--- a/slides/pptx/week-01.pptx
+++ b/slides/pptx/week-01.pptx
@@ -12,9 +12,10 @@
     <p:sldId id="260" r:id="rId6"/>
     <p:sldId id="261" r:id="rId7"/>
     <p:sldId id="262" r:id="rId8"/>
+    <p:sldId id="263" r:id="rId9"/>
   </p:sldIdLst>
   <p:notesMasterIdLst>
-    <p:notesMasterId r:id="rId9"/>
+    <p:notesMasterId r:id="rId10"/>
   </p:notesMasterIdLst>
   <p:sldSz cx="12191695" cy="6858000"/>
   <p:notesSz cx="6858000" cy="12191695"/>
@@ -1078,6 +1079,94 @@
 </p:notes>
 </file>
 
+<file path=ppt/notesSlides/notesSlide8.xml><?xml version="1.0" encoding="utf-8"?>
+<p:notes xmlns:a="http://schemas.openxmlformats.org/drawingml/2006/main" xmlns:r="http://schemas.openxmlformats.org/officeDocument/2006/relationships" xmlns:p="http://schemas.openxmlformats.org/presentationml/2006/main">
+  <p:cSld>
+    <p:spTree>
+      <p:nvGrpSpPr>
+        <p:cNvPr id="1" name=""/>
+        <p:cNvGrpSpPr/>
+        <p:nvPr/>
+      </p:nvGrpSpPr>
+      <p:grpSpPr>
+        <a:xfrm>
+          <a:off x="0" y="0"/>
+          <a:ext cx="0" cy="0"/>
+          <a:chOff x="0" y="0"/>
+          <a:chExt cx="0" cy="0"/>
+        </a:xfrm>
+      </p:grpSpPr>
+      <p:sp>
+        <p:nvSpPr>
+          <p:cNvPr id="2" name="Slide Image Placeholder 1"/>
+          <p:cNvSpPr>
+            <a:spLocks noGrp="1" noRot="1" noChangeAspect="1"/>
+          </p:cNvSpPr>
+          <p:nvPr>
+            <p:ph type="sldImg"/>
+          </p:nvPr>
+        </p:nvSpPr>
+        <p:spPr/>
+      </p:sp>
+      <p:sp>
+        <p:nvSpPr>
+          <p:cNvPr id="3" name="Notes Placeholder 2"/>
+          <p:cNvSpPr>
+            <a:spLocks noGrp="1"/>
+          </p:cNvSpPr>
+          <p:nvPr>
+            <p:ph type="body" idx="1"/>
+          </p:nvPr>
+        </p:nvSpPr>
+        <p:spPr/>
+        <p:txBody>
+          <a:bodyPr/>
+          <a:lstStyle/>
+          <a:p>
+            <a:r>
+              <a:rPr lang="en-US" dirty="0"/>
+              <a:t/>
+            </a:r>
+            <a:endParaRPr lang="en-US" dirty="0"/>
+          </a:p>
+        </p:txBody>
+      </p:sp>
+      <p:sp>
+        <p:nvSpPr>
+          <p:cNvPr id="4" name="Slide Number Placeholder 3"/>
+          <p:cNvSpPr>
+            <a:spLocks noGrp="1"/>
+          </p:cNvSpPr>
+          <p:nvPr>
+            <p:ph type="sldNum" sz="quarter" idx="10"/>
+          </p:nvPr>
+        </p:nvSpPr>
+        <p:spPr/>
+        <p:txBody>
+          <a:bodyPr/>
+          <a:lstStyle/>
+          <a:p>
+            <a:fld id="{F7021451-1387-4CA6-816F-3879F97B5CBC}" type="slidenum">
+              <a:rPr lang="en-US"/>
+              <a:t>8</a:t>
+            </a:fld>
+            <a:endParaRPr lang="en-US"/>
+          </a:p>
+        </p:txBody>
+      </p:sp>
+    </p:spTree>
+    <p:extLst>
+      <p:ext uri="{BB962C8B-B14F-4D97-AF65-F5344CB8AC3E}">
+        <p14:creationId xmlns:p14="http://schemas.microsoft.com/office/powerpoint/2010/main" val="1024086991"/>
+      </p:ext>
+    </p:extLst>
+  </p:cSld>
+  <p:clrMapOvr>
+    <a:masterClrMapping/>
+  </p:clrMapOvr>
+</p:notes>
+</file>
+
 <file path=ppt/slideLayouts/slideLayout1.xml><?xml version="1.0" encoding="utf-8"?>
 <p:sldLayout xmlns:a="http://schemas.openxmlformats.org/drawingml/2006/main" xmlns:r="http://schemas.openxmlformats.org/officeDocument/2006/relationships" xmlns:p="http://schemas.openxmlformats.org/presentationml/2006/main" preserve="1">
   <p:cSld name="DEFAULT">
@@ -4090,6 +4179,548 @@
 <file path=ppt/slides/slide7.xml><?xml version="1.0" encoding="utf-8"?>
 <p:sld xmlns:a="http://schemas.openxmlformats.org/drawingml/2006/main" xmlns:r="http://schemas.openxmlformats.org/officeDocument/2006/relationships" xmlns:p="http://schemas.openxmlformats.org/presentationml/2006/main">
   <p:cSld name="Slide 7">
+    <p:bg>
+      <p:bgPr>
+        <a:solidFill>
+          <a:srgbClr val="FFFFFF"/>
+        </a:solidFill>
+      </p:bgPr>
+    </p:bg>
+    <p:spTree>
+      <p:nvGrpSpPr>
+        <p:cNvPr id="1" name=""/>
+        <p:cNvGrpSpPr/>
+        <p:nvPr/>
+      </p:nvGrpSpPr>
+      <p:grpSpPr>
+        <a:xfrm>
+          <a:off x="0" y="0"/>
+          <a:ext cx="0" cy="0"/>
+          <a:chOff x="0" y="0"/>
+          <a:chExt cx="0" cy="0"/>
+        </a:xfrm>
+      </p:grpSpPr>
+      <p:sp>
+        <p:nvSpPr>
+          <p:cNvPr id="2" name="Text 0"/>
+          <p:cNvSpPr/>
+          <p:nvPr/>
+        </p:nvSpPr>
+        <p:spPr>
+          <a:xfrm>
+            <a:off x="640080" y="640080"/>
+            <a:ext cx="10058400" cy="320040"/>
+          </a:xfrm>
+          <a:prstGeom prst="rect">
+            <a:avLst/>
+          </a:prstGeom>
+          <a:noFill/>
+          <a:ln/>
+        </p:spPr>
+        <p:txBody>
+          <a:bodyPr wrap="square" rtlCol="0" anchor="ctr"/>
+          <a:lstStyle/>
+          <a:p>
+            <a:pPr indent="0" marL="0">
+              <a:buNone/>
+            </a:pPr>
+            <a:r>
+              <a:rPr lang="en-US" sz="1300" b="1" spc="300" kern="0" dirty="0">
+                <a:solidFill>
+                  <a:srgbClr val="7A3B2E"/>
+                </a:solidFill>
+                <a:latin typeface="Calibri" pitchFamily="34" charset="0"/>
+                <a:ea typeface="Calibri" pitchFamily="34" charset="-122"/>
+                <a:cs typeface="Calibri" pitchFamily="34" charset="-120"/>
+              </a:rPr>
+              <a:t>HOW THIS WEEK CONNECTS</a:t>
+            </a:r>
+            <a:endParaRPr lang="en-US" sz="1300" dirty="0"/>
+          </a:p>
+        </p:txBody>
+      </p:sp>
+      <p:sp>
+        <p:nvSpPr>
+          <p:cNvPr id="3" name="Text 1"/>
+          <p:cNvSpPr/>
+          <p:nvPr/>
+        </p:nvSpPr>
+        <p:spPr>
+          <a:xfrm>
+            <a:off x="640080" y="987552"/>
+            <a:ext cx="10058400" cy="640080"/>
+          </a:xfrm>
+          <a:prstGeom prst="rect">
+            <a:avLst/>
+          </a:prstGeom>
+          <a:noFill/>
+          <a:ln/>
+        </p:spPr>
+        <p:txBody>
+          <a:bodyPr wrap="square" rtlCol="0" anchor="ctr"/>
+          <a:lstStyle/>
+          <a:p>
+            <a:pPr indent="0" marL="0">
+              <a:buNone/>
+            </a:pPr>
+            <a:r>
+              <a:rPr lang="en-US" sz="2800" b="1" dirty="0">
+                <a:solidFill>
+                  <a:srgbClr val="1A1A1A"/>
+                </a:solidFill>
+                <a:latin typeface="Cambria" pitchFamily="34" charset="0"/>
+                <a:ea typeface="Cambria" pitchFamily="34" charset="-122"/>
+                <a:cs typeface="Cambria" pitchFamily="34" charset="-120"/>
+              </a:rPr>
+              <a:t>The course's through-lines</a:t>
+            </a:r>
+            <a:endParaRPr lang="en-US" sz="2800" dirty="0"/>
+          </a:p>
+        </p:txBody>
+      </p:sp>
+      <p:sp>
+        <p:nvSpPr>
+          <p:cNvPr id="4" name="Shape 2"/>
+          <p:cNvSpPr/>
+          <p:nvPr/>
+        </p:nvSpPr>
+        <p:spPr>
+          <a:xfrm>
+            <a:off x="640080" y="2057400"/>
+            <a:ext cx="457200" cy="457200"/>
+          </a:xfrm>
+          <a:prstGeom prst="roundRect">
+            <a:avLst>
+              <a:gd name="adj" fmla="val 16000"/>
+            </a:avLst>
+          </a:prstGeom>
+          <a:solidFill>
+            <a:srgbClr val="7A3B2E"/>
+          </a:solidFill>
+          <a:ln/>
+        </p:spPr>
+      </p:sp>
+      <p:sp>
+        <p:nvSpPr>
+          <p:cNvPr id="5" name="Text 3"/>
+          <p:cNvSpPr/>
+          <p:nvPr/>
+        </p:nvSpPr>
+        <p:spPr>
+          <a:xfrm>
+            <a:off x="640080" y="2057400"/>
+            <a:ext cx="457200" cy="457200"/>
+          </a:xfrm>
+          <a:prstGeom prst="rect">
+            <a:avLst/>
+          </a:prstGeom>
+          <a:noFill/>
+          <a:ln/>
+        </p:spPr>
+        <p:txBody>
+          <a:bodyPr wrap="square" rtlCol="0" anchor="ctr"/>
+          <a:lstStyle/>
+          <a:p>
+            <a:pPr algn="ctr" indent="0" marL="0">
+              <a:buNone/>
+            </a:pPr>
+            <a:r>
+              <a:rPr lang="en-US" sz="2000" b="1" dirty="0">
+                <a:solidFill>
+                  <a:srgbClr val="FFFFFF"/>
+                </a:solidFill>
+                <a:latin typeface="Cambria" pitchFamily="34" charset="0"/>
+                <a:ea typeface="Cambria" pitchFamily="34" charset="-122"/>
+                <a:cs typeface="Cambria" pitchFamily="34" charset="-120"/>
+              </a:rPr>
+              <a:t>1</a:t>
+            </a:r>
+            <a:endParaRPr lang="en-US" sz="2000" dirty="0"/>
+          </a:p>
+        </p:txBody>
+      </p:sp>
+      <p:sp>
+        <p:nvSpPr>
+          <p:cNvPr id="6" name="Text 4"/>
+          <p:cNvSpPr/>
+          <p:nvPr/>
+        </p:nvSpPr>
+        <p:spPr>
+          <a:xfrm>
+            <a:off x="1371600" y="2020824"/>
+            <a:ext cx="10332720" cy="411480"/>
+          </a:xfrm>
+          <a:prstGeom prst="rect">
+            <a:avLst/>
+          </a:prstGeom>
+          <a:noFill/>
+          <a:ln/>
+        </p:spPr>
+        <p:txBody>
+          <a:bodyPr wrap="square" rtlCol="0" anchor="ctr"/>
+          <a:lstStyle/>
+          <a:p>
+            <a:pPr indent="0" marL="0">
+              <a:buNone/>
+            </a:pPr>
+            <a:r>
+              <a:rPr lang="en-US" sz="1900" b="1" dirty="0">
+                <a:solidFill>
+                  <a:srgbClr val="7A3B2E"/>
+                </a:solidFill>
+                <a:latin typeface="Cambria" pitchFamily="34" charset="0"/>
+                <a:ea typeface="Cambria" pitchFamily="34" charset="-122"/>
+                <a:cs typeface="Cambria" pitchFamily="34" charset="-120"/>
+              </a:rPr>
+              <a:t>Read work critically</a:t>
+            </a:r>
+            <a:endParaRPr lang="en-US" sz="1900" dirty="0"/>
+          </a:p>
+        </p:txBody>
+      </p:sp>
+      <p:sp>
+        <p:nvSpPr>
+          <p:cNvPr id="7" name="Text 5"/>
+          <p:cNvSpPr/>
+          <p:nvPr/>
+        </p:nvSpPr>
+        <p:spPr>
+          <a:xfrm>
+            <a:off x="1371600" y="2441448"/>
+            <a:ext cx="10332720" cy="914400"/>
+          </a:xfrm>
+          <a:prstGeom prst="rect">
+            <a:avLst/>
+          </a:prstGeom>
+          <a:noFill/>
+          <a:ln/>
+        </p:spPr>
+        <p:txBody>
+          <a:bodyPr wrap="square" rtlCol="0" anchor="t">
+            <a:spAutoFit/>
+          </a:bodyPr>
+          <a:lstStyle/>
+          <a:p>
+            <a:pPr indent="0" marL="0">
+              <a:lnSpc>
+                <a:spcPct val="112000"/>
+              </a:lnSpc>
+              <a:buNone/>
+            </a:pPr>
+            <a:r>
+              <a:rPr lang="en-US" sz="1450" dirty="0">
+                <a:solidFill>
+                  <a:srgbClr val="1A1A1A"/>
+                </a:solidFill>
+                <a:latin typeface="Calibri" pitchFamily="34" charset="0"/>
+                <a:ea typeface="Calibri" pitchFamily="34" charset="-122"/>
+                <a:cs typeface="Calibri" pitchFamily="34" charset="-120"/>
+              </a:rPr>
+              <a:t>Pockets is great and its choices are arguable. We admire and interrogate at once, the habit the whole course turns on.</a:t>
+            </a:r>
+            <a:endParaRPr lang="en-US" sz="1450" dirty="0"/>
+          </a:p>
+        </p:txBody>
+      </p:sp>
+      <p:sp>
+        <p:nvSpPr>
+          <p:cNvPr id="8" name="Shape 6"/>
+          <p:cNvSpPr/>
+          <p:nvPr/>
+        </p:nvSpPr>
+        <p:spPr>
+          <a:xfrm>
+            <a:off x="640080" y="3520440"/>
+            <a:ext cx="457200" cy="457200"/>
+          </a:xfrm>
+          <a:prstGeom prst="roundRect">
+            <a:avLst>
+              <a:gd name="adj" fmla="val 16000"/>
+            </a:avLst>
+          </a:prstGeom>
+          <a:solidFill>
+            <a:srgbClr val="3F6F5F"/>
+          </a:solidFill>
+          <a:ln/>
+        </p:spPr>
+      </p:sp>
+      <p:sp>
+        <p:nvSpPr>
+          <p:cNvPr id="9" name="Text 7"/>
+          <p:cNvSpPr/>
+          <p:nvPr/>
+        </p:nvSpPr>
+        <p:spPr>
+          <a:xfrm>
+            <a:off x="640080" y="3520440"/>
+            <a:ext cx="457200" cy="457200"/>
+          </a:xfrm>
+          <a:prstGeom prst="rect">
+            <a:avLst/>
+          </a:prstGeom>
+          <a:noFill/>
+          <a:ln/>
+        </p:spPr>
+        <p:txBody>
+          <a:bodyPr wrap="square" rtlCol="0" anchor="ctr"/>
+          <a:lstStyle/>
+          <a:p>
+            <a:pPr algn="ctr" indent="0" marL="0">
+              <a:buNone/>
+            </a:pPr>
+            <a:r>
+              <a:rPr lang="en-US" sz="2000" b="1" dirty="0">
+                <a:solidFill>
+                  <a:srgbClr val="FFFFFF"/>
+                </a:solidFill>
+                <a:latin typeface="Cambria" pitchFamily="34" charset="0"/>
+                <a:ea typeface="Cambria" pitchFamily="34" charset="-122"/>
+                <a:cs typeface="Cambria" pitchFamily="34" charset="-120"/>
+              </a:rPr>
+              <a:t>2</a:t>
+            </a:r>
+            <a:endParaRPr lang="en-US" sz="2000" dirty="0"/>
+          </a:p>
+        </p:txBody>
+      </p:sp>
+      <p:sp>
+        <p:nvSpPr>
+          <p:cNvPr id="10" name="Text 8"/>
+          <p:cNvSpPr/>
+          <p:nvPr/>
+        </p:nvSpPr>
+        <p:spPr>
+          <a:xfrm>
+            <a:off x="1371600" y="3483864"/>
+            <a:ext cx="10332720" cy="411480"/>
+          </a:xfrm>
+          <a:prstGeom prst="rect">
+            <a:avLst/>
+          </a:prstGeom>
+          <a:noFill/>
+          <a:ln/>
+        </p:spPr>
+        <p:txBody>
+          <a:bodyPr wrap="square" rtlCol="0" anchor="ctr"/>
+          <a:lstStyle/>
+          <a:p>
+            <a:pPr indent="0" marL="0">
+              <a:buNone/>
+            </a:pPr>
+            <a:r>
+              <a:rPr lang="en-US" sz="1900" b="1" dirty="0">
+                <a:solidFill>
+                  <a:srgbClr val="3F6F5F"/>
+                </a:solidFill>
+                <a:latin typeface="Cambria" pitchFamily="34" charset="0"/>
+                <a:ea typeface="Cambria" pitchFamily="34" charset="-122"/>
+                <a:cs typeface="Cambria" pitchFamily="34" charset="-120"/>
+              </a:rPr>
+              <a:t>Make something real</a:t>
+            </a:r>
+            <a:endParaRPr lang="en-US" sz="1900" dirty="0"/>
+          </a:p>
+        </p:txBody>
+      </p:sp>
+      <p:sp>
+        <p:nvSpPr>
+          <p:cNvPr id="11" name="Text 9"/>
+          <p:cNvSpPr/>
+          <p:nvPr/>
+        </p:nvSpPr>
+        <p:spPr>
+          <a:xfrm>
+            <a:off x="1371600" y="3904488"/>
+            <a:ext cx="10332720" cy="914400"/>
+          </a:xfrm>
+          <a:prstGeom prst="rect">
+            <a:avLst/>
+          </a:prstGeom>
+          <a:noFill/>
+          <a:ln/>
+        </p:spPr>
+        <p:txBody>
+          <a:bodyPr wrap="square" rtlCol="0" anchor="t">
+            <a:spAutoFit/>
+          </a:bodyPr>
+          <a:lstStyle/>
+          <a:p>
+            <a:pPr indent="0" marL="0">
+              <a:lnSpc>
+                <a:spcPct val="112000"/>
+              </a:lnSpc>
+              <a:buNone/>
+            </a:pPr>
+            <a:r>
+              <a:rPr lang="en-US" sz="1450" dirty="0">
+                <a:solidFill>
+                  <a:srgbClr val="1A1A1A"/>
+                </a:solidFill>
+                <a:latin typeface="Calibri" pitchFamily="34" charset="0"/>
+                <a:ea typeface="Calibri" pitchFamily="34" charset="-122"/>
+                <a:cs typeface="Calibri" pitchFamily="34" charset="-120"/>
+              </a:rPr>
+              <a:t>A complete investigation by the first break, before any theory.</a:t>
+            </a:r>
+            <a:endParaRPr lang="en-US" sz="1450" dirty="0"/>
+          </a:p>
+        </p:txBody>
+      </p:sp>
+      <p:sp>
+        <p:nvSpPr>
+          <p:cNvPr id="12" name="Shape 10"/>
+          <p:cNvSpPr/>
+          <p:nvPr/>
+        </p:nvSpPr>
+        <p:spPr>
+          <a:xfrm>
+            <a:off x="640080" y="4983480"/>
+            <a:ext cx="457200" cy="457200"/>
+          </a:xfrm>
+          <a:prstGeom prst="roundRect">
+            <a:avLst>
+              <a:gd name="adj" fmla="val 16000"/>
+            </a:avLst>
+          </a:prstGeom>
+          <a:solidFill>
+            <a:srgbClr val="B9852F"/>
+          </a:solidFill>
+          <a:ln/>
+        </p:spPr>
+      </p:sp>
+      <p:sp>
+        <p:nvSpPr>
+          <p:cNvPr id="13" name="Text 11"/>
+          <p:cNvSpPr/>
+          <p:nvPr/>
+        </p:nvSpPr>
+        <p:spPr>
+          <a:xfrm>
+            <a:off x="640080" y="4983480"/>
+            <a:ext cx="457200" cy="457200"/>
+          </a:xfrm>
+          <a:prstGeom prst="rect">
+            <a:avLst/>
+          </a:prstGeom>
+          <a:noFill/>
+          <a:ln/>
+        </p:spPr>
+        <p:txBody>
+          <a:bodyPr wrap="square" rtlCol="0" anchor="ctr"/>
+          <a:lstStyle/>
+          <a:p>
+            <a:pPr algn="ctr" indent="0" marL="0">
+              <a:buNone/>
+            </a:pPr>
+            <a:r>
+              <a:rPr lang="en-US" sz="2000" b="1" dirty="0">
+                <a:solidFill>
+                  <a:srgbClr val="FFFFFF"/>
+                </a:solidFill>
+                <a:latin typeface="Cambria" pitchFamily="34" charset="0"/>
+                <a:ea typeface="Cambria" pitchFamily="34" charset="-122"/>
+                <a:cs typeface="Cambria" pitchFamily="34" charset="-120"/>
+              </a:rPr>
+              <a:t>3</a:t>
+            </a:r>
+            <a:endParaRPr lang="en-US" sz="2000" dirty="0"/>
+          </a:p>
+        </p:txBody>
+      </p:sp>
+      <p:sp>
+        <p:nvSpPr>
+          <p:cNvPr id="14" name="Text 12"/>
+          <p:cNvSpPr/>
+          <p:nvPr/>
+        </p:nvSpPr>
+        <p:spPr>
+          <a:xfrm>
+            <a:off x="1371600" y="4946904"/>
+            <a:ext cx="10332720" cy="411480"/>
+          </a:xfrm>
+          <a:prstGeom prst="rect">
+            <a:avLst/>
+          </a:prstGeom>
+          <a:noFill/>
+          <a:ln/>
+        </p:spPr>
+        <p:txBody>
+          <a:bodyPr wrap="square" rtlCol="0" anchor="ctr"/>
+          <a:lstStyle/>
+          <a:p>
+            <a:pPr indent="0" marL="0">
+              <a:buNone/>
+            </a:pPr>
+            <a:r>
+              <a:rPr lang="en-US" sz="1900" b="1" dirty="0">
+                <a:solidFill>
+                  <a:srgbClr val="B9852F"/>
+                </a:solidFill>
+                <a:latin typeface="Cambria" pitchFamily="34" charset="0"/>
+                <a:ea typeface="Cambria" pitchFamily="34" charset="-122"/>
+                <a:cs typeface="Cambria" pitchFamily="34" charset="-120"/>
+              </a:rPr>
+              <a:t>Beyond counting (preview)</a:t>
+            </a:r>
+            <a:endParaRPr lang="en-US" sz="1900" dirty="0"/>
+          </a:p>
+        </p:txBody>
+      </p:sp>
+      <p:sp>
+        <p:nvSpPr>
+          <p:cNvPr id="15" name="Text 13"/>
+          <p:cNvSpPr/>
+          <p:nvPr/>
+        </p:nvSpPr>
+        <p:spPr>
+          <a:xfrm>
+            <a:off x="1371600" y="5367528"/>
+            <a:ext cx="10332720" cy="914400"/>
+          </a:xfrm>
+          <a:prstGeom prst="rect">
+            <a:avLst/>
+          </a:prstGeom>
+          <a:noFill/>
+          <a:ln/>
+        </p:spPr>
+        <p:txBody>
+          <a:bodyPr wrap="square" rtlCol="0" anchor="t">
+            <a:spAutoFit/>
+          </a:bodyPr>
+          <a:lstStyle/>
+          <a:p>
+            <a:pPr indent="0" marL="0">
+              <a:lnSpc>
+                <a:spcPct val="112000"/>
+              </a:lnSpc>
+              <a:buNone/>
+            </a:pPr>
+            <a:r>
+              <a:rPr lang="en-US" sz="1450" dirty="0">
+                <a:solidFill>
+                  <a:srgbClr val="1A1A1A"/>
+                </a:solidFill>
+                <a:latin typeface="Calibri" pitchFamily="34" charset="0"/>
+                <a:ea typeface="Calibri" pitchFamily="34" charset="-122"/>
+                <a:cs typeface="Calibri" pitchFamily="34" charset="-120"/>
+              </a:rPr>
+              <a:t>You load and chart real culture today; the ladder past counting starts next week.</a:t>
+            </a:r>
+            <a:endParaRPr lang="en-US" sz="1450" dirty="0"/>
+          </a:p>
+        </p:txBody>
+      </p:sp>
+    </p:spTree>
+  </p:cSld>
+  <p:clrMapOvr>
+    <a:masterClrMapping/>
+  </p:clrMapOvr>
+</p:sld>
+</file>
+
+<file path=ppt/slides/slide8.xml><?xml version="1.0" encoding="utf-8"?>
+<p:sld xmlns:a="http://schemas.openxmlformats.org/drawingml/2006/main" xmlns:r="http://schemas.openxmlformats.org/officeDocument/2006/relationships" xmlns:p="http://schemas.openxmlformats.org/presentationml/2006/main">
+  <p:cSld name="Slide 8">
     <p:bg>
       <p:bgPr>
         <a:solidFill>

--- a/slides/pptx/week-01.pptx
+++ b/slides/pptx/week-01.pptx
@@ -2245,7 +2245,7 @@
                 <a:ea typeface="Calibri" pitchFamily="34" charset="-122"/>
                 <a:cs typeface="Calibri" pitchFamily="34" charset="-120"/>
               </a:rPr>
-              <a:t>The Pudding, "Pockets" (2018), women's jeans pockets are measurably smaller, and one chart lands the argument.</a:t>
+              <a:t>The Pudding, "She Giggles, He Gallops" (2017): across ~2,000 film screenplays, the stage-direction verbs split by gender, women snuggle and giggle, men gallop and stride, and the interactive makes it impossible to unsee.</a:t>
             </a:r>
             <a:endParaRPr lang="en-US" sz="1900" dirty="0"/>
           </a:p>
@@ -2421,7 +2421,7 @@
                 <a:ea typeface="Calibri" pitchFamily="34" charset="-122"/>
                 <a:cs typeface="Calibri" pitchFamily="34" charset="-120"/>
               </a:rPr>
-              <a:t>80 pairs from a handful of brands: is that "women's pockets," or a slice? And look at the chart itself, not just the data, what does it put front and center?</a:t>
+              <a:t>~2,000 screenplays skewed toward what got produced and digitized: is that "film," or a slice? Whose choice is a gendered verb, the writer's, the character's, the genre's? Counting shows the split, not the cause. And read the visualization's choices, not just the data.</a:t>
             </a:r>
             <a:endParaRPr lang="en-US" sz="2000" dirty="0"/>
           </a:p>
@@ -3181,7 +3181,7 @@
                 <a:ea typeface="Calibri" pitchFamily="34" charset="-122"/>
                 <a:cs typeface="Calibri" pitchFamily="34" charset="-120"/>
               </a:rPr>
-              <a:t>Look at This, then Question It: Pockets.</a:t>
+              <a:t>Look at This, then Question It: She Giggles, He Gallops.</a:t>
             </a:r>
             <a:endParaRPr lang="en-US" sz="1250" dirty="0"/>
           </a:p>
@@ -3589,7 +3589,7 @@
                 <a:ea typeface="Calibri" pitchFamily="34" charset="-122"/>
                 <a:cs typeface="Calibri" pitchFamily="34" charset="-120"/>
               </a:rPr>
-              <a:t>Lab 2 (worked): ~200 Met Museum objects with thumbnails. Plot the collection by century; notice what the catalog does not record.</a:t>
+              <a:t>Lab 2 (worked), count an image corpus at the pixel level: ~200 Met thumbnails (or a stack of album covers). A picture is numbers, so the AI computes each image's average color and brightness and ranks the corpus darkest to brightest. What you choose to count of a picture is a choice too, and image projects start here.</a:t>
             </a:r>
             <a:endParaRPr lang="en-US" sz="1250" dirty="0"/>
           </a:p>
@@ -4416,7 +4416,7 @@
                 <a:ea typeface="Calibri" pitchFamily="34" charset="-122"/>
                 <a:cs typeface="Calibri" pitchFamily="34" charset="-120"/>
               </a:rPr>
-              <a:t>Pockets is great and its choices are arguable. We admire and interrogate at once, the habit the whole course turns on.</a:t>
+              <a:t>She Giggles, He Gallops is great and its choices are arguable. We admire and interrogate at once, the habit the whole course turns on.</a:t>
             </a:r>
             <a:endParaRPr lang="en-US" sz="1450" dirty="0"/>
           </a:p>
@@ -4660,7 +4660,7 @@
                 <a:ea typeface="Cambria" pitchFamily="34" charset="-122"/>
                 <a:cs typeface="Cambria" pitchFamily="34" charset="-120"/>
               </a:rPr>
-              <a:t>Beyond counting (preview)</a:t>
+              <a:t>Images are culture too</a:t>
             </a:r>
             <a:endParaRPr lang="en-US" sz="1900" dirty="0"/>
           </a:p>
@@ -4704,7 +4704,7 @@
                 <a:ea typeface="Calibri" pitchFamily="34" charset="-122"/>
                 <a:cs typeface="Calibri" pitchFamily="34" charset="-120"/>
               </a:rPr>
-              <a:t>You load and chart real culture today; the ladder past counting starts next week.</a:t>
+              <a:t>A picture is numbers: you counted pixels on day one, and images ride along as a co-equal corpus all ten weeks.</a:t>
             </a:r>
             <a:endParaRPr lang="en-US" sz="1450" dirty="0"/>
           </a:p>

--- a/slides/pptx/week-01.pptx
+++ b/slides/pptx/week-01.pptx
@@ -1652,7 +1652,7 @@
                 <a:ea typeface="Calibri" pitchFamily="34" charset="-122"/>
                 <a:cs typeface="Calibri" pitchFamily="34" charset="-120"/>
               </a:rPr>
-              <a:t>By the break you'll have loaded a real dataset, asked it a question, and produced your first chart. A complete investigation, end to end, on day one.</a:t>
+              <a:t>By the break you'll have loaded a real dataset, asked it a question, and produced your first chart. By the end you'll have counted culture in all three shapes it comes in: rows, words, and pixels.</a:t>
             </a:r>
             <a:endParaRPr lang="en-US" sz="1600" dirty="0"/>
           </a:p>
@@ -1691,7 +1691,7 @@
                 <a:ea typeface="Calibri" pitchFamily="34" charset="-122"/>
                 <a:cs typeface="Calibri" pitchFamily="34" charset="-120"/>
               </a:rPr>
-              <a:t>Tool / method:  Culture as data itself (the ladder starts next week)</a:t>
+              <a:t>Tool / method:  Counting, met on day one: rows, words, pixels</a:t>
             </a:r>
             <a:endParaRPr lang="en-US" sz="1200" dirty="0"/>
           </a:p>
@@ -2656,7 +2656,7 @@
                 <a:ea typeface="Calibri" pitchFamily="34" charset="-122"/>
                 <a:cs typeface="Calibri" pitchFamily="34" charset="-120"/>
               </a:rPr>
-              <a:t>Culture as data itself (the ladder starts next week)</a:t>
+              <a:t>Counting, met on day one: rows, words, pixels</a:t>
             </a:r>
             <a:endParaRPr lang="en-US" sz="1500" dirty="0"/>
           </a:p>
@@ -3589,7 +3589,7 @@
                 <a:ea typeface="Calibri" pitchFamily="34" charset="-122"/>
                 <a:cs typeface="Calibri" pitchFamily="34" charset="-120"/>
               </a:rPr>
-              <a:t>Lab 2 (worked), count an image corpus at the pixel level: ~200 Met thumbnails (or a stack of album covers). A picture is numbers, so the AI computes each image's average color and brightness and ranks the corpus darkest to brightest. What you choose to count of a picture is a choice too, and image projects start here.</a:t>
+              <a:t>Lab 2 (worked), count words, then pixels: first the top words of a small lyrics slice (stop-words drown the list until you remove them, your first counting choice), then an image corpus, ~200 Met thumbnails ranked darkest to brightest by average brightness. Text and pictures, counted with the same move; image projects start here.</a:t>
             </a:r>
             <a:endParaRPr lang="en-US" sz="1250" dirty="0"/>
           </a:p>

--- a/slides/pptx/week-01.pptx
+++ b/slides/pptx/week-01.pptx
@@ -13,9 +13,14 @@
     <p:sldId id="261" r:id="rId7"/>
     <p:sldId id="262" r:id="rId8"/>
     <p:sldId id="263" r:id="rId9"/>
+    <p:sldId id="264" r:id="rId10"/>
+    <p:sldId id="265" r:id="rId11"/>
+    <p:sldId id="266" r:id="rId12"/>
+    <p:sldId id="267" r:id="rId13"/>
+    <p:sldId id="268" r:id="rId14"/>
   </p:sldIdLst>
   <p:notesMasterIdLst>
-    <p:notesMasterId r:id="rId10"/>
+    <p:notesMasterId r:id="rId15"/>
   </p:notesMasterIdLst>
   <p:sldSz cx="12191695" cy="6858000"/>
   <p:notesSz cx="6858000" cy="12191695"/>
@@ -551,6 +556,358 @@
 </p:notes>
 </file>
 
+<file path=ppt/notesSlides/notesSlide10.xml><?xml version="1.0" encoding="utf-8"?>
+<p:notes xmlns:a="http://schemas.openxmlformats.org/drawingml/2006/main" xmlns:r="http://schemas.openxmlformats.org/officeDocument/2006/relationships" xmlns:p="http://schemas.openxmlformats.org/presentationml/2006/main">
+  <p:cSld>
+    <p:spTree>
+      <p:nvGrpSpPr>
+        <p:cNvPr id="1" name=""/>
+        <p:cNvGrpSpPr/>
+        <p:nvPr/>
+      </p:nvGrpSpPr>
+      <p:grpSpPr>
+        <a:xfrm>
+          <a:off x="0" y="0"/>
+          <a:ext cx="0" cy="0"/>
+          <a:chOff x="0" y="0"/>
+          <a:chExt cx="0" cy="0"/>
+        </a:xfrm>
+      </p:grpSpPr>
+      <p:sp>
+        <p:nvSpPr>
+          <p:cNvPr id="2" name="Slide Image Placeholder 1"/>
+          <p:cNvSpPr>
+            <a:spLocks noGrp="1" noRot="1" noChangeAspect="1"/>
+          </p:cNvSpPr>
+          <p:nvPr>
+            <p:ph type="sldImg"/>
+          </p:nvPr>
+        </p:nvSpPr>
+        <p:spPr/>
+      </p:sp>
+      <p:sp>
+        <p:nvSpPr>
+          <p:cNvPr id="3" name="Notes Placeholder 2"/>
+          <p:cNvSpPr>
+            <a:spLocks noGrp="1"/>
+          </p:cNvSpPr>
+          <p:nvPr>
+            <p:ph type="body" idx="1"/>
+          </p:nvPr>
+        </p:nvSpPr>
+        <p:spPr/>
+        <p:txBody>
+          <a:bodyPr/>
+          <a:lstStyle/>
+          <a:p>
+            <a:r>
+              <a:rPr lang="en-US" dirty="0"/>
+              <a:t/>
+            </a:r>
+            <a:endParaRPr lang="en-US" dirty="0"/>
+          </a:p>
+        </p:txBody>
+      </p:sp>
+      <p:sp>
+        <p:nvSpPr>
+          <p:cNvPr id="4" name="Slide Number Placeholder 3"/>
+          <p:cNvSpPr>
+            <a:spLocks noGrp="1"/>
+          </p:cNvSpPr>
+          <p:nvPr>
+            <p:ph type="sldNum" sz="quarter" idx="10"/>
+          </p:nvPr>
+        </p:nvSpPr>
+        <p:spPr/>
+        <p:txBody>
+          <a:bodyPr/>
+          <a:lstStyle/>
+          <a:p>
+            <a:fld id="{F7021451-1387-4CA6-816F-3879F97B5CBC}" type="slidenum">
+              <a:rPr lang="en-US"/>
+              <a:t>10</a:t>
+            </a:fld>
+            <a:endParaRPr lang="en-US"/>
+          </a:p>
+        </p:txBody>
+      </p:sp>
+    </p:spTree>
+    <p:extLst>
+      <p:ext uri="{BB962C8B-B14F-4D97-AF65-F5344CB8AC3E}">
+        <p14:creationId xmlns:p14="http://schemas.microsoft.com/office/powerpoint/2010/main" val="1024086991"/>
+      </p:ext>
+    </p:extLst>
+  </p:cSld>
+  <p:clrMapOvr>
+    <a:masterClrMapping/>
+  </p:clrMapOvr>
+</p:notes>
+</file>
+
+<file path=ppt/notesSlides/notesSlide11.xml><?xml version="1.0" encoding="utf-8"?>
+<p:notes xmlns:a="http://schemas.openxmlformats.org/drawingml/2006/main" xmlns:r="http://schemas.openxmlformats.org/officeDocument/2006/relationships" xmlns:p="http://schemas.openxmlformats.org/presentationml/2006/main">
+  <p:cSld>
+    <p:spTree>
+      <p:nvGrpSpPr>
+        <p:cNvPr id="1" name=""/>
+        <p:cNvGrpSpPr/>
+        <p:nvPr/>
+      </p:nvGrpSpPr>
+      <p:grpSpPr>
+        <a:xfrm>
+          <a:off x="0" y="0"/>
+          <a:ext cx="0" cy="0"/>
+          <a:chOff x="0" y="0"/>
+          <a:chExt cx="0" cy="0"/>
+        </a:xfrm>
+      </p:grpSpPr>
+      <p:sp>
+        <p:nvSpPr>
+          <p:cNvPr id="2" name="Slide Image Placeholder 1"/>
+          <p:cNvSpPr>
+            <a:spLocks noGrp="1" noRot="1" noChangeAspect="1"/>
+          </p:cNvSpPr>
+          <p:nvPr>
+            <p:ph type="sldImg"/>
+          </p:nvPr>
+        </p:nvSpPr>
+        <p:spPr/>
+      </p:sp>
+      <p:sp>
+        <p:nvSpPr>
+          <p:cNvPr id="3" name="Notes Placeholder 2"/>
+          <p:cNvSpPr>
+            <a:spLocks noGrp="1"/>
+          </p:cNvSpPr>
+          <p:nvPr>
+            <p:ph type="body" idx="1"/>
+          </p:nvPr>
+        </p:nvSpPr>
+        <p:spPr/>
+        <p:txBody>
+          <a:bodyPr/>
+          <a:lstStyle/>
+          <a:p>
+            <a:r>
+              <a:rPr lang="en-US" dirty="0"/>
+              <a:t/>
+            </a:r>
+            <a:endParaRPr lang="en-US" dirty="0"/>
+          </a:p>
+        </p:txBody>
+      </p:sp>
+      <p:sp>
+        <p:nvSpPr>
+          <p:cNvPr id="4" name="Slide Number Placeholder 3"/>
+          <p:cNvSpPr>
+            <a:spLocks noGrp="1"/>
+          </p:cNvSpPr>
+          <p:nvPr>
+            <p:ph type="sldNum" sz="quarter" idx="10"/>
+          </p:nvPr>
+        </p:nvSpPr>
+        <p:spPr/>
+        <p:txBody>
+          <a:bodyPr/>
+          <a:lstStyle/>
+          <a:p>
+            <a:fld id="{F7021451-1387-4CA6-816F-3879F97B5CBC}" type="slidenum">
+              <a:rPr lang="en-US"/>
+              <a:t>11</a:t>
+            </a:fld>
+            <a:endParaRPr lang="en-US"/>
+          </a:p>
+        </p:txBody>
+      </p:sp>
+    </p:spTree>
+    <p:extLst>
+      <p:ext uri="{BB962C8B-B14F-4D97-AF65-F5344CB8AC3E}">
+        <p14:creationId xmlns:p14="http://schemas.microsoft.com/office/powerpoint/2010/main" val="1024086991"/>
+      </p:ext>
+    </p:extLst>
+  </p:cSld>
+  <p:clrMapOvr>
+    <a:masterClrMapping/>
+  </p:clrMapOvr>
+</p:notes>
+</file>
+
+<file path=ppt/notesSlides/notesSlide12.xml><?xml version="1.0" encoding="utf-8"?>
+<p:notes xmlns:a="http://schemas.openxmlformats.org/drawingml/2006/main" xmlns:r="http://schemas.openxmlformats.org/officeDocument/2006/relationships" xmlns:p="http://schemas.openxmlformats.org/presentationml/2006/main">
+  <p:cSld>
+    <p:spTree>
+      <p:nvGrpSpPr>
+        <p:cNvPr id="1" name=""/>
+        <p:cNvGrpSpPr/>
+        <p:nvPr/>
+      </p:nvGrpSpPr>
+      <p:grpSpPr>
+        <a:xfrm>
+          <a:off x="0" y="0"/>
+          <a:ext cx="0" cy="0"/>
+          <a:chOff x="0" y="0"/>
+          <a:chExt cx="0" cy="0"/>
+        </a:xfrm>
+      </p:grpSpPr>
+      <p:sp>
+        <p:nvSpPr>
+          <p:cNvPr id="2" name="Slide Image Placeholder 1"/>
+          <p:cNvSpPr>
+            <a:spLocks noGrp="1" noRot="1" noChangeAspect="1"/>
+          </p:cNvSpPr>
+          <p:nvPr>
+            <p:ph type="sldImg"/>
+          </p:nvPr>
+        </p:nvSpPr>
+        <p:spPr/>
+      </p:sp>
+      <p:sp>
+        <p:nvSpPr>
+          <p:cNvPr id="3" name="Notes Placeholder 2"/>
+          <p:cNvSpPr>
+            <a:spLocks noGrp="1"/>
+          </p:cNvSpPr>
+          <p:nvPr>
+            <p:ph type="body" idx="1"/>
+          </p:nvPr>
+        </p:nvSpPr>
+        <p:spPr/>
+        <p:txBody>
+          <a:bodyPr/>
+          <a:lstStyle/>
+          <a:p>
+            <a:r>
+              <a:rPr lang="en-US" dirty="0"/>
+              <a:t/>
+            </a:r>
+            <a:endParaRPr lang="en-US" dirty="0"/>
+          </a:p>
+        </p:txBody>
+      </p:sp>
+      <p:sp>
+        <p:nvSpPr>
+          <p:cNvPr id="4" name="Slide Number Placeholder 3"/>
+          <p:cNvSpPr>
+            <a:spLocks noGrp="1"/>
+          </p:cNvSpPr>
+          <p:nvPr>
+            <p:ph type="sldNum" sz="quarter" idx="10"/>
+          </p:nvPr>
+        </p:nvSpPr>
+        <p:spPr/>
+        <p:txBody>
+          <a:bodyPr/>
+          <a:lstStyle/>
+          <a:p>
+            <a:fld id="{F7021451-1387-4CA6-816F-3879F97B5CBC}" type="slidenum">
+              <a:rPr lang="en-US"/>
+              <a:t>12</a:t>
+            </a:fld>
+            <a:endParaRPr lang="en-US"/>
+          </a:p>
+        </p:txBody>
+      </p:sp>
+    </p:spTree>
+    <p:extLst>
+      <p:ext uri="{BB962C8B-B14F-4D97-AF65-F5344CB8AC3E}">
+        <p14:creationId xmlns:p14="http://schemas.microsoft.com/office/powerpoint/2010/main" val="1024086991"/>
+      </p:ext>
+    </p:extLst>
+  </p:cSld>
+  <p:clrMapOvr>
+    <a:masterClrMapping/>
+  </p:clrMapOvr>
+</p:notes>
+</file>
+
+<file path=ppt/notesSlides/notesSlide13.xml><?xml version="1.0" encoding="utf-8"?>
+<p:notes xmlns:a="http://schemas.openxmlformats.org/drawingml/2006/main" xmlns:r="http://schemas.openxmlformats.org/officeDocument/2006/relationships" xmlns:p="http://schemas.openxmlformats.org/presentationml/2006/main">
+  <p:cSld>
+    <p:spTree>
+      <p:nvGrpSpPr>
+        <p:cNvPr id="1" name=""/>
+        <p:cNvGrpSpPr/>
+        <p:nvPr/>
+      </p:nvGrpSpPr>
+      <p:grpSpPr>
+        <a:xfrm>
+          <a:off x="0" y="0"/>
+          <a:ext cx="0" cy="0"/>
+          <a:chOff x="0" y="0"/>
+          <a:chExt cx="0" cy="0"/>
+        </a:xfrm>
+      </p:grpSpPr>
+      <p:sp>
+        <p:nvSpPr>
+          <p:cNvPr id="2" name="Slide Image Placeholder 1"/>
+          <p:cNvSpPr>
+            <a:spLocks noGrp="1" noRot="1" noChangeAspect="1"/>
+          </p:cNvSpPr>
+          <p:nvPr>
+            <p:ph type="sldImg"/>
+          </p:nvPr>
+        </p:nvSpPr>
+        <p:spPr/>
+      </p:sp>
+      <p:sp>
+        <p:nvSpPr>
+          <p:cNvPr id="3" name="Notes Placeholder 2"/>
+          <p:cNvSpPr>
+            <a:spLocks noGrp="1"/>
+          </p:cNvSpPr>
+          <p:nvPr>
+            <p:ph type="body" idx="1"/>
+          </p:nvPr>
+        </p:nvSpPr>
+        <p:spPr/>
+        <p:txBody>
+          <a:bodyPr/>
+          <a:lstStyle/>
+          <a:p>
+            <a:r>
+              <a:rPr lang="en-US" dirty="0"/>
+              <a:t/>
+            </a:r>
+            <a:endParaRPr lang="en-US" dirty="0"/>
+          </a:p>
+        </p:txBody>
+      </p:sp>
+      <p:sp>
+        <p:nvSpPr>
+          <p:cNvPr id="4" name="Slide Number Placeholder 3"/>
+          <p:cNvSpPr>
+            <a:spLocks noGrp="1"/>
+          </p:cNvSpPr>
+          <p:nvPr>
+            <p:ph type="sldNum" sz="quarter" idx="10"/>
+          </p:nvPr>
+        </p:nvSpPr>
+        <p:spPr/>
+        <p:txBody>
+          <a:bodyPr/>
+          <a:lstStyle/>
+          <a:p>
+            <a:fld id="{F7021451-1387-4CA6-816F-3879F97B5CBC}" type="slidenum">
+              <a:rPr lang="en-US"/>
+              <a:t>13</a:t>
+            </a:fld>
+            <a:endParaRPr lang="en-US"/>
+          </a:p>
+        </p:txBody>
+      </p:sp>
+    </p:spTree>
+    <p:extLst>
+      <p:ext uri="{BB962C8B-B14F-4D97-AF65-F5344CB8AC3E}">
+        <p14:creationId xmlns:p14="http://schemas.microsoft.com/office/powerpoint/2010/main" val="1024086991"/>
+      </p:ext>
+    </p:extLst>
+  </p:cSld>
+  <p:clrMapOvr>
+    <a:masterClrMapping/>
+  </p:clrMapOvr>
+</p:notes>
+</file>
+
 <file path=ppt/notesSlides/notesSlide2.xml><?xml version="1.0" encoding="utf-8"?>
 <p:notes xmlns:a="http://schemas.openxmlformats.org/drawingml/2006/main" xmlns:r="http://schemas.openxmlformats.org/officeDocument/2006/relationships" xmlns:p="http://schemas.openxmlformats.org/presentationml/2006/main">
   <p:cSld>
@@ -1149,6 +1506,94 @@
             <a:fld id="{F7021451-1387-4CA6-816F-3879F97B5CBC}" type="slidenum">
               <a:rPr lang="en-US"/>
               <a:t>8</a:t>
+            </a:fld>
+            <a:endParaRPr lang="en-US"/>
+          </a:p>
+        </p:txBody>
+      </p:sp>
+    </p:spTree>
+    <p:extLst>
+      <p:ext uri="{BB962C8B-B14F-4D97-AF65-F5344CB8AC3E}">
+        <p14:creationId xmlns:p14="http://schemas.microsoft.com/office/powerpoint/2010/main" val="1024086991"/>
+      </p:ext>
+    </p:extLst>
+  </p:cSld>
+  <p:clrMapOvr>
+    <a:masterClrMapping/>
+  </p:clrMapOvr>
+</p:notes>
+</file>
+
+<file path=ppt/notesSlides/notesSlide9.xml><?xml version="1.0" encoding="utf-8"?>
+<p:notes xmlns:a="http://schemas.openxmlformats.org/drawingml/2006/main" xmlns:r="http://schemas.openxmlformats.org/officeDocument/2006/relationships" xmlns:p="http://schemas.openxmlformats.org/presentationml/2006/main">
+  <p:cSld>
+    <p:spTree>
+      <p:nvGrpSpPr>
+        <p:cNvPr id="1" name=""/>
+        <p:cNvGrpSpPr/>
+        <p:nvPr/>
+      </p:nvGrpSpPr>
+      <p:grpSpPr>
+        <a:xfrm>
+          <a:off x="0" y="0"/>
+          <a:ext cx="0" cy="0"/>
+          <a:chOff x="0" y="0"/>
+          <a:chExt cx="0" cy="0"/>
+        </a:xfrm>
+      </p:grpSpPr>
+      <p:sp>
+        <p:nvSpPr>
+          <p:cNvPr id="2" name="Slide Image Placeholder 1"/>
+          <p:cNvSpPr>
+            <a:spLocks noGrp="1" noRot="1" noChangeAspect="1"/>
+          </p:cNvSpPr>
+          <p:nvPr>
+            <p:ph type="sldImg"/>
+          </p:nvPr>
+        </p:nvSpPr>
+        <p:spPr/>
+      </p:sp>
+      <p:sp>
+        <p:nvSpPr>
+          <p:cNvPr id="3" name="Notes Placeholder 2"/>
+          <p:cNvSpPr>
+            <a:spLocks noGrp="1"/>
+          </p:cNvSpPr>
+          <p:nvPr>
+            <p:ph type="body" idx="1"/>
+          </p:nvPr>
+        </p:nvSpPr>
+        <p:spPr/>
+        <p:txBody>
+          <a:bodyPr/>
+          <a:lstStyle/>
+          <a:p>
+            <a:r>
+              <a:rPr lang="en-US" dirty="0"/>
+              <a:t/>
+            </a:r>
+            <a:endParaRPr lang="en-US" dirty="0"/>
+          </a:p>
+        </p:txBody>
+      </p:sp>
+      <p:sp>
+        <p:nvSpPr>
+          <p:cNvPr id="4" name="Slide Number Placeholder 3"/>
+          <p:cNvSpPr>
+            <a:spLocks noGrp="1"/>
+          </p:cNvSpPr>
+          <p:nvPr>
+            <p:ph type="sldNum" sz="quarter" idx="10"/>
+          </p:nvPr>
+        </p:nvSpPr>
+        <p:spPr/>
+        <p:txBody>
+          <a:bodyPr/>
+          <a:lstStyle/>
+          <a:p>
+            <a:fld id="{F7021451-1387-4CA6-816F-3879F97B5CBC}" type="slidenum">
+              <a:rPr lang="en-US"/>
+              <a:t>9</a:t>
             </a:fld>
             <a:endParaRPr lang="en-US"/>
           </a:p>
@@ -2025,6 +2470,2238 @@
 </p:sld>
 </file>
 
+<file path=ppt/slides/slide10.xml><?xml version="1.0" encoding="utf-8"?>
+<p:sld xmlns:a="http://schemas.openxmlformats.org/drawingml/2006/main" xmlns:r="http://schemas.openxmlformats.org/officeDocument/2006/relationships" xmlns:p="http://schemas.openxmlformats.org/presentationml/2006/main">
+  <p:cSld name="Slide 10">
+    <p:bg>
+      <p:bgPr>
+        <a:solidFill>
+          <a:srgbClr val="FFFFFF"/>
+        </a:solidFill>
+      </p:bgPr>
+    </p:bg>
+    <p:spTree>
+      <p:nvGrpSpPr>
+        <p:cNvPr id="1" name=""/>
+        <p:cNvGrpSpPr/>
+        <p:nvPr/>
+      </p:nvGrpSpPr>
+      <p:grpSpPr>
+        <a:xfrm>
+          <a:off x="0" y="0"/>
+          <a:ext cx="0" cy="0"/>
+          <a:chOff x="0" y="0"/>
+          <a:chExt cx="0" cy="0"/>
+        </a:xfrm>
+      </p:grpSpPr>
+      <p:sp>
+        <p:nvSpPr>
+          <p:cNvPr id="2" name="Text 0"/>
+          <p:cNvSpPr/>
+          <p:nvPr/>
+        </p:nvSpPr>
+        <p:spPr>
+          <a:xfrm>
+            <a:off x="640080" y="640080"/>
+            <a:ext cx="10058400" cy="731520"/>
+          </a:xfrm>
+          <a:prstGeom prst="rect">
+            <a:avLst/>
+          </a:prstGeom>
+          <a:noFill/>
+          <a:ln/>
+        </p:spPr>
+        <p:txBody>
+          <a:bodyPr wrap="square" rtlCol="0" anchor="ctr"/>
+          <a:lstStyle/>
+          <a:p>
+            <a:pPr indent="0" marL="0">
+              <a:buNone/>
+            </a:pPr>
+            <a:r>
+              <a:rPr lang="en-US" sz="3000" b="1" dirty="0">
+                <a:solidFill>
+                  <a:srgbClr val="1A1A1A"/>
+                </a:solidFill>
+                <a:latin typeface="Cambria" pitchFamily="34" charset="0"/>
+                <a:ea typeface="Cambria" pitchFamily="34" charset="-122"/>
+                <a:cs typeface="Cambria" pitchFamily="34" charset="-120"/>
+              </a:rPr>
+              <a:t>The session</a:t>
+            </a:r>
+            <a:endParaRPr lang="en-US" sz="3000" dirty="0"/>
+          </a:p>
+        </p:txBody>
+      </p:sp>
+      <p:sp>
+        <p:nvSpPr>
+          <p:cNvPr id="3" name="Shape 1"/>
+          <p:cNvSpPr/>
+          <p:nvPr/>
+        </p:nvSpPr>
+        <p:spPr>
+          <a:xfrm>
+            <a:off x="640080" y="1572768"/>
+            <a:ext cx="868680" cy="457200"/>
+          </a:xfrm>
+          <a:prstGeom prst="roundRect">
+            <a:avLst>
+              <a:gd name="adj" fmla="val 12000"/>
+            </a:avLst>
+          </a:prstGeom>
+          <a:solidFill>
+            <a:srgbClr val="7A3B2E"/>
+          </a:solidFill>
+          <a:ln/>
+        </p:spPr>
+      </p:sp>
+      <p:sp>
+        <p:nvSpPr>
+          <p:cNvPr id="4" name="Text 2"/>
+          <p:cNvSpPr/>
+          <p:nvPr/>
+        </p:nvSpPr>
+        <p:spPr>
+          <a:xfrm>
+            <a:off x="640080" y="1572768"/>
+            <a:ext cx="868680" cy="457200"/>
+          </a:xfrm>
+          <a:prstGeom prst="rect">
+            <a:avLst/>
+          </a:prstGeom>
+          <a:noFill/>
+          <a:ln/>
+        </p:spPr>
+        <p:txBody>
+          <a:bodyPr wrap="square" rtlCol="0" anchor="ctr"/>
+          <a:lstStyle/>
+          <a:p>
+            <a:pPr algn="ctr" indent="0" marL="0">
+              <a:buNone/>
+            </a:pPr>
+            <a:r>
+              <a:rPr lang="en-US" sz="1100" b="1" dirty="0">
+                <a:solidFill>
+                  <a:srgbClr val="FFFFFF"/>
+                </a:solidFill>
+                <a:latin typeface="Calibri" pitchFamily="34" charset="0"/>
+                <a:ea typeface="Calibri" pitchFamily="34" charset="-122"/>
+                <a:cs typeface="Calibri" pitchFamily="34" charset="-120"/>
+              </a:rPr>
+              <a:t>0:00</a:t>
+            </a:r>
+            <a:endParaRPr lang="en-US" sz="1100" dirty="0"/>
+          </a:p>
+        </p:txBody>
+      </p:sp>
+      <p:sp>
+        <p:nvSpPr>
+          <p:cNvPr id="5" name="Text 3"/>
+          <p:cNvSpPr/>
+          <p:nvPr/>
+        </p:nvSpPr>
+        <p:spPr>
+          <a:xfrm>
+            <a:off x="1691640" y="1554480"/>
+            <a:ext cx="9646920" cy="566928"/>
+          </a:xfrm>
+          <a:prstGeom prst="rect">
+            <a:avLst/>
+          </a:prstGeom>
+          <a:noFill/>
+          <a:ln/>
+        </p:spPr>
+        <p:txBody>
+          <a:bodyPr wrap="square" rtlCol="0" anchor="ctr">
+            <a:spAutoFit/>
+          </a:bodyPr>
+          <a:lstStyle/>
+          <a:p>
+            <a:pPr indent="0" marL="0">
+              <a:buNone/>
+            </a:pPr>
+            <a:r>
+              <a:rPr lang="en-US" sz="1250" dirty="0">
+                <a:solidFill>
+                  <a:srgbClr val="1A1A1A"/>
+                </a:solidFill>
+                <a:latin typeface="Calibri" pitchFamily="34" charset="0"/>
+                <a:ea typeface="Calibri" pitchFamily="34" charset="-122"/>
+                <a:cs typeface="Calibri" pitchFamily="34" charset="-120"/>
+              </a:rPr>
+              <a:t>Setting the room: the social rules, demonstrated by the instructor breaking one and being corrected. Today's live coding includes real mistakes on purpose.</a:t>
+            </a:r>
+            <a:endParaRPr lang="en-US" sz="1250" dirty="0"/>
+          </a:p>
+        </p:txBody>
+      </p:sp>
+      <p:sp>
+        <p:nvSpPr>
+          <p:cNvPr id="6" name="Shape 4"/>
+          <p:cNvSpPr/>
+          <p:nvPr/>
+        </p:nvSpPr>
+        <p:spPr>
+          <a:xfrm>
+            <a:off x="640080" y="2139696"/>
+            <a:ext cx="868680" cy="457200"/>
+          </a:xfrm>
+          <a:prstGeom prst="roundRect">
+            <a:avLst>
+              <a:gd name="adj" fmla="val 12000"/>
+            </a:avLst>
+          </a:prstGeom>
+          <a:solidFill>
+            <a:srgbClr val="7A3B2E"/>
+          </a:solidFill>
+          <a:ln/>
+        </p:spPr>
+      </p:sp>
+      <p:sp>
+        <p:nvSpPr>
+          <p:cNvPr id="7" name="Text 5"/>
+          <p:cNvSpPr/>
+          <p:nvPr/>
+        </p:nvSpPr>
+        <p:spPr>
+          <a:xfrm>
+            <a:off x="640080" y="2139696"/>
+            <a:ext cx="868680" cy="457200"/>
+          </a:xfrm>
+          <a:prstGeom prst="rect">
+            <a:avLst/>
+          </a:prstGeom>
+          <a:noFill/>
+          <a:ln/>
+        </p:spPr>
+        <p:txBody>
+          <a:bodyPr wrap="square" rtlCol="0" anchor="ctr"/>
+          <a:lstStyle/>
+          <a:p>
+            <a:pPr algn="ctr" indent="0" marL="0">
+              <a:buNone/>
+            </a:pPr>
+            <a:r>
+              <a:rPr lang="en-US" sz="1100" b="1" dirty="0">
+                <a:solidFill>
+                  <a:srgbClr val="FFFFFF"/>
+                </a:solidFill>
+                <a:latin typeface="Calibri" pitchFamily="34" charset="0"/>
+                <a:ea typeface="Calibri" pitchFamily="34" charset="-122"/>
+                <a:cs typeface="Calibri" pitchFamily="34" charset="-120"/>
+              </a:rPr>
+              <a:t>0:12</a:t>
+            </a:r>
+            <a:endParaRPr lang="en-US" sz="1100" dirty="0"/>
+          </a:p>
+        </p:txBody>
+      </p:sp>
+      <p:sp>
+        <p:nvSpPr>
+          <p:cNvPr id="8" name="Text 6"/>
+          <p:cNvSpPr/>
+          <p:nvPr/>
+        </p:nvSpPr>
+        <p:spPr>
+          <a:xfrm>
+            <a:off x="1691640" y="2121408"/>
+            <a:ext cx="9646920" cy="566928"/>
+          </a:xfrm>
+          <a:prstGeom prst="rect">
+            <a:avLst/>
+          </a:prstGeom>
+          <a:noFill/>
+          <a:ln/>
+        </p:spPr>
+        <p:txBody>
+          <a:bodyPr wrap="square" rtlCol="0" anchor="ctr">
+            <a:spAutoFit/>
+          </a:bodyPr>
+          <a:lstStyle/>
+          <a:p>
+            <a:pPr indent="0" marL="0">
+              <a:buNone/>
+            </a:pPr>
+            <a:r>
+              <a:rPr lang="en-US" sz="1250" dirty="0">
+                <a:solidFill>
+                  <a:srgbClr val="1A1A1A"/>
+                </a:solidFill>
+                <a:latin typeface="Calibri" pitchFamily="34" charset="0"/>
+                <a:ea typeface="Calibri" pitchFamily="34" charset="-122"/>
+                <a:cs typeface="Calibri" pitchFamily="34" charset="-120"/>
+              </a:rPr>
+              <a:t>Look at This, then Question It: She Giggles, He Gallops.</a:t>
+            </a:r>
+            <a:endParaRPr lang="en-US" sz="1250" dirty="0"/>
+          </a:p>
+        </p:txBody>
+      </p:sp>
+      <p:sp>
+        <p:nvSpPr>
+          <p:cNvPr id="9" name="Shape 7"/>
+          <p:cNvSpPr/>
+          <p:nvPr/>
+        </p:nvSpPr>
+        <p:spPr>
+          <a:xfrm>
+            <a:off x="640080" y="2706624"/>
+            <a:ext cx="868680" cy="457200"/>
+          </a:xfrm>
+          <a:prstGeom prst="roundRect">
+            <a:avLst>
+              <a:gd name="adj" fmla="val 12000"/>
+            </a:avLst>
+          </a:prstGeom>
+          <a:solidFill>
+            <a:srgbClr val="7A3B2E"/>
+          </a:solidFill>
+          <a:ln/>
+        </p:spPr>
+      </p:sp>
+      <p:sp>
+        <p:nvSpPr>
+          <p:cNvPr id="10" name="Text 8"/>
+          <p:cNvSpPr/>
+          <p:nvPr/>
+        </p:nvSpPr>
+        <p:spPr>
+          <a:xfrm>
+            <a:off x="640080" y="2706624"/>
+            <a:ext cx="868680" cy="457200"/>
+          </a:xfrm>
+          <a:prstGeom prst="rect">
+            <a:avLst/>
+          </a:prstGeom>
+          <a:noFill/>
+          <a:ln/>
+        </p:spPr>
+        <p:txBody>
+          <a:bodyPr wrap="square" rtlCol="0" anchor="ctr"/>
+          <a:lstStyle/>
+          <a:p>
+            <a:pPr algn="ctr" indent="0" marL="0">
+              <a:buNone/>
+            </a:pPr>
+            <a:r>
+              <a:rPr lang="en-US" sz="1100" b="1" dirty="0">
+                <a:solidFill>
+                  <a:srgbClr val="FFFFFF"/>
+                </a:solidFill>
+                <a:latin typeface="Calibri" pitchFamily="34" charset="0"/>
+                <a:ea typeface="Calibri" pitchFamily="34" charset="-122"/>
+                <a:cs typeface="Calibri" pitchFamily="34" charset="-120"/>
+              </a:rPr>
+              <a:t>0:17</a:t>
+            </a:r>
+            <a:endParaRPr lang="en-US" sz="1100" dirty="0"/>
+          </a:p>
+        </p:txBody>
+      </p:sp>
+      <p:sp>
+        <p:nvSpPr>
+          <p:cNvPr id="11" name="Text 9"/>
+          <p:cNvSpPr/>
+          <p:nvPr/>
+        </p:nvSpPr>
+        <p:spPr>
+          <a:xfrm>
+            <a:off x="1691640" y="2688336"/>
+            <a:ext cx="9646920" cy="566928"/>
+          </a:xfrm>
+          <a:prstGeom prst="rect">
+            <a:avLst/>
+          </a:prstGeom>
+          <a:noFill/>
+          <a:ln/>
+        </p:spPr>
+        <p:txBody>
+          <a:bodyPr wrap="square" rtlCol="0" anchor="ctr">
+            <a:spAutoFit/>
+          </a:bodyPr>
+          <a:lstStyle/>
+          <a:p>
+            <a:pPr indent="0" marL="0">
+              <a:buNone/>
+            </a:pPr>
+            <a:r>
+              <a:rPr lang="en-US" sz="1250" dirty="0">
+                <a:solidFill>
+                  <a:srgbClr val="1A1A1A"/>
+                </a:solidFill>
+                <a:latin typeface="Calibri" pitchFamily="34" charset="0"/>
+                <a:ea typeface="Calibri" pitchFamily="34" charset="-122"/>
+                <a:cs typeface="Calibri" pitchFamily="34" charset="-120"/>
+              </a:rPr>
+              <a:t>Pre-train the vocabulary (no code): corpus, method, model, embedding, in plain language with pictures. The course map and the deliverable.</a:t>
+            </a:r>
+            <a:endParaRPr lang="en-US" sz="1250" dirty="0"/>
+          </a:p>
+        </p:txBody>
+      </p:sp>
+      <p:sp>
+        <p:nvSpPr>
+          <p:cNvPr id="12" name="Shape 10"/>
+          <p:cNvSpPr/>
+          <p:nvPr/>
+        </p:nvSpPr>
+        <p:spPr>
+          <a:xfrm>
+            <a:off x="640080" y="3273552"/>
+            <a:ext cx="868680" cy="457200"/>
+          </a:xfrm>
+          <a:prstGeom prst="roundRect">
+            <a:avLst>
+              <a:gd name="adj" fmla="val 12000"/>
+            </a:avLst>
+          </a:prstGeom>
+          <a:solidFill>
+            <a:srgbClr val="7A3B2E"/>
+          </a:solidFill>
+          <a:ln/>
+        </p:spPr>
+      </p:sp>
+      <p:sp>
+        <p:nvSpPr>
+          <p:cNvPr id="13" name="Text 11"/>
+          <p:cNvSpPr/>
+          <p:nvPr/>
+        </p:nvSpPr>
+        <p:spPr>
+          <a:xfrm>
+            <a:off x="640080" y="3273552"/>
+            <a:ext cx="868680" cy="457200"/>
+          </a:xfrm>
+          <a:prstGeom prst="rect">
+            <a:avLst/>
+          </a:prstGeom>
+          <a:noFill/>
+          <a:ln/>
+        </p:spPr>
+        <p:txBody>
+          <a:bodyPr wrap="square" rtlCol="0" anchor="ctr"/>
+          <a:lstStyle/>
+          <a:p>
+            <a:pPr algn="ctr" indent="0" marL="0">
+              <a:buNone/>
+            </a:pPr>
+            <a:r>
+              <a:rPr lang="en-US" sz="1100" b="1" dirty="0">
+                <a:solidFill>
+                  <a:srgbClr val="FFFFFF"/>
+                </a:solidFill>
+                <a:latin typeface="Calibri" pitchFamily="34" charset="0"/>
+                <a:ea typeface="Calibri" pitchFamily="34" charset="-122"/>
+                <a:cs typeface="Calibri" pitchFamily="34" charset="-120"/>
+              </a:rPr>
+              <a:t>0:32</a:t>
+            </a:r>
+            <a:endParaRPr lang="en-US" sz="1100" dirty="0"/>
+          </a:p>
+        </p:txBody>
+      </p:sp>
+      <p:sp>
+        <p:nvSpPr>
+          <p:cNvPr id="14" name="Text 12"/>
+          <p:cNvSpPr/>
+          <p:nvPr/>
+        </p:nvSpPr>
+        <p:spPr>
+          <a:xfrm>
+            <a:off x="1691640" y="3255264"/>
+            <a:ext cx="9646920" cy="566928"/>
+          </a:xfrm>
+          <a:prstGeom prst="rect">
+            <a:avLst/>
+          </a:prstGeom>
+          <a:noFill/>
+          <a:ln/>
+        </p:spPr>
+        <p:txBody>
+          <a:bodyPr wrap="square" rtlCol="0" anchor="ctr">
+            <a:spAutoFit/>
+          </a:bodyPr>
+          <a:lstStyle/>
+          <a:p>
+            <a:pPr indent="0" marL="0">
+              <a:buNone/>
+            </a:pPr>
+            <a:r>
+              <a:rPr lang="en-US" sz="1250" dirty="0">
+                <a:solidFill>
+                  <a:srgbClr val="1A1A1A"/>
+                </a:solidFill>
+                <a:latin typeface="Calibri" pitchFamily="34" charset="0"/>
+                <a:ea typeface="Calibri" pitchFamily="34" charset="-122"/>
+                <a:cs typeface="Calibri" pitchFamily="34" charset="-120"/>
+              </a:rPr>
+              <a:t>Lab 1 (worked, participatory): copy the notebook to Drive and mount Drive into the runtime (this is how your corpus and results survive Colab wiping the session, everything saving to one project folder), put a Gemini key in Colab Secrets, load NYT wedding data, make a first chart. Hand out the common-errors cheat sheet. Then solo with a partner: draft three questions, pick one, have the AI write the code, run it, chart it. Write one sentence predicting your cell before you run it.</a:t>
+            </a:r>
+            <a:endParaRPr lang="en-US" sz="1250" dirty="0"/>
+          </a:p>
+        </p:txBody>
+      </p:sp>
+      <p:sp>
+        <p:nvSpPr>
+          <p:cNvPr id="15" name="Shape 13"/>
+          <p:cNvSpPr/>
+          <p:nvPr/>
+        </p:nvSpPr>
+        <p:spPr>
+          <a:xfrm>
+            <a:off x="640080" y="3840480"/>
+            <a:ext cx="868680" cy="457200"/>
+          </a:xfrm>
+          <a:prstGeom prst="roundRect">
+            <a:avLst>
+              <a:gd name="adj" fmla="val 12000"/>
+            </a:avLst>
+          </a:prstGeom>
+          <a:solidFill>
+            <a:srgbClr val="7A3B2E"/>
+          </a:solidFill>
+          <a:ln/>
+        </p:spPr>
+      </p:sp>
+      <p:sp>
+        <p:nvSpPr>
+          <p:cNvPr id="16" name="Text 14"/>
+          <p:cNvSpPr/>
+          <p:nvPr/>
+        </p:nvSpPr>
+        <p:spPr>
+          <a:xfrm>
+            <a:off x="640080" y="3840480"/>
+            <a:ext cx="868680" cy="457200"/>
+          </a:xfrm>
+          <a:prstGeom prst="rect">
+            <a:avLst/>
+          </a:prstGeom>
+          <a:noFill/>
+          <a:ln/>
+        </p:spPr>
+        <p:txBody>
+          <a:bodyPr wrap="square" rtlCol="0" anchor="ctr"/>
+          <a:lstStyle/>
+          <a:p>
+            <a:pPr algn="ctr" indent="0" marL="0">
+              <a:buNone/>
+            </a:pPr>
+            <a:r>
+              <a:rPr lang="en-US" sz="1100" b="1" dirty="0">
+                <a:solidFill>
+                  <a:srgbClr val="FFFFFF"/>
+                </a:solidFill>
+                <a:latin typeface="Calibri" pitchFamily="34" charset="0"/>
+                <a:ea typeface="Calibri" pitchFamily="34" charset="-122"/>
+                <a:cs typeface="Calibri" pitchFamily="34" charset="-120"/>
+              </a:rPr>
+              <a:t>1:10</a:t>
+            </a:r>
+            <a:endParaRPr lang="en-US" sz="1100" dirty="0"/>
+          </a:p>
+        </p:txBody>
+      </p:sp>
+      <p:sp>
+        <p:nvSpPr>
+          <p:cNvPr id="17" name="Text 15"/>
+          <p:cNvSpPr/>
+          <p:nvPr/>
+        </p:nvSpPr>
+        <p:spPr>
+          <a:xfrm>
+            <a:off x="1691640" y="3822192"/>
+            <a:ext cx="9646920" cy="566928"/>
+          </a:xfrm>
+          <a:prstGeom prst="rect">
+            <a:avLst/>
+          </a:prstGeom>
+          <a:noFill/>
+          <a:ln/>
+        </p:spPr>
+        <p:txBody>
+          <a:bodyPr wrap="square" rtlCol="0" anchor="ctr">
+            <a:spAutoFit/>
+          </a:bodyPr>
+          <a:lstStyle/>
+          <a:p>
+            <a:pPr indent="0" marL="0">
+              <a:buNone/>
+            </a:pPr>
+            <a:r>
+              <a:rPr lang="en-US" sz="1250" dirty="0">
+                <a:solidFill>
+                  <a:srgbClr val="1A1A1A"/>
+                </a:solidFill>
+                <a:latin typeface="Calibri" pitchFamily="34" charset="0"/>
+                <a:ea typeface="Calibri" pitchFamily="34" charset="-122"/>
+                <a:cs typeface="Calibri" pitchFamily="34" charset="-120"/>
+              </a:rPr>
+              <a:t>Break</a:t>
+            </a:r>
+            <a:endParaRPr lang="en-US" sz="1250" dirty="0"/>
+          </a:p>
+        </p:txBody>
+      </p:sp>
+      <p:sp>
+        <p:nvSpPr>
+          <p:cNvPr id="18" name="Shape 16"/>
+          <p:cNvSpPr/>
+          <p:nvPr/>
+        </p:nvSpPr>
+        <p:spPr>
+          <a:xfrm>
+            <a:off x="640080" y="4407408"/>
+            <a:ext cx="868680" cy="457200"/>
+          </a:xfrm>
+          <a:prstGeom prst="roundRect">
+            <a:avLst>
+              <a:gd name="adj" fmla="val 12000"/>
+            </a:avLst>
+          </a:prstGeom>
+          <a:solidFill>
+            <a:srgbClr val="7A3B2E"/>
+          </a:solidFill>
+          <a:ln/>
+        </p:spPr>
+      </p:sp>
+      <p:sp>
+        <p:nvSpPr>
+          <p:cNvPr id="19" name="Text 17"/>
+          <p:cNvSpPr/>
+          <p:nvPr/>
+        </p:nvSpPr>
+        <p:spPr>
+          <a:xfrm>
+            <a:off x="640080" y="4407408"/>
+            <a:ext cx="868680" cy="457200"/>
+          </a:xfrm>
+          <a:prstGeom prst="rect">
+            <a:avLst/>
+          </a:prstGeom>
+          <a:noFill/>
+          <a:ln/>
+        </p:spPr>
+        <p:txBody>
+          <a:bodyPr wrap="square" rtlCol="0" anchor="ctr"/>
+          <a:lstStyle/>
+          <a:p>
+            <a:pPr algn="ctr" indent="0" marL="0">
+              <a:buNone/>
+            </a:pPr>
+            <a:r>
+              <a:rPr lang="en-US" sz="1100" b="1" dirty="0">
+                <a:solidFill>
+                  <a:srgbClr val="FFFFFF"/>
+                </a:solidFill>
+                <a:latin typeface="Calibri" pitchFamily="34" charset="0"/>
+                <a:ea typeface="Calibri" pitchFamily="34" charset="-122"/>
+                <a:cs typeface="Calibri" pitchFamily="34" charset="-120"/>
+              </a:rPr>
+              <a:t>1:20</a:t>
+            </a:r>
+            <a:endParaRPr lang="en-US" sz="1100" dirty="0"/>
+          </a:p>
+        </p:txBody>
+      </p:sp>
+      <p:sp>
+        <p:nvSpPr>
+          <p:cNvPr id="20" name="Text 18"/>
+          <p:cNvSpPr/>
+          <p:nvPr/>
+        </p:nvSpPr>
+        <p:spPr>
+          <a:xfrm>
+            <a:off x="1691640" y="4389120"/>
+            <a:ext cx="9646920" cy="566928"/>
+          </a:xfrm>
+          <a:prstGeom prst="rect">
+            <a:avLst/>
+          </a:prstGeom>
+          <a:noFill/>
+          <a:ln/>
+        </p:spPr>
+        <p:txBody>
+          <a:bodyPr wrap="square" rtlCol="0" anchor="ctr">
+            <a:spAutoFit/>
+          </a:bodyPr>
+          <a:lstStyle/>
+          <a:p>
+            <a:pPr indent="0" marL="0">
+              <a:buNone/>
+            </a:pPr>
+            <a:r>
+              <a:rPr lang="en-US" sz="1250" dirty="0">
+                <a:solidFill>
+                  <a:srgbClr val="1A1A1A"/>
+                </a:solidFill>
+                <a:latin typeface="Calibri" pitchFamily="34" charset="0"/>
+                <a:ea typeface="Calibri" pitchFamily="34" charset="-122"/>
+                <a:cs typeface="Calibri" pitchFamily="34" charset="-120"/>
+              </a:rPr>
+              <a:t>Lab 2 (worked), count words, then pixels: first the top words of a small lyrics slice (stop-words drown the list until you remove them, your first counting choice), then an image corpus, ~200 Met thumbnails ranked darkest to brightest by average brightness. Text and pictures, counted with the same move; image projects start here.</a:t>
+            </a:r>
+            <a:endParaRPr lang="en-US" sz="1250" dirty="0"/>
+          </a:p>
+        </p:txBody>
+      </p:sp>
+      <p:sp>
+        <p:nvSpPr>
+          <p:cNvPr id="21" name="Shape 19"/>
+          <p:cNvSpPr/>
+          <p:nvPr/>
+        </p:nvSpPr>
+        <p:spPr>
+          <a:xfrm>
+            <a:off x="640080" y="4974336"/>
+            <a:ext cx="868680" cy="457200"/>
+          </a:xfrm>
+          <a:prstGeom prst="roundRect">
+            <a:avLst>
+              <a:gd name="adj" fmla="val 12000"/>
+            </a:avLst>
+          </a:prstGeom>
+          <a:solidFill>
+            <a:srgbClr val="7A3B2E"/>
+          </a:solidFill>
+          <a:ln/>
+        </p:spPr>
+      </p:sp>
+      <p:sp>
+        <p:nvSpPr>
+          <p:cNvPr id="22" name="Text 20"/>
+          <p:cNvSpPr/>
+          <p:nvPr/>
+        </p:nvSpPr>
+        <p:spPr>
+          <a:xfrm>
+            <a:off x="640080" y="4974336"/>
+            <a:ext cx="868680" cy="457200"/>
+          </a:xfrm>
+          <a:prstGeom prst="rect">
+            <a:avLst/>
+          </a:prstGeom>
+          <a:noFill/>
+          <a:ln/>
+        </p:spPr>
+        <p:txBody>
+          <a:bodyPr wrap="square" rtlCol="0" anchor="ctr"/>
+          <a:lstStyle/>
+          <a:p>
+            <a:pPr algn="ctr" indent="0" marL="0">
+              <a:buNone/>
+            </a:pPr>
+            <a:r>
+              <a:rPr lang="en-US" sz="1100" b="1" dirty="0">
+                <a:solidFill>
+                  <a:srgbClr val="FFFFFF"/>
+                </a:solidFill>
+                <a:latin typeface="Calibri" pitchFamily="34" charset="0"/>
+                <a:ea typeface="Calibri" pitchFamily="34" charset="-122"/>
+                <a:cs typeface="Calibri" pitchFamily="34" charset="-120"/>
+              </a:rPr>
+              <a:t>1:50</a:t>
+            </a:r>
+            <a:endParaRPr lang="en-US" sz="1100" dirty="0"/>
+          </a:p>
+        </p:txBody>
+      </p:sp>
+      <p:sp>
+        <p:nvSpPr>
+          <p:cNvPr id="23" name="Text 21"/>
+          <p:cNvSpPr/>
+          <p:nvPr/>
+        </p:nvSpPr>
+        <p:spPr>
+          <a:xfrm>
+            <a:off x="1691640" y="4956048"/>
+            <a:ext cx="9646920" cy="566928"/>
+          </a:xfrm>
+          <a:prstGeom prst="rect">
+            <a:avLst/>
+          </a:prstGeom>
+          <a:noFill/>
+          <a:ln/>
+        </p:spPr>
+        <p:txBody>
+          <a:bodyPr wrap="square" rtlCol="0" anchor="ctr">
+            <a:spAutoFit/>
+          </a:bodyPr>
+          <a:lstStyle/>
+          <a:p>
+            <a:pPr indent="0" marL="0">
+              <a:buNone/>
+            </a:pPr>
+            <a:r>
+              <a:rPr lang="en-US" sz="1250" dirty="0">
+                <a:solidFill>
+                  <a:srgbClr val="1A1A1A"/>
+                </a:solidFill>
+                <a:latin typeface="Calibri" pitchFamily="34" charset="0"/>
+                <a:ea typeface="Calibri" pitchFamily="34" charset="-122"/>
+                <a:cs typeface="Calibri" pitchFamily="34" charset="-120"/>
+              </a:rPr>
+              <a:t>Teaser of the ladder ahead; the standing rituals named. First check-out.</a:t>
+            </a:r>
+            <a:endParaRPr lang="en-US" sz="1250" dirty="0"/>
+          </a:p>
+        </p:txBody>
+      </p:sp>
+    </p:spTree>
+  </p:cSld>
+  <p:clrMapOvr>
+    <a:masterClrMapping/>
+  </p:clrMapOvr>
+</p:sld>
+</file>
+
+<file path=ppt/slides/slide11.xml><?xml version="1.0" encoding="utf-8"?>
+<p:sld xmlns:a="http://schemas.openxmlformats.org/drawingml/2006/main" xmlns:r="http://schemas.openxmlformats.org/officeDocument/2006/relationships" xmlns:p="http://schemas.openxmlformats.org/presentationml/2006/main">
+  <p:cSld name="Slide 11">
+    <p:bg>
+      <p:bgPr>
+        <a:solidFill>
+          <a:srgbClr val="FFFFFF"/>
+        </a:solidFill>
+      </p:bgPr>
+    </p:bg>
+    <p:spTree>
+      <p:nvGrpSpPr>
+        <p:cNvPr id="1" name=""/>
+        <p:cNvGrpSpPr/>
+        <p:nvPr/>
+      </p:nvGrpSpPr>
+      <p:grpSpPr>
+        <a:xfrm>
+          <a:off x="0" y="0"/>
+          <a:ext cx="0" cy="0"/>
+          <a:chOff x="0" y="0"/>
+          <a:chExt cx="0" cy="0"/>
+        </a:xfrm>
+      </p:grpSpPr>
+      <p:sp>
+        <p:nvSpPr>
+          <p:cNvPr id="2" name="Text 0"/>
+          <p:cNvSpPr/>
+          <p:nvPr/>
+        </p:nvSpPr>
+        <p:spPr>
+          <a:xfrm>
+            <a:off x="640080" y="640080"/>
+            <a:ext cx="10058400" cy="731520"/>
+          </a:xfrm>
+          <a:prstGeom prst="rect">
+            <a:avLst/>
+          </a:prstGeom>
+          <a:noFill/>
+          <a:ln/>
+        </p:spPr>
+        <p:txBody>
+          <a:bodyPr wrap="square" rtlCol="0" anchor="ctr"/>
+          <a:lstStyle/>
+          <a:p>
+            <a:pPr indent="0" marL="0">
+              <a:buNone/>
+            </a:pPr>
+            <a:r>
+              <a:rPr lang="en-US" sz="3000" b="1" dirty="0">
+                <a:solidFill>
+                  <a:srgbClr val="1A1A1A"/>
+                </a:solidFill>
+                <a:latin typeface="Cambria" pitchFamily="34" charset="0"/>
+                <a:ea typeface="Cambria" pitchFamily="34" charset="-122"/>
+                <a:cs typeface="Cambria" pitchFamily="34" charset="-120"/>
+              </a:rPr>
+              <a:t>Reading &amp; homework</a:t>
+            </a:r>
+            <a:endParaRPr lang="en-US" sz="3000" dirty="0"/>
+          </a:p>
+        </p:txBody>
+      </p:sp>
+      <p:sp>
+        <p:nvSpPr>
+          <p:cNvPr id="3" name="Shape 1"/>
+          <p:cNvSpPr/>
+          <p:nvPr/>
+        </p:nvSpPr>
+        <p:spPr>
+          <a:xfrm>
+            <a:off x="640080" y="1810512"/>
+            <a:ext cx="219456" cy="219456"/>
+          </a:xfrm>
+          <a:prstGeom prst="ellipse">
+            <a:avLst/>
+          </a:prstGeom>
+          <a:solidFill>
+            <a:srgbClr val="7A3B2E"/>
+          </a:solidFill>
+          <a:ln/>
+        </p:spPr>
+      </p:sp>
+      <p:sp>
+        <p:nvSpPr>
+          <p:cNvPr id="4" name="Text 2"/>
+          <p:cNvSpPr/>
+          <p:nvPr/>
+        </p:nvSpPr>
+        <p:spPr>
+          <a:xfrm>
+            <a:off x="1051560" y="1737360"/>
+            <a:ext cx="10424160" cy="365760"/>
+          </a:xfrm>
+          <a:prstGeom prst="rect">
+            <a:avLst/>
+          </a:prstGeom>
+          <a:noFill/>
+          <a:ln/>
+        </p:spPr>
+        <p:txBody>
+          <a:bodyPr wrap="square" rtlCol="0" anchor="ctr"/>
+          <a:lstStyle/>
+          <a:p>
+            <a:pPr indent="0" marL="0">
+              <a:buNone/>
+            </a:pPr>
+            <a:r>
+              <a:rPr lang="en-US" sz="1500" b="1" dirty="0">
+                <a:solidFill>
+                  <a:srgbClr val="7A3B2E"/>
+                </a:solidFill>
+                <a:latin typeface="Calibri" pitchFamily="34" charset="0"/>
+                <a:ea typeface="Calibri" pitchFamily="34" charset="-122"/>
+                <a:cs typeface="Calibri" pitchFamily="34" charset="-120"/>
+              </a:rPr>
+              <a:t>Reading</a:t>
+            </a:r>
+            <a:endParaRPr lang="en-US" sz="1500" dirty="0"/>
+          </a:p>
+        </p:txBody>
+      </p:sp>
+      <p:sp>
+        <p:nvSpPr>
+          <p:cNvPr id="5" name="Text 3"/>
+          <p:cNvSpPr/>
+          <p:nvPr/>
+        </p:nvSpPr>
+        <p:spPr>
+          <a:xfrm>
+            <a:off x="1051560" y="2121408"/>
+            <a:ext cx="10424160" cy="731520"/>
+          </a:xfrm>
+          <a:prstGeom prst="rect">
+            <a:avLst/>
+          </a:prstGeom>
+          <a:noFill/>
+          <a:ln/>
+        </p:spPr>
+        <p:txBody>
+          <a:bodyPr wrap="square" rtlCol="0" anchor="t">
+            <a:spAutoFit/>
+          </a:bodyPr>
+          <a:lstStyle/>
+          <a:p>
+            <a:pPr indent="0" marL="0">
+              <a:buNone/>
+            </a:pPr>
+            <a:r>
+              <a:rPr lang="en-US" sz="1400" dirty="0">
+                <a:solidFill>
+                  <a:srgbClr val="1A1A1A"/>
+                </a:solidFill>
+                <a:latin typeface="Calibri" pitchFamily="34" charset="0"/>
+                <a:ea typeface="Calibri" pitchFamily="34" charset="-122"/>
+                <a:cs typeface="Calibri" pitchFamily="34" charset="-120"/>
+              </a:rPr>
+              <a:t>Bollen et al., the cognitive-distortions hockey stick (PNAS 2021), with the Schmidt et al. critique</a:t>
+            </a:r>
+            <a:endParaRPr lang="en-US" sz="1400" dirty="0"/>
+          </a:p>
+        </p:txBody>
+      </p:sp>
+      <p:sp>
+        <p:nvSpPr>
+          <p:cNvPr id="6" name="Shape 4"/>
+          <p:cNvSpPr/>
+          <p:nvPr/>
+        </p:nvSpPr>
+        <p:spPr>
+          <a:xfrm>
+            <a:off x="640080" y="2953512"/>
+            <a:ext cx="219456" cy="219456"/>
+          </a:xfrm>
+          <a:prstGeom prst="ellipse">
+            <a:avLst/>
+          </a:prstGeom>
+          <a:solidFill>
+            <a:srgbClr val="3F6F5F"/>
+          </a:solidFill>
+          <a:ln/>
+        </p:spPr>
+      </p:sp>
+      <p:sp>
+        <p:nvSpPr>
+          <p:cNvPr id="7" name="Text 5"/>
+          <p:cNvSpPr/>
+          <p:nvPr/>
+        </p:nvSpPr>
+        <p:spPr>
+          <a:xfrm>
+            <a:off x="1051560" y="2880360"/>
+            <a:ext cx="10424160" cy="365760"/>
+          </a:xfrm>
+          <a:prstGeom prst="rect">
+            <a:avLst/>
+          </a:prstGeom>
+          <a:noFill/>
+          <a:ln/>
+        </p:spPr>
+        <p:txBody>
+          <a:bodyPr wrap="square" rtlCol="0" anchor="ctr"/>
+          <a:lstStyle/>
+          <a:p>
+            <a:pPr indent="0" marL="0">
+              <a:buNone/>
+            </a:pPr>
+            <a:r>
+              <a:rPr lang="en-US" sz="1500" b="1" dirty="0">
+                <a:solidFill>
+                  <a:srgbClr val="3F6F5F"/>
+                </a:solidFill>
+                <a:latin typeface="Calibri" pitchFamily="34" charset="0"/>
+                <a:ea typeface="Calibri" pitchFamily="34" charset="-122"/>
+                <a:cs typeface="Calibri" pitchFamily="34" charset="-120"/>
+              </a:rPr>
+              <a:t>Supplement</a:t>
+            </a:r>
+            <a:endParaRPr lang="en-US" sz="1500" dirty="0"/>
+          </a:p>
+        </p:txBody>
+      </p:sp>
+      <p:sp>
+        <p:nvSpPr>
+          <p:cNvPr id="8" name="Text 6"/>
+          <p:cNvSpPr/>
+          <p:nvPr/>
+        </p:nvSpPr>
+        <p:spPr>
+          <a:xfrm>
+            <a:off x="1051560" y="3264408"/>
+            <a:ext cx="10424160" cy="731520"/>
+          </a:xfrm>
+          <a:prstGeom prst="rect">
+            <a:avLst/>
+          </a:prstGeom>
+          <a:noFill/>
+          <a:ln/>
+        </p:spPr>
+        <p:txBody>
+          <a:bodyPr wrap="square" rtlCol="0" anchor="t">
+            <a:spAutoFit/>
+          </a:bodyPr>
+          <a:lstStyle/>
+          <a:p>
+            <a:pPr indent="0" marL="0">
+              <a:buNone/>
+            </a:pPr>
+            <a:r>
+              <a:rPr lang="en-US" sz="1400" dirty="0">
+                <a:solidFill>
+                  <a:srgbClr val="1A1A1A"/>
+                </a:solidFill>
+                <a:latin typeface="Calibri" pitchFamily="34" charset="0"/>
+                <a:ea typeface="Calibri" pitchFamily="34" charset="-122"/>
+                <a:cs typeface="Calibri" pitchFamily="34" charset="-120"/>
+              </a:rPr>
+              <a:t>Robin Sloan, Writing with the machine</a:t>
+            </a:r>
+            <a:endParaRPr lang="en-US" sz="1400" dirty="0"/>
+          </a:p>
+        </p:txBody>
+      </p:sp>
+      <p:sp>
+        <p:nvSpPr>
+          <p:cNvPr id="9" name="Shape 7"/>
+          <p:cNvSpPr/>
+          <p:nvPr/>
+        </p:nvSpPr>
+        <p:spPr>
+          <a:xfrm>
+            <a:off x="640080" y="4096512"/>
+            <a:ext cx="219456" cy="219456"/>
+          </a:xfrm>
+          <a:prstGeom prst="ellipse">
+            <a:avLst/>
+          </a:prstGeom>
+          <a:solidFill>
+            <a:srgbClr val="B9852F"/>
+          </a:solidFill>
+          <a:ln/>
+        </p:spPr>
+      </p:sp>
+      <p:sp>
+        <p:nvSpPr>
+          <p:cNvPr id="10" name="Text 8"/>
+          <p:cNvSpPr/>
+          <p:nvPr/>
+        </p:nvSpPr>
+        <p:spPr>
+          <a:xfrm>
+            <a:off x="1051560" y="4023360"/>
+            <a:ext cx="10424160" cy="365760"/>
+          </a:xfrm>
+          <a:prstGeom prst="rect">
+            <a:avLst/>
+          </a:prstGeom>
+          <a:noFill/>
+          <a:ln/>
+        </p:spPr>
+        <p:txBody>
+          <a:bodyPr wrap="square" rtlCol="0" anchor="ctr"/>
+          <a:lstStyle/>
+          <a:p>
+            <a:pPr indent="0" marL="0">
+              <a:buNone/>
+            </a:pPr>
+            <a:r>
+              <a:rPr lang="en-US" sz="1500" b="1" dirty="0">
+                <a:solidFill>
+                  <a:srgbClr val="B9852F"/>
+                </a:solidFill>
+                <a:latin typeface="Calibri" pitchFamily="34" charset="0"/>
+                <a:ea typeface="Calibri" pitchFamily="34" charset="-122"/>
+                <a:cs typeface="Calibri" pitchFamily="34" charset="-120"/>
+              </a:rPr>
+              <a:t>Sketch</a:t>
+            </a:r>
+            <a:endParaRPr lang="en-US" sz="1500" dirty="0"/>
+          </a:p>
+        </p:txBody>
+      </p:sp>
+      <p:sp>
+        <p:nvSpPr>
+          <p:cNvPr id="11" name="Text 9"/>
+          <p:cNvSpPr/>
+          <p:nvPr/>
+        </p:nvSpPr>
+        <p:spPr>
+          <a:xfrm>
+            <a:off x="1051560" y="4407408"/>
+            <a:ext cx="10424160" cy="731520"/>
+          </a:xfrm>
+          <a:prstGeom prst="rect">
+            <a:avLst/>
+          </a:prstGeom>
+          <a:noFill/>
+          <a:ln/>
+        </p:spPr>
+        <p:txBody>
+          <a:bodyPr wrap="square" rtlCol="0" anchor="t">
+            <a:spAutoFit/>
+          </a:bodyPr>
+          <a:lstStyle/>
+          <a:p>
+            <a:pPr indent="0" marL="0">
+              <a:buNone/>
+            </a:pPr>
+            <a:r>
+              <a:rPr lang="en-US" sz="1400" dirty="0">
+                <a:solidFill>
+                  <a:srgbClr val="1A1A1A"/>
+                </a:solidFill>
+                <a:latin typeface="Calibri" pitchFamily="34" charset="0"/>
+                <a:ea typeface="Calibri" pitchFamily="34" charset="-122"/>
+                <a:cs typeface="Calibri" pitchFamily="34" charset="-120"/>
+              </a:rPr>
+              <a:t>One question from your life answerable with text or image data; three sentences.</a:t>
+            </a:r>
+            <a:endParaRPr lang="en-US" sz="1400" dirty="0"/>
+          </a:p>
+        </p:txBody>
+      </p:sp>
+      <p:sp>
+        <p:nvSpPr>
+          <p:cNvPr id="12" name="Shape 10"/>
+          <p:cNvSpPr/>
+          <p:nvPr/>
+        </p:nvSpPr>
+        <p:spPr>
+          <a:xfrm>
+            <a:off x="640080" y="5239512"/>
+            <a:ext cx="219456" cy="219456"/>
+          </a:xfrm>
+          <a:prstGeom prst="ellipse">
+            <a:avLst/>
+          </a:prstGeom>
+          <a:solidFill>
+            <a:srgbClr val="7A3B2E"/>
+          </a:solidFill>
+          <a:ln/>
+        </p:spPr>
+      </p:sp>
+      <p:sp>
+        <p:nvSpPr>
+          <p:cNvPr id="13" name="Text 11"/>
+          <p:cNvSpPr/>
+          <p:nvPr/>
+        </p:nvSpPr>
+        <p:spPr>
+          <a:xfrm>
+            <a:off x="1051560" y="5166360"/>
+            <a:ext cx="10424160" cy="365760"/>
+          </a:xfrm>
+          <a:prstGeom prst="rect">
+            <a:avLst/>
+          </a:prstGeom>
+          <a:noFill/>
+          <a:ln/>
+        </p:spPr>
+        <p:txBody>
+          <a:bodyPr wrap="square" rtlCol="0" anchor="ctr"/>
+          <a:lstStyle/>
+          <a:p>
+            <a:pPr indent="0" marL="0">
+              <a:buNone/>
+            </a:pPr>
+            <a:r>
+              <a:rPr lang="en-US" sz="1500" b="1" dirty="0">
+                <a:solidFill>
+                  <a:srgbClr val="7A3B2E"/>
+                </a:solidFill>
+                <a:latin typeface="Calibri" pitchFamily="34" charset="0"/>
+                <a:ea typeface="Calibri" pitchFamily="34" charset="-122"/>
+                <a:cs typeface="Calibri" pitchFamily="34" charset="-120"/>
+              </a:rPr>
+              <a:t>Check (AI closed)</a:t>
+            </a:r>
+            <a:endParaRPr lang="en-US" sz="1500" dirty="0"/>
+          </a:p>
+        </p:txBody>
+      </p:sp>
+      <p:sp>
+        <p:nvSpPr>
+          <p:cNvPr id="14" name="Text 12"/>
+          <p:cNvSpPr/>
+          <p:nvPr/>
+        </p:nvSpPr>
+        <p:spPr>
+          <a:xfrm>
+            <a:off x="1051560" y="5550408"/>
+            <a:ext cx="10424160" cy="731520"/>
+          </a:xfrm>
+          <a:prstGeom prst="rect">
+            <a:avLst/>
+          </a:prstGeom>
+          <a:noFill/>
+          <a:ln/>
+        </p:spPr>
+        <p:txBody>
+          <a:bodyPr wrap="square" rtlCol="0" anchor="t">
+            <a:spAutoFit/>
+          </a:bodyPr>
+          <a:lstStyle/>
+          <a:p>
+            <a:pPr indent="0" marL="0">
+              <a:buNone/>
+            </a:pPr>
+            <a:r>
+              <a:rPr lang="en-US" sz="1400" dirty="0">
+                <a:solidFill>
+                  <a:srgbClr val="1A1A1A"/>
+                </a:solidFill>
+                <a:latin typeface="Calibri" pitchFamily="34" charset="0"/>
+                <a:ea typeface="Calibri" pitchFamily="34" charset="-122"/>
+                <a:cs typeface="Calibri" pitchFamily="34" charset="-120"/>
+              </a:rPr>
+              <a:t>Trace it: one written sentence predicting what your cell does before you run it. (Competency 1.)</a:t>
+            </a:r>
+            <a:endParaRPr lang="en-US" sz="1400" dirty="0"/>
+          </a:p>
+        </p:txBody>
+      </p:sp>
+    </p:spTree>
+  </p:cSld>
+  <p:clrMapOvr>
+    <a:masterClrMapping/>
+  </p:clrMapOvr>
+</p:sld>
+</file>
+
+<file path=ppt/slides/slide12.xml><?xml version="1.0" encoding="utf-8"?>
+<p:sld xmlns:a="http://schemas.openxmlformats.org/drawingml/2006/main" xmlns:r="http://schemas.openxmlformats.org/officeDocument/2006/relationships" xmlns:p="http://schemas.openxmlformats.org/presentationml/2006/main">
+  <p:cSld name="Slide 12">
+    <p:bg>
+      <p:bgPr>
+        <a:solidFill>
+          <a:srgbClr val="FFFFFF"/>
+        </a:solidFill>
+      </p:bgPr>
+    </p:bg>
+    <p:spTree>
+      <p:nvGrpSpPr>
+        <p:cNvPr id="1" name=""/>
+        <p:cNvGrpSpPr/>
+        <p:nvPr/>
+      </p:nvGrpSpPr>
+      <p:grpSpPr>
+        <a:xfrm>
+          <a:off x="0" y="0"/>
+          <a:ext cx="0" cy="0"/>
+          <a:chOff x="0" y="0"/>
+          <a:chExt cx="0" cy="0"/>
+        </a:xfrm>
+      </p:grpSpPr>
+      <p:sp>
+        <p:nvSpPr>
+          <p:cNvPr id="2" name="Text 0"/>
+          <p:cNvSpPr/>
+          <p:nvPr/>
+        </p:nvSpPr>
+        <p:spPr>
+          <a:xfrm>
+            <a:off x="640080" y="640080"/>
+            <a:ext cx="10058400" cy="320040"/>
+          </a:xfrm>
+          <a:prstGeom prst="rect">
+            <a:avLst/>
+          </a:prstGeom>
+          <a:noFill/>
+          <a:ln/>
+        </p:spPr>
+        <p:txBody>
+          <a:bodyPr wrap="square" rtlCol="0" anchor="ctr"/>
+          <a:lstStyle/>
+          <a:p>
+            <a:pPr indent="0" marL="0">
+              <a:buNone/>
+            </a:pPr>
+            <a:r>
+              <a:rPr lang="en-US" sz="1300" b="1" spc="300" kern="0" dirty="0">
+                <a:solidFill>
+                  <a:srgbClr val="7A3B2E"/>
+                </a:solidFill>
+                <a:latin typeface="Calibri" pitchFamily="34" charset="0"/>
+                <a:ea typeface="Calibri" pitchFamily="34" charset="-122"/>
+                <a:cs typeface="Calibri" pitchFamily="34" charset="-120"/>
+              </a:rPr>
+              <a:t>HOW THIS WEEK CONNECTS</a:t>
+            </a:r>
+            <a:endParaRPr lang="en-US" sz="1300" dirty="0"/>
+          </a:p>
+        </p:txBody>
+      </p:sp>
+      <p:sp>
+        <p:nvSpPr>
+          <p:cNvPr id="3" name="Text 1"/>
+          <p:cNvSpPr/>
+          <p:nvPr/>
+        </p:nvSpPr>
+        <p:spPr>
+          <a:xfrm>
+            <a:off x="640080" y="987552"/>
+            <a:ext cx="10058400" cy="640080"/>
+          </a:xfrm>
+          <a:prstGeom prst="rect">
+            <a:avLst/>
+          </a:prstGeom>
+          <a:noFill/>
+          <a:ln/>
+        </p:spPr>
+        <p:txBody>
+          <a:bodyPr wrap="square" rtlCol="0" anchor="ctr"/>
+          <a:lstStyle/>
+          <a:p>
+            <a:pPr indent="0" marL="0">
+              <a:buNone/>
+            </a:pPr>
+            <a:r>
+              <a:rPr lang="en-US" sz="2800" b="1" dirty="0">
+                <a:solidFill>
+                  <a:srgbClr val="1A1A1A"/>
+                </a:solidFill>
+                <a:latin typeface="Cambria" pitchFamily="34" charset="0"/>
+                <a:ea typeface="Cambria" pitchFamily="34" charset="-122"/>
+                <a:cs typeface="Cambria" pitchFamily="34" charset="-120"/>
+              </a:rPr>
+              <a:t>The course's through-lines</a:t>
+            </a:r>
+            <a:endParaRPr lang="en-US" sz="2800" dirty="0"/>
+          </a:p>
+        </p:txBody>
+      </p:sp>
+      <p:sp>
+        <p:nvSpPr>
+          <p:cNvPr id="4" name="Shape 2"/>
+          <p:cNvSpPr/>
+          <p:nvPr/>
+        </p:nvSpPr>
+        <p:spPr>
+          <a:xfrm>
+            <a:off x="640080" y="2057400"/>
+            <a:ext cx="457200" cy="457200"/>
+          </a:xfrm>
+          <a:prstGeom prst="roundRect">
+            <a:avLst>
+              <a:gd name="adj" fmla="val 16000"/>
+            </a:avLst>
+          </a:prstGeom>
+          <a:solidFill>
+            <a:srgbClr val="7A3B2E"/>
+          </a:solidFill>
+          <a:ln/>
+        </p:spPr>
+      </p:sp>
+      <p:sp>
+        <p:nvSpPr>
+          <p:cNvPr id="5" name="Text 3"/>
+          <p:cNvSpPr/>
+          <p:nvPr/>
+        </p:nvSpPr>
+        <p:spPr>
+          <a:xfrm>
+            <a:off x="640080" y="2057400"/>
+            <a:ext cx="457200" cy="457200"/>
+          </a:xfrm>
+          <a:prstGeom prst="rect">
+            <a:avLst/>
+          </a:prstGeom>
+          <a:noFill/>
+          <a:ln/>
+        </p:spPr>
+        <p:txBody>
+          <a:bodyPr wrap="square" rtlCol="0" anchor="ctr"/>
+          <a:lstStyle/>
+          <a:p>
+            <a:pPr algn="ctr" indent="0" marL="0">
+              <a:buNone/>
+            </a:pPr>
+            <a:r>
+              <a:rPr lang="en-US" sz="2000" b="1" dirty="0">
+                <a:solidFill>
+                  <a:srgbClr val="FFFFFF"/>
+                </a:solidFill>
+                <a:latin typeface="Cambria" pitchFamily="34" charset="0"/>
+                <a:ea typeface="Cambria" pitchFamily="34" charset="-122"/>
+                <a:cs typeface="Cambria" pitchFamily="34" charset="-120"/>
+              </a:rPr>
+              <a:t>1</a:t>
+            </a:r>
+            <a:endParaRPr lang="en-US" sz="2000" dirty="0"/>
+          </a:p>
+        </p:txBody>
+      </p:sp>
+      <p:sp>
+        <p:nvSpPr>
+          <p:cNvPr id="6" name="Text 4"/>
+          <p:cNvSpPr/>
+          <p:nvPr/>
+        </p:nvSpPr>
+        <p:spPr>
+          <a:xfrm>
+            <a:off x="1371600" y="2020824"/>
+            <a:ext cx="10332720" cy="411480"/>
+          </a:xfrm>
+          <a:prstGeom prst="rect">
+            <a:avLst/>
+          </a:prstGeom>
+          <a:noFill/>
+          <a:ln/>
+        </p:spPr>
+        <p:txBody>
+          <a:bodyPr wrap="square" rtlCol="0" anchor="ctr"/>
+          <a:lstStyle/>
+          <a:p>
+            <a:pPr indent="0" marL="0">
+              <a:buNone/>
+            </a:pPr>
+            <a:r>
+              <a:rPr lang="en-US" sz="1900" b="1" dirty="0">
+                <a:solidFill>
+                  <a:srgbClr val="7A3B2E"/>
+                </a:solidFill>
+                <a:latin typeface="Cambria" pitchFamily="34" charset="0"/>
+                <a:ea typeface="Cambria" pitchFamily="34" charset="-122"/>
+                <a:cs typeface="Cambria" pitchFamily="34" charset="-120"/>
+              </a:rPr>
+              <a:t>Read work critically</a:t>
+            </a:r>
+            <a:endParaRPr lang="en-US" sz="1900" dirty="0"/>
+          </a:p>
+        </p:txBody>
+      </p:sp>
+      <p:sp>
+        <p:nvSpPr>
+          <p:cNvPr id="7" name="Text 5"/>
+          <p:cNvSpPr/>
+          <p:nvPr/>
+        </p:nvSpPr>
+        <p:spPr>
+          <a:xfrm>
+            <a:off x="1371600" y="2441448"/>
+            <a:ext cx="10332720" cy="914400"/>
+          </a:xfrm>
+          <a:prstGeom prst="rect">
+            <a:avLst/>
+          </a:prstGeom>
+          <a:noFill/>
+          <a:ln/>
+        </p:spPr>
+        <p:txBody>
+          <a:bodyPr wrap="square" rtlCol="0" anchor="t">
+            <a:spAutoFit/>
+          </a:bodyPr>
+          <a:lstStyle/>
+          <a:p>
+            <a:pPr indent="0" marL="0">
+              <a:lnSpc>
+                <a:spcPct val="112000"/>
+              </a:lnSpc>
+              <a:buNone/>
+            </a:pPr>
+            <a:r>
+              <a:rPr lang="en-US" sz="1450" dirty="0">
+                <a:solidFill>
+                  <a:srgbClr val="1A1A1A"/>
+                </a:solidFill>
+                <a:latin typeface="Calibri" pitchFamily="34" charset="0"/>
+                <a:ea typeface="Calibri" pitchFamily="34" charset="-122"/>
+                <a:cs typeface="Calibri" pitchFamily="34" charset="-120"/>
+              </a:rPr>
+              <a:t>She Giggles, He Gallops is great and its choices are arguable. We admire and interrogate at once, the habit the whole course turns on.</a:t>
+            </a:r>
+            <a:endParaRPr lang="en-US" sz="1450" dirty="0"/>
+          </a:p>
+        </p:txBody>
+      </p:sp>
+      <p:sp>
+        <p:nvSpPr>
+          <p:cNvPr id="8" name="Shape 6"/>
+          <p:cNvSpPr/>
+          <p:nvPr/>
+        </p:nvSpPr>
+        <p:spPr>
+          <a:xfrm>
+            <a:off x="640080" y="3520440"/>
+            <a:ext cx="457200" cy="457200"/>
+          </a:xfrm>
+          <a:prstGeom prst="roundRect">
+            <a:avLst>
+              <a:gd name="adj" fmla="val 16000"/>
+            </a:avLst>
+          </a:prstGeom>
+          <a:solidFill>
+            <a:srgbClr val="3F6F5F"/>
+          </a:solidFill>
+          <a:ln/>
+        </p:spPr>
+      </p:sp>
+      <p:sp>
+        <p:nvSpPr>
+          <p:cNvPr id="9" name="Text 7"/>
+          <p:cNvSpPr/>
+          <p:nvPr/>
+        </p:nvSpPr>
+        <p:spPr>
+          <a:xfrm>
+            <a:off x="640080" y="3520440"/>
+            <a:ext cx="457200" cy="457200"/>
+          </a:xfrm>
+          <a:prstGeom prst="rect">
+            <a:avLst/>
+          </a:prstGeom>
+          <a:noFill/>
+          <a:ln/>
+        </p:spPr>
+        <p:txBody>
+          <a:bodyPr wrap="square" rtlCol="0" anchor="ctr"/>
+          <a:lstStyle/>
+          <a:p>
+            <a:pPr algn="ctr" indent="0" marL="0">
+              <a:buNone/>
+            </a:pPr>
+            <a:r>
+              <a:rPr lang="en-US" sz="2000" b="1" dirty="0">
+                <a:solidFill>
+                  <a:srgbClr val="FFFFFF"/>
+                </a:solidFill>
+                <a:latin typeface="Cambria" pitchFamily="34" charset="0"/>
+                <a:ea typeface="Cambria" pitchFamily="34" charset="-122"/>
+                <a:cs typeface="Cambria" pitchFamily="34" charset="-120"/>
+              </a:rPr>
+              <a:t>2</a:t>
+            </a:r>
+            <a:endParaRPr lang="en-US" sz="2000" dirty="0"/>
+          </a:p>
+        </p:txBody>
+      </p:sp>
+      <p:sp>
+        <p:nvSpPr>
+          <p:cNvPr id="10" name="Text 8"/>
+          <p:cNvSpPr/>
+          <p:nvPr/>
+        </p:nvSpPr>
+        <p:spPr>
+          <a:xfrm>
+            <a:off x="1371600" y="3483864"/>
+            <a:ext cx="10332720" cy="411480"/>
+          </a:xfrm>
+          <a:prstGeom prst="rect">
+            <a:avLst/>
+          </a:prstGeom>
+          <a:noFill/>
+          <a:ln/>
+        </p:spPr>
+        <p:txBody>
+          <a:bodyPr wrap="square" rtlCol="0" anchor="ctr"/>
+          <a:lstStyle/>
+          <a:p>
+            <a:pPr indent="0" marL="0">
+              <a:buNone/>
+            </a:pPr>
+            <a:r>
+              <a:rPr lang="en-US" sz="1900" b="1" dirty="0">
+                <a:solidFill>
+                  <a:srgbClr val="3F6F5F"/>
+                </a:solidFill>
+                <a:latin typeface="Cambria" pitchFamily="34" charset="0"/>
+                <a:ea typeface="Cambria" pitchFamily="34" charset="-122"/>
+                <a:cs typeface="Cambria" pitchFamily="34" charset="-120"/>
+              </a:rPr>
+              <a:t>Make something real</a:t>
+            </a:r>
+            <a:endParaRPr lang="en-US" sz="1900" dirty="0"/>
+          </a:p>
+        </p:txBody>
+      </p:sp>
+      <p:sp>
+        <p:nvSpPr>
+          <p:cNvPr id="11" name="Text 9"/>
+          <p:cNvSpPr/>
+          <p:nvPr/>
+        </p:nvSpPr>
+        <p:spPr>
+          <a:xfrm>
+            <a:off x="1371600" y="3904488"/>
+            <a:ext cx="10332720" cy="914400"/>
+          </a:xfrm>
+          <a:prstGeom prst="rect">
+            <a:avLst/>
+          </a:prstGeom>
+          <a:noFill/>
+          <a:ln/>
+        </p:spPr>
+        <p:txBody>
+          <a:bodyPr wrap="square" rtlCol="0" anchor="t">
+            <a:spAutoFit/>
+          </a:bodyPr>
+          <a:lstStyle/>
+          <a:p>
+            <a:pPr indent="0" marL="0">
+              <a:lnSpc>
+                <a:spcPct val="112000"/>
+              </a:lnSpc>
+              <a:buNone/>
+            </a:pPr>
+            <a:r>
+              <a:rPr lang="en-US" sz="1450" dirty="0">
+                <a:solidFill>
+                  <a:srgbClr val="1A1A1A"/>
+                </a:solidFill>
+                <a:latin typeface="Calibri" pitchFamily="34" charset="0"/>
+                <a:ea typeface="Calibri" pitchFamily="34" charset="-122"/>
+                <a:cs typeface="Calibri" pitchFamily="34" charset="-120"/>
+              </a:rPr>
+              <a:t>A complete investigation by the first break, before any theory.</a:t>
+            </a:r>
+            <a:endParaRPr lang="en-US" sz="1450" dirty="0"/>
+          </a:p>
+        </p:txBody>
+      </p:sp>
+      <p:sp>
+        <p:nvSpPr>
+          <p:cNvPr id="12" name="Shape 10"/>
+          <p:cNvSpPr/>
+          <p:nvPr/>
+        </p:nvSpPr>
+        <p:spPr>
+          <a:xfrm>
+            <a:off x="640080" y="4983480"/>
+            <a:ext cx="457200" cy="457200"/>
+          </a:xfrm>
+          <a:prstGeom prst="roundRect">
+            <a:avLst>
+              <a:gd name="adj" fmla="val 16000"/>
+            </a:avLst>
+          </a:prstGeom>
+          <a:solidFill>
+            <a:srgbClr val="B9852F"/>
+          </a:solidFill>
+          <a:ln/>
+        </p:spPr>
+      </p:sp>
+      <p:sp>
+        <p:nvSpPr>
+          <p:cNvPr id="13" name="Text 11"/>
+          <p:cNvSpPr/>
+          <p:nvPr/>
+        </p:nvSpPr>
+        <p:spPr>
+          <a:xfrm>
+            <a:off x="640080" y="4983480"/>
+            <a:ext cx="457200" cy="457200"/>
+          </a:xfrm>
+          <a:prstGeom prst="rect">
+            <a:avLst/>
+          </a:prstGeom>
+          <a:noFill/>
+          <a:ln/>
+        </p:spPr>
+        <p:txBody>
+          <a:bodyPr wrap="square" rtlCol="0" anchor="ctr"/>
+          <a:lstStyle/>
+          <a:p>
+            <a:pPr algn="ctr" indent="0" marL="0">
+              <a:buNone/>
+            </a:pPr>
+            <a:r>
+              <a:rPr lang="en-US" sz="2000" b="1" dirty="0">
+                <a:solidFill>
+                  <a:srgbClr val="FFFFFF"/>
+                </a:solidFill>
+                <a:latin typeface="Cambria" pitchFamily="34" charset="0"/>
+                <a:ea typeface="Cambria" pitchFamily="34" charset="-122"/>
+                <a:cs typeface="Cambria" pitchFamily="34" charset="-120"/>
+              </a:rPr>
+              <a:t>3</a:t>
+            </a:r>
+            <a:endParaRPr lang="en-US" sz="2000" dirty="0"/>
+          </a:p>
+        </p:txBody>
+      </p:sp>
+      <p:sp>
+        <p:nvSpPr>
+          <p:cNvPr id="14" name="Text 12"/>
+          <p:cNvSpPr/>
+          <p:nvPr/>
+        </p:nvSpPr>
+        <p:spPr>
+          <a:xfrm>
+            <a:off x="1371600" y="4946904"/>
+            <a:ext cx="10332720" cy="411480"/>
+          </a:xfrm>
+          <a:prstGeom prst="rect">
+            <a:avLst/>
+          </a:prstGeom>
+          <a:noFill/>
+          <a:ln/>
+        </p:spPr>
+        <p:txBody>
+          <a:bodyPr wrap="square" rtlCol="0" anchor="ctr"/>
+          <a:lstStyle/>
+          <a:p>
+            <a:pPr indent="0" marL="0">
+              <a:buNone/>
+            </a:pPr>
+            <a:r>
+              <a:rPr lang="en-US" sz="1900" b="1" dirty="0">
+                <a:solidFill>
+                  <a:srgbClr val="B9852F"/>
+                </a:solidFill>
+                <a:latin typeface="Cambria" pitchFamily="34" charset="0"/>
+                <a:ea typeface="Cambria" pitchFamily="34" charset="-122"/>
+                <a:cs typeface="Cambria" pitchFamily="34" charset="-120"/>
+              </a:rPr>
+              <a:t>Images are culture too</a:t>
+            </a:r>
+            <a:endParaRPr lang="en-US" sz="1900" dirty="0"/>
+          </a:p>
+        </p:txBody>
+      </p:sp>
+      <p:sp>
+        <p:nvSpPr>
+          <p:cNvPr id="15" name="Text 13"/>
+          <p:cNvSpPr/>
+          <p:nvPr/>
+        </p:nvSpPr>
+        <p:spPr>
+          <a:xfrm>
+            <a:off x="1371600" y="5367528"/>
+            <a:ext cx="10332720" cy="914400"/>
+          </a:xfrm>
+          <a:prstGeom prst="rect">
+            <a:avLst/>
+          </a:prstGeom>
+          <a:noFill/>
+          <a:ln/>
+        </p:spPr>
+        <p:txBody>
+          <a:bodyPr wrap="square" rtlCol="0" anchor="t">
+            <a:spAutoFit/>
+          </a:bodyPr>
+          <a:lstStyle/>
+          <a:p>
+            <a:pPr indent="0" marL="0">
+              <a:lnSpc>
+                <a:spcPct val="112000"/>
+              </a:lnSpc>
+              <a:buNone/>
+            </a:pPr>
+            <a:r>
+              <a:rPr lang="en-US" sz="1450" dirty="0">
+                <a:solidFill>
+                  <a:srgbClr val="1A1A1A"/>
+                </a:solidFill>
+                <a:latin typeface="Calibri" pitchFamily="34" charset="0"/>
+                <a:ea typeface="Calibri" pitchFamily="34" charset="-122"/>
+                <a:cs typeface="Calibri" pitchFamily="34" charset="-120"/>
+              </a:rPr>
+              <a:t>A picture is numbers: you counted pixels on day one, and images ride along as a co-equal corpus all ten weeks.</a:t>
+            </a:r>
+            <a:endParaRPr lang="en-US" sz="1450" dirty="0"/>
+          </a:p>
+        </p:txBody>
+      </p:sp>
+    </p:spTree>
+  </p:cSld>
+  <p:clrMapOvr>
+    <a:masterClrMapping/>
+  </p:clrMapOvr>
+</p:sld>
+</file>
+
+<file path=ppt/slides/slide13.xml><?xml version="1.0" encoding="utf-8"?>
+<p:sld xmlns:a="http://schemas.openxmlformats.org/drawingml/2006/main" xmlns:r="http://schemas.openxmlformats.org/officeDocument/2006/relationships" xmlns:p="http://schemas.openxmlformats.org/presentationml/2006/main">
+  <p:cSld name="Slide 13">
+    <p:bg>
+      <p:bgPr>
+        <a:solidFill>
+          <a:srgbClr val="4E261D"/>
+        </a:solidFill>
+      </p:bgPr>
+    </p:bg>
+    <p:spTree>
+      <p:nvGrpSpPr>
+        <p:cNvPr id="1" name=""/>
+        <p:cNvGrpSpPr/>
+        <p:nvPr/>
+      </p:nvGrpSpPr>
+      <p:grpSpPr>
+        <a:xfrm>
+          <a:off x="0" y="0"/>
+          <a:ext cx="0" cy="0"/>
+          <a:chOff x="0" y="0"/>
+          <a:chExt cx="0" cy="0"/>
+        </a:xfrm>
+      </p:grpSpPr>
+      <p:sp>
+        <p:nvSpPr>
+          <p:cNvPr id="2" name="Text 0"/>
+          <p:cNvSpPr/>
+          <p:nvPr/>
+        </p:nvSpPr>
+        <p:spPr>
+          <a:xfrm>
+            <a:off x="640080" y="1005840"/>
+            <a:ext cx="8229600" cy="320040"/>
+          </a:xfrm>
+          <a:prstGeom prst="rect">
+            <a:avLst/>
+          </a:prstGeom>
+          <a:noFill/>
+          <a:ln/>
+        </p:spPr>
+        <p:txBody>
+          <a:bodyPr wrap="square" rtlCol="0" anchor="ctr"/>
+          <a:lstStyle/>
+          <a:p>
+            <a:pPr indent="0" marL="0">
+              <a:buNone/>
+            </a:pPr>
+            <a:r>
+              <a:rPr lang="en-US" sz="1300" b="1" spc="300" kern="0" dirty="0">
+                <a:solidFill>
+                  <a:srgbClr val="B9852F"/>
+                </a:solidFill>
+                <a:latin typeface="Calibri" pitchFamily="34" charset="0"/>
+                <a:ea typeface="Calibri" pitchFamily="34" charset="-122"/>
+                <a:cs typeface="Calibri" pitchFamily="34" charset="-120"/>
+              </a:rPr>
+              <a:t>THE CHECK, AI CLOSED</a:t>
+            </a:r>
+            <a:endParaRPr lang="en-US" sz="1300" dirty="0"/>
+          </a:p>
+        </p:txBody>
+      </p:sp>
+      <p:sp>
+        <p:nvSpPr>
+          <p:cNvPr id="3" name="Text 1"/>
+          <p:cNvSpPr/>
+          <p:nvPr/>
+        </p:nvSpPr>
+        <p:spPr>
+          <a:xfrm>
+            <a:off x="640080" y="1645920"/>
+            <a:ext cx="8686800" cy="3108960"/>
+          </a:xfrm>
+          <a:prstGeom prst="rect">
+            <a:avLst/>
+          </a:prstGeom>
+          <a:noFill/>
+          <a:ln/>
+        </p:spPr>
+        <p:txBody>
+          <a:bodyPr wrap="square" rtlCol="0" anchor="t">
+            <a:spAutoFit/>
+          </a:bodyPr>
+          <a:lstStyle/>
+          <a:p>
+            <a:pPr indent="0" marL="0">
+              <a:lnSpc>
+                <a:spcPct val="115000"/>
+              </a:lnSpc>
+              <a:buNone/>
+            </a:pPr>
+            <a:r>
+              <a:rPr lang="en-US" sz="2600" dirty="0">
+                <a:solidFill>
+                  <a:srgbClr val="FFFFFF"/>
+                </a:solidFill>
+                <a:latin typeface="Cambria" pitchFamily="34" charset="0"/>
+                <a:ea typeface="Cambria" pitchFamily="34" charset="-122"/>
+                <a:cs typeface="Cambria" pitchFamily="34" charset="-120"/>
+              </a:rPr>
+              <a:t>Trace it: one written sentence predicting what your cell does before you run it. (Competency 1.)</a:t>
+            </a:r>
+            <a:endParaRPr lang="en-US" sz="2600" dirty="0"/>
+          </a:p>
+        </p:txBody>
+      </p:sp>
+      <p:sp>
+        <p:nvSpPr>
+          <p:cNvPr id="4" name="Text 2"/>
+          <p:cNvSpPr/>
+          <p:nvPr/>
+        </p:nvSpPr>
+        <p:spPr>
+          <a:xfrm>
+            <a:off x="640080" y="6126480"/>
+            <a:ext cx="7315200" cy="365760"/>
+          </a:xfrm>
+          <a:prstGeom prst="rect">
+            <a:avLst/>
+          </a:prstGeom>
+          <a:noFill/>
+          <a:ln/>
+        </p:spPr>
+        <p:txBody>
+          <a:bodyPr wrap="square" rtlCol="0" anchor="ctr"/>
+          <a:lstStyle/>
+          <a:p>
+            <a:pPr indent="0" marL="0">
+              <a:buNone/>
+            </a:pPr>
+            <a:r>
+              <a:rPr lang="en-US" sz="1200" dirty="0">
+                <a:solidFill>
+                  <a:srgbClr val="E8DCD6"/>
+                </a:solidFill>
+                <a:latin typeface="Calibri" pitchFamily="34" charset="0"/>
+                <a:ea typeface="Calibri" pitchFamily="34" charset="-122"/>
+                <a:cs typeface="Calibri" pitchFamily="34" charset="-120"/>
+              </a:rPr>
+              <a:t>Culture as Data  ·  Week 1</a:t>
+            </a:r>
+            <a:endParaRPr lang="en-US" sz="1200" dirty="0"/>
+          </a:p>
+        </p:txBody>
+      </p:sp>
+      <p:sp>
+        <p:nvSpPr>
+          <p:cNvPr id="5" name="Shape 3"/>
+          <p:cNvSpPr/>
+          <p:nvPr/>
+        </p:nvSpPr>
+        <p:spPr>
+          <a:xfrm>
+            <a:off x="11006176" y="4841304"/>
+            <a:ext cx="70992" cy="70992"/>
+          </a:xfrm>
+          <a:prstGeom prst="ellipse">
+            <a:avLst/>
+          </a:prstGeom>
+          <a:solidFill>
+            <a:srgbClr val="7A3B2E"/>
+          </a:solidFill>
+          <a:ln/>
+        </p:spPr>
+      </p:sp>
+      <p:sp>
+        <p:nvSpPr>
+          <p:cNvPr id="6" name="Shape 4"/>
+          <p:cNvSpPr/>
+          <p:nvPr/>
+        </p:nvSpPr>
+        <p:spPr>
+          <a:xfrm>
+            <a:off x="10333730" y="5139734"/>
+            <a:ext cx="51926" cy="51926"/>
+          </a:xfrm>
+          <a:prstGeom prst="ellipse">
+            <a:avLst/>
+          </a:prstGeom>
+          <a:solidFill>
+            <a:srgbClr val="3F6F5F"/>
+          </a:solidFill>
+          <a:ln/>
+        </p:spPr>
+      </p:sp>
+      <p:sp>
+        <p:nvSpPr>
+          <p:cNvPr id="7" name="Shape 5"/>
+          <p:cNvSpPr/>
+          <p:nvPr/>
+        </p:nvSpPr>
+        <p:spPr>
+          <a:xfrm>
+            <a:off x="9655357" y="4517202"/>
+            <a:ext cx="66260" cy="66260"/>
+          </a:xfrm>
+          <a:prstGeom prst="ellipse">
+            <a:avLst/>
+          </a:prstGeom>
+          <a:solidFill>
+            <a:srgbClr val="B9852F"/>
+          </a:solidFill>
+          <a:ln/>
+        </p:spPr>
+      </p:sp>
+      <p:sp>
+        <p:nvSpPr>
+          <p:cNvPr id="8" name="Shape 6"/>
+          <p:cNvSpPr/>
+          <p:nvPr/>
+        </p:nvSpPr>
+        <p:spPr>
+          <a:xfrm>
+            <a:off x="10037857" y="5434969"/>
+            <a:ext cx="81992" cy="81992"/>
+          </a:xfrm>
+          <a:prstGeom prst="ellipse">
+            <a:avLst/>
+          </a:prstGeom>
+          <a:solidFill>
+            <a:srgbClr val="7A3B2E"/>
+          </a:solidFill>
+          <a:ln/>
+        </p:spPr>
+      </p:sp>
+      <p:sp>
+        <p:nvSpPr>
+          <p:cNvPr id="9" name="Shape 7"/>
+          <p:cNvSpPr/>
+          <p:nvPr/>
+        </p:nvSpPr>
+        <p:spPr>
+          <a:xfrm>
+            <a:off x="9987711" y="5142214"/>
+            <a:ext cx="67117" cy="67117"/>
+          </a:xfrm>
+          <a:prstGeom prst="ellipse">
+            <a:avLst/>
+          </a:prstGeom>
+          <a:solidFill>
+            <a:srgbClr val="3F6F5F"/>
+          </a:solidFill>
+          <a:ln/>
+        </p:spPr>
+      </p:sp>
+      <p:sp>
+        <p:nvSpPr>
+          <p:cNvPr id="10" name="Shape 8"/>
+          <p:cNvSpPr/>
+          <p:nvPr/>
+        </p:nvSpPr>
+        <p:spPr>
+          <a:xfrm>
+            <a:off x="10571718" y="6100197"/>
+            <a:ext cx="99359" cy="99359"/>
+          </a:xfrm>
+          <a:prstGeom prst="ellipse">
+            <a:avLst/>
+          </a:prstGeom>
+          <a:solidFill>
+            <a:srgbClr val="B9852F"/>
+          </a:solidFill>
+          <a:ln/>
+        </p:spPr>
+      </p:sp>
+      <p:sp>
+        <p:nvSpPr>
+          <p:cNvPr id="11" name="Shape 9"/>
+          <p:cNvSpPr/>
+          <p:nvPr/>
+        </p:nvSpPr>
+        <p:spPr>
+          <a:xfrm>
+            <a:off x="10296359" y="5558099"/>
+            <a:ext cx="91849" cy="91849"/>
+          </a:xfrm>
+          <a:prstGeom prst="ellipse">
+            <a:avLst/>
+          </a:prstGeom>
+          <a:solidFill>
+            <a:srgbClr val="7A3B2E"/>
+          </a:solidFill>
+          <a:ln/>
+        </p:spPr>
+      </p:sp>
+      <p:sp>
+        <p:nvSpPr>
+          <p:cNvPr id="12" name="Shape 10"/>
+          <p:cNvSpPr/>
+          <p:nvPr/>
+        </p:nvSpPr>
+        <p:spPr>
+          <a:xfrm>
+            <a:off x="10228433" y="5977179"/>
+            <a:ext cx="67449" cy="67449"/>
+          </a:xfrm>
+          <a:prstGeom prst="ellipse">
+            <a:avLst/>
+          </a:prstGeom>
+          <a:solidFill>
+            <a:srgbClr val="3F6F5F"/>
+          </a:solidFill>
+          <a:ln/>
+        </p:spPr>
+      </p:sp>
+      <p:sp>
+        <p:nvSpPr>
+          <p:cNvPr id="13" name="Shape 11"/>
+          <p:cNvSpPr/>
+          <p:nvPr/>
+        </p:nvSpPr>
+        <p:spPr>
+          <a:xfrm>
+            <a:off x="11434740" y="4606617"/>
+            <a:ext cx="49018" cy="49018"/>
+          </a:xfrm>
+          <a:prstGeom prst="ellipse">
+            <a:avLst/>
+          </a:prstGeom>
+          <a:solidFill>
+            <a:srgbClr val="B9852F"/>
+          </a:solidFill>
+          <a:ln/>
+        </p:spPr>
+      </p:sp>
+      <p:sp>
+        <p:nvSpPr>
+          <p:cNvPr id="14" name="Shape 12"/>
+          <p:cNvSpPr/>
+          <p:nvPr/>
+        </p:nvSpPr>
+        <p:spPr>
+          <a:xfrm>
+            <a:off x="9861440" y="5645034"/>
+            <a:ext cx="59416" cy="59416"/>
+          </a:xfrm>
+          <a:prstGeom prst="ellipse">
+            <a:avLst/>
+          </a:prstGeom>
+          <a:solidFill>
+            <a:srgbClr val="7A3B2E"/>
+          </a:solidFill>
+          <a:ln/>
+        </p:spPr>
+      </p:sp>
+      <p:sp>
+        <p:nvSpPr>
+          <p:cNvPr id="15" name="Shape 13"/>
+          <p:cNvSpPr/>
+          <p:nvPr/>
+        </p:nvSpPr>
+        <p:spPr>
+          <a:xfrm>
+            <a:off x="9135654" y="4604249"/>
+            <a:ext cx="66639" cy="66639"/>
+          </a:xfrm>
+          <a:prstGeom prst="ellipse">
+            <a:avLst/>
+          </a:prstGeom>
+          <a:solidFill>
+            <a:srgbClr val="3F6F5F"/>
+          </a:solidFill>
+          <a:ln/>
+        </p:spPr>
+      </p:sp>
+      <p:sp>
+        <p:nvSpPr>
+          <p:cNvPr id="16" name="Shape 14"/>
+          <p:cNvSpPr/>
+          <p:nvPr/>
+        </p:nvSpPr>
+        <p:spPr>
+          <a:xfrm>
+            <a:off x="10324181" y="5682882"/>
+            <a:ext cx="93546" cy="93546"/>
+          </a:xfrm>
+          <a:prstGeom prst="ellipse">
+            <a:avLst/>
+          </a:prstGeom>
+          <a:solidFill>
+            <a:srgbClr val="B9852F"/>
+          </a:solidFill>
+          <a:ln/>
+        </p:spPr>
+      </p:sp>
+      <p:sp>
+        <p:nvSpPr>
+          <p:cNvPr id="17" name="Shape 15"/>
+          <p:cNvSpPr/>
+          <p:nvPr/>
+        </p:nvSpPr>
+        <p:spPr>
+          <a:xfrm>
+            <a:off x="9373182" y="6130114"/>
+            <a:ext cx="53271" cy="53271"/>
+          </a:xfrm>
+          <a:prstGeom prst="ellipse">
+            <a:avLst/>
+          </a:prstGeom>
+          <a:solidFill>
+            <a:srgbClr val="7A3B2E"/>
+          </a:solidFill>
+          <a:ln/>
+        </p:spPr>
+      </p:sp>
+      <p:sp>
+        <p:nvSpPr>
+          <p:cNvPr id="18" name="Shape 16"/>
+          <p:cNvSpPr/>
+          <p:nvPr/>
+        </p:nvSpPr>
+        <p:spPr>
+          <a:xfrm>
+            <a:off x="9909776" y="4932484"/>
+            <a:ext cx="78401" cy="78401"/>
+          </a:xfrm>
+          <a:prstGeom prst="ellipse">
+            <a:avLst/>
+          </a:prstGeom>
+          <a:solidFill>
+            <a:srgbClr val="3F6F5F"/>
+          </a:solidFill>
+          <a:ln/>
+        </p:spPr>
+      </p:sp>
+    </p:spTree>
+  </p:cSld>
+  <p:clrMapOvr>
+    <a:masterClrMapping/>
+  </p:clrMapOvr>
+</p:sld>
+</file>
+
 <file path=ppt/slides/slide2.xml><?xml version="1.0" encoding="utf-8"?>
 <p:sld xmlns:a="http://schemas.openxmlformats.org/drawingml/2006/main" xmlns:r="http://schemas.openxmlformats.org/officeDocument/2006/relationships" xmlns:p="http://schemas.openxmlformats.org/presentationml/2006/main">
   <p:cSld name="Slide 2">
@@ -2461,14 +5138,34 @@
       </p:grpSpPr>
       <p:sp>
         <p:nvSpPr>
-          <p:cNvPr id="2" name="Text 0"/>
-          <p:cNvSpPr/>
-          <p:nvPr/>
-        </p:nvSpPr>
-        <p:spPr>
-          <a:xfrm>
-            <a:off x="640080" y="731520"/>
-            <a:ext cx="10058400" cy="731520"/>
+          <p:cNvPr id="2" name="Shape 0"/>
+          <p:cNvSpPr/>
+          <p:nvPr/>
+        </p:nvSpPr>
+        <p:spPr>
+          <a:xfrm>
+            <a:off x="0" y="0"/>
+            <a:ext cx="164592" cy="6858000"/>
+          </a:xfrm>
+          <a:prstGeom prst="rect">
+            <a:avLst/>
+          </a:prstGeom>
+          <a:solidFill>
+            <a:srgbClr val="7A3B2E"/>
+          </a:solidFill>
+          <a:ln/>
+        </p:spPr>
+      </p:sp>
+      <p:sp>
+        <p:nvSpPr>
+          <p:cNvPr id="3" name="Text 1"/>
+          <p:cNvSpPr/>
+          <p:nvPr/>
+        </p:nvSpPr>
+        <p:spPr>
+          <a:xfrm>
+            <a:off x="640080" y="640080"/>
+            <a:ext cx="10058400" cy="320040"/>
           </a:xfrm>
           <a:prstGeom prst="rect">
             <a:avLst/>
@@ -2478,6 +5175,47 @@
         </p:spPr>
         <p:txBody>
           <a:bodyPr wrap="square" rtlCol="0" anchor="ctr"/>
+          <a:lstStyle/>
+          <a:p>
+            <a:pPr indent="0" marL="0">
+              <a:buNone/>
+            </a:pPr>
+            <a:r>
+              <a:rPr lang="en-US" sz="1200" b="1" spc="300" kern="0" dirty="0">
+                <a:solidFill>
+                  <a:srgbClr val="7A3B2E"/>
+                </a:solidFill>
+                <a:latin typeface="Calibri" pitchFamily="34" charset="0"/>
+                <a:ea typeface="Calibri" pitchFamily="34" charset="-122"/>
+                <a:cs typeface="Calibri" pitchFamily="34" charset="-120"/>
+              </a:rPr>
+              <a:t>WEEK 1 · THE MATERIAL</a:t>
+            </a:r>
+            <a:endParaRPr lang="en-US" sz="1200" dirty="0"/>
+          </a:p>
+        </p:txBody>
+      </p:sp>
+      <p:sp>
+        <p:nvSpPr>
+          <p:cNvPr id="4" name="Text 2"/>
+          <p:cNvSpPr/>
+          <p:nvPr/>
+        </p:nvSpPr>
+        <p:spPr>
+          <a:xfrm>
+            <a:off x="640080" y="1005840"/>
+            <a:ext cx="10881360" cy="914400"/>
+          </a:xfrm>
+          <a:prstGeom prst="rect">
+            <a:avLst/>
+          </a:prstGeom>
+          <a:noFill/>
+          <a:ln/>
+        </p:spPr>
+        <p:txBody>
+          <a:bodyPr wrap="square" rtlCol="0" anchor="t">
+            <a:spAutoFit/>
+          </a:bodyPr>
           <a:lstStyle/>
           <a:p>
             <a:pPr indent="0" marL="0">
@@ -2492,7 +5230,7 @@
                 <a:ea typeface="Cambria" pitchFamily="34" charset="-122"/>
                 <a:cs typeface="Cambria" pitchFamily="34" charset="-120"/>
               </a:rPr>
-              <a:t>Three modes today</a:t>
+              <a:t>Culture is already data</a:t>
             </a:r>
             <a:endParaRPr lang="en-US" sz="3000" dirty="0"/>
           </a:p>
@@ -2500,134 +5238,98 @@
       </p:sp>
       <p:sp>
         <p:nvSpPr>
-          <p:cNvPr id="3" name="Text 1"/>
-          <p:cNvSpPr/>
-          <p:nvPr/>
-        </p:nvSpPr>
-        <p:spPr>
-          <a:xfrm>
-            <a:off x="640080" y="1417320"/>
-            <a:ext cx="10058400" cy="365760"/>
-          </a:xfrm>
-          <a:prstGeom prst="rect">
-            <a:avLst/>
-          </a:prstGeom>
-          <a:noFill/>
-          <a:ln/>
-        </p:spPr>
-        <p:txBody>
-          <a:bodyPr wrap="square" rtlCol="0" anchor="ctr"/>
+          <p:cNvPr id="5" name="Shape 3"/>
+          <p:cNvSpPr/>
+          <p:nvPr/>
+        </p:nvSpPr>
+        <p:spPr>
+          <a:xfrm>
+            <a:off x="640080" y="2331720"/>
+            <a:ext cx="201168" cy="201168"/>
+          </a:xfrm>
+          <a:prstGeom prst="ellipse">
+            <a:avLst/>
+          </a:prstGeom>
+          <a:solidFill>
+            <a:srgbClr val="7A3B2E"/>
+          </a:solidFill>
+          <a:ln/>
+        </p:spPr>
+      </p:sp>
+      <p:sp>
+        <p:nvSpPr>
+          <p:cNvPr id="6" name="Text 4"/>
+          <p:cNvSpPr/>
+          <p:nvPr/>
+        </p:nvSpPr>
+        <p:spPr>
+          <a:xfrm>
+            <a:off x="1097280" y="2240280"/>
+            <a:ext cx="10607040" cy="1017270"/>
+          </a:xfrm>
+          <a:prstGeom prst="rect">
+            <a:avLst/>
+          </a:prstGeom>
+          <a:noFill/>
+          <a:ln/>
+        </p:spPr>
+        <p:txBody>
+          <a:bodyPr wrap="square" rtlCol="0" anchor="t">
+            <a:spAutoFit/>
+          </a:bodyPr>
           <a:lstStyle/>
           <a:p>
             <a:pPr indent="0" marL="0">
-              <a:buNone/>
-            </a:pPr>
-            <a:r>
-              <a:rPr lang="en-US" sz="1400" i="1" dirty="0">
-                <a:solidFill>
-                  <a:srgbClr val="6B6B63"/>
+              <a:lnSpc>
+                <a:spcPct val="112000"/>
+              </a:lnSpc>
+              <a:buNone/>
+            </a:pPr>
+            <a:r>
+              <a:rPr lang="en-US" sz="1650" dirty="0">
+                <a:solidFill>
+                  <a:srgbClr val="1A1A1A"/>
                 </a:solidFill>
                 <a:latin typeface="Calibri" pitchFamily="34" charset="0"/>
                 <a:ea typeface="Calibri" pitchFamily="34" charset="-122"/>
                 <a:cs typeface="Calibri" pitchFamily="34" charset="-120"/>
               </a:rPr>
-              <a:t>about a third of the session each</a:t>
-            </a:r>
-            <a:endParaRPr lang="en-US" sz="1400" dirty="0"/>
-          </a:p>
-        </p:txBody>
-      </p:sp>
-      <p:sp>
-        <p:nvSpPr>
-          <p:cNvPr id="4" name="Shape 2"/>
-          <p:cNvSpPr/>
-          <p:nvPr/>
-        </p:nvSpPr>
-        <p:spPr>
-          <a:xfrm>
-            <a:off x="640080" y="2194560"/>
-            <a:ext cx="3383280" cy="3291840"/>
-          </a:xfrm>
-          <a:prstGeom prst="roundRect">
-            <a:avLst>
-              <a:gd name="adj" fmla="val 3333"/>
-            </a:avLst>
-          </a:prstGeom>
-          <a:solidFill>
-            <a:srgbClr val="F4EEE8"/>
-          </a:solidFill>
-          <a:ln/>
-        </p:spPr>
-      </p:sp>
-      <p:sp>
-        <p:nvSpPr>
-          <p:cNvPr id="5" name="Shape 3"/>
-          <p:cNvSpPr/>
-          <p:nvPr/>
-        </p:nvSpPr>
-        <p:spPr>
-          <a:xfrm>
-            <a:off x="1051560" y="2606040"/>
-            <a:ext cx="548640" cy="548640"/>
+              <a:t>Spotify counts your listening; the For You feed is a model reading culture at scale; you are on the receiving end every day.</a:t>
+            </a:r>
+            <a:endParaRPr lang="en-US" sz="1650" dirty="0"/>
+          </a:p>
+        </p:txBody>
+      </p:sp>
+      <p:sp>
+        <p:nvSpPr>
+          <p:cNvPr id="7" name="Shape 5"/>
+          <p:cNvSpPr/>
+          <p:nvPr/>
+        </p:nvSpPr>
+        <p:spPr>
+          <a:xfrm>
+            <a:off x="640080" y="3348990"/>
+            <a:ext cx="201168" cy="201168"/>
           </a:xfrm>
           <a:prstGeom prst="ellipse">
             <a:avLst/>
           </a:prstGeom>
           <a:solidFill>
-            <a:srgbClr val="7A3B2E"/>
-          </a:solidFill>
-          <a:ln/>
-        </p:spPr>
-      </p:sp>
-      <p:sp>
-        <p:nvSpPr>
-          <p:cNvPr id="6" name="Text 4"/>
-          <p:cNvSpPr/>
-          <p:nvPr/>
-        </p:nvSpPr>
-        <p:spPr>
-          <a:xfrm>
-            <a:off x="1005840" y="3383280"/>
-            <a:ext cx="2651760" cy="548640"/>
-          </a:xfrm>
-          <a:prstGeom prst="rect">
-            <a:avLst/>
-          </a:prstGeom>
-          <a:noFill/>
-          <a:ln/>
-        </p:spPr>
-        <p:txBody>
-          <a:bodyPr wrap="square" rtlCol="0" anchor="ctr"/>
-          <a:lstStyle/>
-          <a:p>
-            <a:pPr indent="0" marL="0">
-              <a:buNone/>
-            </a:pPr>
-            <a:r>
-              <a:rPr lang="en-US" sz="2100" b="1" dirty="0">
-                <a:solidFill>
-                  <a:srgbClr val="1A1A1A"/>
-                </a:solidFill>
-                <a:latin typeface="Cambria" pitchFamily="34" charset="0"/>
-                <a:ea typeface="Cambria" pitchFamily="34" charset="-122"/>
-                <a:cs typeface="Cambria" pitchFamily="34" charset="-120"/>
-              </a:rPr>
-              <a:t>Lecture / demo</a:t>
-            </a:r>
-            <a:endParaRPr lang="en-US" sz="2100" dirty="0"/>
-          </a:p>
-        </p:txBody>
-      </p:sp>
-      <p:sp>
-        <p:nvSpPr>
-          <p:cNvPr id="7" name="Text 5"/>
-          <p:cNvSpPr/>
-          <p:nvPr/>
-        </p:nvSpPr>
-        <p:spPr>
-          <a:xfrm>
-            <a:off x="1005840" y="3977640"/>
-            <a:ext cx="2651760" cy="1371600"/>
+            <a:srgbClr val="3F6F5F"/>
+          </a:solidFill>
+          <a:ln/>
+        </p:spPr>
+      </p:sp>
+      <p:sp>
+        <p:nvSpPr>
+          <p:cNvPr id="8" name="Text 6"/>
+          <p:cNvSpPr/>
+          <p:nvPr/>
+        </p:nvSpPr>
+        <p:spPr>
+          <a:xfrm>
+            <a:off x="1097280" y="3257550"/>
+            <a:ext cx="10607040" cy="1017270"/>
           </a:xfrm>
           <a:prstGeom prst="rect">
             <a:avLst/>
@@ -2643,12 +5345,12 @@
           <a:p>
             <a:pPr indent="0" marL="0">
               <a:lnSpc>
-                <a:spcPct val="115000"/>
+                <a:spcPct val="112000"/>
               </a:lnSpc>
               <a:buNone/>
             </a:pPr>
             <a:r>
-              <a:rPr lang="en-US" sz="1500" dirty="0">
+              <a:rPr lang="en-US" sz="1650" dirty="0">
                 <a:solidFill>
                   <a:srgbClr val="1A1A1A"/>
                 </a:solidFill>
@@ -2656,33 +5358,11 @@
                 <a:ea typeface="Calibri" pitchFamily="34" charset="-122"/>
                 <a:cs typeface="Calibri" pitchFamily="34" charset="-120"/>
               </a:rPr>
-              <a:t>Counting, met on day one: rows, words, pixels</a:t>
-            </a:r>
-            <a:endParaRPr lang="en-US" sz="1500" dirty="0"/>
-          </a:p>
-        </p:txBody>
-      </p:sp>
-      <p:sp>
-        <p:nvSpPr>
-          <p:cNvPr id="8" name="Shape 6"/>
-          <p:cNvSpPr/>
-          <p:nvPr/>
-        </p:nvSpPr>
-        <p:spPr>
-          <a:xfrm>
-            <a:off x="4526280" y="2194560"/>
-            <a:ext cx="3383280" cy="3291840"/>
-          </a:xfrm>
-          <a:prstGeom prst="roundRect">
-            <a:avLst>
-              <a:gd name="adj" fmla="val 3333"/>
-            </a:avLst>
-          </a:prstGeom>
-          <a:solidFill>
-            <a:srgbClr val="F4EEE8"/>
-          </a:solidFill>
-          <a:ln/>
-        </p:spPr>
+              <a:t>In ten weeks you run the same kind of reading yourself, on culture you choose.</a:t>
+            </a:r>
+            <a:endParaRPr lang="en-US" sz="1650" dirty="0"/>
+          </a:p>
+        </p:txBody>
       </p:sp>
       <p:sp>
         <p:nvSpPr>
@@ -2692,14 +5372,14 @@
         </p:nvSpPr>
         <p:spPr>
           <a:xfrm>
-            <a:off x="4937760" y="2606040"/>
-            <a:ext cx="548640" cy="548640"/>
+            <a:off x="640080" y="4366260"/>
+            <a:ext cx="201168" cy="201168"/>
           </a:xfrm>
           <a:prstGeom prst="ellipse">
             <a:avLst/>
           </a:prstGeom>
           <a:solidFill>
-            <a:srgbClr val="3F6F5F"/>
+            <a:srgbClr val="B9852F"/>
           </a:solidFill>
           <a:ln/>
         </p:spPr>
@@ -2712,47 +5392,8 @@
         </p:nvSpPr>
         <p:spPr>
           <a:xfrm>
-            <a:off x="4892040" y="3383280"/>
-            <a:ext cx="2651760" cy="548640"/>
-          </a:xfrm>
-          <a:prstGeom prst="rect">
-            <a:avLst/>
-          </a:prstGeom>
-          <a:noFill/>
-          <a:ln/>
-        </p:spPr>
-        <p:txBody>
-          <a:bodyPr wrap="square" rtlCol="0" anchor="ctr"/>
-          <a:lstStyle/>
-          <a:p>
-            <a:pPr indent="0" marL="0">
-              <a:buNone/>
-            </a:pPr>
-            <a:r>
-              <a:rPr lang="en-US" sz="2100" b="1" dirty="0">
-                <a:solidFill>
-                  <a:srgbClr val="1A1A1A"/>
-                </a:solidFill>
-                <a:latin typeface="Cambria" pitchFamily="34" charset="0"/>
-                <a:ea typeface="Cambria" pitchFamily="34" charset="-122"/>
-                <a:cs typeface="Cambria" pitchFamily="34" charset="-120"/>
-              </a:rPr>
-              <a:t>Workshop</a:t>
-            </a:r>
-            <a:endParaRPr lang="en-US" sz="2100" dirty="0"/>
-          </a:p>
-        </p:txBody>
-      </p:sp>
-      <p:sp>
-        <p:nvSpPr>
-          <p:cNvPr id="11" name="Text 9"/>
-          <p:cNvSpPr/>
-          <p:nvPr/>
-        </p:nvSpPr>
-        <p:spPr>
-          <a:xfrm>
-            <a:off x="4892040" y="3977640"/>
-            <a:ext cx="2651760" cy="1371600"/>
+            <a:off x="1097280" y="4274820"/>
+            <a:ext cx="10607040" cy="1017270"/>
           </a:xfrm>
           <a:prstGeom prst="rect">
             <a:avLst/>
@@ -2768,12 +5409,12 @@
           <a:p>
             <a:pPr indent="0" marL="0">
               <a:lnSpc>
-                <a:spcPct val="115000"/>
+                <a:spcPct val="112000"/>
               </a:lnSpc>
               <a:buNone/>
             </a:pPr>
             <a:r>
-              <a:rPr lang="en-US" sz="1500" dirty="0">
+              <a:rPr lang="en-US" sz="1650" dirty="0">
                 <a:solidFill>
                   <a:srgbClr val="1A1A1A"/>
                 </a:solidFill>
@@ -2781,103 +5422,42 @@
                 <a:ea typeface="Calibri" pitchFamily="34" charset="-122"/>
                 <a:cs typeface="Calibri" pitchFamily="34" charset="-120"/>
               </a:rPr>
-              <a:t>Build hands-on on your own data.</a:t>
-            </a:r>
-            <a:endParaRPr lang="en-US" sz="1500" dirty="0"/>
-          </a:p>
-        </p:txBody>
-      </p:sp>
-      <p:sp>
-        <p:nvSpPr>
-          <p:cNvPr id="12" name="Shape 10"/>
-          <p:cNvSpPr/>
-          <p:nvPr/>
-        </p:nvSpPr>
-        <p:spPr>
-          <a:xfrm>
-            <a:off x="8412480" y="2194560"/>
-            <a:ext cx="3383280" cy="3291840"/>
-          </a:xfrm>
-          <a:prstGeom prst="roundRect">
-            <a:avLst>
-              <a:gd name="adj" fmla="val 3333"/>
-            </a:avLst>
-          </a:prstGeom>
-          <a:solidFill>
-            <a:srgbClr val="F4EEE8"/>
-          </a:solidFill>
-          <a:ln/>
-        </p:spPr>
-      </p:sp>
-      <p:sp>
-        <p:nvSpPr>
-          <p:cNvPr id="13" name="Shape 11"/>
-          <p:cNvSpPr/>
-          <p:nvPr/>
-        </p:nvSpPr>
-        <p:spPr>
-          <a:xfrm>
-            <a:off x="8823960" y="2606040"/>
-            <a:ext cx="548640" cy="548640"/>
+              <a:t>Today's corpus: every NYT wedding announcement 1985-2014 (~500 rows): who married whom, and whether the bride kept her name.</a:t>
+            </a:r>
+            <a:endParaRPr lang="en-US" sz="1650" dirty="0"/>
+          </a:p>
+        </p:txBody>
+      </p:sp>
+      <p:sp>
+        <p:nvSpPr>
+          <p:cNvPr id="11" name="Shape 9"/>
+          <p:cNvSpPr/>
+          <p:nvPr/>
+        </p:nvSpPr>
+        <p:spPr>
+          <a:xfrm>
+            <a:off x="640080" y="5383530"/>
+            <a:ext cx="201168" cy="201168"/>
           </a:xfrm>
           <a:prstGeom prst="ellipse">
             <a:avLst/>
           </a:prstGeom>
           <a:solidFill>
-            <a:srgbClr val="B9852F"/>
-          </a:solidFill>
-          <a:ln/>
-        </p:spPr>
-      </p:sp>
-      <p:sp>
-        <p:nvSpPr>
-          <p:cNvPr id="14" name="Text 12"/>
-          <p:cNvSpPr/>
-          <p:nvPr/>
-        </p:nvSpPr>
-        <p:spPr>
-          <a:xfrm>
-            <a:off x="8778240" y="3383280"/>
-            <a:ext cx="2651760" cy="548640"/>
-          </a:xfrm>
-          <a:prstGeom prst="rect">
-            <a:avLst/>
-          </a:prstGeom>
-          <a:noFill/>
-          <a:ln/>
-        </p:spPr>
-        <p:txBody>
-          <a:bodyPr wrap="square" rtlCol="0" anchor="ctr"/>
-          <a:lstStyle/>
-          <a:p>
-            <a:pPr indent="0" marL="0">
-              <a:buNone/>
-            </a:pPr>
-            <a:r>
-              <a:rPr lang="en-US" sz="2100" b="1" dirty="0">
-                <a:solidFill>
-                  <a:srgbClr val="1A1A1A"/>
-                </a:solidFill>
-                <a:latin typeface="Cambria" pitchFamily="34" charset="0"/>
-                <a:ea typeface="Cambria" pitchFamily="34" charset="-122"/>
-                <a:cs typeface="Cambria" pitchFamily="34" charset="-120"/>
-              </a:rPr>
-              <a:t>Discussion</a:t>
-            </a:r>
-            <a:endParaRPr lang="en-US" sz="2100" dirty="0"/>
-          </a:p>
-        </p:txBody>
-      </p:sp>
-      <p:sp>
-        <p:nvSpPr>
-          <p:cNvPr id="15" name="Text 13"/>
-          <p:cNvSpPr/>
-          <p:nvPr/>
-        </p:nvSpPr>
-        <p:spPr>
-          <a:xfrm>
-            <a:off x="8778240" y="3977640"/>
-            <a:ext cx="2651760" cy="1371600"/>
+            <a:srgbClr val="7A3B2E"/>
+          </a:solidFill>
+          <a:ln/>
+        </p:spPr>
+      </p:sp>
+      <p:sp>
+        <p:nvSpPr>
+          <p:cNvPr id="12" name="Text 10"/>
+          <p:cNvSpPr/>
+          <p:nvPr/>
+        </p:nvSpPr>
+        <p:spPr>
+          <a:xfrm>
+            <a:off x="1097280" y="5292090"/>
+            <a:ext cx="10607040" cy="1017270"/>
           </a:xfrm>
           <a:prstGeom prst="rect">
             <a:avLst/>
@@ -2893,12 +5473,12 @@
           <a:p>
             <a:pPr indent="0" marL="0">
               <a:lnSpc>
-                <a:spcPct val="115000"/>
+                <a:spcPct val="112000"/>
               </a:lnSpc>
               <a:buNone/>
             </a:pPr>
             <a:r>
-              <a:rPr lang="en-US" sz="1500" dirty="0">
+              <a:rPr lang="en-US" sz="1650" dirty="0">
                 <a:solidFill>
                   <a:srgbClr val="1A1A1A"/>
                 </a:solidFill>
@@ -2906,9 +5486,9 @@
                 <a:ea typeface="Calibri" pitchFamily="34" charset="-122"/>
                 <a:cs typeface="Calibri" pitchFamily="34" charset="-120"/>
               </a:rPr>
-              <a:t>Interrogate the study, debate it, or critique each other's work.</a:t>
-            </a:r>
-            <a:endParaRPr lang="en-US" sz="1500" dirty="0"/>
+              <a:t>The deliverable, shown now: a published web essay on top of a notebook anyone can run.</a:t>
+            </a:r>
+            <a:endParaRPr lang="en-US" sz="1650" dirty="0"/>
           </a:p>
         </p:txBody>
       </p:sp>
@@ -2946,14 +5526,34 @@
       </p:grpSpPr>
       <p:sp>
         <p:nvSpPr>
-          <p:cNvPr id="2" name="Text 0"/>
+          <p:cNvPr id="2" name="Shape 0"/>
+          <p:cNvSpPr/>
+          <p:nvPr/>
+        </p:nvSpPr>
+        <p:spPr>
+          <a:xfrm>
+            <a:off x="0" y="0"/>
+            <a:ext cx="164592" cy="6858000"/>
+          </a:xfrm>
+          <a:prstGeom prst="rect">
+            <a:avLst/>
+          </a:prstGeom>
+          <a:solidFill>
+            <a:srgbClr val="3F6F5F"/>
+          </a:solidFill>
+          <a:ln/>
+        </p:spPr>
+      </p:sp>
+      <p:sp>
+        <p:nvSpPr>
+          <p:cNvPr id="3" name="Text 1"/>
           <p:cNvSpPr/>
           <p:nvPr/>
         </p:nvSpPr>
         <p:spPr>
           <a:xfrm>
             <a:off x="640080" y="640080"/>
-            <a:ext cx="10058400" cy="731520"/>
+            <a:ext cx="10058400" cy="320040"/>
           </a:xfrm>
           <a:prstGeom prst="rect">
             <a:avLst/>
@@ -2963,6 +5563,47 @@
         </p:spPr>
         <p:txBody>
           <a:bodyPr wrap="square" rtlCol="0" anchor="ctr"/>
+          <a:lstStyle/>
+          <a:p>
+            <a:pPr indent="0" marL="0">
+              <a:buNone/>
+            </a:pPr>
+            <a:r>
+              <a:rPr lang="en-US" sz="1200" b="1" spc="300" kern="0" dirty="0">
+                <a:solidFill>
+                  <a:srgbClr val="3F6F5F"/>
+                </a:solidFill>
+                <a:latin typeface="Calibri" pitchFamily="34" charset="0"/>
+                <a:ea typeface="Calibri" pitchFamily="34" charset="-122"/>
+                <a:cs typeface="Calibri" pitchFamily="34" charset="-120"/>
+              </a:rPr>
+              <a:t>WEEK 1 · THE MATERIAL</a:t>
+            </a:r>
+            <a:endParaRPr lang="en-US" sz="1200" dirty="0"/>
+          </a:p>
+        </p:txBody>
+      </p:sp>
+      <p:sp>
+        <p:nvSpPr>
+          <p:cNvPr id="4" name="Text 2"/>
+          <p:cNvSpPr/>
+          <p:nvPr/>
+        </p:nvSpPr>
+        <p:spPr>
+          <a:xfrm>
+            <a:off x="640080" y="1005840"/>
+            <a:ext cx="10881360" cy="914400"/>
+          </a:xfrm>
+          <a:prstGeom prst="rect">
+            <a:avLst/>
+          </a:prstGeom>
+          <a:noFill/>
+          <a:ln/>
+        </p:spPr>
+        <p:txBody>
+          <a:bodyPr wrap="square" rtlCol="0" anchor="t">
+            <a:spAutoFit/>
+          </a:bodyPr>
           <a:lstStyle/>
           <a:p>
             <a:pPr indent="0" marL="0">
@@ -2977,7 +5618,7 @@
                 <a:ea typeface="Cambria" pitchFamily="34" charset="-122"/>
                 <a:cs typeface="Cambria" pitchFamily="34" charset="-120"/>
               </a:rPr>
-              <a:t>The session</a:t>
+              <a:t>Four words, used all term</a:t>
             </a:r>
             <a:endParaRPr lang="en-US" sz="3000" dirty="0"/>
           </a:p>
@@ -2985,19 +5626,17 @@
       </p:sp>
       <p:sp>
         <p:nvSpPr>
-          <p:cNvPr id="3" name="Shape 1"/>
-          <p:cNvSpPr/>
-          <p:nvPr/>
-        </p:nvSpPr>
-        <p:spPr>
-          <a:xfrm>
-            <a:off x="640080" y="1572768"/>
-            <a:ext cx="868680" cy="457200"/>
-          </a:xfrm>
-          <a:prstGeom prst="roundRect">
-            <a:avLst>
-              <a:gd name="adj" fmla="val 12000"/>
-            </a:avLst>
+          <p:cNvPr id="5" name="Shape 3"/>
+          <p:cNvSpPr/>
+          <p:nvPr/>
+        </p:nvSpPr>
+        <p:spPr>
+          <a:xfrm>
+            <a:off x="640080" y="2331720"/>
+            <a:ext cx="201168" cy="201168"/>
+          </a:xfrm>
+          <a:prstGeom prst="ellipse">
+            <a:avLst/>
           </a:prstGeom>
           <a:solidFill>
             <a:srgbClr val="7A3B2E"/>
@@ -3007,71 +5646,99 @@
       </p:sp>
       <p:sp>
         <p:nvSpPr>
-          <p:cNvPr id="4" name="Text 2"/>
-          <p:cNvSpPr/>
-          <p:nvPr/>
-        </p:nvSpPr>
-        <p:spPr>
-          <a:xfrm>
-            <a:off x="640080" y="1572768"/>
-            <a:ext cx="868680" cy="457200"/>
-          </a:xfrm>
-          <a:prstGeom prst="rect">
-            <a:avLst/>
-          </a:prstGeom>
-          <a:noFill/>
-          <a:ln/>
-        </p:spPr>
-        <p:txBody>
-          <a:bodyPr wrap="square" rtlCol="0" anchor="ctr"/>
-          <a:lstStyle/>
-          <a:p>
-            <a:pPr algn="ctr" indent="0" marL="0">
-              <a:buNone/>
-            </a:pPr>
-            <a:r>
-              <a:rPr lang="en-US" sz="1100" b="1" dirty="0">
-                <a:solidFill>
-                  <a:srgbClr val="FFFFFF"/>
+          <p:cNvPr id="6" name="Text 4"/>
+          <p:cNvSpPr/>
+          <p:nvPr/>
+        </p:nvSpPr>
+        <p:spPr>
+          <a:xfrm>
+            <a:off x="1097280" y="2240280"/>
+            <a:ext cx="10607040" cy="1017270"/>
+          </a:xfrm>
+          <a:prstGeom prst="rect">
+            <a:avLst/>
+          </a:prstGeom>
+          <a:noFill/>
+          <a:ln/>
+        </p:spPr>
+        <p:txBody>
+          <a:bodyPr wrap="square" rtlCol="0" anchor="t">
+            <a:spAutoFit/>
+          </a:bodyPr>
+          <a:lstStyle/>
+          <a:p>
+            <a:pPr indent="0" marL="0">
+              <a:lnSpc>
+                <a:spcPct val="112000"/>
+              </a:lnSpc>
+              <a:buNone/>
+            </a:pPr>
+            <a:r>
+              <a:rPr lang="en-US" sz="1650" dirty="0">
+                <a:solidFill>
+                  <a:srgbClr val="1A1A1A"/>
                 </a:solidFill>
                 <a:latin typeface="Calibri" pitchFamily="34" charset="0"/>
                 <a:ea typeface="Calibri" pitchFamily="34" charset="-122"/>
                 <a:cs typeface="Calibri" pitchFamily="34" charset="-120"/>
               </a:rPr>
-              <a:t>0:00</a:t>
-            </a:r>
-            <a:endParaRPr lang="en-US" sz="1100" dirty="0"/>
-          </a:p>
-        </p:txBody>
-      </p:sp>
-      <p:sp>
-        <p:nvSpPr>
-          <p:cNvPr id="5" name="Text 3"/>
-          <p:cNvSpPr/>
-          <p:nvPr/>
-        </p:nvSpPr>
-        <p:spPr>
-          <a:xfrm>
-            <a:off x="1691640" y="1554480"/>
-            <a:ext cx="9646920" cy="566928"/>
-          </a:xfrm>
-          <a:prstGeom prst="rect">
-            <a:avLst/>
-          </a:prstGeom>
-          <a:noFill/>
-          <a:ln/>
-        </p:spPr>
-        <p:txBody>
-          <a:bodyPr wrap="square" rtlCol="0" anchor="ctr">
+              <a:t>Corpus: the pile you study. 500 announcements, 2,000 screenplays, 10,000 album covers.</a:t>
+            </a:r>
+            <a:endParaRPr lang="en-US" sz="1650" dirty="0"/>
+          </a:p>
+        </p:txBody>
+      </p:sp>
+      <p:sp>
+        <p:nvSpPr>
+          <p:cNvPr id="7" name="Shape 5"/>
+          <p:cNvSpPr/>
+          <p:nvPr/>
+        </p:nvSpPr>
+        <p:spPr>
+          <a:xfrm>
+            <a:off x="640080" y="3348990"/>
+            <a:ext cx="201168" cy="201168"/>
+          </a:xfrm>
+          <a:prstGeom prst="ellipse">
+            <a:avLst/>
+          </a:prstGeom>
+          <a:solidFill>
+            <a:srgbClr val="3F6F5F"/>
+          </a:solidFill>
+          <a:ln/>
+        </p:spPr>
+      </p:sp>
+      <p:sp>
+        <p:nvSpPr>
+          <p:cNvPr id="8" name="Text 6"/>
+          <p:cNvSpPr/>
+          <p:nvPr/>
+        </p:nvSpPr>
+        <p:spPr>
+          <a:xfrm>
+            <a:off x="1097280" y="3257550"/>
+            <a:ext cx="10607040" cy="1017270"/>
+          </a:xfrm>
+          <a:prstGeom prst="rect">
+            <a:avLst/>
+          </a:prstGeom>
+          <a:noFill/>
+          <a:ln/>
+        </p:spPr>
+        <p:txBody>
+          <a:bodyPr wrap="square" rtlCol="0" anchor="t">
             <a:spAutoFit/>
           </a:bodyPr>
           <a:lstStyle/>
           <a:p>
             <a:pPr indent="0" marL="0">
-              <a:buNone/>
-            </a:pPr>
-            <a:r>
-              <a:rPr lang="en-US" sz="1250" dirty="0">
+              <a:lnSpc>
+                <a:spcPct val="112000"/>
+              </a:lnSpc>
+              <a:buNone/>
+            </a:pPr>
+            <a:r>
+              <a:rPr lang="en-US" sz="1650" dirty="0">
                 <a:solidFill>
                   <a:srgbClr val="1A1A1A"/>
                 </a:solidFill>
@@ -3079,101 +5746,127 @@
                 <a:ea typeface="Calibri" pitchFamily="34" charset="-122"/>
                 <a:cs typeface="Calibri" pitchFamily="34" charset="-120"/>
               </a:rPr>
-              <a:t>Setting the room: the social rules, demonstrated by the instructor breaking one and being corrected. Today's live coding includes real mistakes on purpose.</a:t>
-            </a:r>
-            <a:endParaRPr lang="en-US" sz="1250" dirty="0"/>
-          </a:p>
-        </p:txBody>
-      </p:sp>
-      <p:sp>
-        <p:nvSpPr>
-          <p:cNvPr id="6" name="Shape 4"/>
-          <p:cNvSpPr/>
-          <p:nvPr/>
-        </p:nvSpPr>
-        <p:spPr>
-          <a:xfrm>
-            <a:off x="640080" y="2139696"/>
-            <a:ext cx="868680" cy="457200"/>
-          </a:xfrm>
-          <a:prstGeom prst="roundRect">
-            <a:avLst>
-              <a:gd name="adj" fmla="val 12000"/>
-            </a:avLst>
-          </a:prstGeom>
-          <a:solidFill>
-            <a:srgbClr val="7A3B2E"/>
-          </a:solidFill>
-          <a:ln/>
-        </p:spPr>
-      </p:sp>
-      <p:sp>
-        <p:nvSpPr>
-          <p:cNvPr id="7" name="Text 5"/>
-          <p:cNvSpPr/>
-          <p:nvPr/>
-        </p:nvSpPr>
-        <p:spPr>
-          <a:xfrm>
-            <a:off x="640080" y="2139696"/>
-            <a:ext cx="868680" cy="457200"/>
-          </a:xfrm>
-          <a:prstGeom prst="rect">
-            <a:avLst/>
-          </a:prstGeom>
-          <a:noFill/>
-          <a:ln/>
-        </p:spPr>
-        <p:txBody>
-          <a:bodyPr wrap="square" rtlCol="0" anchor="ctr"/>
-          <a:lstStyle/>
-          <a:p>
-            <a:pPr algn="ctr" indent="0" marL="0">
-              <a:buNone/>
-            </a:pPr>
-            <a:r>
-              <a:rPr lang="en-US" sz="1100" b="1" dirty="0">
-                <a:solidFill>
-                  <a:srgbClr val="FFFFFF"/>
+              <a:t>Method: the counting or weighting you run on the corpus.</a:t>
+            </a:r>
+            <a:endParaRPr lang="en-US" sz="1650" dirty="0"/>
+          </a:p>
+        </p:txBody>
+      </p:sp>
+      <p:sp>
+        <p:nvSpPr>
+          <p:cNvPr id="9" name="Shape 7"/>
+          <p:cNvSpPr/>
+          <p:nvPr/>
+        </p:nvSpPr>
+        <p:spPr>
+          <a:xfrm>
+            <a:off x="640080" y="4366260"/>
+            <a:ext cx="201168" cy="201168"/>
+          </a:xfrm>
+          <a:prstGeom prst="ellipse">
+            <a:avLst/>
+          </a:prstGeom>
+          <a:solidFill>
+            <a:srgbClr val="B9852F"/>
+          </a:solidFill>
+          <a:ln/>
+        </p:spPr>
+      </p:sp>
+      <p:sp>
+        <p:nvSpPr>
+          <p:cNvPr id="10" name="Text 8"/>
+          <p:cNvSpPr/>
+          <p:nvPr/>
+        </p:nvSpPr>
+        <p:spPr>
+          <a:xfrm>
+            <a:off x="1097280" y="4274820"/>
+            <a:ext cx="10607040" cy="1017270"/>
+          </a:xfrm>
+          <a:prstGeom prst="rect">
+            <a:avLst/>
+          </a:prstGeom>
+          <a:noFill/>
+          <a:ln/>
+        </p:spPr>
+        <p:txBody>
+          <a:bodyPr wrap="square" rtlCol="0" anchor="t">
+            <a:spAutoFit/>
+          </a:bodyPr>
+          <a:lstStyle/>
+          <a:p>
+            <a:pPr indent="0" marL="0">
+              <a:lnSpc>
+                <a:spcPct val="112000"/>
+              </a:lnSpc>
+              <a:buNone/>
+            </a:pPr>
+            <a:r>
+              <a:rPr lang="en-US" sz="1650" dirty="0">
+                <a:solidFill>
+                  <a:srgbClr val="1A1A1A"/>
                 </a:solidFill>
                 <a:latin typeface="Calibri" pitchFamily="34" charset="0"/>
                 <a:ea typeface="Calibri" pitchFamily="34" charset="-122"/>
                 <a:cs typeface="Calibri" pitchFamily="34" charset="-120"/>
               </a:rPr>
-              <a:t>0:12</a:t>
-            </a:r>
-            <a:endParaRPr lang="en-US" sz="1100" dirty="0"/>
-          </a:p>
-        </p:txBody>
-      </p:sp>
-      <p:sp>
-        <p:nvSpPr>
-          <p:cNvPr id="8" name="Text 6"/>
-          <p:cNvSpPr/>
-          <p:nvPr/>
-        </p:nvSpPr>
-        <p:spPr>
-          <a:xfrm>
-            <a:off x="1691640" y="2121408"/>
-            <a:ext cx="9646920" cy="566928"/>
-          </a:xfrm>
-          <a:prstGeom prst="rect">
-            <a:avLst/>
-          </a:prstGeom>
-          <a:noFill/>
-          <a:ln/>
-        </p:spPr>
-        <p:txBody>
-          <a:bodyPr wrap="square" rtlCol="0" anchor="ctr">
+              <a:t>Model: any simplification that turns culture into numbers. A word count is already one.</a:t>
+            </a:r>
+            <a:endParaRPr lang="en-US" sz="1650" dirty="0"/>
+          </a:p>
+        </p:txBody>
+      </p:sp>
+      <p:sp>
+        <p:nvSpPr>
+          <p:cNvPr id="11" name="Shape 9"/>
+          <p:cNvSpPr/>
+          <p:nvPr/>
+        </p:nvSpPr>
+        <p:spPr>
+          <a:xfrm>
+            <a:off x="640080" y="5383530"/>
+            <a:ext cx="201168" cy="201168"/>
+          </a:xfrm>
+          <a:prstGeom prst="ellipse">
+            <a:avLst/>
+          </a:prstGeom>
+          <a:solidFill>
+            <a:srgbClr val="7A3B2E"/>
+          </a:solidFill>
+          <a:ln/>
+        </p:spPr>
+      </p:sp>
+      <p:sp>
+        <p:nvSpPr>
+          <p:cNvPr id="12" name="Text 10"/>
+          <p:cNvSpPr/>
+          <p:nvPr/>
+        </p:nvSpPr>
+        <p:spPr>
+          <a:xfrm>
+            <a:off x="1097280" y="5292090"/>
+            <a:ext cx="10607040" cy="1017270"/>
+          </a:xfrm>
+          <a:prstGeom prst="rect">
+            <a:avLst/>
+          </a:prstGeom>
+          <a:noFill/>
+          <a:ln/>
+        </p:spPr>
+        <p:txBody>
+          <a:bodyPr wrap="square" rtlCol="0" anchor="t">
             <a:spAutoFit/>
           </a:bodyPr>
           <a:lstStyle/>
           <a:p>
             <a:pPr indent="0" marL="0">
-              <a:buNone/>
-            </a:pPr>
-            <a:r>
-              <a:rPr lang="en-US" sz="1250" dirty="0">
+              <a:lnSpc>
+                <a:spcPct val="112000"/>
+              </a:lnSpc>
+              <a:buNone/>
+            </a:pPr>
+            <a:r>
+              <a:rPr lang="en-US" sz="1650" dirty="0">
                 <a:solidFill>
                   <a:srgbClr val="1A1A1A"/>
                 </a:solidFill>
@@ -3181,519 +5874,9 @@
                 <a:ea typeface="Calibri" pitchFamily="34" charset="-122"/>
                 <a:cs typeface="Calibri" pitchFamily="34" charset="-120"/>
               </a:rPr>
-              <a:t>Look at This, then Question It: She Giggles, He Gallops.</a:t>
-            </a:r>
-            <a:endParaRPr lang="en-US" sz="1250" dirty="0"/>
-          </a:p>
-        </p:txBody>
-      </p:sp>
-      <p:sp>
-        <p:nvSpPr>
-          <p:cNvPr id="9" name="Shape 7"/>
-          <p:cNvSpPr/>
-          <p:nvPr/>
-        </p:nvSpPr>
-        <p:spPr>
-          <a:xfrm>
-            <a:off x="640080" y="2706624"/>
-            <a:ext cx="868680" cy="457200"/>
-          </a:xfrm>
-          <a:prstGeom prst="roundRect">
-            <a:avLst>
-              <a:gd name="adj" fmla="val 12000"/>
-            </a:avLst>
-          </a:prstGeom>
-          <a:solidFill>
-            <a:srgbClr val="7A3B2E"/>
-          </a:solidFill>
-          <a:ln/>
-        </p:spPr>
-      </p:sp>
-      <p:sp>
-        <p:nvSpPr>
-          <p:cNvPr id="10" name="Text 8"/>
-          <p:cNvSpPr/>
-          <p:nvPr/>
-        </p:nvSpPr>
-        <p:spPr>
-          <a:xfrm>
-            <a:off x="640080" y="2706624"/>
-            <a:ext cx="868680" cy="457200"/>
-          </a:xfrm>
-          <a:prstGeom prst="rect">
-            <a:avLst/>
-          </a:prstGeom>
-          <a:noFill/>
-          <a:ln/>
-        </p:spPr>
-        <p:txBody>
-          <a:bodyPr wrap="square" rtlCol="0" anchor="ctr"/>
-          <a:lstStyle/>
-          <a:p>
-            <a:pPr algn="ctr" indent="0" marL="0">
-              <a:buNone/>
-            </a:pPr>
-            <a:r>
-              <a:rPr lang="en-US" sz="1100" b="1" dirty="0">
-                <a:solidFill>
-                  <a:srgbClr val="FFFFFF"/>
-                </a:solidFill>
-                <a:latin typeface="Calibri" pitchFamily="34" charset="0"/>
-                <a:ea typeface="Calibri" pitchFamily="34" charset="-122"/>
-                <a:cs typeface="Calibri" pitchFamily="34" charset="-120"/>
-              </a:rPr>
-              <a:t>0:17</a:t>
-            </a:r>
-            <a:endParaRPr lang="en-US" sz="1100" dirty="0"/>
-          </a:p>
-        </p:txBody>
-      </p:sp>
-      <p:sp>
-        <p:nvSpPr>
-          <p:cNvPr id="11" name="Text 9"/>
-          <p:cNvSpPr/>
-          <p:nvPr/>
-        </p:nvSpPr>
-        <p:spPr>
-          <a:xfrm>
-            <a:off x="1691640" y="2688336"/>
-            <a:ext cx="9646920" cy="566928"/>
-          </a:xfrm>
-          <a:prstGeom prst="rect">
-            <a:avLst/>
-          </a:prstGeom>
-          <a:noFill/>
-          <a:ln/>
-        </p:spPr>
-        <p:txBody>
-          <a:bodyPr wrap="square" rtlCol="0" anchor="ctr">
-            <a:spAutoFit/>
-          </a:bodyPr>
-          <a:lstStyle/>
-          <a:p>
-            <a:pPr indent="0" marL="0">
-              <a:buNone/>
-            </a:pPr>
-            <a:r>
-              <a:rPr lang="en-US" sz="1250" dirty="0">
-                <a:solidFill>
-                  <a:srgbClr val="1A1A1A"/>
-                </a:solidFill>
-                <a:latin typeface="Calibri" pitchFamily="34" charset="0"/>
-                <a:ea typeface="Calibri" pitchFamily="34" charset="-122"/>
-                <a:cs typeface="Calibri" pitchFamily="34" charset="-120"/>
-              </a:rPr>
-              <a:t>Pre-train the vocabulary (no code): corpus, method, model, embedding, in plain language with pictures. The course map and the deliverable.</a:t>
-            </a:r>
-            <a:endParaRPr lang="en-US" sz="1250" dirty="0"/>
-          </a:p>
-        </p:txBody>
-      </p:sp>
-      <p:sp>
-        <p:nvSpPr>
-          <p:cNvPr id="12" name="Shape 10"/>
-          <p:cNvSpPr/>
-          <p:nvPr/>
-        </p:nvSpPr>
-        <p:spPr>
-          <a:xfrm>
-            <a:off x="640080" y="3273552"/>
-            <a:ext cx="868680" cy="457200"/>
-          </a:xfrm>
-          <a:prstGeom prst="roundRect">
-            <a:avLst>
-              <a:gd name="adj" fmla="val 12000"/>
-            </a:avLst>
-          </a:prstGeom>
-          <a:solidFill>
-            <a:srgbClr val="7A3B2E"/>
-          </a:solidFill>
-          <a:ln/>
-        </p:spPr>
-      </p:sp>
-      <p:sp>
-        <p:nvSpPr>
-          <p:cNvPr id="13" name="Text 11"/>
-          <p:cNvSpPr/>
-          <p:nvPr/>
-        </p:nvSpPr>
-        <p:spPr>
-          <a:xfrm>
-            <a:off x="640080" y="3273552"/>
-            <a:ext cx="868680" cy="457200"/>
-          </a:xfrm>
-          <a:prstGeom prst="rect">
-            <a:avLst/>
-          </a:prstGeom>
-          <a:noFill/>
-          <a:ln/>
-        </p:spPr>
-        <p:txBody>
-          <a:bodyPr wrap="square" rtlCol="0" anchor="ctr"/>
-          <a:lstStyle/>
-          <a:p>
-            <a:pPr algn="ctr" indent="0" marL="0">
-              <a:buNone/>
-            </a:pPr>
-            <a:r>
-              <a:rPr lang="en-US" sz="1100" b="1" dirty="0">
-                <a:solidFill>
-                  <a:srgbClr val="FFFFFF"/>
-                </a:solidFill>
-                <a:latin typeface="Calibri" pitchFamily="34" charset="0"/>
-                <a:ea typeface="Calibri" pitchFamily="34" charset="-122"/>
-                <a:cs typeface="Calibri" pitchFamily="34" charset="-120"/>
-              </a:rPr>
-              <a:t>0:32</a:t>
-            </a:r>
-            <a:endParaRPr lang="en-US" sz="1100" dirty="0"/>
-          </a:p>
-        </p:txBody>
-      </p:sp>
-      <p:sp>
-        <p:nvSpPr>
-          <p:cNvPr id="14" name="Text 12"/>
-          <p:cNvSpPr/>
-          <p:nvPr/>
-        </p:nvSpPr>
-        <p:spPr>
-          <a:xfrm>
-            <a:off x="1691640" y="3255264"/>
-            <a:ext cx="9646920" cy="566928"/>
-          </a:xfrm>
-          <a:prstGeom prst="rect">
-            <a:avLst/>
-          </a:prstGeom>
-          <a:noFill/>
-          <a:ln/>
-        </p:spPr>
-        <p:txBody>
-          <a:bodyPr wrap="square" rtlCol="0" anchor="ctr">
-            <a:spAutoFit/>
-          </a:bodyPr>
-          <a:lstStyle/>
-          <a:p>
-            <a:pPr indent="0" marL="0">
-              <a:buNone/>
-            </a:pPr>
-            <a:r>
-              <a:rPr lang="en-US" sz="1250" dirty="0">
-                <a:solidFill>
-                  <a:srgbClr val="1A1A1A"/>
-                </a:solidFill>
-                <a:latin typeface="Calibri" pitchFamily="34" charset="0"/>
-                <a:ea typeface="Calibri" pitchFamily="34" charset="-122"/>
-                <a:cs typeface="Calibri" pitchFamily="34" charset="-120"/>
-              </a:rPr>
-              <a:t>Lab 1 (worked, participatory): copy the notebook to Drive and mount Drive into the runtime (this is how your corpus and results survive Colab wiping the session, everything saving to one project folder), put a Gemini key in Colab Secrets, load NYT wedding data, make a first chart. Hand out the common-errors cheat sheet. Then solo with a partner: draft three questions, pick one, have the AI write the code, run it, chart it. Write one sentence predicting your cell before you run it.</a:t>
-            </a:r>
-            <a:endParaRPr lang="en-US" sz="1250" dirty="0"/>
-          </a:p>
-        </p:txBody>
-      </p:sp>
-      <p:sp>
-        <p:nvSpPr>
-          <p:cNvPr id="15" name="Shape 13"/>
-          <p:cNvSpPr/>
-          <p:nvPr/>
-        </p:nvSpPr>
-        <p:spPr>
-          <a:xfrm>
-            <a:off x="640080" y="3840480"/>
-            <a:ext cx="868680" cy="457200"/>
-          </a:xfrm>
-          <a:prstGeom prst="roundRect">
-            <a:avLst>
-              <a:gd name="adj" fmla="val 12000"/>
-            </a:avLst>
-          </a:prstGeom>
-          <a:solidFill>
-            <a:srgbClr val="7A3B2E"/>
-          </a:solidFill>
-          <a:ln/>
-        </p:spPr>
-      </p:sp>
-      <p:sp>
-        <p:nvSpPr>
-          <p:cNvPr id="16" name="Text 14"/>
-          <p:cNvSpPr/>
-          <p:nvPr/>
-        </p:nvSpPr>
-        <p:spPr>
-          <a:xfrm>
-            <a:off x="640080" y="3840480"/>
-            <a:ext cx="868680" cy="457200"/>
-          </a:xfrm>
-          <a:prstGeom prst="rect">
-            <a:avLst/>
-          </a:prstGeom>
-          <a:noFill/>
-          <a:ln/>
-        </p:spPr>
-        <p:txBody>
-          <a:bodyPr wrap="square" rtlCol="0" anchor="ctr"/>
-          <a:lstStyle/>
-          <a:p>
-            <a:pPr algn="ctr" indent="0" marL="0">
-              <a:buNone/>
-            </a:pPr>
-            <a:r>
-              <a:rPr lang="en-US" sz="1100" b="1" dirty="0">
-                <a:solidFill>
-                  <a:srgbClr val="FFFFFF"/>
-                </a:solidFill>
-                <a:latin typeface="Calibri" pitchFamily="34" charset="0"/>
-                <a:ea typeface="Calibri" pitchFamily="34" charset="-122"/>
-                <a:cs typeface="Calibri" pitchFamily="34" charset="-120"/>
-              </a:rPr>
-              <a:t>1:10</a:t>
-            </a:r>
-            <a:endParaRPr lang="en-US" sz="1100" dirty="0"/>
-          </a:p>
-        </p:txBody>
-      </p:sp>
-      <p:sp>
-        <p:nvSpPr>
-          <p:cNvPr id="17" name="Text 15"/>
-          <p:cNvSpPr/>
-          <p:nvPr/>
-        </p:nvSpPr>
-        <p:spPr>
-          <a:xfrm>
-            <a:off x="1691640" y="3822192"/>
-            <a:ext cx="9646920" cy="566928"/>
-          </a:xfrm>
-          <a:prstGeom prst="rect">
-            <a:avLst/>
-          </a:prstGeom>
-          <a:noFill/>
-          <a:ln/>
-        </p:spPr>
-        <p:txBody>
-          <a:bodyPr wrap="square" rtlCol="0" anchor="ctr">
-            <a:spAutoFit/>
-          </a:bodyPr>
-          <a:lstStyle/>
-          <a:p>
-            <a:pPr indent="0" marL="0">
-              <a:buNone/>
-            </a:pPr>
-            <a:r>
-              <a:rPr lang="en-US" sz="1250" dirty="0">
-                <a:solidFill>
-                  <a:srgbClr val="1A1A1A"/>
-                </a:solidFill>
-                <a:latin typeface="Calibri" pitchFamily="34" charset="0"/>
-                <a:ea typeface="Calibri" pitchFamily="34" charset="-122"/>
-                <a:cs typeface="Calibri" pitchFamily="34" charset="-120"/>
-              </a:rPr>
-              <a:t>Break</a:t>
-            </a:r>
-            <a:endParaRPr lang="en-US" sz="1250" dirty="0"/>
-          </a:p>
-        </p:txBody>
-      </p:sp>
-      <p:sp>
-        <p:nvSpPr>
-          <p:cNvPr id="18" name="Shape 16"/>
-          <p:cNvSpPr/>
-          <p:nvPr/>
-        </p:nvSpPr>
-        <p:spPr>
-          <a:xfrm>
-            <a:off x="640080" y="4407408"/>
-            <a:ext cx="868680" cy="457200"/>
-          </a:xfrm>
-          <a:prstGeom prst="roundRect">
-            <a:avLst>
-              <a:gd name="adj" fmla="val 12000"/>
-            </a:avLst>
-          </a:prstGeom>
-          <a:solidFill>
-            <a:srgbClr val="7A3B2E"/>
-          </a:solidFill>
-          <a:ln/>
-        </p:spPr>
-      </p:sp>
-      <p:sp>
-        <p:nvSpPr>
-          <p:cNvPr id="19" name="Text 17"/>
-          <p:cNvSpPr/>
-          <p:nvPr/>
-        </p:nvSpPr>
-        <p:spPr>
-          <a:xfrm>
-            <a:off x="640080" y="4407408"/>
-            <a:ext cx="868680" cy="457200"/>
-          </a:xfrm>
-          <a:prstGeom prst="rect">
-            <a:avLst/>
-          </a:prstGeom>
-          <a:noFill/>
-          <a:ln/>
-        </p:spPr>
-        <p:txBody>
-          <a:bodyPr wrap="square" rtlCol="0" anchor="ctr"/>
-          <a:lstStyle/>
-          <a:p>
-            <a:pPr algn="ctr" indent="0" marL="0">
-              <a:buNone/>
-            </a:pPr>
-            <a:r>
-              <a:rPr lang="en-US" sz="1100" b="1" dirty="0">
-                <a:solidFill>
-                  <a:srgbClr val="FFFFFF"/>
-                </a:solidFill>
-                <a:latin typeface="Calibri" pitchFamily="34" charset="0"/>
-                <a:ea typeface="Calibri" pitchFamily="34" charset="-122"/>
-                <a:cs typeface="Calibri" pitchFamily="34" charset="-120"/>
-              </a:rPr>
-              <a:t>1:20</a:t>
-            </a:r>
-            <a:endParaRPr lang="en-US" sz="1100" dirty="0"/>
-          </a:p>
-        </p:txBody>
-      </p:sp>
-      <p:sp>
-        <p:nvSpPr>
-          <p:cNvPr id="20" name="Text 18"/>
-          <p:cNvSpPr/>
-          <p:nvPr/>
-        </p:nvSpPr>
-        <p:spPr>
-          <a:xfrm>
-            <a:off x="1691640" y="4389120"/>
-            <a:ext cx="9646920" cy="566928"/>
-          </a:xfrm>
-          <a:prstGeom prst="rect">
-            <a:avLst/>
-          </a:prstGeom>
-          <a:noFill/>
-          <a:ln/>
-        </p:spPr>
-        <p:txBody>
-          <a:bodyPr wrap="square" rtlCol="0" anchor="ctr">
-            <a:spAutoFit/>
-          </a:bodyPr>
-          <a:lstStyle/>
-          <a:p>
-            <a:pPr indent="0" marL="0">
-              <a:buNone/>
-            </a:pPr>
-            <a:r>
-              <a:rPr lang="en-US" sz="1250" dirty="0">
-                <a:solidFill>
-                  <a:srgbClr val="1A1A1A"/>
-                </a:solidFill>
-                <a:latin typeface="Calibri" pitchFamily="34" charset="0"/>
-                <a:ea typeface="Calibri" pitchFamily="34" charset="-122"/>
-                <a:cs typeface="Calibri" pitchFamily="34" charset="-120"/>
-              </a:rPr>
-              <a:t>Lab 2 (worked), count words, then pixels: first the top words of a small lyrics slice (stop-words drown the list until you remove them, your first counting choice), then an image corpus, ~200 Met thumbnails ranked darkest to brightest by average brightness. Text and pictures, counted with the same move; image projects start here.</a:t>
-            </a:r>
-            <a:endParaRPr lang="en-US" sz="1250" dirty="0"/>
-          </a:p>
-        </p:txBody>
-      </p:sp>
-      <p:sp>
-        <p:nvSpPr>
-          <p:cNvPr id="21" name="Shape 19"/>
-          <p:cNvSpPr/>
-          <p:nvPr/>
-        </p:nvSpPr>
-        <p:spPr>
-          <a:xfrm>
-            <a:off x="640080" y="4974336"/>
-            <a:ext cx="868680" cy="457200"/>
-          </a:xfrm>
-          <a:prstGeom prst="roundRect">
-            <a:avLst>
-              <a:gd name="adj" fmla="val 12000"/>
-            </a:avLst>
-          </a:prstGeom>
-          <a:solidFill>
-            <a:srgbClr val="7A3B2E"/>
-          </a:solidFill>
-          <a:ln/>
-        </p:spPr>
-      </p:sp>
-      <p:sp>
-        <p:nvSpPr>
-          <p:cNvPr id="22" name="Text 20"/>
-          <p:cNvSpPr/>
-          <p:nvPr/>
-        </p:nvSpPr>
-        <p:spPr>
-          <a:xfrm>
-            <a:off x="640080" y="4974336"/>
-            <a:ext cx="868680" cy="457200"/>
-          </a:xfrm>
-          <a:prstGeom prst="rect">
-            <a:avLst/>
-          </a:prstGeom>
-          <a:noFill/>
-          <a:ln/>
-        </p:spPr>
-        <p:txBody>
-          <a:bodyPr wrap="square" rtlCol="0" anchor="ctr"/>
-          <a:lstStyle/>
-          <a:p>
-            <a:pPr algn="ctr" indent="0" marL="0">
-              <a:buNone/>
-            </a:pPr>
-            <a:r>
-              <a:rPr lang="en-US" sz="1100" b="1" dirty="0">
-                <a:solidFill>
-                  <a:srgbClr val="FFFFFF"/>
-                </a:solidFill>
-                <a:latin typeface="Calibri" pitchFamily="34" charset="0"/>
-                <a:ea typeface="Calibri" pitchFamily="34" charset="-122"/>
-                <a:cs typeface="Calibri" pitchFamily="34" charset="-120"/>
-              </a:rPr>
-              <a:t>1:50</a:t>
-            </a:r>
-            <a:endParaRPr lang="en-US" sz="1100" dirty="0"/>
-          </a:p>
-        </p:txBody>
-      </p:sp>
-      <p:sp>
-        <p:nvSpPr>
-          <p:cNvPr id="23" name="Text 21"/>
-          <p:cNvSpPr/>
-          <p:nvPr/>
-        </p:nvSpPr>
-        <p:spPr>
-          <a:xfrm>
-            <a:off x="1691640" y="4956048"/>
-            <a:ext cx="9646920" cy="566928"/>
-          </a:xfrm>
-          <a:prstGeom prst="rect">
-            <a:avLst/>
-          </a:prstGeom>
-          <a:noFill/>
-          <a:ln/>
-        </p:spPr>
-        <p:txBody>
-          <a:bodyPr wrap="square" rtlCol="0" anchor="ctr">
-            <a:spAutoFit/>
-          </a:bodyPr>
-          <a:lstStyle/>
-          <a:p>
-            <a:pPr indent="0" marL="0">
-              <a:buNone/>
-            </a:pPr>
-            <a:r>
-              <a:rPr lang="en-US" sz="1250" dirty="0">
-                <a:solidFill>
-                  <a:srgbClr val="1A1A1A"/>
-                </a:solidFill>
-                <a:latin typeface="Calibri" pitchFamily="34" charset="0"/>
-                <a:ea typeface="Calibri" pitchFamily="34" charset="-122"/>
-                <a:cs typeface="Calibri" pitchFamily="34" charset="-120"/>
-              </a:rPr>
-              <a:t>Teaser of the ladder ahead; the standing rituals named. First check-out.</a:t>
-            </a:r>
-            <a:endParaRPr lang="en-US" sz="1250" dirty="0"/>
+              <a:t>Embedding: a few hundred numbers that place an item on a map of meaning. Week 5.</a:t>
+            </a:r>
+            <a:endParaRPr lang="en-US" sz="1650" dirty="0"/>
           </a:p>
         </p:txBody>
       </p:sp>
@@ -3731,14 +5914,34 @@
       </p:grpSpPr>
       <p:sp>
         <p:nvSpPr>
-          <p:cNvPr id="2" name="Text 0"/>
+          <p:cNvPr id="2" name="Shape 0"/>
+          <p:cNvSpPr/>
+          <p:nvPr/>
+        </p:nvSpPr>
+        <p:spPr>
+          <a:xfrm>
+            <a:off x="0" y="0"/>
+            <a:ext cx="164592" cy="6858000"/>
+          </a:xfrm>
+          <a:prstGeom prst="rect">
+            <a:avLst/>
+          </a:prstGeom>
+          <a:solidFill>
+            <a:srgbClr val="B9852F"/>
+          </a:solidFill>
+          <a:ln/>
+        </p:spPr>
+      </p:sp>
+      <p:sp>
+        <p:nvSpPr>
+          <p:cNvPr id="3" name="Text 1"/>
           <p:cNvSpPr/>
           <p:nvPr/>
         </p:nvSpPr>
         <p:spPr>
           <a:xfrm>
             <a:off x="640080" y="640080"/>
-            <a:ext cx="10058400" cy="731520"/>
+            <a:ext cx="10058400" cy="320040"/>
           </a:xfrm>
           <a:prstGeom prst="rect">
             <a:avLst/>
@@ -3748,6 +5951,47 @@
         </p:spPr>
         <p:txBody>
           <a:bodyPr wrap="square" rtlCol="0" anchor="ctr"/>
+          <a:lstStyle/>
+          <a:p>
+            <a:pPr indent="0" marL="0">
+              <a:buNone/>
+            </a:pPr>
+            <a:r>
+              <a:rPr lang="en-US" sz="1200" b="1" spc="300" kern="0" dirty="0">
+                <a:solidFill>
+                  <a:srgbClr val="B9852F"/>
+                </a:solidFill>
+                <a:latin typeface="Calibri" pitchFamily="34" charset="0"/>
+                <a:ea typeface="Calibri" pitchFamily="34" charset="-122"/>
+                <a:cs typeface="Calibri" pitchFamily="34" charset="-120"/>
+              </a:rPr>
+              <a:t>WEEK 1 · THE MATERIAL</a:t>
+            </a:r>
+            <a:endParaRPr lang="en-US" sz="1200" dirty="0"/>
+          </a:p>
+        </p:txBody>
+      </p:sp>
+      <p:sp>
+        <p:nvSpPr>
+          <p:cNvPr id="4" name="Text 2"/>
+          <p:cNvSpPr/>
+          <p:nvPr/>
+        </p:nvSpPr>
+        <p:spPr>
+          <a:xfrm>
+            <a:off x="640080" y="1005840"/>
+            <a:ext cx="10881360" cy="914400"/>
+          </a:xfrm>
+          <a:prstGeom prst="rect">
+            <a:avLst/>
+          </a:prstGeom>
+          <a:noFill/>
+          <a:ln/>
+        </p:spPr>
+        <p:txBody>
+          <a:bodyPr wrap="square" rtlCol="0" anchor="t">
+            <a:spAutoFit/>
+          </a:bodyPr>
           <a:lstStyle/>
           <a:p>
             <a:pPr indent="0" marL="0">
@@ -3762,7 +6006,7 @@
                 <a:ea typeface="Cambria" pitchFamily="34" charset="-122"/>
                 <a:cs typeface="Cambria" pitchFamily="34" charset="-120"/>
               </a:rPr>
-              <a:t>Reading &amp; homework</a:t>
+              <a:t>The Drive ritual (every week, no exceptions)</a:t>
             </a:r>
             <a:endParaRPr lang="en-US" sz="3000" dirty="0"/>
           </a:p>
@@ -3770,14 +6014,14 @@
       </p:sp>
       <p:sp>
         <p:nvSpPr>
-          <p:cNvPr id="3" name="Shape 1"/>
-          <p:cNvSpPr/>
-          <p:nvPr/>
-        </p:nvSpPr>
-        <p:spPr>
-          <a:xfrm>
-            <a:off x="640080" y="1810512"/>
-            <a:ext cx="219456" cy="219456"/>
+          <p:cNvPr id="5" name="Shape 3"/>
+          <p:cNvSpPr/>
+          <p:nvPr/>
+        </p:nvSpPr>
+        <p:spPr>
+          <a:xfrm>
+            <a:off x="640080" y="2331720"/>
+            <a:ext cx="201168" cy="201168"/>
           </a:xfrm>
           <a:prstGeom prst="ellipse">
             <a:avLst/>
@@ -3790,53 +6034,78 @@
       </p:sp>
       <p:sp>
         <p:nvSpPr>
-          <p:cNvPr id="4" name="Text 2"/>
-          <p:cNvSpPr/>
-          <p:nvPr/>
-        </p:nvSpPr>
-        <p:spPr>
-          <a:xfrm>
-            <a:off x="1051560" y="1737360"/>
-            <a:ext cx="10424160" cy="365760"/>
-          </a:xfrm>
-          <a:prstGeom prst="rect">
-            <a:avLst/>
-          </a:prstGeom>
-          <a:noFill/>
-          <a:ln/>
-        </p:spPr>
-        <p:txBody>
-          <a:bodyPr wrap="square" rtlCol="0" anchor="ctr"/>
+          <p:cNvPr id="6" name="Text 4"/>
+          <p:cNvSpPr/>
+          <p:nvPr/>
+        </p:nvSpPr>
+        <p:spPr>
+          <a:xfrm>
+            <a:off x="1097280" y="2240280"/>
+            <a:ext cx="10607040" cy="1017270"/>
+          </a:xfrm>
+          <a:prstGeom prst="rect">
+            <a:avLst/>
+          </a:prstGeom>
+          <a:noFill/>
+          <a:ln/>
+        </p:spPr>
+        <p:txBody>
+          <a:bodyPr wrap="square" rtlCol="0" anchor="t">
+            <a:spAutoFit/>
+          </a:bodyPr>
           <a:lstStyle/>
           <a:p>
             <a:pPr indent="0" marL="0">
-              <a:buNone/>
-            </a:pPr>
-            <a:r>
-              <a:rPr lang="en-US" sz="1500" b="1" dirty="0">
-                <a:solidFill>
-                  <a:srgbClr val="7A3B2E"/>
+              <a:lnSpc>
+                <a:spcPct val="112000"/>
+              </a:lnSpc>
+              <a:buNone/>
+            </a:pPr>
+            <a:r>
+              <a:rPr lang="en-US" sz="1650" dirty="0">
+                <a:solidFill>
+                  <a:srgbClr val="1A1A1A"/>
                 </a:solidFill>
                 <a:latin typeface="Calibri" pitchFamily="34" charset="0"/>
                 <a:ea typeface="Calibri" pitchFamily="34" charset="-122"/>
                 <a:cs typeface="Calibri" pitchFamily="34" charset="-120"/>
               </a:rPr>
-              <a:t>Reading</a:t>
-            </a:r>
-            <a:endParaRPr lang="en-US" sz="1500" dirty="0"/>
-          </a:p>
-        </p:txBody>
-      </p:sp>
-      <p:sp>
-        <p:nvSpPr>
-          <p:cNvPr id="5" name="Text 3"/>
-          <p:cNvSpPr/>
-          <p:nvPr/>
-        </p:nvSpPr>
-        <p:spPr>
-          <a:xfrm>
-            <a:off x="1051560" y="2121408"/>
-            <a:ext cx="10424160" cy="731520"/>
+              <a:t>Colab wipes its machine when you idle. Your mounted Drive folder is what survives.</a:t>
+            </a:r>
+            <a:endParaRPr lang="en-US" sz="1650" dirty="0"/>
+          </a:p>
+        </p:txBody>
+      </p:sp>
+      <p:sp>
+        <p:nvSpPr>
+          <p:cNvPr id="7" name="Shape 5"/>
+          <p:cNvSpPr/>
+          <p:nvPr/>
+        </p:nvSpPr>
+        <p:spPr>
+          <a:xfrm>
+            <a:off x="640080" y="3348990"/>
+            <a:ext cx="201168" cy="201168"/>
+          </a:xfrm>
+          <a:prstGeom prst="ellipse">
+            <a:avLst/>
+          </a:prstGeom>
+          <a:solidFill>
+            <a:srgbClr val="3F6F5F"/>
+          </a:solidFill>
+          <a:ln/>
+        </p:spPr>
+      </p:sp>
+      <p:sp>
+        <p:nvSpPr>
+          <p:cNvPr id="8" name="Text 6"/>
+          <p:cNvSpPr/>
+          <p:nvPr/>
+        </p:nvSpPr>
+        <p:spPr>
+          <a:xfrm>
+            <a:off x="1097280" y="3257550"/>
+            <a:ext cx="10607040" cy="1017270"/>
           </a:xfrm>
           <a:prstGeom prst="rect">
             <a:avLst/>
@@ -3851,10 +6120,13 @@
           <a:lstStyle/>
           <a:p>
             <a:pPr indent="0" marL="0">
-              <a:buNone/>
-            </a:pPr>
-            <a:r>
-              <a:rPr lang="en-US" sz="1400" dirty="0">
+              <a:lnSpc>
+                <a:spcPct val="112000"/>
+              </a:lnSpc>
+              <a:buNone/>
+            </a:pPr>
+            <a:r>
+              <a:rPr lang="en-US" sz="1650" dirty="0">
                 <a:solidFill>
                   <a:srgbClr val="1A1A1A"/>
                 </a:solidFill>
@@ -3862,81 +6134,106 @@
                 <a:ea typeface="Calibri" pitchFamily="34" charset="-122"/>
                 <a:cs typeface="Calibri" pitchFamily="34" charset="-120"/>
               </a:rPr>
-              <a:t>Bollen et al., the cognitive-distortions hockey stick (PNAS 2021), with the Schmidt et al. critique</a:t>
-            </a:r>
-            <a:endParaRPr lang="en-US" sz="1400" dirty="0"/>
-          </a:p>
-        </p:txBody>
-      </p:sp>
-      <p:sp>
-        <p:nvSpPr>
-          <p:cNvPr id="6" name="Shape 4"/>
-          <p:cNvSpPr/>
-          <p:nvPr/>
-        </p:nvSpPr>
-        <p:spPr>
-          <a:xfrm>
-            <a:off x="640080" y="2953512"/>
-            <a:ext cx="219456" cy="219456"/>
+              <a:t>Copy the notebook to Drive, mount Drive, save everything to the one project folder.</a:t>
+            </a:r>
+            <a:endParaRPr lang="en-US" sz="1650" dirty="0"/>
+          </a:p>
+        </p:txBody>
+      </p:sp>
+      <p:sp>
+        <p:nvSpPr>
+          <p:cNvPr id="9" name="Shape 7"/>
+          <p:cNvSpPr/>
+          <p:nvPr/>
+        </p:nvSpPr>
+        <p:spPr>
+          <a:xfrm>
+            <a:off x="640080" y="4366260"/>
+            <a:ext cx="201168" cy="201168"/>
           </a:xfrm>
           <a:prstGeom prst="ellipse">
             <a:avLst/>
           </a:prstGeom>
           <a:solidFill>
-            <a:srgbClr val="3F6F5F"/>
-          </a:solidFill>
-          <a:ln/>
-        </p:spPr>
-      </p:sp>
-      <p:sp>
-        <p:nvSpPr>
-          <p:cNvPr id="7" name="Text 5"/>
-          <p:cNvSpPr/>
-          <p:nvPr/>
-        </p:nvSpPr>
-        <p:spPr>
-          <a:xfrm>
-            <a:off x="1051560" y="2880360"/>
-            <a:ext cx="10424160" cy="365760"/>
-          </a:xfrm>
-          <a:prstGeom prst="rect">
-            <a:avLst/>
-          </a:prstGeom>
-          <a:noFill/>
-          <a:ln/>
-        </p:spPr>
-        <p:txBody>
-          <a:bodyPr wrap="square" rtlCol="0" anchor="ctr"/>
+            <a:srgbClr val="B9852F"/>
+          </a:solidFill>
+          <a:ln/>
+        </p:spPr>
+      </p:sp>
+      <p:sp>
+        <p:nvSpPr>
+          <p:cNvPr id="10" name="Text 8"/>
+          <p:cNvSpPr/>
+          <p:nvPr/>
+        </p:nvSpPr>
+        <p:spPr>
+          <a:xfrm>
+            <a:off x="1097280" y="4274820"/>
+            <a:ext cx="10607040" cy="1017270"/>
+          </a:xfrm>
+          <a:prstGeom prst="rect">
+            <a:avLst/>
+          </a:prstGeom>
+          <a:noFill/>
+          <a:ln/>
+        </p:spPr>
+        <p:txBody>
+          <a:bodyPr wrap="square" rtlCol="0" anchor="t">
+            <a:spAutoFit/>
+          </a:bodyPr>
           <a:lstStyle/>
           <a:p>
             <a:pPr indent="0" marL="0">
-              <a:buNone/>
-            </a:pPr>
-            <a:r>
-              <a:rPr lang="en-US" sz="1500" b="1" dirty="0">
-                <a:solidFill>
-                  <a:srgbClr val="3F6F5F"/>
+              <a:lnSpc>
+                <a:spcPct val="112000"/>
+              </a:lnSpc>
+              <a:buNone/>
+            </a:pPr>
+            <a:r>
+              <a:rPr lang="en-US" sz="1650" dirty="0">
+                <a:solidFill>
+                  <a:srgbClr val="1A1A1A"/>
                 </a:solidFill>
                 <a:latin typeface="Calibri" pitchFamily="34" charset="0"/>
                 <a:ea typeface="Calibri" pitchFamily="34" charset="-122"/>
                 <a:cs typeface="Calibri" pitchFamily="34" charset="-120"/>
               </a:rPr>
-              <a:t>Supplement</a:t>
-            </a:r>
-            <a:endParaRPr lang="en-US" sz="1500" dirty="0"/>
-          </a:p>
-        </p:txBody>
-      </p:sp>
-      <p:sp>
-        <p:nvSpPr>
-          <p:cNvPr id="8" name="Text 6"/>
-          <p:cNvSpPr/>
-          <p:nvPr/>
-        </p:nvSpPr>
-        <p:spPr>
-          <a:xfrm>
-            <a:off x="1051560" y="3264408"/>
-            <a:ext cx="10424160" cy="731520"/>
+              <a:t>Your Week-4 corpus has to be alive in Week 5. This ritual is how.</a:t>
+            </a:r>
+            <a:endParaRPr lang="en-US" sz="1650" dirty="0"/>
+          </a:p>
+        </p:txBody>
+      </p:sp>
+      <p:sp>
+        <p:nvSpPr>
+          <p:cNvPr id="11" name="Shape 9"/>
+          <p:cNvSpPr/>
+          <p:nvPr/>
+        </p:nvSpPr>
+        <p:spPr>
+          <a:xfrm>
+            <a:off x="640080" y="5383530"/>
+            <a:ext cx="201168" cy="201168"/>
+          </a:xfrm>
+          <a:prstGeom prst="ellipse">
+            <a:avLst/>
+          </a:prstGeom>
+          <a:solidFill>
+            <a:srgbClr val="7A3B2E"/>
+          </a:solidFill>
+          <a:ln/>
+        </p:spPr>
+      </p:sp>
+      <p:sp>
+        <p:nvSpPr>
+          <p:cNvPr id="12" name="Text 10"/>
+          <p:cNvSpPr/>
+          <p:nvPr/>
+        </p:nvSpPr>
+        <p:spPr>
+          <a:xfrm>
+            <a:off x="1097280" y="5292090"/>
+            <a:ext cx="10607040" cy="1017270"/>
           </a:xfrm>
           <a:prstGeom prst="rect">
             <a:avLst/>
@@ -3951,10 +6248,13 @@
           <a:lstStyle/>
           <a:p>
             <a:pPr indent="0" marL="0">
-              <a:buNone/>
-            </a:pPr>
-            <a:r>
-              <a:rPr lang="en-US" sz="1400" dirty="0">
+              <a:lnSpc>
+                <a:spcPct val="112000"/>
+              </a:lnSpc>
+              <a:buNone/>
+            </a:pPr>
+            <a:r>
+              <a:rPr lang="en-US" sz="1650" dirty="0">
                 <a:solidFill>
                   <a:srgbClr val="1A1A1A"/>
                 </a:solidFill>
@@ -3962,209 +6262,9 @@
                 <a:ea typeface="Calibri" pitchFamily="34" charset="-122"/>
                 <a:cs typeface="Calibri" pitchFamily="34" charset="-120"/>
               </a:rPr>
-              <a:t>Robin Sloan, Writing with the machine</a:t>
-            </a:r>
-            <a:endParaRPr lang="en-US" sz="1400" dirty="0"/>
-          </a:p>
-        </p:txBody>
-      </p:sp>
-      <p:sp>
-        <p:nvSpPr>
-          <p:cNvPr id="9" name="Shape 7"/>
-          <p:cNvSpPr/>
-          <p:nvPr/>
-        </p:nvSpPr>
-        <p:spPr>
-          <a:xfrm>
-            <a:off x="640080" y="4096512"/>
-            <a:ext cx="219456" cy="219456"/>
-          </a:xfrm>
-          <a:prstGeom prst="ellipse">
-            <a:avLst/>
-          </a:prstGeom>
-          <a:solidFill>
-            <a:srgbClr val="B9852F"/>
-          </a:solidFill>
-          <a:ln/>
-        </p:spPr>
-      </p:sp>
-      <p:sp>
-        <p:nvSpPr>
-          <p:cNvPr id="10" name="Text 8"/>
-          <p:cNvSpPr/>
-          <p:nvPr/>
-        </p:nvSpPr>
-        <p:spPr>
-          <a:xfrm>
-            <a:off x="1051560" y="4023360"/>
-            <a:ext cx="10424160" cy="365760"/>
-          </a:xfrm>
-          <a:prstGeom prst="rect">
-            <a:avLst/>
-          </a:prstGeom>
-          <a:noFill/>
-          <a:ln/>
-        </p:spPr>
-        <p:txBody>
-          <a:bodyPr wrap="square" rtlCol="0" anchor="ctr"/>
-          <a:lstStyle/>
-          <a:p>
-            <a:pPr indent="0" marL="0">
-              <a:buNone/>
-            </a:pPr>
-            <a:r>
-              <a:rPr lang="en-US" sz="1500" b="1" dirty="0">
-                <a:solidFill>
-                  <a:srgbClr val="B9852F"/>
-                </a:solidFill>
-                <a:latin typeface="Calibri" pitchFamily="34" charset="0"/>
-                <a:ea typeface="Calibri" pitchFamily="34" charset="-122"/>
-                <a:cs typeface="Calibri" pitchFamily="34" charset="-120"/>
-              </a:rPr>
-              <a:t>Sketch</a:t>
-            </a:r>
-            <a:endParaRPr lang="en-US" sz="1500" dirty="0"/>
-          </a:p>
-        </p:txBody>
-      </p:sp>
-      <p:sp>
-        <p:nvSpPr>
-          <p:cNvPr id="11" name="Text 9"/>
-          <p:cNvSpPr/>
-          <p:nvPr/>
-        </p:nvSpPr>
-        <p:spPr>
-          <a:xfrm>
-            <a:off x="1051560" y="4407408"/>
-            <a:ext cx="10424160" cy="731520"/>
-          </a:xfrm>
-          <a:prstGeom prst="rect">
-            <a:avLst/>
-          </a:prstGeom>
-          <a:noFill/>
-          <a:ln/>
-        </p:spPr>
-        <p:txBody>
-          <a:bodyPr wrap="square" rtlCol="0" anchor="t">
-            <a:spAutoFit/>
-          </a:bodyPr>
-          <a:lstStyle/>
-          <a:p>
-            <a:pPr indent="0" marL="0">
-              <a:buNone/>
-            </a:pPr>
-            <a:r>
-              <a:rPr lang="en-US" sz="1400" dirty="0">
-                <a:solidFill>
-                  <a:srgbClr val="1A1A1A"/>
-                </a:solidFill>
-                <a:latin typeface="Calibri" pitchFamily="34" charset="0"/>
-                <a:ea typeface="Calibri" pitchFamily="34" charset="-122"/>
-                <a:cs typeface="Calibri" pitchFamily="34" charset="-120"/>
-              </a:rPr>
-              <a:t>One question from your life answerable with text or image data; three sentences.</a:t>
-            </a:r>
-            <a:endParaRPr lang="en-US" sz="1400" dirty="0"/>
-          </a:p>
-        </p:txBody>
-      </p:sp>
-      <p:sp>
-        <p:nvSpPr>
-          <p:cNvPr id="12" name="Shape 10"/>
-          <p:cNvSpPr/>
-          <p:nvPr/>
-        </p:nvSpPr>
-        <p:spPr>
-          <a:xfrm>
-            <a:off x="640080" y="5239512"/>
-            <a:ext cx="219456" cy="219456"/>
-          </a:xfrm>
-          <a:prstGeom prst="ellipse">
-            <a:avLst/>
-          </a:prstGeom>
-          <a:solidFill>
-            <a:srgbClr val="7A3B2E"/>
-          </a:solidFill>
-          <a:ln/>
-        </p:spPr>
-      </p:sp>
-      <p:sp>
-        <p:nvSpPr>
-          <p:cNvPr id="13" name="Text 11"/>
-          <p:cNvSpPr/>
-          <p:nvPr/>
-        </p:nvSpPr>
-        <p:spPr>
-          <a:xfrm>
-            <a:off x="1051560" y="5166360"/>
-            <a:ext cx="10424160" cy="365760"/>
-          </a:xfrm>
-          <a:prstGeom prst="rect">
-            <a:avLst/>
-          </a:prstGeom>
-          <a:noFill/>
-          <a:ln/>
-        </p:spPr>
-        <p:txBody>
-          <a:bodyPr wrap="square" rtlCol="0" anchor="ctr"/>
-          <a:lstStyle/>
-          <a:p>
-            <a:pPr indent="0" marL="0">
-              <a:buNone/>
-            </a:pPr>
-            <a:r>
-              <a:rPr lang="en-US" sz="1500" b="1" dirty="0">
-                <a:solidFill>
-                  <a:srgbClr val="7A3B2E"/>
-                </a:solidFill>
-                <a:latin typeface="Calibri" pitchFamily="34" charset="0"/>
-                <a:ea typeface="Calibri" pitchFamily="34" charset="-122"/>
-                <a:cs typeface="Calibri" pitchFamily="34" charset="-120"/>
-              </a:rPr>
-              <a:t>Check (AI closed)</a:t>
-            </a:r>
-            <a:endParaRPr lang="en-US" sz="1500" dirty="0"/>
-          </a:p>
-        </p:txBody>
-      </p:sp>
-      <p:sp>
-        <p:nvSpPr>
-          <p:cNvPr id="14" name="Text 12"/>
-          <p:cNvSpPr/>
-          <p:nvPr/>
-        </p:nvSpPr>
-        <p:spPr>
-          <a:xfrm>
-            <a:off x="1051560" y="5550408"/>
-            <a:ext cx="10424160" cy="731520"/>
-          </a:xfrm>
-          <a:prstGeom prst="rect">
-            <a:avLst/>
-          </a:prstGeom>
-          <a:noFill/>
-          <a:ln/>
-        </p:spPr>
-        <p:txBody>
-          <a:bodyPr wrap="square" rtlCol="0" anchor="t">
-            <a:spAutoFit/>
-          </a:bodyPr>
-          <a:lstStyle/>
-          <a:p>
-            <a:pPr indent="0" marL="0">
-              <a:buNone/>
-            </a:pPr>
-            <a:r>
-              <a:rPr lang="en-US" sz="1400" dirty="0">
-                <a:solidFill>
-                  <a:srgbClr val="1A1A1A"/>
-                </a:solidFill>
-                <a:latin typeface="Calibri" pitchFamily="34" charset="0"/>
-                <a:ea typeface="Calibri" pitchFamily="34" charset="-122"/>
-                <a:cs typeface="Calibri" pitchFamily="34" charset="-120"/>
-              </a:rPr>
-              <a:t>Trace it: one written sentence predicting what your cell does before you run it. (Competency 1.)</a:t>
-            </a:r>
-            <a:endParaRPr lang="en-US" sz="1400" dirty="0"/>
+              <a:t>Gemini key goes in Colab Secrets. Never pasted into code.</a:t>
+            </a:r>
+            <a:endParaRPr lang="en-US" sz="1650" dirty="0"/>
           </a:p>
         </p:txBody>
       </p:sp>
@@ -4202,7 +6302,27 @@
       </p:grpSpPr>
       <p:sp>
         <p:nvSpPr>
-          <p:cNvPr id="2" name="Text 0"/>
+          <p:cNvPr id="2" name="Shape 0"/>
+          <p:cNvSpPr/>
+          <p:nvPr/>
+        </p:nvSpPr>
+        <p:spPr>
+          <a:xfrm>
+            <a:off x="0" y="0"/>
+            <a:ext cx="164592" cy="6858000"/>
+          </a:xfrm>
+          <a:prstGeom prst="rect">
+            <a:avLst/>
+          </a:prstGeom>
+          <a:solidFill>
+            <a:srgbClr val="7A3B2E"/>
+          </a:solidFill>
+          <a:ln/>
+        </p:spPr>
+      </p:sp>
+      <p:sp>
+        <p:nvSpPr>
+          <p:cNvPr id="3" name="Text 1"/>
           <p:cNvSpPr/>
           <p:nvPr/>
         </p:nvSpPr>
@@ -4225,7 +6345,7 @@
               <a:buNone/>
             </a:pPr>
             <a:r>
-              <a:rPr lang="en-US" sz="1300" b="1" spc="300" kern="0" dirty="0">
+              <a:rPr lang="en-US" sz="1200" b="1" spc="300" kern="0" dirty="0">
                 <a:solidFill>
                   <a:srgbClr val="7A3B2E"/>
                 </a:solidFill>
@@ -4233,38 +6353,40 @@
                 <a:ea typeface="Calibri" pitchFamily="34" charset="-122"/>
                 <a:cs typeface="Calibri" pitchFamily="34" charset="-120"/>
               </a:rPr>
-              <a:t>HOW THIS WEEK CONNECTS</a:t>
-            </a:r>
-            <a:endParaRPr lang="en-US" sz="1300" dirty="0"/>
-          </a:p>
-        </p:txBody>
-      </p:sp>
-      <p:sp>
-        <p:nvSpPr>
-          <p:cNvPr id="3" name="Text 1"/>
-          <p:cNvSpPr/>
-          <p:nvPr/>
-        </p:nvSpPr>
-        <p:spPr>
-          <a:xfrm>
-            <a:off x="640080" y="987552"/>
-            <a:ext cx="10058400" cy="640080"/>
-          </a:xfrm>
-          <a:prstGeom prst="rect">
-            <a:avLst/>
-          </a:prstGeom>
-          <a:noFill/>
-          <a:ln/>
-        </p:spPr>
-        <p:txBody>
-          <a:bodyPr wrap="square" rtlCol="0" anchor="ctr"/>
+              <a:t>WEEK 1 · THE MATERIAL</a:t>
+            </a:r>
+            <a:endParaRPr lang="en-US" sz="1200" dirty="0"/>
+          </a:p>
+        </p:txBody>
+      </p:sp>
+      <p:sp>
+        <p:nvSpPr>
+          <p:cNvPr id="4" name="Text 2"/>
+          <p:cNvSpPr/>
+          <p:nvPr/>
+        </p:nvSpPr>
+        <p:spPr>
+          <a:xfrm>
+            <a:off x="640080" y="1005840"/>
+            <a:ext cx="10881360" cy="914400"/>
+          </a:xfrm>
+          <a:prstGeom prst="rect">
+            <a:avLst/>
+          </a:prstGeom>
+          <a:noFill/>
+          <a:ln/>
+        </p:spPr>
+        <p:txBody>
+          <a:bodyPr wrap="square" rtlCol="0" anchor="t">
+            <a:spAutoFit/>
+          </a:bodyPr>
           <a:lstStyle/>
           <a:p>
             <a:pPr indent="0" marL="0">
               <a:buNone/>
             </a:pPr>
             <a:r>
-              <a:rPr lang="en-US" sz="2800" b="1" dirty="0">
+              <a:rPr lang="en-US" sz="3000" b="1" dirty="0">
                 <a:solidFill>
                   <a:srgbClr val="1A1A1A"/>
                 </a:solidFill>
@@ -4272,27 +6394,25 @@
                 <a:ea typeface="Cambria" pitchFamily="34" charset="-122"/>
                 <a:cs typeface="Cambria" pitchFamily="34" charset="-120"/>
               </a:rPr>
-              <a:t>The course's through-lines</a:t>
-            </a:r>
-            <a:endParaRPr lang="en-US" sz="2800" dirty="0"/>
-          </a:p>
-        </p:txBody>
-      </p:sp>
-      <p:sp>
-        <p:nvSpPr>
-          <p:cNvPr id="4" name="Shape 2"/>
-          <p:cNvSpPr/>
-          <p:nvPr/>
-        </p:nvSpPr>
-        <p:spPr>
-          <a:xfrm>
-            <a:off x="640080" y="2057400"/>
-            <a:ext cx="457200" cy="457200"/>
-          </a:xfrm>
-          <a:prstGeom prst="roundRect">
-            <a:avLst>
-              <a:gd name="adj" fmla="val 16000"/>
-            </a:avLst>
+              <a:t>When code errors (it will, today, on purpose)</a:t>
+            </a:r>
+            <a:endParaRPr lang="en-US" sz="3000" dirty="0"/>
+          </a:p>
+        </p:txBody>
+      </p:sp>
+      <p:sp>
+        <p:nvSpPr>
+          <p:cNvPr id="5" name="Shape 3"/>
+          <p:cNvSpPr/>
+          <p:nvPr/>
+        </p:nvSpPr>
+        <p:spPr>
+          <a:xfrm>
+            <a:off x="640080" y="2331720"/>
+            <a:ext cx="201168" cy="201168"/>
+          </a:xfrm>
+          <a:prstGeom prst="ellipse">
+            <a:avLst/>
           </a:prstGeom>
           <a:solidFill>
             <a:srgbClr val="7A3B2E"/>
@@ -4302,92 +6422,14 @@
       </p:sp>
       <p:sp>
         <p:nvSpPr>
-          <p:cNvPr id="5" name="Text 3"/>
-          <p:cNvSpPr/>
-          <p:nvPr/>
-        </p:nvSpPr>
-        <p:spPr>
-          <a:xfrm>
-            <a:off x="640080" y="2057400"/>
-            <a:ext cx="457200" cy="457200"/>
-          </a:xfrm>
-          <a:prstGeom prst="rect">
-            <a:avLst/>
-          </a:prstGeom>
-          <a:noFill/>
-          <a:ln/>
-        </p:spPr>
-        <p:txBody>
-          <a:bodyPr wrap="square" rtlCol="0" anchor="ctr"/>
-          <a:lstStyle/>
-          <a:p>
-            <a:pPr algn="ctr" indent="0" marL="0">
-              <a:buNone/>
-            </a:pPr>
-            <a:r>
-              <a:rPr lang="en-US" sz="2000" b="1" dirty="0">
-                <a:solidFill>
-                  <a:srgbClr val="FFFFFF"/>
-                </a:solidFill>
-                <a:latin typeface="Cambria" pitchFamily="34" charset="0"/>
-                <a:ea typeface="Cambria" pitchFamily="34" charset="-122"/>
-                <a:cs typeface="Cambria" pitchFamily="34" charset="-120"/>
-              </a:rPr>
-              <a:t>1</a:t>
-            </a:r>
-            <a:endParaRPr lang="en-US" sz="2000" dirty="0"/>
-          </a:p>
-        </p:txBody>
-      </p:sp>
-      <p:sp>
-        <p:nvSpPr>
           <p:cNvPr id="6" name="Text 4"/>
           <p:cNvSpPr/>
           <p:nvPr/>
         </p:nvSpPr>
         <p:spPr>
           <a:xfrm>
-            <a:off x="1371600" y="2020824"/>
-            <a:ext cx="10332720" cy="411480"/>
-          </a:xfrm>
-          <a:prstGeom prst="rect">
-            <a:avLst/>
-          </a:prstGeom>
-          <a:noFill/>
-          <a:ln/>
-        </p:spPr>
-        <p:txBody>
-          <a:bodyPr wrap="square" rtlCol="0" anchor="ctr"/>
-          <a:lstStyle/>
-          <a:p>
-            <a:pPr indent="0" marL="0">
-              <a:buNone/>
-            </a:pPr>
-            <a:r>
-              <a:rPr lang="en-US" sz="1900" b="1" dirty="0">
-                <a:solidFill>
-                  <a:srgbClr val="7A3B2E"/>
-                </a:solidFill>
-                <a:latin typeface="Cambria" pitchFamily="34" charset="0"/>
-                <a:ea typeface="Cambria" pitchFamily="34" charset="-122"/>
-                <a:cs typeface="Cambria" pitchFamily="34" charset="-120"/>
-              </a:rPr>
-              <a:t>Read work critically</a:t>
-            </a:r>
-            <a:endParaRPr lang="en-US" sz="1900" dirty="0"/>
-          </a:p>
-        </p:txBody>
-      </p:sp>
-      <p:sp>
-        <p:nvSpPr>
-          <p:cNvPr id="7" name="Text 5"/>
-          <p:cNvSpPr/>
-          <p:nvPr/>
-        </p:nvSpPr>
-        <p:spPr>
-          <a:xfrm>
-            <a:off x="1371600" y="2441448"/>
-            <a:ext cx="10332720" cy="914400"/>
+            <a:off x="1097280" y="2240280"/>
+            <a:ext cx="10607040" cy="1017270"/>
           </a:xfrm>
           <a:prstGeom prst="rect">
             <a:avLst/>
@@ -4408,7 +6450,7 @@
               <a:buNone/>
             </a:pPr>
             <a:r>
-              <a:rPr lang="en-US" sz="1450" dirty="0">
+              <a:rPr lang="en-US" sz="1650" dirty="0">
                 <a:solidFill>
                   <a:srgbClr val="1A1A1A"/>
                 </a:solidFill>
@@ -4416,27 +6458,25 @@
                 <a:ea typeface="Calibri" pitchFamily="34" charset="-122"/>
                 <a:cs typeface="Calibri" pitchFamily="34" charset="-120"/>
               </a:rPr>
-              <a:t>She Giggles, He Gallops is great and its choices are arguable. We admire and interrogate at once, the habit the whole course turns on.</a:t>
-            </a:r>
-            <a:endParaRPr lang="en-US" sz="1450" dirty="0"/>
-          </a:p>
-        </p:txBody>
-      </p:sp>
-      <p:sp>
-        <p:nvSpPr>
-          <p:cNvPr id="8" name="Shape 6"/>
-          <p:cNvSpPr/>
-          <p:nvPr/>
-        </p:nvSpPr>
-        <p:spPr>
-          <a:xfrm>
-            <a:off x="640080" y="3520440"/>
-            <a:ext cx="457200" cy="457200"/>
-          </a:xfrm>
-          <a:prstGeom prst="roundRect">
-            <a:avLst>
-              <a:gd name="adj" fmla="val 16000"/>
-            </a:avLst>
+              <a:t>Read the LAST line of the traceback first. It names the problem.</a:t>
+            </a:r>
+            <a:endParaRPr lang="en-US" sz="1650" dirty="0"/>
+          </a:p>
+        </p:txBody>
+      </p:sp>
+      <p:sp>
+        <p:nvSpPr>
+          <p:cNvPr id="7" name="Shape 5"/>
+          <p:cNvSpPr/>
+          <p:nvPr/>
+        </p:nvSpPr>
+        <p:spPr>
+          <a:xfrm>
+            <a:off x="640080" y="3348990"/>
+            <a:ext cx="201168" cy="201168"/>
+          </a:xfrm>
+          <a:prstGeom prst="ellipse">
+            <a:avLst/>
           </a:prstGeom>
           <a:solidFill>
             <a:srgbClr val="3F6F5F"/>
@@ -4446,92 +6486,14 @@
       </p:sp>
       <p:sp>
         <p:nvSpPr>
-          <p:cNvPr id="9" name="Text 7"/>
-          <p:cNvSpPr/>
-          <p:nvPr/>
-        </p:nvSpPr>
-        <p:spPr>
-          <a:xfrm>
-            <a:off x="640080" y="3520440"/>
-            <a:ext cx="457200" cy="457200"/>
-          </a:xfrm>
-          <a:prstGeom prst="rect">
-            <a:avLst/>
-          </a:prstGeom>
-          <a:noFill/>
-          <a:ln/>
-        </p:spPr>
-        <p:txBody>
-          <a:bodyPr wrap="square" rtlCol="0" anchor="ctr"/>
-          <a:lstStyle/>
-          <a:p>
-            <a:pPr algn="ctr" indent="0" marL="0">
-              <a:buNone/>
-            </a:pPr>
-            <a:r>
-              <a:rPr lang="en-US" sz="2000" b="1" dirty="0">
-                <a:solidFill>
-                  <a:srgbClr val="FFFFFF"/>
-                </a:solidFill>
-                <a:latin typeface="Cambria" pitchFamily="34" charset="0"/>
-                <a:ea typeface="Cambria" pitchFamily="34" charset="-122"/>
-                <a:cs typeface="Cambria" pitchFamily="34" charset="-120"/>
-              </a:rPr>
-              <a:t>2</a:t>
-            </a:r>
-            <a:endParaRPr lang="en-US" sz="2000" dirty="0"/>
-          </a:p>
-        </p:txBody>
-      </p:sp>
-      <p:sp>
-        <p:nvSpPr>
-          <p:cNvPr id="10" name="Text 8"/>
-          <p:cNvSpPr/>
-          <p:nvPr/>
-        </p:nvSpPr>
-        <p:spPr>
-          <a:xfrm>
-            <a:off x="1371600" y="3483864"/>
-            <a:ext cx="10332720" cy="411480"/>
-          </a:xfrm>
-          <a:prstGeom prst="rect">
-            <a:avLst/>
-          </a:prstGeom>
-          <a:noFill/>
-          <a:ln/>
-        </p:spPr>
-        <p:txBody>
-          <a:bodyPr wrap="square" rtlCol="0" anchor="ctr"/>
-          <a:lstStyle/>
-          <a:p>
-            <a:pPr indent="0" marL="0">
-              <a:buNone/>
-            </a:pPr>
-            <a:r>
-              <a:rPr lang="en-US" sz="1900" b="1" dirty="0">
-                <a:solidFill>
-                  <a:srgbClr val="3F6F5F"/>
-                </a:solidFill>
-                <a:latin typeface="Cambria" pitchFamily="34" charset="0"/>
-                <a:ea typeface="Cambria" pitchFamily="34" charset="-122"/>
-                <a:cs typeface="Cambria" pitchFamily="34" charset="-120"/>
-              </a:rPr>
-              <a:t>Make something real</a:t>
-            </a:r>
-            <a:endParaRPr lang="en-US" sz="1900" dirty="0"/>
-          </a:p>
-        </p:txBody>
-      </p:sp>
-      <p:sp>
-        <p:nvSpPr>
-          <p:cNvPr id="11" name="Text 9"/>
-          <p:cNvSpPr/>
-          <p:nvPr/>
-        </p:nvSpPr>
-        <p:spPr>
-          <a:xfrm>
-            <a:off x="1371600" y="3904488"/>
-            <a:ext cx="10332720" cy="914400"/>
+          <p:cNvPr id="8" name="Text 6"/>
+          <p:cNvSpPr/>
+          <p:nvPr/>
+        </p:nvSpPr>
+        <p:spPr>
+          <a:xfrm>
+            <a:off x="1097280" y="3257550"/>
+            <a:ext cx="10607040" cy="1017270"/>
           </a:xfrm>
           <a:prstGeom prst="rect">
             <a:avLst/>
@@ -4552,7 +6514,7 @@
               <a:buNone/>
             </a:pPr>
             <a:r>
-              <a:rPr lang="en-US" sz="1450" dirty="0">
+              <a:rPr lang="en-US" sz="1650" dirty="0">
                 <a:solidFill>
                   <a:srgbClr val="1A1A1A"/>
                 </a:solidFill>
@@ -4560,27 +6522,25 @@
                 <a:ea typeface="Calibri" pitchFamily="34" charset="-122"/>
                 <a:cs typeface="Calibri" pitchFamily="34" charset="-120"/>
               </a:rPr>
-              <a:t>A complete investigation by the first break, before any theory.</a:t>
-            </a:r>
-            <a:endParaRPr lang="en-US" sz="1450" dirty="0"/>
-          </a:p>
-        </p:txBody>
-      </p:sp>
-      <p:sp>
-        <p:nvSpPr>
-          <p:cNvPr id="12" name="Shape 10"/>
-          <p:cNvSpPr/>
-          <p:nvPr/>
-        </p:nvSpPr>
-        <p:spPr>
-          <a:xfrm>
-            <a:off x="640080" y="4983480"/>
-            <a:ext cx="457200" cy="457200"/>
-          </a:xfrm>
-          <a:prstGeom prst="roundRect">
-            <a:avLst>
-              <a:gd name="adj" fmla="val 16000"/>
-            </a:avLst>
+              <a:t>Paste it to the AI: "this errored, fix it and tell me what went wrong."</a:t>
+            </a:r>
+            <a:endParaRPr lang="en-US" sz="1650" dirty="0"/>
+          </a:p>
+        </p:txBody>
+      </p:sp>
+      <p:sp>
+        <p:nvSpPr>
+          <p:cNvPr id="9" name="Shape 7"/>
+          <p:cNvSpPr/>
+          <p:nvPr/>
+        </p:nvSpPr>
+        <p:spPr>
+          <a:xfrm>
+            <a:off x="640080" y="4366260"/>
+            <a:ext cx="201168" cy="201168"/>
+          </a:xfrm>
+          <a:prstGeom prst="ellipse">
+            <a:avLst/>
           </a:prstGeom>
           <a:solidFill>
             <a:srgbClr val="B9852F"/>
@@ -4590,92 +6550,14 @@
       </p:sp>
       <p:sp>
         <p:nvSpPr>
-          <p:cNvPr id="13" name="Text 11"/>
-          <p:cNvSpPr/>
-          <p:nvPr/>
-        </p:nvSpPr>
-        <p:spPr>
-          <a:xfrm>
-            <a:off x="640080" y="4983480"/>
-            <a:ext cx="457200" cy="457200"/>
-          </a:xfrm>
-          <a:prstGeom prst="rect">
-            <a:avLst/>
-          </a:prstGeom>
-          <a:noFill/>
-          <a:ln/>
-        </p:spPr>
-        <p:txBody>
-          <a:bodyPr wrap="square" rtlCol="0" anchor="ctr"/>
-          <a:lstStyle/>
-          <a:p>
-            <a:pPr algn="ctr" indent="0" marL="0">
-              <a:buNone/>
-            </a:pPr>
-            <a:r>
-              <a:rPr lang="en-US" sz="2000" b="1" dirty="0">
-                <a:solidFill>
-                  <a:srgbClr val="FFFFFF"/>
-                </a:solidFill>
-                <a:latin typeface="Cambria" pitchFamily="34" charset="0"/>
-                <a:ea typeface="Cambria" pitchFamily="34" charset="-122"/>
-                <a:cs typeface="Cambria" pitchFamily="34" charset="-120"/>
-              </a:rPr>
-              <a:t>3</a:t>
-            </a:r>
-            <a:endParaRPr lang="en-US" sz="2000" dirty="0"/>
-          </a:p>
-        </p:txBody>
-      </p:sp>
-      <p:sp>
-        <p:nvSpPr>
-          <p:cNvPr id="14" name="Text 12"/>
-          <p:cNvSpPr/>
-          <p:nvPr/>
-        </p:nvSpPr>
-        <p:spPr>
-          <a:xfrm>
-            <a:off x="1371600" y="4946904"/>
-            <a:ext cx="10332720" cy="411480"/>
-          </a:xfrm>
-          <a:prstGeom prst="rect">
-            <a:avLst/>
-          </a:prstGeom>
-          <a:noFill/>
-          <a:ln/>
-        </p:spPr>
-        <p:txBody>
-          <a:bodyPr wrap="square" rtlCol="0" anchor="ctr"/>
-          <a:lstStyle/>
-          <a:p>
-            <a:pPr indent="0" marL="0">
-              <a:buNone/>
-            </a:pPr>
-            <a:r>
-              <a:rPr lang="en-US" sz="1900" b="1" dirty="0">
-                <a:solidFill>
-                  <a:srgbClr val="B9852F"/>
-                </a:solidFill>
-                <a:latin typeface="Cambria" pitchFamily="34" charset="0"/>
-                <a:ea typeface="Cambria" pitchFamily="34" charset="-122"/>
-                <a:cs typeface="Cambria" pitchFamily="34" charset="-120"/>
-              </a:rPr>
-              <a:t>Images are culture too</a:t>
-            </a:r>
-            <a:endParaRPr lang="en-US" sz="1900" dirty="0"/>
-          </a:p>
-        </p:txBody>
-      </p:sp>
-      <p:sp>
-        <p:nvSpPr>
-          <p:cNvPr id="15" name="Text 13"/>
-          <p:cNvSpPr/>
-          <p:nvPr/>
-        </p:nvSpPr>
-        <p:spPr>
-          <a:xfrm>
-            <a:off x="1371600" y="5367528"/>
-            <a:ext cx="10332720" cy="914400"/>
+          <p:cNvPr id="10" name="Text 8"/>
+          <p:cNvSpPr/>
+          <p:nvPr/>
+        </p:nvSpPr>
+        <p:spPr>
+          <a:xfrm>
+            <a:off x="1097280" y="4274820"/>
+            <a:ext cx="10607040" cy="1017270"/>
           </a:xfrm>
           <a:prstGeom prst="rect">
             <a:avLst/>
@@ -4696,7 +6578,7 @@
               <a:buNone/>
             </a:pPr>
             <a:r>
-              <a:rPr lang="en-US" sz="1450" dirty="0">
+              <a:rPr lang="en-US" sz="1650" dirty="0">
                 <a:solidFill>
                   <a:srgbClr val="1A1A1A"/>
                 </a:solidFill>
@@ -4704,9 +6586,73 @@
                 <a:ea typeface="Calibri" pitchFamily="34" charset="-122"/>
                 <a:cs typeface="Calibri" pitchFamily="34" charset="-120"/>
               </a:rPr>
-              <a:t>A picture is numbers: you counted pixels on day one, and images ride along as a co-equal corpus all ten weeks.</a:t>
-            </a:r>
-            <a:endParaRPr lang="en-US" sz="1450" dirty="0"/>
+              <a:t>Try twice. Then ask a human. That order.</a:t>
+            </a:r>
+            <a:endParaRPr lang="en-US" sz="1650" dirty="0"/>
+          </a:p>
+        </p:txBody>
+      </p:sp>
+      <p:sp>
+        <p:nvSpPr>
+          <p:cNvPr id="11" name="Shape 9"/>
+          <p:cNvSpPr/>
+          <p:nvPr/>
+        </p:nvSpPr>
+        <p:spPr>
+          <a:xfrm>
+            <a:off x="640080" y="5383530"/>
+            <a:ext cx="201168" cy="201168"/>
+          </a:xfrm>
+          <a:prstGeom prst="ellipse">
+            <a:avLst/>
+          </a:prstGeom>
+          <a:solidFill>
+            <a:srgbClr val="7A3B2E"/>
+          </a:solidFill>
+          <a:ln/>
+        </p:spPr>
+      </p:sp>
+      <p:sp>
+        <p:nvSpPr>
+          <p:cNvPr id="12" name="Text 10"/>
+          <p:cNvSpPr/>
+          <p:nvPr/>
+        </p:nvSpPr>
+        <p:spPr>
+          <a:xfrm>
+            <a:off x="1097280" y="5292090"/>
+            <a:ext cx="10607040" cy="1017270"/>
+          </a:xfrm>
+          <a:prstGeom prst="rect">
+            <a:avLst/>
+          </a:prstGeom>
+          <a:noFill/>
+          <a:ln/>
+        </p:spPr>
+        <p:txBody>
+          <a:bodyPr wrap="square" rtlCol="0" anchor="t">
+            <a:spAutoFit/>
+          </a:bodyPr>
+          <a:lstStyle/>
+          <a:p>
+            <a:pPr indent="0" marL="0">
+              <a:lnSpc>
+                <a:spcPct val="112000"/>
+              </a:lnSpc>
+              <a:buNone/>
+            </a:pPr>
+            <a:r>
+              <a:rPr lang="en-US" sz="1650" dirty="0">
+                <a:solidFill>
+                  <a:srgbClr val="1A1A1A"/>
+                </a:solidFill>
+                <a:latin typeface="Calibri" pitchFamily="34" charset="0"/>
+                <a:ea typeface="Calibri" pitchFamily="34" charset="-122"/>
+                <a:cs typeface="Calibri" pitchFamily="34" charset="-120"/>
+              </a:rPr>
+              <a:t>Keep the cheat sheet out. Nobody memorizes error messages; everybody reads them.</a:t>
+            </a:r>
+            <a:endParaRPr lang="en-US" sz="1650" dirty="0"/>
           </a:p>
         </p:txBody>
       </p:sp>
@@ -4724,7 +6670,7 @@
     <p:bg>
       <p:bgPr>
         <a:solidFill>
-          <a:srgbClr val="4E261D"/>
+          <a:srgbClr val="FFFFFF"/>
         </a:solidFill>
       </p:bgPr>
     </p:bg>
@@ -4744,14 +6690,34 @@
       </p:grpSpPr>
       <p:sp>
         <p:nvSpPr>
-          <p:cNvPr id="2" name="Text 0"/>
-          <p:cNvSpPr/>
-          <p:nvPr/>
-        </p:nvSpPr>
-        <p:spPr>
-          <a:xfrm>
-            <a:off x="640080" y="1005840"/>
-            <a:ext cx="8229600" cy="320040"/>
+          <p:cNvPr id="2" name="Shape 0"/>
+          <p:cNvSpPr/>
+          <p:nvPr/>
+        </p:nvSpPr>
+        <p:spPr>
+          <a:xfrm>
+            <a:off x="0" y="0"/>
+            <a:ext cx="164592" cy="6858000"/>
+          </a:xfrm>
+          <a:prstGeom prst="rect">
+            <a:avLst/>
+          </a:prstGeom>
+          <a:solidFill>
+            <a:srgbClr val="3F6F5F"/>
+          </a:solidFill>
+          <a:ln/>
+        </p:spPr>
+      </p:sp>
+      <p:sp>
+        <p:nvSpPr>
+          <p:cNvPr id="3" name="Text 1"/>
+          <p:cNvSpPr/>
+          <p:nvPr/>
+        </p:nvSpPr>
+        <p:spPr>
+          <a:xfrm>
+            <a:off x="640080" y="640080"/>
+            <a:ext cx="10058400" cy="320040"/>
           </a:xfrm>
           <a:prstGeom prst="rect">
             <a:avLst/>
@@ -4767,17 +6733,385 @@
               <a:buNone/>
             </a:pPr>
             <a:r>
-              <a:rPr lang="en-US" sz="1300" b="1" spc="300" kern="0" dirty="0">
-                <a:solidFill>
-                  <a:srgbClr val="B9852F"/>
+              <a:rPr lang="en-US" sz="1200" b="1" spc="300" kern="0" dirty="0">
+                <a:solidFill>
+                  <a:srgbClr val="3F6F5F"/>
                 </a:solidFill>
                 <a:latin typeface="Calibri" pitchFamily="34" charset="0"/>
                 <a:ea typeface="Calibri" pitchFamily="34" charset="-122"/>
                 <a:cs typeface="Calibri" pitchFamily="34" charset="-120"/>
               </a:rPr>
-              <a:t>THE CHECK, AI CLOSED</a:t>
-            </a:r>
-            <a:endParaRPr lang="en-US" sz="1300" dirty="0"/>
+              <a:t>WEEK 1 · THE MATERIAL</a:t>
+            </a:r>
+            <a:endParaRPr lang="en-US" sz="1200" dirty="0"/>
+          </a:p>
+        </p:txBody>
+      </p:sp>
+      <p:sp>
+        <p:nvSpPr>
+          <p:cNvPr id="4" name="Text 2"/>
+          <p:cNvSpPr/>
+          <p:nvPr/>
+        </p:nvSpPr>
+        <p:spPr>
+          <a:xfrm>
+            <a:off x="640080" y="1005840"/>
+            <a:ext cx="10881360" cy="914400"/>
+          </a:xfrm>
+          <a:prstGeom prst="rect">
+            <a:avLst/>
+          </a:prstGeom>
+          <a:noFill/>
+          <a:ln/>
+        </p:spPr>
+        <p:txBody>
+          <a:bodyPr wrap="square" rtlCol="0" anchor="t">
+            <a:spAutoFit/>
+          </a:bodyPr>
+          <a:lstStyle/>
+          <a:p>
+            <a:pPr indent="0" marL="0">
+              <a:buNone/>
+            </a:pPr>
+            <a:r>
+              <a:rPr lang="en-US" sz="3000" b="1" dirty="0">
+                <a:solidFill>
+                  <a:srgbClr val="1A1A1A"/>
+                </a:solidFill>
+                <a:latin typeface="Cambria" pitchFamily="34" charset="0"/>
+                <a:ea typeface="Cambria" pitchFamily="34" charset="-122"/>
+                <a:cs typeface="Cambria" pitchFamily="34" charset="-120"/>
+              </a:rPr>
+              <a:t>Counting, three shapes</a:t>
+            </a:r>
+            <a:endParaRPr lang="en-US" sz="3000" dirty="0"/>
+          </a:p>
+        </p:txBody>
+      </p:sp>
+      <p:sp>
+        <p:nvSpPr>
+          <p:cNvPr id="5" name="Shape 3"/>
+          <p:cNvSpPr/>
+          <p:nvPr/>
+        </p:nvSpPr>
+        <p:spPr>
+          <a:xfrm>
+            <a:off x="640080" y="2331720"/>
+            <a:ext cx="201168" cy="201168"/>
+          </a:xfrm>
+          <a:prstGeom prst="ellipse">
+            <a:avLst/>
+          </a:prstGeom>
+          <a:solidFill>
+            <a:srgbClr val="7A3B2E"/>
+          </a:solidFill>
+          <a:ln/>
+        </p:spPr>
+      </p:sp>
+      <p:sp>
+        <p:nvSpPr>
+          <p:cNvPr id="6" name="Text 4"/>
+          <p:cNvSpPr/>
+          <p:nvPr/>
+        </p:nvSpPr>
+        <p:spPr>
+          <a:xfrm>
+            <a:off x="1097280" y="2240280"/>
+            <a:ext cx="10607040" cy="1017270"/>
+          </a:xfrm>
+          <a:prstGeom prst="rect">
+            <a:avLst/>
+          </a:prstGeom>
+          <a:noFill/>
+          <a:ln/>
+        </p:spPr>
+        <p:txBody>
+          <a:bodyPr wrap="square" rtlCol="0" anchor="t">
+            <a:spAutoFit/>
+          </a:bodyPr>
+          <a:lstStyle/>
+          <a:p>
+            <a:pPr indent="0" marL="0">
+              <a:lnSpc>
+                <a:spcPct val="112000"/>
+              </a:lnSpc>
+              <a:buNone/>
+            </a:pPr>
+            <a:r>
+              <a:rPr lang="en-US" sz="1650" dirty="0">
+                <a:solidFill>
+                  <a:srgbClr val="1A1A1A"/>
+                </a:solidFill>
+                <a:latin typeface="Calibri" pitchFamily="34" charset="0"/>
+                <a:ea typeface="Calibri" pitchFamily="34" charset="-122"/>
+                <a:cs typeface="Calibri" pitchFamily="34" charset="-120"/>
+              </a:rPr>
+              <a:t>Rows: what share of brides kept their name, year by year. One groupby, one chart.</a:t>
+            </a:r>
+            <a:endParaRPr lang="en-US" sz="1650" dirty="0"/>
+          </a:p>
+        </p:txBody>
+      </p:sp>
+      <p:sp>
+        <p:nvSpPr>
+          <p:cNvPr id="7" name="Shape 5"/>
+          <p:cNvSpPr/>
+          <p:nvPr/>
+        </p:nvSpPr>
+        <p:spPr>
+          <a:xfrm>
+            <a:off x="640080" y="3348990"/>
+            <a:ext cx="201168" cy="201168"/>
+          </a:xfrm>
+          <a:prstGeom prst="ellipse">
+            <a:avLst/>
+          </a:prstGeom>
+          <a:solidFill>
+            <a:srgbClr val="3F6F5F"/>
+          </a:solidFill>
+          <a:ln/>
+        </p:spPr>
+      </p:sp>
+      <p:sp>
+        <p:nvSpPr>
+          <p:cNvPr id="8" name="Text 6"/>
+          <p:cNvSpPr/>
+          <p:nvPr/>
+        </p:nvSpPr>
+        <p:spPr>
+          <a:xfrm>
+            <a:off x="1097280" y="3257550"/>
+            <a:ext cx="10607040" cy="1017270"/>
+          </a:xfrm>
+          <a:prstGeom prst="rect">
+            <a:avLst/>
+          </a:prstGeom>
+          <a:noFill/>
+          <a:ln/>
+        </p:spPr>
+        <p:txBody>
+          <a:bodyPr wrap="square" rtlCol="0" anchor="t">
+            <a:spAutoFit/>
+          </a:bodyPr>
+          <a:lstStyle/>
+          <a:p>
+            <a:pPr indent="0" marL="0">
+              <a:lnSpc>
+                <a:spcPct val="112000"/>
+              </a:lnSpc>
+              <a:buNone/>
+            </a:pPr>
+            <a:r>
+              <a:rPr lang="en-US" sz="1650" dirty="0">
+                <a:solidFill>
+                  <a:srgbClr val="1A1A1A"/>
+                </a:solidFill>
+                <a:latin typeface="Calibri" pitchFamily="34" charset="0"/>
+                <a:ea typeface="Calibri" pitchFamily="34" charset="-122"/>
+                <a:cs typeface="Calibri" pitchFamily="34" charset="-120"/>
+              </a:rPr>
+              <a:t>Words: the top words of a lyric are "the, and, you" until you remove stop-words. That removal is your first modeling choice.</a:t>
+            </a:r>
+            <a:endParaRPr lang="en-US" sz="1650" dirty="0"/>
+          </a:p>
+        </p:txBody>
+      </p:sp>
+      <p:sp>
+        <p:nvSpPr>
+          <p:cNvPr id="9" name="Shape 7"/>
+          <p:cNvSpPr/>
+          <p:nvPr/>
+        </p:nvSpPr>
+        <p:spPr>
+          <a:xfrm>
+            <a:off x="640080" y="4366260"/>
+            <a:ext cx="201168" cy="201168"/>
+          </a:xfrm>
+          <a:prstGeom prst="ellipse">
+            <a:avLst/>
+          </a:prstGeom>
+          <a:solidFill>
+            <a:srgbClr val="B9852F"/>
+          </a:solidFill>
+          <a:ln/>
+        </p:spPr>
+      </p:sp>
+      <p:sp>
+        <p:nvSpPr>
+          <p:cNvPr id="10" name="Text 8"/>
+          <p:cNvSpPr/>
+          <p:nvPr/>
+        </p:nvSpPr>
+        <p:spPr>
+          <a:xfrm>
+            <a:off x="1097280" y="4274820"/>
+            <a:ext cx="10607040" cy="1017270"/>
+          </a:xfrm>
+          <a:prstGeom prst="rect">
+            <a:avLst/>
+          </a:prstGeom>
+          <a:noFill/>
+          <a:ln/>
+        </p:spPr>
+        <p:txBody>
+          <a:bodyPr wrap="square" rtlCol="0" anchor="t">
+            <a:spAutoFit/>
+          </a:bodyPr>
+          <a:lstStyle/>
+          <a:p>
+            <a:pPr indent="0" marL="0">
+              <a:lnSpc>
+                <a:spcPct val="112000"/>
+              </a:lnSpc>
+              <a:buNone/>
+            </a:pPr>
+            <a:r>
+              <a:rPr lang="en-US" sz="1650" dirty="0">
+                <a:solidFill>
+                  <a:srgbClr val="1A1A1A"/>
+                </a:solidFill>
+                <a:latin typeface="Calibri" pitchFamily="34" charset="0"/>
+                <a:ea typeface="Calibri" pitchFamily="34" charset="-122"/>
+                <a:cs typeface="Calibri" pitchFamily="34" charset="-120"/>
+              </a:rPr>
+              <a:t>Pixels: rank 200 Met thumbnails darkest to brightest from average luminance.</a:t>
+            </a:r>
+            <a:endParaRPr lang="en-US" sz="1650" dirty="0"/>
+          </a:p>
+        </p:txBody>
+      </p:sp>
+      <p:sp>
+        <p:nvSpPr>
+          <p:cNvPr id="11" name="Shape 9"/>
+          <p:cNvSpPr/>
+          <p:nvPr/>
+        </p:nvSpPr>
+        <p:spPr>
+          <a:xfrm>
+            <a:off x="640080" y="5383530"/>
+            <a:ext cx="201168" cy="201168"/>
+          </a:xfrm>
+          <a:prstGeom prst="ellipse">
+            <a:avLst/>
+          </a:prstGeom>
+          <a:solidFill>
+            <a:srgbClr val="7A3B2E"/>
+          </a:solidFill>
+          <a:ln/>
+        </p:spPr>
+      </p:sp>
+      <p:sp>
+        <p:nvSpPr>
+          <p:cNvPr id="12" name="Text 10"/>
+          <p:cNvSpPr/>
+          <p:nvPr/>
+        </p:nvSpPr>
+        <p:spPr>
+          <a:xfrm>
+            <a:off x="1097280" y="5292090"/>
+            <a:ext cx="10607040" cy="1017270"/>
+          </a:xfrm>
+          <a:prstGeom prst="rect">
+            <a:avLst/>
+          </a:prstGeom>
+          <a:noFill/>
+          <a:ln/>
+        </p:spPr>
+        <p:txBody>
+          <a:bodyPr wrap="square" rtlCol="0" anchor="t">
+            <a:spAutoFit/>
+          </a:bodyPr>
+          <a:lstStyle/>
+          <a:p>
+            <a:pPr indent="0" marL="0">
+              <a:lnSpc>
+                <a:spcPct val="112000"/>
+              </a:lnSpc>
+              <a:buNone/>
+            </a:pPr>
+            <a:r>
+              <a:rPr lang="en-US" sz="1650" dirty="0">
+                <a:solidFill>
+                  <a:srgbClr val="1A1A1A"/>
+                </a:solidFill>
+                <a:latin typeface="Calibri" pitchFamily="34" charset="0"/>
+                <a:ea typeface="Calibri" pitchFamily="34" charset="-122"/>
+                <a:cs typeface="Calibri" pitchFamily="34" charset="-120"/>
+              </a:rPr>
+              <a:t>Same move three times, and a decision hiding in each.</a:t>
+            </a:r>
+            <a:endParaRPr lang="en-US" sz="1650" dirty="0"/>
+          </a:p>
+        </p:txBody>
+      </p:sp>
+    </p:spTree>
+  </p:cSld>
+  <p:clrMapOvr>
+    <a:masterClrMapping/>
+  </p:clrMapOvr>
+</p:sld>
+</file>
+
+<file path=ppt/slides/slide9.xml><?xml version="1.0" encoding="utf-8"?>
+<p:sld xmlns:a="http://schemas.openxmlformats.org/drawingml/2006/main" xmlns:r="http://schemas.openxmlformats.org/officeDocument/2006/relationships" xmlns:p="http://schemas.openxmlformats.org/presentationml/2006/main">
+  <p:cSld name="Slide 9">
+    <p:bg>
+      <p:bgPr>
+        <a:solidFill>
+          <a:srgbClr val="FFFFFF"/>
+        </a:solidFill>
+      </p:bgPr>
+    </p:bg>
+    <p:spTree>
+      <p:nvGrpSpPr>
+        <p:cNvPr id="1" name=""/>
+        <p:cNvGrpSpPr/>
+        <p:nvPr/>
+      </p:nvGrpSpPr>
+      <p:grpSpPr>
+        <a:xfrm>
+          <a:off x="0" y="0"/>
+          <a:ext cx="0" cy="0"/>
+          <a:chOff x="0" y="0"/>
+          <a:chExt cx="0" cy="0"/>
+        </a:xfrm>
+      </p:grpSpPr>
+      <p:sp>
+        <p:nvSpPr>
+          <p:cNvPr id="2" name="Text 0"/>
+          <p:cNvSpPr/>
+          <p:nvPr/>
+        </p:nvSpPr>
+        <p:spPr>
+          <a:xfrm>
+            <a:off x="640080" y="731520"/>
+            <a:ext cx="10058400" cy="731520"/>
+          </a:xfrm>
+          <a:prstGeom prst="rect">
+            <a:avLst/>
+          </a:prstGeom>
+          <a:noFill/>
+          <a:ln/>
+        </p:spPr>
+        <p:txBody>
+          <a:bodyPr wrap="square" rtlCol="0" anchor="ctr"/>
+          <a:lstStyle/>
+          <a:p>
+            <a:pPr indent="0" marL="0">
+              <a:buNone/>
+            </a:pPr>
+            <a:r>
+              <a:rPr lang="en-US" sz="3000" b="1" dirty="0">
+                <a:solidFill>
+                  <a:srgbClr val="1A1A1A"/>
+                </a:solidFill>
+                <a:latin typeface="Cambria" pitchFamily="34" charset="0"/>
+                <a:ea typeface="Cambria" pitchFamily="34" charset="-122"/>
+                <a:cs typeface="Cambria" pitchFamily="34" charset="-120"/>
+              </a:rPr>
+              <a:t>Three modes today</a:t>
+            </a:r>
+            <a:endParaRPr lang="en-US" sz="3000" dirty="0"/>
           </a:p>
         </p:txBody>
       </p:sp>
@@ -4789,8 +7123,128 @@
         </p:nvSpPr>
         <p:spPr>
           <a:xfrm>
-            <a:off x="640080" y="1645920"/>
-            <a:ext cx="8686800" cy="3108960"/>
+            <a:off x="640080" y="1417320"/>
+            <a:ext cx="10058400" cy="365760"/>
+          </a:xfrm>
+          <a:prstGeom prst="rect">
+            <a:avLst/>
+          </a:prstGeom>
+          <a:noFill/>
+          <a:ln/>
+        </p:spPr>
+        <p:txBody>
+          <a:bodyPr wrap="square" rtlCol="0" anchor="ctr"/>
+          <a:lstStyle/>
+          <a:p>
+            <a:pPr indent="0" marL="0">
+              <a:buNone/>
+            </a:pPr>
+            <a:r>
+              <a:rPr lang="en-US" sz="1400" i="1" dirty="0">
+                <a:solidFill>
+                  <a:srgbClr val="6B6B63"/>
+                </a:solidFill>
+                <a:latin typeface="Calibri" pitchFamily="34" charset="0"/>
+                <a:ea typeface="Calibri" pitchFamily="34" charset="-122"/>
+                <a:cs typeface="Calibri" pitchFamily="34" charset="-120"/>
+              </a:rPr>
+              <a:t>about a third of the session each</a:t>
+            </a:r>
+            <a:endParaRPr lang="en-US" sz="1400" dirty="0"/>
+          </a:p>
+        </p:txBody>
+      </p:sp>
+      <p:sp>
+        <p:nvSpPr>
+          <p:cNvPr id="4" name="Shape 2"/>
+          <p:cNvSpPr/>
+          <p:nvPr/>
+        </p:nvSpPr>
+        <p:spPr>
+          <a:xfrm>
+            <a:off x="640080" y="2194560"/>
+            <a:ext cx="3383280" cy="3291840"/>
+          </a:xfrm>
+          <a:prstGeom prst="roundRect">
+            <a:avLst>
+              <a:gd name="adj" fmla="val 3333"/>
+            </a:avLst>
+          </a:prstGeom>
+          <a:solidFill>
+            <a:srgbClr val="F4EEE8"/>
+          </a:solidFill>
+          <a:ln/>
+        </p:spPr>
+      </p:sp>
+      <p:sp>
+        <p:nvSpPr>
+          <p:cNvPr id="5" name="Shape 3"/>
+          <p:cNvSpPr/>
+          <p:nvPr/>
+        </p:nvSpPr>
+        <p:spPr>
+          <a:xfrm>
+            <a:off x="1051560" y="2606040"/>
+            <a:ext cx="548640" cy="548640"/>
+          </a:xfrm>
+          <a:prstGeom prst="ellipse">
+            <a:avLst/>
+          </a:prstGeom>
+          <a:solidFill>
+            <a:srgbClr val="7A3B2E"/>
+          </a:solidFill>
+          <a:ln/>
+        </p:spPr>
+      </p:sp>
+      <p:sp>
+        <p:nvSpPr>
+          <p:cNvPr id="6" name="Text 4"/>
+          <p:cNvSpPr/>
+          <p:nvPr/>
+        </p:nvSpPr>
+        <p:spPr>
+          <a:xfrm>
+            <a:off x="1005840" y="3383280"/>
+            <a:ext cx="2651760" cy="548640"/>
+          </a:xfrm>
+          <a:prstGeom prst="rect">
+            <a:avLst/>
+          </a:prstGeom>
+          <a:noFill/>
+          <a:ln/>
+        </p:spPr>
+        <p:txBody>
+          <a:bodyPr wrap="square" rtlCol="0" anchor="ctr"/>
+          <a:lstStyle/>
+          <a:p>
+            <a:pPr indent="0" marL="0">
+              <a:buNone/>
+            </a:pPr>
+            <a:r>
+              <a:rPr lang="en-US" sz="2100" b="1" dirty="0">
+                <a:solidFill>
+                  <a:srgbClr val="1A1A1A"/>
+                </a:solidFill>
+                <a:latin typeface="Cambria" pitchFamily="34" charset="0"/>
+                <a:ea typeface="Cambria" pitchFamily="34" charset="-122"/>
+                <a:cs typeface="Cambria" pitchFamily="34" charset="-120"/>
+              </a:rPr>
+              <a:t>Lecture / demo</a:t>
+            </a:r>
+            <a:endParaRPr lang="en-US" sz="2100" dirty="0"/>
+          </a:p>
+        </p:txBody>
+      </p:sp>
+      <p:sp>
+        <p:nvSpPr>
+          <p:cNvPr id="7" name="Text 5"/>
+          <p:cNvSpPr/>
+          <p:nvPr/>
+        </p:nvSpPr>
+        <p:spPr>
+          <a:xfrm>
+            <a:off x="1005840" y="3977640"/>
+            <a:ext cx="2651760" cy="1371600"/>
           </a:xfrm>
           <a:prstGeom prst="rect">
             <a:avLst/>
@@ -4811,114 +7265,182 @@
               <a:buNone/>
             </a:pPr>
             <a:r>
-              <a:rPr lang="en-US" sz="2600" dirty="0">
-                <a:solidFill>
-                  <a:srgbClr val="FFFFFF"/>
+              <a:rPr lang="en-US" sz="1500" dirty="0">
+                <a:solidFill>
+                  <a:srgbClr val="1A1A1A"/>
+                </a:solidFill>
+                <a:latin typeface="Calibri" pitchFamily="34" charset="0"/>
+                <a:ea typeface="Calibri" pitchFamily="34" charset="-122"/>
+                <a:cs typeface="Calibri" pitchFamily="34" charset="-120"/>
+              </a:rPr>
+              <a:t>Counting, met on day one: rows, words, pixels</a:t>
+            </a:r>
+            <a:endParaRPr lang="en-US" sz="1500" dirty="0"/>
+          </a:p>
+        </p:txBody>
+      </p:sp>
+      <p:sp>
+        <p:nvSpPr>
+          <p:cNvPr id="8" name="Shape 6"/>
+          <p:cNvSpPr/>
+          <p:nvPr/>
+        </p:nvSpPr>
+        <p:spPr>
+          <a:xfrm>
+            <a:off x="4526280" y="2194560"/>
+            <a:ext cx="3383280" cy="3291840"/>
+          </a:xfrm>
+          <a:prstGeom prst="roundRect">
+            <a:avLst>
+              <a:gd name="adj" fmla="val 3333"/>
+            </a:avLst>
+          </a:prstGeom>
+          <a:solidFill>
+            <a:srgbClr val="F4EEE8"/>
+          </a:solidFill>
+          <a:ln/>
+        </p:spPr>
+      </p:sp>
+      <p:sp>
+        <p:nvSpPr>
+          <p:cNvPr id="9" name="Shape 7"/>
+          <p:cNvSpPr/>
+          <p:nvPr/>
+        </p:nvSpPr>
+        <p:spPr>
+          <a:xfrm>
+            <a:off x="4937760" y="2606040"/>
+            <a:ext cx="548640" cy="548640"/>
+          </a:xfrm>
+          <a:prstGeom prst="ellipse">
+            <a:avLst/>
+          </a:prstGeom>
+          <a:solidFill>
+            <a:srgbClr val="3F6F5F"/>
+          </a:solidFill>
+          <a:ln/>
+        </p:spPr>
+      </p:sp>
+      <p:sp>
+        <p:nvSpPr>
+          <p:cNvPr id="10" name="Text 8"/>
+          <p:cNvSpPr/>
+          <p:nvPr/>
+        </p:nvSpPr>
+        <p:spPr>
+          <a:xfrm>
+            <a:off x="4892040" y="3383280"/>
+            <a:ext cx="2651760" cy="548640"/>
+          </a:xfrm>
+          <a:prstGeom prst="rect">
+            <a:avLst/>
+          </a:prstGeom>
+          <a:noFill/>
+          <a:ln/>
+        </p:spPr>
+        <p:txBody>
+          <a:bodyPr wrap="square" rtlCol="0" anchor="ctr"/>
+          <a:lstStyle/>
+          <a:p>
+            <a:pPr indent="0" marL="0">
+              <a:buNone/>
+            </a:pPr>
+            <a:r>
+              <a:rPr lang="en-US" sz="2100" b="1" dirty="0">
+                <a:solidFill>
+                  <a:srgbClr val="1A1A1A"/>
                 </a:solidFill>
                 <a:latin typeface="Cambria" pitchFamily="34" charset="0"/>
                 <a:ea typeface="Cambria" pitchFamily="34" charset="-122"/>
                 <a:cs typeface="Cambria" pitchFamily="34" charset="-120"/>
               </a:rPr>
-              <a:t>Trace it: one written sentence predicting what your cell does before you run it. (Competency 1.)</a:t>
-            </a:r>
-            <a:endParaRPr lang="en-US" sz="2600" dirty="0"/>
-          </a:p>
-        </p:txBody>
-      </p:sp>
-      <p:sp>
-        <p:nvSpPr>
-          <p:cNvPr id="4" name="Text 2"/>
-          <p:cNvSpPr/>
-          <p:nvPr/>
-        </p:nvSpPr>
-        <p:spPr>
-          <a:xfrm>
-            <a:off x="640080" y="6126480"/>
-            <a:ext cx="7315200" cy="365760"/>
-          </a:xfrm>
-          <a:prstGeom prst="rect">
-            <a:avLst/>
-          </a:prstGeom>
-          <a:noFill/>
-          <a:ln/>
-        </p:spPr>
-        <p:txBody>
-          <a:bodyPr wrap="square" rtlCol="0" anchor="ctr"/>
+              <a:t>Workshop</a:t>
+            </a:r>
+            <a:endParaRPr lang="en-US" sz="2100" dirty="0"/>
+          </a:p>
+        </p:txBody>
+      </p:sp>
+      <p:sp>
+        <p:nvSpPr>
+          <p:cNvPr id="11" name="Text 9"/>
+          <p:cNvSpPr/>
+          <p:nvPr/>
+        </p:nvSpPr>
+        <p:spPr>
+          <a:xfrm>
+            <a:off x="4892040" y="3977640"/>
+            <a:ext cx="2651760" cy="1371600"/>
+          </a:xfrm>
+          <a:prstGeom prst="rect">
+            <a:avLst/>
+          </a:prstGeom>
+          <a:noFill/>
+          <a:ln/>
+        </p:spPr>
+        <p:txBody>
+          <a:bodyPr wrap="square" rtlCol="0" anchor="t">
+            <a:spAutoFit/>
+          </a:bodyPr>
           <a:lstStyle/>
           <a:p>
             <a:pPr indent="0" marL="0">
-              <a:buNone/>
-            </a:pPr>
-            <a:r>
-              <a:rPr lang="en-US" sz="1200" dirty="0">
-                <a:solidFill>
-                  <a:srgbClr val="E8DCD6"/>
+              <a:lnSpc>
+                <a:spcPct val="115000"/>
+              </a:lnSpc>
+              <a:buNone/>
+            </a:pPr>
+            <a:r>
+              <a:rPr lang="en-US" sz="1500" dirty="0">
+                <a:solidFill>
+                  <a:srgbClr val="1A1A1A"/>
                 </a:solidFill>
                 <a:latin typeface="Calibri" pitchFamily="34" charset="0"/>
                 <a:ea typeface="Calibri" pitchFamily="34" charset="-122"/>
                 <a:cs typeface="Calibri" pitchFamily="34" charset="-120"/>
               </a:rPr>
-              <a:t>Culture as Data  ·  Week 1</a:t>
-            </a:r>
-            <a:endParaRPr lang="en-US" sz="1200" dirty="0"/>
-          </a:p>
-        </p:txBody>
-      </p:sp>
-      <p:sp>
-        <p:nvSpPr>
-          <p:cNvPr id="5" name="Shape 3"/>
-          <p:cNvSpPr/>
-          <p:nvPr/>
-        </p:nvSpPr>
-        <p:spPr>
-          <a:xfrm>
-            <a:off x="11006176" y="4841304"/>
-            <a:ext cx="70992" cy="70992"/>
+              <a:t>Build hands-on on your own data.</a:t>
+            </a:r>
+            <a:endParaRPr lang="en-US" sz="1500" dirty="0"/>
+          </a:p>
+        </p:txBody>
+      </p:sp>
+      <p:sp>
+        <p:nvSpPr>
+          <p:cNvPr id="12" name="Shape 10"/>
+          <p:cNvSpPr/>
+          <p:nvPr/>
+        </p:nvSpPr>
+        <p:spPr>
+          <a:xfrm>
+            <a:off x="8412480" y="2194560"/>
+            <a:ext cx="3383280" cy="3291840"/>
+          </a:xfrm>
+          <a:prstGeom prst="roundRect">
+            <a:avLst>
+              <a:gd name="adj" fmla="val 3333"/>
+            </a:avLst>
+          </a:prstGeom>
+          <a:solidFill>
+            <a:srgbClr val="F4EEE8"/>
+          </a:solidFill>
+          <a:ln/>
+        </p:spPr>
+      </p:sp>
+      <p:sp>
+        <p:nvSpPr>
+          <p:cNvPr id="13" name="Shape 11"/>
+          <p:cNvSpPr/>
+          <p:nvPr/>
+        </p:nvSpPr>
+        <p:spPr>
+          <a:xfrm>
+            <a:off x="8823960" y="2606040"/>
+            <a:ext cx="548640" cy="548640"/>
           </a:xfrm>
           <a:prstGeom prst="ellipse">
             <a:avLst/>
           </a:prstGeom>
           <a:solidFill>
-            <a:srgbClr val="7A3B2E"/>
-          </a:solidFill>
-          <a:ln/>
-        </p:spPr>
-      </p:sp>
-      <p:sp>
-        <p:nvSpPr>
-          <p:cNvPr id="6" name="Shape 4"/>
-          <p:cNvSpPr/>
-          <p:nvPr/>
-        </p:nvSpPr>
-        <p:spPr>
-          <a:xfrm>
-            <a:off x="10333730" y="5139734"/>
-            <a:ext cx="51926" cy="51926"/>
-          </a:xfrm>
-          <a:prstGeom prst="ellipse">
-            <a:avLst/>
-          </a:prstGeom>
-          <a:solidFill>
-            <a:srgbClr val="3F6F5F"/>
-          </a:solidFill>
-          <a:ln/>
-        </p:spPr>
-      </p:sp>
-      <p:sp>
-        <p:nvSpPr>
-          <p:cNvPr id="7" name="Shape 5"/>
-          <p:cNvSpPr/>
-          <p:nvPr/>
-        </p:nvSpPr>
-        <p:spPr>
-          <a:xfrm>
-            <a:off x="9655357" y="4517202"/>
-            <a:ext cx="66260" cy="66260"/>
-          </a:xfrm>
-          <a:prstGeom prst="ellipse">
-            <a:avLst/>
-          </a:prstGeom>
-          <a:solidFill>
             <a:srgbClr val="B9852F"/>
           </a:solidFill>
           <a:ln/>
@@ -4926,223 +7448,86 @@
       </p:sp>
       <p:sp>
         <p:nvSpPr>
-          <p:cNvPr id="8" name="Shape 6"/>
-          <p:cNvSpPr/>
-          <p:nvPr/>
-        </p:nvSpPr>
-        <p:spPr>
-          <a:xfrm>
-            <a:off x="10037857" y="5434969"/>
-            <a:ext cx="81992" cy="81992"/>
-          </a:xfrm>
-          <a:prstGeom prst="ellipse">
-            <a:avLst/>
-          </a:prstGeom>
-          <a:solidFill>
-            <a:srgbClr val="7A3B2E"/>
-          </a:solidFill>
-          <a:ln/>
-        </p:spPr>
-      </p:sp>
-      <p:sp>
-        <p:nvSpPr>
-          <p:cNvPr id="9" name="Shape 7"/>
-          <p:cNvSpPr/>
-          <p:nvPr/>
-        </p:nvSpPr>
-        <p:spPr>
-          <a:xfrm>
-            <a:off x="9987711" y="5142214"/>
-            <a:ext cx="67117" cy="67117"/>
-          </a:xfrm>
-          <a:prstGeom prst="ellipse">
-            <a:avLst/>
-          </a:prstGeom>
-          <a:solidFill>
-            <a:srgbClr val="3F6F5F"/>
-          </a:solidFill>
-          <a:ln/>
-        </p:spPr>
-      </p:sp>
-      <p:sp>
-        <p:nvSpPr>
-          <p:cNvPr id="10" name="Shape 8"/>
-          <p:cNvSpPr/>
-          <p:nvPr/>
-        </p:nvSpPr>
-        <p:spPr>
-          <a:xfrm>
-            <a:off x="10571718" y="6100197"/>
-            <a:ext cx="99359" cy="99359"/>
-          </a:xfrm>
-          <a:prstGeom prst="ellipse">
-            <a:avLst/>
-          </a:prstGeom>
-          <a:solidFill>
-            <a:srgbClr val="B9852F"/>
-          </a:solidFill>
-          <a:ln/>
-        </p:spPr>
-      </p:sp>
-      <p:sp>
-        <p:nvSpPr>
-          <p:cNvPr id="11" name="Shape 9"/>
-          <p:cNvSpPr/>
-          <p:nvPr/>
-        </p:nvSpPr>
-        <p:spPr>
-          <a:xfrm>
-            <a:off x="10296359" y="5558099"/>
-            <a:ext cx="91849" cy="91849"/>
-          </a:xfrm>
-          <a:prstGeom prst="ellipse">
-            <a:avLst/>
-          </a:prstGeom>
-          <a:solidFill>
-            <a:srgbClr val="7A3B2E"/>
-          </a:solidFill>
-          <a:ln/>
-        </p:spPr>
-      </p:sp>
-      <p:sp>
-        <p:nvSpPr>
-          <p:cNvPr id="12" name="Shape 10"/>
-          <p:cNvSpPr/>
-          <p:nvPr/>
-        </p:nvSpPr>
-        <p:spPr>
-          <a:xfrm>
-            <a:off x="10228433" y="5977179"/>
-            <a:ext cx="67449" cy="67449"/>
-          </a:xfrm>
-          <a:prstGeom prst="ellipse">
-            <a:avLst/>
-          </a:prstGeom>
-          <a:solidFill>
-            <a:srgbClr val="3F6F5F"/>
-          </a:solidFill>
-          <a:ln/>
-        </p:spPr>
-      </p:sp>
-      <p:sp>
-        <p:nvSpPr>
-          <p:cNvPr id="13" name="Shape 11"/>
-          <p:cNvSpPr/>
-          <p:nvPr/>
-        </p:nvSpPr>
-        <p:spPr>
-          <a:xfrm>
-            <a:off x="11434740" y="4606617"/>
-            <a:ext cx="49018" cy="49018"/>
-          </a:xfrm>
-          <a:prstGeom prst="ellipse">
-            <a:avLst/>
-          </a:prstGeom>
-          <a:solidFill>
-            <a:srgbClr val="B9852F"/>
-          </a:solidFill>
-          <a:ln/>
-        </p:spPr>
-      </p:sp>
-      <p:sp>
-        <p:nvSpPr>
-          <p:cNvPr id="14" name="Shape 12"/>
-          <p:cNvSpPr/>
-          <p:nvPr/>
-        </p:nvSpPr>
-        <p:spPr>
-          <a:xfrm>
-            <a:off x="9861440" y="5645034"/>
-            <a:ext cx="59416" cy="59416"/>
-          </a:xfrm>
-          <a:prstGeom prst="ellipse">
-            <a:avLst/>
-          </a:prstGeom>
-          <a:solidFill>
-            <a:srgbClr val="7A3B2E"/>
-          </a:solidFill>
-          <a:ln/>
-        </p:spPr>
-      </p:sp>
-      <p:sp>
-        <p:nvSpPr>
-          <p:cNvPr id="15" name="Shape 13"/>
-          <p:cNvSpPr/>
-          <p:nvPr/>
-        </p:nvSpPr>
-        <p:spPr>
-          <a:xfrm>
-            <a:off x="9135654" y="4604249"/>
-            <a:ext cx="66639" cy="66639"/>
-          </a:xfrm>
-          <a:prstGeom prst="ellipse">
-            <a:avLst/>
-          </a:prstGeom>
-          <a:solidFill>
-            <a:srgbClr val="3F6F5F"/>
-          </a:solidFill>
-          <a:ln/>
-        </p:spPr>
-      </p:sp>
-      <p:sp>
-        <p:nvSpPr>
-          <p:cNvPr id="16" name="Shape 14"/>
-          <p:cNvSpPr/>
-          <p:nvPr/>
-        </p:nvSpPr>
-        <p:spPr>
-          <a:xfrm>
-            <a:off x="10324181" y="5682882"/>
-            <a:ext cx="93546" cy="93546"/>
-          </a:xfrm>
-          <a:prstGeom prst="ellipse">
-            <a:avLst/>
-          </a:prstGeom>
-          <a:solidFill>
-            <a:srgbClr val="B9852F"/>
-          </a:solidFill>
-          <a:ln/>
-        </p:spPr>
-      </p:sp>
-      <p:sp>
-        <p:nvSpPr>
-          <p:cNvPr id="17" name="Shape 15"/>
-          <p:cNvSpPr/>
-          <p:nvPr/>
-        </p:nvSpPr>
-        <p:spPr>
-          <a:xfrm>
-            <a:off x="9373182" y="6130114"/>
-            <a:ext cx="53271" cy="53271"/>
-          </a:xfrm>
-          <a:prstGeom prst="ellipse">
-            <a:avLst/>
-          </a:prstGeom>
-          <a:solidFill>
-            <a:srgbClr val="7A3B2E"/>
-          </a:solidFill>
-          <a:ln/>
-        </p:spPr>
-      </p:sp>
-      <p:sp>
-        <p:nvSpPr>
-          <p:cNvPr id="18" name="Shape 16"/>
-          <p:cNvSpPr/>
-          <p:nvPr/>
-        </p:nvSpPr>
-        <p:spPr>
-          <a:xfrm>
-            <a:off x="9909776" y="4932484"/>
-            <a:ext cx="78401" cy="78401"/>
-          </a:xfrm>
-          <a:prstGeom prst="ellipse">
-            <a:avLst/>
-          </a:prstGeom>
-          <a:solidFill>
-            <a:srgbClr val="3F6F5F"/>
-          </a:solidFill>
-          <a:ln/>
-        </p:spPr>
+          <p:cNvPr id="14" name="Text 12"/>
+          <p:cNvSpPr/>
+          <p:nvPr/>
+        </p:nvSpPr>
+        <p:spPr>
+          <a:xfrm>
+            <a:off x="8778240" y="3383280"/>
+            <a:ext cx="2651760" cy="548640"/>
+          </a:xfrm>
+          <a:prstGeom prst="rect">
+            <a:avLst/>
+          </a:prstGeom>
+          <a:noFill/>
+          <a:ln/>
+        </p:spPr>
+        <p:txBody>
+          <a:bodyPr wrap="square" rtlCol="0" anchor="ctr"/>
+          <a:lstStyle/>
+          <a:p>
+            <a:pPr indent="0" marL="0">
+              <a:buNone/>
+            </a:pPr>
+            <a:r>
+              <a:rPr lang="en-US" sz="2100" b="1" dirty="0">
+                <a:solidFill>
+                  <a:srgbClr val="1A1A1A"/>
+                </a:solidFill>
+                <a:latin typeface="Cambria" pitchFamily="34" charset="0"/>
+                <a:ea typeface="Cambria" pitchFamily="34" charset="-122"/>
+                <a:cs typeface="Cambria" pitchFamily="34" charset="-120"/>
+              </a:rPr>
+              <a:t>Discussion</a:t>
+            </a:r>
+            <a:endParaRPr lang="en-US" sz="2100" dirty="0"/>
+          </a:p>
+        </p:txBody>
+      </p:sp>
+      <p:sp>
+        <p:nvSpPr>
+          <p:cNvPr id="15" name="Text 13"/>
+          <p:cNvSpPr/>
+          <p:nvPr/>
+        </p:nvSpPr>
+        <p:spPr>
+          <a:xfrm>
+            <a:off x="8778240" y="3977640"/>
+            <a:ext cx="2651760" cy="1371600"/>
+          </a:xfrm>
+          <a:prstGeom prst="rect">
+            <a:avLst/>
+          </a:prstGeom>
+          <a:noFill/>
+          <a:ln/>
+        </p:spPr>
+        <p:txBody>
+          <a:bodyPr wrap="square" rtlCol="0" anchor="t">
+            <a:spAutoFit/>
+          </a:bodyPr>
+          <a:lstStyle/>
+          <a:p>
+            <a:pPr indent="0" marL="0">
+              <a:lnSpc>
+                <a:spcPct val="115000"/>
+              </a:lnSpc>
+              <a:buNone/>
+            </a:pPr>
+            <a:r>
+              <a:rPr lang="en-US" sz="1500" dirty="0">
+                <a:solidFill>
+                  <a:srgbClr val="1A1A1A"/>
+                </a:solidFill>
+                <a:latin typeface="Calibri" pitchFamily="34" charset="0"/>
+                <a:ea typeface="Calibri" pitchFamily="34" charset="-122"/>
+                <a:cs typeface="Calibri" pitchFamily="34" charset="-120"/>
+              </a:rPr>
+              <a:t>Interrogate the study, debate it, or critique each other's work.</a:t>
+            </a:r>
+            <a:endParaRPr lang="en-US" sz="1500" dirty="0"/>
+          </a:p>
+        </p:txBody>
       </p:sp>
     </p:spTree>
   </p:cSld>

--- a/slides/pptx/week-01.pptx
+++ b/slides/pptx/week-01.pptx
@@ -2136,7 +2136,7 @@
                 <a:ea typeface="Calibri" pitchFamily="34" charset="-122"/>
                 <a:cs typeface="Calibri" pitchFamily="34" charset="-120"/>
               </a:rPr>
-              <a:t>Tool / method:  Counting, met on day one: rows, words, pixels</a:t>
+              <a:t>Tool / method:  Counting: rows, words, pixels</a:t>
             </a:r>
             <a:endParaRPr lang="en-US" sz="1200" dirty="0"/>
           </a:p>
@@ -5189,7 +5189,7 @@
                 <a:ea typeface="Calibri" pitchFamily="34" charset="-122"/>
                 <a:cs typeface="Calibri" pitchFamily="34" charset="-120"/>
               </a:rPr>
-              <a:t>WEEK 1 · THE MATERIAL</a:t>
+              <a:t>WEEK 1 · KEY POINTS</a:t>
             </a:r>
             <a:endParaRPr lang="en-US" sz="1200" dirty="0"/>
           </a:p>
@@ -5577,7 +5577,7 @@
                 <a:ea typeface="Calibri" pitchFamily="34" charset="-122"/>
                 <a:cs typeface="Calibri" pitchFamily="34" charset="-120"/>
               </a:rPr>
-              <a:t>WEEK 1 · THE MATERIAL</a:t>
+              <a:t>WEEK 1 · KEY POINTS</a:t>
             </a:r>
             <a:endParaRPr lang="en-US" sz="1200" dirty="0"/>
           </a:p>
@@ -5965,7 +5965,7 @@
                 <a:ea typeface="Calibri" pitchFamily="34" charset="-122"/>
                 <a:cs typeface="Calibri" pitchFamily="34" charset="-120"/>
               </a:rPr>
-              <a:t>WEEK 1 · THE MATERIAL</a:t>
+              <a:t>WEEK 1 · KEY POINTS</a:t>
             </a:r>
             <a:endParaRPr lang="en-US" sz="1200" dirty="0"/>
           </a:p>
@@ -6353,7 +6353,7 @@
                 <a:ea typeface="Calibri" pitchFamily="34" charset="-122"/>
                 <a:cs typeface="Calibri" pitchFamily="34" charset="-120"/>
               </a:rPr>
-              <a:t>WEEK 1 · THE MATERIAL</a:t>
+              <a:t>WEEK 1 · KEY POINTS</a:t>
             </a:r>
             <a:endParaRPr lang="en-US" sz="1200" dirty="0"/>
           </a:p>
@@ -6741,7 +6741,7 @@
                 <a:ea typeface="Calibri" pitchFamily="34" charset="-122"/>
                 <a:cs typeface="Calibri" pitchFamily="34" charset="-120"/>
               </a:rPr>
-              <a:t>WEEK 1 · THE MATERIAL</a:t>
+              <a:t>WEEK 1 · KEY POINTS</a:t>
             </a:r>
             <a:endParaRPr lang="en-US" sz="1200" dirty="0"/>
           </a:p>
@@ -7273,7 +7273,7 @@
                 <a:ea typeface="Calibri" pitchFamily="34" charset="-122"/>
                 <a:cs typeface="Calibri" pitchFamily="34" charset="-120"/>
               </a:rPr>
-              <a:t>Counting, met on day one: rows, words, pixels</a:t>
+              <a:t>Counting: rows, words, pixels</a:t>
             </a:r>
             <a:endParaRPr lang="en-US" sz="1500" dirty="0"/>
           </a:p>

--- a/slides/pptx/week-01.pptx
+++ b/slides/pptx/week-01.pptx
@@ -2097,7 +2097,7 @@
                 <a:ea typeface="Calibri" pitchFamily="34" charset="-122"/>
                 <a:cs typeface="Calibri" pitchFamily="34" charset="-120"/>
               </a:rPr>
-              <a:t>By the break you'll have loaded a real dataset, asked it a question, and produced your first chart. By the end you'll have counted culture in all three shapes it comes in: rows, words, and pixels.</a:t>
+              <a:t>By the mid-session break you will have loaded a real dataset, asked a question of it, and produced a chart. By the end you will have counted culture in three forms: rows, words, and pixels.</a:t>
             </a:r>
             <a:endParaRPr lang="en-US" sz="1600" dirty="0"/>
           </a:p>
@@ -2629,7 +2629,7 @@
                 <a:ea typeface="Calibri" pitchFamily="34" charset="-122"/>
                 <a:cs typeface="Calibri" pitchFamily="34" charset="-120"/>
               </a:rPr>
-              <a:t>Setting the room: the social rules, demonstrated by the instructor breaking one and being corrected. Today's live coding includes real mistakes on purpose.</a:t>
+              <a:t>Introductions and working agreements, demonstrated in practice. Today's live coding deliberately includes real mistakes.</a:t>
             </a:r>
             <a:endParaRPr lang="en-US" sz="1250" dirty="0"/>
           </a:p>
@@ -3139,7 +3139,7 @@
                 <a:ea typeface="Calibri" pitchFamily="34" charset="-122"/>
                 <a:cs typeface="Calibri" pitchFamily="34" charset="-120"/>
               </a:rPr>
-              <a:t>Lab 2 (worked), count words, then pixels: first the top words of a small lyrics slice (stop-words drown the list until you remove them, your first counting choice), then an image corpus, ~200 Met thumbnails ranked darkest to brightest by average brightness. Text and pictures, counted with the same move; image projects start here.</a:t>
+              <a:t>Lab 2 (worked): count words, then pixels. First the top words of a small lyrics sample (stop-words dominate the list until you remove them, the first counting decision), then an image corpus: ~200 Met thumbnails ranked darkest to brightest by average brightness. Text and images, counted with the same technique; image projects begin here.</a:t>
             </a:r>
             <a:endParaRPr lang="en-US" sz="1250" dirty="0"/>
           </a:p>
@@ -3241,7 +3241,7 @@
                 <a:ea typeface="Calibri" pitchFamily="34" charset="-122"/>
                 <a:cs typeface="Calibri" pitchFamily="34" charset="-120"/>
               </a:rPr>
-              <a:t>Teaser of the ladder ahead; the standing rituals named. First check-out.</a:t>
+              <a:t>Preview of the methods ahead; the weekly routines introduced. First check-out.</a:t>
             </a:r>
             <a:endParaRPr lang="en-US" sz="1250" dirty="0"/>
           </a:p>
@@ -3966,7 +3966,7 @@
                 <a:ea typeface="Calibri" pitchFamily="34" charset="-122"/>
                 <a:cs typeface="Calibri" pitchFamily="34" charset="-120"/>
               </a:rPr>
-              <a:t>She Giggles, He Gallops is great and its choices are arguable. We admire and interrogate at once, the habit the whole course turns on.</a:t>
+              <a:t>She Giggles, He Gallops is excellent and its choices are debatable. Admiring and questioning at once is the habit the course is built on.</a:t>
             </a:r>
             <a:endParaRPr lang="en-US" sz="1450" dirty="0"/>
           </a:p>
@@ -4254,7 +4254,7 @@
                 <a:ea typeface="Calibri" pitchFamily="34" charset="-122"/>
                 <a:cs typeface="Calibri" pitchFamily="34" charset="-120"/>
               </a:rPr>
-              <a:t>A picture is numbers: you counted pixels on day one, and images ride along as a co-equal corpus all ten weeks.</a:t>
+              <a:t>A picture is numbers: you counted pixels on day one, and images continue as a co-equal corpus through all ten weeks.</a:t>
             </a:r>
             <a:endParaRPr lang="en-US" sz="1450" dirty="0"/>
           </a:p>
@@ -4922,7 +4922,7 @@
                 <a:ea typeface="Calibri" pitchFamily="34" charset="-122"/>
                 <a:cs typeface="Calibri" pitchFamily="34" charset="-120"/>
               </a:rPr>
-              <a:t>The Pudding, "She Giggles, He Gallops" (2017): across ~2,000 film screenplays, the stage-direction verbs split by gender, women snuggle and giggle, men gallop and stride, and the interactive makes it impossible to unsee.</a:t>
+              <a:t>The Pudding, "She Giggles, He Gallops" (2017): across ~2,000 film screenplays, the stage-direction verbs split by gender, women snuggle and giggle, men gallop and stride. The interactive presentation makes the pattern unmistakable.</a:t>
             </a:r>
             <a:endParaRPr lang="en-US" sz="1900" dirty="0"/>
           </a:p>
@@ -5098,7 +5098,7 @@
                 <a:ea typeface="Calibri" pitchFamily="34" charset="-122"/>
                 <a:cs typeface="Calibri" pitchFamily="34" charset="-120"/>
               </a:rPr>
-              <a:t>~2,000 screenplays skewed toward what got produced and digitized: is that "film," or a slice? Whose choice is a gendered verb, the writer's, the character's, the genre's? Counting shows the split, not the cause. And read the visualization's choices, not just the data.</a:t>
+              <a:t>The 2,000 screenplays skew toward what was produced and digitized: is that "film," or a sample of it? Whose choice is a gendered verb: the writer's, the character's, or the genre's? Counting shows the split, not the cause. The visualization's own choices deserve the same scrutiny as the data.</a:t>
             </a:r>
             <a:endParaRPr lang="en-US" sz="2000" dirty="0"/>
           </a:p>
@@ -6006,7 +6006,7 @@
                 <a:ea typeface="Cambria" pitchFamily="34" charset="-122"/>
                 <a:cs typeface="Cambria" pitchFamily="34" charset="-120"/>
               </a:rPr>
-              <a:t>The Drive ritual (every week, no exceptions)</a:t>
+              <a:t>The Drive routine (every week, without exception)</a:t>
             </a:r>
             <a:endParaRPr lang="en-US" sz="3000" dirty="0"/>
           </a:p>
@@ -6394,7 +6394,7 @@
                 <a:ea typeface="Cambria" pitchFamily="34" charset="-122"/>
                 <a:cs typeface="Cambria" pitchFamily="34" charset="-120"/>
               </a:rPr>
-              <a:t>When code errors (it will, today, on purpose)</a:t>
+              <a:t>When code fails (it will, today, deliberately)</a:t>
             </a:r>
             <a:endParaRPr lang="en-US" sz="3000" dirty="0"/>
           </a:p>
@@ -6458,7 +6458,7 @@
                 <a:ea typeface="Calibri" pitchFamily="34" charset="-122"/>
                 <a:cs typeface="Calibri" pitchFamily="34" charset="-120"/>
               </a:rPr>
-              <a:t>Read the LAST line of the traceback first. It names the problem.</a:t>
+              <a:t>Read the last line of the traceback first. It names the problem.</a:t>
             </a:r>
             <a:endParaRPr lang="en-US" sz="1650" dirty="0"/>
           </a:p>
@@ -6586,7 +6586,7 @@
                 <a:ea typeface="Calibri" pitchFamily="34" charset="-122"/>
                 <a:cs typeface="Calibri" pitchFamily="34" charset="-120"/>
               </a:rPr>
-              <a:t>Try twice. Then ask a human. That order.</a:t>
+              <a:t>Try twice, then ask a human. In that order.</a:t>
             </a:r>
             <a:endParaRPr lang="en-US" sz="1650" dirty="0"/>
           </a:p>
@@ -6650,7 +6650,7 @@
                 <a:ea typeface="Calibri" pitchFamily="34" charset="-122"/>
                 <a:cs typeface="Calibri" pitchFamily="34" charset="-120"/>
               </a:rPr>
-              <a:t>Keep the cheat sheet out. Nobody memorizes error messages; everybody reads them.</a:t>
+              <a:t>Keep the cheat sheet at hand. No one memorizes error messages; everyone reads them.</a:t>
             </a:r>
             <a:endParaRPr lang="en-US" sz="1650" dirty="0"/>
           </a:p>
@@ -7038,7 +7038,7 @@
                 <a:ea typeface="Calibri" pitchFamily="34" charset="-122"/>
                 <a:cs typeface="Calibri" pitchFamily="34" charset="-120"/>
               </a:rPr>
-              <a:t>Same move three times, and a decision hiding in each.</a:t>
+              <a:t>The same technique three times, each containing a decision.</a:t>
             </a:r>
             <a:endParaRPr lang="en-US" sz="1650" dirty="0"/>
           </a:p>

--- a/slides/pptx/week-01.pptx
+++ b/slides/pptx/week-01.pptx
@@ -5422,7 +5422,7 @@
                 <a:ea typeface="Calibri" pitchFamily="34" charset="-122"/>
                 <a:cs typeface="Calibri" pitchFamily="34" charset="-120"/>
               </a:rPr>
-              <a:t>Today's corpus: every NYT wedding announcement 1985-2014 (~500 rows): who married whom, and whether the bride kept her name.</a:t>
+              <a:t>Today's corpus: 5,562 NYT wedding announcements, 1985-2014: whether the bride kept her name, and the couple's ages.</a:t>
             </a:r>
             <a:endParaRPr lang="en-US" sz="1650" dirty="0"/>
           </a:p>

--- a/slides/pptx/week-01.pptx
+++ b/slides/pptx/week-01.pptx
@@ -3326,7 +3326,7 @@
         </p:nvSpPr>
         <p:spPr>
           <a:xfrm>
-            <a:off x="640080" y="1810512"/>
+            <a:off x="640080" y="1673352"/>
             <a:ext cx="219456" cy="219456"/>
           </a:xfrm>
           <a:prstGeom prst="ellipse">
@@ -3346,7 +3346,7 @@
         </p:nvSpPr>
         <p:spPr>
           <a:xfrm>
-            <a:off x="1051560" y="1737360"/>
+            <a:off x="1051560" y="1600200"/>
             <a:ext cx="10424160" cy="365760"/>
           </a:xfrm>
           <a:prstGeom prst="rect">
@@ -3385,7 +3385,7 @@
         </p:nvSpPr>
         <p:spPr>
           <a:xfrm>
-            <a:off x="1051560" y="2121408"/>
+            <a:off x="1051560" y="1984248"/>
             <a:ext cx="10424160" cy="731520"/>
           </a:xfrm>
           <a:prstGeom prst="rect">
@@ -3426,7 +3426,7 @@
         </p:nvSpPr>
         <p:spPr>
           <a:xfrm>
-            <a:off x="640080" y="2953512"/>
+            <a:off x="640080" y="2633472"/>
             <a:ext cx="219456" cy="219456"/>
           </a:xfrm>
           <a:prstGeom prst="ellipse">
@@ -3446,7 +3446,7 @@
         </p:nvSpPr>
         <p:spPr>
           <a:xfrm>
-            <a:off x="1051560" y="2880360"/>
+            <a:off x="1051560" y="2560320"/>
             <a:ext cx="10424160" cy="365760"/>
           </a:xfrm>
           <a:prstGeom prst="rect">
@@ -3485,7 +3485,7 @@
         </p:nvSpPr>
         <p:spPr>
           <a:xfrm>
-            <a:off x="1051560" y="3264408"/>
+            <a:off x="1051560" y="2944368"/>
             <a:ext cx="10424160" cy="731520"/>
           </a:xfrm>
           <a:prstGeom prst="rect">
@@ -3526,7 +3526,7 @@
         </p:nvSpPr>
         <p:spPr>
           <a:xfrm>
-            <a:off x="640080" y="4096512"/>
+            <a:off x="640080" y="3593592"/>
             <a:ext cx="219456" cy="219456"/>
           </a:xfrm>
           <a:prstGeom prst="ellipse">
@@ -3546,7 +3546,7 @@
         </p:nvSpPr>
         <p:spPr>
           <a:xfrm>
-            <a:off x="1051560" y="4023360"/>
+            <a:off x="1051560" y="3520440"/>
             <a:ext cx="10424160" cy="365760"/>
           </a:xfrm>
           <a:prstGeom prst="rect">
@@ -3571,7 +3571,7 @@
                 <a:ea typeface="Calibri" pitchFamily="34" charset="-122"/>
                 <a:cs typeface="Calibri" pitchFamily="34" charset="-120"/>
               </a:rPr>
-              <a:t>Sketch</a:t>
+              <a:t>Deeper (optional)</a:t>
             </a:r>
             <a:endParaRPr lang="en-US" sz="1500" dirty="0"/>
           </a:p>
@@ -3585,7 +3585,7 @@
         </p:nvSpPr>
         <p:spPr>
           <a:xfrm>
-            <a:off x="1051560" y="4407408"/>
+            <a:off x="1051560" y="3904488"/>
             <a:ext cx="10424160" cy="731520"/>
           </a:xfrm>
           <a:prstGeom prst="rect">
@@ -3612,7 +3612,7 @@
                 <a:ea typeface="Calibri" pitchFamily="34" charset="-122"/>
                 <a:cs typeface="Calibri" pitchFamily="34" charset="-120"/>
               </a:rPr>
-              <a:t>One question from your life answerable with text or image data; three sentences.</a:t>
+              <a:t>Moretti, Conjectures on World Literature (NLR 2000), the founding argument for reading culture at scale</a:t>
             </a:r>
             <a:endParaRPr lang="en-US" sz="1400" dirty="0"/>
           </a:p>
@@ -3626,14 +3626,14 @@
         </p:nvSpPr>
         <p:spPr>
           <a:xfrm>
-            <a:off x="640080" y="5239512"/>
+            <a:off x="640080" y="4553712"/>
             <a:ext cx="219456" cy="219456"/>
           </a:xfrm>
           <a:prstGeom prst="ellipse">
             <a:avLst/>
           </a:prstGeom>
           <a:solidFill>
-            <a:srgbClr val="7A3B2E"/>
+            <a:srgbClr val="3F6F5F"/>
           </a:solidFill>
           <a:ln/>
         </p:spPr>
@@ -3646,7 +3646,7 @@
         </p:nvSpPr>
         <p:spPr>
           <a:xfrm>
-            <a:off x="1051560" y="5166360"/>
+            <a:off x="1051560" y="4480560"/>
             <a:ext cx="10424160" cy="365760"/>
           </a:xfrm>
           <a:prstGeom prst="rect">
@@ -3665,12 +3665,112 @@
             <a:r>
               <a:rPr lang="en-US" sz="1500" b="1" dirty="0">
                 <a:solidFill>
-                  <a:srgbClr val="7A3B2E"/>
+                  <a:srgbClr val="3F6F5F"/>
                 </a:solidFill>
                 <a:latin typeface="Calibri" pitchFamily="34" charset="0"/>
                 <a:ea typeface="Calibri" pitchFamily="34" charset="-122"/>
                 <a:cs typeface="Calibri" pitchFamily="34" charset="-120"/>
               </a:rPr>
+              <a:t>Sketch</a:t>
+            </a:r>
+            <a:endParaRPr lang="en-US" sz="1500" dirty="0"/>
+          </a:p>
+        </p:txBody>
+      </p:sp>
+      <p:sp>
+        <p:nvSpPr>
+          <p:cNvPr id="14" name="Text 12"/>
+          <p:cNvSpPr/>
+          <p:nvPr/>
+        </p:nvSpPr>
+        <p:spPr>
+          <a:xfrm>
+            <a:off x="1051560" y="4864608"/>
+            <a:ext cx="10424160" cy="731520"/>
+          </a:xfrm>
+          <a:prstGeom prst="rect">
+            <a:avLst/>
+          </a:prstGeom>
+          <a:noFill/>
+          <a:ln/>
+        </p:spPr>
+        <p:txBody>
+          <a:bodyPr wrap="square" rtlCol="0" anchor="t">
+            <a:spAutoFit/>
+          </a:bodyPr>
+          <a:lstStyle/>
+          <a:p>
+            <a:pPr indent="0" marL="0">
+              <a:buNone/>
+            </a:pPr>
+            <a:r>
+              <a:rPr lang="en-US" sz="1400" dirty="0">
+                <a:solidFill>
+                  <a:srgbClr val="1A1A1A"/>
+                </a:solidFill>
+                <a:latin typeface="Calibri" pitchFamily="34" charset="0"/>
+                <a:ea typeface="Calibri" pitchFamily="34" charset="-122"/>
+                <a:cs typeface="Calibri" pitchFamily="34" charset="-120"/>
+              </a:rPr>
+              <a:t>One question from your life answerable with text or image data; three sentences.</a:t>
+            </a:r>
+            <a:endParaRPr lang="en-US" sz="1400" dirty="0"/>
+          </a:p>
+        </p:txBody>
+      </p:sp>
+      <p:sp>
+        <p:nvSpPr>
+          <p:cNvPr id="15" name="Shape 13"/>
+          <p:cNvSpPr/>
+          <p:nvPr/>
+        </p:nvSpPr>
+        <p:spPr>
+          <a:xfrm>
+            <a:off x="640080" y="5513832"/>
+            <a:ext cx="219456" cy="219456"/>
+          </a:xfrm>
+          <a:prstGeom prst="ellipse">
+            <a:avLst/>
+          </a:prstGeom>
+          <a:solidFill>
+            <a:srgbClr val="7A3B2E"/>
+          </a:solidFill>
+          <a:ln/>
+        </p:spPr>
+      </p:sp>
+      <p:sp>
+        <p:nvSpPr>
+          <p:cNvPr id="16" name="Text 14"/>
+          <p:cNvSpPr/>
+          <p:nvPr/>
+        </p:nvSpPr>
+        <p:spPr>
+          <a:xfrm>
+            <a:off x="1051560" y="5440680"/>
+            <a:ext cx="10424160" cy="365760"/>
+          </a:xfrm>
+          <a:prstGeom prst="rect">
+            <a:avLst/>
+          </a:prstGeom>
+          <a:noFill/>
+          <a:ln/>
+        </p:spPr>
+        <p:txBody>
+          <a:bodyPr wrap="square" rtlCol="0" anchor="ctr"/>
+          <a:lstStyle/>
+          <a:p>
+            <a:pPr indent="0" marL="0">
+              <a:buNone/>
+            </a:pPr>
+            <a:r>
+              <a:rPr lang="en-US" sz="1500" b="1" dirty="0">
+                <a:solidFill>
+                  <a:srgbClr val="7A3B2E"/>
+                </a:solidFill>
+                <a:latin typeface="Calibri" pitchFamily="34" charset="0"/>
+                <a:ea typeface="Calibri" pitchFamily="34" charset="-122"/>
+                <a:cs typeface="Calibri" pitchFamily="34" charset="-120"/>
+              </a:rPr>
               <a:t>Check (AI closed)</a:t>
             </a:r>
             <a:endParaRPr lang="en-US" sz="1500" dirty="0"/>
@@ -3679,13 +3779,13 @@
       </p:sp>
       <p:sp>
         <p:nvSpPr>
-          <p:cNvPr id="14" name="Text 12"/>
-          <p:cNvSpPr/>
-          <p:nvPr/>
-        </p:nvSpPr>
-        <p:spPr>
-          <a:xfrm>
-            <a:off x="1051560" y="5550408"/>
+          <p:cNvPr id="17" name="Text 15"/>
+          <p:cNvSpPr/>
+          <p:nvPr/>
+        </p:nvSpPr>
+        <p:spPr>
+          <a:xfrm>
+            <a:off x="1051560" y="5824728"/>
             <a:ext cx="10424160" cy="731520"/>
           </a:xfrm>
           <a:prstGeom prst="rect">

--- a/slides/pptx/week-01.pptx
+++ b/slides/pptx/week-01.pptx
@@ -18,9 +18,10 @@
     <p:sldId id="266" r:id="rId12"/>
     <p:sldId id="267" r:id="rId13"/>
     <p:sldId id="268" r:id="rId14"/>
+    <p:sldId id="269" r:id="rId15"/>
   </p:sldIdLst>
   <p:notesMasterIdLst>
-    <p:notesMasterId r:id="rId15"/>
+    <p:notesMasterId r:id="rId16"/>
   </p:notesMasterIdLst>
   <p:sldSz cx="12191695" cy="6858000"/>
   <p:notesSz cx="6858000" cy="12191695"/>
@@ -908,6 +909,94 @@
 </p:notes>
 </file>
 
+<file path=ppt/notesSlides/notesSlide14.xml><?xml version="1.0" encoding="utf-8"?>
+<p:notes xmlns:a="http://schemas.openxmlformats.org/drawingml/2006/main" xmlns:r="http://schemas.openxmlformats.org/officeDocument/2006/relationships" xmlns:p="http://schemas.openxmlformats.org/presentationml/2006/main">
+  <p:cSld>
+    <p:spTree>
+      <p:nvGrpSpPr>
+        <p:cNvPr id="1" name=""/>
+        <p:cNvGrpSpPr/>
+        <p:nvPr/>
+      </p:nvGrpSpPr>
+      <p:grpSpPr>
+        <a:xfrm>
+          <a:off x="0" y="0"/>
+          <a:ext cx="0" cy="0"/>
+          <a:chOff x="0" y="0"/>
+          <a:chExt cx="0" cy="0"/>
+        </a:xfrm>
+      </p:grpSpPr>
+      <p:sp>
+        <p:nvSpPr>
+          <p:cNvPr id="2" name="Slide Image Placeholder 1"/>
+          <p:cNvSpPr>
+            <a:spLocks noGrp="1" noRot="1" noChangeAspect="1"/>
+          </p:cNvSpPr>
+          <p:nvPr>
+            <p:ph type="sldImg"/>
+          </p:nvPr>
+        </p:nvSpPr>
+        <p:spPr/>
+      </p:sp>
+      <p:sp>
+        <p:nvSpPr>
+          <p:cNvPr id="3" name="Notes Placeholder 2"/>
+          <p:cNvSpPr>
+            <a:spLocks noGrp="1"/>
+          </p:cNvSpPr>
+          <p:nvPr>
+            <p:ph type="body" idx="1"/>
+          </p:nvPr>
+        </p:nvSpPr>
+        <p:spPr/>
+        <p:txBody>
+          <a:bodyPr/>
+          <a:lstStyle/>
+          <a:p>
+            <a:r>
+              <a:rPr lang="en-US" dirty="0"/>
+              <a:t/>
+            </a:r>
+            <a:endParaRPr lang="en-US" dirty="0"/>
+          </a:p>
+        </p:txBody>
+      </p:sp>
+      <p:sp>
+        <p:nvSpPr>
+          <p:cNvPr id="4" name="Slide Number Placeholder 3"/>
+          <p:cNvSpPr>
+            <a:spLocks noGrp="1"/>
+          </p:cNvSpPr>
+          <p:nvPr>
+            <p:ph type="sldNum" sz="quarter" idx="10"/>
+          </p:nvPr>
+        </p:nvSpPr>
+        <p:spPr/>
+        <p:txBody>
+          <a:bodyPr/>
+          <a:lstStyle/>
+          <a:p>
+            <a:fld id="{F7021451-1387-4CA6-816F-3879F97B5CBC}" type="slidenum">
+              <a:rPr lang="en-US"/>
+              <a:t>14</a:t>
+            </a:fld>
+            <a:endParaRPr lang="en-US"/>
+          </a:p>
+        </p:txBody>
+      </p:sp>
+    </p:spTree>
+    <p:extLst>
+      <p:ext uri="{BB962C8B-B14F-4D97-AF65-F5344CB8AC3E}">
+        <p14:creationId xmlns:p14="http://schemas.microsoft.com/office/powerpoint/2010/main" val="1024086991"/>
+      </p:ext>
+    </p:extLst>
+  </p:cSld>
+  <p:clrMapOvr>
+    <a:masterClrMapping/>
+  </p:clrMapOvr>
+</p:notes>
+</file>
+
 <file path=ppt/notesSlides/notesSlide2.xml><?xml version="1.0" encoding="utf-8"?>
 <p:notes xmlns:a="http://schemas.openxmlformats.org/drawingml/2006/main" xmlns:r="http://schemas.openxmlformats.org/officeDocument/2006/relationships" xmlns:p="http://schemas.openxmlformats.org/presentationml/2006/main">
   <p:cSld>
@@ -2502,7 +2591,7 @@
         </p:nvSpPr>
         <p:spPr>
           <a:xfrm>
-            <a:off x="640080" y="640080"/>
+            <a:off x="640080" y="731520"/>
             <a:ext cx="10058400" cy="731520"/>
           </a:xfrm>
           <a:prstGeom prst="rect">
@@ -2527,7 +2616,7 @@
                 <a:ea typeface="Cambria" pitchFamily="34" charset="-122"/>
                 <a:cs typeface="Cambria" pitchFamily="34" charset="-120"/>
               </a:rPr>
-              <a:t>The session</a:t>
+              <a:t>Three modes today</a:t>
             </a:r>
             <a:endParaRPr lang="en-US" sz="3000" dirty="0"/>
           </a:p>
@@ -2535,36 +2624,14 @@
       </p:sp>
       <p:sp>
         <p:nvSpPr>
-          <p:cNvPr id="3" name="Shape 1"/>
-          <p:cNvSpPr/>
-          <p:nvPr/>
-        </p:nvSpPr>
-        <p:spPr>
-          <a:xfrm>
-            <a:off x="640080" y="1572768"/>
-            <a:ext cx="868680" cy="457200"/>
-          </a:xfrm>
-          <a:prstGeom prst="roundRect">
-            <a:avLst>
-              <a:gd name="adj" fmla="val 12000"/>
-            </a:avLst>
-          </a:prstGeom>
-          <a:solidFill>
-            <a:srgbClr val="7A3B2E"/>
-          </a:solidFill>
-          <a:ln/>
-        </p:spPr>
-      </p:sp>
-      <p:sp>
-        <p:nvSpPr>
-          <p:cNvPr id="4" name="Text 2"/>
-          <p:cNvSpPr/>
-          <p:nvPr/>
-        </p:nvSpPr>
-        <p:spPr>
-          <a:xfrm>
-            <a:off x="640080" y="1572768"/>
-            <a:ext cx="868680" cy="457200"/>
+          <p:cNvPr id="3" name="Text 1"/>
+          <p:cNvSpPr/>
+          <p:nvPr/>
+        </p:nvSpPr>
+        <p:spPr>
+          <a:xfrm>
+            <a:off x="640080" y="1417320"/>
+            <a:ext cx="10058400" cy="365760"/>
           </a:xfrm>
           <a:prstGeom prst="rect">
             <a:avLst/>
@@ -2576,52 +2643,136 @@
           <a:bodyPr wrap="square" rtlCol="0" anchor="ctr"/>
           <a:lstStyle/>
           <a:p>
-            <a:pPr algn="ctr" indent="0" marL="0">
-              <a:buNone/>
-            </a:pPr>
-            <a:r>
-              <a:rPr lang="en-US" sz="1100" b="1" dirty="0">
-                <a:solidFill>
-                  <a:srgbClr val="FFFFFF"/>
+            <a:pPr indent="0" marL="0">
+              <a:buNone/>
+            </a:pPr>
+            <a:r>
+              <a:rPr lang="en-US" sz="1400" i="1" dirty="0">
+                <a:solidFill>
+                  <a:srgbClr val="6B6B63"/>
                 </a:solidFill>
                 <a:latin typeface="Calibri" pitchFamily="34" charset="0"/>
                 <a:ea typeface="Calibri" pitchFamily="34" charset="-122"/>
                 <a:cs typeface="Calibri" pitchFamily="34" charset="-120"/>
               </a:rPr>
-              <a:t>0:00</a:t>
-            </a:r>
-            <a:endParaRPr lang="en-US" sz="1100" dirty="0"/>
-          </a:p>
-        </p:txBody>
-      </p:sp>
-      <p:sp>
-        <p:nvSpPr>
-          <p:cNvPr id="5" name="Text 3"/>
-          <p:cNvSpPr/>
-          <p:nvPr/>
-        </p:nvSpPr>
-        <p:spPr>
-          <a:xfrm>
-            <a:off x="1691640" y="1554480"/>
-            <a:ext cx="9646920" cy="566928"/>
-          </a:xfrm>
-          <a:prstGeom prst="rect">
-            <a:avLst/>
-          </a:prstGeom>
-          <a:noFill/>
-          <a:ln/>
-        </p:spPr>
-        <p:txBody>
-          <a:bodyPr wrap="square" rtlCol="0" anchor="ctr">
+              <a:t>about a third of the session each</a:t>
+            </a:r>
+            <a:endParaRPr lang="en-US" sz="1400" dirty="0"/>
+          </a:p>
+        </p:txBody>
+      </p:sp>
+      <p:sp>
+        <p:nvSpPr>
+          <p:cNvPr id="4" name="Shape 2"/>
+          <p:cNvSpPr/>
+          <p:nvPr/>
+        </p:nvSpPr>
+        <p:spPr>
+          <a:xfrm>
+            <a:off x="640080" y="2194560"/>
+            <a:ext cx="3383280" cy="3291840"/>
+          </a:xfrm>
+          <a:prstGeom prst="roundRect">
+            <a:avLst>
+              <a:gd name="adj" fmla="val 3333"/>
+            </a:avLst>
+          </a:prstGeom>
+          <a:solidFill>
+            <a:srgbClr val="F4EEE8"/>
+          </a:solidFill>
+          <a:ln/>
+        </p:spPr>
+      </p:sp>
+      <p:sp>
+        <p:nvSpPr>
+          <p:cNvPr id="5" name="Shape 3"/>
+          <p:cNvSpPr/>
+          <p:nvPr/>
+        </p:nvSpPr>
+        <p:spPr>
+          <a:xfrm>
+            <a:off x="1051560" y="2606040"/>
+            <a:ext cx="548640" cy="548640"/>
+          </a:xfrm>
+          <a:prstGeom prst="ellipse">
+            <a:avLst/>
+          </a:prstGeom>
+          <a:solidFill>
+            <a:srgbClr val="7A3B2E"/>
+          </a:solidFill>
+          <a:ln/>
+        </p:spPr>
+      </p:sp>
+      <p:sp>
+        <p:nvSpPr>
+          <p:cNvPr id="6" name="Text 4"/>
+          <p:cNvSpPr/>
+          <p:nvPr/>
+        </p:nvSpPr>
+        <p:spPr>
+          <a:xfrm>
+            <a:off x="1005840" y="3383280"/>
+            <a:ext cx="2651760" cy="548640"/>
+          </a:xfrm>
+          <a:prstGeom prst="rect">
+            <a:avLst/>
+          </a:prstGeom>
+          <a:noFill/>
+          <a:ln/>
+        </p:spPr>
+        <p:txBody>
+          <a:bodyPr wrap="square" rtlCol="0" anchor="ctr"/>
+          <a:lstStyle/>
+          <a:p>
+            <a:pPr indent="0" marL="0">
+              <a:buNone/>
+            </a:pPr>
+            <a:r>
+              <a:rPr lang="en-US" sz="2100" b="1" dirty="0">
+                <a:solidFill>
+                  <a:srgbClr val="1A1A1A"/>
+                </a:solidFill>
+                <a:latin typeface="Cambria" pitchFamily="34" charset="0"/>
+                <a:ea typeface="Cambria" pitchFamily="34" charset="-122"/>
+                <a:cs typeface="Cambria" pitchFamily="34" charset="-120"/>
+              </a:rPr>
+              <a:t>Lecture / demo</a:t>
+            </a:r>
+            <a:endParaRPr lang="en-US" sz="2100" dirty="0"/>
+          </a:p>
+        </p:txBody>
+      </p:sp>
+      <p:sp>
+        <p:nvSpPr>
+          <p:cNvPr id="7" name="Text 5"/>
+          <p:cNvSpPr/>
+          <p:nvPr/>
+        </p:nvSpPr>
+        <p:spPr>
+          <a:xfrm>
+            <a:off x="1005840" y="3977640"/>
+            <a:ext cx="2651760" cy="1371600"/>
+          </a:xfrm>
+          <a:prstGeom prst="rect">
+            <a:avLst/>
+          </a:prstGeom>
+          <a:noFill/>
+          <a:ln/>
+        </p:spPr>
+        <p:txBody>
+          <a:bodyPr wrap="square" rtlCol="0" anchor="t">
             <a:spAutoFit/>
           </a:bodyPr>
           <a:lstStyle/>
           <a:p>
             <a:pPr indent="0" marL="0">
-              <a:buNone/>
-            </a:pPr>
-            <a:r>
-              <a:rPr lang="en-US" sz="1250" dirty="0">
+              <a:lnSpc>
+                <a:spcPct val="115000"/>
+              </a:lnSpc>
+              <a:buNone/>
+            </a:pPr>
+            <a:r>
+              <a:rPr lang="en-US" sz="1500" dirty="0">
                 <a:solidFill>
                   <a:srgbClr val="1A1A1A"/>
                 </a:solidFill>
@@ -2629,44 +2780,64 @@
                 <a:ea typeface="Calibri" pitchFamily="34" charset="-122"/>
                 <a:cs typeface="Calibri" pitchFamily="34" charset="-120"/>
               </a:rPr>
-              <a:t>Introductions and working agreements, demonstrated in practice. Today's live coding deliberately includes real mistakes.</a:t>
-            </a:r>
-            <a:endParaRPr lang="en-US" sz="1250" dirty="0"/>
-          </a:p>
-        </p:txBody>
-      </p:sp>
-      <p:sp>
-        <p:nvSpPr>
-          <p:cNvPr id="6" name="Shape 4"/>
-          <p:cNvSpPr/>
-          <p:nvPr/>
-        </p:nvSpPr>
-        <p:spPr>
-          <a:xfrm>
-            <a:off x="640080" y="2139696"/>
-            <a:ext cx="868680" cy="457200"/>
+              <a:t>Counting: rows, words, pixels</a:t>
+            </a:r>
+            <a:endParaRPr lang="en-US" sz="1500" dirty="0"/>
+          </a:p>
+        </p:txBody>
+      </p:sp>
+      <p:sp>
+        <p:nvSpPr>
+          <p:cNvPr id="8" name="Shape 6"/>
+          <p:cNvSpPr/>
+          <p:nvPr/>
+        </p:nvSpPr>
+        <p:spPr>
+          <a:xfrm>
+            <a:off x="4526280" y="2194560"/>
+            <a:ext cx="3383280" cy="3291840"/>
           </a:xfrm>
           <a:prstGeom prst="roundRect">
             <a:avLst>
-              <a:gd name="adj" fmla="val 12000"/>
+              <a:gd name="adj" fmla="val 3333"/>
             </a:avLst>
           </a:prstGeom>
           <a:solidFill>
-            <a:srgbClr val="7A3B2E"/>
-          </a:solidFill>
-          <a:ln/>
-        </p:spPr>
-      </p:sp>
-      <p:sp>
-        <p:nvSpPr>
-          <p:cNvPr id="7" name="Text 5"/>
-          <p:cNvSpPr/>
-          <p:nvPr/>
-        </p:nvSpPr>
-        <p:spPr>
-          <a:xfrm>
-            <a:off x="640080" y="2139696"/>
-            <a:ext cx="868680" cy="457200"/>
+            <a:srgbClr val="F4EEE8"/>
+          </a:solidFill>
+          <a:ln/>
+        </p:spPr>
+      </p:sp>
+      <p:sp>
+        <p:nvSpPr>
+          <p:cNvPr id="9" name="Shape 7"/>
+          <p:cNvSpPr/>
+          <p:nvPr/>
+        </p:nvSpPr>
+        <p:spPr>
+          <a:xfrm>
+            <a:off x="4937760" y="2606040"/>
+            <a:ext cx="548640" cy="548640"/>
+          </a:xfrm>
+          <a:prstGeom prst="ellipse">
+            <a:avLst/>
+          </a:prstGeom>
+          <a:solidFill>
+            <a:srgbClr val="3F6F5F"/>
+          </a:solidFill>
+          <a:ln/>
+        </p:spPr>
+      </p:sp>
+      <p:sp>
+        <p:nvSpPr>
+          <p:cNvPr id="10" name="Text 8"/>
+          <p:cNvSpPr/>
+          <p:nvPr/>
+        </p:nvSpPr>
+        <p:spPr>
+          <a:xfrm>
+            <a:off x="4892040" y="3383280"/>
+            <a:ext cx="2651760" cy="548640"/>
           </a:xfrm>
           <a:prstGeom prst="rect">
             <a:avLst/>
@@ -2678,52 +2849,180 @@
           <a:bodyPr wrap="square" rtlCol="0" anchor="ctr"/>
           <a:lstStyle/>
           <a:p>
-            <a:pPr algn="ctr" indent="0" marL="0">
-              <a:buNone/>
-            </a:pPr>
-            <a:r>
-              <a:rPr lang="en-US" sz="1100" b="1" dirty="0">
-                <a:solidFill>
-                  <a:srgbClr val="FFFFFF"/>
+            <a:pPr indent="0" marL="0">
+              <a:buNone/>
+            </a:pPr>
+            <a:r>
+              <a:rPr lang="en-US" sz="2100" b="1" dirty="0">
+                <a:solidFill>
+                  <a:srgbClr val="1A1A1A"/>
+                </a:solidFill>
+                <a:latin typeface="Cambria" pitchFamily="34" charset="0"/>
+                <a:ea typeface="Cambria" pitchFamily="34" charset="-122"/>
+                <a:cs typeface="Cambria" pitchFamily="34" charset="-120"/>
+              </a:rPr>
+              <a:t>Workshop</a:t>
+            </a:r>
+            <a:endParaRPr lang="en-US" sz="2100" dirty="0"/>
+          </a:p>
+        </p:txBody>
+      </p:sp>
+      <p:sp>
+        <p:nvSpPr>
+          <p:cNvPr id="11" name="Text 9"/>
+          <p:cNvSpPr/>
+          <p:nvPr/>
+        </p:nvSpPr>
+        <p:spPr>
+          <a:xfrm>
+            <a:off x="4892040" y="3977640"/>
+            <a:ext cx="2651760" cy="1371600"/>
+          </a:xfrm>
+          <a:prstGeom prst="rect">
+            <a:avLst/>
+          </a:prstGeom>
+          <a:noFill/>
+          <a:ln/>
+        </p:spPr>
+        <p:txBody>
+          <a:bodyPr wrap="square" rtlCol="0" anchor="t">
+            <a:spAutoFit/>
+          </a:bodyPr>
+          <a:lstStyle/>
+          <a:p>
+            <a:pPr indent="0" marL="0">
+              <a:lnSpc>
+                <a:spcPct val="115000"/>
+              </a:lnSpc>
+              <a:buNone/>
+            </a:pPr>
+            <a:r>
+              <a:rPr lang="en-US" sz="1500" dirty="0">
+                <a:solidFill>
+                  <a:srgbClr val="1A1A1A"/>
                 </a:solidFill>
                 <a:latin typeface="Calibri" pitchFamily="34" charset="0"/>
                 <a:ea typeface="Calibri" pitchFamily="34" charset="-122"/>
                 <a:cs typeface="Calibri" pitchFamily="34" charset="-120"/>
               </a:rPr>
-              <a:t>0:12</a:t>
-            </a:r>
-            <a:endParaRPr lang="en-US" sz="1100" dirty="0"/>
-          </a:p>
-        </p:txBody>
-      </p:sp>
-      <p:sp>
-        <p:nvSpPr>
-          <p:cNvPr id="8" name="Text 6"/>
-          <p:cNvSpPr/>
-          <p:nvPr/>
-        </p:nvSpPr>
-        <p:spPr>
-          <a:xfrm>
-            <a:off x="1691640" y="2121408"/>
-            <a:ext cx="9646920" cy="566928"/>
-          </a:xfrm>
-          <a:prstGeom prst="rect">
-            <a:avLst/>
-          </a:prstGeom>
-          <a:noFill/>
-          <a:ln/>
-        </p:spPr>
-        <p:txBody>
-          <a:bodyPr wrap="square" rtlCol="0" anchor="ctr">
+              <a:t>Build hands-on on your own data.</a:t>
+            </a:r>
+            <a:endParaRPr lang="en-US" sz="1500" dirty="0"/>
+          </a:p>
+        </p:txBody>
+      </p:sp>
+      <p:sp>
+        <p:nvSpPr>
+          <p:cNvPr id="12" name="Shape 10"/>
+          <p:cNvSpPr/>
+          <p:nvPr/>
+        </p:nvSpPr>
+        <p:spPr>
+          <a:xfrm>
+            <a:off x="8412480" y="2194560"/>
+            <a:ext cx="3383280" cy="3291840"/>
+          </a:xfrm>
+          <a:prstGeom prst="roundRect">
+            <a:avLst>
+              <a:gd name="adj" fmla="val 3333"/>
+            </a:avLst>
+          </a:prstGeom>
+          <a:solidFill>
+            <a:srgbClr val="F4EEE8"/>
+          </a:solidFill>
+          <a:ln/>
+        </p:spPr>
+      </p:sp>
+      <p:sp>
+        <p:nvSpPr>
+          <p:cNvPr id="13" name="Shape 11"/>
+          <p:cNvSpPr/>
+          <p:nvPr/>
+        </p:nvSpPr>
+        <p:spPr>
+          <a:xfrm>
+            <a:off x="8823960" y="2606040"/>
+            <a:ext cx="548640" cy="548640"/>
+          </a:xfrm>
+          <a:prstGeom prst="ellipse">
+            <a:avLst/>
+          </a:prstGeom>
+          <a:solidFill>
+            <a:srgbClr val="B9852F"/>
+          </a:solidFill>
+          <a:ln/>
+        </p:spPr>
+      </p:sp>
+      <p:sp>
+        <p:nvSpPr>
+          <p:cNvPr id="14" name="Text 12"/>
+          <p:cNvSpPr/>
+          <p:nvPr/>
+        </p:nvSpPr>
+        <p:spPr>
+          <a:xfrm>
+            <a:off x="8778240" y="3383280"/>
+            <a:ext cx="2651760" cy="548640"/>
+          </a:xfrm>
+          <a:prstGeom prst="rect">
+            <a:avLst/>
+          </a:prstGeom>
+          <a:noFill/>
+          <a:ln/>
+        </p:spPr>
+        <p:txBody>
+          <a:bodyPr wrap="square" rtlCol="0" anchor="ctr"/>
+          <a:lstStyle/>
+          <a:p>
+            <a:pPr indent="0" marL="0">
+              <a:buNone/>
+            </a:pPr>
+            <a:r>
+              <a:rPr lang="en-US" sz="2100" b="1" dirty="0">
+                <a:solidFill>
+                  <a:srgbClr val="1A1A1A"/>
+                </a:solidFill>
+                <a:latin typeface="Cambria" pitchFamily="34" charset="0"/>
+                <a:ea typeface="Cambria" pitchFamily="34" charset="-122"/>
+                <a:cs typeface="Cambria" pitchFamily="34" charset="-120"/>
+              </a:rPr>
+              <a:t>Discussion</a:t>
+            </a:r>
+            <a:endParaRPr lang="en-US" sz="2100" dirty="0"/>
+          </a:p>
+        </p:txBody>
+      </p:sp>
+      <p:sp>
+        <p:nvSpPr>
+          <p:cNvPr id="15" name="Text 13"/>
+          <p:cNvSpPr/>
+          <p:nvPr/>
+        </p:nvSpPr>
+        <p:spPr>
+          <a:xfrm>
+            <a:off x="8778240" y="3977640"/>
+            <a:ext cx="2651760" cy="1371600"/>
+          </a:xfrm>
+          <a:prstGeom prst="rect">
+            <a:avLst/>
+          </a:prstGeom>
+          <a:noFill/>
+          <a:ln/>
+        </p:spPr>
+        <p:txBody>
+          <a:bodyPr wrap="square" rtlCol="0" anchor="t">
             <a:spAutoFit/>
           </a:bodyPr>
           <a:lstStyle/>
           <a:p>
             <a:pPr indent="0" marL="0">
-              <a:buNone/>
-            </a:pPr>
-            <a:r>
-              <a:rPr lang="en-US" sz="1250" dirty="0">
+              <a:lnSpc>
+                <a:spcPct val="115000"/>
+              </a:lnSpc>
+              <a:buNone/>
+            </a:pPr>
+            <a:r>
+              <a:rPr lang="en-US" sz="1500" dirty="0">
                 <a:solidFill>
                   <a:srgbClr val="1A1A1A"/>
                 </a:solidFill>
@@ -2731,519 +3030,9 @@
                 <a:ea typeface="Calibri" pitchFamily="34" charset="-122"/>
                 <a:cs typeface="Calibri" pitchFamily="34" charset="-120"/>
               </a:rPr>
-              <a:t>Look at This, then Question It: She Giggles, He Gallops.</a:t>
-            </a:r>
-            <a:endParaRPr lang="en-US" sz="1250" dirty="0"/>
-          </a:p>
-        </p:txBody>
-      </p:sp>
-      <p:sp>
-        <p:nvSpPr>
-          <p:cNvPr id="9" name="Shape 7"/>
-          <p:cNvSpPr/>
-          <p:nvPr/>
-        </p:nvSpPr>
-        <p:spPr>
-          <a:xfrm>
-            <a:off x="640080" y="2706624"/>
-            <a:ext cx="868680" cy="457200"/>
-          </a:xfrm>
-          <a:prstGeom prst="roundRect">
-            <a:avLst>
-              <a:gd name="adj" fmla="val 12000"/>
-            </a:avLst>
-          </a:prstGeom>
-          <a:solidFill>
-            <a:srgbClr val="7A3B2E"/>
-          </a:solidFill>
-          <a:ln/>
-        </p:spPr>
-      </p:sp>
-      <p:sp>
-        <p:nvSpPr>
-          <p:cNvPr id="10" name="Text 8"/>
-          <p:cNvSpPr/>
-          <p:nvPr/>
-        </p:nvSpPr>
-        <p:spPr>
-          <a:xfrm>
-            <a:off x="640080" y="2706624"/>
-            <a:ext cx="868680" cy="457200"/>
-          </a:xfrm>
-          <a:prstGeom prst="rect">
-            <a:avLst/>
-          </a:prstGeom>
-          <a:noFill/>
-          <a:ln/>
-        </p:spPr>
-        <p:txBody>
-          <a:bodyPr wrap="square" rtlCol="0" anchor="ctr"/>
-          <a:lstStyle/>
-          <a:p>
-            <a:pPr algn="ctr" indent="0" marL="0">
-              <a:buNone/>
-            </a:pPr>
-            <a:r>
-              <a:rPr lang="en-US" sz="1100" b="1" dirty="0">
-                <a:solidFill>
-                  <a:srgbClr val="FFFFFF"/>
-                </a:solidFill>
-                <a:latin typeface="Calibri" pitchFamily="34" charset="0"/>
-                <a:ea typeface="Calibri" pitchFamily="34" charset="-122"/>
-                <a:cs typeface="Calibri" pitchFamily="34" charset="-120"/>
-              </a:rPr>
-              <a:t>0:17</a:t>
-            </a:r>
-            <a:endParaRPr lang="en-US" sz="1100" dirty="0"/>
-          </a:p>
-        </p:txBody>
-      </p:sp>
-      <p:sp>
-        <p:nvSpPr>
-          <p:cNvPr id="11" name="Text 9"/>
-          <p:cNvSpPr/>
-          <p:nvPr/>
-        </p:nvSpPr>
-        <p:spPr>
-          <a:xfrm>
-            <a:off x="1691640" y="2688336"/>
-            <a:ext cx="9646920" cy="566928"/>
-          </a:xfrm>
-          <a:prstGeom prst="rect">
-            <a:avLst/>
-          </a:prstGeom>
-          <a:noFill/>
-          <a:ln/>
-        </p:spPr>
-        <p:txBody>
-          <a:bodyPr wrap="square" rtlCol="0" anchor="ctr">
-            <a:spAutoFit/>
-          </a:bodyPr>
-          <a:lstStyle/>
-          <a:p>
-            <a:pPr indent="0" marL="0">
-              <a:buNone/>
-            </a:pPr>
-            <a:r>
-              <a:rPr lang="en-US" sz="1250" dirty="0">
-                <a:solidFill>
-                  <a:srgbClr val="1A1A1A"/>
-                </a:solidFill>
-                <a:latin typeface="Calibri" pitchFamily="34" charset="0"/>
-                <a:ea typeface="Calibri" pitchFamily="34" charset="-122"/>
-                <a:cs typeface="Calibri" pitchFamily="34" charset="-120"/>
-              </a:rPr>
-              <a:t>Pre-train the vocabulary (no code): corpus, method, model, embedding, in plain language with pictures. The course map and the deliverable.</a:t>
-            </a:r>
-            <a:endParaRPr lang="en-US" sz="1250" dirty="0"/>
-          </a:p>
-        </p:txBody>
-      </p:sp>
-      <p:sp>
-        <p:nvSpPr>
-          <p:cNvPr id="12" name="Shape 10"/>
-          <p:cNvSpPr/>
-          <p:nvPr/>
-        </p:nvSpPr>
-        <p:spPr>
-          <a:xfrm>
-            <a:off x="640080" y="3273552"/>
-            <a:ext cx="868680" cy="457200"/>
-          </a:xfrm>
-          <a:prstGeom prst="roundRect">
-            <a:avLst>
-              <a:gd name="adj" fmla="val 12000"/>
-            </a:avLst>
-          </a:prstGeom>
-          <a:solidFill>
-            <a:srgbClr val="7A3B2E"/>
-          </a:solidFill>
-          <a:ln/>
-        </p:spPr>
-      </p:sp>
-      <p:sp>
-        <p:nvSpPr>
-          <p:cNvPr id="13" name="Text 11"/>
-          <p:cNvSpPr/>
-          <p:nvPr/>
-        </p:nvSpPr>
-        <p:spPr>
-          <a:xfrm>
-            <a:off x="640080" y="3273552"/>
-            <a:ext cx="868680" cy="457200"/>
-          </a:xfrm>
-          <a:prstGeom prst="rect">
-            <a:avLst/>
-          </a:prstGeom>
-          <a:noFill/>
-          <a:ln/>
-        </p:spPr>
-        <p:txBody>
-          <a:bodyPr wrap="square" rtlCol="0" anchor="ctr"/>
-          <a:lstStyle/>
-          <a:p>
-            <a:pPr algn="ctr" indent="0" marL="0">
-              <a:buNone/>
-            </a:pPr>
-            <a:r>
-              <a:rPr lang="en-US" sz="1100" b="1" dirty="0">
-                <a:solidFill>
-                  <a:srgbClr val="FFFFFF"/>
-                </a:solidFill>
-                <a:latin typeface="Calibri" pitchFamily="34" charset="0"/>
-                <a:ea typeface="Calibri" pitchFamily="34" charset="-122"/>
-                <a:cs typeface="Calibri" pitchFamily="34" charset="-120"/>
-              </a:rPr>
-              <a:t>0:32</a:t>
-            </a:r>
-            <a:endParaRPr lang="en-US" sz="1100" dirty="0"/>
-          </a:p>
-        </p:txBody>
-      </p:sp>
-      <p:sp>
-        <p:nvSpPr>
-          <p:cNvPr id="14" name="Text 12"/>
-          <p:cNvSpPr/>
-          <p:nvPr/>
-        </p:nvSpPr>
-        <p:spPr>
-          <a:xfrm>
-            <a:off x="1691640" y="3255264"/>
-            <a:ext cx="9646920" cy="566928"/>
-          </a:xfrm>
-          <a:prstGeom prst="rect">
-            <a:avLst/>
-          </a:prstGeom>
-          <a:noFill/>
-          <a:ln/>
-        </p:spPr>
-        <p:txBody>
-          <a:bodyPr wrap="square" rtlCol="0" anchor="ctr">
-            <a:spAutoFit/>
-          </a:bodyPr>
-          <a:lstStyle/>
-          <a:p>
-            <a:pPr indent="0" marL="0">
-              <a:buNone/>
-            </a:pPr>
-            <a:r>
-              <a:rPr lang="en-US" sz="1250" dirty="0">
-                <a:solidFill>
-                  <a:srgbClr val="1A1A1A"/>
-                </a:solidFill>
-                <a:latin typeface="Calibri" pitchFamily="34" charset="0"/>
-                <a:ea typeface="Calibri" pitchFamily="34" charset="-122"/>
-                <a:cs typeface="Calibri" pitchFamily="34" charset="-120"/>
-              </a:rPr>
-              <a:t>Lab 1 (worked, participatory): copy the notebook to Drive and mount Drive into the runtime (this is how your corpus and results survive Colab wiping the session, everything saving to one project folder), put a Gemini key in Colab Secrets, load NYT wedding data, make a first chart. Hand out the common-errors cheat sheet. Then solo with a partner: draft three questions, pick one, have the AI write the code, run it, chart it. Write one sentence predicting your cell before you run it.</a:t>
-            </a:r>
-            <a:endParaRPr lang="en-US" sz="1250" dirty="0"/>
-          </a:p>
-        </p:txBody>
-      </p:sp>
-      <p:sp>
-        <p:nvSpPr>
-          <p:cNvPr id="15" name="Shape 13"/>
-          <p:cNvSpPr/>
-          <p:nvPr/>
-        </p:nvSpPr>
-        <p:spPr>
-          <a:xfrm>
-            <a:off x="640080" y="3840480"/>
-            <a:ext cx="868680" cy="457200"/>
-          </a:xfrm>
-          <a:prstGeom prst="roundRect">
-            <a:avLst>
-              <a:gd name="adj" fmla="val 12000"/>
-            </a:avLst>
-          </a:prstGeom>
-          <a:solidFill>
-            <a:srgbClr val="7A3B2E"/>
-          </a:solidFill>
-          <a:ln/>
-        </p:spPr>
-      </p:sp>
-      <p:sp>
-        <p:nvSpPr>
-          <p:cNvPr id="16" name="Text 14"/>
-          <p:cNvSpPr/>
-          <p:nvPr/>
-        </p:nvSpPr>
-        <p:spPr>
-          <a:xfrm>
-            <a:off x="640080" y="3840480"/>
-            <a:ext cx="868680" cy="457200"/>
-          </a:xfrm>
-          <a:prstGeom prst="rect">
-            <a:avLst/>
-          </a:prstGeom>
-          <a:noFill/>
-          <a:ln/>
-        </p:spPr>
-        <p:txBody>
-          <a:bodyPr wrap="square" rtlCol="0" anchor="ctr"/>
-          <a:lstStyle/>
-          <a:p>
-            <a:pPr algn="ctr" indent="0" marL="0">
-              <a:buNone/>
-            </a:pPr>
-            <a:r>
-              <a:rPr lang="en-US" sz="1100" b="1" dirty="0">
-                <a:solidFill>
-                  <a:srgbClr val="FFFFFF"/>
-                </a:solidFill>
-                <a:latin typeface="Calibri" pitchFamily="34" charset="0"/>
-                <a:ea typeface="Calibri" pitchFamily="34" charset="-122"/>
-                <a:cs typeface="Calibri" pitchFamily="34" charset="-120"/>
-              </a:rPr>
-              <a:t>1:10</a:t>
-            </a:r>
-            <a:endParaRPr lang="en-US" sz="1100" dirty="0"/>
-          </a:p>
-        </p:txBody>
-      </p:sp>
-      <p:sp>
-        <p:nvSpPr>
-          <p:cNvPr id="17" name="Text 15"/>
-          <p:cNvSpPr/>
-          <p:nvPr/>
-        </p:nvSpPr>
-        <p:spPr>
-          <a:xfrm>
-            <a:off x="1691640" y="3822192"/>
-            <a:ext cx="9646920" cy="566928"/>
-          </a:xfrm>
-          <a:prstGeom prst="rect">
-            <a:avLst/>
-          </a:prstGeom>
-          <a:noFill/>
-          <a:ln/>
-        </p:spPr>
-        <p:txBody>
-          <a:bodyPr wrap="square" rtlCol="0" anchor="ctr">
-            <a:spAutoFit/>
-          </a:bodyPr>
-          <a:lstStyle/>
-          <a:p>
-            <a:pPr indent="0" marL="0">
-              <a:buNone/>
-            </a:pPr>
-            <a:r>
-              <a:rPr lang="en-US" sz="1250" dirty="0">
-                <a:solidFill>
-                  <a:srgbClr val="1A1A1A"/>
-                </a:solidFill>
-                <a:latin typeface="Calibri" pitchFamily="34" charset="0"/>
-                <a:ea typeface="Calibri" pitchFamily="34" charset="-122"/>
-                <a:cs typeface="Calibri" pitchFamily="34" charset="-120"/>
-              </a:rPr>
-              <a:t>Break</a:t>
-            </a:r>
-            <a:endParaRPr lang="en-US" sz="1250" dirty="0"/>
-          </a:p>
-        </p:txBody>
-      </p:sp>
-      <p:sp>
-        <p:nvSpPr>
-          <p:cNvPr id="18" name="Shape 16"/>
-          <p:cNvSpPr/>
-          <p:nvPr/>
-        </p:nvSpPr>
-        <p:spPr>
-          <a:xfrm>
-            <a:off x="640080" y="4407408"/>
-            <a:ext cx="868680" cy="457200"/>
-          </a:xfrm>
-          <a:prstGeom prst="roundRect">
-            <a:avLst>
-              <a:gd name="adj" fmla="val 12000"/>
-            </a:avLst>
-          </a:prstGeom>
-          <a:solidFill>
-            <a:srgbClr val="7A3B2E"/>
-          </a:solidFill>
-          <a:ln/>
-        </p:spPr>
-      </p:sp>
-      <p:sp>
-        <p:nvSpPr>
-          <p:cNvPr id="19" name="Text 17"/>
-          <p:cNvSpPr/>
-          <p:nvPr/>
-        </p:nvSpPr>
-        <p:spPr>
-          <a:xfrm>
-            <a:off x="640080" y="4407408"/>
-            <a:ext cx="868680" cy="457200"/>
-          </a:xfrm>
-          <a:prstGeom prst="rect">
-            <a:avLst/>
-          </a:prstGeom>
-          <a:noFill/>
-          <a:ln/>
-        </p:spPr>
-        <p:txBody>
-          <a:bodyPr wrap="square" rtlCol="0" anchor="ctr"/>
-          <a:lstStyle/>
-          <a:p>
-            <a:pPr algn="ctr" indent="0" marL="0">
-              <a:buNone/>
-            </a:pPr>
-            <a:r>
-              <a:rPr lang="en-US" sz="1100" b="1" dirty="0">
-                <a:solidFill>
-                  <a:srgbClr val="FFFFFF"/>
-                </a:solidFill>
-                <a:latin typeface="Calibri" pitchFamily="34" charset="0"/>
-                <a:ea typeface="Calibri" pitchFamily="34" charset="-122"/>
-                <a:cs typeface="Calibri" pitchFamily="34" charset="-120"/>
-              </a:rPr>
-              <a:t>1:20</a:t>
-            </a:r>
-            <a:endParaRPr lang="en-US" sz="1100" dirty="0"/>
-          </a:p>
-        </p:txBody>
-      </p:sp>
-      <p:sp>
-        <p:nvSpPr>
-          <p:cNvPr id="20" name="Text 18"/>
-          <p:cNvSpPr/>
-          <p:nvPr/>
-        </p:nvSpPr>
-        <p:spPr>
-          <a:xfrm>
-            <a:off x="1691640" y="4389120"/>
-            <a:ext cx="9646920" cy="566928"/>
-          </a:xfrm>
-          <a:prstGeom prst="rect">
-            <a:avLst/>
-          </a:prstGeom>
-          <a:noFill/>
-          <a:ln/>
-        </p:spPr>
-        <p:txBody>
-          <a:bodyPr wrap="square" rtlCol="0" anchor="ctr">
-            <a:spAutoFit/>
-          </a:bodyPr>
-          <a:lstStyle/>
-          <a:p>
-            <a:pPr indent="0" marL="0">
-              <a:buNone/>
-            </a:pPr>
-            <a:r>
-              <a:rPr lang="en-US" sz="1250" dirty="0">
-                <a:solidFill>
-                  <a:srgbClr val="1A1A1A"/>
-                </a:solidFill>
-                <a:latin typeface="Calibri" pitchFamily="34" charset="0"/>
-                <a:ea typeface="Calibri" pitchFamily="34" charset="-122"/>
-                <a:cs typeface="Calibri" pitchFamily="34" charset="-120"/>
-              </a:rPr>
-              <a:t>Lab 2 (worked): count words, then pixels. First the top words of a small lyrics sample (stop-words dominate the list until you remove them, the first counting decision), then an image corpus: ~200 Met thumbnails ranked darkest to brightest by average brightness. Text and images, counted with the same technique; image projects begin here.</a:t>
-            </a:r>
-            <a:endParaRPr lang="en-US" sz="1250" dirty="0"/>
-          </a:p>
-        </p:txBody>
-      </p:sp>
-      <p:sp>
-        <p:nvSpPr>
-          <p:cNvPr id="21" name="Shape 19"/>
-          <p:cNvSpPr/>
-          <p:nvPr/>
-        </p:nvSpPr>
-        <p:spPr>
-          <a:xfrm>
-            <a:off x="640080" y="4974336"/>
-            <a:ext cx="868680" cy="457200"/>
-          </a:xfrm>
-          <a:prstGeom prst="roundRect">
-            <a:avLst>
-              <a:gd name="adj" fmla="val 12000"/>
-            </a:avLst>
-          </a:prstGeom>
-          <a:solidFill>
-            <a:srgbClr val="7A3B2E"/>
-          </a:solidFill>
-          <a:ln/>
-        </p:spPr>
-      </p:sp>
-      <p:sp>
-        <p:nvSpPr>
-          <p:cNvPr id="22" name="Text 20"/>
-          <p:cNvSpPr/>
-          <p:nvPr/>
-        </p:nvSpPr>
-        <p:spPr>
-          <a:xfrm>
-            <a:off x="640080" y="4974336"/>
-            <a:ext cx="868680" cy="457200"/>
-          </a:xfrm>
-          <a:prstGeom prst="rect">
-            <a:avLst/>
-          </a:prstGeom>
-          <a:noFill/>
-          <a:ln/>
-        </p:spPr>
-        <p:txBody>
-          <a:bodyPr wrap="square" rtlCol="0" anchor="ctr"/>
-          <a:lstStyle/>
-          <a:p>
-            <a:pPr algn="ctr" indent="0" marL="0">
-              <a:buNone/>
-            </a:pPr>
-            <a:r>
-              <a:rPr lang="en-US" sz="1100" b="1" dirty="0">
-                <a:solidFill>
-                  <a:srgbClr val="FFFFFF"/>
-                </a:solidFill>
-                <a:latin typeface="Calibri" pitchFamily="34" charset="0"/>
-                <a:ea typeface="Calibri" pitchFamily="34" charset="-122"/>
-                <a:cs typeface="Calibri" pitchFamily="34" charset="-120"/>
-              </a:rPr>
-              <a:t>1:50</a:t>
-            </a:r>
-            <a:endParaRPr lang="en-US" sz="1100" dirty="0"/>
-          </a:p>
-        </p:txBody>
-      </p:sp>
-      <p:sp>
-        <p:nvSpPr>
-          <p:cNvPr id="23" name="Text 21"/>
-          <p:cNvSpPr/>
-          <p:nvPr/>
-        </p:nvSpPr>
-        <p:spPr>
-          <a:xfrm>
-            <a:off x="1691640" y="4956048"/>
-            <a:ext cx="9646920" cy="566928"/>
-          </a:xfrm>
-          <a:prstGeom prst="rect">
-            <a:avLst/>
-          </a:prstGeom>
-          <a:noFill/>
-          <a:ln/>
-        </p:spPr>
-        <p:txBody>
-          <a:bodyPr wrap="square" rtlCol="0" anchor="ctr">
-            <a:spAutoFit/>
-          </a:bodyPr>
-          <a:lstStyle/>
-          <a:p>
-            <a:pPr indent="0" marL="0">
-              <a:buNone/>
-            </a:pPr>
-            <a:r>
-              <a:rPr lang="en-US" sz="1250" dirty="0">
-                <a:solidFill>
-                  <a:srgbClr val="1A1A1A"/>
-                </a:solidFill>
-                <a:latin typeface="Calibri" pitchFamily="34" charset="0"/>
-                <a:ea typeface="Calibri" pitchFamily="34" charset="-122"/>
-                <a:cs typeface="Calibri" pitchFamily="34" charset="-120"/>
-              </a:rPr>
-              <a:t>Preview of the methods ahead; the weekly routines introduced. First check-out.</a:t>
-            </a:r>
-            <a:endParaRPr lang="en-US" sz="1250" dirty="0"/>
+              <a:t>Interrogate the study, debate it, or critique each other's work.</a:t>
+            </a:r>
+            <a:endParaRPr lang="en-US" sz="1500" dirty="0"/>
           </a:p>
         </p:txBody>
       </p:sp>
@@ -3312,7 +3101,7 @@
                 <a:ea typeface="Cambria" pitchFamily="34" charset="-122"/>
                 <a:cs typeface="Cambria" pitchFamily="34" charset="-120"/>
               </a:rPr>
-              <a:t>Reading &amp; homework</a:t>
+              <a:t>The session</a:t>
             </a:r>
             <a:endParaRPr lang="en-US" sz="3000" dirty="0"/>
           </a:p>
@@ -3326,11 +3115,13 @@
         </p:nvSpPr>
         <p:spPr>
           <a:xfrm>
-            <a:off x="640080" y="1673352"/>
-            <a:ext cx="219456" cy="219456"/>
-          </a:xfrm>
-          <a:prstGeom prst="ellipse">
-            <a:avLst/>
+            <a:off x="640080" y="1572768"/>
+            <a:ext cx="868680" cy="450342"/>
+          </a:xfrm>
+          <a:prstGeom prst="roundRect">
+            <a:avLst>
+              <a:gd name="adj" fmla="val 12183"/>
+            </a:avLst>
           </a:prstGeom>
           <a:solidFill>
             <a:srgbClr val="7A3B2E"/>
@@ -3346,8 +3137,8 @@
         </p:nvSpPr>
         <p:spPr>
           <a:xfrm>
-            <a:off x="1051560" y="1600200"/>
-            <a:ext cx="10424160" cy="365760"/>
+            <a:off x="640080" y="1572768"/>
+            <a:ext cx="868680" cy="450342"/>
           </a:xfrm>
           <a:prstGeom prst="rect">
             <a:avLst/>
@@ -3359,21 +3150,21 @@
           <a:bodyPr wrap="square" rtlCol="0" anchor="ctr"/>
           <a:lstStyle/>
           <a:p>
-            <a:pPr indent="0" marL="0">
-              <a:buNone/>
-            </a:pPr>
-            <a:r>
-              <a:rPr lang="en-US" sz="1500" b="1" dirty="0">
-                <a:solidFill>
-                  <a:srgbClr val="7A3B2E"/>
+            <a:pPr algn="ctr" indent="0" marL="0">
+              <a:buNone/>
+            </a:pPr>
+            <a:r>
+              <a:rPr lang="en-US" sz="1100" b="1" dirty="0">
+                <a:solidFill>
+                  <a:srgbClr val="FFFFFF"/>
                 </a:solidFill>
                 <a:latin typeface="Calibri" pitchFamily="34" charset="0"/>
                 <a:ea typeface="Calibri" pitchFamily="34" charset="-122"/>
                 <a:cs typeface="Calibri" pitchFamily="34" charset="-120"/>
               </a:rPr>
-              <a:t>Reading</a:t>
-            </a:r>
-            <a:endParaRPr lang="en-US" sz="1500" dirty="0"/>
+              <a:t>0:00</a:t>
+            </a:r>
+            <a:endParaRPr lang="en-US" sz="1100" dirty="0"/>
           </a:p>
         </p:txBody>
       </p:sp>
@@ -3385,17 +3176,17 @@
         </p:nvSpPr>
         <p:spPr>
           <a:xfrm>
-            <a:off x="1051560" y="1984248"/>
-            <a:ext cx="10424160" cy="731520"/>
-          </a:xfrm>
-          <a:prstGeom prst="rect">
-            <a:avLst/>
-          </a:prstGeom>
-          <a:noFill/>
-          <a:ln/>
-        </p:spPr>
-        <p:txBody>
-          <a:bodyPr wrap="square" rtlCol="0" anchor="t">
+            <a:off x="1691640" y="1554480"/>
+            <a:ext cx="9646920" cy="560070"/>
+          </a:xfrm>
+          <a:prstGeom prst="rect">
+            <a:avLst/>
+          </a:prstGeom>
+          <a:noFill/>
+          <a:ln/>
+        </p:spPr>
+        <p:txBody>
+          <a:bodyPr wrap="square" rtlCol="0" anchor="ctr">
             <a:spAutoFit/>
           </a:bodyPr>
           <a:lstStyle/>
@@ -3404,7 +3195,7 @@
               <a:buNone/>
             </a:pPr>
             <a:r>
-              <a:rPr lang="en-US" sz="1400" dirty="0">
+              <a:rPr lang="en-US" sz="1100" dirty="0">
                 <a:solidFill>
                   <a:srgbClr val="1A1A1A"/>
                 </a:solidFill>
@@ -3412,9 +3203,9 @@
                 <a:ea typeface="Calibri" pitchFamily="34" charset="-122"/>
                 <a:cs typeface="Calibri" pitchFamily="34" charset="-120"/>
               </a:rPr>
-              <a:t>Bollen et al., the cognitive-distortions hockey stick (PNAS 2021), with the Schmidt et al. critique</a:t>
-            </a:r>
-            <a:endParaRPr lang="en-US" sz="1400" dirty="0"/>
+              <a:t>Introductions and working agreements, demonstrated in practice. Today's live coding deliberately includes real mistakes.</a:t>
+            </a:r>
+            <a:endParaRPr lang="en-US" sz="1100" dirty="0"/>
           </a:p>
         </p:txBody>
       </p:sp>
@@ -3426,14 +3217,16 @@
         </p:nvSpPr>
         <p:spPr>
           <a:xfrm>
-            <a:off x="640080" y="2633472"/>
-            <a:ext cx="219456" cy="219456"/>
-          </a:xfrm>
-          <a:prstGeom prst="ellipse">
-            <a:avLst/>
-          </a:prstGeom>
-          <a:solidFill>
-            <a:srgbClr val="3F6F5F"/>
+            <a:off x="640080" y="2132838"/>
+            <a:ext cx="868680" cy="450342"/>
+          </a:xfrm>
+          <a:prstGeom prst="roundRect">
+            <a:avLst>
+              <a:gd name="adj" fmla="val 12183"/>
+            </a:avLst>
+          </a:prstGeom>
+          <a:solidFill>
+            <a:srgbClr val="7A3B2E"/>
           </a:solidFill>
           <a:ln/>
         </p:spPr>
@@ -3446,8 +3239,8 @@
         </p:nvSpPr>
         <p:spPr>
           <a:xfrm>
-            <a:off x="1051560" y="2560320"/>
-            <a:ext cx="10424160" cy="365760"/>
+            <a:off x="640080" y="2132838"/>
+            <a:ext cx="868680" cy="450342"/>
           </a:xfrm>
           <a:prstGeom prst="rect">
             <a:avLst/>
@@ -3459,21 +3252,21 @@
           <a:bodyPr wrap="square" rtlCol="0" anchor="ctr"/>
           <a:lstStyle/>
           <a:p>
-            <a:pPr indent="0" marL="0">
-              <a:buNone/>
-            </a:pPr>
-            <a:r>
-              <a:rPr lang="en-US" sz="1500" b="1" dirty="0">
-                <a:solidFill>
-                  <a:srgbClr val="3F6F5F"/>
+            <a:pPr algn="ctr" indent="0" marL="0">
+              <a:buNone/>
+            </a:pPr>
+            <a:r>
+              <a:rPr lang="en-US" sz="1100" b="1" dirty="0">
+                <a:solidFill>
+                  <a:srgbClr val="FFFFFF"/>
                 </a:solidFill>
                 <a:latin typeface="Calibri" pitchFamily="34" charset="0"/>
                 <a:ea typeface="Calibri" pitchFamily="34" charset="-122"/>
                 <a:cs typeface="Calibri" pitchFamily="34" charset="-120"/>
               </a:rPr>
-              <a:t>Supplement</a:t>
-            </a:r>
-            <a:endParaRPr lang="en-US" sz="1500" dirty="0"/>
+              <a:t>0:10</a:t>
+            </a:r>
+            <a:endParaRPr lang="en-US" sz="1100" dirty="0"/>
           </a:p>
         </p:txBody>
       </p:sp>
@@ -3485,17 +3278,17 @@
         </p:nvSpPr>
         <p:spPr>
           <a:xfrm>
-            <a:off x="1051560" y="2944368"/>
-            <a:ext cx="10424160" cy="731520"/>
-          </a:xfrm>
-          <a:prstGeom prst="rect">
-            <a:avLst/>
-          </a:prstGeom>
-          <a:noFill/>
-          <a:ln/>
-        </p:spPr>
-        <p:txBody>
-          <a:bodyPr wrap="square" rtlCol="0" anchor="t">
+            <a:off x="1691640" y="2114550"/>
+            <a:ext cx="9646920" cy="560070"/>
+          </a:xfrm>
+          <a:prstGeom prst="rect">
+            <a:avLst/>
+          </a:prstGeom>
+          <a:noFill/>
+          <a:ln/>
+        </p:spPr>
+        <p:txBody>
+          <a:bodyPr wrap="square" rtlCol="0" anchor="ctr">
             <a:spAutoFit/>
           </a:bodyPr>
           <a:lstStyle/>
@@ -3504,7 +3297,7 @@
               <a:buNone/>
             </a:pPr>
             <a:r>
-              <a:rPr lang="en-US" sz="1400" dirty="0">
+              <a:rPr lang="en-US" sz="1100" dirty="0">
                 <a:solidFill>
                   <a:srgbClr val="1A1A1A"/>
                 </a:solidFill>
@@ -3512,9 +3305,9 @@
                 <a:ea typeface="Calibri" pitchFamily="34" charset="-122"/>
                 <a:cs typeface="Calibri" pitchFamily="34" charset="-120"/>
               </a:rPr>
-              <a:t>Robin Sloan, Writing with the machine</a:t>
-            </a:r>
-            <a:endParaRPr lang="en-US" sz="1400" dirty="0"/>
+              <a:t>Lecture, the stakes: machines already read culture at scale, the feed ranking what you see, the moderation filter, the model trained on scraped art and prose, and that reading happens without you. Counting culture has produced real knowledge (the screenplay verb split, the Rowling unmasking, pop music's 1991 revolution) and real mistakes, and both look identical until someone checks. In ten weeks you do the reading yourself and publish something checkable.</a:t>
+            </a:r>
+            <a:endParaRPr lang="en-US" sz="1100" dirty="0"/>
           </a:p>
         </p:txBody>
       </p:sp>
@@ -3526,14 +3319,16 @@
         </p:nvSpPr>
         <p:spPr>
           <a:xfrm>
-            <a:off x="640080" y="3593592"/>
-            <a:ext cx="219456" cy="219456"/>
-          </a:xfrm>
-          <a:prstGeom prst="ellipse">
-            <a:avLst/>
-          </a:prstGeom>
-          <a:solidFill>
-            <a:srgbClr val="B9852F"/>
+            <a:off x="640080" y="2692908"/>
+            <a:ext cx="868680" cy="450342"/>
+          </a:xfrm>
+          <a:prstGeom prst="roundRect">
+            <a:avLst>
+              <a:gd name="adj" fmla="val 12183"/>
+            </a:avLst>
+          </a:prstGeom>
+          <a:solidFill>
+            <a:srgbClr val="7A3B2E"/>
           </a:solidFill>
           <a:ln/>
         </p:spPr>
@@ -3546,8 +3341,8 @@
         </p:nvSpPr>
         <p:spPr>
           <a:xfrm>
-            <a:off x="1051560" y="3520440"/>
-            <a:ext cx="10424160" cy="365760"/>
+            <a:off x="640080" y="2692908"/>
+            <a:ext cx="868680" cy="450342"/>
           </a:xfrm>
           <a:prstGeom prst="rect">
             <a:avLst/>
@@ -3559,21 +3354,21 @@
           <a:bodyPr wrap="square" rtlCol="0" anchor="ctr"/>
           <a:lstStyle/>
           <a:p>
-            <a:pPr indent="0" marL="0">
-              <a:buNone/>
-            </a:pPr>
-            <a:r>
-              <a:rPr lang="en-US" sz="1500" b="1" dirty="0">
-                <a:solidFill>
-                  <a:srgbClr val="B9852F"/>
+            <a:pPr algn="ctr" indent="0" marL="0">
+              <a:buNone/>
+            </a:pPr>
+            <a:r>
+              <a:rPr lang="en-US" sz="1100" b="1" dirty="0">
+                <a:solidFill>
+                  <a:srgbClr val="FFFFFF"/>
                 </a:solidFill>
                 <a:latin typeface="Calibri" pitchFamily="34" charset="0"/>
                 <a:ea typeface="Calibri" pitchFamily="34" charset="-122"/>
                 <a:cs typeface="Calibri" pitchFamily="34" charset="-120"/>
               </a:rPr>
-              <a:t>Deeper (optional)</a:t>
-            </a:r>
-            <a:endParaRPr lang="en-US" sz="1500" dirty="0"/>
+              <a:t>0:28</a:t>
+            </a:r>
+            <a:endParaRPr lang="en-US" sz="1100" dirty="0"/>
           </a:p>
         </p:txBody>
       </p:sp>
@@ -3585,17 +3380,17 @@
         </p:nvSpPr>
         <p:spPr>
           <a:xfrm>
-            <a:off x="1051560" y="3904488"/>
-            <a:ext cx="10424160" cy="731520"/>
-          </a:xfrm>
-          <a:prstGeom prst="rect">
-            <a:avLst/>
-          </a:prstGeom>
-          <a:noFill/>
-          <a:ln/>
-        </p:spPr>
-        <p:txBody>
-          <a:bodyPr wrap="square" rtlCol="0" anchor="t">
+            <a:off x="1691640" y="2674620"/>
+            <a:ext cx="9646920" cy="560070"/>
+          </a:xfrm>
+          <a:prstGeom prst="rect">
+            <a:avLst/>
+          </a:prstGeom>
+          <a:noFill/>
+          <a:ln/>
+        </p:spPr>
+        <p:txBody>
+          <a:bodyPr wrap="square" rtlCol="0" anchor="ctr">
             <a:spAutoFit/>
           </a:bodyPr>
           <a:lstStyle/>
@@ -3604,7 +3399,7 @@
               <a:buNone/>
             </a:pPr>
             <a:r>
-              <a:rPr lang="en-US" sz="1400" dirty="0">
+              <a:rPr lang="en-US" sz="1100" dirty="0">
                 <a:solidFill>
                   <a:srgbClr val="1A1A1A"/>
                 </a:solidFill>
@@ -3612,9 +3407,9 @@
                 <a:ea typeface="Calibri" pitchFamily="34" charset="-122"/>
                 <a:cs typeface="Calibri" pitchFamily="34" charset="-120"/>
               </a:rPr>
-              <a:t>Moretti, Conjectures on World Literature (NLR 2000), the founding argument for reading culture at scale</a:t>
-            </a:r>
-            <a:endParaRPr lang="en-US" sz="1400" dirty="0"/>
+              <a:t>Look at This, then Question It: She Giggles, He Gallops.</a:t>
+            </a:r>
+            <a:endParaRPr lang="en-US" sz="1100" dirty="0"/>
           </a:p>
         </p:txBody>
       </p:sp>
@@ -3626,14 +3421,16 @@
         </p:nvSpPr>
         <p:spPr>
           <a:xfrm>
-            <a:off x="640080" y="4553712"/>
-            <a:ext cx="219456" cy="219456"/>
-          </a:xfrm>
-          <a:prstGeom prst="ellipse">
-            <a:avLst/>
-          </a:prstGeom>
-          <a:solidFill>
-            <a:srgbClr val="3F6F5F"/>
+            <a:off x="640080" y="3252978"/>
+            <a:ext cx="868680" cy="450342"/>
+          </a:xfrm>
+          <a:prstGeom prst="roundRect">
+            <a:avLst>
+              <a:gd name="adj" fmla="val 12183"/>
+            </a:avLst>
+          </a:prstGeom>
+          <a:solidFill>
+            <a:srgbClr val="7A3B2E"/>
           </a:solidFill>
           <a:ln/>
         </p:spPr>
@@ -3646,8 +3443,8 @@
         </p:nvSpPr>
         <p:spPr>
           <a:xfrm>
-            <a:off x="1051560" y="4480560"/>
-            <a:ext cx="10424160" cy="365760"/>
+            <a:off x="640080" y="3252978"/>
+            <a:ext cx="868680" cy="450342"/>
           </a:xfrm>
           <a:prstGeom prst="rect">
             <a:avLst/>
@@ -3659,21 +3456,21 @@
           <a:bodyPr wrap="square" rtlCol="0" anchor="ctr"/>
           <a:lstStyle/>
           <a:p>
-            <a:pPr indent="0" marL="0">
-              <a:buNone/>
-            </a:pPr>
-            <a:r>
-              <a:rPr lang="en-US" sz="1500" b="1" dirty="0">
-                <a:solidFill>
-                  <a:srgbClr val="3F6F5F"/>
+            <a:pPr algn="ctr" indent="0" marL="0">
+              <a:buNone/>
+            </a:pPr>
+            <a:r>
+              <a:rPr lang="en-US" sz="1100" b="1" dirty="0">
+                <a:solidFill>
+                  <a:srgbClr val="FFFFFF"/>
                 </a:solidFill>
                 <a:latin typeface="Calibri" pitchFamily="34" charset="0"/>
                 <a:ea typeface="Calibri" pitchFamily="34" charset="-122"/>
                 <a:cs typeface="Calibri" pitchFamily="34" charset="-120"/>
               </a:rPr>
-              <a:t>Sketch</a:t>
-            </a:r>
-            <a:endParaRPr lang="en-US" sz="1500" dirty="0"/>
+              <a:t>0:35</a:t>
+            </a:r>
+            <a:endParaRPr lang="en-US" sz="1100" dirty="0"/>
           </a:p>
         </p:txBody>
       </p:sp>
@@ -3685,17 +3482,17 @@
         </p:nvSpPr>
         <p:spPr>
           <a:xfrm>
-            <a:off x="1051560" y="4864608"/>
-            <a:ext cx="10424160" cy="731520"/>
-          </a:xfrm>
-          <a:prstGeom prst="rect">
-            <a:avLst/>
-          </a:prstGeom>
-          <a:noFill/>
-          <a:ln/>
-        </p:spPr>
-        <p:txBody>
-          <a:bodyPr wrap="square" rtlCol="0" anchor="t">
+            <a:off x="1691640" y="3234690"/>
+            <a:ext cx="9646920" cy="560070"/>
+          </a:xfrm>
+          <a:prstGeom prst="rect">
+            <a:avLst/>
+          </a:prstGeom>
+          <a:noFill/>
+          <a:ln/>
+        </p:spPr>
+        <p:txBody>
+          <a:bodyPr wrap="square" rtlCol="0" anchor="ctr">
             <a:spAutoFit/>
           </a:bodyPr>
           <a:lstStyle/>
@@ -3704,7 +3501,7 @@
               <a:buNone/>
             </a:pPr>
             <a:r>
-              <a:rPr lang="en-US" sz="1400" dirty="0">
+              <a:rPr lang="en-US" sz="1100" dirty="0">
                 <a:solidFill>
                   <a:srgbClr val="1A1A1A"/>
                 </a:solidFill>
@@ -3712,9 +3509,9 @@
                 <a:ea typeface="Calibri" pitchFamily="34" charset="-122"/>
                 <a:cs typeface="Calibri" pitchFamily="34" charset="-120"/>
               </a:rPr>
-              <a:t>One question from your life answerable with text or image data; three sentences.</a:t>
-            </a:r>
-            <a:endParaRPr lang="en-US" sz="1400" dirty="0"/>
+              <a:t>The vocabulary and the map (no code): corpus, method, model, embedding, in plain language with pictures. The deliverable, shown: a web essay on a runnable notebook.</a:t>
+            </a:r>
+            <a:endParaRPr lang="en-US" sz="1100" dirty="0"/>
           </a:p>
         </p:txBody>
       </p:sp>
@@ -3726,11 +3523,13 @@
         </p:nvSpPr>
         <p:spPr>
           <a:xfrm>
-            <a:off x="640080" y="5513832"/>
-            <a:ext cx="219456" cy="219456"/>
-          </a:xfrm>
-          <a:prstGeom prst="ellipse">
-            <a:avLst/>
+            <a:off x="640080" y="3813048"/>
+            <a:ext cx="868680" cy="450342"/>
+          </a:xfrm>
+          <a:prstGeom prst="roundRect">
+            <a:avLst>
+              <a:gd name="adj" fmla="val 12183"/>
+            </a:avLst>
           </a:prstGeom>
           <a:solidFill>
             <a:srgbClr val="7A3B2E"/>
@@ -3746,8 +3545,8 @@
         </p:nvSpPr>
         <p:spPr>
           <a:xfrm>
-            <a:off x="1051560" y="5440680"/>
-            <a:ext cx="10424160" cy="365760"/>
+            <a:off x="640080" y="3813048"/>
+            <a:ext cx="868680" cy="450342"/>
           </a:xfrm>
           <a:prstGeom prst="rect">
             <a:avLst/>
@@ -3759,21 +3558,21 @@
           <a:bodyPr wrap="square" rtlCol="0" anchor="ctr"/>
           <a:lstStyle/>
           <a:p>
-            <a:pPr indent="0" marL="0">
-              <a:buNone/>
-            </a:pPr>
-            <a:r>
-              <a:rPr lang="en-US" sz="1500" b="1" dirty="0">
-                <a:solidFill>
-                  <a:srgbClr val="7A3B2E"/>
+            <a:pPr algn="ctr" indent="0" marL="0">
+              <a:buNone/>
+            </a:pPr>
+            <a:r>
+              <a:rPr lang="en-US" sz="1100" b="1" dirty="0">
+                <a:solidFill>
+                  <a:srgbClr val="FFFFFF"/>
                 </a:solidFill>
                 <a:latin typeface="Calibri" pitchFamily="34" charset="0"/>
                 <a:ea typeface="Calibri" pitchFamily="34" charset="-122"/>
                 <a:cs typeface="Calibri" pitchFamily="34" charset="-120"/>
               </a:rPr>
-              <a:t>Check (AI closed)</a:t>
-            </a:r>
-            <a:endParaRPr lang="en-US" sz="1500" dirty="0"/>
+              <a:t>0:47</a:t>
+            </a:r>
+            <a:endParaRPr lang="en-US" sz="1100" dirty="0"/>
           </a:p>
         </p:txBody>
       </p:sp>
@@ -3785,17 +3584,17 @@
         </p:nvSpPr>
         <p:spPr>
           <a:xfrm>
-            <a:off x="1051560" y="5824728"/>
-            <a:ext cx="10424160" cy="731520"/>
-          </a:xfrm>
-          <a:prstGeom prst="rect">
-            <a:avLst/>
-          </a:prstGeom>
-          <a:noFill/>
-          <a:ln/>
-        </p:spPr>
-        <p:txBody>
-          <a:bodyPr wrap="square" rtlCol="0" anchor="t">
+            <a:off x="1691640" y="3794760"/>
+            <a:ext cx="9646920" cy="560070"/>
+          </a:xfrm>
+          <a:prstGeom prst="rect">
+            <a:avLst/>
+          </a:prstGeom>
+          <a:noFill/>
+          <a:ln/>
+        </p:spPr>
+        <p:txBody>
+          <a:bodyPr wrap="square" rtlCol="0" anchor="ctr">
             <a:spAutoFit/>
           </a:bodyPr>
           <a:lstStyle/>
@@ -3804,7 +3603,7 @@
               <a:buNone/>
             </a:pPr>
             <a:r>
-              <a:rPr lang="en-US" sz="1400" dirty="0">
+              <a:rPr lang="en-US" sz="1100" dirty="0">
                 <a:solidFill>
                   <a:srgbClr val="1A1A1A"/>
                 </a:solidFill>
@@ -3812,9 +3611,315 @@
                 <a:ea typeface="Calibri" pitchFamily="34" charset="-122"/>
                 <a:cs typeface="Calibri" pitchFamily="34" charset="-120"/>
               </a:rPr>
-              <a:t>Trace it: one written sentence predicting what your cell does before you run it. (Competency 1.)</a:t>
-            </a:r>
-            <a:endParaRPr lang="en-US" sz="1400" dirty="0"/>
+              <a:t>Lab 1 (worked, participatory): copy the notebook to Drive and mount Drive into the runtime (this is how your corpus and results survive Colab wiping the session, everything saving to one project folder), put a Gemini key in Colab Secrets, load NYT wedding data, make a first chart. Hand out the common-errors cheat sheet. Then solo with a partner: draft three questions, pick one, have the AI write the code, run it, chart it. Write one sentence predicting your cell before you run it.</a:t>
+            </a:r>
+            <a:endParaRPr lang="en-US" sz="1100" dirty="0"/>
+          </a:p>
+        </p:txBody>
+      </p:sp>
+      <p:sp>
+        <p:nvSpPr>
+          <p:cNvPr id="18" name="Shape 16"/>
+          <p:cNvSpPr/>
+          <p:nvPr/>
+        </p:nvSpPr>
+        <p:spPr>
+          <a:xfrm>
+            <a:off x="640080" y="4373118"/>
+            <a:ext cx="868680" cy="450342"/>
+          </a:xfrm>
+          <a:prstGeom prst="roundRect">
+            <a:avLst>
+              <a:gd name="adj" fmla="val 12183"/>
+            </a:avLst>
+          </a:prstGeom>
+          <a:solidFill>
+            <a:srgbClr val="7A3B2E"/>
+          </a:solidFill>
+          <a:ln/>
+        </p:spPr>
+      </p:sp>
+      <p:sp>
+        <p:nvSpPr>
+          <p:cNvPr id="19" name="Text 17"/>
+          <p:cNvSpPr/>
+          <p:nvPr/>
+        </p:nvSpPr>
+        <p:spPr>
+          <a:xfrm>
+            <a:off x="640080" y="4373118"/>
+            <a:ext cx="868680" cy="450342"/>
+          </a:xfrm>
+          <a:prstGeom prst="rect">
+            <a:avLst/>
+          </a:prstGeom>
+          <a:noFill/>
+          <a:ln/>
+        </p:spPr>
+        <p:txBody>
+          <a:bodyPr wrap="square" rtlCol="0" anchor="ctr"/>
+          <a:lstStyle/>
+          <a:p>
+            <a:pPr algn="ctr" indent="0" marL="0">
+              <a:buNone/>
+            </a:pPr>
+            <a:r>
+              <a:rPr lang="en-US" sz="1100" b="1" dirty="0">
+                <a:solidFill>
+                  <a:srgbClr val="FFFFFF"/>
+                </a:solidFill>
+                <a:latin typeface="Calibri" pitchFamily="34" charset="0"/>
+                <a:ea typeface="Calibri" pitchFamily="34" charset="-122"/>
+                <a:cs typeface="Calibri" pitchFamily="34" charset="-120"/>
+              </a:rPr>
+              <a:t>1:20</a:t>
+            </a:r>
+            <a:endParaRPr lang="en-US" sz="1100" dirty="0"/>
+          </a:p>
+        </p:txBody>
+      </p:sp>
+      <p:sp>
+        <p:nvSpPr>
+          <p:cNvPr id="20" name="Text 18"/>
+          <p:cNvSpPr/>
+          <p:nvPr/>
+        </p:nvSpPr>
+        <p:spPr>
+          <a:xfrm>
+            <a:off x="1691640" y="4354830"/>
+            <a:ext cx="9646920" cy="560070"/>
+          </a:xfrm>
+          <a:prstGeom prst="rect">
+            <a:avLst/>
+          </a:prstGeom>
+          <a:noFill/>
+          <a:ln/>
+        </p:spPr>
+        <p:txBody>
+          <a:bodyPr wrap="square" rtlCol="0" anchor="ctr">
+            <a:spAutoFit/>
+          </a:bodyPr>
+          <a:lstStyle/>
+          <a:p>
+            <a:pPr indent="0" marL="0">
+              <a:buNone/>
+            </a:pPr>
+            <a:r>
+              <a:rPr lang="en-US" sz="1100" dirty="0">
+                <a:solidFill>
+                  <a:srgbClr val="1A1A1A"/>
+                </a:solidFill>
+                <a:latin typeface="Calibri" pitchFamily="34" charset="0"/>
+                <a:ea typeface="Calibri" pitchFamily="34" charset="-122"/>
+                <a:cs typeface="Calibri" pitchFamily="34" charset="-120"/>
+              </a:rPr>
+              <a:t>Break</a:t>
+            </a:r>
+            <a:endParaRPr lang="en-US" sz="1100" dirty="0"/>
+          </a:p>
+        </p:txBody>
+      </p:sp>
+      <p:sp>
+        <p:nvSpPr>
+          <p:cNvPr id="21" name="Shape 19"/>
+          <p:cNvSpPr/>
+          <p:nvPr/>
+        </p:nvSpPr>
+        <p:spPr>
+          <a:xfrm>
+            <a:off x="640080" y="4933188"/>
+            <a:ext cx="868680" cy="450342"/>
+          </a:xfrm>
+          <a:prstGeom prst="roundRect">
+            <a:avLst>
+              <a:gd name="adj" fmla="val 12183"/>
+            </a:avLst>
+          </a:prstGeom>
+          <a:solidFill>
+            <a:srgbClr val="7A3B2E"/>
+          </a:solidFill>
+          <a:ln/>
+        </p:spPr>
+      </p:sp>
+      <p:sp>
+        <p:nvSpPr>
+          <p:cNvPr id="22" name="Text 20"/>
+          <p:cNvSpPr/>
+          <p:nvPr/>
+        </p:nvSpPr>
+        <p:spPr>
+          <a:xfrm>
+            <a:off x="640080" y="4933188"/>
+            <a:ext cx="868680" cy="450342"/>
+          </a:xfrm>
+          <a:prstGeom prst="rect">
+            <a:avLst/>
+          </a:prstGeom>
+          <a:noFill/>
+          <a:ln/>
+        </p:spPr>
+        <p:txBody>
+          <a:bodyPr wrap="square" rtlCol="0" anchor="ctr"/>
+          <a:lstStyle/>
+          <a:p>
+            <a:pPr algn="ctr" indent="0" marL="0">
+              <a:buNone/>
+            </a:pPr>
+            <a:r>
+              <a:rPr lang="en-US" sz="1100" b="1" dirty="0">
+                <a:solidFill>
+                  <a:srgbClr val="FFFFFF"/>
+                </a:solidFill>
+                <a:latin typeface="Calibri" pitchFamily="34" charset="0"/>
+                <a:ea typeface="Calibri" pitchFamily="34" charset="-122"/>
+                <a:cs typeface="Calibri" pitchFamily="34" charset="-120"/>
+              </a:rPr>
+              <a:t>1:30</a:t>
+            </a:r>
+            <a:endParaRPr lang="en-US" sz="1100" dirty="0"/>
+          </a:p>
+        </p:txBody>
+      </p:sp>
+      <p:sp>
+        <p:nvSpPr>
+          <p:cNvPr id="23" name="Text 21"/>
+          <p:cNvSpPr/>
+          <p:nvPr/>
+        </p:nvSpPr>
+        <p:spPr>
+          <a:xfrm>
+            <a:off x="1691640" y="4914900"/>
+            <a:ext cx="9646920" cy="560070"/>
+          </a:xfrm>
+          <a:prstGeom prst="rect">
+            <a:avLst/>
+          </a:prstGeom>
+          <a:noFill/>
+          <a:ln/>
+        </p:spPr>
+        <p:txBody>
+          <a:bodyPr wrap="square" rtlCol="0" anchor="ctr">
+            <a:spAutoFit/>
+          </a:bodyPr>
+          <a:lstStyle/>
+          <a:p>
+            <a:pPr indent="0" marL="0">
+              <a:buNone/>
+            </a:pPr>
+            <a:r>
+              <a:rPr lang="en-US" sz="1100" dirty="0">
+                <a:solidFill>
+                  <a:srgbClr val="1A1A1A"/>
+                </a:solidFill>
+                <a:latin typeface="Calibri" pitchFamily="34" charset="0"/>
+                <a:ea typeface="Calibri" pitchFamily="34" charset="-122"/>
+                <a:cs typeface="Calibri" pitchFamily="34" charset="-120"/>
+              </a:rPr>
+              <a:t>Lab 2 (worked): count words, then pixels. First the top words of a small lyrics sample (stop-words dominate the list until you remove them, the first counting decision), then an image corpus: ~200 Met thumbnails ranked darkest to brightest by average brightness. Text and images, counted with the same technique; image projects begin here.</a:t>
+            </a:r>
+            <a:endParaRPr lang="en-US" sz="1100" dirty="0"/>
+          </a:p>
+        </p:txBody>
+      </p:sp>
+      <p:sp>
+        <p:nvSpPr>
+          <p:cNvPr id="24" name="Shape 22"/>
+          <p:cNvSpPr/>
+          <p:nvPr/>
+        </p:nvSpPr>
+        <p:spPr>
+          <a:xfrm>
+            <a:off x="640080" y="5493258"/>
+            <a:ext cx="868680" cy="450342"/>
+          </a:xfrm>
+          <a:prstGeom prst="roundRect">
+            <a:avLst>
+              <a:gd name="adj" fmla="val 12183"/>
+            </a:avLst>
+          </a:prstGeom>
+          <a:solidFill>
+            <a:srgbClr val="7A3B2E"/>
+          </a:solidFill>
+          <a:ln/>
+        </p:spPr>
+      </p:sp>
+      <p:sp>
+        <p:nvSpPr>
+          <p:cNvPr id="25" name="Text 23"/>
+          <p:cNvSpPr/>
+          <p:nvPr/>
+        </p:nvSpPr>
+        <p:spPr>
+          <a:xfrm>
+            <a:off x="640080" y="5493258"/>
+            <a:ext cx="868680" cy="450342"/>
+          </a:xfrm>
+          <a:prstGeom prst="rect">
+            <a:avLst/>
+          </a:prstGeom>
+          <a:noFill/>
+          <a:ln/>
+        </p:spPr>
+        <p:txBody>
+          <a:bodyPr wrap="square" rtlCol="0" anchor="ctr"/>
+          <a:lstStyle/>
+          <a:p>
+            <a:pPr algn="ctr" indent="0" marL="0">
+              <a:buNone/>
+            </a:pPr>
+            <a:r>
+              <a:rPr lang="en-US" sz="1100" b="1" dirty="0">
+                <a:solidFill>
+                  <a:srgbClr val="FFFFFF"/>
+                </a:solidFill>
+                <a:latin typeface="Calibri" pitchFamily="34" charset="0"/>
+                <a:ea typeface="Calibri" pitchFamily="34" charset="-122"/>
+                <a:cs typeface="Calibri" pitchFamily="34" charset="-120"/>
+              </a:rPr>
+              <a:t>1:52</a:t>
+            </a:r>
+            <a:endParaRPr lang="en-US" sz="1100" dirty="0"/>
+          </a:p>
+        </p:txBody>
+      </p:sp>
+      <p:sp>
+        <p:nvSpPr>
+          <p:cNvPr id="26" name="Text 24"/>
+          <p:cNvSpPr/>
+          <p:nvPr/>
+        </p:nvSpPr>
+        <p:spPr>
+          <a:xfrm>
+            <a:off x="1691640" y="5474970"/>
+            <a:ext cx="9646920" cy="560070"/>
+          </a:xfrm>
+          <a:prstGeom prst="rect">
+            <a:avLst/>
+          </a:prstGeom>
+          <a:noFill/>
+          <a:ln/>
+        </p:spPr>
+        <p:txBody>
+          <a:bodyPr wrap="square" rtlCol="0" anchor="ctr">
+            <a:spAutoFit/>
+          </a:bodyPr>
+          <a:lstStyle/>
+          <a:p>
+            <a:pPr indent="0" marL="0">
+              <a:buNone/>
+            </a:pPr>
+            <a:r>
+              <a:rPr lang="en-US" sz="1100" dirty="0">
+                <a:solidFill>
+                  <a:srgbClr val="1A1A1A"/>
+                </a:solidFill>
+                <a:latin typeface="Calibri" pitchFamily="34" charset="0"/>
+                <a:ea typeface="Calibri" pitchFamily="34" charset="-122"/>
+                <a:cs typeface="Calibri" pitchFamily="34" charset="-120"/>
+              </a:rPr>
+              <a:t>Preview of the methods ahead; the weekly routines introduced. First check-out.</a:t>
+            </a:r>
+            <a:endParaRPr lang="en-US" sz="1100" dirty="0"/>
           </a:p>
         </p:txBody>
       </p:sp>
@@ -3859,7 +3964,7 @@
         <p:spPr>
           <a:xfrm>
             <a:off x="640080" y="640080"/>
-            <a:ext cx="10058400" cy="320040"/>
+            <a:ext cx="10058400" cy="731520"/>
           </a:xfrm>
           <a:prstGeom prst="rect">
             <a:avLst/>
@@ -3875,7 +3980,66 @@
               <a:buNone/>
             </a:pPr>
             <a:r>
-              <a:rPr lang="en-US" sz="1300" b="1" spc="300" kern="0" dirty="0">
+              <a:rPr lang="en-US" sz="3000" b="1" dirty="0">
+                <a:solidFill>
+                  <a:srgbClr val="1A1A1A"/>
+                </a:solidFill>
+                <a:latin typeface="Cambria" pitchFamily="34" charset="0"/>
+                <a:ea typeface="Cambria" pitchFamily="34" charset="-122"/>
+                <a:cs typeface="Cambria" pitchFamily="34" charset="-120"/>
+              </a:rPr>
+              <a:t>Reading &amp; homework</a:t>
+            </a:r>
+            <a:endParaRPr lang="en-US" sz="3000" dirty="0"/>
+          </a:p>
+        </p:txBody>
+      </p:sp>
+      <p:sp>
+        <p:nvSpPr>
+          <p:cNvPr id="3" name="Shape 1"/>
+          <p:cNvSpPr/>
+          <p:nvPr/>
+        </p:nvSpPr>
+        <p:spPr>
+          <a:xfrm>
+            <a:off x="640080" y="1673352"/>
+            <a:ext cx="219456" cy="219456"/>
+          </a:xfrm>
+          <a:prstGeom prst="ellipse">
+            <a:avLst/>
+          </a:prstGeom>
+          <a:solidFill>
+            <a:srgbClr val="7A3B2E"/>
+          </a:solidFill>
+          <a:ln/>
+        </p:spPr>
+      </p:sp>
+      <p:sp>
+        <p:nvSpPr>
+          <p:cNvPr id="4" name="Text 2"/>
+          <p:cNvSpPr/>
+          <p:nvPr/>
+        </p:nvSpPr>
+        <p:spPr>
+          <a:xfrm>
+            <a:off x="1051560" y="1600200"/>
+            <a:ext cx="10424160" cy="365760"/>
+          </a:xfrm>
+          <a:prstGeom prst="rect">
+            <a:avLst/>
+          </a:prstGeom>
+          <a:noFill/>
+          <a:ln/>
+        </p:spPr>
+        <p:txBody>
+          <a:bodyPr wrap="square" rtlCol="0" anchor="ctr"/>
+          <a:lstStyle/>
+          <a:p>
+            <a:pPr indent="0" marL="0">
+              <a:buNone/>
+            </a:pPr>
+            <a:r>
+              <a:rPr lang="en-US" sz="1500" b="1" dirty="0">
                 <a:solidFill>
                   <a:srgbClr val="7A3B2E"/>
                 </a:solidFill>
@@ -3883,72 +4047,11 @@
                 <a:ea typeface="Calibri" pitchFamily="34" charset="-122"/>
                 <a:cs typeface="Calibri" pitchFamily="34" charset="-120"/>
               </a:rPr>
-              <a:t>HOW THIS WEEK CONNECTS</a:t>
-            </a:r>
-            <a:endParaRPr lang="en-US" sz="1300" dirty="0"/>
-          </a:p>
-        </p:txBody>
-      </p:sp>
-      <p:sp>
-        <p:nvSpPr>
-          <p:cNvPr id="3" name="Text 1"/>
-          <p:cNvSpPr/>
-          <p:nvPr/>
-        </p:nvSpPr>
-        <p:spPr>
-          <a:xfrm>
-            <a:off x="640080" y="987552"/>
-            <a:ext cx="10058400" cy="640080"/>
-          </a:xfrm>
-          <a:prstGeom prst="rect">
-            <a:avLst/>
-          </a:prstGeom>
-          <a:noFill/>
-          <a:ln/>
-        </p:spPr>
-        <p:txBody>
-          <a:bodyPr wrap="square" rtlCol="0" anchor="ctr"/>
-          <a:lstStyle/>
-          <a:p>
-            <a:pPr indent="0" marL="0">
-              <a:buNone/>
-            </a:pPr>
-            <a:r>
-              <a:rPr lang="en-US" sz="2800" b="1" dirty="0">
-                <a:solidFill>
-                  <a:srgbClr val="1A1A1A"/>
-                </a:solidFill>
-                <a:latin typeface="Cambria" pitchFamily="34" charset="0"/>
-                <a:ea typeface="Cambria" pitchFamily="34" charset="-122"/>
-                <a:cs typeface="Cambria" pitchFamily="34" charset="-120"/>
-              </a:rPr>
-              <a:t>The course's through-lines</a:t>
-            </a:r>
-            <a:endParaRPr lang="en-US" sz="2800" dirty="0"/>
-          </a:p>
-        </p:txBody>
-      </p:sp>
-      <p:sp>
-        <p:nvSpPr>
-          <p:cNvPr id="4" name="Shape 2"/>
-          <p:cNvSpPr/>
-          <p:nvPr/>
-        </p:nvSpPr>
-        <p:spPr>
-          <a:xfrm>
-            <a:off x="640080" y="2057400"/>
-            <a:ext cx="457200" cy="457200"/>
-          </a:xfrm>
-          <a:prstGeom prst="roundRect">
-            <a:avLst>
-              <a:gd name="adj" fmla="val 16000"/>
-            </a:avLst>
-          </a:prstGeom>
-          <a:solidFill>
-            <a:srgbClr val="7A3B2E"/>
-          </a:solidFill>
-          <a:ln/>
-        </p:spPr>
+              <a:t>Reading</a:t>
+            </a:r>
+            <a:endParaRPr lang="en-US" sz="1500" dirty="0"/>
+          </a:p>
+        </p:txBody>
       </p:sp>
       <p:sp>
         <p:nvSpPr>
@@ -3958,86 +4061,8 @@
         </p:nvSpPr>
         <p:spPr>
           <a:xfrm>
-            <a:off x="640080" y="2057400"/>
-            <a:ext cx="457200" cy="457200"/>
-          </a:xfrm>
-          <a:prstGeom prst="rect">
-            <a:avLst/>
-          </a:prstGeom>
-          <a:noFill/>
-          <a:ln/>
-        </p:spPr>
-        <p:txBody>
-          <a:bodyPr wrap="square" rtlCol="0" anchor="ctr"/>
-          <a:lstStyle/>
-          <a:p>
-            <a:pPr algn="ctr" indent="0" marL="0">
-              <a:buNone/>
-            </a:pPr>
-            <a:r>
-              <a:rPr lang="en-US" sz="2000" b="1" dirty="0">
-                <a:solidFill>
-                  <a:srgbClr val="FFFFFF"/>
-                </a:solidFill>
-                <a:latin typeface="Cambria" pitchFamily="34" charset="0"/>
-                <a:ea typeface="Cambria" pitchFamily="34" charset="-122"/>
-                <a:cs typeface="Cambria" pitchFamily="34" charset="-120"/>
-              </a:rPr>
-              <a:t>1</a:t>
-            </a:r>
-            <a:endParaRPr lang="en-US" sz="2000" dirty="0"/>
-          </a:p>
-        </p:txBody>
-      </p:sp>
-      <p:sp>
-        <p:nvSpPr>
-          <p:cNvPr id="6" name="Text 4"/>
-          <p:cNvSpPr/>
-          <p:nvPr/>
-        </p:nvSpPr>
-        <p:spPr>
-          <a:xfrm>
-            <a:off x="1371600" y="2020824"/>
-            <a:ext cx="10332720" cy="411480"/>
-          </a:xfrm>
-          <a:prstGeom prst="rect">
-            <a:avLst/>
-          </a:prstGeom>
-          <a:noFill/>
-          <a:ln/>
-        </p:spPr>
-        <p:txBody>
-          <a:bodyPr wrap="square" rtlCol="0" anchor="ctr"/>
-          <a:lstStyle/>
-          <a:p>
-            <a:pPr indent="0" marL="0">
-              <a:buNone/>
-            </a:pPr>
-            <a:r>
-              <a:rPr lang="en-US" sz="1900" b="1" dirty="0">
-                <a:solidFill>
-                  <a:srgbClr val="7A3B2E"/>
-                </a:solidFill>
-                <a:latin typeface="Cambria" pitchFamily="34" charset="0"/>
-                <a:ea typeface="Cambria" pitchFamily="34" charset="-122"/>
-                <a:cs typeface="Cambria" pitchFamily="34" charset="-120"/>
-              </a:rPr>
-              <a:t>Read work critically</a:t>
-            </a:r>
-            <a:endParaRPr lang="en-US" sz="1900" dirty="0"/>
-          </a:p>
-        </p:txBody>
-      </p:sp>
-      <p:sp>
-        <p:nvSpPr>
-          <p:cNvPr id="7" name="Text 5"/>
-          <p:cNvSpPr/>
-          <p:nvPr/>
-        </p:nvSpPr>
-        <p:spPr>
-          <a:xfrm>
-            <a:off x="1371600" y="2441448"/>
-            <a:ext cx="10332720" cy="914400"/>
+            <a:off x="1051560" y="1984248"/>
+            <a:ext cx="10424160" cy="731520"/>
           </a:xfrm>
           <a:prstGeom prst="rect">
             <a:avLst/>
@@ -4052,13 +4077,10 @@
           <a:lstStyle/>
           <a:p>
             <a:pPr indent="0" marL="0">
-              <a:lnSpc>
-                <a:spcPct val="112000"/>
-              </a:lnSpc>
-              <a:buNone/>
-            </a:pPr>
-            <a:r>
-              <a:rPr lang="en-US" sz="1450" dirty="0">
+              <a:buNone/>
+            </a:pPr>
+            <a:r>
+              <a:rPr lang="en-US" sz="1400" dirty="0">
                 <a:solidFill>
                   <a:srgbClr val="1A1A1A"/>
                 </a:solidFill>
@@ -4066,27 +4088,25 @@
                 <a:ea typeface="Calibri" pitchFamily="34" charset="-122"/>
                 <a:cs typeface="Calibri" pitchFamily="34" charset="-120"/>
               </a:rPr>
-              <a:t>She Giggles, He Gallops is excellent and its choices are debatable. Admiring and questioning at once is the habit the course is built on.</a:t>
-            </a:r>
-            <a:endParaRPr lang="en-US" sz="1450" dirty="0"/>
-          </a:p>
-        </p:txBody>
-      </p:sp>
-      <p:sp>
-        <p:nvSpPr>
-          <p:cNvPr id="8" name="Shape 6"/>
-          <p:cNvSpPr/>
-          <p:nvPr/>
-        </p:nvSpPr>
-        <p:spPr>
-          <a:xfrm>
-            <a:off x="640080" y="3520440"/>
-            <a:ext cx="457200" cy="457200"/>
-          </a:xfrm>
-          <a:prstGeom prst="roundRect">
-            <a:avLst>
-              <a:gd name="adj" fmla="val 16000"/>
-            </a:avLst>
+              <a:t>Bollen et al., the cognitive-distortions hockey stick (PNAS 2021), with the Schmidt et al. critique</a:t>
+            </a:r>
+            <a:endParaRPr lang="en-US" sz="1400" dirty="0"/>
+          </a:p>
+        </p:txBody>
+      </p:sp>
+      <p:sp>
+        <p:nvSpPr>
+          <p:cNvPr id="6" name="Shape 4"/>
+          <p:cNvSpPr/>
+          <p:nvPr/>
+        </p:nvSpPr>
+        <p:spPr>
+          <a:xfrm>
+            <a:off x="640080" y="2633472"/>
+            <a:ext cx="219456" cy="219456"/>
+          </a:xfrm>
+          <a:prstGeom prst="ellipse">
+            <a:avLst/>
           </a:prstGeom>
           <a:solidFill>
             <a:srgbClr val="3F6F5F"/>
@@ -4096,14 +4116,14 @@
       </p:sp>
       <p:sp>
         <p:nvSpPr>
-          <p:cNvPr id="9" name="Text 7"/>
-          <p:cNvSpPr/>
-          <p:nvPr/>
-        </p:nvSpPr>
-        <p:spPr>
-          <a:xfrm>
-            <a:off x="640080" y="3520440"/>
-            <a:ext cx="457200" cy="457200"/>
+          <p:cNvPr id="7" name="Text 5"/>
+          <p:cNvSpPr/>
+          <p:nvPr/>
+        </p:nvSpPr>
+        <p:spPr>
+          <a:xfrm>
+            <a:off x="1051560" y="2560320"/>
+            <a:ext cx="10424160" cy="365760"/>
           </a:xfrm>
           <a:prstGeom prst="rect">
             <a:avLst/>
@@ -4115,73 +4135,34 @@
           <a:bodyPr wrap="square" rtlCol="0" anchor="ctr"/>
           <a:lstStyle/>
           <a:p>
-            <a:pPr algn="ctr" indent="0" marL="0">
-              <a:buNone/>
-            </a:pPr>
-            <a:r>
-              <a:rPr lang="en-US" sz="2000" b="1" dirty="0">
-                <a:solidFill>
-                  <a:srgbClr val="FFFFFF"/>
-                </a:solidFill>
-                <a:latin typeface="Cambria" pitchFamily="34" charset="0"/>
-                <a:ea typeface="Cambria" pitchFamily="34" charset="-122"/>
-                <a:cs typeface="Cambria" pitchFamily="34" charset="-120"/>
-              </a:rPr>
-              <a:t>2</a:t>
-            </a:r>
-            <a:endParaRPr lang="en-US" sz="2000" dirty="0"/>
-          </a:p>
-        </p:txBody>
-      </p:sp>
-      <p:sp>
-        <p:nvSpPr>
-          <p:cNvPr id="10" name="Text 8"/>
-          <p:cNvSpPr/>
-          <p:nvPr/>
-        </p:nvSpPr>
-        <p:spPr>
-          <a:xfrm>
-            <a:off x="1371600" y="3483864"/>
-            <a:ext cx="10332720" cy="411480"/>
-          </a:xfrm>
-          <a:prstGeom prst="rect">
-            <a:avLst/>
-          </a:prstGeom>
-          <a:noFill/>
-          <a:ln/>
-        </p:spPr>
-        <p:txBody>
-          <a:bodyPr wrap="square" rtlCol="0" anchor="ctr"/>
-          <a:lstStyle/>
-          <a:p>
-            <a:pPr indent="0" marL="0">
-              <a:buNone/>
-            </a:pPr>
-            <a:r>
-              <a:rPr lang="en-US" sz="1900" b="1" dirty="0">
+            <a:pPr indent="0" marL="0">
+              <a:buNone/>
+            </a:pPr>
+            <a:r>
+              <a:rPr lang="en-US" sz="1500" b="1" dirty="0">
                 <a:solidFill>
                   <a:srgbClr val="3F6F5F"/>
                 </a:solidFill>
-                <a:latin typeface="Cambria" pitchFamily="34" charset="0"/>
-                <a:ea typeface="Cambria" pitchFamily="34" charset="-122"/>
-                <a:cs typeface="Cambria" pitchFamily="34" charset="-120"/>
-              </a:rPr>
-              <a:t>Make something real</a:t>
-            </a:r>
-            <a:endParaRPr lang="en-US" sz="1900" dirty="0"/>
-          </a:p>
-        </p:txBody>
-      </p:sp>
-      <p:sp>
-        <p:nvSpPr>
-          <p:cNvPr id="11" name="Text 9"/>
-          <p:cNvSpPr/>
-          <p:nvPr/>
-        </p:nvSpPr>
-        <p:spPr>
-          <a:xfrm>
-            <a:off x="1371600" y="3904488"/>
-            <a:ext cx="10332720" cy="914400"/>
+                <a:latin typeface="Calibri" pitchFamily="34" charset="0"/>
+                <a:ea typeface="Calibri" pitchFamily="34" charset="-122"/>
+                <a:cs typeface="Calibri" pitchFamily="34" charset="-120"/>
+              </a:rPr>
+              <a:t>Supplement</a:t>
+            </a:r>
+            <a:endParaRPr lang="en-US" sz="1500" dirty="0"/>
+          </a:p>
+        </p:txBody>
+      </p:sp>
+      <p:sp>
+        <p:nvSpPr>
+          <p:cNvPr id="8" name="Text 6"/>
+          <p:cNvSpPr/>
+          <p:nvPr/>
+        </p:nvSpPr>
+        <p:spPr>
+          <a:xfrm>
+            <a:off x="1051560" y="2944368"/>
+            <a:ext cx="10424160" cy="731520"/>
           </a:xfrm>
           <a:prstGeom prst="rect">
             <a:avLst/>
@@ -4196,13 +4177,10 @@
           <a:lstStyle/>
           <a:p>
             <a:pPr indent="0" marL="0">
-              <a:lnSpc>
-                <a:spcPct val="112000"/>
-              </a:lnSpc>
-              <a:buNone/>
-            </a:pPr>
-            <a:r>
-              <a:rPr lang="en-US" sz="1450" dirty="0">
+              <a:buNone/>
+            </a:pPr>
+            <a:r>
+              <a:rPr lang="en-US" sz="1400" dirty="0">
                 <a:solidFill>
                   <a:srgbClr val="1A1A1A"/>
                 </a:solidFill>
@@ -4210,27 +4188,25 @@
                 <a:ea typeface="Calibri" pitchFamily="34" charset="-122"/>
                 <a:cs typeface="Calibri" pitchFamily="34" charset="-120"/>
               </a:rPr>
-              <a:t>A complete investigation by the first break, before any theory.</a:t>
-            </a:r>
-            <a:endParaRPr lang="en-US" sz="1450" dirty="0"/>
-          </a:p>
-        </p:txBody>
-      </p:sp>
-      <p:sp>
-        <p:nvSpPr>
-          <p:cNvPr id="12" name="Shape 10"/>
-          <p:cNvSpPr/>
-          <p:nvPr/>
-        </p:nvSpPr>
-        <p:spPr>
-          <a:xfrm>
-            <a:off x="640080" y="4983480"/>
-            <a:ext cx="457200" cy="457200"/>
-          </a:xfrm>
-          <a:prstGeom prst="roundRect">
-            <a:avLst>
-              <a:gd name="adj" fmla="val 16000"/>
-            </a:avLst>
+              <a:t>Robin Sloan, Writing with the machine</a:t>
+            </a:r>
+            <a:endParaRPr lang="en-US" sz="1400" dirty="0"/>
+          </a:p>
+        </p:txBody>
+      </p:sp>
+      <p:sp>
+        <p:nvSpPr>
+          <p:cNvPr id="9" name="Shape 7"/>
+          <p:cNvSpPr/>
+          <p:nvPr/>
+        </p:nvSpPr>
+        <p:spPr>
+          <a:xfrm>
+            <a:off x="640080" y="3593592"/>
+            <a:ext cx="219456" cy="219456"/>
+          </a:xfrm>
+          <a:prstGeom prst="ellipse">
+            <a:avLst/>
           </a:prstGeom>
           <a:solidFill>
             <a:srgbClr val="B9852F"/>
@@ -4240,14 +4216,14 @@
       </p:sp>
       <p:sp>
         <p:nvSpPr>
-          <p:cNvPr id="13" name="Text 11"/>
-          <p:cNvSpPr/>
-          <p:nvPr/>
-        </p:nvSpPr>
-        <p:spPr>
-          <a:xfrm>
-            <a:off x="640080" y="4983480"/>
-            <a:ext cx="457200" cy="457200"/>
+          <p:cNvPr id="10" name="Text 8"/>
+          <p:cNvSpPr/>
+          <p:nvPr/>
+        </p:nvSpPr>
+        <p:spPr>
+          <a:xfrm>
+            <a:off x="1051560" y="3520440"/>
+            <a:ext cx="10424160" cy="365760"/>
           </a:xfrm>
           <a:prstGeom prst="rect">
             <a:avLst/>
@@ -4259,73 +4235,34 @@
           <a:bodyPr wrap="square" rtlCol="0" anchor="ctr"/>
           <a:lstStyle/>
           <a:p>
-            <a:pPr algn="ctr" indent="0" marL="0">
-              <a:buNone/>
-            </a:pPr>
-            <a:r>
-              <a:rPr lang="en-US" sz="2000" b="1" dirty="0">
-                <a:solidFill>
-                  <a:srgbClr val="FFFFFF"/>
-                </a:solidFill>
-                <a:latin typeface="Cambria" pitchFamily="34" charset="0"/>
-                <a:ea typeface="Cambria" pitchFamily="34" charset="-122"/>
-                <a:cs typeface="Cambria" pitchFamily="34" charset="-120"/>
-              </a:rPr>
-              <a:t>3</a:t>
-            </a:r>
-            <a:endParaRPr lang="en-US" sz="2000" dirty="0"/>
-          </a:p>
-        </p:txBody>
-      </p:sp>
-      <p:sp>
-        <p:nvSpPr>
-          <p:cNvPr id="14" name="Text 12"/>
-          <p:cNvSpPr/>
-          <p:nvPr/>
-        </p:nvSpPr>
-        <p:spPr>
-          <a:xfrm>
-            <a:off x="1371600" y="4946904"/>
-            <a:ext cx="10332720" cy="411480"/>
-          </a:xfrm>
-          <a:prstGeom prst="rect">
-            <a:avLst/>
-          </a:prstGeom>
-          <a:noFill/>
-          <a:ln/>
-        </p:spPr>
-        <p:txBody>
-          <a:bodyPr wrap="square" rtlCol="0" anchor="ctr"/>
-          <a:lstStyle/>
-          <a:p>
-            <a:pPr indent="0" marL="0">
-              <a:buNone/>
-            </a:pPr>
-            <a:r>
-              <a:rPr lang="en-US" sz="1900" b="1" dirty="0">
+            <a:pPr indent="0" marL="0">
+              <a:buNone/>
+            </a:pPr>
+            <a:r>
+              <a:rPr lang="en-US" sz="1500" b="1" dirty="0">
                 <a:solidFill>
                   <a:srgbClr val="B9852F"/>
                 </a:solidFill>
-                <a:latin typeface="Cambria" pitchFamily="34" charset="0"/>
-                <a:ea typeface="Cambria" pitchFamily="34" charset="-122"/>
-                <a:cs typeface="Cambria" pitchFamily="34" charset="-120"/>
-              </a:rPr>
-              <a:t>Images are culture too</a:t>
-            </a:r>
-            <a:endParaRPr lang="en-US" sz="1900" dirty="0"/>
-          </a:p>
-        </p:txBody>
-      </p:sp>
-      <p:sp>
-        <p:nvSpPr>
-          <p:cNvPr id="15" name="Text 13"/>
-          <p:cNvSpPr/>
-          <p:nvPr/>
-        </p:nvSpPr>
-        <p:spPr>
-          <a:xfrm>
-            <a:off x="1371600" y="5367528"/>
-            <a:ext cx="10332720" cy="914400"/>
+                <a:latin typeface="Calibri" pitchFamily="34" charset="0"/>
+                <a:ea typeface="Calibri" pitchFamily="34" charset="-122"/>
+                <a:cs typeface="Calibri" pitchFamily="34" charset="-120"/>
+              </a:rPr>
+              <a:t>Deeper (optional)</a:t>
+            </a:r>
+            <a:endParaRPr lang="en-US" sz="1500" dirty="0"/>
+          </a:p>
+        </p:txBody>
+      </p:sp>
+      <p:sp>
+        <p:nvSpPr>
+          <p:cNvPr id="11" name="Text 9"/>
+          <p:cNvSpPr/>
+          <p:nvPr/>
+        </p:nvSpPr>
+        <p:spPr>
+          <a:xfrm>
+            <a:off x="1051560" y="3904488"/>
+            <a:ext cx="10424160" cy="731520"/>
           </a:xfrm>
           <a:prstGeom prst="rect">
             <a:avLst/>
@@ -4340,13 +4277,10 @@
           <a:lstStyle/>
           <a:p>
             <a:pPr indent="0" marL="0">
-              <a:lnSpc>
-                <a:spcPct val="112000"/>
-              </a:lnSpc>
-              <a:buNone/>
-            </a:pPr>
-            <a:r>
-              <a:rPr lang="en-US" sz="1450" dirty="0">
+              <a:buNone/>
+            </a:pPr>
+            <a:r>
+              <a:rPr lang="en-US" sz="1400" dirty="0">
                 <a:solidFill>
                   <a:srgbClr val="1A1A1A"/>
                 </a:solidFill>
@@ -4354,9 +4288,209 @@
                 <a:ea typeface="Calibri" pitchFamily="34" charset="-122"/>
                 <a:cs typeface="Calibri" pitchFamily="34" charset="-120"/>
               </a:rPr>
-              <a:t>A picture is numbers: you counted pixels on day one, and images continue as a co-equal corpus through all ten weeks.</a:t>
-            </a:r>
-            <a:endParaRPr lang="en-US" sz="1450" dirty="0"/>
+              <a:t>Moretti, Conjectures on World Literature (NLR 2000), the founding argument for reading culture at scale</a:t>
+            </a:r>
+            <a:endParaRPr lang="en-US" sz="1400" dirty="0"/>
+          </a:p>
+        </p:txBody>
+      </p:sp>
+      <p:sp>
+        <p:nvSpPr>
+          <p:cNvPr id="12" name="Shape 10"/>
+          <p:cNvSpPr/>
+          <p:nvPr/>
+        </p:nvSpPr>
+        <p:spPr>
+          <a:xfrm>
+            <a:off x="640080" y="4553712"/>
+            <a:ext cx="219456" cy="219456"/>
+          </a:xfrm>
+          <a:prstGeom prst="ellipse">
+            <a:avLst/>
+          </a:prstGeom>
+          <a:solidFill>
+            <a:srgbClr val="3F6F5F"/>
+          </a:solidFill>
+          <a:ln/>
+        </p:spPr>
+      </p:sp>
+      <p:sp>
+        <p:nvSpPr>
+          <p:cNvPr id="13" name="Text 11"/>
+          <p:cNvSpPr/>
+          <p:nvPr/>
+        </p:nvSpPr>
+        <p:spPr>
+          <a:xfrm>
+            <a:off x="1051560" y="4480560"/>
+            <a:ext cx="10424160" cy="365760"/>
+          </a:xfrm>
+          <a:prstGeom prst="rect">
+            <a:avLst/>
+          </a:prstGeom>
+          <a:noFill/>
+          <a:ln/>
+        </p:spPr>
+        <p:txBody>
+          <a:bodyPr wrap="square" rtlCol="0" anchor="ctr"/>
+          <a:lstStyle/>
+          <a:p>
+            <a:pPr indent="0" marL="0">
+              <a:buNone/>
+            </a:pPr>
+            <a:r>
+              <a:rPr lang="en-US" sz="1500" b="1" dirty="0">
+                <a:solidFill>
+                  <a:srgbClr val="3F6F5F"/>
+                </a:solidFill>
+                <a:latin typeface="Calibri" pitchFamily="34" charset="0"/>
+                <a:ea typeface="Calibri" pitchFamily="34" charset="-122"/>
+                <a:cs typeface="Calibri" pitchFamily="34" charset="-120"/>
+              </a:rPr>
+              <a:t>Sketch</a:t>
+            </a:r>
+            <a:endParaRPr lang="en-US" sz="1500" dirty="0"/>
+          </a:p>
+        </p:txBody>
+      </p:sp>
+      <p:sp>
+        <p:nvSpPr>
+          <p:cNvPr id="14" name="Text 12"/>
+          <p:cNvSpPr/>
+          <p:nvPr/>
+        </p:nvSpPr>
+        <p:spPr>
+          <a:xfrm>
+            <a:off x="1051560" y="4864608"/>
+            <a:ext cx="10424160" cy="731520"/>
+          </a:xfrm>
+          <a:prstGeom prst="rect">
+            <a:avLst/>
+          </a:prstGeom>
+          <a:noFill/>
+          <a:ln/>
+        </p:spPr>
+        <p:txBody>
+          <a:bodyPr wrap="square" rtlCol="0" anchor="t">
+            <a:spAutoFit/>
+          </a:bodyPr>
+          <a:lstStyle/>
+          <a:p>
+            <a:pPr indent="0" marL="0">
+              <a:buNone/>
+            </a:pPr>
+            <a:r>
+              <a:rPr lang="en-US" sz="1400" dirty="0">
+                <a:solidFill>
+                  <a:srgbClr val="1A1A1A"/>
+                </a:solidFill>
+                <a:latin typeface="Calibri" pitchFamily="34" charset="0"/>
+                <a:ea typeface="Calibri" pitchFamily="34" charset="-122"/>
+                <a:cs typeface="Calibri" pitchFamily="34" charset="-120"/>
+              </a:rPr>
+              <a:t>One question from your life answerable with text or image data; three sentences.</a:t>
+            </a:r>
+            <a:endParaRPr lang="en-US" sz="1400" dirty="0"/>
+          </a:p>
+        </p:txBody>
+      </p:sp>
+      <p:sp>
+        <p:nvSpPr>
+          <p:cNvPr id="15" name="Shape 13"/>
+          <p:cNvSpPr/>
+          <p:nvPr/>
+        </p:nvSpPr>
+        <p:spPr>
+          <a:xfrm>
+            <a:off x="640080" y="5513832"/>
+            <a:ext cx="219456" cy="219456"/>
+          </a:xfrm>
+          <a:prstGeom prst="ellipse">
+            <a:avLst/>
+          </a:prstGeom>
+          <a:solidFill>
+            <a:srgbClr val="7A3B2E"/>
+          </a:solidFill>
+          <a:ln/>
+        </p:spPr>
+      </p:sp>
+      <p:sp>
+        <p:nvSpPr>
+          <p:cNvPr id="16" name="Text 14"/>
+          <p:cNvSpPr/>
+          <p:nvPr/>
+        </p:nvSpPr>
+        <p:spPr>
+          <a:xfrm>
+            <a:off x="1051560" y="5440680"/>
+            <a:ext cx="10424160" cy="365760"/>
+          </a:xfrm>
+          <a:prstGeom prst="rect">
+            <a:avLst/>
+          </a:prstGeom>
+          <a:noFill/>
+          <a:ln/>
+        </p:spPr>
+        <p:txBody>
+          <a:bodyPr wrap="square" rtlCol="0" anchor="ctr"/>
+          <a:lstStyle/>
+          <a:p>
+            <a:pPr indent="0" marL="0">
+              <a:buNone/>
+            </a:pPr>
+            <a:r>
+              <a:rPr lang="en-US" sz="1500" b="1" dirty="0">
+                <a:solidFill>
+                  <a:srgbClr val="7A3B2E"/>
+                </a:solidFill>
+                <a:latin typeface="Calibri" pitchFamily="34" charset="0"/>
+                <a:ea typeface="Calibri" pitchFamily="34" charset="-122"/>
+                <a:cs typeface="Calibri" pitchFamily="34" charset="-120"/>
+              </a:rPr>
+              <a:t>Check (AI closed)</a:t>
+            </a:r>
+            <a:endParaRPr lang="en-US" sz="1500" dirty="0"/>
+          </a:p>
+        </p:txBody>
+      </p:sp>
+      <p:sp>
+        <p:nvSpPr>
+          <p:cNvPr id="17" name="Text 15"/>
+          <p:cNvSpPr/>
+          <p:nvPr/>
+        </p:nvSpPr>
+        <p:spPr>
+          <a:xfrm>
+            <a:off x="1051560" y="5824728"/>
+            <a:ext cx="10424160" cy="731520"/>
+          </a:xfrm>
+          <a:prstGeom prst="rect">
+            <a:avLst/>
+          </a:prstGeom>
+          <a:noFill/>
+          <a:ln/>
+        </p:spPr>
+        <p:txBody>
+          <a:bodyPr wrap="square" rtlCol="0" anchor="t">
+            <a:spAutoFit/>
+          </a:bodyPr>
+          <a:lstStyle/>
+          <a:p>
+            <a:pPr indent="0" marL="0">
+              <a:buNone/>
+            </a:pPr>
+            <a:r>
+              <a:rPr lang="en-US" sz="1400" dirty="0">
+                <a:solidFill>
+                  <a:srgbClr val="1A1A1A"/>
+                </a:solidFill>
+                <a:latin typeface="Calibri" pitchFamily="34" charset="0"/>
+                <a:ea typeface="Calibri" pitchFamily="34" charset="-122"/>
+                <a:cs typeface="Calibri" pitchFamily="34" charset="-120"/>
+              </a:rPr>
+              <a:t>Trace it: one written sentence predicting what your cell does before you run it. (Competency 1.)</a:t>
+            </a:r>
+            <a:endParaRPr lang="en-US" sz="1400" dirty="0"/>
           </a:p>
         </p:txBody>
       </p:sp>
@@ -4371,6 +4505,548 @@
 <file path=ppt/slides/slide13.xml><?xml version="1.0" encoding="utf-8"?>
 <p:sld xmlns:a="http://schemas.openxmlformats.org/drawingml/2006/main" xmlns:r="http://schemas.openxmlformats.org/officeDocument/2006/relationships" xmlns:p="http://schemas.openxmlformats.org/presentationml/2006/main">
   <p:cSld name="Slide 13">
+    <p:bg>
+      <p:bgPr>
+        <a:solidFill>
+          <a:srgbClr val="FFFFFF"/>
+        </a:solidFill>
+      </p:bgPr>
+    </p:bg>
+    <p:spTree>
+      <p:nvGrpSpPr>
+        <p:cNvPr id="1" name=""/>
+        <p:cNvGrpSpPr/>
+        <p:nvPr/>
+      </p:nvGrpSpPr>
+      <p:grpSpPr>
+        <a:xfrm>
+          <a:off x="0" y="0"/>
+          <a:ext cx="0" cy="0"/>
+          <a:chOff x="0" y="0"/>
+          <a:chExt cx="0" cy="0"/>
+        </a:xfrm>
+      </p:grpSpPr>
+      <p:sp>
+        <p:nvSpPr>
+          <p:cNvPr id="2" name="Text 0"/>
+          <p:cNvSpPr/>
+          <p:nvPr/>
+        </p:nvSpPr>
+        <p:spPr>
+          <a:xfrm>
+            <a:off x="640080" y="640080"/>
+            <a:ext cx="10058400" cy="320040"/>
+          </a:xfrm>
+          <a:prstGeom prst="rect">
+            <a:avLst/>
+          </a:prstGeom>
+          <a:noFill/>
+          <a:ln/>
+        </p:spPr>
+        <p:txBody>
+          <a:bodyPr wrap="square" rtlCol="0" anchor="ctr"/>
+          <a:lstStyle/>
+          <a:p>
+            <a:pPr indent="0" marL="0">
+              <a:buNone/>
+            </a:pPr>
+            <a:r>
+              <a:rPr lang="en-US" sz="1300" b="1" spc="300" kern="0" dirty="0">
+                <a:solidFill>
+                  <a:srgbClr val="7A3B2E"/>
+                </a:solidFill>
+                <a:latin typeface="Calibri" pitchFamily="34" charset="0"/>
+                <a:ea typeface="Calibri" pitchFamily="34" charset="-122"/>
+                <a:cs typeface="Calibri" pitchFamily="34" charset="-120"/>
+              </a:rPr>
+              <a:t>HOW THIS WEEK CONNECTS</a:t>
+            </a:r>
+            <a:endParaRPr lang="en-US" sz="1300" dirty="0"/>
+          </a:p>
+        </p:txBody>
+      </p:sp>
+      <p:sp>
+        <p:nvSpPr>
+          <p:cNvPr id="3" name="Text 1"/>
+          <p:cNvSpPr/>
+          <p:nvPr/>
+        </p:nvSpPr>
+        <p:spPr>
+          <a:xfrm>
+            <a:off x="640080" y="987552"/>
+            <a:ext cx="10058400" cy="640080"/>
+          </a:xfrm>
+          <a:prstGeom prst="rect">
+            <a:avLst/>
+          </a:prstGeom>
+          <a:noFill/>
+          <a:ln/>
+        </p:spPr>
+        <p:txBody>
+          <a:bodyPr wrap="square" rtlCol="0" anchor="ctr"/>
+          <a:lstStyle/>
+          <a:p>
+            <a:pPr indent="0" marL="0">
+              <a:buNone/>
+            </a:pPr>
+            <a:r>
+              <a:rPr lang="en-US" sz="2800" b="1" dirty="0">
+                <a:solidFill>
+                  <a:srgbClr val="1A1A1A"/>
+                </a:solidFill>
+                <a:latin typeface="Cambria" pitchFamily="34" charset="0"/>
+                <a:ea typeface="Cambria" pitchFamily="34" charset="-122"/>
+                <a:cs typeface="Cambria" pitchFamily="34" charset="-120"/>
+              </a:rPr>
+              <a:t>The course's through-lines</a:t>
+            </a:r>
+            <a:endParaRPr lang="en-US" sz="2800" dirty="0"/>
+          </a:p>
+        </p:txBody>
+      </p:sp>
+      <p:sp>
+        <p:nvSpPr>
+          <p:cNvPr id="4" name="Shape 2"/>
+          <p:cNvSpPr/>
+          <p:nvPr/>
+        </p:nvSpPr>
+        <p:spPr>
+          <a:xfrm>
+            <a:off x="640080" y="2057400"/>
+            <a:ext cx="457200" cy="457200"/>
+          </a:xfrm>
+          <a:prstGeom prst="roundRect">
+            <a:avLst>
+              <a:gd name="adj" fmla="val 16000"/>
+            </a:avLst>
+          </a:prstGeom>
+          <a:solidFill>
+            <a:srgbClr val="7A3B2E"/>
+          </a:solidFill>
+          <a:ln/>
+        </p:spPr>
+      </p:sp>
+      <p:sp>
+        <p:nvSpPr>
+          <p:cNvPr id="5" name="Text 3"/>
+          <p:cNvSpPr/>
+          <p:nvPr/>
+        </p:nvSpPr>
+        <p:spPr>
+          <a:xfrm>
+            <a:off x="640080" y="2057400"/>
+            <a:ext cx="457200" cy="457200"/>
+          </a:xfrm>
+          <a:prstGeom prst="rect">
+            <a:avLst/>
+          </a:prstGeom>
+          <a:noFill/>
+          <a:ln/>
+        </p:spPr>
+        <p:txBody>
+          <a:bodyPr wrap="square" rtlCol="0" anchor="ctr"/>
+          <a:lstStyle/>
+          <a:p>
+            <a:pPr algn="ctr" indent="0" marL="0">
+              <a:buNone/>
+            </a:pPr>
+            <a:r>
+              <a:rPr lang="en-US" sz="2000" b="1" dirty="0">
+                <a:solidFill>
+                  <a:srgbClr val="FFFFFF"/>
+                </a:solidFill>
+                <a:latin typeface="Cambria" pitchFamily="34" charset="0"/>
+                <a:ea typeface="Cambria" pitchFamily="34" charset="-122"/>
+                <a:cs typeface="Cambria" pitchFamily="34" charset="-120"/>
+              </a:rPr>
+              <a:t>1</a:t>
+            </a:r>
+            <a:endParaRPr lang="en-US" sz="2000" dirty="0"/>
+          </a:p>
+        </p:txBody>
+      </p:sp>
+      <p:sp>
+        <p:nvSpPr>
+          <p:cNvPr id="6" name="Text 4"/>
+          <p:cNvSpPr/>
+          <p:nvPr/>
+        </p:nvSpPr>
+        <p:spPr>
+          <a:xfrm>
+            <a:off x="1371600" y="2020824"/>
+            <a:ext cx="10332720" cy="411480"/>
+          </a:xfrm>
+          <a:prstGeom prst="rect">
+            <a:avLst/>
+          </a:prstGeom>
+          <a:noFill/>
+          <a:ln/>
+        </p:spPr>
+        <p:txBody>
+          <a:bodyPr wrap="square" rtlCol="0" anchor="ctr"/>
+          <a:lstStyle/>
+          <a:p>
+            <a:pPr indent="0" marL="0">
+              <a:buNone/>
+            </a:pPr>
+            <a:r>
+              <a:rPr lang="en-US" sz="1900" b="1" dirty="0">
+                <a:solidFill>
+                  <a:srgbClr val="7A3B2E"/>
+                </a:solidFill>
+                <a:latin typeface="Cambria" pitchFamily="34" charset="0"/>
+                <a:ea typeface="Cambria" pitchFamily="34" charset="-122"/>
+                <a:cs typeface="Cambria" pitchFamily="34" charset="-120"/>
+              </a:rPr>
+              <a:t>Read work critically</a:t>
+            </a:r>
+            <a:endParaRPr lang="en-US" sz="1900" dirty="0"/>
+          </a:p>
+        </p:txBody>
+      </p:sp>
+      <p:sp>
+        <p:nvSpPr>
+          <p:cNvPr id="7" name="Text 5"/>
+          <p:cNvSpPr/>
+          <p:nvPr/>
+        </p:nvSpPr>
+        <p:spPr>
+          <a:xfrm>
+            <a:off x="1371600" y="2441448"/>
+            <a:ext cx="10332720" cy="914400"/>
+          </a:xfrm>
+          <a:prstGeom prst="rect">
+            <a:avLst/>
+          </a:prstGeom>
+          <a:noFill/>
+          <a:ln/>
+        </p:spPr>
+        <p:txBody>
+          <a:bodyPr wrap="square" rtlCol="0" anchor="t">
+            <a:spAutoFit/>
+          </a:bodyPr>
+          <a:lstStyle/>
+          <a:p>
+            <a:pPr indent="0" marL="0">
+              <a:lnSpc>
+                <a:spcPct val="112000"/>
+              </a:lnSpc>
+              <a:buNone/>
+            </a:pPr>
+            <a:r>
+              <a:rPr lang="en-US" sz="1450" dirty="0">
+                <a:solidFill>
+                  <a:srgbClr val="1A1A1A"/>
+                </a:solidFill>
+                <a:latin typeface="Calibri" pitchFamily="34" charset="0"/>
+                <a:ea typeface="Calibri" pitchFamily="34" charset="-122"/>
+                <a:cs typeface="Calibri" pitchFamily="34" charset="-120"/>
+              </a:rPr>
+              <a:t>She Giggles, He Gallops is excellent and its choices are debatable. Admiring and questioning at once is the habit the course is built on.</a:t>
+            </a:r>
+            <a:endParaRPr lang="en-US" sz="1450" dirty="0"/>
+          </a:p>
+        </p:txBody>
+      </p:sp>
+      <p:sp>
+        <p:nvSpPr>
+          <p:cNvPr id="8" name="Shape 6"/>
+          <p:cNvSpPr/>
+          <p:nvPr/>
+        </p:nvSpPr>
+        <p:spPr>
+          <a:xfrm>
+            <a:off x="640080" y="3520440"/>
+            <a:ext cx="457200" cy="457200"/>
+          </a:xfrm>
+          <a:prstGeom prst="roundRect">
+            <a:avLst>
+              <a:gd name="adj" fmla="val 16000"/>
+            </a:avLst>
+          </a:prstGeom>
+          <a:solidFill>
+            <a:srgbClr val="3F6F5F"/>
+          </a:solidFill>
+          <a:ln/>
+        </p:spPr>
+      </p:sp>
+      <p:sp>
+        <p:nvSpPr>
+          <p:cNvPr id="9" name="Text 7"/>
+          <p:cNvSpPr/>
+          <p:nvPr/>
+        </p:nvSpPr>
+        <p:spPr>
+          <a:xfrm>
+            <a:off x="640080" y="3520440"/>
+            <a:ext cx="457200" cy="457200"/>
+          </a:xfrm>
+          <a:prstGeom prst="rect">
+            <a:avLst/>
+          </a:prstGeom>
+          <a:noFill/>
+          <a:ln/>
+        </p:spPr>
+        <p:txBody>
+          <a:bodyPr wrap="square" rtlCol="0" anchor="ctr"/>
+          <a:lstStyle/>
+          <a:p>
+            <a:pPr algn="ctr" indent="0" marL="0">
+              <a:buNone/>
+            </a:pPr>
+            <a:r>
+              <a:rPr lang="en-US" sz="2000" b="1" dirty="0">
+                <a:solidFill>
+                  <a:srgbClr val="FFFFFF"/>
+                </a:solidFill>
+                <a:latin typeface="Cambria" pitchFamily="34" charset="0"/>
+                <a:ea typeface="Cambria" pitchFamily="34" charset="-122"/>
+                <a:cs typeface="Cambria" pitchFamily="34" charset="-120"/>
+              </a:rPr>
+              <a:t>2</a:t>
+            </a:r>
+            <a:endParaRPr lang="en-US" sz="2000" dirty="0"/>
+          </a:p>
+        </p:txBody>
+      </p:sp>
+      <p:sp>
+        <p:nvSpPr>
+          <p:cNvPr id="10" name="Text 8"/>
+          <p:cNvSpPr/>
+          <p:nvPr/>
+        </p:nvSpPr>
+        <p:spPr>
+          <a:xfrm>
+            <a:off x="1371600" y="3483864"/>
+            <a:ext cx="10332720" cy="411480"/>
+          </a:xfrm>
+          <a:prstGeom prst="rect">
+            <a:avLst/>
+          </a:prstGeom>
+          <a:noFill/>
+          <a:ln/>
+        </p:spPr>
+        <p:txBody>
+          <a:bodyPr wrap="square" rtlCol="0" anchor="ctr"/>
+          <a:lstStyle/>
+          <a:p>
+            <a:pPr indent="0" marL="0">
+              <a:buNone/>
+            </a:pPr>
+            <a:r>
+              <a:rPr lang="en-US" sz="1900" b="1" dirty="0">
+                <a:solidFill>
+                  <a:srgbClr val="3F6F5F"/>
+                </a:solidFill>
+                <a:latin typeface="Cambria" pitchFamily="34" charset="0"/>
+                <a:ea typeface="Cambria" pitchFamily="34" charset="-122"/>
+                <a:cs typeface="Cambria" pitchFamily="34" charset="-120"/>
+              </a:rPr>
+              <a:t>Make something real</a:t>
+            </a:r>
+            <a:endParaRPr lang="en-US" sz="1900" dirty="0"/>
+          </a:p>
+        </p:txBody>
+      </p:sp>
+      <p:sp>
+        <p:nvSpPr>
+          <p:cNvPr id="11" name="Text 9"/>
+          <p:cNvSpPr/>
+          <p:nvPr/>
+        </p:nvSpPr>
+        <p:spPr>
+          <a:xfrm>
+            <a:off x="1371600" y="3904488"/>
+            <a:ext cx="10332720" cy="914400"/>
+          </a:xfrm>
+          <a:prstGeom prst="rect">
+            <a:avLst/>
+          </a:prstGeom>
+          <a:noFill/>
+          <a:ln/>
+        </p:spPr>
+        <p:txBody>
+          <a:bodyPr wrap="square" rtlCol="0" anchor="t">
+            <a:spAutoFit/>
+          </a:bodyPr>
+          <a:lstStyle/>
+          <a:p>
+            <a:pPr indent="0" marL="0">
+              <a:lnSpc>
+                <a:spcPct val="112000"/>
+              </a:lnSpc>
+              <a:buNone/>
+            </a:pPr>
+            <a:r>
+              <a:rPr lang="en-US" sz="1450" dirty="0">
+                <a:solidFill>
+                  <a:srgbClr val="1A1A1A"/>
+                </a:solidFill>
+                <a:latin typeface="Calibri" pitchFamily="34" charset="0"/>
+                <a:ea typeface="Calibri" pitchFamily="34" charset="-122"/>
+                <a:cs typeface="Calibri" pitchFamily="34" charset="-120"/>
+              </a:rPr>
+              <a:t>A complete investigation by the first break, before any theory.</a:t>
+            </a:r>
+            <a:endParaRPr lang="en-US" sz="1450" dirty="0"/>
+          </a:p>
+        </p:txBody>
+      </p:sp>
+      <p:sp>
+        <p:nvSpPr>
+          <p:cNvPr id="12" name="Shape 10"/>
+          <p:cNvSpPr/>
+          <p:nvPr/>
+        </p:nvSpPr>
+        <p:spPr>
+          <a:xfrm>
+            <a:off x="640080" y="4983480"/>
+            <a:ext cx="457200" cy="457200"/>
+          </a:xfrm>
+          <a:prstGeom prst="roundRect">
+            <a:avLst>
+              <a:gd name="adj" fmla="val 16000"/>
+            </a:avLst>
+          </a:prstGeom>
+          <a:solidFill>
+            <a:srgbClr val="B9852F"/>
+          </a:solidFill>
+          <a:ln/>
+        </p:spPr>
+      </p:sp>
+      <p:sp>
+        <p:nvSpPr>
+          <p:cNvPr id="13" name="Text 11"/>
+          <p:cNvSpPr/>
+          <p:nvPr/>
+        </p:nvSpPr>
+        <p:spPr>
+          <a:xfrm>
+            <a:off x="640080" y="4983480"/>
+            <a:ext cx="457200" cy="457200"/>
+          </a:xfrm>
+          <a:prstGeom prst="rect">
+            <a:avLst/>
+          </a:prstGeom>
+          <a:noFill/>
+          <a:ln/>
+        </p:spPr>
+        <p:txBody>
+          <a:bodyPr wrap="square" rtlCol="0" anchor="ctr"/>
+          <a:lstStyle/>
+          <a:p>
+            <a:pPr algn="ctr" indent="0" marL="0">
+              <a:buNone/>
+            </a:pPr>
+            <a:r>
+              <a:rPr lang="en-US" sz="2000" b="1" dirty="0">
+                <a:solidFill>
+                  <a:srgbClr val="FFFFFF"/>
+                </a:solidFill>
+                <a:latin typeface="Cambria" pitchFamily="34" charset="0"/>
+                <a:ea typeface="Cambria" pitchFamily="34" charset="-122"/>
+                <a:cs typeface="Cambria" pitchFamily="34" charset="-120"/>
+              </a:rPr>
+              <a:t>3</a:t>
+            </a:r>
+            <a:endParaRPr lang="en-US" sz="2000" dirty="0"/>
+          </a:p>
+        </p:txBody>
+      </p:sp>
+      <p:sp>
+        <p:nvSpPr>
+          <p:cNvPr id="14" name="Text 12"/>
+          <p:cNvSpPr/>
+          <p:nvPr/>
+        </p:nvSpPr>
+        <p:spPr>
+          <a:xfrm>
+            <a:off x="1371600" y="4946904"/>
+            <a:ext cx="10332720" cy="411480"/>
+          </a:xfrm>
+          <a:prstGeom prst="rect">
+            <a:avLst/>
+          </a:prstGeom>
+          <a:noFill/>
+          <a:ln/>
+        </p:spPr>
+        <p:txBody>
+          <a:bodyPr wrap="square" rtlCol="0" anchor="ctr"/>
+          <a:lstStyle/>
+          <a:p>
+            <a:pPr indent="0" marL="0">
+              <a:buNone/>
+            </a:pPr>
+            <a:r>
+              <a:rPr lang="en-US" sz="1900" b="1" dirty="0">
+                <a:solidFill>
+                  <a:srgbClr val="B9852F"/>
+                </a:solidFill>
+                <a:latin typeface="Cambria" pitchFamily="34" charset="0"/>
+                <a:ea typeface="Cambria" pitchFamily="34" charset="-122"/>
+                <a:cs typeface="Cambria" pitchFamily="34" charset="-120"/>
+              </a:rPr>
+              <a:t>Images are culture too</a:t>
+            </a:r>
+            <a:endParaRPr lang="en-US" sz="1900" dirty="0"/>
+          </a:p>
+        </p:txBody>
+      </p:sp>
+      <p:sp>
+        <p:nvSpPr>
+          <p:cNvPr id="15" name="Text 13"/>
+          <p:cNvSpPr/>
+          <p:nvPr/>
+        </p:nvSpPr>
+        <p:spPr>
+          <a:xfrm>
+            <a:off x="1371600" y="5367528"/>
+            <a:ext cx="10332720" cy="914400"/>
+          </a:xfrm>
+          <a:prstGeom prst="rect">
+            <a:avLst/>
+          </a:prstGeom>
+          <a:noFill/>
+          <a:ln/>
+        </p:spPr>
+        <p:txBody>
+          <a:bodyPr wrap="square" rtlCol="0" anchor="t">
+            <a:spAutoFit/>
+          </a:bodyPr>
+          <a:lstStyle/>
+          <a:p>
+            <a:pPr indent="0" marL="0">
+              <a:lnSpc>
+                <a:spcPct val="112000"/>
+              </a:lnSpc>
+              <a:buNone/>
+            </a:pPr>
+            <a:r>
+              <a:rPr lang="en-US" sz="1450" dirty="0">
+                <a:solidFill>
+                  <a:srgbClr val="1A1A1A"/>
+                </a:solidFill>
+                <a:latin typeface="Calibri" pitchFamily="34" charset="0"/>
+                <a:ea typeface="Calibri" pitchFamily="34" charset="-122"/>
+                <a:cs typeface="Calibri" pitchFamily="34" charset="-120"/>
+              </a:rPr>
+              <a:t>A picture is numbers: you counted pixels on day one, and images continue as a co-equal corpus through all ten weeks.</a:t>
+            </a:r>
+            <a:endParaRPr lang="en-US" sz="1450" dirty="0"/>
+          </a:p>
+        </p:txBody>
+      </p:sp>
+    </p:spTree>
+  </p:cSld>
+  <p:clrMapOvr>
+    <a:masterClrMapping/>
+  </p:clrMapOvr>
+</p:sld>
+</file>
+
+<file path=ppt/slides/slide14.xml><?xml version="1.0" encoding="utf-8"?>
+<p:sld xmlns:a="http://schemas.openxmlformats.org/drawingml/2006/main" xmlns:r="http://schemas.openxmlformats.org/officeDocument/2006/relationships" xmlns:p="http://schemas.openxmlformats.org/presentationml/2006/main">
+  <p:cSld name="Slide 14">
     <p:bg>
       <p:bgPr>
         <a:solidFill>
@@ -5330,7 +6006,7 @@
                 <a:ea typeface="Cambria" pitchFamily="34" charset="-122"/>
                 <a:cs typeface="Cambria" pitchFamily="34" charset="-120"/>
               </a:rPr>
-              <a:t>Culture is already data</a:t>
+              <a:t>Why this course: the stakes</a:t>
             </a:r>
             <a:endParaRPr lang="en-US" sz="3000" dirty="0"/>
           </a:p>
@@ -5394,7 +6070,7 @@
                 <a:ea typeface="Calibri" pitchFamily="34" charset="-122"/>
                 <a:cs typeface="Calibri" pitchFamily="34" charset="-120"/>
               </a:rPr>
-              <a:t>Spotify counts your listening; the For You feed is a model reading culture at scale; you are on the receiving end every day.</a:t>
+              <a:t>Machines already read culture at scale: the feed ranking what you see, the moderation filter, the model trained on scraped art and prose. That reading shapes which culture reaches you, and it happens without you.</a:t>
             </a:r>
             <a:endParaRPr lang="en-US" sz="1650" dirty="0"/>
           </a:p>
@@ -5458,7 +6134,7 @@
                 <a:ea typeface="Calibri" pitchFamily="34" charset="-122"/>
                 <a:cs typeface="Calibri" pitchFamily="34" charset="-120"/>
               </a:rPr>
-              <a:t>In ten weeks you run the same kind of reading yourself, on culture you choose.</a:t>
+              <a:t>Reading culture with machines produces real knowledge and real mistakes, and the two look identical until someone checks. Learning to check is the course.</a:t>
             </a:r>
             <a:endParaRPr lang="en-US" sz="1650" dirty="0"/>
           </a:p>
@@ -5522,7 +6198,7 @@
                 <a:ea typeface="Calibri" pitchFamily="34" charset="-122"/>
                 <a:cs typeface="Calibri" pitchFamily="34" charset="-120"/>
               </a:rPr>
-              <a:t>Today's corpus: 5,562 NYT wedding announcements, 1985-2014: whether the bride kept her name, and the couple's ages.</a:t>
+              <a:t>Ten weeks from now, you do the reading: a question you chose, a corpus you built, a published finding anyone can verify.</a:t>
             </a:r>
             <a:endParaRPr lang="en-US" sz="1650" dirty="0"/>
           </a:p>
@@ -5586,7 +6262,7 @@
                 <a:ea typeface="Calibri" pitchFamily="34" charset="-122"/>
                 <a:cs typeface="Calibri" pitchFamily="34" charset="-120"/>
               </a:rPr>
-              <a:t>The deliverable, shown now: a published web essay on top of a notebook anyone can run.</a:t>
+              <a:t>The whole method in one sentence: it is all counting and weighting, and you can learn to read both.</a:t>
             </a:r>
             <a:endParaRPr lang="en-US" sz="1650" dirty="0"/>
           </a:p>
@@ -5718,7 +6394,7 @@
                 <a:ea typeface="Cambria" pitchFamily="34" charset="-122"/>
                 <a:cs typeface="Cambria" pitchFamily="34" charset="-120"/>
               </a:rPr>
-              <a:t>Four words, used all term</a:t>
+              <a:t>What counting culture has found</a:t>
             </a:r>
             <a:endParaRPr lang="en-US" sz="3000" dirty="0"/>
           </a:p>
@@ -5753,7 +6429,7 @@
         <p:spPr>
           <a:xfrm>
             <a:off x="1097280" y="2240280"/>
-            <a:ext cx="10607040" cy="1017270"/>
+            <a:ext cx="10607040" cy="813816"/>
           </a:xfrm>
           <a:prstGeom prst="rect">
             <a:avLst/>
@@ -5774,7 +6450,7 @@
               <a:buNone/>
             </a:pPr>
             <a:r>
-              <a:rPr lang="en-US" sz="1650" dirty="0">
+              <a:rPr lang="en-US" sz="1500" dirty="0">
                 <a:solidFill>
                   <a:srgbClr val="1A1A1A"/>
                 </a:solidFill>
@@ -5782,9 +6458,9 @@
                 <a:ea typeface="Calibri" pitchFamily="34" charset="-122"/>
                 <a:cs typeface="Calibri" pitchFamily="34" charset="-120"/>
               </a:rPr>
-              <a:t>Corpus: the pile you study. 500 announcements, 2,000 screenplays, 10,000 album covers.</a:t>
-            </a:r>
-            <a:endParaRPr lang="en-US" sz="1650" dirty="0"/>
+              <a:t>In the stage directions of 2,000 film scripts: women snuggle, giggle, and sob; men strap, gallop, and kill. 85% of the screenwriters were men (The Pudding, 2017).</a:t>
+            </a:r>
+            <a:endParaRPr lang="en-US" sz="1500" dirty="0"/>
           </a:p>
         </p:txBody>
       </p:sp>
@@ -5796,7 +6472,7 @@
         </p:nvSpPr>
         <p:spPr>
           <a:xfrm>
-            <a:off x="640080" y="3348990"/>
+            <a:off x="640080" y="3145536"/>
             <a:ext cx="201168" cy="201168"/>
           </a:xfrm>
           <a:prstGeom prst="ellipse">
@@ -5816,8 +6492,8 @@
         </p:nvSpPr>
         <p:spPr>
           <a:xfrm>
-            <a:off x="1097280" y="3257550"/>
-            <a:ext cx="10607040" cy="1017270"/>
+            <a:off x="1097280" y="3054096"/>
+            <a:ext cx="10607040" cy="813816"/>
           </a:xfrm>
           <a:prstGeom prst="rect">
             <a:avLst/>
@@ -5838,7 +6514,7 @@
               <a:buNone/>
             </a:pPr>
             <a:r>
-              <a:rPr lang="en-US" sz="1650" dirty="0">
+              <a:rPr lang="en-US" sz="1500" dirty="0">
                 <a:solidFill>
                   <a:srgbClr val="1A1A1A"/>
                 </a:solidFill>
@@ -5846,9 +6522,9 @@
                 <a:ea typeface="Calibri" pitchFamily="34" charset="-122"/>
                 <a:cs typeface="Calibri" pitchFamily="34" charset="-120"/>
               </a:rPr>
-              <a:t>Method: the counting or weighting you run on the corpus.</a:t>
-            </a:r>
-            <a:endParaRPr lang="en-US" sz="1650" dirty="0"/>
+              <a:t>Across 17,000 Hot 100 songs, the biggest revolution in American pop was not the Beatles in 1964; it was hip-hop in 1991 (Mauch et al., 2015).</a:t>
+            </a:r>
+            <a:endParaRPr lang="en-US" sz="1500" dirty="0"/>
           </a:p>
         </p:txBody>
       </p:sp>
@@ -5860,7 +6536,7 @@
         </p:nvSpPr>
         <p:spPr>
           <a:xfrm>
-            <a:off x="640080" y="4366260"/>
+            <a:off x="640080" y="3959352"/>
             <a:ext cx="201168" cy="201168"/>
           </a:xfrm>
           <a:prstGeom prst="ellipse">
@@ -5880,8 +6556,8 @@
         </p:nvSpPr>
         <p:spPr>
           <a:xfrm>
-            <a:off x="1097280" y="4274820"/>
-            <a:ext cx="10607040" cy="1017270"/>
+            <a:off x="1097280" y="3867912"/>
+            <a:ext cx="10607040" cy="813816"/>
           </a:xfrm>
           <a:prstGeom prst="rect">
             <a:avLst/>
@@ -5902,7 +6578,7 @@
               <a:buNone/>
             </a:pPr>
             <a:r>
-              <a:rPr lang="en-US" sz="1650" dirty="0">
+              <a:rPr lang="en-US" sz="1500" dirty="0">
                 <a:solidFill>
                   <a:srgbClr val="1A1A1A"/>
                 </a:solidFill>
@@ -5910,9 +6586,9 @@
                 <a:ea typeface="Calibri" pitchFamily="34" charset="-122"/>
                 <a:cs typeface="Calibri" pitchFamily="34" charset="-120"/>
               </a:rPr>
-              <a:t>Model: any simplification that turns culture into numbers. A word count is already one.</a:t>
-            </a:r>
-            <a:endParaRPr lang="en-US" sz="1650" dirty="0"/>
+              <a:t>Counting small words like 'the' and 'of' unmasked Robert Galbraith as J.K. Rowling within days (Juola, 2013).</a:t>
+            </a:r>
+            <a:endParaRPr lang="en-US" sz="1500" dirty="0"/>
           </a:p>
         </p:txBody>
       </p:sp>
@@ -5924,7 +6600,7 @@
         </p:nvSpPr>
         <p:spPr>
           <a:xfrm>
-            <a:off x="640080" y="5383530"/>
+            <a:off x="640080" y="4773168"/>
             <a:ext cx="201168" cy="201168"/>
           </a:xfrm>
           <a:prstGeom prst="ellipse">
@@ -5944,8 +6620,8 @@
         </p:nvSpPr>
         <p:spPr>
           <a:xfrm>
-            <a:off x="1097280" y="5292090"/>
-            <a:ext cx="10607040" cy="1017270"/>
+            <a:off x="1097280" y="4681728"/>
+            <a:ext cx="10607040" cy="813816"/>
           </a:xfrm>
           <a:prstGeom prst="rect">
             <a:avLst/>
@@ -5966,7 +6642,7 @@
               <a:buNone/>
             </a:pPr>
             <a:r>
-              <a:rPr lang="en-US" sz="1650" dirty="0">
+              <a:rPr lang="en-US" sz="1500" dirty="0">
                 <a:solidFill>
                   <a:srgbClr val="1A1A1A"/>
                 </a:solidFill>
@@ -5974,9 +6650,73 @@
                 <a:ea typeface="Calibri" pitchFamily="34" charset="-122"/>
                 <a:cs typeface="Calibri" pitchFamily="34" charset="-120"/>
               </a:rPr>
-              <a:t>Embedding: a few hundred numbers that place an item on a map of meaning. Week 5.</a:t>
-            </a:r>
-            <a:endParaRPr lang="en-US" sz="1650" dirty="0"/>
+              <a:t>A model trained on Google News completes 'man is to computer programmer as woman is to...' with 'homemaker' (Bolukbasi et al., 2016).</a:t>
+            </a:r>
+            <a:endParaRPr lang="en-US" sz="1500" dirty="0"/>
+          </a:p>
+        </p:txBody>
+      </p:sp>
+      <p:sp>
+        <p:nvSpPr>
+          <p:cNvPr id="13" name="Shape 11"/>
+          <p:cNvSpPr/>
+          <p:nvPr/>
+        </p:nvSpPr>
+        <p:spPr>
+          <a:xfrm>
+            <a:off x="640080" y="5586984"/>
+            <a:ext cx="201168" cy="201168"/>
+          </a:xfrm>
+          <a:prstGeom prst="ellipse">
+            <a:avLst/>
+          </a:prstGeom>
+          <a:solidFill>
+            <a:srgbClr val="3F6F5F"/>
+          </a:solidFill>
+          <a:ln/>
+        </p:spPr>
+      </p:sp>
+      <p:sp>
+        <p:nvSpPr>
+          <p:cNvPr id="14" name="Text 12"/>
+          <p:cNvSpPr/>
+          <p:nvPr/>
+        </p:nvSpPr>
+        <p:spPr>
+          <a:xfrm>
+            <a:off x="1097280" y="5495544"/>
+            <a:ext cx="10607040" cy="813816"/>
+          </a:xfrm>
+          <a:prstGeom prst="rect">
+            <a:avLst/>
+          </a:prstGeom>
+          <a:noFill/>
+          <a:ln/>
+        </p:spPr>
+        <p:txBody>
+          <a:bodyPr wrap="square" rtlCol="0" anchor="t">
+            <a:spAutoFit/>
+          </a:bodyPr>
+          <a:lstStyle/>
+          <a:p>
+            <a:pPr indent="0" marL="0">
+              <a:lnSpc>
+                <a:spcPct val="112000"/>
+              </a:lnSpc>
+              <a:buNone/>
+            </a:pPr>
+            <a:r>
+              <a:rPr lang="en-US" sz="1500" dirty="0">
+                <a:solidFill>
+                  <a:srgbClr val="1A1A1A"/>
+                </a:solidFill>
+                <a:latin typeface="Calibri" pitchFamily="34" charset="0"/>
+                <a:ea typeface="Calibri" pitchFamily="34" charset="-122"/>
+                <a:cs typeface="Calibri" pitchFamily="34" charset="-120"/>
+              </a:rPr>
+              <a:t>An AI portrait sold at Christie's for $432,500; the training data was other people's paintings (2018). Every one of these is a count, and every one has arguable choices. Both halves are the course.</a:t>
+            </a:r>
+            <a:endParaRPr lang="en-US" sz="1500" dirty="0"/>
           </a:p>
         </p:txBody>
       </p:sp>
@@ -6106,7 +6846,7 @@
                 <a:ea typeface="Cambria" pitchFamily="34" charset="-122"/>
                 <a:cs typeface="Cambria" pitchFamily="34" charset="-120"/>
               </a:rPr>
-              <a:t>The Drive routine (every week, without exception)</a:t>
+              <a:t>Four words, used all term</a:t>
             </a:r>
             <a:endParaRPr lang="en-US" sz="3000" dirty="0"/>
           </a:p>
@@ -6170,7 +6910,7 @@
                 <a:ea typeface="Calibri" pitchFamily="34" charset="-122"/>
                 <a:cs typeface="Calibri" pitchFamily="34" charset="-120"/>
               </a:rPr>
-              <a:t>Colab wipes its machine when you idle. Your mounted Drive folder is what survives.</a:t>
+              <a:t>Corpus: the pile you study. 500 announcements, 2,000 screenplays, 10,000 album covers.</a:t>
             </a:r>
             <a:endParaRPr lang="en-US" sz="1650" dirty="0"/>
           </a:p>
@@ -6234,7 +6974,7 @@
                 <a:ea typeface="Calibri" pitchFamily="34" charset="-122"/>
                 <a:cs typeface="Calibri" pitchFamily="34" charset="-120"/>
               </a:rPr>
-              <a:t>Copy the notebook to Drive, mount Drive, save everything to the one project folder.</a:t>
+              <a:t>Method: the counting or weighting you run on the corpus.</a:t>
             </a:r>
             <a:endParaRPr lang="en-US" sz="1650" dirty="0"/>
           </a:p>
@@ -6298,7 +7038,7 @@
                 <a:ea typeface="Calibri" pitchFamily="34" charset="-122"/>
                 <a:cs typeface="Calibri" pitchFamily="34" charset="-120"/>
               </a:rPr>
-              <a:t>Your Week-4 corpus has to be alive in Week 5. This ritual is how.</a:t>
+              <a:t>Model: any simplification that turns culture into numbers. A word count is already one.</a:t>
             </a:r>
             <a:endParaRPr lang="en-US" sz="1650" dirty="0"/>
           </a:p>
@@ -6362,7 +7102,7 @@
                 <a:ea typeface="Calibri" pitchFamily="34" charset="-122"/>
                 <a:cs typeface="Calibri" pitchFamily="34" charset="-120"/>
               </a:rPr>
-              <a:t>Gemini key goes in Colab Secrets. Never pasted into code.</a:t>
+              <a:t>Embedding: a few hundred numbers that place an item on a map of meaning. Week 5.</a:t>
             </a:r>
             <a:endParaRPr lang="en-US" sz="1650" dirty="0"/>
           </a:p>
@@ -6494,7 +7234,7 @@
                 <a:ea typeface="Cambria" pitchFamily="34" charset="-122"/>
                 <a:cs typeface="Cambria" pitchFamily="34" charset="-120"/>
               </a:rPr>
-              <a:t>When code fails (it will, today, deliberately)</a:t>
+              <a:t>The Drive routine (every week, without exception)</a:t>
             </a:r>
             <a:endParaRPr lang="en-US" sz="3000" dirty="0"/>
           </a:p>
@@ -6558,7 +7298,7 @@
                 <a:ea typeface="Calibri" pitchFamily="34" charset="-122"/>
                 <a:cs typeface="Calibri" pitchFamily="34" charset="-120"/>
               </a:rPr>
-              <a:t>Read the last line of the traceback first. It names the problem.</a:t>
+              <a:t>Colab wipes its machine when you idle. Your mounted Drive folder is what survives.</a:t>
             </a:r>
             <a:endParaRPr lang="en-US" sz="1650" dirty="0"/>
           </a:p>
@@ -6622,7 +7362,7 @@
                 <a:ea typeface="Calibri" pitchFamily="34" charset="-122"/>
                 <a:cs typeface="Calibri" pitchFamily="34" charset="-120"/>
               </a:rPr>
-              <a:t>Paste it to the AI: "this errored, fix it and tell me what went wrong."</a:t>
+              <a:t>Copy the notebook to Drive, mount Drive, save everything to the one project folder.</a:t>
             </a:r>
             <a:endParaRPr lang="en-US" sz="1650" dirty="0"/>
           </a:p>
@@ -6686,7 +7426,7 @@
                 <a:ea typeface="Calibri" pitchFamily="34" charset="-122"/>
                 <a:cs typeface="Calibri" pitchFamily="34" charset="-120"/>
               </a:rPr>
-              <a:t>Try twice, then ask a human. In that order.</a:t>
+              <a:t>Your Week-4 corpus has to be alive in Week 5. This ritual is how.</a:t>
             </a:r>
             <a:endParaRPr lang="en-US" sz="1650" dirty="0"/>
           </a:p>
@@ -6750,7 +7490,7 @@
                 <a:ea typeface="Calibri" pitchFamily="34" charset="-122"/>
                 <a:cs typeface="Calibri" pitchFamily="34" charset="-120"/>
               </a:rPr>
-              <a:t>Keep the cheat sheet at hand. No one memorizes error messages; everyone reads them.</a:t>
+              <a:t>Gemini key goes in Colab Secrets. Never pasted into code.</a:t>
             </a:r>
             <a:endParaRPr lang="en-US" sz="1650" dirty="0"/>
           </a:p>
@@ -6882,7 +7622,7 @@
                 <a:ea typeface="Cambria" pitchFamily="34" charset="-122"/>
                 <a:cs typeface="Cambria" pitchFamily="34" charset="-120"/>
               </a:rPr>
-              <a:t>Counting, three shapes</a:t>
+              <a:t>When code fails (it will, today, deliberately)</a:t>
             </a:r>
             <a:endParaRPr lang="en-US" sz="3000" dirty="0"/>
           </a:p>
@@ -6946,7 +7686,7 @@
                 <a:ea typeface="Calibri" pitchFamily="34" charset="-122"/>
                 <a:cs typeface="Calibri" pitchFamily="34" charset="-120"/>
               </a:rPr>
-              <a:t>Rows: what share of brides kept their name, year by year. One groupby, one chart.</a:t>
+              <a:t>Read the last line of the traceback first. It names the problem.</a:t>
             </a:r>
             <a:endParaRPr lang="en-US" sz="1650" dirty="0"/>
           </a:p>
@@ -7010,7 +7750,7 @@
                 <a:ea typeface="Calibri" pitchFamily="34" charset="-122"/>
                 <a:cs typeface="Calibri" pitchFamily="34" charset="-120"/>
               </a:rPr>
-              <a:t>Words: the top words of a lyric are "the, and, you" until you remove stop-words. That removal is your first modeling choice.</a:t>
+              <a:t>Paste it to the AI: "this errored, fix it and tell me what went wrong."</a:t>
             </a:r>
             <a:endParaRPr lang="en-US" sz="1650" dirty="0"/>
           </a:p>
@@ -7074,7 +7814,7 @@
                 <a:ea typeface="Calibri" pitchFamily="34" charset="-122"/>
                 <a:cs typeface="Calibri" pitchFamily="34" charset="-120"/>
               </a:rPr>
-              <a:t>Pixels: rank 200 Met thumbnails darkest to brightest from average luminance.</a:t>
+              <a:t>Try twice, then ask a human. In that order.</a:t>
             </a:r>
             <a:endParaRPr lang="en-US" sz="1650" dirty="0"/>
           </a:p>
@@ -7138,7 +7878,7 @@
                 <a:ea typeface="Calibri" pitchFamily="34" charset="-122"/>
                 <a:cs typeface="Calibri" pitchFamily="34" charset="-120"/>
               </a:rPr>
-              <a:t>The same technique three times, each containing a decision.</a:t>
+              <a:t>Keep the cheat sheet at hand. No one memorizes error messages; everyone reads them.</a:t>
             </a:r>
             <a:endParaRPr lang="en-US" sz="1650" dirty="0"/>
           </a:p>
@@ -7178,14 +7918,34 @@
       </p:grpSpPr>
       <p:sp>
         <p:nvSpPr>
-          <p:cNvPr id="2" name="Text 0"/>
-          <p:cNvSpPr/>
-          <p:nvPr/>
-        </p:nvSpPr>
-        <p:spPr>
-          <a:xfrm>
-            <a:off x="640080" y="731520"/>
-            <a:ext cx="10058400" cy="731520"/>
+          <p:cNvPr id="2" name="Shape 0"/>
+          <p:cNvSpPr/>
+          <p:nvPr/>
+        </p:nvSpPr>
+        <p:spPr>
+          <a:xfrm>
+            <a:off x="0" y="0"/>
+            <a:ext cx="164592" cy="6858000"/>
+          </a:xfrm>
+          <a:prstGeom prst="rect">
+            <a:avLst/>
+          </a:prstGeom>
+          <a:solidFill>
+            <a:srgbClr val="B9852F"/>
+          </a:solidFill>
+          <a:ln/>
+        </p:spPr>
+      </p:sp>
+      <p:sp>
+        <p:nvSpPr>
+          <p:cNvPr id="3" name="Text 1"/>
+          <p:cNvSpPr/>
+          <p:nvPr/>
+        </p:nvSpPr>
+        <p:spPr>
+          <a:xfrm>
+            <a:off x="640080" y="640080"/>
+            <a:ext cx="10058400" cy="320040"/>
           </a:xfrm>
           <a:prstGeom prst="rect">
             <a:avLst/>
@@ -7195,6 +7955,47 @@
         </p:spPr>
         <p:txBody>
           <a:bodyPr wrap="square" rtlCol="0" anchor="ctr"/>
+          <a:lstStyle/>
+          <a:p>
+            <a:pPr indent="0" marL="0">
+              <a:buNone/>
+            </a:pPr>
+            <a:r>
+              <a:rPr lang="en-US" sz="1200" b="1" spc="300" kern="0" dirty="0">
+                <a:solidFill>
+                  <a:srgbClr val="B9852F"/>
+                </a:solidFill>
+                <a:latin typeface="Calibri" pitchFamily="34" charset="0"/>
+                <a:ea typeface="Calibri" pitchFamily="34" charset="-122"/>
+                <a:cs typeface="Calibri" pitchFamily="34" charset="-120"/>
+              </a:rPr>
+              <a:t>WEEK 1 · KEY POINTS</a:t>
+            </a:r>
+            <a:endParaRPr lang="en-US" sz="1200" dirty="0"/>
+          </a:p>
+        </p:txBody>
+      </p:sp>
+      <p:sp>
+        <p:nvSpPr>
+          <p:cNvPr id="4" name="Text 2"/>
+          <p:cNvSpPr/>
+          <p:nvPr/>
+        </p:nvSpPr>
+        <p:spPr>
+          <a:xfrm>
+            <a:off x="640080" y="1005840"/>
+            <a:ext cx="10881360" cy="914400"/>
+          </a:xfrm>
+          <a:prstGeom prst="rect">
+            <a:avLst/>
+          </a:prstGeom>
+          <a:noFill/>
+          <a:ln/>
+        </p:spPr>
+        <p:txBody>
+          <a:bodyPr wrap="square" rtlCol="0" anchor="t">
+            <a:spAutoFit/>
+          </a:bodyPr>
           <a:lstStyle/>
           <a:p>
             <a:pPr indent="0" marL="0">
@@ -7209,7 +8010,7 @@
                 <a:ea typeface="Cambria" pitchFamily="34" charset="-122"/>
                 <a:cs typeface="Cambria" pitchFamily="34" charset="-120"/>
               </a:rPr>
-              <a:t>Three modes today</a:t>
+              <a:t>Counting, three shapes</a:t>
             </a:r>
             <a:endParaRPr lang="en-US" sz="3000" dirty="0"/>
           </a:p>
@@ -7217,134 +8018,98 @@
       </p:sp>
       <p:sp>
         <p:nvSpPr>
-          <p:cNvPr id="3" name="Text 1"/>
-          <p:cNvSpPr/>
-          <p:nvPr/>
-        </p:nvSpPr>
-        <p:spPr>
-          <a:xfrm>
-            <a:off x="640080" y="1417320"/>
-            <a:ext cx="10058400" cy="365760"/>
-          </a:xfrm>
-          <a:prstGeom prst="rect">
-            <a:avLst/>
-          </a:prstGeom>
-          <a:noFill/>
-          <a:ln/>
-        </p:spPr>
-        <p:txBody>
-          <a:bodyPr wrap="square" rtlCol="0" anchor="ctr"/>
-          <a:lstStyle/>
-          <a:p>
-            <a:pPr indent="0" marL="0">
-              <a:buNone/>
-            </a:pPr>
-            <a:r>
-              <a:rPr lang="en-US" sz="1400" i="1" dirty="0">
-                <a:solidFill>
-                  <a:srgbClr val="6B6B63"/>
+          <p:cNvPr id="5" name="Shape 3"/>
+          <p:cNvSpPr/>
+          <p:nvPr/>
+        </p:nvSpPr>
+        <p:spPr>
+          <a:xfrm>
+            <a:off x="640080" y="2331720"/>
+            <a:ext cx="201168" cy="201168"/>
+          </a:xfrm>
+          <a:prstGeom prst="ellipse">
+            <a:avLst/>
+          </a:prstGeom>
+          <a:solidFill>
+            <a:srgbClr val="7A3B2E"/>
+          </a:solidFill>
+          <a:ln/>
+        </p:spPr>
+      </p:sp>
+      <p:sp>
+        <p:nvSpPr>
+          <p:cNvPr id="6" name="Text 4"/>
+          <p:cNvSpPr/>
+          <p:nvPr/>
+        </p:nvSpPr>
+        <p:spPr>
+          <a:xfrm>
+            <a:off x="1097280" y="2240280"/>
+            <a:ext cx="10607040" cy="1017270"/>
+          </a:xfrm>
+          <a:prstGeom prst="rect">
+            <a:avLst/>
+          </a:prstGeom>
+          <a:noFill/>
+          <a:ln/>
+        </p:spPr>
+        <p:txBody>
+          <a:bodyPr wrap="square" rtlCol="0" anchor="t">
+            <a:spAutoFit/>
+          </a:bodyPr>
+          <a:lstStyle/>
+          <a:p>
+            <a:pPr indent="0" marL="0">
+              <a:lnSpc>
+                <a:spcPct val="112000"/>
+              </a:lnSpc>
+              <a:buNone/>
+            </a:pPr>
+            <a:r>
+              <a:rPr lang="en-US" sz="1650" dirty="0">
+                <a:solidFill>
+                  <a:srgbClr val="1A1A1A"/>
                 </a:solidFill>
                 <a:latin typeface="Calibri" pitchFamily="34" charset="0"/>
                 <a:ea typeface="Calibri" pitchFamily="34" charset="-122"/>
                 <a:cs typeface="Calibri" pitchFamily="34" charset="-120"/>
               </a:rPr>
-              <a:t>about a third of the session each</a:t>
-            </a:r>
-            <a:endParaRPr lang="en-US" sz="1400" dirty="0"/>
-          </a:p>
-        </p:txBody>
-      </p:sp>
-      <p:sp>
-        <p:nvSpPr>
-          <p:cNvPr id="4" name="Shape 2"/>
-          <p:cNvSpPr/>
-          <p:nvPr/>
-        </p:nvSpPr>
-        <p:spPr>
-          <a:xfrm>
-            <a:off x="640080" y="2194560"/>
-            <a:ext cx="3383280" cy="3291840"/>
-          </a:xfrm>
-          <a:prstGeom prst="roundRect">
-            <a:avLst>
-              <a:gd name="adj" fmla="val 3333"/>
-            </a:avLst>
-          </a:prstGeom>
-          <a:solidFill>
-            <a:srgbClr val="F4EEE8"/>
-          </a:solidFill>
-          <a:ln/>
-        </p:spPr>
-      </p:sp>
-      <p:sp>
-        <p:nvSpPr>
-          <p:cNvPr id="5" name="Shape 3"/>
-          <p:cNvSpPr/>
-          <p:nvPr/>
-        </p:nvSpPr>
-        <p:spPr>
-          <a:xfrm>
-            <a:off x="1051560" y="2606040"/>
-            <a:ext cx="548640" cy="548640"/>
+              <a:t>Rows: what share of brides kept their name, year by year. One groupby, one chart.</a:t>
+            </a:r>
+            <a:endParaRPr lang="en-US" sz="1650" dirty="0"/>
+          </a:p>
+        </p:txBody>
+      </p:sp>
+      <p:sp>
+        <p:nvSpPr>
+          <p:cNvPr id="7" name="Shape 5"/>
+          <p:cNvSpPr/>
+          <p:nvPr/>
+        </p:nvSpPr>
+        <p:spPr>
+          <a:xfrm>
+            <a:off x="640080" y="3348990"/>
+            <a:ext cx="201168" cy="201168"/>
           </a:xfrm>
           <a:prstGeom prst="ellipse">
             <a:avLst/>
           </a:prstGeom>
           <a:solidFill>
-            <a:srgbClr val="7A3B2E"/>
-          </a:solidFill>
-          <a:ln/>
-        </p:spPr>
-      </p:sp>
-      <p:sp>
-        <p:nvSpPr>
-          <p:cNvPr id="6" name="Text 4"/>
-          <p:cNvSpPr/>
-          <p:nvPr/>
-        </p:nvSpPr>
-        <p:spPr>
-          <a:xfrm>
-            <a:off x="1005840" y="3383280"/>
-            <a:ext cx="2651760" cy="548640"/>
-          </a:xfrm>
-          <a:prstGeom prst="rect">
-            <a:avLst/>
-          </a:prstGeom>
-          <a:noFill/>
-          <a:ln/>
-        </p:spPr>
-        <p:txBody>
-          <a:bodyPr wrap="square" rtlCol="0" anchor="ctr"/>
-          <a:lstStyle/>
-          <a:p>
-            <a:pPr indent="0" marL="0">
-              <a:buNone/>
-            </a:pPr>
-            <a:r>
-              <a:rPr lang="en-US" sz="2100" b="1" dirty="0">
-                <a:solidFill>
-                  <a:srgbClr val="1A1A1A"/>
-                </a:solidFill>
-                <a:latin typeface="Cambria" pitchFamily="34" charset="0"/>
-                <a:ea typeface="Cambria" pitchFamily="34" charset="-122"/>
-                <a:cs typeface="Cambria" pitchFamily="34" charset="-120"/>
-              </a:rPr>
-              <a:t>Lecture / demo</a:t>
-            </a:r>
-            <a:endParaRPr lang="en-US" sz="2100" dirty="0"/>
-          </a:p>
-        </p:txBody>
-      </p:sp>
-      <p:sp>
-        <p:nvSpPr>
-          <p:cNvPr id="7" name="Text 5"/>
-          <p:cNvSpPr/>
-          <p:nvPr/>
-        </p:nvSpPr>
-        <p:spPr>
-          <a:xfrm>
-            <a:off x="1005840" y="3977640"/>
-            <a:ext cx="2651760" cy="1371600"/>
+            <a:srgbClr val="3F6F5F"/>
+          </a:solidFill>
+          <a:ln/>
+        </p:spPr>
+      </p:sp>
+      <p:sp>
+        <p:nvSpPr>
+          <p:cNvPr id="8" name="Text 6"/>
+          <p:cNvSpPr/>
+          <p:nvPr/>
+        </p:nvSpPr>
+        <p:spPr>
+          <a:xfrm>
+            <a:off x="1097280" y="3257550"/>
+            <a:ext cx="10607040" cy="1017270"/>
           </a:xfrm>
           <a:prstGeom prst="rect">
             <a:avLst/>
@@ -7360,12 +8125,12 @@
           <a:p>
             <a:pPr indent="0" marL="0">
               <a:lnSpc>
-                <a:spcPct val="115000"/>
+                <a:spcPct val="112000"/>
               </a:lnSpc>
               <a:buNone/>
             </a:pPr>
             <a:r>
-              <a:rPr lang="en-US" sz="1500" dirty="0">
+              <a:rPr lang="en-US" sz="1650" dirty="0">
                 <a:solidFill>
                   <a:srgbClr val="1A1A1A"/>
                 </a:solidFill>
@@ -7373,33 +8138,11 @@
                 <a:ea typeface="Calibri" pitchFamily="34" charset="-122"/>
                 <a:cs typeface="Calibri" pitchFamily="34" charset="-120"/>
               </a:rPr>
-              <a:t>Counting: rows, words, pixels</a:t>
-            </a:r>
-            <a:endParaRPr lang="en-US" sz="1500" dirty="0"/>
-          </a:p>
-        </p:txBody>
-      </p:sp>
-      <p:sp>
-        <p:nvSpPr>
-          <p:cNvPr id="8" name="Shape 6"/>
-          <p:cNvSpPr/>
-          <p:nvPr/>
-        </p:nvSpPr>
-        <p:spPr>
-          <a:xfrm>
-            <a:off x="4526280" y="2194560"/>
-            <a:ext cx="3383280" cy="3291840"/>
-          </a:xfrm>
-          <a:prstGeom prst="roundRect">
-            <a:avLst>
-              <a:gd name="adj" fmla="val 3333"/>
-            </a:avLst>
-          </a:prstGeom>
-          <a:solidFill>
-            <a:srgbClr val="F4EEE8"/>
-          </a:solidFill>
-          <a:ln/>
-        </p:spPr>
+              <a:t>Words: the top words of a lyric are "the, and, you" until you remove stop-words. That removal is your first modeling choice.</a:t>
+            </a:r>
+            <a:endParaRPr lang="en-US" sz="1650" dirty="0"/>
+          </a:p>
+        </p:txBody>
       </p:sp>
       <p:sp>
         <p:nvSpPr>
@@ -7409,14 +8152,14 @@
         </p:nvSpPr>
         <p:spPr>
           <a:xfrm>
-            <a:off x="4937760" y="2606040"/>
-            <a:ext cx="548640" cy="548640"/>
+            <a:off x="640080" y="4366260"/>
+            <a:ext cx="201168" cy="201168"/>
           </a:xfrm>
           <a:prstGeom prst="ellipse">
             <a:avLst/>
           </a:prstGeom>
           <a:solidFill>
-            <a:srgbClr val="3F6F5F"/>
+            <a:srgbClr val="B9852F"/>
           </a:solidFill>
           <a:ln/>
         </p:spPr>
@@ -7429,47 +8172,8 @@
         </p:nvSpPr>
         <p:spPr>
           <a:xfrm>
-            <a:off x="4892040" y="3383280"/>
-            <a:ext cx="2651760" cy="548640"/>
-          </a:xfrm>
-          <a:prstGeom prst="rect">
-            <a:avLst/>
-          </a:prstGeom>
-          <a:noFill/>
-          <a:ln/>
-        </p:spPr>
-        <p:txBody>
-          <a:bodyPr wrap="square" rtlCol="0" anchor="ctr"/>
-          <a:lstStyle/>
-          <a:p>
-            <a:pPr indent="0" marL="0">
-              <a:buNone/>
-            </a:pPr>
-            <a:r>
-              <a:rPr lang="en-US" sz="2100" b="1" dirty="0">
-                <a:solidFill>
-                  <a:srgbClr val="1A1A1A"/>
-                </a:solidFill>
-                <a:latin typeface="Cambria" pitchFamily="34" charset="0"/>
-                <a:ea typeface="Cambria" pitchFamily="34" charset="-122"/>
-                <a:cs typeface="Cambria" pitchFamily="34" charset="-120"/>
-              </a:rPr>
-              <a:t>Workshop</a:t>
-            </a:r>
-            <a:endParaRPr lang="en-US" sz="2100" dirty="0"/>
-          </a:p>
-        </p:txBody>
-      </p:sp>
-      <p:sp>
-        <p:nvSpPr>
-          <p:cNvPr id="11" name="Text 9"/>
-          <p:cNvSpPr/>
-          <p:nvPr/>
-        </p:nvSpPr>
-        <p:spPr>
-          <a:xfrm>
-            <a:off x="4892040" y="3977640"/>
-            <a:ext cx="2651760" cy="1371600"/>
+            <a:off x="1097280" y="4274820"/>
+            <a:ext cx="10607040" cy="1017270"/>
           </a:xfrm>
           <a:prstGeom prst="rect">
             <a:avLst/>
@@ -7485,12 +8189,12 @@
           <a:p>
             <a:pPr indent="0" marL="0">
               <a:lnSpc>
-                <a:spcPct val="115000"/>
+                <a:spcPct val="112000"/>
               </a:lnSpc>
               <a:buNone/>
             </a:pPr>
             <a:r>
-              <a:rPr lang="en-US" sz="1500" dirty="0">
+              <a:rPr lang="en-US" sz="1650" dirty="0">
                 <a:solidFill>
                   <a:srgbClr val="1A1A1A"/>
                 </a:solidFill>
@@ -7498,103 +8202,42 @@
                 <a:ea typeface="Calibri" pitchFamily="34" charset="-122"/>
                 <a:cs typeface="Calibri" pitchFamily="34" charset="-120"/>
               </a:rPr>
-              <a:t>Build hands-on on your own data.</a:t>
-            </a:r>
-            <a:endParaRPr lang="en-US" sz="1500" dirty="0"/>
-          </a:p>
-        </p:txBody>
-      </p:sp>
-      <p:sp>
-        <p:nvSpPr>
-          <p:cNvPr id="12" name="Shape 10"/>
-          <p:cNvSpPr/>
-          <p:nvPr/>
-        </p:nvSpPr>
-        <p:spPr>
-          <a:xfrm>
-            <a:off x="8412480" y="2194560"/>
-            <a:ext cx="3383280" cy="3291840"/>
-          </a:xfrm>
-          <a:prstGeom prst="roundRect">
-            <a:avLst>
-              <a:gd name="adj" fmla="val 3333"/>
-            </a:avLst>
-          </a:prstGeom>
-          <a:solidFill>
-            <a:srgbClr val="F4EEE8"/>
-          </a:solidFill>
-          <a:ln/>
-        </p:spPr>
-      </p:sp>
-      <p:sp>
-        <p:nvSpPr>
-          <p:cNvPr id="13" name="Shape 11"/>
-          <p:cNvSpPr/>
-          <p:nvPr/>
-        </p:nvSpPr>
-        <p:spPr>
-          <a:xfrm>
-            <a:off x="8823960" y="2606040"/>
-            <a:ext cx="548640" cy="548640"/>
+              <a:t>Pixels: rank 200 Met thumbnails darkest to brightest from average luminance.</a:t>
+            </a:r>
+            <a:endParaRPr lang="en-US" sz="1650" dirty="0"/>
+          </a:p>
+        </p:txBody>
+      </p:sp>
+      <p:sp>
+        <p:nvSpPr>
+          <p:cNvPr id="11" name="Shape 9"/>
+          <p:cNvSpPr/>
+          <p:nvPr/>
+        </p:nvSpPr>
+        <p:spPr>
+          <a:xfrm>
+            <a:off x="640080" y="5383530"/>
+            <a:ext cx="201168" cy="201168"/>
           </a:xfrm>
           <a:prstGeom prst="ellipse">
             <a:avLst/>
           </a:prstGeom>
           <a:solidFill>
-            <a:srgbClr val="B9852F"/>
-          </a:solidFill>
-          <a:ln/>
-        </p:spPr>
-      </p:sp>
-      <p:sp>
-        <p:nvSpPr>
-          <p:cNvPr id="14" name="Text 12"/>
-          <p:cNvSpPr/>
-          <p:nvPr/>
-        </p:nvSpPr>
-        <p:spPr>
-          <a:xfrm>
-            <a:off x="8778240" y="3383280"/>
-            <a:ext cx="2651760" cy="548640"/>
-          </a:xfrm>
-          <a:prstGeom prst="rect">
-            <a:avLst/>
-          </a:prstGeom>
-          <a:noFill/>
-          <a:ln/>
-        </p:spPr>
-        <p:txBody>
-          <a:bodyPr wrap="square" rtlCol="0" anchor="ctr"/>
-          <a:lstStyle/>
-          <a:p>
-            <a:pPr indent="0" marL="0">
-              <a:buNone/>
-            </a:pPr>
-            <a:r>
-              <a:rPr lang="en-US" sz="2100" b="1" dirty="0">
-                <a:solidFill>
-                  <a:srgbClr val="1A1A1A"/>
-                </a:solidFill>
-                <a:latin typeface="Cambria" pitchFamily="34" charset="0"/>
-                <a:ea typeface="Cambria" pitchFamily="34" charset="-122"/>
-                <a:cs typeface="Cambria" pitchFamily="34" charset="-120"/>
-              </a:rPr>
-              <a:t>Discussion</a:t>
-            </a:r>
-            <a:endParaRPr lang="en-US" sz="2100" dirty="0"/>
-          </a:p>
-        </p:txBody>
-      </p:sp>
-      <p:sp>
-        <p:nvSpPr>
-          <p:cNvPr id="15" name="Text 13"/>
-          <p:cNvSpPr/>
-          <p:nvPr/>
-        </p:nvSpPr>
-        <p:spPr>
-          <a:xfrm>
-            <a:off x="8778240" y="3977640"/>
-            <a:ext cx="2651760" cy="1371600"/>
+            <a:srgbClr val="7A3B2E"/>
+          </a:solidFill>
+          <a:ln/>
+        </p:spPr>
+      </p:sp>
+      <p:sp>
+        <p:nvSpPr>
+          <p:cNvPr id="12" name="Text 10"/>
+          <p:cNvSpPr/>
+          <p:nvPr/>
+        </p:nvSpPr>
+        <p:spPr>
+          <a:xfrm>
+            <a:off x="1097280" y="5292090"/>
+            <a:ext cx="10607040" cy="1017270"/>
           </a:xfrm>
           <a:prstGeom prst="rect">
             <a:avLst/>
@@ -7610,12 +8253,12 @@
           <a:p>
             <a:pPr indent="0" marL="0">
               <a:lnSpc>
-                <a:spcPct val="115000"/>
+                <a:spcPct val="112000"/>
               </a:lnSpc>
               <a:buNone/>
             </a:pPr>
             <a:r>
-              <a:rPr lang="en-US" sz="1500" dirty="0">
+              <a:rPr lang="en-US" sz="1650" dirty="0">
                 <a:solidFill>
                   <a:srgbClr val="1A1A1A"/>
                 </a:solidFill>
@@ -7623,9 +8266,9 @@
                 <a:ea typeface="Calibri" pitchFamily="34" charset="-122"/>
                 <a:cs typeface="Calibri" pitchFamily="34" charset="-120"/>
               </a:rPr>
-              <a:t>Interrogate the study, debate it, or critique each other's work.</a:t>
-            </a:r>
-            <a:endParaRPr lang="en-US" sz="1500" dirty="0"/>
+              <a:t>The same technique three times, each containing a decision.</a:t>
+            </a:r>
+            <a:endParaRPr lang="en-US" sz="1650" dirty="0"/>
           </a:p>
         </p:txBody>
       </p:sp>

--- a/slides/pptx/week-01.pptx
+++ b/slides/pptx/week-01.pptx
@@ -19,9 +19,10 @@
     <p:sldId id="267" r:id="rId13"/>
     <p:sldId id="268" r:id="rId14"/>
     <p:sldId id="269" r:id="rId15"/>
+    <p:sldId id="270" r:id="rId16"/>
   </p:sldIdLst>
   <p:notesMasterIdLst>
-    <p:notesMasterId r:id="rId16"/>
+    <p:notesMasterId r:id="rId17"/>
   </p:notesMasterIdLst>
   <p:sldSz cx="12191695" cy="6858000"/>
   <p:notesSz cx="6858000" cy="12191695"/>
@@ -997,6 +998,94 @@
 </p:notes>
 </file>
 
+<file path=ppt/notesSlides/notesSlide15.xml><?xml version="1.0" encoding="utf-8"?>
+<p:notes xmlns:a="http://schemas.openxmlformats.org/drawingml/2006/main" xmlns:r="http://schemas.openxmlformats.org/officeDocument/2006/relationships" xmlns:p="http://schemas.openxmlformats.org/presentationml/2006/main">
+  <p:cSld>
+    <p:spTree>
+      <p:nvGrpSpPr>
+        <p:cNvPr id="1" name=""/>
+        <p:cNvGrpSpPr/>
+        <p:nvPr/>
+      </p:nvGrpSpPr>
+      <p:grpSpPr>
+        <a:xfrm>
+          <a:off x="0" y="0"/>
+          <a:ext cx="0" cy="0"/>
+          <a:chOff x="0" y="0"/>
+          <a:chExt cx="0" cy="0"/>
+        </a:xfrm>
+      </p:grpSpPr>
+      <p:sp>
+        <p:nvSpPr>
+          <p:cNvPr id="2" name="Slide Image Placeholder 1"/>
+          <p:cNvSpPr>
+            <a:spLocks noGrp="1" noRot="1" noChangeAspect="1"/>
+          </p:cNvSpPr>
+          <p:nvPr>
+            <p:ph type="sldImg"/>
+          </p:nvPr>
+        </p:nvSpPr>
+        <p:spPr/>
+      </p:sp>
+      <p:sp>
+        <p:nvSpPr>
+          <p:cNvPr id="3" name="Notes Placeholder 2"/>
+          <p:cNvSpPr>
+            <a:spLocks noGrp="1"/>
+          </p:cNvSpPr>
+          <p:nvPr>
+            <p:ph type="body" idx="1"/>
+          </p:nvPr>
+        </p:nvSpPr>
+        <p:spPr/>
+        <p:txBody>
+          <a:bodyPr/>
+          <a:lstStyle/>
+          <a:p>
+            <a:r>
+              <a:rPr lang="en-US" dirty="0"/>
+              <a:t/>
+            </a:r>
+            <a:endParaRPr lang="en-US" dirty="0"/>
+          </a:p>
+        </p:txBody>
+      </p:sp>
+      <p:sp>
+        <p:nvSpPr>
+          <p:cNvPr id="4" name="Slide Number Placeholder 3"/>
+          <p:cNvSpPr>
+            <a:spLocks noGrp="1"/>
+          </p:cNvSpPr>
+          <p:nvPr>
+            <p:ph type="sldNum" sz="quarter" idx="10"/>
+          </p:nvPr>
+        </p:nvSpPr>
+        <p:spPr/>
+        <p:txBody>
+          <a:bodyPr/>
+          <a:lstStyle/>
+          <a:p>
+            <a:fld id="{F7021451-1387-4CA6-816F-3879F97B5CBC}" type="slidenum">
+              <a:rPr lang="en-US"/>
+              <a:t>15</a:t>
+            </a:fld>
+            <a:endParaRPr lang="en-US"/>
+          </a:p>
+        </p:txBody>
+      </p:sp>
+    </p:spTree>
+    <p:extLst>
+      <p:ext uri="{BB962C8B-B14F-4D97-AF65-F5344CB8AC3E}">
+        <p14:creationId xmlns:p14="http://schemas.microsoft.com/office/powerpoint/2010/main" val="1024086991"/>
+      </p:ext>
+    </p:extLst>
+  </p:cSld>
+  <p:clrMapOvr>
+    <a:masterClrMapping/>
+  </p:clrMapOvr>
+</p:notes>
+</file>
+
 <file path=ppt/notesSlides/notesSlide2.xml><?xml version="1.0" encoding="utf-8"?>
 <p:notes xmlns:a="http://schemas.openxmlformats.org/drawingml/2006/main" xmlns:r="http://schemas.openxmlformats.org/officeDocument/2006/relationships" xmlns:p="http://schemas.openxmlformats.org/presentationml/2006/main">
   <p:cSld>
@@ -2585,14 +2674,34 @@
       </p:grpSpPr>
       <p:sp>
         <p:nvSpPr>
-          <p:cNvPr id="2" name="Text 0"/>
-          <p:cNvSpPr/>
-          <p:nvPr/>
-        </p:nvSpPr>
-        <p:spPr>
-          <a:xfrm>
-            <a:off x="640080" y="731520"/>
-            <a:ext cx="10058400" cy="731520"/>
+          <p:cNvPr id="2" name="Shape 0"/>
+          <p:cNvSpPr/>
+          <p:nvPr/>
+        </p:nvSpPr>
+        <p:spPr>
+          <a:xfrm>
+            <a:off x="0" y="0"/>
+            <a:ext cx="164592" cy="6858000"/>
+          </a:xfrm>
+          <a:prstGeom prst="rect">
+            <a:avLst/>
+          </a:prstGeom>
+          <a:solidFill>
+            <a:srgbClr val="7A3B2E"/>
+          </a:solidFill>
+          <a:ln/>
+        </p:spPr>
+      </p:sp>
+      <p:sp>
+        <p:nvSpPr>
+          <p:cNvPr id="3" name="Text 1"/>
+          <p:cNvSpPr/>
+          <p:nvPr/>
+        </p:nvSpPr>
+        <p:spPr>
+          <a:xfrm>
+            <a:off x="640080" y="640080"/>
+            <a:ext cx="10058400" cy="320040"/>
           </a:xfrm>
           <a:prstGeom prst="rect">
             <a:avLst/>
@@ -2602,6 +2711,47 @@
         </p:spPr>
         <p:txBody>
           <a:bodyPr wrap="square" rtlCol="0" anchor="ctr"/>
+          <a:lstStyle/>
+          <a:p>
+            <a:pPr indent="0" marL="0">
+              <a:buNone/>
+            </a:pPr>
+            <a:r>
+              <a:rPr lang="en-US" sz="1200" b="1" spc="300" kern="0" dirty="0">
+                <a:solidFill>
+                  <a:srgbClr val="7A3B2E"/>
+                </a:solidFill>
+                <a:latin typeface="Calibri" pitchFamily="34" charset="0"/>
+                <a:ea typeface="Calibri" pitchFamily="34" charset="-122"/>
+                <a:cs typeface="Calibri" pitchFamily="34" charset="-120"/>
+              </a:rPr>
+              <a:t>WEEK 1 · KEY POINTS</a:t>
+            </a:r>
+            <a:endParaRPr lang="en-US" sz="1200" dirty="0"/>
+          </a:p>
+        </p:txBody>
+      </p:sp>
+      <p:sp>
+        <p:nvSpPr>
+          <p:cNvPr id="4" name="Text 2"/>
+          <p:cNvSpPr/>
+          <p:nvPr/>
+        </p:nvSpPr>
+        <p:spPr>
+          <a:xfrm>
+            <a:off x="640080" y="1005840"/>
+            <a:ext cx="10881360" cy="914400"/>
+          </a:xfrm>
+          <a:prstGeom prst="rect">
+            <a:avLst/>
+          </a:prstGeom>
+          <a:noFill/>
+          <a:ln/>
+        </p:spPr>
+        <p:txBody>
+          <a:bodyPr wrap="square" rtlCol="0" anchor="t">
+            <a:spAutoFit/>
+          </a:bodyPr>
           <a:lstStyle/>
           <a:p>
             <a:pPr indent="0" marL="0">
@@ -2616,7 +2766,7 @@
                 <a:ea typeface="Cambria" pitchFamily="34" charset="-122"/>
                 <a:cs typeface="Cambria" pitchFamily="34" charset="-120"/>
               </a:rPr>
-              <a:t>Three modes today</a:t>
+              <a:t>Counting, three shapes</a:t>
             </a:r>
             <a:endParaRPr lang="en-US" sz="3000" dirty="0"/>
           </a:p>
@@ -2624,134 +2774,98 @@
       </p:sp>
       <p:sp>
         <p:nvSpPr>
-          <p:cNvPr id="3" name="Text 1"/>
-          <p:cNvSpPr/>
-          <p:nvPr/>
-        </p:nvSpPr>
-        <p:spPr>
-          <a:xfrm>
-            <a:off x="640080" y="1417320"/>
-            <a:ext cx="10058400" cy="365760"/>
-          </a:xfrm>
-          <a:prstGeom prst="rect">
-            <a:avLst/>
-          </a:prstGeom>
-          <a:noFill/>
-          <a:ln/>
-        </p:spPr>
-        <p:txBody>
-          <a:bodyPr wrap="square" rtlCol="0" anchor="ctr"/>
-          <a:lstStyle/>
-          <a:p>
-            <a:pPr indent="0" marL="0">
-              <a:buNone/>
-            </a:pPr>
-            <a:r>
-              <a:rPr lang="en-US" sz="1400" i="1" dirty="0">
-                <a:solidFill>
-                  <a:srgbClr val="6B6B63"/>
+          <p:cNvPr id="5" name="Shape 3"/>
+          <p:cNvSpPr/>
+          <p:nvPr/>
+        </p:nvSpPr>
+        <p:spPr>
+          <a:xfrm>
+            <a:off x="640080" y="2331720"/>
+            <a:ext cx="201168" cy="201168"/>
+          </a:xfrm>
+          <a:prstGeom prst="ellipse">
+            <a:avLst/>
+          </a:prstGeom>
+          <a:solidFill>
+            <a:srgbClr val="7A3B2E"/>
+          </a:solidFill>
+          <a:ln/>
+        </p:spPr>
+      </p:sp>
+      <p:sp>
+        <p:nvSpPr>
+          <p:cNvPr id="6" name="Text 4"/>
+          <p:cNvSpPr/>
+          <p:nvPr/>
+        </p:nvSpPr>
+        <p:spPr>
+          <a:xfrm>
+            <a:off x="1097280" y="2240280"/>
+            <a:ext cx="10607040" cy="1017270"/>
+          </a:xfrm>
+          <a:prstGeom prst="rect">
+            <a:avLst/>
+          </a:prstGeom>
+          <a:noFill/>
+          <a:ln/>
+        </p:spPr>
+        <p:txBody>
+          <a:bodyPr wrap="square" rtlCol="0" anchor="t">
+            <a:spAutoFit/>
+          </a:bodyPr>
+          <a:lstStyle/>
+          <a:p>
+            <a:pPr indent="0" marL="0">
+              <a:lnSpc>
+                <a:spcPct val="112000"/>
+              </a:lnSpc>
+              <a:buNone/>
+            </a:pPr>
+            <a:r>
+              <a:rPr lang="en-US" sz="1650" dirty="0">
+                <a:solidFill>
+                  <a:srgbClr val="1A1A1A"/>
                 </a:solidFill>
                 <a:latin typeface="Calibri" pitchFamily="34" charset="0"/>
                 <a:ea typeface="Calibri" pitchFamily="34" charset="-122"/>
                 <a:cs typeface="Calibri" pitchFamily="34" charset="-120"/>
               </a:rPr>
-              <a:t>about a third of the session each</a:t>
-            </a:r>
-            <a:endParaRPr lang="en-US" sz="1400" dirty="0"/>
-          </a:p>
-        </p:txBody>
-      </p:sp>
-      <p:sp>
-        <p:nvSpPr>
-          <p:cNvPr id="4" name="Shape 2"/>
-          <p:cNvSpPr/>
-          <p:nvPr/>
-        </p:nvSpPr>
-        <p:spPr>
-          <a:xfrm>
-            <a:off x="640080" y="2194560"/>
-            <a:ext cx="3383280" cy="3291840"/>
-          </a:xfrm>
-          <a:prstGeom prst="roundRect">
-            <a:avLst>
-              <a:gd name="adj" fmla="val 3333"/>
-            </a:avLst>
-          </a:prstGeom>
-          <a:solidFill>
-            <a:srgbClr val="F4EEE8"/>
-          </a:solidFill>
-          <a:ln/>
-        </p:spPr>
-      </p:sp>
-      <p:sp>
-        <p:nvSpPr>
-          <p:cNvPr id="5" name="Shape 3"/>
-          <p:cNvSpPr/>
-          <p:nvPr/>
-        </p:nvSpPr>
-        <p:spPr>
-          <a:xfrm>
-            <a:off x="1051560" y="2606040"/>
-            <a:ext cx="548640" cy="548640"/>
+              <a:t>Rows: what share of brides kept their name, year by year. One groupby, one chart.</a:t>
+            </a:r>
+            <a:endParaRPr lang="en-US" sz="1650" dirty="0"/>
+          </a:p>
+        </p:txBody>
+      </p:sp>
+      <p:sp>
+        <p:nvSpPr>
+          <p:cNvPr id="7" name="Shape 5"/>
+          <p:cNvSpPr/>
+          <p:nvPr/>
+        </p:nvSpPr>
+        <p:spPr>
+          <a:xfrm>
+            <a:off x="640080" y="3348990"/>
+            <a:ext cx="201168" cy="201168"/>
           </a:xfrm>
           <a:prstGeom prst="ellipse">
             <a:avLst/>
           </a:prstGeom>
           <a:solidFill>
-            <a:srgbClr val="7A3B2E"/>
-          </a:solidFill>
-          <a:ln/>
-        </p:spPr>
-      </p:sp>
-      <p:sp>
-        <p:nvSpPr>
-          <p:cNvPr id="6" name="Text 4"/>
-          <p:cNvSpPr/>
-          <p:nvPr/>
-        </p:nvSpPr>
-        <p:spPr>
-          <a:xfrm>
-            <a:off x="1005840" y="3383280"/>
-            <a:ext cx="2651760" cy="548640"/>
-          </a:xfrm>
-          <a:prstGeom prst="rect">
-            <a:avLst/>
-          </a:prstGeom>
-          <a:noFill/>
-          <a:ln/>
-        </p:spPr>
-        <p:txBody>
-          <a:bodyPr wrap="square" rtlCol="0" anchor="ctr"/>
-          <a:lstStyle/>
-          <a:p>
-            <a:pPr indent="0" marL="0">
-              <a:buNone/>
-            </a:pPr>
-            <a:r>
-              <a:rPr lang="en-US" sz="2100" b="1" dirty="0">
-                <a:solidFill>
-                  <a:srgbClr val="1A1A1A"/>
-                </a:solidFill>
-                <a:latin typeface="Cambria" pitchFamily="34" charset="0"/>
-                <a:ea typeface="Cambria" pitchFamily="34" charset="-122"/>
-                <a:cs typeface="Cambria" pitchFamily="34" charset="-120"/>
-              </a:rPr>
-              <a:t>Lecture / demo</a:t>
-            </a:r>
-            <a:endParaRPr lang="en-US" sz="2100" dirty="0"/>
-          </a:p>
-        </p:txBody>
-      </p:sp>
-      <p:sp>
-        <p:nvSpPr>
-          <p:cNvPr id="7" name="Text 5"/>
-          <p:cNvSpPr/>
-          <p:nvPr/>
-        </p:nvSpPr>
-        <p:spPr>
-          <a:xfrm>
-            <a:off x="1005840" y="3977640"/>
-            <a:ext cx="2651760" cy="1371600"/>
+            <a:srgbClr val="3F6F5F"/>
+          </a:solidFill>
+          <a:ln/>
+        </p:spPr>
+      </p:sp>
+      <p:sp>
+        <p:nvSpPr>
+          <p:cNvPr id="8" name="Text 6"/>
+          <p:cNvSpPr/>
+          <p:nvPr/>
+        </p:nvSpPr>
+        <p:spPr>
+          <a:xfrm>
+            <a:off x="1097280" y="3257550"/>
+            <a:ext cx="10607040" cy="1017270"/>
           </a:xfrm>
           <a:prstGeom prst="rect">
             <a:avLst/>
@@ -2767,12 +2881,12 @@
           <a:p>
             <a:pPr indent="0" marL="0">
               <a:lnSpc>
-                <a:spcPct val="115000"/>
+                <a:spcPct val="112000"/>
               </a:lnSpc>
               <a:buNone/>
             </a:pPr>
             <a:r>
-              <a:rPr lang="en-US" sz="1500" dirty="0">
+              <a:rPr lang="en-US" sz="1650" dirty="0">
                 <a:solidFill>
                   <a:srgbClr val="1A1A1A"/>
                 </a:solidFill>
@@ -2780,33 +2894,11 @@
                 <a:ea typeface="Calibri" pitchFamily="34" charset="-122"/>
                 <a:cs typeface="Calibri" pitchFamily="34" charset="-120"/>
               </a:rPr>
-              <a:t>Counting: rows, words, pixels</a:t>
-            </a:r>
-            <a:endParaRPr lang="en-US" sz="1500" dirty="0"/>
-          </a:p>
-        </p:txBody>
-      </p:sp>
-      <p:sp>
-        <p:nvSpPr>
-          <p:cNvPr id="8" name="Shape 6"/>
-          <p:cNvSpPr/>
-          <p:nvPr/>
-        </p:nvSpPr>
-        <p:spPr>
-          <a:xfrm>
-            <a:off x="4526280" y="2194560"/>
-            <a:ext cx="3383280" cy="3291840"/>
-          </a:xfrm>
-          <a:prstGeom prst="roundRect">
-            <a:avLst>
-              <a:gd name="adj" fmla="val 3333"/>
-            </a:avLst>
-          </a:prstGeom>
-          <a:solidFill>
-            <a:srgbClr val="F4EEE8"/>
-          </a:solidFill>
-          <a:ln/>
-        </p:spPr>
+              <a:t>Words: the top words of a lyric are "the, and, you" until you remove stop-words. That removal is your first modeling choice.</a:t>
+            </a:r>
+            <a:endParaRPr lang="en-US" sz="1650" dirty="0"/>
+          </a:p>
+        </p:txBody>
       </p:sp>
       <p:sp>
         <p:nvSpPr>
@@ -2816,14 +2908,14 @@
         </p:nvSpPr>
         <p:spPr>
           <a:xfrm>
-            <a:off x="4937760" y="2606040"/>
-            <a:ext cx="548640" cy="548640"/>
+            <a:off x="640080" y="4366260"/>
+            <a:ext cx="201168" cy="201168"/>
           </a:xfrm>
           <a:prstGeom prst="ellipse">
             <a:avLst/>
           </a:prstGeom>
           <a:solidFill>
-            <a:srgbClr val="3F6F5F"/>
+            <a:srgbClr val="B9852F"/>
           </a:solidFill>
           <a:ln/>
         </p:spPr>
@@ -2836,47 +2928,8 @@
         </p:nvSpPr>
         <p:spPr>
           <a:xfrm>
-            <a:off x="4892040" y="3383280"/>
-            <a:ext cx="2651760" cy="548640"/>
-          </a:xfrm>
-          <a:prstGeom prst="rect">
-            <a:avLst/>
-          </a:prstGeom>
-          <a:noFill/>
-          <a:ln/>
-        </p:spPr>
-        <p:txBody>
-          <a:bodyPr wrap="square" rtlCol="0" anchor="ctr"/>
-          <a:lstStyle/>
-          <a:p>
-            <a:pPr indent="0" marL="0">
-              <a:buNone/>
-            </a:pPr>
-            <a:r>
-              <a:rPr lang="en-US" sz="2100" b="1" dirty="0">
-                <a:solidFill>
-                  <a:srgbClr val="1A1A1A"/>
-                </a:solidFill>
-                <a:latin typeface="Cambria" pitchFamily="34" charset="0"/>
-                <a:ea typeface="Cambria" pitchFamily="34" charset="-122"/>
-                <a:cs typeface="Cambria" pitchFamily="34" charset="-120"/>
-              </a:rPr>
-              <a:t>Workshop</a:t>
-            </a:r>
-            <a:endParaRPr lang="en-US" sz="2100" dirty="0"/>
-          </a:p>
-        </p:txBody>
-      </p:sp>
-      <p:sp>
-        <p:nvSpPr>
-          <p:cNvPr id="11" name="Text 9"/>
-          <p:cNvSpPr/>
-          <p:nvPr/>
-        </p:nvSpPr>
-        <p:spPr>
-          <a:xfrm>
-            <a:off x="4892040" y="3977640"/>
-            <a:ext cx="2651760" cy="1371600"/>
+            <a:off x="1097280" y="4274820"/>
+            <a:ext cx="10607040" cy="1017270"/>
           </a:xfrm>
           <a:prstGeom prst="rect">
             <a:avLst/>
@@ -2892,12 +2945,12 @@
           <a:p>
             <a:pPr indent="0" marL="0">
               <a:lnSpc>
-                <a:spcPct val="115000"/>
+                <a:spcPct val="112000"/>
               </a:lnSpc>
               <a:buNone/>
             </a:pPr>
             <a:r>
-              <a:rPr lang="en-US" sz="1500" dirty="0">
+              <a:rPr lang="en-US" sz="1650" dirty="0">
                 <a:solidFill>
                   <a:srgbClr val="1A1A1A"/>
                 </a:solidFill>
@@ -2905,103 +2958,42 @@
                 <a:ea typeface="Calibri" pitchFamily="34" charset="-122"/>
                 <a:cs typeface="Calibri" pitchFamily="34" charset="-120"/>
               </a:rPr>
-              <a:t>Build hands-on on your own data.</a:t>
-            </a:r>
-            <a:endParaRPr lang="en-US" sz="1500" dirty="0"/>
-          </a:p>
-        </p:txBody>
-      </p:sp>
-      <p:sp>
-        <p:nvSpPr>
-          <p:cNvPr id="12" name="Shape 10"/>
-          <p:cNvSpPr/>
-          <p:nvPr/>
-        </p:nvSpPr>
-        <p:spPr>
-          <a:xfrm>
-            <a:off x="8412480" y="2194560"/>
-            <a:ext cx="3383280" cy="3291840"/>
-          </a:xfrm>
-          <a:prstGeom prst="roundRect">
-            <a:avLst>
-              <a:gd name="adj" fmla="val 3333"/>
-            </a:avLst>
-          </a:prstGeom>
-          <a:solidFill>
-            <a:srgbClr val="F4EEE8"/>
-          </a:solidFill>
-          <a:ln/>
-        </p:spPr>
-      </p:sp>
-      <p:sp>
-        <p:nvSpPr>
-          <p:cNvPr id="13" name="Shape 11"/>
-          <p:cNvSpPr/>
-          <p:nvPr/>
-        </p:nvSpPr>
-        <p:spPr>
-          <a:xfrm>
-            <a:off x="8823960" y="2606040"/>
-            <a:ext cx="548640" cy="548640"/>
+              <a:t>Pixels: rank 200 Met thumbnails darkest to brightest from average luminance.</a:t>
+            </a:r>
+            <a:endParaRPr lang="en-US" sz="1650" dirty="0"/>
+          </a:p>
+        </p:txBody>
+      </p:sp>
+      <p:sp>
+        <p:nvSpPr>
+          <p:cNvPr id="11" name="Shape 9"/>
+          <p:cNvSpPr/>
+          <p:nvPr/>
+        </p:nvSpPr>
+        <p:spPr>
+          <a:xfrm>
+            <a:off x="640080" y="5383530"/>
+            <a:ext cx="201168" cy="201168"/>
           </a:xfrm>
           <a:prstGeom prst="ellipse">
             <a:avLst/>
           </a:prstGeom>
           <a:solidFill>
-            <a:srgbClr val="B9852F"/>
-          </a:solidFill>
-          <a:ln/>
-        </p:spPr>
-      </p:sp>
-      <p:sp>
-        <p:nvSpPr>
-          <p:cNvPr id="14" name="Text 12"/>
-          <p:cNvSpPr/>
-          <p:nvPr/>
-        </p:nvSpPr>
-        <p:spPr>
-          <a:xfrm>
-            <a:off x="8778240" y="3383280"/>
-            <a:ext cx="2651760" cy="548640"/>
-          </a:xfrm>
-          <a:prstGeom prst="rect">
-            <a:avLst/>
-          </a:prstGeom>
-          <a:noFill/>
-          <a:ln/>
-        </p:spPr>
-        <p:txBody>
-          <a:bodyPr wrap="square" rtlCol="0" anchor="ctr"/>
-          <a:lstStyle/>
-          <a:p>
-            <a:pPr indent="0" marL="0">
-              <a:buNone/>
-            </a:pPr>
-            <a:r>
-              <a:rPr lang="en-US" sz="2100" b="1" dirty="0">
-                <a:solidFill>
-                  <a:srgbClr val="1A1A1A"/>
-                </a:solidFill>
-                <a:latin typeface="Cambria" pitchFamily="34" charset="0"/>
-                <a:ea typeface="Cambria" pitchFamily="34" charset="-122"/>
-                <a:cs typeface="Cambria" pitchFamily="34" charset="-120"/>
-              </a:rPr>
-              <a:t>Discussion</a:t>
-            </a:r>
-            <a:endParaRPr lang="en-US" sz="2100" dirty="0"/>
-          </a:p>
-        </p:txBody>
-      </p:sp>
-      <p:sp>
-        <p:nvSpPr>
-          <p:cNvPr id="15" name="Text 13"/>
-          <p:cNvSpPr/>
-          <p:nvPr/>
-        </p:nvSpPr>
-        <p:spPr>
-          <a:xfrm>
-            <a:off x="8778240" y="3977640"/>
-            <a:ext cx="2651760" cy="1371600"/>
+            <a:srgbClr val="7A3B2E"/>
+          </a:solidFill>
+          <a:ln/>
+        </p:spPr>
+      </p:sp>
+      <p:sp>
+        <p:nvSpPr>
+          <p:cNvPr id="12" name="Text 10"/>
+          <p:cNvSpPr/>
+          <p:nvPr/>
+        </p:nvSpPr>
+        <p:spPr>
+          <a:xfrm>
+            <a:off x="1097280" y="5292090"/>
+            <a:ext cx="10607040" cy="1017270"/>
           </a:xfrm>
           <a:prstGeom prst="rect">
             <a:avLst/>
@@ -3017,12 +3009,12 @@
           <a:p>
             <a:pPr indent="0" marL="0">
               <a:lnSpc>
-                <a:spcPct val="115000"/>
+                <a:spcPct val="112000"/>
               </a:lnSpc>
               <a:buNone/>
             </a:pPr>
             <a:r>
-              <a:rPr lang="en-US" sz="1500" dirty="0">
+              <a:rPr lang="en-US" sz="1650" dirty="0">
                 <a:solidFill>
                   <a:srgbClr val="1A1A1A"/>
                 </a:solidFill>
@@ -3030,9 +3022,9 @@
                 <a:ea typeface="Calibri" pitchFamily="34" charset="-122"/>
                 <a:cs typeface="Calibri" pitchFamily="34" charset="-120"/>
               </a:rPr>
-              <a:t>Interrogate the study, debate it, or critique each other's work.</a:t>
-            </a:r>
-            <a:endParaRPr lang="en-US" sz="1500" dirty="0"/>
+              <a:t>The same technique three times, each containing a decision.</a:t>
+            </a:r>
+            <a:endParaRPr lang="en-US" sz="1650" dirty="0"/>
           </a:p>
         </p:txBody>
       </p:sp>
@@ -3076,7 +3068,7 @@
         </p:nvSpPr>
         <p:spPr>
           <a:xfrm>
-            <a:off x="640080" y="640080"/>
+            <a:off x="640080" y="731520"/>
             <a:ext cx="10058400" cy="731520"/>
           </a:xfrm>
           <a:prstGeom prst="rect">
@@ -3101,7 +3093,7 @@
                 <a:ea typeface="Cambria" pitchFamily="34" charset="-122"/>
                 <a:cs typeface="Cambria" pitchFamily="34" charset="-120"/>
               </a:rPr>
-              <a:t>The session</a:t>
+              <a:t>Three modes today</a:t>
             </a:r>
             <a:endParaRPr lang="en-US" sz="3000" dirty="0"/>
           </a:p>
@@ -3109,36 +3101,14 @@
       </p:sp>
       <p:sp>
         <p:nvSpPr>
-          <p:cNvPr id="3" name="Shape 1"/>
-          <p:cNvSpPr/>
-          <p:nvPr/>
-        </p:nvSpPr>
-        <p:spPr>
-          <a:xfrm>
-            <a:off x="640080" y="1572768"/>
-            <a:ext cx="868680" cy="450342"/>
-          </a:xfrm>
-          <a:prstGeom prst="roundRect">
-            <a:avLst>
-              <a:gd name="adj" fmla="val 12183"/>
-            </a:avLst>
-          </a:prstGeom>
-          <a:solidFill>
-            <a:srgbClr val="7A3B2E"/>
-          </a:solidFill>
-          <a:ln/>
-        </p:spPr>
-      </p:sp>
-      <p:sp>
-        <p:nvSpPr>
-          <p:cNvPr id="4" name="Text 2"/>
-          <p:cNvSpPr/>
-          <p:nvPr/>
-        </p:nvSpPr>
-        <p:spPr>
-          <a:xfrm>
-            <a:off x="640080" y="1572768"/>
-            <a:ext cx="868680" cy="450342"/>
+          <p:cNvPr id="3" name="Text 1"/>
+          <p:cNvSpPr/>
+          <p:nvPr/>
+        </p:nvSpPr>
+        <p:spPr>
+          <a:xfrm>
+            <a:off x="640080" y="1417320"/>
+            <a:ext cx="10058400" cy="365760"/>
           </a:xfrm>
           <a:prstGeom prst="rect">
             <a:avLst/>
@@ -3150,52 +3120,136 @@
           <a:bodyPr wrap="square" rtlCol="0" anchor="ctr"/>
           <a:lstStyle/>
           <a:p>
-            <a:pPr algn="ctr" indent="0" marL="0">
-              <a:buNone/>
-            </a:pPr>
-            <a:r>
-              <a:rPr lang="en-US" sz="1100" b="1" dirty="0">
-                <a:solidFill>
-                  <a:srgbClr val="FFFFFF"/>
+            <a:pPr indent="0" marL="0">
+              <a:buNone/>
+            </a:pPr>
+            <a:r>
+              <a:rPr lang="en-US" sz="1400" i="1" dirty="0">
+                <a:solidFill>
+                  <a:srgbClr val="6B6B63"/>
                 </a:solidFill>
                 <a:latin typeface="Calibri" pitchFamily="34" charset="0"/>
                 <a:ea typeface="Calibri" pitchFamily="34" charset="-122"/>
                 <a:cs typeface="Calibri" pitchFamily="34" charset="-120"/>
               </a:rPr>
-              <a:t>0:00</a:t>
-            </a:r>
-            <a:endParaRPr lang="en-US" sz="1100" dirty="0"/>
-          </a:p>
-        </p:txBody>
-      </p:sp>
-      <p:sp>
-        <p:nvSpPr>
-          <p:cNvPr id="5" name="Text 3"/>
-          <p:cNvSpPr/>
-          <p:nvPr/>
-        </p:nvSpPr>
-        <p:spPr>
-          <a:xfrm>
-            <a:off x="1691640" y="1554480"/>
-            <a:ext cx="9646920" cy="560070"/>
-          </a:xfrm>
-          <a:prstGeom prst="rect">
-            <a:avLst/>
-          </a:prstGeom>
-          <a:noFill/>
-          <a:ln/>
-        </p:spPr>
-        <p:txBody>
-          <a:bodyPr wrap="square" rtlCol="0" anchor="ctr">
+              <a:t>about a third of the session each</a:t>
+            </a:r>
+            <a:endParaRPr lang="en-US" sz="1400" dirty="0"/>
+          </a:p>
+        </p:txBody>
+      </p:sp>
+      <p:sp>
+        <p:nvSpPr>
+          <p:cNvPr id="4" name="Shape 2"/>
+          <p:cNvSpPr/>
+          <p:nvPr/>
+        </p:nvSpPr>
+        <p:spPr>
+          <a:xfrm>
+            <a:off x="640080" y="2194560"/>
+            <a:ext cx="3383280" cy="3291840"/>
+          </a:xfrm>
+          <a:prstGeom prst="roundRect">
+            <a:avLst>
+              <a:gd name="adj" fmla="val 3333"/>
+            </a:avLst>
+          </a:prstGeom>
+          <a:solidFill>
+            <a:srgbClr val="F4EEE8"/>
+          </a:solidFill>
+          <a:ln/>
+        </p:spPr>
+      </p:sp>
+      <p:sp>
+        <p:nvSpPr>
+          <p:cNvPr id="5" name="Shape 3"/>
+          <p:cNvSpPr/>
+          <p:nvPr/>
+        </p:nvSpPr>
+        <p:spPr>
+          <a:xfrm>
+            <a:off x="1051560" y="2606040"/>
+            <a:ext cx="548640" cy="548640"/>
+          </a:xfrm>
+          <a:prstGeom prst="ellipse">
+            <a:avLst/>
+          </a:prstGeom>
+          <a:solidFill>
+            <a:srgbClr val="7A3B2E"/>
+          </a:solidFill>
+          <a:ln/>
+        </p:spPr>
+      </p:sp>
+      <p:sp>
+        <p:nvSpPr>
+          <p:cNvPr id="6" name="Text 4"/>
+          <p:cNvSpPr/>
+          <p:nvPr/>
+        </p:nvSpPr>
+        <p:spPr>
+          <a:xfrm>
+            <a:off x="1005840" y="3383280"/>
+            <a:ext cx="2651760" cy="548640"/>
+          </a:xfrm>
+          <a:prstGeom prst="rect">
+            <a:avLst/>
+          </a:prstGeom>
+          <a:noFill/>
+          <a:ln/>
+        </p:spPr>
+        <p:txBody>
+          <a:bodyPr wrap="square" rtlCol="0" anchor="ctr"/>
+          <a:lstStyle/>
+          <a:p>
+            <a:pPr indent="0" marL="0">
+              <a:buNone/>
+            </a:pPr>
+            <a:r>
+              <a:rPr lang="en-US" sz="2100" b="1" dirty="0">
+                <a:solidFill>
+                  <a:srgbClr val="1A1A1A"/>
+                </a:solidFill>
+                <a:latin typeface="Cambria" pitchFamily="34" charset="0"/>
+                <a:ea typeface="Cambria" pitchFamily="34" charset="-122"/>
+                <a:cs typeface="Cambria" pitchFamily="34" charset="-120"/>
+              </a:rPr>
+              <a:t>Lecture / demo</a:t>
+            </a:r>
+            <a:endParaRPr lang="en-US" sz="2100" dirty="0"/>
+          </a:p>
+        </p:txBody>
+      </p:sp>
+      <p:sp>
+        <p:nvSpPr>
+          <p:cNvPr id="7" name="Text 5"/>
+          <p:cNvSpPr/>
+          <p:nvPr/>
+        </p:nvSpPr>
+        <p:spPr>
+          <a:xfrm>
+            <a:off x="1005840" y="3977640"/>
+            <a:ext cx="2651760" cy="1371600"/>
+          </a:xfrm>
+          <a:prstGeom prst="rect">
+            <a:avLst/>
+          </a:prstGeom>
+          <a:noFill/>
+          <a:ln/>
+        </p:spPr>
+        <p:txBody>
+          <a:bodyPr wrap="square" rtlCol="0" anchor="t">
             <a:spAutoFit/>
           </a:bodyPr>
           <a:lstStyle/>
           <a:p>
             <a:pPr indent="0" marL="0">
-              <a:buNone/>
-            </a:pPr>
-            <a:r>
-              <a:rPr lang="en-US" sz="1100" dirty="0">
+              <a:lnSpc>
+                <a:spcPct val="115000"/>
+              </a:lnSpc>
+              <a:buNone/>
+            </a:pPr>
+            <a:r>
+              <a:rPr lang="en-US" sz="1500" dirty="0">
                 <a:solidFill>
                   <a:srgbClr val="1A1A1A"/>
                 </a:solidFill>
@@ -3203,44 +3257,64 @@
                 <a:ea typeface="Calibri" pitchFamily="34" charset="-122"/>
                 <a:cs typeface="Calibri" pitchFamily="34" charset="-120"/>
               </a:rPr>
-              <a:t>Introductions and working agreements, demonstrated in practice. Today's live coding deliberately includes real mistakes.</a:t>
-            </a:r>
-            <a:endParaRPr lang="en-US" sz="1100" dirty="0"/>
-          </a:p>
-        </p:txBody>
-      </p:sp>
-      <p:sp>
-        <p:nvSpPr>
-          <p:cNvPr id="6" name="Shape 4"/>
-          <p:cNvSpPr/>
-          <p:nvPr/>
-        </p:nvSpPr>
-        <p:spPr>
-          <a:xfrm>
-            <a:off x="640080" y="2132838"/>
-            <a:ext cx="868680" cy="450342"/>
+              <a:t>Counting: rows, words, pixels</a:t>
+            </a:r>
+            <a:endParaRPr lang="en-US" sz="1500" dirty="0"/>
+          </a:p>
+        </p:txBody>
+      </p:sp>
+      <p:sp>
+        <p:nvSpPr>
+          <p:cNvPr id="8" name="Shape 6"/>
+          <p:cNvSpPr/>
+          <p:nvPr/>
+        </p:nvSpPr>
+        <p:spPr>
+          <a:xfrm>
+            <a:off x="4526280" y="2194560"/>
+            <a:ext cx="3383280" cy="3291840"/>
           </a:xfrm>
           <a:prstGeom prst="roundRect">
             <a:avLst>
-              <a:gd name="adj" fmla="val 12183"/>
+              <a:gd name="adj" fmla="val 3333"/>
             </a:avLst>
           </a:prstGeom>
           <a:solidFill>
-            <a:srgbClr val="7A3B2E"/>
-          </a:solidFill>
-          <a:ln/>
-        </p:spPr>
-      </p:sp>
-      <p:sp>
-        <p:nvSpPr>
-          <p:cNvPr id="7" name="Text 5"/>
-          <p:cNvSpPr/>
-          <p:nvPr/>
-        </p:nvSpPr>
-        <p:spPr>
-          <a:xfrm>
-            <a:off x="640080" y="2132838"/>
-            <a:ext cx="868680" cy="450342"/>
+            <a:srgbClr val="F4EEE8"/>
+          </a:solidFill>
+          <a:ln/>
+        </p:spPr>
+      </p:sp>
+      <p:sp>
+        <p:nvSpPr>
+          <p:cNvPr id="9" name="Shape 7"/>
+          <p:cNvSpPr/>
+          <p:nvPr/>
+        </p:nvSpPr>
+        <p:spPr>
+          <a:xfrm>
+            <a:off x="4937760" y="2606040"/>
+            <a:ext cx="548640" cy="548640"/>
+          </a:xfrm>
+          <a:prstGeom prst="ellipse">
+            <a:avLst/>
+          </a:prstGeom>
+          <a:solidFill>
+            <a:srgbClr val="3F6F5F"/>
+          </a:solidFill>
+          <a:ln/>
+        </p:spPr>
+      </p:sp>
+      <p:sp>
+        <p:nvSpPr>
+          <p:cNvPr id="10" name="Text 8"/>
+          <p:cNvSpPr/>
+          <p:nvPr/>
+        </p:nvSpPr>
+        <p:spPr>
+          <a:xfrm>
+            <a:off x="4892040" y="3383280"/>
+            <a:ext cx="2651760" cy="548640"/>
           </a:xfrm>
           <a:prstGeom prst="rect">
             <a:avLst/>
@@ -3252,52 +3326,180 @@
           <a:bodyPr wrap="square" rtlCol="0" anchor="ctr"/>
           <a:lstStyle/>
           <a:p>
-            <a:pPr algn="ctr" indent="0" marL="0">
-              <a:buNone/>
-            </a:pPr>
-            <a:r>
-              <a:rPr lang="en-US" sz="1100" b="1" dirty="0">
-                <a:solidFill>
-                  <a:srgbClr val="FFFFFF"/>
+            <a:pPr indent="0" marL="0">
+              <a:buNone/>
+            </a:pPr>
+            <a:r>
+              <a:rPr lang="en-US" sz="2100" b="1" dirty="0">
+                <a:solidFill>
+                  <a:srgbClr val="1A1A1A"/>
+                </a:solidFill>
+                <a:latin typeface="Cambria" pitchFamily="34" charset="0"/>
+                <a:ea typeface="Cambria" pitchFamily="34" charset="-122"/>
+                <a:cs typeface="Cambria" pitchFamily="34" charset="-120"/>
+              </a:rPr>
+              <a:t>Workshop</a:t>
+            </a:r>
+            <a:endParaRPr lang="en-US" sz="2100" dirty="0"/>
+          </a:p>
+        </p:txBody>
+      </p:sp>
+      <p:sp>
+        <p:nvSpPr>
+          <p:cNvPr id="11" name="Text 9"/>
+          <p:cNvSpPr/>
+          <p:nvPr/>
+        </p:nvSpPr>
+        <p:spPr>
+          <a:xfrm>
+            <a:off x="4892040" y="3977640"/>
+            <a:ext cx="2651760" cy="1371600"/>
+          </a:xfrm>
+          <a:prstGeom prst="rect">
+            <a:avLst/>
+          </a:prstGeom>
+          <a:noFill/>
+          <a:ln/>
+        </p:spPr>
+        <p:txBody>
+          <a:bodyPr wrap="square" rtlCol="0" anchor="t">
+            <a:spAutoFit/>
+          </a:bodyPr>
+          <a:lstStyle/>
+          <a:p>
+            <a:pPr indent="0" marL="0">
+              <a:lnSpc>
+                <a:spcPct val="115000"/>
+              </a:lnSpc>
+              <a:buNone/>
+            </a:pPr>
+            <a:r>
+              <a:rPr lang="en-US" sz="1500" dirty="0">
+                <a:solidFill>
+                  <a:srgbClr val="1A1A1A"/>
                 </a:solidFill>
                 <a:latin typeface="Calibri" pitchFamily="34" charset="0"/>
                 <a:ea typeface="Calibri" pitchFamily="34" charset="-122"/>
                 <a:cs typeface="Calibri" pitchFamily="34" charset="-120"/>
               </a:rPr>
-              <a:t>0:10</a:t>
-            </a:r>
-            <a:endParaRPr lang="en-US" sz="1100" dirty="0"/>
-          </a:p>
-        </p:txBody>
-      </p:sp>
-      <p:sp>
-        <p:nvSpPr>
-          <p:cNvPr id="8" name="Text 6"/>
-          <p:cNvSpPr/>
-          <p:nvPr/>
-        </p:nvSpPr>
-        <p:spPr>
-          <a:xfrm>
-            <a:off x="1691640" y="2114550"/>
-            <a:ext cx="9646920" cy="560070"/>
-          </a:xfrm>
-          <a:prstGeom prst="rect">
-            <a:avLst/>
-          </a:prstGeom>
-          <a:noFill/>
-          <a:ln/>
-        </p:spPr>
-        <p:txBody>
-          <a:bodyPr wrap="square" rtlCol="0" anchor="ctr">
+              <a:t>Build hands-on on your own data.</a:t>
+            </a:r>
+            <a:endParaRPr lang="en-US" sz="1500" dirty="0"/>
+          </a:p>
+        </p:txBody>
+      </p:sp>
+      <p:sp>
+        <p:nvSpPr>
+          <p:cNvPr id="12" name="Shape 10"/>
+          <p:cNvSpPr/>
+          <p:nvPr/>
+        </p:nvSpPr>
+        <p:spPr>
+          <a:xfrm>
+            <a:off x="8412480" y="2194560"/>
+            <a:ext cx="3383280" cy="3291840"/>
+          </a:xfrm>
+          <a:prstGeom prst="roundRect">
+            <a:avLst>
+              <a:gd name="adj" fmla="val 3333"/>
+            </a:avLst>
+          </a:prstGeom>
+          <a:solidFill>
+            <a:srgbClr val="F4EEE8"/>
+          </a:solidFill>
+          <a:ln/>
+        </p:spPr>
+      </p:sp>
+      <p:sp>
+        <p:nvSpPr>
+          <p:cNvPr id="13" name="Shape 11"/>
+          <p:cNvSpPr/>
+          <p:nvPr/>
+        </p:nvSpPr>
+        <p:spPr>
+          <a:xfrm>
+            <a:off x="8823960" y="2606040"/>
+            <a:ext cx="548640" cy="548640"/>
+          </a:xfrm>
+          <a:prstGeom prst="ellipse">
+            <a:avLst/>
+          </a:prstGeom>
+          <a:solidFill>
+            <a:srgbClr val="B9852F"/>
+          </a:solidFill>
+          <a:ln/>
+        </p:spPr>
+      </p:sp>
+      <p:sp>
+        <p:nvSpPr>
+          <p:cNvPr id="14" name="Text 12"/>
+          <p:cNvSpPr/>
+          <p:nvPr/>
+        </p:nvSpPr>
+        <p:spPr>
+          <a:xfrm>
+            <a:off x="8778240" y="3383280"/>
+            <a:ext cx="2651760" cy="548640"/>
+          </a:xfrm>
+          <a:prstGeom prst="rect">
+            <a:avLst/>
+          </a:prstGeom>
+          <a:noFill/>
+          <a:ln/>
+        </p:spPr>
+        <p:txBody>
+          <a:bodyPr wrap="square" rtlCol="0" anchor="ctr"/>
+          <a:lstStyle/>
+          <a:p>
+            <a:pPr indent="0" marL="0">
+              <a:buNone/>
+            </a:pPr>
+            <a:r>
+              <a:rPr lang="en-US" sz="2100" b="1" dirty="0">
+                <a:solidFill>
+                  <a:srgbClr val="1A1A1A"/>
+                </a:solidFill>
+                <a:latin typeface="Cambria" pitchFamily="34" charset="0"/>
+                <a:ea typeface="Cambria" pitchFamily="34" charset="-122"/>
+                <a:cs typeface="Cambria" pitchFamily="34" charset="-120"/>
+              </a:rPr>
+              <a:t>Discussion</a:t>
+            </a:r>
+            <a:endParaRPr lang="en-US" sz="2100" dirty="0"/>
+          </a:p>
+        </p:txBody>
+      </p:sp>
+      <p:sp>
+        <p:nvSpPr>
+          <p:cNvPr id="15" name="Text 13"/>
+          <p:cNvSpPr/>
+          <p:nvPr/>
+        </p:nvSpPr>
+        <p:spPr>
+          <a:xfrm>
+            <a:off x="8778240" y="3977640"/>
+            <a:ext cx="2651760" cy="1371600"/>
+          </a:xfrm>
+          <a:prstGeom prst="rect">
+            <a:avLst/>
+          </a:prstGeom>
+          <a:noFill/>
+          <a:ln/>
+        </p:spPr>
+        <p:txBody>
+          <a:bodyPr wrap="square" rtlCol="0" anchor="t">
             <a:spAutoFit/>
           </a:bodyPr>
           <a:lstStyle/>
           <a:p>
             <a:pPr indent="0" marL="0">
-              <a:buNone/>
-            </a:pPr>
-            <a:r>
-              <a:rPr lang="en-US" sz="1100" dirty="0">
+              <a:lnSpc>
+                <a:spcPct val="115000"/>
+              </a:lnSpc>
+              <a:buNone/>
+            </a:pPr>
+            <a:r>
+              <a:rPr lang="en-US" sz="1500" dirty="0">
                 <a:solidFill>
                   <a:srgbClr val="1A1A1A"/>
                 </a:solidFill>
@@ -3305,621 +3507,9 @@
                 <a:ea typeface="Calibri" pitchFamily="34" charset="-122"/>
                 <a:cs typeface="Calibri" pitchFamily="34" charset="-120"/>
               </a:rPr>
-              <a:t>Lecture, the stakes: machines already read culture at scale, the feed ranking what you see, the moderation filter, the model trained on scraped art and prose, and that reading happens without you. Counting culture has produced real knowledge (the screenplay verb split, the Rowling unmasking, pop music's 1991 revolution) and real mistakes, and both look identical until someone checks. In ten weeks you do the reading yourself and publish something checkable.</a:t>
-            </a:r>
-            <a:endParaRPr lang="en-US" sz="1100" dirty="0"/>
-          </a:p>
-        </p:txBody>
-      </p:sp>
-      <p:sp>
-        <p:nvSpPr>
-          <p:cNvPr id="9" name="Shape 7"/>
-          <p:cNvSpPr/>
-          <p:nvPr/>
-        </p:nvSpPr>
-        <p:spPr>
-          <a:xfrm>
-            <a:off x="640080" y="2692908"/>
-            <a:ext cx="868680" cy="450342"/>
-          </a:xfrm>
-          <a:prstGeom prst="roundRect">
-            <a:avLst>
-              <a:gd name="adj" fmla="val 12183"/>
-            </a:avLst>
-          </a:prstGeom>
-          <a:solidFill>
-            <a:srgbClr val="7A3B2E"/>
-          </a:solidFill>
-          <a:ln/>
-        </p:spPr>
-      </p:sp>
-      <p:sp>
-        <p:nvSpPr>
-          <p:cNvPr id="10" name="Text 8"/>
-          <p:cNvSpPr/>
-          <p:nvPr/>
-        </p:nvSpPr>
-        <p:spPr>
-          <a:xfrm>
-            <a:off x="640080" y="2692908"/>
-            <a:ext cx="868680" cy="450342"/>
-          </a:xfrm>
-          <a:prstGeom prst="rect">
-            <a:avLst/>
-          </a:prstGeom>
-          <a:noFill/>
-          <a:ln/>
-        </p:spPr>
-        <p:txBody>
-          <a:bodyPr wrap="square" rtlCol="0" anchor="ctr"/>
-          <a:lstStyle/>
-          <a:p>
-            <a:pPr algn="ctr" indent="0" marL="0">
-              <a:buNone/>
-            </a:pPr>
-            <a:r>
-              <a:rPr lang="en-US" sz="1100" b="1" dirty="0">
-                <a:solidFill>
-                  <a:srgbClr val="FFFFFF"/>
-                </a:solidFill>
-                <a:latin typeface="Calibri" pitchFamily="34" charset="0"/>
-                <a:ea typeface="Calibri" pitchFamily="34" charset="-122"/>
-                <a:cs typeface="Calibri" pitchFamily="34" charset="-120"/>
-              </a:rPr>
-              <a:t>0:28</a:t>
-            </a:r>
-            <a:endParaRPr lang="en-US" sz="1100" dirty="0"/>
-          </a:p>
-        </p:txBody>
-      </p:sp>
-      <p:sp>
-        <p:nvSpPr>
-          <p:cNvPr id="11" name="Text 9"/>
-          <p:cNvSpPr/>
-          <p:nvPr/>
-        </p:nvSpPr>
-        <p:spPr>
-          <a:xfrm>
-            <a:off x="1691640" y="2674620"/>
-            <a:ext cx="9646920" cy="560070"/>
-          </a:xfrm>
-          <a:prstGeom prst="rect">
-            <a:avLst/>
-          </a:prstGeom>
-          <a:noFill/>
-          <a:ln/>
-        </p:spPr>
-        <p:txBody>
-          <a:bodyPr wrap="square" rtlCol="0" anchor="ctr">
-            <a:spAutoFit/>
-          </a:bodyPr>
-          <a:lstStyle/>
-          <a:p>
-            <a:pPr indent="0" marL="0">
-              <a:buNone/>
-            </a:pPr>
-            <a:r>
-              <a:rPr lang="en-US" sz="1100" dirty="0">
-                <a:solidFill>
-                  <a:srgbClr val="1A1A1A"/>
-                </a:solidFill>
-                <a:latin typeface="Calibri" pitchFamily="34" charset="0"/>
-                <a:ea typeface="Calibri" pitchFamily="34" charset="-122"/>
-                <a:cs typeface="Calibri" pitchFamily="34" charset="-120"/>
-              </a:rPr>
-              <a:t>Look at This, then Question It: She Giggles, He Gallops.</a:t>
-            </a:r>
-            <a:endParaRPr lang="en-US" sz="1100" dirty="0"/>
-          </a:p>
-        </p:txBody>
-      </p:sp>
-      <p:sp>
-        <p:nvSpPr>
-          <p:cNvPr id="12" name="Shape 10"/>
-          <p:cNvSpPr/>
-          <p:nvPr/>
-        </p:nvSpPr>
-        <p:spPr>
-          <a:xfrm>
-            <a:off x="640080" y="3252978"/>
-            <a:ext cx="868680" cy="450342"/>
-          </a:xfrm>
-          <a:prstGeom prst="roundRect">
-            <a:avLst>
-              <a:gd name="adj" fmla="val 12183"/>
-            </a:avLst>
-          </a:prstGeom>
-          <a:solidFill>
-            <a:srgbClr val="7A3B2E"/>
-          </a:solidFill>
-          <a:ln/>
-        </p:spPr>
-      </p:sp>
-      <p:sp>
-        <p:nvSpPr>
-          <p:cNvPr id="13" name="Text 11"/>
-          <p:cNvSpPr/>
-          <p:nvPr/>
-        </p:nvSpPr>
-        <p:spPr>
-          <a:xfrm>
-            <a:off x="640080" y="3252978"/>
-            <a:ext cx="868680" cy="450342"/>
-          </a:xfrm>
-          <a:prstGeom prst="rect">
-            <a:avLst/>
-          </a:prstGeom>
-          <a:noFill/>
-          <a:ln/>
-        </p:spPr>
-        <p:txBody>
-          <a:bodyPr wrap="square" rtlCol="0" anchor="ctr"/>
-          <a:lstStyle/>
-          <a:p>
-            <a:pPr algn="ctr" indent="0" marL="0">
-              <a:buNone/>
-            </a:pPr>
-            <a:r>
-              <a:rPr lang="en-US" sz="1100" b="1" dirty="0">
-                <a:solidFill>
-                  <a:srgbClr val="FFFFFF"/>
-                </a:solidFill>
-                <a:latin typeface="Calibri" pitchFamily="34" charset="0"/>
-                <a:ea typeface="Calibri" pitchFamily="34" charset="-122"/>
-                <a:cs typeface="Calibri" pitchFamily="34" charset="-120"/>
-              </a:rPr>
-              <a:t>0:35</a:t>
-            </a:r>
-            <a:endParaRPr lang="en-US" sz="1100" dirty="0"/>
-          </a:p>
-        </p:txBody>
-      </p:sp>
-      <p:sp>
-        <p:nvSpPr>
-          <p:cNvPr id="14" name="Text 12"/>
-          <p:cNvSpPr/>
-          <p:nvPr/>
-        </p:nvSpPr>
-        <p:spPr>
-          <a:xfrm>
-            <a:off x="1691640" y="3234690"/>
-            <a:ext cx="9646920" cy="560070"/>
-          </a:xfrm>
-          <a:prstGeom prst="rect">
-            <a:avLst/>
-          </a:prstGeom>
-          <a:noFill/>
-          <a:ln/>
-        </p:spPr>
-        <p:txBody>
-          <a:bodyPr wrap="square" rtlCol="0" anchor="ctr">
-            <a:spAutoFit/>
-          </a:bodyPr>
-          <a:lstStyle/>
-          <a:p>
-            <a:pPr indent="0" marL="0">
-              <a:buNone/>
-            </a:pPr>
-            <a:r>
-              <a:rPr lang="en-US" sz="1100" dirty="0">
-                <a:solidFill>
-                  <a:srgbClr val="1A1A1A"/>
-                </a:solidFill>
-                <a:latin typeface="Calibri" pitchFamily="34" charset="0"/>
-                <a:ea typeface="Calibri" pitchFamily="34" charset="-122"/>
-                <a:cs typeface="Calibri" pitchFamily="34" charset="-120"/>
-              </a:rPr>
-              <a:t>The vocabulary and the map (no code): corpus, method, model, embedding, in plain language with pictures. The deliverable, shown: a web essay on a runnable notebook.</a:t>
-            </a:r>
-            <a:endParaRPr lang="en-US" sz="1100" dirty="0"/>
-          </a:p>
-        </p:txBody>
-      </p:sp>
-      <p:sp>
-        <p:nvSpPr>
-          <p:cNvPr id="15" name="Shape 13"/>
-          <p:cNvSpPr/>
-          <p:nvPr/>
-        </p:nvSpPr>
-        <p:spPr>
-          <a:xfrm>
-            <a:off x="640080" y="3813048"/>
-            <a:ext cx="868680" cy="450342"/>
-          </a:xfrm>
-          <a:prstGeom prst="roundRect">
-            <a:avLst>
-              <a:gd name="adj" fmla="val 12183"/>
-            </a:avLst>
-          </a:prstGeom>
-          <a:solidFill>
-            <a:srgbClr val="7A3B2E"/>
-          </a:solidFill>
-          <a:ln/>
-        </p:spPr>
-      </p:sp>
-      <p:sp>
-        <p:nvSpPr>
-          <p:cNvPr id="16" name="Text 14"/>
-          <p:cNvSpPr/>
-          <p:nvPr/>
-        </p:nvSpPr>
-        <p:spPr>
-          <a:xfrm>
-            <a:off x="640080" y="3813048"/>
-            <a:ext cx="868680" cy="450342"/>
-          </a:xfrm>
-          <a:prstGeom prst="rect">
-            <a:avLst/>
-          </a:prstGeom>
-          <a:noFill/>
-          <a:ln/>
-        </p:spPr>
-        <p:txBody>
-          <a:bodyPr wrap="square" rtlCol="0" anchor="ctr"/>
-          <a:lstStyle/>
-          <a:p>
-            <a:pPr algn="ctr" indent="0" marL="0">
-              <a:buNone/>
-            </a:pPr>
-            <a:r>
-              <a:rPr lang="en-US" sz="1100" b="1" dirty="0">
-                <a:solidFill>
-                  <a:srgbClr val="FFFFFF"/>
-                </a:solidFill>
-                <a:latin typeface="Calibri" pitchFamily="34" charset="0"/>
-                <a:ea typeface="Calibri" pitchFamily="34" charset="-122"/>
-                <a:cs typeface="Calibri" pitchFamily="34" charset="-120"/>
-              </a:rPr>
-              <a:t>0:47</a:t>
-            </a:r>
-            <a:endParaRPr lang="en-US" sz="1100" dirty="0"/>
-          </a:p>
-        </p:txBody>
-      </p:sp>
-      <p:sp>
-        <p:nvSpPr>
-          <p:cNvPr id="17" name="Text 15"/>
-          <p:cNvSpPr/>
-          <p:nvPr/>
-        </p:nvSpPr>
-        <p:spPr>
-          <a:xfrm>
-            <a:off x="1691640" y="3794760"/>
-            <a:ext cx="9646920" cy="560070"/>
-          </a:xfrm>
-          <a:prstGeom prst="rect">
-            <a:avLst/>
-          </a:prstGeom>
-          <a:noFill/>
-          <a:ln/>
-        </p:spPr>
-        <p:txBody>
-          <a:bodyPr wrap="square" rtlCol="0" anchor="ctr">
-            <a:spAutoFit/>
-          </a:bodyPr>
-          <a:lstStyle/>
-          <a:p>
-            <a:pPr indent="0" marL="0">
-              <a:buNone/>
-            </a:pPr>
-            <a:r>
-              <a:rPr lang="en-US" sz="1100" dirty="0">
-                <a:solidFill>
-                  <a:srgbClr val="1A1A1A"/>
-                </a:solidFill>
-                <a:latin typeface="Calibri" pitchFamily="34" charset="0"/>
-                <a:ea typeface="Calibri" pitchFamily="34" charset="-122"/>
-                <a:cs typeface="Calibri" pitchFamily="34" charset="-120"/>
-              </a:rPr>
-              <a:t>Lab 1 (worked, participatory): copy the notebook to Drive and mount Drive into the runtime (this is how your corpus and results survive Colab wiping the session, everything saving to one project folder), put a Gemini key in Colab Secrets, load NYT wedding data, make a first chart. Hand out the common-errors cheat sheet. Then solo with a partner: draft three questions, pick one, have the AI write the code, run it, chart it. Write one sentence predicting your cell before you run it.</a:t>
-            </a:r>
-            <a:endParaRPr lang="en-US" sz="1100" dirty="0"/>
-          </a:p>
-        </p:txBody>
-      </p:sp>
-      <p:sp>
-        <p:nvSpPr>
-          <p:cNvPr id="18" name="Shape 16"/>
-          <p:cNvSpPr/>
-          <p:nvPr/>
-        </p:nvSpPr>
-        <p:spPr>
-          <a:xfrm>
-            <a:off x="640080" y="4373118"/>
-            <a:ext cx="868680" cy="450342"/>
-          </a:xfrm>
-          <a:prstGeom prst="roundRect">
-            <a:avLst>
-              <a:gd name="adj" fmla="val 12183"/>
-            </a:avLst>
-          </a:prstGeom>
-          <a:solidFill>
-            <a:srgbClr val="7A3B2E"/>
-          </a:solidFill>
-          <a:ln/>
-        </p:spPr>
-      </p:sp>
-      <p:sp>
-        <p:nvSpPr>
-          <p:cNvPr id="19" name="Text 17"/>
-          <p:cNvSpPr/>
-          <p:nvPr/>
-        </p:nvSpPr>
-        <p:spPr>
-          <a:xfrm>
-            <a:off x="640080" y="4373118"/>
-            <a:ext cx="868680" cy="450342"/>
-          </a:xfrm>
-          <a:prstGeom prst="rect">
-            <a:avLst/>
-          </a:prstGeom>
-          <a:noFill/>
-          <a:ln/>
-        </p:spPr>
-        <p:txBody>
-          <a:bodyPr wrap="square" rtlCol="0" anchor="ctr"/>
-          <a:lstStyle/>
-          <a:p>
-            <a:pPr algn="ctr" indent="0" marL="0">
-              <a:buNone/>
-            </a:pPr>
-            <a:r>
-              <a:rPr lang="en-US" sz="1100" b="1" dirty="0">
-                <a:solidFill>
-                  <a:srgbClr val="FFFFFF"/>
-                </a:solidFill>
-                <a:latin typeface="Calibri" pitchFamily="34" charset="0"/>
-                <a:ea typeface="Calibri" pitchFamily="34" charset="-122"/>
-                <a:cs typeface="Calibri" pitchFamily="34" charset="-120"/>
-              </a:rPr>
-              <a:t>1:20</a:t>
-            </a:r>
-            <a:endParaRPr lang="en-US" sz="1100" dirty="0"/>
-          </a:p>
-        </p:txBody>
-      </p:sp>
-      <p:sp>
-        <p:nvSpPr>
-          <p:cNvPr id="20" name="Text 18"/>
-          <p:cNvSpPr/>
-          <p:nvPr/>
-        </p:nvSpPr>
-        <p:spPr>
-          <a:xfrm>
-            <a:off x="1691640" y="4354830"/>
-            <a:ext cx="9646920" cy="560070"/>
-          </a:xfrm>
-          <a:prstGeom prst="rect">
-            <a:avLst/>
-          </a:prstGeom>
-          <a:noFill/>
-          <a:ln/>
-        </p:spPr>
-        <p:txBody>
-          <a:bodyPr wrap="square" rtlCol="0" anchor="ctr">
-            <a:spAutoFit/>
-          </a:bodyPr>
-          <a:lstStyle/>
-          <a:p>
-            <a:pPr indent="0" marL="0">
-              <a:buNone/>
-            </a:pPr>
-            <a:r>
-              <a:rPr lang="en-US" sz="1100" dirty="0">
-                <a:solidFill>
-                  <a:srgbClr val="1A1A1A"/>
-                </a:solidFill>
-                <a:latin typeface="Calibri" pitchFamily="34" charset="0"/>
-                <a:ea typeface="Calibri" pitchFamily="34" charset="-122"/>
-                <a:cs typeface="Calibri" pitchFamily="34" charset="-120"/>
-              </a:rPr>
-              <a:t>Break</a:t>
-            </a:r>
-            <a:endParaRPr lang="en-US" sz="1100" dirty="0"/>
-          </a:p>
-        </p:txBody>
-      </p:sp>
-      <p:sp>
-        <p:nvSpPr>
-          <p:cNvPr id="21" name="Shape 19"/>
-          <p:cNvSpPr/>
-          <p:nvPr/>
-        </p:nvSpPr>
-        <p:spPr>
-          <a:xfrm>
-            <a:off x="640080" y="4933188"/>
-            <a:ext cx="868680" cy="450342"/>
-          </a:xfrm>
-          <a:prstGeom prst="roundRect">
-            <a:avLst>
-              <a:gd name="adj" fmla="val 12183"/>
-            </a:avLst>
-          </a:prstGeom>
-          <a:solidFill>
-            <a:srgbClr val="7A3B2E"/>
-          </a:solidFill>
-          <a:ln/>
-        </p:spPr>
-      </p:sp>
-      <p:sp>
-        <p:nvSpPr>
-          <p:cNvPr id="22" name="Text 20"/>
-          <p:cNvSpPr/>
-          <p:nvPr/>
-        </p:nvSpPr>
-        <p:spPr>
-          <a:xfrm>
-            <a:off x="640080" y="4933188"/>
-            <a:ext cx="868680" cy="450342"/>
-          </a:xfrm>
-          <a:prstGeom prst="rect">
-            <a:avLst/>
-          </a:prstGeom>
-          <a:noFill/>
-          <a:ln/>
-        </p:spPr>
-        <p:txBody>
-          <a:bodyPr wrap="square" rtlCol="0" anchor="ctr"/>
-          <a:lstStyle/>
-          <a:p>
-            <a:pPr algn="ctr" indent="0" marL="0">
-              <a:buNone/>
-            </a:pPr>
-            <a:r>
-              <a:rPr lang="en-US" sz="1100" b="1" dirty="0">
-                <a:solidFill>
-                  <a:srgbClr val="FFFFFF"/>
-                </a:solidFill>
-                <a:latin typeface="Calibri" pitchFamily="34" charset="0"/>
-                <a:ea typeface="Calibri" pitchFamily="34" charset="-122"/>
-                <a:cs typeface="Calibri" pitchFamily="34" charset="-120"/>
-              </a:rPr>
-              <a:t>1:30</a:t>
-            </a:r>
-            <a:endParaRPr lang="en-US" sz="1100" dirty="0"/>
-          </a:p>
-        </p:txBody>
-      </p:sp>
-      <p:sp>
-        <p:nvSpPr>
-          <p:cNvPr id="23" name="Text 21"/>
-          <p:cNvSpPr/>
-          <p:nvPr/>
-        </p:nvSpPr>
-        <p:spPr>
-          <a:xfrm>
-            <a:off x="1691640" y="4914900"/>
-            <a:ext cx="9646920" cy="560070"/>
-          </a:xfrm>
-          <a:prstGeom prst="rect">
-            <a:avLst/>
-          </a:prstGeom>
-          <a:noFill/>
-          <a:ln/>
-        </p:spPr>
-        <p:txBody>
-          <a:bodyPr wrap="square" rtlCol="0" anchor="ctr">
-            <a:spAutoFit/>
-          </a:bodyPr>
-          <a:lstStyle/>
-          <a:p>
-            <a:pPr indent="0" marL="0">
-              <a:buNone/>
-            </a:pPr>
-            <a:r>
-              <a:rPr lang="en-US" sz="1100" dirty="0">
-                <a:solidFill>
-                  <a:srgbClr val="1A1A1A"/>
-                </a:solidFill>
-                <a:latin typeface="Calibri" pitchFamily="34" charset="0"/>
-                <a:ea typeface="Calibri" pitchFamily="34" charset="-122"/>
-                <a:cs typeface="Calibri" pitchFamily="34" charset="-120"/>
-              </a:rPr>
-              <a:t>Lab 2 (worked): count words, then pixels. First the top words of a small lyrics sample (stop-words dominate the list until you remove them, the first counting decision), then an image corpus: ~200 Met thumbnails ranked darkest to brightest by average brightness. Text and images, counted with the same technique; image projects begin here.</a:t>
-            </a:r>
-            <a:endParaRPr lang="en-US" sz="1100" dirty="0"/>
-          </a:p>
-        </p:txBody>
-      </p:sp>
-      <p:sp>
-        <p:nvSpPr>
-          <p:cNvPr id="24" name="Shape 22"/>
-          <p:cNvSpPr/>
-          <p:nvPr/>
-        </p:nvSpPr>
-        <p:spPr>
-          <a:xfrm>
-            <a:off x="640080" y="5493258"/>
-            <a:ext cx="868680" cy="450342"/>
-          </a:xfrm>
-          <a:prstGeom prst="roundRect">
-            <a:avLst>
-              <a:gd name="adj" fmla="val 12183"/>
-            </a:avLst>
-          </a:prstGeom>
-          <a:solidFill>
-            <a:srgbClr val="7A3B2E"/>
-          </a:solidFill>
-          <a:ln/>
-        </p:spPr>
-      </p:sp>
-      <p:sp>
-        <p:nvSpPr>
-          <p:cNvPr id="25" name="Text 23"/>
-          <p:cNvSpPr/>
-          <p:nvPr/>
-        </p:nvSpPr>
-        <p:spPr>
-          <a:xfrm>
-            <a:off x="640080" y="5493258"/>
-            <a:ext cx="868680" cy="450342"/>
-          </a:xfrm>
-          <a:prstGeom prst="rect">
-            <a:avLst/>
-          </a:prstGeom>
-          <a:noFill/>
-          <a:ln/>
-        </p:spPr>
-        <p:txBody>
-          <a:bodyPr wrap="square" rtlCol="0" anchor="ctr"/>
-          <a:lstStyle/>
-          <a:p>
-            <a:pPr algn="ctr" indent="0" marL="0">
-              <a:buNone/>
-            </a:pPr>
-            <a:r>
-              <a:rPr lang="en-US" sz="1100" b="1" dirty="0">
-                <a:solidFill>
-                  <a:srgbClr val="FFFFFF"/>
-                </a:solidFill>
-                <a:latin typeface="Calibri" pitchFamily="34" charset="0"/>
-                <a:ea typeface="Calibri" pitchFamily="34" charset="-122"/>
-                <a:cs typeface="Calibri" pitchFamily="34" charset="-120"/>
-              </a:rPr>
-              <a:t>1:52</a:t>
-            </a:r>
-            <a:endParaRPr lang="en-US" sz="1100" dirty="0"/>
-          </a:p>
-        </p:txBody>
-      </p:sp>
-      <p:sp>
-        <p:nvSpPr>
-          <p:cNvPr id="26" name="Text 24"/>
-          <p:cNvSpPr/>
-          <p:nvPr/>
-        </p:nvSpPr>
-        <p:spPr>
-          <a:xfrm>
-            <a:off x="1691640" y="5474970"/>
-            <a:ext cx="9646920" cy="560070"/>
-          </a:xfrm>
-          <a:prstGeom prst="rect">
-            <a:avLst/>
-          </a:prstGeom>
-          <a:noFill/>
-          <a:ln/>
-        </p:spPr>
-        <p:txBody>
-          <a:bodyPr wrap="square" rtlCol="0" anchor="ctr">
-            <a:spAutoFit/>
-          </a:bodyPr>
-          <a:lstStyle/>
-          <a:p>
-            <a:pPr indent="0" marL="0">
-              <a:buNone/>
-            </a:pPr>
-            <a:r>
-              <a:rPr lang="en-US" sz="1100" dirty="0">
-                <a:solidFill>
-                  <a:srgbClr val="1A1A1A"/>
-                </a:solidFill>
-                <a:latin typeface="Calibri" pitchFamily="34" charset="0"/>
-                <a:ea typeface="Calibri" pitchFamily="34" charset="-122"/>
-                <a:cs typeface="Calibri" pitchFamily="34" charset="-120"/>
-              </a:rPr>
-              <a:t>Preview of the methods ahead; the weekly routines introduced. First check-out.</a:t>
-            </a:r>
-            <a:endParaRPr lang="en-US" sz="1100" dirty="0"/>
+              <a:t>Interrogate the study, debate it, or critique each other's work.</a:t>
+            </a:r>
+            <a:endParaRPr lang="en-US" sz="1500" dirty="0"/>
           </a:p>
         </p:txBody>
       </p:sp>
@@ -3988,7 +3578,7 @@
                 <a:ea typeface="Cambria" pitchFamily="34" charset="-122"/>
                 <a:cs typeface="Cambria" pitchFamily="34" charset="-120"/>
               </a:rPr>
-              <a:t>Reading &amp; homework</a:t>
+              <a:t>The session</a:t>
             </a:r>
             <a:endParaRPr lang="en-US" sz="3000" dirty="0"/>
           </a:p>
@@ -4002,11 +3592,13 @@
         </p:nvSpPr>
         <p:spPr>
           <a:xfrm>
-            <a:off x="640080" y="1673352"/>
-            <a:ext cx="219456" cy="219456"/>
-          </a:xfrm>
-          <a:prstGeom prst="ellipse">
-            <a:avLst/>
+            <a:off x="640080" y="1572768"/>
+            <a:ext cx="868680" cy="450342"/>
+          </a:xfrm>
+          <a:prstGeom prst="roundRect">
+            <a:avLst>
+              <a:gd name="adj" fmla="val 12183"/>
+            </a:avLst>
           </a:prstGeom>
           <a:solidFill>
             <a:srgbClr val="7A3B2E"/>
@@ -4022,8 +3614,8 @@
         </p:nvSpPr>
         <p:spPr>
           <a:xfrm>
-            <a:off x="1051560" y="1600200"/>
-            <a:ext cx="10424160" cy="365760"/>
+            <a:off x="640080" y="1572768"/>
+            <a:ext cx="868680" cy="450342"/>
           </a:xfrm>
           <a:prstGeom prst="rect">
             <a:avLst/>
@@ -4035,21 +3627,21 @@
           <a:bodyPr wrap="square" rtlCol="0" anchor="ctr"/>
           <a:lstStyle/>
           <a:p>
-            <a:pPr indent="0" marL="0">
-              <a:buNone/>
-            </a:pPr>
-            <a:r>
-              <a:rPr lang="en-US" sz="1500" b="1" dirty="0">
-                <a:solidFill>
-                  <a:srgbClr val="7A3B2E"/>
+            <a:pPr algn="ctr" indent="0" marL="0">
+              <a:buNone/>
+            </a:pPr>
+            <a:r>
+              <a:rPr lang="en-US" sz="1100" b="1" dirty="0">
+                <a:solidFill>
+                  <a:srgbClr val="FFFFFF"/>
                 </a:solidFill>
                 <a:latin typeface="Calibri" pitchFamily="34" charset="0"/>
                 <a:ea typeface="Calibri" pitchFamily="34" charset="-122"/>
                 <a:cs typeface="Calibri" pitchFamily="34" charset="-120"/>
               </a:rPr>
-              <a:t>Reading</a:t>
-            </a:r>
-            <a:endParaRPr lang="en-US" sz="1500" dirty="0"/>
+              <a:t>0:00</a:t>
+            </a:r>
+            <a:endParaRPr lang="en-US" sz="1100" dirty="0"/>
           </a:p>
         </p:txBody>
       </p:sp>
@@ -4061,17 +3653,17 @@
         </p:nvSpPr>
         <p:spPr>
           <a:xfrm>
-            <a:off x="1051560" y="1984248"/>
-            <a:ext cx="10424160" cy="731520"/>
-          </a:xfrm>
-          <a:prstGeom prst="rect">
-            <a:avLst/>
-          </a:prstGeom>
-          <a:noFill/>
-          <a:ln/>
-        </p:spPr>
-        <p:txBody>
-          <a:bodyPr wrap="square" rtlCol="0" anchor="t">
+            <a:off x="1691640" y="1554480"/>
+            <a:ext cx="9646920" cy="560070"/>
+          </a:xfrm>
+          <a:prstGeom prst="rect">
+            <a:avLst/>
+          </a:prstGeom>
+          <a:noFill/>
+          <a:ln/>
+        </p:spPr>
+        <p:txBody>
+          <a:bodyPr wrap="square" rtlCol="0" anchor="ctr">
             <a:spAutoFit/>
           </a:bodyPr>
           <a:lstStyle/>
@@ -4080,7 +3672,7 @@
               <a:buNone/>
             </a:pPr>
             <a:r>
-              <a:rPr lang="en-US" sz="1400" dirty="0">
+              <a:rPr lang="en-US" sz="1100" dirty="0">
                 <a:solidFill>
                   <a:srgbClr val="1A1A1A"/>
                 </a:solidFill>
@@ -4088,9 +3680,9 @@
                 <a:ea typeface="Calibri" pitchFamily="34" charset="-122"/>
                 <a:cs typeface="Calibri" pitchFamily="34" charset="-120"/>
               </a:rPr>
-              <a:t>Bollen et al., the cognitive-distortions hockey stick (PNAS 2021), with the Schmidt et al. critique</a:t>
-            </a:r>
-            <a:endParaRPr lang="en-US" sz="1400" dirty="0"/>
+              <a:t>Introductions and working agreements, demonstrated in practice. Today's live coding deliberately includes real mistakes.</a:t>
+            </a:r>
+            <a:endParaRPr lang="en-US" sz="1100" dirty="0"/>
           </a:p>
         </p:txBody>
       </p:sp>
@@ -4102,14 +3694,16 @@
         </p:nvSpPr>
         <p:spPr>
           <a:xfrm>
-            <a:off x="640080" y="2633472"/>
-            <a:ext cx="219456" cy="219456"/>
-          </a:xfrm>
-          <a:prstGeom prst="ellipse">
-            <a:avLst/>
-          </a:prstGeom>
-          <a:solidFill>
-            <a:srgbClr val="3F6F5F"/>
+            <a:off x="640080" y="2132838"/>
+            <a:ext cx="868680" cy="450342"/>
+          </a:xfrm>
+          <a:prstGeom prst="roundRect">
+            <a:avLst>
+              <a:gd name="adj" fmla="val 12183"/>
+            </a:avLst>
+          </a:prstGeom>
+          <a:solidFill>
+            <a:srgbClr val="7A3B2E"/>
           </a:solidFill>
           <a:ln/>
         </p:spPr>
@@ -4122,8 +3716,8 @@
         </p:nvSpPr>
         <p:spPr>
           <a:xfrm>
-            <a:off x="1051560" y="2560320"/>
-            <a:ext cx="10424160" cy="365760"/>
+            <a:off x="640080" y="2132838"/>
+            <a:ext cx="868680" cy="450342"/>
           </a:xfrm>
           <a:prstGeom prst="rect">
             <a:avLst/>
@@ -4135,21 +3729,21 @@
           <a:bodyPr wrap="square" rtlCol="0" anchor="ctr"/>
           <a:lstStyle/>
           <a:p>
-            <a:pPr indent="0" marL="0">
-              <a:buNone/>
-            </a:pPr>
-            <a:r>
-              <a:rPr lang="en-US" sz="1500" b="1" dirty="0">
-                <a:solidFill>
-                  <a:srgbClr val="3F6F5F"/>
+            <a:pPr algn="ctr" indent="0" marL="0">
+              <a:buNone/>
+            </a:pPr>
+            <a:r>
+              <a:rPr lang="en-US" sz="1100" b="1" dirty="0">
+                <a:solidFill>
+                  <a:srgbClr val="FFFFFF"/>
                 </a:solidFill>
                 <a:latin typeface="Calibri" pitchFamily="34" charset="0"/>
                 <a:ea typeface="Calibri" pitchFamily="34" charset="-122"/>
                 <a:cs typeface="Calibri" pitchFamily="34" charset="-120"/>
               </a:rPr>
-              <a:t>Supplement</a:t>
-            </a:r>
-            <a:endParaRPr lang="en-US" sz="1500" dirty="0"/>
+              <a:t>0:10</a:t>
+            </a:r>
+            <a:endParaRPr lang="en-US" sz="1100" dirty="0"/>
           </a:p>
         </p:txBody>
       </p:sp>
@@ -4161,17 +3755,17 @@
         </p:nvSpPr>
         <p:spPr>
           <a:xfrm>
-            <a:off x="1051560" y="2944368"/>
-            <a:ext cx="10424160" cy="731520"/>
-          </a:xfrm>
-          <a:prstGeom prst="rect">
-            <a:avLst/>
-          </a:prstGeom>
-          <a:noFill/>
-          <a:ln/>
-        </p:spPr>
-        <p:txBody>
-          <a:bodyPr wrap="square" rtlCol="0" anchor="t">
+            <a:off x="1691640" y="2114550"/>
+            <a:ext cx="9646920" cy="560070"/>
+          </a:xfrm>
+          <a:prstGeom prst="rect">
+            <a:avLst/>
+          </a:prstGeom>
+          <a:noFill/>
+          <a:ln/>
+        </p:spPr>
+        <p:txBody>
+          <a:bodyPr wrap="square" rtlCol="0" anchor="ctr">
             <a:spAutoFit/>
           </a:bodyPr>
           <a:lstStyle/>
@@ -4180,7 +3774,7 @@
               <a:buNone/>
             </a:pPr>
             <a:r>
-              <a:rPr lang="en-US" sz="1400" dirty="0">
+              <a:rPr lang="en-US" sz="1100" dirty="0">
                 <a:solidFill>
                   <a:srgbClr val="1A1A1A"/>
                 </a:solidFill>
@@ -4188,9 +3782,9 @@
                 <a:ea typeface="Calibri" pitchFamily="34" charset="-122"/>
                 <a:cs typeface="Calibri" pitchFamily="34" charset="-120"/>
               </a:rPr>
-              <a:t>Robin Sloan, Writing with the machine</a:t>
-            </a:r>
-            <a:endParaRPr lang="en-US" sz="1400" dirty="0"/>
+              <a:t>Lecture, the stakes: machines already read culture at scale, the feed ranking what you see, the moderation filter, the model trained on scraped art and prose, and that reading happens without you. Counting culture has produced real knowledge (the screenplay verb split, the Rowling unmasking, pop music's 1991 revolution) and real mistakes, and both look identical until someone checks. In ten weeks you do the reading yourself and publish something checkable.</a:t>
+            </a:r>
+            <a:endParaRPr lang="en-US" sz="1100" dirty="0"/>
           </a:p>
         </p:txBody>
       </p:sp>
@@ -4202,14 +3796,16 @@
         </p:nvSpPr>
         <p:spPr>
           <a:xfrm>
-            <a:off x="640080" y="3593592"/>
-            <a:ext cx="219456" cy="219456"/>
-          </a:xfrm>
-          <a:prstGeom prst="ellipse">
-            <a:avLst/>
-          </a:prstGeom>
-          <a:solidFill>
-            <a:srgbClr val="B9852F"/>
+            <a:off x="640080" y="2692908"/>
+            <a:ext cx="868680" cy="450342"/>
+          </a:xfrm>
+          <a:prstGeom prst="roundRect">
+            <a:avLst>
+              <a:gd name="adj" fmla="val 12183"/>
+            </a:avLst>
+          </a:prstGeom>
+          <a:solidFill>
+            <a:srgbClr val="7A3B2E"/>
           </a:solidFill>
           <a:ln/>
         </p:spPr>
@@ -4222,8 +3818,8 @@
         </p:nvSpPr>
         <p:spPr>
           <a:xfrm>
-            <a:off x="1051560" y="3520440"/>
-            <a:ext cx="10424160" cy="365760"/>
+            <a:off x="640080" y="2692908"/>
+            <a:ext cx="868680" cy="450342"/>
           </a:xfrm>
           <a:prstGeom prst="rect">
             <a:avLst/>
@@ -4235,21 +3831,21 @@
           <a:bodyPr wrap="square" rtlCol="0" anchor="ctr"/>
           <a:lstStyle/>
           <a:p>
-            <a:pPr indent="0" marL="0">
-              <a:buNone/>
-            </a:pPr>
-            <a:r>
-              <a:rPr lang="en-US" sz="1500" b="1" dirty="0">
-                <a:solidFill>
-                  <a:srgbClr val="B9852F"/>
+            <a:pPr algn="ctr" indent="0" marL="0">
+              <a:buNone/>
+            </a:pPr>
+            <a:r>
+              <a:rPr lang="en-US" sz="1100" b="1" dirty="0">
+                <a:solidFill>
+                  <a:srgbClr val="FFFFFF"/>
                 </a:solidFill>
                 <a:latin typeface="Calibri" pitchFamily="34" charset="0"/>
                 <a:ea typeface="Calibri" pitchFamily="34" charset="-122"/>
                 <a:cs typeface="Calibri" pitchFamily="34" charset="-120"/>
               </a:rPr>
-              <a:t>Deeper (optional)</a:t>
-            </a:r>
-            <a:endParaRPr lang="en-US" sz="1500" dirty="0"/>
+              <a:t>0:28</a:t>
+            </a:r>
+            <a:endParaRPr lang="en-US" sz="1100" dirty="0"/>
           </a:p>
         </p:txBody>
       </p:sp>
@@ -4261,17 +3857,17 @@
         </p:nvSpPr>
         <p:spPr>
           <a:xfrm>
-            <a:off x="1051560" y="3904488"/>
-            <a:ext cx="10424160" cy="731520"/>
-          </a:xfrm>
-          <a:prstGeom prst="rect">
-            <a:avLst/>
-          </a:prstGeom>
-          <a:noFill/>
-          <a:ln/>
-        </p:spPr>
-        <p:txBody>
-          <a:bodyPr wrap="square" rtlCol="0" anchor="t">
+            <a:off x="1691640" y="2674620"/>
+            <a:ext cx="9646920" cy="560070"/>
+          </a:xfrm>
+          <a:prstGeom prst="rect">
+            <a:avLst/>
+          </a:prstGeom>
+          <a:noFill/>
+          <a:ln/>
+        </p:spPr>
+        <p:txBody>
+          <a:bodyPr wrap="square" rtlCol="0" anchor="ctr">
             <a:spAutoFit/>
           </a:bodyPr>
           <a:lstStyle/>
@@ -4280,7 +3876,7 @@
               <a:buNone/>
             </a:pPr>
             <a:r>
-              <a:rPr lang="en-US" sz="1400" dirty="0">
+              <a:rPr lang="en-US" sz="1100" dirty="0">
                 <a:solidFill>
                   <a:srgbClr val="1A1A1A"/>
                 </a:solidFill>
@@ -4288,9 +3884,9 @@
                 <a:ea typeface="Calibri" pitchFamily="34" charset="-122"/>
                 <a:cs typeface="Calibri" pitchFamily="34" charset="-120"/>
               </a:rPr>
-              <a:t>Moretti, Conjectures on World Literature (NLR 2000), the founding argument for reading culture at scale</a:t>
-            </a:r>
-            <a:endParaRPr lang="en-US" sz="1400" dirty="0"/>
+              <a:t>Look at This, then Question It: She Giggles, He Gallops.</a:t>
+            </a:r>
+            <a:endParaRPr lang="en-US" sz="1100" dirty="0"/>
           </a:p>
         </p:txBody>
       </p:sp>
@@ -4302,14 +3898,16 @@
         </p:nvSpPr>
         <p:spPr>
           <a:xfrm>
-            <a:off x="640080" y="4553712"/>
-            <a:ext cx="219456" cy="219456"/>
-          </a:xfrm>
-          <a:prstGeom prst="ellipse">
-            <a:avLst/>
-          </a:prstGeom>
-          <a:solidFill>
-            <a:srgbClr val="3F6F5F"/>
+            <a:off x="640080" y="3252978"/>
+            <a:ext cx="868680" cy="450342"/>
+          </a:xfrm>
+          <a:prstGeom prst="roundRect">
+            <a:avLst>
+              <a:gd name="adj" fmla="val 12183"/>
+            </a:avLst>
+          </a:prstGeom>
+          <a:solidFill>
+            <a:srgbClr val="7A3B2E"/>
           </a:solidFill>
           <a:ln/>
         </p:spPr>
@@ -4322,8 +3920,8 @@
         </p:nvSpPr>
         <p:spPr>
           <a:xfrm>
-            <a:off x="1051560" y="4480560"/>
-            <a:ext cx="10424160" cy="365760"/>
+            <a:off x="640080" y="3252978"/>
+            <a:ext cx="868680" cy="450342"/>
           </a:xfrm>
           <a:prstGeom prst="rect">
             <a:avLst/>
@@ -4335,21 +3933,21 @@
           <a:bodyPr wrap="square" rtlCol="0" anchor="ctr"/>
           <a:lstStyle/>
           <a:p>
-            <a:pPr indent="0" marL="0">
-              <a:buNone/>
-            </a:pPr>
-            <a:r>
-              <a:rPr lang="en-US" sz="1500" b="1" dirty="0">
-                <a:solidFill>
-                  <a:srgbClr val="3F6F5F"/>
+            <a:pPr algn="ctr" indent="0" marL="0">
+              <a:buNone/>
+            </a:pPr>
+            <a:r>
+              <a:rPr lang="en-US" sz="1100" b="1" dirty="0">
+                <a:solidFill>
+                  <a:srgbClr val="FFFFFF"/>
                 </a:solidFill>
                 <a:latin typeface="Calibri" pitchFamily="34" charset="0"/>
                 <a:ea typeface="Calibri" pitchFamily="34" charset="-122"/>
                 <a:cs typeface="Calibri" pitchFamily="34" charset="-120"/>
               </a:rPr>
-              <a:t>Sketch</a:t>
-            </a:r>
-            <a:endParaRPr lang="en-US" sz="1500" dirty="0"/>
+              <a:t>0:35</a:t>
+            </a:r>
+            <a:endParaRPr lang="en-US" sz="1100" dirty="0"/>
           </a:p>
         </p:txBody>
       </p:sp>
@@ -4361,17 +3959,17 @@
         </p:nvSpPr>
         <p:spPr>
           <a:xfrm>
-            <a:off x="1051560" y="4864608"/>
-            <a:ext cx="10424160" cy="731520"/>
-          </a:xfrm>
-          <a:prstGeom prst="rect">
-            <a:avLst/>
-          </a:prstGeom>
-          <a:noFill/>
-          <a:ln/>
-        </p:spPr>
-        <p:txBody>
-          <a:bodyPr wrap="square" rtlCol="0" anchor="t">
+            <a:off x="1691640" y="3234690"/>
+            <a:ext cx="9646920" cy="560070"/>
+          </a:xfrm>
+          <a:prstGeom prst="rect">
+            <a:avLst/>
+          </a:prstGeom>
+          <a:noFill/>
+          <a:ln/>
+        </p:spPr>
+        <p:txBody>
+          <a:bodyPr wrap="square" rtlCol="0" anchor="ctr">
             <a:spAutoFit/>
           </a:bodyPr>
           <a:lstStyle/>
@@ -4380,7 +3978,7 @@
               <a:buNone/>
             </a:pPr>
             <a:r>
-              <a:rPr lang="en-US" sz="1400" dirty="0">
+              <a:rPr lang="en-US" sz="1100" dirty="0">
                 <a:solidFill>
                   <a:srgbClr val="1A1A1A"/>
                 </a:solidFill>
@@ -4388,9 +3986,9 @@
                 <a:ea typeface="Calibri" pitchFamily="34" charset="-122"/>
                 <a:cs typeface="Calibri" pitchFamily="34" charset="-120"/>
               </a:rPr>
-              <a:t>One question from your life answerable with text or image data; three sentences.</a:t>
-            </a:r>
-            <a:endParaRPr lang="en-US" sz="1400" dirty="0"/>
+              <a:t>The vocabulary and the map (no code): corpus, method, model, embedding, in plain language with pictures. The deliverable, shown: a web essay on a runnable notebook.</a:t>
+            </a:r>
+            <a:endParaRPr lang="en-US" sz="1100" dirty="0"/>
           </a:p>
         </p:txBody>
       </p:sp>
@@ -4402,11 +4000,13 @@
         </p:nvSpPr>
         <p:spPr>
           <a:xfrm>
-            <a:off x="640080" y="5513832"/>
-            <a:ext cx="219456" cy="219456"/>
-          </a:xfrm>
-          <a:prstGeom prst="ellipse">
-            <a:avLst/>
+            <a:off x="640080" y="3813048"/>
+            <a:ext cx="868680" cy="450342"/>
+          </a:xfrm>
+          <a:prstGeom prst="roundRect">
+            <a:avLst>
+              <a:gd name="adj" fmla="val 12183"/>
+            </a:avLst>
           </a:prstGeom>
           <a:solidFill>
             <a:srgbClr val="7A3B2E"/>
@@ -4422,8 +4022,8 @@
         </p:nvSpPr>
         <p:spPr>
           <a:xfrm>
-            <a:off x="1051560" y="5440680"/>
-            <a:ext cx="10424160" cy="365760"/>
+            <a:off x="640080" y="3813048"/>
+            <a:ext cx="868680" cy="450342"/>
           </a:xfrm>
           <a:prstGeom prst="rect">
             <a:avLst/>
@@ -4435,21 +4035,21 @@
           <a:bodyPr wrap="square" rtlCol="0" anchor="ctr"/>
           <a:lstStyle/>
           <a:p>
-            <a:pPr indent="0" marL="0">
-              <a:buNone/>
-            </a:pPr>
-            <a:r>
-              <a:rPr lang="en-US" sz="1500" b="1" dirty="0">
-                <a:solidFill>
-                  <a:srgbClr val="7A3B2E"/>
+            <a:pPr algn="ctr" indent="0" marL="0">
+              <a:buNone/>
+            </a:pPr>
+            <a:r>
+              <a:rPr lang="en-US" sz="1100" b="1" dirty="0">
+                <a:solidFill>
+                  <a:srgbClr val="FFFFFF"/>
                 </a:solidFill>
                 <a:latin typeface="Calibri" pitchFamily="34" charset="0"/>
                 <a:ea typeface="Calibri" pitchFamily="34" charset="-122"/>
                 <a:cs typeface="Calibri" pitchFamily="34" charset="-120"/>
               </a:rPr>
-              <a:t>Check (AI closed)</a:t>
-            </a:r>
-            <a:endParaRPr lang="en-US" sz="1500" dirty="0"/>
+              <a:t>0:47</a:t>
+            </a:r>
+            <a:endParaRPr lang="en-US" sz="1100" dirty="0"/>
           </a:p>
         </p:txBody>
       </p:sp>
@@ -4461,17 +4061,17 @@
         </p:nvSpPr>
         <p:spPr>
           <a:xfrm>
-            <a:off x="1051560" y="5824728"/>
-            <a:ext cx="10424160" cy="731520"/>
-          </a:xfrm>
-          <a:prstGeom prst="rect">
-            <a:avLst/>
-          </a:prstGeom>
-          <a:noFill/>
-          <a:ln/>
-        </p:spPr>
-        <p:txBody>
-          <a:bodyPr wrap="square" rtlCol="0" anchor="t">
+            <a:off x="1691640" y="3794760"/>
+            <a:ext cx="9646920" cy="560070"/>
+          </a:xfrm>
+          <a:prstGeom prst="rect">
+            <a:avLst/>
+          </a:prstGeom>
+          <a:noFill/>
+          <a:ln/>
+        </p:spPr>
+        <p:txBody>
+          <a:bodyPr wrap="square" rtlCol="0" anchor="ctr">
             <a:spAutoFit/>
           </a:bodyPr>
           <a:lstStyle/>
@@ -4480,7 +4080,7 @@
               <a:buNone/>
             </a:pPr>
             <a:r>
-              <a:rPr lang="en-US" sz="1400" dirty="0">
+              <a:rPr lang="en-US" sz="1100" dirty="0">
                 <a:solidFill>
                   <a:srgbClr val="1A1A1A"/>
                 </a:solidFill>
@@ -4488,9 +4088,315 @@
                 <a:ea typeface="Calibri" pitchFamily="34" charset="-122"/>
                 <a:cs typeface="Calibri" pitchFamily="34" charset="-120"/>
               </a:rPr>
-              <a:t>Trace it: one written sentence predicting what your cell does before you run it. (Competency 1.)</a:t>
-            </a:r>
-            <a:endParaRPr lang="en-US" sz="1400" dirty="0"/>
+              <a:t>Lab 1 (worked, participatory): copy the notebook to Drive and mount Drive into the runtime (this is how your corpus and results survive Colab wiping the session, everything saving to one project folder), put a Gemini key in Colab Secrets, load NYT wedding data, make a first chart. Hand out the common-errors cheat sheet. Then solo with a partner: draft three questions, pick one, have the AI write the code, run it, chart it. Write one sentence predicting your cell before you run it.</a:t>
+            </a:r>
+            <a:endParaRPr lang="en-US" sz="1100" dirty="0"/>
+          </a:p>
+        </p:txBody>
+      </p:sp>
+      <p:sp>
+        <p:nvSpPr>
+          <p:cNvPr id="18" name="Shape 16"/>
+          <p:cNvSpPr/>
+          <p:nvPr/>
+        </p:nvSpPr>
+        <p:spPr>
+          <a:xfrm>
+            <a:off x="640080" y="4373118"/>
+            <a:ext cx="868680" cy="450342"/>
+          </a:xfrm>
+          <a:prstGeom prst="roundRect">
+            <a:avLst>
+              <a:gd name="adj" fmla="val 12183"/>
+            </a:avLst>
+          </a:prstGeom>
+          <a:solidFill>
+            <a:srgbClr val="7A3B2E"/>
+          </a:solidFill>
+          <a:ln/>
+        </p:spPr>
+      </p:sp>
+      <p:sp>
+        <p:nvSpPr>
+          <p:cNvPr id="19" name="Text 17"/>
+          <p:cNvSpPr/>
+          <p:nvPr/>
+        </p:nvSpPr>
+        <p:spPr>
+          <a:xfrm>
+            <a:off x="640080" y="4373118"/>
+            <a:ext cx="868680" cy="450342"/>
+          </a:xfrm>
+          <a:prstGeom prst="rect">
+            <a:avLst/>
+          </a:prstGeom>
+          <a:noFill/>
+          <a:ln/>
+        </p:spPr>
+        <p:txBody>
+          <a:bodyPr wrap="square" rtlCol="0" anchor="ctr"/>
+          <a:lstStyle/>
+          <a:p>
+            <a:pPr algn="ctr" indent="0" marL="0">
+              <a:buNone/>
+            </a:pPr>
+            <a:r>
+              <a:rPr lang="en-US" sz="1100" b="1" dirty="0">
+                <a:solidFill>
+                  <a:srgbClr val="FFFFFF"/>
+                </a:solidFill>
+                <a:latin typeface="Calibri" pitchFamily="34" charset="0"/>
+                <a:ea typeface="Calibri" pitchFamily="34" charset="-122"/>
+                <a:cs typeface="Calibri" pitchFamily="34" charset="-120"/>
+              </a:rPr>
+              <a:t>1:20</a:t>
+            </a:r>
+            <a:endParaRPr lang="en-US" sz="1100" dirty="0"/>
+          </a:p>
+        </p:txBody>
+      </p:sp>
+      <p:sp>
+        <p:nvSpPr>
+          <p:cNvPr id="20" name="Text 18"/>
+          <p:cNvSpPr/>
+          <p:nvPr/>
+        </p:nvSpPr>
+        <p:spPr>
+          <a:xfrm>
+            <a:off x="1691640" y="4354830"/>
+            <a:ext cx="9646920" cy="560070"/>
+          </a:xfrm>
+          <a:prstGeom prst="rect">
+            <a:avLst/>
+          </a:prstGeom>
+          <a:noFill/>
+          <a:ln/>
+        </p:spPr>
+        <p:txBody>
+          <a:bodyPr wrap="square" rtlCol="0" anchor="ctr">
+            <a:spAutoFit/>
+          </a:bodyPr>
+          <a:lstStyle/>
+          <a:p>
+            <a:pPr indent="0" marL="0">
+              <a:buNone/>
+            </a:pPr>
+            <a:r>
+              <a:rPr lang="en-US" sz="1100" dirty="0">
+                <a:solidFill>
+                  <a:srgbClr val="1A1A1A"/>
+                </a:solidFill>
+                <a:latin typeface="Calibri" pitchFamily="34" charset="0"/>
+                <a:ea typeface="Calibri" pitchFamily="34" charset="-122"/>
+                <a:cs typeface="Calibri" pitchFamily="34" charset="-120"/>
+              </a:rPr>
+              <a:t>Break</a:t>
+            </a:r>
+            <a:endParaRPr lang="en-US" sz="1100" dirty="0"/>
+          </a:p>
+        </p:txBody>
+      </p:sp>
+      <p:sp>
+        <p:nvSpPr>
+          <p:cNvPr id="21" name="Shape 19"/>
+          <p:cNvSpPr/>
+          <p:nvPr/>
+        </p:nvSpPr>
+        <p:spPr>
+          <a:xfrm>
+            <a:off x="640080" y="4933188"/>
+            <a:ext cx="868680" cy="450342"/>
+          </a:xfrm>
+          <a:prstGeom prst="roundRect">
+            <a:avLst>
+              <a:gd name="adj" fmla="val 12183"/>
+            </a:avLst>
+          </a:prstGeom>
+          <a:solidFill>
+            <a:srgbClr val="7A3B2E"/>
+          </a:solidFill>
+          <a:ln/>
+        </p:spPr>
+      </p:sp>
+      <p:sp>
+        <p:nvSpPr>
+          <p:cNvPr id="22" name="Text 20"/>
+          <p:cNvSpPr/>
+          <p:nvPr/>
+        </p:nvSpPr>
+        <p:spPr>
+          <a:xfrm>
+            <a:off x="640080" y="4933188"/>
+            <a:ext cx="868680" cy="450342"/>
+          </a:xfrm>
+          <a:prstGeom prst="rect">
+            <a:avLst/>
+          </a:prstGeom>
+          <a:noFill/>
+          <a:ln/>
+        </p:spPr>
+        <p:txBody>
+          <a:bodyPr wrap="square" rtlCol="0" anchor="ctr"/>
+          <a:lstStyle/>
+          <a:p>
+            <a:pPr algn="ctr" indent="0" marL="0">
+              <a:buNone/>
+            </a:pPr>
+            <a:r>
+              <a:rPr lang="en-US" sz="1100" b="1" dirty="0">
+                <a:solidFill>
+                  <a:srgbClr val="FFFFFF"/>
+                </a:solidFill>
+                <a:latin typeface="Calibri" pitchFamily="34" charset="0"/>
+                <a:ea typeface="Calibri" pitchFamily="34" charset="-122"/>
+                <a:cs typeface="Calibri" pitchFamily="34" charset="-120"/>
+              </a:rPr>
+              <a:t>1:30</a:t>
+            </a:r>
+            <a:endParaRPr lang="en-US" sz="1100" dirty="0"/>
+          </a:p>
+        </p:txBody>
+      </p:sp>
+      <p:sp>
+        <p:nvSpPr>
+          <p:cNvPr id="23" name="Text 21"/>
+          <p:cNvSpPr/>
+          <p:nvPr/>
+        </p:nvSpPr>
+        <p:spPr>
+          <a:xfrm>
+            <a:off x="1691640" y="4914900"/>
+            <a:ext cx="9646920" cy="560070"/>
+          </a:xfrm>
+          <a:prstGeom prst="rect">
+            <a:avLst/>
+          </a:prstGeom>
+          <a:noFill/>
+          <a:ln/>
+        </p:spPr>
+        <p:txBody>
+          <a:bodyPr wrap="square" rtlCol="0" anchor="ctr">
+            <a:spAutoFit/>
+          </a:bodyPr>
+          <a:lstStyle/>
+          <a:p>
+            <a:pPr indent="0" marL="0">
+              <a:buNone/>
+            </a:pPr>
+            <a:r>
+              <a:rPr lang="en-US" sz="1100" dirty="0">
+                <a:solidFill>
+                  <a:srgbClr val="1A1A1A"/>
+                </a:solidFill>
+                <a:latin typeface="Calibri" pitchFamily="34" charset="0"/>
+                <a:ea typeface="Calibri" pitchFamily="34" charset="-122"/>
+                <a:cs typeface="Calibri" pitchFamily="34" charset="-120"/>
+              </a:rPr>
+              <a:t>Lab 2 (worked): count words, then pixels. The real headlines' top words (stop-words dominate until removed, the first counting decision), then the Met image corpus: brightness ranking, defined color ranges and the corpus palette (what counts as red is a boundary you set), and the closing demonstration of what every bag throws away, identical word-bags with opposite meanings and a painting beside its shuffled pixels. Image projects begin here.</a:t>
+            </a:r>
+            <a:endParaRPr lang="en-US" sz="1100" dirty="0"/>
+          </a:p>
+        </p:txBody>
+      </p:sp>
+      <p:sp>
+        <p:nvSpPr>
+          <p:cNvPr id="24" name="Shape 22"/>
+          <p:cNvSpPr/>
+          <p:nvPr/>
+        </p:nvSpPr>
+        <p:spPr>
+          <a:xfrm>
+            <a:off x="640080" y="5493258"/>
+            <a:ext cx="868680" cy="450342"/>
+          </a:xfrm>
+          <a:prstGeom prst="roundRect">
+            <a:avLst>
+              <a:gd name="adj" fmla="val 12183"/>
+            </a:avLst>
+          </a:prstGeom>
+          <a:solidFill>
+            <a:srgbClr val="7A3B2E"/>
+          </a:solidFill>
+          <a:ln/>
+        </p:spPr>
+      </p:sp>
+      <p:sp>
+        <p:nvSpPr>
+          <p:cNvPr id="25" name="Text 23"/>
+          <p:cNvSpPr/>
+          <p:nvPr/>
+        </p:nvSpPr>
+        <p:spPr>
+          <a:xfrm>
+            <a:off x="640080" y="5493258"/>
+            <a:ext cx="868680" cy="450342"/>
+          </a:xfrm>
+          <a:prstGeom prst="rect">
+            <a:avLst/>
+          </a:prstGeom>
+          <a:noFill/>
+          <a:ln/>
+        </p:spPr>
+        <p:txBody>
+          <a:bodyPr wrap="square" rtlCol="0" anchor="ctr"/>
+          <a:lstStyle/>
+          <a:p>
+            <a:pPr algn="ctr" indent="0" marL="0">
+              <a:buNone/>
+            </a:pPr>
+            <a:r>
+              <a:rPr lang="en-US" sz="1100" b="1" dirty="0">
+                <a:solidFill>
+                  <a:srgbClr val="FFFFFF"/>
+                </a:solidFill>
+                <a:latin typeface="Calibri" pitchFamily="34" charset="0"/>
+                <a:ea typeface="Calibri" pitchFamily="34" charset="-122"/>
+                <a:cs typeface="Calibri" pitchFamily="34" charset="-120"/>
+              </a:rPr>
+              <a:t>1:52</a:t>
+            </a:r>
+            <a:endParaRPr lang="en-US" sz="1100" dirty="0"/>
+          </a:p>
+        </p:txBody>
+      </p:sp>
+      <p:sp>
+        <p:nvSpPr>
+          <p:cNvPr id="26" name="Text 24"/>
+          <p:cNvSpPr/>
+          <p:nvPr/>
+        </p:nvSpPr>
+        <p:spPr>
+          <a:xfrm>
+            <a:off x="1691640" y="5474970"/>
+            <a:ext cx="9646920" cy="560070"/>
+          </a:xfrm>
+          <a:prstGeom prst="rect">
+            <a:avLst/>
+          </a:prstGeom>
+          <a:noFill/>
+          <a:ln/>
+        </p:spPr>
+        <p:txBody>
+          <a:bodyPr wrap="square" rtlCol="0" anchor="ctr">
+            <a:spAutoFit/>
+          </a:bodyPr>
+          <a:lstStyle/>
+          <a:p>
+            <a:pPr indent="0" marL="0">
+              <a:buNone/>
+            </a:pPr>
+            <a:r>
+              <a:rPr lang="en-US" sz="1100" dirty="0">
+                <a:solidFill>
+                  <a:srgbClr val="1A1A1A"/>
+                </a:solidFill>
+                <a:latin typeface="Calibri" pitchFamily="34" charset="0"/>
+                <a:ea typeface="Calibri" pitchFamily="34" charset="-122"/>
+                <a:cs typeface="Calibri" pitchFamily="34" charset="-120"/>
+              </a:rPr>
+              <a:t>Preview of the methods ahead; the weekly routines introduced. First check-out.</a:t>
+            </a:r>
+            <a:endParaRPr lang="en-US" sz="1100" dirty="0"/>
           </a:p>
         </p:txBody>
       </p:sp>
@@ -4535,7 +4441,7 @@
         <p:spPr>
           <a:xfrm>
             <a:off x="640080" y="640080"/>
-            <a:ext cx="10058400" cy="320040"/>
+            <a:ext cx="10058400" cy="731520"/>
           </a:xfrm>
           <a:prstGeom prst="rect">
             <a:avLst/>
@@ -4551,7 +4457,66 @@
               <a:buNone/>
             </a:pPr>
             <a:r>
-              <a:rPr lang="en-US" sz="1300" b="1" spc="300" kern="0" dirty="0">
+              <a:rPr lang="en-US" sz="3000" b="1" dirty="0">
+                <a:solidFill>
+                  <a:srgbClr val="1A1A1A"/>
+                </a:solidFill>
+                <a:latin typeface="Cambria" pitchFamily="34" charset="0"/>
+                <a:ea typeface="Cambria" pitchFamily="34" charset="-122"/>
+                <a:cs typeface="Cambria" pitchFamily="34" charset="-120"/>
+              </a:rPr>
+              <a:t>Reading &amp; homework</a:t>
+            </a:r>
+            <a:endParaRPr lang="en-US" sz="3000" dirty="0"/>
+          </a:p>
+        </p:txBody>
+      </p:sp>
+      <p:sp>
+        <p:nvSpPr>
+          <p:cNvPr id="3" name="Shape 1"/>
+          <p:cNvSpPr/>
+          <p:nvPr/>
+        </p:nvSpPr>
+        <p:spPr>
+          <a:xfrm>
+            <a:off x="640080" y="1673352"/>
+            <a:ext cx="219456" cy="219456"/>
+          </a:xfrm>
+          <a:prstGeom prst="ellipse">
+            <a:avLst/>
+          </a:prstGeom>
+          <a:solidFill>
+            <a:srgbClr val="7A3B2E"/>
+          </a:solidFill>
+          <a:ln/>
+        </p:spPr>
+      </p:sp>
+      <p:sp>
+        <p:nvSpPr>
+          <p:cNvPr id="4" name="Text 2"/>
+          <p:cNvSpPr/>
+          <p:nvPr/>
+        </p:nvSpPr>
+        <p:spPr>
+          <a:xfrm>
+            <a:off x="1051560" y="1600200"/>
+            <a:ext cx="10424160" cy="365760"/>
+          </a:xfrm>
+          <a:prstGeom prst="rect">
+            <a:avLst/>
+          </a:prstGeom>
+          <a:noFill/>
+          <a:ln/>
+        </p:spPr>
+        <p:txBody>
+          <a:bodyPr wrap="square" rtlCol="0" anchor="ctr"/>
+          <a:lstStyle/>
+          <a:p>
+            <a:pPr indent="0" marL="0">
+              <a:buNone/>
+            </a:pPr>
+            <a:r>
+              <a:rPr lang="en-US" sz="1500" b="1" dirty="0">
                 <a:solidFill>
                   <a:srgbClr val="7A3B2E"/>
                 </a:solidFill>
@@ -4559,72 +4524,11 @@
                 <a:ea typeface="Calibri" pitchFamily="34" charset="-122"/>
                 <a:cs typeface="Calibri" pitchFamily="34" charset="-120"/>
               </a:rPr>
-              <a:t>HOW THIS WEEK CONNECTS</a:t>
-            </a:r>
-            <a:endParaRPr lang="en-US" sz="1300" dirty="0"/>
-          </a:p>
-        </p:txBody>
-      </p:sp>
-      <p:sp>
-        <p:nvSpPr>
-          <p:cNvPr id="3" name="Text 1"/>
-          <p:cNvSpPr/>
-          <p:nvPr/>
-        </p:nvSpPr>
-        <p:spPr>
-          <a:xfrm>
-            <a:off x="640080" y="987552"/>
-            <a:ext cx="10058400" cy="640080"/>
-          </a:xfrm>
-          <a:prstGeom prst="rect">
-            <a:avLst/>
-          </a:prstGeom>
-          <a:noFill/>
-          <a:ln/>
-        </p:spPr>
-        <p:txBody>
-          <a:bodyPr wrap="square" rtlCol="0" anchor="ctr"/>
-          <a:lstStyle/>
-          <a:p>
-            <a:pPr indent="0" marL="0">
-              <a:buNone/>
-            </a:pPr>
-            <a:r>
-              <a:rPr lang="en-US" sz="2800" b="1" dirty="0">
-                <a:solidFill>
-                  <a:srgbClr val="1A1A1A"/>
-                </a:solidFill>
-                <a:latin typeface="Cambria" pitchFamily="34" charset="0"/>
-                <a:ea typeface="Cambria" pitchFamily="34" charset="-122"/>
-                <a:cs typeface="Cambria" pitchFamily="34" charset="-120"/>
-              </a:rPr>
-              <a:t>The course's through-lines</a:t>
-            </a:r>
-            <a:endParaRPr lang="en-US" sz="2800" dirty="0"/>
-          </a:p>
-        </p:txBody>
-      </p:sp>
-      <p:sp>
-        <p:nvSpPr>
-          <p:cNvPr id="4" name="Shape 2"/>
-          <p:cNvSpPr/>
-          <p:nvPr/>
-        </p:nvSpPr>
-        <p:spPr>
-          <a:xfrm>
-            <a:off x="640080" y="2057400"/>
-            <a:ext cx="457200" cy="457200"/>
-          </a:xfrm>
-          <a:prstGeom prst="roundRect">
-            <a:avLst>
-              <a:gd name="adj" fmla="val 16000"/>
-            </a:avLst>
-          </a:prstGeom>
-          <a:solidFill>
-            <a:srgbClr val="7A3B2E"/>
-          </a:solidFill>
-          <a:ln/>
-        </p:spPr>
+              <a:t>Reading</a:t>
+            </a:r>
+            <a:endParaRPr lang="en-US" sz="1500" dirty="0"/>
+          </a:p>
+        </p:txBody>
       </p:sp>
       <p:sp>
         <p:nvSpPr>
@@ -4634,86 +4538,8 @@
         </p:nvSpPr>
         <p:spPr>
           <a:xfrm>
-            <a:off x="640080" y="2057400"/>
-            <a:ext cx="457200" cy="457200"/>
-          </a:xfrm>
-          <a:prstGeom prst="rect">
-            <a:avLst/>
-          </a:prstGeom>
-          <a:noFill/>
-          <a:ln/>
-        </p:spPr>
-        <p:txBody>
-          <a:bodyPr wrap="square" rtlCol="0" anchor="ctr"/>
-          <a:lstStyle/>
-          <a:p>
-            <a:pPr algn="ctr" indent="0" marL="0">
-              <a:buNone/>
-            </a:pPr>
-            <a:r>
-              <a:rPr lang="en-US" sz="2000" b="1" dirty="0">
-                <a:solidFill>
-                  <a:srgbClr val="FFFFFF"/>
-                </a:solidFill>
-                <a:latin typeface="Cambria" pitchFamily="34" charset="0"/>
-                <a:ea typeface="Cambria" pitchFamily="34" charset="-122"/>
-                <a:cs typeface="Cambria" pitchFamily="34" charset="-120"/>
-              </a:rPr>
-              <a:t>1</a:t>
-            </a:r>
-            <a:endParaRPr lang="en-US" sz="2000" dirty="0"/>
-          </a:p>
-        </p:txBody>
-      </p:sp>
-      <p:sp>
-        <p:nvSpPr>
-          <p:cNvPr id="6" name="Text 4"/>
-          <p:cNvSpPr/>
-          <p:nvPr/>
-        </p:nvSpPr>
-        <p:spPr>
-          <a:xfrm>
-            <a:off x="1371600" y="2020824"/>
-            <a:ext cx="10332720" cy="411480"/>
-          </a:xfrm>
-          <a:prstGeom prst="rect">
-            <a:avLst/>
-          </a:prstGeom>
-          <a:noFill/>
-          <a:ln/>
-        </p:spPr>
-        <p:txBody>
-          <a:bodyPr wrap="square" rtlCol="0" anchor="ctr"/>
-          <a:lstStyle/>
-          <a:p>
-            <a:pPr indent="0" marL="0">
-              <a:buNone/>
-            </a:pPr>
-            <a:r>
-              <a:rPr lang="en-US" sz="1900" b="1" dirty="0">
-                <a:solidFill>
-                  <a:srgbClr val="7A3B2E"/>
-                </a:solidFill>
-                <a:latin typeface="Cambria" pitchFamily="34" charset="0"/>
-                <a:ea typeface="Cambria" pitchFamily="34" charset="-122"/>
-                <a:cs typeface="Cambria" pitchFamily="34" charset="-120"/>
-              </a:rPr>
-              <a:t>Read work critically</a:t>
-            </a:r>
-            <a:endParaRPr lang="en-US" sz="1900" dirty="0"/>
-          </a:p>
-        </p:txBody>
-      </p:sp>
-      <p:sp>
-        <p:nvSpPr>
-          <p:cNvPr id="7" name="Text 5"/>
-          <p:cNvSpPr/>
-          <p:nvPr/>
-        </p:nvSpPr>
-        <p:spPr>
-          <a:xfrm>
-            <a:off x="1371600" y="2441448"/>
-            <a:ext cx="10332720" cy="914400"/>
+            <a:off x="1051560" y="1984248"/>
+            <a:ext cx="10424160" cy="731520"/>
           </a:xfrm>
           <a:prstGeom prst="rect">
             <a:avLst/>
@@ -4728,13 +4554,10 @@
           <a:lstStyle/>
           <a:p>
             <a:pPr indent="0" marL="0">
-              <a:lnSpc>
-                <a:spcPct val="112000"/>
-              </a:lnSpc>
-              <a:buNone/>
-            </a:pPr>
-            <a:r>
-              <a:rPr lang="en-US" sz="1450" dirty="0">
+              <a:buNone/>
+            </a:pPr>
+            <a:r>
+              <a:rPr lang="en-US" sz="1400" dirty="0">
                 <a:solidFill>
                   <a:srgbClr val="1A1A1A"/>
                 </a:solidFill>
@@ -4742,27 +4565,25 @@
                 <a:ea typeface="Calibri" pitchFamily="34" charset="-122"/>
                 <a:cs typeface="Calibri" pitchFamily="34" charset="-120"/>
               </a:rPr>
-              <a:t>She Giggles, He Gallops is excellent and its choices are debatable. Admiring and questioning at once is the habit the course is built on.</a:t>
-            </a:r>
-            <a:endParaRPr lang="en-US" sz="1450" dirty="0"/>
-          </a:p>
-        </p:txBody>
-      </p:sp>
-      <p:sp>
-        <p:nvSpPr>
-          <p:cNvPr id="8" name="Shape 6"/>
-          <p:cNvSpPr/>
-          <p:nvPr/>
-        </p:nvSpPr>
-        <p:spPr>
-          <a:xfrm>
-            <a:off x="640080" y="3520440"/>
-            <a:ext cx="457200" cy="457200"/>
-          </a:xfrm>
-          <a:prstGeom prst="roundRect">
-            <a:avLst>
-              <a:gd name="adj" fmla="val 16000"/>
-            </a:avLst>
+              <a:t>Bollen et al., the cognitive-distortions hockey stick (PNAS 2021), with the Schmidt et al. critique</a:t>
+            </a:r>
+            <a:endParaRPr lang="en-US" sz="1400" dirty="0"/>
+          </a:p>
+        </p:txBody>
+      </p:sp>
+      <p:sp>
+        <p:nvSpPr>
+          <p:cNvPr id="6" name="Shape 4"/>
+          <p:cNvSpPr/>
+          <p:nvPr/>
+        </p:nvSpPr>
+        <p:spPr>
+          <a:xfrm>
+            <a:off x="640080" y="2633472"/>
+            <a:ext cx="219456" cy="219456"/>
+          </a:xfrm>
+          <a:prstGeom prst="ellipse">
+            <a:avLst/>
           </a:prstGeom>
           <a:solidFill>
             <a:srgbClr val="3F6F5F"/>
@@ -4772,14 +4593,14 @@
       </p:sp>
       <p:sp>
         <p:nvSpPr>
-          <p:cNvPr id="9" name="Text 7"/>
-          <p:cNvSpPr/>
-          <p:nvPr/>
-        </p:nvSpPr>
-        <p:spPr>
-          <a:xfrm>
-            <a:off x="640080" y="3520440"/>
-            <a:ext cx="457200" cy="457200"/>
+          <p:cNvPr id="7" name="Text 5"/>
+          <p:cNvSpPr/>
+          <p:nvPr/>
+        </p:nvSpPr>
+        <p:spPr>
+          <a:xfrm>
+            <a:off x="1051560" y="2560320"/>
+            <a:ext cx="10424160" cy="365760"/>
           </a:xfrm>
           <a:prstGeom prst="rect">
             <a:avLst/>
@@ -4791,73 +4612,34 @@
           <a:bodyPr wrap="square" rtlCol="0" anchor="ctr"/>
           <a:lstStyle/>
           <a:p>
-            <a:pPr algn="ctr" indent="0" marL="0">
-              <a:buNone/>
-            </a:pPr>
-            <a:r>
-              <a:rPr lang="en-US" sz="2000" b="1" dirty="0">
-                <a:solidFill>
-                  <a:srgbClr val="FFFFFF"/>
-                </a:solidFill>
-                <a:latin typeface="Cambria" pitchFamily="34" charset="0"/>
-                <a:ea typeface="Cambria" pitchFamily="34" charset="-122"/>
-                <a:cs typeface="Cambria" pitchFamily="34" charset="-120"/>
-              </a:rPr>
-              <a:t>2</a:t>
-            </a:r>
-            <a:endParaRPr lang="en-US" sz="2000" dirty="0"/>
-          </a:p>
-        </p:txBody>
-      </p:sp>
-      <p:sp>
-        <p:nvSpPr>
-          <p:cNvPr id="10" name="Text 8"/>
-          <p:cNvSpPr/>
-          <p:nvPr/>
-        </p:nvSpPr>
-        <p:spPr>
-          <a:xfrm>
-            <a:off x="1371600" y="3483864"/>
-            <a:ext cx="10332720" cy="411480"/>
-          </a:xfrm>
-          <a:prstGeom prst="rect">
-            <a:avLst/>
-          </a:prstGeom>
-          <a:noFill/>
-          <a:ln/>
-        </p:spPr>
-        <p:txBody>
-          <a:bodyPr wrap="square" rtlCol="0" anchor="ctr"/>
-          <a:lstStyle/>
-          <a:p>
-            <a:pPr indent="0" marL="0">
-              <a:buNone/>
-            </a:pPr>
-            <a:r>
-              <a:rPr lang="en-US" sz="1900" b="1" dirty="0">
+            <a:pPr indent="0" marL="0">
+              <a:buNone/>
+            </a:pPr>
+            <a:r>
+              <a:rPr lang="en-US" sz="1500" b="1" dirty="0">
                 <a:solidFill>
                   <a:srgbClr val="3F6F5F"/>
                 </a:solidFill>
-                <a:latin typeface="Cambria" pitchFamily="34" charset="0"/>
-                <a:ea typeface="Cambria" pitchFamily="34" charset="-122"/>
-                <a:cs typeface="Cambria" pitchFamily="34" charset="-120"/>
-              </a:rPr>
-              <a:t>Make something real</a:t>
-            </a:r>
-            <a:endParaRPr lang="en-US" sz="1900" dirty="0"/>
-          </a:p>
-        </p:txBody>
-      </p:sp>
-      <p:sp>
-        <p:nvSpPr>
-          <p:cNvPr id="11" name="Text 9"/>
-          <p:cNvSpPr/>
-          <p:nvPr/>
-        </p:nvSpPr>
-        <p:spPr>
-          <a:xfrm>
-            <a:off x="1371600" y="3904488"/>
-            <a:ext cx="10332720" cy="914400"/>
+                <a:latin typeface="Calibri" pitchFamily="34" charset="0"/>
+                <a:ea typeface="Calibri" pitchFamily="34" charset="-122"/>
+                <a:cs typeface="Calibri" pitchFamily="34" charset="-120"/>
+              </a:rPr>
+              <a:t>Supplement</a:t>
+            </a:r>
+            <a:endParaRPr lang="en-US" sz="1500" dirty="0"/>
+          </a:p>
+        </p:txBody>
+      </p:sp>
+      <p:sp>
+        <p:nvSpPr>
+          <p:cNvPr id="8" name="Text 6"/>
+          <p:cNvSpPr/>
+          <p:nvPr/>
+        </p:nvSpPr>
+        <p:spPr>
+          <a:xfrm>
+            <a:off x="1051560" y="2944368"/>
+            <a:ext cx="10424160" cy="731520"/>
           </a:xfrm>
           <a:prstGeom prst="rect">
             <a:avLst/>
@@ -4872,13 +4654,10 @@
           <a:lstStyle/>
           <a:p>
             <a:pPr indent="0" marL="0">
-              <a:lnSpc>
-                <a:spcPct val="112000"/>
-              </a:lnSpc>
-              <a:buNone/>
-            </a:pPr>
-            <a:r>
-              <a:rPr lang="en-US" sz="1450" dirty="0">
+              <a:buNone/>
+            </a:pPr>
+            <a:r>
+              <a:rPr lang="en-US" sz="1400" dirty="0">
                 <a:solidFill>
                   <a:srgbClr val="1A1A1A"/>
                 </a:solidFill>
@@ -4886,27 +4665,25 @@
                 <a:ea typeface="Calibri" pitchFamily="34" charset="-122"/>
                 <a:cs typeface="Calibri" pitchFamily="34" charset="-120"/>
               </a:rPr>
-              <a:t>A complete investigation by the first break, before any theory.</a:t>
-            </a:r>
-            <a:endParaRPr lang="en-US" sz="1450" dirty="0"/>
-          </a:p>
-        </p:txBody>
-      </p:sp>
-      <p:sp>
-        <p:nvSpPr>
-          <p:cNvPr id="12" name="Shape 10"/>
-          <p:cNvSpPr/>
-          <p:nvPr/>
-        </p:nvSpPr>
-        <p:spPr>
-          <a:xfrm>
-            <a:off x="640080" y="4983480"/>
-            <a:ext cx="457200" cy="457200"/>
-          </a:xfrm>
-          <a:prstGeom prst="roundRect">
-            <a:avLst>
-              <a:gd name="adj" fmla="val 16000"/>
-            </a:avLst>
+              <a:t>Robin Sloan, Writing with the machine</a:t>
+            </a:r>
+            <a:endParaRPr lang="en-US" sz="1400" dirty="0"/>
+          </a:p>
+        </p:txBody>
+      </p:sp>
+      <p:sp>
+        <p:nvSpPr>
+          <p:cNvPr id="9" name="Shape 7"/>
+          <p:cNvSpPr/>
+          <p:nvPr/>
+        </p:nvSpPr>
+        <p:spPr>
+          <a:xfrm>
+            <a:off x="640080" y="3593592"/>
+            <a:ext cx="219456" cy="219456"/>
+          </a:xfrm>
+          <a:prstGeom prst="ellipse">
+            <a:avLst/>
           </a:prstGeom>
           <a:solidFill>
             <a:srgbClr val="B9852F"/>
@@ -4916,14 +4693,14 @@
       </p:sp>
       <p:sp>
         <p:nvSpPr>
-          <p:cNvPr id="13" name="Text 11"/>
-          <p:cNvSpPr/>
-          <p:nvPr/>
-        </p:nvSpPr>
-        <p:spPr>
-          <a:xfrm>
-            <a:off x="640080" y="4983480"/>
-            <a:ext cx="457200" cy="457200"/>
+          <p:cNvPr id="10" name="Text 8"/>
+          <p:cNvSpPr/>
+          <p:nvPr/>
+        </p:nvSpPr>
+        <p:spPr>
+          <a:xfrm>
+            <a:off x="1051560" y="3520440"/>
+            <a:ext cx="10424160" cy="365760"/>
           </a:xfrm>
           <a:prstGeom prst="rect">
             <a:avLst/>
@@ -4935,73 +4712,34 @@
           <a:bodyPr wrap="square" rtlCol="0" anchor="ctr"/>
           <a:lstStyle/>
           <a:p>
-            <a:pPr algn="ctr" indent="0" marL="0">
-              <a:buNone/>
-            </a:pPr>
-            <a:r>
-              <a:rPr lang="en-US" sz="2000" b="1" dirty="0">
-                <a:solidFill>
-                  <a:srgbClr val="FFFFFF"/>
-                </a:solidFill>
-                <a:latin typeface="Cambria" pitchFamily="34" charset="0"/>
-                <a:ea typeface="Cambria" pitchFamily="34" charset="-122"/>
-                <a:cs typeface="Cambria" pitchFamily="34" charset="-120"/>
-              </a:rPr>
-              <a:t>3</a:t>
-            </a:r>
-            <a:endParaRPr lang="en-US" sz="2000" dirty="0"/>
-          </a:p>
-        </p:txBody>
-      </p:sp>
-      <p:sp>
-        <p:nvSpPr>
-          <p:cNvPr id="14" name="Text 12"/>
-          <p:cNvSpPr/>
-          <p:nvPr/>
-        </p:nvSpPr>
-        <p:spPr>
-          <a:xfrm>
-            <a:off x="1371600" y="4946904"/>
-            <a:ext cx="10332720" cy="411480"/>
-          </a:xfrm>
-          <a:prstGeom prst="rect">
-            <a:avLst/>
-          </a:prstGeom>
-          <a:noFill/>
-          <a:ln/>
-        </p:spPr>
-        <p:txBody>
-          <a:bodyPr wrap="square" rtlCol="0" anchor="ctr"/>
-          <a:lstStyle/>
-          <a:p>
-            <a:pPr indent="0" marL="0">
-              <a:buNone/>
-            </a:pPr>
-            <a:r>
-              <a:rPr lang="en-US" sz="1900" b="1" dirty="0">
+            <a:pPr indent="0" marL="0">
+              <a:buNone/>
+            </a:pPr>
+            <a:r>
+              <a:rPr lang="en-US" sz="1500" b="1" dirty="0">
                 <a:solidFill>
                   <a:srgbClr val="B9852F"/>
                 </a:solidFill>
-                <a:latin typeface="Cambria" pitchFamily="34" charset="0"/>
-                <a:ea typeface="Cambria" pitchFamily="34" charset="-122"/>
-                <a:cs typeface="Cambria" pitchFamily="34" charset="-120"/>
-              </a:rPr>
-              <a:t>Images are culture too</a:t>
-            </a:r>
-            <a:endParaRPr lang="en-US" sz="1900" dirty="0"/>
-          </a:p>
-        </p:txBody>
-      </p:sp>
-      <p:sp>
-        <p:nvSpPr>
-          <p:cNvPr id="15" name="Text 13"/>
-          <p:cNvSpPr/>
-          <p:nvPr/>
-        </p:nvSpPr>
-        <p:spPr>
-          <a:xfrm>
-            <a:off x="1371600" y="5367528"/>
-            <a:ext cx="10332720" cy="914400"/>
+                <a:latin typeface="Calibri" pitchFamily="34" charset="0"/>
+                <a:ea typeface="Calibri" pitchFamily="34" charset="-122"/>
+                <a:cs typeface="Calibri" pitchFamily="34" charset="-120"/>
+              </a:rPr>
+              <a:t>Deeper (optional)</a:t>
+            </a:r>
+            <a:endParaRPr lang="en-US" sz="1500" dirty="0"/>
+          </a:p>
+        </p:txBody>
+      </p:sp>
+      <p:sp>
+        <p:nvSpPr>
+          <p:cNvPr id="11" name="Text 9"/>
+          <p:cNvSpPr/>
+          <p:nvPr/>
+        </p:nvSpPr>
+        <p:spPr>
+          <a:xfrm>
+            <a:off x="1051560" y="3904488"/>
+            <a:ext cx="10424160" cy="731520"/>
           </a:xfrm>
           <a:prstGeom prst="rect">
             <a:avLst/>
@@ -5016,13 +4754,10 @@
           <a:lstStyle/>
           <a:p>
             <a:pPr indent="0" marL="0">
-              <a:lnSpc>
-                <a:spcPct val="112000"/>
-              </a:lnSpc>
-              <a:buNone/>
-            </a:pPr>
-            <a:r>
-              <a:rPr lang="en-US" sz="1450" dirty="0">
+              <a:buNone/>
+            </a:pPr>
+            <a:r>
+              <a:rPr lang="en-US" sz="1400" dirty="0">
                 <a:solidFill>
                   <a:srgbClr val="1A1A1A"/>
                 </a:solidFill>
@@ -5030,9 +4765,209 @@
                 <a:ea typeface="Calibri" pitchFamily="34" charset="-122"/>
                 <a:cs typeface="Calibri" pitchFamily="34" charset="-120"/>
               </a:rPr>
-              <a:t>A picture is numbers: you counted pixels on day one, and images continue as a co-equal corpus through all ten weeks.</a:t>
-            </a:r>
-            <a:endParaRPr lang="en-US" sz="1450" dirty="0"/>
+              <a:t>Moretti, Conjectures on World Literature (NLR 2000), the founding argument for reading culture at scale</a:t>
+            </a:r>
+            <a:endParaRPr lang="en-US" sz="1400" dirty="0"/>
+          </a:p>
+        </p:txBody>
+      </p:sp>
+      <p:sp>
+        <p:nvSpPr>
+          <p:cNvPr id="12" name="Shape 10"/>
+          <p:cNvSpPr/>
+          <p:nvPr/>
+        </p:nvSpPr>
+        <p:spPr>
+          <a:xfrm>
+            <a:off x="640080" y="4553712"/>
+            <a:ext cx="219456" cy="219456"/>
+          </a:xfrm>
+          <a:prstGeom prst="ellipse">
+            <a:avLst/>
+          </a:prstGeom>
+          <a:solidFill>
+            <a:srgbClr val="3F6F5F"/>
+          </a:solidFill>
+          <a:ln/>
+        </p:spPr>
+      </p:sp>
+      <p:sp>
+        <p:nvSpPr>
+          <p:cNvPr id="13" name="Text 11"/>
+          <p:cNvSpPr/>
+          <p:nvPr/>
+        </p:nvSpPr>
+        <p:spPr>
+          <a:xfrm>
+            <a:off x="1051560" y="4480560"/>
+            <a:ext cx="10424160" cy="365760"/>
+          </a:xfrm>
+          <a:prstGeom prst="rect">
+            <a:avLst/>
+          </a:prstGeom>
+          <a:noFill/>
+          <a:ln/>
+        </p:spPr>
+        <p:txBody>
+          <a:bodyPr wrap="square" rtlCol="0" anchor="ctr"/>
+          <a:lstStyle/>
+          <a:p>
+            <a:pPr indent="0" marL="0">
+              <a:buNone/>
+            </a:pPr>
+            <a:r>
+              <a:rPr lang="en-US" sz="1500" b="1" dirty="0">
+                <a:solidFill>
+                  <a:srgbClr val="3F6F5F"/>
+                </a:solidFill>
+                <a:latin typeface="Calibri" pitchFamily="34" charset="0"/>
+                <a:ea typeface="Calibri" pitchFamily="34" charset="-122"/>
+                <a:cs typeface="Calibri" pitchFamily="34" charset="-120"/>
+              </a:rPr>
+              <a:t>Sketch</a:t>
+            </a:r>
+            <a:endParaRPr lang="en-US" sz="1500" dirty="0"/>
+          </a:p>
+        </p:txBody>
+      </p:sp>
+      <p:sp>
+        <p:nvSpPr>
+          <p:cNvPr id="14" name="Text 12"/>
+          <p:cNvSpPr/>
+          <p:nvPr/>
+        </p:nvSpPr>
+        <p:spPr>
+          <a:xfrm>
+            <a:off x="1051560" y="4864608"/>
+            <a:ext cx="10424160" cy="731520"/>
+          </a:xfrm>
+          <a:prstGeom prst="rect">
+            <a:avLst/>
+          </a:prstGeom>
+          <a:noFill/>
+          <a:ln/>
+        </p:spPr>
+        <p:txBody>
+          <a:bodyPr wrap="square" rtlCol="0" anchor="t">
+            <a:spAutoFit/>
+          </a:bodyPr>
+          <a:lstStyle/>
+          <a:p>
+            <a:pPr indent="0" marL="0">
+              <a:buNone/>
+            </a:pPr>
+            <a:r>
+              <a:rPr lang="en-US" sz="1400" dirty="0">
+                <a:solidFill>
+                  <a:srgbClr val="1A1A1A"/>
+                </a:solidFill>
+                <a:latin typeface="Calibri" pitchFamily="34" charset="0"/>
+                <a:ea typeface="Calibri" pitchFamily="34" charset="-122"/>
+                <a:cs typeface="Calibri" pitchFamily="34" charset="-120"/>
+              </a:rPr>
+              <a:t>One question from your life answerable with text or image data; three sentences.</a:t>
+            </a:r>
+            <a:endParaRPr lang="en-US" sz="1400" dirty="0"/>
+          </a:p>
+        </p:txBody>
+      </p:sp>
+      <p:sp>
+        <p:nvSpPr>
+          <p:cNvPr id="15" name="Shape 13"/>
+          <p:cNvSpPr/>
+          <p:nvPr/>
+        </p:nvSpPr>
+        <p:spPr>
+          <a:xfrm>
+            <a:off x="640080" y="5513832"/>
+            <a:ext cx="219456" cy="219456"/>
+          </a:xfrm>
+          <a:prstGeom prst="ellipse">
+            <a:avLst/>
+          </a:prstGeom>
+          <a:solidFill>
+            <a:srgbClr val="7A3B2E"/>
+          </a:solidFill>
+          <a:ln/>
+        </p:spPr>
+      </p:sp>
+      <p:sp>
+        <p:nvSpPr>
+          <p:cNvPr id="16" name="Text 14"/>
+          <p:cNvSpPr/>
+          <p:nvPr/>
+        </p:nvSpPr>
+        <p:spPr>
+          <a:xfrm>
+            <a:off x="1051560" y="5440680"/>
+            <a:ext cx="10424160" cy="365760"/>
+          </a:xfrm>
+          <a:prstGeom prst="rect">
+            <a:avLst/>
+          </a:prstGeom>
+          <a:noFill/>
+          <a:ln/>
+        </p:spPr>
+        <p:txBody>
+          <a:bodyPr wrap="square" rtlCol="0" anchor="ctr"/>
+          <a:lstStyle/>
+          <a:p>
+            <a:pPr indent="0" marL="0">
+              <a:buNone/>
+            </a:pPr>
+            <a:r>
+              <a:rPr lang="en-US" sz="1500" b="1" dirty="0">
+                <a:solidFill>
+                  <a:srgbClr val="7A3B2E"/>
+                </a:solidFill>
+                <a:latin typeface="Calibri" pitchFamily="34" charset="0"/>
+                <a:ea typeface="Calibri" pitchFamily="34" charset="-122"/>
+                <a:cs typeface="Calibri" pitchFamily="34" charset="-120"/>
+              </a:rPr>
+              <a:t>Check (AI closed)</a:t>
+            </a:r>
+            <a:endParaRPr lang="en-US" sz="1500" dirty="0"/>
+          </a:p>
+        </p:txBody>
+      </p:sp>
+      <p:sp>
+        <p:nvSpPr>
+          <p:cNvPr id="17" name="Text 15"/>
+          <p:cNvSpPr/>
+          <p:nvPr/>
+        </p:nvSpPr>
+        <p:spPr>
+          <a:xfrm>
+            <a:off x="1051560" y="5824728"/>
+            <a:ext cx="10424160" cy="731520"/>
+          </a:xfrm>
+          <a:prstGeom prst="rect">
+            <a:avLst/>
+          </a:prstGeom>
+          <a:noFill/>
+          <a:ln/>
+        </p:spPr>
+        <p:txBody>
+          <a:bodyPr wrap="square" rtlCol="0" anchor="t">
+            <a:spAutoFit/>
+          </a:bodyPr>
+          <a:lstStyle/>
+          <a:p>
+            <a:pPr indent="0" marL="0">
+              <a:buNone/>
+            </a:pPr>
+            <a:r>
+              <a:rPr lang="en-US" sz="1400" dirty="0">
+                <a:solidFill>
+                  <a:srgbClr val="1A1A1A"/>
+                </a:solidFill>
+                <a:latin typeface="Calibri" pitchFamily="34" charset="0"/>
+                <a:ea typeface="Calibri" pitchFamily="34" charset="-122"/>
+                <a:cs typeface="Calibri" pitchFamily="34" charset="-120"/>
+              </a:rPr>
+              <a:t>Trace it: one written sentence predicting what your cell does before you run it. (Competency 1.)</a:t>
+            </a:r>
+            <a:endParaRPr lang="en-US" sz="1400" dirty="0"/>
           </a:p>
         </p:txBody>
       </p:sp>
@@ -5047,6 +4982,548 @@
 <file path=ppt/slides/slide14.xml><?xml version="1.0" encoding="utf-8"?>
 <p:sld xmlns:a="http://schemas.openxmlformats.org/drawingml/2006/main" xmlns:r="http://schemas.openxmlformats.org/officeDocument/2006/relationships" xmlns:p="http://schemas.openxmlformats.org/presentationml/2006/main">
   <p:cSld name="Slide 14">
+    <p:bg>
+      <p:bgPr>
+        <a:solidFill>
+          <a:srgbClr val="FFFFFF"/>
+        </a:solidFill>
+      </p:bgPr>
+    </p:bg>
+    <p:spTree>
+      <p:nvGrpSpPr>
+        <p:cNvPr id="1" name=""/>
+        <p:cNvGrpSpPr/>
+        <p:nvPr/>
+      </p:nvGrpSpPr>
+      <p:grpSpPr>
+        <a:xfrm>
+          <a:off x="0" y="0"/>
+          <a:ext cx="0" cy="0"/>
+          <a:chOff x="0" y="0"/>
+          <a:chExt cx="0" cy="0"/>
+        </a:xfrm>
+      </p:grpSpPr>
+      <p:sp>
+        <p:nvSpPr>
+          <p:cNvPr id="2" name="Text 0"/>
+          <p:cNvSpPr/>
+          <p:nvPr/>
+        </p:nvSpPr>
+        <p:spPr>
+          <a:xfrm>
+            <a:off x="640080" y="640080"/>
+            <a:ext cx="10058400" cy="320040"/>
+          </a:xfrm>
+          <a:prstGeom prst="rect">
+            <a:avLst/>
+          </a:prstGeom>
+          <a:noFill/>
+          <a:ln/>
+        </p:spPr>
+        <p:txBody>
+          <a:bodyPr wrap="square" rtlCol="0" anchor="ctr"/>
+          <a:lstStyle/>
+          <a:p>
+            <a:pPr indent="0" marL="0">
+              <a:buNone/>
+            </a:pPr>
+            <a:r>
+              <a:rPr lang="en-US" sz="1300" b="1" spc="300" kern="0" dirty="0">
+                <a:solidFill>
+                  <a:srgbClr val="7A3B2E"/>
+                </a:solidFill>
+                <a:latin typeface="Calibri" pitchFamily="34" charset="0"/>
+                <a:ea typeface="Calibri" pitchFamily="34" charset="-122"/>
+                <a:cs typeface="Calibri" pitchFamily="34" charset="-120"/>
+              </a:rPr>
+              <a:t>HOW THIS WEEK CONNECTS</a:t>
+            </a:r>
+            <a:endParaRPr lang="en-US" sz="1300" dirty="0"/>
+          </a:p>
+        </p:txBody>
+      </p:sp>
+      <p:sp>
+        <p:nvSpPr>
+          <p:cNvPr id="3" name="Text 1"/>
+          <p:cNvSpPr/>
+          <p:nvPr/>
+        </p:nvSpPr>
+        <p:spPr>
+          <a:xfrm>
+            <a:off x="640080" y="987552"/>
+            <a:ext cx="10058400" cy="640080"/>
+          </a:xfrm>
+          <a:prstGeom prst="rect">
+            <a:avLst/>
+          </a:prstGeom>
+          <a:noFill/>
+          <a:ln/>
+        </p:spPr>
+        <p:txBody>
+          <a:bodyPr wrap="square" rtlCol="0" anchor="ctr"/>
+          <a:lstStyle/>
+          <a:p>
+            <a:pPr indent="0" marL="0">
+              <a:buNone/>
+            </a:pPr>
+            <a:r>
+              <a:rPr lang="en-US" sz="2800" b="1" dirty="0">
+                <a:solidFill>
+                  <a:srgbClr val="1A1A1A"/>
+                </a:solidFill>
+                <a:latin typeface="Cambria" pitchFamily="34" charset="0"/>
+                <a:ea typeface="Cambria" pitchFamily="34" charset="-122"/>
+                <a:cs typeface="Cambria" pitchFamily="34" charset="-120"/>
+              </a:rPr>
+              <a:t>The course's through-lines</a:t>
+            </a:r>
+            <a:endParaRPr lang="en-US" sz="2800" dirty="0"/>
+          </a:p>
+        </p:txBody>
+      </p:sp>
+      <p:sp>
+        <p:nvSpPr>
+          <p:cNvPr id="4" name="Shape 2"/>
+          <p:cNvSpPr/>
+          <p:nvPr/>
+        </p:nvSpPr>
+        <p:spPr>
+          <a:xfrm>
+            <a:off x="640080" y="2057400"/>
+            <a:ext cx="457200" cy="457200"/>
+          </a:xfrm>
+          <a:prstGeom prst="roundRect">
+            <a:avLst>
+              <a:gd name="adj" fmla="val 16000"/>
+            </a:avLst>
+          </a:prstGeom>
+          <a:solidFill>
+            <a:srgbClr val="7A3B2E"/>
+          </a:solidFill>
+          <a:ln/>
+        </p:spPr>
+      </p:sp>
+      <p:sp>
+        <p:nvSpPr>
+          <p:cNvPr id="5" name="Text 3"/>
+          <p:cNvSpPr/>
+          <p:nvPr/>
+        </p:nvSpPr>
+        <p:spPr>
+          <a:xfrm>
+            <a:off x="640080" y="2057400"/>
+            <a:ext cx="457200" cy="457200"/>
+          </a:xfrm>
+          <a:prstGeom prst="rect">
+            <a:avLst/>
+          </a:prstGeom>
+          <a:noFill/>
+          <a:ln/>
+        </p:spPr>
+        <p:txBody>
+          <a:bodyPr wrap="square" rtlCol="0" anchor="ctr"/>
+          <a:lstStyle/>
+          <a:p>
+            <a:pPr algn="ctr" indent="0" marL="0">
+              <a:buNone/>
+            </a:pPr>
+            <a:r>
+              <a:rPr lang="en-US" sz="2000" b="1" dirty="0">
+                <a:solidFill>
+                  <a:srgbClr val="FFFFFF"/>
+                </a:solidFill>
+                <a:latin typeface="Cambria" pitchFamily="34" charset="0"/>
+                <a:ea typeface="Cambria" pitchFamily="34" charset="-122"/>
+                <a:cs typeface="Cambria" pitchFamily="34" charset="-120"/>
+              </a:rPr>
+              <a:t>1</a:t>
+            </a:r>
+            <a:endParaRPr lang="en-US" sz="2000" dirty="0"/>
+          </a:p>
+        </p:txBody>
+      </p:sp>
+      <p:sp>
+        <p:nvSpPr>
+          <p:cNvPr id="6" name="Text 4"/>
+          <p:cNvSpPr/>
+          <p:nvPr/>
+        </p:nvSpPr>
+        <p:spPr>
+          <a:xfrm>
+            <a:off x="1371600" y="2020824"/>
+            <a:ext cx="10332720" cy="411480"/>
+          </a:xfrm>
+          <a:prstGeom prst="rect">
+            <a:avLst/>
+          </a:prstGeom>
+          <a:noFill/>
+          <a:ln/>
+        </p:spPr>
+        <p:txBody>
+          <a:bodyPr wrap="square" rtlCol="0" anchor="ctr"/>
+          <a:lstStyle/>
+          <a:p>
+            <a:pPr indent="0" marL="0">
+              <a:buNone/>
+            </a:pPr>
+            <a:r>
+              <a:rPr lang="en-US" sz="1900" b="1" dirty="0">
+                <a:solidFill>
+                  <a:srgbClr val="7A3B2E"/>
+                </a:solidFill>
+                <a:latin typeface="Cambria" pitchFamily="34" charset="0"/>
+                <a:ea typeface="Cambria" pitchFamily="34" charset="-122"/>
+                <a:cs typeface="Cambria" pitchFamily="34" charset="-120"/>
+              </a:rPr>
+              <a:t>Read work critically</a:t>
+            </a:r>
+            <a:endParaRPr lang="en-US" sz="1900" dirty="0"/>
+          </a:p>
+        </p:txBody>
+      </p:sp>
+      <p:sp>
+        <p:nvSpPr>
+          <p:cNvPr id="7" name="Text 5"/>
+          <p:cNvSpPr/>
+          <p:nvPr/>
+        </p:nvSpPr>
+        <p:spPr>
+          <a:xfrm>
+            <a:off x="1371600" y="2441448"/>
+            <a:ext cx="10332720" cy="914400"/>
+          </a:xfrm>
+          <a:prstGeom prst="rect">
+            <a:avLst/>
+          </a:prstGeom>
+          <a:noFill/>
+          <a:ln/>
+        </p:spPr>
+        <p:txBody>
+          <a:bodyPr wrap="square" rtlCol="0" anchor="t">
+            <a:spAutoFit/>
+          </a:bodyPr>
+          <a:lstStyle/>
+          <a:p>
+            <a:pPr indent="0" marL="0">
+              <a:lnSpc>
+                <a:spcPct val="112000"/>
+              </a:lnSpc>
+              <a:buNone/>
+            </a:pPr>
+            <a:r>
+              <a:rPr lang="en-US" sz="1450" dirty="0">
+                <a:solidFill>
+                  <a:srgbClr val="1A1A1A"/>
+                </a:solidFill>
+                <a:latin typeface="Calibri" pitchFamily="34" charset="0"/>
+                <a:ea typeface="Calibri" pitchFamily="34" charset="-122"/>
+                <a:cs typeface="Calibri" pitchFamily="34" charset="-120"/>
+              </a:rPr>
+              <a:t>She Giggles, He Gallops is excellent and its choices are debatable. Admiring and questioning at once is the habit the course is built on.</a:t>
+            </a:r>
+            <a:endParaRPr lang="en-US" sz="1450" dirty="0"/>
+          </a:p>
+        </p:txBody>
+      </p:sp>
+      <p:sp>
+        <p:nvSpPr>
+          <p:cNvPr id="8" name="Shape 6"/>
+          <p:cNvSpPr/>
+          <p:nvPr/>
+        </p:nvSpPr>
+        <p:spPr>
+          <a:xfrm>
+            <a:off x="640080" y="3520440"/>
+            <a:ext cx="457200" cy="457200"/>
+          </a:xfrm>
+          <a:prstGeom prst="roundRect">
+            <a:avLst>
+              <a:gd name="adj" fmla="val 16000"/>
+            </a:avLst>
+          </a:prstGeom>
+          <a:solidFill>
+            <a:srgbClr val="3F6F5F"/>
+          </a:solidFill>
+          <a:ln/>
+        </p:spPr>
+      </p:sp>
+      <p:sp>
+        <p:nvSpPr>
+          <p:cNvPr id="9" name="Text 7"/>
+          <p:cNvSpPr/>
+          <p:nvPr/>
+        </p:nvSpPr>
+        <p:spPr>
+          <a:xfrm>
+            <a:off x="640080" y="3520440"/>
+            <a:ext cx="457200" cy="457200"/>
+          </a:xfrm>
+          <a:prstGeom prst="rect">
+            <a:avLst/>
+          </a:prstGeom>
+          <a:noFill/>
+          <a:ln/>
+        </p:spPr>
+        <p:txBody>
+          <a:bodyPr wrap="square" rtlCol="0" anchor="ctr"/>
+          <a:lstStyle/>
+          <a:p>
+            <a:pPr algn="ctr" indent="0" marL="0">
+              <a:buNone/>
+            </a:pPr>
+            <a:r>
+              <a:rPr lang="en-US" sz="2000" b="1" dirty="0">
+                <a:solidFill>
+                  <a:srgbClr val="FFFFFF"/>
+                </a:solidFill>
+                <a:latin typeface="Cambria" pitchFamily="34" charset="0"/>
+                <a:ea typeface="Cambria" pitchFamily="34" charset="-122"/>
+                <a:cs typeface="Cambria" pitchFamily="34" charset="-120"/>
+              </a:rPr>
+              <a:t>2</a:t>
+            </a:r>
+            <a:endParaRPr lang="en-US" sz="2000" dirty="0"/>
+          </a:p>
+        </p:txBody>
+      </p:sp>
+      <p:sp>
+        <p:nvSpPr>
+          <p:cNvPr id="10" name="Text 8"/>
+          <p:cNvSpPr/>
+          <p:nvPr/>
+        </p:nvSpPr>
+        <p:spPr>
+          <a:xfrm>
+            <a:off x="1371600" y="3483864"/>
+            <a:ext cx="10332720" cy="411480"/>
+          </a:xfrm>
+          <a:prstGeom prst="rect">
+            <a:avLst/>
+          </a:prstGeom>
+          <a:noFill/>
+          <a:ln/>
+        </p:spPr>
+        <p:txBody>
+          <a:bodyPr wrap="square" rtlCol="0" anchor="ctr"/>
+          <a:lstStyle/>
+          <a:p>
+            <a:pPr indent="0" marL="0">
+              <a:buNone/>
+            </a:pPr>
+            <a:r>
+              <a:rPr lang="en-US" sz="1900" b="1" dirty="0">
+                <a:solidFill>
+                  <a:srgbClr val="3F6F5F"/>
+                </a:solidFill>
+                <a:latin typeface="Cambria" pitchFamily="34" charset="0"/>
+                <a:ea typeface="Cambria" pitchFamily="34" charset="-122"/>
+                <a:cs typeface="Cambria" pitchFamily="34" charset="-120"/>
+              </a:rPr>
+              <a:t>Make something real</a:t>
+            </a:r>
+            <a:endParaRPr lang="en-US" sz="1900" dirty="0"/>
+          </a:p>
+        </p:txBody>
+      </p:sp>
+      <p:sp>
+        <p:nvSpPr>
+          <p:cNvPr id="11" name="Text 9"/>
+          <p:cNvSpPr/>
+          <p:nvPr/>
+        </p:nvSpPr>
+        <p:spPr>
+          <a:xfrm>
+            <a:off x="1371600" y="3904488"/>
+            <a:ext cx="10332720" cy="914400"/>
+          </a:xfrm>
+          <a:prstGeom prst="rect">
+            <a:avLst/>
+          </a:prstGeom>
+          <a:noFill/>
+          <a:ln/>
+        </p:spPr>
+        <p:txBody>
+          <a:bodyPr wrap="square" rtlCol="0" anchor="t">
+            <a:spAutoFit/>
+          </a:bodyPr>
+          <a:lstStyle/>
+          <a:p>
+            <a:pPr indent="0" marL="0">
+              <a:lnSpc>
+                <a:spcPct val="112000"/>
+              </a:lnSpc>
+              <a:buNone/>
+            </a:pPr>
+            <a:r>
+              <a:rPr lang="en-US" sz="1450" dirty="0">
+                <a:solidFill>
+                  <a:srgbClr val="1A1A1A"/>
+                </a:solidFill>
+                <a:latin typeface="Calibri" pitchFamily="34" charset="0"/>
+                <a:ea typeface="Calibri" pitchFamily="34" charset="-122"/>
+                <a:cs typeface="Calibri" pitchFamily="34" charset="-120"/>
+              </a:rPr>
+              <a:t>A complete investigation by the first break, before any theory.</a:t>
+            </a:r>
+            <a:endParaRPr lang="en-US" sz="1450" dirty="0"/>
+          </a:p>
+        </p:txBody>
+      </p:sp>
+      <p:sp>
+        <p:nvSpPr>
+          <p:cNvPr id="12" name="Shape 10"/>
+          <p:cNvSpPr/>
+          <p:nvPr/>
+        </p:nvSpPr>
+        <p:spPr>
+          <a:xfrm>
+            <a:off x="640080" y="4983480"/>
+            <a:ext cx="457200" cy="457200"/>
+          </a:xfrm>
+          <a:prstGeom prst="roundRect">
+            <a:avLst>
+              <a:gd name="adj" fmla="val 16000"/>
+            </a:avLst>
+          </a:prstGeom>
+          <a:solidFill>
+            <a:srgbClr val="B9852F"/>
+          </a:solidFill>
+          <a:ln/>
+        </p:spPr>
+      </p:sp>
+      <p:sp>
+        <p:nvSpPr>
+          <p:cNvPr id="13" name="Text 11"/>
+          <p:cNvSpPr/>
+          <p:nvPr/>
+        </p:nvSpPr>
+        <p:spPr>
+          <a:xfrm>
+            <a:off x="640080" y="4983480"/>
+            <a:ext cx="457200" cy="457200"/>
+          </a:xfrm>
+          <a:prstGeom prst="rect">
+            <a:avLst/>
+          </a:prstGeom>
+          <a:noFill/>
+          <a:ln/>
+        </p:spPr>
+        <p:txBody>
+          <a:bodyPr wrap="square" rtlCol="0" anchor="ctr"/>
+          <a:lstStyle/>
+          <a:p>
+            <a:pPr algn="ctr" indent="0" marL="0">
+              <a:buNone/>
+            </a:pPr>
+            <a:r>
+              <a:rPr lang="en-US" sz="2000" b="1" dirty="0">
+                <a:solidFill>
+                  <a:srgbClr val="FFFFFF"/>
+                </a:solidFill>
+                <a:latin typeface="Cambria" pitchFamily="34" charset="0"/>
+                <a:ea typeface="Cambria" pitchFamily="34" charset="-122"/>
+                <a:cs typeface="Cambria" pitchFamily="34" charset="-120"/>
+              </a:rPr>
+              <a:t>3</a:t>
+            </a:r>
+            <a:endParaRPr lang="en-US" sz="2000" dirty="0"/>
+          </a:p>
+        </p:txBody>
+      </p:sp>
+      <p:sp>
+        <p:nvSpPr>
+          <p:cNvPr id="14" name="Text 12"/>
+          <p:cNvSpPr/>
+          <p:nvPr/>
+        </p:nvSpPr>
+        <p:spPr>
+          <a:xfrm>
+            <a:off x="1371600" y="4946904"/>
+            <a:ext cx="10332720" cy="411480"/>
+          </a:xfrm>
+          <a:prstGeom prst="rect">
+            <a:avLst/>
+          </a:prstGeom>
+          <a:noFill/>
+          <a:ln/>
+        </p:spPr>
+        <p:txBody>
+          <a:bodyPr wrap="square" rtlCol="0" anchor="ctr"/>
+          <a:lstStyle/>
+          <a:p>
+            <a:pPr indent="0" marL="0">
+              <a:buNone/>
+            </a:pPr>
+            <a:r>
+              <a:rPr lang="en-US" sz="1900" b="1" dirty="0">
+                <a:solidFill>
+                  <a:srgbClr val="B9852F"/>
+                </a:solidFill>
+                <a:latin typeface="Cambria" pitchFamily="34" charset="0"/>
+                <a:ea typeface="Cambria" pitchFamily="34" charset="-122"/>
+                <a:cs typeface="Cambria" pitchFamily="34" charset="-120"/>
+              </a:rPr>
+              <a:t>Images are culture too</a:t>
+            </a:r>
+            <a:endParaRPr lang="en-US" sz="1900" dirty="0"/>
+          </a:p>
+        </p:txBody>
+      </p:sp>
+      <p:sp>
+        <p:nvSpPr>
+          <p:cNvPr id="15" name="Text 13"/>
+          <p:cNvSpPr/>
+          <p:nvPr/>
+        </p:nvSpPr>
+        <p:spPr>
+          <a:xfrm>
+            <a:off x="1371600" y="5367528"/>
+            <a:ext cx="10332720" cy="914400"/>
+          </a:xfrm>
+          <a:prstGeom prst="rect">
+            <a:avLst/>
+          </a:prstGeom>
+          <a:noFill/>
+          <a:ln/>
+        </p:spPr>
+        <p:txBody>
+          <a:bodyPr wrap="square" rtlCol="0" anchor="t">
+            <a:spAutoFit/>
+          </a:bodyPr>
+          <a:lstStyle/>
+          <a:p>
+            <a:pPr indent="0" marL="0">
+              <a:lnSpc>
+                <a:spcPct val="112000"/>
+              </a:lnSpc>
+              <a:buNone/>
+            </a:pPr>
+            <a:r>
+              <a:rPr lang="en-US" sz="1450" dirty="0">
+                <a:solidFill>
+                  <a:srgbClr val="1A1A1A"/>
+                </a:solidFill>
+                <a:latin typeface="Calibri" pitchFamily="34" charset="0"/>
+                <a:ea typeface="Calibri" pitchFamily="34" charset="-122"/>
+                <a:cs typeface="Calibri" pitchFamily="34" charset="-120"/>
+              </a:rPr>
+              <a:t>A picture is numbers: you counted pixels on day one, and images continue as a co-equal corpus through all ten weeks.</a:t>
+            </a:r>
+            <a:endParaRPr lang="en-US" sz="1450" dirty="0"/>
+          </a:p>
+        </p:txBody>
+      </p:sp>
+    </p:spTree>
+  </p:cSld>
+  <p:clrMapOvr>
+    <a:masterClrMapping/>
+  </p:clrMapOvr>
+</p:sld>
+</file>
+
+<file path=ppt/slides/slide15.xml><?xml version="1.0" encoding="utf-8"?>
+<p:sld xmlns:a="http://schemas.openxmlformats.org/drawingml/2006/main" xmlns:r="http://schemas.openxmlformats.org/officeDocument/2006/relationships" xmlns:p="http://schemas.openxmlformats.org/presentationml/2006/main">
+  <p:cSld name="Slide 15">
     <p:bg>
       <p:bgPr>
         <a:solidFill>
@@ -8010,7 +8487,7 @@
                 <a:ea typeface="Cambria" pitchFamily="34" charset="-122"/>
                 <a:cs typeface="Cambria" pitchFamily="34" charset="-120"/>
               </a:rPr>
-              <a:t>Counting, three shapes</a:t>
+              <a:t>Defining a color, and what every bag loses</a:t>
             </a:r>
             <a:endParaRPr lang="en-US" sz="3000" dirty="0"/>
           </a:p>
@@ -8074,7 +8551,7 @@
                 <a:ea typeface="Calibri" pitchFamily="34" charset="-122"/>
                 <a:cs typeface="Calibri" pitchFamily="34" charset="-120"/>
               </a:rPr>
-              <a:t>Rows: what share of brides kept their name, year by year. One groupby, one chart.</a:t>
+              <a:t>What counts as red? A boundary you set on the hue wheel. Shift it twenty degrees and paintings change category without changing a pixel: defining the ranges is the analysis, the same decision as the stop-word list.</a:t>
             </a:r>
             <a:endParaRPr lang="en-US" sz="1650" dirty="0"/>
           </a:p>
@@ -8138,7 +8615,7 @@
                 <a:ea typeface="Calibri" pitchFamily="34" charset="-122"/>
                 <a:cs typeface="Calibri" pitchFamily="34" charset="-120"/>
               </a:rPr>
-              <a:t>Words: the top words of a lyric are "the, and, you" until you remove stop-words. That removal is your first modeling choice.</a:t>
+              <a:t>Two sentences with identical word-bags can mean opposite things: "the critics loved it, the public did not" and its reversal count the same. Order, negation, and who-did-what are the casualties.</a:t>
             </a:r>
             <a:endParaRPr lang="en-US" sz="1650" dirty="0"/>
           </a:p>
@@ -8202,7 +8679,7 @@
                 <a:ea typeface="Calibri" pitchFamily="34" charset="-122"/>
                 <a:cs typeface="Calibri" pitchFamily="34" charset="-120"/>
               </a:rPr>
-              <a:t>Pixels: rank 200 Met thumbnails darkest to brightest from average luminance.</a:t>
+              <a:t>A painting and its shuffled pixels share the brightness, the average color, and the palette. Composition is to images what word order is to sentences.</a:t>
             </a:r>
             <a:endParaRPr lang="en-US" sz="1650" dirty="0"/>
           </a:p>
@@ -8266,7 +8743,7 @@
                 <a:ea typeface="Calibri" pitchFamily="34" charset="-122"/>
                 <a:cs typeface="Calibri" pitchFamily="34" charset="-120"/>
               </a:rPr>
-              <a:t>The same technique three times, each containing a decision.</a:t>
+              <a:t>The loss is the trade counting makes for scale. Name it on day one; Week 5's embeddings exist to recover some of it.</a:t>
             </a:r>
             <a:endParaRPr lang="en-US" sz="1650" dirty="0"/>
           </a:p>

--- a/slides/pptx/week-01.pptx
+++ b/slides/pptx/week-01.pptx
@@ -4292,7 +4292,7 @@
                 <a:ea typeface="Calibri" pitchFamily="34" charset="-122"/>
                 <a:cs typeface="Calibri" pitchFamily="34" charset="-120"/>
               </a:rPr>
-              <a:t>Lab 2 (worked): count words, then pixels. The real headlines' top words (stop-words dominate until removed, the first counting decision), then the Met image corpus: brightness ranking, defined color ranges and the corpus palette (what counts as red is a boundary you set), and the closing demonstration of what every bag throws away, identical word-bags with opposite meanings and a painting beside its shuffled pixels. Image projects begin here.</a:t>
+              <a:t>Lab 2 (worked): count words, then pixels. The real headlines' top words (stop-words dominate until removed, the first counting decision), then the Met image corpus ranked darkest to brightest by average brightness. The notebook's after-class half, defined color ranges and what every bag throws away, is this week's guided homework. Image projects begin here.</a:t>
             </a:r>
             <a:endParaRPr lang="en-US" sz="1100" dirty="0"/>
           </a:p>
@@ -4865,7 +4865,7 @@
                 <a:ea typeface="Calibri" pitchFamily="34" charset="-122"/>
                 <a:cs typeface="Calibri" pitchFamily="34" charset="-120"/>
               </a:rPr>
-              <a:t>One question from your life answerable with text or image data; three sentences.</a:t>
+              <a:t>One question from your life, answerable with data (three sentences), plus the notebook's after-class half (~20 minutes).</a:t>
             </a:r>
             <a:endParaRPr lang="en-US" sz="1400" dirty="0"/>
           </a:p>
@@ -8487,7 +8487,7 @@
                 <a:ea typeface="Cambria" pitchFamily="34" charset="-122"/>
                 <a:cs typeface="Cambria" pitchFamily="34" charset="-120"/>
               </a:rPr>
-              <a:t>Defining a color, and what every bag loses</a:t>
+              <a:t>The after-class half: defining a color, and what every bag loses</a:t>
             </a:r>
             <a:endParaRPr lang="en-US" sz="3000" dirty="0"/>
           </a:p>

--- a/slides/pptx/week-01.pptx
+++ b/slides/pptx/week-01.pptx
@@ -20,9 +20,10 @@
     <p:sldId id="268" r:id="rId14"/>
     <p:sldId id="269" r:id="rId15"/>
     <p:sldId id="270" r:id="rId16"/>
+    <p:sldId id="271" r:id="rId17"/>
   </p:sldIdLst>
   <p:notesMasterIdLst>
-    <p:notesMasterId r:id="rId17"/>
+    <p:notesMasterId r:id="rId18"/>
   </p:notesMasterIdLst>
   <p:sldSz cx="12191695" cy="6858000"/>
   <p:notesSz cx="6858000" cy="12191695"/>
@@ -1086,6 +1087,94 @@
 </p:notes>
 </file>
 
+<file path=ppt/notesSlides/notesSlide16.xml><?xml version="1.0" encoding="utf-8"?>
+<p:notes xmlns:a="http://schemas.openxmlformats.org/drawingml/2006/main" xmlns:r="http://schemas.openxmlformats.org/officeDocument/2006/relationships" xmlns:p="http://schemas.openxmlformats.org/presentationml/2006/main">
+  <p:cSld>
+    <p:spTree>
+      <p:nvGrpSpPr>
+        <p:cNvPr id="1" name=""/>
+        <p:cNvGrpSpPr/>
+        <p:nvPr/>
+      </p:nvGrpSpPr>
+      <p:grpSpPr>
+        <a:xfrm>
+          <a:off x="0" y="0"/>
+          <a:ext cx="0" cy="0"/>
+          <a:chOff x="0" y="0"/>
+          <a:chExt cx="0" cy="0"/>
+        </a:xfrm>
+      </p:grpSpPr>
+      <p:sp>
+        <p:nvSpPr>
+          <p:cNvPr id="2" name="Slide Image Placeholder 1"/>
+          <p:cNvSpPr>
+            <a:spLocks noGrp="1" noRot="1" noChangeAspect="1"/>
+          </p:cNvSpPr>
+          <p:nvPr>
+            <p:ph type="sldImg"/>
+          </p:nvPr>
+        </p:nvSpPr>
+        <p:spPr/>
+      </p:sp>
+      <p:sp>
+        <p:nvSpPr>
+          <p:cNvPr id="3" name="Notes Placeholder 2"/>
+          <p:cNvSpPr>
+            <a:spLocks noGrp="1"/>
+          </p:cNvSpPr>
+          <p:nvPr>
+            <p:ph type="body" idx="1"/>
+          </p:nvPr>
+        </p:nvSpPr>
+        <p:spPr/>
+        <p:txBody>
+          <a:bodyPr/>
+          <a:lstStyle/>
+          <a:p>
+            <a:r>
+              <a:rPr lang="en-US" dirty="0"/>
+              <a:t/>
+            </a:r>
+            <a:endParaRPr lang="en-US" dirty="0"/>
+          </a:p>
+        </p:txBody>
+      </p:sp>
+      <p:sp>
+        <p:nvSpPr>
+          <p:cNvPr id="4" name="Slide Number Placeholder 3"/>
+          <p:cNvSpPr>
+            <a:spLocks noGrp="1"/>
+          </p:cNvSpPr>
+          <p:nvPr>
+            <p:ph type="sldNum" sz="quarter" idx="10"/>
+          </p:nvPr>
+        </p:nvSpPr>
+        <p:spPr/>
+        <p:txBody>
+          <a:bodyPr/>
+          <a:lstStyle/>
+          <a:p>
+            <a:fld id="{F7021451-1387-4CA6-816F-3879F97B5CBC}" type="slidenum">
+              <a:rPr lang="en-US"/>
+              <a:t>16</a:t>
+            </a:fld>
+            <a:endParaRPr lang="en-US"/>
+          </a:p>
+        </p:txBody>
+      </p:sp>
+    </p:spTree>
+    <p:extLst>
+      <p:ext uri="{BB962C8B-B14F-4D97-AF65-F5344CB8AC3E}">
+        <p14:creationId xmlns:p14="http://schemas.microsoft.com/office/powerpoint/2010/main" val="1024086991"/>
+      </p:ext>
+    </p:extLst>
+  </p:cSld>
+  <p:clrMapOvr>
+    <a:masterClrMapping/>
+  </p:clrMapOvr>
+</p:notes>
+</file>
+
 <file path=ppt/notesSlides/notesSlide2.xml><?xml version="1.0" encoding="utf-8"?>
 <p:notes xmlns:a="http://schemas.openxmlformats.org/drawingml/2006/main" xmlns:r="http://schemas.openxmlformats.org/officeDocument/2006/relationships" xmlns:p="http://schemas.openxmlformats.org/presentationml/2006/main">
   <p:cSld>
@@ -2766,7 +2855,7 @@
                 <a:ea typeface="Cambria" pitchFamily="34" charset="-122"/>
                 <a:cs typeface="Cambria" pitchFamily="34" charset="-120"/>
               </a:rPr>
-              <a:t>Counting, three shapes</a:t>
+              <a:t>The after-class half: defining a color, and what every bag loses</a:t>
             </a:r>
             <a:endParaRPr lang="en-US" sz="3000" dirty="0"/>
           </a:p>
@@ -2830,7 +2919,7 @@
                 <a:ea typeface="Calibri" pitchFamily="34" charset="-122"/>
                 <a:cs typeface="Calibri" pitchFamily="34" charset="-120"/>
               </a:rPr>
-              <a:t>Rows: what share of brides kept their name, year by year. One groupby, one chart.</a:t>
+              <a:t>What counts as red? A boundary you set on the hue wheel. Shift it twenty degrees and paintings change category without changing a pixel: defining the ranges is the analysis, the same decision as the stop-word list.</a:t>
             </a:r>
             <a:endParaRPr lang="en-US" sz="1650" dirty="0"/>
           </a:p>
@@ -2894,7 +2983,7 @@
                 <a:ea typeface="Calibri" pitchFamily="34" charset="-122"/>
                 <a:cs typeface="Calibri" pitchFamily="34" charset="-120"/>
               </a:rPr>
-              <a:t>Words: the top words of a lyric are "the, and, you" until you remove stop-words. That removal is your first modeling choice.</a:t>
+              <a:t>Two sentences with identical word-bags can mean opposite things: "the critics loved it, the public did not" and its reversal count the same. Order, negation, and who-did-what are the casualties.</a:t>
             </a:r>
             <a:endParaRPr lang="en-US" sz="1650" dirty="0"/>
           </a:p>
@@ -2958,7 +3047,7 @@
                 <a:ea typeface="Calibri" pitchFamily="34" charset="-122"/>
                 <a:cs typeface="Calibri" pitchFamily="34" charset="-120"/>
               </a:rPr>
-              <a:t>Pixels: rank 200 Met thumbnails darkest to brightest from average luminance.</a:t>
+              <a:t>A painting and its shuffled pixels share the brightness, the average color, and the palette. Composition is to images what word order is to sentences.</a:t>
             </a:r>
             <a:endParaRPr lang="en-US" sz="1650" dirty="0"/>
           </a:p>
@@ -3022,7 +3111,7 @@
                 <a:ea typeface="Calibri" pitchFamily="34" charset="-122"/>
                 <a:cs typeface="Calibri" pitchFamily="34" charset="-120"/>
               </a:rPr>
-              <a:t>The same technique three times, each containing a decision.</a:t>
+              <a:t>The loss is the trade counting makes for scale. Name it on day one; Week 5's embeddings exist to recover some of it.</a:t>
             </a:r>
             <a:endParaRPr lang="en-US" sz="1650" dirty="0"/>
           </a:p>
@@ -3062,14 +3151,34 @@
       </p:grpSpPr>
       <p:sp>
         <p:nvSpPr>
-          <p:cNvPr id="2" name="Text 0"/>
-          <p:cNvSpPr/>
-          <p:nvPr/>
-        </p:nvSpPr>
-        <p:spPr>
-          <a:xfrm>
-            <a:off x="640080" y="731520"/>
-            <a:ext cx="10058400" cy="731520"/>
+          <p:cNvPr id="2" name="Shape 0"/>
+          <p:cNvSpPr/>
+          <p:nvPr/>
+        </p:nvSpPr>
+        <p:spPr>
+          <a:xfrm>
+            <a:off x="0" y="0"/>
+            <a:ext cx="164592" cy="6858000"/>
+          </a:xfrm>
+          <a:prstGeom prst="rect">
+            <a:avLst/>
+          </a:prstGeom>
+          <a:solidFill>
+            <a:srgbClr val="3F6F5F"/>
+          </a:solidFill>
+          <a:ln/>
+        </p:spPr>
+      </p:sp>
+      <p:sp>
+        <p:nvSpPr>
+          <p:cNvPr id="3" name="Text 1"/>
+          <p:cNvSpPr/>
+          <p:nvPr/>
+        </p:nvSpPr>
+        <p:spPr>
+          <a:xfrm>
+            <a:off x="640080" y="640080"/>
+            <a:ext cx="10058400" cy="320040"/>
           </a:xfrm>
           <a:prstGeom prst="rect">
             <a:avLst/>
@@ -3079,6 +3188,47 @@
         </p:spPr>
         <p:txBody>
           <a:bodyPr wrap="square" rtlCol="0" anchor="ctr"/>
+          <a:lstStyle/>
+          <a:p>
+            <a:pPr indent="0" marL="0">
+              <a:buNone/>
+            </a:pPr>
+            <a:r>
+              <a:rPr lang="en-US" sz="1200" b="1" spc="300" kern="0" dirty="0">
+                <a:solidFill>
+                  <a:srgbClr val="3F6F5F"/>
+                </a:solidFill>
+                <a:latin typeface="Calibri" pitchFamily="34" charset="0"/>
+                <a:ea typeface="Calibri" pitchFamily="34" charset="-122"/>
+                <a:cs typeface="Calibri" pitchFamily="34" charset="-120"/>
+              </a:rPr>
+              <a:t>WEEK 1 · KEY POINTS</a:t>
+            </a:r>
+            <a:endParaRPr lang="en-US" sz="1200" dirty="0"/>
+          </a:p>
+        </p:txBody>
+      </p:sp>
+      <p:sp>
+        <p:nvSpPr>
+          <p:cNvPr id="4" name="Text 2"/>
+          <p:cNvSpPr/>
+          <p:nvPr/>
+        </p:nvSpPr>
+        <p:spPr>
+          <a:xfrm>
+            <a:off x="640080" y="1005840"/>
+            <a:ext cx="10881360" cy="914400"/>
+          </a:xfrm>
+          <a:prstGeom prst="rect">
+            <a:avLst/>
+          </a:prstGeom>
+          <a:noFill/>
+          <a:ln/>
+        </p:spPr>
+        <p:txBody>
+          <a:bodyPr wrap="square" rtlCol="0" anchor="t">
+            <a:spAutoFit/>
+          </a:bodyPr>
           <a:lstStyle/>
           <a:p>
             <a:pPr indent="0" marL="0">
@@ -3093,7 +3243,7 @@
                 <a:ea typeface="Cambria" pitchFamily="34" charset="-122"/>
                 <a:cs typeface="Cambria" pitchFamily="34" charset="-120"/>
               </a:rPr>
-              <a:t>Three modes today</a:t>
+              <a:t>Counting, three shapes</a:t>
             </a:r>
             <a:endParaRPr lang="en-US" sz="3000" dirty="0"/>
           </a:p>
@@ -3101,134 +3251,98 @@
       </p:sp>
       <p:sp>
         <p:nvSpPr>
-          <p:cNvPr id="3" name="Text 1"/>
-          <p:cNvSpPr/>
-          <p:nvPr/>
-        </p:nvSpPr>
-        <p:spPr>
-          <a:xfrm>
-            <a:off x="640080" y="1417320"/>
-            <a:ext cx="10058400" cy="365760"/>
-          </a:xfrm>
-          <a:prstGeom prst="rect">
-            <a:avLst/>
-          </a:prstGeom>
-          <a:noFill/>
-          <a:ln/>
-        </p:spPr>
-        <p:txBody>
-          <a:bodyPr wrap="square" rtlCol="0" anchor="ctr"/>
-          <a:lstStyle/>
-          <a:p>
-            <a:pPr indent="0" marL="0">
-              <a:buNone/>
-            </a:pPr>
-            <a:r>
-              <a:rPr lang="en-US" sz="1400" i="1" dirty="0">
-                <a:solidFill>
-                  <a:srgbClr val="6B6B63"/>
+          <p:cNvPr id="5" name="Shape 3"/>
+          <p:cNvSpPr/>
+          <p:nvPr/>
+        </p:nvSpPr>
+        <p:spPr>
+          <a:xfrm>
+            <a:off x="640080" y="2331720"/>
+            <a:ext cx="201168" cy="201168"/>
+          </a:xfrm>
+          <a:prstGeom prst="ellipse">
+            <a:avLst/>
+          </a:prstGeom>
+          <a:solidFill>
+            <a:srgbClr val="7A3B2E"/>
+          </a:solidFill>
+          <a:ln/>
+        </p:spPr>
+      </p:sp>
+      <p:sp>
+        <p:nvSpPr>
+          <p:cNvPr id="6" name="Text 4"/>
+          <p:cNvSpPr/>
+          <p:nvPr/>
+        </p:nvSpPr>
+        <p:spPr>
+          <a:xfrm>
+            <a:off x="1097280" y="2240280"/>
+            <a:ext cx="10607040" cy="1017270"/>
+          </a:xfrm>
+          <a:prstGeom prst="rect">
+            <a:avLst/>
+          </a:prstGeom>
+          <a:noFill/>
+          <a:ln/>
+        </p:spPr>
+        <p:txBody>
+          <a:bodyPr wrap="square" rtlCol="0" anchor="t">
+            <a:spAutoFit/>
+          </a:bodyPr>
+          <a:lstStyle/>
+          <a:p>
+            <a:pPr indent="0" marL="0">
+              <a:lnSpc>
+                <a:spcPct val="112000"/>
+              </a:lnSpc>
+              <a:buNone/>
+            </a:pPr>
+            <a:r>
+              <a:rPr lang="en-US" sz="1650" dirty="0">
+                <a:solidFill>
+                  <a:srgbClr val="1A1A1A"/>
                 </a:solidFill>
                 <a:latin typeface="Calibri" pitchFamily="34" charset="0"/>
                 <a:ea typeface="Calibri" pitchFamily="34" charset="-122"/>
                 <a:cs typeface="Calibri" pitchFamily="34" charset="-120"/>
               </a:rPr>
-              <a:t>about a third of the session each</a:t>
-            </a:r>
-            <a:endParaRPr lang="en-US" sz="1400" dirty="0"/>
-          </a:p>
-        </p:txBody>
-      </p:sp>
-      <p:sp>
-        <p:nvSpPr>
-          <p:cNvPr id="4" name="Shape 2"/>
-          <p:cNvSpPr/>
-          <p:nvPr/>
-        </p:nvSpPr>
-        <p:spPr>
-          <a:xfrm>
-            <a:off x="640080" y="2194560"/>
-            <a:ext cx="3383280" cy="3291840"/>
-          </a:xfrm>
-          <a:prstGeom prst="roundRect">
-            <a:avLst>
-              <a:gd name="adj" fmla="val 3333"/>
-            </a:avLst>
-          </a:prstGeom>
-          <a:solidFill>
-            <a:srgbClr val="F4EEE8"/>
-          </a:solidFill>
-          <a:ln/>
-        </p:spPr>
-      </p:sp>
-      <p:sp>
-        <p:nvSpPr>
-          <p:cNvPr id="5" name="Shape 3"/>
-          <p:cNvSpPr/>
-          <p:nvPr/>
-        </p:nvSpPr>
-        <p:spPr>
-          <a:xfrm>
-            <a:off x="1051560" y="2606040"/>
-            <a:ext cx="548640" cy="548640"/>
+              <a:t>Rows: what share of brides kept their name, year by year. One groupby, one chart.</a:t>
+            </a:r>
+            <a:endParaRPr lang="en-US" sz="1650" dirty="0"/>
+          </a:p>
+        </p:txBody>
+      </p:sp>
+      <p:sp>
+        <p:nvSpPr>
+          <p:cNvPr id="7" name="Shape 5"/>
+          <p:cNvSpPr/>
+          <p:nvPr/>
+        </p:nvSpPr>
+        <p:spPr>
+          <a:xfrm>
+            <a:off x="640080" y="3348990"/>
+            <a:ext cx="201168" cy="201168"/>
           </a:xfrm>
           <a:prstGeom prst="ellipse">
             <a:avLst/>
           </a:prstGeom>
           <a:solidFill>
-            <a:srgbClr val="7A3B2E"/>
-          </a:solidFill>
-          <a:ln/>
-        </p:spPr>
-      </p:sp>
-      <p:sp>
-        <p:nvSpPr>
-          <p:cNvPr id="6" name="Text 4"/>
-          <p:cNvSpPr/>
-          <p:nvPr/>
-        </p:nvSpPr>
-        <p:spPr>
-          <a:xfrm>
-            <a:off x="1005840" y="3383280"/>
-            <a:ext cx="2651760" cy="548640"/>
-          </a:xfrm>
-          <a:prstGeom prst="rect">
-            <a:avLst/>
-          </a:prstGeom>
-          <a:noFill/>
-          <a:ln/>
-        </p:spPr>
-        <p:txBody>
-          <a:bodyPr wrap="square" rtlCol="0" anchor="ctr"/>
-          <a:lstStyle/>
-          <a:p>
-            <a:pPr indent="0" marL="0">
-              <a:buNone/>
-            </a:pPr>
-            <a:r>
-              <a:rPr lang="en-US" sz="2100" b="1" dirty="0">
-                <a:solidFill>
-                  <a:srgbClr val="1A1A1A"/>
-                </a:solidFill>
-                <a:latin typeface="Cambria" pitchFamily="34" charset="0"/>
-                <a:ea typeface="Cambria" pitchFamily="34" charset="-122"/>
-                <a:cs typeface="Cambria" pitchFamily="34" charset="-120"/>
-              </a:rPr>
-              <a:t>Lecture / demo</a:t>
-            </a:r>
-            <a:endParaRPr lang="en-US" sz="2100" dirty="0"/>
-          </a:p>
-        </p:txBody>
-      </p:sp>
-      <p:sp>
-        <p:nvSpPr>
-          <p:cNvPr id="7" name="Text 5"/>
-          <p:cNvSpPr/>
-          <p:nvPr/>
-        </p:nvSpPr>
-        <p:spPr>
-          <a:xfrm>
-            <a:off x="1005840" y="3977640"/>
-            <a:ext cx="2651760" cy="1371600"/>
+            <a:srgbClr val="3F6F5F"/>
+          </a:solidFill>
+          <a:ln/>
+        </p:spPr>
+      </p:sp>
+      <p:sp>
+        <p:nvSpPr>
+          <p:cNvPr id="8" name="Text 6"/>
+          <p:cNvSpPr/>
+          <p:nvPr/>
+        </p:nvSpPr>
+        <p:spPr>
+          <a:xfrm>
+            <a:off x="1097280" y="3257550"/>
+            <a:ext cx="10607040" cy="1017270"/>
           </a:xfrm>
           <a:prstGeom prst="rect">
             <a:avLst/>
@@ -3244,12 +3358,12 @@
           <a:p>
             <a:pPr indent="0" marL="0">
               <a:lnSpc>
-                <a:spcPct val="115000"/>
+                <a:spcPct val="112000"/>
               </a:lnSpc>
               <a:buNone/>
             </a:pPr>
             <a:r>
-              <a:rPr lang="en-US" sz="1500" dirty="0">
+              <a:rPr lang="en-US" sz="1650" dirty="0">
                 <a:solidFill>
                   <a:srgbClr val="1A1A1A"/>
                 </a:solidFill>
@@ -3257,33 +3371,11 @@
                 <a:ea typeface="Calibri" pitchFamily="34" charset="-122"/>
                 <a:cs typeface="Calibri" pitchFamily="34" charset="-120"/>
               </a:rPr>
-              <a:t>Counting: rows, words, pixels</a:t>
-            </a:r>
-            <a:endParaRPr lang="en-US" sz="1500" dirty="0"/>
-          </a:p>
-        </p:txBody>
-      </p:sp>
-      <p:sp>
-        <p:nvSpPr>
-          <p:cNvPr id="8" name="Shape 6"/>
-          <p:cNvSpPr/>
-          <p:nvPr/>
-        </p:nvSpPr>
-        <p:spPr>
-          <a:xfrm>
-            <a:off x="4526280" y="2194560"/>
-            <a:ext cx="3383280" cy="3291840"/>
-          </a:xfrm>
-          <a:prstGeom prst="roundRect">
-            <a:avLst>
-              <a:gd name="adj" fmla="val 3333"/>
-            </a:avLst>
-          </a:prstGeom>
-          <a:solidFill>
-            <a:srgbClr val="F4EEE8"/>
-          </a:solidFill>
-          <a:ln/>
-        </p:spPr>
+              <a:t>Words: the top words of a lyric are "the, and, you" until you remove stop-words. That removal is your first modeling choice.</a:t>
+            </a:r>
+            <a:endParaRPr lang="en-US" sz="1650" dirty="0"/>
+          </a:p>
+        </p:txBody>
       </p:sp>
       <p:sp>
         <p:nvSpPr>
@@ -3293,14 +3385,14 @@
         </p:nvSpPr>
         <p:spPr>
           <a:xfrm>
-            <a:off x="4937760" y="2606040"/>
-            <a:ext cx="548640" cy="548640"/>
+            <a:off x="640080" y="4366260"/>
+            <a:ext cx="201168" cy="201168"/>
           </a:xfrm>
           <a:prstGeom prst="ellipse">
             <a:avLst/>
           </a:prstGeom>
           <a:solidFill>
-            <a:srgbClr val="3F6F5F"/>
+            <a:srgbClr val="B9852F"/>
           </a:solidFill>
           <a:ln/>
         </p:spPr>
@@ -3313,47 +3405,8 @@
         </p:nvSpPr>
         <p:spPr>
           <a:xfrm>
-            <a:off x="4892040" y="3383280"/>
-            <a:ext cx="2651760" cy="548640"/>
-          </a:xfrm>
-          <a:prstGeom prst="rect">
-            <a:avLst/>
-          </a:prstGeom>
-          <a:noFill/>
-          <a:ln/>
-        </p:spPr>
-        <p:txBody>
-          <a:bodyPr wrap="square" rtlCol="0" anchor="ctr"/>
-          <a:lstStyle/>
-          <a:p>
-            <a:pPr indent="0" marL="0">
-              <a:buNone/>
-            </a:pPr>
-            <a:r>
-              <a:rPr lang="en-US" sz="2100" b="1" dirty="0">
-                <a:solidFill>
-                  <a:srgbClr val="1A1A1A"/>
-                </a:solidFill>
-                <a:latin typeface="Cambria" pitchFamily="34" charset="0"/>
-                <a:ea typeface="Cambria" pitchFamily="34" charset="-122"/>
-                <a:cs typeface="Cambria" pitchFamily="34" charset="-120"/>
-              </a:rPr>
-              <a:t>Workshop</a:t>
-            </a:r>
-            <a:endParaRPr lang="en-US" sz="2100" dirty="0"/>
-          </a:p>
-        </p:txBody>
-      </p:sp>
-      <p:sp>
-        <p:nvSpPr>
-          <p:cNvPr id="11" name="Text 9"/>
-          <p:cNvSpPr/>
-          <p:nvPr/>
-        </p:nvSpPr>
-        <p:spPr>
-          <a:xfrm>
-            <a:off x="4892040" y="3977640"/>
-            <a:ext cx="2651760" cy="1371600"/>
+            <a:off x="1097280" y="4274820"/>
+            <a:ext cx="10607040" cy="1017270"/>
           </a:xfrm>
           <a:prstGeom prst="rect">
             <a:avLst/>
@@ -3369,12 +3422,12 @@
           <a:p>
             <a:pPr indent="0" marL="0">
               <a:lnSpc>
-                <a:spcPct val="115000"/>
+                <a:spcPct val="112000"/>
               </a:lnSpc>
               <a:buNone/>
             </a:pPr>
             <a:r>
-              <a:rPr lang="en-US" sz="1500" dirty="0">
+              <a:rPr lang="en-US" sz="1650" dirty="0">
                 <a:solidFill>
                   <a:srgbClr val="1A1A1A"/>
                 </a:solidFill>
@@ -3382,103 +3435,42 @@
                 <a:ea typeface="Calibri" pitchFamily="34" charset="-122"/>
                 <a:cs typeface="Calibri" pitchFamily="34" charset="-120"/>
               </a:rPr>
-              <a:t>Build hands-on on your own data.</a:t>
-            </a:r>
-            <a:endParaRPr lang="en-US" sz="1500" dirty="0"/>
-          </a:p>
-        </p:txBody>
-      </p:sp>
-      <p:sp>
-        <p:nvSpPr>
-          <p:cNvPr id="12" name="Shape 10"/>
-          <p:cNvSpPr/>
-          <p:nvPr/>
-        </p:nvSpPr>
-        <p:spPr>
-          <a:xfrm>
-            <a:off x="8412480" y="2194560"/>
-            <a:ext cx="3383280" cy="3291840"/>
-          </a:xfrm>
-          <a:prstGeom prst="roundRect">
-            <a:avLst>
-              <a:gd name="adj" fmla="val 3333"/>
-            </a:avLst>
-          </a:prstGeom>
-          <a:solidFill>
-            <a:srgbClr val="F4EEE8"/>
-          </a:solidFill>
-          <a:ln/>
-        </p:spPr>
-      </p:sp>
-      <p:sp>
-        <p:nvSpPr>
-          <p:cNvPr id="13" name="Shape 11"/>
-          <p:cNvSpPr/>
-          <p:nvPr/>
-        </p:nvSpPr>
-        <p:spPr>
-          <a:xfrm>
-            <a:off x="8823960" y="2606040"/>
-            <a:ext cx="548640" cy="548640"/>
+              <a:t>Pixels: rank 200 Met thumbnails darkest to brightest from average luminance.</a:t>
+            </a:r>
+            <a:endParaRPr lang="en-US" sz="1650" dirty="0"/>
+          </a:p>
+        </p:txBody>
+      </p:sp>
+      <p:sp>
+        <p:nvSpPr>
+          <p:cNvPr id="11" name="Shape 9"/>
+          <p:cNvSpPr/>
+          <p:nvPr/>
+        </p:nvSpPr>
+        <p:spPr>
+          <a:xfrm>
+            <a:off x="640080" y="5383530"/>
+            <a:ext cx="201168" cy="201168"/>
           </a:xfrm>
           <a:prstGeom prst="ellipse">
             <a:avLst/>
           </a:prstGeom>
           <a:solidFill>
-            <a:srgbClr val="B9852F"/>
-          </a:solidFill>
-          <a:ln/>
-        </p:spPr>
-      </p:sp>
-      <p:sp>
-        <p:nvSpPr>
-          <p:cNvPr id="14" name="Text 12"/>
-          <p:cNvSpPr/>
-          <p:nvPr/>
-        </p:nvSpPr>
-        <p:spPr>
-          <a:xfrm>
-            <a:off x="8778240" y="3383280"/>
-            <a:ext cx="2651760" cy="548640"/>
-          </a:xfrm>
-          <a:prstGeom prst="rect">
-            <a:avLst/>
-          </a:prstGeom>
-          <a:noFill/>
-          <a:ln/>
-        </p:spPr>
-        <p:txBody>
-          <a:bodyPr wrap="square" rtlCol="0" anchor="ctr"/>
-          <a:lstStyle/>
-          <a:p>
-            <a:pPr indent="0" marL="0">
-              <a:buNone/>
-            </a:pPr>
-            <a:r>
-              <a:rPr lang="en-US" sz="2100" b="1" dirty="0">
-                <a:solidFill>
-                  <a:srgbClr val="1A1A1A"/>
-                </a:solidFill>
-                <a:latin typeface="Cambria" pitchFamily="34" charset="0"/>
-                <a:ea typeface="Cambria" pitchFamily="34" charset="-122"/>
-                <a:cs typeface="Cambria" pitchFamily="34" charset="-120"/>
-              </a:rPr>
-              <a:t>Discussion</a:t>
-            </a:r>
-            <a:endParaRPr lang="en-US" sz="2100" dirty="0"/>
-          </a:p>
-        </p:txBody>
-      </p:sp>
-      <p:sp>
-        <p:nvSpPr>
-          <p:cNvPr id="15" name="Text 13"/>
-          <p:cNvSpPr/>
-          <p:nvPr/>
-        </p:nvSpPr>
-        <p:spPr>
-          <a:xfrm>
-            <a:off x="8778240" y="3977640"/>
-            <a:ext cx="2651760" cy="1371600"/>
+            <a:srgbClr val="7A3B2E"/>
+          </a:solidFill>
+          <a:ln/>
+        </p:spPr>
+      </p:sp>
+      <p:sp>
+        <p:nvSpPr>
+          <p:cNvPr id="12" name="Text 10"/>
+          <p:cNvSpPr/>
+          <p:nvPr/>
+        </p:nvSpPr>
+        <p:spPr>
+          <a:xfrm>
+            <a:off x="1097280" y="5292090"/>
+            <a:ext cx="10607040" cy="1017270"/>
           </a:xfrm>
           <a:prstGeom prst="rect">
             <a:avLst/>
@@ -3494,12 +3486,12 @@
           <a:p>
             <a:pPr indent="0" marL="0">
               <a:lnSpc>
-                <a:spcPct val="115000"/>
+                <a:spcPct val="112000"/>
               </a:lnSpc>
               <a:buNone/>
             </a:pPr>
             <a:r>
-              <a:rPr lang="en-US" sz="1500" dirty="0">
+              <a:rPr lang="en-US" sz="1650" dirty="0">
                 <a:solidFill>
                   <a:srgbClr val="1A1A1A"/>
                 </a:solidFill>
@@ -3507,9 +3499,9 @@
                 <a:ea typeface="Calibri" pitchFamily="34" charset="-122"/>
                 <a:cs typeface="Calibri" pitchFamily="34" charset="-120"/>
               </a:rPr>
-              <a:t>Interrogate the study, debate it, or critique each other's work.</a:t>
-            </a:r>
-            <a:endParaRPr lang="en-US" sz="1500" dirty="0"/>
+              <a:t>The same technique three times, each containing a decision.</a:t>
+            </a:r>
+            <a:endParaRPr lang="en-US" sz="1650" dirty="0"/>
           </a:p>
         </p:txBody>
       </p:sp>
@@ -3553,7 +3545,7 @@
         </p:nvSpPr>
         <p:spPr>
           <a:xfrm>
-            <a:off x="640080" y="640080"/>
+            <a:off x="640080" y="731520"/>
             <a:ext cx="10058400" cy="731520"/>
           </a:xfrm>
           <a:prstGeom prst="rect">
@@ -3578,7 +3570,7 @@
                 <a:ea typeface="Cambria" pitchFamily="34" charset="-122"/>
                 <a:cs typeface="Cambria" pitchFamily="34" charset="-120"/>
               </a:rPr>
-              <a:t>The session</a:t>
+              <a:t>Three modes today</a:t>
             </a:r>
             <a:endParaRPr lang="en-US" sz="3000" dirty="0"/>
           </a:p>
@@ -3586,36 +3578,14 @@
       </p:sp>
       <p:sp>
         <p:nvSpPr>
-          <p:cNvPr id="3" name="Shape 1"/>
-          <p:cNvSpPr/>
-          <p:nvPr/>
-        </p:nvSpPr>
-        <p:spPr>
-          <a:xfrm>
-            <a:off x="640080" y="1572768"/>
-            <a:ext cx="868680" cy="450342"/>
-          </a:xfrm>
-          <a:prstGeom prst="roundRect">
-            <a:avLst>
-              <a:gd name="adj" fmla="val 12183"/>
-            </a:avLst>
-          </a:prstGeom>
-          <a:solidFill>
-            <a:srgbClr val="7A3B2E"/>
-          </a:solidFill>
-          <a:ln/>
-        </p:spPr>
-      </p:sp>
-      <p:sp>
-        <p:nvSpPr>
-          <p:cNvPr id="4" name="Text 2"/>
-          <p:cNvSpPr/>
-          <p:nvPr/>
-        </p:nvSpPr>
-        <p:spPr>
-          <a:xfrm>
-            <a:off x="640080" y="1572768"/>
-            <a:ext cx="868680" cy="450342"/>
+          <p:cNvPr id="3" name="Text 1"/>
+          <p:cNvSpPr/>
+          <p:nvPr/>
+        </p:nvSpPr>
+        <p:spPr>
+          <a:xfrm>
+            <a:off x="640080" y="1417320"/>
+            <a:ext cx="10058400" cy="365760"/>
           </a:xfrm>
           <a:prstGeom prst="rect">
             <a:avLst/>
@@ -3627,52 +3597,136 @@
           <a:bodyPr wrap="square" rtlCol="0" anchor="ctr"/>
           <a:lstStyle/>
           <a:p>
-            <a:pPr algn="ctr" indent="0" marL="0">
-              <a:buNone/>
-            </a:pPr>
-            <a:r>
-              <a:rPr lang="en-US" sz="1100" b="1" dirty="0">
-                <a:solidFill>
-                  <a:srgbClr val="FFFFFF"/>
+            <a:pPr indent="0" marL="0">
+              <a:buNone/>
+            </a:pPr>
+            <a:r>
+              <a:rPr lang="en-US" sz="1400" i="1" dirty="0">
+                <a:solidFill>
+                  <a:srgbClr val="6B6B63"/>
                 </a:solidFill>
                 <a:latin typeface="Calibri" pitchFamily="34" charset="0"/>
                 <a:ea typeface="Calibri" pitchFamily="34" charset="-122"/>
                 <a:cs typeface="Calibri" pitchFamily="34" charset="-120"/>
               </a:rPr>
-              <a:t>0:00</a:t>
-            </a:r>
-            <a:endParaRPr lang="en-US" sz="1100" dirty="0"/>
-          </a:p>
-        </p:txBody>
-      </p:sp>
-      <p:sp>
-        <p:nvSpPr>
-          <p:cNvPr id="5" name="Text 3"/>
-          <p:cNvSpPr/>
-          <p:nvPr/>
-        </p:nvSpPr>
-        <p:spPr>
-          <a:xfrm>
-            <a:off x="1691640" y="1554480"/>
-            <a:ext cx="9646920" cy="560070"/>
-          </a:xfrm>
-          <a:prstGeom prst="rect">
-            <a:avLst/>
-          </a:prstGeom>
-          <a:noFill/>
-          <a:ln/>
-        </p:spPr>
-        <p:txBody>
-          <a:bodyPr wrap="square" rtlCol="0" anchor="ctr">
+              <a:t>about a third of the session each</a:t>
+            </a:r>
+            <a:endParaRPr lang="en-US" sz="1400" dirty="0"/>
+          </a:p>
+        </p:txBody>
+      </p:sp>
+      <p:sp>
+        <p:nvSpPr>
+          <p:cNvPr id="4" name="Shape 2"/>
+          <p:cNvSpPr/>
+          <p:nvPr/>
+        </p:nvSpPr>
+        <p:spPr>
+          <a:xfrm>
+            <a:off x="640080" y="2194560"/>
+            <a:ext cx="3383280" cy="3291840"/>
+          </a:xfrm>
+          <a:prstGeom prst="roundRect">
+            <a:avLst>
+              <a:gd name="adj" fmla="val 3333"/>
+            </a:avLst>
+          </a:prstGeom>
+          <a:solidFill>
+            <a:srgbClr val="F4EEE8"/>
+          </a:solidFill>
+          <a:ln/>
+        </p:spPr>
+      </p:sp>
+      <p:sp>
+        <p:nvSpPr>
+          <p:cNvPr id="5" name="Shape 3"/>
+          <p:cNvSpPr/>
+          <p:nvPr/>
+        </p:nvSpPr>
+        <p:spPr>
+          <a:xfrm>
+            <a:off x="1051560" y="2606040"/>
+            <a:ext cx="548640" cy="548640"/>
+          </a:xfrm>
+          <a:prstGeom prst="ellipse">
+            <a:avLst/>
+          </a:prstGeom>
+          <a:solidFill>
+            <a:srgbClr val="7A3B2E"/>
+          </a:solidFill>
+          <a:ln/>
+        </p:spPr>
+      </p:sp>
+      <p:sp>
+        <p:nvSpPr>
+          <p:cNvPr id="6" name="Text 4"/>
+          <p:cNvSpPr/>
+          <p:nvPr/>
+        </p:nvSpPr>
+        <p:spPr>
+          <a:xfrm>
+            <a:off x="1005840" y="3383280"/>
+            <a:ext cx="2651760" cy="548640"/>
+          </a:xfrm>
+          <a:prstGeom prst="rect">
+            <a:avLst/>
+          </a:prstGeom>
+          <a:noFill/>
+          <a:ln/>
+        </p:spPr>
+        <p:txBody>
+          <a:bodyPr wrap="square" rtlCol="0" anchor="ctr"/>
+          <a:lstStyle/>
+          <a:p>
+            <a:pPr indent="0" marL="0">
+              <a:buNone/>
+            </a:pPr>
+            <a:r>
+              <a:rPr lang="en-US" sz="2100" b="1" dirty="0">
+                <a:solidFill>
+                  <a:srgbClr val="1A1A1A"/>
+                </a:solidFill>
+                <a:latin typeface="Cambria" pitchFamily="34" charset="0"/>
+                <a:ea typeface="Cambria" pitchFamily="34" charset="-122"/>
+                <a:cs typeface="Cambria" pitchFamily="34" charset="-120"/>
+              </a:rPr>
+              <a:t>Lecture / demo</a:t>
+            </a:r>
+            <a:endParaRPr lang="en-US" sz="2100" dirty="0"/>
+          </a:p>
+        </p:txBody>
+      </p:sp>
+      <p:sp>
+        <p:nvSpPr>
+          <p:cNvPr id="7" name="Text 5"/>
+          <p:cNvSpPr/>
+          <p:nvPr/>
+        </p:nvSpPr>
+        <p:spPr>
+          <a:xfrm>
+            <a:off x="1005840" y="3977640"/>
+            <a:ext cx="2651760" cy="1371600"/>
+          </a:xfrm>
+          <a:prstGeom prst="rect">
+            <a:avLst/>
+          </a:prstGeom>
+          <a:noFill/>
+          <a:ln/>
+        </p:spPr>
+        <p:txBody>
+          <a:bodyPr wrap="square" rtlCol="0" anchor="t">
             <a:spAutoFit/>
           </a:bodyPr>
           <a:lstStyle/>
           <a:p>
             <a:pPr indent="0" marL="0">
-              <a:buNone/>
-            </a:pPr>
-            <a:r>
-              <a:rPr lang="en-US" sz="1100" dirty="0">
+              <a:lnSpc>
+                <a:spcPct val="115000"/>
+              </a:lnSpc>
+              <a:buNone/>
+            </a:pPr>
+            <a:r>
+              <a:rPr lang="en-US" sz="1500" dirty="0">
                 <a:solidFill>
                   <a:srgbClr val="1A1A1A"/>
                 </a:solidFill>
@@ -3680,44 +3734,64 @@
                 <a:ea typeface="Calibri" pitchFamily="34" charset="-122"/>
                 <a:cs typeface="Calibri" pitchFamily="34" charset="-120"/>
               </a:rPr>
-              <a:t>Introductions and working agreements, demonstrated in practice. Today's live coding deliberately includes real mistakes.</a:t>
-            </a:r>
-            <a:endParaRPr lang="en-US" sz="1100" dirty="0"/>
-          </a:p>
-        </p:txBody>
-      </p:sp>
-      <p:sp>
-        <p:nvSpPr>
-          <p:cNvPr id="6" name="Shape 4"/>
-          <p:cNvSpPr/>
-          <p:nvPr/>
-        </p:nvSpPr>
-        <p:spPr>
-          <a:xfrm>
-            <a:off x="640080" y="2132838"/>
-            <a:ext cx="868680" cy="450342"/>
+              <a:t>Counting: rows, words, pixels</a:t>
+            </a:r>
+            <a:endParaRPr lang="en-US" sz="1500" dirty="0"/>
+          </a:p>
+        </p:txBody>
+      </p:sp>
+      <p:sp>
+        <p:nvSpPr>
+          <p:cNvPr id="8" name="Shape 6"/>
+          <p:cNvSpPr/>
+          <p:nvPr/>
+        </p:nvSpPr>
+        <p:spPr>
+          <a:xfrm>
+            <a:off x="4526280" y="2194560"/>
+            <a:ext cx="3383280" cy="3291840"/>
           </a:xfrm>
           <a:prstGeom prst="roundRect">
             <a:avLst>
-              <a:gd name="adj" fmla="val 12183"/>
+              <a:gd name="adj" fmla="val 3333"/>
             </a:avLst>
           </a:prstGeom>
           <a:solidFill>
-            <a:srgbClr val="7A3B2E"/>
-          </a:solidFill>
-          <a:ln/>
-        </p:spPr>
-      </p:sp>
-      <p:sp>
-        <p:nvSpPr>
-          <p:cNvPr id="7" name="Text 5"/>
-          <p:cNvSpPr/>
-          <p:nvPr/>
-        </p:nvSpPr>
-        <p:spPr>
-          <a:xfrm>
-            <a:off x="640080" y="2132838"/>
-            <a:ext cx="868680" cy="450342"/>
+            <a:srgbClr val="F4EEE8"/>
+          </a:solidFill>
+          <a:ln/>
+        </p:spPr>
+      </p:sp>
+      <p:sp>
+        <p:nvSpPr>
+          <p:cNvPr id="9" name="Shape 7"/>
+          <p:cNvSpPr/>
+          <p:nvPr/>
+        </p:nvSpPr>
+        <p:spPr>
+          <a:xfrm>
+            <a:off x="4937760" y="2606040"/>
+            <a:ext cx="548640" cy="548640"/>
+          </a:xfrm>
+          <a:prstGeom prst="ellipse">
+            <a:avLst/>
+          </a:prstGeom>
+          <a:solidFill>
+            <a:srgbClr val="3F6F5F"/>
+          </a:solidFill>
+          <a:ln/>
+        </p:spPr>
+      </p:sp>
+      <p:sp>
+        <p:nvSpPr>
+          <p:cNvPr id="10" name="Text 8"/>
+          <p:cNvSpPr/>
+          <p:nvPr/>
+        </p:nvSpPr>
+        <p:spPr>
+          <a:xfrm>
+            <a:off x="4892040" y="3383280"/>
+            <a:ext cx="2651760" cy="548640"/>
           </a:xfrm>
           <a:prstGeom prst="rect">
             <a:avLst/>
@@ -3729,52 +3803,180 @@
           <a:bodyPr wrap="square" rtlCol="0" anchor="ctr"/>
           <a:lstStyle/>
           <a:p>
-            <a:pPr algn="ctr" indent="0" marL="0">
-              <a:buNone/>
-            </a:pPr>
-            <a:r>
-              <a:rPr lang="en-US" sz="1100" b="1" dirty="0">
-                <a:solidFill>
-                  <a:srgbClr val="FFFFFF"/>
+            <a:pPr indent="0" marL="0">
+              <a:buNone/>
+            </a:pPr>
+            <a:r>
+              <a:rPr lang="en-US" sz="2100" b="1" dirty="0">
+                <a:solidFill>
+                  <a:srgbClr val="1A1A1A"/>
+                </a:solidFill>
+                <a:latin typeface="Cambria" pitchFamily="34" charset="0"/>
+                <a:ea typeface="Cambria" pitchFamily="34" charset="-122"/>
+                <a:cs typeface="Cambria" pitchFamily="34" charset="-120"/>
+              </a:rPr>
+              <a:t>Workshop</a:t>
+            </a:r>
+            <a:endParaRPr lang="en-US" sz="2100" dirty="0"/>
+          </a:p>
+        </p:txBody>
+      </p:sp>
+      <p:sp>
+        <p:nvSpPr>
+          <p:cNvPr id="11" name="Text 9"/>
+          <p:cNvSpPr/>
+          <p:nvPr/>
+        </p:nvSpPr>
+        <p:spPr>
+          <a:xfrm>
+            <a:off x="4892040" y="3977640"/>
+            <a:ext cx="2651760" cy="1371600"/>
+          </a:xfrm>
+          <a:prstGeom prst="rect">
+            <a:avLst/>
+          </a:prstGeom>
+          <a:noFill/>
+          <a:ln/>
+        </p:spPr>
+        <p:txBody>
+          <a:bodyPr wrap="square" rtlCol="0" anchor="t">
+            <a:spAutoFit/>
+          </a:bodyPr>
+          <a:lstStyle/>
+          <a:p>
+            <a:pPr indent="0" marL="0">
+              <a:lnSpc>
+                <a:spcPct val="115000"/>
+              </a:lnSpc>
+              <a:buNone/>
+            </a:pPr>
+            <a:r>
+              <a:rPr lang="en-US" sz="1500" dirty="0">
+                <a:solidFill>
+                  <a:srgbClr val="1A1A1A"/>
                 </a:solidFill>
                 <a:latin typeface="Calibri" pitchFamily="34" charset="0"/>
                 <a:ea typeface="Calibri" pitchFamily="34" charset="-122"/>
                 <a:cs typeface="Calibri" pitchFamily="34" charset="-120"/>
               </a:rPr>
-              <a:t>0:10</a:t>
-            </a:r>
-            <a:endParaRPr lang="en-US" sz="1100" dirty="0"/>
-          </a:p>
-        </p:txBody>
-      </p:sp>
-      <p:sp>
-        <p:nvSpPr>
-          <p:cNvPr id="8" name="Text 6"/>
-          <p:cNvSpPr/>
-          <p:nvPr/>
-        </p:nvSpPr>
-        <p:spPr>
-          <a:xfrm>
-            <a:off x="1691640" y="2114550"/>
-            <a:ext cx="9646920" cy="560070"/>
-          </a:xfrm>
-          <a:prstGeom prst="rect">
-            <a:avLst/>
-          </a:prstGeom>
-          <a:noFill/>
-          <a:ln/>
-        </p:spPr>
-        <p:txBody>
-          <a:bodyPr wrap="square" rtlCol="0" anchor="ctr">
+              <a:t>Build hands-on on your own data.</a:t>
+            </a:r>
+            <a:endParaRPr lang="en-US" sz="1500" dirty="0"/>
+          </a:p>
+        </p:txBody>
+      </p:sp>
+      <p:sp>
+        <p:nvSpPr>
+          <p:cNvPr id="12" name="Shape 10"/>
+          <p:cNvSpPr/>
+          <p:nvPr/>
+        </p:nvSpPr>
+        <p:spPr>
+          <a:xfrm>
+            <a:off x="8412480" y="2194560"/>
+            <a:ext cx="3383280" cy="3291840"/>
+          </a:xfrm>
+          <a:prstGeom prst="roundRect">
+            <a:avLst>
+              <a:gd name="adj" fmla="val 3333"/>
+            </a:avLst>
+          </a:prstGeom>
+          <a:solidFill>
+            <a:srgbClr val="F4EEE8"/>
+          </a:solidFill>
+          <a:ln/>
+        </p:spPr>
+      </p:sp>
+      <p:sp>
+        <p:nvSpPr>
+          <p:cNvPr id="13" name="Shape 11"/>
+          <p:cNvSpPr/>
+          <p:nvPr/>
+        </p:nvSpPr>
+        <p:spPr>
+          <a:xfrm>
+            <a:off x="8823960" y="2606040"/>
+            <a:ext cx="548640" cy="548640"/>
+          </a:xfrm>
+          <a:prstGeom prst="ellipse">
+            <a:avLst/>
+          </a:prstGeom>
+          <a:solidFill>
+            <a:srgbClr val="B9852F"/>
+          </a:solidFill>
+          <a:ln/>
+        </p:spPr>
+      </p:sp>
+      <p:sp>
+        <p:nvSpPr>
+          <p:cNvPr id="14" name="Text 12"/>
+          <p:cNvSpPr/>
+          <p:nvPr/>
+        </p:nvSpPr>
+        <p:spPr>
+          <a:xfrm>
+            <a:off x="8778240" y="3383280"/>
+            <a:ext cx="2651760" cy="548640"/>
+          </a:xfrm>
+          <a:prstGeom prst="rect">
+            <a:avLst/>
+          </a:prstGeom>
+          <a:noFill/>
+          <a:ln/>
+        </p:spPr>
+        <p:txBody>
+          <a:bodyPr wrap="square" rtlCol="0" anchor="ctr"/>
+          <a:lstStyle/>
+          <a:p>
+            <a:pPr indent="0" marL="0">
+              <a:buNone/>
+            </a:pPr>
+            <a:r>
+              <a:rPr lang="en-US" sz="2100" b="1" dirty="0">
+                <a:solidFill>
+                  <a:srgbClr val="1A1A1A"/>
+                </a:solidFill>
+                <a:latin typeface="Cambria" pitchFamily="34" charset="0"/>
+                <a:ea typeface="Cambria" pitchFamily="34" charset="-122"/>
+                <a:cs typeface="Cambria" pitchFamily="34" charset="-120"/>
+              </a:rPr>
+              <a:t>Discussion</a:t>
+            </a:r>
+            <a:endParaRPr lang="en-US" sz="2100" dirty="0"/>
+          </a:p>
+        </p:txBody>
+      </p:sp>
+      <p:sp>
+        <p:nvSpPr>
+          <p:cNvPr id="15" name="Text 13"/>
+          <p:cNvSpPr/>
+          <p:nvPr/>
+        </p:nvSpPr>
+        <p:spPr>
+          <a:xfrm>
+            <a:off x="8778240" y="3977640"/>
+            <a:ext cx="2651760" cy="1371600"/>
+          </a:xfrm>
+          <a:prstGeom prst="rect">
+            <a:avLst/>
+          </a:prstGeom>
+          <a:noFill/>
+          <a:ln/>
+        </p:spPr>
+        <p:txBody>
+          <a:bodyPr wrap="square" rtlCol="0" anchor="t">
             <a:spAutoFit/>
           </a:bodyPr>
           <a:lstStyle/>
           <a:p>
             <a:pPr indent="0" marL="0">
-              <a:buNone/>
-            </a:pPr>
-            <a:r>
-              <a:rPr lang="en-US" sz="1100" dirty="0">
+              <a:lnSpc>
+                <a:spcPct val="115000"/>
+              </a:lnSpc>
+              <a:buNone/>
+            </a:pPr>
+            <a:r>
+              <a:rPr lang="en-US" sz="1500" dirty="0">
                 <a:solidFill>
                   <a:srgbClr val="1A1A1A"/>
                 </a:solidFill>
@@ -3782,621 +3984,9 @@
                 <a:ea typeface="Calibri" pitchFamily="34" charset="-122"/>
                 <a:cs typeface="Calibri" pitchFamily="34" charset="-120"/>
               </a:rPr>
-              <a:t>Lecture, the stakes: machines already read culture at scale, the feed ranking what you see, the moderation filter, the model trained on scraped art and prose, and that reading happens without you. Counting culture has produced real knowledge (the screenplay verb split, the Rowling unmasking, pop music's 1991 revolution) and real mistakes, and both look identical until someone checks. In ten weeks you do the reading yourself and publish something checkable.</a:t>
-            </a:r>
-            <a:endParaRPr lang="en-US" sz="1100" dirty="0"/>
-          </a:p>
-        </p:txBody>
-      </p:sp>
-      <p:sp>
-        <p:nvSpPr>
-          <p:cNvPr id="9" name="Shape 7"/>
-          <p:cNvSpPr/>
-          <p:nvPr/>
-        </p:nvSpPr>
-        <p:spPr>
-          <a:xfrm>
-            <a:off x="640080" y="2692908"/>
-            <a:ext cx="868680" cy="450342"/>
-          </a:xfrm>
-          <a:prstGeom prst="roundRect">
-            <a:avLst>
-              <a:gd name="adj" fmla="val 12183"/>
-            </a:avLst>
-          </a:prstGeom>
-          <a:solidFill>
-            <a:srgbClr val="7A3B2E"/>
-          </a:solidFill>
-          <a:ln/>
-        </p:spPr>
-      </p:sp>
-      <p:sp>
-        <p:nvSpPr>
-          <p:cNvPr id="10" name="Text 8"/>
-          <p:cNvSpPr/>
-          <p:nvPr/>
-        </p:nvSpPr>
-        <p:spPr>
-          <a:xfrm>
-            <a:off x="640080" y="2692908"/>
-            <a:ext cx="868680" cy="450342"/>
-          </a:xfrm>
-          <a:prstGeom prst="rect">
-            <a:avLst/>
-          </a:prstGeom>
-          <a:noFill/>
-          <a:ln/>
-        </p:spPr>
-        <p:txBody>
-          <a:bodyPr wrap="square" rtlCol="0" anchor="ctr"/>
-          <a:lstStyle/>
-          <a:p>
-            <a:pPr algn="ctr" indent="0" marL="0">
-              <a:buNone/>
-            </a:pPr>
-            <a:r>
-              <a:rPr lang="en-US" sz="1100" b="1" dirty="0">
-                <a:solidFill>
-                  <a:srgbClr val="FFFFFF"/>
-                </a:solidFill>
-                <a:latin typeface="Calibri" pitchFamily="34" charset="0"/>
-                <a:ea typeface="Calibri" pitchFamily="34" charset="-122"/>
-                <a:cs typeface="Calibri" pitchFamily="34" charset="-120"/>
-              </a:rPr>
-              <a:t>0:28</a:t>
-            </a:r>
-            <a:endParaRPr lang="en-US" sz="1100" dirty="0"/>
-          </a:p>
-        </p:txBody>
-      </p:sp>
-      <p:sp>
-        <p:nvSpPr>
-          <p:cNvPr id="11" name="Text 9"/>
-          <p:cNvSpPr/>
-          <p:nvPr/>
-        </p:nvSpPr>
-        <p:spPr>
-          <a:xfrm>
-            <a:off x="1691640" y="2674620"/>
-            <a:ext cx="9646920" cy="560070"/>
-          </a:xfrm>
-          <a:prstGeom prst="rect">
-            <a:avLst/>
-          </a:prstGeom>
-          <a:noFill/>
-          <a:ln/>
-        </p:spPr>
-        <p:txBody>
-          <a:bodyPr wrap="square" rtlCol="0" anchor="ctr">
-            <a:spAutoFit/>
-          </a:bodyPr>
-          <a:lstStyle/>
-          <a:p>
-            <a:pPr indent="0" marL="0">
-              <a:buNone/>
-            </a:pPr>
-            <a:r>
-              <a:rPr lang="en-US" sz="1100" dirty="0">
-                <a:solidFill>
-                  <a:srgbClr val="1A1A1A"/>
-                </a:solidFill>
-                <a:latin typeface="Calibri" pitchFamily="34" charset="0"/>
-                <a:ea typeface="Calibri" pitchFamily="34" charset="-122"/>
-                <a:cs typeface="Calibri" pitchFamily="34" charset="-120"/>
-              </a:rPr>
-              <a:t>Look at This, then Question It: She Giggles, He Gallops.</a:t>
-            </a:r>
-            <a:endParaRPr lang="en-US" sz="1100" dirty="0"/>
-          </a:p>
-        </p:txBody>
-      </p:sp>
-      <p:sp>
-        <p:nvSpPr>
-          <p:cNvPr id="12" name="Shape 10"/>
-          <p:cNvSpPr/>
-          <p:nvPr/>
-        </p:nvSpPr>
-        <p:spPr>
-          <a:xfrm>
-            <a:off x="640080" y="3252978"/>
-            <a:ext cx="868680" cy="450342"/>
-          </a:xfrm>
-          <a:prstGeom prst="roundRect">
-            <a:avLst>
-              <a:gd name="adj" fmla="val 12183"/>
-            </a:avLst>
-          </a:prstGeom>
-          <a:solidFill>
-            <a:srgbClr val="7A3B2E"/>
-          </a:solidFill>
-          <a:ln/>
-        </p:spPr>
-      </p:sp>
-      <p:sp>
-        <p:nvSpPr>
-          <p:cNvPr id="13" name="Text 11"/>
-          <p:cNvSpPr/>
-          <p:nvPr/>
-        </p:nvSpPr>
-        <p:spPr>
-          <a:xfrm>
-            <a:off x="640080" y="3252978"/>
-            <a:ext cx="868680" cy="450342"/>
-          </a:xfrm>
-          <a:prstGeom prst="rect">
-            <a:avLst/>
-          </a:prstGeom>
-          <a:noFill/>
-          <a:ln/>
-        </p:spPr>
-        <p:txBody>
-          <a:bodyPr wrap="square" rtlCol="0" anchor="ctr"/>
-          <a:lstStyle/>
-          <a:p>
-            <a:pPr algn="ctr" indent="0" marL="0">
-              <a:buNone/>
-            </a:pPr>
-            <a:r>
-              <a:rPr lang="en-US" sz="1100" b="1" dirty="0">
-                <a:solidFill>
-                  <a:srgbClr val="FFFFFF"/>
-                </a:solidFill>
-                <a:latin typeface="Calibri" pitchFamily="34" charset="0"/>
-                <a:ea typeface="Calibri" pitchFamily="34" charset="-122"/>
-                <a:cs typeface="Calibri" pitchFamily="34" charset="-120"/>
-              </a:rPr>
-              <a:t>0:35</a:t>
-            </a:r>
-            <a:endParaRPr lang="en-US" sz="1100" dirty="0"/>
-          </a:p>
-        </p:txBody>
-      </p:sp>
-      <p:sp>
-        <p:nvSpPr>
-          <p:cNvPr id="14" name="Text 12"/>
-          <p:cNvSpPr/>
-          <p:nvPr/>
-        </p:nvSpPr>
-        <p:spPr>
-          <a:xfrm>
-            <a:off x="1691640" y="3234690"/>
-            <a:ext cx="9646920" cy="560070"/>
-          </a:xfrm>
-          <a:prstGeom prst="rect">
-            <a:avLst/>
-          </a:prstGeom>
-          <a:noFill/>
-          <a:ln/>
-        </p:spPr>
-        <p:txBody>
-          <a:bodyPr wrap="square" rtlCol="0" anchor="ctr">
-            <a:spAutoFit/>
-          </a:bodyPr>
-          <a:lstStyle/>
-          <a:p>
-            <a:pPr indent="0" marL="0">
-              <a:buNone/>
-            </a:pPr>
-            <a:r>
-              <a:rPr lang="en-US" sz="1100" dirty="0">
-                <a:solidFill>
-                  <a:srgbClr val="1A1A1A"/>
-                </a:solidFill>
-                <a:latin typeface="Calibri" pitchFamily="34" charset="0"/>
-                <a:ea typeface="Calibri" pitchFamily="34" charset="-122"/>
-                <a:cs typeface="Calibri" pitchFamily="34" charset="-120"/>
-              </a:rPr>
-              <a:t>The vocabulary and the map (no code): corpus, method, model, embedding, in plain language with pictures. The deliverable, shown: a web essay on a runnable notebook.</a:t>
-            </a:r>
-            <a:endParaRPr lang="en-US" sz="1100" dirty="0"/>
-          </a:p>
-        </p:txBody>
-      </p:sp>
-      <p:sp>
-        <p:nvSpPr>
-          <p:cNvPr id="15" name="Shape 13"/>
-          <p:cNvSpPr/>
-          <p:nvPr/>
-        </p:nvSpPr>
-        <p:spPr>
-          <a:xfrm>
-            <a:off x="640080" y="3813048"/>
-            <a:ext cx="868680" cy="450342"/>
-          </a:xfrm>
-          <a:prstGeom prst="roundRect">
-            <a:avLst>
-              <a:gd name="adj" fmla="val 12183"/>
-            </a:avLst>
-          </a:prstGeom>
-          <a:solidFill>
-            <a:srgbClr val="7A3B2E"/>
-          </a:solidFill>
-          <a:ln/>
-        </p:spPr>
-      </p:sp>
-      <p:sp>
-        <p:nvSpPr>
-          <p:cNvPr id="16" name="Text 14"/>
-          <p:cNvSpPr/>
-          <p:nvPr/>
-        </p:nvSpPr>
-        <p:spPr>
-          <a:xfrm>
-            <a:off x="640080" y="3813048"/>
-            <a:ext cx="868680" cy="450342"/>
-          </a:xfrm>
-          <a:prstGeom prst="rect">
-            <a:avLst/>
-          </a:prstGeom>
-          <a:noFill/>
-          <a:ln/>
-        </p:spPr>
-        <p:txBody>
-          <a:bodyPr wrap="square" rtlCol="0" anchor="ctr"/>
-          <a:lstStyle/>
-          <a:p>
-            <a:pPr algn="ctr" indent="0" marL="0">
-              <a:buNone/>
-            </a:pPr>
-            <a:r>
-              <a:rPr lang="en-US" sz="1100" b="1" dirty="0">
-                <a:solidFill>
-                  <a:srgbClr val="FFFFFF"/>
-                </a:solidFill>
-                <a:latin typeface="Calibri" pitchFamily="34" charset="0"/>
-                <a:ea typeface="Calibri" pitchFamily="34" charset="-122"/>
-                <a:cs typeface="Calibri" pitchFamily="34" charset="-120"/>
-              </a:rPr>
-              <a:t>0:47</a:t>
-            </a:r>
-            <a:endParaRPr lang="en-US" sz="1100" dirty="0"/>
-          </a:p>
-        </p:txBody>
-      </p:sp>
-      <p:sp>
-        <p:nvSpPr>
-          <p:cNvPr id="17" name="Text 15"/>
-          <p:cNvSpPr/>
-          <p:nvPr/>
-        </p:nvSpPr>
-        <p:spPr>
-          <a:xfrm>
-            <a:off x="1691640" y="3794760"/>
-            <a:ext cx="9646920" cy="560070"/>
-          </a:xfrm>
-          <a:prstGeom prst="rect">
-            <a:avLst/>
-          </a:prstGeom>
-          <a:noFill/>
-          <a:ln/>
-        </p:spPr>
-        <p:txBody>
-          <a:bodyPr wrap="square" rtlCol="0" anchor="ctr">
-            <a:spAutoFit/>
-          </a:bodyPr>
-          <a:lstStyle/>
-          <a:p>
-            <a:pPr indent="0" marL="0">
-              <a:buNone/>
-            </a:pPr>
-            <a:r>
-              <a:rPr lang="en-US" sz="1100" dirty="0">
-                <a:solidFill>
-                  <a:srgbClr val="1A1A1A"/>
-                </a:solidFill>
-                <a:latin typeface="Calibri" pitchFamily="34" charset="0"/>
-                <a:ea typeface="Calibri" pitchFamily="34" charset="-122"/>
-                <a:cs typeface="Calibri" pitchFamily="34" charset="-120"/>
-              </a:rPr>
-              <a:t>Lab 1 (worked, participatory): copy the notebook to Drive and mount Drive into the runtime (this is how your corpus and results survive Colab wiping the session, everything saving to one project folder), put a Gemini key in Colab Secrets, load NYT wedding data, make a first chart. Hand out the common-errors cheat sheet. Then solo with a partner: draft three questions, pick one, have the AI write the code, run it, chart it. Write one sentence predicting your cell before you run it.</a:t>
-            </a:r>
-            <a:endParaRPr lang="en-US" sz="1100" dirty="0"/>
-          </a:p>
-        </p:txBody>
-      </p:sp>
-      <p:sp>
-        <p:nvSpPr>
-          <p:cNvPr id="18" name="Shape 16"/>
-          <p:cNvSpPr/>
-          <p:nvPr/>
-        </p:nvSpPr>
-        <p:spPr>
-          <a:xfrm>
-            <a:off x="640080" y="4373118"/>
-            <a:ext cx="868680" cy="450342"/>
-          </a:xfrm>
-          <a:prstGeom prst="roundRect">
-            <a:avLst>
-              <a:gd name="adj" fmla="val 12183"/>
-            </a:avLst>
-          </a:prstGeom>
-          <a:solidFill>
-            <a:srgbClr val="7A3B2E"/>
-          </a:solidFill>
-          <a:ln/>
-        </p:spPr>
-      </p:sp>
-      <p:sp>
-        <p:nvSpPr>
-          <p:cNvPr id="19" name="Text 17"/>
-          <p:cNvSpPr/>
-          <p:nvPr/>
-        </p:nvSpPr>
-        <p:spPr>
-          <a:xfrm>
-            <a:off x="640080" y="4373118"/>
-            <a:ext cx="868680" cy="450342"/>
-          </a:xfrm>
-          <a:prstGeom prst="rect">
-            <a:avLst/>
-          </a:prstGeom>
-          <a:noFill/>
-          <a:ln/>
-        </p:spPr>
-        <p:txBody>
-          <a:bodyPr wrap="square" rtlCol="0" anchor="ctr"/>
-          <a:lstStyle/>
-          <a:p>
-            <a:pPr algn="ctr" indent="0" marL="0">
-              <a:buNone/>
-            </a:pPr>
-            <a:r>
-              <a:rPr lang="en-US" sz="1100" b="1" dirty="0">
-                <a:solidFill>
-                  <a:srgbClr val="FFFFFF"/>
-                </a:solidFill>
-                <a:latin typeface="Calibri" pitchFamily="34" charset="0"/>
-                <a:ea typeface="Calibri" pitchFamily="34" charset="-122"/>
-                <a:cs typeface="Calibri" pitchFamily="34" charset="-120"/>
-              </a:rPr>
-              <a:t>1:20</a:t>
-            </a:r>
-            <a:endParaRPr lang="en-US" sz="1100" dirty="0"/>
-          </a:p>
-        </p:txBody>
-      </p:sp>
-      <p:sp>
-        <p:nvSpPr>
-          <p:cNvPr id="20" name="Text 18"/>
-          <p:cNvSpPr/>
-          <p:nvPr/>
-        </p:nvSpPr>
-        <p:spPr>
-          <a:xfrm>
-            <a:off x="1691640" y="4354830"/>
-            <a:ext cx="9646920" cy="560070"/>
-          </a:xfrm>
-          <a:prstGeom prst="rect">
-            <a:avLst/>
-          </a:prstGeom>
-          <a:noFill/>
-          <a:ln/>
-        </p:spPr>
-        <p:txBody>
-          <a:bodyPr wrap="square" rtlCol="0" anchor="ctr">
-            <a:spAutoFit/>
-          </a:bodyPr>
-          <a:lstStyle/>
-          <a:p>
-            <a:pPr indent="0" marL="0">
-              <a:buNone/>
-            </a:pPr>
-            <a:r>
-              <a:rPr lang="en-US" sz="1100" dirty="0">
-                <a:solidFill>
-                  <a:srgbClr val="1A1A1A"/>
-                </a:solidFill>
-                <a:latin typeface="Calibri" pitchFamily="34" charset="0"/>
-                <a:ea typeface="Calibri" pitchFamily="34" charset="-122"/>
-                <a:cs typeface="Calibri" pitchFamily="34" charset="-120"/>
-              </a:rPr>
-              <a:t>Break</a:t>
-            </a:r>
-            <a:endParaRPr lang="en-US" sz="1100" dirty="0"/>
-          </a:p>
-        </p:txBody>
-      </p:sp>
-      <p:sp>
-        <p:nvSpPr>
-          <p:cNvPr id="21" name="Shape 19"/>
-          <p:cNvSpPr/>
-          <p:nvPr/>
-        </p:nvSpPr>
-        <p:spPr>
-          <a:xfrm>
-            <a:off x="640080" y="4933188"/>
-            <a:ext cx="868680" cy="450342"/>
-          </a:xfrm>
-          <a:prstGeom prst="roundRect">
-            <a:avLst>
-              <a:gd name="adj" fmla="val 12183"/>
-            </a:avLst>
-          </a:prstGeom>
-          <a:solidFill>
-            <a:srgbClr val="7A3B2E"/>
-          </a:solidFill>
-          <a:ln/>
-        </p:spPr>
-      </p:sp>
-      <p:sp>
-        <p:nvSpPr>
-          <p:cNvPr id="22" name="Text 20"/>
-          <p:cNvSpPr/>
-          <p:nvPr/>
-        </p:nvSpPr>
-        <p:spPr>
-          <a:xfrm>
-            <a:off x="640080" y="4933188"/>
-            <a:ext cx="868680" cy="450342"/>
-          </a:xfrm>
-          <a:prstGeom prst="rect">
-            <a:avLst/>
-          </a:prstGeom>
-          <a:noFill/>
-          <a:ln/>
-        </p:spPr>
-        <p:txBody>
-          <a:bodyPr wrap="square" rtlCol="0" anchor="ctr"/>
-          <a:lstStyle/>
-          <a:p>
-            <a:pPr algn="ctr" indent="0" marL="0">
-              <a:buNone/>
-            </a:pPr>
-            <a:r>
-              <a:rPr lang="en-US" sz="1100" b="1" dirty="0">
-                <a:solidFill>
-                  <a:srgbClr val="FFFFFF"/>
-                </a:solidFill>
-                <a:latin typeface="Calibri" pitchFamily="34" charset="0"/>
-                <a:ea typeface="Calibri" pitchFamily="34" charset="-122"/>
-                <a:cs typeface="Calibri" pitchFamily="34" charset="-120"/>
-              </a:rPr>
-              <a:t>1:30</a:t>
-            </a:r>
-            <a:endParaRPr lang="en-US" sz="1100" dirty="0"/>
-          </a:p>
-        </p:txBody>
-      </p:sp>
-      <p:sp>
-        <p:nvSpPr>
-          <p:cNvPr id="23" name="Text 21"/>
-          <p:cNvSpPr/>
-          <p:nvPr/>
-        </p:nvSpPr>
-        <p:spPr>
-          <a:xfrm>
-            <a:off x="1691640" y="4914900"/>
-            <a:ext cx="9646920" cy="560070"/>
-          </a:xfrm>
-          <a:prstGeom prst="rect">
-            <a:avLst/>
-          </a:prstGeom>
-          <a:noFill/>
-          <a:ln/>
-        </p:spPr>
-        <p:txBody>
-          <a:bodyPr wrap="square" rtlCol="0" anchor="ctr">
-            <a:spAutoFit/>
-          </a:bodyPr>
-          <a:lstStyle/>
-          <a:p>
-            <a:pPr indent="0" marL="0">
-              <a:buNone/>
-            </a:pPr>
-            <a:r>
-              <a:rPr lang="en-US" sz="1100" dirty="0">
-                <a:solidFill>
-                  <a:srgbClr val="1A1A1A"/>
-                </a:solidFill>
-                <a:latin typeface="Calibri" pitchFamily="34" charset="0"/>
-                <a:ea typeface="Calibri" pitchFamily="34" charset="-122"/>
-                <a:cs typeface="Calibri" pitchFamily="34" charset="-120"/>
-              </a:rPr>
-              <a:t>Lab 2 (worked): count words, then pixels. The real headlines' top words (stop-words dominate until removed, the first counting decision), then the Met image corpus ranked darkest to brightest by average brightness. The notebook's after-class half, defined color ranges and what every bag throws away, is this week's guided homework. Image projects begin here.</a:t>
-            </a:r>
-            <a:endParaRPr lang="en-US" sz="1100" dirty="0"/>
-          </a:p>
-        </p:txBody>
-      </p:sp>
-      <p:sp>
-        <p:nvSpPr>
-          <p:cNvPr id="24" name="Shape 22"/>
-          <p:cNvSpPr/>
-          <p:nvPr/>
-        </p:nvSpPr>
-        <p:spPr>
-          <a:xfrm>
-            <a:off x="640080" y="5493258"/>
-            <a:ext cx="868680" cy="450342"/>
-          </a:xfrm>
-          <a:prstGeom prst="roundRect">
-            <a:avLst>
-              <a:gd name="adj" fmla="val 12183"/>
-            </a:avLst>
-          </a:prstGeom>
-          <a:solidFill>
-            <a:srgbClr val="7A3B2E"/>
-          </a:solidFill>
-          <a:ln/>
-        </p:spPr>
-      </p:sp>
-      <p:sp>
-        <p:nvSpPr>
-          <p:cNvPr id="25" name="Text 23"/>
-          <p:cNvSpPr/>
-          <p:nvPr/>
-        </p:nvSpPr>
-        <p:spPr>
-          <a:xfrm>
-            <a:off x="640080" y="5493258"/>
-            <a:ext cx="868680" cy="450342"/>
-          </a:xfrm>
-          <a:prstGeom prst="rect">
-            <a:avLst/>
-          </a:prstGeom>
-          <a:noFill/>
-          <a:ln/>
-        </p:spPr>
-        <p:txBody>
-          <a:bodyPr wrap="square" rtlCol="0" anchor="ctr"/>
-          <a:lstStyle/>
-          <a:p>
-            <a:pPr algn="ctr" indent="0" marL="0">
-              <a:buNone/>
-            </a:pPr>
-            <a:r>
-              <a:rPr lang="en-US" sz="1100" b="1" dirty="0">
-                <a:solidFill>
-                  <a:srgbClr val="FFFFFF"/>
-                </a:solidFill>
-                <a:latin typeface="Calibri" pitchFamily="34" charset="0"/>
-                <a:ea typeface="Calibri" pitchFamily="34" charset="-122"/>
-                <a:cs typeface="Calibri" pitchFamily="34" charset="-120"/>
-              </a:rPr>
-              <a:t>1:52</a:t>
-            </a:r>
-            <a:endParaRPr lang="en-US" sz="1100" dirty="0"/>
-          </a:p>
-        </p:txBody>
-      </p:sp>
-      <p:sp>
-        <p:nvSpPr>
-          <p:cNvPr id="26" name="Text 24"/>
-          <p:cNvSpPr/>
-          <p:nvPr/>
-        </p:nvSpPr>
-        <p:spPr>
-          <a:xfrm>
-            <a:off x="1691640" y="5474970"/>
-            <a:ext cx="9646920" cy="560070"/>
-          </a:xfrm>
-          <a:prstGeom prst="rect">
-            <a:avLst/>
-          </a:prstGeom>
-          <a:noFill/>
-          <a:ln/>
-        </p:spPr>
-        <p:txBody>
-          <a:bodyPr wrap="square" rtlCol="0" anchor="ctr">
-            <a:spAutoFit/>
-          </a:bodyPr>
-          <a:lstStyle/>
-          <a:p>
-            <a:pPr indent="0" marL="0">
-              <a:buNone/>
-            </a:pPr>
-            <a:r>
-              <a:rPr lang="en-US" sz="1100" dirty="0">
-                <a:solidFill>
-                  <a:srgbClr val="1A1A1A"/>
-                </a:solidFill>
-                <a:latin typeface="Calibri" pitchFamily="34" charset="0"/>
-                <a:ea typeface="Calibri" pitchFamily="34" charset="-122"/>
-                <a:cs typeface="Calibri" pitchFamily="34" charset="-120"/>
-              </a:rPr>
-              <a:t>Preview of the methods ahead; the weekly routines introduced. First check-out.</a:t>
-            </a:r>
-            <a:endParaRPr lang="en-US" sz="1100" dirty="0"/>
+              <a:t>Interrogate the study, debate it, or critique each other's work.</a:t>
+            </a:r>
+            <a:endParaRPr lang="en-US" sz="1500" dirty="0"/>
           </a:p>
         </p:txBody>
       </p:sp>
@@ -4465,7 +4055,7 @@
                 <a:ea typeface="Cambria" pitchFamily="34" charset="-122"/>
                 <a:cs typeface="Cambria" pitchFamily="34" charset="-120"/>
               </a:rPr>
-              <a:t>Reading &amp; homework</a:t>
+              <a:t>The session</a:t>
             </a:r>
             <a:endParaRPr lang="en-US" sz="3000" dirty="0"/>
           </a:p>
@@ -4479,11 +4069,13 @@
         </p:nvSpPr>
         <p:spPr>
           <a:xfrm>
-            <a:off x="640080" y="1673352"/>
-            <a:ext cx="219456" cy="219456"/>
-          </a:xfrm>
-          <a:prstGeom prst="ellipse">
-            <a:avLst/>
+            <a:off x="640080" y="1572768"/>
+            <a:ext cx="868680" cy="450342"/>
+          </a:xfrm>
+          <a:prstGeom prst="roundRect">
+            <a:avLst>
+              <a:gd name="adj" fmla="val 12183"/>
+            </a:avLst>
           </a:prstGeom>
           <a:solidFill>
             <a:srgbClr val="7A3B2E"/>
@@ -4499,8 +4091,8 @@
         </p:nvSpPr>
         <p:spPr>
           <a:xfrm>
-            <a:off x="1051560" y="1600200"/>
-            <a:ext cx="10424160" cy="365760"/>
+            <a:off x="640080" y="1572768"/>
+            <a:ext cx="868680" cy="450342"/>
           </a:xfrm>
           <a:prstGeom prst="rect">
             <a:avLst/>
@@ -4512,21 +4104,21 @@
           <a:bodyPr wrap="square" rtlCol="0" anchor="ctr"/>
           <a:lstStyle/>
           <a:p>
-            <a:pPr indent="0" marL="0">
-              <a:buNone/>
-            </a:pPr>
-            <a:r>
-              <a:rPr lang="en-US" sz="1500" b="1" dirty="0">
-                <a:solidFill>
-                  <a:srgbClr val="7A3B2E"/>
+            <a:pPr algn="ctr" indent="0" marL="0">
+              <a:buNone/>
+            </a:pPr>
+            <a:r>
+              <a:rPr lang="en-US" sz="1100" b="1" dirty="0">
+                <a:solidFill>
+                  <a:srgbClr val="FFFFFF"/>
                 </a:solidFill>
                 <a:latin typeface="Calibri" pitchFamily="34" charset="0"/>
                 <a:ea typeface="Calibri" pitchFamily="34" charset="-122"/>
                 <a:cs typeface="Calibri" pitchFamily="34" charset="-120"/>
               </a:rPr>
-              <a:t>Reading</a:t>
-            </a:r>
-            <a:endParaRPr lang="en-US" sz="1500" dirty="0"/>
+              <a:t>0:00</a:t>
+            </a:r>
+            <a:endParaRPr lang="en-US" sz="1100" dirty="0"/>
           </a:p>
         </p:txBody>
       </p:sp>
@@ -4538,17 +4130,17 @@
         </p:nvSpPr>
         <p:spPr>
           <a:xfrm>
-            <a:off x="1051560" y="1984248"/>
-            <a:ext cx="10424160" cy="731520"/>
-          </a:xfrm>
-          <a:prstGeom prst="rect">
-            <a:avLst/>
-          </a:prstGeom>
-          <a:noFill/>
-          <a:ln/>
-        </p:spPr>
-        <p:txBody>
-          <a:bodyPr wrap="square" rtlCol="0" anchor="t">
+            <a:off x="1691640" y="1554480"/>
+            <a:ext cx="9646920" cy="560070"/>
+          </a:xfrm>
+          <a:prstGeom prst="rect">
+            <a:avLst/>
+          </a:prstGeom>
+          <a:noFill/>
+          <a:ln/>
+        </p:spPr>
+        <p:txBody>
+          <a:bodyPr wrap="square" rtlCol="0" anchor="ctr">
             <a:spAutoFit/>
           </a:bodyPr>
           <a:lstStyle/>
@@ -4557,7 +4149,7 @@
               <a:buNone/>
             </a:pPr>
             <a:r>
-              <a:rPr lang="en-US" sz="1400" dirty="0">
+              <a:rPr lang="en-US" sz="1100" dirty="0">
                 <a:solidFill>
                   <a:srgbClr val="1A1A1A"/>
                 </a:solidFill>
@@ -4565,9 +4157,9 @@
                 <a:ea typeface="Calibri" pitchFamily="34" charset="-122"/>
                 <a:cs typeface="Calibri" pitchFamily="34" charset="-120"/>
               </a:rPr>
-              <a:t>Bollen et al., the cognitive-distortions hockey stick (PNAS 2021), with the Schmidt et al. critique</a:t>
-            </a:r>
-            <a:endParaRPr lang="en-US" sz="1400" dirty="0"/>
+              <a:t>Introductions and working agreements, demonstrated in practice. Today's live coding deliberately includes real mistakes.</a:t>
+            </a:r>
+            <a:endParaRPr lang="en-US" sz="1100" dirty="0"/>
           </a:p>
         </p:txBody>
       </p:sp>
@@ -4579,14 +4171,16 @@
         </p:nvSpPr>
         <p:spPr>
           <a:xfrm>
-            <a:off x="640080" y="2633472"/>
-            <a:ext cx="219456" cy="219456"/>
-          </a:xfrm>
-          <a:prstGeom prst="ellipse">
-            <a:avLst/>
-          </a:prstGeom>
-          <a:solidFill>
-            <a:srgbClr val="3F6F5F"/>
+            <a:off x="640080" y="2132838"/>
+            <a:ext cx="868680" cy="450342"/>
+          </a:xfrm>
+          <a:prstGeom prst="roundRect">
+            <a:avLst>
+              <a:gd name="adj" fmla="val 12183"/>
+            </a:avLst>
+          </a:prstGeom>
+          <a:solidFill>
+            <a:srgbClr val="7A3B2E"/>
           </a:solidFill>
           <a:ln/>
         </p:spPr>
@@ -4599,8 +4193,8 @@
         </p:nvSpPr>
         <p:spPr>
           <a:xfrm>
-            <a:off x="1051560" y="2560320"/>
-            <a:ext cx="10424160" cy="365760"/>
+            <a:off x="640080" y="2132838"/>
+            <a:ext cx="868680" cy="450342"/>
           </a:xfrm>
           <a:prstGeom prst="rect">
             <a:avLst/>
@@ -4612,21 +4206,21 @@
           <a:bodyPr wrap="square" rtlCol="0" anchor="ctr"/>
           <a:lstStyle/>
           <a:p>
-            <a:pPr indent="0" marL="0">
-              <a:buNone/>
-            </a:pPr>
-            <a:r>
-              <a:rPr lang="en-US" sz="1500" b="1" dirty="0">
-                <a:solidFill>
-                  <a:srgbClr val="3F6F5F"/>
+            <a:pPr algn="ctr" indent="0" marL="0">
+              <a:buNone/>
+            </a:pPr>
+            <a:r>
+              <a:rPr lang="en-US" sz="1100" b="1" dirty="0">
+                <a:solidFill>
+                  <a:srgbClr val="FFFFFF"/>
                 </a:solidFill>
                 <a:latin typeface="Calibri" pitchFamily="34" charset="0"/>
                 <a:ea typeface="Calibri" pitchFamily="34" charset="-122"/>
                 <a:cs typeface="Calibri" pitchFamily="34" charset="-120"/>
               </a:rPr>
-              <a:t>Supplement</a:t>
-            </a:r>
-            <a:endParaRPr lang="en-US" sz="1500" dirty="0"/>
+              <a:t>0:10</a:t>
+            </a:r>
+            <a:endParaRPr lang="en-US" sz="1100" dirty="0"/>
           </a:p>
         </p:txBody>
       </p:sp>
@@ -4638,17 +4232,17 @@
         </p:nvSpPr>
         <p:spPr>
           <a:xfrm>
-            <a:off x="1051560" y="2944368"/>
-            <a:ext cx="10424160" cy="731520"/>
-          </a:xfrm>
-          <a:prstGeom prst="rect">
-            <a:avLst/>
-          </a:prstGeom>
-          <a:noFill/>
-          <a:ln/>
-        </p:spPr>
-        <p:txBody>
-          <a:bodyPr wrap="square" rtlCol="0" anchor="t">
+            <a:off x="1691640" y="2114550"/>
+            <a:ext cx="9646920" cy="560070"/>
+          </a:xfrm>
+          <a:prstGeom prst="rect">
+            <a:avLst/>
+          </a:prstGeom>
+          <a:noFill/>
+          <a:ln/>
+        </p:spPr>
+        <p:txBody>
+          <a:bodyPr wrap="square" rtlCol="0" anchor="ctr">
             <a:spAutoFit/>
           </a:bodyPr>
           <a:lstStyle/>
@@ -4657,7 +4251,7 @@
               <a:buNone/>
             </a:pPr>
             <a:r>
-              <a:rPr lang="en-US" sz="1400" dirty="0">
+              <a:rPr lang="en-US" sz="1100" dirty="0">
                 <a:solidFill>
                   <a:srgbClr val="1A1A1A"/>
                 </a:solidFill>
@@ -4665,9 +4259,9 @@
                 <a:ea typeface="Calibri" pitchFamily="34" charset="-122"/>
                 <a:cs typeface="Calibri" pitchFamily="34" charset="-120"/>
               </a:rPr>
-              <a:t>Robin Sloan, Writing with the machine</a:t>
-            </a:r>
-            <a:endParaRPr lang="en-US" sz="1400" dirty="0"/>
+              <a:t>Lecture, the stakes: machines already read culture at scale, the feed ranking what you see, the moderation filter, the model trained on scraped art and prose, and that reading happens without you. Counting culture has produced real knowledge (the screenplay verb split, the Rowling unmasking, pop music's 1991 revolution) and real mistakes, and both look identical until someone checks. In ten weeks you do the reading yourself and publish something checkable.</a:t>
+            </a:r>
+            <a:endParaRPr lang="en-US" sz="1100" dirty="0"/>
           </a:p>
         </p:txBody>
       </p:sp>
@@ -4679,14 +4273,16 @@
         </p:nvSpPr>
         <p:spPr>
           <a:xfrm>
-            <a:off x="640080" y="3593592"/>
-            <a:ext cx="219456" cy="219456"/>
-          </a:xfrm>
-          <a:prstGeom prst="ellipse">
-            <a:avLst/>
-          </a:prstGeom>
-          <a:solidFill>
-            <a:srgbClr val="B9852F"/>
+            <a:off x="640080" y="2692908"/>
+            <a:ext cx="868680" cy="450342"/>
+          </a:xfrm>
+          <a:prstGeom prst="roundRect">
+            <a:avLst>
+              <a:gd name="adj" fmla="val 12183"/>
+            </a:avLst>
+          </a:prstGeom>
+          <a:solidFill>
+            <a:srgbClr val="7A3B2E"/>
           </a:solidFill>
           <a:ln/>
         </p:spPr>
@@ -4699,8 +4295,8 @@
         </p:nvSpPr>
         <p:spPr>
           <a:xfrm>
-            <a:off x="1051560" y="3520440"/>
-            <a:ext cx="10424160" cy="365760"/>
+            <a:off x="640080" y="2692908"/>
+            <a:ext cx="868680" cy="450342"/>
           </a:xfrm>
           <a:prstGeom prst="rect">
             <a:avLst/>
@@ -4712,21 +4308,21 @@
           <a:bodyPr wrap="square" rtlCol="0" anchor="ctr"/>
           <a:lstStyle/>
           <a:p>
-            <a:pPr indent="0" marL="0">
-              <a:buNone/>
-            </a:pPr>
-            <a:r>
-              <a:rPr lang="en-US" sz="1500" b="1" dirty="0">
-                <a:solidFill>
-                  <a:srgbClr val="B9852F"/>
+            <a:pPr algn="ctr" indent="0" marL="0">
+              <a:buNone/>
+            </a:pPr>
+            <a:r>
+              <a:rPr lang="en-US" sz="1100" b="1" dirty="0">
+                <a:solidFill>
+                  <a:srgbClr val="FFFFFF"/>
                 </a:solidFill>
                 <a:latin typeface="Calibri" pitchFamily="34" charset="0"/>
                 <a:ea typeface="Calibri" pitchFamily="34" charset="-122"/>
                 <a:cs typeface="Calibri" pitchFamily="34" charset="-120"/>
               </a:rPr>
-              <a:t>Deeper (optional)</a:t>
-            </a:r>
-            <a:endParaRPr lang="en-US" sz="1500" dirty="0"/>
+              <a:t>0:28</a:t>
+            </a:r>
+            <a:endParaRPr lang="en-US" sz="1100" dirty="0"/>
           </a:p>
         </p:txBody>
       </p:sp>
@@ -4738,17 +4334,17 @@
         </p:nvSpPr>
         <p:spPr>
           <a:xfrm>
-            <a:off x="1051560" y="3904488"/>
-            <a:ext cx="10424160" cy="731520"/>
-          </a:xfrm>
-          <a:prstGeom prst="rect">
-            <a:avLst/>
-          </a:prstGeom>
-          <a:noFill/>
-          <a:ln/>
-        </p:spPr>
-        <p:txBody>
-          <a:bodyPr wrap="square" rtlCol="0" anchor="t">
+            <a:off x="1691640" y="2674620"/>
+            <a:ext cx="9646920" cy="560070"/>
+          </a:xfrm>
+          <a:prstGeom prst="rect">
+            <a:avLst/>
+          </a:prstGeom>
+          <a:noFill/>
+          <a:ln/>
+        </p:spPr>
+        <p:txBody>
+          <a:bodyPr wrap="square" rtlCol="0" anchor="ctr">
             <a:spAutoFit/>
           </a:bodyPr>
           <a:lstStyle/>
@@ -4757,7 +4353,7 @@
               <a:buNone/>
             </a:pPr>
             <a:r>
-              <a:rPr lang="en-US" sz="1400" dirty="0">
+              <a:rPr lang="en-US" sz="1100" dirty="0">
                 <a:solidFill>
                   <a:srgbClr val="1A1A1A"/>
                 </a:solidFill>
@@ -4765,9 +4361,9 @@
                 <a:ea typeface="Calibri" pitchFamily="34" charset="-122"/>
                 <a:cs typeface="Calibri" pitchFamily="34" charset="-120"/>
               </a:rPr>
-              <a:t>Moretti, Conjectures on World Literature (NLR 2000), the founding argument for reading culture at scale</a:t>
-            </a:r>
-            <a:endParaRPr lang="en-US" sz="1400" dirty="0"/>
+              <a:t>Look at This, then Question It: She Giggles, He Gallops.</a:t>
+            </a:r>
+            <a:endParaRPr lang="en-US" sz="1100" dirty="0"/>
           </a:p>
         </p:txBody>
       </p:sp>
@@ -4779,14 +4375,16 @@
         </p:nvSpPr>
         <p:spPr>
           <a:xfrm>
-            <a:off x="640080" y="4553712"/>
-            <a:ext cx="219456" cy="219456"/>
-          </a:xfrm>
-          <a:prstGeom prst="ellipse">
-            <a:avLst/>
-          </a:prstGeom>
-          <a:solidFill>
-            <a:srgbClr val="3F6F5F"/>
+            <a:off x="640080" y="3252978"/>
+            <a:ext cx="868680" cy="450342"/>
+          </a:xfrm>
+          <a:prstGeom prst="roundRect">
+            <a:avLst>
+              <a:gd name="adj" fmla="val 12183"/>
+            </a:avLst>
+          </a:prstGeom>
+          <a:solidFill>
+            <a:srgbClr val="7A3B2E"/>
           </a:solidFill>
           <a:ln/>
         </p:spPr>
@@ -4799,8 +4397,8 @@
         </p:nvSpPr>
         <p:spPr>
           <a:xfrm>
-            <a:off x="1051560" y="4480560"/>
-            <a:ext cx="10424160" cy="365760"/>
+            <a:off x="640080" y="3252978"/>
+            <a:ext cx="868680" cy="450342"/>
           </a:xfrm>
           <a:prstGeom prst="rect">
             <a:avLst/>
@@ -4812,21 +4410,21 @@
           <a:bodyPr wrap="square" rtlCol="0" anchor="ctr"/>
           <a:lstStyle/>
           <a:p>
-            <a:pPr indent="0" marL="0">
-              <a:buNone/>
-            </a:pPr>
-            <a:r>
-              <a:rPr lang="en-US" sz="1500" b="1" dirty="0">
-                <a:solidFill>
-                  <a:srgbClr val="3F6F5F"/>
+            <a:pPr algn="ctr" indent="0" marL="0">
+              <a:buNone/>
+            </a:pPr>
+            <a:r>
+              <a:rPr lang="en-US" sz="1100" b="1" dirty="0">
+                <a:solidFill>
+                  <a:srgbClr val="FFFFFF"/>
                 </a:solidFill>
                 <a:latin typeface="Calibri" pitchFamily="34" charset="0"/>
                 <a:ea typeface="Calibri" pitchFamily="34" charset="-122"/>
                 <a:cs typeface="Calibri" pitchFamily="34" charset="-120"/>
               </a:rPr>
-              <a:t>Sketch</a:t>
-            </a:r>
-            <a:endParaRPr lang="en-US" sz="1500" dirty="0"/>
+              <a:t>0:35</a:t>
+            </a:r>
+            <a:endParaRPr lang="en-US" sz="1100" dirty="0"/>
           </a:p>
         </p:txBody>
       </p:sp>
@@ -4838,17 +4436,17 @@
         </p:nvSpPr>
         <p:spPr>
           <a:xfrm>
-            <a:off x="1051560" y="4864608"/>
-            <a:ext cx="10424160" cy="731520"/>
-          </a:xfrm>
-          <a:prstGeom prst="rect">
-            <a:avLst/>
-          </a:prstGeom>
-          <a:noFill/>
-          <a:ln/>
-        </p:spPr>
-        <p:txBody>
-          <a:bodyPr wrap="square" rtlCol="0" anchor="t">
+            <a:off x="1691640" y="3234690"/>
+            <a:ext cx="9646920" cy="560070"/>
+          </a:xfrm>
+          <a:prstGeom prst="rect">
+            <a:avLst/>
+          </a:prstGeom>
+          <a:noFill/>
+          <a:ln/>
+        </p:spPr>
+        <p:txBody>
+          <a:bodyPr wrap="square" rtlCol="0" anchor="ctr">
             <a:spAutoFit/>
           </a:bodyPr>
           <a:lstStyle/>
@@ -4857,7 +4455,7 @@
               <a:buNone/>
             </a:pPr>
             <a:r>
-              <a:rPr lang="en-US" sz="1400" dirty="0">
+              <a:rPr lang="en-US" sz="1100" dirty="0">
                 <a:solidFill>
                   <a:srgbClr val="1A1A1A"/>
                 </a:solidFill>
@@ -4865,9 +4463,9 @@
                 <a:ea typeface="Calibri" pitchFamily="34" charset="-122"/>
                 <a:cs typeface="Calibri" pitchFamily="34" charset="-120"/>
               </a:rPr>
-              <a:t>One question from your life, answerable with data (three sentences), plus the notebook's after-class half (~20 minutes).</a:t>
-            </a:r>
-            <a:endParaRPr lang="en-US" sz="1400" dirty="0"/>
+              <a:t>The vocabulary and the map (no code): corpus, method, model, embedding, plus what data itself is. A CSV, anatomized on screen (rows are observations, columns are recorded facts), and Drucker's correction: data is capta, taken not given. Two minutes in pairs: what did the makers of the wedding table take, and what did they leave out? The deliverable, shown: a web essay on a runnable notebook.</a:t>
+            </a:r>
+            <a:endParaRPr lang="en-US" sz="1100" dirty="0"/>
           </a:p>
         </p:txBody>
       </p:sp>
@@ -4879,11 +4477,13 @@
         </p:nvSpPr>
         <p:spPr>
           <a:xfrm>
-            <a:off x="640080" y="5513832"/>
-            <a:ext cx="219456" cy="219456"/>
-          </a:xfrm>
-          <a:prstGeom prst="ellipse">
-            <a:avLst/>
+            <a:off x="640080" y="3813048"/>
+            <a:ext cx="868680" cy="450342"/>
+          </a:xfrm>
+          <a:prstGeom prst="roundRect">
+            <a:avLst>
+              <a:gd name="adj" fmla="val 12183"/>
+            </a:avLst>
           </a:prstGeom>
           <a:solidFill>
             <a:srgbClr val="7A3B2E"/>
@@ -4899,8 +4499,8 @@
         </p:nvSpPr>
         <p:spPr>
           <a:xfrm>
-            <a:off x="1051560" y="5440680"/>
-            <a:ext cx="10424160" cy="365760"/>
+            <a:off x="640080" y="3813048"/>
+            <a:ext cx="868680" cy="450342"/>
           </a:xfrm>
           <a:prstGeom prst="rect">
             <a:avLst/>
@@ -4912,21 +4512,21 @@
           <a:bodyPr wrap="square" rtlCol="0" anchor="ctr"/>
           <a:lstStyle/>
           <a:p>
-            <a:pPr indent="0" marL="0">
-              <a:buNone/>
-            </a:pPr>
-            <a:r>
-              <a:rPr lang="en-US" sz="1500" b="1" dirty="0">
-                <a:solidFill>
-                  <a:srgbClr val="7A3B2E"/>
+            <a:pPr algn="ctr" indent="0" marL="0">
+              <a:buNone/>
+            </a:pPr>
+            <a:r>
+              <a:rPr lang="en-US" sz="1100" b="1" dirty="0">
+                <a:solidFill>
+                  <a:srgbClr val="FFFFFF"/>
                 </a:solidFill>
                 <a:latin typeface="Calibri" pitchFamily="34" charset="0"/>
                 <a:ea typeface="Calibri" pitchFamily="34" charset="-122"/>
                 <a:cs typeface="Calibri" pitchFamily="34" charset="-120"/>
               </a:rPr>
-              <a:t>Check (AI closed)</a:t>
-            </a:r>
-            <a:endParaRPr lang="en-US" sz="1500" dirty="0"/>
+              <a:t>0:47</a:t>
+            </a:r>
+            <a:endParaRPr lang="en-US" sz="1100" dirty="0"/>
           </a:p>
         </p:txBody>
       </p:sp>
@@ -4938,17 +4538,17 @@
         </p:nvSpPr>
         <p:spPr>
           <a:xfrm>
-            <a:off x="1051560" y="5824728"/>
-            <a:ext cx="10424160" cy="731520"/>
-          </a:xfrm>
-          <a:prstGeom prst="rect">
-            <a:avLst/>
-          </a:prstGeom>
-          <a:noFill/>
-          <a:ln/>
-        </p:spPr>
-        <p:txBody>
-          <a:bodyPr wrap="square" rtlCol="0" anchor="t">
+            <a:off x="1691640" y="3794760"/>
+            <a:ext cx="9646920" cy="560070"/>
+          </a:xfrm>
+          <a:prstGeom prst="rect">
+            <a:avLst/>
+          </a:prstGeom>
+          <a:noFill/>
+          <a:ln/>
+        </p:spPr>
+        <p:txBody>
+          <a:bodyPr wrap="square" rtlCol="0" anchor="ctr">
             <a:spAutoFit/>
           </a:bodyPr>
           <a:lstStyle/>
@@ -4957,7 +4557,7 @@
               <a:buNone/>
             </a:pPr>
             <a:r>
-              <a:rPr lang="en-US" sz="1400" dirty="0">
+              <a:rPr lang="en-US" sz="1100" dirty="0">
                 <a:solidFill>
                   <a:srgbClr val="1A1A1A"/>
                 </a:solidFill>
@@ -4965,9 +4565,315 @@
                 <a:ea typeface="Calibri" pitchFamily="34" charset="-122"/>
                 <a:cs typeface="Calibri" pitchFamily="34" charset="-120"/>
               </a:rPr>
-              <a:t>Trace it: one written sentence predicting what your cell does before you run it. (Competency 1.)</a:t>
-            </a:r>
-            <a:endParaRPr lang="en-US" sz="1400" dirty="0"/>
+              <a:t>Lab 1 (worked, participatory): copy the notebook to Drive and mount Drive into the runtime (this is how your corpus and results survive Colab wiping the session, everything saving to one project folder), put a Gemini key in Colab Secrets, load NYT wedding data, make a first chart. Hand out the common-errors cheat sheet. Then solo with a partner: draft three questions, pick one, have the AI write the code, run it, chart it. Write one sentence predicting your cell before you run it.</a:t>
+            </a:r>
+            <a:endParaRPr lang="en-US" sz="1100" dirty="0"/>
+          </a:p>
+        </p:txBody>
+      </p:sp>
+      <p:sp>
+        <p:nvSpPr>
+          <p:cNvPr id="18" name="Shape 16"/>
+          <p:cNvSpPr/>
+          <p:nvPr/>
+        </p:nvSpPr>
+        <p:spPr>
+          <a:xfrm>
+            <a:off x="640080" y="4373118"/>
+            <a:ext cx="868680" cy="450342"/>
+          </a:xfrm>
+          <a:prstGeom prst="roundRect">
+            <a:avLst>
+              <a:gd name="adj" fmla="val 12183"/>
+            </a:avLst>
+          </a:prstGeom>
+          <a:solidFill>
+            <a:srgbClr val="7A3B2E"/>
+          </a:solidFill>
+          <a:ln/>
+        </p:spPr>
+      </p:sp>
+      <p:sp>
+        <p:nvSpPr>
+          <p:cNvPr id="19" name="Text 17"/>
+          <p:cNvSpPr/>
+          <p:nvPr/>
+        </p:nvSpPr>
+        <p:spPr>
+          <a:xfrm>
+            <a:off x="640080" y="4373118"/>
+            <a:ext cx="868680" cy="450342"/>
+          </a:xfrm>
+          <a:prstGeom prst="rect">
+            <a:avLst/>
+          </a:prstGeom>
+          <a:noFill/>
+          <a:ln/>
+        </p:spPr>
+        <p:txBody>
+          <a:bodyPr wrap="square" rtlCol="0" anchor="ctr"/>
+          <a:lstStyle/>
+          <a:p>
+            <a:pPr algn="ctr" indent="0" marL="0">
+              <a:buNone/>
+            </a:pPr>
+            <a:r>
+              <a:rPr lang="en-US" sz="1100" b="1" dirty="0">
+                <a:solidFill>
+                  <a:srgbClr val="FFFFFF"/>
+                </a:solidFill>
+                <a:latin typeface="Calibri" pitchFamily="34" charset="0"/>
+                <a:ea typeface="Calibri" pitchFamily="34" charset="-122"/>
+                <a:cs typeface="Calibri" pitchFamily="34" charset="-120"/>
+              </a:rPr>
+              <a:t>1:20</a:t>
+            </a:r>
+            <a:endParaRPr lang="en-US" sz="1100" dirty="0"/>
+          </a:p>
+        </p:txBody>
+      </p:sp>
+      <p:sp>
+        <p:nvSpPr>
+          <p:cNvPr id="20" name="Text 18"/>
+          <p:cNvSpPr/>
+          <p:nvPr/>
+        </p:nvSpPr>
+        <p:spPr>
+          <a:xfrm>
+            <a:off x="1691640" y="4354830"/>
+            <a:ext cx="9646920" cy="560070"/>
+          </a:xfrm>
+          <a:prstGeom prst="rect">
+            <a:avLst/>
+          </a:prstGeom>
+          <a:noFill/>
+          <a:ln/>
+        </p:spPr>
+        <p:txBody>
+          <a:bodyPr wrap="square" rtlCol="0" anchor="ctr">
+            <a:spAutoFit/>
+          </a:bodyPr>
+          <a:lstStyle/>
+          <a:p>
+            <a:pPr indent="0" marL="0">
+              <a:buNone/>
+            </a:pPr>
+            <a:r>
+              <a:rPr lang="en-US" sz="1100" dirty="0">
+                <a:solidFill>
+                  <a:srgbClr val="1A1A1A"/>
+                </a:solidFill>
+                <a:latin typeface="Calibri" pitchFamily="34" charset="0"/>
+                <a:ea typeface="Calibri" pitchFamily="34" charset="-122"/>
+                <a:cs typeface="Calibri" pitchFamily="34" charset="-120"/>
+              </a:rPr>
+              <a:t>Break</a:t>
+            </a:r>
+            <a:endParaRPr lang="en-US" sz="1100" dirty="0"/>
+          </a:p>
+        </p:txBody>
+      </p:sp>
+      <p:sp>
+        <p:nvSpPr>
+          <p:cNvPr id="21" name="Shape 19"/>
+          <p:cNvSpPr/>
+          <p:nvPr/>
+        </p:nvSpPr>
+        <p:spPr>
+          <a:xfrm>
+            <a:off x="640080" y="4933188"/>
+            <a:ext cx="868680" cy="450342"/>
+          </a:xfrm>
+          <a:prstGeom prst="roundRect">
+            <a:avLst>
+              <a:gd name="adj" fmla="val 12183"/>
+            </a:avLst>
+          </a:prstGeom>
+          <a:solidFill>
+            <a:srgbClr val="7A3B2E"/>
+          </a:solidFill>
+          <a:ln/>
+        </p:spPr>
+      </p:sp>
+      <p:sp>
+        <p:nvSpPr>
+          <p:cNvPr id="22" name="Text 20"/>
+          <p:cNvSpPr/>
+          <p:nvPr/>
+        </p:nvSpPr>
+        <p:spPr>
+          <a:xfrm>
+            <a:off x="640080" y="4933188"/>
+            <a:ext cx="868680" cy="450342"/>
+          </a:xfrm>
+          <a:prstGeom prst="rect">
+            <a:avLst/>
+          </a:prstGeom>
+          <a:noFill/>
+          <a:ln/>
+        </p:spPr>
+        <p:txBody>
+          <a:bodyPr wrap="square" rtlCol="0" anchor="ctr"/>
+          <a:lstStyle/>
+          <a:p>
+            <a:pPr algn="ctr" indent="0" marL="0">
+              <a:buNone/>
+            </a:pPr>
+            <a:r>
+              <a:rPr lang="en-US" sz="1100" b="1" dirty="0">
+                <a:solidFill>
+                  <a:srgbClr val="FFFFFF"/>
+                </a:solidFill>
+                <a:latin typeface="Calibri" pitchFamily="34" charset="0"/>
+                <a:ea typeface="Calibri" pitchFamily="34" charset="-122"/>
+                <a:cs typeface="Calibri" pitchFamily="34" charset="-120"/>
+              </a:rPr>
+              <a:t>1:30</a:t>
+            </a:r>
+            <a:endParaRPr lang="en-US" sz="1100" dirty="0"/>
+          </a:p>
+        </p:txBody>
+      </p:sp>
+      <p:sp>
+        <p:nvSpPr>
+          <p:cNvPr id="23" name="Text 21"/>
+          <p:cNvSpPr/>
+          <p:nvPr/>
+        </p:nvSpPr>
+        <p:spPr>
+          <a:xfrm>
+            <a:off x="1691640" y="4914900"/>
+            <a:ext cx="9646920" cy="560070"/>
+          </a:xfrm>
+          <a:prstGeom prst="rect">
+            <a:avLst/>
+          </a:prstGeom>
+          <a:noFill/>
+          <a:ln/>
+        </p:spPr>
+        <p:txBody>
+          <a:bodyPr wrap="square" rtlCol="0" anchor="ctr">
+            <a:spAutoFit/>
+          </a:bodyPr>
+          <a:lstStyle/>
+          <a:p>
+            <a:pPr indent="0" marL="0">
+              <a:buNone/>
+            </a:pPr>
+            <a:r>
+              <a:rPr lang="en-US" sz="1100" dirty="0">
+                <a:solidFill>
+                  <a:srgbClr val="1A1A1A"/>
+                </a:solidFill>
+                <a:latin typeface="Calibri" pitchFamily="34" charset="0"/>
+                <a:ea typeface="Calibri" pitchFamily="34" charset="-122"/>
+                <a:cs typeface="Calibri" pitchFamily="34" charset="-120"/>
+              </a:rPr>
+              <a:t>Lab 2 (worked): count words, then pixels. The real headlines' top words (stop-words dominate until removed, the first counting decision), then the Met image corpus ranked darkest to brightest by average brightness. The notebook's after-class half, defined color ranges and what every bag throws away, is this week's guided homework. Image projects begin here.</a:t>
+            </a:r>
+            <a:endParaRPr lang="en-US" sz="1100" dirty="0"/>
+          </a:p>
+        </p:txBody>
+      </p:sp>
+      <p:sp>
+        <p:nvSpPr>
+          <p:cNvPr id="24" name="Shape 22"/>
+          <p:cNvSpPr/>
+          <p:nvPr/>
+        </p:nvSpPr>
+        <p:spPr>
+          <a:xfrm>
+            <a:off x="640080" y="5493258"/>
+            <a:ext cx="868680" cy="450342"/>
+          </a:xfrm>
+          <a:prstGeom prst="roundRect">
+            <a:avLst>
+              <a:gd name="adj" fmla="val 12183"/>
+            </a:avLst>
+          </a:prstGeom>
+          <a:solidFill>
+            <a:srgbClr val="7A3B2E"/>
+          </a:solidFill>
+          <a:ln/>
+        </p:spPr>
+      </p:sp>
+      <p:sp>
+        <p:nvSpPr>
+          <p:cNvPr id="25" name="Text 23"/>
+          <p:cNvSpPr/>
+          <p:nvPr/>
+        </p:nvSpPr>
+        <p:spPr>
+          <a:xfrm>
+            <a:off x="640080" y="5493258"/>
+            <a:ext cx="868680" cy="450342"/>
+          </a:xfrm>
+          <a:prstGeom prst="rect">
+            <a:avLst/>
+          </a:prstGeom>
+          <a:noFill/>
+          <a:ln/>
+        </p:spPr>
+        <p:txBody>
+          <a:bodyPr wrap="square" rtlCol="0" anchor="ctr"/>
+          <a:lstStyle/>
+          <a:p>
+            <a:pPr algn="ctr" indent="0" marL="0">
+              <a:buNone/>
+            </a:pPr>
+            <a:r>
+              <a:rPr lang="en-US" sz="1100" b="1" dirty="0">
+                <a:solidFill>
+                  <a:srgbClr val="FFFFFF"/>
+                </a:solidFill>
+                <a:latin typeface="Calibri" pitchFamily="34" charset="0"/>
+                <a:ea typeface="Calibri" pitchFamily="34" charset="-122"/>
+                <a:cs typeface="Calibri" pitchFamily="34" charset="-120"/>
+              </a:rPr>
+              <a:t>1:52</a:t>
+            </a:r>
+            <a:endParaRPr lang="en-US" sz="1100" dirty="0"/>
+          </a:p>
+        </p:txBody>
+      </p:sp>
+      <p:sp>
+        <p:nvSpPr>
+          <p:cNvPr id="26" name="Text 24"/>
+          <p:cNvSpPr/>
+          <p:nvPr/>
+        </p:nvSpPr>
+        <p:spPr>
+          <a:xfrm>
+            <a:off x="1691640" y="5474970"/>
+            <a:ext cx="9646920" cy="560070"/>
+          </a:xfrm>
+          <a:prstGeom prst="rect">
+            <a:avLst/>
+          </a:prstGeom>
+          <a:noFill/>
+          <a:ln/>
+        </p:spPr>
+        <p:txBody>
+          <a:bodyPr wrap="square" rtlCol="0" anchor="ctr">
+            <a:spAutoFit/>
+          </a:bodyPr>
+          <a:lstStyle/>
+          <a:p>
+            <a:pPr indent="0" marL="0">
+              <a:buNone/>
+            </a:pPr>
+            <a:r>
+              <a:rPr lang="en-US" sz="1100" dirty="0">
+                <a:solidFill>
+                  <a:srgbClr val="1A1A1A"/>
+                </a:solidFill>
+                <a:latin typeface="Calibri" pitchFamily="34" charset="0"/>
+                <a:ea typeface="Calibri" pitchFamily="34" charset="-122"/>
+                <a:cs typeface="Calibri" pitchFamily="34" charset="-120"/>
+              </a:rPr>
+              <a:t>Preview of the methods ahead; the weekly routines introduced. First check-out.</a:t>
+            </a:r>
+            <a:endParaRPr lang="en-US" sz="1100" dirty="0"/>
           </a:p>
         </p:txBody>
       </p:sp>
@@ -5012,7 +4918,7 @@
         <p:spPr>
           <a:xfrm>
             <a:off x="640080" y="640080"/>
-            <a:ext cx="10058400" cy="320040"/>
+            <a:ext cx="10058400" cy="731520"/>
           </a:xfrm>
           <a:prstGeom prst="rect">
             <a:avLst/>
@@ -5028,7 +4934,66 @@
               <a:buNone/>
             </a:pPr>
             <a:r>
-              <a:rPr lang="en-US" sz="1300" b="1" spc="300" kern="0" dirty="0">
+              <a:rPr lang="en-US" sz="3000" b="1" dirty="0">
+                <a:solidFill>
+                  <a:srgbClr val="1A1A1A"/>
+                </a:solidFill>
+                <a:latin typeface="Cambria" pitchFamily="34" charset="0"/>
+                <a:ea typeface="Cambria" pitchFamily="34" charset="-122"/>
+                <a:cs typeface="Cambria" pitchFamily="34" charset="-120"/>
+              </a:rPr>
+              <a:t>Reading &amp; homework</a:t>
+            </a:r>
+            <a:endParaRPr lang="en-US" sz="3000" dirty="0"/>
+          </a:p>
+        </p:txBody>
+      </p:sp>
+      <p:sp>
+        <p:nvSpPr>
+          <p:cNvPr id="3" name="Shape 1"/>
+          <p:cNvSpPr/>
+          <p:nvPr/>
+        </p:nvSpPr>
+        <p:spPr>
+          <a:xfrm>
+            <a:off x="640080" y="1673352"/>
+            <a:ext cx="219456" cy="219456"/>
+          </a:xfrm>
+          <a:prstGeom prst="ellipse">
+            <a:avLst/>
+          </a:prstGeom>
+          <a:solidFill>
+            <a:srgbClr val="7A3B2E"/>
+          </a:solidFill>
+          <a:ln/>
+        </p:spPr>
+      </p:sp>
+      <p:sp>
+        <p:nvSpPr>
+          <p:cNvPr id="4" name="Text 2"/>
+          <p:cNvSpPr/>
+          <p:nvPr/>
+        </p:nvSpPr>
+        <p:spPr>
+          <a:xfrm>
+            <a:off x="1051560" y="1600200"/>
+            <a:ext cx="10424160" cy="365760"/>
+          </a:xfrm>
+          <a:prstGeom prst="rect">
+            <a:avLst/>
+          </a:prstGeom>
+          <a:noFill/>
+          <a:ln/>
+        </p:spPr>
+        <p:txBody>
+          <a:bodyPr wrap="square" rtlCol="0" anchor="ctr"/>
+          <a:lstStyle/>
+          <a:p>
+            <a:pPr indent="0" marL="0">
+              <a:buNone/>
+            </a:pPr>
+            <a:r>
+              <a:rPr lang="en-US" sz="1500" b="1" dirty="0">
                 <a:solidFill>
                   <a:srgbClr val="7A3B2E"/>
                 </a:solidFill>
@@ -5036,72 +5001,11 @@
                 <a:ea typeface="Calibri" pitchFamily="34" charset="-122"/>
                 <a:cs typeface="Calibri" pitchFamily="34" charset="-120"/>
               </a:rPr>
-              <a:t>HOW THIS WEEK CONNECTS</a:t>
-            </a:r>
-            <a:endParaRPr lang="en-US" sz="1300" dirty="0"/>
-          </a:p>
-        </p:txBody>
-      </p:sp>
-      <p:sp>
-        <p:nvSpPr>
-          <p:cNvPr id="3" name="Text 1"/>
-          <p:cNvSpPr/>
-          <p:nvPr/>
-        </p:nvSpPr>
-        <p:spPr>
-          <a:xfrm>
-            <a:off x="640080" y="987552"/>
-            <a:ext cx="10058400" cy="640080"/>
-          </a:xfrm>
-          <a:prstGeom prst="rect">
-            <a:avLst/>
-          </a:prstGeom>
-          <a:noFill/>
-          <a:ln/>
-        </p:spPr>
-        <p:txBody>
-          <a:bodyPr wrap="square" rtlCol="0" anchor="ctr"/>
-          <a:lstStyle/>
-          <a:p>
-            <a:pPr indent="0" marL="0">
-              <a:buNone/>
-            </a:pPr>
-            <a:r>
-              <a:rPr lang="en-US" sz="2800" b="1" dirty="0">
-                <a:solidFill>
-                  <a:srgbClr val="1A1A1A"/>
-                </a:solidFill>
-                <a:latin typeface="Cambria" pitchFamily="34" charset="0"/>
-                <a:ea typeface="Cambria" pitchFamily="34" charset="-122"/>
-                <a:cs typeface="Cambria" pitchFamily="34" charset="-120"/>
-              </a:rPr>
-              <a:t>The course's through-lines</a:t>
-            </a:r>
-            <a:endParaRPr lang="en-US" sz="2800" dirty="0"/>
-          </a:p>
-        </p:txBody>
-      </p:sp>
-      <p:sp>
-        <p:nvSpPr>
-          <p:cNvPr id="4" name="Shape 2"/>
-          <p:cNvSpPr/>
-          <p:nvPr/>
-        </p:nvSpPr>
-        <p:spPr>
-          <a:xfrm>
-            <a:off x="640080" y="2057400"/>
-            <a:ext cx="457200" cy="457200"/>
-          </a:xfrm>
-          <a:prstGeom prst="roundRect">
-            <a:avLst>
-              <a:gd name="adj" fmla="val 16000"/>
-            </a:avLst>
-          </a:prstGeom>
-          <a:solidFill>
-            <a:srgbClr val="7A3B2E"/>
-          </a:solidFill>
-          <a:ln/>
-        </p:spPr>
+              <a:t>Reading</a:t>
+            </a:r>
+            <a:endParaRPr lang="en-US" sz="1500" dirty="0"/>
+          </a:p>
+        </p:txBody>
       </p:sp>
       <p:sp>
         <p:nvSpPr>
@@ -5111,86 +5015,8 @@
         </p:nvSpPr>
         <p:spPr>
           <a:xfrm>
-            <a:off x="640080" y="2057400"/>
-            <a:ext cx="457200" cy="457200"/>
-          </a:xfrm>
-          <a:prstGeom prst="rect">
-            <a:avLst/>
-          </a:prstGeom>
-          <a:noFill/>
-          <a:ln/>
-        </p:spPr>
-        <p:txBody>
-          <a:bodyPr wrap="square" rtlCol="0" anchor="ctr"/>
-          <a:lstStyle/>
-          <a:p>
-            <a:pPr algn="ctr" indent="0" marL="0">
-              <a:buNone/>
-            </a:pPr>
-            <a:r>
-              <a:rPr lang="en-US" sz="2000" b="1" dirty="0">
-                <a:solidFill>
-                  <a:srgbClr val="FFFFFF"/>
-                </a:solidFill>
-                <a:latin typeface="Cambria" pitchFamily="34" charset="0"/>
-                <a:ea typeface="Cambria" pitchFamily="34" charset="-122"/>
-                <a:cs typeface="Cambria" pitchFamily="34" charset="-120"/>
-              </a:rPr>
-              <a:t>1</a:t>
-            </a:r>
-            <a:endParaRPr lang="en-US" sz="2000" dirty="0"/>
-          </a:p>
-        </p:txBody>
-      </p:sp>
-      <p:sp>
-        <p:nvSpPr>
-          <p:cNvPr id="6" name="Text 4"/>
-          <p:cNvSpPr/>
-          <p:nvPr/>
-        </p:nvSpPr>
-        <p:spPr>
-          <a:xfrm>
-            <a:off x="1371600" y="2020824"/>
-            <a:ext cx="10332720" cy="411480"/>
-          </a:xfrm>
-          <a:prstGeom prst="rect">
-            <a:avLst/>
-          </a:prstGeom>
-          <a:noFill/>
-          <a:ln/>
-        </p:spPr>
-        <p:txBody>
-          <a:bodyPr wrap="square" rtlCol="0" anchor="ctr"/>
-          <a:lstStyle/>
-          <a:p>
-            <a:pPr indent="0" marL="0">
-              <a:buNone/>
-            </a:pPr>
-            <a:r>
-              <a:rPr lang="en-US" sz="1900" b="1" dirty="0">
-                <a:solidFill>
-                  <a:srgbClr val="7A3B2E"/>
-                </a:solidFill>
-                <a:latin typeface="Cambria" pitchFamily="34" charset="0"/>
-                <a:ea typeface="Cambria" pitchFamily="34" charset="-122"/>
-                <a:cs typeface="Cambria" pitchFamily="34" charset="-120"/>
-              </a:rPr>
-              <a:t>Read work critically</a:t>
-            </a:r>
-            <a:endParaRPr lang="en-US" sz="1900" dirty="0"/>
-          </a:p>
-        </p:txBody>
-      </p:sp>
-      <p:sp>
-        <p:nvSpPr>
-          <p:cNvPr id="7" name="Text 5"/>
-          <p:cNvSpPr/>
-          <p:nvPr/>
-        </p:nvSpPr>
-        <p:spPr>
-          <a:xfrm>
-            <a:off x="1371600" y="2441448"/>
-            <a:ext cx="10332720" cy="914400"/>
+            <a:off x="1051560" y="1984248"/>
+            <a:ext cx="10424160" cy="731520"/>
           </a:xfrm>
           <a:prstGeom prst="rect">
             <a:avLst/>
@@ -5205,13 +5031,10 @@
           <a:lstStyle/>
           <a:p>
             <a:pPr indent="0" marL="0">
-              <a:lnSpc>
-                <a:spcPct val="112000"/>
-              </a:lnSpc>
-              <a:buNone/>
-            </a:pPr>
-            <a:r>
-              <a:rPr lang="en-US" sz="1450" dirty="0">
+              <a:buNone/>
+            </a:pPr>
+            <a:r>
+              <a:rPr lang="en-US" sz="1400" dirty="0">
                 <a:solidFill>
                   <a:srgbClr val="1A1A1A"/>
                 </a:solidFill>
@@ -5219,27 +5042,25 @@
                 <a:ea typeface="Calibri" pitchFamily="34" charset="-122"/>
                 <a:cs typeface="Calibri" pitchFamily="34" charset="-120"/>
               </a:rPr>
-              <a:t>She Giggles, He Gallops is excellent and its choices are debatable. Admiring and questioning at once is the habit the course is built on.</a:t>
-            </a:r>
-            <a:endParaRPr lang="en-US" sz="1450" dirty="0"/>
-          </a:p>
-        </p:txBody>
-      </p:sp>
-      <p:sp>
-        <p:nvSpPr>
-          <p:cNvPr id="8" name="Shape 6"/>
-          <p:cNvSpPr/>
-          <p:nvPr/>
-        </p:nvSpPr>
-        <p:spPr>
-          <a:xfrm>
-            <a:off x="640080" y="3520440"/>
-            <a:ext cx="457200" cy="457200"/>
-          </a:xfrm>
-          <a:prstGeom prst="roundRect">
-            <a:avLst>
-              <a:gd name="adj" fmla="val 16000"/>
-            </a:avLst>
+              <a:t>Bollen et al., the cognitive-distortions hockey stick (PNAS 2021), with the Schmidt et al. critique</a:t>
+            </a:r>
+            <a:endParaRPr lang="en-US" sz="1400" dirty="0"/>
+          </a:p>
+        </p:txBody>
+      </p:sp>
+      <p:sp>
+        <p:nvSpPr>
+          <p:cNvPr id="6" name="Shape 4"/>
+          <p:cNvSpPr/>
+          <p:nvPr/>
+        </p:nvSpPr>
+        <p:spPr>
+          <a:xfrm>
+            <a:off x="640080" y="2633472"/>
+            <a:ext cx="219456" cy="219456"/>
+          </a:xfrm>
+          <a:prstGeom prst="ellipse">
+            <a:avLst/>
           </a:prstGeom>
           <a:solidFill>
             <a:srgbClr val="3F6F5F"/>
@@ -5249,14 +5070,14 @@
       </p:sp>
       <p:sp>
         <p:nvSpPr>
-          <p:cNvPr id="9" name="Text 7"/>
-          <p:cNvSpPr/>
-          <p:nvPr/>
-        </p:nvSpPr>
-        <p:spPr>
-          <a:xfrm>
-            <a:off x="640080" y="3520440"/>
-            <a:ext cx="457200" cy="457200"/>
+          <p:cNvPr id="7" name="Text 5"/>
+          <p:cNvSpPr/>
+          <p:nvPr/>
+        </p:nvSpPr>
+        <p:spPr>
+          <a:xfrm>
+            <a:off x="1051560" y="2560320"/>
+            <a:ext cx="10424160" cy="365760"/>
           </a:xfrm>
           <a:prstGeom prst="rect">
             <a:avLst/>
@@ -5268,73 +5089,34 @@
           <a:bodyPr wrap="square" rtlCol="0" anchor="ctr"/>
           <a:lstStyle/>
           <a:p>
-            <a:pPr algn="ctr" indent="0" marL="0">
-              <a:buNone/>
-            </a:pPr>
-            <a:r>
-              <a:rPr lang="en-US" sz="2000" b="1" dirty="0">
-                <a:solidFill>
-                  <a:srgbClr val="FFFFFF"/>
-                </a:solidFill>
-                <a:latin typeface="Cambria" pitchFamily="34" charset="0"/>
-                <a:ea typeface="Cambria" pitchFamily="34" charset="-122"/>
-                <a:cs typeface="Cambria" pitchFamily="34" charset="-120"/>
-              </a:rPr>
-              <a:t>2</a:t>
-            </a:r>
-            <a:endParaRPr lang="en-US" sz="2000" dirty="0"/>
-          </a:p>
-        </p:txBody>
-      </p:sp>
-      <p:sp>
-        <p:nvSpPr>
-          <p:cNvPr id="10" name="Text 8"/>
-          <p:cNvSpPr/>
-          <p:nvPr/>
-        </p:nvSpPr>
-        <p:spPr>
-          <a:xfrm>
-            <a:off x="1371600" y="3483864"/>
-            <a:ext cx="10332720" cy="411480"/>
-          </a:xfrm>
-          <a:prstGeom prst="rect">
-            <a:avLst/>
-          </a:prstGeom>
-          <a:noFill/>
-          <a:ln/>
-        </p:spPr>
-        <p:txBody>
-          <a:bodyPr wrap="square" rtlCol="0" anchor="ctr"/>
-          <a:lstStyle/>
-          <a:p>
-            <a:pPr indent="0" marL="0">
-              <a:buNone/>
-            </a:pPr>
-            <a:r>
-              <a:rPr lang="en-US" sz="1900" b="1" dirty="0">
+            <a:pPr indent="0" marL="0">
+              <a:buNone/>
+            </a:pPr>
+            <a:r>
+              <a:rPr lang="en-US" sz="1500" b="1" dirty="0">
                 <a:solidFill>
                   <a:srgbClr val="3F6F5F"/>
                 </a:solidFill>
-                <a:latin typeface="Cambria" pitchFamily="34" charset="0"/>
-                <a:ea typeface="Cambria" pitchFamily="34" charset="-122"/>
-                <a:cs typeface="Cambria" pitchFamily="34" charset="-120"/>
-              </a:rPr>
-              <a:t>Make something real</a:t>
-            </a:r>
-            <a:endParaRPr lang="en-US" sz="1900" dirty="0"/>
-          </a:p>
-        </p:txBody>
-      </p:sp>
-      <p:sp>
-        <p:nvSpPr>
-          <p:cNvPr id="11" name="Text 9"/>
-          <p:cNvSpPr/>
-          <p:nvPr/>
-        </p:nvSpPr>
-        <p:spPr>
-          <a:xfrm>
-            <a:off x="1371600" y="3904488"/>
-            <a:ext cx="10332720" cy="914400"/>
+                <a:latin typeface="Calibri" pitchFamily="34" charset="0"/>
+                <a:ea typeface="Calibri" pitchFamily="34" charset="-122"/>
+                <a:cs typeface="Calibri" pitchFamily="34" charset="-120"/>
+              </a:rPr>
+              <a:t>Supplement</a:t>
+            </a:r>
+            <a:endParaRPr lang="en-US" sz="1500" dirty="0"/>
+          </a:p>
+        </p:txBody>
+      </p:sp>
+      <p:sp>
+        <p:nvSpPr>
+          <p:cNvPr id="8" name="Text 6"/>
+          <p:cNvSpPr/>
+          <p:nvPr/>
+        </p:nvSpPr>
+        <p:spPr>
+          <a:xfrm>
+            <a:off x="1051560" y="2944368"/>
+            <a:ext cx="10424160" cy="731520"/>
           </a:xfrm>
           <a:prstGeom prst="rect">
             <a:avLst/>
@@ -5349,13 +5131,10 @@
           <a:lstStyle/>
           <a:p>
             <a:pPr indent="0" marL="0">
-              <a:lnSpc>
-                <a:spcPct val="112000"/>
-              </a:lnSpc>
-              <a:buNone/>
-            </a:pPr>
-            <a:r>
-              <a:rPr lang="en-US" sz="1450" dirty="0">
+              <a:buNone/>
+            </a:pPr>
+            <a:r>
+              <a:rPr lang="en-US" sz="1400" dirty="0">
                 <a:solidFill>
                   <a:srgbClr val="1A1A1A"/>
                 </a:solidFill>
@@ -5363,27 +5142,25 @@
                 <a:ea typeface="Calibri" pitchFamily="34" charset="-122"/>
                 <a:cs typeface="Calibri" pitchFamily="34" charset="-120"/>
               </a:rPr>
-              <a:t>A complete investigation by the first break, before any theory.</a:t>
-            </a:r>
-            <a:endParaRPr lang="en-US" sz="1450" dirty="0"/>
-          </a:p>
-        </p:txBody>
-      </p:sp>
-      <p:sp>
-        <p:nvSpPr>
-          <p:cNvPr id="12" name="Shape 10"/>
-          <p:cNvSpPr/>
-          <p:nvPr/>
-        </p:nvSpPr>
-        <p:spPr>
-          <a:xfrm>
-            <a:off x="640080" y="4983480"/>
-            <a:ext cx="457200" cy="457200"/>
-          </a:xfrm>
-          <a:prstGeom prst="roundRect">
-            <a:avLst>
-              <a:gd name="adj" fmla="val 16000"/>
-            </a:avLst>
+              <a:t>Robin Sloan, Writing with the machine; Drucker, Humanities Approaches to Graphical Display (DHQ 2011), the case that all data is capta</a:t>
+            </a:r>
+            <a:endParaRPr lang="en-US" sz="1400" dirty="0"/>
+          </a:p>
+        </p:txBody>
+      </p:sp>
+      <p:sp>
+        <p:nvSpPr>
+          <p:cNvPr id="9" name="Shape 7"/>
+          <p:cNvSpPr/>
+          <p:nvPr/>
+        </p:nvSpPr>
+        <p:spPr>
+          <a:xfrm>
+            <a:off x="640080" y="3593592"/>
+            <a:ext cx="219456" cy="219456"/>
+          </a:xfrm>
+          <a:prstGeom prst="ellipse">
+            <a:avLst/>
           </a:prstGeom>
           <a:solidFill>
             <a:srgbClr val="B9852F"/>
@@ -5393,14 +5170,14 @@
       </p:sp>
       <p:sp>
         <p:nvSpPr>
-          <p:cNvPr id="13" name="Text 11"/>
-          <p:cNvSpPr/>
-          <p:nvPr/>
-        </p:nvSpPr>
-        <p:spPr>
-          <a:xfrm>
-            <a:off x="640080" y="4983480"/>
-            <a:ext cx="457200" cy="457200"/>
+          <p:cNvPr id="10" name="Text 8"/>
+          <p:cNvSpPr/>
+          <p:nvPr/>
+        </p:nvSpPr>
+        <p:spPr>
+          <a:xfrm>
+            <a:off x="1051560" y="3520440"/>
+            <a:ext cx="10424160" cy="365760"/>
           </a:xfrm>
           <a:prstGeom prst="rect">
             <a:avLst/>
@@ -5412,73 +5189,34 @@
           <a:bodyPr wrap="square" rtlCol="0" anchor="ctr"/>
           <a:lstStyle/>
           <a:p>
-            <a:pPr algn="ctr" indent="0" marL="0">
-              <a:buNone/>
-            </a:pPr>
-            <a:r>
-              <a:rPr lang="en-US" sz="2000" b="1" dirty="0">
-                <a:solidFill>
-                  <a:srgbClr val="FFFFFF"/>
-                </a:solidFill>
-                <a:latin typeface="Cambria" pitchFamily="34" charset="0"/>
-                <a:ea typeface="Cambria" pitchFamily="34" charset="-122"/>
-                <a:cs typeface="Cambria" pitchFamily="34" charset="-120"/>
-              </a:rPr>
-              <a:t>3</a:t>
-            </a:r>
-            <a:endParaRPr lang="en-US" sz="2000" dirty="0"/>
-          </a:p>
-        </p:txBody>
-      </p:sp>
-      <p:sp>
-        <p:nvSpPr>
-          <p:cNvPr id="14" name="Text 12"/>
-          <p:cNvSpPr/>
-          <p:nvPr/>
-        </p:nvSpPr>
-        <p:spPr>
-          <a:xfrm>
-            <a:off x="1371600" y="4946904"/>
-            <a:ext cx="10332720" cy="411480"/>
-          </a:xfrm>
-          <a:prstGeom prst="rect">
-            <a:avLst/>
-          </a:prstGeom>
-          <a:noFill/>
-          <a:ln/>
-        </p:spPr>
-        <p:txBody>
-          <a:bodyPr wrap="square" rtlCol="0" anchor="ctr"/>
-          <a:lstStyle/>
-          <a:p>
-            <a:pPr indent="0" marL="0">
-              <a:buNone/>
-            </a:pPr>
-            <a:r>
-              <a:rPr lang="en-US" sz="1900" b="1" dirty="0">
+            <a:pPr indent="0" marL="0">
+              <a:buNone/>
+            </a:pPr>
+            <a:r>
+              <a:rPr lang="en-US" sz="1500" b="1" dirty="0">
                 <a:solidFill>
                   <a:srgbClr val="B9852F"/>
                 </a:solidFill>
-                <a:latin typeface="Cambria" pitchFamily="34" charset="0"/>
-                <a:ea typeface="Cambria" pitchFamily="34" charset="-122"/>
-                <a:cs typeface="Cambria" pitchFamily="34" charset="-120"/>
-              </a:rPr>
-              <a:t>Images are culture too</a:t>
-            </a:r>
-            <a:endParaRPr lang="en-US" sz="1900" dirty="0"/>
-          </a:p>
-        </p:txBody>
-      </p:sp>
-      <p:sp>
-        <p:nvSpPr>
-          <p:cNvPr id="15" name="Text 13"/>
-          <p:cNvSpPr/>
-          <p:nvPr/>
-        </p:nvSpPr>
-        <p:spPr>
-          <a:xfrm>
-            <a:off x="1371600" y="5367528"/>
-            <a:ext cx="10332720" cy="914400"/>
+                <a:latin typeface="Calibri" pitchFamily="34" charset="0"/>
+                <a:ea typeface="Calibri" pitchFamily="34" charset="-122"/>
+                <a:cs typeface="Calibri" pitchFamily="34" charset="-120"/>
+              </a:rPr>
+              <a:t>Deeper (optional)</a:t>
+            </a:r>
+            <a:endParaRPr lang="en-US" sz="1500" dirty="0"/>
+          </a:p>
+        </p:txBody>
+      </p:sp>
+      <p:sp>
+        <p:nvSpPr>
+          <p:cNvPr id="11" name="Text 9"/>
+          <p:cNvSpPr/>
+          <p:nvPr/>
+        </p:nvSpPr>
+        <p:spPr>
+          <a:xfrm>
+            <a:off x="1051560" y="3904488"/>
+            <a:ext cx="10424160" cy="731520"/>
           </a:xfrm>
           <a:prstGeom prst="rect">
             <a:avLst/>
@@ -5493,13 +5231,10 @@
           <a:lstStyle/>
           <a:p>
             <a:pPr indent="0" marL="0">
-              <a:lnSpc>
-                <a:spcPct val="112000"/>
-              </a:lnSpc>
-              <a:buNone/>
-            </a:pPr>
-            <a:r>
-              <a:rPr lang="en-US" sz="1450" dirty="0">
+              <a:buNone/>
+            </a:pPr>
+            <a:r>
+              <a:rPr lang="en-US" sz="1400" dirty="0">
                 <a:solidFill>
                   <a:srgbClr val="1A1A1A"/>
                 </a:solidFill>
@@ -5507,9 +5242,209 @@
                 <a:ea typeface="Calibri" pitchFamily="34" charset="-122"/>
                 <a:cs typeface="Calibri" pitchFamily="34" charset="-120"/>
               </a:rPr>
-              <a:t>A picture is numbers: you counted pixels on day one, and images continue as a co-equal corpus through all ten weeks.</a:t>
-            </a:r>
-            <a:endParaRPr lang="en-US" sz="1450" dirty="0"/>
+              <a:t>Moretti, Conjectures on World Literature (NLR 2000), the founding argument for reading culture at scale</a:t>
+            </a:r>
+            <a:endParaRPr lang="en-US" sz="1400" dirty="0"/>
+          </a:p>
+        </p:txBody>
+      </p:sp>
+      <p:sp>
+        <p:nvSpPr>
+          <p:cNvPr id="12" name="Shape 10"/>
+          <p:cNvSpPr/>
+          <p:nvPr/>
+        </p:nvSpPr>
+        <p:spPr>
+          <a:xfrm>
+            <a:off x="640080" y="4553712"/>
+            <a:ext cx="219456" cy="219456"/>
+          </a:xfrm>
+          <a:prstGeom prst="ellipse">
+            <a:avLst/>
+          </a:prstGeom>
+          <a:solidFill>
+            <a:srgbClr val="3F6F5F"/>
+          </a:solidFill>
+          <a:ln/>
+        </p:spPr>
+      </p:sp>
+      <p:sp>
+        <p:nvSpPr>
+          <p:cNvPr id="13" name="Text 11"/>
+          <p:cNvSpPr/>
+          <p:nvPr/>
+        </p:nvSpPr>
+        <p:spPr>
+          <a:xfrm>
+            <a:off x="1051560" y="4480560"/>
+            <a:ext cx="10424160" cy="365760"/>
+          </a:xfrm>
+          <a:prstGeom prst="rect">
+            <a:avLst/>
+          </a:prstGeom>
+          <a:noFill/>
+          <a:ln/>
+        </p:spPr>
+        <p:txBody>
+          <a:bodyPr wrap="square" rtlCol="0" anchor="ctr"/>
+          <a:lstStyle/>
+          <a:p>
+            <a:pPr indent="0" marL="0">
+              <a:buNone/>
+            </a:pPr>
+            <a:r>
+              <a:rPr lang="en-US" sz="1500" b="1" dirty="0">
+                <a:solidFill>
+                  <a:srgbClr val="3F6F5F"/>
+                </a:solidFill>
+                <a:latin typeface="Calibri" pitchFamily="34" charset="0"/>
+                <a:ea typeface="Calibri" pitchFamily="34" charset="-122"/>
+                <a:cs typeface="Calibri" pitchFamily="34" charset="-120"/>
+              </a:rPr>
+              <a:t>Sketch</a:t>
+            </a:r>
+            <a:endParaRPr lang="en-US" sz="1500" dirty="0"/>
+          </a:p>
+        </p:txBody>
+      </p:sp>
+      <p:sp>
+        <p:nvSpPr>
+          <p:cNvPr id="14" name="Text 12"/>
+          <p:cNvSpPr/>
+          <p:nvPr/>
+        </p:nvSpPr>
+        <p:spPr>
+          <a:xfrm>
+            <a:off x="1051560" y="4864608"/>
+            <a:ext cx="10424160" cy="731520"/>
+          </a:xfrm>
+          <a:prstGeom prst="rect">
+            <a:avLst/>
+          </a:prstGeom>
+          <a:noFill/>
+          <a:ln/>
+        </p:spPr>
+        <p:txBody>
+          <a:bodyPr wrap="square" rtlCol="0" anchor="t">
+            <a:spAutoFit/>
+          </a:bodyPr>
+          <a:lstStyle/>
+          <a:p>
+            <a:pPr indent="0" marL="0">
+              <a:buNone/>
+            </a:pPr>
+            <a:r>
+              <a:rPr lang="en-US" sz="1400" dirty="0">
+                <a:solidFill>
+                  <a:srgbClr val="1A1A1A"/>
+                </a:solidFill>
+                <a:latin typeface="Calibri" pitchFamily="34" charset="0"/>
+                <a:ea typeface="Calibri" pitchFamily="34" charset="-122"/>
+                <a:cs typeface="Calibri" pitchFamily="34" charset="-120"/>
+              </a:rPr>
+              <a:t>One question from your life, answerable with data (three sentences), plus the notebook's after-class half (~20 minutes).</a:t>
+            </a:r>
+            <a:endParaRPr lang="en-US" sz="1400" dirty="0"/>
+          </a:p>
+        </p:txBody>
+      </p:sp>
+      <p:sp>
+        <p:nvSpPr>
+          <p:cNvPr id="15" name="Shape 13"/>
+          <p:cNvSpPr/>
+          <p:nvPr/>
+        </p:nvSpPr>
+        <p:spPr>
+          <a:xfrm>
+            <a:off x="640080" y="5513832"/>
+            <a:ext cx="219456" cy="219456"/>
+          </a:xfrm>
+          <a:prstGeom prst="ellipse">
+            <a:avLst/>
+          </a:prstGeom>
+          <a:solidFill>
+            <a:srgbClr val="7A3B2E"/>
+          </a:solidFill>
+          <a:ln/>
+        </p:spPr>
+      </p:sp>
+      <p:sp>
+        <p:nvSpPr>
+          <p:cNvPr id="16" name="Text 14"/>
+          <p:cNvSpPr/>
+          <p:nvPr/>
+        </p:nvSpPr>
+        <p:spPr>
+          <a:xfrm>
+            <a:off x="1051560" y="5440680"/>
+            <a:ext cx="10424160" cy="365760"/>
+          </a:xfrm>
+          <a:prstGeom prst="rect">
+            <a:avLst/>
+          </a:prstGeom>
+          <a:noFill/>
+          <a:ln/>
+        </p:spPr>
+        <p:txBody>
+          <a:bodyPr wrap="square" rtlCol="0" anchor="ctr"/>
+          <a:lstStyle/>
+          <a:p>
+            <a:pPr indent="0" marL="0">
+              <a:buNone/>
+            </a:pPr>
+            <a:r>
+              <a:rPr lang="en-US" sz="1500" b="1" dirty="0">
+                <a:solidFill>
+                  <a:srgbClr val="7A3B2E"/>
+                </a:solidFill>
+                <a:latin typeface="Calibri" pitchFamily="34" charset="0"/>
+                <a:ea typeface="Calibri" pitchFamily="34" charset="-122"/>
+                <a:cs typeface="Calibri" pitchFamily="34" charset="-120"/>
+              </a:rPr>
+              <a:t>Check (AI closed)</a:t>
+            </a:r>
+            <a:endParaRPr lang="en-US" sz="1500" dirty="0"/>
+          </a:p>
+        </p:txBody>
+      </p:sp>
+      <p:sp>
+        <p:nvSpPr>
+          <p:cNvPr id="17" name="Text 15"/>
+          <p:cNvSpPr/>
+          <p:nvPr/>
+        </p:nvSpPr>
+        <p:spPr>
+          <a:xfrm>
+            <a:off x="1051560" y="5824728"/>
+            <a:ext cx="10424160" cy="731520"/>
+          </a:xfrm>
+          <a:prstGeom prst="rect">
+            <a:avLst/>
+          </a:prstGeom>
+          <a:noFill/>
+          <a:ln/>
+        </p:spPr>
+        <p:txBody>
+          <a:bodyPr wrap="square" rtlCol="0" anchor="t">
+            <a:spAutoFit/>
+          </a:bodyPr>
+          <a:lstStyle/>
+          <a:p>
+            <a:pPr indent="0" marL="0">
+              <a:buNone/>
+            </a:pPr>
+            <a:r>
+              <a:rPr lang="en-US" sz="1400" dirty="0">
+                <a:solidFill>
+                  <a:srgbClr val="1A1A1A"/>
+                </a:solidFill>
+                <a:latin typeface="Calibri" pitchFamily="34" charset="0"/>
+                <a:ea typeface="Calibri" pitchFamily="34" charset="-122"/>
+                <a:cs typeface="Calibri" pitchFamily="34" charset="-120"/>
+              </a:rPr>
+              <a:t>Trace it: one written sentence predicting what your cell does before you run it. (Competency 1.)</a:t>
+            </a:r>
+            <a:endParaRPr lang="en-US" sz="1400" dirty="0"/>
           </a:p>
         </p:txBody>
       </p:sp>
@@ -5524,6 +5459,548 @@
 <file path=ppt/slides/slide15.xml><?xml version="1.0" encoding="utf-8"?>
 <p:sld xmlns:a="http://schemas.openxmlformats.org/drawingml/2006/main" xmlns:r="http://schemas.openxmlformats.org/officeDocument/2006/relationships" xmlns:p="http://schemas.openxmlformats.org/presentationml/2006/main">
   <p:cSld name="Slide 15">
+    <p:bg>
+      <p:bgPr>
+        <a:solidFill>
+          <a:srgbClr val="FFFFFF"/>
+        </a:solidFill>
+      </p:bgPr>
+    </p:bg>
+    <p:spTree>
+      <p:nvGrpSpPr>
+        <p:cNvPr id="1" name=""/>
+        <p:cNvGrpSpPr/>
+        <p:nvPr/>
+      </p:nvGrpSpPr>
+      <p:grpSpPr>
+        <a:xfrm>
+          <a:off x="0" y="0"/>
+          <a:ext cx="0" cy="0"/>
+          <a:chOff x="0" y="0"/>
+          <a:chExt cx="0" cy="0"/>
+        </a:xfrm>
+      </p:grpSpPr>
+      <p:sp>
+        <p:nvSpPr>
+          <p:cNvPr id="2" name="Text 0"/>
+          <p:cNvSpPr/>
+          <p:nvPr/>
+        </p:nvSpPr>
+        <p:spPr>
+          <a:xfrm>
+            <a:off x="640080" y="640080"/>
+            <a:ext cx="10058400" cy="320040"/>
+          </a:xfrm>
+          <a:prstGeom prst="rect">
+            <a:avLst/>
+          </a:prstGeom>
+          <a:noFill/>
+          <a:ln/>
+        </p:spPr>
+        <p:txBody>
+          <a:bodyPr wrap="square" rtlCol="0" anchor="ctr"/>
+          <a:lstStyle/>
+          <a:p>
+            <a:pPr indent="0" marL="0">
+              <a:buNone/>
+            </a:pPr>
+            <a:r>
+              <a:rPr lang="en-US" sz="1300" b="1" spc="300" kern="0" dirty="0">
+                <a:solidFill>
+                  <a:srgbClr val="7A3B2E"/>
+                </a:solidFill>
+                <a:latin typeface="Calibri" pitchFamily="34" charset="0"/>
+                <a:ea typeface="Calibri" pitchFamily="34" charset="-122"/>
+                <a:cs typeface="Calibri" pitchFamily="34" charset="-120"/>
+              </a:rPr>
+              <a:t>HOW THIS WEEK CONNECTS</a:t>
+            </a:r>
+            <a:endParaRPr lang="en-US" sz="1300" dirty="0"/>
+          </a:p>
+        </p:txBody>
+      </p:sp>
+      <p:sp>
+        <p:nvSpPr>
+          <p:cNvPr id="3" name="Text 1"/>
+          <p:cNvSpPr/>
+          <p:nvPr/>
+        </p:nvSpPr>
+        <p:spPr>
+          <a:xfrm>
+            <a:off x="640080" y="987552"/>
+            <a:ext cx="10058400" cy="640080"/>
+          </a:xfrm>
+          <a:prstGeom prst="rect">
+            <a:avLst/>
+          </a:prstGeom>
+          <a:noFill/>
+          <a:ln/>
+        </p:spPr>
+        <p:txBody>
+          <a:bodyPr wrap="square" rtlCol="0" anchor="ctr"/>
+          <a:lstStyle/>
+          <a:p>
+            <a:pPr indent="0" marL="0">
+              <a:buNone/>
+            </a:pPr>
+            <a:r>
+              <a:rPr lang="en-US" sz="2800" b="1" dirty="0">
+                <a:solidFill>
+                  <a:srgbClr val="1A1A1A"/>
+                </a:solidFill>
+                <a:latin typeface="Cambria" pitchFamily="34" charset="0"/>
+                <a:ea typeface="Cambria" pitchFamily="34" charset="-122"/>
+                <a:cs typeface="Cambria" pitchFamily="34" charset="-120"/>
+              </a:rPr>
+              <a:t>The course's through-lines</a:t>
+            </a:r>
+            <a:endParaRPr lang="en-US" sz="2800" dirty="0"/>
+          </a:p>
+        </p:txBody>
+      </p:sp>
+      <p:sp>
+        <p:nvSpPr>
+          <p:cNvPr id="4" name="Shape 2"/>
+          <p:cNvSpPr/>
+          <p:nvPr/>
+        </p:nvSpPr>
+        <p:spPr>
+          <a:xfrm>
+            <a:off x="640080" y="2057400"/>
+            <a:ext cx="457200" cy="457200"/>
+          </a:xfrm>
+          <a:prstGeom prst="roundRect">
+            <a:avLst>
+              <a:gd name="adj" fmla="val 16000"/>
+            </a:avLst>
+          </a:prstGeom>
+          <a:solidFill>
+            <a:srgbClr val="7A3B2E"/>
+          </a:solidFill>
+          <a:ln/>
+        </p:spPr>
+      </p:sp>
+      <p:sp>
+        <p:nvSpPr>
+          <p:cNvPr id="5" name="Text 3"/>
+          <p:cNvSpPr/>
+          <p:nvPr/>
+        </p:nvSpPr>
+        <p:spPr>
+          <a:xfrm>
+            <a:off x="640080" y="2057400"/>
+            <a:ext cx="457200" cy="457200"/>
+          </a:xfrm>
+          <a:prstGeom prst="rect">
+            <a:avLst/>
+          </a:prstGeom>
+          <a:noFill/>
+          <a:ln/>
+        </p:spPr>
+        <p:txBody>
+          <a:bodyPr wrap="square" rtlCol="0" anchor="ctr"/>
+          <a:lstStyle/>
+          <a:p>
+            <a:pPr algn="ctr" indent="0" marL="0">
+              <a:buNone/>
+            </a:pPr>
+            <a:r>
+              <a:rPr lang="en-US" sz="2000" b="1" dirty="0">
+                <a:solidFill>
+                  <a:srgbClr val="FFFFFF"/>
+                </a:solidFill>
+                <a:latin typeface="Cambria" pitchFamily="34" charset="0"/>
+                <a:ea typeface="Cambria" pitchFamily="34" charset="-122"/>
+                <a:cs typeface="Cambria" pitchFamily="34" charset="-120"/>
+              </a:rPr>
+              <a:t>1</a:t>
+            </a:r>
+            <a:endParaRPr lang="en-US" sz="2000" dirty="0"/>
+          </a:p>
+        </p:txBody>
+      </p:sp>
+      <p:sp>
+        <p:nvSpPr>
+          <p:cNvPr id="6" name="Text 4"/>
+          <p:cNvSpPr/>
+          <p:nvPr/>
+        </p:nvSpPr>
+        <p:spPr>
+          <a:xfrm>
+            <a:off x="1371600" y="2020824"/>
+            <a:ext cx="10332720" cy="411480"/>
+          </a:xfrm>
+          <a:prstGeom prst="rect">
+            <a:avLst/>
+          </a:prstGeom>
+          <a:noFill/>
+          <a:ln/>
+        </p:spPr>
+        <p:txBody>
+          <a:bodyPr wrap="square" rtlCol="0" anchor="ctr"/>
+          <a:lstStyle/>
+          <a:p>
+            <a:pPr indent="0" marL="0">
+              <a:buNone/>
+            </a:pPr>
+            <a:r>
+              <a:rPr lang="en-US" sz="1900" b="1" dirty="0">
+                <a:solidFill>
+                  <a:srgbClr val="7A3B2E"/>
+                </a:solidFill>
+                <a:latin typeface="Cambria" pitchFamily="34" charset="0"/>
+                <a:ea typeface="Cambria" pitchFamily="34" charset="-122"/>
+                <a:cs typeface="Cambria" pitchFamily="34" charset="-120"/>
+              </a:rPr>
+              <a:t>Read work critically</a:t>
+            </a:r>
+            <a:endParaRPr lang="en-US" sz="1900" dirty="0"/>
+          </a:p>
+        </p:txBody>
+      </p:sp>
+      <p:sp>
+        <p:nvSpPr>
+          <p:cNvPr id="7" name="Text 5"/>
+          <p:cNvSpPr/>
+          <p:nvPr/>
+        </p:nvSpPr>
+        <p:spPr>
+          <a:xfrm>
+            <a:off x="1371600" y="2441448"/>
+            <a:ext cx="10332720" cy="914400"/>
+          </a:xfrm>
+          <a:prstGeom prst="rect">
+            <a:avLst/>
+          </a:prstGeom>
+          <a:noFill/>
+          <a:ln/>
+        </p:spPr>
+        <p:txBody>
+          <a:bodyPr wrap="square" rtlCol="0" anchor="t">
+            <a:spAutoFit/>
+          </a:bodyPr>
+          <a:lstStyle/>
+          <a:p>
+            <a:pPr indent="0" marL="0">
+              <a:lnSpc>
+                <a:spcPct val="112000"/>
+              </a:lnSpc>
+              <a:buNone/>
+            </a:pPr>
+            <a:r>
+              <a:rPr lang="en-US" sz="1450" dirty="0">
+                <a:solidFill>
+                  <a:srgbClr val="1A1A1A"/>
+                </a:solidFill>
+                <a:latin typeface="Calibri" pitchFamily="34" charset="0"/>
+                <a:ea typeface="Calibri" pitchFamily="34" charset="-122"/>
+                <a:cs typeface="Calibri" pitchFamily="34" charset="-120"/>
+              </a:rPr>
+              <a:t>She Giggles, He Gallops is excellent and its choices are debatable. Admiring and questioning at once is the habit the course is built on.</a:t>
+            </a:r>
+            <a:endParaRPr lang="en-US" sz="1450" dirty="0"/>
+          </a:p>
+        </p:txBody>
+      </p:sp>
+      <p:sp>
+        <p:nvSpPr>
+          <p:cNvPr id="8" name="Shape 6"/>
+          <p:cNvSpPr/>
+          <p:nvPr/>
+        </p:nvSpPr>
+        <p:spPr>
+          <a:xfrm>
+            <a:off x="640080" y="3520440"/>
+            <a:ext cx="457200" cy="457200"/>
+          </a:xfrm>
+          <a:prstGeom prst="roundRect">
+            <a:avLst>
+              <a:gd name="adj" fmla="val 16000"/>
+            </a:avLst>
+          </a:prstGeom>
+          <a:solidFill>
+            <a:srgbClr val="3F6F5F"/>
+          </a:solidFill>
+          <a:ln/>
+        </p:spPr>
+      </p:sp>
+      <p:sp>
+        <p:nvSpPr>
+          <p:cNvPr id="9" name="Text 7"/>
+          <p:cNvSpPr/>
+          <p:nvPr/>
+        </p:nvSpPr>
+        <p:spPr>
+          <a:xfrm>
+            <a:off x="640080" y="3520440"/>
+            <a:ext cx="457200" cy="457200"/>
+          </a:xfrm>
+          <a:prstGeom prst="rect">
+            <a:avLst/>
+          </a:prstGeom>
+          <a:noFill/>
+          <a:ln/>
+        </p:spPr>
+        <p:txBody>
+          <a:bodyPr wrap="square" rtlCol="0" anchor="ctr"/>
+          <a:lstStyle/>
+          <a:p>
+            <a:pPr algn="ctr" indent="0" marL="0">
+              <a:buNone/>
+            </a:pPr>
+            <a:r>
+              <a:rPr lang="en-US" sz="2000" b="1" dirty="0">
+                <a:solidFill>
+                  <a:srgbClr val="FFFFFF"/>
+                </a:solidFill>
+                <a:latin typeface="Cambria" pitchFamily="34" charset="0"/>
+                <a:ea typeface="Cambria" pitchFamily="34" charset="-122"/>
+                <a:cs typeface="Cambria" pitchFamily="34" charset="-120"/>
+              </a:rPr>
+              <a:t>2</a:t>
+            </a:r>
+            <a:endParaRPr lang="en-US" sz="2000" dirty="0"/>
+          </a:p>
+        </p:txBody>
+      </p:sp>
+      <p:sp>
+        <p:nvSpPr>
+          <p:cNvPr id="10" name="Text 8"/>
+          <p:cNvSpPr/>
+          <p:nvPr/>
+        </p:nvSpPr>
+        <p:spPr>
+          <a:xfrm>
+            <a:off x="1371600" y="3483864"/>
+            <a:ext cx="10332720" cy="411480"/>
+          </a:xfrm>
+          <a:prstGeom prst="rect">
+            <a:avLst/>
+          </a:prstGeom>
+          <a:noFill/>
+          <a:ln/>
+        </p:spPr>
+        <p:txBody>
+          <a:bodyPr wrap="square" rtlCol="0" anchor="ctr"/>
+          <a:lstStyle/>
+          <a:p>
+            <a:pPr indent="0" marL="0">
+              <a:buNone/>
+            </a:pPr>
+            <a:r>
+              <a:rPr lang="en-US" sz="1900" b="1" dirty="0">
+                <a:solidFill>
+                  <a:srgbClr val="3F6F5F"/>
+                </a:solidFill>
+                <a:latin typeface="Cambria" pitchFamily="34" charset="0"/>
+                <a:ea typeface="Cambria" pitchFamily="34" charset="-122"/>
+                <a:cs typeface="Cambria" pitchFamily="34" charset="-120"/>
+              </a:rPr>
+              <a:t>Make something real</a:t>
+            </a:r>
+            <a:endParaRPr lang="en-US" sz="1900" dirty="0"/>
+          </a:p>
+        </p:txBody>
+      </p:sp>
+      <p:sp>
+        <p:nvSpPr>
+          <p:cNvPr id="11" name="Text 9"/>
+          <p:cNvSpPr/>
+          <p:nvPr/>
+        </p:nvSpPr>
+        <p:spPr>
+          <a:xfrm>
+            <a:off x="1371600" y="3904488"/>
+            <a:ext cx="10332720" cy="914400"/>
+          </a:xfrm>
+          <a:prstGeom prst="rect">
+            <a:avLst/>
+          </a:prstGeom>
+          <a:noFill/>
+          <a:ln/>
+        </p:spPr>
+        <p:txBody>
+          <a:bodyPr wrap="square" rtlCol="0" anchor="t">
+            <a:spAutoFit/>
+          </a:bodyPr>
+          <a:lstStyle/>
+          <a:p>
+            <a:pPr indent="0" marL="0">
+              <a:lnSpc>
+                <a:spcPct val="112000"/>
+              </a:lnSpc>
+              <a:buNone/>
+            </a:pPr>
+            <a:r>
+              <a:rPr lang="en-US" sz="1450" dirty="0">
+                <a:solidFill>
+                  <a:srgbClr val="1A1A1A"/>
+                </a:solidFill>
+                <a:latin typeface="Calibri" pitchFamily="34" charset="0"/>
+                <a:ea typeface="Calibri" pitchFamily="34" charset="-122"/>
+                <a:cs typeface="Calibri" pitchFamily="34" charset="-120"/>
+              </a:rPr>
+              <a:t>A complete investigation by the first break, before any theory.</a:t>
+            </a:r>
+            <a:endParaRPr lang="en-US" sz="1450" dirty="0"/>
+          </a:p>
+        </p:txBody>
+      </p:sp>
+      <p:sp>
+        <p:nvSpPr>
+          <p:cNvPr id="12" name="Shape 10"/>
+          <p:cNvSpPr/>
+          <p:nvPr/>
+        </p:nvSpPr>
+        <p:spPr>
+          <a:xfrm>
+            <a:off x="640080" y="4983480"/>
+            <a:ext cx="457200" cy="457200"/>
+          </a:xfrm>
+          <a:prstGeom prst="roundRect">
+            <a:avLst>
+              <a:gd name="adj" fmla="val 16000"/>
+            </a:avLst>
+          </a:prstGeom>
+          <a:solidFill>
+            <a:srgbClr val="B9852F"/>
+          </a:solidFill>
+          <a:ln/>
+        </p:spPr>
+      </p:sp>
+      <p:sp>
+        <p:nvSpPr>
+          <p:cNvPr id="13" name="Text 11"/>
+          <p:cNvSpPr/>
+          <p:nvPr/>
+        </p:nvSpPr>
+        <p:spPr>
+          <a:xfrm>
+            <a:off x="640080" y="4983480"/>
+            <a:ext cx="457200" cy="457200"/>
+          </a:xfrm>
+          <a:prstGeom prst="rect">
+            <a:avLst/>
+          </a:prstGeom>
+          <a:noFill/>
+          <a:ln/>
+        </p:spPr>
+        <p:txBody>
+          <a:bodyPr wrap="square" rtlCol="0" anchor="ctr"/>
+          <a:lstStyle/>
+          <a:p>
+            <a:pPr algn="ctr" indent="0" marL="0">
+              <a:buNone/>
+            </a:pPr>
+            <a:r>
+              <a:rPr lang="en-US" sz="2000" b="1" dirty="0">
+                <a:solidFill>
+                  <a:srgbClr val="FFFFFF"/>
+                </a:solidFill>
+                <a:latin typeface="Cambria" pitchFamily="34" charset="0"/>
+                <a:ea typeface="Cambria" pitchFamily="34" charset="-122"/>
+                <a:cs typeface="Cambria" pitchFamily="34" charset="-120"/>
+              </a:rPr>
+              <a:t>3</a:t>
+            </a:r>
+            <a:endParaRPr lang="en-US" sz="2000" dirty="0"/>
+          </a:p>
+        </p:txBody>
+      </p:sp>
+      <p:sp>
+        <p:nvSpPr>
+          <p:cNvPr id="14" name="Text 12"/>
+          <p:cNvSpPr/>
+          <p:nvPr/>
+        </p:nvSpPr>
+        <p:spPr>
+          <a:xfrm>
+            <a:off x="1371600" y="4946904"/>
+            <a:ext cx="10332720" cy="411480"/>
+          </a:xfrm>
+          <a:prstGeom prst="rect">
+            <a:avLst/>
+          </a:prstGeom>
+          <a:noFill/>
+          <a:ln/>
+        </p:spPr>
+        <p:txBody>
+          <a:bodyPr wrap="square" rtlCol="0" anchor="ctr"/>
+          <a:lstStyle/>
+          <a:p>
+            <a:pPr indent="0" marL="0">
+              <a:buNone/>
+            </a:pPr>
+            <a:r>
+              <a:rPr lang="en-US" sz="1900" b="1" dirty="0">
+                <a:solidFill>
+                  <a:srgbClr val="B9852F"/>
+                </a:solidFill>
+                <a:latin typeface="Cambria" pitchFamily="34" charset="0"/>
+                <a:ea typeface="Cambria" pitchFamily="34" charset="-122"/>
+                <a:cs typeface="Cambria" pitchFamily="34" charset="-120"/>
+              </a:rPr>
+              <a:t>Images are culture too</a:t>
+            </a:r>
+            <a:endParaRPr lang="en-US" sz="1900" dirty="0"/>
+          </a:p>
+        </p:txBody>
+      </p:sp>
+      <p:sp>
+        <p:nvSpPr>
+          <p:cNvPr id="15" name="Text 13"/>
+          <p:cNvSpPr/>
+          <p:nvPr/>
+        </p:nvSpPr>
+        <p:spPr>
+          <a:xfrm>
+            <a:off x="1371600" y="5367528"/>
+            <a:ext cx="10332720" cy="914400"/>
+          </a:xfrm>
+          <a:prstGeom prst="rect">
+            <a:avLst/>
+          </a:prstGeom>
+          <a:noFill/>
+          <a:ln/>
+        </p:spPr>
+        <p:txBody>
+          <a:bodyPr wrap="square" rtlCol="0" anchor="t">
+            <a:spAutoFit/>
+          </a:bodyPr>
+          <a:lstStyle/>
+          <a:p>
+            <a:pPr indent="0" marL="0">
+              <a:lnSpc>
+                <a:spcPct val="112000"/>
+              </a:lnSpc>
+              <a:buNone/>
+            </a:pPr>
+            <a:r>
+              <a:rPr lang="en-US" sz="1450" dirty="0">
+                <a:solidFill>
+                  <a:srgbClr val="1A1A1A"/>
+                </a:solidFill>
+                <a:latin typeface="Calibri" pitchFamily="34" charset="0"/>
+                <a:ea typeface="Calibri" pitchFamily="34" charset="-122"/>
+                <a:cs typeface="Calibri" pitchFamily="34" charset="-120"/>
+              </a:rPr>
+              <a:t>A picture is numbers: you counted pixels on day one, and images continue as a co-equal corpus through all ten weeks.</a:t>
+            </a:r>
+            <a:endParaRPr lang="en-US" sz="1450" dirty="0"/>
+          </a:p>
+        </p:txBody>
+      </p:sp>
+    </p:spTree>
+  </p:cSld>
+  <p:clrMapOvr>
+    <a:masterClrMapping/>
+  </p:clrMapOvr>
+</p:sld>
+</file>
+
+<file path=ppt/slides/slide16.xml><?xml version="1.0" encoding="utf-8"?>
+<p:sld xmlns:a="http://schemas.openxmlformats.org/drawingml/2006/main" xmlns:r="http://schemas.openxmlformats.org/officeDocument/2006/relationships" xmlns:p="http://schemas.openxmlformats.org/presentationml/2006/main">
+  <p:cSld name="Slide 16">
     <p:bg>
       <p:bgPr>
         <a:solidFill>
@@ -7711,7 +8188,7 @@
                 <a:ea typeface="Cambria" pitchFamily="34" charset="-122"/>
                 <a:cs typeface="Cambria" pitchFamily="34" charset="-120"/>
               </a:rPr>
-              <a:t>The Drive routine (every week, without exception)</a:t>
+              <a:t>What is data? A CSV, and Drucker's caveat</a:t>
             </a:r>
             <a:endParaRPr lang="en-US" sz="3000" dirty="0"/>
           </a:p>
@@ -7746,7 +8223,7 @@
         <p:spPr>
           <a:xfrm>
             <a:off x="1097280" y="2240280"/>
-            <a:ext cx="10607040" cy="1017270"/>
+            <a:ext cx="10607040" cy="813816"/>
           </a:xfrm>
           <a:prstGeom prst="rect">
             <a:avLst/>
@@ -7767,7 +8244,7 @@
               <a:buNone/>
             </a:pPr>
             <a:r>
-              <a:rPr lang="en-US" sz="1650" dirty="0">
+              <a:rPr lang="en-US" sz="1500" dirty="0">
                 <a:solidFill>
                   <a:srgbClr val="1A1A1A"/>
                 </a:solidFill>
@@ -7775,9 +8252,9 @@
                 <a:ea typeface="Calibri" pitchFamily="34" charset="-122"/>
                 <a:cs typeface="Calibri" pitchFamily="34" charset="-120"/>
               </a:rPr>
-              <a:t>Colab wipes its machine when you idle. Your mounted Drive folder is what survives.</a:t>
-            </a:r>
-            <a:endParaRPr lang="en-US" sz="1650" dirty="0"/>
+              <a:t>Data is anything made countable: rows in a table, words in a headline, numbers in a pixel. The making is the part to watch.</a:t>
+            </a:r>
+            <a:endParaRPr lang="en-US" sz="1500" dirty="0"/>
           </a:p>
         </p:txBody>
       </p:sp>
@@ -7789,7 +8266,7 @@
         </p:nvSpPr>
         <p:spPr>
           <a:xfrm>
-            <a:off x="640080" y="3348990"/>
+            <a:off x="640080" y="3145536"/>
             <a:ext cx="201168" cy="201168"/>
           </a:xfrm>
           <a:prstGeom prst="ellipse">
@@ -7809,8 +8286,8 @@
         </p:nvSpPr>
         <p:spPr>
           <a:xfrm>
-            <a:off x="1097280" y="3257550"/>
-            <a:ext cx="10607040" cy="1017270"/>
+            <a:off x="1097280" y="3054096"/>
+            <a:ext cx="10607040" cy="813816"/>
           </a:xfrm>
           <a:prstGeom prst="rect">
             <a:avLst/>
@@ -7831,7 +8308,7 @@
               <a:buNone/>
             </a:pPr>
             <a:r>
-              <a:rPr lang="en-US" sz="1650" dirty="0">
+              <a:rPr lang="en-US" sz="1500" dirty="0">
                 <a:solidFill>
                   <a:srgbClr val="1A1A1A"/>
                 </a:solidFill>
@@ -7839,9 +8316,9 @@
                 <a:ea typeface="Calibri" pitchFamily="34" charset="-122"/>
                 <a:cs typeface="Calibri" pitchFamily="34" charset="-120"/>
               </a:rPr>
-              <a:t>Copy the notebook to Drive, mount Drive, save everything to the one project folder.</a:t>
-            </a:r>
-            <a:endParaRPr lang="en-US" sz="1650" dirty="0"/>
+              <a:t>A CSV is the plainest container: one row per observation, one column per recorded fact, a first line naming the columns. Ours has four columns and 7,835 rows, and opens in anything.</a:t>
+            </a:r>
+            <a:endParaRPr lang="en-US" sz="1500" dirty="0"/>
           </a:p>
         </p:txBody>
       </p:sp>
@@ -7853,7 +8330,7 @@
         </p:nvSpPr>
         <p:spPr>
           <a:xfrm>
-            <a:off x="640080" y="4366260"/>
+            <a:off x="640080" y="3959352"/>
             <a:ext cx="201168" cy="201168"/>
           </a:xfrm>
           <a:prstGeom prst="ellipse">
@@ -7873,8 +8350,8 @@
         </p:nvSpPr>
         <p:spPr>
           <a:xfrm>
-            <a:off x="1097280" y="4274820"/>
-            <a:ext cx="10607040" cy="1017270"/>
+            <a:off x="1097280" y="3867912"/>
+            <a:ext cx="10607040" cy="813816"/>
           </a:xfrm>
           <a:prstGeom prst="rect">
             <a:avLst/>
@@ -7895,7 +8372,7 @@
               <a:buNone/>
             </a:pPr>
             <a:r>
-              <a:rPr lang="en-US" sz="1650" dirty="0">
+              <a:rPr lang="en-US" sz="1500" dirty="0">
                 <a:solidFill>
                   <a:srgbClr val="1A1A1A"/>
                 </a:solidFill>
@@ -7903,9 +8380,9 @@
                 <a:ea typeface="Calibri" pitchFamily="34" charset="-122"/>
                 <a:cs typeface="Calibri" pitchFamily="34" charset="-120"/>
               </a:rPr>
-              <a:t>Your Week-4 corpus has to be alive in Week 5. This ritual is how.</a:t>
-            </a:r>
-            <a:endParaRPr lang="en-US" sz="1650" dirty="0"/>
+              <a:t>Johanna Drucker's correction: data ("the given") is the wrong word; capta ("the taken") is honest. Nothing is simply given - someone chose what to record.</a:t>
+            </a:r>
+            <a:endParaRPr lang="en-US" sz="1500" dirty="0"/>
           </a:p>
         </p:txBody>
       </p:sp>
@@ -7917,7 +8394,7 @@
         </p:nvSpPr>
         <p:spPr>
           <a:xfrm>
-            <a:off x="640080" y="5383530"/>
+            <a:off x="640080" y="4773168"/>
             <a:ext cx="201168" cy="201168"/>
           </a:xfrm>
           <a:prstGeom prst="ellipse">
@@ -7937,8 +8414,8 @@
         </p:nvSpPr>
         <p:spPr>
           <a:xfrm>
-            <a:off x="1097280" y="5292090"/>
-            <a:ext cx="10607040" cy="1017270"/>
+            <a:off x="1097280" y="4681728"/>
+            <a:ext cx="10607040" cy="813816"/>
           </a:xfrm>
           <a:prstGeom prst="rect">
             <a:avLst/>
@@ -7959,7 +8436,7 @@
               <a:buNone/>
             </a:pPr>
             <a:r>
-              <a:rPr lang="en-US" sz="1650" dirty="0">
+              <a:rPr lang="en-US" sz="1500" dirty="0">
                 <a:solidFill>
                   <a:srgbClr val="1A1A1A"/>
                 </a:solidFill>
@@ -7967,9 +8444,73 @@
                 <a:ea typeface="Calibri" pitchFamily="34" charset="-122"/>
                 <a:cs typeface="Calibri" pitchFamily="34" charset="-120"/>
               </a:rPr>
-              <a:t>Gemini key goes in Colab Secrets. Never pasted into code.</a:t>
-            </a:r>
-            <a:endParaRPr lang="en-US" sz="1650" dirty="0"/>
+              <a:t>The four columns are those choices. There is a name status for the bride and none for the groom; ages but no occupations; no field a same-sex couple could use for most of the period.</a:t>
+            </a:r>
+            <a:endParaRPr lang="en-US" sz="1500" dirty="0"/>
+          </a:p>
+        </p:txBody>
+      </p:sp>
+      <p:sp>
+        <p:nvSpPr>
+          <p:cNvPr id="13" name="Shape 11"/>
+          <p:cNvSpPr/>
+          <p:nvPr/>
+        </p:nvSpPr>
+        <p:spPr>
+          <a:xfrm>
+            <a:off x="640080" y="5586984"/>
+            <a:ext cx="201168" cy="201168"/>
+          </a:xfrm>
+          <a:prstGeom prst="ellipse">
+            <a:avLst/>
+          </a:prstGeom>
+          <a:solidFill>
+            <a:srgbClr val="3F6F5F"/>
+          </a:solidFill>
+          <a:ln/>
+        </p:spPr>
+      </p:sp>
+      <p:sp>
+        <p:nvSpPr>
+          <p:cNvPr id="14" name="Text 12"/>
+          <p:cNvSpPr/>
+          <p:nvPr/>
+        </p:nvSpPr>
+        <p:spPr>
+          <a:xfrm>
+            <a:off x="1097280" y="5495544"/>
+            <a:ext cx="10607040" cy="813816"/>
+          </a:xfrm>
+          <a:prstGeom prst="rect">
+            <a:avLst/>
+          </a:prstGeom>
+          <a:noFill/>
+          <a:ln/>
+        </p:spPr>
+        <p:txBody>
+          <a:bodyPr wrap="square" rtlCol="0" anchor="t">
+            <a:spAutoFit/>
+          </a:bodyPr>
+          <a:lstStyle/>
+          <a:p>
+            <a:pPr indent="0" marL="0">
+              <a:lnSpc>
+                <a:spcPct val="112000"/>
+              </a:lnSpc>
+              <a:buNone/>
+            </a:pPr>
+            <a:r>
+              <a:rPr lang="en-US" sz="1500" dirty="0">
+                <a:solidFill>
+                  <a:srgbClr val="1A1A1A"/>
+                </a:solidFill>
+                <a:latin typeface="Calibri" pitchFamily="34" charset="0"/>
+                <a:ea typeface="Calibri" pitchFamily="34" charset="-122"/>
+                <a:cs typeface="Calibri" pitchFamily="34" charset="-120"/>
+              </a:rPr>
+              <a:t>Discussion, in pairs: what did the makers of this table take, and what did they leave? That question is the course, asked of every corpus from now on.</a:t>
+            </a:r>
+            <a:endParaRPr lang="en-US" sz="1500" dirty="0"/>
           </a:p>
         </p:txBody>
       </p:sp>
@@ -8099,7 +8640,7 @@
                 <a:ea typeface="Cambria" pitchFamily="34" charset="-122"/>
                 <a:cs typeface="Cambria" pitchFamily="34" charset="-120"/>
               </a:rPr>
-              <a:t>When code fails (it will, today, deliberately)</a:t>
+              <a:t>The Drive routine (every week, without exception)</a:t>
             </a:r>
             <a:endParaRPr lang="en-US" sz="3000" dirty="0"/>
           </a:p>
@@ -8163,7 +8704,7 @@
                 <a:ea typeface="Calibri" pitchFamily="34" charset="-122"/>
                 <a:cs typeface="Calibri" pitchFamily="34" charset="-120"/>
               </a:rPr>
-              <a:t>Read the last line of the traceback first. It names the problem.</a:t>
+              <a:t>Colab wipes its machine when you idle. Your mounted Drive folder is what survives.</a:t>
             </a:r>
             <a:endParaRPr lang="en-US" sz="1650" dirty="0"/>
           </a:p>
@@ -8227,7 +8768,7 @@
                 <a:ea typeface="Calibri" pitchFamily="34" charset="-122"/>
                 <a:cs typeface="Calibri" pitchFamily="34" charset="-120"/>
               </a:rPr>
-              <a:t>Paste it to the AI: "this errored, fix it and tell me what went wrong."</a:t>
+              <a:t>Copy the notebook to Drive, mount Drive, save everything to the one project folder.</a:t>
             </a:r>
             <a:endParaRPr lang="en-US" sz="1650" dirty="0"/>
           </a:p>
@@ -8291,7 +8832,7 @@
                 <a:ea typeface="Calibri" pitchFamily="34" charset="-122"/>
                 <a:cs typeface="Calibri" pitchFamily="34" charset="-120"/>
               </a:rPr>
-              <a:t>Try twice, then ask a human. In that order.</a:t>
+              <a:t>Your Week-4 corpus has to be alive in Week 5. This ritual is how.</a:t>
             </a:r>
             <a:endParaRPr lang="en-US" sz="1650" dirty="0"/>
           </a:p>
@@ -8355,7 +8896,7 @@
                 <a:ea typeface="Calibri" pitchFamily="34" charset="-122"/>
                 <a:cs typeface="Calibri" pitchFamily="34" charset="-120"/>
               </a:rPr>
-              <a:t>Keep the cheat sheet at hand. No one memorizes error messages; everyone reads them.</a:t>
+              <a:t>Gemini key goes in Colab Secrets. Never pasted into code.</a:t>
             </a:r>
             <a:endParaRPr lang="en-US" sz="1650" dirty="0"/>
           </a:p>
@@ -8487,7 +9028,7 @@
                 <a:ea typeface="Cambria" pitchFamily="34" charset="-122"/>
                 <a:cs typeface="Cambria" pitchFamily="34" charset="-120"/>
               </a:rPr>
-              <a:t>The after-class half: defining a color, and what every bag loses</a:t>
+              <a:t>When code fails (it will, today, deliberately)</a:t>
             </a:r>
             <a:endParaRPr lang="en-US" sz="3000" dirty="0"/>
           </a:p>
@@ -8551,7 +9092,7 @@
                 <a:ea typeface="Calibri" pitchFamily="34" charset="-122"/>
                 <a:cs typeface="Calibri" pitchFamily="34" charset="-120"/>
               </a:rPr>
-              <a:t>What counts as red? A boundary you set on the hue wheel. Shift it twenty degrees and paintings change category without changing a pixel: defining the ranges is the analysis, the same decision as the stop-word list.</a:t>
+              <a:t>Read the last line of the traceback first. It names the problem.</a:t>
             </a:r>
             <a:endParaRPr lang="en-US" sz="1650" dirty="0"/>
           </a:p>
@@ -8615,7 +9156,7 @@
                 <a:ea typeface="Calibri" pitchFamily="34" charset="-122"/>
                 <a:cs typeface="Calibri" pitchFamily="34" charset="-120"/>
               </a:rPr>
-              <a:t>Two sentences with identical word-bags can mean opposite things: "the critics loved it, the public did not" and its reversal count the same. Order, negation, and who-did-what are the casualties.</a:t>
+              <a:t>Paste it to the AI: "this errored, fix it and tell me what went wrong."</a:t>
             </a:r>
             <a:endParaRPr lang="en-US" sz="1650" dirty="0"/>
           </a:p>
@@ -8679,7 +9220,7 @@
                 <a:ea typeface="Calibri" pitchFamily="34" charset="-122"/>
                 <a:cs typeface="Calibri" pitchFamily="34" charset="-120"/>
               </a:rPr>
-              <a:t>A painting and its shuffled pixels share the brightness, the average color, and the palette. Composition is to images what word order is to sentences.</a:t>
+              <a:t>Try twice, then ask a human. In that order.</a:t>
             </a:r>
             <a:endParaRPr lang="en-US" sz="1650" dirty="0"/>
           </a:p>
@@ -8743,7 +9284,7 @@
                 <a:ea typeface="Calibri" pitchFamily="34" charset="-122"/>
                 <a:cs typeface="Calibri" pitchFamily="34" charset="-120"/>
               </a:rPr>
-              <a:t>The loss is the trade counting makes for scale. Name it on day one; Week 5's embeddings exist to recover some of it.</a:t>
+              <a:t>Keep the cheat sheet at hand. No one memorizes error messages; everyone reads them.</a:t>
             </a:r>
             <a:endParaRPr lang="en-US" sz="1650" dirty="0"/>
           </a:p>

--- a/slides/pptx/week-01.pptx
+++ b/slides/pptx/week-01.pptx
@@ -21,9 +21,10 @@
     <p:sldId id="269" r:id="rId15"/>
     <p:sldId id="270" r:id="rId16"/>
     <p:sldId id="271" r:id="rId17"/>
+    <p:sldId id="272" r:id="rId18"/>
   </p:sldIdLst>
   <p:notesMasterIdLst>
-    <p:notesMasterId r:id="rId18"/>
+    <p:notesMasterId r:id="rId19"/>
   </p:notesMasterIdLst>
   <p:sldSz cx="12191695" cy="6858000"/>
   <p:notesSz cx="6858000" cy="12191695"/>
@@ -1175,6 +1176,94 @@
 </p:notes>
 </file>
 
+<file path=ppt/notesSlides/notesSlide17.xml><?xml version="1.0" encoding="utf-8"?>
+<p:notes xmlns:a="http://schemas.openxmlformats.org/drawingml/2006/main" xmlns:r="http://schemas.openxmlformats.org/officeDocument/2006/relationships" xmlns:p="http://schemas.openxmlformats.org/presentationml/2006/main">
+  <p:cSld>
+    <p:spTree>
+      <p:nvGrpSpPr>
+        <p:cNvPr id="1" name=""/>
+        <p:cNvGrpSpPr/>
+        <p:nvPr/>
+      </p:nvGrpSpPr>
+      <p:grpSpPr>
+        <a:xfrm>
+          <a:off x="0" y="0"/>
+          <a:ext cx="0" cy="0"/>
+          <a:chOff x="0" y="0"/>
+          <a:chExt cx="0" cy="0"/>
+        </a:xfrm>
+      </p:grpSpPr>
+      <p:sp>
+        <p:nvSpPr>
+          <p:cNvPr id="2" name="Slide Image Placeholder 1"/>
+          <p:cNvSpPr>
+            <a:spLocks noGrp="1" noRot="1" noChangeAspect="1"/>
+          </p:cNvSpPr>
+          <p:nvPr>
+            <p:ph type="sldImg"/>
+          </p:nvPr>
+        </p:nvSpPr>
+        <p:spPr/>
+      </p:sp>
+      <p:sp>
+        <p:nvSpPr>
+          <p:cNvPr id="3" name="Notes Placeholder 2"/>
+          <p:cNvSpPr>
+            <a:spLocks noGrp="1"/>
+          </p:cNvSpPr>
+          <p:nvPr>
+            <p:ph type="body" idx="1"/>
+          </p:nvPr>
+        </p:nvSpPr>
+        <p:spPr/>
+        <p:txBody>
+          <a:bodyPr/>
+          <a:lstStyle/>
+          <a:p>
+            <a:r>
+              <a:rPr lang="en-US" dirty="0"/>
+              <a:t/>
+            </a:r>
+            <a:endParaRPr lang="en-US" dirty="0"/>
+          </a:p>
+        </p:txBody>
+      </p:sp>
+      <p:sp>
+        <p:nvSpPr>
+          <p:cNvPr id="4" name="Slide Number Placeholder 3"/>
+          <p:cNvSpPr>
+            <a:spLocks noGrp="1"/>
+          </p:cNvSpPr>
+          <p:nvPr>
+            <p:ph type="sldNum" sz="quarter" idx="10"/>
+          </p:nvPr>
+        </p:nvSpPr>
+        <p:spPr/>
+        <p:txBody>
+          <a:bodyPr/>
+          <a:lstStyle/>
+          <a:p>
+            <a:fld id="{F7021451-1387-4CA6-816F-3879F97B5CBC}" type="slidenum">
+              <a:rPr lang="en-US"/>
+              <a:t>17</a:t>
+            </a:fld>
+            <a:endParaRPr lang="en-US"/>
+          </a:p>
+        </p:txBody>
+      </p:sp>
+    </p:spTree>
+    <p:extLst>
+      <p:ext uri="{BB962C8B-B14F-4D97-AF65-F5344CB8AC3E}">
+        <p14:creationId xmlns:p14="http://schemas.microsoft.com/office/powerpoint/2010/main" val="1024086991"/>
+      </p:ext>
+    </p:extLst>
+  </p:cSld>
+  <p:clrMapOvr>
+    <a:masterClrMapping/>
+  </p:clrMapOvr>
+</p:notes>
+</file>
+
 <file path=ppt/notesSlides/notesSlide2.xml><?xml version="1.0" encoding="utf-8"?>
 <p:notes xmlns:a="http://schemas.openxmlformats.org/drawingml/2006/main" xmlns:r="http://schemas.openxmlformats.org/officeDocument/2006/relationships" xmlns:p="http://schemas.openxmlformats.org/presentationml/2006/main">
   <p:cSld>
@@ -3243,7 +3332,7 @@
                 <a:ea typeface="Cambria" pitchFamily="34" charset="-122"/>
                 <a:cs typeface="Cambria" pitchFamily="34" charset="-120"/>
               </a:rPr>
-              <a:t>Counting, three shapes</a:t>
+              <a:t>Deep-research tools: one role, four rules</a:t>
             </a:r>
             <a:endParaRPr lang="en-US" sz="3000" dirty="0"/>
           </a:p>
@@ -3278,7 +3367,7 @@
         <p:spPr>
           <a:xfrm>
             <a:off x="1097280" y="2240280"/>
-            <a:ext cx="10607040" cy="1017270"/>
+            <a:ext cx="10607040" cy="813816"/>
           </a:xfrm>
           <a:prstGeom prst="rect">
             <a:avLst/>
@@ -3299,7 +3388,7 @@
               <a:buNone/>
             </a:pPr>
             <a:r>
-              <a:rPr lang="en-US" sz="1650" dirty="0">
+              <a:rPr lang="en-US" sz="1500" dirty="0">
                 <a:solidFill>
                   <a:srgbClr val="1A1A1A"/>
                 </a:solidFill>
@@ -3307,9 +3396,9 @@
                 <a:ea typeface="Calibri" pitchFamily="34" charset="-122"/>
                 <a:cs typeface="Calibri" pitchFamily="34" charset="-120"/>
               </a:rPr>
-              <a:t>Rows: what share of brides kept their name, year by year. One groupby, one chart.</a:t>
-            </a:r>
-            <a:endParaRPr lang="en-US" sz="1650" dirty="0"/>
+              <a:t>AI deep-research tools browse for an hour and return a long, cited report. In this course they have exactly one role: the scout, finding datasets and prior work before Week 4's commitment.</a:t>
+            </a:r>
+            <a:endParaRPr lang="en-US" sz="1500" dirty="0"/>
           </a:p>
         </p:txBody>
       </p:sp>
@@ -3321,7 +3410,7 @@
         </p:nvSpPr>
         <p:spPr>
           <a:xfrm>
-            <a:off x="640080" y="3348990"/>
+            <a:off x="640080" y="3145536"/>
             <a:ext cx="201168" cy="201168"/>
           </a:xfrm>
           <a:prstGeom prst="ellipse">
@@ -3341,8 +3430,8 @@
         </p:nvSpPr>
         <p:spPr>
           <a:xfrm>
-            <a:off x="1097280" y="3257550"/>
-            <a:ext cx="10607040" cy="1017270"/>
+            <a:off x="1097280" y="3054096"/>
+            <a:ext cx="10607040" cy="813816"/>
           </a:xfrm>
           <a:prstGeom prst="rect">
             <a:avLst/>
@@ -3363,7 +3452,7 @@
               <a:buNone/>
             </a:pPr>
             <a:r>
-              <a:rPr lang="en-US" sz="1650" dirty="0">
+              <a:rPr lang="en-US" sz="1500" dirty="0">
                 <a:solidFill>
                   <a:srgbClr val="1A1A1A"/>
                 </a:solidFill>
@@ -3371,9 +3460,9 @@
                 <a:ea typeface="Calibri" pitchFamily="34" charset="-122"/>
                 <a:cs typeface="Calibri" pitchFamily="34" charset="-120"/>
               </a:rPr>
-              <a:t>Words: the top words of a lyric are "the, and, you" until you remove stop-words. That removal is your first modeling choice.</a:t>
-            </a:r>
-            <a:endParaRPr lang="en-US" sz="1650" dirty="0"/>
+              <a:t>Rule one: every citation is a lead, not a source. Reports cite real, wrong, and nonexistent works with identical confidence; nothing enters your work unread.</a:t>
+            </a:r>
+            <a:endParaRPr lang="en-US" sz="1500" dirty="0"/>
           </a:p>
         </p:txBody>
       </p:sp>
@@ -3385,7 +3474,7 @@
         </p:nvSpPr>
         <p:spPr>
           <a:xfrm>
-            <a:off x="640080" y="4366260"/>
+            <a:off x="640080" y="3959352"/>
             <a:ext cx="201168" cy="201168"/>
           </a:xfrm>
           <a:prstGeom prst="ellipse">
@@ -3405,8 +3494,8 @@
         </p:nvSpPr>
         <p:spPr>
           <a:xfrm>
-            <a:off x="1097280" y="4274820"/>
-            <a:ext cx="10607040" cy="1017270"/>
+            <a:off x="1097280" y="3867912"/>
+            <a:ext cx="10607040" cy="813816"/>
           </a:xfrm>
           <a:prstGeom prst="rect">
             <a:avLst/>
@@ -3427,7 +3516,7 @@
               <a:buNone/>
             </a:pPr>
             <a:r>
-              <a:rPr lang="en-US" sz="1650" dirty="0">
+              <a:rPr lang="en-US" sz="1500" dirty="0">
                 <a:solidFill>
                   <a:srgbClr val="1A1A1A"/>
                 </a:solidFill>
@@ -3435,9 +3524,9 @@
                 <a:ea typeface="Calibri" pitchFamily="34" charset="-122"/>
                 <a:cs typeface="Calibri" pitchFamily="34" charset="-120"/>
               </a:rPr>
-              <a:t>Pixels: rank 200 Met thumbnails darkest to brightest from average luminance.</a:t>
-            </a:r>
-            <a:endParaRPr lang="en-US" sz="1650" dirty="0"/>
+              <a:t>Rule two: verify dataset access yourself. "Publicly available" in a report means someone once said so; the corpus-existence proof (50 loadable rows, Week 3's sketch) is the standard.</a:t>
+            </a:r>
+            <a:endParaRPr lang="en-US" sz="1500" dirty="0"/>
           </a:p>
         </p:txBody>
       </p:sp>
@@ -3449,7 +3538,7 @@
         </p:nvSpPr>
         <p:spPr>
           <a:xfrm>
-            <a:off x="640080" y="5383530"/>
+            <a:off x="640080" y="4773168"/>
             <a:ext cx="201168" cy="201168"/>
           </a:xfrm>
           <a:prstGeom prst="ellipse">
@@ -3469,8 +3558,8 @@
         </p:nvSpPr>
         <p:spPr>
           <a:xfrm>
-            <a:off x="1097280" y="5292090"/>
-            <a:ext cx="10607040" cy="1017270"/>
+            <a:off x="1097280" y="4681728"/>
+            <a:ext cx="10607040" cy="813816"/>
           </a:xfrm>
           <a:prstGeom prst="rect">
             <a:avLst/>
@@ -3491,7 +3580,7 @@
               <a:buNone/>
             </a:pPr>
             <a:r>
-              <a:rPr lang="en-US" sz="1650" dirty="0">
+              <a:rPr lang="en-US" sz="1500" dirty="0">
                 <a:solidFill>
                   <a:srgbClr val="1A1A1A"/>
                 </a:solidFill>
@@ -3499,9 +3588,73 @@
                 <a:ea typeface="Calibri" pitchFamily="34" charset="-122"/>
                 <a:cs typeface="Calibri" pitchFamily="34" charset="-120"/>
               </a:rPr>
-              <a:t>The same technique three times, each containing a decision.</a:t>
-            </a:r>
-            <a:endParaRPr lang="en-US" sz="1650" dirty="0"/>
+              <a:t>Rule three: the report is never a source. Cite what you read, not the tool that found it.</a:t>
+            </a:r>
+            <a:endParaRPr lang="en-US" sz="1500" dirty="0"/>
+          </a:p>
+        </p:txBody>
+      </p:sp>
+      <p:sp>
+        <p:nvSpPr>
+          <p:cNvPr id="13" name="Shape 11"/>
+          <p:cNvSpPr/>
+          <p:nvPr/>
+        </p:nvSpPr>
+        <p:spPr>
+          <a:xfrm>
+            <a:off x="640080" y="5586984"/>
+            <a:ext cx="201168" cy="201168"/>
+          </a:xfrm>
+          <a:prstGeom prst="ellipse">
+            <a:avLst/>
+          </a:prstGeom>
+          <a:solidFill>
+            <a:srgbClr val="3F6F5F"/>
+          </a:solidFill>
+          <a:ln/>
+        </p:spPr>
+      </p:sp>
+      <p:sp>
+        <p:nvSpPr>
+          <p:cNvPr id="14" name="Text 12"/>
+          <p:cNvSpPr/>
+          <p:nvPr/>
+        </p:nvSpPr>
+        <p:spPr>
+          <a:xfrm>
+            <a:off x="1097280" y="5495544"/>
+            <a:ext cx="10607040" cy="813816"/>
+          </a:xfrm>
+          <a:prstGeom prst="rect">
+            <a:avLst/>
+          </a:prstGeom>
+          <a:noFill/>
+          <a:ln/>
+        </p:spPr>
+        <p:txBody>
+          <a:bodyPr wrap="square" rtlCol="0" anchor="t">
+            <a:spAutoFit/>
+          </a:bodyPr>
+          <a:lstStyle/>
+          <a:p>
+            <a:pPr indent="0" marL="0">
+              <a:lnSpc>
+                <a:spcPct val="112000"/>
+              </a:lnSpc>
+              <a:buNone/>
+            </a:pPr>
+            <a:r>
+              <a:rPr lang="en-US" sz="1500" dirty="0">
+                <a:solidFill>
+                  <a:srgbClr val="1A1A1A"/>
+                </a:solidFill>
+                <a:latin typeface="Calibri" pitchFamily="34" charset="0"/>
+                <a:ea typeface="Calibri" pitchFamily="34" charset="-122"/>
+                <a:cs typeface="Calibri" pitchFamily="34" charset="-120"/>
+              </a:rPr>
+              <a:t>Rule four: scout, then close the tool. Your question, your reading, and your interpretation cannot be delegated - the same boundary as with code.</a:t>
+            </a:r>
+            <a:endParaRPr lang="en-US" sz="1500" dirty="0"/>
           </a:p>
         </p:txBody>
       </p:sp>
@@ -3539,14 +3692,34 @@
       </p:grpSpPr>
       <p:sp>
         <p:nvSpPr>
-          <p:cNvPr id="2" name="Text 0"/>
-          <p:cNvSpPr/>
-          <p:nvPr/>
-        </p:nvSpPr>
-        <p:spPr>
-          <a:xfrm>
-            <a:off x="640080" y="731520"/>
-            <a:ext cx="10058400" cy="731520"/>
+          <p:cNvPr id="2" name="Shape 0"/>
+          <p:cNvSpPr/>
+          <p:nvPr/>
+        </p:nvSpPr>
+        <p:spPr>
+          <a:xfrm>
+            <a:off x="0" y="0"/>
+            <a:ext cx="164592" cy="6858000"/>
+          </a:xfrm>
+          <a:prstGeom prst="rect">
+            <a:avLst/>
+          </a:prstGeom>
+          <a:solidFill>
+            <a:srgbClr val="B9852F"/>
+          </a:solidFill>
+          <a:ln/>
+        </p:spPr>
+      </p:sp>
+      <p:sp>
+        <p:nvSpPr>
+          <p:cNvPr id="3" name="Text 1"/>
+          <p:cNvSpPr/>
+          <p:nvPr/>
+        </p:nvSpPr>
+        <p:spPr>
+          <a:xfrm>
+            <a:off x="640080" y="640080"/>
+            <a:ext cx="10058400" cy="320040"/>
           </a:xfrm>
           <a:prstGeom prst="rect">
             <a:avLst/>
@@ -3556,6 +3729,47 @@
         </p:spPr>
         <p:txBody>
           <a:bodyPr wrap="square" rtlCol="0" anchor="ctr"/>
+          <a:lstStyle/>
+          <a:p>
+            <a:pPr indent="0" marL="0">
+              <a:buNone/>
+            </a:pPr>
+            <a:r>
+              <a:rPr lang="en-US" sz="1200" b="1" spc="300" kern="0" dirty="0">
+                <a:solidFill>
+                  <a:srgbClr val="B9852F"/>
+                </a:solidFill>
+                <a:latin typeface="Calibri" pitchFamily="34" charset="0"/>
+                <a:ea typeface="Calibri" pitchFamily="34" charset="-122"/>
+                <a:cs typeface="Calibri" pitchFamily="34" charset="-120"/>
+              </a:rPr>
+              <a:t>WEEK 1 · KEY POINTS</a:t>
+            </a:r>
+            <a:endParaRPr lang="en-US" sz="1200" dirty="0"/>
+          </a:p>
+        </p:txBody>
+      </p:sp>
+      <p:sp>
+        <p:nvSpPr>
+          <p:cNvPr id="4" name="Text 2"/>
+          <p:cNvSpPr/>
+          <p:nvPr/>
+        </p:nvSpPr>
+        <p:spPr>
+          <a:xfrm>
+            <a:off x="640080" y="1005840"/>
+            <a:ext cx="10881360" cy="914400"/>
+          </a:xfrm>
+          <a:prstGeom prst="rect">
+            <a:avLst/>
+          </a:prstGeom>
+          <a:noFill/>
+          <a:ln/>
+        </p:spPr>
+        <p:txBody>
+          <a:bodyPr wrap="square" rtlCol="0" anchor="t">
+            <a:spAutoFit/>
+          </a:bodyPr>
           <a:lstStyle/>
           <a:p>
             <a:pPr indent="0" marL="0">
@@ -3570,7 +3784,7 @@
                 <a:ea typeface="Cambria" pitchFamily="34" charset="-122"/>
                 <a:cs typeface="Cambria" pitchFamily="34" charset="-120"/>
               </a:rPr>
-              <a:t>Three modes today</a:t>
+              <a:t>Counting, three shapes</a:t>
             </a:r>
             <a:endParaRPr lang="en-US" sz="3000" dirty="0"/>
           </a:p>
@@ -3578,134 +3792,98 @@
       </p:sp>
       <p:sp>
         <p:nvSpPr>
-          <p:cNvPr id="3" name="Text 1"/>
-          <p:cNvSpPr/>
-          <p:nvPr/>
-        </p:nvSpPr>
-        <p:spPr>
-          <a:xfrm>
-            <a:off x="640080" y="1417320"/>
-            <a:ext cx="10058400" cy="365760"/>
-          </a:xfrm>
-          <a:prstGeom prst="rect">
-            <a:avLst/>
-          </a:prstGeom>
-          <a:noFill/>
-          <a:ln/>
-        </p:spPr>
-        <p:txBody>
-          <a:bodyPr wrap="square" rtlCol="0" anchor="ctr"/>
-          <a:lstStyle/>
-          <a:p>
-            <a:pPr indent="0" marL="0">
-              <a:buNone/>
-            </a:pPr>
-            <a:r>
-              <a:rPr lang="en-US" sz="1400" i="1" dirty="0">
-                <a:solidFill>
-                  <a:srgbClr val="6B6B63"/>
+          <p:cNvPr id="5" name="Shape 3"/>
+          <p:cNvSpPr/>
+          <p:nvPr/>
+        </p:nvSpPr>
+        <p:spPr>
+          <a:xfrm>
+            <a:off x="640080" y="2331720"/>
+            <a:ext cx="201168" cy="201168"/>
+          </a:xfrm>
+          <a:prstGeom prst="ellipse">
+            <a:avLst/>
+          </a:prstGeom>
+          <a:solidFill>
+            <a:srgbClr val="7A3B2E"/>
+          </a:solidFill>
+          <a:ln/>
+        </p:spPr>
+      </p:sp>
+      <p:sp>
+        <p:nvSpPr>
+          <p:cNvPr id="6" name="Text 4"/>
+          <p:cNvSpPr/>
+          <p:nvPr/>
+        </p:nvSpPr>
+        <p:spPr>
+          <a:xfrm>
+            <a:off x="1097280" y="2240280"/>
+            <a:ext cx="10607040" cy="1017270"/>
+          </a:xfrm>
+          <a:prstGeom prst="rect">
+            <a:avLst/>
+          </a:prstGeom>
+          <a:noFill/>
+          <a:ln/>
+        </p:spPr>
+        <p:txBody>
+          <a:bodyPr wrap="square" rtlCol="0" anchor="t">
+            <a:spAutoFit/>
+          </a:bodyPr>
+          <a:lstStyle/>
+          <a:p>
+            <a:pPr indent="0" marL="0">
+              <a:lnSpc>
+                <a:spcPct val="112000"/>
+              </a:lnSpc>
+              <a:buNone/>
+            </a:pPr>
+            <a:r>
+              <a:rPr lang="en-US" sz="1650" dirty="0">
+                <a:solidFill>
+                  <a:srgbClr val="1A1A1A"/>
                 </a:solidFill>
                 <a:latin typeface="Calibri" pitchFamily="34" charset="0"/>
                 <a:ea typeface="Calibri" pitchFamily="34" charset="-122"/>
                 <a:cs typeface="Calibri" pitchFamily="34" charset="-120"/>
               </a:rPr>
-              <a:t>about a third of the session each</a:t>
-            </a:r>
-            <a:endParaRPr lang="en-US" sz="1400" dirty="0"/>
-          </a:p>
-        </p:txBody>
-      </p:sp>
-      <p:sp>
-        <p:nvSpPr>
-          <p:cNvPr id="4" name="Shape 2"/>
-          <p:cNvSpPr/>
-          <p:nvPr/>
-        </p:nvSpPr>
-        <p:spPr>
-          <a:xfrm>
-            <a:off x="640080" y="2194560"/>
-            <a:ext cx="3383280" cy="3291840"/>
-          </a:xfrm>
-          <a:prstGeom prst="roundRect">
-            <a:avLst>
-              <a:gd name="adj" fmla="val 3333"/>
-            </a:avLst>
-          </a:prstGeom>
-          <a:solidFill>
-            <a:srgbClr val="F4EEE8"/>
-          </a:solidFill>
-          <a:ln/>
-        </p:spPr>
-      </p:sp>
-      <p:sp>
-        <p:nvSpPr>
-          <p:cNvPr id="5" name="Shape 3"/>
-          <p:cNvSpPr/>
-          <p:nvPr/>
-        </p:nvSpPr>
-        <p:spPr>
-          <a:xfrm>
-            <a:off x="1051560" y="2606040"/>
-            <a:ext cx="548640" cy="548640"/>
+              <a:t>Rows: what share of brides kept their name, year by year. One groupby, one chart.</a:t>
+            </a:r>
+            <a:endParaRPr lang="en-US" sz="1650" dirty="0"/>
+          </a:p>
+        </p:txBody>
+      </p:sp>
+      <p:sp>
+        <p:nvSpPr>
+          <p:cNvPr id="7" name="Shape 5"/>
+          <p:cNvSpPr/>
+          <p:nvPr/>
+        </p:nvSpPr>
+        <p:spPr>
+          <a:xfrm>
+            <a:off x="640080" y="3348990"/>
+            <a:ext cx="201168" cy="201168"/>
           </a:xfrm>
           <a:prstGeom prst="ellipse">
             <a:avLst/>
           </a:prstGeom>
           <a:solidFill>
-            <a:srgbClr val="7A3B2E"/>
-          </a:solidFill>
-          <a:ln/>
-        </p:spPr>
-      </p:sp>
-      <p:sp>
-        <p:nvSpPr>
-          <p:cNvPr id="6" name="Text 4"/>
-          <p:cNvSpPr/>
-          <p:nvPr/>
-        </p:nvSpPr>
-        <p:spPr>
-          <a:xfrm>
-            <a:off x="1005840" y="3383280"/>
-            <a:ext cx="2651760" cy="548640"/>
-          </a:xfrm>
-          <a:prstGeom prst="rect">
-            <a:avLst/>
-          </a:prstGeom>
-          <a:noFill/>
-          <a:ln/>
-        </p:spPr>
-        <p:txBody>
-          <a:bodyPr wrap="square" rtlCol="0" anchor="ctr"/>
-          <a:lstStyle/>
-          <a:p>
-            <a:pPr indent="0" marL="0">
-              <a:buNone/>
-            </a:pPr>
-            <a:r>
-              <a:rPr lang="en-US" sz="2100" b="1" dirty="0">
-                <a:solidFill>
-                  <a:srgbClr val="1A1A1A"/>
-                </a:solidFill>
-                <a:latin typeface="Cambria" pitchFamily="34" charset="0"/>
-                <a:ea typeface="Cambria" pitchFamily="34" charset="-122"/>
-                <a:cs typeface="Cambria" pitchFamily="34" charset="-120"/>
-              </a:rPr>
-              <a:t>Lecture / demo</a:t>
-            </a:r>
-            <a:endParaRPr lang="en-US" sz="2100" dirty="0"/>
-          </a:p>
-        </p:txBody>
-      </p:sp>
-      <p:sp>
-        <p:nvSpPr>
-          <p:cNvPr id="7" name="Text 5"/>
-          <p:cNvSpPr/>
-          <p:nvPr/>
-        </p:nvSpPr>
-        <p:spPr>
-          <a:xfrm>
-            <a:off x="1005840" y="3977640"/>
-            <a:ext cx="2651760" cy="1371600"/>
+            <a:srgbClr val="3F6F5F"/>
+          </a:solidFill>
+          <a:ln/>
+        </p:spPr>
+      </p:sp>
+      <p:sp>
+        <p:nvSpPr>
+          <p:cNvPr id="8" name="Text 6"/>
+          <p:cNvSpPr/>
+          <p:nvPr/>
+        </p:nvSpPr>
+        <p:spPr>
+          <a:xfrm>
+            <a:off x="1097280" y="3257550"/>
+            <a:ext cx="10607040" cy="1017270"/>
           </a:xfrm>
           <a:prstGeom prst="rect">
             <a:avLst/>
@@ -3721,12 +3899,12 @@
           <a:p>
             <a:pPr indent="0" marL="0">
               <a:lnSpc>
-                <a:spcPct val="115000"/>
+                <a:spcPct val="112000"/>
               </a:lnSpc>
               <a:buNone/>
             </a:pPr>
             <a:r>
-              <a:rPr lang="en-US" sz="1500" dirty="0">
+              <a:rPr lang="en-US" sz="1650" dirty="0">
                 <a:solidFill>
                   <a:srgbClr val="1A1A1A"/>
                 </a:solidFill>
@@ -3734,33 +3912,11 @@
                 <a:ea typeface="Calibri" pitchFamily="34" charset="-122"/>
                 <a:cs typeface="Calibri" pitchFamily="34" charset="-120"/>
               </a:rPr>
-              <a:t>Counting: rows, words, pixels</a:t>
-            </a:r>
-            <a:endParaRPr lang="en-US" sz="1500" dirty="0"/>
-          </a:p>
-        </p:txBody>
-      </p:sp>
-      <p:sp>
-        <p:nvSpPr>
-          <p:cNvPr id="8" name="Shape 6"/>
-          <p:cNvSpPr/>
-          <p:nvPr/>
-        </p:nvSpPr>
-        <p:spPr>
-          <a:xfrm>
-            <a:off x="4526280" y="2194560"/>
-            <a:ext cx="3383280" cy="3291840"/>
-          </a:xfrm>
-          <a:prstGeom prst="roundRect">
-            <a:avLst>
-              <a:gd name="adj" fmla="val 3333"/>
-            </a:avLst>
-          </a:prstGeom>
-          <a:solidFill>
-            <a:srgbClr val="F4EEE8"/>
-          </a:solidFill>
-          <a:ln/>
-        </p:spPr>
+              <a:t>Words: the top words of a lyric are "the, and, you" until you remove stop-words. That removal is your first modeling choice.</a:t>
+            </a:r>
+            <a:endParaRPr lang="en-US" sz="1650" dirty="0"/>
+          </a:p>
+        </p:txBody>
       </p:sp>
       <p:sp>
         <p:nvSpPr>
@@ -3770,14 +3926,14 @@
         </p:nvSpPr>
         <p:spPr>
           <a:xfrm>
-            <a:off x="4937760" y="2606040"/>
-            <a:ext cx="548640" cy="548640"/>
+            <a:off x="640080" y="4366260"/>
+            <a:ext cx="201168" cy="201168"/>
           </a:xfrm>
           <a:prstGeom prst="ellipse">
             <a:avLst/>
           </a:prstGeom>
           <a:solidFill>
-            <a:srgbClr val="3F6F5F"/>
+            <a:srgbClr val="B9852F"/>
           </a:solidFill>
           <a:ln/>
         </p:spPr>
@@ -3790,47 +3946,8 @@
         </p:nvSpPr>
         <p:spPr>
           <a:xfrm>
-            <a:off x="4892040" y="3383280"/>
-            <a:ext cx="2651760" cy="548640"/>
-          </a:xfrm>
-          <a:prstGeom prst="rect">
-            <a:avLst/>
-          </a:prstGeom>
-          <a:noFill/>
-          <a:ln/>
-        </p:spPr>
-        <p:txBody>
-          <a:bodyPr wrap="square" rtlCol="0" anchor="ctr"/>
-          <a:lstStyle/>
-          <a:p>
-            <a:pPr indent="0" marL="0">
-              <a:buNone/>
-            </a:pPr>
-            <a:r>
-              <a:rPr lang="en-US" sz="2100" b="1" dirty="0">
-                <a:solidFill>
-                  <a:srgbClr val="1A1A1A"/>
-                </a:solidFill>
-                <a:latin typeface="Cambria" pitchFamily="34" charset="0"/>
-                <a:ea typeface="Cambria" pitchFamily="34" charset="-122"/>
-                <a:cs typeface="Cambria" pitchFamily="34" charset="-120"/>
-              </a:rPr>
-              <a:t>Workshop</a:t>
-            </a:r>
-            <a:endParaRPr lang="en-US" sz="2100" dirty="0"/>
-          </a:p>
-        </p:txBody>
-      </p:sp>
-      <p:sp>
-        <p:nvSpPr>
-          <p:cNvPr id="11" name="Text 9"/>
-          <p:cNvSpPr/>
-          <p:nvPr/>
-        </p:nvSpPr>
-        <p:spPr>
-          <a:xfrm>
-            <a:off x="4892040" y="3977640"/>
-            <a:ext cx="2651760" cy="1371600"/>
+            <a:off x="1097280" y="4274820"/>
+            <a:ext cx="10607040" cy="1017270"/>
           </a:xfrm>
           <a:prstGeom prst="rect">
             <a:avLst/>
@@ -3846,12 +3963,12 @@
           <a:p>
             <a:pPr indent="0" marL="0">
               <a:lnSpc>
-                <a:spcPct val="115000"/>
+                <a:spcPct val="112000"/>
               </a:lnSpc>
               <a:buNone/>
             </a:pPr>
             <a:r>
-              <a:rPr lang="en-US" sz="1500" dirty="0">
+              <a:rPr lang="en-US" sz="1650" dirty="0">
                 <a:solidFill>
                   <a:srgbClr val="1A1A1A"/>
                 </a:solidFill>
@@ -3859,103 +3976,42 @@
                 <a:ea typeface="Calibri" pitchFamily="34" charset="-122"/>
                 <a:cs typeface="Calibri" pitchFamily="34" charset="-120"/>
               </a:rPr>
-              <a:t>Build hands-on on your own data.</a:t>
-            </a:r>
-            <a:endParaRPr lang="en-US" sz="1500" dirty="0"/>
-          </a:p>
-        </p:txBody>
-      </p:sp>
-      <p:sp>
-        <p:nvSpPr>
-          <p:cNvPr id="12" name="Shape 10"/>
-          <p:cNvSpPr/>
-          <p:nvPr/>
-        </p:nvSpPr>
-        <p:spPr>
-          <a:xfrm>
-            <a:off x="8412480" y="2194560"/>
-            <a:ext cx="3383280" cy="3291840"/>
-          </a:xfrm>
-          <a:prstGeom prst="roundRect">
-            <a:avLst>
-              <a:gd name="adj" fmla="val 3333"/>
-            </a:avLst>
-          </a:prstGeom>
-          <a:solidFill>
-            <a:srgbClr val="F4EEE8"/>
-          </a:solidFill>
-          <a:ln/>
-        </p:spPr>
-      </p:sp>
-      <p:sp>
-        <p:nvSpPr>
-          <p:cNvPr id="13" name="Shape 11"/>
-          <p:cNvSpPr/>
-          <p:nvPr/>
-        </p:nvSpPr>
-        <p:spPr>
-          <a:xfrm>
-            <a:off x="8823960" y="2606040"/>
-            <a:ext cx="548640" cy="548640"/>
+              <a:t>Pixels: rank 200 Met thumbnails darkest to brightest from average luminance.</a:t>
+            </a:r>
+            <a:endParaRPr lang="en-US" sz="1650" dirty="0"/>
+          </a:p>
+        </p:txBody>
+      </p:sp>
+      <p:sp>
+        <p:nvSpPr>
+          <p:cNvPr id="11" name="Shape 9"/>
+          <p:cNvSpPr/>
+          <p:nvPr/>
+        </p:nvSpPr>
+        <p:spPr>
+          <a:xfrm>
+            <a:off x="640080" y="5383530"/>
+            <a:ext cx="201168" cy="201168"/>
           </a:xfrm>
           <a:prstGeom prst="ellipse">
             <a:avLst/>
           </a:prstGeom>
           <a:solidFill>
-            <a:srgbClr val="B9852F"/>
-          </a:solidFill>
-          <a:ln/>
-        </p:spPr>
-      </p:sp>
-      <p:sp>
-        <p:nvSpPr>
-          <p:cNvPr id="14" name="Text 12"/>
-          <p:cNvSpPr/>
-          <p:nvPr/>
-        </p:nvSpPr>
-        <p:spPr>
-          <a:xfrm>
-            <a:off x="8778240" y="3383280"/>
-            <a:ext cx="2651760" cy="548640"/>
-          </a:xfrm>
-          <a:prstGeom prst="rect">
-            <a:avLst/>
-          </a:prstGeom>
-          <a:noFill/>
-          <a:ln/>
-        </p:spPr>
-        <p:txBody>
-          <a:bodyPr wrap="square" rtlCol="0" anchor="ctr"/>
-          <a:lstStyle/>
-          <a:p>
-            <a:pPr indent="0" marL="0">
-              <a:buNone/>
-            </a:pPr>
-            <a:r>
-              <a:rPr lang="en-US" sz="2100" b="1" dirty="0">
-                <a:solidFill>
-                  <a:srgbClr val="1A1A1A"/>
-                </a:solidFill>
-                <a:latin typeface="Cambria" pitchFamily="34" charset="0"/>
-                <a:ea typeface="Cambria" pitchFamily="34" charset="-122"/>
-                <a:cs typeface="Cambria" pitchFamily="34" charset="-120"/>
-              </a:rPr>
-              <a:t>Discussion</a:t>
-            </a:r>
-            <a:endParaRPr lang="en-US" sz="2100" dirty="0"/>
-          </a:p>
-        </p:txBody>
-      </p:sp>
-      <p:sp>
-        <p:nvSpPr>
-          <p:cNvPr id="15" name="Text 13"/>
-          <p:cNvSpPr/>
-          <p:nvPr/>
-        </p:nvSpPr>
-        <p:spPr>
-          <a:xfrm>
-            <a:off x="8778240" y="3977640"/>
-            <a:ext cx="2651760" cy="1371600"/>
+            <a:srgbClr val="7A3B2E"/>
+          </a:solidFill>
+          <a:ln/>
+        </p:spPr>
+      </p:sp>
+      <p:sp>
+        <p:nvSpPr>
+          <p:cNvPr id="12" name="Text 10"/>
+          <p:cNvSpPr/>
+          <p:nvPr/>
+        </p:nvSpPr>
+        <p:spPr>
+          <a:xfrm>
+            <a:off x="1097280" y="5292090"/>
+            <a:ext cx="10607040" cy="1017270"/>
           </a:xfrm>
           <a:prstGeom prst="rect">
             <a:avLst/>
@@ -3971,12 +4027,12 @@
           <a:p>
             <a:pPr indent="0" marL="0">
               <a:lnSpc>
-                <a:spcPct val="115000"/>
+                <a:spcPct val="112000"/>
               </a:lnSpc>
               <a:buNone/>
             </a:pPr>
             <a:r>
-              <a:rPr lang="en-US" sz="1500" dirty="0">
+              <a:rPr lang="en-US" sz="1650" dirty="0">
                 <a:solidFill>
                   <a:srgbClr val="1A1A1A"/>
                 </a:solidFill>
@@ -3984,9 +4040,9 @@
                 <a:ea typeface="Calibri" pitchFamily="34" charset="-122"/>
                 <a:cs typeface="Calibri" pitchFamily="34" charset="-120"/>
               </a:rPr>
-              <a:t>Interrogate the study, debate it, or critique each other's work.</a:t>
-            </a:r>
-            <a:endParaRPr lang="en-US" sz="1500" dirty="0"/>
+              <a:t>The same technique three times, each containing a decision.</a:t>
+            </a:r>
+            <a:endParaRPr lang="en-US" sz="1650" dirty="0"/>
           </a:p>
         </p:txBody>
       </p:sp>
@@ -4030,7 +4086,7 @@
         </p:nvSpPr>
         <p:spPr>
           <a:xfrm>
-            <a:off x="640080" y="640080"/>
+            <a:off x="640080" y="731520"/>
             <a:ext cx="10058400" cy="731520"/>
           </a:xfrm>
           <a:prstGeom prst="rect">
@@ -4055,7 +4111,7 @@
                 <a:ea typeface="Cambria" pitchFamily="34" charset="-122"/>
                 <a:cs typeface="Cambria" pitchFamily="34" charset="-120"/>
               </a:rPr>
-              <a:t>The session</a:t>
+              <a:t>Three modes today</a:t>
             </a:r>
             <a:endParaRPr lang="en-US" sz="3000" dirty="0"/>
           </a:p>
@@ -4063,36 +4119,14 @@
       </p:sp>
       <p:sp>
         <p:nvSpPr>
-          <p:cNvPr id="3" name="Shape 1"/>
-          <p:cNvSpPr/>
-          <p:nvPr/>
-        </p:nvSpPr>
-        <p:spPr>
-          <a:xfrm>
-            <a:off x="640080" y="1572768"/>
-            <a:ext cx="868680" cy="450342"/>
-          </a:xfrm>
-          <a:prstGeom prst="roundRect">
-            <a:avLst>
-              <a:gd name="adj" fmla="val 12183"/>
-            </a:avLst>
-          </a:prstGeom>
-          <a:solidFill>
-            <a:srgbClr val="7A3B2E"/>
-          </a:solidFill>
-          <a:ln/>
-        </p:spPr>
-      </p:sp>
-      <p:sp>
-        <p:nvSpPr>
-          <p:cNvPr id="4" name="Text 2"/>
-          <p:cNvSpPr/>
-          <p:nvPr/>
-        </p:nvSpPr>
-        <p:spPr>
-          <a:xfrm>
-            <a:off x="640080" y="1572768"/>
-            <a:ext cx="868680" cy="450342"/>
+          <p:cNvPr id="3" name="Text 1"/>
+          <p:cNvSpPr/>
+          <p:nvPr/>
+        </p:nvSpPr>
+        <p:spPr>
+          <a:xfrm>
+            <a:off x="640080" y="1417320"/>
+            <a:ext cx="10058400" cy="365760"/>
           </a:xfrm>
           <a:prstGeom prst="rect">
             <a:avLst/>
@@ -4104,52 +4138,136 @@
           <a:bodyPr wrap="square" rtlCol="0" anchor="ctr"/>
           <a:lstStyle/>
           <a:p>
-            <a:pPr algn="ctr" indent="0" marL="0">
-              <a:buNone/>
-            </a:pPr>
-            <a:r>
-              <a:rPr lang="en-US" sz="1100" b="1" dirty="0">
-                <a:solidFill>
-                  <a:srgbClr val="FFFFFF"/>
+            <a:pPr indent="0" marL="0">
+              <a:buNone/>
+            </a:pPr>
+            <a:r>
+              <a:rPr lang="en-US" sz="1400" i="1" dirty="0">
+                <a:solidFill>
+                  <a:srgbClr val="6B6B63"/>
                 </a:solidFill>
                 <a:latin typeface="Calibri" pitchFamily="34" charset="0"/>
                 <a:ea typeface="Calibri" pitchFamily="34" charset="-122"/>
                 <a:cs typeface="Calibri" pitchFamily="34" charset="-120"/>
               </a:rPr>
-              <a:t>0:00</a:t>
-            </a:r>
-            <a:endParaRPr lang="en-US" sz="1100" dirty="0"/>
-          </a:p>
-        </p:txBody>
-      </p:sp>
-      <p:sp>
-        <p:nvSpPr>
-          <p:cNvPr id="5" name="Text 3"/>
-          <p:cNvSpPr/>
-          <p:nvPr/>
-        </p:nvSpPr>
-        <p:spPr>
-          <a:xfrm>
-            <a:off x="1691640" y="1554480"/>
-            <a:ext cx="9646920" cy="560070"/>
-          </a:xfrm>
-          <a:prstGeom prst="rect">
-            <a:avLst/>
-          </a:prstGeom>
-          <a:noFill/>
-          <a:ln/>
-        </p:spPr>
-        <p:txBody>
-          <a:bodyPr wrap="square" rtlCol="0" anchor="ctr">
+              <a:t>about a third of the session each</a:t>
+            </a:r>
+            <a:endParaRPr lang="en-US" sz="1400" dirty="0"/>
+          </a:p>
+        </p:txBody>
+      </p:sp>
+      <p:sp>
+        <p:nvSpPr>
+          <p:cNvPr id="4" name="Shape 2"/>
+          <p:cNvSpPr/>
+          <p:nvPr/>
+        </p:nvSpPr>
+        <p:spPr>
+          <a:xfrm>
+            <a:off x="640080" y="2194560"/>
+            <a:ext cx="3383280" cy="3291840"/>
+          </a:xfrm>
+          <a:prstGeom prst="roundRect">
+            <a:avLst>
+              <a:gd name="adj" fmla="val 3333"/>
+            </a:avLst>
+          </a:prstGeom>
+          <a:solidFill>
+            <a:srgbClr val="F4EEE8"/>
+          </a:solidFill>
+          <a:ln/>
+        </p:spPr>
+      </p:sp>
+      <p:sp>
+        <p:nvSpPr>
+          <p:cNvPr id="5" name="Shape 3"/>
+          <p:cNvSpPr/>
+          <p:nvPr/>
+        </p:nvSpPr>
+        <p:spPr>
+          <a:xfrm>
+            <a:off x="1051560" y="2606040"/>
+            <a:ext cx="548640" cy="548640"/>
+          </a:xfrm>
+          <a:prstGeom prst="ellipse">
+            <a:avLst/>
+          </a:prstGeom>
+          <a:solidFill>
+            <a:srgbClr val="7A3B2E"/>
+          </a:solidFill>
+          <a:ln/>
+        </p:spPr>
+      </p:sp>
+      <p:sp>
+        <p:nvSpPr>
+          <p:cNvPr id="6" name="Text 4"/>
+          <p:cNvSpPr/>
+          <p:nvPr/>
+        </p:nvSpPr>
+        <p:spPr>
+          <a:xfrm>
+            <a:off x="1005840" y="3383280"/>
+            <a:ext cx="2651760" cy="548640"/>
+          </a:xfrm>
+          <a:prstGeom prst="rect">
+            <a:avLst/>
+          </a:prstGeom>
+          <a:noFill/>
+          <a:ln/>
+        </p:spPr>
+        <p:txBody>
+          <a:bodyPr wrap="square" rtlCol="0" anchor="ctr"/>
+          <a:lstStyle/>
+          <a:p>
+            <a:pPr indent="0" marL="0">
+              <a:buNone/>
+            </a:pPr>
+            <a:r>
+              <a:rPr lang="en-US" sz="2100" b="1" dirty="0">
+                <a:solidFill>
+                  <a:srgbClr val="1A1A1A"/>
+                </a:solidFill>
+                <a:latin typeface="Cambria" pitchFamily="34" charset="0"/>
+                <a:ea typeface="Cambria" pitchFamily="34" charset="-122"/>
+                <a:cs typeface="Cambria" pitchFamily="34" charset="-120"/>
+              </a:rPr>
+              <a:t>Lecture / demo</a:t>
+            </a:r>
+            <a:endParaRPr lang="en-US" sz="2100" dirty="0"/>
+          </a:p>
+        </p:txBody>
+      </p:sp>
+      <p:sp>
+        <p:nvSpPr>
+          <p:cNvPr id="7" name="Text 5"/>
+          <p:cNvSpPr/>
+          <p:nvPr/>
+        </p:nvSpPr>
+        <p:spPr>
+          <a:xfrm>
+            <a:off x="1005840" y="3977640"/>
+            <a:ext cx="2651760" cy="1371600"/>
+          </a:xfrm>
+          <a:prstGeom prst="rect">
+            <a:avLst/>
+          </a:prstGeom>
+          <a:noFill/>
+          <a:ln/>
+        </p:spPr>
+        <p:txBody>
+          <a:bodyPr wrap="square" rtlCol="0" anchor="t">
             <a:spAutoFit/>
           </a:bodyPr>
           <a:lstStyle/>
           <a:p>
             <a:pPr indent="0" marL="0">
-              <a:buNone/>
-            </a:pPr>
-            <a:r>
-              <a:rPr lang="en-US" sz="1100" dirty="0">
+              <a:lnSpc>
+                <a:spcPct val="115000"/>
+              </a:lnSpc>
+              <a:buNone/>
+            </a:pPr>
+            <a:r>
+              <a:rPr lang="en-US" sz="1500" dirty="0">
                 <a:solidFill>
                   <a:srgbClr val="1A1A1A"/>
                 </a:solidFill>
@@ -4157,44 +4275,64 @@
                 <a:ea typeface="Calibri" pitchFamily="34" charset="-122"/>
                 <a:cs typeface="Calibri" pitchFamily="34" charset="-120"/>
               </a:rPr>
-              <a:t>Introductions and working agreements, demonstrated in practice. Today's live coding deliberately includes real mistakes.</a:t>
-            </a:r>
-            <a:endParaRPr lang="en-US" sz="1100" dirty="0"/>
-          </a:p>
-        </p:txBody>
-      </p:sp>
-      <p:sp>
-        <p:nvSpPr>
-          <p:cNvPr id="6" name="Shape 4"/>
-          <p:cNvSpPr/>
-          <p:nvPr/>
-        </p:nvSpPr>
-        <p:spPr>
-          <a:xfrm>
-            <a:off x="640080" y="2132838"/>
-            <a:ext cx="868680" cy="450342"/>
+              <a:t>Counting: rows, words, pixels</a:t>
+            </a:r>
+            <a:endParaRPr lang="en-US" sz="1500" dirty="0"/>
+          </a:p>
+        </p:txBody>
+      </p:sp>
+      <p:sp>
+        <p:nvSpPr>
+          <p:cNvPr id="8" name="Shape 6"/>
+          <p:cNvSpPr/>
+          <p:nvPr/>
+        </p:nvSpPr>
+        <p:spPr>
+          <a:xfrm>
+            <a:off x="4526280" y="2194560"/>
+            <a:ext cx="3383280" cy="3291840"/>
           </a:xfrm>
           <a:prstGeom prst="roundRect">
             <a:avLst>
-              <a:gd name="adj" fmla="val 12183"/>
+              <a:gd name="adj" fmla="val 3333"/>
             </a:avLst>
           </a:prstGeom>
           <a:solidFill>
-            <a:srgbClr val="7A3B2E"/>
-          </a:solidFill>
-          <a:ln/>
-        </p:spPr>
-      </p:sp>
-      <p:sp>
-        <p:nvSpPr>
-          <p:cNvPr id="7" name="Text 5"/>
-          <p:cNvSpPr/>
-          <p:nvPr/>
-        </p:nvSpPr>
-        <p:spPr>
-          <a:xfrm>
-            <a:off x="640080" y="2132838"/>
-            <a:ext cx="868680" cy="450342"/>
+            <a:srgbClr val="F4EEE8"/>
+          </a:solidFill>
+          <a:ln/>
+        </p:spPr>
+      </p:sp>
+      <p:sp>
+        <p:nvSpPr>
+          <p:cNvPr id="9" name="Shape 7"/>
+          <p:cNvSpPr/>
+          <p:nvPr/>
+        </p:nvSpPr>
+        <p:spPr>
+          <a:xfrm>
+            <a:off x="4937760" y="2606040"/>
+            <a:ext cx="548640" cy="548640"/>
+          </a:xfrm>
+          <a:prstGeom prst="ellipse">
+            <a:avLst/>
+          </a:prstGeom>
+          <a:solidFill>
+            <a:srgbClr val="3F6F5F"/>
+          </a:solidFill>
+          <a:ln/>
+        </p:spPr>
+      </p:sp>
+      <p:sp>
+        <p:nvSpPr>
+          <p:cNvPr id="10" name="Text 8"/>
+          <p:cNvSpPr/>
+          <p:nvPr/>
+        </p:nvSpPr>
+        <p:spPr>
+          <a:xfrm>
+            <a:off x="4892040" y="3383280"/>
+            <a:ext cx="2651760" cy="548640"/>
           </a:xfrm>
           <a:prstGeom prst="rect">
             <a:avLst/>
@@ -4206,52 +4344,180 @@
           <a:bodyPr wrap="square" rtlCol="0" anchor="ctr"/>
           <a:lstStyle/>
           <a:p>
-            <a:pPr algn="ctr" indent="0" marL="0">
-              <a:buNone/>
-            </a:pPr>
-            <a:r>
-              <a:rPr lang="en-US" sz="1100" b="1" dirty="0">
-                <a:solidFill>
-                  <a:srgbClr val="FFFFFF"/>
+            <a:pPr indent="0" marL="0">
+              <a:buNone/>
+            </a:pPr>
+            <a:r>
+              <a:rPr lang="en-US" sz="2100" b="1" dirty="0">
+                <a:solidFill>
+                  <a:srgbClr val="1A1A1A"/>
+                </a:solidFill>
+                <a:latin typeface="Cambria" pitchFamily="34" charset="0"/>
+                <a:ea typeface="Cambria" pitchFamily="34" charset="-122"/>
+                <a:cs typeface="Cambria" pitchFamily="34" charset="-120"/>
+              </a:rPr>
+              <a:t>Workshop</a:t>
+            </a:r>
+            <a:endParaRPr lang="en-US" sz="2100" dirty="0"/>
+          </a:p>
+        </p:txBody>
+      </p:sp>
+      <p:sp>
+        <p:nvSpPr>
+          <p:cNvPr id="11" name="Text 9"/>
+          <p:cNvSpPr/>
+          <p:nvPr/>
+        </p:nvSpPr>
+        <p:spPr>
+          <a:xfrm>
+            <a:off x="4892040" y="3977640"/>
+            <a:ext cx="2651760" cy="1371600"/>
+          </a:xfrm>
+          <a:prstGeom prst="rect">
+            <a:avLst/>
+          </a:prstGeom>
+          <a:noFill/>
+          <a:ln/>
+        </p:spPr>
+        <p:txBody>
+          <a:bodyPr wrap="square" rtlCol="0" anchor="t">
+            <a:spAutoFit/>
+          </a:bodyPr>
+          <a:lstStyle/>
+          <a:p>
+            <a:pPr indent="0" marL="0">
+              <a:lnSpc>
+                <a:spcPct val="115000"/>
+              </a:lnSpc>
+              <a:buNone/>
+            </a:pPr>
+            <a:r>
+              <a:rPr lang="en-US" sz="1500" dirty="0">
+                <a:solidFill>
+                  <a:srgbClr val="1A1A1A"/>
                 </a:solidFill>
                 <a:latin typeface="Calibri" pitchFamily="34" charset="0"/>
                 <a:ea typeface="Calibri" pitchFamily="34" charset="-122"/>
                 <a:cs typeface="Calibri" pitchFamily="34" charset="-120"/>
               </a:rPr>
-              <a:t>0:10</a:t>
-            </a:r>
-            <a:endParaRPr lang="en-US" sz="1100" dirty="0"/>
-          </a:p>
-        </p:txBody>
-      </p:sp>
-      <p:sp>
-        <p:nvSpPr>
-          <p:cNvPr id="8" name="Text 6"/>
-          <p:cNvSpPr/>
-          <p:nvPr/>
-        </p:nvSpPr>
-        <p:spPr>
-          <a:xfrm>
-            <a:off x="1691640" y="2114550"/>
-            <a:ext cx="9646920" cy="560070"/>
-          </a:xfrm>
-          <a:prstGeom prst="rect">
-            <a:avLst/>
-          </a:prstGeom>
-          <a:noFill/>
-          <a:ln/>
-        </p:spPr>
-        <p:txBody>
-          <a:bodyPr wrap="square" rtlCol="0" anchor="ctr">
+              <a:t>Build hands-on on your own data.</a:t>
+            </a:r>
+            <a:endParaRPr lang="en-US" sz="1500" dirty="0"/>
+          </a:p>
+        </p:txBody>
+      </p:sp>
+      <p:sp>
+        <p:nvSpPr>
+          <p:cNvPr id="12" name="Shape 10"/>
+          <p:cNvSpPr/>
+          <p:nvPr/>
+        </p:nvSpPr>
+        <p:spPr>
+          <a:xfrm>
+            <a:off x="8412480" y="2194560"/>
+            <a:ext cx="3383280" cy="3291840"/>
+          </a:xfrm>
+          <a:prstGeom prst="roundRect">
+            <a:avLst>
+              <a:gd name="adj" fmla="val 3333"/>
+            </a:avLst>
+          </a:prstGeom>
+          <a:solidFill>
+            <a:srgbClr val="F4EEE8"/>
+          </a:solidFill>
+          <a:ln/>
+        </p:spPr>
+      </p:sp>
+      <p:sp>
+        <p:nvSpPr>
+          <p:cNvPr id="13" name="Shape 11"/>
+          <p:cNvSpPr/>
+          <p:nvPr/>
+        </p:nvSpPr>
+        <p:spPr>
+          <a:xfrm>
+            <a:off x="8823960" y="2606040"/>
+            <a:ext cx="548640" cy="548640"/>
+          </a:xfrm>
+          <a:prstGeom prst="ellipse">
+            <a:avLst/>
+          </a:prstGeom>
+          <a:solidFill>
+            <a:srgbClr val="B9852F"/>
+          </a:solidFill>
+          <a:ln/>
+        </p:spPr>
+      </p:sp>
+      <p:sp>
+        <p:nvSpPr>
+          <p:cNvPr id="14" name="Text 12"/>
+          <p:cNvSpPr/>
+          <p:nvPr/>
+        </p:nvSpPr>
+        <p:spPr>
+          <a:xfrm>
+            <a:off x="8778240" y="3383280"/>
+            <a:ext cx="2651760" cy="548640"/>
+          </a:xfrm>
+          <a:prstGeom prst="rect">
+            <a:avLst/>
+          </a:prstGeom>
+          <a:noFill/>
+          <a:ln/>
+        </p:spPr>
+        <p:txBody>
+          <a:bodyPr wrap="square" rtlCol="0" anchor="ctr"/>
+          <a:lstStyle/>
+          <a:p>
+            <a:pPr indent="0" marL="0">
+              <a:buNone/>
+            </a:pPr>
+            <a:r>
+              <a:rPr lang="en-US" sz="2100" b="1" dirty="0">
+                <a:solidFill>
+                  <a:srgbClr val="1A1A1A"/>
+                </a:solidFill>
+                <a:latin typeface="Cambria" pitchFamily="34" charset="0"/>
+                <a:ea typeface="Cambria" pitchFamily="34" charset="-122"/>
+                <a:cs typeface="Cambria" pitchFamily="34" charset="-120"/>
+              </a:rPr>
+              <a:t>Discussion</a:t>
+            </a:r>
+            <a:endParaRPr lang="en-US" sz="2100" dirty="0"/>
+          </a:p>
+        </p:txBody>
+      </p:sp>
+      <p:sp>
+        <p:nvSpPr>
+          <p:cNvPr id="15" name="Text 13"/>
+          <p:cNvSpPr/>
+          <p:nvPr/>
+        </p:nvSpPr>
+        <p:spPr>
+          <a:xfrm>
+            <a:off x="8778240" y="3977640"/>
+            <a:ext cx="2651760" cy="1371600"/>
+          </a:xfrm>
+          <a:prstGeom prst="rect">
+            <a:avLst/>
+          </a:prstGeom>
+          <a:noFill/>
+          <a:ln/>
+        </p:spPr>
+        <p:txBody>
+          <a:bodyPr wrap="square" rtlCol="0" anchor="t">
             <a:spAutoFit/>
           </a:bodyPr>
           <a:lstStyle/>
           <a:p>
             <a:pPr indent="0" marL="0">
-              <a:buNone/>
-            </a:pPr>
-            <a:r>
-              <a:rPr lang="en-US" sz="1100" dirty="0">
+              <a:lnSpc>
+                <a:spcPct val="115000"/>
+              </a:lnSpc>
+              <a:buNone/>
+            </a:pPr>
+            <a:r>
+              <a:rPr lang="en-US" sz="1500" dirty="0">
                 <a:solidFill>
                   <a:srgbClr val="1A1A1A"/>
                 </a:solidFill>
@@ -4259,621 +4525,9 @@
                 <a:ea typeface="Calibri" pitchFamily="34" charset="-122"/>
                 <a:cs typeface="Calibri" pitchFamily="34" charset="-120"/>
               </a:rPr>
-              <a:t>Lecture, the stakes: machines already read culture at scale, the feed ranking what you see, the moderation filter, the model trained on scraped art and prose, and that reading happens without you. Counting culture has produced real knowledge (the screenplay verb split, the Rowling unmasking, pop music's 1991 revolution) and real mistakes, and both look identical until someone checks. In ten weeks you do the reading yourself and publish something checkable.</a:t>
-            </a:r>
-            <a:endParaRPr lang="en-US" sz="1100" dirty="0"/>
-          </a:p>
-        </p:txBody>
-      </p:sp>
-      <p:sp>
-        <p:nvSpPr>
-          <p:cNvPr id="9" name="Shape 7"/>
-          <p:cNvSpPr/>
-          <p:nvPr/>
-        </p:nvSpPr>
-        <p:spPr>
-          <a:xfrm>
-            <a:off x="640080" y="2692908"/>
-            <a:ext cx="868680" cy="450342"/>
-          </a:xfrm>
-          <a:prstGeom prst="roundRect">
-            <a:avLst>
-              <a:gd name="adj" fmla="val 12183"/>
-            </a:avLst>
-          </a:prstGeom>
-          <a:solidFill>
-            <a:srgbClr val="7A3B2E"/>
-          </a:solidFill>
-          <a:ln/>
-        </p:spPr>
-      </p:sp>
-      <p:sp>
-        <p:nvSpPr>
-          <p:cNvPr id="10" name="Text 8"/>
-          <p:cNvSpPr/>
-          <p:nvPr/>
-        </p:nvSpPr>
-        <p:spPr>
-          <a:xfrm>
-            <a:off x="640080" y="2692908"/>
-            <a:ext cx="868680" cy="450342"/>
-          </a:xfrm>
-          <a:prstGeom prst="rect">
-            <a:avLst/>
-          </a:prstGeom>
-          <a:noFill/>
-          <a:ln/>
-        </p:spPr>
-        <p:txBody>
-          <a:bodyPr wrap="square" rtlCol="0" anchor="ctr"/>
-          <a:lstStyle/>
-          <a:p>
-            <a:pPr algn="ctr" indent="0" marL="0">
-              <a:buNone/>
-            </a:pPr>
-            <a:r>
-              <a:rPr lang="en-US" sz="1100" b="1" dirty="0">
-                <a:solidFill>
-                  <a:srgbClr val="FFFFFF"/>
-                </a:solidFill>
-                <a:latin typeface="Calibri" pitchFamily="34" charset="0"/>
-                <a:ea typeface="Calibri" pitchFamily="34" charset="-122"/>
-                <a:cs typeface="Calibri" pitchFamily="34" charset="-120"/>
-              </a:rPr>
-              <a:t>0:28</a:t>
-            </a:r>
-            <a:endParaRPr lang="en-US" sz="1100" dirty="0"/>
-          </a:p>
-        </p:txBody>
-      </p:sp>
-      <p:sp>
-        <p:nvSpPr>
-          <p:cNvPr id="11" name="Text 9"/>
-          <p:cNvSpPr/>
-          <p:nvPr/>
-        </p:nvSpPr>
-        <p:spPr>
-          <a:xfrm>
-            <a:off x="1691640" y="2674620"/>
-            <a:ext cx="9646920" cy="560070"/>
-          </a:xfrm>
-          <a:prstGeom prst="rect">
-            <a:avLst/>
-          </a:prstGeom>
-          <a:noFill/>
-          <a:ln/>
-        </p:spPr>
-        <p:txBody>
-          <a:bodyPr wrap="square" rtlCol="0" anchor="ctr">
-            <a:spAutoFit/>
-          </a:bodyPr>
-          <a:lstStyle/>
-          <a:p>
-            <a:pPr indent="0" marL="0">
-              <a:buNone/>
-            </a:pPr>
-            <a:r>
-              <a:rPr lang="en-US" sz="1100" dirty="0">
-                <a:solidFill>
-                  <a:srgbClr val="1A1A1A"/>
-                </a:solidFill>
-                <a:latin typeface="Calibri" pitchFamily="34" charset="0"/>
-                <a:ea typeface="Calibri" pitchFamily="34" charset="-122"/>
-                <a:cs typeface="Calibri" pitchFamily="34" charset="-120"/>
-              </a:rPr>
-              <a:t>Look at This, then Question It: She Giggles, He Gallops.</a:t>
-            </a:r>
-            <a:endParaRPr lang="en-US" sz="1100" dirty="0"/>
-          </a:p>
-        </p:txBody>
-      </p:sp>
-      <p:sp>
-        <p:nvSpPr>
-          <p:cNvPr id="12" name="Shape 10"/>
-          <p:cNvSpPr/>
-          <p:nvPr/>
-        </p:nvSpPr>
-        <p:spPr>
-          <a:xfrm>
-            <a:off x="640080" y="3252978"/>
-            <a:ext cx="868680" cy="450342"/>
-          </a:xfrm>
-          <a:prstGeom prst="roundRect">
-            <a:avLst>
-              <a:gd name="adj" fmla="val 12183"/>
-            </a:avLst>
-          </a:prstGeom>
-          <a:solidFill>
-            <a:srgbClr val="7A3B2E"/>
-          </a:solidFill>
-          <a:ln/>
-        </p:spPr>
-      </p:sp>
-      <p:sp>
-        <p:nvSpPr>
-          <p:cNvPr id="13" name="Text 11"/>
-          <p:cNvSpPr/>
-          <p:nvPr/>
-        </p:nvSpPr>
-        <p:spPr>
-          <a:xfrm>
-            <a:off x="640080" y="3252978"/>
-            <a:ext cx="868680" cy="450342"/>
-          </a:xfrm>
-          <a:prstGeom prst="rect">
-            <a:avLst/>
-          </a:prstGeom>
-          <a:noFill/>
-          <a:ln/>
-        </p:spPr>
-        <p:txBody>
-          <a:bodyPr wrap="square" rtlCol="0" anchor="ctr"/>
-          <a:lstStyle/>
-          <a:p>
-            <a:pPr algn="ctr" indent="0" marL="0">
-              <a:buNone/>
-            </a:pPr>
-            <a:r>
-              <a:rPr lang="en-US" sz="1100" b="1" dirty="0">
-                <a:solidFill>
-                  <a:srgbClr val="FFFFFF"/>
-                </a:solidFill>
-                <a:latin typeface="Calibri" pitchFamily="34" charset="0"/>
-                <a:ea typeface="Calibri" pitchFamily="34" charset="-122"/>
-                <a:cs typeface="Calibri" pitchFamily="34" charset="-120"/>
-              </a:rPr>
-              <a:t>0:35</a:t>
-            </a:r>
-            <a:endParaRPr lang="en-US" sz="1100" dirty="0"/>
-          </a:p>
-        </p:txBody>
-      </p:sp>
-      <p:sp>
-        <p:nvSpPr>
-          <p:cNvPr id="14" name="Text 12"/>
-          <p:cNvSpPr/>
-          <p:nvPr/>
-        </p:nvSpPr>
-        <p:spPr>
-          <a:xfrm>
-            <a:off x="1691640" y="3234690"/>
-            <a:ext cx="9646920" cy="560070"/>
-          </a:xfrm>
-          <a:prstGeom prst="rect">
-            <a:avLst/>
-          </a:prstGeom>
-          <a:noFill/>
-          <a:ln/>
-        </p:spPr>
-        <p:txBody>
-          <a:bodyPr wrap="square" rtlCol="0" anchor="ctr">
-            <a:spAutoFit/>
-          </a:bodyPr>
-          <a:lstStyle/>
-          <a:p>
-            <a:pPr indent="0" marL="0">
-              <a:buNone/>
-            </a:pPr>
-            <a:r>
-              <a:rPr lang="en-US" sz="1100" dirty="0">
-                <a:solidFill>
-                  <a:srgbClr val="1A1A1A"/>
-                </a:solidFill>
-                <a:latin typeface="Calibri" pitchFamily="34" charset="0"/>
-                <a:ea typeface="Calibri" pitchFamily="34" charset="-122"/>
-                <a:cs typeface="Calibri" pitchFamily="34" charset="-120"/>
-              </a:rPr>
-              <a:t>The vocabulary and the map (no code): corpus, method, model, embedding, plus what data itself is. A CSV, anatomized on screen (rows are observations, columns are recorded facts), and Drucker's correction: data is capta, taken not given. Two minutes in pairs: what did the makers of the wedding table take, and what did they leave out? The deliverable, shown: a web essay on a runnable notebook.</a:t>
-            </a:r>
-            <a:endParaRPr lang="en-US" sz="1100" dirty="0"/>
-          </a:p>
-        </p:txBody>
-      </p:sp>
-      <p:sp>
-        <p:nvSpPr>
-          <p:cNvPr id="15" name="Shape 13"/>
-          <p:cNvSpPr/>
-          <p:nvPr/>
-        </p:nvSpPr>
-        <p:spPr>
-          <a:xfrm>
-            <a:off x="640080" y="3813048"/>
-            <a:ext cx="868680" cy="450342"/>
-          </a:xfrm>
-          <a:prstGeom prst="roundRect">
-            <a:avLst>
-              <a:gd name="adj" fmla="val 12183"/>
-            </a:avLst>
-          </a:prstGeom>
-          <a:solidFill>
-            <a:srgbClr val="7A3B2E"/>
-          </a:solidFill>
-          <a:ln/>
-        </p:spPr>
-      </p:sp>
-      <p:sp>
-        <p:nvSpPr>
-          <p:cNvPr id="16" name="Text 14"/>
-          <p:cNvSpPr/>
-          <p:nvPr/>
-        </p:nvSpPr>
-        <p:spPr>
-          <a:xfrm>
-            <a:off x="640080" y="3813048"/>
-            <a:ext cx="868680" cy="450342"/>
-          </a:xfrm>
-          <a:prstGeom prst="rect">
-            <a:avLst/>
-          </a:prstGeom>
-          <a:noFill/>
-          <a:ln/>
-        </p:spPr>
-        <p:txBody>
-          <a:bodyPr wrap="square" rtlCol="0" anchor="ctr"/>
-          <a:lstStyle/>
-          <a:p>
-            <a:pPr algn="ctr" indent="0" marL="0">
-              <a:buNone/>
-            </a:pPr>
-            <a:r>
-              <a:rPr lang="en-US" sz="1100" b="1" dirty="0">
-                <a:solidFill>
-                  <a:srgbClr val="FFFFFF"/>
-                </a:solidFill>
-                <a:latin typeface="Calibri" pitchFamily="34" charset="0"/>
-                <a:ea typeface="Calibri" pitchFamily="34" charset="-122"/>
-                <a:cs typeface="Calibri" pitchFamily="34" charset="-120"/>
-              </a:rPr>
-              <a:t>0:47</a:t>
-            </a:r>
-            <a:endParaRPr lang="en-US" sz="1100" dirty="0"/>
-          </a:p>
-        </p:txBody>
-      </p:sp>
-      <p:sp>
-        <p:nvSpPr>
-          <p:cNvPr id="17" name="Text 15"/>
-          <p:cNvSpPr/>
-          <p:nvPr/>
-        </p:nvSpPr>
-        <p:spPr>
-          <a:xfrm>
-            <a:off x="1691640" y="3794760"/>
-            <a:ext cx="9646920" cy="560070"/>
-          </a:xfrm>
-          <a:prstGeom prst="rect">
-            <a:avLst/>
-          </a:prstGeom>
-          <a:noFill/>
-          <a:ln/>
-        </p:spPr>
-        <p:txBody>
-          <a:bodyPr wrap="square" rtlCol="0" anchor="ctr">
-            <a:spAutoFit/>
-          </a:bodyPr>
-          <a:lstStyle/>
-          <a:p>
-            <a:pPr indent="0" marL="0">
-              <a:buNone/>
-            </a:pPr>
-            <a:r>
-              <a:rPr lang="en-US" sz="1100" dirty="0">
-                <a:solidFill>
-                  <a:srgbClr val="1A1A1A"/>
-                </a:solidFill>
-                <a:latin typeface="Calibri" pitchFamily="34" charset="0"/>
-                <a:ea typeface="Calibri" pitchFamily="34" charset="-122"/>
-                <a:cs typeface="Calibri" pitchFamily="34" charset="-120"/>
-              </a:rPr>
-              <a:t>Lab 1 (worked, participatory): copy the notebook to Drive and mount Drive into the runtime (this is how your corpus and results survive Colab wiping the session, everything saving to one project folder), put a Gemini key in Colab Secrets, load NYT wedding data, make a first chart. Hand out the common-errors cheat sheet. Then solo with a partner: draft three questions, pick one, have the AI write the code, run it, chart it. Write one sentence predicting your cell before you run it.</a:t>
-            </a:r>
-            <a:endParaRPr lang="en-US" sz="1100" dirty="0"/>
-          </a:p>
-        </p:txBody>
-      </p:sp>
-      <p:sp>
-        <p:nvSpPr>
-          <p:cNvPr id="18" name="Shape 16"/>
-          <p:cNvSpPr/>
-          <p:nvPr/>
-        </p:nvSpPr>
-        <p:spPr>
-          <a:xfrm>
-            <a:off x="640080" y="4373118"/>
-            <a:ext cx="868680" cy="450342"/>
-          </a:xfrm>
-          <a:prstGeom prst="roundRect">
-            <a:avLst>
-              <a:gd name="adj" fmla="val 12183"/>
-            </a:avLst>
-          </a:prstGeom>
-          <a:solidFill>
-            <a:srgbClr val="7A3B2E"/>
-          </a:solidFill>
-          <a:ln/>
-        </p:spPr>
-      </p:sp>
-      <p:sp>
-        <p:nvSpPr>
-          <p:cNvPr id="19" name="Text 17"/>
-          <p:cNvSpPr/>
-          <p:nvPr/>
-        </p:nvSpPr>
-        <p:spPr>
-          <a:xfrm>
-            <a:off x="640080" y="4373118"/>
-            <a:ext cx="868680" cy="450342"/>
-          </a:xfrm>
-          <a:prstGeom prst="rect">
-            <a:avLst/>
-          </a:prstGeom>
-          <a:noFill/>
-          <a:ln/>
-        </p:spPr>
-        <p:txBody>
-          <a:bodyPr wrap="square" rtlCol="0" anchor="ctr"/>
-          <a:lstStyle/>
-          <a:p>
-            <a:pPr algn="ctr" indent="0" marL="0">
-              <a:buNone/>
-            </a:pPr>
-            <a:r>
-              <a:rPr lang="en-US" sz="1100" b="1" dirty="0">
-                <a:solidFill>
-                  <a:srgbClr val="FFFFFF"/>
-                </a:solidFill>
-                <a:latin typeface="Calibri" pitchFamily="34" charset="0"/>
-                <a:ea typeface="Calibri" pitchFamily="34" charset="-122"/>
-                <a:cs typeface="Calibri" pitchFamily="34" charset="-120"/>
-              </a:rPr>
-              <a:t>1:20</a:t>
-            </a:r>
-            <a:endParaRPr lang="en-US" sz="1100" dirty="0"/>
-          </a:p>
-        </p:txBody>
-      </p:sp>
-      <p:sp>
-        <p:nvSpPr>
-          <p:cNvPr id="20" name="Text 18"/>
-          <p:cNvSpPr/>
-          <p:nvPr/>
-        </p:nvSpPr>
-        <p:spPr>
-          <a:xfrm>
-            <a:off x="1691640" y="4354830"/>
-            <a:ext cx="9646920" cy="560070"/>
-          </a:xfrm>
-          <a:prstGeom prst="rect">
-            <a:avLst/>
-          </a:prstGeom>
-          <a:noFill/>
-          <a:ln/>
-        </p:spPr>
-        <p:txBody>
-          <a:bodyPr wrap="square" rtlCol="0" anchor="ctr">
-            <a:spAutoFit/>
-          </a:bodyPr>
-          <a:lstStyle/>
-          <a:p>
-            <a:pPr indent="0" marL="0">
-              <a:buNone/>
-            </a:pPr>
-            <a:r>
-              <a:rPr lang="en-US" sz="1100" dirty="0">
-                <a:solidFill>
-                  <a:srgbClr val="1A1A1A"/>
-                </a:solidFill>
-                <a:latin typeface="Calibri" pitchFamily="34" charset="0"/>
-                <a:ea typeface="Calibri" pitchFamily="34" charset="-122"/>
-                <a:cs typeface="Calibri" pitchFamily="34" charset="-120"/>
-              </a:rPr>
-              <a:t>Break</a:t>
-            </a:r>
-            <a:endParaRPr lang="en-US" sz="1100" dirty="0"/>
-          </a:p>
-        </p:txBody>
-      </p:sp>
-      <p:sp>
-        <p:nvSpPr>
-          <p:cNvPr id="21" name="Shape 19"/>
-          <p:cNvSpPr/>
-          <p:nvPr/>
-        </p:nvSpPr>
-        <p:spPr>
-          <a:xfrm>
-            <a:off x="640080" y="4933188"/>
-            <a:ext cx="868680" cy="450342"/>
-          </a:xfrm>
-          <a:prstGeom prst="roundRect">
-            <a:avLst>
-              <a:gd name="adj" fmla="val 12183"/>
-            </a:avLst>
-          </a:prstGeom>
-          <a:solidFill>
-            <a:srgbClr val="7A3B2E"/>
-          </a:solidFill>
-          <a:ln/>
-        </p:spPr>
-      </p:sp>
-      <p:sp>
-        <p:nvSpPr>
-          <p:cNvPr id="22" name="Text 20"/>
-          <p:cNvSpPr/>
-          <p:nvPr/>
-        </p:nvSpPr>
-        <p:spPr>
-          <a:xfrm>
-            <a:off x="640080" y="4933188"/>
-            <a:ext cx="868680" cy="450342"/>
-          </a:xfrm>
-          <a:prstGeom prst="rect">
-            <a:avLst/>
-          </a:prstGeom>
-          <a:noFill/>
-          <a:ln/>
-        </p:spPr>
-        <p:txBody>
-          <a:bodyPr wrap="square" rtlCol="0" anchor="ctr"/>
-          <a:lstStyle/>
-          <a:p>
-            <a:pPr algn="ctr" indent="0" marL="0">
-              <a:buNone/>
-            </a:pPr>
-            <a:r>
-              <a:rPr lang="en-US" sz="1100" b="1" dirty="0">
-                <a:solidFill>
-                  <a:srgbClr val="FFFFFF"/>
-                </a:solidFill>
-                <a:latin typeface="Calibri" pitchFamily="34" charset="0"/>
-                <a:ea typeface="Calibri" pitchFamily="34" charset="-122"/>
-                <a:cs typeface="Calibri" pitchFamily="34" charset="-120"/>
-              </a:rPr>
-              <a:t>1:30</a:t>
-            </a:r>
-            <a:endParaRPr lang="en-US" sz="1100" dirty="0"/>
-          </a:p>
-        </p:txBody>
-      </p:sp>
-      <p:sp>
-        <p:nvSpPr>
-          <p:cNvPr id="23" name="Text 21"/>
-          <p:cNvSpPr/>
-          <p:nvPr/>
-        </p:nvSpPr>
-        <p:spPr>
-          <a:xfrm>
-            <a:off x="1691640" y="4914900"/>
-            <a:ext cx="9646920" cy="560070"/>
-          </a:xfrm>
-          <a:prstGeom prst="rect">
-            <a:avLst/>
-          </a:prstGeom>
-          <a:noFill/>
-          <a:ln/>
-        </p:spPr>
-        <p:txBody>
-          <a:bodyPr wrap="square" rtlCol="0" anchor="ctr">
-            <a:spAutoFit/>
-          </a:bodyPr>
-          <a:lstStyle/>
-          <a:p>
-            <a:pPr indent="0" marL="0">
-              <a:buNone/>
-            </a:pPr>
-            <a:r>
-              <a:rPr lang="en-US" sz="1100" dirty="0">
-                <a:solidFill>
-                  <a:srgbClr val="1A1A1A"/>
-                </a:solidFill>
-                <a:latin typeface="Calibri" pitchFamily="34" charset="0"/>
-                <a:ea typeface="Calibri" pitchFamily="34" charset="-122"/>
-                <a:cs typeface="Calibri" pitchFamily="34" charset="-120"/>
-              </a:rPr>
-              <a:t>Lab 2 (worked): count words, then pixels. The real headlines' top words (stop-words dominate until removed, the first counting decision), then the Met image corpus ranked darkest to brightest by average brightness. The notebook's after-class half, defined color ranges and what every bag throws away, is this week's guided homework. Image projects begin here.</a:t>
-            </a:r>
-            <a:endParaRPr lang="en-US" sz="1100" dirty="0"/>
-          </a:p>
-        </p:txBody>
-      </p:sp>
-      <p:sp>
-        <p:nvSpPr>
-          <p:cNvPr id="24" name="Shape 22"/>
-          <p:cNvSpPr/>
-          <p:nvPr/>
-        </p:nvSpPr>
-        <p:spPr>
-          <a:xfrm>
-            <a:off x="640080" y="5493258"/>
-            <a:ext cx="868680" cy="450342"/>
-          </a:xfrm>
-          <a:prstGeom prst="roundRect">
-            <a:avLst>
-              <a:gd name="adj" fmla="val 12183"/>
-            </a:avLst>
-          </a:prstGeom>
-          <a:solidFill>
-            <a:srgbClr val="7A3B2E"/>
-          </a:solidFill>
-          <a:ln/>
-        </p:spPr>
-      </p:sp>
-      <p:sp>
-        <p:nvSpPr>
-          <p:cNvPr id="25" name="Text 23"/>
-          <p:cNvSpPr/>
-          <p:nvPr/>
-        </p:nvSpPr>
-        <p:spPr>
-          <a:xfrm>
-            <a:off x="640080" y="5493258"/>
-            <a:ext cx="868680" cy="450342"/>
-          </a:xfrm>
-          <a:prstGeom prst="rect">
-            <a:avLst/>
-          </a:prstGeom>
-          <a:noFill/>
-          <a:ln/>
-        </p:spPr>
-        <p:txBody>
-          <a:bodyPr wrap="square" rtlCol="0" anchor="ctr"/>
-          <a:lstStyle/>
-          <a:p>
-            <a:pPr algn="ctr" indent="0" marL="0">
-              <a:buNone/>
-            </a:pPr>
-            <a:r>
-              <a:rPr lang="en-US" sz="1100" b="1" dirty="0">
-                <a:solidFill>
-                  <a:srgbClr val="FFFFFF"/>
-                </a:solidFill>
-                <a:latin typeface="Calibri" pitchFamily="34" charset="0"/>
-                <a:ea typeface="Calibri" pitchFamily="34" charset="-122"/>
-                <a:cs typeface="Calibri" pitchFamily="34" charset="-120"/>
-              </a:rPr>
-              <a:t>1:52</a:t>
-            </a:r>
-            <a:endParaRPr lang="en-US" sz="1100" dirty="0"/>
-          </a:p>
-        </p:txBody>
-      </p:sp>
-      <p:sp>
-        <p:nvSpPr>
-          <p:cNvPr id="26" name="Text 24"/>
-          <p:cNvSpPr/>
-          <p:nvPr/>
-        </p:nvSpPr>
-        <p:spPr>
-          <a:xfrm>
-            <a:off x="1691640" y="5474970"/>
-            <a:ext cx="9646920" cy="560070"/>
-          </a:xfrm>
-          <a:prstGeom prst="rect">
-            <a:avLst/>
-          </a:prstGeom>
-          <a:noFill/>
-          <a:ln/>
-        </p:spPr>
-        <p:txBody>
-          <a:bodyPr wrap="square" rtlCol="0" anchor="ctr">
-            <a:spAutoFit/>
-          </a:bodyPr>
-          <a:lstStyle/>
-          <a:p>
-            <a:pPr indent="0" marL="0">
-              <a:buNone/>
-            </a:pPr>
-            <a:r>
-              <a:rPr lang="en-US" sz="1100" dirty="0">
-                <a:solidFill>
-                  <a:srgbClr val="1A1A1A"/>
-                </a:solidFill>
-                <a:latin typeface="Calibri" pitchFamily="34" charset="0"/>
-                <a:ea typeface="Calibri" pitchFamily="34" charset="-122"/>
-                <a:cs typeface="Calibri" pitchFamily="34" charset="-120"/>
-              </a:rPr>
-              <a:t>Preview of the methods ahead; the weekly routines introduced. First check-out.</a:t>
-            </a:r>
-            <a:endParaRPr lang="en-US" sz="1100" dirty="0"/>
+              <a:t>Interrogate the study, debate it, or critique each other's work.</a:t>
+            </a:r>
+            <a:endParaRPr lang="en-US" sz="1500" dirty="0"/>
           </a:p>
         </p:txBody>
       </p:sp>
@@ -4942,7 +4596,7 @@
                 <a:ea typeface="Cambria" pitchFamily="34" charset="-122"/>
                 <a:cs typeface="Cambria" pitchFamily="34" charset="-120"/>
               </a:rPr>
-              <a:t>Reading &amp; homework</a:t>
+              <a:t>The session</a:t>
             </a:r>
             <a:endParaRPr lang="en-US" sz="3000" dirty="0"/>
           </a:p>
@@ -4956,11 +4610,13 @@
         </p:nvSpPr>
         <p:spPr>
           <a:xfrm>
-            <a:off x="640080" y="1673352"/>
-            <a:ext cx="219456" cy="219456"/>
-          </a:xfrm>
-          <a:prstGeom prst="ellipse">
-            <a:avLst/>
+            <a:off x="640080" y="1572768"/>
+            <a:ext cx="868680" cy="450342"/>
+          </a:xfrm>
+          <a:prstGeom prst="roundRect">
+            <a:avLst>
+              <a:gd name="adj" fmla="val 12183"/>
+            </a:avLst>
           </a:prstGeom>
           <a:solidFill>
             <a:srgbClr val="7A3B2E"/>
@@ -4976,8 +4632,8 @@
         </p:nvSpPr>
         <p:spPr>
           <a:xfrm>
-            <a:off x="1051560" y="1600200"/>
-            <a:ext cx="10424160" cy="365760"/>
+            <a:off x="640080" y="1572768"/>
+            <a:ext cx="868680" cy="450342"/>
           </a:xfrm>
           <a:prstGeom prst="rect">
             <a:avLst/>
@@ -4989,21 +4645,21 @@
           <a:bodyPr wrap="square" rtlCol="0" anchor="ctr"/>
           <a:lstStyle/>
           <a:p>
-            <a:pPr indent="0" marL="0">
-              <a:buNone/>
-            </a:pPr>
-            <a:r>
-              <a:rPr lang="en-US" sz="1500" b="1" dirty="0">
-                <a:solidFill>
-                  <a:srgbClr val="7A3B2E"/>
+            <a:pPr algn="ctr" indent="0" marL="0">
+              <a:buNone/>
+            </a:pPr>
+            <a:r>
+              <a:rPr lang="en-US" sz="1100" b="1" dirty="0">
+                <a:solidFill>
+                  <a:srgbClr val="FFFFFF"/>
                 </a:solidFill>
                 <a:latin typeface="Calibri" pitchFamily="34" charset="0"/>
                 <a:ea typeface="Calibri" pitchFamily="34" charset="-122"/>
                 <a:cs typeface="Calibri" pitchFamily="34" charset="-120"/>
               </a:rPr>
-              <a:t>Reading</a:t>
-            </a:r>
-            <a:endParaRPr lang="en-US" sz="1500" dirty="0"/>
+              <a:t>0:00</a:t>
+            </a:r>
+            <a:endParaRPr lang="en-US" sz="1100" dirty="0"/>
           </a:p>
         </p:txBody>
       </p:sp>
@@ -5015,17 +4671,17 @@
         </p:nvSpPr>
         <p:spPr>
           <a:xfrm>
-            <a:off x="1051560" y="1984248"/>
-            <a:ext cx="10424160" cy="731520"/>
-          </a:xfrm>
-          <a:prstGeom prst="rect">
-            <a:avLst/>
-          </a:prstGeom>
-          <a:noFill/>
-          <a:ln/>
-        </p:spPr>
-        <p:txBody>
-          <a:bodyPr wrap="square" rtlCol="0" anchor="t">
+            <a:off x="1691640" y="1554480"/>
+            <a:ext cx="9646920" cy="560070"/>
+          </a:xfrm>
+          <a:prstGeom prst="rect">
+            <a:avLst/>
+          </a:prstGeom>
+          <a:noFill/>
+          <a:ln/>
+        </p:spPr>
+        <p:txBody>
+          <a:bodyPr wrap="square" rtlCol="0" anchor="ctr">
             <a:spAutoFit/>
           </a:bodyPr>
           <a:lstStyle/>
@@ -5034,7 +4690,7 @@
               <a:buNone/>
             </a:pPr>
             <a:r>
-              <a:rPr lang="en-US" sz="1400" dirty="0">
+              <a:rPr lang="en-US" sz="1100" dirty="0">
                 <a:solidFill>
                   <a:srgbClr val="1A1A1A"/>
                 </a:solidFill>
@@ -5042,9 +4698,9 @@
                 <a:ea typeface="Calibri" pitchFamily="34" charset="-122"/>
                 <a:cs typeface="Calibri" pitchFamily="34" charset="-120"/>
               </a:rPr>
-              <a:t>Bollen et al., the cognitive-distortions hockey stick (PNAS 2021), with the Schmidt et al. critique</a:t>
-            </a:r>
-            <a:endParaRPr lang="en-US" sz="1400" dirty="0"/>
+              <a:t>Introductions and working agreements, demonstrated in practice. Today's live coding deliberately includes real mistakes.</a:t>
+            </a:r>
+            <a:endParaRPr lang="en-US" sz="1100" dirty="0"/>
           </a:p>
         </p:txBody>
       </p:sp>
@@ -5056,14 +4712,16 @@
         </p:nvSpPr>
         <p:spPr>
           <a:xfrm>
-            <a:off x="640080" y="2633472"/>
-            <a:ext cx="219456" cy="219456"/>
-          </a:xfrm>
-          <a:prstGeom prst="ellipse">
-            <a:avLst/>
-          </a:prstGeom>
-          <a:solidFill>
-            <a:srgbClr val="3F6F5F"/>
+            <a:off x="640080" y="2132838"/>
+            <a:ext cx="868680" cy="450342"/>
+          </a:xfrm>
+          <a:prstGeom prst="roundRect">
+            <a:avLst>
+              <a:gd name="adj" fmla="val 12183"/>
+            </a:avLst>
+          </a:prstGeom>
+          <a:solidFill>
+            <a:srgbClr val="7A3B2E"/>
           </a:solidFill>
           <a:ln/>
         </p:spPr>
@@ -5076,8 +4734,8 @@
         </p:nvSpPr>
         <p:spPr>
           <a:xfrm>
-            <a:off x="1051560" y="2560320"/>
-            <a:ext cx="10424160" cy="365760"/>
+            <a:off x="640080" y="2132838"/>
+            <a:ext cx="868680" cy="450342"/>
           </a:xfrm>
           <a:prstGeom prst="rect">
             <a:avLst/>
@@ -5089,21 +4747,21 @@
           <a:bodyPr wrap="square" rtlCol="0" anchor="ctr"/>
           <a:lstStyle/>
           <a:p>
-            <a:pPr indent="0" marL="0">
-              <a:buNone/>
-            </a:pPr>
-            <a:r>
-              <a:rPr lang="en-US" sz="1500" b="1" dirty="0">
-                <a:solidFill>
-                  <a:srgbClr val="3F6F5F"/>
+            <a:pPr algn="ctr" indent="0" marL="0">
+              <a:buNone/>
+            </a:pPr>
+            <a:r>
+              <a:rPr lang="en-US" sz="1100" b="1" dirty="0">
+                <a:solidFill>
+                  <a:srgbClr val="FFFFFF"/>
                 </a:solidFill>
                 <a:latin typeface="Calibri" pitchFamily="34" charset="0"/>
                 <a:ea typeface="Calibri" pitchFamily="34" charset="-122"/>
                 <a:cs typeface="Calibri" pitchFamily="34" charset="-120"/>
               </a:rPr>
-              <a:t>Supplement</a:t>
-            </a:r>
-            <a:endParaRPr lang="en-US" sz="1500" dirty="0"/>
+              <a:t>0:10</a:t>
+            </a:r>
+            <a:endParaRPr lang="en-US" sz="1100" dirty="0"/>
           </a:p>
         </p:txBody>
       </p:sp>
@@ -5115,17 +4773,17 @@
         </p:nvSpPr>
         <p:spPr>
           <a:xfrm>
-            <a:off x="1051560" y="2944368"/>
-            <a:ext cx="10424160" cy="731520"/>
-          </a:xfrm>
-          <a:prstGeom prst="rect">
-            <a:avLst/>
-          </a:prstGeom>
-          <a:noFill/>
-          <a:ln/>
-        </p:spPr>
-        <p:txBody>
-          <a:bodyPr wrap="square" rtlCol="0" anchor="t">
+            <a:off x="1691640" y="2114550"/>
+            <a:ext cx="9646920" cy="560070"/>
+          </a:xfrm>
+          <a:prstGeom prst="rect">
+            <a:avLst/>
+          </a:prstGeom>
+          <a:noFill/>
+          <a:ln/>
+        </p:spPr>
+        <p:txBody>
+          <a:bodyPr wrap="square" rtlCol="0" anchor="ctr">
             <a:spAutoFit/>
           </a:bodyPr>
           <a:lstStyle/>
@@ -5134,7 +4792,7 @@
               <a:buNone/>
             </a:pPr>
             <a:r>
-              <a:rPr lang="en-US" sz="1400" dirty="0">
+              <a:rPr lang="en-US" sz="1100" dirty="0">
                 <a:solidFill>
                   <a:srgbClr val="1A1A1A"/>
                 </a:solidFill>
@@ -5142,9 +4800,9 @@
                 <a:ea typeface="Calibri" pitchFamily="34" charset="-122"/>
                 <a:cs typeface="Calibri" pitchFamily="34" charset="-120"/>
               </a:rPr>
-              <a:t>Robin Sloan, Writing with the machine; Drucker, Humanities Approaches to Graphical Display (DHQ 2011), the case that all data is capta</a:t>
-            </a:r>
-            <a:endParaRPr lang="en-US" sz="1400" dirty="0"/>
+              <a:t>Lecture, the stakes: machines already read culture at scale, the feed ranking what you see, the moderation filter, the model trained on scraped art and prose, and that reading happens without you. Counting culture has produced real knowledge (the screenplay verb split, the Rowling unmasking, pop music's 1991 revolution) and real mistakes, and both look identical until someone checks. In ten weeks you do the reading yourself and publish something checkable.</a:t>
+            </a:r>
+            <a:endParaRPr lang="en-US" sz="1100" dirty="0"/>
           </a:p>
         </p:txBody>
       </p:sp>
@@ -5156,14 +4814,16 @@
         </p:nvSpPr>
         <p:spPr>
           <a:xfrm>
-            <a:off x="640080" y="3593592"/>
-            <a:ext cx="219456" cy="219456"/>
-          </a:xfrm>
-          <a:prstGeom prst="ellipse">
-            <a:avLst/>
-          </a:prstGeom>
-          <a:solidFill>
-            <a:srgbClr val="B9852F"/>
+            <a:off x="640080" y="2692908"/>
+            <a:ext cx="868680" cy="450342"/>
+          </a:xfrm>
+          <a:prstGeom prst="roundRect">
+            <a:avLst>
+              <a:gd name="adj" fmla="val 12183"/>
+            </a:avLst>
+          </a:prstGeom>
+          <a:solidFill>
+            <a:srgbClr val="7A3B2E"/>
           </a:solidFill>
           <a:ln/>
         </p:spPr>
@@ -5176,8 +4836,8 @@
         </p:nvSpPr>
         <p:spPr>
           <a:xfrm>
-            <a:off x="1051560" y="3520440"/>
-            <a:ext cx="10424160" cy="365760"/>
+            <a:off x="640080" y="2692908"/>
+            <a:ext cx="868680" cy="450342"/>
           </a:xfrm>
           <a:prstGeom prst="rect">
             <a:avLst/>
@@ -5189,21 +4849,21 @@
           <a:bodyPr wrap="square" rtlCol="0" anchor="ctr"/>
           <a:lstStyle/>
           <a:p>
-            <a:pPr indent="0" marL="0">
-              <a:buNone/>
-            </a:pPr>
-            <a:r>
-              <a:rPr lang="en-US" sz="1500" b="1" dirty="0">
-                <a:solidFill>
-                  <a:srgbClr val="B9852F"/>
+            <a:pPr algn="ctr" indent="0" marL="0">
+              <a:buNone/>
+            </a:pPr>
+            <a:r>
+              <a:rPr lang="en-US" sz="1100" b="1" dirty="0">
+                <a:solidFill>
+                  <a:srgbClr val="FFFFFF"/>
                 </a:solidFill>
                 <a:latin typeface="Calibri" pitchFamily="34" charset="0"/>
                 <a:ea typeface="Calibri" pitchFamily="34" charset="-122"/>
                 <a:cs typeface="Calibri" pitchFamily="34" charset="-120"/>
               </a:rPr>
-              <a:t>Deeper (optional)</a:t>
-            </a:r>
-            <a:endParaRPr lang="en-US" sz="1500" dirty="0"/>
+              <a:t>0:28</a:t>
+            </a:r>
+            <a:endParaRPr lang="en-US" sz="1100" dirty="0"/>
           </a:p>
         </p:txBody>
       </p:sp>
@@ -5215,17 +4875,17 @@
         </p:nvSpPr>
         <p:spPr>
           <a:xfrm>
-            <a:off x="1051560" y="3904488"/>
-            <a:ext cx="10424160" cy="731520"/>
-          </a:xfrm>
-          <a:prstGeom prst="rect">
-            <a:avLst/>
-          </a:prstGeom>
-          <a:noFill/>
-          <a:ln/>
-        </p:spPr>
-        <p:txBody>
-          <a:bodyPr wrap="square" rtlCol="0" anchor="t">
+            <a:off x="1691640" y="2674620"/>
+            <a:ext cx="9646920" cy="560070"/>
+          </a:xfrm>
+          <a:prstGeom prst="rect">
+            <a:avLst/>
+          </a:prstGeom>
+          <a:noFill/>
+          <a:ln/>
+        </p:spPr>
+        <p:txBody>
+          <a:bodyPr wrap="square" rtlCol="0" anchor="ctr">
             <a:spAutoFit/>
           </a:bodyPr>
           <a:lstStyle/>
@@ -5234,7 +4894,7 @@
               <a:buNone/>
             </a:pPr>
             <a:r>
-              <a:rPr lang="en-US" sz="1400" dirty="0">
+              <a:rPr lang="en-US" sz="1100" dirty="0">
                 <a:solidFill>
                   <a:srgbClr val="1A1A1A"/>
                 </a:solidFill>
@@ -5242,9 +4902,9 @@
                 <a:ea typeface="Calibri" pitchFamily="34" charset="-122"/>
                 <a:cs typeface="Calibri" pitchFamily="34" charset="-120"/>
               </a:rPr>
-              <a:t>Moretti, Conjectures on World Literature (NLR 2000), the founding argument for reading culture at scale</a:t>
-            </a:r>
-            <a:endParaRPr lang="en-US" sz="1400" dirty="0"/>
+              <a:t>Look at This, then Question It: She Giggles, He Gallops.</a:t>
+            </a:r>
+            <a:endParaRPr lang="en-US" sz="1100" dirty="0"/>
           </a:p>
         </p:txBody>
       </p:sp>
@@ -5256,14 +4916,16 @@
         </p:nvSpPr>
         <p:spPr>
           <a:xfrm>
-            <a:off x="640080" y="4553712"/>
-            <a:ext cx="219456" cy="219456"/>
-          </a:xfrm>
-          <a:prstGeom prst="ellipse">
-            <a:avLst/>
-          </a:prstGeom>
-          <a:solidFill>
-            <a:srgbClr val="3F6F5F"/>
+            <a:off x="640080" y="3252978"/>
+            <a:ext cx="868680" cy="450342"/>
+          </a:xfrm>
+          <a:prstGeom prst="roundRect">
+            <a:avLst>
+              <a:gd name="adj" fmla="val 12183"/>
+            </a:avLst>
+          </a:prstGeom>
+          <a:solidFill>
+            <a:srgbClr val="7A3B2E"/>
           </a:solidFill>
           <a:ln/>
         </p:spPr>
@@ -5276,8 +4938,8 @@
         </p:nvSpPr>
         <p:spPr>
           <a:xfrm>
-            <a:off x="1051560" y="4480560"/>
-            <a:ext cx="10424160" cy="365760"/>
+            <a:off x="640080" y="3252978"/>
+            <a:ext cx="868680" cy="450342"/>
           </a:xfrm>
           <a:prstGeom prst="rect">
             <a:avLst/>
@@ -5289,21 +4951,21 @@
           <a:bodyPr wrap="square" rtlCol="0" anchor="ctr"/>
           <a:lstStyle/>
           <a:p>
-            <a:pPr indent="0" marL="0">
-              <a:buNone/>
-            </a:pPr>
-            <a:r>
-              <a:rPr lang="en-US" sz="1500" b="1" dirty="0">
-                <a:solidFill>
-                  <a:srgbClr val="3F6F5F"/>
+            <a:pPr algn="ctr" indent="0" marL="0">
+              <a:buNone/>
+            </a:pPr>
+            <a:r>
+              <a:rPr lang="en-US" sz="1100" b="1" dirty="0">
+                <a:solidFill>
+                  <a:srgbClr val="FFFFFF"/>
                 </a:solidFill>
                 <a:latin typeface="Calibri" pitchFamily="34" charset="0"/>
                 <a:ea typeface="Calibri" pitchFamily="34" charset="-122"/>
                 <a:cs typeface="Calibri" pitchFamily="34" charset="-120"/>
               </a:rPr>
-              <a:t>Sketch</a:t>
-            </a:r>
-            <a:endParaRPr lang="en-US" sz="1500" dirty="0"/>
+              <a:t>0:35</a:t>
+            </a:r>
+            <a:endParaRPr lang="en-US" sz="1100" dirty="0"/>
           </a:p>
         </p:txBody>
       </p:sp>
@@ -5315,17 +4977,17 @@
         </p:nvSpPr>
         <p:spPr>
           <a:xfrm>
-            <a:off x="1051560" y="4864608"/>
-            <a:ext cx="10424160" cy="731520"/>
-          </a:xfrm>
-          <a:prstGeom prst="rect">
-            <a:avLst/>
-          </a:prstGeom>
-          <a:noFill/>
-          <a:ln/>
-        </p:spPr>
-        <p:txBody>
-          <a:bodyPr wrap="square" rtlCol="0" anchor="t">
+            <a:off x="1691640" y="3234690"/>
+            <a:ext cx="9646920" cy="560070"/>
+          </a:xfrm>
+          <a:prstGeom prst="rect">
+            <a:avLst/>
+          </a:prstGeom>
+          <a:noFill/>
+          <a:ln/>
+        </p:spPr>
+        <p:txBody>
+          <a:bodyPr wrap="square" rtlCol="0" anchor="ctr">
             <a:spAutoFit/>
           </a:bodyPr>
           <a:lstStyle/>
@@ -5334,7 +4996,7 @@
               <a:buNone/>
             </a:pPr>
             <a:r>
-              <a:rPr lang="en-US" sz="1400" dirty="0">
+              <a:rPr lang="en-US" sz="1100" dirty="0">
                 <a:solidFill>
                   <a:srgbClr val="1A1A1A"/>
                 </a:solidFill>
@@ -5342,9 +5004,9 @@
                 <a:ea typeface="Calibri" pitchFamily="34" charset="-122"/>
                 <a:cs typeface="Calibri" pitchFamily="34" charset="-120"/>
               </a:rPr>
-              <a:t>One question from your life, answerable with data (three sentences), plus the notebook's after-class half (~20 minutes).</a:t>
-            </a:r>
-            <a:endParaRPr lang="en-US" sz="1400" dirty="0"/>
+              <a:t>The vocabulary and the map (no code): corpus, method, model, embedding, plus what data itself is. A CSV, anatomized on screen (rows are observations, columns are recorded facts), and Drucker's correction: data is capta, taken not given. Two minutes in pairs: what did the makers of the wedding table take, and what did they leave out? The deliverable, shown: a web essay on a runnable notebook.</a:t>
+            </a:r>
+            <a:endParaRPr lang="en-US" sz="1100" dirty="0"/>
           </a:p>
         </p:txBody>
       </p:sp>
@@ -5356,11 +5018,13 @@
         </p:nvSpPr>
         <p:spPr>
           <a:xfrm>
-            <a:off x="640080" y="5513832"/>
-            <a:ext cx="219456" cy="219456"/>
-          </a:xfrm>
-          <a:prstGeom prst="ellipse">
-            <a:avLst/>
+            <a:off x="640080" y="3813048"/>
+            <a:ext cx="868680" cy="450342"/>
+          </a:xfrm>
+          <a:prstGeom prst="roundRect">
+            <a:avLst>
+              <a:gd name="adj" fmla="val 12183"/>
+            </a:avLst>
           </a:prstGeom>
           <a:solidFill>
             <a:srgbClr val="7A3B2E"/>
@@ -5376,8 +5040,8 @@
         </p:nvSpPr>
         <p:spPr>
           <a:xfrm>
-            <a:off x="1051560" y="5440680"/>
-            <a:ext cx="10424160" cy="365760"/>
+            <a:off x="640080" y="3813048"/>
+            <a:ext cx="868680" cy="450342"/>
           </a:xfrm>
           <a:prstGeom prst="rect">
             <a:avLst/>
@@ -5389,21 +5053,21 @@
           <a:bodyPr wrap="square" rtlCol="0" anchor="ctr"/>
           <a:lstStyle/>
           <a:p>
-            <a:pPr indent="0" marL="0">
-              <a:buNone/>
-            </a:pPr>
-            <a:r>
-              <a:rPr lang="en-US" sz="1500" b="1" dirty="0">
-                <a:solidFill>
-                  <a:srgbClr val="7A3B2E"/>
+            <a:pPr algn="ctr" indent="0" marL="0">
+              <a:buNone/>
+            </a:pPr>
+            <a:r>
+              <a:rPr lang="en-US" sz="1100" b="1" dirty="0">
+                <a:solidFill>
+                  <a:srgbClr val="FFFFFF"/>
                 </a:solidFill>
                 <a:latin typeface="Calibri" pitchFamily="34" charset="0"/>
                 <a:ea typeface="Calibri" pitchFamily="34" charset="-122"/>
                 <a:cs typeface="Calibri" pitchFamily="34" charset="-120"/>
               </a:rPr>
-              <a:t>Check (AI closed)</a:t>
-            </a:r>
-            <a:endParaRPr lang="en-US" sz="1500" dirty="0"/>
+              <a:t>0:47</a:t>
+            </a:r>
+            <a:endParaRPr lang="en-US" sz="1100" dirty="0"/>
           </a:p>
         </p:txBody>
       </p:sp>
@@ -5415,17 +5079,17 @@
         </p:nvSpPr>
         <p:spPr>
           <a:xfrm>
-            <a:off x="1051560" y="5824728"/>
-            <a:ext cx="10424160" cy="731520"/>
-          </a:xfrm>
-          <a:prstGeom prst="rect">
-            <a:avLst/>
-          </a:prstGeom>
-          <a:noFill/>
-          <a:ln/>
-        </p:spPr>
-        <p:txBody>
-          <a:bodyPr wrap="square" rtlCol="0" anchor="t">
+            <a:off x="1691640" y="3794760"/>
+            <a:ext cx="9646920" cy="560070"/>
+          </a:xfrm>
+          <a:prstGeom prst="rect">
+            <a:avLst/>
+          </a:prstGeom>
+          <a:noFill/>
+          <a:ln/>
+        </p:spPr>
+        <p:txBody>
+          <a:bodyPr wrap="square" rtlCol="0" anchor="ctr">
             <a:spAutoFit/>
           </a:bodyPr>
           <a:lstStyle/>
@@ -5434,7 +5098,7 @@
               <a:buNone/>
             </a:pPr>
             <a:r>
-              <a:rPr lang="en-US" sz="1400" dirty="0">
+              <a:rPr lang="en-US" sz="1100" dirty="0">
                 <a:solidFill>
                   <a:srgbClr val="1A1A1A"/>
                 </a:solidFill>
@@ -5442,9 +5106,315 @@
                 <a:ea typeface="Calibri" pitchFamily="34" charset="-122"/>
                 <a:cs typeface="Calibri" pitchFamily="34" charset="-120"/>
               </a:rPr>
-              <a:t>Trace it: one written sentence predicting what your cell does before you run it. (Competency 1.)</a:t>
-            </a:r>
-            <a:endParaRPr lang="en-US" sz="1400" dirty="0"/>
+              <a:t>Lab 1 (worked, participatory): copy the notebook to Drive and mount Drive into the runtime (this is how your corpus and results survive Colab wiping the session, everything saving to one project folder), put a Gemini key in Colab Secrets, load NYT wedding data, make a first chart. Hand out the common-errors cheat sheet. Then solo with a partner: draft three questions, pick one, have the AI write the code, run it, chart it. Write one sentence predicting your cell before you run it.</a:t>
+            </a:r>
+            <a:endParaRPr lang="en-US" sz="1100" dirty="0"/>
+          </a:p>
+        </p:txBody>
+      </p:sp>
+      <p:sp>
+        <p:nvSpPr>
+          <p:cNvPr id="18" name="Shape 16"/>
+          <p:cNvSpPr/>
+          <p:nvPr/>
+        </p:nvSpPr>
+        <p:spPr>
+          <a:xfrm>
+            <a:off x="640080" y="4373118"/>
+            <a:ext cx="868680" cy="450342"/>
+          </a:xfrm>
+          <a:prstGeom prst="roundRect">
+            <a:avLst>
+              <a:gd name="adj" fmla="val 12183"/>
+            </a:avLst>
+          </a:prstGeom>
+          <a:solidFill>
+            <a:srgbClr val="7A3B2E"/>
+          </a:solidFill>
+          <a:ln/>
+        </p:spPr>
+      </p:sp>
+      <p:sp>
+        <p:nvSpPr>
+          <p:cNvPr id="19" name="Text 17"/>
+          <p:cNvSpPr/>
+          <p:nvPr/>
+        </p:nvSpPr>
+        <p:spPr>
+          <a:xfrm>
+            <a:off x="640080" y="4373118"/>
+            <a:ext cx="868680" cy="450342"/>
+          </a:xfrm>
+          <a:prstGeom prst="rect">
+            <a:avLst/>
+          </a:prstGeom>
+          <a:noFill/>
+          <a:ln/>
+        </p:spPr>
+        <p:txBody>
+          <a:bodyPr wrap="square" rtlCol="0" anchor="ctr"/>
+          <a:lstStyle/>
+          <a:p>
+            <a:pPr algn="ctr" indent="0" marL="0">
+              <a:buNone/>
+            </a:pPr>
+            <a:r>
+              <a:rPr lang="en-US" sz="1100" b="1" dirty="0">
+                <a:solidFill>
+                  <a:srgbClr val="FFFFFF"/>
+                </a:solidFill>
+                <a:latin typeface="Calibri" pitchFamily="34" charset="0"/>
+                <a:ea typeface="Calibri" pitchFamily="34" charset="-122"/>
+                <a:cs typeface="Calibri" pitchFamily="34" charset="-120"/>
+              </a:rPr>
+              <a:t>1:20</a:t>
+            </a:r>
+            <a:endParaRPr lang="en-US" sz="1100" dirty="0"/>
+          </a:p>
+        </p:txBody>
+      </p:sp>
+      <p:sp>
+        <p:nvSpPr>
+          <p:cNvPr id="20" name="Text 18"/>
+          <p:cNvSpPr/>
+          <p:nvPr/>
+        </p:nvSpPr>
+        <p:spPr>
+          <a:xfrm>
+            <a:off x="1691640" y="4354830"/>
+            <a:ext cx="9646920" cy="560070"/>
+          </a:xfrm>
+          <a:prstGeom prst="rect">
+            <a:avLst/>
+          </a:prstGeom>
+          <a:noFill/>
+          <a:ln/>
+        </p:spPr>
+        <p:txBody>
+          <a:bodyPr wrap="square" rtlCol="0" anchor="ctr">
+            <a:spAutoFit/>
+          </a:bodyPr>
+          <a:lstStyle/>
+          <a:p>
+            <a:pPr indent="0" marL="0">
+              <a:buNone/>
+            </a:pPr>
+            <a:r>
+              <a:rPr lang="en-US" sz="1100" dirty="0">
+                <a:solidFill>
+                  <a:srgbClr val="1A1A1A"/>
+                </a:solidFill>
+                <a:latin typeface="Calibri" pitchFamily="34" charset="0"/>
+                <a:ea typeface="Calibri" pitchFamily="34" charset="-122"/>
+                <a:cs typeface="Calibri" pitchFamily="34" charset="-120"/>
+              </a:rPr>
+              <a:t>Break</a:t>
+            </a:r>
+            <a:endParaRPr lang="en-US" sz="1100" dirty="0"/>
+          </a:p>
+        </p:txBody>
+      </p:sp>
+      <p:sp>
+        <p:nvSpPr>
+          <p:cNvPr id="21" name="Shape 19"/>
+          <p:cNvSpPr/>
+          <p:nvPr/>
+        </p:nvSpPr>
+        <p:spPr>
+          <a:xfrm>
+            <a:off x="640080" y="4933188"/>
+            <a:ext cx="868680" cy="450342"/>
+          </a:xfrm>
+          <a:prstGeom prst="roundRect">
+            <a:avLst>
+              <a:gd name="adj" fmla="val 12183"/>
+            </a:avLst>
+          </a:prstGeom>
+          <a:solidFill>
+            <a:srgbClr val="7A3B2E"/>
+          </a:solidFill>
+          <a:ln/>
+        </p:spPr>
+      </p:sp>
+      <p:sp>
+        <p:nvSpPr>
+          <p:cNvPr id="22" name="Text 20"/>
+          <p:cNvSpPr/>
+          <p:nvPr/>
+        </p:nvSpPr>
+        <p:spPr>
+          <a:xfrm>
+            <a:off x="640080" y="4933188"/>
+            <a:ext cx="868680" cy="450342"/>
+          </a:xfrm>
+          <a:prstGeom prst="rect">
+            <a:avLst/>
+          </a:prstGeom>
+          <a:noFill/>
+          <a:ln/>
+        </p:spPr>
+        <p:txBody>
+          <a:bodyPr wrap="square" rtlCol="0" anchor="ctr"/>
+          <a:lstStyle/>
+          <a:p>
+            <a:pPr algn="ctr" indent="0" marL="0">
+              <a:buNone/>
+            </a:pPr>
+            <a:r>
+              <a:rPr lang="en-US" sz="1100" b="1" dirty="0">
+                <a:solidFill>
+                  <a:srgbClr val="FFFFFF"/>
+                </a:solidFill>
+                <a:latin typeface="Calibri" pitchFamily="34" charset="0"/>
+                <a:ea typeface="Calibri" pitchFamily="34" charset="-122"/>
+                <a:cs typeface="Calibri" pitchFamily="34" charset="-120"/>
+              </a:rPr>
+              <a:t>1:30</a:t>
+            </a:r>
+            <a:endParaRPr lang="en-US" sz="1100" dirty="0"/>
+          </a:p>
+        </p:txBody>
+      </p:sp>
+      <p:sp>
+        <p:nvSpPr>
+          <p:cNvPr id="23" name="Text 21"/>
+          <p:cNvSpPr/>
+          <p:nvPr/>
+        </p:nvSpPr>
+        <p:spPr>
+          <a:xfrm>
+            <a:off x="1691640" y="4914900"/>
+            <a:ext cx="9646920" cy="560070"/>
+          </a:xfrm>
+          <a:prstGeom prst="rect">
+            <a:avLst/>
+          </a:prstGeom>
+          <a:noFill/>
+          <a:ln/>
+        </p:spPr>
+        <p:txBody>
+          <a:bodyPr wrap="square" rtlCol="0" anchor="ctr">
+            <a:spAutoFit/>
+          </a:bodyPr>
+          <a:lstStyle/>
+          <a:p>
+            <a:pPr indent="0" marL="0">
+              <a:buNone/>
+            </a:pPr>
+            <a:r>
+              <a:rPr lang="en-US" sz="1100" dirty="0">
+                <a:solidFill>
+                  <a:srgbClr val="1A1A1A"/>
+                </a:solidFill>
+                <a:latin typeface="Calibri" pitchFamily="34" charset="0"/>
+                <a:ea typeface="Calibri" pitchFamily="34" charset="-122"/>
+                <a:cs typeface="Calibri" pitchFamily="34" charset="-120"/>
+              </a:rPr>
+              <a:t>Lab 2 (worked): count words, then pixels. The real headlines' top words (stop-words dominate until removed, the first counting decision), then the Met image corpus ranked darkest to brightest by average brightness. The notebook's after-class half, defined color ranges and what every bag throws away, is this week's guided homework. Image projects begin here.</a:t>
+            </a:r>
+            <a:endParaRPr lang="en-US" sz="1100" dirty="0"/>
+          </a:p>
+        </p:txBody>
+      </p:sp>
+      <p:sp>
+        <p:nvSpPr>
+          <p:cNvPr id="24" name="Shape 22"/>
+          <p:cNvSpPr/>
+          <p:nvPr/>
+        </p:nvSpPr>
+        <p:spPr>
+          <a:xfrm>
+            <a:off x="640080" y="5493258"/>
+            <a:ext cx="868680" cy="450342"/>
+          </a:xfrm>
+          <a:prstGeom prst="roundRect">
+            <a:avLst>
+              <a:gd name="adj" fmla="val 12183"/>
+            </a:avLst>
+          </a:prstGeom>
+          <a:solidFill>
+            <a:srgbClr val="7A3B2E"/>
+          </a:solidFill>
+          <a:ln/>
+        </p:spPr>
+      </p:sp>
+      <p:sp>
+        <p:nvSpPr>
+          <p:cNvPr id="25" name="Text 23"/>
+          <p:cNvSpPr/>
+          <p:nvPr/>
+        </p:nvSpPr>
+        <p:spPr>
+          <a:xfrm>
+            <a:off x="640080" y="5493258"/>
+            <a:ext cx="868680" cy="450342"/>
+          </a:xfrm>
+          <a:prstGeom prst="rect">
+            <a:avLst/>
+          </a:prstGeom>
+          <a:noFill/>
+          <a:ln/>
+        </p:spPr>
+        <p:txBody>
+          <a:bodyPr wrap="square" rtlCol="0" anchor="ctr"/>
+          <a:lstStyle/>
+          <a:p>
+            <a:pPr algn="ctr" indent="0" marL="0">
+              <a:buNone/>
+            </a:pPr>
+            <a:r>
+              <a:rPr lang="en-US" sz="1100" b="1" dirty="0">
+                <a:solidFill>
+                  <a:srgbClr val="FFFFFF"/>
+                </a:solidFill>
+                <a:latin typeface="Calibri" pitchFamily="34" charset="0"/>
+                <a:ea typeface="Calibri" pitchFamily="34" charset="-122"/>
+                <a:cs typeface="Calibri" pitchFamily="34" charset="-120"/>
+              </a:rPr>
+              <a:t>1:52</a:t>
+            </a:r>
+            <a:endParaRPr lang="en-US" sz="1100" dirty="0"/>
+          </a:p>
+        </p:txBody>
+      </p:sp>
+      <p:sp>
+        <p:nvSpPr>
+          <p:cNvPr id="26" name="Text 24"/>
+          <p:cNvSpPr/>
+          <p:nvPr/>
+        </p:nvSpPr>
+        <p:spPr>
+          <a:xfrm>
+            <a:off x="1691640" y="5474970"/>
+            <a:ext cx="9646920" cy="560070"/>
+          </a:xfrm>
+          <a:prstGeom prst="rect">
+            <a:avLst/>
+          </a:prstGeom>
+          <a:noFill/>
+          <a:ln/>
+        </p:spPr>
+        <p:txBody>
+          <a:bodyPr wrap="square" rtlCol="0" anchor="ctr">
+            <a:spAutoFit/>
+          </a:bodyPr>
+          <a:lstStyle/>
+          <a:p>
+            <a:pPr indent="0" marL="0">
+              <a:buNone/>
+            </a:pPr>
+            <a:r>
+              <a:rPr lang="en-US" sz="1100" dirty="0">
+                <a:solidFill>
+                  <a:srgbClr val="1A1A1A"/>
+                </a:solidFill>
+                <a:latin typeface="Calibri" pitchFamily="34" charset="0"/>
+                <a:ea typeface="Calibri" pitchFamily="34" charset="-122"/>
+                <a:cs typeface="Calibri" pitchFamily="34" charset="-120"/>
+              </a:rPr>
+              <a:t>Preview of the methods ahead; the weekly routines introduced. First check-out.</a:t>
+            </a:r>
+            <a:endParaRPr lang="en-US" sz="1100" dirty="0"/>
           </a:p>
         </p:txBody>
       </p:sp>
@@ -5489,7 +5459,7 @@
         <p:spPr>
           <a:xfrm>
             <a:off x="640080" y="640080"/>
-            <a:ext cx="10058400" cy="320040"/>
+            <a:ext cx="10058400" cy="731520"/>
           </a:xfrm>
           <a:prstGeom prst="rect">
             <a:avLst/>
@@ -5505,7 +5475,66 @@
               <a:buNone/>
             </a:pPr>
             <a:r>
-              <a:rPr lang="en-US" sz="1300" b="1" spc="300" kern="0" dirty="0">
+              <a:rPr lang="en-US" sz="3000" b="1" dirty="0">
+                <a:solidFill>
+                  <a:srgbClr val="1A1A1A"/>
+                </a:solidFill>
+                <a:latin typeface="Cambria" pitchFamily="34" charset="0"/>
+                <a:ea typeface="Cambria" pitchFamily="34" charset="-122"/>
+                <a:cs typeface="Cambria" pitchFamily="34" charset="-120"/>
+              </a:rPr>
+              <a:t>Reading &amp; homework</a:t>
+            </a:r>
+            <a:endParaRPr lang="en-US" sz="3000" dirty="0"/>
+          </a:p>
+        </p:txBody>
+      </p:sp>
+      <p:sp>
+        <p:nvSpPr>
+          <p:cNvPr id="3" name="Shape 1"/>
+          <p:cNvSpPr/>
+          <p:nvPr/>
+        </p:nvSpPr>
+        <p:spPr>
+          <a:xfrm>
+            <a:off x="640080" y="1673352"/>
+            <a:ext cx="219456" cy="219456"/>
+          </a:xfrm>
+          <a:prstGeom prst="ellipse">
+            <a:avLst/>
+          </a:prstGeom>
+          <a:solidFill>
+            <a:srgbClr val="7A3B2E"/>
+          </a:solidFill>
+          <a:ln/>
+        </p:spPr>
+      </p:sp>
+      <p:sp>
+        <p:nvSpPr>
+          <p:cNvPr id="4" name="Text 2"/>
+          <p:cNvSpPr/>
+          <p:nvPr/>
+        </p:nvSpPr>
+        <p:spPr>
+          <a:xfrm>
+            <a:off x="1051560" y="1600200"/>
+            <a:ext cx="10424160" cy="365760"/>
+          </a:xfrm>
+          <a:prstGeom prst="rect">
+            <a:avLst/>
+          </a:prstGeom>
+          <a:noFill/>
+          <a:ln/>
+        </p:spPr>
+        <p:txBody>
+          <a:bodyPr wrap="square" rtlCol="0" anchor="ctr"/>
+          <a:lstStyle/>
+          <a:p>
+            <a:pPr indent="0" marL="0">
+              <a:buNone/>
+            </a:pPr>
+            <a:r>
+              <a:rPr lang="en-US" sz="1500" b="1" dirty="0">
                 <a:solidFill>
                   <a:srgbClr val="7A3B2E"/>
                 </a:solidFill>
@@ -5513,72 +5542,11 @@
                 <a:ea typeface="Calibri" pitchFamily="34" charset="-122"/>
                 <a:cs typeface="Calibri" pitchFamily="34" charset="-120"/>
               </a:rPr>
-              <a:t>HOW THIS WEEK CONNECTS</a:t>
-            </a:r>
-            <a:endParaRPr lang="en-US" sz="1300" dirty="0"/>
-          </a:p>
-        </p:txBody>
-      </p:sp>
-      <p:sp>
-        <p:nvSpPr>
-          <p:cNvPr id="3" name="Text 1"/>
-          <p:cNvSpPr/>
-          <p:nvPr/>
-        </p:nvSpPr>
-        <p:spPr>
-          <a:xfrm>
-            <a:off x="640080" y="987552"/>
-            <a:ext cx="10058400" cy="640080"/>
-          </a:xfrm>
-          <a:prstGeom prst="rect">
-            <a:avLst/>
-          </a:prstGeom>
-          <a:noFill/>
-          <a:ln/>
-        </p:spPr>
-        <p:txBody>
-          <a:bodyPr wrap="square" rtlCol="0" anchor="ctr"/>
-          <a:lstStyle/>
-          <a:p>
-            <a:pPr indent="0" marL="0">
-              <a:buNone/>
-            </a:pPr>
-            <a:r>
-              <a:rPr lang="en-US" sz="2800" b="1" dirty="0">
-                <a:solidFill>
-                  <a:srgbClr val="1A1A1A"/>
-                </a:solidFill>
-                <a:latin typeface="Cambria" pitchFamily="34" charset="0"/>
-                <a:ea typeface="Cambria" pitchFamily="34" charset="-122"/>
-                <a:cs typeface="Cambria" pitchFamily="34" charset="-120"/>
-              </a:rPr>
-              <a:t>The course's through-lines</a:t>
-            </a:r>
-            <a:endParaRPr lang="en-US" sz="2800" dirty="0"/>
-          </a:p>
-        </p:txBody>
-      </p:sp>
-      <p:sp>
-        <p:nvSpPr>
-          <p:cNvPr id="4" name="Shape 2"/>
-          <p:cNvSpPr/>
-          <p:nvPr/>
-        </p:nvSpPr>
-        <p:spPr>
-          <a:xfrm>
-            <a:off x="640080" y="2057400"/>
-            <a:ext cx="457200" cy="457200"/>
-          </a:xfrm>
-          <a:prstGeom prst="roundRect">
-            <a:avLst>
-              <a:gd name="adj" fmla="val 16000"/>
-            </a:avLst>
-          </a:prstGeom>
-          <a:solidFill>
-            <a:srgbClr val="7A3B2E"/>
-          </a:solidFill>
-          <a:ln/>
-        </p:spPr>
+              <a:t>Reading</a:t>
+            </a:r>
+            <a:endParaRPr lang="en-US" sz="1500" dirty="0"/>
+          </a:p>
+        </p:txBody>
       </p:sp>
       <p:sp>
         <p:nvSpPr>
@@ -5588,86 +5556,8 @@
         </p:nvSpPr>
         <p:spPr>
           <a:xfrm>
-            <a:off x="640080" y="2057400"/>
-            <a:ext cx="457200" cy="457200"/>
-          </a:xfrm>
-          <a:prstGeom prst="rect">
-            <a:avLst/>
-          </a:prstGeom>
-          <a:noFill/>
-          <a:ln/>
-        </p:spPr>
-        <p:txBody>
-          <a:bodyPr wrap="square" rtlCol="0" anchor="ctr"/>
-          <a:lstStyle/>
-          <a:p>
-            <a:pPr algn="ctr" indent="0" marL="0">
-              <a:buNone/>
-            </a:pPr>
-            <a:r>
-              <a:rPr lang="en-US" sz="2000" b="1" dirty="0">
-                <a:solidFill>
-                  <a:srgbClr val="FFFFFF"/>
-                </a:solidFill>
-                <a:latin typeface="Cambria" pitchFamily="34" charset="0"/>
-                <a:ea typeface="Cambria" pitchFamily="34" charset="-122"/>
-                <a:cs typeface="Cambria" pitchFamily="34" charset="-120"/>
-              </a:rPr>
-              <a:t>1</a:t>
-            </a:r>
-            <a:endParaRPr lang="en-US" sz="2000" dirty="0"/>
-          </a:p>
-        </p:txBody>
-      </p:sp>
-      <p:sp>
-        <p:nvSpPr>
-          <p:cNvPr id="6" name="Text 4"/>
-          <p:cNvSpPr/>
-          <p:nvPr/>
-        </p:nvSpPr>
-        <p:spPr>
-          <a:xfrm>
-            <a:off x="1371600" y="2020824"/>
-            <a:ext cx="10332720" cy="411480"/>
-          </a:xfrm>
-          <a:prstGeom prst="rect">
-            <a:avLst/>
-          </a:prstGeom>
-          <a:noFill/>
-          <a:ln/>
-        </p:spPr>
-        <p:txBody>
-          <a:bodyPr wrap="square" rtlCol="0" anchor="ctr"/>
-          <a:lstStyle/>
-          <a:p>
-            <a:pPr indent="0" marL="0">
-              <a:buNone/>
-            </a:pPr>
-            <a:r>
-              <a:rPr lang="en-US" sz="1900" b="1" dirty="0">
-                <a:solidFill>
-                  <a:srgbClr val="7A3B2E"/>
-                </a:solidFill>
-                <a:latin typeface="Cambria" pitchFamily="34" charset="0"/>
-                <a:ea typeface="Cambria" pitchFamily="34" charset="-122"/>
-                <a:cs typeface="Cambria" pitchFamily="34" charset="-120"/>
-              </a:rPr>
-              <a:t>Read work critically</a:t>
-            </a:r>
-            <a:endParaRPr lang="en-US" sz="1900" dirty="0"/>
-          </a:p>
-        </p:txBody>
-      </p:sp>
-      <p:sp>
-        <p:nvSpPr>
-          <p:cNvPr id="7" name="Text 5"/>
-          <p:cNvSpPr/>
-          <p:nvPr/>
-        </p:nvSpPr>
-        <p:spPr>
-          <a:xfrm>
-            <a:off x="1371600" y="2441448"/>
-            <a:ext cx="10332720" cy="914400"/>
+            <a:off x="1051560" y="1984248"/>
+            <a:ext cx="10424160" cy="731520"/>
           </a:xfrm>
           <a:prstGeom prst="rect">
             <a:avLst/>
@@ -5682,13 +5572,10 @@
           <a:lstStyle/>
           <a:p>
             <a:pPr indent="0" marL="0">
-              <a:lnSpc>
-                <a:spcPct val="112000"/>
-              </a:lnSpc>
-              <a:buNone/>
-            </a:pPr>
-            <a:r>
-              <a:rPr lang="en-US" sz="1450" dirty="0">
+              <a:buNone/>
+            </a:pPr>
+            <a:r>
+              <a:rPr lang="en-US" sz="1400" dirty="0">
                 <a:solidFill>
                   <a:srgbClr val="1A1A1A"/>
                 </a:solidFill>
@@ -5696,27 +5583,25 @@
                 <a:ea typeface="Calibri" pitchFamily="34" charset="-122"/>
                 <a:cs typeface="Calibri" pitchFamily="34" charset="-120"/>
               </a:rPr>
-              <a:t>She Giggles, He Gallops is excellent and its choices are debatable. Admiring and questioning at once is the habit the course is built on.</a:t>
-            </a:r>
-            <a:endParaRPr lang="en-US" sz="1450" dirty="0"/>
-          </a:p>
-        </p:txBody>
-      </p:sp>
-      <p:sp>
-        <p:nvSpPr>
-          <p:cNvPr id="8" name="Shape 6"/>
-          <p:cNvSpPr/>
-          <p:nvPr/>
-        </p:nvSpPr>
-        <p:spPr>
-          <a:xfrm>
-            <a:off x="640080" y="3520440"/>
-            <a:ext cx="457200" cy="457200"/>
-          </a:xfrm>
-          <a:prstGeom prst="roundRect">
-            <a:avLst>
-              <a:gd name="adj" fmla="val 16000"/>
-            </a:avLst>
+              <a:t>Bollen et al., the cognitive-distortions hockey stick (PNAS 2021), with the Schmidt et al. critique</a:t>
+            </a:r>
+            <a:endParaRPr lang="en-US" sz="1400" dirty="0"/>
+          </a:p>
+        </p:txBody>
+      </p:sp>
+      <p:sp>
+        <p:nvSpPr>
+          <p:cNvPr id="6" name="Shape 4"/>
+          <p:cNvSpPr/>
+          <p:nvPr/>
+        </p:nvSpPr>
+        <p:spPr>
+          <a:xfrm>
+            <a:off x="640080" y="2633472"/>
+            <a:ext cx="219456" cy="219456"/>
+          </a:xfrm>
+          <a:prstGeom prst="ellipse">
+            <a:avLst/>
           </a:prstGeom>
           <a:solidFill>
             <a:srgbClr val="3F6F5F"/>
@@ -5726,14 +5611,14 @@
       </p:sp>
       <p:sp>
         <p:nvSpPr>
-          <p:cNvPr id="9" name="Text 7"/>
-          <p:cNvSpPr/>
-          <p:nvPr/>
-        </p:nvSpPr>
-        <p:spPr>
-          <a:xfrm>
-            <a:off x="640080" y="3520440"/>
-            <a:ext cx="457200" cy="457200"/>
+          <p:cNvPr id="7" name="Text 5"/>
+          <p:cNvSpPr/>
+          <p:nvPr/>
+        </p:nvSpPr>
+        <p:spPr>
+          <a:xfrm>
+            <a:off x="1051560" y="2560320"/>
+            <a:ext cx="10424160" cy="365760"/>
           </a:xfrm>
           <a:prstGeom prst="rect">
             <a:avLst/>
@@ -5745,73 +5630,34 @@
           <a:bodyPr wrap="square" rtlCol="0" anchor="ctr"/>
           <a:lstStyle/>
           <a:p>
-            <a:pPr algn="ctr" indent="0" marL="0">
-              <a:buNone/>
-            </a:pPr>
-            <a:r>
-              <a:rPr lang="en-US" sz="2000" b="1" dirty="0">
-                <a:solidFill>
-                  <a:srgbClr val="FFFFFF"/>
-                </a:solidFill>
-                <a:latin typeface="Cambria" pitchFamily="34" charset="0"/>
-                <a:ea typeface="Cambria" pitchFamily="34" charset="-122"/>
-                <a:cs typeface="Cambria" pitchFamily="34" charset="-120"/>
-              </a:rPr>
-              <a:t>2</a:t>
-            </a:r>
-            <a:endParaRPr lang="en-US" sz="2000" dirty="0"/>
-          </a:p>
-        </p:txBody>
-      </p:sp>
-      <p:sp>
-        <p:nvSpPr>
-          <p:cNvPr id="10" name="Text 8"/>
-          <p:cNvSpPr/>
-          <p:nvPr/>
-        </p:nvSpPr>
-        <p:spPr>
-          <a:xfrm>
-            <a:off x="1371600" y="3483864"/>
-            <a:ext cx="10332720" cy="411480"/>
-          </a:xfrm>
-          <a:prstGeom prst="rect">
-            <a:avLst/>
-          </a:prstGeom>
-          <a:noFill/>
-          <a:ln/>
-        </p:spPr>
-        <p:txBody>
-          <a:bodyPr wrap="square" rtlCol="0" anchor="ctr"/>
-          <a:lstStyle/>
-          <a:p>
-            <a:pPr indent="0" marL="0">
-              <a:buNone/>
-            </a:pPr>
-            <a:r>
-              <a:rPr lang="en-US" sz="1900" b="1" dirty="0">
+            <a:pPr indent="0" marL="0">
+              <a:buNone/>
+            </a:pPr>
+            <a:r>
+              <a:rPr lang="en-US" sz="1500" b="1" dirty="0">
                 <a:solidFill>
                   <a:srgbClr val="3F6F5F"/>
                 </a:solidFill>
-                <a:latin typeface="Cambria" pitchFamily="34" charset="0"/>
-                <a:ea typeface="Cambria" pitchFamily="34" charset="-122"/>
-                <a:cs typeface="Cambria" pitchFamily="34" charset="-120"/>
-              </a:rPr>
-              <a:t>Make something real</a:t>
-            </a:r>
-            <a:endParaRPr lang="en-US" sz="1900" dirty="0"/>
-          </a:p>
-        </p:txBody>
-      </p:sp>
-      <p:sp>
-        <p:nvSpPr>
-          <p:cNvPr id="11" name="Text 9"/>
-          <p:cNvSpPr/>
-          <p:nvPr/>
-        </p:nvSpPr>
-        <p:spPr>
-          <a:xfrm>
-            <a:off x="1371600" y="3904488"/>
-            <a:ext cx="10332720" cy="914400"/>
+                <a:latin typeface="Calibri" pitchFamily="34" charset="0"/>
+                <a:ea typeface="Calibri" pitchFamily="34" charset="-122"/>
+                <a:cs typeface="Calibri" pitchFamily="34" charset="-120"/>
+              </a:rPr>
+              <a:t>Supplement</a:t>
+            </a:r>
+            <a:endParaRPr lang="en-US" sz="1500" dirty="0"/>
+          </a:p>
+        </p:txBody>
+      </p:sp>
+      <p:sp>
+        <p:nvSpPr>
+          <p:cNvPr id="8" name="Text 6"/>
+          <p:cNvSpPr/>
+          <p:nvPr/>
+        </p:nvSpPr>
+        <p:spPr>
+          <a:xfrm>
+            <a:off x="1051560" y="2944368"/>
+            <a:ext cx="10424160" cy="731520"/>
           </a:xfrm>
           <a:prstGeom prst="rect">
             <a:avLst/>
@@ -5826,13 +5672,10 @@
           <a:lstStyle/>
           <a:p>
             <a:pPr indent="0" marL="0">
-              <a:lnSpc>
-                <a:spcPct val="112000"/>
-              </a:lnSpc>
-              <a:buNone/>
-            </a:pPr>
-            <a:r>
-              <a:rPr lang="en-US" sz="1450" dirty="0">
+              <a:buNone/>
+            </a:pPr>
+            <a:r>
+              <a:rPr lang="en-US" sz="1400" dirty="0">
                 <a:solidFill>
                   <a:srgbClr val="1A1A1A"/>
                 </a:solidFill>
@@ -5840,27 +5683,25 @@
                 <a:ea typeface="Calibri" pitchFamily="34" charset="-122"/>
                 <a:cs typeface="Calibri" pitchFamily="34" charset="-120"/>
               </a:rPr>
-              <a:t>A complete investigation by the first break, before any theory.</a:t>
-            </a:r>
-            <a:endParaRPr lang="en-US" sz="1450" dirty="0"/>
-          </a:p>
-        </p:txBody>
-      </p:sp>
-      <p:sp>
-        <p:nvSpPr>
-          <p:cNvPr id="12" name="Shape 10"/>
-          <p:cNvSpPr/>
-          <p:nvPr/>
-        </p:nvSpPr>
-        <p:spPr>
-          <a:xfrm>
-            <a:off x="640080" y="4983480"/>
-            <a:ext cx="457200" cy="457200"/>
-          </a:xfrm>
-          <a:prstGeom prst="roundRect">
-            <a:avLst>
-              <a:gd name="adj" fmla="val 16000"/>
-            </a:avLst>
+              <a:t>Robin Sloan, Writing with the machine; Drucker, Humanities Approaches to Graphical Display (DHQ 2011), the case that all data is capta</a:t>
+            </a:r>
+            <a:endParaRPr lang="en-US" sz="1400" dirty="0"/>
+          </a:p>
+        </p:txBody>
+      </p:sp>
+      <p:sp>
+        <p:nvSpPr>
+          <p:cNvPr id="9" name="Shape 7"/>
+          <p:cNvSpPr/>
+          <p:nvPr/>
+        </p:nvSpPr>
+        <p:spPr>
+          <a:xfrm>
+            <a:off x="640080" y="3593592"/>
+            <a:ext cx="219456" cy="219456"/>
+          </a:xfrm>
+          <a:prstGeom prst="ellipse">
+            <a:avLst/>
           </a:prstGeom>
           <a:solidFill>
             <a:srgbClr val="B9852F"/>
@@ -5870,14 +5711,14 @@
       </p:sp>
       <p:sp>
         <p:nvSpPr>
-          <p:cNvPr id="13" name="Text 11"/>
-          <p:cNvSpPr/>
-          <p:nvPr/>
-        </p:nvSpPr>
-        <p:spPr>
-          <a:xfrm>
-            <a:off x="640080" y="4983480"/>
-            <a:ext cx="457200" cy="457200"/>
+          <p:cNvPr id="10" name="Text 8"/>
+          <p:cNvSpPr/>
+          <p:nvPr/>
+        </p:nvSpPr>
+        <p:spPr>
+          <a:xfrm>
+            <a:off x="1051560" y="3520440"/>
+            <a:ext cx="10424160" cy="365760"/>
           </a:xfrm>
           <a:prstGeom prst="rect">
             <a:avLst/>
@@ -5889,73 +5730,34 @@
           <a:bodyPr wrap="square" rtlCol="0" anchor="ctr"/>
           <a:lstStyle/>
           <a:p>
-            <a:pPr algn="ctr" indent="0" marL="0">
-              <a:buNone/>
-            </a:pPr>
-            <a:r>
-              <a:rPr lang="en-US" sz="2000" b="1" dirty="0">
-                <a:solidFill>
-                  <a:srgbClr val="FFFFFF"/>
-                </a:solidFill>
-                <a:latin typeface="Cambria" pitchFamily="34" charset="0"/>
-                <a:ea typeface="Cambria" pitchFamily="34" charset="-122"/>
-                <a:cs typeface="Cambria" pitchFamily="34" charset="-120"/>
-              </a:rPr>
-              <a:t>3</a:t>
-            </a:r>
-            <a:endParaRPr lang="en-US" sz="2000" dirty="0"/>
-          </a:p>
-        </p:txBody>
-      </p:sp>
-      <p:sp>
-        <p:nvSpPr>
-          <p:cNvPr id="14" name="Text 12"/>
-          <p:cNvSpPr/>
-          <p:nvPr/>
-        </p:nvSpPr>
-        <p:spPr>
-          <a:xfrm>
-            <a:off x="1371600" y="4946904"/>
-            <a:ext cx="10332720" cy="411480"/>
-          </a:xfrm>
-          <a:prstGeom prst="rect">
-            <a:avLst/>
-          </a:prstGeom>
-          <a:noFill/>
-          <a:ln/>
-        </p:spPr>
-        <p:txBody>
-          <a:bodyPr wrap="square" rtlCol="0" anchor="ctr"/>
-          <a:lstStyle/>
-          <a:p>
-            <a:pPr indent="0" marL="0">
-              <a:buNone/>
-            </a:pPr>
-            <a:r>
-              <a:rPr lang="en-US" sz="1900" b="1" dirty="0">
+            <a:pPr indent="0" marL="0">
+              <a:buNone/>
+            </a:pPr>
+            <a:r>
+              <a:rPr lang="en-US" sz="1500" b="1" dirty="0">
                 <a:solidFill>
                   <a:srgbClr val="B9852F"/>
                 </a:solidFill>
-                <a:latin typeface="Cambria" pitchFamily="34" charset="0"/>
-                <a:ea typeface="Cambria" pitchFamily="34" charset="-122"/>
-                <a:cs typeface="Cambria" pitchFamily="34" charset="-120"/>
-              </a:rPr>
-              <a:t>Images are culture too</a:t>
-            </a:r>
-            <a:endParaRPr lang="en-US" sz="1900" dirty="0"/>
-          </a:p>
-        </p:txBody>
-      </p:sp>
-      <p:sp>
-        <p:nvSpPr>
-          <p:cNvPr id="15" name="Text 13"/>
-          <p:cNvSpPr/>
-          <p:nvPr/>
-        </p:nvSpPr>
-        <p:spPr>
-          <a:xfrm>
-            <a:off x="1371600" y="5367528"/>
-            <a:ext cx="10332720" cy="914400"/>
+                <a:latin typeface="Calibri" pitchFamily="34" charset="0"/>
+                <a:ea typeface="Calibri" pitchFamily="34" charset="-122"/>
+                <a:cs typeface="Calibri" pitchFamily="34" charset="-120"/>
+              </a:rPr>
+              <a:t>Deeper (optional)</a:t>
+            </a:r>
+            <a:endParaRPr lang="en-US" sz="1500" dirty="0"/>
+          </a:p>
+        </p:txBody>
+      </p:sp>
+      <p:sp>
+        <p:nvSpPr>
+          <p:cNvPr id="11" name="Text 9"/>
+          <p:cNvSpPr/>
+          <p:nvPr/>
+        </p:nvSpPr>
+        <p:spPr>
+          <a:xfrm>
+            <a:off x="1051560" y="3904488"/>
+            <a:ext cx="10424160" cy="731520"/>
           </a:xfrm>
           <a:prstGeom prst="rect">
             <a:avLst/>
@@ -5970,13 +5772,10 @@
           <a:lstStyle/>
           <a:p>
             <a:pPr indent="0" marL="0">
-              <a:lnSpc>
-                <a:spcPct val="112000"/>
-              </a:lnSpc>
-              <a:buNone/>
-            </a:pPr>
-            <a:r>
-              <a:rPr lang="en-US" sz="1450" dirty="0">
+              <a:buNone/>
+            </a:pPr>
+            <a:r>
+              <a:rPr lang="en-US" sz="1400" dirty="0">
                 <a:solidFill>
                   <a:srgbClr val="1A1A1A"/>
                 </a:solidFill>
@@ -5984,9 +5783,209 @@
                 <a:ea typeface="Calibri" pitchFamily="34" charset="-122"/>
                 <a:cs typeface="Calibri" pitchFamily="34" charset="-120"/>
               </a:rPr>
-              <a:t>A picture is numbers: you counted pixels on day one, and images continue as a co-equal corpus through all ten weeks.</a:t>
-            </a:r>
-            <a:endParaRPr lang="en-US" sz="1450" dirty="0"/>
+              <a:t>Moretti, Conjectures on World Literature (NLR 2000), the founding argument for reading culture at scale</a:t>
+            </a:r>
+            <a:endParaRPr lang="en-US" sz="1400" dirty="0"/>
+          </a:p>
+        </p:txBody>
+      </p:sp>
+      <p:sp>
+        <p:nvSpPr>
+          <p:cNvPr id="12" name="Shape 10"/>
+          <p:cNvSpPr/>
+          <p:nvPr/>
+        </p:nvSpPr>
+        <p:spPr>
+          <a:xfrm>
+            <a:off x="640080" y="4553712"/>
+            <a:ext cx="219456" cy="219456"/>
+          </a:xfrm>
+          <a:prstGeom prst="ellipse">
+            <a:avLst/>
+          </a:prstGeom>
+          <a:solidFill>
+            <a:srgbClr val="3F6F5F"/>
+          </a:solidFill>
+          <a:ln/>
+        </p:spPr>
+      </p:sp>
+      <p:sp>
+        <p:nvSpPr>
+          <p:cNvPr id="13" name="Text 11"/>
+          <p:cNvSpPr/>
+          <p:nvPr/>
+        </p:nvSpPr>
+        <p:spPr>
+          <a:xfrm>
+            <a:off x="1051560" y="4480560"/>
+            <a:ext cx="10424160" cy="365760"/>
+          </a:xfrm>
+          <a:prstGeom prst="rect">
+            <a:avLst/>
+          </a:prstGeom>
+          <a:noFill/>
+          <a:ln/>
+        </p:spPr>
+        <p:txBody>
+          <a:bodyPr wrap="square" rtlCol="0" anchor="ctr"/>
+          <a:lstStyle/>
+          <a:p>
+            <a:pPr indent="0" marL="0">
+              <a:buNone/>
+            </a:pPr>
+            <a:r>
+              <a:rPr lang="en-US" sz="1500" b="1" dirty="0">
+                <a:solidFill>
+                  <a:srgbClr val="3F6F5F"/>
+                </a:solidFill>
+                <a:latin typeface="Calibri" pitchFamily="34" charset="0"/>
+                <a:ea typeface="Calibri" pitchFamily="34" charset="-122"/>
+                <a:cs typeface="Calibri" pitchFamily="34" charset="-120"/>
+              </a:rPr>
+              <a:t>Sketch</a:t>
+            </a:r>
+            <a:endParaRPr lang="en-US" sz="1500" dirty="0"/>
+          </a:p>
+        </p:txBody>
+      </p:sp>
+      <p:sp>
+        <p:nvSpPr>
+          <p:cNvPr id="14" name="Text 12"/>
+          <p:cNvSpPr/>
+          <p:nvPr/>
+        </p:nvSpPr>
+        <p:spPr>
+          <a:xfrm>
+            <a:off x="1051560" y="4864608"/>
+            <a:ext cx="10424160" cy="731520"/>
+          </a:xfrm>
+          <a:prstGeom prst="rect">
+            <a:avLst/>
+          </a:prstGeom>
+          <a:noFill/>
+          <a:ln/>
+        </p:spPr>
+        <p:txBody>
+          <a:bodyPr wrap="square" rtlCol="0" anchor="t">
+            <a:spAutoFit/>
+          </a:bodyPr>
+          <a:lstStyle/>
+          <a:p>
+            <a:pPr indent="0" marL="0">
+              <a:buNone/>
+            </a:pPr>
+            <a:r>
+              <a:rPr lang="en-US" sz="1400" dirty="0">
+                <a:solidFill>
+                  <a:srgbClr val="1A1A1A"/>
+                </a:solidFill>
+                <a:latin typeface="Calibri" pitchFamily="34" charset="0"/>
+                <a:ea typeface="Calibri" pitchFamily="34" charset="-122"/>
+                <a:cs typeface="Calibri" pitchFamily="34" charset="-120"/>
+              </a:rPr>
+              <a:t>One question from your life, answerable with data (three sentences), plus the notebook's after-class half (~20 minutes).</a:t>
+            </a:r>
+            <a:endParaRPr lang="en-US" sz="1400" dirty="0"/>
+          </a:p>
+        </p:txBody>
+      </p:sp>
+      <p:sp>
+        <p:nvSpPr>
+          <p:cNvPr id="15" name="Shape 13"/>
+          <p:cNvSpPr/>
+          <p:nvPr/>
+        </p:nvSpPr>
+        <p:spPr>
+          <a:xfrm>
+            <a:off x="640080" y="5513832"/>
+            <a:ext cx="219456" cy="219456"/>
+          </a:xfrm>
+          <a:prstGeom prst="ellipse">
+            <a:avLst/>
+          </a:prstGeom>
+          <a:solidFill>
+            <a:srgbClr val="7A3B2E"/>
+          </a:solidFill>
+          <a:ln/>
+        </p:spPr>
+      </p:sp>
+      <p:sp>
+        <p:nvSpPr>
+          <p:cNvPr id="16" name="Text 14"/>
+          <p:cNvSpPr/>
+          <p:nvPr/>
+        </p:nvSpPr>
+        <p:spPr>
+          <a:xfrm>
+            <a:off x="1051560" y="5440680"/>
+            <a:ext cx="10424160" cy="365760"/>
+          </a:xfrm>
+          <a:prstGeom prst="rect">
+            <a:avLst/>
+          </a:prstGeom>
+          <a:noFill/>
+          <a:ln/>
+        </p:spPr>
+        <p:txBody>
+          <a:bodyPr wrap="square" rtlCol="0" anchor="ctr"/>
+          <a:lstStyle/>
+          <a:p>
+            <a:pPr indent="0" marL="0">
+              <a:buNone/>
+            </a:pPr>
+            <a:r>
+              <a:rPr lang="en-US" sz="1500" b="1" dirty="0">
+                <a:solidFill>
+                  <a:srgbClr val="7A3B2E"/>
+                </a:solidFill>
+                <a:latin typeface="Calibri" pitchFamily="34" charset="0"/>
+                <a:ea typeface="Calibri" pitchFamily="34" charset="-122"/>
+                <a:cs typeface="Calibri" pitchFamily="34" charset="-120"/>
+              </a:rPr>
+              <a:t>Check (AI closed)</a:t>
+            </a:r>
+            <a:endParaRPr lang="en-US" sz="1500" dirty="0"/>
+          </a:p>
+        </p:txBody>
+      </p:sp>
+      <p:sp>
+        <p:nvSpPr>
+          <p:cNvPr id="17" name="Text 15"/>
+          <p:cNvSpPr/>
+          <p:nvPr/>
+        </p:nvSpPr>
+        <p:spPr>
+          <a:xfrm>
+            <a:off x="1051560" y="5824728"/>
+            <a:ext cx="10424160" cy="731520"/>
+          </a:xfrm>
+          <a:prstGeom prst="rect">
+            <a:avLst/>
+          </a:prstGeom>
+          <a:noFill/>
+          <a:ln/>
+        </p:spPr>
+        <p:txBody>
+          <a:bodyPr wrap="square" rtlCol="0" anchor="t">
+            <a:spAutoFit/>
+          </a:bodyPr>
+          <a:lstStyle/>
+          <a:p>
+            <a:pPr indent="0" marL="0">
+              <a:buNone/>
+            </a:pPr>
+            <a:r>
+              <a:rPr lang="en-US" sz="1400" dirty="0">
+                <a:solidFill>
+                  <a:srgbClr val="1A1A1A"/>
+                </a:solidFill>
+                <a:latin typeface="Calibri" pitchFamily="34" charset="0"/>
+                <a:ea typeface="Calibri" pitchFamily="34" charset="-122"/>
+                <a:cs typeface="Calibri" pitchFamily="34" charset="-120"/>
+              </a:rPr>
+              <a:t>Trace it: one written sentence predicting what your cell does before you run it. (Competency 1.)</a:t>
+            </a:r>
+            <a:endParaRPr lang="en-US" sz="1400" dirty="0"/>
           </a:p>
         </p:txBody>
       </p:sp>
@@ -6001,6 +6000,548 @@
 <file path=ppt/slides/slide16.xml><?xml version="1.0" encoding="utf-8"?>
 <p:sld xmlns:a="http://schemas.openxmlformats.org/drawingml/2006/main" xmlns:r="http://schemas.openxmlformats.org/officeDocument/2006/relationships" xmlns:p="http://schemas.openxmlformats.org/presentationml/2006/main">
   <p:cSld name="Slide 16">
+    <p:bg>
+      <p:bgPr>
+        <a:solidFill>
+          <a:srgbClr val="FFFFFF"/>
+        </a:solidFill>
+      </p:bgPr>
+    </p:bg>
+    <p:spTree>
+      <p:nvGrpSpPr>
+        <p:cNvPr id="1" name=""/>
+        <p:cNvGrpSpPr/>
+        <p:nvPr/>
+      </p:nvGrpSpPr>
+      <p:grpSpPr>
+        <a:xfrm>
+          <a:off x="0" y="0"/>
+          <a:ext cx="0" cy="0"/>
+          <a:chOff x="0" y="0"/>
+          <a:chExt cx="0" cy="0"/>
+        </a:xfrm>
+      </p:grpSpPr>
+      <p:sp>
+        <p:nvSpPr>
+          <p:cNvPr id="2" name="Text 0"/>
+          <p:cNvSpPr/>
+          <p:nvPr/>
+        </p:nvSpPr>
+        <p:spPr>
+          <a:xfrm>
+            <a:off x="640080" y="640080"/>
+            <a:ext cx="10058400" cy="320040"/>
+          </a:xfrm>
+          <a:prstGeom prst="rect">
+            <a:avLst/>
+          </a:prstGeom>
+          <a:noFill/>
+          <a:ln/>
+        </p:spPr>
+        <p:txBody>
+          <a:bodyPr wrap="square" rtlCol="0" anchor="ctr"/>
+          <a:lstStyle/>
+          <a:p>
+            <a:pPr indent="0" marL="0">
+              <a:buNone/>
+            </a:pPr>
+            <a:r>
+              <a:rPr lang="en-US" sz="1300" b="1" spc="300" kern="0" dirty="0">
+                <a:solidFill>
+                  <a:srgbClr val="7A3B2E"/>
+                </a:solidFill>
+                <a:latin typeface="Calibri" pitchFamily="34" charset="0"/>
+                <a:ea typeface="Calibri" pitchFamily="34" charset="-122"/>
+                <a:cs typeface="Calibri" pitchFamily="34" charset="-120"/>
+              </a:rPr>
+              <a:t>HOW THIS WEEK CONNECTS</a:t>
+            </a:r>
+            <a:endParaRPr lang="en-US" sz="1300" dirty="0"/>
+          </a:p>
+        </p:txBody>
+      </p:sp>
+      <p:sp>
+        <p:nvSpPr>
+          <p:cNvPr id="3" name="Text 1"/>
+          <p:cNvSpPr/>
+          <p:nvPr/>
+        </p:nvSpPr>
+        <p:spPr>
+          <a:xfrm>
+            <a:off x="640080" y="987552"/>
+            <a:ext cx="10058400" cy="640080"/>
+          </a:xfrm>
+          <a:prstGeom prst="rect">
+            <a:avLst/>
+          </a:prstGeom>
+          <a:noFill/>
+          <a:ln/>
+        </p:spPr>
+        <p:txBody>
+          <a:bodyPr wrap="square" rtlCol="0" anchor="ctr"/>
+          <a:lstStyle/>
+          <a:p>
+            <a:pPr indent="0" marL="0">
+              <a:buNone/>
+            </a:pPr>
+            <a:r>
+              <a:rPr lang="en-US" sz="2800" b="1" dirty="0">
+                <a:solidFill>
+                  <a:srgbClr val="1A1A1A"/>
+                </a:solidFill>
+                <a:latin typeface="Cambria" pitchFamily="34" charset="0"/>
+                <a:ea typeface="Cambria" pitchFamily="34" charset="-122"/>
+                <a:cs typeface="Cambria" pitchFamily="34" charset="-120"/>
+              </a:rPr>
+              <a:t>The course's through-lines</a:t>
+            </a:r>
+            <a:endParaRPr lang="en-US" sz="2800" dirty="0"/>
+          </a:p>
+        </p:txBody>
+      </p:sp>
+      <p:sp>
+        <p:nvSpPr>
+          <p:cNvPr id="4" name="Shape 2"/>
+          <p:cNvSpPr/>
+          <p:nvPr/>
+        </p:nvSpPr>
+        <p:spPr>
+          <a:xfrm>
+            <a:off x="640080" y="2057400"/>
+            <a:ext cx="457200" cy="457200"/>
+          </a:xfrm>
+          <a:prstGeom prst="roundRect">
+            <a:avLst>
+              <a:gd name="adj" fmla="val 16000"/>
+            </a:avLst>
+          </a:prstGeom>
+          <a:solidFill>
+            <a:srgbClr val="7A3B2E"/>
+          </a:solidFill>
+          <a:ln/>
+        </p:spPr>
+      </p:sp>
+      <p:sp>
+        <p:nvSpPr>
+          <p:cNvPr id="5" name="Text 3"/>
+          <p:cNvSpPr/>
+          <p:nvPr/>
+        </p:nvSpPr>
+        <p:spPr>
+          <a:xfrm>
+            <a:off x="640080" y="2057400"/>
+            <a:ext cx="457200" cy="457200"/>
+          </a:xfrm>
+          <a:prstGeom prst="rect">
+            <a:avLst/>
+          </a:prstGeom>
+          <a:noFill/>
+          <a:ln/>
+        </p:spPr>
+        <p:txBody>
+          <a:bodyPr wrap="square" rtlCol="0" anchor="ctr"/>
+          <a:lstStyle/>
+          <a:p>
+            <a:pPr algn="ctr" indent="0" marL="0">
+              <a:buNone/>
+            </a:pPr>
+            <a:r>
+              <a:rPr lang="en-US" sz="2000" b="1" dirty="0">
+                <a:solidFill>
+                  <a:srgbClr val="FFFFFF"/>
+                </a:solidFill>
+                <a:latin typeface="Cambria" pitchFamily="34" charset="0"/>
+                <a:ea typeface="Cambria" pitchFamily="34" charset="-122"/>
+                <a:cs typeface="Cambria" pitchFamily="34" charset="-120"/>
+              </a:rPr>
+              <a:t>1</a:t>
+            </a:r>
+            <a:endParaRPr lang="en-US" sz="2000" dirty="0"/>
+          </a:p>
+        </p:txBody>
+      </p:sp>
+      <p:sp>
+        <p:nvSpPr>
+          <p:cNvPr id="6" name="Text 4"/>
+          <p:cNvSpPr/>
+          <p:nvPr/>
+        </p:nvSpPr>
+        <p:spPr>
+          <a:xfrm>
+            <a:off x="1371600" y="2020824"/>
+            <a:ext cx="10332720" cy="411480"/>
+          </a:xfrm>
+          <a:prstGeom prst="rect">
+            <a:avLst/>
+          </a:prstGeom>
+          <a:noFill/>
+          <a:ln/>
+        </p:spPr>
+        <p:txBody>
+          <a:bodyPr wrap="square" rtlCol="0" anchor="ctr"/>
+          <a:lstStyle/>
+          <a:p>
+            <a:pPr indent="0" marL="0">
+              <a:buNone/>
+            </a:pPr>
+            <a:r>
+              <a:rPr lang="en-US" sz="1900" b="1" dirty="0">
+                <a:solidFill>
+                  <a:srgbClr val="7A3B2E"/>
+                </a:solidFill>
+                <a:latin typeface="Cambria" pitchFamily="34" charset="0"/>
+                <a:ea typeface="Cambria" pitchFamily="34" charset="-122"/>
+                <a:cs typeface="Cambria" pitchFamily="34" charset="-120"/>
+              </a:rPr>
+              <a:t>Read work critically</a:t>
+            </a:r>
+            <a:endParaRPr lang="en-US" sz="1900" dirty="0"/>
+          </a:p>
+        </p:txBody>
+      </p:sp>
+      <p:sp>
+        <p:nvSpPr>
+          <p:cNvPr id="7" name="Text 5"/>
+          <p:cNvSpPr/>
+          <p:nvPr/>
+        </p:nvSpPr>
+        <p:spPr>
+          <a:xfrm>
+            <a:off x="1371600" y="2441448"/>
+            <a:ext cx="10332720" cy="914400"/>
+          </a:xfrm>
+          <a:prstGeom prst="rect">
+            <a:avLst/>
+          </a:prstGeom>
+          <a:noFill/>
+          <a:ln/>
+        </p:spPr>
+        <p:txBody>
+          <a:bodyPr wrap="square" rtlCol="0" anchor="t">
+            <a:spAutoFit/>
+          </a:bodyPr>
+          <a:lstStyle/>
+          <a:p>
+            <a:pPr indent="0" marL="0">
+              <a:lnSpc>
+                <a:spcPct val="112000"/>
+              </a:lnSpc>
+              <a:buNone/>
+            </a:pPr>
+            <a:r>
+              <a:rPr lang="en-US" sz="1450" dirty="0">
+                <a:solidFill>
+                  <a:srgbClr val="1A1A1A"/>
+                </a:solidFill>
+                <a:latin typeface="Calibri" pitchFamily="34" charset="0"/>
+                <a:ea typeface="Calibri" pitchFamily="34" charset="-122"/>
+                <a:cs typeface="Calibri" pitchFamily="34" charset="-120"/>
+              </a:rPr>
+              <a:t>She Giggles, He Gallops is excellent and its choices are debatable. Admiring and questioning at once is the habit the course is built on.</a:t>
+            </a:r>
+            <a:endParaRPr lang="en-US" sz="1450" dirty="0"/>
+          </a:p>
+        </p:txBody>
+      </p:sp>
+      <p:sp>
+        <p:nvSpPr>
+          <p:cNvPr id="8" name="Shape 6"/>
+          <p:cNvSpPr/>
+          <p:nvPr/>
+        </p:nvSpPr>
+        <p:spPr>
+          <a:xfrm>
+            <a:off x="640080" y="3520440"/>
+            <a:ext cx="457200" cy="457200"/>
+          </a:xfrm>
+          <a:prstGeom prst="roundRect">
+            <a:avLst>
+              <a:gd name="adj" fmla="val 16000"/>
+            </a:avLst>
+          </a:prstGeom>
+          <a:solidFill>
+            <a:srgbClr val="3F6F5F"/>
+          </a:solidFill>
+          <a:ln/>
+        </p:spPr>
+      </p:sp>
+      <p:sp>
+        <p:nvSpPr>
+          <p:cNvPr id="9" name="Text 7"/>
+          <p:cNvSpPr/>
+          <p:nvPr/>
+        </p:nvSpPr>
+        <p:spPr>
+          <a:xfrm>
+            <a:off x="640080" y="3520440"/>
+            <a:ext cx="457200" cy="457200"/>
+          </a:xfrm>
+          <a:prstGeom prst="rect">
+            <a:avLst/>
+          </a:prstGeom>
+          <a:noFill/>
+          <a:ln/>
+        </p:spPr>
+        <p:txBody>
+          <a:bodyPr wrap="square" rtlCol="0" anchor="ctr"/>
+          <a:lstStyle/>
+          <a:p>
+            <a:pPr algn="ctr" indent="0" marL="0">
+              <a:buNone/>
+            </a:pPr>
+            <a:r>
+              <a:rPr lang="en-US" sz="2000" b="1" dirty="0">
+                <a:solidFill>
+                  <a:srgbClr val="FFFFFF"/>
+                </a:solidFill>
+                <a:latin typeface="Cambria" pitchFamily="34" charset="0"/>
+                <a:ea typeface="Cambria" pitchFamily="34" charset="-122"/>
+                <a:cs typeface="Cambria" pitchFamily="34" charset="-120"/>
+              </a:rPr>
+              <a:t>2</a:t>
+            </a:r>
+            <a:endParaRPr lang="en-US" sz="2000" dirty="0"/>
+          </a:p>
+        </p:txBody>
+      </p:sp>
+      <p:sp>
+        <p:nvSpPr>
+          <p:cNvPr id="10" name="Text 8"/>
+          <p:cNvSpPr/>
+          <p:nvPr/>
+        </p:nvSpPr>
+        <p:spPr>
+          <a:xfrm>
+            <a:off x="1371600" y="3483864"/>
+            <a:ext cx="10332720" cy="411480"/>
+          </a:xfrm>
+          <a:prstGeom prst="rect">
+            <a:avLst/>
+          </a:prstGeom>
+          <a:noFill/>
+          <a:ln/>
+        </p:spPr>
+        <p:txBody>
+          <a:bodyPr wrap="square" rtlCol="0" anchor="ctr"/>
+          <a:lstStyle/>
+          <a:p>
+            <a:pPr indent="0" marL="0">
+              <a:buNone/>
+            </a:pPr>
+            <a:r>
+              <a:rPr lang="en-US" sz="1900" b="1" dirty="0">
+                <a:solidFill>
+                  <a:srgbClr val="3F6F5F"/>
+                </a:solidFill>
+                <a:latin typeface="Cambria" pitchFamily="34" charset="0"/>
+                <a:ea typeface="Cambria" pitchFamily="34" charset="-122"/>
+                <a:cs typeface="Cambria" pitchFamily="34" charset="-120"/>
+              </a:rPr>
+              <a:t>Make something real</a:t>
+            </a:r>
+            <a:endParaRPr lang="en-US" sz="1900" dirty="0"/>
+          </a:p>
+        </p:txBody>
+      </p:sp>
+      <p:sp>
+        <p:nvSpPr>
+          <p:cNvPr id="11" name="Text 9"/>
+          <p:cNvSpPr/>
+          <p:nvPr/>
+        </p:nvSpPr>
+        <p:spPr>
+          <a:xfrm>
+            <a:off x="1371600" y="3904488"/>
+            <a:ext cx="10332720" cy="914400"/>
+          </a:xfrm>
+          <a:prstGeom prst="rect">
+            <a:avLst/>
+          </a:prstGeom>
+          <a:noFill/>
+          <a:ln/>
+        </p:spPr>
+        <p:txBody>
+          <a:bodyPr wrap="square" rtlCol="0" anchor="t">
+            <a:spAutoFit/>
+          </a:bodyPr>
+          <a:lstStyle/>
+          <a:p>
+            <a:pPr indent="0" marL="0">
+              <a:lnSpc>
+                <a:spcPct val="112000"/>
+              </a:lnSpc>
+              <a:buNone/>
+            </a:pPr>
+            <a:r>
+              <a:rPr lang="en-US" sz="1450" dirty="0">
+                <a:solidFill>
+                  <a:srgbClr val="1A1A1A"/>
+                </a:solidFill>
+                <a:latin typeface="Calibri" pitchFamily="34" charset="0"/>
+                <a:ea typeface="Calibri" pitchFamily="34" charset="-122"/>
+                <a:cs typeface="Calibri" pitchFamily="34" charset="-120"/>
+              </a:rPr>
+              <a:t>A complete investigation by the first break, before any theory.</a:t>
+            </a:r>
+            <a:endParaRPr lang="en-US" sz="1450" dirty="0"/>
+          </a:p>
+        </p:txBody>
+      </p:sp>
+      <p:sp>
+        <p:nvSpPr>
+          <p:cNvPr id="12" name="Shape 10"/>
+          <p:cNvSpPr/>
+          <p:nvPr/>
+        </p:nvSpPr>
+        <p:spPr>
+          <a:xfrm>
+            <a:off x="640080" y="4983480"/>
+            <a:ext cx="457200" cy="457200"/>
+          </a:xfrm>
+          <a:prstGeom prst="roundRect">
+            <a:avLst>
+              <a:gd name="adj" fmla="val 16000"/>
+            </a:avLst>
+          </a:prstGeom>
+          <a:solidFill>
+            <a:srgbClr val="B9852F"/>
+          </a:solidFill>
+          <a:ln/>
+        </p:spPr>
+      </p:sp>
+      <p:sp>
+        <p:nvSpPr>
+          <p:cNvPr id="13" name="Text 11"/>
+          <p:cNvSpPr/>
+          <p:nvPr/>
+        </p:nvSpPr>
+        <p:spPr>
+          <a:xfrm>
+            <a:off x="640080" y="4983480"/>
+            <a:ext cx="457200" cy="457200"/>
+          </a:xfrm>
+          <a:prstGeom prst="rect">
+            <a:avLst/>
+          </a:prstGeom>
+          <a:noFill/>
+          <a:ln/>
+        </p:spPr>
+        <p:txBody>
+          <a:bodyPr wrap="square" rtlCol="0" anchor="ctr"/>
+          <a:lstStyle/>
+          <a:p>
+            <a:pPr algn="ctr" indent="0" marL="0">
+              <a:buNone/>
+            </a:pPr>
+            <a:r>
+              <a:rPr lang="en-US" sz="2000" b="1" dirty="0">
+                <a:solidFill>
+                  <a:srgbClr val="FFFFFF"/>
+                </a:solidFill>
+                <a:latin typeface="Cambria" pitchFamily="34" charset="0"/>
+                <a:ea typeface="Cambria" pitchFamily="34" charset="-122"/>
+                <a:cs typeface="Cambria" pitchFamily="34" charset="-120"/>
+              </a:rPr>
+              <a:t>3</a:t>
+            </a:r>
+            <a:endParaRPr lang="en-US" sz="2000" dirty="0"/>
+          </a:p>
+        </p:txBody>
+      </p:sp>
+      <p:sp>
+        <p:nvSpPr>
+          <p:cNvPr id="14" name="Text 12"/>
+          <p:cNvSpPr/>
+          <p:nvPr/>
+        </p:nvSpPr>
+        <p:spPr>
+          <a:xfrm>
+            <a:off x="1371600" y="4946904"/>
+            <a:ext cx="10332720" cy="411480"/>
+          </a:xfrm>
+          <a:prstGeom prst="rect">
+            <a:avLst/>
+          </a:prstGeom>
+          <a:noFill/>
+          <a:ln/>
+        </p:spPr>
+        <p:txBody>
+          <a:bodyPr wrap="square" rtlCol="0" anchor="ctr"/>
+          <a:lstStyle/>
+          <a:p>
+            <a:pPr indent="0" marL="0">
+              <a:buNone/>
+            </a:pPr>
+            <a:r>
+              <a:rPr lang="en-US" sz="1900" b="1" dirty="0">
+                <a:solidFill>
+                  <a:srgbClr val="B9852F"/>
+                </a:solidFill>
+                <a:latin typeface="Cambria" pitchFamily="34" charset="0"/>
+                <a:ea typeface="Cambria" pitchFamily="34" charset="-122"/>
+                <a:cs typeface="Cambria" pitchFamily="34" charset="-120"/>
+              </a:rPr>
+              <a:t>Images are culture too</a:t>
+            </a:r>
+            <a:endParaRPr lang="en-US" sz="1900" dirty="0"/>
+          </a:p>
+        </p:txBody>
+      </p:sp>
+      <p:sp>
+        <p:nvSpPr>
+          <p:cNvPr id="15" name="Text 13"/>
+          <p:cNvSpPr/>
+          <p:nvPr/>
+        </p:nvSpPr>
+        <p:spPr>
+          <a:xfrm>
+            <a:off x="1371600" y="5367528"/>
+            <a:ext cx="10332720" cy="914400"/>
+          </a:xfrm>
+          <a:prstGeom prst="rect">
+            <a:avLst/>
+          </a:prstGeom>
+          <a:noFill/>
+          <a:ln/>
+        </p:spPr>
+        <p:txBody>
+          <a:bodyPr wrap="square" rtlCol="0" anchor="t">
+            <a:spAutoFit/>
+          </a:bodyPr>
+          <a:lstStyle/>
+          <a:p>
+            <a:pPr indent="0" marL="0">
+              <a:lnSpc>
+                <a:spcPct val="112000"/>
+              </a:lnSpc>
+              <a:buNone/>
+            </a:pPr>
+            <a:r>
+              <a:rPr lang="en-US" sz="1450" dirty="0">
+                <a:solidFill>
+                  <a:srgbClr val="1A1A1A"/>
+                </a:solidFill>
+                <a:latin typeface="Calibri" pitchFamily="34" charset="0"/>
+                <a:ea typeface="Calibri" pitchFamily="34" charset="-122"/>
+                <a:cs typeface="Calibri" pitchFamily="34" charset="-120"/>
+              </a:rPr>
+              <a:t>A picture is numbers: you counted pixels on day one, and images continue as a co-equal corpus through all ten weeks.</a:t>
+            </a:r>
+            <a:endParaRPr lang="en-US" sz="1450" dirty="0"/>
+          </a:p>
+        </p:txBody>
+      </p:sp>
+    </p:spTree>
+  </p:cSld>
+  <p:clrMapOvr>
+    <a:masterClrMapping/>
+  </p:clrMapOvr>
+</p:sld>
+</file>
+
+<file path=ppt/slides/slide17.xml><?xml version="1.0" encoding="utf-8"?>
+<p:sld xmlns:a="http://schemas.openxmlformats.org/drawingml/2006/main" xmlns:r="http://schemas.openxmlformats.org/officeDocument/2006/relationships" xmlns:p="http://schemas.openxmlformats.org/presentationml/2006/main">
+  <p:cSld name="Slide 17">
     <p:bg>
       <p:bgPr>
         <a:solidFill>

--- a/slides/pptx/week-01.pptx
+++ b/slides/pptx/week-01.pptx
@@ -22,9 +22,10 @@
     <p:sldId id="270" r:id="rId16"/>
     <p:sldId id="271" r:id="rId17"/>
     <p:sldId id="272" r:id="rId18"/>
+    <p:sldId id="273" r:id="rId19"/>
   </p:sldIdLst>
   <p:notesMasterIdLst>
-    <p:notesMasterId r:id="rId19"/>
+    <p:notesMasterId r:id="rId20"/>
   </p:notesMasterIdLst>
   <p:sldSz cx="12191695" cy="6858000"/>
   <p:notesSz cx="6858000" cy="12191695"/>
@@ -1264,6 +1265,94 @@
 </p:notes>
 </file>
 
+<file path=ppt/notesSlides/notesSlide18.xml><?xml version="1.0" encoding="utf-8"?>
+<p:notes xmlns:a="http://schemas.openxmlformats.org/drawingml/2006/main" xmlns:r="http://schemas.openxmlformats.org/officeDocument/2006/relationships" xmlns:p="http://schemas.openxmlformats.org/presentationml/2006/main">
+  <p:cSld>
+    <p:spTree>
+      <p:nvGrpSpPr>
+        <p:cNvPr id="1" name=""/>
+        <p:cNvGrpSpPr/>
+        <p:nvPr/>
+      </p:nvGrpSpPr>
+      <p:grpSpPr>
+        <a:xfrm>
+          <a:off x="0" y="0"/>
+          <a:ext cx="0" cy="0"/>
+          <a:chOff x="0" y="0"/>
+          <a:chExt cx="0" cy="0"/>
+        </a:xfrm>
+      </p:grpSpPr>
+      <p:sp>
+        <p:nvSpPr>
+          <p:cNvPr id="2" name="Slide Image Placeholder 1"/>
+          <p:cNvSpPr>
+            <a:spLocks noGrp="1" noRot="1" noChangeAspect="1"/>
+          </p:cNvSpPr>
+          <p:nvPr>
+            <p:ph type="sldImg"/>
+          </p:nvPr>
+        </p:nvSpPr>
+        <p:spPr/>
+      </p:sp>
+      <p:sp>
+        <p:nvSpPr>
+          <p:cNvPr id="3" name="Notes Placeholder 2"/>
+          <p:cNvSpPr>
+            <a:spLocks noGrp="1"/>
+          </p:cNvSpPr>
+          <p:nvPr>
+            <p:ph type="body" idx="1"/>
+          </p:nvPr>
+        </p:nvSpPr>
+        <p:spPr/>
+        <p:txBody>
+          <a:bodyPr/>
+          <a:lstStyle/>
+          <a:p>
+            <a:r>
+              <a:rPr lang="en-US" dirty="0"/>
+              <a:t/>
+            </a:r>
+            <a:endParaRPr lang="en-US" dirty="0"/>
+          </a:p>
+        </p:txBody>
+      </p:sp>
+      <p:sp>
+        <p:nvSpPr>
+          <p:cNvPr id="4" name="Slide Number Placeholder 3"/>
+          <p:cNvSpPr>
+            <a:spLocks noGrp="1"/>
+          </p:cNvSpPr>
+          <p:nvPr>
+            <p:ph type="sldNum" sz="quarter" idx="10"/>
+          </p:nvPr>
+        </p:nvSpPr>
+        <p:spPr/>
+        <p:txBody>
+          <a:bodyPr/>
+          <a:lstStyle/>
+          <a:p>
+            <a:fld id="{F7021451-1387-4CA6-816F-3879F97B5CBC}" type="slidenum">
+              <a:rPr lang="en-US"/>
+              <a:t>18</a:t>
+            </a:fld>
+            <a:endParaRPr lang="en-US"/>
+          </a:p>
+        </p:txBody>
+      </p:sp>
+    </p:spTree>
+    <p:extLst>
+      <p:ext uri="{BB962C8B-B14F-4D97-AF65-F5344CB8AC3E}">
+        <p14:creationId xmlns:p14="http://schemas.microsoft.com/office/powerpoint/2010/main" val="1024086991"/>
+      </p:ext>
+    </p:extLst>
+  </p:cSld>
+  <p:clrMapOvr>
+    <a:masterClrMapping/>
+  </p:clrMapOvr>
+</p:notes>
+</file>
+
 <file path=ppt/notesSlides/notesSlide2.xml><?xml version="1.0" encoding="utf-8"?>
 <p:notes xmlns:a="http://schemas.openxmlformats.org/drawingml/2006/main" xmlns:r="http://schemas.openxmlformats.org/officeDocument/2006/relationships" xmlns:p="http://schemas.openxmlformats.org/presentationml/2006/main">
   <p:cSld>
@@ -2944,7 +3033,7 @@
                 <a:ea typeface="Cambria" pitchFamily="34" charset="-122"/>
                 <a:cs typeface="Cambria" pitchFamily="34" charset="-120"/>
               </a:rPr>
-              <a:t>The after-class half: defining a color, and what every bag loses</a:t>
+              <a:t>When code fails (it will, today, deliberately)</a:t>
             </a:r>
             <a:endParaRPr lang="en-US" sz="3000" dirty="0"/>
           </a:p>
@@ -3008,7 +3097,7 @@
                 <a:ea typeface="Calibri" pitchFamily="34" charset="-122"/>
                 <a:cs typeface="Calibri" pitchFamily="34" charset="-120"/>
               </a:rPr>
-              <a:t>What counts as red? A boundary you set on the hue wheel. Shift it twenty degrees and paintings change category without changing a pixel: defining the ranges is the analysis, the same decision as the stop-word list.</a:t>
+              <a:t>Read the last line of the traceback first. It names the problem.</a:t>
             </a:r>
             <a:endParaRPr lang="en-US" sz="1650" dirty="0"/>
           </a:p>
@@ -3072,7 +3161,7 @@
                 <a:ea typeface="Calibri" pitchFamily="34" charset="-122"/>
                 <a:cs typeface="Calibri" pitchFamily="34" charset="-120"/>
               </a:rPr>
-              <a:t>Two sentences with identical word-bags can mean opposite things: "the critics loved it, the public did not" and its reversal count the same. Order, negation, and who-did-what are the casualties.</a:t>
+              <a:t>Paste it to the AI: "this errored, fix it and tell me what went wrong."</a:t>
             </a:r>
             <a:endParaRPr lang="en-US" sz="1650" dirty="0"/>
           </a:p>
@@ -3136,7 +3225,7 @@
                 <a:ea typeface="Calibri" pitchFamily="34" charset="-122"/>
                 <a:cs typeface="Calibri" pitchFamily="34" charset="-120"/>
               </a:rPr>
-              <a:t>A painting and its shuffled pixels share the brightness, the average color, and the palette. Composition is to images what word order is to sentences.</a:t>
+              <a:t>Try twice, then ask a human. In that order.</a:t>
             </a:r>
             <a:endParaRPr lang="en-US" sz="1650" dirty="0"/>
           </a:p>
@@ -3200,7 +3289,7 @@
                 <a:ea typeface="Calibri" pitchFamily="34" charset="-122"/>
                 <a:cs typeface="Calibri" pitchFamily="34" charset="-120"/>
               </a:rPr>
-              <a:t>The loss is the trade counting makes for scale. Name it on day one; Week 5's embeddings exist to recover some of it.</a:t>
+              <a:t>Keep the cheat sheet at hand. No one memorizes error messages; everyone reads them.</a:t>
             </a:r>
             <a:endParaRPr lang="en-US" sz="1650" dirty="0"/>
           </a:p>
@@ -3332,7 +3421,7 @@
                 <a:ea typeface="Cambria" pitchFamily="34" charset="-122"/>
                 <a:cs typeface="Cambria" pitchFamily="34" charset="-120"/>
               </a:rPr>
-              <a:t>Deep-research tools: one role, four rules</a:t>
+              <a:t>The after-class half: defining a color, and what every bag loses</a:t>
             </a:r>
             <a:endParaRPr lang="en-US" sz="3000" dirty="0"/>
           </a:p>
@@ -3367,7 +3456,7 @@
         <p:spPr>
           <a:xfrm>
             <a:off x="1097280" y="2240280"/>
-            <a:ext cx="10607040" cy="813816"/>
+            <a:ext cx="10607040" cy="1017270"/>
           </a:xfrm>
           <a:prstGeom prst="rect">
             <a:avLst/>
@@ -3388,7 +3477,7 @@
               <a:buNone/>
             </a:pPr>
             <a:r>
-              <a:rPr lang="en-US" sz="1500" dirty="0">
+              <a:rPr lang="en-US" sz="1650" dirty="0">
                 <a:solidFill>
                   <a:srgbClr val="1A1A1A"/>
                 </a:solidFill>
@@ -3396,9 +3485,9 @@
                 <a:ea typeface="Calibri" pitchFamily="34" charset="-122"/>
                 <a:cs typeface="Calibri" pitchFamily="34" charset="-120"/>
               </a:rPr>
-              <a:t>AI deep-research tools browse for an hour and return a long, cited report. In this course they have exactly one role: the scout, finding datasets and prior work before Week 4's commitment.</a:t>
-            </a:r>
-            <a:endParaRPr lang="en-US" sz="1500" dirty="0"/>
+              <a:t>What counts as red? A boundary you set on the hue wheel. Shift it twenty degrees and paintings change category without changing a pixel: defining the ranges is the analysis, the same decision as the stop-word list.</a:t>
+            </a:r>
+            <a:endParaRPr lang="en-US" sz="1650" dirty="0"/>
           </a:p>
         </p:txBody>
       </p:sp>
@@ -3410,7 +3499,7 @@
         </p:nvSpPr>
         <p:spPr>
           <a:xfrm>
-            <a:off x="640080" y="3145536"/>
+            <a:off x="640080" y="3348990"/>
             <a:ext cx="201168" cy="201168"/>
           </a:xfrm>
           <a:prstGeom prst="ellipse">
@@ -3430,8 +3519,8 @@
         </p:nvSpPr>
         <p:spPr>
           <a:xfrm>
-            <a:off x="1097280" y="3054096"/>
-            <a:ext cx="10607040" cy="813816"/>
+            <a:off x="1097280" y="3257550"/>
+            <a:ext cx="10607040" cy="1017270"/>
           </a:xfrm>
           <a:prstGeom prst="rect">
             <a:avLst/>
@@ -3452,7 +3541,7 @@
               <a:buNone/>
             </a:pPr>
             <a:r>
-              <a:rPr lang="en-US" sz="1500" dirty="0">
+              <a:rPr lang="en-US" sz="1650" dirty="0">
                 <a:solidFill>
                   <a:srgbClr val="1A1A1A"/>
                 </a:solidFill>
@@ -3460,9 +3549,9 @@
                 <a:ea typeface="Calibri" pitchFamily="34" charset="-122"/>
                 <a:cs typeface="Calibri" pitchFamily="34" charset="-120"/>
               </a:rPr>
-              <a:t>Rule one: every citation is a lead, not a source. Reports cite real, wrong, and nonexistent works with identical confidence; nothing enters your work unread.</a:t>
-            </a:r>
-            <a:endParaRPr lang="en-US" sz="1500" dirty="0"/>
+              <a:t>Two sentences with identical word-bags can mean opposite things: "the critics loved it, the public did not" and its reversal count the same. Order, negation, and who-did-what are the casualties.</a:t>
+            </a:r>
+            <a:endParaRPr lang="en-US" sz="1650" dirty="0"/>
           </a:p>
         </p:txBody>
       </p:sp>
@@ -3474,7 +3563,7 @@
         </p:nvSpPr>
         <p:spPr>
           <a:xfrm>
-            <a:off x="640080" y="3959352"/>
+            <a:off x="640080" y="4366260"/>
             <a:ext cx="201168" cy="201168"/>
           </a:xfrm>
           <a:prstGeom prst="ellipse">
@@ -3494,8 +3583,8 @@
         </p:nvSpPr>
         <p:spPr>
           <a:xfrm>
-            <a:off x="1097280" y="3867912"/>
-            <a:ext cx="10607040" cy="813816"/>
+            <a:off x="1097280" y="4274820"/>
+            <a:ext cx="10607040" cy="1017270"/>
           </a:xfrm>
           <a:prstGeom prst="rect">
             <a:avLst/>
@@ -3516,7 +3605,7 @@
               <a:buNone/>
             </a:pPr>
             <a:r>
-              <a:rPr lang="en-US" sz="1500" dirty="0">
+              <a:rPr lang="en-US" sz="1650" dirty="0">
                 <a:solidFill>
                   <a:srgbClr val="1A1A1A"/>
                 </a:solidFill>
@@ -3524,9 +3613,9 @@
                 <a:ea typeface="Calibri" pitchFamily="34" charset="-122"/>
                 <a:cs typeface="Calibri" pitchFamily="34" charset="-120"/>
               </a:rPr>
-              <a:t>Rule two: verify dataset access yourself. "Publicly available" in a report means someone once said so; the corpus-existence proof (50 loadable rows, Week 3's sketch) is the standard.</a:t>
-            </a:r>
-            <a:endParaRPr lang="en-US" sz="1500" dirty="0"/>
+              <a:t>A painting and its shuffled pixels share the brightness, the average color, and the palette. Composition is to images what word order is to sentences.</a:t>
+            </a:r>
+            <a:endParaRPr lang="en-US" sz="1650" dirty="0"/>
           </a:p>
         </p:txBody>
       </p:sp>
@@ -3538,7 +3627,7 @@
         </p:nvSpPr>
         <p:spPr>
           <a:xfrm>
-            <a:off x="640080" y="4773168"/>
+            <a:off x="640080" y="5383530"/>
             <a:ext cx="201168" cy="201168"/>
           </a:xfrm>
           <a:prstGeom prst="ellipse">
@@ -3558,8 +3647,8 @@
         </p:nvSpPr>
         <p:spPr>
           <a:xfrm>
-            <a:off x="1097280" y="4681728"/>
-            <a:ext cx="10607040" cy="813816"/>
+            <a:off x="1097280" y="5292090"/>
+            <a:ext cx="10607040" cy="1017270"/>
           </a:xfrm>
           <a:prstGeom prst="rect">
             <a:avLst/>
@@ -3580,7 +3669,7 @@
               <a:buNone/>
             </a:pPr>
             <a:r>
-              <a:rPr lang="en-US" sz="1500" dirty="0">
+              <a:rPr lang="en-US" sz="1650" dirty="0">
                 <a:solidFill>
                   <a:srgbClr val="1A1A1A"/>
                 </a:solidFill>
@@ -3588,73 +3677,9 @@
                 <a:ea typeface="Calibri" pitchFamily="34" charset="-122"/>
                 <a:cs typeface="Calibri" pitchFamily="34" charset="-120"/>
               </a:rPr>
-              <a:t>Rule three: the report is never a source. Cite what you read, not the tool that found it.</a:t>
-            </a:r>
-            <a:endParaRPr lang="en-US" sz="1500" dirty="0"/>
-          </a:p>
-        </p:txBody>
-      </p:sp>
-      <p:sp>
-        <p:nvSpPr>
-          <p:cNvPr id="13" name="Shape 11"/>
-          <p:cNvSpPr/>
-          <p:nvPr/>
-        </p:nvSpPr>
-        <p:spPr>
-          <a:xfrm>
-            <a:off x="640080" y="5586984"/>
-            <a:ext cx="201168" cy="201168"/>
-          </a:xfrm>
-          <a:prstGeom prst="ellipse">
-            <a:avLst/>
-          </a:prstGeom>
-          <a:solidFill>
-            <a:srgbClr val="3F6F5F"/>
-          </a:solidFill>
-          <a:ln/>
-        </p:spPr>
-      </p:sp>
-      <p:sp>
-        <p:nvSpPr>
-          <p:cNvPr id="14" name="Text 12"/>
-          <p:cNvSpPr/>
-          <p:nvPr/>
-        </p:nvSpPr>
-        <p:spPr>
-          <a:xfrm>
-            <a:off x="1097280" y="5495544"/>
-            <a:ext cx="10607040" cy="813816"/>
-          </a:xfrm>
-          <a:prstGeom prst="rect">
-            <a:avLst/>
-          </a:prstGeom>
-          <a:noFill/>
-          <a:ln/>
-        </p:spPr>
-        <p:txBody>
-          <a:bodyPr wrap="square" rtlCol="0" anchor="t">
-            <a:spAutoFit/>
-          </a:bodyPr>
-          <a:lstStyle/>
-          <a:p>
-            <a:pPr indent="0" marL="0">
-              <a:lnSpc>
-                <a:spcPct val="112000"/>
-              </a:lnSpc>
-              <a:buNone/>
-            </a:pPr>
-            <a:r>
-              <a:rPr lang="en-US" sz="1500" dirty="0">
-                <a:solidFill>
-                  <a:srgbClr val="1A1A1A"/>
-                </a:solidFill>
-                <a:latin typeface="Calibri" pitchFamily="34" charset="0"/>
-                <a:ea typeface="Calibri" pitchFamily="34" charset="-122"/>
-                <a:cs typeface="Calibri" pitchFamily="34" charset="-120"/>
-              </a:rPr>
-              <a:t>Rule four: scout, then close the tool. Your question, your reading, and your interpretation cannot be delegated - the same boundary as with code.</a:t>
-            </a:r>
-            <a:endParaRPr lang="en-US" sz="1500" dirty="0"/>
+              <a:t>The loss is the trade counting makes for scale. Name it on day one; Week 5's embeddings exist to recover some of it.</a:t>
+            </a:r>
+            <a:endParaRPr lang="en-US" sz="1650" dirty="0"/>
           </a:p>
         </p:txBody>
       </p:sp>
@@ -3784,7 +3809,7 @@
                 <a:ea typeface="Cambria" pitchFamily="34" charset="-122"/>
                 <a:cs typeface="Cambria" pitchFamily="34" charset="-120"/>
               </a:rPr>
-              <a:t>Counting, three shapes</a:t>
+              <a:t>Deep-research tools: one role, four rules</a:t>
             </a:r>
             <a:endParaRPr lang="en-US" sz="3000" dirty="0"/>
           </a:p>
@@ -3819,7 +3844,7 @@
         <p:spPr>
           <a:xfrm>
             <a:off x="1097280" y="2240280"/>
-            <a:ext cx="10607040" cy="1017270"/>
+            <a:ext cx="10607040" cy="813816"/>
           </a:xfrm>
           <a:prstGeom prst="rect">
             <a:avLst/>
@@ -3840,7 +3865,7 @@
               <a:buNone/>
             </a:pPr>
             <a:r>
-              <a:rPr lang="en-US" sz="1650" dirty="0">
+              <a:rPr lang="en-US" sz="1500" dirty="0">
                 <a:solidFill>
                   <a:srgbClr val="1A1A1A"/>
                 </a:solidFill>
@@ -3848,9 +3873,9 @@
                 <a:ea typeface="Calibri" pitchFamily="34" charset="-122"/>
                 <a:cs typeface="Calibri" pitchFamily="34" charset="-120"/>
               </a:rPr>
-              <a:t>Rows: what share of brides kept their name, year by year. One groupby, one chart.</a:t>
-            </a:r>
-            <a:endParaRPr lang="en-US" sz="1650" dirty="0"/>
+              <a:t>AI deep-research tools browse for an hour and return a long, cited report. In this course they have exactly one role: the scout, finding datasets and prior work before Week 4's commitment.</a:t>
+            </a:r>
+            <a:endParaRPr lang="en-US" sz="1500" dirty="0"/>
           </a:p>
         </p:txBody>
       </p:sp>
@@ -3862,7 +3887,7 @@
         </p:nvSpPr>
         <p:spPr>
           <a:xfrm>
-            <a:off x="640080" y="3348990"/>
+            <a:off x="640080" y="3145536"/>
             <a:ext cx="201168" cy="201168"/>
           </a:xfrm>
           <a:prstGeom prst="ellipse">
@@ -3882,8 +3907,8 @@
         </p:nvSpPr>
         <p:spPr>
           <a:xfrm>
-            <a:off x="1097280" y="3257550"/>
-            <a:ext cx="10607040" cy="1017270"/>
+            <a:off x="1097280" y="3054096"/>
+            <a:ext cx="10607040" cy="813816"/>
           </a:xfrm>
           <a:prstGeom prst="rect">
             <a:avLst/>
@@ -3904,7 +3929,7 @@
               <a:buNone/>
             </a:pPr>
             <a:r>
-              <a:rPr lang="en-US" sz="1650" dirty="0">
+              <a:rPr lang="en-US" sz="1500" dirty="0">
                 <a:solidFill>
                   <a:srgbClr val="1A1A1A"/>
                 </a:solidFill>
@@ -3912,9 +3937,9 @@
                 <a:ea typeface="Calibri" pitchFamily="34" charset="-122"/>
                 <a:cs typeface="Calibri" pitchFamily="34" charset="-120"/>
               </a:rPr>
-              <a:t>Words: the top words of a lyric are "the, and, you" until you remove stop-words. That removal is your first modeling choice.</a:t>
-            </a:r>
-            <a:endParaRPr lang="en-US" sz="1650" dirty="0"/>
+              <a:t>Rule one: every citation is a lead, not a source. Reports cite real, wrong, and nonexistent works with identical confidence; nothing enters your work unread.</a:t>
+            </a:r>
+            <a:endParaRPr lang="en-US" sz="1500" dirty="0"/>
           </a:p>
         </p:txBody>
       </p:sp>
@@ -3926,7 +3951,7 @@
         </p:nvSpPr>
         <p:spPr>
           <a:xfrm>
-            <a:off x="640080" y="4366260"/>
+            <a:off x="640080" y="3959352"/>
             <a:ext cx="201168" cy="201168"/>
           </a:xfrm>
           <a:prstGeom prst="ellipse">
@@ -3946,8 +3971,8 @@
         </p:nvSpPr>
         <p:spPr>
           <a:xfrm>
-            <a:off x="1097280" y="4274820"/>
-            <a:ext cx="10607040" cy="1017270"/>
+            <a:off x="1097280" y="3867912"/>
+            <a:ext cx="10607040" cy="813816"/>
           </a:xfrm>
           <a:prstGeom prst="rect">
             <a:avLst/>
@@ -3968,7 +3993,7 @@
               <a:buNone/>
             </a:pPr>
             <a:r>
-              <a:rPr lang="en-US" sz="1650" dirty="0">
+              <a:rPr lang="en-US" sz="1500" dirty="0">
                 <a:solidFill>
                   <a:srgbClr val="1A1A1A"/>
                 </a:solidFill>
@@ -3976,9 +4001,9 @@
                 <a:ea typeface="Calibri" pitchFamily="34" charset="-122"/>
                 <a:cs typeface="Calibri" pitchFamily="34" charset="-120"/>
               </a:rPr>
-              <a:t>Pixels: rank 200 Met thumbnails darkest to brightest from average luminance.</a:t>
-            </a:r>
-            <a:endParaRPr lang="en-US" sz="1650" dirty="0"/>
+              <a:t>Rule two: verify dataset access yourself. "Publicly available" in a report means someone once said so; the corpus-existence proof (50 loadable rows, Week 3's sketch) is the standard.</a:t>
+            </a:r>
+            <a:endParaRPr lang="en-US" sz="1500" dirty="0"/>
           </a:p>
         </p:txBody>
       </p:sp>
@@ -3990,7 +4015,7 @@
         </p:nvSpPr>
         <p:spPr>
           <a:xfrm>
-            <a:off x="640080" y="5383530"/>
+            <a:off x="640080" y="4773168"/>
             <a:ext cx="201168" cy="201168"/>
           </a:xfrm>
           <a:prstGeom prst="ellipse">
@@ -4010,8 +4035,8 @@
         </p:nvSpPr>
         <p:spPr>
           <a:xfrm>
-            <a:off x="1097280" y="5292090"/>
-            <a:ext cx="10607040" cy="1017270"/>
+            <a:off x="1097280" y="4681728"/>
+            <a:ext cx="10607040" cy="813816"/>
           </a:xfrm>
           <a:prstGeom prst="rect">
             <a:avLst/>
@@ -4032,7 +4057,7 @@
               <a:buNone/>
             </a:pPr>
             <a:r>
-              <a:rPr lang="en-US" sz="1650" dirty="0">
+              <a:rPr lang="en-US" sz="1500" dirty="0">
                 <a:solidFill>
                   <a:srgbClr val="1A1A1A"/>
                 </a:solidFill>
@@ -4040,9 +4065,73 @@
                 <a:ea typeface="Calibri" pitchFamily="34" charset="-122"/>
                 <a:cs typeface="Calibri" pitchFamily="34" charset="-120"/>
               </a:rPr>
-              <a:t>The same technique three times, each containing a decision.</a:t>
-            </a:r>
-            <a:endParaRPr lang="en-US" sz="1650" dirty="0"/>
+              <a:t>Rule three: the report is never a source. Cite what you read, not the tool that found it.</a:t>
+            </a:r>
+            <a:endParaRPr lang="en-US" sz="1500" dirty="0"/>
+          </a:p>
+        </p:txBody>
+      </p:sp>
+      <p:sp>
+        <p:nvSpPr>
+          <p:cNvPr id="13" name="Shape 11"/>
+          <p:cNvSpPr/>
+          <p:nvPr/>
+        </p:nvSpPr>
+        <p:spPr>
+          <a:xfrm>
+            <a:off x="640080" y="5586984"/>
+            <a:ext cx="201168" cy="201168"/>
+          </a:xfrm>
+          <a:prstGeom prst="ellipse">
+            <a:avLst/>
+          </a:prstGeom>
+          <a:solidFill>
+            <a:srgbClr val="3F6F5F"/>
+          </a:solidFill>
+          <a:ln/>
+        </p:spPr>
+      </p:sp>
+      <p:sp>
+        <p:nvSpPr>
+          <p:cNvPr id="14" name="Text 12"/>
+          <p:cNvSpPr/>
+          <p:nvPr/>
+        </p:nvSpPr>
+        <p:spPr>
+          <a:xfrm>
+            <a:off x="1097280" y="5495544"/>
+            <a:ext cx="10607040" cy="813816"/>
+          </a:xfrm>
+          <a:prstGeom prst="rect">
+            <a:avLst/>
+          </a:prstGeom>
+          <a:noFill/>
+          <a:ln/>
+        </p:spPr>
+        <p:txBody>
+          <a:bodyPr wrap="square" rtlCol="0" anchor="t">
+            <a:spAutoFit/>
+          </a:bodyPr>
+          <a:lstStyle/>
+          <a:p>
+            <a:pPr indent="0" marL="0">
+              <a:lnSpc>
+                <a:spcPct val="112000"/>
+              </a:lnSpc>
+              <a:buNone/>
+            </a:pPr>
+            <a:r>
+              <a:rPr lang="en-US" sz="1500" dirty="0">
+                <a:solidFill>
+                  <a:srgbClr val="1A1A1A"/>
+                </a:solidFill>
+                <a:latin typeface="Calibri" pitchFamily="34" charset="0"/>
+                <a:ea typeface="Calibri" pitchFamily="34" charset="-122"/>
+                <a:cs typeface="Calibri" pitchFamily="34" charset="-120"/>
+              </a:rPr>
+              <a:t>Rule four: scout, then close the tool. Your question, your reading, and your interpretation cannot be delegated - the same boundary as with code.</a:t>
+            </a:r>
+            <a:endParaRPr lang="en-US" sz="1500" dirty="0"/>
           </a:p>
         </p:txBody>
       </p:sp>
@@ -4080,14 +4169,34 @@
       </p:grpSpPr>
       <p:sp>
         <p:nvSpPr>
-          <p:cNvPr id="2" name="Text 0"/>
-          <p:cNvSpPr/>
-          <p:nvPr/>
-        </p:nvSpPr>
-        <p:spPr>
-          <a:xfrm>
-            <a:off x="640080" y="731520"/>
-            <a:ext cx="10058400" cy="731520"/>
+          <p:cNvPr id="2" name="Shape 0"/>
+          <p:cNvSpPr/>
+          <p:nvPr/>
+        </p:nvSpPr>
+        <p:spPr>
+          <a:xfrm>
+            <a:off x="0" y="0"/>
+            <a:ext cx="164592" cy="6858000"/>
+          </a:xfrm>
+          <a:prstGeom prst="rect">
+            <a:avLst/>
+          </a:prstGeom>
+          <a:solidFill>
+            <a:srgbClr val="7A3B2E"/>
+          </a:solidFill>
+          <a:ln/>
+        </p:spPr>
+      </p:sp>
+      <p:sp>
+        <p:nvSpPr>
+          <p:cNvPr id="3" name="Text 1"/>
+          <p:cNvSpPr/>
+          <p:nvPr/>
+        </p:nvSpPr>
+        <p:spPr>
+          <a:xfrm>
+            <a:off x="640080" y="640080"/>
+            <a:ext cx="10058400" cy="320040"/>
           </a:xfrm>
           <a:prstGeom prst="rect">
             <a:avLst/>
@@ -4097,6 +4206,47 @@
         </p:spPr>
         <p:txBody>
           <a:bodyPr wrap="square" rtlCol="0" anchor="ctr"/>
+          <a:lstStyle/>
+          <a:p>
+            <a:pPr indent="0" marL="0">
+              <a:buNone/>
+            </a:pPr>
+            <a:r>
+              <a:rPr lang="en-US" sz="1200" b="1" spc="300" kern="0" dirty="0">
+                <a:solidFill>
+                  <a:srgbClr val="7A3B2E"/>
+                </a:solidFill>
+                <a:latin typeface="Calibri" pitchFamily="34" charset="0"/>
+                <a:ea typeface="Calibri" pitchFamily="34" charset="-122"/>
+                <a:cs typeface="Calibri" pitchFamily="34" charset="-120"/>
+              </a:rPr>
+              <a:t>WEEK 1 · KEY POINTS</a:t>
+            </a:r>
+            <a:endParaRPr lang="en-US" sz="1200" dirty="0"/>
+          </a:p>
+        </p:txBody>
+      </p:sp>
+      <p:sp>
+        <p:nvSpPr>
+          <p:cNvPr id="4" name="Text 2"/>
+          <p:cNvSpPr/>
+          <p:nvPr/>
+        </p:nvSpPr>
+        <p:spPr>
+          <a:xfrm>
+            <a:off x="640080" y="1005840"/>
+            <a:ext cx="10881360" cy="914400"/>
+          </a:xfrm>
+          <a:prstGeom prst="rect">
+            <a:avLst/>
+          </a:prstGeom>
+          <a:noFill/>
+          <a:ln/>
+        </p:spPr>
+        <p:txBody>
+          <a:bodyPr wrap="square" rtlCol="0" anchor="t">
+            <a:spAutoFit/>
+          </a:bodyPr>
           <a:lstStyle/>
           <a:p>
             <a:pPr indent="0" marL="0">
@@ -4111,7 +4261,7 @@
                 <a:ea typeface="Cambria" pitchFamily="34" charset="-122"/>
                 <a:cs typeface="Cambria" pitchFamily="34" charset="-120"/>
               </a:rPr>
-              <a:t>Three modes today</a:t>
+              <a:t>Counting, three shapes</a:t>
             </a:r>
             <a:endParaRPr lang="en-US" sz="3000" dirty="0"/>
           </a:p>
@@ -4119,134 +4269,98 @@
       </p:sp>
       <p:sp>
         <p:nvSpPr>
-          <p:cNvPr id="3" name="Text 1"/>
-          <p:cNvSpPr/>
-          <p:nvPr/>
-        </p:nvSpPr>
-        <p:spPr>
-          <a:xfrm>
-            <a:off x="640080" y="1417320"/>
-            <a:ext cx="10058400" cy="365760"/>
-          </a:xfrm>
-          <a:prstGeom prst="rect">
-            <a:avLst/>
-          </a:prstGeom>
-          <a:noFill/>
-          <a:ln/>
-        </p:spPr>
-        <p:txBody>
-          <a:bodyPr wrap="square" rtlCol="0" anchor="ctr"/>
-          <a:lstStyle/>
-          <a:p>
-            <a:pPr indent="0" marL="0">
-              <a:buNone/>
-            </a:pPr>
-            <a:r>
-              <a:rPr lang="en-US" sz="1400" i="1" dirty="0">
-                <a:solidFill>
-                  <a:srgbClr val="6B6B63"/>
+          <p:cNvPr id="5" name="Shape 3"/>
+          <p:cNvSpPr/>
+          <p:nvPr/>
+        </p:nvSpPr>
+        <p:spPr>
+          <a:xfrm>
+            <a:off x="640080" y="2331720"/>
+            <a:ext cx="201168" cy="201168"/>
+          </a:xfrm>
+          <a:prstGeom prst="ellipse">
+            <a:avLst/>
+          </a:prstGeom>
+          <a:solidFill>
+            <a:srgbClr val="7A3B2E"/>
+          </a:solidFill>
+          <a:ln/>
+        </p:spPr>
+      </p:sp>
+      <p:sp>
+        <p:nvSpPr>
+          <p:cNvPr id="6" name="Text 4"/>
+          <p:cNvSpPr/>
+          <p:nvPr/>
+        </p:nvSpPr>
+        <p:spPr>
+          <a:xfrm>
+            <a:off x="1097280" y="2240280"/>
+            <a:ext cx="10607040" cy="1017270"/>
+          </a:xfrm>
+          <a:prstGeom prst="rect">
+            <a:avLst/>
+          </a:prstGeom>
+          <a:noFill/>
+          <a:ln/>
+        </p:spPr>
+        <p:txBody>
+          <a:bodyPr wrap="square" rtlCol="0" anchor="t">
+            <a:spAutoFit/>
+          </a:bodyPr>
+          <a:lstStyle/>
+          <a:p>
+            <a:pPr indent="0" marL="0">
+              <a:lnSpc>
+                <a:spcPct val="112000"/>
+              </a:lnSpc>
+              <a:buNone/>
+            </a:pPr>
+            <a:r>
+              <a:rPr lang="en-US" sz="1650" dirty="0">
+                <a:solidFill>
+                  <a:srgbClr val="1A1A1A"/>
                 </a:solidFill>
                 <a:latin typeface="Calibri" pitchFamily="34" charset="0"/>
                 <a:ea typeface="Calibri" pitchFamily="34" charset="-122"/>
                 <a:cs typeface="Calibri" pitchFamily="34" charset="-120"/>
               </a:rPr>
-              <a:t>about a third of the session each</a:t>
-            </a:r>
-            <a:endParaRPr lang="en-US" sz="1400" dirty="0"/>
-          </a:p>
-        </p:txBody>
-      </p:sp>
-      <p:sp>
-        <p:nvSpPr>
-          <p:cNvPr id="4" name="Shape 2"/>
-          <p:cNvSpPr/>
-          <p:nvPr/>
-        </p:nvSpPr>
-        <p:spPr>
-          <a:xfrm>
-            <a:off x="640080" y="2194560"/>
-            <a:ext cx="3383280" cy="3291840"/>
-          </a:xfrm>
-          <a:prstGeom prst="roundRect">
-            <a:avLst>
-              <a:gd name="adj" fmla="val 3333"/>
-            </a:avLst>
-          </a:prstGeom>
-          <a:solidFill>
-            <a:srgbClr val="F4EEE8"/>
-          </a:solidFill>
-          <a:ln/>
-        </p:spPr>
-      </p:sp>
-      <p:sp>
-        <p:nvSpPr>
-          <p:cNvPr id="5" name="Shape 3"/>
-          <p:cNvSpPr/>
-          <p:nvPr/>
-        </p:nvSpPr>
-        <p:spPr>
-          <a:xfrm>
-            <a:off x="1051560" y="2606040"/>
-            <a:ext cx="548640" cy="548640"/>
+              <a:t>Rows: what share of brides kept their name, year by year. One groupby, one chart.</a:t>
+            </a:r>
+            <a:endParaRPr lang="en-US" sz="1650" dirty="0"/>
+          </a:p>
+        </p:txBody>
+      </p:sp>
+      <p:sp>
+        <p:nvSpPr>
+          <p:cNvPr id="7" name="Shape 5"/>
+          <p:cNvSpPr/>
+          <p:nvPr/>
+        </p:nvSpPr>
+        <p:spPr>
+          <a:xfrm>
+            <a:off x="640080" y="3348990"/>
+            <a:ext cx="201168" cy="201168"/>
           </a:xfrm>
           <a:prstGeom prst="ellipse">
             <a:avLst/>
           </a:prstGeom>
           <a:solidFill>
-            <a:srgbClr val="7A3B2E"/>
-          </a:solidFill>
-          <a:ln/>
-        </p:spPr>
-      </p:sp>
-      <p:sp>
-        <p:nvSpPr>
-          <p:cNvPr id="6" name="Text 4"/>
-          <p:cNvSpPr/>
-          <p:nvPr/>
-        </p:nvSpPr>
-        <p:spPr>
-          <a:xfrm>
-            <a:off x="1005840" y="3383280"/>
-            <a:ext cx="2651760" cy="548640"/>
-          </a:xfrm>
-          <a:prstGeom prst="rect">
-            <a:avLst/>
-          </a:prstGeom>
-          <a:noFill/>
-          <a:ln/>
-        </p:spPr>
-        <p:txBody>
-          <a:bodyPr wrap="square" rtlCol="0" anchor="ctr"/>
-          <a:lstStyle/>
-          <a:p>
-            <a:pPr indent="0" marL="0">
-              <a:buNone/>
-            </a:pPr>
-            <a:r>
-              <a:rPr lang="en-US" sz="2100" b="1" dirty="0">
-                <a:solidFill>
-                  <a:srgbClr val="1A1A1A"/>
-                </a:solidFill>
-                <a:latin typeface="Cambria" pitchFamily="34" charset="0"/>
-                <a:ea typeface="Cambria" pitchFamily="34" charset="-122"/>
-                <a:cs typeface="Cambria" pitchFamily="34" charset="-120"/>
-              </a:rPr>
-              <a:t>Lecture / demo</a:t>
-            </a:r>
-            <a:endParaRPr lang="en-US" sz="2100" dirty="0"/>
-          </a:p>
-        </p:txBody>
-      </p:sp>
-      <p:sp>
-        <p:nvSpPr>
-          <p:cNvPr id="7" name="Text 5"/>
-          <p:cNvSpPr/>
-          <p:nvPr/>
-        </p:nvSpPr>
-        <p:spPr>
-          <a:xfrm>
-            <a:off x="1005840" y="3977640"/>
-            <a:ext cx="2651760" cy="1371600"/>
+            <a:srgbClr val="3F6F5F"/>
+          </a:solidFill>
+          <a:ln/>
+        </p:spPr>
+      </p:sp>
+      <p:sp>
+        <p:nvSpPr>
+          <p:cNvPr id="8" name="Text 6"/>
+          <p:cNvSpPr/>
+          <p:nvPr/>
+        </p:nvSpPr>
+        <p:spPr>
+          <a:xfrm>
+            <a:off x="1097280" y="3257550"/>
+            <a:ext cx="10607040" cy="1017270"/>
           </a:xfrm>
           <a:prstGeom prst="rect">
             <a:avLst/>
@@ -4262,12 +4376,12 @@
           <a:p>
             <a:pPr indent="0" marL="0">
               <a:lnSpc>
-                <a:spcPct val="115000"/>
+                <a:spcPct val="112000"/>
               </a:lnSpc>
               <a:buNone/>
             </a:pPr>
             <a:r>
-              <a:rPr lang="en-US" sz="1500" dirty="0">
+              <a:rPr lang="en-US" sz="1650" dirty="0">
                 <a:solidFill>
                   <a:srgbClr val="1A1A1A"/>
                 </a:solidFill>
@@ -4275,33 +4389,11 @@
                 <a:ea typeface="Calibri" pitchFamily="34" charset="-122"/>
                 <a:cs typeface="Calibri" pitchFamily="34" charset="-120"/>
               </a:rPr>
-              <a:t>Counting: rows, words, pixels</a:t>
-            </a:r>
-            <a:endParaRPr lang="en-US" sz="1500" dirty="0"/>
-          </a:p>
-        </p:txBody>
-      </p:sp>
-      <p:sp>
-        <p:nvSpPr>
-          <p:cNvPr id="8" name="Shape 6"/>
-          <p:cNvSpPr/>
-          <p:nvPr/>
-        </p:nvSpPr>
-        <p:spPr>
-          <a:xfrm>
-            <a:off x="4526280" y="2194560"/>
-            <a:ext cx="3383280" cy="3291840"/>
-          </a:xfrm>
-          <a:prstGeom prst="roundRect">
-            <a:avLst>
-              <a:gd name="adj" fmla="val 3333"/>
-            </a:avLst>
-          </a:prstGeom>
-          <a:solidFill>
-            <a:srgbClr val="F4EEE8"/>
-          </a:solidFill>
-          <a:ln/>
-        </p:spPr>
+              <a:t>Words: the top words of a lyric are "the, and, you" until you remove stop-words. That removal is your first modeling choice.</a:t>
+            </a:r>
+            <a:endParaRPr lang="en-US" sz="1650" dirty="0"/>
+          </a:p>
+        </p:txBody>
       </p:sp>
       <p:sp>
         <p:nvSpPr>
@@ -4311,14 +4403,14 @@
         </p:nvSpPr>
         <p:spPr>
           <a:xfrm>
-            <a:off x="4937760" y="2606040"/>
-            <a:ext cx="548640" cy="548640"/>
+            <a:off x="640080" y="4366260"/>
+            <a:ext cx="201168" cy="201168"/>
           </a:xfrm>
           <a:prstGeom prst="ellipse">
             <a:avLst/>
           </a:prstGeom>
           <a:solidFill>
-            <a:srgbClr val="3F6F5F"/>
+            <a:srgbClr val="B9852F"/>
           </a:solidFill>
           <a:ln/>
         </p:spPr>
@@ -4331,47 +4423,8 @@
         </p:nvSpPr>
         <p:spPr>
           <a:xfrm>
-            <a:off x="4892040" y="3383280"/>
-            <a:ext cx="2651760" cy="548640"/>
-          </a:xfrm>
-          <a:prstGeom prst="rect">
-            <a:avLst/>
-          </a:prstGeom>
-          <a:noFill/>
-          <a:ln/>
-        </p:spPr>
-        <p:txBody>
-          <a:bodyPr wrap="square" rtlCol="0" anchor="ctr"/>
-          <a:lstStyle/>
-          <a:p>
-            <a:pPr indent="0" marL="0">
-              <a:buNone/>
-            </a:pPr>
-            <a:r>
-              <a:rPr lang="en-US" sz="2100" b="1" dirty="0">
-                <a:solidFill>
-                  <a:srgbClr val="1A1A1A"/>
-                </a:solidFill>
-                <a:latin typeface="Cambria" pitchFamily="34" charset="0"/>
-                <a:ea typeface="Cambria" pitchFamily="34" charset="-122"/>
-                <a:cs typeface="Cambria" pitchFamily="34" charset="-120"/>
-              </a:rPr>
-              <a:t>Workshop</a:t>
-            </a:r>
-            <a:endParaRPr lang="en-US" sz="2100" dirty="0"/>
-          </a:p>
-        </p:txBody>
-      </p:sp>
-      <p:sp>
-        <p:nvSpPr>
-          <p:cNvPr id="11" name="Text 9"/>
-          <p:cNvSpPr/>
-          <p:nvPr/>
-        </p:nvSpPr>
-        <p:spPr>
-          <a:xfrm>
-            <a:off x="4892040" y="3977640"/>
-            <a:ext cx="2651760" cy="1371600"/>
+            <a:off x="1097280" y="4274820"/>
+            <a:ext cx="10607040" cy="1017270"/>
           </a:xfrm>
           <a:prstGeom prst="rect">
             <a:avLst/>
@@ -4387,12 +4440,12 @@
           <a:p>
             <a:pPr indent="0" marL="0">
               <a:lnSpc>
-                <a:spcPct val="115000"/>
+                <a:spcPct val="112000"/>
               </a:lnSpc>
               <a:buNone/>
             </a:pPr>
             <a:r>
-              <a:rPr lang="en-US" sz="1500" dirty="0">
+              <a:rPr lang="en-US" sz="1650" dirty="0">
                 <a:solidFill>
                   <a:srgbClr val="1A1A1A"/>
                 </a:solidFill>
@@ -4400,103 +4453,42 @@
                 <a:ea typeface="Calibri" pitchFamily="34" charset="-122"/>
                 <a:cs typeface="Calibri" pitchFamily="34" charset="-120"/>
               </a:rPr>
-              <a:t>Build hands-on on your own data.</a:t>
-            </a:r>
-            <a:endParaRPr lang="en-US" sz="1500" dirty="0"/>
-          </a:p>
-        </p:txBody>
-      </p:sp>
-      <p:sp>
-        <p:nvSpPr>
-          <p:cNvPr id="12" name="Shape 10"/>
-          <p:cNvSpPr/>
-          <p:nvPr/>
-        </p:nvSpPr>
-        <p:spPr>
-          <a:xfrm>
-            <a:off x="8412480" y="2194560"/>
-            <a:ext cx="3383280" cy="3291840"/>
-          </a:xfrm>
-          <a:prstGeom prst="roundRect">
-            <a:avLst>
-              <a:gd name="adj" fmla="val 3333"/>
-            </a:avLst>
-          </a:prstGeom>
-          <a:solidFill>
-            <a:srgbClr val="F4EEE8"/>
-          </a:solidFill>
-          <a:ln/>
-        </p:spPr>
-      </p:sp>
-      <p:sp>
-        <p:nvSpPr>
-          <p:cNvPr id="13" name="Shape 11"/>
-          <p:cNvSpPr/>
-          <p:nvPr/>
-        </p:nvSpPr>
-        <p:spPr>
-          <a:xfrm>
-            <a:off x="8823960" y="2606040"/>
-            <a:ext cx="548640" cy="548640"/>
+              <a:t>Pixels: rank 200 Met thumbnails darkest to brightest from average luminance.</a:t>
+            </a:r>
+            <a:endParaRPr lang="en-US" sz="1650" dirty="0"/>
+          </a:p>
+        </p:txBody>
+      </p:sp>
+      <p:sp>
+        <p:nvSpPr>
+          <p:cNvPr id="11" name="Shape 9"/>
+          <p:cNvSpPr/>
+          <p:nvPr/>
+        </p:nvSpPr>
+        <p:spPr>
+          <a:xfrm>
+            <a:off x="640080" y="5383530"/>
+            <a:ext cx="201168" cy="201168"/>
           </a:xfrm>
           <a:prstGeom prst="ellipse">
             <a:avLst/>
           </a:prstGeom>
           <a:solidFill>
-            <a:srgbClr val="B9852F"/>
-          </a:solidFill>
-          <a:ln/>
-        </p:spPr>
-      </p:sp>
-      <p:sp>
-        <p:nvSpPr>
-          <p:cNvPr id="14" name="Text 12"/>
-          <p:cNvSpPr/>
-          <p:nvPr/>
-        </p:nvSpPr>
-        <p:spPr>
-          <a:xfrm>
-            <a:off x="8778240" y="3383280"/>
-            <a:ext cx="2651760" cy="548640"/>
-          </a:xfrm>
-          <a:prstGeom prst="rect">
-            <a:avLst/>
-          </a:prstGeom>
-          <a:noFill/>
-          <a:ln/>
-        </p:spPr>
-        <p:txBody>
-          <a:bodyPr wrap="square" rtlCol="0" anchor="ctr"/>
-          <a:lstStyle/>
-          <a:p>
-            <a:pPr indent="0" marL="0">
-              <a:buNone/>
-            </a:pPr>
-            <a:r>
-              <a:rPr lang="en-US" sz="2100" b="1" dirty="0">
-                <a:solidFill>
-                  <a:srgbClr val="1A1A1A"/>
-                </a:solidFill>
-                <a:latin typeface="Cambria" pitchFamily="34" charset="0"/>
-                <a:ea typeface="Cambria" pitchFamily="34" charset="-122"/>
-                <a:cs typeface="Cambria" pitchFamily="34" charset="-120"/>
-              </a:rPr>
-              <a:t>Discussion</a:t>
-            </a:r>
-            <a:endParaRPr lang="en-US" sz="2100" dirty="0"/>
-          </a:p>
-        </p:txBody>
-      </p:sp>
-      <p:sp>
-        <p:nvSpPr>
-          <p:cNvPr id="15" name="Text 13"/>
-          <p:cNvSpPr/>
-          <p:nvPr/>
-        </p:nvSpPr>
-        <p:spPr>
-          <a:xfrm>
-            <a:off x="8778240" y="3977640"/>
-            <a:ext cx="2651760" cy="1371600"/>
+            <a:srgbClr val="7A3B2E"/>
+          </a:solidFill>
+          <a:ln/>
+        </p:spPr>
+      </p:sp>
+      <p:sp>
+        <p:nvSpPr>
+          <p:cNvPr id="12" name="Text 10"/>
+          <p:cNvSpPr/>
+          <p:nvPr/>
+        </p:nvSpPr>
+        <p:spPr>
+          <a:xfrm>
+            <a:off x="1097280" y="5292090"/>
+            <a:ext cx="10607040" cy="1017270"/>
           </a:xfrm>
           <a:prstGeom prst="rect">
             <a:avLst/>
@@ -4512,12 +4504,12 @@
           <a:p>
             <a:pPr indent="0" marL="0">
               <a:lnSpc>
-                <a:spcPct val="115000"/>
+                <a:spcPct val="112000"/>
               </a:lnSpc>
               <a:buNone/>
             </a:pPr>
             <a:r>
-              <a:rPr lang="en-US" sz="1500" dirty="0">
+              <a:rPr lang="en-US" sz="1650" dirty="0">
                 <a:solidFill>
                   <a:srgbClr val="1A1A1A"/>
                 </a:solidFill>
@@ -4525,9 +4517,9 @@
                 <a:ea typeface="Calibri" pitchFamily="34" charset="-122"/>
                 <a:cs typeface="Calibri" pitchFamily="34" charset="-120"/>
               </a:rPr>
-              <a:t>Interrogate the study, debate it, or critique each other's work.</a:t>
-            </a:r>
-            <a:endParaRPr lang="en-US" sz="1500" dirty="0"/>
+              <a:t>The same technique three times, each containing a decision.</a:t>
+            </a:r>
+            <a:endParaRPr lang="en-US" sz="1650" dirty="0"/>
           </a:p>
         </p:txBody>
       </p:sp>
@@ -4571,7 +4563,7 @@
         </p:nvSpPr>
         <p:spPr>
           <a:xfrm>
-            <a:off x="640080" y="640080"/>
+            <a:off x="640080" y="731520"/>
             <a:ext cx="10058400" cy="731520"/>
           </a:xfrm>
           <a:prstGeom prst="rect">
@@ -4596,7 +4588,7 @@
                 <a:ea typeface="Cambria" pitchFamily="34" charset="-122"/>
                 <a:cs typeface="Cambria" pitchFamily="34" charset="-120"/>
               </a:rPr>
-              <a:t>The session</a:t>
+              <a:t>Three modes today</a:t>
             </a:r>
             <a:endParaRPr lang="en-US" sz="3000" dirty="0"/>
           </a:p>
@@ -4604,36 +4596,14 @@
       </p:sp>
       <p:sp>
         <p:nvSpPr>
-          <p:cNvPr id="3" name="Shape 1"/>
-          <p:cNvSpPr/>
-          <p:nvPr/>
-        </p:nvSpPr>
-        <p:spPr>
-          <a:xfrm>
-            <a:off x="640080" y="1572768"/>
-            <a:ext cx="868680" cy="450342"/>
-          </a:xfrm>
-          <a:prstGeom prst="roundRect">
-            <a:avLst>
-              <a:gd name="adj" fmla="val 12183"/>
-            </a:avLst>
-          </a:prstGeom>
-          <a:solidFill>
-            <a:srgbClr val="7A3B2E"/>
-          </a:solidFill>
-          <a:ln/>
-        </p:spPr>
-      </p:sp>
-      <p:sp>
-        <p:nvSpPr>
-          <p:cNvPr id="4" name="Text 2"/>
-          <p:cNvSpPr/>
-          <p:nvPr/>
-        </p:nvSpPr>
-        <p:spPr>
-          <a:xfrm>
-            <a:off x="640080" y="1572768"/>
-            <a:ext cx="868680" cy="450342"/>
+          <p:cNvPr id="3" name="Text 1"/>
+          <p:cNvSpPr/>
+          <p:nvPr/>
+        </p:nvSpPr>
+        <p:spPr>
+          <a:xfrm>
+            <a:off x="640080" y="1417320"/>
+            <a:ext cx="10058400" cy="365760"/>
           </a:xfrm>
           <a:prstGeom prst="rect">
             <a:avLst/>
@@ -4645,52 +4615,136 @@
           <a:bodyPr wrap="square" rtlCol="0" anchor="ctr"/>
           <a:lstStyle/>
           <a:p>
-            <a:pPr algn="ctr" indent="0" marL="0">
-              <a:buNone/>
-            </a:pPr>
-            <a:r>
-              <a:rPr lang="en-US" sz="1100" b="1" dirty="0">
-                <a:solidFill>
-                  <a:srgbClr val="FFFFFF"/>
+            <a:pPr indent="0" marL="0">
+              <a:buNone/>
+            </a:pPr>
+            <a:r>
+              <a:rPr lang="en-US" sz="1400" i="1" dirty="0">
+                <a:solidFill>
+                  <a:srgbClr val="6B6B63"/>
                 </a:solidFill>
                 <a:latin typeface="Calibri" pitchFamily="34" charset="0"/>
                 <a:ea typeface="Calibri" pitchFamily="34" charset="-122"/>
                 <a:cs typeface="Calibri" pitchFamily="34" charset="-120"/>
               </a:rPr>
-              <a:t>0:00</a:t>
-            </a:r>
-            <a:endParaRPr lang="en-US" sz="1100" dirty="0"/>
-          </a:p>
-        </p:txBody>
-      </p:sp>
-      <p:sp>
-        <p:nvSpPr>
-          <p:cNvPr id="5" name="Text 3"/>
-          <p:cNvSpPr/>
-          <p:nvPr/>
-        </p:nvSpPr>
-        <p:spPr>
-          <a:xfrm>
-            <a:off x="1691640" y="1554480"/>
-            <a:ext cx="9646920" cy="560070"/>
-          </a:xfrm>
-          <a:prstGeom prst="rect">
-            <a:avLst/>
-          </a:prstGeom>
-          <a:noFill/>
-          <a:ln/>
-        </p:spPr>
-        <p:txBody>
-          <a:bodyPr wrap="square" rtlCol="0" anchor="ctr">
+              <a:t>about a third of the session each</a:t>
+            </a:r>
+            <a:endParaRPr lang="en-US" sz="1400" dirty="0"/>
+          </a:p>
+        </p:txBody>
+      </p:sp>
+      <p:sp>
+        <p:nvSpPr>
+          <p:cNvPr id="4" name="Shape 2"/>
+          <p:cNvSpPr/>
+          <p:nvPr/>
+        </p:nvSpPr>
+        <p:spPr>
+          <a:xfrm>
+            <a:off x="640080" y="2194560"/>
+            <a:ext cx="3383280" cy="3291840"/>
+          </a:xfrm>
+          <a:prstGeom prst="roundRect">
+            <a:avLst>
+              <a:gd name="adj" fmla="val 3333"/>
+            </a:avLst>
+          </a:prstGeom>
+          <a:solidFill>
+            <a:srgbClr val="F4EEE8"/>
+          </a:solidFill>
+          <a:ln/>
+        </p:spPr>
+      </p:sp>
+      <p:sp>
+        <p:nvSpPr>
+          <p:cNvPr id="5" name="Shape 3"/>
+          <p:cNvSpPr/>
+          <p:nvPr/>
+        </p:nvSpPr>
+        <p:spPr>
+          <a:xfrm>
+            <a:off x="1051560" y="2606040"/>
+            <a:ext cx="548640" cy="548640"/>
+          </a:xfrm>
+          <a:prstGeom prst="ellipse">
+            <a:avLst/>
+          </a:prstGeom>
+          <a:solidFill>
+            <a:srgbClr val="7A3B2E"/>
+          </a:solidFill>
+          <a:ln/>
+        </p:spPr>
+      </p:sp>
+      <p:sp>
+        <p:nvSpPr>
+          <p:cNvPr id="6" name="Text 4"/>
+          <p:cNvSpPr/>
+          <p:nvPr/>
+        </p:nvSpPr>
+        <p:spPr>
+          <a:xfrm>
+            <a:off x="1005840" y="3383280"/>
+            <a:ext cx="2651760" cy="548640"/>
+          </a:xfrm>
+          <a:prstGeom prst="rect">
+            <a:avLst/>
+          </a:prstGeom>
+          <a:noFill/>
+          <a:ln/>
+        </p:spPr>
+        <p:txBody>
+          <a:bodyPr wrap="square" rtlCol="0" anchor="ctr"/>
+          <a:lstStyle/>
+          <a:p>
+            <a:pPr indent="0" marL="0">
+              <a:buNone/>
+            </a:pPr>
+            <a:r>
+              <a:rPr lang="en-US" sz="2100" b="1" dirty="0">
+                <a:solidFill>
+                  <a:srgbClr val="1A1A1A"/>
+                </a:solidFill>
+                <a:latin typeface="Cambria" pitchFamily="34" charset="0"/>
+                <a:ea typeface="Cambria" pitchFamily="34" charset="-122"/>
+                <a:cs typeface="Cambria" pitchFamily="34" charset="-120"/>
+              </a:rPr>
+              <a:t>Lecture / demo</a:t>
+            </a:r>
+            <a:endParaRPr lang="en-US" sz="2100" dirty="0"/>
+          </a:p>
+        </p:txBody>
+      </p:sp>
+      <p:sp>
+        <p:nvSpPr>
+          <p:cNvPr id="7" name="Text 5"/>
+          <p:cNvSpPr/>
+          <p:nvPr/>
+        </p:nvSpPr>
+        <p:spPr>
+          <a:xfrm>
+            <a:off x="1005840" y="3977640"/>
+            <a:ext cx="2651760" cy="1371600"/>
+          </a:xfrm>
+          <a:prstGeom prst="rect">
+            <a:avLst/>
+          </a:prstGeom>
+          <a:noFill/>
+          <a:ln/>
+        </p:spPr>
+        <p:txBody>
+          <a:bodyPr wrap="square" rtlCol="0" anchor="t">
             <a:spAutoFit/>
           </a:bodyPr>
           <a:lstStyle/>
           <a:p>
             <a:pPr indent="0" marL="0">
-              <a:buNone/>
-            </a:pPr>
-            <a:r>
-              <a:rPr lang="en-US" sz="1100" dirty="0">
+              <a:lnSpc>
+                <a:spcPct val="115000"/>
+              </a:lnSpc>
+              <a:buNone/>
+            </a:pPr>
+            <a:r>
+              <a:rPr lang="en-US" sz="1500" dirty="0">
                 <a:solidFill>
                   <a:srgbClr val="1A1A1A"/>
                 </a:solidFill>
@@ -4698,44 +4752,64 @@
                 <a:ea typeface="Calibri" pitchFamily="34" charset="-122"/>
                 <a:cs typeface="Calibri" pitchFamily="34" charset="-120"/>
               </a:rPr>
-              <a:t>Introductions and working agreements, demonstrated in practice. Today's live coding deliberately includes real mistakes.</a:t>
-            </a:r>
-            <a:endParaRPr lang="en-US" sz="1100" dirty="0"/>
-          </a:p>
-        </p:txBody>
-      </p:sp>
-      <p:sp>
-        <p:nvSpPr>
-          <p:cNvPr id="6" name="Shape 4"/>
-          <p:cNvSpPr/>
-          <p:nvPr/>
-        </p:nvSpPr>
-        <p:spPr>
-          <a:xfrm>
-            <a:off x="640080" y="2132838"/>
-            <a:ext cx="868680" cy="450342"/>
+              <a:t>Counting: rows, words, pixels</a:t>
+            </a:r>
+            <a:endParaRPr lang="en-US" sz="1500" dirty="0"/>
+          </a:p>
+        </p:txBody>
+      </p:sp>
+      <p:sp>
+        <p:nvSpPr>
+          <p:cNvPr id="8" name="Shape 6"/>
+          <p:cNvSpPr/>
+          <p:nvPr/>
+        </p:nvSpPr>
+        <p:spPr>
+          <a:xfrm>
+            <a:off x="4526280" y="2194560"/>
+            <a:ext cx="3383280" cy="3291840"/>
           </a:xfrm>
           <a:prstGeom prst="roundRect">
             <a:avLst>
-              <a:gd name="adj" fmla="val 12183"/>
+              <a:gd name="adj" fmla="val 3333"/>
             </a:avLst>
           </a:prstGeom>
           <a:solidFill>
-            <a:srgbClr val="7A3B2E"/>
-          </a:solidFill>
-          <a:ln/>
-        </p:spPr>
-      </p:sp>
-      <p:sp>
-        <p:nvSpPr>
-          <p:cNvPr id="7" name="Text 5"/>
-          <p:cNvSpPr/>
-          <p:nvPr/>
-        </p:nvSpPr>
-        <p:spPr>
-          <a:xfrm>
-            <a:off x="640080" y="2132838"/>
-            <a:ext cx="868680" cy="450342"/>
+            <a:srgbClr val="F4EEE8"/>
+          </a:solidFill>
+          <a:ln/>
+        </p:spPr>
+      </p:sp>
+      <p:sp>
+        <p:nvSpPr>
+          <p:cNvPr id="9" name="Shape 7"/>
+          <p:cNvSpPr/>
+          <p:nvPr/>
+        </p:nvSpPr>
+        <p:spPr>
+          <a:xfrm>
+            <a:off x="4937760" y="2606040"/>
+            <a:ext cx="548640" cy="548640"/>
+          </a:xfrm>
+          <a:prstGeom prst="ellipse">
+            <a:avLst/>
+          </a:prstGeom>
+          <a:solidFill>
+            <a:srgbClr val="3F6F5F"/>
+          </a:solidFill>
+          <a:ln/>
+        </p:spPr>
+      </p:sp>
+      <p:sp>
+        <p:nvSpPr>
+          <p:cNvPr id="10" name="Text 8"/>
+          <p:cNvSpPr/>
+          <p:nvPr/>
+        </p:nvSpPr>
+        <p:spPr>
+          <a:xfrm>
+            <a:off x="4892040" y="3383280"/>
+            <a:ext cx="2651760" cy="548640"/>
           </a:xfrm>
           <a:prstGeom prst="rect">
             <a:avLst/>
@@ -4747,52 +4821,180 @@
           <a:bodyPr wrap="square" rtlCol="0" anchor="ctr"/>
           <a:lstStyle/>
           <a:p>
-            <a:pPr algn="ctr" indent="0" marL="0">
-              <a:buNone/>
-            </a:pPr>
-            <a:r>
-              <a:rPr lang="en-US" sz="1100" b="1" dirty="0">
-                <a:solidFill>
-                  <a:srgbClr val="FFFFFF"/>
+            <a:pPr indent="0" marL="0">
+              <a:buNone/>
+            </a:pPr>
+            <a:r>
+              <a:rPr lang="en-US" sz="2100" b="1" dirty="0">
+                <a:solidFill>
+                  <a:srgbClr val="1A1A1A"/>
+                </a:solidFill>
+                <a:latin typeface="Cambria" pitchFamily="34" charset="0"/>
+                <a:ea typeface="Cambria" pitchFamily="34" charset="-122"/>
+                <a:cs typeface="Cambria" pitchFamily="34" charset="-120"/>
+              </a:rPr>
+              <a:t>Workshop</a:t>
+            </a:r>
+            <a:endParaRPr lang="en-US" sz="2100" dirty="0"/>
+          </a:p>
+        </p:txBody>
+      </p:sp>
+      <p:sp>
+        <p:nvSpPr>
+          <p:cNvPr id="11" name="Text 9"/>
+          <p:cNvSpPr/>
+          <p:nvPr/>
+        </p:nvSpPr>
+        <p:spPr>
+          <a:xfrm>
+            <a:off x="4892040" y="3977640"/>
+            <a:ext cx="2651760" cy="1371600"/>
+          </a:xfrm>
+          <a:prstGeom prst="rect">
+            <a:avLst/>
+          </a:prstGeom>
+          <a:noFill/>
+          <a:ln/>
+        </p:spPr>
+        <p:txBody>
+          <a:bodyPr wrap="square" rtlCol="0" anchor="t">
+            <a:spAutoFit/>
+          </a:bodyPr>
+          <a:lstStyle/>
+          <a:p>
+            <a:pPr indent="0" marL="0">
+              <a:lnSpc>
+                <a:spcPct val="115000"/>
+              </a:lnSpc>
+              <a:buNone/>
+            </a:pPr>
+            <a:r>
+              <a:rPr lang="en-US" sz="1500" dirty="0">
+                <a:solidFill>
+                  <a:srgbClr val="1A1A1A"/>
                 </a:solidFill>
                 <a:latin typeface="Calibri" pitchFamily="34" charset="0"/>
                 <a:ea typeface="Calibri" pitchFamily="34" charset="-122"/>
                 <a:cs typeface="Calibri" pitchFamily="34" charset="-120"/>
               </a:rPr>
-              <a:t>0:10</a:t>
-            </a:r>
-            <a:endParaRPr lang="en-US" sz="1100" dirty="0"/>
-          </a:p>
-        </p:txBody>
-      </p:sp>
-      <p:sp>
-        <p:nvSpPr>
-          <p:cNvPr id="8" name="Text 6"/>
-          <p:cNvSpPr/>
-          <p:nvPr/>
-        </p:nvSpPr>
-        <p:spPr>
-          <a:xfrm>
-            <a:off x="1691640" y="2114550"/>
-            <a:ext cx="9646920" cy="560070"/>
-          </a:xfrm>
-          <a:prstGeom prst="rect">
-            <a:avLst/>
-          </a:prstGeom>
-          <a:noFill/>
-          <a:ln/>
-        </p:spPr>
-        <p:txBody>
-          <a:bodyPr wrap="square" rtlCol="0" anchor="ctr">
+              <a:t>Build hands-on on your own data.</a:t>
+            </a:r>
+            <a:endParaRPr lang="en-US" sz="1500" dirty="0"/>
+          </a:p>
+        </p:txBody>
+      </p:sp>
+      <p:sp>
+        <p:nvSpPr>
+          <p:cNvPr id="12" name="Shape 10"/>
+          <p:cNvSpPr/>
+          <p:nvPr/>
+        </p:nvSpPr>
+        <p:spPr>
+          <a:xfrm>
+            <a:off x="8412480" y="2194560"/>
+            <a:ext cx="3383280" cy="3291840"/>
+          </a:xfrm>
+          <a:prstGeom prst="roundRect">
+            <a:avLst>
+              <a:gd name="adj" fmla="val 3333"/>
+            </a:avLst>
+          </a:prstGeom>
+          <a:solidFill>
+            <a:srgbClr val="F4EEE8"/>
+          </a:solidFill>
+          <a:ln/>
+        </p:spPr>
+      </p:sp>
+      <p:sp>
+        <p:nvSpPr>
+          <p:cNvPr id="13" name="Shape 11"/>
+          <p:cNvSpPr/>
+          <p:nvPr/>
+        </p:nvSpPr>
+        <p:spPr>
+          <a:xfrm>
+            <a:off x="8823960" y="2606040"/>
+            <a:ext cx="548640" cy="548640"/>
+          </a:xfrm>
+          <a:prstGeom prst="ellipse">
+            <a:avLst/>
+          </a:prstGeom>
+          <a:solidFill>
+            <a:srgbClr val="B9852F"/>
+          </a:solidFill>
+          <a:ln/>
+        </p:spPr>
+      </p:sp>
+      <p:sp>
+        <p:nvSpPr>
+          <p:cNvPr id="14" name="Text 12"/>
+          <p:cNvSpPr/>
+          <p:nvPr/>
+        </p:nvSpPr>
+        <p:spPr>
+          <a:xfrm>
+            <a:off x="8778240" y="3383280"/>
+            <a:ext cx="2651760" cy="548640"/>
+          </a:xfrm>
+          <a:prstGeom prst="rect">
+            <a:avLst/>
+          </a:prstGeom>
+          <a:noFill/>
+          <a:ln/>
+        </p:spPr>
+        <p:txBody>
+          <a:bodyPr wrap="square" rtlCol="0" anchor="ctr"/>
+          <a:lstStyle/>
+          <a:p>
+            <a:pPr indent="0" marL="0">
+              <a:buNone/>
+            </a:pPr>
+            <a:r>
+              <a:rPr lang="en-US" sz="2100" b="1" dirty="0">
+                <a:solidFill>
+                  <a:srgbClr val="1A1A1A"/>
+                </a:solidFill>
+                <a:latin typeface="Cambria" pitchFamily="34" charset="0"/>
+                <a:ea typeface="Cambria" pitchFamily="34" charset="-122"/>
+                <a:cs typeface="Cambria" pitchFamily="34" charset="-120"/>
+              </a:rPr>
+              <a:t>Discussion</a:t>
+            </a:r>
+            <a:endParaRPr lang="en-US" sz="2100" dirty="0"/>
+          </a:p>
+        </p:txBody>
+      </p:sp>
+      <p:sp>
+        <p:nvSpPr>
+          <p:cNvPr id="15" name="Text 13"/>
+          <p:cNvSpPr/>
+          <p:nvPr/>
+        </p:nvSpPr>
+        <p:spPr>
+          <a:xfrm>
+            <a:off x="8778240" y="3977640"/>
+            <a:ext cx="2651760" cy="1371600"/>
+          </a:xfrm>
+          <a:prstGeom prst="rect">
+            <a:avLst/>
+          </a:prstGeom>
+          <a:noFill/>
+          <a:ln/>
+        </p:spPr>
+        <p:txBody>
+          <a:bodyPr wrap="square" rtlCol="0" anchor="t">
             <a:spAutoFit/>
           </a:bodyPr>
           <a:lstStyle/>
           <a:p>
             <a:pPr indent="0" marL="0">
-              <a:buNone/>
-            </a:pPr>
-            <a:r>
-              <a:rPr lang="en-US" sz="1100" dirty="0">
+              <a:lnSpc>
+                <a:spcPct val="115000"/>
+              </a:lnSpc>
+              <a:buNone/>
+            </a:pPr>
+            <a:r>
+              <a:rPr lang="en-US" sz="1500" dirty="0">
                 <a:solidFill>
                   <a:srgbClr val="1A1A1A"/>
                 </a:solidFill>
@@ -4800,621 +5002,9 @@
                 <a:ea typeface="Calibri" pitchFamily="34" charset="-122"/>
                 <a:cs typeface="Calibri" pitchFamily="34" charset="-120"/>
               </a:rPr>
-              <a:t>Lecture, the stakes: machines already read culture at scale, the feed ranking what you see, the moderation filter, the model trained on scraped art and prose, and that reading happens without you. Counting culture has produced real knowledge (the screenplay verb split, the Rowling unmasking, pop music's 1991 revolution) and real mistakes, and both look identical until someone checks. In ten weeks you do the reading yourself and publish something checkable.</a:t>
-            </a:r>
-            <a:endParaRPr lang="en-US" sz="1100" dirty="0"/>
-          </a:p>
-        </p:txBody>
-      </p:sp>
-      <p:sp>
-        <p:nvSpPr>
-          <p:cNvPr id="9" name="Shape 7"/>
-          <p:cNvSpPr/>
-          <p:nvPr/>
-        </p:nvSpPr>
-        <p:spPr>
-          <a:xfrm>
-            <a:off x="640080" y="2692908"/>
-            <a:ext cx="868680" cy="450342"/>
-          </a:xfrm>
-          <a:prstGeom prst="roundRect">
-            <a:avLst>
-              <a:gd name="adj" fmla="val 12183"/>
-            </a:avLst>
-          </a:prstGeom>
-          <a:solidFill>
-            <a:srgbClr val="7A3B2E"/>
-          </a:solidFill>
-          <a:ln/>
-        </p:spPr>
-      </p:sp>
-      <p:sp>
-        <p:nvSpPr>
-          <p:cNvPr id="10" name="Text 8"/>
-          <p:cNvSpPr/>
-          <p:nvPr/>
-        </p:nvSpPr>
-        <p:spPr>
-          <a:xfrm>
-            <a:off x="640080" y="2692908"/>
-            <a:ext cx="868680" cy="450342"/>
-          </a:xfrm>
-          <a:prstGeom prst="rect">
-            <a:avLst/>
-          </a:prstGeom>
-          <a:noFill/>
-          <a:ln/>
-        </p:spPr>
-        <p:txBody>
-          <a:bodyPr wrap="square" rtlCol="0" anchor="ctr"/>
-          <a:lstStyle/>
-          <a:p>
-            <a:pPr algn="ctr" indent="0" marL="0">
-              <a:buNone/>
-            </a:pPr>
-            <a:r>
-              <a:rPr lang="en-US" sz="1100" b="1" dirty="0">
-                <a:solidFill>
-                  <a:srgbClr val="FFFFFF"/>
-                </a:solidFill>
-                <a:latin typeface="Calibri" pitchFamily="34" charset="0"/>
-                <a:ea typeface="Calibri" pitchFamily="34" charset="-122"/>
-                <a:cs typeface="Calibri" pitchFamily="34" charset="-120"/>
-              </a:rPr>
-              <a:t>0:28</a:t>
-            </a:r>
-            <a:endParaRPr lang="en-US" sz="1100" dirty="0"/>
-          </a:p>
-        </p:txBody>
-      </p:sp>
-      <p:sp>
-        <p:nvSpPr>
-          <p:cNvPr id="11" name="Text 9"/>
-          <p:cNvSpPr/>
-          <p:nvPr/>
-        </p:nvSpPr>
-        <p:spPr>
-          <a:xfrm>
-            <a:off x="1691640" y="2674620"/>
-            <a:ext cx="9646920" cy="560070"/>
-          </a:xfrm>
-          <a:prstGeom prst="rect">
-            <a:avLst/>
-          </a:prstGeom>
-          <a:noFill/>
-          <a:ln/>
-        </p:spPr>
-        <p:txBody>
-          <a:bodyPr wrap="square" rtlCol="0" anchor="ctr">
-            <a:spAutoFit/>
-          </a:bodyPr>
-          <a:lstStyle/>
-          <a:p>
-            <a:pPr indent="0" marL="0">
-              <a:buNone/>
-            </a:pPr>
-            <a:r>
-              <a:rPr lang="en-US" sz="1100" dirty="0">
-                <a:solidFill>
-                  <a:srgbClr val="1A1A1A"/>
-                </a:solidFill>
-                <a:latin typeface="Calibri" pitchFamily="34" charset="0"/>
-                <a:ea typeface="Calibri" pitchFamily="34" charset="-122"/>
-                <a:cs typeface="Calibri" pitchFamily="34" charset="-120"/>
-              </a:rPr>
-              <a:t>Look at This, then Question It: She Giggles, He Gallops.</a:t>
-            </a:r>
-            <a:endParaRPr lang="en-US" sz="1100" dirty="0"/>
-          </a:p>
-        </p:txBody>
-      </p:sp>
-      <p:sp>
-        <p:nvSpPr>
-          <p:cNvPr id="12" name="Shape 10"/>
-          <p:cNvSpPr/>
-          <p:nvPr/>
-        </p:nvSpPr>
-        <p:spPr>
-          <a:xfrm>
-            <a:off x="640080" y="3252978"/>
-            <a:ext cx="868680" cy="450342"/>
-          </a:xfrm>
-          <a:prstGeom prst="roundRect">
-            <a:avLst>
-              <a:gd name="adj" fmla="val 12183"/>
-            </a:avLst>
-          </a:prstGeom>
-          <a:solidFill>
-            <a:srgbClr val="7A3B2E"/>
-          </a:solidFill>
-          <a:ln/>
-        </p:spPr>
-      </p:sp>
-      <p:sp>
-        <p:nvSpPr>
-          <p:cNvPr id="13" name="Text 11"/>
-          <p:cNvSpPr/>
-          <p:nvPr/>
-        </p:nvSpPr>
-        <p:spPr>
-          <a:xfrm>
-            <a:off x="640080" y="3252978"/>
-            <a:ext cx="868680" cy="450342"/>
-          </a:xfrm>
-          <a:prstGeom prst="rect">
-            <a:avLst/>
-          </a:prstGeom>
-          <a:noFill/>
-          <a:ln/>
-        </p:spPr>
-        <p:txBody>
-          <a:bodyPr wrap="square" rtlCol="0" anchor="ctr"/>
-          <a:lstStyle/>
-          <a:p>
-            <a:pPr algn="ctr" indent="0" marL="0">
-              <a:buNone/>
-            </a:pPr>
-            <a:r>
-              <a:rPr lang="en-US" sz="1100" b="1" dirty="0">
-                <a:solidFill>
-                  <a:srgbClr val="FFFFFF"/>
-                </a:solidFill>
-                <a:latin typeface="Calibri" pitchFamily="34" charset="0"/>
-                <a:ea typeface="Calibri" pitchFamily="34" charset="-122"/>
-                <a:cs typeface="Calibri" pitchFamily="34" charset="-120"/>
-              </a:rPr>
-              <a:t>0:35</a:t>
-            </a:r>
-            <a:endParaRPr lang="en-US" sz="1100" dirty="0"/>
-          </a:p>
-        </p:txBody>
-      </p:sp>
-      <p:sp>
-        <p:nvSpPr>
-          <p:cNvPr id="14" name="Text 12"/>
-          <p:cNvSpPr/>
-          <p:nvPr/>
-        </p:nvSpPr>
-        <p:spPr>
-          <a:xfrm>
-            <a:off x="1691640" y="3234690"/>
-            <a:ext cx="9646920" cy="560070"/>
-          </a:xfrm>
-          <a:prstGeom prst="rect">
-            <a:avLst/>
-          </a:prstGeom>
-          <a:noFill/>
-          <a:ln/>
-        </p:spPr>
-        <p:txBody>
-          <a:bodyPr wrap="square" rtlCol="0" anchor="ctr">
-            <a:spAutoFit/>
-          </a:bodyPr>
-          <a:lstStyle/>
-          <a:p>
-            <a:pPr indent="0" marL="0">
-              <a:buNone/>
-            </a:pPr>
-            <a:r>
-              <a:rPr lang="en-US" sz="1100" dirty="0">
-                <a:solidFill>
-                  <a:srgbClr val="1A1A1A"/>
-                </a:solidFill>
-                <a:latin typeface="Calibri" pitchFamily="34" charset="0"/>
-                <a:ea typeface="Calibri" pitchFamily="34" charset="-122"/>
-                <a:cs typeface="Calibri" pitchFamily="34" charset="-120"/>
-              </a:rPr>
-              <a:t>The vocabulary and the map (no code): corpus, method, model, embedding, plus what data itself is. A CSV, anatomized on screen (rows are observations, columns are recorded facts), and Drucker's correction: data is capta, taken not given. Two minutes in pairs: what did the makers of the wedding table take, and what did they leave out? The deliverable, shown: a web essay on a runnable notebook.</a:t>
-            </a:r>
-            <a:endParaRPr lang="en-US" sz="1100" dirty="0"/>
-          </a:p>
-        </p:txBody>
-      </p:sp>
-      <p:sp>
-        <p:nvSpPr>
-          <p:cNvPr id="15" name="Shape 13"/>
-          <p:cNvSpPr/>
-          <p:nvPr/>
-        </p:nvSpPr>
-        <p:spPr>
-          <a:xfrm>
-            <a:off x="640080" y="3813048"/>
-            <a:ext cx="868680" cy="450342"/>
-          </a:xfrm>
-          <a:prstGeom prst="roundRect">
-            <a:avLst>
-              <a:gd name="adj" fmla="val 12183"/>
-            </a:avLst>
-          </a:prstGeom>
-          <a:solidFill>
-            <a:srgbClr val="7A3B2E"/>
-          </a:solidFill>
-          <a:ln/>
-        </p:spPr>
-      </p:sp>
-      <p:sp>
-        <p:nvSpPr>
-          <p:cNvPr id="16" name="Text 14"/>
-          <p:cNvSpPr/>
-          <p:nvPr/>
-        </p:nvSpPr>
-        <p:spPr>
-          <a:xfrm>
-            <a:off x="640080" y="3813048"/>
-            <a:ext cx="868680" cy="450342"/>
-          </a:xfrm>
-          <a:prstGeom prst="rect">
-            <a:avLst/>
-          </a:prstGeom>
-          <a:noFill/>
-          <a:ln/>
-        </p:spPr>
-        <p:txBody>
-          <a:bodyPr wrap="square" rtlCol="0" anchor="ctr"/>
-          <a:lstStyle/>
-          <a:p>
-            <a:pPr algn="ctr" indent="0" marL="0">
-              <a:buNone/>
-            </a:pPr>
-            <a:r>
-              <a:rPr lang="en-US" sz="1100" b="1" dirty="0">
-                <a:solidFill>
-                  <a:srgbClr val="FFFFFF"/>
-                </a:solidFill>
-                <a:latin typeface="Calibri" pitchFamily="34" charset="0"/>
-                <a:ea typeface="Calibri" pitchFamily="34" charset="-122"/>
-                <a:cs typeface="Calibri" pitchFamily="34" charset="-120"/>
-              </a:rPr>
-              <a:t>0:47</a:t>
-            </a:r>
-            <a:endParaRPr lang="en-US" sz="1100" dirty="0"/>
-          </a:p>
-        </p:txBody>
-      </p:sp>
-      <p:sp>
-        <p:nvSpPr>
-          <p:cNvPr id="17" name="Text 15"/>
-          <p:cNvSpPr/>
-          <p:nvPr/>
-        </p:nvSpPr>
-        <p:spPr>
-          <a:xfrm>
-            <a:off x="1691640" y="3794760"/>
-            <a:ext cx="9646920" cy="560070"/>
-          </a:xfrm>
-          <a:prstGeom prst="rect">
-            <a:avLst/>
-          </a:prstGeom>
-          <a:noFill/>
-          <a:ln/>
-        </p:spPr>
-        <p:txBody>
-          <a:bodyPr wrap="square" rtlCol="0" anchor="ctr">
-            <a:spAutoFit/>
-          </a:bodyPr>
-          <a:lstStyle/>
-          <a:p>
-            <a:pPr indent="0" marL="0">
-              <a:buNone/>
-            </a:pPr>
-            <a:r>
-              <a:rPr lang="en-US" sz="1100" dirty="0">
-                <a:solidFill>
-                  <a:srgbClr val="1A1A1A"/>
-                </a:solidFill>
-                <a:latin typeface="Calibri" pitchFamily="34" charset="0"/>
-                <a:ea typeface="Calibri" pitchFamily="34" charset="-122"/>
-                <a:cs typeface="Calibri" pitchFamily="34" charset="-120"/>
-              </a:rPr>
-              <a:t>Lab 1 (worked, participatory): copy the notebook to Drive and mount Drive into the runtime (this is how your corpus and results survive Colab wiping the session, everything saving to one project folder), put a Gemini key in Colab Secrets, load NYT wedding data, make a first chart. Hand out the common-errors cheat sheet. Then solo with a partner: draft three questions, pick one, have the AI write the code, run it, chart it. Write one sentence predicting your cell before you run it.</a:t>
-            </a:r>
-            <a:endParaRPr lang="en-US" sz="1100" dirty="0"/>
-          </a:p>
-        </p:txBody>
-      </p:sp>
-      <p:sp>
-        <p:nvSpPr>
-          <p:cNvPr id="18" name="Shape 16"/>
-          <p:cNvSpPr/>
-          <p:nvPr/>
-        </p:nvSpPr>
-        <p:spPr>
-          <a:xfrm>
-            <a:off x="640080" y="4373118"/>
-            <a:ext cx="868680" cy="450342"/>
-          </a:xfrm>
-          <a:prstGeom prst="roundRect">
-            <a:avLst>
-              <a:gd name="adj" fmla="val 12183"/>
-            </a:avLst>
-          </a:prstGeom>
-          <a:solidFill>
-            <a:srgbClr val="7A3B2E"/>
-          </a:solidFill>
-          <a:ln/>
-        </p:spPr>
-      </p:sp>
-      <p:sp>
-        <p:nvSpPr>
-          <p:cNvPr id="19" name="Text 17"/>
-          <p:cNvSpPr/>
-          <p:nvPr/>
-        </p:nvSpPr>
-        <p:spPr>
-          <a:xfrm>
-            <a:off x="640080" y="4373118"/>
-            <a:ext cx="868680" cy="450342"/>
-          </a:xfrm>
-          <a:prstGeom prst="rect">
-            <a:avLst/>
-          </a:prstGeom>
-          <a:noFill/>
-          <a:ln/>
-        </p:spPr>
-        <p:txBody>
-          <a:bodyPr wrap="square" rtlCol="0" anchor="ctr"/>
-          <a:lstStyle/>
-          <a:p>
-            <a:pPr algn="ctr" indent="0" marL="0">
-              <a:buNone/>
-            </a:pPr>
-            <a:r>
-              <a:rPr lang="en-US" sz="1100" b="1" dirty="0">
-                <a:solidFill>
-                  <a:srgbClr val="FFFFFF"/>
-                </a:solidFill>
-                <a:latin typeface="Calibri" pitchFamily="34" charset="0"/>
-                <a:ea typeface="Calibri" pitchFamily="34" charset="-122"/>
-                <a:cs typeface="Calibri" pitchFamily="34" charset="-120"/>
-              </a:rPr>
-              <a:t>1:20</a:t>
-            </a:r>
-            <a:endParaRPr lang="en-US" sz="1100" dirty="0"/>
-          </a:p>
-        </p:txBody>
-      </p:sp>
-      <p:sp>
-        <p:nvSpPr>
-          <p:cNvPr id="20" name="Text 18"/>
-          <p:cNvSpPr/>
-          <p:nvPr/>
-        </p:nvSpPr>
-        <p:spPr>
-          <a:xfrm>
-            <a:off x="1691640" y="4354830"/>
-            <a:ext cx="9646920" cy="560070"/>
-          </a:xfrm>
-          <a:prstGeom prst="rect">
-            <a:avLst/>
-          </a:prstGeom>
-          <a:noFill/>
-          <a:ln/>
-        </p:spPr>
-        <p:txBody>
-          <a:bodyPr wrap="square" rtlCol="0" anchor="ctr">
-            <a:spAutoFit/>
-          </a:bodyPr>
-          <a:lstStyle/>
-          <a:p>
-            <a:pPr indent="0" marL="0">
-              <a:buNone/>
-            </a:pPr>
-            <a:r>
-              <a:rPr lang="en-US" sz="1100" dirty="0">
-                <a:solidFill>
-                  <a:srgbClr val="1A1A1A"/>
-                </a:solidFill>
-                <a:latin typeface="Calibri" pitchFamily="34" charset="0"/>
-                <a:ea typeface="Calibri" pitchFamily="34" charset="-122"/>
-                <a:cs typeface="Calibri" pitchFamily="34" charset="-120"/>
-              </a:rPr>
-              <a:t>Break</a:t>
-            </a:r>
-            <a:endParaRPr lang="en-US" sz="1100" dirty="0"/>
-          </a:p>
-        </p:txBody>
-      </p:sp>
-      <p:sp>
-        <p:nvSpPr>
-          <p:cNvPr id="21" name="Shape 19"/>
-          <p:cNvSpPr/>
-          <p:nvPr/>
-        </p:nvSpPr>
-        <p:spPr>
-          <a:xfrm>
-            <a:off x="640080" y="4933188"/>
-            <a:ext cx="868680" cy="450342"/>
-          </a:xfrm>
-          <a:prstGeom prst="roundRect">
-            <a:avLst>
-              <a:gd name="adj" fmla="val 12183"/>
-            </a:avLst>
-          </a:prstGeom>
-          <a:solidFill>
-            <a:srgbClr val="7A3B2E"/>
-          </a:solidFill>
-          <a:ln/>
-        </p:spPr>
-      </p:sp>
-      <p:sp>
-        <p:nvSpPr>
-          <p:cNvPr id="22" name="Text 20"/>
-          <p:cNvSpPr/>
-          <p:nvPr/>
-        </p:nvSpPr>
-        <p:spPr>
-          <a:xfrm>
-            <a:off x="640080" y="4933188"/>
-            <a:ext cx="868680" cy="450342"/>
-          </a:xfrm>
-          <a:prstGeom prst="rect">
-            <a:avLst/>
-          </a:prstGeom>
-          <a:noFill/>
-          <a:ln/>
-        </p:spPr>
-        <p:txBody>
-          <a:bodyPr wrap="square" rtlCol="0" anchor="ctr"/>
-          <a:lstStyle/>
-          <a:p>
-            <a:pPr algn="ctr" indent="0" marL="0">
-              <a:buNone/>
-            </a:pPr>
-            <a:r>
-              <a:rPr lang="en-US" sz="1100" b="1" dirty="0">
-                <a:solidFill>
-                  <a:srgbClr val="FFFFFF"/>
-                </a:solidFill>
-                <a:latin typeface="Calibri" pitchFamily="34" charset="0"/>
-                <a:ea typeface="Calibri" pitchFamily="34" charset="-122"/>
-                <a:cs typeface="Calibri" pitchFamily="34" charset="-120"/>
-              </a:rPr>
-              <a:t>1:30</a:t>
-            </a:r>
-            <a:endParaRPr lang="en-US" sz="1100" dirty="0"/>
-          </a:p>
-        </p:txBody>
-      </p:sp>
-      <p:sp>
-        <p:nvSpPr>
-          <p:cNvPr id="23" name="Text 21"/>
-          <p:cNvSpPr/>
-          <p:nvPr/>
-        </p:nvSpPr>
-        <p:spPr>
-          <a:xfrm>
-            <a:off x="1691640" y="4914900"/>
-            <a:ext cx="9646920" cy="560070"/>
-          </a:xfrm>
-          <a:prstGeom prst="rect">
-            <a:avLst/>
-          </a:prstGeom>
-          <a:noFill/>
-          <a:ln/>
-        </p:spPr>
-        <p:txBody>
-          <a:bodyPr wrap="square" rtlCol="0" anchor="ctr">
-            <a:spAutoFit/>
-          </a:bodyPr>
-          <a:lstStyle/>
-          <a:p>
-            <a:pPr indent="0" marL="0">
-              <a:buNone/>
-            </a:pPr>
-            <a:r>
-              <a:rPr lang="en-US" sz="1100" dirty="0">
-                <a:solidFill>
-                  <a:srgbClr val="1A1A1A"/>
-                </a:solidFill>
-                <a:latin typeface="Calibri" pitchFamily="34" charset="0"/>
-                <a:ea typeface="Calibri" pitchFamily="34" charset="-122"/>
-                <a:cs typeface="Calibri" pitchFamily="34" charset="-120"/>
-              </a:rPr>
-              <a:t>Lab 2 (worked): count words, then pixels. The real headlines' top words (stop-words dominate until removed, the first counting decision), then the Met image corpus ranked darkest to brightest by average brightness. The notebook's after-class half, defined color ranges and what every bag throws away, is this week's guided homework. Image projects begin here.</a:t>
-            </a:r>
-            <a:endParaRPr lang="en-US" sz="1100" dirty="0"/>
-          </a:p>
-        </p:txBody>
-      </p:sp>
-      <p:sp>
-        <p:nvSpPr>
-          <p:cNvPr id="24" name="Shape 22"/>
-          <p:cNvSpPr/>
-          <p:nvPr/>
-        </p:nvSpPr>
-        <p:spPr>
-          <a:xfrm>
-            <a:off x="640080" y="5493258"/>
-            <a:ext cx="868680" cy="450342"/>
-          </a:xfrm>
-          <a:prstGeom prst="roundRect">
-            <a:avLst>
-              <a:gd name="adj" fmla="val 12183"/>
-            </a:avLst>
-          </a:prstGeom>
-          <a:solidFill>
-            <a:srgbClr val="7A3B2E"/>
-          </a:solidFill>
-          <a:ln/>
-        </p:spPr>
-      </p:sp>
-      <p:sp>
-        <p:nvSpPr>
-          <p:cNvPr id="25" name="Text 23"/>
-          <p:cNvSpPr/>
-          <p:nvPr/>
-        </p:nvSpPr>
-        <p:spPr>
-          <a:xfrm>
-            <a:off x="640080" y="5493258"/>
-            <a:ext cx="868680" cy="450342"/>
-          </a:xfrm>
-          <a:prstGeom prst="rect">
-            <a:avLst/>
-          </a:prstGeom>
-          <a:noFill/>
-          <a:ln/>
-        </p:spPr>
-        <p:txBody>
-          <a:bodyPr wrap="square" rtlCol="0" anchor="ctr"/>
-          <a:lstStyle/>
-          <a:p>
-            <a:pPr algn="ctr" indent="0" marL="0">
-              <a:buNone/>
-            </a:pPr>
-            <a:r>
-              <a:rPr lang="en-US" sz="1100" b="1" dirty="0">
-                <a:solidFill>
-                  <a:srgbClr val="FFFFFF"/>
-                </a:solidFill>
-                <a:latin typeface="Calibri" pitchFamily="34" charset="0"/>
-                <a:ea typeface="Calibri" pitchFamily="34" charset="-122"/>
-                <a:cs typeface="Calibri" pitchFamily="34" charset="-120"/>
-              </a:rPr>
-              <a:t>1:52</a:t>
-            </a:r>
-            <a:endParaRPr lang="en-US" sz="1100" dirty="0"/>
-          </a:p>
-        </p:txBody>
-      </p:sp>
-      <p:sp>
-        <p:nvSpPr>
-          <p:cNvPr id="26" name="Text 24"/>
-          <p:cNvSpPr/>
-          <p:nvPr/>
-        </p:nvSpPr>
-        <p:spPr>
-          <a:xfrm>
-            <a:off x="1691640" y="5474970"/>
-            <a:ext cx="9646920" cy="560070"/>
-          </a:xfrm>
-          <a:prstGeom prst="rect">
-            <a:avLst/>
-          </a:prstGeom>
-          <a:noFill/>
-          <a:ln/>
-        </p:spPr>
-        <p:txBody>
-          <a:bodyPr wrap="square" rtlCol="0" anchor="ctr">
-            <a:spAutoFit/>
-          </a:bodyPr>
-          <a:lstStyle/>
-          <a:p>
-            <a:pPr indent="0" marL="0">
-              <a:buNone/>
-            </a:pPr>
-            <a:r>
-              <a:rPr lang="en-US" sz="1100" dirty="0">
-                <a:solidFill>
-                  <a:srgbClr val="1A1A1A"/>
-                </a:solidFill>
-                <a:latin typeface="Calibri" pitchFamily="34" charset="0"/>
-                <a:ea typeface="Calibri" pitchFamily="34" charset="-122"/>
-                <a:cs typeface="Calibri" pitchFamily="34" charset="-120"/>
-              </a:rPr>
-              <a:t>Preview of the methods ahead; the weekly routines introduced. First check-out.</a:t>
-            </a:r>
-            <a:endParaRPr lang="en-US" sz="1100" dirty="0"/>
+              <a:t>Interrogate the study, debate it, or critique each other's work.</a:t>
+            </a:r>
+            <a:endParaRPr lang="en-US" sz="1500" dirty="0"/>
           </a:p>
         </p:txBody>
       </p:sp>
@@ -5483,7 +5073,7 @@
                 <a:ea typeface="Cambria" pitchFamily="34" charset="-122"/>
                 <a:cs typeface="Cambria" pitchFamily="34" charset="-120"/>
               </a:rPr>
-              <a:t>Reading &amp; homework</a:t>
+              <a:t>The session</a:t>
             </a:r>
             <a:endParaRPr lang="en-US" sz="3000" dirty="0"/>
           </a:p>
@@ -5497,11 +5087,13 @@
         </p:nvSpPr>
         <p:spPr>
           <a:xfrm>
-            <a:off x="640080" y="1673352"/>
-            <a:ext cx="219456" cy="219456"/>
-          </a:xfrm>
-          <a:prstGeom prst="ellipse">
-            <a:avLst/>
+            <a:off x="640080" y="1572768"/>
+            <a:ext cx="868680" cy="450342"/>
+          </a:xfrm>
+          <a:prstGeom prst="roundRect">
+            <a:avLst>
+              <a:gd name="adj" fmla="val 12183"/>
+            </a:avLst>
           </a:prstGeom>
           <a:solidFill>
             <a:srgbClr val="7A3B2E"/>
@@ -5517,8 +5109,8 @@
         </p:nvSpPr>
         <p:spPr>
           <a:xfrm>
-            <a:off x="1051560" y="1600200"/>
-            <a:ext cx="10424160" cy="365760"/>
+            <a:off x="640080" y="1572768"/>
+            <a:ext cx="868680" cy="450342"/>
           </a:xfrm>
           <a:prstGeom prst="rect">
             <a:avLst/>
@@ -5530,21 +5122,21 @@
           <a:bodyPr wrap="square" rtlCol="0" anchor="ctr"/>
           <a:lstStyle/>
           <a:p>
-            <a:pPr indent="0" marL="0">
-              <a:buNone/>
-            </a:pPr>
-            <a:r>
-              <a:rPr lang="en-US" sz="1500" b="1" dirty="0">
-                <a:solidFill>
-                  <a:srgbClr val="7A3B2E"/>
+            <a:pPr algn="ctr" indent="0" marL="0">
+              <a:buNone/>
+            </a:pPr>
+            <a:r>
+              <a:rPr lang="en-US" sz="1100" b="1" dirty="0">
+                <a:solidFill>
+                  <a:srgbClr val="FFFFFF"/>
                 </a:solidFill>
                 <a:latin typeface="Calibri" pitchFamily="34" charset="0"/>
                 <a:ea typeface="Calibri" pitchFamily="34" charset="-122"/>
                 <a:cs typeface="Calibri" pitchFamily="34" charset="-120"/>
               </a:rPr>
-              <a:t>Reading</a:t>
-            </a:r>
-            <a:endParaRPr lang="en-US" sz="1500" dirty="0"/>
+              <a:t>0:00</a:t>
+            </a:r>
+            <a:endParaRPr lang="en-US" sz="1100" dirty="0"/>
           </a:p>
         </p:txBody>
       </p:sp>
@@ -5556,17 +5148,17 @@
         </p:nvSpPr>
         <p:spPr>
           <a:xfrm>
-            <a:off x="1051560" y="1984248"/>
-            <a:ext cx="10424160" cy="731520"/>
-          </a:xfrm>
-          <a:prstGeom prst="rect">
-            <a:avLst/>
-          </a:prstGeom>
-          <a:noFill/>
-          <a:ln/>
-        </p:spPr>
-        <p:txBody>
-          <a:bodyPr wrap="square" rtlCol="0" anchor="t">
+            <a:off x="1691640" y="1554480"/>
+            <a:ext cx="9646920" cy="560070"/>
+          </a:xfrm>
+          <a:prstGeom prst="rect">
+            <a:avLst/>
+          </a:prstGeom>
+          <a:noFill/>
+          <a:ln/>
+        </p:spPr>
+        <p:txBody>
+          <a:bodyPr wrap="square" rtlCol="0" anchor="ctr">
             <a:spAutoFit/>
           </a:bodyPr>
           <a:lstStyle/>
@@ -5575,7 +5167,7 @@
               <a:buNone/>
             </a:pPr>
             <a:r>
-              <a:rPr lang="en-US" sz="1400" dirty="0">
+              <a:rPr lang="en-US" sz="1100" dirty="0">
                 <a:solidFill>
                   <a:srgbClr val="1A1A1A"/>
                 </a:solidFill>
@@ -5583,9 +5175,9 @@
                 <a:ea typeface="Calibri" pitchFamily="34" charset="-122"/>
                 <a:cs typeface="Calibri" pitchFamily="34" charset="-120"/>
               </a:rPr>
-              <a:t>Bollen et al., the cognitive-distortions hockey stick (PNAS 2021), with the Schmidt et al. critique</a:t>
-            </a:r>
-            <a:endParaRPr lang="en-US" sz="1400" dirty="0"/>
+              <a:t>Logistics, working agreements, and a one-round icebreaker: your name, one piece of culture you kept returning to this year, and one number about it you wish you knew. Today's live coding deliberately includes real mistakes.</a:t>
+            </a:r>
+            <a:endParaRPr lang="en-US" sz="1100" dirty="0"/>
           </a:p>
         </p:txBody>
       </p:sp>
@@ -5597,14 +5189,16 @@
         </p:nvSpPr>
         <p:spPr>
           <a:xfrm>
-            <a:off x="640080" y="2633472"/>
-            <a:ext cx="219456" cy="219456"/>
-          </a:xfrm>
-          <a:prstGeom prst="ellipse">
-            <a:avLst/>
-          </a:prstGeom>
-          <a:solidFill>
-            <a:srgbClr val="3F6F5F"/>
+            <a:off x="640080" y="2132838"/>
+            <a:ext cx="868680" cy="450342"/>
+          </a:xfrm>
+          <a:prstGeom prst="roundRect">
+            <a:avLst>
+              <a:gd name="adj" fmla="val 12183"/>
+            </a:avLst>
+          </a:prstGeom>
+          <a:solidFill>
+            <a:srgbClr val="7A3B2E"/>
           </a:solidFill>
           <a:ln/>
         </p:spPr>
@@ -5617,8 +5211,8 @@
         </p:nvSpPr>
         <p:spPr>
           <a:xfrm>
-            <a:off x="1051560" y="2560320"/>
-            <a:ext cx="10424160" cy="365760"/>
+            <a:off x="640080" y="2132838"/>
+            <a:ext cx="868680" cy="450342"/>
           </a:xfrm>
           <a:prstGeom prst="rect">
             <a:avLst/>
@@ -5630,21 +5224,21 @@
           <a:bodyPr wrap="square" rtlCol="0" anchor="ctr"/>
           <a:lstStyle/>
           <a:p>
-            <a:pPr indent="0" marL="0">
-              <a:buNone/>
-            </a:pPr>
-            <a:r>
-              <a:rPr lang="en-US" sz="1500" b="1" dirty="0">
-                <a:solidFill>
-                  <a:srgbClr val="3F6F5F"/>
+            <a:pPr algn="ctr" indent="0" marL="0">
+              <a:buNone/>
+            </a:pPr>
+            <a:r>
+              <a:rPr lang="en-US" sz="1100" b="1" dirty="0">
+                <a:solidFill>
+                  <a:srgbClr val="FFFFFF"/>
                 </a:solidFill>
                 <a:latin typeface="Calibri" pitchFamily="34" charset="0"/>
                 <a:ea typeface="Calibri" pitchFamily="34" charset="-122"/>
                 <a:cs typeface="Calibri" pitchFamily="34" charset="-120"/>
               </a:rPr>
-              <a:t>Supplement</a:t>
-            </a:r>
-            <a:endParaRPr lang="en-US" sz="1500" dirty="0"/>
+              <a:t>0:10</a:t>
+            </a:r>
+            <a:endParaRPr lang="en-US" sz="1100" dirty="0"/>
           </a:p>
         </p:txBody>
       </p:sp>
@@ -5656,17 +5250,17 @@
         </p:nvSpPr>
         <p:spPr>
           <a:xfrm>
-            <a:off x="1051560" y="2944368"/>
-            <a:ext cx="10424160" cy="731520"/>
-          </a:xfrm>
-          <a:prstGeom prst="rect">
-            <a:avLst/>
-          </a:prstGeom>
-          <a:noFill/>
-          <a:ln/>
-        </p:spPr>
-        <p:txBody>
-          <a:bodyPr wrap="square" rtlCol="0" anchor="t">
+            <a:off x="1691640" y="2114550"/>
+            <a:ext cx="9646920" cy="560070"/>
+          </a:xfrm>
+          <a:prstGeom prst="rect">
+            <a:avLst/>
+          </a:prstGeom>
+          <a:noFill/>
+          <a:ln/>
+        </p:spPr>
+        <p:txBody>
+          <a:bodyPr wrap="square" rtlCol="0" anchor="ctr">
             <a:spAutoFit/>
           </a:bodyPr>
           <a:lstStyle/>
@@ -5675,7 +5269,7 @@
               <a:buNone/>
             </a:pPr>
             <a:r>
-              <a:rPr lang="en-US" sz="1400" dirty="0">
+              <a:rPr lang="en-US" sz="1100" dirty="0">
                 <a:solidFill>
                   <a:srgbClr val="1A1A1A"/>
                 </a:solidFill>
@@ -5683,9 +5277,9 @@
                 <a:ea typeface="Calibri" pitchFamily="34" charset="-122"/>
                 <a:cs typeface="Calibri" pitchFamily="34" charset="-120"/>
               </a:rPr>
-              <a:t>Robin Sloan, Writing with the machine; Drucker, Humanities Approaches to Graphical Display (DHQ 2011), the case that all data is capta</a:t>
-            </a:r>
-            <a:endParaRPr lang="en-US" sz="1400" dirty="0"/>
+              <a:t>Lecture, the stakes: machines already read culture at scale, the feed ranking what you see, the moderation filter, the model trained on scraped art and prose, and that reading happens without you. Counting culture has produced real knowledge (the screenplay verb split, the Rowling unmasking, pop music's 1991 revolution) and real mistakes, and both look identical until someone checks. In ten weeks you do the reading yourself and publish something checkable.</a:t>
+            </a:r>
+            <a:endParaRPr lang="en-US" sz="1100" dirty="0"/>
           </a:p>
         </p:txBody>
       </p:sp>
@@ -5697,14 +5291,16 @@
         </p:nvSpPr>
         <p:spPr>
           <a:xfrm>
-            <a:off x="640080" y="3593592"/>
-            <a:ext cx="219456" cy="219456"/>
-          </a:xfrm>
-          <a:prstGeom prst="ellipse">
-            <a:avLst/>
-          </a:prstGeom>
-          <a:solidFill>
-            <a:srgbClr val="B9852F"/>
+            <a:off x="640080" y="2692908"/>
+            <a:ext cx="868680" cy="450342"/>
+          </a:xfrm>
+          <a:prstGeom prst="roundRect">
+            <a:avLst>
+              <a:gd name="adj" fmla="val 12183"/>
+            </a:avLst>
+          </a:prstGeom>
+          <a:solidFill>
+            <a:srgbClr val="7A3B2E"/>
           </a:solidFill>
           <a:ln/>
         </p:spPr>
@@ -5717,8 +5313,8 @@
         </p:nvSpPr>
         <p:spPr>
           <a:xfrm>
-            <a:off x="1051560" y="3520440"/>
-            <a:ext cx="10424160" cy="365760"/>
+            <a:off x="640080" y="2692908"/>
+            <a:ext cx="868680" cy="450342"/>
           </a:xfrm>
           <a:prstGeom prst="rect">
             <a:avLst/>
@@ -5730,21 +5326,21 @@
           <a:bodyPr wrap="square" rtlCol="0" anchor="ctr"/>
           <a:lstStyle/>
           <a:p>
-            <a:pPr indent="0" marL="0">
-              <a:buNone/>
-            </a:pPr>
-            <a:r>
-              <a:rPr lang="en-US" sz="1500" b="1" dirty="0">
-                <a:solidFill>
-                  <a:srgbClr val="B9852F"/>
+            <a:pPr algn="ctr" indent="0" marL="0">
+              <a:buNone/>
+            </a:pPr>
+            <a:r>
+              <a:rPr lang="en-US" sz="1100" b="1" dirty="0">
+                <a:solidFill>
+                  <a:srgbClr val="FFFFFF"/>
                 </a:solidFill>
                 <a:latin typeface="Calibri" pitchFamily="34" charset="0"/>
                 <a:ea typeface="Calibri" pitchFamily="34" charset="-122"/>
                 <a:cs typeface="Calibri" pitchFamily="34" charset="-120"/>
               </a:rPr>
-              <a:t>Deeper (optional)</a:t>
-            </a:r>
-            <a:endParaRPr lang="en-US" sz="1500" dirty="0"/>
+              <a:t>0:28</a:t>
+            </a:r>
+            <a:endParaRPr lang="en-US" sz="1100" dirty="0"/>
           </a:p>
         </p:txBody>
       </p:sp>
@@ -5756,17 +5352,17 @@
         </p:nvSpPr>
         <p:spPr>
           <a:xfrm>
-            <a:off x="1051560" y="3904488"/>
-            <a:ext cx="10424160" cy="731520"/>
-          </a:xfrm>
-          <a:prstGeom prst="rect">
-            <a:avLst/>
-          </a:prstGeom>
-          <a:noFill/>
-          <a:ln/>
-        </p:spPr>
-        <p:txBody>
-          <a:bodyPr wrap="square" rtlCol="0" anchor="t">
+            <a:off x="1691640" y="2674620"/>
+            <a:ext cx="9646920" cy="560070"/>
+          </a:xfrm>
+          <a:prstGeom prst="rect">
+            <a:avLst/>
+          </a:prstGeom>
+          <a:noFill/>
+          <a:ln/>
+        </p:spPr>
+        <p:txBody>
+          <a:bodyPr wrap="square" rtlCol="0" anchor="ctr">
             <a:spAutoFit/>
           </a:bodyPr>
           <a:lstStyle/>
@@ -5775,7 +5371,7 @@
               <a:buNone/>
             </a:pPr>
             <a:r>
-              <a:rPr lang="en-US" sz="1400" dirty="0">
+              <a:rPr lang="en-US" sz="1100" dirty="0">
                 <a:solidFill>
                   <a:srgbClr val="1A1A1A"/>
                 </a:solidFill>
@@ -5783,9 +5379,9 @@
                 <a:ea typeface="Calibri" pitchFamily="34" charset="-122"/>
                 <a:cs typeface="Calibri" pitchFamily="34" charset="-120"/>
               </a:rPr>
-              <a:t>Moretti, Conjectures on World Literature (NLR 2000), the founding argument for reading culture at scale</a:t>
-            </a:r>
-            <a:endParaRPr lang="en-US" sz="1400" dirty="0"/>
+              <a:t>Look at This, then Question It: She Giggles, He Gallops.</a:t>
+            </a:r>
+            <a:endParaRPr lang="en-US" sz="1100" dirty="0"/>
           </a:p>
         </p:txBody>
       </p:sp>
@@ -5797,14 +5393,16 @@
         </p:nvSpPr>
         <p:spPr>
           <a:xfrm>
-            <a:off x="640080" y="4553712"/>
-            <a:ext cx="219456" cy="219456"/>
-          </a:xfrm>
-          <a:prstGeom prst="ellipse">
-            <a:avLst/>
-          </a:prstGeom>
-          <a:solidFill>
-            <a:srgbClr val="3F6F5F"/>
+            <a:off x="640080" y="3252978"/>
+            <a:ext cx="868680" cy="450342"/>
+          </a:xfrm>
+          <a:prstGeom prst="roundRect">
+            <a:avLst>
+              <a:gd name="adj" fmla="val 12183"/>
+            </a:avLst>
+          </a:prstGeom>
+          <a:solidFill>
+            <a:srgbClr val="7A3B2E"/>
           </a:solidFill>
           <a:ln/>
         </p:spPr>
@@ -5817,8 +5415,8 @@
         </p:nvSpPr>
         <p:spPr>
           <a:xfrm>
-            <a:off x="1051560" y="4480560"/>
-            <a:ext cx="10424160" cy="365760"/>
+            <a:off x="640080" y="3252978"/>
+            <a:ext cx="868680" cy="450342"/>
           </a:xfrm>
           <a:prstGeom prst="rect">
             <a:avLst/>
@@ -5830,21 +5428,21 @@
           <a:bodyPr wrap="square" rtlCol="0" anchor="ctr"/>
           <a:lstStyle/>
           <a:p>
-            <a:pPr indent="0" marL="0">
-              <a:buNone/>
-            </a:pPr>
-            <a:r>
-              <a:rPr lang="en-US" sz="1500" b="1" dirty="0">
-                <a:solidFill>
-                  <a:srgbClr val="3F6F5F"/>
+            <a:pPr algn="ctr" indent="0" marL="0">
+              <a:buNone/>
+            </a:pPr>
+            <a:r>
+              <a:rPr lang="en-US" sz="1100" b="1" dirty="0">
+                <a:solidFill>
+                  <a:srgbClr val="FFFFFF"/>
                 </a:solidFill>
                 <a:latin typeface="Calibri" pitchFamily="34" charset="0"/>
                 <a:ea typeface="Calibri" pitchFamily="34" charset="-122"/>
                 <a:cs typeface="Calibri" pitchFamily="34" charset="-120"/>
               </a:rPr>
-              <a:t>Sketch</a:t>
-            </a:r>
-            <a:endParaRPr lang="en-US" sz="1500" dirty="0"/>
+              <a:t>0:35</a:t>
+            </a:r>
+            <a:endParaRPr lang="en-US" sz="1100" dirty="0"/>
           </a:p>
         </p:txBody>
       </p:sp>
@@ -5856,17 +5454,17 @@
         </p:nvSpPr>
         <p:spPr>
           <a:xfrm>
-            <a:off x="1051560" y="4864608"/>
-            <a:ext cx="10424160" cy="731520"/>
-          </a:xfrm>
-          <a:prstGeom prst="rect">
-            <a:avLst/>
-          </a:prstGeom>
-          <a:noFill/>
-          <a:ln/>
-        </p:spPr>
-        <p:txBody>
-          <a:bodyPr wrap="square" rtlCol="0" anchor="t">
+            <a:off x="1691640" y="3234690"/>
+            <a:ext cx="9646920" cy="560070"/>
+          </a:xfrm>
+          <a:prstGeom prst="rect">
+            <a:avLst/>
+          </a:prstGeom>
+          <a:noFill/>
+          <a:ln/>
+        </p:spPr>
+        <p:txBody>
+          <a:bodyPr wrap="square" rtlCol="0" anchor="ctr">
             <a:spAutoFit/>
           </a:bodyPr>
           <a:lstStyle/>
@@ -5875,7 +5473,7 @@
               <a:buNone/>
             </a:pPr>
             <a:r>
-              <a:rPr lang="en-US" sz="1400" dirty="0">
+              <a:rPr lang="en-US" sz="1100" dirty="0">
                 <a:solidFill>
                   <a:srgbClr val="1A1A1A"/>
                 </a:solidFill>
@@ -5883,9 +5481,9 @@
                 <a:ea typeface="Calibri" pitchFamily="34" charset="-122"/>
                 <a:cs typeface="Calibri" pitchFamily="34" charset="-120"/>
               </a:rPr>
-              <a:t>One question from your life, answerable with data (three sentences), plus the notebook's after-class half (~20 minutes).</a:t>
-            </a:r>
-            <a:endParaRPr lang="en-US" sz="1400" dirty="0"/>
+              <a:t>The vocabulary and the map (no code): corpus, method, model, embedding, plus what data itself is. A CSV, anatomized on screen (rows are observations, columns are recorded facts), and Drucker's correction: data is capta, taken not given. Two minutes in pairs: what did the makers of the wedding table take, and what did they leave out? The deliverable, shown: a web essay on a runnable notebook.</a:t>
+            </a:r>
+            <a:endParaRPr lang="en-US" sz="1100" dirty="0"/>
           </a:p>
         </p:txBody>
       </p:sp>
@@ -5897,11 +5495,13 @@
         </p:nvSpPr>
         <p:spPr>
           <a:xfrm>
-            <a:off x="640080" y="5513832"/>
-            <a:ext cx="219456" cy="219456"/>
-          </a:xfrm>
-          <a:prstGeom prst="ellipse">
-            <a:avLst/>
+            <a:off x="640080" y="3813048"/>
+            <a:ext cx="868680" cy="450342"/>
+          </a:xfrm>
+          <a:prstGeom prst="roundRect">
+            <a:avLst>
+              <a:gd name="adj" fmla="val 12183"/>
+            </a:avLst>
           </a:prstGeom>
           <a:solidFill>
             <a:srgbClr val="7A3B2E"/>
@@ -5917,8 +5517,8 @@
         </p:nvSpPr>
         <p:spPr>
           <a:xfrm>
-            <a:off x="1051560" y="5440680"/>
-            <a:ext cx="10424160" cy="365760"/>
+            <a:off x="640080" y="3813048"/>
+            <a:ext cx="868680" cy="450342"/>
           </a:xfrm>
           <a:prstGeom prst="rect">
             <a:avLst/>
@@ -5930,21 +5530,21 @@
           <a:bodyPr wrap="square" rtlCol="0" anchor="ctr"/>
           <a:lstStyle/>
           <a:p>
-            <a:pPr indent="0" marL="0">
-              <a:buNone/>
-            </a:pPr>
-            <a:r>
-              <a:rPr lang="en-US" sz="1500" b="1" dirty="0">
-                <a:solidFill>
-                  <a:srgbClr val="7A3B2E"/>
+            <a:pPr algn="ctr" indent="0" marL="0">
+              <a:buNone/>
+            </a:pPr>
+            <a:r>
+              <a:rPr lang="en-US" sz="1100" b="1" dirty="0">
+                <a:solidFill>
+                  <a:srgbClr val="FFFFFF"/>
                 </a:solidFill>
                 <a:latin typeface="Calibri" pitchFamily="34" charset="0"/>
                 <a:ea typeface="Calibri" pitchFamily="34" charset="-122"/>
                 <a:cs typeface="Calibri" pitchFamily="34" charset="-120"/>
               </a:rPr>
-              <a:t>Check (AI closed)</a:t>
-            </a:r>
-            <a:endParaRPr lang="en-US" sz="1500" dirty="0"/>
+              <a:t>0:47</a:t>
+            </a:r>
+            <a:endParaRPr lang="en-US" sz="1100" dirty="0"/>
           </a:p>
         </p:txBody>
       </p:sp>
@@ -5956,17 +5556,17 @@
         </p:nvSpPr>
         <p:spPr>
           <a:xfrm>
-            <a:off x="1051560" y="5824728"/>
-            <a:ext cx="10424160" cy="731520"/>
-          </a:xfrm>
-          <a:prstGeom prst="rect">
-            <a:avLst/>
-          </a:prstGeom>
-          <a:noFill/>
-          <a:ln/>
-        </p:spPr>
-        <p:txBody>
-          <a:bodyPr wrap="square" rtlCol="0" anchor="t">
+            <a:off x="1691640" y="3794760"/>
+            <a:ext cx="9646920" cy="560070"/>
+          </a:xfrm>
+          <a:prstGeom prst="rect">
+            <a:avLst/>
+          </a:prstGeom>
+          <a:noFill/>
+          <a:ln/>
+        </p:spPr>
+        <p:txBody>
+          <a:bodyPr wrap="square" rtlCol="0" anchor="ctr">
             <a:spAutoFit/>
           </a:bodyPr>
           <a:lstStyle/>
@@ -5975,7 +5575,7 @@
               <a:buNone/>
             </a:pPr>
             <a:r>
-              <a:rPr lang="en-US" sz="1400" dirty="0">
+              <a:rPr lang="en-US" sz="1100" dirty="0">
                 <a:solidFill>
                   <a:srgbClr val="1A1A1A"/>
                 </a:solidFill>
@@ -5983,9 +5583,315 @@
                 <a:ea typeface="Calibri" pitchFamily="34" charset="-122"/>
                 <a:cs typeface="Calibri" pitchFamily="34" charset="-120"/>
               </a:rPr>
-              <a:t>Trace it: one written sentence predicting what your cell does before you run it. (Competency 1.)</a:t>
-            </a:r>
-            <a:endParaRPr lang="en-US" sz="1400" dirty="0"/>
+              <a:t>Lab 1 (worked, participatory): copy the notebook to Drive and mount Drive into the runtime (this is how your corpus and results survive Colab wiping the session, everything saving to one project folder), put a Gemini key in Colab Secrets, load NYT wedding data, make a first chart. Hand out the common-errors cheat sheet. Then solo with a partner: draft three questions, pick one, have the AI write the code, run it, chart it. Write one sentence predicting your cell before you run it.</a:t>
+            </a:r>
+            <a:endParaRPr lang="en-US" sz="1100" dirty="0"/>
+          </a:p>
+        </p:txBody>
+      </p:sp>
+      <p:sp>
+        <p:nvSpPr>
+          <p:cNvPr id="18" name="Shape 16"/>
+          <p:cNvSpPr/>
+          <p:nvPr/>
+        </p:nvSpPr>
+        <p:spPr>
+          <a:xfrm>
+            <a:off x="640080" y="4373118"/>
+            <a:ext cx="868680" cy="450342"/>
+          </a:xfrm>
+          <a:prstGeom prst="roundRect">
+            <a:avLst>
+              <a:gd name="adj" fmla="val 12183"/>
+            </a:avLst>
+          </a:prstGeom>
+          <a:solidFill>
+            <a:srgbClr val="7A3B2E"/>
+          </a:solidFill>
+          <a:ln/>
+        </p:spPr>
+      </p:sp>
+      <p:sp>
+        <p:nvSpPr>
+          <p:cNvPr id="19" name="Text 17"/>
+          <p:cNvSpPr/>
+          <p:nvPr/>
+        </p:nvSpPr>
+        <p:spPr>
+          <a:xfrm>
+            <a:off x="640080" y="4373118"/>
+            <a:ext cx="868680" cy="450342"/>
+          </a:xfrm>
+          <a:prstGeom prst="rect">
+            <a:avLst/>
+          </a:prstGeom>
+          <a:noFill/>
+          <a:ln/>
+        </p:spPr>
+        <p:txBody>
+          <a:bodyPr wrap="square" rtlCol="0" anchor="ctr"/>
+          <a:lstStyle/>
+          <a:p>
+            <a:pPr algn="ctr" indent="0" marL="0">
+              <a:buNone/>
+            </a:pPr>
+            <a:r>
+              <a:rPr lang="en-US" sz="1100" b="1" dirty="0">
+                <a:solidFill>
+                  <a:srgbClr val="FFFFFF"/>
+                </a:solidFill>
+                <a:latin typeface="Calibri" pitchFamily="34" charset="0"/>
+                <a:ea typeface="Calibri" pitchFamily="34" charset="-122"/>
+                <a:cs typeface="Calibri" pitchFamily="34" charset="-120"/>
+              </a:rPr>
+              <a:t>1:20</a:t>
+            </a:r>
+            <a:endParaRPr lang="en-US" sz="1100" dirty="0"/>
+          </a:p>
+        </p:txBody>
+      </p:sp>
+      <p:sp>
+        <p:nvSpPr>
+          <p:cNvPr id="20" name="Text 18"/>
+          <p:cNvSpPr/>
+          <p:nvPr/>
+        </p:nvSpPr>
+        <p:spPr>
+          <a:xfrm>
+            <a:off x="1691640" y="4354830"/>
+            <a:ext cx="9646920" cy="560070"/>
+          </a:xfrm>
+          <a:prstGeom prst="rect">
+            <a:avLst/>
+          </a:prstGeom>
+          <a:noFill/>
+          <a:ln/>
+        </p:spPr>
+        <p:txBody>
+          <a:bodyPr wrap="square" rtlCol="0" anchor="ctr">
+            <a:spAutoFit/>
+          </a:bodyPr>
+          <a:lstStyle/>
+          <a:p>
+            <a:pPr indent="0" marL="0">
+              <a:buNone/>
+            </a:pPr>
+            <a:r>
+              <a:rPr lang="en-US" sz="1100" dirty="0">
+                <a:solidFill>
+                  <a:srgbClr val="1A1A1A"/>
+                </a:solidFill>
+                <a:latin typeface="Calibri" pitchFamily="34" charset="0"/>
+                <a:ea typeface="Calibri" pitchFamily="34" charset="-122"/>
+                <a:cs typeface="Calibri" pitchFamily="34" charset="-120"/>
+              </a:rPr>
+              <a:t>Break</a:t>
+            </a:r>
+            <a:endParaRPr lang="en-US" sz="1100" dirty="0"/>
+          </a:p>
+        </p:txBody>
+      </p:sp>
+      <p:sp>
+        <p:nvSpPr>
+          <p:cNvPr id="21" name="Shape 19"/>
+          <p:cNvSpPr/>
+          <p:nvPr/>
+        </p:nvSpPr>
+        <p:spPr>
+          <a:xfrm>
+            <a:off x="640080" y="4933188"/>
+            <a:ext cx="868680" cy="450342"/>
+          </a:xfrm>
+          <a:prstGeom prst="roundRect">
+            <a:avLst>
+              <a:gd name="adj" fmla="val 12183"/>
+            </a:avLst>
+          </a:prstGeom>
+          <a:solidFill>
+            <a:srgbClr val="7A3B2E"/>
+          </a:solidFill>
+          <a:ln/>
+        </p:spPr>
+      </p:sp>
+      <p:sp>
+        <p:nvSpPr>
+          <p:cNvPr id="22" name="Text 20"/>
+          <p:cNvSpPr/>
+          <p:nvPr/>
+        </p:nvSpPr>
+        <p:spPr>
+          <a:xfrm>
+            <a:off x="640080" y="4933188"/>
+            <a:ext cx="868680" cy="450342"/>
+          </a:xfrm>
+          <a:prstGeom prst="rect">
+            <a:avLst/>
+          </a:prstGeom>
+          <a:noFill/>
+          <a:ln/>
+        </p:spPr>
+        <p:txBody>
+          <a:bodyPr wrap="square" rtlCol="0" anchor="ctr"/>
+          <a:lstStyle/>
+          <a:p>
+            <a:pPr algn="ctr" indent="0" marL="0">
+              <a:buNone/>
+            </a:pPr>
+            <a:r>
+              <a:rPr lang="en-US" sz="1100" b="1" dirty="0">
+                <a:solidFill>
+                  <a:srgbClr val="FFFFFF"/>
+                </a:solidFill>
+                <a:latin typeface="Calibri" pitchFamily="34" charset="0"/>
+                <a:ea typeface="Calibri" pitchFamily="34" charset="-122"/>
+                <a:cs typeface="Calibri" pitchFamily="34" charset="-120"/>
+              </a:rPr>
+              <a:t>1:30</a:t>
+            </a:r>
+            <a:endParaRPr lang="en-US" sz="1100" dirty="0"/>
+          </a:p>
+        </p:txBody>
+      </p:sp>
+      <p:sp>
+        <p:nvSpPr>
+          <p:cNvPr id="23" name="Text 21"/>
+          <p:cNvSpPr/>
+          <p:nvPr/>
+        </p:nvSpPr>
+        <p:spPr>
+          <a:xfrm>
+            <a:off x="1691640" y="4914900"/>
+            <a:ext cx="9646920" cy="560070"/>
+          </a:xfrm>
+          <a:prstGeom prst="rect">
+            <a:avLst/>
+          </a:prstGeom>
+          <a:noFill/>
+          <a:ln/>
+        </p:spPr>
+        <p:txBody>
+          <a:bodyPr wrap="square" rtlCol="0" anchor="ctr">
+            <a:spAutoFit/>
+          </a:bodyPr>
+          <a:lstStyle/>
+          <a:p>
+            <a:pPr indent="0" marL="0">
+              <a:buNone/>
+            </a:pPr>
+            <a:r>
+              <a:rPr lang="en-US" sz="1100" dirty="0">
+                <a:solidFill>
+                  <a:srgbClr val="1A1A1A"/>
+                </a:solidFill>
+                <a:latin typeface="Calibri" pitchFamily="34" charset="0"/>
+                <a:ea typeface="Calibri" pitchFamily="34" charset="-122"/>
+                <a:cs typeface="Calibri" pitchFamily="34" charset="-120"/>
+              </a:rPr>
+              <a:t>Lab 2 (worked): count words, then pixels. The real headlines' top words (stop-words dominate until removed, the first counting decision), then the Met image corpus ranked darkest to brightest by average brightness. The notebook's after-class half, defined color ranges and what every bag throws away, is this week's guided homework. Image projects begin here.</a:t>
+            </a:r>
+            <a:endParaRPr lang="en-US" sz="1100" dirty="0"/>
+          </a:p>
+        </p:txBody>
+      </p:sp>
+      <p:sp>
+        <p:nvSpPr>
+          <p:cNvPr id="24" name="Shape 22"/>
+          <p:cNvSpPr/>
+          <p:nvPr/>
+        </p:nvSpPr>
+        <p:spPr>
+          <a:xfrm>
+            <a:off x="640080" y="5493258"/>
+            <a:ext cx="868680" cy="450342"/>
+          </a:xfrm>
+          <a:prstGeom prst="roundRect">
+            <a:avLst>
+              <a:gd name="adj" fmla="val 12183"/>
+            </a:avLst>
+          </a:prstGeom>
+          <a:solidFill>
+            <a:srgbClr val="7A3B2E"/>
+          </a:solidFill>
+          <a:ln/>
+        </p:spPr>
+      </p:sp>
+      <p:sp>
+        <p:nvSpPr>
+          <p:cNvPr id="25" name="Text 23"/>
+          <p:cNvSpPr/>
+          <p:nvPr/>
+        </p:nvSpPr>
+        <p:spPr>
+          <a:xfrm>
+            <a:off x="640080" y="5493258"/>
+            <a:ext cx="868680" cy="450342"/>
+          </a:xfrm>
+          <a:prstGeom prst="rect">
+            <a:avLst/>
+          </a:prstGeom>
+          <a:noFill/>
+          <a:ln/>
+        </p:spPr>
+        <p:txBody>
+          <a:bodyPr wrap="square" rtlCol="0" anchor="ctr"/>
+          <a:lstStyle/>
+          <a:p>
+            <a:pPr algn="ctr" indent="0" marL="0">
+              <a:buNone/>
+            </a:pPr>
+            <a:r>
+              <a:rPr lang="en-US" sz="1100" b="1" dirty="0">
+                <a:solidFill>
+                  <a:srgbClr val="FFFFFF"/>
+                </a:solidFill>
+                <a:latin typeface="Calibri" pitchFamily="34" charset="0"/>
+                <a:ea typeface="Calibri" pitchFamily="34" charset="-122"/>
+                <a:cs typeface="Calibri" pitchFamily="34" charset="-120"/>
+              </a:rPr>
+              <a:t>1:52</a:t>
+            </a:r>
+            <a:endParaRPr lang="en-US" sz="1100" dirty="0"/>
+          </a:p>
+        </p:txBody>
+      </p:sp>
+      <p:sp>
+        <p:nvSpPr>
+          <p:cNvPr id="26" name="Text 24"/>
+          <p:cNvSpPr/>
+          <p:nvPr/>
+        </p:nvSpPr>
+        <p:spPr>
+          <a:xfrm>
+            <a:off x="1691640" y="5474970"/>
+            <a:ext cx="9646920" cy="560070"/>
+          </a:xfrm>
+          <a:prstGeom prst="rect">
+            <a:avLst/>
+          </a:prstGeom>
+          <a:noFill/>
+          <a:ln/>
+        </p:spPr>
+        <p:txBody>
+          <a:bodyPr wrap="square" rtlCol="0" anchor="ctr">
+            <a:spAutoFit/>
+          </a:bodyPr>
+          <a:lstStyle/>
+          <a:p>
+            <a:pPr indent="0" marL="0">
+              <a:buNone/>
+            </a:pPr>
+            <a:r>
+              <a:rPr lang="en-US" sz="1100" dirty="0">
+                <a:solidFill>
+                  <a:srgbClr val="1A1A1A"/>
+                </a:solidFill>
+                <a:latin typeface="Calibri" pitchFamily="34" charset="0"/>
+                <a:ea typeface="Calibri" pitchFamily="34" charset="-122"/>
+                <a:cs typeface="Calibri" pitchFamily="34" charset="-120"/>
+              </a:rPr>
+              <a:t>Preview of the methods ahead; the weekly routines introduced. First check-out.</a:t>
+            </a:r>
+            <a:endParaRPr lang="en-US" sz="1100" dirty="0"/>
           </a:p>
         </p:txBody>
       </p:sp>
@@ -6030,7 +5936,7 @@
         <p:spPr>
           <a:xfrm>
             <a:off x="640080" y="640080"/>
-            <a:ext cx="10058400" cy="320040"/>
+            <a:ext cx="10058400" cy="731520"/>
           </a:xfrm>
           <a:prstGeom prst="rect">
             <a:avLst/>
@@ -6046,7 +5952,66 @@
               <a:buNone/>
             </a:pPr>
             <a:r>
-              <a:rPr lang="en-US" sz="1300" b="1" spc="300" kern="0" dirty="0">
+              <a:rPr lang="en-US" sz="3000" b="1" dirty="0">
+                <a:solidFill>
+                  <a:srgbClr val="1A1A1A"/>
+                </a:solidFill>
+                <a:latin typeface="Cambria" pitchFamily="34" charset="0"/>
+                <a:ea typeface="Cambria" pitchFamily="34" charset="-122"/>
+                <a:cs typeface="Cambria" pitchFamily="34" charset="-120"/>
+              </a:rPr>
+              <a:t>Reading &amp; homework</a:t>
+            </a:r>
+            <a:endParaRPr lang="en-US" sz="3000" dirty="0"/>
+          </a:p>
+        </p:txBody>
+      </p:sp>
+      <p:sp>
+        <p:nvSpPr>
+          <p:cNvPr id="3" name="Shape 1"/>
+          <p:cNvSpPr/>
+          <p:nvPr/>
+        </p:nvSpPr>
+        <p:spPr>
+          <a:xfrm>
+            <a:off x="640080" y="1673352"/>
+            <a:ext cx="219456" cy="219456"/>
+          </a:xfrm>
+          <a:prstGeom prst="ellipse">
+            <a:avLst/>
+          </a:prstGeom>
+          <a:solidFill>
+            <a:srgbClr val="7A3B2E"/>
+          </a:solidFill>
+          <a:ln/>
+        </p:spPr>
+      </p:sp>
+      <p:sp>
+        <p:nvSpPr>
+          <p:cNvPr id="4" name="Text 2"/>
+          <p:cNvSpPr/>
+          <p:nvPr/>
+        </p:nvSpPr>
+        <p:spPr>
+          <a:xfrm>
+            <a:off x="1051560" y="1600200"/>
+            <a:ext cx="10424160" cy="365760"/>
+          </a:xfrm>
+          <a:prstGeom prst="rect">
+            <a:avLst/>
+          </a:prstGeom>
+          <a:noFill/>
+          <a:ln/>
+        </p:spPr>
+        <p:txBody>
+          <a:bodyPr wrap="square" rtlCol="0" anchor="ctr"/>
+          <a:lstStyle/>
+          <a:p>
+            <a:pPr indent="0" marL="0">
+              <a:buNone/>
+            </a:pPr>
+            <a:r>
+              <a:rPr lang="en-US" sz="1500" b="1" dirty="0">
                 <a:solidFill>
                   <a:srgbClr val="7A3B2E"/>
                 </a:solidFill>
@@ -6054,72 +6019,11 @@
                 <a:ea typeface="Calibri" pitchFamily="34" charset="-122"/>
                 <a:cs typeface="Calibri" pitchFamily="34" charset="-120"/>
               </a:rPr>
-              <a:t>HOW THIS WEEK CONNECTS</a:t>
-            </a:r>
-            <a:endParaRPr lang="en-US" sz="1300" dirty="0"/>
-          </a:p>
-        </p:txBody>
-      </p:sp>
-      <p:sp>
-        <p:nvSpPr>
-          <p:cNvPr id="3" name="Text 1"/>
-          <p:cNvSpPr/>
-          <p:nvPr/>
-        </p:nvSpPr>
-        <p:spPr>
-          <a:xfrm>
-            <a:off x="640080" y="987552"/>
-            <a:ext cx="10058400" cy="640080"/>
-          </a:xfrm>
-          <a:prstGeom prst="rect">
-            <a:avLst/>
-          </a:prstGeom>
-          <a:noFill/>
-          <a:ln/>
-        </p:spPr>
-        <p:txBody>
-          <a:bodyPr wrap="square" rtlCol="0" anchor="ctr"/>
-          <a:lstStyle/>
-          <a:p>
-            <a:pPr indent="0" marL="0">
-              <a:buNone/>
-            </a:pPr>
-            <a:r>
-              <a:rPr lang="en-US" sz="2800" b="1" dirty="0">
-                <a:solidFill>
-                  <a:srgbClr val="1A1A1A"/>
-                </a:solidFill>
-                <a:latin typeface="Cambria" pitchFamily="34" charset="0"/>
-                <a:ea typeface="Cambria" pitchFamily="34" charset="-122"/>
-                <a:cs typeface="Cambria" pitchFamily="34" charset="-120"/>
-              </a:rPr>
-              <a:t>The course's through-lines</a:t>
-            </a:r>
-            <a:endParaRPr lang="en-US" sz="2800" dirty="0"/>
-          </a:p>
-        </p:txBody>
-      </p:sp>
-      <p:sp>
-        <p:nvSpPr>
-          <p:cNvPr id="4" name="Shape 2"/>
-          <p:cNvSpPr/>
-          <p:nvPr/>
-        </p:nvSpPr>
-        <p:spPr>
-          <a:xfrm>
-            <a:off x="640080" y="2057400"/>
-            <a:ext cx="457200" cy="457200"/>
-          </a:xfrm>
-          <a:prstGeom prst="roundRect">
-            <a:avLst>
-              <a:gd name="adj" fmla="val 16000"/>
-            </a:avLst>
-          </a:prstGeom>
-          <a:solidFill>
-            <a:srgbClr val="7A3B2E"/>
-          </a:solidFill>
-          <a:ln/>
-        </p:spPr>
+              <a:t>Reading</a:t>
+            </a:r>
+            <a:endParaRPr lang="en-US" sz="1500" dirty="0"/>
+          </a:p>
+        </p:txBody>
       </p:sp>
       <p:sp>
         <p:nvSpPr>
@@ -6129,86 +6033,8 @@
         </p:nvSpPr>
         <p:spPr>
           <a:xfrm>
-            <a:off x="640080" y="2057400"/>
-            <a:ext cx="457200" cy="457200"/>
-          </a:xfrm>
-          <a:prstGeom prst="rect">
-            <a:avLst/>
-          </a:prstGeom>
-          <a:noFill/>
-          <a:ln/>
-        </p:spPr>
-        <p:txBody>
-          <a:bodyPr wrap="square" rtlCol="0" anchor="ctr"/>
-          <a:lstStyle/>
-          <a:p>
-            <a:pPr algn="ctr" indent="0" marL="0">
-              <a:buNone/>
-            </a:pPr>
-            <a:r>
-              <a:rPr lang="en-US" sz="2000" b="1" dirty="0">
-                <a:solidFill>
-                  <a:srgbClr val="FFFFFF"/>
-                </a:solidFill>
-                <a:latin typeface="Cambria" pitchFamily="34" charset="0"/>
-                <a:ea typeface="Cambria" pitchFamily="34" charset="-122"/>
-                <a:cs typeface="Cambria" pitchFamily="34" charset="-120"/>
-              </a:rPr>
-              <a:t>1</a:t>
-            </a:r>
-            <a:endParaRPr lang="en-US" sz="2000" dirty="0"/>
-          </a:p>
-        </p:txBody>
-      </p:sp>
-      <p:sp>
-        <p:nvSpPr>
-          <p:cNvPr id="6" name="Text 4"/>
-          <p:cNvSpPr/>
-          <p:nvPr/>
-        </p:nvSpPr>
-        <p:spPr>
-          <a:xfrm>
-            <a:off x="1371600" y="2020824"/>
-            <a:ext cx="10332720" cy="411480"/>
-          </a:xfrm>
-          <a:prstGeom prst="rect">
-            <a:avLst/>
-          </a:prstGeom>
-          <a:noFill/>
-          <a:ln/>
-        </p:spPr>
-        <p:txBody>
-          <a:bodyPr wrap="square" rtlCol="0" anchor="ctr"/>
-          <a:lstStyle/>
-          <a:p>
-            <a:pPr indent="0" marL="0">
-              <a:buNone/>
-            </a:pPr>
-            <a:r>
-              <a:rPr lang="en-US" sz="1900" b="1" dirty="0">
-                <a:solidFill>
-                  <a:srgbClr val="7A3B2E"/>
-                </a:solidFill>
-                <a:latin typeface="Cambria" pitchFamily="34" charset="0"/>
-                <a:ea typeface="Cambria" pitchFamily="34" charset="-122"/>
-                <a:cs typeface="Cambria" pitchFamily="34" charset="-120"/>
-              </a:rPr>
-              <a:t>Read work critically</a:t>
-            </a:r>
-            <a:endParaRPr lang="en-US" sz="1900" dirty="0"/>
-          </a:p>
-        </p:txBody>
-      </p:sp>
-      <p:sp>
-        <p:nvSpPr>
-          <p:cNvPr id="7" name="Text 5"/>
-          <p:cNvSpPr/>
-          <p:nvPr/>
-        </p:nvSpPr>
-        <p:spPr>
-          <a:xfrm>
-            <a:off x="1371600" y="2441448"/>
-            <a:ext cx="10332720" cy="914400"/>
+            <a:off x="1051560" y="1984248"/>
+            <a:ext cx="10424160" cy="731520"/>
           </a:xfrm>
           <a:prstGeom prst="rect">
             <a:avLst/>
@@ -6223,13 +6049,10 @@
           <a:lstStyle/>
           <a:p>
             <a:pPr indent="0" marL="0">
-              <a:lnSpc>
-                <a:spcPct val="112000"/>
-              </a:lnSpc>
-              <a:buNone/>
-            </a:pPr>
-            <a:r>
-              <a:rPr lang="en-US" sz="1450" dirty="0">
+              <a:buNone/>
+            </a:pPr>
+            <a:r>
+              <a:rPr lang="en-US" sz="1400" dirty="0">
                 <a:solidFill>
                   <a:srgbClr val="1A1A1A"/>
                 </a:solidFill>
@@ -6237,27 +6060,25 @@
                 <a:ea typeface="Calibri" pitchFamily="34" charset="-122"/>
                 <a:cs typeface="Calibri" pitchFamily="34" charset="-120"/>
               </a:rPr>
-              <a:t>She Giggles, He Gallops is excellent and its choices are debatable. Admiring and questioning at once is the habit the course is built on.</a:t>
-            </a:r>
-            <a:endParaRPr lang="en-US" sz="1450" dirty="0"/>
-          </a:p>
-        </p:txBody>
-      </p:sp>
-      <p:sp>
-        <p:nvSpPr>
-          <p:cNvPr id="8" name="Shape 6"/>
-          <p:cNvSpPr/>
-          <p:nvPr/>
-        </p:nvSpPr>
-        <p:spPr>
-          <a:xfrm>
-            <a:off x="640080" y="3520440"/>
-            <a:ext cx="457200" cy="457200"/>
-          </a:xfrm>
-          <a:prstGeom prst="roundRect">
-            <a:avLst>
-              <a:gd name="adj" fmla="val 16000"/>
-            </a:avLst>
+              <a:t>Bollen et al., the cognitive-distortions hockey stick (PNAS 2021), with the Schmidt et al. critique</a:t>
+            </a:r>
+            <a:endParaRPr lang="en-US" sz="1400" dirty="0"/>
+          </a:p>
+        </p:txBody>
+      </p:sp>
+      <p:sp>
+        <p:nvSpPr>
+          <p:cNvPr id="6" name="Shape 4"/>
+          <p:cNvSpPr/>
+          <p:nvPr/>
+        </p:nvSpPr>
+        <p:spPr>
+          <a:xfrm>
+            <a:off x="640080" y="2633472"/>
+            <a:ext cx="219456" cy="219456"/>
+          </a:xfrm>
+          <a:prstGeom prst="ellipse">
+            <a:avLst/>
           </a:prstGeom>
           <a:solidFill>
             <a:srgbClr val="3F6F5F"/>
@@ -6267,14 +6088,14 @@
       </p:sp>
       <p:sp>
         <p:nvSpPr>
-          <p:cNvPr id="9" name="Text 7"/>
-          <p:cNvSpPr/>
-          <p:nvPr/>
-        </p:nvSpPr>
-        <p:spPr>
-          <a:xfrm>
-            <a:off x="640080" y="3520440"/>
-            <a:ext cx="457200" cy="457200"/>
+          <p:cNvPr id="7" name="Text 5"/>
+          <p:cNvSpPr/>
+          <p:nvPr/>
+        </p:nvSpPr>
+        <p:spPr>
+          <a:xfrm>
+            <a:off x="1051560" y="2560320"/>
+            <a:ext cx="10424160" cy="365760"/>
           </a:xfrm>
           <a:prstGeom prst="rect">
             <a:avLst/>
@@ -6286,73 +6107,34 @@
           <a:bodyPr wrap="square" rtlCol="0" anchor="ctr"/>
           <a:lstStyle/>
           <a:p>
-            <a:pPr algn="ctr" indent="0" marL="0">
-              <a:buNone/>
-            </a:pPr>
-            <a:r>
-              <a:rPr lang="en-US" sz="2000" b="1" dirty="0">
-                <a:solidFill>
-                  <a:srgbClr val="FFFFFF"/>
-                </a:solidFill>
-                <a:latin typeface="Cambria" pitchFamily="34" charset="0"/>
-                <a:ea typeface="Cambria" pitchFamily="34" charset="-122"/>
-                <a:cs typeface="Cambria" pitchFamily="34" charset="-120"/>
-              </a:rPr>
-              <a:t>2</a:t>
-            </a:r>
-            <a:endParaRPr lang="en-US" sz="2000" dirty="0"/>
-          </a:p>
-        </p:txBody>
-      </p:sp>
-      <p:sp>
-        <p:nvSpPr>
-          <p:cNvPr id="10" name="Text 8"/>
-          <p:cNvSpPr/>
-          <p:nvPr/>
-        </p:nvSpPr>
-        <p:spPr>
-          <a:xfrm>
-            <a:off x="1371600" y="3483864"/>
-            <a:ext cx="10332720" cy="411480"/>
-          </a:xfrm>
-          <a:prstGeom prst="rect">
-            <a:avLst/>
-          </a:prstGeom>
-          <a:noFill/>
-          <a:ln/>
-        </p:spPr>
-        <p:txBody>
-          <a:bodyPr wrap="square" rtlCol="0" anchor="ctr"/>
-          <a:lstStyle/>
-          <a:p>
-            <a:pPr indent="0" marL="0">
-              <a:buNone/>
-            </a:pPr>
-            <a:r>
-              <a:rPr lang="en-US" sz="1900" b="1" dirty="0">
+            <a:pPr indent="0" marL="0">
+              <a:buNone/>
+            </a:pPr>
+            <a:r>
+              <a:rPr lang="en-US" sz="1500" b="1" dirty="0">
                 <a:solidFill>
                   <a:srgbClr val="3F6F5F"/>
                 </a:solidFill>
-                <a:latin typeface="Cambria" pitchFamily="34" charset="0"/>
-                <a:ea typeface="Cambria" pitchFamily="34" charset="-122"/>
-                <a:cs typeface="Cambria" pitchFamily="34" charset="-120"/>
-              </a:rPr>
-              <a:t>Make something real</a:t>
-            </a:r>
-            <a:endParaRPr lang="en-US" sz="1900" dirty="0"/>
-          </a:p>
-        </p:txBody>
-      </p:sp>
-      <p:sp>
-        <p:nvSpPr>
-          <p:cNvPr id="11" name="Text 9"/>
-          <p:cNvSpPr/>
-          <p:nvPr/>
-        </p:nvSpPr>
-        <p:spPr>
-          <a:xfrm>
-            <a:off x="1371600" y="3904488"/>
-            <a:ext cx="10332720" cy="914400"/>
+                <a:latin typeface="Calibri" pitchFamily="34" charset="0"/>
+                <a:ea typeface="Calibri" pitchFamily="34" charset="-122"/>
+                <a:cs typeface="Calibri" pitchFamily="34" charset="-120"/>
+              </a:rPr>
+              <a:t>Supplement</a:t>
+            </a:r>
+            <a:endParaRPr lang="en-US" sz="1500" dirty="0"/>
+          </a:p>
+        </p:txBody>
+      </p:sp>
+      <p:sp>
+        <p:nvSpPr>
+          <p:cNvPr id="8" name="Text 6"/>
+          <p:cNvSpPr/>
+          <p:nvPr/>
+        </p:nvSpPr>
+        <p:spPr>
+          <a:xfrm>
+            <a:off x="1051560" y="2944368"/>
+            <a:ext cx="10424160" cy="731520"/>
           </a:xfrm>
           <a:prstGeom prst="rect">
             <a:avLst/>
@@ -6367,13 +6149,10 @@
           <a:lstStyle/>
           <a:p>
             <a:pPr indent="0" marL="0">
-              <a:lnSpc>
-                <a:spcPct val="112000"/>
-              </a:lnSpc>
-              <a:buNone/>
-            </a:pPr>
-            <a:r>
-              <a:rPr lang="en-US" sz="1450" dirty="0">
+              <a:buNone/>
+            </a:pPr>
+            <a:r>
+              <a:rPr lang="en-US" sz="1400" dirty="0">
                 <a:solidFill>
                   <a:srgbClr val="1A1A1A"/>
                 </a:solidFill>
@@ -6381,27 +6160,25 @@
                 <a:ea typeface="Calibri" pitchFamily="34" charset="-122"/>
                 <a:cs typeface="Calibri" pitchFamily="34" charset="-120"/>
               </a:rPr>
-              <a:t>A complete investigation by the first break, before any theory.</a:t>
-            </a:r>
-            <a:endParaRPr lang="en-US" sz="1450" dirty="0"/>
-          </a:p>
-        </p:txBody>
-      </p:sp>
-      <p:sp>
-        <p:nvSpPr>
-          <p:cNvPr id="12" name="Shape 10"/>
-          <p:cNvSpPr/>
-          <p:nvPr/>
-        </p:nvSpPr>
-        <p:spPr>
-          <a:xfrm>
-            <a:off x="640080" y="4983480"/>
-            <a:ext cx="457200" cy="457200"/>
-          </a:xfrm>
-          <a:prstGeom prst="roundRect">
-            <a:avLst>
-              <a:gd name="adj" fmla="val 16000"/>
-            </a:avLst>
+              <a:t>Robin Sloan, Writing with the machine; Drucker, Humanities Approaches to Graphical Display (DHQ 2011), the case that all data is capta</a:t>
+            </a:r>
+            <a:endParaRPr lang="en-US" sz="1400" dirty="0"/>
+          </a:p>
+        </p:txBody>
+      </p:sp>
+      <p:sp>
+        <p:nvSpPr>
+          <p:cNvPr id="9" name="Shape 7"/>
+          <p:cNvSpPr/>
+          <p:nvPr/>
+        </p:nvSpPr>
+        <p:spPr>
+          <a:xfrm>
+            <a:off x="640080" y="3593592"/>
+            <a:ext cx="219456" cy="219456"/>
+          </a:xfrm>
+          <a:prstGeom prst="ellipse">
+            <a:avLst/>
           </a:prstGeom>
           <a:solidFill>
             <a:srgbClr val="B9852F"/>
@@ -6411,14 +6188,14 @@
       </p:sp>
       <p:sp>
         <p:nvSpPr>
-          <p:cNvPr id="13" name="Text 11"/>
-          <p:cNvSpPr/>
-          <p:nvPr/>
-        </p:nvSpPr>
-        <p:spPr>
-          <a:xfrm>
-            <a:off x="640080" y="4983480"/>
-            <a:ext cx="457200" cy="457200"/>
+          <p:cNvPr id="10" name="Text 8"/>
+          <p:cNvSpPr/>
+          <p:nvPr/>
+        </p:nvSpPr>
+        <p:spPr>
+          <a:xfrm>
+            <a:off x="1051560" y="3520440"/>
+            <a:ext cx="10424160" cy="365760"/>
           </a:xfrm>
           <a:prstGeom prst="rect">
             <a:avLst/>
@@ -6430,73 +6207,34 @@
           <a:bodyPr wrap="square" rtlCol="0" anchor="ctr"/>
           <a:lstStyle/>
           <a:p>
-            <a:pPr algn="ctr" indent="0" marL="0">
-              <a:buNone/>
-            </a:pPr>
-            <a:r>
-              <a:rPr lang="en-US" sz="2000" b="1" dirty="0">
-                <a:solidFill>
-                  <a:srgbClr val="FFFFFF"/>
-                </a:solidFill>
-                <a:latin typeface="Cambria" pitchFamily="34" charset="0"/>
-                <a:ea typeface="Cambria" pitchFamily="34" charset="-122"/>
-                <a:cs typeface="Cambria" pitchFamily="34" charset="-120"/>
-              </a:rPr>
-              <a:t>3</a:t>
-            </a:r>
-            <a:endParaRPr lang="en-US" sz="2000" dirty="0"/>
-          </a:p>
-        </p:txBody>
-      </p:sp>
-      <p:sp>
-        <p:nvSpPr>
-          <p:cNvPr id="14" name="Text 12"/>
-          <p:cNvSpPr/>
-          <p:nvPr/>
-        </p:nvSpPr>
-        <p:spPr>
-          <a:xfrm>
-            <a:off x="1371600" y="4946904"/>
-            <a:ext cx="10332720" cy="411480"/>
-          </a:xfrm>
-          <a:prstGeom prst="rect">
-            <a:avLst/>
-          </a:prstGeom>
-          <a:noFill/>
-          <a:ln/>
-        </p:spPr>
-        <p:txBody>
-          <a:bodyPr wrap="square" rtlCol="0" anchor="ctr"/>
-          <a:lstStyle/>
-          <a:p>
-            <a:pPr indent="0" marL="0">
-              <a:buNone/>
-            </a:pPr>
-            <a:r>
-              <a:rPr lang="en-US" sz="1900" b="1" dirty="0">
+            <a:pPr indent="0" marL="0">
+              <a:buNone/>
+            </a:pPr>
+            <a:r>
+              <a:rPr lang="en-US" sz="1500" b="1" dirty="0">
                 <a:solidFill>
                   <a:srgbClr val="B9852F"/>
                 </a:solidFill>
-                <a:latin typeface="Cambria" pitchFamily="34" charset="0"/>
-                <a:ea typeface="Cambria" pitchFamily="34" charset="-122"/>
-                <a:cs typeface="Cambria" pitchFamily="34" charset="-120"/>
-              </a:rPr>
-              <a:t>Images are culture too</a:t>
-            </a:r>
-            <a:endParaRPr lang="en-US" sz="1900" dirty="0"/>
-          </a:p>
-        </p:txBody>
-      </p:sp>
-      <p:sp>
-        <p:nvSpPr>
-          <p:cNvPr id="15" name="Text 13"/>
-          <p:cNvSpPr/>
-          <p:nvPr/>
-        </p:nvSpPr>
-        <p:spPr>
-          <a:xfrm>
-            <a:off x="1371600" y="5367528"/>
-            <a:ext cx="10332720" cy="914400"/>
+                <a:latin typeface="Calibri" pitchFamily="34" charset="0"/>
+                <a:ea typeface="Calibri" pitchFamily="34" charset="-122"/>
+                <a:cs typeface="Calibri" pitchFamily="34" charset="-120"/>
+              </a:rPr>
+              <a:t>Deeper (optional)</a:t>
+            </a:r>
+            <a:endParaRPr lang="en-US" sz="1500" dirty="0"/>
+          </a:p>
+        </p:txBody>
+      </p:sp>
+      <p:sp>
+        <p:nvSpPr>
+          <p:cNvPr id="11" name="Text 9"/>
+          <p:cNvSpPr/>
+          <p:nvPr/>
+        </p:nvSpPr>
+        <p:spPr>
+          <a:xfrm>
+            <a:off x="1051560" y="3904488"/>
+            <a:ext cx="10424160" cy="731520"/>
           </a:xfrm>
           <a:prstGeom prst="rect">
             <a:avLst/>
@@ -6511,13 +6249,10 @@
           <a:lstStyle/>
           <a:p>
             <a:pPr indent="0" marL="0">
-              <a:lnSpc>
-                <a:spcPct val="112000"/>
-              </a:lnSpc>
-              <a:buNone/>
-            </a:pPr>
-            <a:r>
-              <a:rPr lang="en-US" sz="1450" dirty="0">
+              <a:buNone/>
+            </a:pPr>
+            <a:r>
+              <a:rPr lang="en-US" sz="1400" dirty="0">
                 <a:solidFill>
                   <a:srgbClr val="1A1A1A"/>
                 </a:solidFill>
@@ -6525,9 +6260,209 @@
                 <a:ea typeface="Calibri" pitchFamily="34" charset="-122"/>
                 <a:cs typeface="Calibri" pitchFamily="34" charset="-120"/>
               </a:rPr>
-              <a:t>A picture is numbers: you counted pixels on day one, and images continue as a co-equal corpus through all ten weeks.</a:t>
-            </a:r>
-            <a:endParaRPr lang="en-US" sz="1450" dirty="0"/>
+              <a:t>Moretti, Conjectures on World Literature (NLR 2000), the founding argument for reading culture at scale</a:t>
+            </a:r>
+            <a:endParaRPr lang="en-US" sz="1400" dirty="0"/>
+          </a:p>
+        </p:txBody>
+      </p:sp>
+      <p:sp>
+        <p:nvSpPr>
+          <p:cNvPr id="12" name="Shape 10"/>
+          <p:cNvSpPr/>
+          <p:nvPr/>
+        </p:nvSpPr>
+        <p:spPr>
+          <a:xfrm>
+            <a:off x="640080" y="4553712"/>
+            <a:ext cx="219456" cy="219456"/>
+          </a:xfrm>
+          <a:prstGeom prst="ellipse">
+            <a:avLst/>
+          </a:prstGeom>
+          <a:solidFill>
+            <a:srgbClr val="3F6F5F"/>
+          </a:solidFill>
+          <a:ln/>
+        </p:spPr>
+      </p:sp>
+      <p:sp>
+        <p:nvSpPr>
+          <p:cNvPr id="13" name="Text 11"/>
+          <p:cNvSpPr/>
+          <p:nvPr/>
+        </p:nvSpPr>
+        <p:spPr>
+          <a:xfrm>
+            <a:off x="1051560" y="4480560"/>
+            <a:ext cx="10424160" cy="365760"/>
+          </a:xfrm>
+          <a:prstGeom prst="rect">
+            <a:avLst/>
+          </a:prstGeom>
+          <a:noFill/>
+          <a:ln/>
+        </p:spPr>
+        <p:txBody>
+          <a:bodyPr wrap="square" rtlCol="0" anchor="ctr"/>
+          <a:lstStyle/>
+          <a:p>
+            <a:pPr indent="0" marL="0">
+              <a:buNone/>
+            </a:pPr>
+            <a:r>
+              <a:rPr lang="en-US" sz="1500" b="1" dirty="0">
+                <a:solidFill>
+                  <a:srgbClr val="3F6F5F"/>
+                </a:solidFill>
+                <a:latin typeface="Calibri" pitchFamily="34" charset="0"/>
+                <a:ea typeface="Calibri" pitchFamily="34" charset="-122"/>
+                <a:cs typeface="Calibri" pitchFamily="34" charset="-120"/>
+              </a:rPr>
+              <a:t>Sketch</a:t>
+            </a:r>
+            <a:endParaRPr lang="en-US" sz="1500" dirty="0"/>
+          </a:p>
+        </p:txBody>
+      </p:sp>
+      <p:sp>
+        <p:nvSpPr>
+          <p:cNvPr id="14" name="Text 12"/>
+          <p:cNvSpPr/>
+          <p:nvPr/>
+        </p:nvSpPr>
+        <p:spPr>
+          <a:xfrm>
+            <a:off x="1051560" y="4864608"/>
+            <a:ext cx="10424160" cy="731520"/>
+          </a:xfrm>
+          <a:prstGeom prst="rect">
+            <a:avLst/>
+          </a:prstGeom>
+          <a:noFill/>
+          <a:ln/>
+        </p:spPr>
+        <p:txBody>
+          <a:bodyPr wrap="square" rtlCol="0" anchor="t">
+            <a:spAutoFit/>
+          </a:bodyPr>
+          <a:lstStyle/>
+          <a:p>
+            <a:pPr indent="0" marL="0">
+              <a:buNone/>
+            </a:pPr>
+            <a:r>
+              <a:rPr lang="en-US" sz="1400" dirty="0">
+                <a:solidFill>
+                  <a:srgbClr val="1A1A1A"/>
+                </a:solidFill>
+                <a:latin typeface="Calibri" pitchFamily="34" charset="0"/>
+                <a:ea typeface="Calibri" pitchFamily="34" charset="-122"/>
+                <a:cs typeface="Calibri" pitchFamily="34" charset="-120"/>
+              </a:rPr>
+              <a:t>A favorite Pudding piece and what it counted; the question from your life it inspires; the notebook's after-class half (~20 minutes).</a:t>
+            </a:r>
+            <a:endParaRPr lang="en-US" sz="1400" dirty="0"/>
+          </a:p>
+        </p:txBody>
+      </p:sp>
+      <p:sp>
+        <p:nvSpPr>
+          <p:cNvPr id="15" name="Shape 13"/>
+          <p:cNvSpPr/>
+          <p:nvPr/>
+        </p:nvSpPr>
+        <p:spPr>
+          <a:xfrm>
+            <a:off x="640080" y="5513832"/>
+            <a:ext cx="219456" cy="219456"/>
+          </a:xfrm>
+          <a:prstGeom prst="ellipse">
+            <a:avLst/>
+          </a:prstGeom>
+          <a:solidFill>
+            <a:srgbClr val="7A3B2E"/>
+          </a:solidFill>
+          <a:ln/>
+        </p:spPr>
+      </p:sp>
+      <p:sp>
+        <p:nvSpPr>
+          <p:cNvPr id="16" name="Text 14"/>
+          <p:cNvSpPr/>
+          <p:nvPr/>
+        </p:nvSpPr>
+        <p:spPr>
+          <a:xfrm>
+            <a:off x="1051560" y="5440680"/>
+            <a:ext cx="10424160" cy="365760"/>
+          </a:xfrm>
+          <a:prstGeom prst="rect">
+            <a:avLst/>
+          </a:prstGeom>
+          <a:noFill/>
+          <a:ln/>
+        </p:spPr>
+        <p:txBody>
+          <a:bodyPr wrap="square" rtlCol="0" anchor="ctr"/>
+          <a:lstStyle/>
+          <a:p>
+            <a:pPr indent="0" marL="0">
+              <a:buNone/>
+            </a:pPr>
+            <a:r>
+              <a:rPr lang="en-US" sz="1500" b="1" dirty="0">
+                <a:solidFill>
+                  <a:srgbClr val="7A3B2E"/>
+                </a:solidFill>
+                <a:latin typeface="Calibri" pitchFamily="34" charset="0"/>
+                <a:ea typeface="Calibri" pitchFamily="34" charset="-122"/>
+                <a:cs typeface="Calibri" pitchFamily="34" charset="-120"/>
+              </a:rPr>
+              <a:t>Check (AI closed)</a:t>
+            </a:r>
+            <a:endParaRPr lang="en-US" sz="1500" dirty="0"/>
+          </a:p>
+        </p:txBody>
+      </p:sp>
+      <p:sp>
+        <p:nvSpPr>
+          <p:cNvPr id="17" name="Text 15"/>
+          <p:cNvSpPr/>
+          <p:nvPr/>
+        </p:nvSpPr>
+        <p:spPr>
+          <a:xfrm>
+            <a:off x="1051560" y="5824728"/>
+            <a:ext cx="10424160" cy="731520"/>
+          </a:xfrm>
+          <a:prstGeom prst="rect">
+            <a:avLst/>
+          </a:prstGeom>
+          <a:noFill/>
+          <a:ln/>
+        </p:spPr>
+        <p:txBody>
+          <a:bodyPr wrap="square" rtlCol="0" anchor="t">
+            <a:spAutoFit/>
+          </a:bodyPr>
+          <a:lstStyle/>
+          <a:p>
+            <a:pPr indent="0" marL="0">
+              <a:buNone/>
+            </a:pPr>
+            <a:r>
+              <a:rPr lang="en-US" sz="1400" dirty="0">
+                <a:solidFill>
+                  <a:srgbClr val="1A1A1A"/>
+                </a:solidFill>
+                <a:latin typeface="Calibri" pitchFamily="34" charset="0"/>
+                <a:ea typeface="Calibri" pitchFamily="34" charset="-122"/>
+                <a:cs typeface="Calibri" pitchFamily="34" charset="-120"/>
+              </a:rPr>
+              <a:t>Trace it: one written sentence predicting what your cell does before you run it. (Competency 1.)</a:t>
+            </a:r>
+            <a:endParaRPr lang="en-US" sz="1400" dirty="0"/>
           </a:p>
         </p:txBody>
       </p:sp>
@@ -6542,6 +6477,548 @@
 <file path=ppt/slides/slide17.xml><?xml version="1.0" encoding="utf-8"?>
 <p:sld xmlns:a="http://schemas.openxmlformats.org/drawingml/2006/main" xmlns:r="http://schemas.openxmlformats.org/officeDocument/2006/relationships" xmlns:p="http://schemas.openxmlformats.org/presentationml/2006/main">
   <p:cSld name="Slide 17">
+    <p:bg>
+      <p:bgPr>
+        <a:solidFill>
+          <a:srgbClr val="FFFFFF"/>
+        </a:solidFill>
+      </p:bgPr>
+    </p:bg>
+    <p:spTree>
+      <p:nvGrpSpPr>
+        <p:cNvPr id="1" name=""/>
+        <p:cNvGrpSpPr/>
+        <p:nvPr/>
+      </p:nvGrpSpPr>
+      <p:grpSpPr>
+        <a:xfrm>
+          <a:off x="0" y="0"/>
+          <a:ext cx="0" cy="0"/>
+          <a:chOff x="0" y="0"/>
+          <a:chExt cx="0" cy="0"/>
+        </a:xfrm>
+      </p:grpSpPr>
+      <p:sp>
+        <p:nvSpPr>
+          <p:cNvPr id="2" name="Text 0"/>
+          <p:cNvSpPr/>
+          <p:nvPr/>
+        </p:nvSpPr>
+        <p:spPr>
+          <a:xfrm>
+            <a:off x="640080" y="640080"/>
+            <a:ext cx="10058400" cy="320040"/>
+          </a:xfrm>
+          <a:prstGeom prst="rect">
+            <a:avLst/>
+          </a:prstGeom>
+          <a:noFill/>
+          <a:ln/>
+        </p:spPr>
+        <p:txBody>
+          <a:bodyPr wrap="square" rtlCol="0" anchor="ctr"/>
+          <a:lstStyle/>
+          <a:p>
+            <a:pPr indent="0" marL="0">
+              <a:buNone/>
+            </a:pPr>
+            <a:r>
+              <a:rPr lang="en-US" sz="1300" b="1" spc="300" kern="0" dirty="0">
+                <a:solidFill>
+                  <a:srgbClr val="7A3B2E"/>
+                </a:solidFill>
+                <a:latin typeface="Calibri" pitchFamily="34" charset="0"/>
+                <a:ea typeface="Calibri" pitchFamily="34" charset="-122"/>
+                <a:cs typeface="Calibri" pitchFamily="34" charset="-120"/>
+              </a:rPr>
+              <a:t>HOW THIS WEEK CONNECTS</a:t>
+            </a:r>
+            <a:endParaRPr lang="en-US" sz="1300" dirty="0"/>
+          </a:p>
+        </p:txBody>
+      </p:sp>
+      <p:sp>
+        <p:nvSpPr>
+          <p:cNvPr id="3" name="Text 1"/>
+          <p:cNvSpPr/>
+          <p:nvPr/>
+        </p:nvSpPr>
+        <p:spPr>
+          <a:xfrm>
+            <a:off x="640080" y="987552"/>
+            <a:ext cx="10058400" cy="640080"/>
+          </a:xfrm>
+          <a:prstGeom prst="rect">
+            <a:avLst/>
+          </a:prstGeom>
+          <a:noFill/>
+          <a:ln/>
+        </p:spPr>
+        <p:txBody>
+          <a:bodyPr wrap="square" rtlCol="0" anchor="ctr"/>
+          <a:lstStyle/>
+          <a:p>
+            <a:pPr indent="0" marL="0">
+              <a:buNone/>
+            </a:pPr>
+            <a:r>
+              <a:rPr lang="en-US" sz="2800" b="1" dirty="0">
+                <a:solidFill>
+                  <a:srgbClr val="1A1A1A"/>
+                </a:solidFill>
+                <a:latin typeface="Cambria" pitchFamily="34" charset="0"/>
+                <a:ea typeface="Cambria" pitchFamily="34" charset="-122"/>
+                <a:cs typeface="Cambria" pitchFamily="34" charset="-120"/>
+              </a:rPr>
+              <a:t>The course's through-lines</a:t>
+            </a:r>
+            <a:endParaRPr lang="en-US" sz="2800" dirty="0"/>
+          </a:p>
+        </p:txBody>
+      </p:sp>
+      <p:sp>
+        <p:nvSpPr>
+          <p:cNvPr id="4" name="Shape 2"/>
+          <p:cNvSpPr/>
+          <p:nvPr/>
+        </p:nvSpPr>
+        <p:spPr>
+          <a:xfrm>
+            <a:off x="640080" y="2057400"/>
+            <a:ext cx="457200" cy="457200"/>
+          </a:xfrm>
+          <a:prstGeom prst="roundRect">
+            <a:avLst>
+              <a:gd name="adj" fmla="val 16000"/>
+            </a:avLst>
+          </a:prstGeom>
+          <a:solidFill>
+            <a:srgbClr val="7A3B2E"/>
+          </a:solidFill>
+          <a:ln/>
+        </p:spPr>
+      </p:sp>
+      <p:sp>
+        <p:nvSpPr>
+          <p:cNvPr id="5" name="Text 3"/>
+          <p:cNvSpPr/>
+          <p:nvPr/>
+        </p:nvSpPr>
+        <p:spPr>
+          <a:xfrm>
+            <a:off x="640080" y="2057400"/>
+            <a:ext cx="457200" cy="457200"/>
+          </a:xfrm>
+          <a:prstGeom prst="rect">
+            <a:avLst/>
+          </a:prstGeom>
+          <a:noFill/>
+          <a:ln/>
+        </p:spPr>
+        <p:txBody>
+          <a:bodyPr wrap="square" rtlCol="0" anchor="ctr"/>
+          <a:lstStyle/>
+          <a:p>
+            <a:pPr algn="ctr" indent="0" marL="0">
+              <a:buNone/>
+            </a:pPr>
+            <a:r>
+              <a:rPr lang="en-US" sz="2000" b="1" dirty="0">
+                <a:solidFill>
+                  <a:srgbClr val="FFFFFF"/>
+                </a:solidFill>
+                <a:latin typeface="Cambria" pitchFamily="34" charset="0"/>
+                <a:ea typeface="Cambria" pitchFamily="34" charset="-122"/>
+                <a:cs typeface="Cambria" pitchFamily="34" charset="-120"/>
+              </a:rPr>
+              <a:t>1</a:t>
+            </a:r>
+            <a:endParaRPr lang="en-US" sz="2000" dirty="0"/>
+          </a:p>
+        </p:txBody>
+      </p:sp>
+      <p:sp>
+        <p:nvSpPr>
+          <p:cNvPr id="6" name="Text 4"/>
+          <p:cNvSpPr/>
+          <p:nvPr/>
+        </p:nvSpPr>
+        <p:spPr>
+          <a:xfrm>
+            <a:off x="1371600" y="2020824"/>
+            <a:ext cx="10332720" cy="411480"/>
+          </a:xfrm>
+          <a:prstGeom prst="rect">
+            <a:avLst/>
+          </a:prstGeom>
+          <a:noFill/>
+          <a:ln/>
+        </p:spPr>
+        <p:txBody>
+          <a:bodyPr wrap="square" rtlCol="0" anchor="ctr"/>
+          <a:lstStyle/>
+          <a:p>
+            <a:pPr indent="0" marL="0">
+              <a:buNone/>
+            </a:pPr>
+            <a:r>
+              <a:rPr lang="en-US" sz="1900" b="1" dirty="0">
+                <a:solidFill>
+                  <a:srgbClr val="7A3B2E"/>
+                </a:solidFill>
+                <a:latin typeface="Cambria" pitchFamily="34" charset="0"/>
+                <a:ea typeface="Cambria" pitchFamily="34" charset="-122"/>
+                <a:cs typeface="Cambria" pitchFamily="34" charset="-120"/>
+              </a:rPr>
+              <a:t>Read work critically</a:t>
+            </a:r>
+            <a:endParaRPr lang="en-US" sz="1900" dirty="0"/>
+          </a:p>
+        </p:txBody>
+      </p:sp>
+      <p:sp>
+        <p:nvSpPr>
+          <p:cNvPr id="7" name="Text 5"/>
+          <p:cNvSpPr/>
+          <p:nvPr/>
+        </p:nvSpPr>
+        <p:spPr>
+          <a:xfrm>
+            <a:off x="1371600" y="2441448"/>
+            <a:ext cx="10332720" cy="914400"/>
+          </a:xfrm>
+          <a:prstGeom prst="rect">
+            <a:avLst/>
+          </a:prstGeom>
+          <a:noFill/>
+          <a:ln/>
+        </p:spPr>
+        <p:txBody>
+          <a:bodyPr wrap="square" rtlCol="0" anchor="t">
+            <a:spAutoFit/>
+          </a:bodyPr>
+          <a:lstStyle/>
+          <a:p>
+            <a:pPr indent="0" marL="0">
+              <a:lnSpc>
+                <a:spcPct val="112000"/>
+              </a:lnSpc>
+              <a:buNone/>
+            </a:pPr>
+            <a:r>
+              <a:rPr lang="en-US" sz="1450" dirty="0">
+                <a:solidFill>
+                  <a:srgbClr val="1A1A1A"/>
+                </a:solidFill>
+                <a:latin typeface="Calibri" pitchFamily="34" charset="0"/>
+                <a:ea typeface="Calibri" pitchFamily="34" charset="-122"/>
+                <a:cs typeface="Calibri" pitchFamily="34" charset="-120"/>
+              </a:rPr>
+              <a:t>She Giggles, He Gallops is excellent and its choices are debatable. Admiring and questioning at once is the habit the course is built on.</a:t>
+            </a:r>
+            <a:endParaRPr lang="en-US" sz="1450" dirty="0"/>
+          </a:p>
+        </p:txBody>
+      </p:sp>
+      <p:sp>
+        <p:nvSpPr>
+          <p:cNvPr id="8" name="Shape 6"/>
+          <p:cNvSpPr/>
+          <p:nvPr/>
+        </p:nvSpPr>
+        <p:spPr>
+          <a:xfrm>
+            <a:off x="640080" y="3520440"/>
+            <a:ext cx="457200" cy="457200"/>
+          </a:xfrm>
+          <a:prstGeom prst="roundRect">
+            <a:avLst>
+              <a:gd name="adj" fmla="val 16000"/>
+            </a:avLst>
+          </a:prstGeom>
+          <a:solidFill>
+            <a:srgbClr val="3F6F5F"/>
+          </a:solidFill>
+          <a:ln/>
+        </p:spPr>
+      </p:sp>
+      <p:sp>
+        <p:nvSpPr>
+          <p:cNvPr id="9" name="Text 7"/>
+          <p:cNvSpPr/>
+          <p:nvPr/>
+        </p:nvSpPr>
+        <p:spPr>
+          <a:xfrm>
+            <a:off x="640080" y="3520440"/>
+            <a:ext cx="457200" cy="457200"/>
+          </a:xfrm>
+          <a:prstGeom prst="rect">
+            <a:avLst/>
+          </a:prstGeom>
+          <a:noFill/>
+          <a:ln/>
+        </p:spPr>
+        <p:txBody>
+          <a:bodyPr wrap="square" rtlCol="0" anchor="ctr"/>
+          <a:lstStyle/>
+          <a:p>
+            <a:pPr algn="ctr" indent="0" marL="0">
+              <a:buNone/>
+            </a:pPr>
+            <a:r>
+              <a:rPr lang="en-US" sz="2000" b="1" dirty="0">
+                <a:solidFill>
+                  <a:srgbClr val="FFFFFF"/>
+                </a:solidFill>
+                <a:latin typeface="Cambria" pitchFamily="34" charset="0"/>
+                <a:ea typeface="Cambria" pitchFamily="34" charset="-122"/>
+                <a:cs typeface="Cambria" pitchFamily="34" charset="-120"/>
+              </a:rPr>
+              <a:t>2</a:t>
+            </a:r>
+            <a:endParaRPr lang="en-US" sz="2000" dirty="0"/>
+          </a:p>
+        </p:txBody>
+      </p:sp>
+      <p:sp>
+        <p:nvSpPr>
+          <p:cNvPr id="10" name="Text 8"/>
+          <p:cNvSpPr/>
+          <p:nvPr/>
+        </p:nvSpPr>
+        <p:spPr>
+          <a:xfrm>
+            <a:off x="1371600" y="3483864"/>
+            <a:ext cx="10332720" cy="411480"/>
+          </a:xfrm>
+          <a:prstGeom prst="rect">
+            <a:avLst/>
+          </a:prstGeom>
+          <a:noFill/>
+          <a:ln/>
+        </p:spPr>
+        <p:txBody>
+          <a:bodyPr wrap="square" rtlCol="0" anchor="ctr"/>
+          <a:lstStyle/>
+          <a:p>
+            <a:pPr indent="0" marL="0">
+              <a:buNone/>
+            </a:pPr>
+            <a:r>
+              <a:rPr lang="en-US" sz="1900" b="1" dirty="0">
+                <a:solidFill>
+                  <a:srgbClr val="3F6F5F"/>
+                </a:solidFill>
+                <a:latin typeface="Cambria" pitchFamily="34" charset="0"/>
+                <a:ea typeface="Cambria" pitchFamily="34" charset="-122"/>
+                <a:cs typeface="Cambria" pitchFamily="34" charset="-120"/>
+              </a:rPr>
+              <a:t>Make something real</a:t>
+            </a:r>
+            <a:endParaRPr lang="en-US" sz="1900" dirty="0"/>
+          </a:p>
+        </p:txBody>
+      </p:sp>
+      <p:sp>
+        <p:nvSpPr>
+          <p:cNvPr id="11" name="Text 9"/>
+          <p:cNvSpPr/>
+          <p:nvPr/>
+        </p:nvSpPr>
+        <p:spPr>
+          <a:xfrm>
+            <a:off x="1371600" y="3904488"/>
+            <a:ext cx="10332720" cy="914400"/>
+          </a:xfrm>
+          <a:prstGeom prst="rect">
+            <a:avLst/>
+          </a:prstGeom>
+          <a:noFill/>
+          <a:ln/>
+        </p:spPr>
+        <p:txBody>
+          <a:bodyPr wrap="square" rtlCol="0" anchor="t">
+            <a:spAutoFit/>
+          </a:bodyPr>
+          <a:lstStyle/>
+          <a:p>
+            <a:pPr indent="0" marL="0">
+              <a:lnSpc>
+                <a:spcPct val="112000"/>
+              </a:lnSpc>
+              <a:buNone/>
+            </a:pPr>
+            <a:r>
+              <a:rPr lang="en-US" sz="1450" dirty="0">
+                <a:solidFill>
+                  <a:srgbClr val="1A1A1A"/>
+                </a:solidFill>
+                <a:latin typeface="Calibri" pitchFamily="34" charset="0"/>
+                <a:ea typeface="Calibri" pitchFamily="34" charset="-122"/>
+                <a:cs typeface="Calibri" pitchFamily="34" charset="-120"/>
+              </a:rPr>
+              <a:t>A complete investigation by the first break, before any theory.</a:t>
+            </a:r>
+            <a:endParaRPr lang="en-US" sz="1450" dirty="0"/>
+          </a:p>
+        </p:txBody>
+      </p:sp>
+      <p:sp>
+        <p:nvSpPr>
+          <p:cNvPr id="12" name="Shape 10"/>
+          <p:cNvSpPr/>
+          <p:nvPr/>
+        </p:nvSpPr>
+        <p:spPr>
+          <a:xfrm>
+            <a:off x="640080" y="4983480"/>
+            <a:ext cx="457200" cy="457200"/>
+          </a:xfrm>
+          <a:prstGeom prst="roundRect">
+            <a:avLst>
+              <a:gd name="adj" fmla="val 16000"/>
+            </a:avLst>
+          </a:prstGeom>
+          <a:solidFill>
+            <a:srgbClr val="B9852F"/>
+          </a:solidFill>
+          <a:ln/>
+        </p:spPr>
+      </p:sp>
+      <p:sp>
+        <p:nvSpPr>
+          <p:cNvPr id="13" name="Text 11"/>
+          <p:cNvSpPr/>
+          <p:nvPr/>
+        </p:nvSpPr>
+        <p:spPr>
+          <a:xfrm>
+            <a:off x="640080" y="4983480"/>
+            <a:ext cx="457200" cy="457200"/>
+          </a:xfrm>
+          <a:prstGeom prst="rect">
+            <a:avLst/>
+          </a:prstGeom>
+          <a:noFill/>
+          <a:ln/>
+        </p:spPr>
+        <p:txBody>
+          <a:bodyPr wrap="square" rtlCol="0" anchor="ctr"/>
+          <a:lstStyle/>
+          <a:p>
+            <a:pPr algn="ctr" indent="0" marL="0">
+              <a:buNone/>
+            </a:pPr>
+            <a:r>
+              <a:rPr lang="en-US" sz="2000" b="1" dirty="0">
+                <a:solidFill>
+                  <a:srgbClr val="FFFFFF"/>
+                </a:solidFill>
+                <a:latin typeface="Cambria" pitchFamily="34" charset="0"/>
+                <a:ea typeface="Cambria" pitchFamily="34" charset="-122"/>
+                <a:cs typeface="Cambria" pitchFamily="34" charset="-120"/>
+              </a:rPr>
+              <a:t>3</a:t>
+            </a:r>
+            <a:endParaRPr lang="en-US" sz="2000" dirty="0"/>
+          </a:p>
+        </p:txBody>
+      </p:sp>
+      <p:sp>
+        <p:nvSpPr>
+          <p:cNvPr id="14" name="Text 12"/>
+          <p:cNvSpPr/>
+          <p:nvPr/>
+        </p:nvSpPr>
+        <p:spPr>
+          <a:xfrm>
+            <a:off x="1371600" y="4946904"/>
+            <a:ext cx="10332720" cy="411480"/>
+          </a:xfrm>
+          <a:prstGeom prst="rect">
+            <a:avLst/>
+          </a:prstGeom>
+          <a:noFill/>
+          <a:ln/>
+        </p:spPr>
+        <p:txBody>
+          <a:bodyPr wrap="square" rtlCol="0" anchor="ctr"/>
+          <a:lstStyle/>
+          <a:p>
+            <a:pPr indent="0" marL="0">
+              <a:buNone/>
+            </a:pPr>
+            <a:r>
+              <a:rPr lang="en-US" sz="1900" b="1" dirty="0">
+                <a:solidFill>
+                  <a:srgbClr val="B9852F"/>
+                </a:solidFill>
+                <a:latin typeface="Cambria" pitchFamily="34" charset="0"/>
+                <a:ea typeface="Cambria" pitchFamily="34" charset="-122"/>
+                <a:cs typeface="Cambria" pitchFamily="34" charset="-120"/>
+              </a:rPr>
+              <a:t>Images are culture too</a:t>
+            </a:r>
+            <a:endParaRPr lang="en-US" sz="1900" dirty="0"/>
+          </a:p>
+        </p:txBody>
+      </p:sp>
+      <p:sp>
+        <p:nvSpPr>
+          <p:cNvPr id="15" name="Text 13"/>
+          <p:cNvSpPr/>
+          <p:nvPr/>
+        </p:nvSpPr>
+        <p:spPr>
+          <a:xfrm>
+            <a:off x="1371600" y="5367528"/>
+            <a:ext cx="10332720" cy="914400"/>
+          </a:xfrm>
+          <a:prstGeom prst="rect">
+            <a:avLst/>
+          </a:prstGeom>
+          <a:noFill/>
+          <a:ln/>
+        </p:spPr>
+        <p:txBody>
+          <a:bodyPr wrap="square" rtlCol="0" anchor="t">
+            <a:spAutoFit/>
+          </a:bodyPr>
+          <a:lstStyle/>
+          <a:p>
+            <a:pPr indent="0" marL="0">
+              <a:lnSpc>
+                <a:spcPct val="112000"/>
+              </a:lnSpc>
+              <a:buNone/>
+            </a:pPr>
+            <a:r>
+              <a:rPr lang="en-US" sz="1450" dirty="0">
+                <a:solidFill>
+                  <a:srgbClr val="1A1A1A"/>
+                </a:solidFill>
+                <a:latin typeface="Calibri" pitchFamily="34" charset="0"/>
+                <a:ea typeface="Calibri" pitchFamily="34" charset="-122"/>
+                <a:cs typeface="Calibri" pitchFamily="34" charset="-120"/>
+              </a:rPr>
+              <a:t>A picture is numbers: you counted pixels on day one, and images continue as a co-equal corpus through all ten weeks.</a:t>
+            </a:r>
+            <a:endParaRPr lang="en-US" sz="1450" dirty="0"/>
+          </a:p>
+        </p:txBody>
+      </p:sp>
+    </p:spTree>
+  </p:cSld>
+  <p:clrMapOvr>
+    <a:masterClrMapping/>
+  </p:clrMapOvr>
+</p:sld>
+</file>
+
+<file path=ppt/slides/slide18.xml><?xml version="1.0" encoding="utf-8"?>
+<p:sld xmlns:a="http://schemas.openxmlformats.org/drawingml/2006/main" xmlns:r="http://schemas.openxmlformats.org/officeDocument/2006/relationships" xmlns:p="http://schemas.openxmlformats.org/presentationml/2006/main">
+  <p:cSld name="Slide 18">
     <p:bg>
       <p:bgPr>
         <a:solidFill>
@@ -7501,7 +7978,7 @@
                 <a:ea typeface="Cambria" pitchFamily="34" charset="-122"/>
                 <a:cs typeface="Cambria" pitchFamily="34" charset="-120"/>
               </a:rPr>
-              <a:t>Why this course: the stakes</a:t>
+              <a:t>Course logistics</a:t>
             </a:r>
             <a:endParaRPr lang="en-US" sz="3000" dirty="0"/>
           </a:p>
@@ -7536,7 +8013,7 @@
         <p:spPr>
           <a:xfrm>
             <a:off x="1097280" y="2240280"/>
-            <a:ext cx="10607040" cy="1017270"/>
+            <a:ext cx="10607040" cy="813816"/>
           </a:xfrm>
           <a:prstGeom prst="rect">
             <a:avLst/>
@@ -7557,7 +8034,7 @@
               <a:buNone/>
             </a:pPr>
             <a:r>
-              <a:rPr lang="en-US" sz="1650" dirty="0">
+              <a:rPr lang="en-US" sz="1500" dirty="0">
                 <a:solidFill>
                   <a:srgbClr val="1A1A1A"/>
                 </a:solidFill>
@@ -7565,9 +8042,9 @@
                 <a:ea typeface="Calibri" pitchFamily="34" charset="-122"/>
                 <a:cs typeface="Calibri" pitchFamily="34" charset="-120"/>
               </a:rPr>
-              <a:t>Machines already read culture at scale: the feed ranking what you see, the moderation filter, the model trained on scraped art and prose. That reading shapes which culture reaches you, and it happens without you.</a:t>
-            </a:r>
-            <a:endParaRPr lang="en-US" sz="1650" dirty="0"/>
+              <a:t>Ten sessions, two hours each, in three parts every week: lecture and demonstration, hands-on workshop, and discussion, roughly a third each.</a:t>
+            </a:r>
+            <a:endParaRPr lang="en-US" sz="1500" dirty="0"/>
           </a:p>
         </p:txBody>
       </p:sp>
@@ -7579,7 +8056,7 @@
         </p:nvSpPr>
         <p:spPr>
           <a:xfrm>
-            <a:off x="640080" y="3348990"/>
+            <a:off x="640080" y="3145536"/>
             <a:ext cx="201168" cy="201168"/>
           </a:xfrm>
           <a:prstGeom prst="ellipse">
@@ -7599,8 +8076,8 @@
         </p:nvSpPr>
         <p:spPr>
           <a:xfrm>
-            <a:off x="1097280" y="3257550"/>
-            <a:ext cx="10607040" cy="1017270"/>
+            <a:off x="1097280" y="3054096"/>
+            <a:ext cx="10607040" cy="813816"/>
           </a:xfrm>
           <a:prstGeom prst="rect">
             <a:avLst/>
@@ -7621,7 +8098,7 @@
               <a:buNone/>
             </a:pPr>
             <a:r>
-              <a:rPr lang="en-US" sz="1650" dirty="0">
+              <a:rPr lang="en-US" sz="1500" dirty="0">
                 <a:solidFill>
                   <a:srgbClr val="1A1A1A"/>
                 </a:solidFill>
@@ -7629,9 +8106,9 @@
                 <a:ea typeface="Calibri" pitchFamily="34" charset="-122"/>
                 <a:cs typeface="Calibri" pitchFamily="34" charset="-120"/>
               </a:rPr>
-              <a:t>Reading culture with machines produces real knowledge and real mistakes, and the two look identical until someone checks. Learning to check is the course.</a:t>
-            </a:r>
-            <a:endParaRPr lang="en-US" sz="1650" dirty="0"/>
+              <a:t>Bring a laptop. You need a Google account (Colab and Drive, where all work lives) and a GitHub account (where your essay publishes); both are free, and the course costs nothing.</a:t>
+            </a:r>
+            <a:endParaRPr lang="en-US" sz="1500" dirty="0"/>
           </a:p>
         </p:txBody>
       </p:sp>
@@ -7643,7 +8120,7 @@
         </p:nvSpPr>
         <p:spPr>
           <a:xfrm>
-            <a:off x="640080" y="4366260"/>
+            <a:off x="640080" y="3959352"/>
             <a:ext cx="201168" cy="201168"/>
           </a:xfrm>
           <a:prstGeom prst="ellipse">
@@ -7663,8 +8140,8 @@
         </p:nvSpPr>
         <p:spPr>
           <a:xfrm>
-            <a:off x="1097280" y="4274820"/>
-            <a:ext cx="10607040" cy="1017270"/>
+            <a:off x="1097280" y="3867912"/>
+            <a:ext cx="10607040" cy="813816"/>
           </a:xfrm>
           <a:prstGeom prst="rect">
             <a:avLst/>
@@ -7685,7 +8162,7 @@
               <a:buNone/>
             </a:pPr>
             <a:r>
-              <a:rPr lang="en-US" sz="1650" dirty="0">
+              <a:rPr lang="en-US" sz="1500" dirty="0">
                 <a:solidFill>
                   <a:srgbClr val="1A1A1A"/>
                 </a:solidFill>
@@ -7693,9 +8170,9 @@
                 <a:ea typeface="Calibri" pitchFamily="34" charset="-122"/>
                 <a:cs typeface="Calibri" pitchFamily="34" charset="-120"/>
               </a:rPr>
-              <a:t>Ten weeks from now, you do the reading: a question you chose, a corpus you built, a published finding anyone can verify.</a:t>
-            </a:r>
-            <a:endParaRPr lang="en-US" sz="1650" dirty="0"/>
+              <a:t>The weekly rhythm: a short reading before each session, a small sketch after it, and a five-minute check with the AI closed. All materials live on the course site.</a:t>
+            </a:r>
+            <a:endParaRPr lang="en-US" sz="1500" dirty="0"/>
           </a:p>
         </p:txBody>
       </p:sp>
@@ -7707,7 +8184,7 @@
         </p:nvSpPr>
         <p:spPr>
           <a:xfrm>
-            <a:off x="640080" y="5383530"/>
+            <a:off x="640080" y="4773168"/>
             <a:ext cx="201168" cy="201168"/>
           </a:xfrm>
           <a:prstGeom prst="ellipse">
@@ -7727,8 +8204,8 @@
         </p:nvSpPr>
         <p:spPr>
           <a:xfrm>
-            <a:off x="1097280" y="5292090"/>
-            <a:ext cx="10607040" cy="1017270"/>
+            <a:off x="1097280" y="4681728"/>
+            <a:ext cx="10607040" cy="813816"/>
           </a:xfrm>
           <a:prstGeom prst="rect">
             <a:avLst/>
@@ -7749,7 +8226,7 @@
               <a:buNone/>
             </a:pPr>
             <a:r>
-              <a:rPr lang="en-US" sz="1650" dirty="0">
+              <a:rPr lang="en-US" sz="1500" dirty="0">
                 <a:solidFill>
                   <a:srgbClr val="1A1A1A"/>
                 </a:solidFill>
@@ -7757,9 +8234,73 @@
                 <a:ea typeface="Calibri" pitchFamily="34" charset="-122"/>
                 <a:cs typeface="Calibri" pitchFamily="34" charset="-120"/>
               </a:rPr>
-              <a:t>The whole method in one sentence: it is all counting and weighting, and you can learn to read both.</a:t>
-            </a:r>
-            <a:endParaRPr lang="en-US" sz="1650" dirty="0"/>
+              <a:t>Icebreaker, one fast round: your name, one piece of culture you kept returning to this year, and one number about it you wish you knew. Keep your answer; it is a first draft of a project question.</a:t>
+            </a:r>
+            <a:endParaRPr lang="en-US" sz="1500" dirty="0"/>
+          </a:p>
+        </p:txBody>
+      </p:sp>
+      <p:sp>
+        <p:nvSpPr>
+          <p:cNvPr id="13" name="Shape 11"/>
+          <p:cNvSpPr/>
+          <p:nvPr/>
+        </p:nvSpPr>
+        <p:spPr>
+          <a:xfrm>
+            <a:off x="640080" y="5586984"/>
+            <a:ext cx="201168" cy="201168"/>
+          </a:xfrm>
+          <a:prstGeom prst="ellipse">
+            <a:avLst/>
+          </a:prstGeom>
+          <a:solidFill>
+            <a:srgbClr val="3F6F5F"/>
+          </a:solidFill>
+          <a:ln/>
+        </p:spPr>
+      </p:sp>
+      <p:sp>
+        <p:nvSpPr>
+          <p:cNvPr id="14" name="Text 12"/>
+          <p:cNvSpPr/>
+          <p:nvPr/>
+        </p:nvSpPr>
+        <p:spPr>
+          <a:xfrm>
+            <a:off x="1097280" y="5495544"/>
+            <a:ext cx="10607040" cy="813816"/>
+          </a:xfrm>
+          <a:prstGeom prst="rect">
+            <a:avLst/>
+          </a:prstGeom>
+          <a:noFill/>
+          <a:ln/>
+        </p:spPr>
+        <p:txBody>
+          <a:bodyPr wrap="square" rtlCol="0" anchor="t">
+            <a:spAutoFit/>
+          </a:bodyPr>
+          <a:lstStyle/>
+          <a:p>
+            <a:pPr indent="0" marL="0">
+              <a:lnSpc>
+                <a:spcPct val="112000"/>
+              </a:lnSpc>
+              <a:buNone/>
+            </a:pPr>
+            <a:r>
+              <a:rPr lang="en-US" sz="1500" dirty="0">
+                <a:solidFill>
+                  <a:srgbClr val="1A1A1A"/>
+                </a:solidFill>
+                <a:latin typeface="Calibri" pitchFamily="34" charset="0"/>
+                <a:ea typeface="Calibri" pitchFamily="34" charset="-122"/>
+                <a:cs typeface="Calibri" pitchFamily="34" charset="-120"/>
+              </a:rPr>
+              <a:t>The course ends in a public showcase, friends and family invited, your finding at a live URL.</a:t>
+            </a:r>
+            <a:endParaRPr lang="en-US" sz="1500" dirty="0"/>
           </a:p>
         </p:txBody>
       </p:sp>
@@ -7889,7 +8430,7 @@
                 <a:ea typeface="Cambria" pitchFamily="34" charset="-122"/>
                 <a:cs typeface="Cambria" pitchFamily="34" charset="-120"/>
               </a:rPr>
-              <a:t>What counting culture has found</a:t>
+              <a:t>Why this course: the stakes</a:t>
             </a:r>
             <a:endParaRPr lang="en-US" sz="3000" dirty="0"/>
           </a:p>
@@ -7924,7 +8465,7 @@
         <p:spPr>
           <a:xfrm>
             <a:off x="1097280" y="2240280"/>
-            <a:ext cx="10607040" cy="813816"/>
+            <a:ext cx="10607040" cy="1017270"/>
           </a:xfrm>
           <a:prstGeom prst="rect">
             <a:avLst/>
@@ -7945,7 +8486,7 @@
               <a:buNone/>
             </a:pPr>
             <a:r>
-              <a:rPr lang="en-US" sz="1500" dirty="0">
+              <a:rPr lang="en-US" sz="1650" dirty="0">
                 <a:solidFill>
                   <a:srgbClr val="1A1A1A"/>
                 </a:solidFill>
@@ -7953,9 +8494,9 @@
                 <a:ea typeface="Calibri" pitchFamily="34" charset="-122"/>
                 <a:cs typeface="Calibri" pitchFamily="34" charset="-120"/>
               </a:rPr>
-              <a:t>In the stage directions of 2,000 film scripts: women snuggle, giggle, and sob; men strap, gallop, and kill. 85% of the screenwriters were men (The Pudding, 2017).</a:t>
-            </a:r>
-            <a:endParaRPr lang="en-US" sz="1500" dirty="0"/>
+              <a:t>Machines already read culture at scale: the feed ranking what you see, the moderation filter, the model trained on scraped art and prose. That reading shapes which culture reaches you, and it happens without you.</a:t>
+            </a:r>
+            <a:endParaRPr lang="en-US" sz="1650" dirty="0"/>
           </a:p>
         </p:txBody>
       </p:sp>
@@ -7967,7 +8508,7 @@
         </p:nvSpPr>
         <p:spPr>
           <a:xfrm>
-            <a:off x="640080" y="3145536"/>
+            <a:off x="640080" y="3348990"/>
             <a:ext cx="201168" cy="201168"/>
           </a:xfrm>
           <a:prstGeom prst="ellipse">
@@ -7987,8 +8528,8 @@
         </p:nvSpPr>
         <p:spPr>
           <a:xfrm>
-            <a:off x="1097280" y="3054096"/>
-            <a:ext cx="10607040" cy="813816"/>
+            <a:off x="1097280" y="3257550"/>
+            <a:ext cx="10607040" cy="1017270"/>
           </a:xfrm>
           <a:prstGeom prst="rect">
             <a:avLst/>
@@ -8009,7 +8550,7 @@
               <a:buNone/>
             </a:pPr>
             <a:r>
-              <a:rPr lang="en-US" sz="1500" dirty="0">
+              <a:rPr lang="en-US" sz="1650" dirty="0">
                 <a:solidFill>
                   <a:srgbClr val="1A1A1A"/>
                 </a:solidFill>
@@ -8017,9 +8558,9 @@
                 <a:ea typeface="Calibri" pitchFamily="34" charset="-122"/>
                 <a:cs typeface="Calibri" pitchFamily="34" charset="-120"/>
               </a:rPr>
-              <a:t>Across 17,000 Hot 100 songs, the biggest revolution in American pop was not the Beatles in 1964; it was hip-hop in 1991 (Mauch et al., 2015).</a:t>
-            </a:r>
-            <a:endParaRPr lang="en-US" sz="1500" dirty="0"/>
+              <a:t>Reading culture with machines produces real knowledge and real mistakes, and the two look identical until someone checks. Learning to check is the course.</a:t>
+            </a:r>
+            <a:endParaRPr lang="en-US" sz="1650" dirty="0"/>
           </a:p>
         </p:txBody>
       </p:sp>
@@ -8031,7 +8572,7 @@
         </p:nvSpPr>
         <p:spPr>
           <a:xfrm>
-            <a:off x="640080" y="3959352"/>
+            <a:off x="640080" y="4366260"/>
             <a:ext cx="201168" cy="201168"/>
           </a:xfrm>
           <a:prstGeom prst="ellipse">
@@ -8051,8 +8592,8 @@
         </p:nvSpPr>
         <p:spPr>
           <a:xfrm>
-            <a:off x="1097280" y="3867912"/>
-            <a:ext cx="10607040" cy="813816"/>
+            <a:off x="1097280" y="4274820"/>
+            <a:ext cx="10607040" cy="1017270"/>
           </a:xfrm>
           <a:prstGeom prst="rect">
             <a:avLst/>
@@ -8073,7 +8614,7 @@
               <a:buNone/>
             </a:pPr>
             <a:r>
-              <a:rPr lang="en-US" sz="1500" dirty="0">
+              <a:rPr lang="en-US" sz="1650" dirty="0">
                 <a:solidFill>
                   <a:srgbClr val="1A1A1A"/>
                 </a:solidFill>
@@ -8081,9 +8622,9 @@
                 <a:ea typeface="Calibri" pitchFamily="34" charset="-122"/>
                 <a:cs typeface="Calibri" pitchFamily="34" charset="-120"/>
               </a:rPr>
-              <a:t>Counting small words like 'the' and 'of' unmasked Robert Galbraith as J.K. Rowling within days (Juola, 2013).</a:t>
-            </a:r>
-            <a:endParaRPr lang="en-US" sz="1500" dirty="0"/>
+              <a:t>Ten weeks from now, you do the reading: a question you chose, a corpus you built, a published finding anyone can verify.</a:t>
+            </a:r>
+            <a:endParaRPr lang="en-US" sz="1650" dirty="0"/>
           </a:p>
         </p:txBody>
       </p:sp>
@@ -8095,7 +8636,7 @@
         </p:nvSpPr>
         <p:spPr>
           <a:xfrm>
-            <a:off x="640080" y="4773168"/>
+            <a:off x="640080" y="5383530"/>
             <a:ext cx="201168" cy="201168"/>
           </a:xfrm>
           <a:prstGeom prst="ellipse">
@@ -8115,8 +8656,8 @@
         </p:nvSpPr>
         <p:spPr>
           <a:xfrm>
-            <a:off x="1097280" y="4681728"/>
-            <a:ext cx="10607040" cy="813816"/>
+            <a:off x="1097280" y="5292090"/>
+            <a:ext cx="10607040" cy="1017270"/>
           </a:xfrm>
           <a:prstGeom prst="rect">
             <a:avLst/>
@@ -8137,7 +8678,7 @@
               <a:buNone/>
             </a:pPr>
             <a:r>
-              <a:rPr lang="en-US" sz="1500" dirty="0">
+              <a:rPr lang="en-US" sz="1650" dirty="0">
                 <a:solidFill>
                   <a:srgbClr val="1A1A1A"/>
                 </a:solidFill>
@@ -8145,73 +8686,9 @@
                 <a:ea typeface="Calibri" pitchFamily="34" charset="-122"/>
                 <a:cs typeface="Calibri" pitchFamily="34" charset="-120"/>
               </a:rPr>
-              <a:t>A model trained on Google News completes 'man is to computer programmer as woman is to...' with 'homemaker' (Bolukbasi et al., 2016).</a:t>
-            </a:r>
-            <a:endParaRPr lang="en-US" sz="1500" dirty="0"/>
-          </a:p>
-        </p:txBody>
-      </p:sp>
-      <p:sp>
-        <p:nvSpPr>
-          <p:cNvPr id="13" name="Shape 11"/>
-          <p:cNvSpPr/>
-          <p:nvPr/>
-        </p:nvSpPr>
-        <p:spPr>
-          <a:xfrm>
-            <a:off x="640080" y="5586984"/>
-            <a:ext cx="201168" cy="201168"/>
-          </a:xfrm>
-          <a:prstGeom prst="ellipse">
-            <a:avLst/>
-          </a:prstGeom>
-          <a:solidFill>
-            <a:srgbClr val="3F6F5F"/>
-          </a:solidFill>
-          <a:ln/>
-        </p:spPr>
-      </p:sp>
-      <p:sp>
-        <p:nvSpPr>
-          <p:cNvPr id="14" name="Text 12"/>
-          <p:cNvSpPr/>
-          <p:nvPr/>
-        </p:nvSpPr>
-        <p:spPr>
-          <a:xfrm>
-            <a:off x="1097280" y="5495544"/>
-            <a:ext cx="10607040" cy="813816"/>
-          </a:xfrm>
-          <a:prstGeom prst="rect">
-            <a:avLst/>
-          </a:prstGeom>
-          <a:noFill/>
-          <a:ln/>
-        </p:spPr>
-        <p:txBody>
-          <a:bodyPr wrap="square" rtlCol="0" anchor="t">
-            <a:spAutoFit/>
-          </a:bodyPr>
-          <a:lstStyle/>
-          <a:p>
-            <a:pPr indent="0" marL="0">
-              <a:lnSpc>
-                <a:spcPct val="112000"/>
-              </a:lnSpc>
-              <a:buNone/>
-            </a:pPr>
-            <a:r>
-              <a:rPr lang="en-US" sz="1500" dirty="0">
-                <a:solidFill>
-                  <a:srgbClr val="1A1A1A"/>
-                </a:solidFill>
-                <a:latin typeface="Calibri" pitchFamily="34" charset="0"/>
-                <a:ea typeface="Calibri" pitchFamily="34" charset="-122"/>
-                <a:cs typeface="Calibri" pitchFamily="34" charset="-120"/>
-              </a:rPr>
-              <a:t>An AI portrait sold at Christie's for $432,500; the training data was other people's paintings (2018). Every one of these is a count, and every one has arguable choices. Both halves are the course.</a:t>
-            </a:r>
-            <a:endParaRPr lang="en-US" sz="1500" dirty="0"/>
+              <a:t>The whole method in one sentence: it is all counting and weighting, and you can learn to read both.</a:t>
+            </a:r>
+            <a:endParaRPr lang="en-US" sz="1650" dirty="0"/>
           </a:p>
         </p:txBody>
       </p:sp>
@@ -8341,7 +8818,7 @@
                 <a:ea typeface="Cambria" pitchFamily="34" charset="-122"/>
                 <a:cs typeface="Cambria" pitchFamily="34" charset="-120"/>
               </a:rPr>
-              <a:t>Four words, used all term</a:t>
+              <a:t>What counting culture has found</a:t>
             </a:r>
             <a:endParaRPr lang="en-US" sz="3000" dirty="0"/>
           </a:p>
@@ -8376,7 +8853,7 @@
         <p:spPr>
           <a:xfrm>
             <a:off x="1097280" y="2240280"/>
-            <a:ext cx="10607040" cy="1017270"/>
+            <a:ext cx="10607040" cy="813816"/>
           </a:xfrm>
           <a:prstGeom prst="rect">
             <a:avLst/>
@@ -8397,7 +8874,7 @@
               <a:buNone/>
             </a:pPr>
             <a:r>
-              <a:rPr lang="en-US" sz="1650" dirty="0">
+              <a:rPr lang="en-US" sz="1500" dirty="0">
                 <a:solidFill>
                   <a:srgbClr val="1A1A1A"/>
                 </a:solidFill>
@@ -8405,9 +8882,9 @@
                 <a:ea typeface="Calibri" pitchFamily="34" charset="-122"/>
                 <a:cs typeface="Calibri" pitchFamily="34" charset="-120"/>
               </a:rPr>
-              <a:t>Corpus: the pile you study. 500 announcements, 2,000 screenplays, 10,000 album covers.</a:t>
-            </a:r>
-            <a:endParaRPr lang="en-US" sz="1650" dirty="0"/>
+              <a:t>In the stage directions of 2,000 film scripts: women snuggle, giggle, and sob; men strap, gallop, and kill. 85% of the screenwriters were men (The Pudding, 2017).</a:t>
+            </a:r>
+            <a:endParaRPr lang="en-US" sz="1500" dirty="0"/>
           </a:p>
         </p:txBody>
       </p:sp>
@@ -8419,7 +8896,7 @@
         </p:nvSpPr>
         <p:spPr>
           <a:xfrm>
-            <a:off x="640080" y="3348990"/>
+            <a:off x="640080" y="3145536"/>
             <a:ext cx="201168" cy="201168"/>
           </a:xfrm>
           <a:prstGeom prst="ellipse">
@@ -8439,8 +8916,8 @@
         </p:nvSpPr>
         <p:spPr>
           <a:xfrm>
-            <a:off x="1097280" y="3257550"/>
-            <a:ext cx="10607040" cy="1017270"/>
+            <a:off x="1097280" y="3054096"/>
+            <a:ext cx="10607040" cy="813816"/>
           </a:xfrm>
           <a:prstGeom prst="rect">
             <a:avLst/>
@@ -8461,7 +8938,7 @@
               <a:buNone/>
             </a:pPr>
             <a:r>
-              <a:rPr lang="en-US" sz="1650" dirty="0">
+              <a:rPr lang="en-US" sz="1500" dirty="0">
                 <a:solidFill>
                   <a:srgbClr val="1A1A1A"/>
                 </a:solidFill>
@@ -8469,9 +8946,9 @@
                 <a:ea typeface="Calibri" pitchFamily="34" charset="-122"/>
                 <a:cs typeface="Calibri" pitchFamily="34" charset="-120"/>
               </a:rPr>
-              <a:t>Method: the counting or weighting you run on the corpus.</a:t>
-            </a:r>
-            <a:endParaRPr lang="en-US" sz="1650" dirty="0"/>
+              <a:t>Across 17,000 Hot 100 songs, the biggest revolution in American pop was not the Beatles in 1964; it was hip-hop in 1991 (Mauch et al., 2015).</a:t>
+            </a:r>
+            <a:endParaRPr lang="en-US" sz="1500" dirty="0"/>
           </a:p>
         </p:txBody>
       </p:sp>
@@ -8483,7 +8960,7 @@
         </p:nvSpPr>
         <p:spPr>
           <a:xfrm>
-            <a:off x="640080" y="4366260"/>
+            <a:off x="640080" y="3959352"/>
             <a:ext cx="201168" cy="201168"/>
           </a:xfrm>
           <a:prstGeom prst="ellipse">
@@ -8503,8 +8980,8 @@
         </p:nvSpPr>
         <p:spPr>
           <a:xfrm>
-            <a:off x="1097280" y="4274820"/>
-            <a:ext cx="10607040" cy="1017270"/>
+            <a:off x="1097280" y="3867912"/>
+            <a:ext cx="10607040" cy="813816"/>
           </a:xfrm>
           <a:prstGeom prst="rect">
             <a:avLst/>
@@ -8525,7 +9002,7 @@
               <a:buNone/>
             </a:pPr>
             <a:r>
-              <a:rPr lang="en-US" sz="1650" dirty="0">
+              <a:rPr lang="en-US" sz="1500" dirty="0">
                 <a:solidFill>
                   <a:srgbClr val="1A1A1A"/>
                 </a:solidFill>
@@ -8533,9 +9010,9 @@
                 <a:ea typeface="Calibri" pitchFamily="34" charset="-122"/>
                 <a:cs typeface="Calibri" pitchFamily="34" charset="-120"/>
               </a:rPr>
-              <a:t>Model: any simplification that turns culture into numbers. A word count is already one.</a:t>
-            </a:r>
-            <a:endParaRPr lang="en-US" sz="1650" dirty="0"/>
+              <a:t>Counting small words like 'the' and 'of' unmasked Robert Galbraith as J.K. Rowling within days (Juola, 2013).</a:t>
+            </a:r>
+            <a:endParaRPr lang="en-US" sz="1500" dirty="0"/>
           </a:p>
         </p:txBody>
       </p:sp>
@@ -8547,7 +9024,7 @@
         </p:nvSpPr>
         <p:spPr>
           <a:xfrm>
-            <a:off x="640080" y="5383530"/>
+            <a:off x="640080" y="4773168"/>
             <a:ext cx="201168" cy="201168"/>
           </a:xfrm>
           <a:prstGeom prst="ellipse">
@@ -8567,8 +9044,8 @@
         </p:nvSpPr>
         <p:spPr>
           <a:xfrm>
-            <a:off x="1097280" y="5292090"/>
-            <a:ext cx="10607040" cy="1017270"/>
+            <a:off x="1097280" y="4681728"/>
+            <a:ext cx="10607040" cy="813816"/>
           </a:xfrm>
           <a:prstGeom prst="rect">
             <a:avLst/>
@@ -8589,7 +9066,7 @@
               <a:buNone/>
             </a:pPr>
             <a:r>
-              <a:rPr lang="en-US" sz="1650" dirty="0">
+              <a:rPr lang="en-US" sz="1500" dirty="0">
                 <a:solidFill>
                   <a:srgbClr val="1A1A1A"/>
                 </a:solidFill>
@@ -8597,9 +9074,73 @@
                 <a:ea typeface="Calibri" pitchFamily="34" charset="-122"/>
                 <a:cs typeface="Calibri" pitchFamily="34" charset="-120"/>
               </a:rPr>
-              <a:t>Embedding: a few hundred numbers that place an item on a map of meaning. Week 5.</a:t>
-            </a:r>
-            <a:endParaRPr lang="en-US" sz="1650" dirty="0"/>
+              <a:t>A model trained on Google News completes 'man is to computer programmer as woman is to...' with 'homemaker' (Bolukbasi et al., 2016).</a:t>
+            </a:r>
+            <a:endParaRPr lang="en-US" sz="1500" dirty="0"/>
+          </a:p>
+        </p:txBody>
+      </p:sp>
+      <p:sp>
+        <p:nvSpPr>
+          <p:cNvPr id="13" name="Shape 11"/>
+          <p:cNvSpPr/>
+          <p:nvPr/>
+        </p:nvSpPr>
+        <p:spPr>
+          <a:xfrm>
+            <a:off x="640080" y="5586984"/>
+            <a:ext cx="201168" cy="201168"/>
+          </a:xfrm>
+          <a:prstGeom prst="ellipse">
+            <a:avLst/>
+          </a:prstGeom>
+          <a:solidFill>
+            <a:srgbClr val="3F6F5F"/>
+          </a:solidFill>
+          <a:ln/>
+        </p:spPr>
+      </p:sp>
+      <p:sp>
+        <p:nvSpPr>
+          <p:cNvPr id="14" name="Text 12"/>
+          <p:cNvSpPr/>
+          <p:nvPr/>
+        </p:nvSpPr>
+        <p:spPr>
+          <a:xfrm>
+            <a:off x="1097280" y="5495544"/>
+            <a:ext cx="10607040" cy="813816"/>
+          </a:xfrm>
+          <a:prstGeom prst="rect">
+            <a:avLst/>
+          </a:prstGeom>
+          <a:noFill/>
+          <a:ln/>
+        </p:spPr>
+        <p:txBody>
+          <a:bodyPr wrap="square" rtlCol="0" anchor="t">
+            <a:spAutoFit/>
+          </a:bodyPr>
+          <a:lstStyle/>
+          <a:p>
+            <a:pPr indent="0" marL="0">
+              <a:lnSpc>
+                <a:spcPct val="112000"/>
+              </a:lnSpc>
+              <a:buNone/>
+            </a:pPr>
+            <a:r>
+              <a:rPr lang="en-US" sz="1500" dirty="0">
+                <a:solidFill>
+                  <a:srgbClr val="1A1A1A"/>
+                </a:solidFill>
+                <a:latin typeface="Calibri" pitchFamily="34" charset="0"/>
+                <a:ea typeface="Calibri" pitchFamily="34" charset="-122"/>
+                <a:cs typeface="Calibri" pitchFamily="34" charset="-120"/>
+              </a:rPr>
+              <a:t>An AI portrait sold at Christie's for $432,500; the training data was other people's paintings (2018). Every one of these is a count, and every one has arguable choices. Both halves are the course.</a:t>
+            </a:r>
+            <a:endParaRPr lang="en-US" sz="1500" dirty="0"/>
           </a:p>
         </p:txBody>
       </p:sp>
@@ -8729,7 +9270,7 @@
                 <a:ea typeface="Cambria" pitchFamily="34" charset="-122"/>
                 <a:cs typeface="Cambria" pitchFamily="34" charset="-120"/>
               </a:rPr>
-              <a:t>What is data? A CSV, and Drucker's caveat</a:t>
+              <a:t>Four words, used all term</a:t>
             </a:r>
             <a:endParaRPr lang="en-US" sz="3000" dirty="0"/>
           </a:p>
@@ -8764,7 +9305,7 @@
         <p:spPr>
           <a:xfrm>
             <a:off x="1097280" y="2240280"/>
-            <a:ext cx="10607040" cy="813816"/>
+            <a:ext cx="10607040" cy="1017270"/>
           </a:xfrm>
           <a:prstGeom prst="rect">
             <a:avLst/>
@@ -8785,7 +9326,7 @@
               <a:buNone/>
             </a:pPr>
             <a:r>
-              <a:rPr lang="en-US" sz="1500" dirty="0">
+              <a:rPr lang="en-US" sz="1650" dirty="0">
                 <a:solidFill>
                   <a:srgbClr val="1A1A1A"/>
                 </a:solidFill>
@@ -8793,9 +9334,9 @@
                 <a:ea typeface="Calibri" pitchFamily="34" charset="-122"/>
                 <a:cs typeface="Calibri" pitchFamily="34" charset="-120"/>
               </a:rPr>
-              <a:t>Data is anything made countable: rows in a table, words in a headline, numbers in a pixel. The making is the part to watch.</a:t>
-            </a:r>
-            <a:endParaRPr lang="en-US" sz="1500" dirty="0"/>
+              <a:t>Corpus: the pile you study. 500 announcements, 2,000 screenplays, 10,000 album covers.</a:t>
+            </a:r>
+            <a:endParaRPr lang="en-US" sz="1650" dirty="0"/>
           </a:p>
         </p:txBody>
       </p:sp>
@@ -8807,7 +9348,7 @@
         </p:nvSpPr>
         <p:spPr>
           <a:xfrm>
-            <a:off x="640080" y="3145536"/>
+            <a:off x="640080" y="3348990"/>
             <a:ext cx="201168" cy="201168"/>
           </a:xfrm>
           <a:prstGeom prst="ellipse">
@@ -8827,8 +9368,8 @@
         </p:nvSpPr>
         <p:spPr>
           <a:xfrm>
-            <a:off x="1097280" y="3054096"/>
-            <a:ext cx="10607040" cy="813816"/>
+            <a:off x="1097280" y="3257550"/>
+            <a:ext cx="10607040" cy="1017270"/>
           </a:xfrm>
           <a:prstGeom prst="rect">
             <a:avLst/>
@@ -8849,7 +9390,7 @@
               <a:buNone/>
             </a:pPr>
             <a:r>
-              <a:rPr lang="en-US" sz="1500" dirty="0">
+              <a:rPr lang="en-US" sz="1650" dirty="0">
                 <a:solidFill>
                   <a:srgbClr val="1A1A1A"/>
                 </a:solidFill>
@@ -8857,9 +9398,9 @@
                 <a:ea typeface="Calibri" pitchFamily="34" charset="-122"/>
                 <a:cs typeface="Calibri" pitchFamily="34" charset="-120"/>
               </a:rPr>
-              <a:t>A CSV is the plainest container: one row per observation, one column per recorded fact, a first line naming the columns. Ours has four columns and 7,835 rows, and opens in anything.</a:t>
-            </a:r>
-            <a:endParaRPr lang="en-US" sz="1500" dirty="0"/>
+              <a:t>Method: the counting or weighting you run on the corpus.</a:t>
+            </a:r>
+            <a:endParaRPr lang="en-US" sz="1650" dirty="0"/>
           </a:p>
         </p:txBody>
       </p:sp>
@@ -8871,7 +9412,7 @@
         </p:nvSpPr>
         <p:spPr>
           <a:xfrm>
-            <a:off x="640080" y="3959352"/>
+            <a:off x="640080" y="4366260"/>
             <a:ext cx="201168" cy="201168"/>
           </a:xfrm>
           <a:prstGeom prst="ellipse">
@@ -8891,8 +9432,8 @@
         </p:nvSpPr>
         <p:spPr>
           <a:xfrm>
-            <a:off x="1097280" y="3867912"/>
-            <a:ext cx="10607040" cy="813816"/>
+            <a:off x="1097280" y="4274820"/>
+            <a:ext cx="10607040" cy="1017270"/>
           </a:xfrm>
           <a:prstGeom prst="rect">
             <a:avLst/>
@@ -8913,7 +9454,7 @@
               <a:buNone/>
             </a:pPr>
             <a:r>
-              <a:rPr lang="en-US" sz="1500" dirty="0">
+              <a:rPr lang="en-US" sz="1650" dirty="0">
                 <a:solidFill>
                   <a:srgbClr val="1A1A1A"/>
                 </a:solidFill>
@@ -8921,9 +9462,9 @@
                 <a:ea typeface="Calibri" pitchFamily="34" charset="-122"/>
                 <a:cs typeface="Calibri" pitchFamily="34" charset="-120"/>
               </a:rPr>
-              <a:t>Johanna Drucker's correction: data ("the given") is the wrong word; capta ("the taken") is honest. Nothing is simply given - someone chose what to record.</a:t>
-            </a:r>
-            <a:endParaRPr lang="en-US" sz="1500" dirty="0"/>
+              <a:t>Model: any simplification that turns culture into numbers. A word count is already one.</a:t>
+            </a:r>
+            <a:endParaRPr lang="en-US" sz="1650" dirty="0"/>
           </a:p>
         </p:txBody>
       </p:sp>
@@ -8935,7 +9476,7 @@
         </p:nvSpPr>
         <p:spPr>
           <a:xfrm>
-            <a:off x="640080" y="4773168"/>
+            <a:off x="640080" y="5383530"/>
             <a:ext cx="201168" cy="201168"/>
           </a:xfrm>
           <a:prstGeom prst="ellipse">
@@ -8955,8 +9496,8 @@
         </p:nvSpPr>
         <p:spPr>
           <a:xfrm>
-            <a:off x="1097280" y="4681728"/>
-            <a:ext cx="10607040" cy="813816"/>
+            <a:off x="1097280" y="5292090"/>
+            <a:ext cx="10607040" cy="1017270"/>
           </a:xfrm>
           <a:prstGeom prst="rect">
             <a:avLst/>
@@ -8977,7 +9518,7 @@
               <a:buNone/>
             </a:pPr>
             <a:r>
-              <a:rPr lang="en-US" sz="1500" dirty="0">
+              <a:rPr lang="en-US" sz="1650" dirty="0">
                 <a:solidFill>
                   <a:srgbClr val="1A1A1A"/>
                 </a:solidFill>
@@ -8985,73 +9526,9 @@
                 <a:ea typeface="Calibri" pitchFamily="34" charset="-122"/>
                 <a:cs typeface="Calibri" pitchFamily="34" charset="-120"/>
               </a:rPr>
-              <a:t>The four columns are those choices. There is a name status for the bride and none for the groom; ages but no occupations; no field a same-sex couple could use for most of the period.</a:t>
-            </a:r>
-            <a:endParaRPr lang="en-US" sz="1500" dirty="0"/>
-          </a:p>
-        </p:txBody>
-      </p:sp>
-      <p:sp>
-        <p:nvSpPr>
-          <p:cNvPr id="13" name="Shape 11"/>
-          <p:cNvSpPr/>
-          <p:nvPr/>
-        </p:nvSpPr>
-        <p:spPr>
-          <a:xfrm>
-            <a:off x="640080" y="5586984"/>
-            <a:ext cx="201168" cy="201168"/>
-          </a:xfrm>
-          <a:prstGeom prst="ellipse">
-            <a:avLst/>
-          </a:prstGeom>
-          <a:solidFill>
-            <a:srgbClr val="3F6F5F"/>
-          </a:solidFill>
-          <a:ln/>
-        </p:spPr>
-      </p:sp>
-      <p:sp>
-        <p:nvSpPr>
-          <p:cNvPr id="14" name="Text 12"/>
-          <p:cNvSpPr/>
-          <p:nvPr/>
-        </p:nvSpPr>
-        <p:spPr>
-          <a:xfrm>
-            <a:off x="1097280" y="5495544"/>
-            <a:ext cx="10607040" cy="813816"/>
-          </a:xfrm>
-          <a:prstGeom prst="rect">
-            <a:avLst/>
-          </a:prstGeom>
-          <a:noFill/>
-          <a:ln/>
-        </p:spPr>
-        <p:txBody>
-          <a:bodyPr wrap="square" rtlCol="0" anchor="t">
-            <a:spAutoFit/>
-          </a:bodyPr>
-          <a:lstStyle/>
-          <a:p>
-            <a:pPr indent="0" marL="0">
-              <a:lnSpc>
-                <a:spcPct val="112000"/>
-              </a:lnSpc>
-              <a:buNone/>
-            </a:pPr>
-            <a:r>
-              <a:rPr lang="en-US" sz="1500" dirty="0">
-                <a:solidFill>
-                  <a:srgbClr val="1A1A1A"/>
-                </a:solidFill>
-                <a:latin typeface="Calibri" pitchFamily="34" charset="0"/>
-                <a:ea typeface="Calibri" pitchFamily="34" charset="-122"/>
-                <a:cs typeface="Calibri" pitchFamily="34" charset="-120"/>
-              </a:rPr>
-              <a:t>Discussion, in pairs: what did the makers of this table take, and what did they leave? That question is the course, asked of every corpus from now on.</a:t>
-            </a:r>
-            <a:endParaRPr lang="en-US" sz="1500" dirty="0"/>
+              <a:t>Embedding: a few hundred numbers that place an item on a map of meaning. Week 5.</a:t>
+            </a:r>
+            <a:endParaRPr lang="en-US" sz="1650" dirty="0"/>
           </a:p>
         </p:txBody>
       </p:sp>
@@ -9181,7 +9658,7 @@
                 <a:ea typeface="Cambria" pitchFamily="34" charset="-122"/>
                 <a:cs typeface="Cambria" pitchFamily="34" charset="-120"/>
               </a:rPr>
-              <a:t>The Drive routine (every week, without exception)</a:t>
+              <a:t>What is data? A CSV, and Drucker's caveat</a:t>
             </a:r>
             <a:endParaRPr lang="en-US" sz="3000" dirty="0"/>
           </a:p>
@@ -9216,7 +9693,7 @@
         <p:spPr>
           <a:xfrm>
             <a:off x="1097280" y="2240280"/>
-            <a:ext cx="10607040" cy="1017270"/>
+            <a:ext cx="10607040" cy="813816"/>
           </a:xfrm>
           <a:prstGeom prst="rect">
             <a:avLst/>
@@ -9237,7 +9714,7 @@
               <a:buNone/>
             </a:pPr>
             <a:r>
-              <a:rPr lang="en-US" sz="1650" dirty="0">
+              <a:rPr lang="en-US" sz="1500" dirty="0">
                 <a:solidFill>
                   <a:srgbClr val="1A1A1A"/>
                 </a:solidFill>
@@ -9245,9 +9722,9 @@
                 <a:ea typeface="Calibri" pitchFamily="34" charset="-122"/>
                 <a:cs typeface="Calibri" pitchFamily="34" charset="-120"/>
               </a:rPr>
-              <a:t>Colab wipes its machine when you idle. Your mounted Drive folder is what survives.</a:t>
-            </a:r>
-            <a:endParaRPr lang="en-US" sz="1650" dirty="0"/>
+              <a:t>Data is anything made countable: rows in a table, words in a headline, numbers in a pixel. The making is the part to watch.</a:t>
+            </a:r>
+            <a:endParaRPr lang="en-US" sz="1500" dirty="0"/>
           </a:p>
         </p:txBody>
       </p:sp>
@@ -9259,7 +9736,7 @@
         </p:nvSpPr>
         <p:spPr>
           <a:xfrm>
-            <a:off x="640080" y="3348990"/>
+            <a:off x="640080" y="3145536"/>
             <a:ext cx="201168" cy="201168"/>
           </a:xfrm>
           <a:prstGeom prst="ellipse">
@@ -9279,8 +9756,8 @@
         </p:nvSpPr>
         <p:spPr>
           <a:xfrm>
-            <a:off x="1097280" y="3257550"/>
-            <a:ext cx="10607040" cy="1017270"/>
+            <a:off x="1097280" y="3054096"/>
+            <a:ext cx="10607040" cy="813816"/>
           </a:xfrm>
           <a:prstGeom prst="rect">
             <a:avLst/>
@@ -9301,7 +9778,7 @@
               <a:buNone/>
             </a:pPr>
             <a:r>
-              <a:rPr lang="en-US" sz="1650" dirty="0">
+              <a:rPr lang="en-US" sz="1500" dirty="0">
                 <a:solidFill>
                   <a:srgbClr val="1A1A1A"/>
                 </a:solidFill>
@@ -9309,9 +9786,9 @@
                 <a:ea typeface="Calibri" pitchFamily="34" charset="-122"/>
                 <a:cs typeface="Calibri" pitchFamily="34" charset="-120"/>
               </a:rPr>
-              <a:t>Copy the notebook to Drive, mount Drive, save everything to the one project folder.</a:t>
-            </a:r>
-            <a:endParaRPr lang="en-US" sz="1650" dirty="0"/>
+              <a:t>A CSV is the plainest container: one row per observation, one column per recorded fact, a first line naming the columns. Ours has four columns and 7,835 rows, and opens in anything.</a:t>
+            </a:r>
+            <a:endParaRPr lang="en-US" sz="1500" dirty="0"/>
           </a:p>
         </p:txBody>
       </p:sp>
@@ -9323,7 +9800,7 @@
         </p:nvSpPr>
         <p:spPr>
           <a:xfrm>
-            <a:off x="640080" y="4366260"/>
+            <a:off x="640080" y="3959352"/>
             <a:ext cx="201168" cy="201168"/>
           </a:xfrm>
           <a:prstGeom prst="ellipse">
@@ -9343,8 +9820,8 @@
         </p:nvSpPr>
         <p:spPr>
           <a:xfrm>
-            <a:off x="1097280" y="4274820"/>
-            <a:ext cx="10607040" cy="1017270"/>
+            <a:off x="1097280" y="3867912"/>
+            <a:ext cx="10607040" cy="813816"/>
           </a:xfrm>
           <a:prstGeom prst="rect">
             <a:avLst/>
@@ -9365,7 +9842,7 @@
               <a:buNone/>
             </a:pPr>
             <a:r>
-              <a:rPr lang="en-US" sz="1650" dirty="0">
+              <a:rPr lang="en-US" sz="1500" dirty="0">
                 <a:solidFill>
                   <a:srgbClr val="1A1A1A"/>
                 </a:solidFill>
@@ -9373,9 +9850,9 @@
                 <a:ea typeface="Calibri" pitchFamily="34" charset="-122"/>
                 <a:cs typeface="Calibri" pitchFamily="34" charset="-120"/>
               </a:rPr>
-              <a:t>Your Week-4 corpus has to be alive in Week 5. This ritual is how.</a:t>
-            </a:r>
-            <a:endParaRPr lang="en-US" sz="1650" dirty="0"/>
+              <a:t>Johanna Drucker's correction: data ("the given") is the wrong word; capta ("the taken") is honest. Nothing is simply given - someone chose what to record.</a:t>
+            </a:r>
+            <a:endParaRPr lang="en-US" sz="1500" dirty="0"/>
           </a:p>
         </p:txBody>
       </p:sp>
@@ -9387,7 +9864,7 @@
         </p:nvSpPr>
         <p:spPr>
           <a:xfrm>
-            <a:off x="640080" y="5383530"/>
+            <a:off x="640080" y="4773168"/>
             <a:ext cx="201168" cy="201168"/>
           </a:xfrm>
           <a:prstGeom prst="ellipse">
@@ -9407,8 +9884,8 @@
         </p:nvSpPr>
         <p:spPr>
           <a:xfrm>
-            <a:off x="1097280" y="5292090"/>
-            <a:ext cx="10607040" cy="1017270"/>
+            <a:off x="1097280" y="4681728"/>
+            <a:ext cx="10607040" cy="813816"/>
           </a:xfrm>
           <a:prstGeom prst="rect">
             <a:avLst/>
@@ -9429,7 +9906,7 @@
               <a:buNone/>
             </a:pPr>
             <a:r>
-              <a:rPr lang="en-US" sz="1650" dirty="0">
+              <a:rPr lang="en-US" sz="1500" dirty="0">
                 <a:solidFill>
                   <a:srgbClr val="1A1A1A"/>
                 </a:solidFill>
@@ -9437,9 +9914,73 @@
                 <a:ea typeface="Calibri" pitchFamily="34" charset="-122"/>
                 <a:cs typeface="Calibri" pitchFamily="34" charset="-120"/>
               </a:rPr>
-              <a:t>Gemini key goes in Colab Secrets. Never pasted into code.</a:t>
-            </a:r>
-            <a:endParaRPr lang="en-US" sz="1650" dirty="0"/>
+              <a:t>The four columns are those choices. There is a name status for the bride and none for the groom; ages but no occupations; no field a same-sex couple could use for most of the period.</a:t>
+            </a:r>
+            <a:endParaRPr lang="en-US" sz="1500" dirty="0"/>
+          </a:p>
+        </p:txBody>
+      </p:sp>
+      <p:sp>
+        <p:nvSpPr>
+          <p:cNvPr id="13" name="Shape 11"/>
+          <p:cNvSpPr/>
+          <p:nvPr/>
+        </p:nvSpPr>
+        <p:spPr>
+          <a:xfrm>
+            <a:off x="640080" y="5586984"/>
+            <a:ext cx="201168" cy="201168"/>
+          </a:xfrm>
+          <a:prstGeom prst="ellipse">
+            <a:avLst/>
+          </a:prstGeom>
+          <a:solidFill>
+            <a:srgbClr val="3F6F5F"/>
+          </a:solidFill>
+          <a:ln/>
+        </p:spPr>
+      </p:sp>
+      <p:sp>
+        <p:nvSpPr>
+          <p:cNvPr id="14" name="Text 12"/>
+          <p:cNvSpPr/>
+          <p:nvPr/>
+        </p:nvSpPr>
+        <p:spPr>
+          <a:xfrm>
+            <a:off x="1097280" y="5495544"/>
+            <a:ext cx="10607040" cy="813816"/>
+          </a:xfrm>
+          <a:prstGeom prst="rect">
+            <a:avLst/>
+          </a:prstGeom>
+          <a:noFill/>
+          <a:ln/>
+        </p:spPr>
+        <p:txBody>
+          <a:bodyPr wrap="square" rtlCol="0" anchor="t">
+            <a:spAutoFit/>
+          </a:bodyPr>
+          <a:lstStyle/>
+          <a:p>
+            <a:pPr indent="0" marL="0">
+              <a:lnSpc>
+                <a:spcPct val="112000"/>
+              </a:lnSpc>
+              <a:buNone/>
+            </a:pPr>
+            <a:r>
+              <a:rPr lang="en-US" sz="1500" dirty="0">
+                <a:solidFill>
+                  <a:srgbClr val="1A1A1A"/>
+                </a:solidFill>
+                <a:latin typeface="Calibri" pitchFamily="34" charset="0"/>
+                <a:ea typeface="Calibri" pitchFamily="34" charset="-122"/>
+                <a:cs typeface="Calibri" pitchFamily="34" charset="-120"/>
+              </a:rPr>
+              <a:t>Discussion, in pairs: what did the makers of this table take, and what did they leave? That question is the course, asked of every corpus from now on.</a:t>
+            </a:r>
+            <a:endParaRPr lang="en-US" sz="1500" dirty="0"/>
           </a:p>
         </p:txBody>
       </p:sp>
@@ -9569,7 +10110,7 @@
                 <a:ea typeface="Cambria" pitchFamily="34" charset="-122"/>
                 <a:cs typeface="Cambria" pitchFamily="34" charset="-120"/>
               </a:rPr>
-              <a:t>When code fails (it will, today, deliberately)</a:t>
+              <a:t>The Drive routine (every week, without exception)</a:t>
             </a:r>
             <a:endParaRPr lang="en-US" sz="3000" dirty="0"/>
           </a:p>
@@ -9633,7 +10174,7 @@
                 <a:ea typeface="Calibri" pitchFamily="34" charset="-122"/>
                 <a:cs typeface="Calibri" pitchFamily="34" charset="-120"/>
               </a:rPr>
-              <a:t>Read the last line of the traceback first. It names the problem.</a:t>
+              <a:t>Colab wipes its machine when you idle. Your mounted Drive folder is what survives.</a:t>
             </a:r>
             <a:endParaRPr lang="en-US" sz="1650" dirty="0"/>
           </a:p>
@@ -9697,7 +10238,7 @@
                 <a:ea typeface="Calibri" pitchFamily="34" charset="-122"/>
                 <a:cs typeface="Calibri" pitchFamily="34" charset="-120"/>
               </a:rPr>
-              <a:t>Paste it to the AI: "this errored, fix it and tell me what went wrong."</a:t>
+              <a:t>Copy the notebook to Drive, mount Drive, save everything to the one project folder.</a:t>
             </a:r>
             <a:endParaRPr lang="en-US" sz="1650" dirty="0"/>
           </a:p>
@@ -9761,7 +10302,7 @@
                 <a:ea typeface="Calibri" pitchFamily="34" charset="-122"/>
                 <a:cs typeface="Calibri" pitchFamily="34" charset="-120"/>
               </a:rPr>
-              <a:t>Try twice, then ask a human. In that order.</a:t>
+              <a:t>Your Week-4 corpus has to be alive in Week 5. This ritual is how.</a:t>
             </a:r>
             <a:endParaRPr lang="en-US" sz="1650" dirty="0"/>
           </a:p>
@@ -9825,7 +10366,7 @@
                 <a:ea typeface="Calibri" pitchFamily="34" charset="-122"/>
                 <a:cs typeface="Calibri" pitchFamily="34" charset="-120"/>
               </a:rPr>
-              <a:t>Keep the cheat sheet at hand. No one memorizes error messages; everyone reads them.</a:t>
+              <a:t>Gemini key goes in Colab Secrets. Never pasted into code.</a:t>
             </a:r>
             <a:endParaRPr lang="en-US" sz="1650" dirty="0"/>
           </a:p>

--- a/slides/pptx/week-01.pptx
+++ b/slides/pptx/week-01.pptx
@@ -23,9 +23,10 @@
     <p:sldId id="271" r:id="rId17"/>
     <p:sldId id="272" r:id="rId18"/>
     <p:sldId id="273" r:id="rId19"/>
+    <p:sldId id="274" r:id="rId20"/>
   </p:sldIdLst>
   <p:notesMasterIdLst>
-    <p:notesMasterId r:id="rId20"/>
+    <p:notesMasterId r:id="rId21"/>
   </p:notesMasterIdLst>
   <p:sldSz cx="12191695" cy="6858000"/>
   <p:notesSz cx="6858000" cy="12191695"/>
@@ -1353,6 +1354,94 @@
 </p:notes>
 </file>
 
+<file path=ppt/notesSlides/notesSlide19.xml><?xml version="1.0" encoding="utf-8"?>
+<p:notes xmlns:a="http://schemas.openxmlformats.org/drawingml/2006/main" xmlns:r="http://schemas.openxmlformats.org/officeDocument/2006/relationships" xmlns:p="http://schemas.openxmlformats.org/presentationml/2006/main">
+  <p:cSld>
+    <p:spTree>
+      <p:nvGrpSpPr>
+        <p:cNvPr id="1" name=""/>
+        <p:cNvGrpSpPr/>
+        <p:nvPr/>
+      </p:nvGrpSpPr>
+      <p:grpSpPr>
+        <a:xfrm>
+          <a:off x="0" y="0"/>
+          <a:ext cx="0" cy="0"/>
+          <a:chOff x="0" y="0"/>
+          <a:chExt cx="0" cy="0"/>
+        </a:xfrm>
+      </p:grpSpPr>
+      <p:sp>
+        <p:nvSpPr>
+          <p:cNvPr id="2" name="Slide Image Placeholder 1"/>
+          <p:cNvSpPr>
+            <a:spLocks noGrp="1" noRot="1" noChangeAspect="1"/>
+          </p:cNvSpPr>
+          <p:nvPr>
+            <p:ph type="sldImg"/>
+          </p:nvPr>
+        </p:nvSpPr>
+        <p:spPr/>
+      </p:sp>
+      <p:sp>
+        <p:nvSpPr>
+          <p:cNvPr id="3" name="Notes Placeholder 2"/>
+          <p:cNvSpPr>
+            <a:spLocks noGrp="1"/>
+          </p:cNvSpPr>
+          <p:nvPr>
+            <p:ph type="body" idx="1"/>
+          </p:nvPr>
+        </p:nvSpPr>
+        <p:spPr/>
+        <p:txBody>
+          <a:bodyPr/>
+          <a:lstStyle/>
+          <a:p>
+            <a:r>
+              <a:rPr lang="en-US" dirty="0"/>
+              <a:t/>
+            </a:r>
+            <a:endParaRPr lang="en-US" dirty="0"/>
+          </a:p>
+        </p:txBody>
+      </p:sp>
+      <p:sp>
+        <p:nvSpPr>
+          <p:cNvPr id="4" name="Slide Number Placeholder 3"/>
+          <p:cNvSpPr>
+            <a:spLocks noGrp="1"/>
+          </p:cNvSpPr>
+          <p:nvPr>
+            <p:ph type="sldNum" sz="quarter" idx="10"/>
+          </p:nvPr>
+        </p:nvSpPr>
+        <p:spPr/>
+        <p:txBody>
+          <a:bodyPr/>
+          <a:lstStyle/>
+          <a:p>
+            <a:fld id="{F7021451-1387-4CA6-816F-3879F97B5CBC}" type="slidenum">
+              <a:rPr lang="en-US"/>
+              <a:t>19</a:t>
+            </a:fld>
+            <a:endParaRPr lang="en-US"/>
+          </a:p>
+        </p:txBody>
+      </p:sp>
+    </p:spTree>
+    <p:extLst>
+      <p:ext uri="{BB962C8B-B14F-4D97-AF65-F5344CB8AC3E}">
+        <p14:creationId xmlns:p14="http://schemas.microsoft.com/office/powerpoint/2010/main" val="1024086991"/>
+      </p:ext>
+    </p:extLst>
+  </p:cSld>
+  <p:clrMapOvr>
+    <a:masterClrMapping/>
+  </p:clrMapOvr>
+</p:notes>
+</file>
+
 <file path=ppt/notesSlides/notesSlide2.xml><?xml version="1.0" encoding="utf-8"?>
 <p:notes xmlns:a="http://schemas.openxmlformats.org/drawingml/2006/main" xmlns:r="http://schemas.openxmlformats.org/officeDocument/2006/relationships" xmlns:p="http://schemas.openxmlformats.org/presentationml/2006/main">
   <p:cSld>
@@ -3033,7 +3122,7 @@
                 <a:ea typeface="Cambria" pitchFamily="34" charset="-122"/>
                 <a:cs typeface="Cambria" pitchFamily="34" charset="-120"/>
               </a:rPr>
-              <a:t>When code fails (it will, today, deliberately)</a:t>
+              <a:t>The Drive routine (every week, without exception)</a:t>
             </a:r>
             <a:endParaRPr lang="en-US" sz="3000" dirty="0"/>
           </a:p>
@@ -3097,7 +3186,7 @@
                 <a:ea typeface="Calibri" pitchFamily="34" charset="-122"/>
                 <a:cs typeface="Calibri" pitchFamily="34" charset="-120"/>
               </a:rPr>
-              <a:t>Read the last line of the traceback first. It names the problem.</a:t>
+              <a:t>Colab wipes its machine when you idle. Your mounted Drive folder is what survives.</a:t>
             </a:r>
             <a:endParaRPr lang="en-US" sz="1650" dirty="0"/>
           </a:p>
@@ -3161,7 +3250,7 @@
                 <a:ea typeface="Calibri" pitchFamily="34" charset="-122"/>
                 <a:cs typeface="Calibri" pitchFamily="34" charset="-120"/>
               </a:rPr>
-              <a:t>Paste it to the AI: "this errored, fix it and tell me what went wrong."</a:t>
+              <a:t>Copy the notebook to Drive, mount Drive, save everything to the one project folder.</a:t>
             </a:r>
             <a:endParaRPr lang="en-US" sz="1650" dirty="0"/>
           </a:p>
@@ -3225,7 +3314,7 @@
                 <a:ea typeface="Calibri" pitchFamily="34" charset="-122"/>
                 <a:cs typeface="Calibri" pitchFamily="34" charset="-120"/>
               </a:rPr>
-              <a:t>Try twice, then ask a human. In that order.</a:t>
+              <a:t>Your Week-4 corpus has to be alive in Week 5. This ritual is how.</a:t>
             </a:r>
             <a:endParaRPr lang="en-US" sz="1650" dirty="0"/>
           </a:p>
@@ -3289,7 +3378,7 @@
                 <a:ea typeface="Calibri" pitchFamily="34" charset="-122"/>
                 <a:cs typeface="Calibri" pitchFamily="34" charset="-120"/>
               </a:rPr>
-              <a:t>Keep the cheat sheet at hand. No one memorizes error messages; everyone reads them.</a:t>
+              <a:t>Gemini key goes in Colab Secrets. Never pasted into code.</a:t>
             </a:r>
             <a:endParaRPr lang="en-US" sz="1650" dirty="0"/>
           </a:p>
@@ -3421,7 +3510,7 @@
                 <a:ea typeface="Cambria" pitchFamily="34" charset="-122"/>
                 <a:cs typeface="Cambria" pitchFamily="34" charset="-120"/>
               </a:rPr>
-              <a:t>The after-class half: defining a color, and what every bag loses</a:t>
+              <a:t>When code fails (it will, today, deliberately)</a:t>
             </a:r>
             <a:endParaRPr lang="en-US" sz="3000" dirty="0"/>
           </a:p>
@@ -3485,7 +3574,7 @@
                 <a:ea typeface="Calibri" pitchFamily="34" charset="-122"/>
                 <a:cs typeface="Calibri" pitchFamily="34" charset="-120"/>
               </a:rPr>
-              <a:t>What counts as red? A boundary you set on the hue wheel. Shift it twenty degrees and paintings change category without changing a pixel: defining the ranges is the analysis, the same decision as the stop-word list.</a:t>
+              <a:t>Read the last line of the traceback first. It names the problem.</a:t>
             </a:r>
             <a:endParaRPr lang="en-US" sz="1650" dirty="0"/>
           </a:p>
@@ -3549,7 +3638,7 @@
                 <a:ea typeface="Calibri" pitchFamily="34" charset="-122"/>
                 <a:cs typeface="Calibri" pitchFamily="34" charset="-120"/>
               </a:rPr>
-              <a:t>Two sentences with identical word-bags can mean opposite things: "the critics loved it, the public did not" and its reversal count the same. Order, negation, and who-did-what are the casualties.</a:t>
+              <a:t>Paste it to the AI: "this errored, fix it and tell me what went wrong."</a:t>
             </a:r>
             <a:endParaRPr lang="en-US" sz="1650" dirty="0"/>
           </a:p>
@@ -3613,7 +3702,7 @@
                 <a:ea typeface="Calibri" pitchFamily="34" charset="-122"/>
                 <a:cs typeface="Calibri" pitchFamily="34" charset="-120"/>
               </a:rPr>
-              <a:t>A painting and its shuffled pixels share the brightness, the average color, and the palette. Composition is to images what word order is to sentences.</a:t>
+              <a:t>Try twice, then ask a human. In that order.</a:t>
             </a:r>
             <a:endParaRPr lang="en-US" sz="1650" dirty="0"/>
           </a:p>
@@ -3677,7 +3766,7 @@
                 <a:ea typeface="Calibri" pitchFamily="34" charset="-122"/>
                 <a:cs typeface="Calibri" pitchFamily="34" charset="-120"/>
               </a:rPr>
-              <a:t>The loss is the trade counting makes for scale. Name it on day one; Week 5's embeddings exist to recover some of it.</a:t>
+              <a:t>Keep the cheat sheet at hand. No one memorizes error messages; everyone reads them.</a:t>
             </a:r>
             <a:endParaRPr lang="en-US" sz="1650" dirty="0"/>
           </a:p>
@@ -3809,7 +3898,7 @@
                 <a:ea typeface="Cambria" pitchFamily="34" charset="-122"/>
                 <a:cs typeface="Cambria" pitchFamily="34" charset="-120"/>
               </a:rPr>
-              <a:t>Deep-research tools: one role, four rules</a:t>
+              <a:t>The after-class half: defining a color, and what every bag loses</a:t>
             </a:r>
             <a:endParaRPr lang="en-US" sz="3000" dirty="0"/>
           </a:p>
@@ -3873,7 +3962,7 @@
                 <a:ea typeface="Calibri" pitchFamily="34" charset="-122"/>
                 <a:cs typeface="Calibri" pitchFamily="34" charset="-120"/>
               </a:rPr>
-              <a:t>AI deep-research tools browse for an hour and return a long, cited report. In this course they have exactly one role: the scout, finding datasets and prior work before Week 4's commitment.</a:t>
+              <a:t>What counts as red? A boundary you set on the hue wheel. Shift it twenty degrees and paintings change category without changing a pixel: defining the ranges is the analysis, the same decision as the stop-word list.</a:t>
             </a:r>
             <a:endParaRPr lang="en-US" sz="1500" dirty="0"/>
           </a:p>
@@ -3937,7 +4026,7 @@
                 <a:ea typeface="Calibri" pitchFamily="34" charset="-122"/>
                 <a:cs typeface="Calibri" pitchFamily="34" charset="-120"/>
               </a:rPr>
-              <a:t>Rule one: every citation is a lead, not a source. Reports cite real, wrong, and nonexistent works with identical confidence; nothing enters your work unread.</a:t>
+              <a:t>Two sentences with identical word-bags can mean opposite things: "the critics loved it, the public did not" and its reversal count the same.</a:t>
             </a:r>
             <a:endParaRPr lang="en-US" sz="1500" dirty="0"/>
           </a:p>
@@ -4001,7 +4090,7 @@
                 <a:ea typeface="Calibri" pitchFamily="34" charset="-122"/>
                 <a:cs typeface="Calibri" pitchFamily="34" charset="-120"/>
               </a:rPr>
-              <a:t>Rule two: verify dataset access yourself. "Publicly available" in a report means someone once said so; the corpus-existence proof (50 loadable rows, Week 3's sketch) is the standard.</a:t>
+              <a:t>The centerpiece: Sonnet 130's bag is a catalogue of praise - sun, coral, roses, snow, music, goddess. The poem negates every item ("my mistress' eyes are nothing like the sun"). The count reads a love poem; Shakespeare wrote a satire of love poems.</a:t>
             </a:r>
             <a:endParaRPr lang="en-US" sz="1500" dirty="0"/>
           </a:p>
@@ -4065,7 +4154,7 @@
                 <a:ea typeface="Calibri" pitchFamily="34" charset="-122"/>
                 <a:cs typeface="Calibri" pitchFamily="34" charset="-120"/>
               </a:rPr>
-              <a:t>Rule three: the report is never a source. Cite what you read, not the tool that found it.</a:t>
+              <a:t>A painting and its shuffled pixels share the brightness, the average color, and the palette. Composition is to images what order and negation are to sentences.</a:t>
             </a:r>
             <a:endParaRPr lang="en-US" sz="1500" dirty="0"/>
           </a:p>
@@ -4129,7 +4218,7 @@
                 <a:ea typeface="Calibri" pitchFamily="34" charset="-122"/>
                 <a:cs typeface="Calibri" pitchFamily="34" charset="-120"/>
               </a:rPr>
-              <a:t>Rule four: scout, then close the tool. Your question, your reading, and your interpretation cannot be delegated - the same boundary as with code.</a:t>
+              <a:t>The loss is the trade counting makes for scale. Name it on day one; Week 5's embeddings exist to recover some of it.</a:t>
             </a:r>
             <a:endParaRPr lang="en-US" sz="1500" dirty="0"/>
           </a:p>
@@ -4261,7 +4350,7 @@
                 <a:ea typeface="Cambria" pitchFamily="34" charset="-122"/>
                 <a:cs typeface="Cambria" pitchFamily="34" charset="-120"/>
               </a:rPr>
-              <a:t>Counting, three shapes</a:t>
+              <a:t>Deep-research tools: one role, four rules</a:t>
             </a:r>
             <a:endParaRPr lang="en-US" sz="3000" dirty="0"/>
           </a:p>
@@ -4296,7 +4385,7 @@
         <p:spPr>
           <a:xfrm>
             <a:off x="1097280" y="2240280"/>
-            <a:ext cx="10607040" cy="1017270"/>
+            <a:ext cx="10607040" cy="813816"/>
           </a:xfrm>
           <a:prstGeom prst="rect">
             <a:avLst/>
@@ -4317,7 +4406,7 @@
               <a:buNone/>
             </a:pPr>
             <a:r>
-              <a:rPr lang="en-US" sz="1650" dirty="0">
+              <a:rPr lang="en-US" sz="1500" dirty="0">
                 <a:solidFill>
                   <a:srgbClr val="1A1A1A"/>
                 </a:solidFill>
@@ -4325,9 +4414,9 @@
                 <a:ea typeface="Calibri" pitchFamily="34" charset="-122"/>
                 <a:cs typeface="Calibri" pitchFamily="34" charset="-120"/>
               </a:rPr>
-              <a:t>Rows: what share of brides kept their name, year by year. One groupby, one chart.</a:t>
-            </a:r>
-            <a:endParaRPr lang="en-US" sz="1650" dirty="0"/>
+              <a:t>AI deep-research tools browse for an hour and return a long, cited report. In this course they have exactly one role: the scout, finding datasets and prior work before Week 4's commitment.</a:t>
+            </a:r>
+            <a:endParaRPr lang="en-US" sz="1500" dirty="0"/>
           </a:p>
         </p:txBody>
       </p:sp>
@@ -4339,7 +4428,7 @@
         </p:nvSpPr>
         <p:spPr>
           <a:xfrm>
-            <a:off x="640080" y="3348990"/>
+            <a:off x="640080" y="3145536"/>
             <a:ext cx="201168" cy="201168"/>
           </a:xfrm>
           <a:prstGeom prst="ellipse">
@@ -4359,8 +4448,8 @@
         </p:nvSpPr>
         <p:spPr>
           <a:xfrm>
-            <a:off x="1097280" y="3257550"/>
-            <a:ext cx="10607040" cy="1017270"/>
+            <a:off x="1097280" y="3054096"/>
+            <a:ext cx="10607040" cy="813816"/>
           </a:xfrm>
           <a:prstGeom prst="rect">
             <a:avLst/>
@@ -4381,7 +4470,7 @@
               <a:buNone/>
             </a:pPr>
             <a:r>
-              <a:rPr lang="en-US" sz="1650" dirty="0">
+              <a:rPr lang="en-US" sz="1500" dirty="0">
                 <a:solidFill>
                   <a:srgbClr val="1A1A1A"/>
                 </a:solidFill>
@@ -4389,9 +4478,9 @@
                 <a:ea typeface="Calibri" pitchFamily="34" charset="-122"/>
                 <a:cs typeface="Calibri" pitchFamily="34" charset="-120"/>
               </a:rPr>
-              <a:t>Words: the top words of a lyric are "the, and, you" until you remove stop-words. That removal is your first modeling choice.</a:t>
-            </a:r>
-            <a:endParaRPr lang="en-US" sz="1650" dirty="0"/>
+              <a:t>Rule one: every citation is a lead, not a source. Reports cite real, wrong, and nonexistent works with identical confidence; nothing enters your work unread.</a:t>
+            </a:r>
+            <a:endParaRPr lang="en-US" sz="1500" dirty="0"/>
           </a:p>
         </p:txBody>
       </p:sp>
@@ -4403,7 +4492,7 @@
         </p:nvSpPr>
         <p:spPr>
           <a:xfrm>
-            <a:off x="640080" y="4366260"/>
+            <a:off x="640080" y="3959352"/>
             <a:ext cx="201168" cy="201168"/>
           </a:xfrm>
           <a:prstGeom prst="ellipse">
@@ -4423,8 +4512,8 @@
         </p:nvSpPr>
         <p:spPr>
           <a:xfrm>
-            <a:off x="1097280" y="4274820"/>
-            <a:ext cx="10607040" cy="1017270"/>
+            <a:off x="1097280" y="3867912"/>
+            <a:ext cx="10607040" cy="813816"/>
           </a:xfrm>
           <a:prstGeom prst="rect">
             <a:avLst/>
@@ -4445,7 +4534,7 @@
               <a:buNone/>
             </a:pPr>
             <a:r>
-              <a:rPr lang="en-US" sz="1650" dirty="0">
+              <a:rPr lang="en-US" sz="1500" dirty="0">
                 <a:solidFill>
                   <a:srgbClr val="1A1A1A"/>
                 </a:solidFill>
@@ -4453,9 +4542,9 @@
                 <a:ea typeface="Calibri" pitchFamily="34" charset="-122"/>
                 <a:cs typeface="Calibri" pitchFamily="34" charset="-120"/>
               </a:rPr>
-              <a:t>Pixels: rank 200 Met thumbnails darkest to brightest from average luminance.</a:t>
-            </a:r>
-            <a:endParaRPr lang="en-US" sz="1650" dirty="0"/>
+              <a:t>Rule two: verify dataset access yourself. "Publicly available" in a report means someone once said so; the corpus-existence proof (50 loadable rows, Week 3's sketch) is the standard.</a:t>
+            </a:r>
+            <a:endParaRPr lang="en-US" sz="1500" dirty="0"/>
           </a:p>
         </p:txBody>
       </p:sp>
@@ -4467,7 +4556,7 @@
         </p:nvSpPr>
         <p:spPr>
           <a:xfrm>
-            <a:off x="640080" y="5383530"/>
+            <a:off x="640080" y="4773168"/>
             <a:ext cx="201168" cy="201168"/>
           </a:xfrm>
           <a:prstGeom prst="ellipse">
@@ -4487,8 +4576,8 @@
         </p:nvSpPr>
         <p:spPr>
           <a:xfrm>
-            <a:off x="1097280" y="5292090"/>
-            <a:ext cx="10607040" cy="1017270"/>
+            <a:off x="1097280" y="4681728"/>
+            <a:ext cx="10607040" cy="813816"/>
           </a:xfrm>
           <a:prstGeom prst="rect">
             <a:avLst/>
@@ -4509,7 +4598,7 @@
               <a:buNone/>
             </a:pPr>
             <a:r>
-              <a:rPr lang="en-US" sz="1650" dirty="0">
+              <a:rPr lang="en-US" sz="1500" dirty="0">
                 <a:solidFill>
                   <a:srgbClr val="1A1A1A"/>
                 </a:solidFill>
@@ -4517,9 +4606,73 @@
                 <a:ea typeface="Calibri" pitchFamily="34" charset="-122"/>
                 <a:cs typeface="Calibri" pitchFamily="34" charset="-120"/>
               </a:rPr>
-              <a:t>The same technique three times, each containing a decision.</a:t>
-            </a:r>
-            <a:endParaRPr lang="en-US" sz="1650" dirty="0"/>
+              <a:t>Rule three: the report is never a source. Cite what you read, not the tool that found it.</a:t>
+            </a:r>
+            <a:endParaRPr lang="en-US" sz="1500" dirty="0"/>
+          </a:p>
+        </p:txBody>
+      </p:sp>
+      <p:sp>
+        <p:nvSpPr>
+          <p:cNvPr id="13" name="Shape 11"/>
+          <p:cNvSpPr/>
+          <p:nvPr/>
+        </p:nvSpPr>
+        <p:spPr>
+          <a:xfrm>
+            <a:off x="640080" y="5586984"/>
+            <a:ext cx="201168" cy="201168"/>
+          </a:xfrm>
+          <a:prstGeom prst="ellipse">
+            <a:avLst/>
+          </a:prstGeom>
+          <a:solidFill>
+            <a:srgbClr val="3F6F5F"/>
+          </a:solidFill>
+          <a:ln/>
+        </p:spPr>
+      </p:sp>
+      <p:sp>
+        <p:nvSpPr>
+          <p:cNvPr id="14" name="Text 12"/>
+          <p:cNvSpPr/>
+          <p:nvPr/>
+        </p:nvSpPr>
+        <p:spPr>
+          <a:xfrm>
+            <a:off x="1097280" y="5495544"/>
+            <a:ext cx="10607040" cy="813816"/>
+          </a:xfrm>
+          <a:prstGeom prst="rect">
+            <a:avLst/>
+          </a:prstGeom>
+          <a:noFill/>
+          <a:ln/>
+        </p:spPr>
+        <p:txBody>
+          <a:bodyPr wrap="square" rtlCol="0" anchor="t">
+            <a:spAutoFit/>
+          </a:bodyPr>
+          <a:lstStyle/>
+          <a:p>
+            <a:pPr indent="0" marL="0">
+              <a:lnSpc>
+                <a:spcPct val="112000"/>
+              </a:lnSpc>
+              <a:buNone/>
+            </a:pPr>
+            <a:r>
+              <a:rPr lang="en-US" sz="1500" dirty="0">
+                <a:solidFill>
+                  <a:srgbClr val="1A1A1A"/>
+                </a:solidFill>
+                <a:latin typeface="Calibri" pitchFamily="34" charset="0"/>
+                <a:ea typeface="Calibri" pitchFamily="34" charset="-122"/>
+                <a:cs typeface="Calibri" pitchFamily="34" charset="-120"/>
+              </a:rPr>
+              <a:t>Rule four: scout, then close the tool. Your question, your reading, and your interpretation cannot be delegated - the same boundary as with code.</a:t>
+            </a:r>
+            <a:endParaRPr lang="en-US" sz="1500" dirty="0"/>
           </a:p>
         </p:txBody>
       </p:sp>
@@ -4557,14 +4710,34 @@
       </p:grpSpPr>
       <p:sp>
         <p:nvSpPr>
-          <p:cNvPr id="2" name="Text 0"/>
-          <p:cNvSpPr/>
-          <p:nvPr/>
-        </p:nvSpPr>
-        <p:spPr>
-          <a:xfrm>
-            <a:off x="640080" y="731520"/>
-            <a:ext cx="10058400" cy="731520"/>
+          <p:cNvPr id="2" name="Shape 0"/>
+          <p:cNvSpPr/>
+          <p:nvPr/>
+        </p:nvSpPr>
+        <p:spPr>
+          <a:xfrm>
+            <a:off x="0" y="0"/>
+            <a:ext cx="164592" cy="6858000"/>
+          </a:xfrm>
+          <a:prstGeom prst="rect">
+            <a:avLst/>
+          </a:prstGeom>
+          <a:solidFill>
+            <a:srgbClr val="3F6F5F"/>
+          </a:solidFill>
+          <a:ln/>
+        </p:spPr>
+      </p:sp>
+      <p:sp>
+        <p:nvSpPr>
+          <p:cNvPr id="3" name="Text 1"/>
+          <p:cNvSpPr/>
+          <p:nvPr/>
+        </p:nvSpPr>
+        <p:spPr>
+          <a:xfrm>
+            <a:off x="640080" y="640080"/>
+            <a:ext cx="10058400" cy="320040"/>
           </a:xfrm>
           <a:prstGeom prst="rect">
             <a:avLst/>
@@ -4574,6 +4747,47 @@
         </p:spPr>
         <p:txBody>
           <a:bodyPr wrap="square" rtlCol="0" anchor="ctr"/>
+          <a:lstStyle/>
+          <a:p>
+            <a:pPr indent="0" marL="0">
+              <a:buNone/>
+            </a:pPr>
+            <a:r>
+              <a:rPr lang="en-US" sz="1200" b="1" spc="300" kern="0" dirty="0">
+                <a:solidFill>
+                  <a:srgbClr val="3F6F5F"/>
+                </a:solidFill>
+                <a:latin typeface="Calibri" pitchFamily="34" charset="0"/>
+                <a:ea typeface="Calibri" pitchFamily="34" charset="-122"/>
+                <a:cs typeface="Calibri" pitchFamily="34" charset="-120"/>
+              </a:rPr>
+              <a:t>WEEK 1 · KEY POINTS</a:t>
+            </a:r>
+            <a:endParaRPr lang="en-US" sz="1200" dirty="0"/>
+          </a:p>
+        </p:txBody>
+      </p:sp>
+      <p:sp>
+        <p:nvSpPr>
+          <p:cNvPr id="4" name="Text 2"/>
+          <p:cNvSpPr/>
+          <p:nvPr/>
+        </p:nvSpPr>
+        <p:spPr>
+          <a:xfrm>
+            <a:off x="640080" y="1005840"/>
+            <a:ext cx="10881360" cy="914400"/>
+          </a:xfrm>
+          <a:prstGeom prst="rect">
+            <a:avLst/>
+          </a:prstGeom>
+          <a:noFill/>
+          <a:ln/>
+        </p:spPr>
+        <p:txBody>
+          <a:bodyPr wrap="square" rtlCol="0" anchor="t">
+            <a:spAutoFit/>
+          </a:bodyPr>
           <a:lstStyle/>
           <a:p>
             <a:pPr indent="0" marL="0">
@@ -4588,7 +4802,7 @@
                 <a:ea typeface="Cambria" pitchFamily="34" charset="-122"/>
                 <a:cs typeface="Cambria" pitchFamily="34" charset="-120"/>
               </a:rPr>
-              <a:t>Three modes today</a:t>
+              <a:t>Counting, three shapes</a:t>
             </a:r>
             <a:endParaRPr lang="en-US" sz="3000" dirty="0"/>
           </a:p>
@@ -4596,134 +4810,98 @@
       </p:sp>
       <p:sp>
         <p:nvSpPr>
-          <p:cNvPr id="3" name="Text 1"/>
-          <p:cNvSpPr/>
-          <p:nvPr/>
-        </p:nvSpPr>
-        <p:spPr>
-          <a:xfrm>
-            <a:off x="640080" y="1417320"/>
-            <a:ext cx="10058400" cy="365760"/>
-          </a:xfrm>
-          <a:prstGeom prst="rect">
-            <a:avLst/>
-          </a:prstGeom>
-          <a:noFill/>
-          <a:ln/>
-        </p:spPr>
-        <p:txBody>
-          <a:bodyPr wrap="square" rtlCol="0" anchor="ctr"/>
-          <a:lstStyle/>
-          <a:p>
-            <a:pPr indent="0" marL="0">
-              <a:buNone/>
-            </a:pPr>
-            <a:r>
-              <a:rPr lang="en-US" sz="1400" i="1" dirty="0">
-                <a:solidFill>
-                  <a:srgbClr val="6B6B63"/>
+          <p:cNvPr id="5" name="Shape 3"/>
+          <p:cNvSpPr/>
+          <p:nvPr/>
+        </p:nvSpPr>
+        <p:spPr>
+          <a:xfrm>
+            <a:off x="640080" y="2331720"/>
+            <a:ext cx="201168" cy="201168"/>
+          </a:xfrm>
+          <a:prstGeom prst="ellipse">
+            <a:avLst/>
+          </a:prstGeom>
+          <a:solidFill>
+            <a:srgbClr val="7A3B2E"/>
+          </a:solidFill>
+          <a:ln/>
+        </p:spPr>
+      </p:sp>
+      <p:sp>
+        <p:nvSpPr>
+          <p:cNvPr id="6" name="Text 4"/>
+          <p:cNvSpPr/>
+          <p:nvPr/>
+        </p:nvSpPr>
+        <p:spPr>
+          <a:xfrm>
+            <a:off x="1097280" y="2240280"/>
+            <a:ext cx="10607040" cy="1017270"/>
+          </a:xfrm>
+          <a:prstGeom prst="rect">
+            <a:avLst/>
+          </a:prstGeom>
+          <a:noFill/>
+          <a:ln/>
+        </p:spPr>
+        <p:txBody>
+          <a:bodyPr wrap="square" rtlCol="0" anchor="t">
+            <a:spAutoFit/>
+          </a:bodyPr>
+          <a:lstStyle/>
+          <a:p>
+            <a:pPr indent="0" marL="0">
+              <a:lnSpc>
+                <a:spcPct val="112000"/>
+              </a:lnSpc>
+              <a:buNone/>
+            </a:pPr>
+            <a:r>
+              <a:rPr lang="en-US" sz="1650" dirty="0">
+                <a:solidFill>
+                  <a:srgbClr val="1A1A1A"/>
                 </a:solidFill>
                 <a:latin typeface="Calibri" pitchFamily="34" charset="0"/>
                 <a:ea typeface="Calibri" pitchFamily="34" charset="-122"/>
                 <a:cs typeface="Calibri" pitchFamily="34" charset="-120"/>
               </a:rPr>
-              <a:t>about a third of the session each</a:t>
-            </a:r>
-            <a:endParaRPr lang="en-US" sz="1400" dirty="0"/>
-          </a:p>
-        </p:txBody>
-      </p:sp>
-      <p:sp>
-        <p:nvSpPr>
-          <p:cNvPr id="4" name="Shape 2"/>
-          <p:cNvSpPr/>
-          <p:nvPr/>
-        </p:nvSpPr>
-        <p:spPr>
-          <a:xfrm>
-            <a:off x="640080" y="2194560"/>
-            <a:ext cx="3383280" cy="3291840"/>
-          </a:xfrm>
-          <a:prstGeom prst="roundRect">
-            <a:avLst>
-              <a:gd name="adj" fmla="val 3333"/>
-            </a:avLst>
-          </a:prstGeom>
-          <a:solidFill>
-            <a:srgbClr val="F4EEE8"/>
-          </a:solidFill>
-          <a:ln/>
-        </p:spPr>
-      </p:sp>
-      <p:sp>
-        <p:nvSpPr>
-          <p:cNvPr id="5" name="Shape 3"/>
-          <p:cNvSpPr/>
-          <p:nvPr/>
-        </p:nvSpPr>
-        <p:spPr>
-          <a:xfrm>
-            <a:off x="1051560" y="2606040"/>
-            <a:ext cx="548640" cy="548640"/>
+              <a:t>Rows: what share of brides kept their name, year by year. One groupby, one chart.</a:t>
+            </a:r>
+            <a:endParaRPr lang="en-US" sz="1650" dirty="0"/>
+          </a:p>
+        </p:txBody>
+      </p:sp>
+      <p:sp>
+        <p:nvSpPr>
+          <p:cNvPr id="7" name="Shape 5"/>
+          <p:cNvSpPr/>
+          <p:nvPr/>
+        </p:nvSpPr>
+        <p:spPr>
+          <a:xfrm>
+            <a:off x="640080" y="3348990"/>
+            <a:ext cx="201168" cy="201168"/>
           </a:xfrm>
           <a:prstGeom prst="ellipse">
             <a:avLst/>
           </a:prstGeom>
           <a:solidFill>
-            <a:srgbClr val="7A3B2E"/>
-          </a:solidFill>
-          <a:ln/>
-        </p:spPr>
-      </p:sp>
-      <p:sp>
-        <p:nvSpPr>
-          <p:cNvPr id="6" name="Text 4"/>
-          <p:cNvSpPr/>
-          <p:nvPr/>
-        </p:nvSpPr>
-        <p:spPr>
-          <a:xfrm>
-            <a:off x="1005840" y="3383280"/>
-            <a:ext cx="2651760" cy="548640"/>
-          </a:xfrm>
-          <a:prstGeom prst="rect">
-            <a:avLst/>
-          </a:prstGeom>
-          <a:noFill/>
-          <a:ln/>
-        </p:spPr>
-        <p:txBody>
-          <a:bodyPr wrap="square" rtlCol="0" anchor="ctr"/>
-          <a:lstStyle/>
-          <a:p>
-            <a:pPr indent="0" marL="0">
-              <a:buNone/>
-            </a:pPr>
-            <a:r>
-              <a:rPr lang="en-US" sz="2100" b="1" dirty="0">
-                <a:solidFill>
-                  <a:srgbClr val="1A1A1A"/>
-                </a:solidFill>
-                <a:latin typeface="Cambria" pitchFamily="34" charset="0"/>
-                <a:ea typeface="Cambria" pitchFamily="34" charset="-122"/>
-                <a:cs typeface="Cambria" pitchFamily="34" charset="-120"/>
-              </a:rPr>
-              <a:t>Lecture / demo</a:t>
-            </a:r>
-            <a:endParaRPr lang="en-US" sz="2100" dirty="0"/>
-          </a:p>
-        </p:txBody>
-      </p:sp>
-      <p:sp>
-        <p:nvSpPr>
-          <p:cNvPr id="7" name="Text 5"/>
-          <p:cNvSpPr/>
-          <p:nvPr/>
-        </p:nvSpPr>
-        <p:spPr>
-          <a:xfrm>
-            <a:off x="1005840" y="3977640"/>
-            <a:ext cx="2651760" cy="1371600"/>
+            <a:srgbClr val="3F6F5F"/>
+          </a:solidFill>
+          <a:ln/>
+        </p:spPr>
+      </p:sp>
+      <p:sp>
+        <p:nvSpPr>
+          <p:cNvPr id="8" name="Text 6"/>
+          <p:cNvSpPr/>
+          <p:nvPr/>
+        </p:nvSpPr>
+        <p:spPr>
+          <a:xfrm>
+            <a:off x="1097280" y="3257550"/>
+            <a:ext cx="10607040" cy="1017270"/>
           </a:xfrm>
           <a:prstGeom prst="rect">
             <a:avLst/>
@@ -4739,12 +4917,12 @@
           <a:p>
             <a:pPr indent="0" marL="0">
               <a:lnSpc>
-                <a:spcPct val="115000"/>
+                <a:spcPct val="112000"/>
               </a:lnSpc>
               <a:buNone/>
             </a:pPr>
             <a:r>
-              <a:rPr lang="en-US" sz="1500" dirty="0">
+              <a:rPr lang="en-US" sz="1650" dirty="0">
                 <a:solidFill>
                   <a:srgbClr val="1A1A1A"/>
                 </a:solidFill>
@@ -4752,33 +4930,11 @@
                 <a:ea typeface="Calibri" pitchFamily="34" charset="-122"/>
                 <a:cs typeface="Calibri" pitchFamily="34" charset="-120"/>
               </a:rPr>
-              <a:t>Counting: rows, words, pixels</a:t>
-            </a:r>
-            <a:endParaRPr lang="en-US" sz="1500" dirty="0"/>
-          </a:p>
-        </p:txBody>
-      </p:sp>
-      <p:sp>
-        <p:nvSpPr>
-          <p:cNvPr id="8" name="Shape 6"/>
-          <p:cNvSpPr/>
-          <p:nvPr/>
-        </p:nvSpPr>
-        <p:spPr>
-          <a:xfrm>
-            <a:off x="4526280" y="2194560"/>
-            <a:ext cx="3383280" cy="3291840"/>
-          </a:xfrm>
-          <a:prstGeom prst="roundRect">
-            <a:avLst>
-              <a:gd name="adj" fmla="val 3333"/>
-            </a:avLst>
-          </a:prstGeom>
-          <a:solidFill>
-            <a:srgbClr val="F4EEE8"/>
-          </a:solidFill>
-          <a:ln/>
-        </p:spPr>
+              <a:t>Words: the top words of 154 sonnets are thy and thou until the stop list learns Early Modern English; then love (195 times), beauty, and time surface. The stop list must fit the corpus, and it is your choice.</a:t>
+            </a:r>
+            <a:endParaRPr lang="en-US" sz="1650" dirty="0"/>
+          </a:p>
+        </p:txBody>
       </p:sp>
       <p:sp>
         <p:nvSpPr>
@@ -4788,14 +4944,14 @@
         </p:nvSpPr>
         <p:spPr>
           <a:xfrm>
-            <a:off x="4937760" y="2606040"/>
-            <a:ext cx="548640" cy="548640"/>
+            <a:off x="640080" y="4366260"/>
+            <a:ext cx="201168" cy="201168"/>
           </a:xfrm>
           <a:prstGeom prst="ellipse">
             <a:avLst/>
           </a:prstGeom>
           <a:solidFill>
-            <a:srgbClr val="3F6F5F"/>
+            <a:srgbClr val="B9852F"/>
           </a:solidFill>
           <a:ln/>
         </p:spPr>
@@ -4808,47 +4964,8 @@
         </p:nvSpPr>
         <p:spPr>
           <a:xfrm>
-            <a:off x="4892040" y="3383280"/>
-            <a:ext cx="2651760" cy="548640"/>
-          </a:xfrm>
-          <a:prstGeom prst="rect">
-            <a:avLst/>
-          </a:prstGeom>
-          <a:noFill/>
-          <a:ln/>
-        </p:spPr>
-        <p:txBody>
-          <a:bodyPr wrap="square" rtlCol="0" anchor="ctr"/>
-          <a:lstStyle/>
-          <a:p>
-            <a:pPr indent="0" marL="0">
-              <a:buNone/>
-            </a:pPr>
-            <a:r>
-              <a:rPr lang="en-US" sz="2100" b="1" dirty="0">
-                <a:solidFill>
-                  <a:srgbClr val="1A1A1A"/>
-                </a:solidFill>
-                <a:latin typeface="Cambria" pitchFamily="34" charset="0"/>
-                <a:ea typeface="Cambria" pitchFamily="34" charset="-122"/>
-                <a:cs typeface="Cambria" pitchFamily="34" charset="-120"/>
-              </a:rPr>
-              <a:t>Workshop</a:t>
-            </a:r>
-            <a:endParaRPr lang="en-US" sz="2100" dirty="0"/>
-          </a:p>
-        </p:txBody>
-      </p:sp>
-      <p:sp>
-        <p:nvSpPr>
-          <p:cNvPr id="11" name="Text 9"/>
-          <p:cNvSpPr/>
-          <p:nvPr/>
-        </p:nvSpPr>
-        <p:spPr>
-          <a:xfrm>
-            <a:off x="4892040" y="3977640"/>
-            <a:ext cx="2651760" cy="1371600"/>
+            <a:off x="1097280" y="4274820"/>
+            <a:ext cx="10607040" cy="1017270"/>
           </a:xfrm>
           <a:prstGeom prst="rect">
             <a:avLst/>
@@ -4864,12 +4981,12 @@
           <a:p>
             <a:pPr indent="0" marL="0">
               <a:lnSpc>
-                <a:spcPct val="115000"/>
+                <a:spcPct val="112000"/>
               </a:lnSpc>
               <a:buNone/>
             </a:pPr>
             <a:r>
-              <a:rPr lang="en-US" sz="1500" dirty="0">
+              <a:rPr lang="en-US" sz="1650" dirty="0">
                 <a:solidFill>
                   <a:srgbClr val="1A1A1A"/>
                 </a:solidFill>
@@ -4877,103 +4994,42 @@
                 <a:ea typeface="Calibri" pitchFamily="34" charset="-122"/>
                 <a:cs typeface="Calibri" pitchFamily="34" charset="-120"/>
               </a:rPr>
-              <a:t>Build hands-on on your own data.</a:t>
-            </a:r>
-            <a:endParaRPr lang="en-US" sz="1500" dirty="0"/>
-          </a:p>
-        </p:txBody>
-      </p:sp>
-      <p:sp>
-        <p:nvSpPr>
-          <p:cNvPr id="12" name="Shape 10"/>
-          <p:cNvSpPr/>
-          <p:nvPr/>
-        </p:nvSpPr>
-        <p:spPr>
-          <a:xfrm>
-            <a:off x="8412480" y="2194560"/>
-            <a:ext cx="3383280" cy="3291840"/>
-          </a:xfrm>
-          <a:prstGeom prst="roundRect">
-            <a:avLst>
-              <a:gd name="adj" fmla="val 3333"/>
-            </a:avLst>
-          </a:prstGeom>
-          <a:solidFill>
-            <a:srgbClr val="F4EEE8"/>
-          </a:solidFill>
-          <a:ln/>
-        </p:spPr>
-      </p:sp>
-      <p:sp>
-        <p:nvSpPr>
-          <p:cNvPr id="13" name="Shape 11"/>
-          <p:cNvSpPr/>
-          <p:nvPr/>
-        </p:nvSpPr>
-        <p:spPr>
-          <a:xfrm>
-            <a:off x="8823960" y="2606040"/>
-            <a:ext cx="548640" cy="548640"/>
+              <a:t>Pixels: rank 200 Met thumbnails darkest to brightest from average luminance.</a:t>
+            </a:r>
+            <a:endParaRPr lang="en-US" sz="1650" dirty="0"/>
+          </a:p>
+        </p:txBody>
+      </p:sp>
+      <p:sp>
+        <p:nvSpPr>
+          <p:cNvPr id="11" name="Shape 9"/>
+          <p:cNvSpPr/>
+          <p:nvPr/>
+        </p:nvSpPr>
+        <p:spPr>
+          <a:xfrm>
+            <a:off x="640080" y="5383530"/>
+            <a:ext cx="201168" cy="201168"/>
           </a:xfrm>
           <a:prstGeom prst="ellipse">
             <a:avLst/>
           </a:prstGeom>
           <a:solidFill>
-            <a:srgbClr val="B9852F"/>
-          </a:solidFill>
-          <a:ln/>
-        </p:spPr>
-      </p:sp>
-      <p:sp>
-        <p:nvSpPr>
-          <p:cNvPr id="14" name="Text 12"/>
-          <p:cNvSpPr/>
-          <p:nvPr/>
-        </p:nvSpPr>
-        <p:spPr>
-          <a:xfrm>
-            <a:off x="8778240" y="3383280"/>
-            <a:ext cx="2651760" cy="548640"/>
-          </a:xfrm>
-          <a:prstGeom prst="rect">
-            <a:avLst/>
-          </a:prstGeom>
-          <a:noFill/>
-          <a:ln/>
-        </p:spPr>
-        <p:txBody>
-          <a:bodyPr wrap="square" rtlCol="0" anchor="ctr"/>
-          <a:lstStyle/>
-          <a:p>
-            <a:pPr indent="0" marL="0">
-              <a:buNone/>
-            </a:pPr>
-            <a:r>
-              <a:rPr lang="en-US" sz="2100" b="1" dirty="0">
-                <a:solidFill>
-                  <a:srgbClr val="1A1A1A"/>
-                </a:solidFill>
-                <a:latin typeface="Cambria" pitchFamily="34" charset="0"/>
-                <a:ea typeface="Cambria" pitchFamily="34" charset="-122"/>
-                <a:cs typeface="Cambria" pitchFamily="34" charset="-120"/>
-              </a:rPr>
-              <a:t>Discussion</a:t>
-            </a:r>
-            <a:endParaRPr lang="en-US" sz="2100" dirty="0"/>
-          </a:p>
-        </p:txBody>
-      </p:sp>
-      <p:sp>
-        <p:nvSpPr>
-          <p:cNvPr id="15" name="Text 13"/>
-          <p:cNvSpPr/>
-          <p:nvPr/>
-        </p:nvSpPr>
-        <p:spPr>
-          <a:xfrm>
-            <a:off x="8778240" y="3977640"/>
-            <a:ext cx="2651760" cy="1371600"/>
+            <a:srgbClr val="7A3B2E"/>
+          </a:solidFill>
+          <a:ln/>
+        </p:spPr>
+      </p:sp>
+      <p:sp>
+        <p:nvSpPr>
+          <p:cNvPr id="12" name="Text 10"/>
+          <p:cNvSpPr/>
+          <p:nvPr/>
+        </p:nvSpPr>
+        <p:spPr>
+          <a:xfrm>
+            <a:off x="1097280" y="5292090"/>
+            <a:ext cx="10607040" cy="1017270"/>
           </a:xfrm>
           <a:prstGeom prst="rect">
             <a:avLst/>
@@ -4989,12 +5045,12 @@
           <a:p>
             <a:pPr indent="0" marL="0">
               <a:lnSpc>
-                <a:spcPct val="115000"/>
+                <a:spcPct val="112000"/>
               </a:lnSpc>
               <a:buNone/>
             </a:pPr>
             <a:r>
-              <a:rPr lang="en-US" sz="1500" dirty="0">
+              <a:rPr lang="en-US" sz="1650" dirty="0">
                 <a:solidFill>
                   <a:srgbClr val="1A1A1A"/>
                 </a:solidFill>
@@ -5002,9 +5058,9 @@
                 <a:ea typeface="Calibri" pitchFamily="34" charset="-122"/>
                 <a:cs typeface="Calibri" pitchFamily="34" charset="-120"/>
               </a:rPr>
-              <a:t>Interrogate the study, debate it, or critique each other's work.</a:t>
-            </a:r>
-            <a:endParaRPr lang="en-US" sz="1500" dirty="0"/>
+              <a:t>The same technique three times, each containing a decision.</a:t>
+            </a:r>
+            <a:endParaRPr lang="en-US" sz="1650" dirty="0"/>
           </a:p>
         </p:txBody>
       </p:sp>
@@ -5048,7 +5104,7 @@
         </p:nvSpPr>
         <p:spPr>
           <a:xfrm>
-            <a:off x="640080" y="640080"/>
+            <a:off x="640080" y="731520"/>
             <a:ext cx="10058400" cy="731520"/>
           </a:xfrm>
           <a:prstGeom prst="rect">
@@ -5073,7 +5129,7 @@
                 <a:ea typeface="Cambria" pitchFamily="34" charset="-122"/>
                 <a:cs typeface="Cambria" pitchFamily="34" charset="-120"/>
               </a:rPr>
-              <a:t>The session</a:t>
+              <a:t>Three modes today</a:t>
             </a:r>
             <a:endParaRPr lang="en-US" sz="3000" dirty="0"/>
           </a:p>
@@ -5081,36 +5137,14 @@
       </p:sp>
       <p:sp>
         <p:nvSpPr>
-          <p:cNvPr id="3" name="Shape 1"/>
-          <p:cNvSpPr/>
-          <p:nvPr/>
-        </p:nvSpPr>
-        <p:spPr>
-          <a:xfrm>
-            <a:off x="640080" y="1572768"/>
-            <a:ext cx="868680" cy="450342"/>
-          </a:xfrm>
-          <a:prstGeom prst="roundRect">
-            <a:avLst>
-              <a:gd name="adj" fmla="val 12183"/>
-            </a:avLst>
-          </a:prstGeom>
-          <a:solidFill>
-            <a:srgbClr val="7A3B2E"/>
-          </a:solidFill>
-          <a:ln/>
-        </p:spPr>
-      </p:sp>
-      <p:sp>
-        <p:nvSpPr>
-          <p:cNvPr id="4" name="Text 2"/>
-          <p:cNvSpPr/>
-          <p:nvPr/>
-        </p:nvSpPr>
-        <p:spPr>
-          <a:xfrm>
-            <a:off x="640080" y="1572768"/>
-            <a:ext cx="868680" cy="450342"/>
+          <p:cNvPr id="3" name="Text 1"/>
+          <p:cNvSpPr/>
+          <p:nvPr/>
+        </p:nvSpPr>
+        <p:spPr>
+          <a:xfrm>
+            <a:off x="640080" y="1417320"/>
+            <a:ext cx="10058400" cy="365760"/>
           </a:xfrm>
           <a:prstGeom prst="rect">
             <a:avLst/>
@@ -5122,52 +5156,136 @@
           <a:bodyPr wrap="square" rtlCol="0" anchor="ctr"/>
           <a:lstStyle/>
           <a:p>
-            <a:pPr algn="ctr" indent="0" marL="0">
-              <a:buNone/>
-            </a:pPr>
-            <a:r>
-              <a:rPr lang="en-US" sz="1100" b="1" dirty="0">
-                <a:solidFill>
-                  <a:srgbClr val="FFFFFF"/>
+            <a:pPr indent="0" marL="0">
+              <a:buNone/>
+            </a:pPr>
+            <a:r>
+              <a:rPr lang="en-US" sz="1400" i="1" dirty="0">
+                <a:solidFill>
+                  <a:srgbClr val="6B6B63"/>
                 </a:solidFill>
                 <a:latin typeface="Calibri" pitchFamily="34" charset="0"/>
                 <a:ea typeface="Calibri" pitchFamily="34" charset="-122"/>
                 <a:cs typeface="Calibri" pitchFamily="34" charset="-120"/>
               </a:rPr>
-              <a:t>0:00</a:t>
-            </a:r>
-            <a:endParaRPr lang="en-US" sz="1100" dirty="0"/>
-          </a:p>
-        </p:txBody>
-      </p:sp>
-      <p:sp>
-        <p:nvSpPr>
-          <p:cNvPr id="5" name="Text 3"/>
-          <p:cNvSpPr/>
-          <p:nvPr/>
-        </p:nvSpPr>
-        <p:spPr>
-          <a:xfrm>
-            <a:off x="1691640" y="1554480"/>
-            <a:ext cx="9646920" cy="560070"/>
-          </a:xfrm>
-          <a:prstGeom prst="rect">
-            <a:avLst/>
-          </a:prstGeom>
-          <a:noFill/>
-          <a:ln/>
-        </p:spPr>
-        <p:txBody>
-          <a:bodyPr wrap="square" rtlCol="0" anchor="ctr">
+              <a:t>about a third of the session each</a:t>
+            </a:r>
+            <a:endParaRPr lang="en-US" sz="1400" dirty="0"/>
+          </a:p>
+        </p:txBody>
+      </p:sp>
+      <p:sp>
+        <p:nvSpPr>
+          <p:cNvPr id="4" name="Shape 2"/>
+          <p:cNvSpPr/>
+          <p:nvPr/>
+        </p:nvSpPr>
+        <p:spPr>
+          <a:xfrm>
+            <a:off x="640080" y="2194560"/>
+            <a:ext cx="3383280" cy="3291840"/>
+          </a:xfrm>
+          <a:prstGeom prst="roundRect">
+            <a:avLst>
+              <a:gd name="adj" fmla="val 3333"/>
+            </a:avLst>
+          </a:prstGeom>
+          <a:solidFill>
+            <a:srgbClr val="F4EEE8"/>
+          </a:solidFill>
+          <a:ln/>
+        </p:spPr>
+      </p:sp>
+      <p:sp>
+        <p:nvSpPr>
+          <p:cNvPr id="5" name="Shape 3"/>
+          <p:cNvSpPr/>
+          <p:nvPr/>
+        </p:nvSpPr>
+        <p:spPr>
+          <a:xfrm>
+            <a:off x="1051560" y="2606040"/>
+            <a:ext cx="548640" cy="548640"/>
+          </a:xfrm>
+          <a:prstGeom prst="ellipse">
+            <a:avLst/>
+          </a:prstGeom>
+          <a:solidFill>
+            <a:srgbClr val="7A3B2E"/>
+          </a:solidFill>
+          <a:ln/>
+        </p:spPr>
+      </p:sp>
+      <p:sp>
+        <p:nvSpPr>
+          <p:cNvPr id="6" name="Text 4"/>
+          <p:cNvSpPr/>
+          <p:nvPr/>
+        </p:nvSpPr>
+        <p:spPr>
+          <a:xfrm>
+            <a:off x="1005840" y="3383280"/>
+            <a:ext cx="2651760" cy="548640"/>
+          </a:xfrm>
+          <a:prstGeom prst="rect">
+            <a:avLst/>
+          </a:prstGeom>
+          <a:noFill/>
+          <a:ln/>
+        </p:spPr>
+        <p:txBody>
+          <a:bodyPr wrap="square" rtlCol="0" anchor="ctr"/>
+          <a:lstStyle/>
+          <a:p>
+            <a:pPr indent="0" marL="0">
+              <a:buNone/>
+            </a:pPr>
+            <a:r>
+              <a:rPr lang="en-US" sz="2100" b="1" dirty="0">
+                <a:solidFill>
+                  <a:srgbClr val="1A1A1A"/>
+                </a:solidFill>
+                <a:latin typeface="Cambria" pitchFamily="34" charset="0"/>
+                <a:ea typeface="Cambria" pitchFamily="34" charset="-122"/>
+                <a:cs typeface="Cambria" pitchFamily="34" charset="-120"/>
+              </a:rPr>
+              <a:t>Lecture / demo</a:t>
+            </a:r>
+            <a:endParaRPr lang="en-US" sz="2100" dirty="0"/>
+          </a:p>
+        </p:txBody>
+      </p:sp>
+      <p:sp>
+        <p:nvSpPr>
+          <p:cNvPr id="7" name="Text 5"/>
+          <p:cNvSpPr/>
+          <p:nvPr/>
+        </p:nvSpPr>
+        <p:spPr>
+          <a:xfrm>
+            <a:off x="1005840" y="3977640"/>
+            <a:ext cx="2651760" cy="1371600"/>
+          </a:xfrm>
+          <a:prstGeom prst="rect">
+            <a:avLst/>
+          </a:prstGeom>
+          <a:noFill/>
+          <a:ln/>
+        </p:spPr>
+        <p:txBody>
+          <a:bodyPr wrap="square" rtlCol="0" anchor="t">
             <a:spAutoFit/>
           </a:bodyPr>
           <a:lstStyle/>
           <a:p>
             <a:pPr indent="0" marL="0">
-              <a:buNone/>
-            </a:pPr>
-            <a:r>
-              <a:rPr lang="en-US" sz="1100" dirty="0">
+              <a:lnSpc>
+                <a:spcPct val="115000"/>
+              </a:lnSpc>
+              <a:buNone/>
+            </a:pPr>
+            <a:r>
+              <a:rPr lang="en-US" sz="1500" dirty="0">
                 <a:solidFill>
                   <a:srgbClr val="1A1A1A"/>
                 </a:solidFill>
@@ -5175,44 +5293,64 @@
                 <a:ea typeface="Calibri" pitchFamily="34" charset="-122"/>
                 <a:cs typeface="Calibri" pitchFamily="34" charset="-120"/>
               </a:rPr>
-              <a:t>Logistics, working agreements, and a one-round icebreaker: your name, one piece of culture you kept returning to this year, and one number about it you wish you knew. Today's live coding deliberately includes real mistakes.</a:t>
-            </a:r>
-            <a:endParaRPr lang="en-US" sz="1100" dirty="0"/>
-          </a:p>
-        </p:txBody>
-      </p:sp>
-      <p:sp>
-        <p:nvSpPr>
-          <p:cNvPr id="6" name="Shape 4"/>
-          <p:cNvSpPr/>
-          <p:nvPr/>
-        </p:nvSpPr>
-        <p:spPr>
-          <a:xfrm>
-            <a:off x="640080" y="2132838"/>
-            <a:ext cx="868680" cy="450342"/>
+              <a:t>Counting: rows, words, pixels</a:t>
+            </a:r>
+            <a:endParaRPr lang="en-US" sz="1500" dirty="0"/>
+          </a:p>
+        </p:txBody>
+      </p:sp>
+      <p:sp>
+        <p:nvSpPr>
+          <p:cNvPr id="8" name="Shape 6"/>
+          <p:cNvSpPr/>
+          <p:nvPr/>
+        </p:nvSpPr>
+        <p:spPr>
+          <a:xfrm>
+            <a:off x="4526280" y="2194560"/>
+            <a:ext cx="3383280" cy="3291840"/>
           </a:xfrm>
           <a:prstGeom prst="roundRect">
             <a:avLst>
-              <a:gd name="adj" fmla="val 12183"/>
+              <a:gd name="adj" fmla="val 3333"/>
             </a:avLst>
           </a:prstGeom>
           <a:solidFill>
-            <a:srgbClr val="7A3B2E"/>
-          </a:solidFill>
-          <a:ln/>
-        </p:spPr>
-      </p:sp>
-      <p:sp>
-        <p:nvSpPr>
-          <p:cNvPr id="7" name="Text 5"/>
-          <p:cNvSpPr/>
-          <p:nvPr/>
-        </p:nvSpPr>
-        <p:spPr>
-          <a:xfrm>
-            <a:off x="640080" y="2132838"/>
-            <a:ext cx="868680" cy="450342"/>
+            <a:srgbClr val="F4EEE8"/>
+          </a:solidFill>
+          <a:ln/>
+        </p:spPr>
+      </p:sp>
+      <p:sp>
+        <p:nvSpPr>
+          <p:cNvPr id="9" name="Shape 7"/>
+          <p:cNvSpPr/>
+          <p:nvPr/>
+        </p:nvSpPr>
+        <p:spPr>
+          <a:xfrm>
+            <a:off x="4937760" y="2606040"/>
+            <a:ext cx="548640" cy="548640"/>
+          </a:xfrm>
+          <a:prstGeom prst="ellipse">
+            <a:avLst/>
+          </a:prstGeom>
+          <a:solidFill>
+            <a:srgbClr val="3F6F5F"/>
+          </a:solidFill>
+          <a:ln/>
+        </p:spPr>
+      </p:sp>
+      <p:sp>
+        <p:nvSpPr>
+          <p:cNvPr id="10" name="Text 8"/>
+          <p:cNvSpPr/>
+          <p:nvPr/>
+        </p:nvSpPr>
+        <p:spPr>
+          <a:xfrm>
+            <a:off x="4892040" y="3383280"/>
+            <a:ext cx="2651760" cy="548640"/>
           </a:xfrm>
           <a:prstGeom prst="rect">
             <a:avLst/>
@@ -5224,52 +5362,180 @@
           <a:bodyPr wrap="square" rtlCol="0" anchor="ctr"/>
           <a:lstStyle/>
           <a:p>
-            <a:pPr algn="ctr" indent="0" marL="0">
-              <a:buNone/>
-            </a:pPr>
-            <a:r>
-              <a:rPr lang="en-US" sz="1100" b="1" dirty="0">
-                <a:solidFill>
-                  <a:srgbClr val="FFFFFF"/>
+            <a:pPr indent="0" marL="0">
+              <a:buNone/>
+            </a:pPr>
+            <a:r>
+              <a:rPr lang="en-US" sz="2100" b="1" dirty="0">
+                <a:solidFill>
+                  <a:srgbClr val="1A1A1A"/>
+                </a:solidFill>
+                <a:latin typeface="Cambria" pitchFamily="34" charset="0"/>
+                <a:ea typeface="Cambria" pitchFamily="34" charset="-122"/>
+                <a:cs typeface="Cambria" pitchFamily="34" charset="-120"/>
+              </a:rPr>
+              <a:t>Workshop</a:t>
+            </a:r>
+            <a:endParaRPr lang="en-US" sz="2100" dirty="0"/>
+          </a:p>
+        </p:txBody>
+      </p:sp>
+      <p:sp>
+        <p:nvSpPr>
+          <p:cNvPr id="11" name="Text 9"/>
+          <p:cNvSpPr/>
+          <p:nvPr/>
+        </p:nvSpPr>
+        <p:spPr>
+          <a:xfrm>
+            <a:off x="4892040" y="3977640"/>
+            <a:ext cx="2651760" cy="1371600"/>
+          </a:xfrm>
+          <a:prstGeom prst="rect">
+            <a:avLst/>
+          </a:prstGeom>
+          <a:noFill/>
+          <a:ln/>
+        </p:spPr>
+        <p:txBody>
+          <a:bodyPr wrap="square" rtlCol="0" anchor="t">
+            <a:spAutoFit/>
+          </a:bodyPr>
+          <a:lstStyle/>
+          <a:p>
+            <a:pPr indent="0" marL="0">
+              <a:lnSpc>
+                <a:spcPct val="115000"/>
+              </a:lnSpc>
+              <a:buNone/>
+            </a:pPr>
+            <a:r>
+              <a:rPr lang="en-US" sz="1500" dirty="0">
+                <a:solidFill>
+                  <a:srgbClr val="1A1A1A"/>
                 </a:solidFill>
                 <a:latin typeface="Calibri" pitchFamily="34" charset="0"/>
                 <a:ea typeface="Calibri" pitchFamily="34" charset="-122"/>
                 <a:cs typeface="Calibri" pitchFamily="34" charset="-120"/>
               </a:rPr>
-              <a:t>0:10</a:t>
-            </a:r>
-            <a:endParaRPr lang="en-US" sz="1100" dirty="0"/>
-          </a:p>
-        </p:txBody>
-      </p:sp>
-      <p:sp>
-        <p:nvSpPr>
-          <p:cNvPr id="8" name="Text 6"/>
-          <p:cNvSpPr/>
-          <p:nvPr/>
-        </p:nvSpPr>
-        <p:spPr>
-          <a:xfrm>
-            <a:off x="1691640" y="2114550"/>
-            <a:ext cx="9646920" cy="560070"/>
-          </a:xfrm>
-          <a:prstGeom prst="rect">
-            <a:avLst/>
-          </a:prstGeom>
-          <a:noFill/>
-          <a:ln/>
-        </p:spPr>
-        <p:txBody>
-          <a:bodyPr wrap="square" rtlCol="0" anchor="ctr">
+              <a:t>Build hands-on on your own data.</a:t>
+            </a:r>
+            <a:endParaRPr lang="en-US" sz="1500" dirty="0"/>
+          </a:p>
+        </p:txBody>
+      </p:sp>
+      <p:sp>
+        <p:nvSpPr>
+          <p:cNvPr id="12" name="Shape 10"/>
+          <p:cNvSpPr/>
+          <p:nvPr/>
+        </p:nvSpPr>
+        <p:spPr>
+          <a:xfrm>
+            <a:off x="8412480" y="2194560"/>
+            <a:ext cx="3383280" cy="3291840"/>
+          </a:xfrm>
+          <a:prstGeom prst="roundRect">
+            <a:avLst>
+              <a:gd name="adj" fmla="val 3333"/>
+            </a:avLst>
+          </a:prstGeom>
+          <a:solidFill>
+            <a:srgbClr val="F4EEE8"/>
+          </a:solidFill>
+          <a:ln/>
+        </p:spPr>
+      </p:sp>
+      <p:sp>
+        <p:nvSpPr>
+          <p:cNvPr id="13" name="Shape 11"/>
+          <p:cNvSpPr/>
+          <p:nvPr/>
+        </p:nvSpPr>
+        <p:spPr>
+          <a:xfrm>
+            <a:off x="8823960" y="2606040"/>
+            <a:ext cx="548640" cy="548640"/>
+          </a:xfrm>
+          <a:prstGeom prst="ellipse">
+            <a:avLst/>
+          </a:prstGeom>
+          <a:solidFill>
+            <a:srgbClr val="B9852F"/>
+          </a:solidFill>
+          <a:ln/>
+        </p:spPr>
+      </p:sp>
+      <p:sp>
+        <p:nvSpPr>
+          <p:cNvPr id="14" name="Text 12"/>
+          <p:cNvSpPr/>
+          <p:nvPr/>
+        </p:nvSpPr>
+        <p:spPr>
+          <a:xfrm>
+            <a:off x="8778240" y="3383280"/>
+            <a:ext cx="2651760" cy="548640"/>
+          </a:xfrm>
+          <a:prstGeom prst="rect">
+            <a:avLst/>
+          </a:prstGeom>
+          <a:noFill/>
+          <a:ln/>
+        </p:spPr>
+        <p:txBody>
+          <a:bodyPr wrap="square" rtlCol="0" anchor="ctr"/>
+          <a:lstStyle/>
+          <a:p>
+            <a:pPr indent="0" marL="0">
+              <a:buNone/>
+            </a:pPr>
+            <a:r>
+              <a:rPr lang="en-US" sz="2100" b="1" dirty="0">
+                <a:solidFill>
+                  <a:srgbClr val="1A1A1A"/>
+                </a:solidFill>
+                <a:latin typeface="Cambria" pitchFamily="34" charset="0"/>
+                <a:ea typeface="Cambria" pitchFamily="34" charset="-122"/>
+                <a:cs typeface="Cambria" pitchFamily="34" charset="-120"/>
+              </a:rPr>
+              <a:t>Discussion</a:t>
+            </a:r>
+            <a:endParaRPr lang="en-US" sz="2100" dirty="0"/>
+          </a:p>
+        </p:txBody>
+      </p:sp>
+      <p:sp>
+        <p:nvSpPr>
+          <p:cNvPr id="15" name="Text 13"/>
+          <p:cNvSpPr/>
+          <p:nvPr/>
+        </p:nvSpPr>
+        <p:spPr>
+          <a:xfrm>
+            <a:off x="8778240" y="3977640"/>
+            <a:ext cx="2651760" cy="1371600"/>
+          </a:xfrm>
+          <a:prstGeom prst="rect">
+            <a:avLst/>
+          </a:prstGeom>
+          <a:noFill/>
+          <a:ln/>
+        </p:spPr>
+        <p:txBody>
+          <a:bodyPr wrap="square" rtlCol="0" anchor="t">
             <a:spAutoFit/>
           </a:bodyPr>
           <a:lstStyle/>
           <a:p>
             <a:pPr indent="0" marL="0">
-              <a:buNone/>
-            </a:pPr>
-            <a:r>
-              <a:rPr lang="en-US" sz="1100" dirty="0">
+              <a:lnSpc>
+                <a:spcPct val="115000"/>
+              </a:lnSpc>
+              <a:buNone/>
+            </a:pPr>
+            <a:r>
+              <a:rPr lang="en-US" sz="1500" dirty="0">
                 <a:solidFill>
                   <a:srgbClr val="1A1A1A"/>
                 </a:solidFill>
@@ -5277,621 +5543,9 @@
                 <a:ea typeface="Calibri" pitchFamily="34" charset="-122"/>
                 <a:cs typeface="Calibri" pitchFamily="34" charset="-120"/>
               </a:rPr>
-              <a:t>Lecture, the stakes: machines already read culture at scale, the feed ranking what you see, the moderation filter, the model trained on scraped art and prose, and that reading happens without you. Counting culture has produced real knowledge (the screenplay verb split, the Rowling unmasking, pop music's 1991 revolution) and real mistakes, and both look identical until someone checks. In ten weeks you do the reading yourself and publish something checkable.</a:t>
-            </a:r>
-            <a:endParaRPr lang="en-US" sz="1100" dirty="0"/>
-          </a:p>
-        </p:txBody>
-      </p:sp>
-      <p:sp>
-        <p:nvSpPr>
-          <p:cNvPr id="9" name="Shape 7"/>
-          <p:cNvSpPr/>
-          <p:nvPr/>
-        </p:nvSpPr>
-        <p:spPr>
-          <a:xfrm>
-            <a:off x="640080" y="2692908"/>
-            <a:ext cx="868680" cy="450342"/>
-          </a:xfrm>
-          <a:prstGeom prst="roundRect">
-            <a:avLst>
-              <a:gd name="adj" fmla="val 12183"/>
-            </a:avLst>
-          </a:prstGeom>
-          <a:solidFill>
-            <a:srgbClr val="7A3B2E"/>
-          </a:solidFill>
-          <a:ln/>
-        </p:spPr>
-      </p:sp>
-      <p:sp>
-        <p:nvSpPr>
-          <p:cNvPr id="10" name="Text 8"/>
-          <p:cNvSpPr/>
-          <p:nvPr/>
-        </p:nvSpPr>
-        <p:spPr>
-          <a:xfrm>
-            <a:off x="640080" y="2692908"/>
-            <a:ext cx="868680" cy="450342"/>
-          </a:xfrm>
-          <a:prstGeom prst="rect">
-            <a:avLst/>
-          </a:prstGeom>
-          <a:noFill/>
-          <a:ln/>
-        </p:spPr>
-        <p:txBody>
-          <a:bodyPr wrap="square" rtlCol="0" anchor="ctr"/>
-          <a:lstStyle/>
-          <a:p>
-            <a:pPr algn="ctr" indent="0" marL="0">
-              <a:buNone/>
-            </a:pPr>
-            <a:r>
-              <a:rPr lang="en-US" sz="1100" b="1" dirty="0">
-                <a:solidFill>
-                  <a:srgbClr val="FFFFFF"/>
-                </a:solidFill>
-                <a:latin typeface="Calibri" pitchFamily="34" charset="0"/>
-                <a:ea typeface="Calibri" pitchFamily="34" charset="-122"/>
-                <a:cs typeface="Calibri" pitchFamily="34" charset="-120"/>
-              </a:rPr>
-              <a:t>0:28</a:t>
-            </a:r>
-            <a:endParaRPr lang="en-US" sz="1100" dirty="0"/>
-          </a:p>
-        </p:txBody>
-      </p:sp>
-      <p:sp>
-        <p:nvSpPr>
-          <p:cNvPr id="11" name="Text 9"/>
-          <p:cNvSpPr/>
-          <p:nvPr/>
-        </p:nvSpPr>
-        <p:spPr>
-          <a:xfrm>
-            <a:off x="1691640" y="2674620"/>
-            <a:ext cx="9646920" cy="560070"/>
-          </a:xfrm>
-          <a:prstGeom prst="rect">
-            <a:avLst/>
-          </a:prstGeom>
-          <a:noFill/>
-          <a:ln/>
-        </p:spPr>
-        <p:txBody>
-          <a:bodyPr wrap="square" rtlCol="0" anchor="ctr">
-            <a:spAutoFit/>
-          </a:bodyPr>
-          <a:lstStyle/>
-          <a:p>
-            <a:pPr indent="0" marL="0">
-              <a:buNone/>
-            </a:pPr>
-            <a:r>
-              <a:rPr lang="en-US" sz="1100" dirty="0">
-                <a:solidFill>
-                  <a:srgbClr val="1A1A1A"/>
-                </a:solidFill>
-                <a:latin typeface="Calibri" pitchFamily="34" charset="0"/>
-                <a:ea typeface="Calibri" pitchFamily="34" charset="-122"/>
-                <a:cs typeface="Calibri" pitchFamily="34" charset="-120"/>
-              </a:rPr>
-              <a:t>Look at This, then Question It: She Giggles, He Gallops.</a:t>
-            </a:r>
-            <a:endParaRPr lang="en-US" sz="1100" dirty="0"/>
-          </a:p>
-        </p:txBody>
-      </p:sp>
-      <p:sp>
-        <p:nvSpPr>
-          <p:cNvPr id="12" name="Shape 10"/>
-          <p:cNvSpPr/>
-          <p:nvPr/>
-        </p:nvSpPr>
-        <p:spPr>
-          <a:xfrm>
-            <a:off x="640080" y="3252978"/>
-            <a:ext cx="868680" cy="450342"/>
-          </a:xfrm>
-          <a:prstGeom prst="roundRect">
-            <a:avLst>
-              <a:gd name="adj" fmla="val 12183"/>
-            </a:avLst>
-          </a:prstGeom>
-          <a:solidFill>
-            <a:srgbClr val="7A3B2E"/>
-          </a:solidFill>
-          <a:ln/>
-        </p:spPr>
-      </p:sp>
-      <p:sp>
-        <p:nvSpPr>
-          <p:cNvPr id="13" name="Text 11"/>
-          <p:cNvSpPr/>
-          <p:nvPr/>
-        </p:nvSpPr>
-        <p:spPr>
-          <a:xfrm>
-            <a:off x="640080" y="3252978"/>
-            <a:ext cx="868680" cy="450342"/>
-          </a:xfrm>
-          <a:prstGeom prst="rect">
-            <a:avLst/>
-          </a:prstGeom>
-          <a:noFill/>
-          <a:ln/>
-        </p:spPr>
-        <p:txBody>
-          <a:bodyPr wrap="square" rtlCol="0" anchor="ctr"/>
-          <a:lstStyle/>
-          <a:p>
-            <a:pPr algn="ctr" indent="0" marL="0">
-              <a:buNone/>
-            </a:pPr>
-            <a:r>
-              <a:rPr lang="en-US" sz="1100" b="1" dirty="0">
-                <a:solidFill>
-                  <a:srgbClr val="FFFFFF"/>
-                </a:solidFill>
-                <a:latin typeface="Calibri" pitchFamily="34" charset="0"/>
-                <a:ea typeface="Calibri" pitchFamily="34" charset="-122"/>
-                <a:cs typeface="Calibri" pitchFamily="34" charset="-120"/>
-              </a:rPr>
-              <a:t>0:35</a:t>
-            </a:r>
-            <a:endParaRPr lang="en-US" sz="1100" dirty="0"/>
-          </a:p>
-        </p:txBody>
-      </p:sp>
-      <p:sp>
-        <p:nvSpPr>
-          <p:cNvPr id="14" name="Text 12"/>
-          <p:cNvSpPr/>
-          <p:nvPr/>
-        </p:nvSpPr>
-        <p:spPr>
-          <a:xfrm>
-            <a:off x="1691640" y="3234690"/>
-            <a:ext cx="9646920" cy="560070"/>
-          </a:xfrm>
-          <a:prstGeom prst="rect">
-            <a:avLst/>
-          </a:prstGeom>
-          <a:noFill/>
-          <a:ln/>
-        </p:spPr>
-        <p:txBody>
-          <a:bodyPr wrap="square" rtlCol="0" anchor="ctr">
-            <a:spAutoFit/>
-          </a:bodyPr>
-          <a:lstStyle/>
-          <a:p>
-            <a:pPr indent="0" marL="0">
-              <a:buNone/>
-            </a:pPr>
-            <a:r>
-              <a:rPr lang="en-US" sz="1100" dirty="0">
-                <a:solidFill>
-                  <a:srgbClr val="1A1A1A"/>
-                </a:solidFill>
-                <a:latin typeface="Calibri" pitchFamily="34" charset="0"/>
-                <a:ea typeface="Calibri" pitchFamily="34" charset="-122"/>
-                <a:cs typeface="Calibri" pitchFamily="34" charset="-120"/>
-              </a:rPr>
-              <a:t>The vocabulary and the map (no code): corpus, method, model, embedding, plus what data itself is. A CSV, anatomized on screen (rows are observations, columns are recorded facts), and Drucker's correction: data is capta, taken not given. Two minutes in pairs: what did the makers of the wedding table take, and what did they leave out? The deliverable, shown: a web essay on a runnable notebook.</a:t>
-            </a:r>
-            <a:endParaRPr lang="en-US" sz="1100" dirty="0"/>
-          </a:p>
-        </p:txBody>
-      </p:sp>
-      <p:sp>
-        <p:nvSpPr>
-          <p:cNvPr id="15" name="Shape 13"/>
-          <p:cNvSpPr/>
-          <p:nvPr/>
-        </p:nvSpPr>
-        <p:spPr>
-          <a:xfrm>
-            <a:off x="640080" y="3813048"/>
-            <a:ext cx="868680" cy="450342"/>
-          </a:xfrm>
-          <a:prstGeom prst="roundRect">
-            <a:avLst>
-              <a:gd name="adj" fmla="val 12183"/>
-            </a:avLst>
-          </a:prstGeom>
-          <a:solidFill>
-            <a:srgbClr val="7A3B2E"/>
-          </a:solidFill>
-          <a:ln/>
-        </p:spPr>
-      </p:sp>
-      <p:sp>
-        <p:nvSpPr>
-          <p:cNvPr id="16" name="Text 14"/>
-          <p:cNvSpPr/>
-          <p:nvPr/>
-        </p:nvSpPr>
-        <p:spPr>
-          <a:xfrm>
-            <a:off x="640080" y="3813048"/>
-            <a:ext cx="868680" cy="450342"/>
-          </a:xfrm>
-          <a:prstGeom prst="rect">
-            <a:avLst/>
-          </a:prstGeom>
-          <a:noFill/>
-          <a:ln/>
-        </p:spPr>
-        <p:txBody>
-          <a:bodyPr wrap="square" rtlCol="0" anchor="ctr"/>
-          <a:lstStyle/>
-          <a:p>
-            <a:pPr algn="ctr" indent="0" marL="0">
-              <a:buNone/>
-            </a:pPr>
-            <a:r>
-              <a:rPr lang="en-US" sz="1100" b="1" dirty="0">
-                <a:solidFill>
-                  <a:srgbClr val="FFFFFF"/>
-                </a:solidFill>
-                <a:latin typeface="Calibri" pitchFamily="34" charset="0"/>
-                <a:ea typeface="Calibri" pitchFamily="34" charset="-122"/>
-                <a:cs typeface="Calibri" pitchFamily="34" charset="-120"/>
-              </a:rPr>
-              <a:t>0:47</a:t>
-            </a:r>
-            <a:endParaRPr lang="en-US" sz="1100" dirty="0"/>
-          </a:p>
-        </p:txBody>
-      </p:sp>
-      <p:sp>
-        <p:nvSpPr>
-          <p:cNvPr id="17" name="Text 15"/>
-          <p:cNvSpPr/>
-          <p:nvPr/>
-        </p:nvSpPr>
-        <p:spPr>
-          <a:xfrm>
-            <a:off x="1691640" y="3794760"/>
-            <a:ext cx="9646920" cy="560070"/>
-          </a:xfrm>
-          <a:prstGeom prst="rect">
-            <a:avLst/>
-          </a:prstGeom>
-          <a:noFill/>
-          <a:ln/>
-        </p:spPr>
-        <p:txBody>
-          <a:bodyPr wrap="square" rtlCol="0" anchor="ctr">
-            <a:spAutoFit/>
-          </a:bodyPr>
-          <a:lstStyle/>
-          <a:p>
-            <a:pPr indent="0" marL="0">
-              <a:buNone/>
-            </a:pPr>
-            <a:r>
-              <a:rPr lang="en-US" sz="1100" dirty="0">
-                <a:solidFill>
-                  <a:srgbClr val="1A1A1A"/>
-                </a:solidFill>
-                <a:latin typeface="Calibri" pitchFamily="34" charset="0"/>
-                <a:ea typeface="Calibri" pitchFamily="34" charset="-122"/>
-                <a:cs typeface="Calibri" pitchFamily="34" charset="-120"/>
-              </a:rPr>
-              <a:t>Lab 1 (worked, participatory): copy the notebook to Drive and mount Drive into the runtime (this is how your corpus and results survive Colab wiping the session, everything saving to one project folder), put a Gemini key in Colab Secrets, load NYT wedding data, make a first chart. Hand out the common-errors cheat sheet. Then solo with a partner: draft three questions, pick one, have the AI write the code, run it, chart it. Write one sentence predicting your cell before you run it.</a:t>
-            </a:r>
-            <a:endParaRPr lang="en-US" sz="1100" dirty="0"/>
-          </a:p>
-        </p:txBody>
-      </p:sp>
-      <p:sp>
-        <p:nvSpPr>
-          <p:cNvPr id="18" name="Shape 16"/>
-          <p:cNvSpPr/>
-          <p:nvPr/>
-        </p:nvSpPr>
-        <p:spPr>
-          <a:xfrm>
-            <a:off x="640080" y="4373118"/>
-            <a:ext cx="868680" cy="450342"/>
-          </a:xfrm>
-          <a:prstGeom prst="roundRect">
-            <a:avLst>
-              <a:gd name="adj" fmla="val 12183"/>
-            </a:avLst>
-          </a:prstGeom>
-          <a:solidFill>
-            <a:srgbClr val="7A3B2E"/>
-          </a:solidFill>
-          <a:ln/>
-        </p:spPr>
-      </p:sp>
-      <p:sp>
-        <p:nvSpPr>
-          <p:cNvPr id="19" name="Text 17"/>
-          <p:cNvSpPr/>
-          <p:nvPr/>
-        </p:nvSpPr>
-        <p:spPr>
-          <a:xfrm>
-            <a:off x="640080" y="4373118"/>
-            <a:ext cx="868680" cy="450342"/>
-          </a:xfrm>
-          <a:prstGeom prst="rect">
-            <a:avLst/>
-          </a:prstGeom>
-          <a:noFill/>
-          <a:ln/>
-        </p:spPr>
-        <p:txBody>
-          <a:bodyPr wrap="square" rtlCol="0" anchor="ctr"/>
-          <a:lstStyle/>
-          <a:p>
-            <a:pPr algn="ctr" indent="0" marL="0">
-              <a:buNone/>
-            </a:pPr>
-            <a:r>
-              <a:rPr lang="en-US" sz="1100" b="1" dirty="0">
-                <a:solidFill>
-                  <a:srgbClr val="FFFFFF"/>
-                </a:solidFill>
-                <a:latin typeface="Calibri" pitchFamily="34" charset="0"/>
-                <a:ea typeface="Calibri" pitchFamily="34" charset="-122"/>
-                <a:cs typeface="Calibri" pitchFamily="34" charset="-120"/>
-              </a:rPr>
-              <a:t>1:20</a:t>
-            </a:r>
-            <a:endParaRPr lang="en-US" sz="1100" dirty="0"/>
-          </a:p>
-        </p:txBody>
-      </p:sp>
-      <p:sp>
-        <p:nvSpPr>
-          <p:cNvPr id="20" name="Text 18"/>
-          <p:cNvSpPr/>
-          <p:nvPr/>
-        </p:nvSpPr>
-        <p:spPr>
-          <a:xfrm>
-            <a:off x="1691640" y="4354830"/>
-            <a:ext cx="9646920" cy="560070"/>
-          </a:xfrm>
-          <a:prstGeom prst="rect">
-            <a:avLst/>
-          </a:prstGeom>
-          <a:noFill/>
-          <a:ln/>
-        </p:spPr>
-        <p:txBody>
-          <a:bodyPr wrap="square" rtlCol="0" anchor="ctr">
-            <a:spAutoFit/>
-          </a:bodyPr>
-          <a:lstStyle/>
-          <a:p>
-            <a:pPr indent="0" marL="0">
-              <a:buNone/>
-            </a:pPr>
-            <a:r>
-              <a:rPr lang="en-US" sz="1100" dirty="0">
-                <a:solidFill>
-                  <a:srgbClr val="1A1A1A"/>
-                </a:solidFill>
-                <a:latin typeface="Calibri" pitchFamily="34" charset="0"/>
-                <a:ea typeface="Calibri" pitchFamily="34" charset="-122"/>
-                <a:cs typeface="Calibri" pitchFamily="34" charset="-120"/>
-              </a:rPr>
-              <a:t>Break</a:t>
-            </a:r>
-            <a:endParaRPr lang="en-US" sz="1100" dirty="0"/>
-          </a:p>
-        </p:txBody>
-      </p:sp>
-      <p:sp>
-        <p:nvSpPr>
-          <p:cNvPr id="21" name="Shape 19"/>
-          <p:cNvSpPr/>
-          <p:nvPr/>
-        </p:nvSpPr>
-        <p:spPr>
-          <a:xfrm>
-            <a:off x="640080" y="4933188"/>
-            <a:ext cx="868680" cy="450342"/>
-          </a:xfrm>
-          <a:prstGeom prst="roundRect">
-            <a:avLst>
-              <a:gd name="adj" fmla="val 12183"/>
-            </a:avLst>
-          </a:prstGeom>
-          <a:solidFill>
-            <a:srgbClr val="7A3B2E"/>
-          </a:solidFill>
-          <a:ln/>
-        </p:spPr>
-      </p:sp>
-      <p:sp>
-        <p:nvSpPr>
-          <p:cNvPr id="22" name="Text 20"/>
-          <p:cNvSpPr/>
-          <p:nvPr/>
-        </p:nvSpPr>
-        <p:spPr>
-          <a:xfrm>
-            <a:off x="640080" y="4933188"/>
-            <a:ext cx="868680" cy="450342"/>
-          </a:xfrm>
-          <a:prstGeom prst="rect">
-            <a:avLst/>
-          </a:prstGeom>
-          <a:noFill/>
-          <a:ln/>
-        </p:spPr>
-        <p:txBody>
-          <a:bodyPr wrap="square" rtlCol="0" anchor="ctr"/>
-          <a:lstStyle/>
-          <a:p>
-            <a:pPr algn="ctr" indent="0" marL="0">
-              <a:buNone/>
-            </a:pPr>
-            <a:r>
-              <a:rPr lang="en-US" sz="1100" b="1" dirty="0">
-                <a:solidFill>
-                  <a:srgbClr val="FFFFFF"/>
-                </a:solidFill>
-                <a:latin typeface="Calibri" pitchFamily="34" charset="0"/>
-                <a:ea typeface="Calibri" pitchFamily="34" charset="-122"/>
-                <a:cs typeface="Calibri" pitchFamily="34" charset="-120"/>
-              </a:rPr>
-              <a:t>1:30</a:t>
-            </a:r>
-            <a:endParaRPr lang="en-US" sz="1100" dirty="0"/>
-          </a:p>
-        </p:txBody>
-      </p:sp>
-      <p:sp>
-        <p:nvSpPr>
-          <p:cNvPr id="23" name="Text 21"/>
-          <p:cNvSpPr/>
-          <p:nvPr/>
-        </p:nvSpPr>
-        <p:spPr>
-          <a:xfrm>
-            <a:off x="1691640" y="4914900"/>
-            <a:ext cx="9646920" cy="560070"/>
-          </a:xfrm>
-          <a:prstGeom prst="rect">
-            <a:avLst/>
-          </a:prstGeom>
-          <a:noFill/>
-          <a:ln/>
-        </p:spPr>
-        <p:txBody>
-          <a:bodyPr wrap="square" rtlCol="0" anchor="ctr">
-            <a:spAutoFit/>
-          </a:bodyPr>
-          <a:lstStyle/>
-          <a:p>
-            <a:pPr indent="0" marL="0">
-              <a:buNone/>
-            </a:pPr>
-            <a:r>
-              <a:rPr lang="en-US" sz="1100" dirty="0">
-                <a:solidFill>
-                  <a:srgbClr val="1A1A1A"/>
-                </a:solidFill>
-                <a:latin typeface="Calibri" pitchFamily="34" charset="0"/>
-                <a:ea typeface="Calibri" pitchFamily="34" charset="-122"/>
-                <a:cs typeface="Calibri" pitchFamily="34" charset="-120"/>
-              </a:rPr>
-              <a:t>Lab 2 (worked): count words, then pixels. The real headlines' top words (stop-words dominate until removed, the first counting decision), then the Met image corpus ranked darkest to brightest by average brightness. The notebook's after-class half, defined color ranges and what every bag throws away, is this week's guided homework. Image projects begin here.</a:t>
-            </a:r>
-            <a:endParaRPr lang="en-US" sz="1100" dirty="0"/>
-          </a:p>
-        </p:txBody>
-      </p:sp>
-      <p:sp>
-        <p:nvSpPr>
-          <p:cNvPr id="24" name="Shape 22"/>
-          <p:cNvSpPr/>
-          <p:nvPr/>
-        </p:nvSpPr>
-        <p:spPr>
-          <a:xfrm>
-            <a:off x="640080" y="5493258"/>
-            <a:ext cx="868680" cy="450342"/>
-          </a:xfrm>
-          <a:prstGeom prst="roundRect">
-            <a:avLst>
-              <a:gd name="adj" fmla="val 12183"/>
-            </a:avLst>
-          </a:prstGeom>
-          <a:solidFill>
-            <a:srgbClr val="7A3B2E"/>
-          </a:solidFill>
-          <a:ln/>
-        </p:spPr>
-      </p:sp>
-      <p:sp>
-        <p:nvSpPr>
-          <p:cNvPr id="25" name="Text 23"/>
-          <p:cNvSpPr/>
-          <p:nvPr/>
-        </p:nvSpPr>
-        <p:spPr>
-          <a:xfrm>
-            <a:off x="640080" y="5493258"/>
-            <a:ext cx="868680" cy="450342"/>
-          </a:xfrm>
-          <a:prstGeom prst="rect">
-            <a:avLst/>
-          </a:prstGeom>
-          <a:noFill/>
-          <a:ln/>
-        </p:spPr>
-        <p:txBody>
-          <a:bodyPr wrap="square" rtlCol="0" anchor="ctr"/>
-          <a:lstStyle/>
-          <a:p>
-            <a:pPr algn="ctr" indent="0" marL="0">
-              <a:buNone/>
-            </a:pPr>
-            <a:r>
-              <a:rPr lang="en-US" sz="1100" b="1" dirty="0">
-                <a:solidFill>
-                  <a:srgbClr val="FFFFFF"/>
-                </a:solidFill>
-                <a:latin typeface="Calibri" pitchFamily="34" charset="0"/>
-                <a:ea typeface="Calibri" pitchFamily="34" charset="-122"/>
-                <a:cs typeface="Calibri" pitchFamily="34" charset="-120"/>
-              </a:rPr>
-              <a:t>1:52</a:t>
-            </a:r>
-            <a:endParaRPr lang="en-US" sz="1100" dirty="0"/>
-          </a:p>
-        </p:txBody>
-      </p:sp>
-      <p:sp>
-        <p:nvSpPr>
-          <p:cNvPr id="26" name="Text 24"/>
-          <p:cNvSpPr/>
-          <p:nvPr/>
-        </p:nvSpPr>
-        <p:spPr>
-          <a:xfrm>
-            <a:off x="1691640" y="5474970"/>
-            <a:ext cx="9646920" cy="560070"/>
-          </a:xfrm>
-          <a:prstGeom prst="rect">
-            <a:avLst/>
-          </a:prstGeom>
-          <a:noFill/>
-          <a:ln/>
-        </p:spPr>
-        <p:txBody>
-          <a:bodyPr wrap="square" rtlCol="0" anchor="ctr">
-            <a:spAutoFit/>
-          </a:bodyPr>
-          <a:lstStyle/>
-          <a:p>
-            <a:pPr indent="0" marL="0">
-              <a:buNone/>
-            </a:pPr>
-            <a:r>
-              <a:rPr lang="en-US" sz="1100" dirty="0">
-                <a:solidFill>
-                  <a:srgbClr val="1A1A1A"/>
-                </a:solidFill>
-                <a:latin typeface="Calibri" pitchFamily="34" charset="0"/>
-                <a:ea typeface="Calibri" pitchFamily="34" charset="-122"/>
-                <a:cs typeface="Calibri" pitchFamily="34" charset="-120"/>
-              </a:rPr>
-              <a:t>Preview of the methods ahead; the weekly routines introduced. First check-out.</a:t>
-            </a:r>
-            <a:endParaRPr lang="en-US" sz="1100" dirty="0"/>
+              <a:t>Interrogate the study, debate it, or critique each other's work.</a:t>
+            </a:r>
+            <a:endParaRPr lang="en-US" sz="1500" dirty="0"/>
           </a:p>
         </p:txBody>
       </p:sp>
@@ -5960,7 +5614,7 @@
                 <a:ea typeface="Cambria" pitchFamily="34" charset="-122"/>
                 <a:cs typeface="Cambria" pitchFamily="34" charset="-120"/>
               </a:rPr>
-              <a:t>Reading &amp; homework</a:t>
+              <a:t>The session</a:t>
             </a:r>
             <a:endParaRPr lang="en-US" sz="3000" dirty="0"/>
           </a:p>
@@ -5974,11 +5628,13 @@
         </p:nvSpPr>
         <p:spPr>
           <a:xfrm>
-            <a:off x="640080" y="1673352"/>
-            <a:ext cx="219456" cy="219456"/>
-          </a:xfrm>
-          <a:prstGeom prst="ellipse">
-            <a:avLst/>
+            <a:off x="640080" y="1572768"/>
+            <a:ext cx="868680" cy="450342"/>
+          </a:xfrm>
+          <a:prstGeom prst="roundRect">
+            <a:avLst>
+              <a:gd name="adj" fmla="val 12183"/>
+            </a:avLst>
           </a:prstGeom>
           <a:solidFill>
             <a:srgbClr val="7A3B2E"/>
@@ -5994,8 +5650,8 @@
         </p:nvSpPr>
         <p:spPr>
           <a:xfrm>
-            <a:off x="1051560" y="1600200"/>
-            <a:ext cx="10424160" cy="365760"/>
+            <a:off x="640080" y="1572768"/>
+            <a:ext cx="868680" cy="450342"/>
           </a:xfrm>
           <a:prstGeom prst="rect">
             <a:avLst/>
@@ -6007,21 +5663,21 @@
           <a:bodyPr wrap="square" rtlCol="0" anchor="ctr"/>
           <a:lstStyle/>
           <a:p>
-            <a:pPr indent="0" marL="0">
-              <a:buNone/>
-            </a:pPr>
-            <a:r>
-              <a:rPr lang="en-US" sz="1500" b="1" dirty="0">
-                <a:solidFill>
-                  <a:srgbClr val="7A3B2E"/>
+            <a:pPr algn="ctr" indent="0" marL="0">
+              <a:buNone/>
+            </a:pPr>
+            <a:r>
+              <a:rPr lang="en-US" sz="1100" b="1" dirty="0">
+                <a:solidFill>
+                  <a:srgbClr val="FFFFFF"/>
                 </a:solidFill>
                 <a:latin typeface="Calibri" pitchFamily="34" charset="0"/>
                 <a:ea typeface="Calibri" pitchFamily="34" charset="-122"/>
                 <a:cs typeface="Calibri" pitchFamily="34" charset="-120"/>
               </a:rPr>
-              <a:t>Reading</a:t>
-            </a:r>
-            <a:endParaRPr lang="en-US" sz="1500" dirty="0"/>
+              <a:t>0:00</a:t>
+            </a:r>
+            <a:endParaRPr lang="en-US" sz="1100" dirty="0"/>
           </a:p>
         </p:txBody>
       </p:sp>
@@ -6033,17 +5689,17 @@
         </p:nvSpPr>
         <p:spPr>
           <a:xfrm>
-            <a:off x="1051560" y="1984248"/>
-            <a:ext cx="10424160" cy="731520"/>
-          </a:xfrm>
-          <a:prstGeom prst="rect">
-            <a:avLst/>
-          </a:prstGeom>
-          <a:noFill/>
-          <a:ln/>
-        </p:spPr>
-        <p:txBody>
-          <a:bodyPr wrap="square" rtlCol="0" anchor="t">
+            <a:off x="1691640" y="1554480"/>
+            <a:ext cx="9646920" cy="560070"/>
+          </a:xfrm>
+          <a:prstGeom prst="rect">
+            <a:avLst/>
+          </a:prstGeom>
+          <a:noFill/>
+          <a:ln/>
+        </p:spPr>
+        <p:txBody>
+          <a:bodyPr wrap="square" rtlCol="0" anchor="ctr">
             <a:spAutoFit/>
           </a:bodyPr>
           <a:lstStyle/>
@@ -6052,7 +5708,7 @@
               <a:buNone/>
             </a:pPr>
             <a:r>
-              <a:rPr lang="en-US" sz="1400" dirty="0">
+              <a:rPr lang="en-US" sz="1100" dirty="0">
                 <a:solidFill>
                   <a:srgbClr val="1A1A1A"/>
                 </a:solidFill>
@@ -6060,9 +5716,9 @@
                 <a:ea typeface="Calibri" pitchFamily="34" charset="-122"/>
                 <a:cs typeface="Calibri" pitchFamily="34" charset="-120"/>
               </a:rPr>
-              <a:t>Bollen et al., the cognitive-distortions hockey stick (PNAS 2021), with the Schmidt et al. critique</a:t>
-            </a:r>
-            <a:endParaRPr lang="en-US" sz="1400" dirty="0"/>
+              <a:t>Logistics, working agreements, and a one-round icebreaker: your name, one piece of culture you kept returning to this year, and one number about it you wish you knew. Today's live coding deliberately includes real mistakes.</a:t>
+            </a:r>
+            <a:endParaRPr lang="en-US" sz="1100" dirty="0"/>
           </a:p>
         </p:txBody>
       </p:sp>
@@ -6074,14 +5730,16 @@
         </p:nvSpPr>
         <p:spPr>
           <a:xfrm>
-            <a:off x="640080" y="2633472"/>
-            <a:ext cx="219456" cy="219456"/>
-          </a:xfrm>
-          <a:prstGeom prst="ellipse">
-            <a:avLst/>
-          </a:prstGeom>
-          <a:solidFill>
-            <a:srgbClr val="3F6F5F"/>
+            <a:off x="640080" y="2132838"/>
+            <a:ext cx="868680" cy="450342"/>
+          </a:xfrm>
+          <a:prstGeom prst="roundRect">
+            <a:avLst>
+              <a:gd name="adj" fmla="val 12183"/>
+            </a:avLst>
+          </a:prstGeom>
+          <a:solidFill>
+            <a:srgbClr val="7A3B2E"/>
           </a:solidFill>
           <a:ln/>
         </p:spPr>
@@ -6094,8 +5752,8 @@
         </p:nvSpPr>
         <p:spPr>
           <a:xfrm>
-            <a:off x="1051560" y="2560320"/>
-            <a:ext cx="10424160" cy="365760"/>
+            <a:off x="640080" y="2132838"/>
+            <a:ext cx="868680" cy="450342"/>
           </a:xfrm>
           <a:prstGeom prst="rect">
             <a:avLst/>
@@ -6107,21 +5765,21 @@
           <a:bodyPr wrap="square" rtlCol="0" anchor="ctr"/>
           <a:lstStyle/>
           <a:p>
-            <a:pPr indent="0" marL="0">
-              <a:buNone/>
-            </a:pPr>
-            <a:r>
-              <a:rPr lang="en-US" sz="1500" b="1" dirty="0">
-                <a:solidFill>
-                  <a:srgbClr val="3F6F5F"/>
+            <a:pPr algn="ctr" indent="0" marL="0">
+              <a:buNone/>
+            </a:pPr>
+            <a:r>
+              <a:rPr lang="en-US" sz="1100" b="1" dirty="0">
+                <a:solidFill>
+                  <a:srgbClr val="FFFFFF"/>
                 </a:solidFill>
                 <a:latin typeface="Calibri" pitchFamily="34" charset="0"/>
                 <a:ea typeface="Calibri" pitchFamily="34" charset="-122"/>
                 <a:cs typeface="Calibri" pitchFamily="34" charset="-120"/>
               </a:rPr>
-              <a:t>Supplement</a:t>
-            </a:r>
-            <a:endParaRPr lang="en-US" sz="1500" dirty="0"/>
+              <a:t>0:10</a:t>
+            </a:r>
+            <a:endParaRPr lang="en-US" sz="1100" dirty="0"/>
           </a:p>
         </p:txBody>
       </p:sp>
@@ -6133,17 +5791,17 @@
         </p:nvSpPr>
         <p:spPr>
           <a:xfrm>
-            <a:off x="1051560" y="2944368"/>
-            <a:ext cx="10424160" cy="731520"/>
-          </a:xfrm>
-          <a:prstGeom prst="rect">
-            <a:avLst/>
-          </a:prstGeom>
-          <a:noFill/>
-          <a:ln/>
-        </p:spPr>
-        <p:txBody>
-          <a:bodyPr wrap="square" rtlCol="0" anchor="t">
+            <a:off x="1691640" y="2114550"/>
+            <a:ext cx="9646920" cy="560070"/>
+          </a:xfrm>
+          <a:prstGeom prst="rect">
+            <a:avLst/>
+          </a:prstGeom>
+          <a:noFill/>
+          <a:ln/>
+        </p:spPr>
+        <p:txBody>
+          <a:bodyPr wrap="square" rtlCol="0" anchor="ctr">
             <a:spAutoFit/>
           </a:bodyPr>
           <a:lstStyle/>
@@ -6152,7 +5810,7 @@
               <a:buNone/>
             </a:pPr>
             <a:r>
-              <a:rPr lang="en-US" sz="1400" dirty="0">
+              <a:rPr lang="en-US" sz="1100" dirty="0">
                 <a:solidFill>
                   <a:srgbClr val="1A1A1A"/>
                 </a:solidFill>
@@ -6160,9 +5818,9 @@
                 <a:ea typeface="Calibri" pitchFamily="34" charset="-122"/>
                 <a:cs typeface="Calibri" pitchFamily="34" charset="-120"/>
               </a:rPr>
-              <a:t>Robin Sloan, Writing with the machine; Drucker, Humanities Approaches to Graphical Display (DHQ 2011), the case that all data is capta</a:t>
-            </a:r>
-            <a:endParaRPr lang="en-US" sz="1400" dirty="0"/>
+              <a:t>Lecture, the stakes: machines already read culture at scale, the feed ranking what you see, the moderation filter, the model trained on scraped art and prose, and that reading happens without you. Counting culture has produced real knowledge (the screenplay verb split, the Rowling unmasking, pop music's 1991 revolution) and real mistakes, and both look identical until someone checks. In ten weeks you do the reading yourself and publish something checkable.</a:t>
+            </a:r>
+            <a:endParaRPr lang="en-US" sz="1100" dirty="0"/>
           </a:p>
         </p:txBody>
       </p:sp>
@@ -6174,14 +5832,16 @@
         </p:nvSpPr>
         <p:spPr>
           <a:xfrm>
-            <a:off x="640080" y="3593592"/>
-            <a:ext cx="219456" cy="219456"/>
-          </a:xfrm>
-          <a:prstGeom prst="ellipse">
-            <a:avLst/>
-          </a:prstGeom>
-          <a:solidFill>
-            <a:srgbClr val="B9852F"/>
+            <a:off x="640080" y="2692908"/>
+            <a:ext cx="868680" cy="450342"/>
+          </a:xfrm>
+          <a:prstGeom prst="roundRect">
+            <a:avLst>
+              <a:gd name="adj" fmla="val 12183"/>
+            </a:avLst>
+          </a:prstGeom>
+          <a:solidFill>
+            <a:srgbClr val="7A3B2E"/>
           </a:solidFill>
           <a:ln/>
         </p:spPr>
@@ -6194,8 +5854,8 @@
         </p:nvSpPr>
         <p:spPr>
           <a:xfrm>
-            <a:off x="1051560" y="3520440"/>
-            <a:ext cx="10424160" cy="365760"/>
+            <a:off x="640080" y="2692908"/>
+            <a:ext cx="868680" cy="450342"/>
           </a:xfrm>
           <a:prstGeom prst="rect">
             <a:avLst/>
@@ -6207,21 +5867,21 @@
           <a:bodyPr wrap="square" rtlCol="0" anchor="ctr"/>
           <a:lstStyle/>
           <a:p>
-            <a:pPr indent="0" marL="0">
-              <a:buNone/>
-            </a:pPr>
-            <a:r>
-              <a:rPr lang="en-US" sz="1500" b="1" dirty="0">
-                <a:solidFill>
-                  <a:srgbClr val="B9852F"/>
+            <a:pPr algn="ctr" indent="0" marL="0">
+              <a:buNone/>
+            </a:pPr>
+            <a:r>
+              <a:rPr lang="en-US" sz="1100" b="1" dirty="0">
+                <a:solidFill>
+                  <a:srgbClr val="FFFFFF"/>
                 </a:solidFill>
                 <a:latin typeface="Calibri" pitchFamily="34" charset="0"/>
                 <a:ea typeface="Calibri" pitchFamily="34" charset="-122"/>
                 <a:cs typeface="Calibri" pitchFamily="34" charset="-120"/>
               </a:rPr>
-              <a:t>Deeper (optional)</a:t>
-            </a:r>
-            <a:endParaRPr lang="en-US" sz="1500" dirty="0"/>
+              <a:t>0:28</a:t>
+            </a:r>
+            <a:endParaRPr lang="en-US" sz="1100" dirty="0"/>
           </a:p>
         </p:txBody>
       </p:sp>
@@ -6233,17 +5893,17 @@
         </p:nvSpPr>
         <p:spPr>
           <a:xfrm>
-            <a:off x="1051560" y="3904488"/>
-            <a:ext cx="10424160" cy="731520"/>
-          </a:xfrm>
-          <a:prstGeom prst="rect">
-            <a:avLst/>
-          </a:prstGeom>
-          <a:noFill/>
-          <a:ln/>
-        </p:spPr>
-        <p:txBody>
-          <a:bodyPr wrap="square" rtlCol="0" anchor="t">
+            <a:off x="1691640" y="2674620"/>
+            <a:ext cx="9646920" cy="560070"/>
+          </a:xfrm>
+          <a:prstGeom prst="rect">
+            <a:avLst/>
+          </a:prstGeom>
+          <a:noFill/>
+          <a:ln/>
+        </p:spPr>
+        <p:txBody>
+          <a:bodyPr wrap="square" rtlCol="0" anchor="ctr">
             <a:spAutoFit/>
           </a:bodyPr>
           <a:lstStyle/>
@@ -6252,7 +5912,7 @@
               <a:buNone/>
             </a:pPr>
             <a:r>
-              <a:rPr lang="en-US" sz="1400" dirty="0">
+              <a:rPr lang="en-US" sz="1100" dirty="0">
                 <a:solidFill>
                   <a:srgbClr val="1A1A1A"/>
                 </a:solidFill>
@@ -6260,9 +5920,9 @@
                 <a:ea typeface="Calibri" pitchFamily="34" charset="-122"/>
                 <a:cs typeface="Calibri" pitchFamily="34" charset="-120"/>
               </a:rPr>
-              <a:t>Moretti, Conjectures on World Literature (NLR 2000), the founding argument for reading culture at scale</a:t>
-            </a:r>
-            <a:endParaRPr lang="en-US" sz="1400" dirty="0"/>
+              <a:t>Look at This, then Question It: She Giggles, He Gallops.</a:t>
+            </a:r>
+            <a:endParaRPr lang="en-US" sz="1100" dirty="0"/>
           </a:p>
         </p:txBody>
       </p:sp>
@@ -6274,14 +5934,16 @@
         </p:nvSpPr>
         <p:spPr>
           <a:xfrm>
-            <a:off x="640080" y="4553712"/>
-            <a:ext cx="219456" cy="219456"/>
-          </a:xfrm>
-          <a:prstGeom prst="ellipse">
-            <a:avLst/>
-          </a:prstGeom>
-          <a:solidFill>
-            <a:srgbClr val="3F6F5F"/>
+            <a:off x="640080" y="3252978"/>
+            <a:ext cx="868680" cy="450342"/>
+          </a:xfrm>
+          <a:prstGeom prst="roundRect">
+            <a:avLst>
+              <a:gd name="adj" fmla="val 12183"/>
+            </a:avLst>
+          </a:prstGeom>
+          <a:solidFill>
+            <a:srgbClr val="7A3B2E"/>
           </a:solidFill>
           <a:ln/>
         </p:spPr>
@@ -6294,8 +5956,8 @@
         </p:nvSpPr>
         <p:spPr>
           <a:xfrm>
-            <a:off x="1051560" y="4480560"/>
-            <a:ext cx="10424160" cy="365760"/>
+            <a:off x="640080" y="3252978"/>
+            <a:ext cx="868680" cy="450342"/>
           </a:xfrm>
           <a:prstGeom prst="rect">
             <a:avLst/>
@@ -6307,21 +5969,21 @@
           <a:bodyPr wrap="square" rtlCol="0" anchor="ctr"/>
           <a:lstStyle/>
           <a:p>
-            <a:pPr indent="0" marL="0">
-              <a:buNone/>
-            </a:pPr>
-            <a:r>
-              <a:rPr lang="en-US" sz="1500" b="1" dirty="0">
-                <a:solidFill>
-                  <a:srgbClr val="3F6F5F"/>
+            <a:pPr algn="ctr" indent="0" marL="0">
+              <a:buNone/>
+            </a:pPr>
+            <a:r>
+              <a:rPr lang="en-US" sz="1100" b="1" dirty="0">
+                <a:solidFill>
+                  <a:srgbClr val="FFFFFF"/>
                 </a:solidFill>
                 <a:latin typeface="Calibri" pitchFamily="34" charset="0"/>
                 <a:ea typeface="Calibri" pitchFamily="34" charset="-122"/>
                 <a:cs typeface="Calibri" pitchFamily="34" charset="-120"/>
               </a:rPr>
-              <a:t>Sketch</a:t>
-            </a:r>
-            <a:endParaRPr lang="en-US" sz="1500" dirty="0"/>
+              <a:t>0:35</a:t>
+            </a:r>
+            <a:endParaRPr lang="en-US" sz="1100" dirty="0"/>
           </a:p>
         </p:txBody>
       </p:sp>
@@ -6333,17 +5995,17 @@
         </p:nvSpPr>
         <p:spPr>
           <a:xfrm>
-            <a:off x="1051560" y="4864608"/>
-            <a:ext cx="10424160" cy="731520"/>
-          </a:xfrm>
-          <a:prstGeom prst="rect">
-            <a:avLst/>
-          </a:prstGeom>
-          <a:noFill/>
-          <a:ln/>
-        </p:spPr>
-        <p:txBody>
-          <a:bodyPr wrap="square" rtlCol="0" anchor="t">
+            <a:off x="1691640" y="3234690"/>
+            <a:ext cx="9646920" cy="560070"/>
+          </a:xfrm>
+          <a:prstGeom prst="rect">
+            <a:avLst/>
+          </a:prstGeom>
+          <a:noFill/>
+          <a:ln/>
+        </p:spPr>
+        <p:txBody>
+          <a:bodyPr wrap="square" rtlCol="0" anchor="ctr">
             <a:spAutoFit/>
           </a:bodyPr>
           <a:lstStyle/>
@@ -6352,7 +6014,7 @@
               <a:buNone/>
             </a:pPr>
             <a:r>
-              <a:rPr lang="en-US" sz="1400" dirty="0">
+              <a:rPr lang="en-US" sz="1100" dirty="0">
                 <a:solidFill>
                   <a:srgbClr val="1A1A1A"/>
                 </a:solidFill>
@@ -6360,9 +6022,9 @@
                 <a:ea typeface="Calibri" pitchFamily="34" charset="-122"/>
                 <a:cs typeface="Calibri" pitchFamily="34" charset="-120"/>
               </a:rPr>
-              <a:t>A favorite Pudding piece and what it counted; the question from your life it inspires; the notebook's after-class half (~20 minutes).</a:t>
-            </a:r>
-            <a:endParaRPr lang="en-US" sz="1400" dirty="0"/>
+              <a:t>The vocabulary and the map (no code): corpus, method, model, embedding, plus what data itself is. A CSV, anatomized on screen (rows are observations, columns are recorded facts), and Drucker's correction: data is capta, taken not given. Two minutes in pairs: what did the makers of the wedding table take, and what did they leave out? The deliverable, shown: a web essay on a runnable notebook.</a:t>
+            </a:r>
+            <a:endParaRPr lang="en-US" sz="1100" dirty="0"/>
           </a:p>
         </p:txBody>
       </p:sp>
@@ -6374,11 +6036,13 @@
         </p:nvSpPr>
         <p:spPr>
           <a:xfrm>
-            <a:off x="640080" y="5513832"/>
-            <a:ext cx="219456" cy="219456"/>
-          </a:xfrm>
-          <a:prstGeom prst="ellipse">
-            <a:avLst/>
+            <a:off x="640080" y="3813048"/>
+            <a:ext cx="868680" cy="450342"/>
+          </a:xfrm>
+          <a:prstGeom prst="roundRect">
+            <a:avLst>
+              <a:gd name="adj" fmla="val 12183"/>
+            </a:avLst>
           </a:prstGeom>
           <a:solidFill>
             <a:srgbClr val="7A3B2E"/>
@@ -6394,8 +6058,8 @@
         </p:nvSpPr>
         <p:spPr>
           <a:xfrm>
-            <a:off x="1051560" y="5440680"/>
-            <a:ext cx="10424160" cy="365760"/>
+            <a:off x="640080" y="3813048"/>
+            <a:ext cx="868680" cy="450342"/>
           </a:xfrm>
           <a:prstGeom prst="rect">
             <a:avLst/>
@@ -6407,21 +6071,21 @@
           <a:bodyPr wrap="square" rtlCol="0" anchor="ctr"/>
           <a:lstStyle/>
           <a:p>
-            <a:pPr indent="0" marL="0">
-              <a:buNone/>
-            </a:pPr>
-            <a:r>
-              <a:rPr lang="en-US" sz="1500" b="1" dirty="0">
-                <a:solidFill>
-                  <a:srgbClr val="7A3B2E"/>
+            <a:pPr algn="ctr" indent="0" marL="0">
+              <a:buNone/>
+            </a:pPr>
+            <a:r>
+              <a:rPr lang="en-US" sz="1100" b="1" dirty="0">
+                <a:solidFill>
+                  <a:srgbClr val="FFFFFF"/>
                 </a:solidFill>
                 <a:latin typeface="Calibri" pitchFamily="34" charset="0"/>
                 <a:ea typeface="Calibri" pitchFamily="34" charset="-122"/>
                 <a:cs typeface="Calibri" pitchFamily="34" charset="-120"/>
               </a:rPr>
-              <a:t>Check (AI closed)</a:t>
-            </a:r>
-            <a:endParaRPr lang="en-US" sz="1500" dirty="0"/>
+              <a:t>0:47</a:t>
+            </a:r>
+            <a:endParaRPr lang="en-US" sz="1100" dirty="0"/>
           </a:p>
         </p:txBody>
       </p:sp>
@@ -6433,17 +6097,17 @@
         </p:nvSpPr>
         <p:spPr>
           <a:xfrm>
-            <a:off x="1051560" y="5824728"/>
-            <a:ext cx="10424160" cy="731520"/>
-          </a:xfrm>
-          <a:prstGeom prst="rect">
-            <a:avLst/>
-          </a:prstGeom>
-          <a:noFill/>
-          <a:ln/>
-        </p:spPr>
-        <p:txBody>
-          <a:bodyPr wrap="square" rtlCol="0" anchor="t">
+            <a:off x="1691640" y="3794760"/>
+            <a:ext cx="9646920" cy="560070"/>
+          </a:xfrm>
+          <a:prstGeom prst="rect">
+            <a:avLst/>
+          </a:prstGeom>
+          <a:noFill/>
+          <a:ln/>
+        </p:spPr>
+        <p:txBody>
+          <a:bodyPr wrap="square" rtlCol="0" anchor="ctr">
             <a:spAutoFit/>
           </a:bodyPr>
           <a:lstStyle/>
@@ -6452,7 +6116,7 @@
               <a:buNone/>
             </a:pPr>
             <a:r>
-              <a:rPr lang="en-US" sz="1400" dirty="0">
+              <a:rPr lang="en-US" sz="1100" dirty="0">
                 <a:solidFill>
                   <a:srgbClr val="1A1A1A"/>
                 </a:solidFill>
@@ -6460,9 +6124,315 @@
                 <a:ea typeface="Calibri" pitchFamily="34" charset="-122"/>
                 <a:cs typeface="Calibri" pitchFamily="34" charset="-120"/>
               </a:rPr>
-              <a:t>Trace it: one written sentence predicting what your cell does before you run it. (Competency 1.)</a:t>
-            </a:r>
-            <a:endParaRPr lang="en-US" sz="1400" dirty="0"/>
+              <a:t>Lab 1 (worked, participatory): copy the notebook to Drive and mount Drive into the runtime (this is how your corpus and results survive Colab wiping the session, everything saving to one project folder), put a Gemini key in Colab Secrets, load NYT wedding data, make a first chart. Hand out the common-errors cheat sheet. Then solo with a partner: draft three questions, pick one, have the AI write the code, run it, chart it. Write one sentence predicting your cell before you run it.</a:t>
+            </a:r>
+            <a:endParaRPr lang="en-US" sz="1100" dirty="0"/>
+          </a:p>
+        </p:txBody>
+      </p:sp>
+      <p:sp>
+        <p:nvSpPr>
+          <p:cNvPr id="18" name="Shape 16"/>
+          <p:cNvSpPr/>
+          <p:nvPr/>
+        </p:nvSpPr>
+        <p:spPr>
+          <a:xfrm>
+            <a:off x="640080" y="4373118"/>
+            <a:ext cx="868680" cy="450342"/>
+          </a:xfrm>
+          <a:prstGeom prst="roundRect">
+            <a:avLst>
+              <a:gd name="adj" fmla="val 12183"/>
+            </a:avLst>
+          </a:prstGeom>
+          <a:solidFill>
+            <a:srgbClr val="7A3B2E"/>
+          </a:solidFill>
+          <a:ln/>
+        </p:spPr>
+      </p:sp>
+      <p:sp>
+        <p:nvSpPr>
+          <p:cNvPr id="19" name="Text 17"/>
+          <p:cNvSpPr/>
+          <p:nvPr/>
+        </p:nvSpPr>
+        <p:spPr>
+          <a:xfrm>
+            <a:off x="640080" y="4373118"/>
+            <a:ext cx="868680" cy="450342"/>
+          </a:xfrm>
+          <a:prstGeom prst="rect">
+            <a:avLst/>
+          </a:prstGeom>
+          <a:noFill/>
+          <a:ln/>
+        </p:spPr>
+        <p:txBody>
+          <a:bodyPr wrap="square" rtlCol="0" anchor="ctr"/>
+          <a:lstStyle/>
+          <a:p>
+            <a:pPr algn="ctr" indent="0" marL="0">
+              <a:buNone/>
+            </a:pPr>
+            <a:r>
+              <a:rPr lang="en-US" sz="1100" b="1" dirty="0">
+                <a:solidFill>
+                  <a:srgbClr val="FFFFFF"/>
+                </a:solidFill>
+                <a:latin typeface="Calibri" pitchFamily="34" charset="0"/>
+                <a:ea typeface="Calibri" pitchFamily="34" charset="-122"/>
+                <a:cs typeface="Calibri" pitchFamily="34" charset="-120"/>
+              </a:rPr>
+              <a:t>1:20</a:t>
+            </a:r>
+            <a:endParaRPr lang="en-US" sz="1100" dirty="0"/>
+          </a:p>
+        </p:txBody>
+      </p:sp>
+      <p:sp>
+        <p:nvSpPr>
+          <p:cNvPr id="20" name="Text 18"/>
+          <p:cNvSpPr/>
+          <p:nvPr/>
+        </p:nvSpPr>
+        <p:spPr>
+          <a:xfrm>
+            <a:off x="1691640" y="4354830"/>
+            <a:ext cx="9646920" cy="560070"/>
+          </a:xfrm>
+          <a:prstGeom prst="rect">
+            <a:avLst/>
+          </a:prstGeom>
+          <a:noFill/>
+          <a:ln/>
+        </p:spPr>
+        <p:txBody>
+          <a:bodyPr wrap="square" rtlCol="0" anchor="ctr">
+            <a:spAutoFit/>
+          </a:bodyPr>
+          <a:lstStyle/>
+          <a:p>
+            <a:pPr indent="0" marL="0">
+              <a:buNone/>
+            </a:pPr>
+            <a:r>
+              <a:rPr lang="en-US" sz="1100" dirty="0">
+                <a:solidFill>
+                  <a:srgbClr val="1A1A1A"/>
+                </a:solidFill>
+                <a:latin typeface="Calibri" pitchFamily="34" charset="0"/>
+                <a:ea typeface="Calibri" pitchFamily="34" charset="-122"/>
+                <a:cs typeface="Calibri" pitchFamily="34" charset="-120"/>
+              </a:rPr>
+              <a:t>Break</a:t>
+            </a:r>
+            <a:endParaRPr lang="en-US" sz="1100" dirty="0"/>
+          </a:p>
+        </p:txBody>
+      </p:sp>
+      <p:sp>
+        <p:nvSpPr>
+          <p:cNvPr id="21" name="Shape 19"/>
+          <p:cNvSpPr/>
+          <p:nvPr/>
+        </p:nvSpPr>
+        <p:spPr>
+          <a:xfrm>
+            <a:off x="640080" y="4933188"/>
+            <a:ext cx="868680" cy="450342"/>
+          </a:xfrm>
+          <a:prstGeom prst="roundRect">
+            <a:avLst>
+              <a:gd name="adj" fmla="val 12183"/>
+            </a:avLst>
+          </a:prstGeom>
+          <a:solidFill>
+            <a:srgbClr val="7A3B2E"/>
+          </a:solidFill>
+          <a:ln/>
+        </p:spPr>
+      </p:sp>
+      <p:sp>
+        <p:nvSpPr>
+          <p:cNvPr id="22" name="Text 20"/>
+          <p:cNvSpPr/>
+          <p:nvPr/>
+        </p:nvSpPr>
+        <p:spPr>
+          <a:xfrm>
+            <a:off x="640080" y="4933188"/>
+            <a:ext cx="868680" cy="450342"/>
+          </a:xfrm>
+          <a:prstGeom prst="rect">
+            <a:avLst/>
+          </a:prstGeom>
+          <a:noFill/>
+          <a:ln/>
+        </p:spPr>
+        <p:txBody>
+          <a:bodyPr wrap="square" rtlCol="0" anchor="ctr"/>
+          <a:lstStyle/>
+          <a:p>
+            <a:pPr algn="ctr" indent="0" marL="0">
+              <a:buNone/>
+            </a:pPr>
+            <a:r>
+              <a:rPr lang="en-US" sz="1100" b="1" dirty="0">
+                <a:solidFill>
+                  <a:srgbClr val="FFFFFF"/>
+                </a:solidFill>
+                <a:latin typeface="Calibri" pitchFamily="34" charset="0"/>
+                <a:ea typeface="Calibri" pitchFamily="34" charset="-122"/>
+                <a:cs typeface="Calibri" pitchFamily="34" charset="-120"/>
+              </a:rPr>
+              <a:t>1:30</a:t>
+            </a:r>
+            <a:endParaRPr lang="en-US" sz="1100" dirty="0"/>
+          </a:p>
+        </p:txBody>
+      </p:sp>
+      <p:sp>
+        <p:nvSpPr>
+          <p:cNvPr id="23" name="Text 21"/>
+          <p:cNvSpPr/>
+          <p:nvPr/>
+        </p:nvSpPr>
+        <p:spPr>
+          <a:xfrm>
+            <a:off x="1691640" y="4914900"/>
+            <a:ext cx="9646920" cy="560070"/>
+          </a:xfrm>
+          <a:prstGeom prst="rect">
+            <a:avLst/>
+          </a:prstGeom>
+          <a:noFill/>
+          <a:ln/>
+        </p:spPr>
+        <p:txBody>
+          <a:bodyPr wrap="square" rtlCol="0" anchor="ctr">
+            <a:spAutoFit/>
+          </a:bodyPr>
+          <a:lstStyle/>
+          <a:p>
+            <a:pPr indent="0" marL="0">
+              <a:buNone/>
+            </a:pPr>
+            <a:r>
+              <a:rPr lang="en-US" sz="1100" dirty="0">
+                <a:solidFill>
+                  <a:srgbClr val="1A1A1A"/>
+                </a:solidFill>
+                <a:latin typeface="Calibri" pitchFamily="34" charset="0"/>
+                <a:ea typeface="Calibri" pitchFamily="34" charset="-122"/>
+                <a:cs typeface="Calibri" pitchFamily="34" charset="-120"/>
+              </a:rPr>
+              <a:t>Lab 2 (worked): count words, then pixels. Shakespeare's 154 sonnets: thy and thou top the count until the stop list learns the corpus, then love, beauty, and time surface. Then the Met image corpus ranked darkest to brightest by average brightness. The notebook's after-class half, defined color ranges and Sonnet 130's bag against the poem itself, is this week's guided homework. Image projects begin here.</a:t>
+            </a:r>
+            <a:endParaRPr lang="en-US" sz="1100" dirty="0"/>
+          </a:p>
+        </p:txBody>
+      </p:sp>
+      <p:sp>
+        <p:nvSpPr>
+          <p:cNvPr id="24" name="Shape 22"/>
+          <p:cNvSpPr/>
+          <p:nvPr/>
+        </p:nvSpPr>
+        <p:spPr>
+          <a:xfrm>
+            <a:off x="640080" y="5493258"/>
+            <a:ext cx="868680" cy="450342"/>
+          </a:xfrm>
+          <a:prstGeom prst="roundRect">
+            <a:avLst>
+              <a:gd name="adj" fmla="val 12183"/>
+            </a:avLst>
+          </a:prstGeom>
+          <a:solidFill>
+            <a:srgbClr val="7A3B2E"/>
+          </a:solidFill>
+          <a:ln/>
+        </p:spPr>
+      </p:sp>
+      <p:sp>
+        <p:nvSpPr>
+          <p:cNvPr id="25" name="Text 23"/>
+          <p:cNvSpPr/>
+          <p:nvPr/>
+        </p:nvSpPr>
+        <p:spPr>
+          <a:xfrm>
+            <a:off x="640080" y="5493258"/>
+            <a:ext cx="868680" cy="450342"/>
+          </a:xfrm>
+          <a:prstGeom prst="rect">
+            <a:avLst/>
+          </a:prstGeom>
+          <a:noFill/>
+          <a:ln/>
+        </p:spPr>
+        <p:txBody>
+          <a:bodyPr wrap="square" rtlCol="0" anchor="ctr"/>
+          <a:lstStyle/>
+          <a:p>
+            <a:pPr algn="ctr" indent="0" marL="0">
+              <a:buNone/>
+            </a:pPr>
+            <a:r>
+              <a:rPr lang="en-US" sz="1100" b="1" dirty="0">
+                <a:solidFill>
+                  <a:srgbClr val="FFFFFF"/>
+                </a:solidFill>
+                <a:latin typeface="Calibri" pitchFamily="34" charset="0"/>
+                <a:ea typeface="Calibri" pitchFamily="34" charset="-122"/>
+                <a:cs typeface="Calibri" pitchFamily="34" charset="-120"/>
+              </a:rPr>
+              <a:t>1:52</a:t>
+            </a:r>
+            <a:endParaRPr lang="en-US" sz="1100" dirty="0"/>
+          </a:p>
+        </p:txBody>
+      </p:sp>
+      <p:sp>
+        <p:nvSpPr>
+          <p:cNvPr id="26" name="Text 24"/>
+          <p:cNvSpPr/>
+          <p:nvPr/>
+        </p:nvSpPr>
+        <p:spPr>
+          <a:xfrm>
+            <a:off x="1691640" y="5474970"/>
+            <a:ext cx="9646920" cy="560070"/>
+          </a:xfrm>
+          <a:prstGeom prst="rect">
+            <a:avLst/>
+          </a:prstGeom>
+          <a:noFill/>
+          <a:ln/>
+        </p:spPr>
+        <p:txBody>
+          <a:bodyPr wrap="square" rtlCol="0" anchor="ctr">
+            <a:spAutoFit/>
+          </a:bodyPr>
+          <a:lstStyle/>
+          <a:p>
+            <a:pPr indent="0" marL="0">
+              <a:buNone/>
+            </a:pPr>
+            <a:r>
+              <a:rPr lang="en-US" sz="1100" dirty="0">
+                <a:solidFill>
+                  <a:srgbClr val="1A1A1A"/>
+                </a:solidFill>
+                <a:latin typeface="Calibri" pitchFamily="34" charset="0"/>
+                <a:ea typeface="Calibri" pitchFamily="34" charset="-122"/>
+                <a:cs typeface="Calibri" pitchFamily="34" charset="-120"/>
+              </a:rPr>
+              <a:t>Preview of the methods ahead; the weekly routines introduced. First check-out.</a:t>
+            </a:r>
+            <a:endParaRPr lang="en-US" sz="1100" dirty="0"/>
           </a:p>
         </p:txBody>
       </p:sp>
@@ -6507,7 +6477,7 @@
         <p:spPr>
           <a:xfrm>
             <a:off x="640080" y="640080"/>
-            <a:ext cx="10058400" cy="320040"/>
+            <a:ext cx="10058400" cy="731520"/>
           </a:xfrm>
           <a:prstGeom prst="rect">
             <a:avLst/>
@@ -6523,7 +6493,66 @@
               <a:buNone/>
             </a:pPr>
             <a:r>
-              <a:rPr lang="en-US" sz="1300" b="1" spc="300" kern="0" dirty="0">
+              <a:rPr lang="en-US" sz="3000" b="1" dirty="0">
+                <a:solidFill>
+                  <a:srgbClr val="1A1A1A"/>
+                </a:solidFill>
+                <a:latin typeface="Cambria" pitchFamily="34" charset="0"/>
+                <a:ea typeface="Cambria" pitchFamily="34" charset="-122"/>
+                <a:cs typeface="Cambria" pitchFamily="34" charset="-120"/>
+              </a:rPr>
+              <a:t>Reading &amp; homework</a:t>
+            </a:r>
+            <a:endParaRPr lang="en-US" sz="3000" dirty="0"/>
+          </a:p>
+        </p:txBody>
+      </p:sp>
+      <p:sp>
+        <p:nvSpPr>
+          <p:cNvPr id="3" name="Shape 1"/>
+          <p:cNvSpPr/>
+          <p:nvPr/>
+        </p:nvSpPr>
+        <p:spPr>
+          <a:xfrm>
+            <a:off x="640080" y="1673352"/>
+            <a:ext cx="219456" cy="219456"/>
+          </a:xfrm>
+          <a:prstGeom prst="ellipse">
+            <a:avLst/>
+          </a:prstGeom>
+          <a:solidFill>
+            <a:srgbClr val="7A3B2E"/>
+          </a:solidFill>
+          <a:ln/>
+        </p:spPr>
+      </p:sp>
+      <p:sp>
+        <p:nvSpPr>
+          <p:cNvPr id="4" name="Text 2"/>
+          <p:cNvSpPr/>
+          <p:nvPr/>
+        </p:nvSpPr>
+        <p:spPr>
+          <a:xfrm>
+            <a:off x="1051560" y="1600200"/>
+            <a:ext cx="10424160" cy="365760"/>
+          </a:xfrm>
+          <a:prstGeom prst="rect">
+            <a:avLst/>
+          </a:prstGeom>
+          <a:noFill/>
+          <a:ln/>
+        </p:spPr>
+        <p:txBody>
+          <a:bodyPr wrap="square" rtlCol="0" anchor="ctr"/>
+          <a:lstStyle/>
+          <a:p>
+            <a:pPr indent="0" marL="0">
+              <a:buNone/>
+            </a:pPr>
+            <a:r>
+              <a:rPr lang="en-US" sz="1500" b="1" dirty="0">
                 <a:solidFill>
                   <a:srgbClr val="7A3B2E"/>
                 </a:solidFill>
@@ -6531,72 +6560,11 @@
                 <a:ea typeface="Calibri" pitchFamily="34" charset="-122"/>
                 <a:cs typeface="Calibri" pitchFamily="34" charset="-120"/>
               </a:rPr>
-              <a:t>HOW THIS WEEK CONNECTS</a:t>
-            </a:r>
-            <a:endParaRPr lang="en-US" sz="1300" dirty="0"/>
-          </a:p>
-        </p:txBody>
-      </p:sp>
-      <p:sp>
-        <p:nvSpPr>
-          <p:cNvPr id="3" name="Text 1"/>
-          <p:cNvSpPr/>
-          <p:nvPr/>
-        </p:nvSpPr>
-        <p:spPr>
-          <a:xfrm>
-            <a:off x="640080" y="987552"/>
-            <a:ext cx="10058400" cy="640080"/>
-          </a:xfrm>
-          <a:prstGeom prst="rect">
-            <a:avLst/>
-          </a:prstGeom>
-          <a:noFill/>
-          <a:ln/>
-        </p:spPr>
-        <p:txBody>
-          <a:bodyPr wrap="square" rtlCol="0" anchor="ctr"/>
-          <a:lstStyle/>
-          <a:p>
-            <a:pPr indent="0" marL="0">
-              <a:buNone/>
-            </a:pPr>
-            <a:r>
-              <a:rPr lang="en-US" sz="2800" b="1" dirty="0">
-                <a:solidFill>
-                  <a:srgbClr val="1A1A1A"/>
-                </a:solidFill>
-                <a:latin typeface="Cambria" pitchFamily="34" charset="0"/>
-                <a:ea typeface="Cambria" pitchFamily="34" charset="-122"/>
-                <a:cs typeface="Cambria" pitchFamily="34" charset="-120"/>
-              </a:rPr>
-              <a:t>The course's through-lines</a:t>
-            </a:r>
-            <a:endParaRPr lang="en-US" sz="2800" dirty="0"/>
-          </a:p>
-        </p:txBody>
-      </p:sp>
-      <p:sp>
-        <p:nvSpPr>
-          <p:cNvPr id="4" name="Shape 2"/>
-          <p:cNvSpPr/>
-          <p:nvPr/>
-        </p:nvSpPr>
-        <p:spPr>
-          <a:xfrm>
-            <a:off x="640080" y="2057400"/>
-            <a:ext cx="457200" cy="457200"/>
-          </a:xfrm>
-          <a:prstGeom prst="roundRect">
-            <a:avLst>
-              <a:gd name="adj" fmla="val 16000"/>
-            </a:avLst>
-          </a:prstGeom>
-          <a:solidFill>
-            <a:srgbClr val="7A3B2E"/>
-          </a:solidFill>
-          <a:ln/>
-        </p:spPr>
+              <a:t>Reading</a:t>
+            </a:r>
+            <a:endParaRPr lang="en-US" sz="1500" dirty="0"/>
+          </a:p>
+        </p:txBody>
       </p:sp>
       <p:sp>
         <p:nvSpPr>
@@ -6606,86 +6574,8 @@
         </p:nvSpPr>
         <p:spPr>
           <a:xfrm>
-            <a:off x="640080" y="2057400"/>
-            <a:ext cx="457200" cy="457200"/>
-          </a:xfrm>
-          <a:prstGeom prst="rect">
-            <a:avLst/>
-          </a:prstGeom>
-          <a:noFill/>
-          <a:ln/>
-        </p:spPr>
-        <p:txBody>
-          <a:bodyPr wrap="square" rtlCol="0" anchor="ctr"/>
-          <a:lstStyle/>
-          <a:p>
-            <a:pPr algn="ctr" indent="0" marL="0">
-              <a:buNone/>
-            </a:pPr>
-            <a:r>
-              <a:rPr lang="en-US" sz="2000" b="1" dirty="0">
-                <a:solidFill>
-                  <a:srgbClr val="FFFFFF"/>
-                </a:solidFill>
-                <a:latin typeface="Cambria" pitchFamily="34" charset="0"/>
-                <a:ea typeface="Cambria" pitchFamily="34" charset="-122"/>
-                <a:cs typeface="Cambria" pitchFamily="34" charset="-120"/>
-              </a:rPr>
-              <a:t>1</a:t>
-            </a:r>
-            <a:endParaRPr lang="en-US" sz="2000" dirty="0"/>
-          </a:p>
-        </p:txBody>
-      </p:sp>
-      <p:sp>
-        <p:nvSpPr>
-          <p:cNvPr id="6" name="Text 4"/>
-          <p:cNvSpPr/>
-          <p:nvPr/>
-        </p:nvSpPr>
-        <p:spPr>
-          <a:xfrm>
-            <a:off x="1371600" y="2020824"/>
-            <a:ext cx="10332720" cy="411480"/>
-          </a:xfrm>
-          <a:prstGeom prst="rect">
-            <a:avLst/>
-          </a:prstGeom>
-          <a:noFill/>
-          <a:ln/>
-        </p:spPr>
-        <p:txBody>
-          <a:bodyPr wrap="square" rtlCol="0" anchor="ctr"/>
-          <a:lstStyle/>
-          <a:p>
-            <a:pPr indent="0" marL="0">
-              <a:buNone/>
-            </a:pPr>
-            <a:r>
-              <a:rPr lang="en-US" sz="1900" b="1" dirty="0">
-                <a:solidFill>
-                  <a:srgbClr val="7A3B2E"/>
-                </a:solidFill>
-                <a:latin typeface="Cambria" pitchFamily="34" charset="0"/>
-                <a:ea typeface="Cambria" pitchFamily="34" charset="-122"/>
-                <a:cs typeface="Cambria" pitchFamily="34" charset="-120"/>
-              </a:rPr>
-              <a:t>Read work critically</a:t>
-            </a:r>
-            <a:endParaRPr lang="en-US" sz="1900" dirty="0"/>
-          </a:p>
-        </p:txBody>
-      </p:sp>
-      <p:sp>
-        <p:nvSpPr>
-          <p:cNvPr id="7" name="Text 5"/>
-          <p:cNvSpPr/>
-          <p:nvPr/>
-        </p:nvSpPr>
-        <p:spPr>
-          <a:xfrm>
-            <a:off x="1371600" y="2441448"/>
-            <a:ext cx="10332720" cy="914400"/>
+            <a:off x="1051560" y="1984248"/>
+            <a:ext cx="10424160" cy="731520"/>
           </a:xfrm>
           <a:prstGeom prst="rect">
             <a:avLst/>
@@ -6700,13 +6590,10 @@
           <a:lstStyle/>
           <a:p>
             <a:pPr indent="0" marL="0">
-              <a:lnSpc>
-                <a:spcPct val="112000"/>
-              </a:lnSpc>
-              <a:buNone/>
-            </a:pPr>
-            <a:r>
-              <a:rPr lang="en-US" sz="1450" dirty="0">
+              <a:buNone/>
+            </a:pPr>
+            <a:r>
+              <a:rPr lang="en-US" sz="1400" dirty="0">
                 <a:solidFill>
                   <a:srgbClr val="1A1A1A"/>
                 </a:solidFill>
@@ -6714,27 +6601,25 @@
                 <a:ea typeface="Calibri" pitchFamily="34" charset="-122"/>
                 <a:cs typeface="Calibri" pitchFamily="34" charset="-120"/>
               </a:rPr>
-              <a:t>She Giggles, He Gallops is excellent and its choices are debatable. Admiring and questioning at once is the habit the course is built on.</a:t>
-            </a:r>
-            <a:endParaRPr lang="en-US" sz="1450" dirty="0"/>
-          </a:p>
-        </p:txBody>
-      </p:sp>
-      <p:sp>
-        <p:nvSpPr>
-          <p:cNvPr id="8" name="Shape 6"/>
-          <p:cNvSpPr/>
-          <p:nvPr/>
-        </p:nvSpPr>
-        <p:spPr>
-          <a:xfrm>
-            <a:off x="640080" y="3520440"/>
-            <a:ext cx="457200" cy="457200"/>
-          </a:xfrm>
-          <a:prstGeom prst="roundRect">
-            <a:avLst>
-              <a:gd name="adj" fmla="val 16000"/>
-            </a:avLst>
+              <a:t>Bollen et al., the cognitive-distortions hockey stick (PNAS 2021), with the Schmidt et al. critique</a:t>
+            </a:r>
+            <a:endParaRPr lang="en-US" sz="1400" dirty="0"/>
+          </a:p>
+        </p:txBody>
+      </p:sp>
+      <p:sp>
+        <p:nvSpPr>
+          <p:cNvPr id="6" name="Shape 4"/>
+          <p:cNvSpPr/>
+          <p:nvPr/>
+        </p:nvSpPr>
+        <p:spPr>
+          <a:xfrm>
+            <a:off x="640080" y="2633472"/>
+            <a:ext cx="219456" cy="219456"/>
+          </a:xfrm>
+          <a:prstGeom prst="ellipse">
+            <a:avLst/>
           </a:prstGeom>
           <a:solidFill>
             <a:srgbClr val="3F6F5F"/>
@@ -6744,14 +6629,14 @@
       </p:sp>
       <p:sp>
         <p:nvSpPr>
-          <p:cNvPr id="9" name="Text 7"/>
-          <p:cNvSpPr/>
-          <p:nvPr/>
-        </p:nvSpPr>
-        <p:spPr>
-          <a:xfrm>
-            <a:off x="640080" y="3520440"/>
-            <a:ext cx="457200" cy="457200"/>
+          <p:cNvPr id="7" name="Text 5"/>
+          <p:cNvSpPr/>
+          <p:nvPr/>
+        </p:nvSpPr>
+        <p:spPr>
+          <a:xfrm>
+            <a:off x="1051560" y="2560320"/>
+            <a:ext cx="10424160" cy="365760"/>
           </a:xfrm>
           <a:prstGeom prst="rect">
             <a:avLst/>
@@ -6763,73 +6648,34 @@
           <a:bodyPr wrap="square" rtlCol="0" anchor="ctr"/>
           <a:lstStyle/>
           <a:p>
-            <a:pPr algn="ctr" indent="0" marL="0">
-              <a:buNone/>
-            </a:pPr>
-            <a:r>
-              <a:rPr lang="en-US" sz="2000" b="1" dirty="0">
-                <a:solidFill>
-                  <a:srgbClr val="FFFFFF"/>
-                </a:solidFill>
-                <a:latin typeface="Cambria" pitchFamily="34" charset="0"/>
-                <a:ea typeface="Cambria" pitchFamily="34" charset="-122"/>
-                <a:cs typeface="Cambria" pitchFamily="34" charset="-120"/>
-              </a:rPr>
-              <a:t>2</a:t>
-            </a:r>
-            <a:endParaRPr lang="en-US" sz="2000" dirty="0"/>
-          </a:p>
-        </p:txBody>
-      </p:sp>
-      <p:sp>
-        <p:nvSpPr>
-          <p:cNvPr id="10" name="Text 8"/>
-          <p:cNvSpPr/>
-          <p:nvPr/>
-        </p:nvSpPr>
-        <p:spPr>
-          <a:xfrm>
-            <a:off x="1371600" y="3483864"/>
-            <a:ext cx="10332720" cy="411480"/>
-          </a:xfrm>
-          <a:prstGeom prst="rect">
-            <a:avLst/>
-          </a:prstGeom>
-          <a:noFill/>
-          <a:ln/>
-        </p:spPr>
-        <p:txBody>
-          <a:bodyPr wrap="square" rtlCol="0" anchor="ctr"/>
-          <a:lstStyle/>
-          <a:p>
-            <a:pPr indent="0" marL="0">
-              <a:buNone/>
-            </a:pPr>
-            <a:r>
-              <a:rPr lang="en-US" sz="1900" b="1" dirty="0">
+            <a:pPr indent="0" marL="0">
+              <a:buNone/>
+            </a:pPr>
+            <a:r>
+              <a:rPr lang="en-US" sz="1500" b="1" dirty="0">
                 <a:solidFill>
                   <a:srgbClr val="3F6F5F"/>
                 </a:solidFill>
-                <a:latin typeface="Cambria" pitchFamily="34" charset="0"/>
-                <a:ea typeface="Cambria" pitchFamily="34" charset="-122"/>
-                <a:cs typeface="Cambria" pitchFamily="34" charset="-120"/>
-              </a:rPr>
-              <a:t>Make something real</a:t>
-            </a:r>
-            <a:endParaRPr lang="en-US" sz="1900" dirty="0"/>
-          </a:p>
-        </p:txBody>
-      </p:sp>
-      <p:sp>
-        <p:nvSpPr>
-          <p:cNvPr id="11" name="Text 9"/>
-          <p:cNvSpPr/>
-          <p:nvPr/>
-        </p:nvSpPr>
-        <p:spPr>
-          <a:xfrm>
-            <a:off x="1371600" y="3904488"/>
-            <a:ext cx="10332720" cy="914400"/>
+                <a:latin typeface="Calibri" pitchFamily="34" charset="0"/>
+                <a:ea typeface="Calibri" pitchFamily="34" charset="-122"/>
+                <a:cs typeface="Calibri" pitchFamily="34" charset="-120"/>
+              </a:rPr>
+              <a:t>Supplement</a:t>
+            </a:r>
+            <a:endParaRPr lang="en-US" sz="1500" dirty="0"/>
+          </a:p>
+        </p:txBody>
+      </p:sp>
+      <p:sp>
+        <p:nvSpPr>
+          <p:cNvPr id="8" name="Text 6"/>
+          <p:cNvSpPr/>
+          <p:nvPr/>
+        </p:nvSpPr>
+        <p:spPr>
+          <a:xfrm>
+            <a:off x="1051560" y="2944368"/>
+            <a:ext cx="10424160" cy="731520"/>
           </a:xfrm>
           <a:prstGeom prst="rect">
             <a:avLst/>
@@ -6844,13 +6690,10 @@
           <a:lstStyle/>
           <a:p>
             <a:pPr indent="0" marL="0">
-              <a:lnSpc>
-                <a:spcPct val="112000"/>
-              </a:lnSpc>
-              <a:buNone/>
-            </a:pPr>
-            <a:r>
-              <a:rPr lang="en-US" sz="1450" dirty="0">
+              <a:buNone/>
+            </a:pPr>
+            <a:r>
+              <a:rPr lang="en-US" sz="1400" dirty="0">
                 <a:solidFill>
                   <a:srgbClr val="1A1A1A"/>
                 </a:solidFill>
@@ -6858,27 +6701,25 @@
                 <a:ea typeface="Calibri" pitchFamily="34" charset="-122"/>
                 <a:cs typeface="Calibri" pitchFamily="34" charset="-120"/>
               </a:rPr>
-              <a:t>A complete investigation by the first break, before any theory.</a:t>
-            </a:r>
-            <a:endParaRPr lang="en-US" sz="1450" dirty="0"/>
-          </a:p>
-        </p:txBody>
-      </p:sp>
-      <p:sp>
-        <p:nvSpPr>
-          <p:cNvPr id="12" name="Shape 10"/>
-          <p:cNvSpPr/>
-          <p:nvPr/>
-        </p:nvSpPr>
-        <p:spPr>
-          <a:xfrm>
-            <a:off x="640080" y="4983480"/>
-            <a:ext cx="457200" cy="457200"/>
-          </a:xfrm>
-          <a:prstGeom prst="roundRect">
-            <a:avLst>
-              <a:gd name="adj" fmla="val 16000"/>
-            </a:avLst>
+              <a:t>Robin Sloan, Writing with the machine; Drucker, Humanities Approaches to Graphical Display (DHQ 2011), the case that all data is capta</a:t>
+            </a:r>
+            <a:endParaRPr lang="en-US" sz="1400" dirty="0"/>
+          </a:p>
+        </p:txBody>
+      </p:sp>
+      <p:sp>
+        <p:nvSpPr>
+          <p:cNvPr id="9" name="Shape 7"/>
+          <p:cNvSpPr/>
+          <p:nvPr/>
+        </p:nvSpPr>
+        <p:spPr>
+          <a:xfrm>
+            <a:off x="640080" y="3593592"/>
+            <a:ext cx="219456" cy="219456"/>
+          </a:xfrm>
+          <a:prstGeom prst="ellipse">
+            <a:avLst/>
           </a:prstGeom>
           <a:solidFill>
             <a:srgbClr val="B9852F"/>
@@ -6888,14 +6729,14 @@
       </p:sp>
       <p:sp>
         <p:nvSpPr>
-          <p:cNvPr id="13" name="Text 11"/>
-          <p:cNvSpPr/>
-          <p:nvPr/>
-        </p:nvSpPr>
-        <p:spPr>
-          <a:xfrm>
-            <a:off x="640080" y="4983480"/>
-            <a:ext cx="457200" cy="457200"/>
+          <p:cNvPr id="10" name="Text 8"/>
+          <p:cNvSpPr/>
+          <p:nvPr/>
+        </p:nvSpPr>
+        <p:spPr>
+          <a:xfrm>
+            <a:off x="1051560" y="3520440"/>
+            <a:ext cx="10424160" cy="365760"/>
           </a:xfrm>
           <a:prstGeom prst="rect">
             <a:avLst/>
@@ -6907,73 +6748,34 @@
           <a:bodyPr wrap="square" rtlCol="0" anchor="ctr"/>
           <a:lstStyle/>
           <a:p>
-            <a:pPr algn="ctr" indent="0" marL="0">
-              <a:buNone/>
-            </a:pPr>
-            <a:r>
-              <a:rPr lang="en-US" sz="2000" b="1" dirty="0">
-                <a:solidFill>
-                  <a:srgbClr val="FFFFFF"/>
-                </a:solidFill>
-                <a:latin typeface="Cambria" pitchFamily="34" charset="0"/>
-                <a:ea typeface="Cambria" pitchFamily="34" charset="-122"/>
-                <a:cs typeface="Cambria" pitchFamily="34" charset="-120"/>
-              </a:rPr>
-              <a:t>3</a:t>
-            </a:r>
-            <a:endParaRPr lang="en-US" sz="2000" dirty="0"/>
-          </a:p>
-        </p:txBody>
-      </p:sp>
-      <p:sp>
-        <p:nvSpPr>
-          <p:cNvPr id="14" name="Text 12"/>
-          <p:cNvSpPr/>
-          <p:nvPr/>
-        </p:nvSpPr>
-        <p:spPr>
-          <a:xfrm>
-            <a:off x="1371600" y="4946904"/>
-            <a:ext cx="10332720" cy="411480"/>
-          </a:xfrm>
-          <a:prstGeom prst="rect">
-            <a:avLst/>
-          </a:prstGeom>
-          <a:noFill/>
-          <a:ln/>
-        </p:spPr>
-        <p:txBody>
-          <a:bodyPr wrap="square" rtlCol="0" anchor="ctr"/>
-          <a:lstStyle/>
-          <a:p>
-            <a:pPr indent="0" marL="0">
-              <a:buNone/>
-            </a:pPr>
-            <a:r>
-              <a:rPr lang="en-US" sz="1900" b="1" dirty="0">
+            <a:pPr indent="0" marL="0">
+              <a:buNone/>
+            </a:pPr>
+            <a:r>
+              <a:rPr lang="en-US" sz="1500" b="1" dirty="0">
                 <a:solidFill>
                   <a:srgbClr val="B9852F"/>
                 </a:solidFill>
-                <a:latin typeface="Cambria" pitchFamily="34" charset="0"/>
-                <a:ea typeface="Cambria" pitchFamily="34" charset="-122"/>
-                <a:cs typeface="Cambria" pitchFamily="34" charset="-120"/>
-              </a:rPr>
-              <a:t>Images are culture too</a:t>
-            </a:r>
-            <a:endParaRPr lang="en-US" sz="1900" dirty="0"/>
-          </a:p>
-        </p:txBody>
-      </p:sp>
-      <p:sp>
-        <p:nvSpPr>
-          <p:cNvPr id="15" name="Text 13"/>
-          <p:cNvSpPr/>
-          <p:nvPr/>
-        </p:nvSpPr>
-        <p:spPr>
-          <a:xfrm>
-            <a:off x="1371600" y="5367528"/>
-            <a:ext cx="10332720" cy="914400"/>
+                <a:latin typeface="Calibri" pitchFamily="34" charset="0"/>
+                <a:ea typeface="Calibri" pitchFamily="34" charset="-122"/>
+                <a:cs typeface="Calibri" pitchFamily="34" charset="-120"/>
+              </a:rPr>
+              <a:t>Deeper (optional)</a:t>
+            </a:r>
+            <a:endParaRPr lang="en-US" sz="1500" dirty="0"/>
+          </a:p>
+        </p:txBody>
+      </p:sp>
+      <p:sp>
+        <p:nvSpPr>
+          <p:cNvPr id="11" name="Text 9"/>
+          <p:cNvSpPr/>
+          <p:nvPr/>
+        </p:nvSpPr>
+        <p:spPr>
+          <a:xfrm>
+            <a:off x="1051560" y="3904488"/>
+            <a:ext cx="10424160" cy="731520"/>
           </a:xfrm>
           <a:prstGeom prst="rect">
             <a:avLst/>
@@ -6988,13 +6790,10 @@
           <a:lstStyle/>
           <a:p>
             <a:pPr indent="0" marL="0">
-              <a:lnSpc>
-                <a:spcPct val="112000"/>
-              </a:lnSpc>
-              <a:buNone/>
-            </a:pPr>
-            <a:r>
-              <a:rPr lang="en-US" sz="1450" dirty="0">
+              <a:buNone/>
+            </a:pPr>
+            <a:r>
+              <a:rPr lang="en-US" sz="1400" dirty="0">
                 <a:solidFill>
                   <a:srgbClr val="1A1A1A"/>
                 </a:solidFill>
@@ -7002,9 +6801,209 @@
                 <a:ea typeface="Calibri" pitchFamily="34" charset="-122"/>
                 <a:cs typeface="Calibri" pitchFamily="34" charset="-120"/>
               </a:rPr>
-              <a:t>A picture is numbers: you counted pixels on day one, and images continue as a co-equal corpus through all ten weeks.</a:t>
-            </a:r>
-            <a:endParaRPr lang="en-US" sz="1450" dirty="0"/>
+              <a:t>Moretti, Conjectures on World Literature (NLR 2000), the founding argument for reading culture at scale</a:t>
+            </a:r>
+            <a:endParaRPr lang="en-US" sz="1400" dirty="0"/>
+          </a:p>
+        </p:txBody>
+      </p:sp>
+      <p:sp>
+        <p:nvSpPr>
+          <p:cNvPr id="12" name="Shape 10"/>
+          <p:cNvSpPr/>
+          <p:nvPr/>
+        </p:nvSpPr>
+        <p:spPr>
+          <a:xfrm>
+            <a:off x="640080" y="4553712"/>
+            <a:ext cx="219456" cy="219456"/>
+          </a:xfrm>
+          <a:prstGeom prst="ellipse">
+            <a:avLst/>
+          </a:prstGeom>
+          <a:solidFill>
+            <a:srgbClr val="3F6F5F"/>
+          </a:solidFill>
+          <a:ln/>
+        </p:spPr>
+      </p:sp>
+      <p:sp>
+        <p:nvSpPr>
+          <p:cNvPr id="13" name="Text 11"/>
+          <p:cNvSpPr/>
+          <p:nvPr/>
+        </p:nvSpPr>
+        <p:spPr>
+          <a:xfrm>
+            <a:off x="1051560" y="4480560"/>
+            <a:ext cx="10424160" cy="365760"/>
+          </a:xfrm>
+          <a:prstGeom prst="rect">
+            <a:avLst/>
+          </a:prstGeom>
+          <a:noFill/>
+          <a:ln/>
+        </p:spPr>
+        <p:txBody>
+          <a:bodyPr wrap="square" rtlCol="0" anchor="ctr"/>
+          <a:lstStyle/>
+          <a:p>
+            <a:pPr indent="0" marL="0">
+              <a:buNone/>
+            </a:pPr>
+            <a:r>
+              <a:rPr lang="en-US" sz="1500" b="1" dirty="0">
+                <a:solidFill>
+                  <a:srgbClr val="3F6F5F"/>
+                </a:solidFill>
+                <a:latin typeface="Calibri" pitchFamily="34" charset="0"/>
+                <a:ea typeface="Calibri" pitchFamily="34" charset="-122"/>
+                <a:cs typeface="Calibri" pitchFamily="34" charset="-120"/>
+              </a:rPr>
+              <a:t>Sketch</a:t>
+            </a:r>
+            <a:endParaRPr lang="en-US" sz="1500" dirty="0"/>
+          </a:p>
+        </p:txBody>
+      </p:sp>
+      <p:sp>
+        <p:nvSpPr>
+          <p:cNvPr id="14" name="Text 12"/>
+          <p:cNvSpPr/>
+          <p:nvPr/>
+        </p:nvSpPr>
+        <p:spPr>
+          <a:xfrm>
+            <a:off x="1051560" y="4864608"/>
+            <a:ext cx="10424160" cy="731520"/>
+          </a:xfrm>
+          <a:prstGeom prst="rect">
+            <a:avLst/>
+          </a:prstGeom>
+          <a:noFill/>
+          <a:ln/>
+        </p:spPr>
+        <p:txBody>
+          <a:bodyPr wrap="square" rtlCol="0" anchor="t">
+            <a:spAutoFit/>
+          </a:bodyPr>
+          <a:lstStyle/>
+          <a:p>
+            <a:pPr indent="0" marL="0">
+              <a:buNone/>
+            </a:pPr>
+            <a:r>
+              <a:rPr lang="en-US" sz="1400" dirty="0">
+                <a:solidFill>
+                  <a:srgbClr val="1A1A1A"/>
+                </a:solidFill>
+                <a:latin typeface="Calibri" pitchFamily="34" charset="0"/>
+                <a:ea typeface="Calibri" pitchFamily="34" charset="-122"/>
+                <a:cs typeface="Calibri" pitchFamily="34" charset="-120"/>
+              </a:rPr>
+              <a:t>A favorite Pudding piece and what it counted; the question from your life it inspires; the notebook's after-class half (~20 minutes).</a:t>
+            </a:r>
+            <a:endParaRPr lang="en-US" sz="1400" dirty="0"/>
+          </a:p>
+        </p:txBody>
+      </p:sp>
+      <p:sp>
+        <p:nvSpPr>
+          <p:cNvPr id="15" name="Shape 13"/>
+          <p:cNvSpPr/>
+          <p:nvPr/>
+        </p:nvSpPr>
+        <p:spPr>
+          <a:xfrm>
+            <a:off x="640080" y="5513832"/>
+            <a:ext cx="219456" cy="219456"/>
+          </a:xfrm>
+          <a:prstGeom prst="ellipse">
+            <a:avLst/>
+          </a:prstGeom>
+          <a:solidFill>
+            <a:srgbClr val="7A3B2E"/>
+          </a:solidFill>
+          <a:ln/>
+        </p:spPr>
+      </p:sp>
+      <p:sp>
+        <p:nvSpPr>
+          <p:cNvPr id="16" name="Text 14"/>
+          <p:cNvSpPr/>
+          <p:nvPr/>
+        </p:nvSpPr>
+        <p:spPr>
+          <a:xfrm>
+            <a:off x="1051560" y="5440680"/>
+            <a:ext cx="10424160" cy="365760"/>
+          </a:xfrm>
+          <a:prstGeom prst="rect">
+            <a:avLst/>
+          </a:prstGeom>
+          <a:noFill/>
+          <a:ln/>
+        </p:spPr>
+        <p:txBody>
+          <a:bodyPr wrap="square" rtlCol="0" anchor="ctr"/>
+          <a:lstStyle/>
+          <a:p>
+            <a:pPr indent="0" marL="0">
+              <a:buNone/>
+            </a:pPr>
+            <a:r>
+              <a:rPr lang="en-US" sz="1500" b="1" dirty="0">
+                <a:solidFill>
+                  <a:srgbClr val="7A3B2E"/>
+                </a:solidFill>
+                <a:latin typeface="Calibri" pitchFamily="34" charset="0"/>
+                <a:ea typeface="Calibri" pitchFamily="34" charset="-122"/>
+                <a:cs typeface="Calibri" pitchFamily="34" charset="-120"/>
+              </a:rPr>
+              <a:t>Check (AI closed)</a:t>
+            </a:r>
+            <a:endParaRPr lang="en-US" sz="1500" dirty="0"/>
+          </a:p>
+        </p:txBody>
+      </p:sp>
+      <p:sp>
+        <p:nvSpPr>
+          <p:cNvPr id="17" name="Text 15"/>
+          <p:cNvSpPr/>
+          <p:nvPr/>
+        </p:nvSpPr>
+        <p:spPr>
+          <a:xfrm>
+            <a:off x="1051560" y="5824728"/>
+            <a:ext cx="10424160" cy="731520"/>
+          </a:xfrm>
+          <a:prstGeom prst="rect">
+            <a:avLst/>
+          </a:prstGeom>
+          <a:noFill/>
+          <a:ln/>
+        </p:spPr>
+        <p:txBody>
+          <a:bodyPr wrap="square" rtlCol="0" anchor="t">
+            <a:spAutoFit/>
+          </a:bodyPr>
+          <a:lstStyle/>
+          <a:p>
+            <a:pPr indent="0" marL="0">
+              <a:buNone/>
+            </a:pPr>
+            <a:r>
+              <a:rPr lang="en-US" sz="1400" dirty="0">
+                <a:solidFill>
+                  <a:srgbClr val="1A1A1A"/>
+                </a:solidFill>
+                <a:latin typeface="Calibri" pitchFamily="34" charset="0"/>
+                <a:ea typeface="Calibri" pitchFamily="34" charset="-122"/>
+                <a:cs typeface="Calibri" pitchFamily="34" charset="-120"/>
+              </a:rPr>
+              <a:t>Trace it: one written sentence predicting what your cell does before you run it. (Competency 1.)</a:t>
+            </a:r>
+            <a:endParaRPr lang="en-US" sz="1400" dirty="0"/>
           </a:p>
         </p:txBody>
       </p:sp>
@@ -7019,6 +7018,548 @@
 <file path=ppt/slides/slide18.xml><?xml version="1.0" encoding="utf-8"?>
 <p:sld xmlns:a="http://schemas.openxmlformats.org/drawingml/2006/main" xmlns:r="http://schemas.openxmlformats.org/officeDocument/2006/relationships" xmlns:p="http://schemas.openxmlformats.org/presentationml/2006/main">
   <p:cSld name="Slide 18">
+    <p:bg>
+      <p:bgPr>
+        <a:solidFill>
+          <a:srgbClr val="FFFFFF"/>
+        </a:solidFill>
+      </p:bgPr>
+    </p:bg>
+    <p:spTree>
+      <p:nvGrpSpPr>
+        <p:cNvPr id="1" name=""/>
+        <p:cNvGrpSpPr/>
+        <p:nvPr/>
+      </p:nvGrpSpPr>
+      <p:grpSpPr>
+        <a:xfrm>
+          <a:off x="0" y="0"/>
+          <a:ext cx="0" cy="0"/>
+          <a:chOff x="0" y="0"/>
+          <a:chExt cx="0" cy="0"/>
+        </a:xfrm>
+      </p:grpSpPr>
+      <p:sp>
+        <p:nvSpPr>
+          <p:cNvPr id="2" name="Text 0"/>
+          <p:cNvSpPr/>
+          <p:nvPr/>
+        </p:nvSpPr>
+        <p:spPr>
+          <a:xfrm>
+            <a:off x="640080" y="640080"/>
+            <a:ext cx="10058400" cy="320040"/>
+          </a:xfrm>
+          <a:prstGeom prst="rect">
+            <a:avLst/>
+          </a:prstGeom>
+          <a:noFill/>
+          <a:ln/>
+        </p:spPr>
+        <p:txBody>
+          <a:bodyPr wrap="square" rtlCol="0" anchor="ctr"/>
+          <a:lstStyle/>
+          <a:p>
+            <a:pPr indent="0" marL="0">
+              <a:buNone/>
+            </a:pPr>
+            <a:r>
+              <a:rPr lang="en-US" sz="1300" b="1" spc="300" kern="0" dirty="0">
+                <a:solidFill>
+                  <a:srgbClr val="7A3B2E"/>
+                </a:solidFill>
+                <a:latin typeface="Calibri" pitchFamily="34" charset="0"/>
+                <a:ea typeface="Calibri" pitchFamily="34" charset="-122"/>
+                <a:cs typeface="Calibri" pitchFamily="34" charset="-120"/>
+              </a:rPr>
+              <a:t>HOW THIS WEEK CONNECTS</a:t>
+            </a:r>
+            <a:endParaRPr lang="en-US" sz="1300" dirty="0"/>
+          </a:p>
+        </p:txBody>
+      </p:sp>
+      <p:sp>
+        <p:nvSpPr>
+          <p:cNvPr id="3" name="Text 1"/>
+          <p:cNvSpPr/>
+          <p:nvPr/>
+        </p:nvSpPr>
+        <p:spPr>
+          <a:xfrm>
+            <a:off x="640080" y="987552"/>
+            <a:ext cx="10058400" cy="640080"/>
+          </a:xfrm>
+          <a:prstGeom prst="rect">
+            <a:avLst/>
+          </a:prstGeom>
+          <a:noFill/>
+          <a:ln/>
+        </p:spPr>
+        <p:txBody>
+          <a:bodyPr wrap="square" rtlCol="0" anchor="ctr"/>
+          <a:lstStyle/>
+          <a:p>
+            <a:pPr indent="0" marL="0">
+              <a:buNone/>
+            </a:pPr>
+            <a:r>
+              <a:rPr lang="en-US" sz="2800" b="1" dirty="0">
+                <a:solidFill>
+                  <a:srgbClr val="1A1A1A"/>
+                </a:solidFill>
+                <a:latin typeface="Cambria" pitchFamily="34" charset="0"/>
+                <a:ea typeface="Cambria" pitchFamily="34" charset="-122"/>
+                <a:cs typeface="Cambria" pitchFamily="34" charset="-120"/>
+              </a:rPr>
+              <a:t>The course's through-lines</a:t>
+            </a:r>
+            <a:endParaRPr lang="en-US" sz="2800" dirty="0"/>
+          </a:p>
+        </p:txBody>
+      </p:sp>
+      <p:sp>
+        <p:nvSpPr>
+          <p:cNvPr id="4" name="Shape 2"/>
+          <p:cNvSpPr/>
+          <p:nvPr/>
+        </p:nvSpPr>
+        <p:spPr>
+          <a:xfrm>
+            <a:off x="640080" y="2057400"/>
+            <a:ext cx="457200" cy="457200"/>
+          </a:xfrm>
+          <a:prstGeom prst="roundRect">
+            <a:avLst>
+              <a:gd name="adj" fmla="val 16000"/>
+            </a:avLst>
+          </a:prstGeom>
+          <a:solidFill>
+            <a:srgbClr val="7A3B2E"/>
+          </a:solidFill>
+          <a:ln/>
+        </p:spPr>
+      </p:sp>
+      <p:sp>
+        <p:nvSpPr>
+          <p:cNvPr id="5" name="Text 3"/>
+          <p:cNvSpPr/>
+          <p:nvPr/>
+        </p:nvSpPr>
+        <p:spPr>
+          <a:xfrm>
+            <a:off x="640080" y="2057400"/>
+            <a:ext cx="457200" cy="457200"/>
+          </a:xfrm>
+          <a:prstGeom prst="rect">
+            <a:avLst/>
+          </a:prstGeom>
+          <a:noFill/>
+          <a:ln/>
+        </p:spPr>
+        <p:txBody>
+          <a:bodyPr wrap="square" rtlCol="0" anchor="ctr"/>
+          <a:lstStyle/>
+          <a:p>
+            <a:pPr algn="ctr" indent="0" marL="0">
+              <a:buNone/>
+            </a:pPr>
+            <a:r>
+              <a:rPr lang="en-US" sz="2000" b="1" dirty="0">
+                <a:solidFill>
+                  <a:srgbClr val="FFFFFF"/>
+                </a:solidFill>
+                <a:latin typeface="Cambria" pitchFamily="34" charset="0"/>
+                <a:ea typeface="Cambria" pitchFamily="34" charset="-122"/>
+                <a:cs typeface="Cambria" pitchFamily="34" charset="-120"/>
+              </a:rPr>
+              <a:t>1</a:t>
+            </a:r>
+            <a:endParaRPr lang="en-US" sz="2000" dirty="0"/>
+          </a:p>
+        </p:txBody>
+      </p:sp>
+      <p:sp>
+        <p:nvSpPr>
+          <p:cNvPr id="6" name="Text 4"/>
+          <p:cNvSpPr/>
+          <p:nvPr/>
+        </p:nvSpPr>
+        <p:spPr>
+          <a:xfrm>
+            <a:off x="1371600" y="2020824"/>
+            <a:ext cx="10332720" cy="411480"/>
+          </a:xfrm>
+          <a:prstGeom prst="rect">
+            <a:avLst/>
+          </a:prstGeom>
+          <a:noFill/>
+          <a:ln/>
+        </p:spPr>
+        <p:txBody>
+          <a:bodyPr wrap="square" rtlCol="0" anchor="ctr"/>
+          <a:lstStyle/>
+          <a:p>
+            <a:pPr indent="0" marL="0">
+              <a:buNone/>
+            </a:pPr>
+            <a:r>
+              <a:rPr lang="en-US" sz="1900" b="1" dirty="0">
+                <a:solidFill>
+                  <a:srgbClr val="7A3B2E"/>
+                </a:solidFill>
+                <a:latin typeface="Cambria" pitchFamily="34" charset="0"/>
+                <a:ea typeface="Cambria" pitchFamily="34" charset="-122"/>
+                <a:cs typeface="Cambria" pitchFamily="34" charset="-120"/>
+              </a:rPr>
+              <a:t>Read work critically</a:t>
+            </a:r>
+            <a:endParaRPr lang="en-US" sz="1900" dirty="0"/>
+          </a:p>
+        </p:txBody>
+      </p:sp>
+      <p:sp>
+        <p:nvSpPr>
+          <p:cNvPr id="7" name="Text 5"/>
+          <p:cNvSpPr/>
+          <p:nvPr/>
+        </p:nvSpPr>
+        <p:spPr>
+          <a:xfrm>
+            <a:off x="1371600" y="2441448"/>
+            <a:ext cx="10332720" cy="914400"/>
+          </a:xfrm>
+          <a:prstGeom prst="rect">
+            <a:avLst/>
+          </a:prstGeom>
+          <a:noFill/>
+          <a:ln/>
+        </p:spPr>
+        <p:txBody>
+          <a:bodyPr wrap="square" rtlCol="0" anchor="t">
+            <a:spAutoFit/>
+          </a:bodyPr>
+          <a:lstStyle/>
+          <a:p>
+            <a:pPr indent="0" marL="0">
+              <a:lnSpc>
+                <a:spcPct val="112000"/>
+              </a:lnSpc>
+              <a:buNone/>
+            </a:pPr>
+            <a:r>
+              <a:rPr lang="en-US" sz="1450" dirty="0">
+                <a:solidFill>
+                  <a:srgbClr val="1A1A1A"/>
+                </a:solidFill>
+                <a:latin typeface="Calibri" pitchFamily="34" charset="0"/>
+                <a:ea typeface="Calibri" pitchFamily="34" charset="-122"/>
+                <a:cs typeface="Calibri" pitchFamily="34" charset="-120"/>
+              </a:rPr>
+              <a:t>She Giggles, He Gallops is excellent and its choices are debatable. Admiring and questioning at once is the habit the course is built on.</a:t>
+            </a:r>
+            <a:endParaRPr lang="en-US" sz="1450" dirty="0"/>
+          </a:p>
+        </p:txBody>
+      </p:sp>
+      <p:sp>
+        <p:nvSpPr>
+          <p:cNvPr id="8" name="Shape 6"/>
+          <p:cNvSpPr/>
+          <p:nvPr/>
+        </p:nvSpPr>
+        <p:spPr>
+          <a:xfrm>
+            <a:off x="640080" y="3520440"/>
+            <a:ext cx="457200" cy="457200"/>
+          </a:xfrm>
+          <a:prstGeom prst="roundRect">
+            <a:avLst>
+              <a:gd name="adj" fmla="val 16000"/>
+            </a:avLst>
+          </a:prstGeom>
+          <a:solidFill>
+            <a:srgbClr val="3F6F5F"/>
+          </a:solidFill>
+          <a:ln/>
+        </p:spPr>
+      </p:sp>
+      <p:sp>
+        <p:nvSpPr>
+          <p:cNvPr id="9" name="Text 7"/>
+          <p:cNvSpPr/>
+          <p:nvPr/>
+        </p:nvSpPr>
+        <p:spPr>
+          <a:xfrm>
+            <a:off x="640080" y="3520440"/>
+            <a:ext cx="457200" cy="457200"/>
+          </a:xfrm>
+          <a:prstGeom prst="rect">
+            <a:avLst/>
+          </a:prstGeom>
+          <a:noFill/>
+          <a:ln/>
+        </p:spPr>
+        <p:txBody>
+          <a:bodyPr wrap="square" rtlCol="0" anchor="ctr"/>
+          <a:lstStyle/>
+          <a:p>
+            <a:pPr algn="ctr" indent="0" marL="0">
+              <a:buNone/>
+            </a:pPr>
+            <a:r>
+              <a:rPr lang="en-US" sz="2000" b="1" dirty="0">
+                <a:solidFill>
+                  <a:srgbClr val="FFFFFF"/>
+                </a:solidFill>
+                <a:latin typeface="Cambria" pitchFamily="34" charset="0"/>
+                <a:ea typeface="Cambria" pitchFamily="34" charset="-122"/>
+                <a:cs typeface="Cambria" pitchFamily="34" charset="-120"/>
+              </a:rPr>
+              <a:t>2</a:t>
+            </a:r>
+            <a:endParaRPr lang="en-US" sz="2000" dirty="0"/>
+          </a:p>
+        </p:txBody>
+      </p:sp>
+      <p:sp>
+        <p:nvSpPr>
+          <p:cNvPr id="10" name="Text 8"/>
+          <p:cNvSpPr/>
+          <p:nvPr/>
+        </p:nvSpPr>
+        <p:spPr>
+          <a:xfrm>
+            <a:off x="1371600" y="3483864"/>
+            <a:ext cx="10332720" cy="411480"/>
+          </a:xfrm>
+          <a:prstGeom prst="rect">
+            <a:avLst/>
+          </a:prstGeom>
+          <a:noFill/>
+          <a:ln/>
+        </p:spPr>
+        <p:txBody>
+          <a:bodyPr wrap="square" rtlCol="0" anchor="ctr"/>
+          <a:lstStyle/>
+          <a:p>
+            <a:pPr indent="0" marL="0">
+              <a:buNone/>
+            </a:pPr>
+            <a:r>
+              <a:rPr lang="en-US" sz="1900" b="1" dirty="0">
+                <a:solidFill>
+                  <a:srgbClr val="3F6F5F"/>
+                </a:solidFill>
+                <a:latin typeface="Cambria" pitchFamily="34" charset="0"/>
+                <a:ea typeface="Cambria" pitchFamily="34" charset="-122"/>
+                <a:cs typeface="Cambria" pitchFamily="34" charset="-120"/>
+              </a:rPr>
+              <a:t>Make something real</a:t>
+            </a:r>
+            <a:endParaRPr lang="en-US" sz="1900" dirty="0"/>
+          </a:p>
+        </p:txBody>
+      </p:sp>
+      <p:sp>
+        <p:nvSpPr>
+          <p:cNvPr id="11" name="Text 9"/>
+          <p:cNvSpPr/>
+          <p:nvPr/>
+        </p:nvSpPr>
+        <p:spPr>
+          <a:xfrm>
+            <a:off x="1371600" y="3904488"/>
+            <a:ext cx="10332720" cy="914400"/>
+          </a:xfrm>
+          <a:prstGeom prst="rect">
+            <a:avLst/>
+          </a:prstGeom>
+          <a:noFill/>
+          <a:ln/>
+        </p:spPr>
+        <p:txBody>
+          <a:bodyPr wrap="square" rtlCol="0" anchor="t">
+            <a:spAutoFit/>
+          </a:bodyPr>
+          <a:lstStyle/>
+          <a:p>
+            <a:pPr indent="0" marL="0">
+              <a:lnSpc>
+                <a:spcPct val="112000"/>
+              </a:lnSpc>
+              <a:buNone/>
+            </a:pPr>
+            <a:r>
+              <a:rPr lang="en-US" sz="1450" dirty="0">
+                <a:solidFill>
+                  <a:srgbClr val="1A1A1A"/>
+                </a:solidFill>
+                <a:latin typeface="Calibri" pitchFamily="34" charset="0"/>
+                <a:ea typeface="Calibri" pitchFamily="34" charset="-122"/>
+                <a:cs typeface="Calibri" pitchFamily="34" charset="-120"/>
+              </a:rPr>
+              <a:t>A complete investigation by the first break, before any theory.</a:t>
+            </a:r>
+            <a:endParaRPr lang="en-US" sz="1450" dirty="0"/>
+          </a:p>
+        </p:txBody>
+      </p:sp>
+      <p:sp>
+        <p:nvSpPr>
+          <p:cNvPr id="12" name="Shape 10"/>
+          <p:cNvSpPr/>
+          <p:nvPr/>
+        </p:nvSpPr>
+        <p:spPr>
+          <a:xfrm>
+            <a:off x="640080" y="4983480"/>
+            <a:ext cx="457200" cy="457200"/>
+          </a:xfrm>
+          <a:prstGeom prst="roundRect">
+            <a:avLst>
+              <a:gd name="adj" fmla="val 16000"/>
+            </a:avLst>
+          </a:prstGeom>
+          <a:solidFill>
+            <a:srgbClr val="B9852F"/>
+          </a:solidFill>
+          <a:ln/>
+        </p:spPr>
+      </p:sp>
+      <p:sp>
+        <p:nvSpPr>
+          <p:cNvPr id="13" name="Text 11"/>
+          <p:cNvSpPr/>
+          <p:nvPr/>
+        </p:nvSpPr>
+        <p:spPr>
+          <a:xfrm>
+            <a:off x="640080" y="4983480"/>
+            <a:ext cx="457200" cy="457200"/>
+          </a:xfrm>
+          <a:prstGeom prst="rect">
+            <a:avLst/>
+          </a:prstGeom>
+          <a:noFill/>
+          <a:ln/>
+        </p:spPr>
+        <p:txBody>
+          <a:bodyPr wrap="square" rtlCol="0" anchor="ctr"/>
+          <a:lstStyle/>
+          <a:p>
+            <a:pPr algn="ctr" indent="0" marL="0">
+              <a:buNone/>
+            </a:pPr>
+            <a:r>
+              <a:rPr lang="en-US" sz="2000" b="1" dirty="0">
+                <a:solidFill>
+                  <a:srgbClr val="FFFFFF"/>
+                </a:solidFill>
+                <a:latin typeface="Cambria" pitchFamily="34" charset="0"/>
+                <a:ea typeface="Cambria" pitchFamily="34" charset="-122"/>
+                <a:cs typeface="Cambria" pitchFamily="34" charset="-120"/>
+              </a:rPr>
+              <a:t>3</a:t>
+            </a:r>
+            <a:endParaRPr lang="en-US" sz="2000" dirty="0"/>
+          </a:p>
+        </p:txBody>
+      </p:sp>
+      <p:sp>
+        <p:nvSpPr>
+          <p:cNvPr id="14" name="Text 12"/>
+          <p:cNvSpPr/>
+          <p:nvPr/>
+        </p:nvSpPr>
+        <p:spPr>
+          <a:xfrm>
+            <a:off x="1371600" y="4946904"/>
+            <a:ext cx="10332720" cy="411480"/>
+          </a:xfrm>
+          <a:prstGeom prst="rect">
+            <a:avLst/>
+          </a:prstGeom>
+          <a:noFill/>
+          <a:ln/>
+        </p:spPr>
+        <p:txBody>
+          <a:bodyPr wrap="square" rtlCol="0" anchor="ctr"/>
+          <a:lstStyle/>
+          <a:p>
+            <a:pPr indent="0" marL="0">
+              <a:buNone/>
+            </a:pPr>
+            <a:r>
+              <a:rPr lang="en-US" sz="1900" b="1" dirty="0">
+                <a:solidFill>
+                  <a:srgbClr val="B9852F"/>
+                </a:solidFill>
+                <a:latin typeface="Cambria" pitchFamily="34" charset="0"/>
+                <a:ea typeface="Cambria" pitchFamily="34" charset="-122"/>
+                <a:cs typeface="Cambria" pitchFamily="34" charset="-120"/>
+              </a:rPr>
+              <a:t>Images are culture too</a:t>
+            </a:r>
+            <a:endParaRPr lang="en-US" sz="1900" dirty="0"/>
+          </a:p>
+        </p:txBody>
+      </p:sp>
+      <p:sp>
+        <p:nvSpPr>
+          <p:cNvPr id="15" name="Text 13"/>
+          <p:cNvSpPr/>
+          <p:nvPr/>
+        </p:nvSpPr>
+        <p:spPr>
+          <a:xfrm>
+            <a:off x="1371600" y="5367528"/>
+            <a:ext cx="10332720" cy="914400"/>
+          </a:xfrm>
+          <a:prstGeom prst="rect">
+            <a:avLst/>
+          </a:prstGeom>
+          <a:noFill/>
+          <a:ln/>
+        </p:spPr>
+        <p:txBody>
+          <a:bodyPr wrap="square" rtlCol="0" anchor="t">
+            <a:spAutoFit/>
+          </a:bodyPr>
+          <a:lstStyle/>
+          <a:p>
+            <a:pPr indent="0" marL="0">
+              <a:lnSpc>
+                <a:spcPct val="112000"/>
+              </a:lnSpc>
+              <a:buNone/>
+            </a:pPr>
+            <a:r>
+              <a:rPr lang="en-US" sz="1450" dirty="0">
+                <a:solidFill>
+                  <a:srgbClr val="1A1A1A"/>
+                </a:solidFill>
+                <a:latin typeface="Calibri" pitchFamily="34" charset="0"/>
+                <a:ea typeface="Calibri" pitchFamily="34" charset="-122"/>
+                <a:cs typeface="Calibri" pitchFamily="34" charset="-120"/>
+              </a:rPr>
+              <a:t>A picture is numbers: you counted pixels on day one, and images continue as a co-equal corpus through all ten weeks.</a:t>
+            </a:r>
+            <a:endParaRPr lang="en-US" sz="1450" dirty="0"/>
+          </a:p>
+        </p:txBody>
+      </p:sp>
+    </p:spTree>
+  </p:cSld>
+  <p:clrMapOvr>
+    <a:masterClrMapping/>
+  </p:clrMapOvr>
+</p:sld>
+</file>
+
+<file path=ppt/slides/slide19.xml><?xml version="1.0" encoding="utf-8"?>
+<p:sld xmlns:a="http://schemas.openxmlformats.org/drawingml/2006/main" xmlns:r="http://schemas.openxmlformats.org/officeDocument/2006/relationships" xmlns:p="http://schemas.openxmlformats.org/presentationml/2006/main">
+  <p:cSld name="Slide 19">
     <p:bg>
       <p:bgPr>
         <a:solidFill>
@@ -9978,7 +10519,7 @@
                 <a:ea typeface="Calibri" pitchFamily="34" charset="-122"/>
                 <a:cs typeface="Calibri" pitchFamily="34" charset="-120"/>
               </a:rPr>
-              <a:t>Discussion, in pairs: what did the makers of this table take, and what did they leave? That question is the course, asked of every corpus from now on.</a:t>
+              <a:t>Discussion, in pairs: what did the makers of this table take, and what did they leave? That question is the course, asked of every corpus from now on - and it has a whole literature, on the next slide.</a:t>
             </a:r>
             <a:endParaRPr lang="en-US" sz="1500" dirty="0"/>
           </a:p>
@@ -10110,7 +10651,7 @@
                 <a:ea typeface="Cambria" pitchFamily="34" charset="-122"/>
                 <a:cs typeface="Cambria" pitchFamily="34" charset="-120"/>
               </a:rPr>
-              <a:t>The Drive routine (every week, without exception)</a:t>
+              <a:t>Quantification has a literature (the theory shelf, never required)</a:t>
             </a:r>
             <a:endParaRPr lang="en-US" sz="3000" dirty="0"/>
           </a:p>
@@ -10145,7 +10686,7 @@
         <p:spPr>
           <a:xfrm>
             <a:off x="1097280" y="2240280"/>
-            <a:ext cx="10607040" cy="1017270"/>
+            <a:ext cx="10607040" cy="813816"/>
           </a:xfrm>
           <a:prstGeom prst="rect">
             <a:avLst/>
@@ -10166,7 +10707,7 @@
               <a:buNone/>
             </a:pPr>
             <a:r>
-              <a:rPr lang="en-US" sz="1650" dirty="0">
+              <a:rPr lang="en-US" sz="1500" dirty="0">
                 <a:solidFill>
                   <a:srgbClr val="1A1A1A"/>
                 </a:solidFill>
@@ -10174,9 +10715,9 @@
                 <a:ea typeface="Calibri" pitchFamily="34" charset="-122"/>
                 <a:cs typeface="Calibri" pitchFamily="34" charset="-120"/>
               </a:rPr>
-              <a:t>Colab wipes its machine when you idle. Your mounted Drive folder is what survives.</a:t>
-            </a:r>
-            <a:endParaRPr lang="en-US" sz="1650" dirty="0"/>
+              <a:t>Porter, Trust in Numbers (1995): quantification is a technology of distance - numbers travel where personal trust cannot, which is why institutions demand them.</a:t>
+            </a:r>
+            <a:endParaRPr lang="en-US" sz="1500" dirty="0"/>
           </a:p>
         </p:txBody>
       </p:sp>
@@ -10188,7 +10729,7 @@
         </p:nvSpPr>
         <p:spPr>
           <a:xfrm>
-            <a:off x="640080" y="3348990"/>
+            <a:off x="640080" y="3145536"/>
             <a:ext cx="201168" cy="201168"/>
           </a:xfrm>
           <a:prstGeom prst="ellipse">
@@ -10208,8 +10749,8 @@
         </p:nvSpPr>
         <p:spPr>
           <a:xfrm>
-            <a:off x="1097280" y="3257550"/>
-            <a:ext cx="10607040" cy="1017270"/>
+            <a:off x="1097280" y="3054096"/>
+            <a:ext cx="10607040" cy="813816"/>
           </a:xfrm>
           <a:prstGeom prst="rect">
             <a:avLst/>
@@ -10230,7 +10771,7 @@
               <a:buNone/>
             </a:pPr>
             <a:r>
-              <a:rPr lang="en-US" sz="1650" dirty="0">
+              <a:rPr lang="en-US" sz="1500" dirty="0">
                 <a:solidFill>
                   <a:srgbClr val="1A1A1A"/>
                 </a:solidFill>
@@ -10238,9 +10779,9 @@
                 <a:ea typeface="Calibri" pitchFamily="34" charset="-122"/>
                 <a:cs typeface="Calibri" pitchFamily="34" charset="-120"/>
               </a:rPr>
-              <a:t>Copy the notebook to Drive, mount Drive, save everything to the one project folder.</a:t>
-            </a:r>
-            <a:endParaRPr lang="en-US" sz="1650" dirty="0"/>
+              <a:t>Bowker and Star, Sorting Things Out (1999): every classification makes some things visible and others invisible; categories have politics, including the four columns of a wedding table.</a:t>
+            </a:r>
+            <a:endParaRPr lang="en-US" sz="1500" dirty="0"/>
           </a:p>
         </p:txBody>
       </p:sp>
@@ -10252,7 +10793,7 @@
         </p:nvSpPr>
         <p:spPr>
           <a:xfrm>
-            <a:off x="640080" y="4366260"/>
+            <a:off x="640080" y="3959352"/>
             <a:ext cx="201168" cy="201168"/>
           </a:xfrm>
           <a:prstGeom prst="ellipse">
@@ -10272,8 +10813,8 @@
         </p:nvSpPr>
         <p:spPr>
           <a:xfrm>
-            <a:off x="1097280" y="4274820"/>
-            <a:ext cx="10607040" cy="1017270"/>
+            <a:off x="1097280" y="3867912"/>
+            <a:ext cx="10607040" cy="813816"/>
           </a:xfrm>
           <a:prstGeom prst="rect">
             <a:avLst/>
@@ -10294,7 +10835,7 @@
               <a:buNone/>
             </a:pPr>
             <a:r>
-              <a:rPr lang="en-US" sz="1650" dirty="0">
+              <a:rPr lang="en-US" sz="1500" dirty="0">
                 <a:solidFill>
                   <a:srgbClr val="1A1A1A"/>
                 </a:solidFill>
@@ -10302,9 +10843,9 @@
                 <a:ea typeface="Calibri" pitchFamily="34" charset="-122"/>
                 <a:cs typeface="Calibri" pitchFamily="34" charset="-120"/>
               </a:rPr>
-              <a:t>Your Week-4 corpus has to be alive in Week 5. This ritual is how.</a:t>
-            </a:r>
-            <a:endParaRPr lang="en-US" sz="1650" dirty="0"/>
+              <a:t>Gitelman (ed.), 'Raw Data' Is an Oxymoron (2013): there is no raw data - collection, cleaning, and framing cook it before you arrive.</a:t>
+            </a:r>
+            <a:endParaRPr lang="en-US" sz="1500" dirty="0"/>
           </a:p>
         </p:txBody>
       </p:sp>
@@ -10316,7 +10857,7 @@
         </p:nvSpPr>
         <p:spPr>
           <a:xfrm>
-            <a:off x="640080" y="5383530"/>
+            <a:off x="640080" y="4773168"/>
             <a:ext cx="201168" cy="201168"/>
           </a:xfrm>
           <a:prstGeom prst="ellipse">
@@ -10336,8 +10877,8 @@
         </p:nvSpPr>
         <p:spPr>
           <a:xfrm>
-            <a:off x="1097280" y="5292090"/>
-            <a:ext cx="10607040" cy="1017270"/>
+            <a:off x="1097280" y="4681728"/>
+            <a:ext cx="10607040" cy="813816"/>
           </a:xfrm>
           <a:prstGeom prst="rect">
             <a:avLst/>
@@ -10358,7 +10899,7 @@
               <a:buNone/>
             </a:pPr>
             <a:r>
-              <a:rPr lang="en-US" sz="1650" dirty="0">
+              <a:rPr lang="en-US" sz="1500" dirty="0">
                 <a:solidFill>
                   <a:srgbClr val="1A1A1A"/>
                 </a:solidFill>
@@ -10366,9 +10907,73 @@
                 <a:ea typeface="Calibri" pitchFamily="34" charset="-122"/>
                 <a:cs typeface="Calibri" pitchFamily="34" charset="-120"/>
               </a:rPr>
-              <a:t>Gemini key goes in Colab Secrets. Never pasted into code.</a:t>
-            </a:r>
-            <a:endParaRPr lang="en-US" sz="1650" dirty="0"/>
+              <a:t>Scott, Seeing Like a State (1998): counting makes the world legible to power, and the counting remakes the world to be more countable.</a:t>
+            </a:r>
+            <a:endParaRPr lang="en-US" sz="1500" dirty="0"/>
+          </a:p>
+        </p:txBody>
+      </p:sp>
+      <p:sp>
+        <p:nvSpPr>
+          <p:cNvPr id="13" name="Shape 11"/>
+          <p:cNvSpPr/>
+          <p:nvPr/>
+        </p:nvSpPr>
+        <p:spPr>
+          <a:xfrm>
+            <a:off x="640080" y="5586984"/>
+            <a:ext cx="201168" cy="201168"/>
+          </a:xfrm>
+          <a:prstGeom prst="ellipse">
+            <a:avLst/>
+          </a:prstGeom>
+          <a:solidFill>
+            <a:srgbClr val="3F6F5F"/>
+          </a:solidFill>
+          <a:ln/>
+        </p:spPr>
+      </p:sp>
+      <p:sp>
+        <p:nvSpPr>
+          <p:cNvPr id="14" name="Text 12"/>
+          <p:cNvSpPr/>
+          <p:nvPr/>
+        </p:nvSpPr>
+        <p:spPr>
+          <a:xfrm>
+            <a:off x="1097280" y="5495544"/>
+            <a:ext cx="10607040" cy="813816"/>
+          </a:xfrm>
+          <a:prstGeom prst="rect">
+            <a:avLst/>
+          </a:prstGeom>
+          <a:noFill/>
+          <a:ln/>
+        </p:spPr>
+        <p:txBody>
+          <a:bodyPr wrap="square" rtlCol="0" anchor="t">
+            <a:spAutoFit/>
+          </a:bodyPr>
+          <a:lstStyle/>
+          <a:p>
+            <a:pPr indent="0" marL="0">
+              <a:lnSpc>
+                <a:spcPct val="112000"/>
+              </a:lnSpc>
+              <a:buNone/>
+            </a:pPr>
+            <a:r>
+              <a:rPr lang="en-US" sz="1500" dirty="0">
+                <a:solidFill>
+                  <a:srgbClr val="1A1A1A"/>
+                </a:solidFill>
+                <a:latin typeface="Calibri" pitchFamily="34" charset="0"/>
+                <a:ea typeface="Calibri" pitchFamily="34" charset="-122"/>
+                <a:cs typeface="Calibri" pitchFamily="34" charset="-120"/>
+              </a:rPr>
+              <a:t>Drucker's capta (the Week 1 supplement) is the door into this shelf; D'Ignazio and Klein's Data Feminism (open access) runs under the whole course. None of it is required; all of it is where the course's habits come from.</a:t>
+            </a:r>
+            <a:endParaRPr lang="en-US" sz="1500" dirty="0"/>
           </a:p>
         </p:txBody>
       </p:sp>

--- a/slides/pptx/week-01.pptx
+++ b/slides/pptx/week-01.pptx
@@ -24,9 +24,10 @@
     <p:sldId id="272" r:id="rId18"/>
     <p:sldId id="273" r:id="rId19"/>
     <p:sldId id="274" r:id="rId20"/>
+    <p:sldId id="275" r:id="rId21"/>
   </p:sldIdLst>
   <p:notesMasterIdLst>
-    <p:notesMasterId r:id="rId21"/>
+    <p:notesMasterId r:id="rId22"/>
   </p:notesMasterIdLst>
   <p:sldSz cx="12191695" cy="6858000"/>
   <p:notesSz cx="6858000" cy="12191695"/>
@@ -1530,6 +1531,94 @@
 </p:notes>
 </file>
 
+<file path=ppt/notesSlides/notesSlide20.xml><?xml version="1.0" encoding="utf-8"?>
+<p:notes xmlns:a="http://schemas.openxmlformats.org/drawingml/2006/main" xmlns:r="http://schemas.openxmlformats.org/officeDocument/2006/relationships" xmlns:p="http://schemas.openxmlformats.org/presentationml/2006/main">
+  <p:cSld>
+    <p:spTree>
+      <p:nvGrpSpPr>
+        <p:cNvPr id="1" name=""/>
+        <p:cNvGrpSpPr/>
+        <p:nvPr/>
+      </p:nvGrpSpPr>
+      <p:grpSpPr>
+        <a:xfrm>
+          <a:off x="0" y="0"/>
+          <a:ext cx="0" cy="0"/>
+          <a:chOff x="0" y="0"/>
+          <a:chExt cx="0" cy="0"/>
+        </a:xfrm>
+      </p:grpSpPr>
+      <p:sp>
+        <p:nvSpPr>
+          <p:cNvPr id="2" name="Slide Image Placeholder 1"/>
+          <p:cNvSpPr>
+            <a:spLocks noGrp="1" noRot="1" noChangeAspect="1"/>
+          </p:cNvSpPr>
+          <p:nvPr>
+            <p:ph type="sldImg"/>
+          </p:nvPr>
+        </p:nvSpPr>
+        <p:spPr/>
+      </p:sp>
+      <p:sp>
+        <p:nvSpPr>
+          <p:cNvPr id="3" name="Notes Placeholder 2"/>
+          <p:cNvSpPr>
+            <a:spLocks noGrp="1"/>
+          </p:cNvSpPr>
+          <p:nvPr>
+            <p:ph type="body" idx="1"/>
+          </p:nvPr>
+        </p:nvSpPr>
+        <p:spPr/>
+        <p:txBody>
+          <a:bodyPr/>
+          <a:lstStyle/>
+          <a:p>
+            <a:r>
+              <a:rPr lang="en-US" dirty="0"/>
+              <a:t/>
+            </a:r>
+            <a:endParaRPr lang="en-US" dirty="0"/>
+          </a:p>
+        </p:txBody>
+      </p:sp>
+      <p:sp>
+        <p:nvSpPr>
+          <p:cNvPr id="4" name="Slide Number Placeholder 3"/>
+          <p:cNvSpPr>
+            <a:spLocks noGrp="1"/>
+          </p:cNvSpPr>
+          <p:nvPr>
+            <p:ph type="sldNum" sz="quarter" idx="10"/>
+          </p:nvPr>
+        </p:nvSpPr>
+        <p:spPr/>
+        <p:txBody>
+          <a:bodyPr/>
+          <a:lstStyle/>
+          <a:p>
+            <a:fld id="{F7021451-1387-4CA6-816F-3879F97B5CBC}" type="slidenum">
+              <a:rPr lang="en-US"/>
+              <a:t>20</a:t>
+            </a:fld>
+            <a:endParaRPr lang="en-US"/>
+          </a:p>
+        </p:txBody>
+      </p:sp>
+    </p:spTree>
+    <p:extLst>
+      <p:ext uri="{BB962C8B-B14F-4D97-AF65-F5344CB8AC3E}">
+        <p14:creationId xmlns:p14="http://schemas.microsoft.com/office/powerpoint/2010/main" val="1024086991"/>
+      </p:ext>
+    </p:extLst>
+  </p:cSld>
+  <p:clrMapOvr>
+    <a:masterClrMapping/>
+  </p:clrMapOvr>
+</p:notes>
+</file>
+
 <file path=ppt/notesSlides/notesSlide3.xml><?xml version="1.0" encoding="utf-8"?>
 <p:notes xmlns:a="http://schemas.openxmlformats.org/drawingml/2006/main" xmlns:r="http://schemas.openxmlformats.org/officeDocument/2006/relationships" xmlns:p="http://schemas.openxmlformats.org/presentationml/2006/main">
   <p:cSld>
@@ -4866,7 +4955,7 @@
                 <a:ea typeface="Calibri" pitchFamily="34" charset="-122"/>
                 <a:cs typeface="Calibri" pitchFamily="34" charset="-120"/>
               </a:rPr>
-              <a:t>Rows: what share of brides kept their name, year by year. One groupby, one chart.</a:t>
+              <a:t>Rows: a manifest of 18 paintings, counted and ranked in one pipeline.</a:t>
             </a:r>
             <a:endParaRPr lang="en-US" sz="1650" dirty="0"/>
           </a:p>
@@ -4994,7 +5083,7 @@
                 <a:ea typeface="Calibri" pitchFamily="34" charset="-122"/>
                 <a:cs typeface="Calibri" pitchFamily="34" charset="-120"/>
               </a:rPr>
-              <a:t>Pixels: rank 200 Met thumbnails darkest to brightest from average luminance.</a:t>
+              <a:t>Pixels: the paintings themselves, ranked darkest to brightest from average luminance.</a:t>
             </a:r>
             <a:endParaRPr lang="en-US" sz="1650" dirty="0"/>
           </a:p>
@@ -5058,7 +5147,7 @@
                 <a:ea typeface="Calibri" pitchFamily="34" charset="-122"/>
                 <a:cs typeface="Calibri" pitchFamily="34" charset="-120"/>
               </a:rPr>
-              <a:t>The same technique three times, each containing a decision.</a:t>
+              <a:t>One technique, three shapes, a decision hiding in each.</a:t>
             </a:r>
             <a:endParaRPr lang="en-US" sz="1650" dirty="0"/>
           </a:p>
@@ -5104,8 +5193,8 @@
         </p:nvSpPr>
         <p:spPr>
           <a:xfrm>
-            <a:off x="640080" y="731520"/>
-            <a:ext cx="10058400" cy="731520"/>
+            <a:off x="640080" y="640080"/>
+            <a:ext cx="10058400" cy="320040"/>
           </a:xfrm>
           <a:prstGeom prst="rect">
             <a:avLst/>
@@ -5121,7 +5210,46 @@
               <a:buNone/>
             </a:pPr>
             <a:r>
-              <a:rPr lang="en-US" sz="3000" b="1" dirty="0">
+              <a:rPr lang="en-US" sz="1200" b="1" spc="300" kern="0" dirty="0">
+                <a:solidFill>
+                  <a:srgbClr val="3F6F5F"/>
+                </a:solidFill>
+                <a:latin typeface="Calibri" pitchFamily="34" charset="0"/>
+                <a:ea typeface="Calibri" pitchFamily="34" charset="-122"/>
+                <a:cs typeface="Calibri" pitchFamily="34" charset="-120"/>
+              </a:rPr>
+              <a:t>WEEK 1 · THE IMAGE CORPUS</a:t>
+            </a:r>
+            <a:endParaRPr lang="en-US" sz="1200" dirty="0"/>
+          </a:p>
+        </p:txBody>
+      </p:sp>
+      <p:sp>
+        <p:nvSpPr>
+          <p:cNvPr id="3" name="Text 1"/>
+          <p:cNvSpPr/>
+          <p:nvPr/>
+        </p:nvSpPr>
+        <p:spPr>
+          <a:xfrm>
+            <a:off x="640080" y="1005840"/>
+            <a:ext cx="10881360" cy="640080"/>
+          </a:xfrm>
+          <a:prstGeom prst="rect">
+            <a:avLst/>
+          </a:prstGeom>
+          <a:noFill/>
+          <a:ln/>
+        </p:spPr>
+        <p:txBody>
+          <a:bodyPr wrap="square" rtlCol="0" anchor="ctr"/>
+          <a:lstStyle/>
+          <a:p>
+            <a:pPr indent="0" marL="0">
+              <a:buNone/>
+            </a:pPr>
+            <a:r>
+              <a:rPr lang="en-US" sz="2600" b="1" dirty="0">
                 <a:solidFill>
                   <a:srgbClr val="1A1A1A"/>
                 </a:solidFill>
@@ -5129,22 +5257,206 @@
                 <a:ea typeface="Cambria" pitchFamily="34" charset="-122"/>
                 <a:cs typeface="Cambria" pitchFamily="34" charset="-120"/>
               </a:rPr>
-              <a:t>Three modes today</a:t>
-            </a:r>
-            <a:endParaRPr lang="en-US" sz="3000" dirty="0"/>
-          </a:p>
-        </p:txBody>
-      </p:sp>
-      <p:sp>
-        <p:nvSpPr>
-          <p:cNvPr id="3" name="Text 1"/>
-          <p:cNvSpPr/>
-          <p:nvPr/>
-        </p:nvSpPr>
-        <p:spPr>
-          <a:xfrm>
-            <a:off x="640080" y="1417320"/>
-            <a:ext cx="10058400" cy="365760"/>
+              <a:t>Eighteen real paintings, public domain, snapshotted in the repo</a:t>
+            </a:r>
+            <a:endParaRPr lang="en-US" sz="2600" dirty="0"/>
+          </a:p>
+        </p:txBody>
+      </p:sp>
+      <p:pic>
+        <p:nvPicPr>
+          <p:cNvPr id="4" name="Image 0" descr="/sessions/hopeful-clever-faraday/mnt/culture-as-data/notebooks/data/week01/met/435581.jpg">    </p:cNvPr>
+          <p:cNvPicPr>
+            <a:picLocks noChangeAspect="1"/>
+          </p:cNvPicPr>
+          <p:nvPr/>
+        </p:nvPicPr>
+        <p:blipFill>
+          <a:blip r:embed="rId1"/>
+          <a:srcRect l="0" r="0" t="0" b="0"/>
+          <a:stretch/>
+        </p:blipFill>
+        <p:spPr>
+          <a:xfrm>
+            <a:off x="640080" y="2011680"/>
+            <a:ext cx="2560320" cy="2011680"/>
+          </a:xfrm>
+          <a:prstGeom prst="rect">
+            <a:avLst/>
+          </a:prstGeom>
+        </p:spPr>
+      </p:pic>
+      <p:pic>
+        <p:nvPicPr>
+          <p:cNvPr id="5" name="Image 1" descr="/sessions/hopeful-clever-faraday/mnt/culture-as-data/notebooks/data/week01/met/435802.jpg">    </p:cNvPr>
+          <p:cNvPicPr>
+            <a:picLocks noChangeAspect="1"/>
+          </p:cNvPicPr>
+          <p:nvPr/>
+        </p:nvPicPr>
+        <p:blipFill>
+          <a:blip r:embed="rId2"/>
+          <a:srcRect l="0" r="0" t="0" b="0"/>
+          <a:stretch/>
+        </p:blipFill>
+        <p:spPr>
+          <a:xfrm>
+            <a:off x="3429000" y="2011680"/>
+            <a:ext cx="2560320" cy="2011680"/>
+          </a:xfrm>
+          <a:prstGeom prst="rect">
+            <a:avLst/>
+          </a:prstGeom>
+        </p:spPr>
+      </p:pic>
+      <p:pic>
+        <p:nvPicPr>
+          <p:cNvPr id="6" name="Image 2" descr="/sessions/hopeful-clever-faraday/mnt/culture-as-data/notebooks/data/week01/met/435896.jpg">    </p:cNvPr>
+          <p:cNvPicPr>
+            <a:picLocks noChangeAspect="1"/>
+          </p:cNvPicPr>
+          <p:nvPr/>
+        </p:nvPicPr>
+        <p:blipFill>
+          <a:blip r:embed="rId3"/>
+          <a:srcRect l="0" r="0" t="0" b="0"/>
+          <a:stretch/>
+        </p:blipFill>
+        <p:spPr>
+          <a:xfrm>
+            <a:off x="6217920" y="2011680"/>
+            <a:ext cx="2560320" cy="2011680"/>
+          </a:xfrm>
+          <a:prstGeom prst="rect">
+            <a:avLst/>
+          </a:prstGeom>
+        </p:spPr>
+      </p:pic>
+      <p:pic>
+        <p:nvPicPr>
+          <p:cNvPr id="7" name="Image 3" descr="/sessions/hopeful-clever-faraday/mnt/culture-as-data/notebooks/data/week01/met/435944.jpg">    </p:cNvPr>
+          <p:cNvPicPr>
+            <a:picLocks noChangeAspect="1"/>
+          </p:cNvPicPr>
+          <p:nvPr/>
+        </p:nvPicPr>
+        <p:blipFill>
+          <a:blip r:embed="rId4"/>
+          <a:srcRect l="0" r="0" t="0" b="0"/>
+          <a:stretch/>
+        </p:blipFill>
+        <p:spPr>
+          <a:xfrm>
+            <a:off x="9006840" y="2011680"/>
+            <a:ext cx="2560320" cy="2011680"/>
+          </a:xfrm>
+          <a:prstGeom prst="rect">
+            <a:avLst/>
+          </a:prstGeom>
+        </p:spPr>
+      </p:pic>
+      <p:pic>
+        <p:nvPicPr>
+          <p:cNvPr id="8" name="Image 4" descr="/sessions/hopeful-clever-faraday/mnt/culture-as-data/notebooks/data/week01/met/436295.jpg">    </p:cNvPr>
+          <p:cNvPicPr>
+            <a:picLocks noChangeAspect="1"/>
+          </p:cNvPicPr>
+          <p:nvPr/>
+        </p:nvPicPr>
+        <p:blipFill>
+          <a:blip r:embed="rId5"/>
+          <a:srcRect l="0" r="0" t="0" b="0"/>
+          <a:stretch/>
+        </p:blipFill>
+        <p:spPr>
+          <a:xfrm>
+            <a:off x="640080" y="4251960"/>
+            <a:ext cx="2560320" cy="2011680"/>
+          </a:xfrm>
+          <a:prstGeom prst="rect">
+            <a:avLst/>
+          </a:prstGeom>
+        </p:spPr>
+      </p:pic>
+      <p:pic>
+        <p:nvPicPr>
+          <p:cNvPr id="9" name="Image 5" descr="/sessions/hopeful-clever-faraday/mnt/culture-as-data/notebooks/data/week01/met/436532.jpg">    </p:cNvPr>
+          <p:cNvPicPr>
+            <a:picLocks noChangeAspect="1"/>
+          </p:cNvPicPr>
+          <p:nvPr/>
+        </p:nvPicPr>
+        <p:blipFill>
+          <a:blip r:embed="rId6"/>
+          <a:srcRect l="0" r="0" t="0" b="0"/>
+          <a:stretch/>
+        </p:blipFill>
+        <p:spPr>
+          <a:xfrm>
+            <a:off x="3429000" y="4251960"/>
+            <a:ext cx="2560320" cy="2011680"/>
+          </a:xfrm>
+          <a:prstGeom prst="rect">
+            <a:avLst/>
+          </a:prstGeom>
+        </p:spPr>
+      </p:pic>
+      <p:pic>
+        <p:nvPicPr>
+          <p:cNvPr id="10" name="Image 6" descr="/sessions/hopeful-clever-faraday/mnt/culture-as-data/notebooks/data/week01/met/436544.jpg">    </p:cNvPr>
+          <p:cNvPicPr>
+            <a:picLocks noChangeAspect="1"/>
+          </p:cNvPicPr>
+          <p:nvPr/>
+        </p:nvPicPr>
+        <p:blipFill>
+          <a:blip r:embed="rId7"/>
+          <a:srcRect l="0" r="0" t="0" b="0"/>
+          <a:stretch/>
+        </p:blipFill>
+        <p:spPr>
+          <a:xfrm>
+            <a:off x="6217920" y="4251960"/>
+            <a:ext cx="2560320" cy="2011680"/>
+          </a:xfrm>
+          <a:prstGeom prst="rect">
+            <a:avLst/>
+          </a:prstGeom>
+        </p:spPr>
+      </p:pic>
+      <p:pic>
+        <p:nvPicPr>
+          <p:cNvPr id="11" name="Image 7" descr="/sessions/hopeful-clever-faraday/mnt/culture-as-data/notebooks/data/week01/met/436623.jpg">    </p:cNvPr>
+          <p:cNvPicPr>
+            <a:picLocks noChangeAspect="1"/>
+          </p:cNvPicPr>
+          <p:nvPr/>
+        </p:nvPicPr>
+        <p:blipFill>
+          <a:blip r:embed="rId8"/>
+          <a:srcRect l="0" r="0" t="0" b="0"/>
+          <a:stretch/>
+        </p:blipFill>
+        <p:spPr>
+          <a:xfrm>
+            <a:off x="9006840" y="4251960"/>
+            <a:ext cx="2560320" cy="2011680"/>
+          </a:xfrm>
+          <a:prstGeom prst="rect">
+            <a:avLst/>
+          </a:prstGeom>
+        </p:spPr>
+      </p:pic>
+      <p:sp>
+        <p:nvSpPr>
+          <p:cNvPr id="12" name="Text 2"/>
+          <p:cNvSpPr/>
+          <p:nvPr/>
+        </p:nvSpPr>
+        <p:spPr>
+          <a:xfrm>
+            <a:off x="640080" y="6400800"/>
+            <a:ext cx="10881360" cy="320040"/>
           </a:xfrm>
           <a:prstGeom prst="rect">
             <a:avLst/>
@@ -5160,7 +5472,7 @@
               <a:buNone/>
             </a:pPr>
             <a:r>
-              <a:rPr lang="en-US" sz="1400" i="1" dirty="0">
+              <a:rPr lang="en-US" sz="1200" i="1" dirty="0">
                 <a:solidFill>
                   <a:srgbClr val="6B6B63"/>
                 </a:solidFill>
@@ -5168,384 +5480,9 @@
                 <a:ea typeface="Calibri" pitchFamily="34" charset="-122"/>
                 <a:cs typeface="Calibri" pitchFamily="34" charset="-120"/>
               </a:rPr>
-              <a:t>about a third of the session each</a:t>
-            </a:r>
-            <a:endParaRPr lang="en-US" sz="1400" dirty="0"/>
-          </a:p>
-        </p:txBody>
-      </p:sp>
-      <p:sp>
-        <p:nvSpPr>
-          <p:cNvPr id="4" name="Shape 2"/>
-          <p:cNvSpPr/>
-          <p:nvPr/>
-        </p:nvSpPr>
-        <p:spPr>
-          <a:xfrm>
-            <a:off x="640080" y="2194560"/>
-            <a:ext cx="3383280" cy="3291840"/>
-          </a:xfrm>
-          <a:prstGeom prst="roundRect">
-            <a:avLst>
-              <a:gd name="adj" fmla="val 3333"/>
-            </a:avLst>
-          </a:prstGeom>
-          <a:solidFill>
-            <a:srgbClr val="F4EEE8"/>
-          </a:solidFill>
-          <a:ln/>
-        </p:spPr>
-      </p:sp>
-      <p:sp>
-        <p:nvSpPr>
-          <p:cNvPr id="5" name="Shape 3"/>
-          <p:cNvSpPr/>
-          <p:nvPr/>
-        </p:nvSpPr>
-        <p:spPr>
-          <a:xfrm>
-            <a:off x="1051560" y="2606040"/>
-            <a:ext cx="548640" cy="548640"/>
-          </a:xfrm>
-          <a:prstGeom prst="ellipse">
-            <a:avLst/>
-          </a:prstGeom>
-          <a:solidFill>
-            <a:srgbClr val="7A3B2E"/>
-          </a:solidFill>
-          <a:ln/>
-        </p:spPr>
-      </p:sp>
-      <p:sp>
-        <p:nvSpPr>
-          <p:cNvPr id="6" name="Text 4"/>
-          <p:cNvSpPr/>
-          <p:nvPr/>
-        </p:nvSpPr>
-        <p:spPr>
-          <a:xfrm>
-            <a:off x="1005840" y="3383280"/>
-            <a:ext cx="2651760" cy="548640"/>
-          </a:xfrm>
-          <a:prstGeom prst="rect">
-            <a:avLst/>
-          </a:prstGeom>
-          <a:noFill/>
-          <a:ln/>
-        </p:spPr>
-        <p:txBody>
-          <a:bodyPr wrap="square" rtlCol="0" anchor="ctr"/>
-          <a:lstStyle/>
-          <a:p>
-            <a:pPr indent="0" marL="0">
-              <a:buNone/>
-            </a:pPr>
-            <a:r>
-              <a:rPr lang="en-US" sz="2100" b="1" dirty="0">
-                <a:solidFill>
-                  <a:srgbClr val="1A1A1A"/>
-                </a:solidFill>
-                <a:latin typeface="Cambria" pitchFamily="34" charset="0"/>
-                <a:ea typeface="Cambria" pitchFamily="34" charset="-122"/>
-                <a:cs typeface="Cambria" pitchFamily="34" charset="-120"/>
-              </a:rPr>
-              <a:t>Lecture / demo</a:t>
-            </a:r>
-            <a:endParaRPr lang="en-US" sz="2100" dirty="0"/>
-          </a:p>
-        </p:txBody>
-      </p:sp>
-      <p:sp>
-        <p:nvSpPr>
-          <p:cNvPr id="7" name="Text 5"/>
-          <p:cNvSpPr/>
-          <p:nvPr/>
-        </p:nvSpPr>
-        <p:spPr>
-          <a:xfrm>
-            <a:off x="1005840" y="3977640"/>
-            <a:ext cx="2651760" cy="1371600"/>
-          </a:xfrm>
-          <a:prstGeom prst="rect">
-            <a:avLst/>
-          </a:prstGeom>
-          <a:noFill/>
-          <a:ln/>
-        </p:spPr>
-        <p:txBody>
-          <a:bodyPr wrap="square" rtlCol="0" anchor="t">
-            <a:spAutoFit/>
-          </a:bodyPr>
-          <a:lstStyle/>
-          <a:p>
-            <a:pPr indent="0" marL="0">
-              <a:lnSpc>
-                <a:spcPct val="115000"/>
-              </a:lnSpc>
-              <a:buNone/>
-            </a:pPr>
-            <a:r>
-              <a:rPr lang="en-US" sz="1500" dirty="0">
-                <a:solidFill>
-                  <a:srgbClr val="1A1A1A"/>
-                </a:solidFill>
-                <a:latin typeface="Calibri" pitchFamily="34" charset="0"/>
-                <a:ea typeface="Calibri" pitchFamily="34" charset="-122"/>
-                <a:cs typeface="Calibri" pitchFamily="34" charset="-120"/>
-              </a:rPr>
-              <a:t>Counting: rows, words, pixels</a:t>
-            </a:r>
-            <a:endParaRPr lang="en-US" sz="1500" dirty="0"/>
-          </a:p>
-        </p:txBody>
-      </p:sp>
-      <p:sp>
-        <p:nvSpPr>
-          <p:cNvPr id="8" name="Shape 6"/>
-          <p:cNvSpPr/>
-          <p:nvPr/>
-        </p:nvSpPr>
-        <p:spPr>
-          <a:xfrm>
-            <a:off x="4526280" y="2194560"/>
-            <a:ext cx="3383280" cy="3291840"/>
-          </a:xfrm>
-          <a:prstGeom prst="roundRect">
-            <a:avLst>
-              <a:gd name="adj" fmla="val 3333"/>
-            </a:avLst>
-          </a:prstGeom>
-          <a:solidFill>
-            <a:srgbClr val="F4EEE8"/>
-          </a:solidFill>
-          <a:ln/>
-        </p:spPr>
-      </p:sp>
-      <p:sp>
-        <p:nvSpPr>
-          <p:cNvPr id="9" name="Shape 7"/>
-          <p:cNvSpPr/>
-          <p:nvPr/>
-        </p:nvSpPr>
-        <p:spPr>
-          <a:xfrm>
-            <a:off x="4937760" y="2606040"/>
-            <a:ext cx="548640" cy="548640"/>
-          </a:xfrm>
-          <a:prstGeom prst="ellipse">
-            <a:avLst/>
-          </a:prstGeom>
-          <a:solidFill>
-            <a:srgbClr val="3F6F5F"/>
-          </a:solidFill>
-          <a:ln/>
-        </p:spPr>
-      </p:sp>
-      <p:sp>
-        <p:nvSpPr>
-          <p:cNvPr id="10" name="Text 8"/>
-          <p:cNvSpPr/>
-          <p:nvPr/>
-        </p:nvSpPr>
-        <p:spPr>
-          <a:xfrm>
-            <a:off x="4892040" y="3383280"/>
-            <a:ext cx="2651760" cy="548640"/>
-          </a:xfrm>
-          <a:prstGeom prst="rect">
-            <a:avLst/>
-          </a:prstGeom>
-          <a:noFill/>
-          <a:ln/>
-        </p:spPr>
-        <p:txBody>
-          <a:bodyPr wrap="square" rtlCol="0" anchor="ctr"/>
-          <a:lstStyle/>
-          <a:p>
-            <a:pPr indent="0" marL="0">
-              <a:buNone/>
-            </a:pPr>
-            <a:r>
-              <a:rPr lang="en-US" sz="2100" b="1" dirty="0">
-                <a:solidFill>
-                  <a:srgbClr val="1A1A1A"/>
-                </a:solidFill>
-                <a:latin typeface="Cambria" pitchFamily="34" charset="0"/>
-                <a:ea typeface="Cambria" pitchFamily="34" charset="-122"/>
-                <a:cs typeface="Cambria" pitchFamily="34" charset="-120"/>
-              </a:rPr>
-              <a:t>Workshop</a:t>
-            </a:r>
-            <a:endParaRPr lang="en-US" sz="2100" dirty="0"/>
-          </a:p>
-        </p:txBody>
-      </p:sp>
-      <p:sp>
-        <p:nvSpPr>
-          <p:cNvPr id="11" name="Text 9"/>
-          <p:cNvSpPr/>
-          <p:nvPr/>
-        </p:nvSpPr>
-        <p:spPr>
-          <a:xfrm>
-            <a:off x="4892040" y="3977640"/>
-            <a:ext cx="2651760" cy="1371600"/>
-          </a:xfrm>
-          <a:prstGeom prst="rect">
-            <a:avLst/>
-          </a:prstGeom>
-          <a:noFill/>
-          <a:ln/>
-        </p:spPr>
-        <p:txBody>
-          <a:bodyPr wrap="square" rtlCol="0" anchor="t">
-            <a:spAutoFit/>
-          </a:bodyPr>
-          <a:lstStyle/>
-          <a:p>
-            <a:pPr indent="0" marL="0">
-              <a:lnSpc>
-                <a:spcPct val="115000"/>
-              </a:lnSpc>
-              <a:buNone/>
-            </a:pPr>
-            <a:r>
-              <a:rPr lang="en-US" sz="1500" dirty="0">
-                <a:solidFill>
-                  <a:srgbClr val="1A1A1A"/>
-                </a:solidFill>
-                <a:latin typeface="Calibri" pitchFamily="34" charset="0"/>
-                <a:ea typeface="Calibri" pitchFamily="34" charset="-122"/>
-                <a:cs typeface="Calibri" pitchFamily="34" charset="-120"/>
-              </a:rPr>
-              <a:t>Build hands-on on your own data.</a:t>
-            </a:r>
-            <a:endParaRPr lang="en-US" sz="1500" dirty="0"/>
-          </a:p>
-        </p:txBody>
-      </p:sp>
-      <p:sp>
-        <p:nvSpPr>
-          <p:cNvPr id="12" name="Shape 10"/>
-          <p:cNvSpPr/>
-          <p:nvPr/>
-        </p:nvSpPr>
-        <p:spPr>
-          <a:xfrm>
-            <a:off x="8412480" y="2194560"/>
-            <a:ext cx="3383280" cy="3291840"/>
-          </a:xfrm>
-          <a:prstGeom prst="roundRect">
-            <a:avLst>
-              <a:gd name="adj" fmla="val 3333"/>
-            </a:avLst>
-          </a:prstGeom>
-          <a:solidFill>
-            <a:srgbClr val="F4EEE8"/>
-          </a:solidFill>
-          <a:ln/>
-        </p:spPr>
-      </p:sp>
-      <p:sp>
-        <p:nvSpPr>
-          <p:cNvPr id="13" name="Shape 11"/>
-          <p:cNvSpPr/>
-          <p:nvPr/>
-        </p:nvSpPr>
-        <p:spPr>
-          <a:xfrm>
-            <a:off x="8823960" y="2606040"/>
-            <a:ext cx="548640" cy="548640"/>
-          </a:xfrm>
-          <a:prstGeom prst="ellipse">
-            <a:avLst/>
-          </a:prstGeom>
-          <a:solidFill>
-            <a:srgbClr val="B9852F"/>
-          </a:solidFill>
-          <a:ln/>
-        </p:spPr>
-      </p:sp>
-      <p:sp>
-        <p:nvSpPr>
-          <p:cNvPr id="14" name="Text 12"/>
-          <p:cNvSpPr/>
-          <p:nvPr/>
-        </p:nvSpPr>
-        <p:spPr>
-          <a:xfrm>
-            <a:off x="8778240" y="3383280"/>
-            <a:ext cx="2651760" cy="548640"/>
-          </a:xfrm>
-          <a:prstGeom prst="rect">
-            <a:avLst/>
-          </a:prstGeom>
-          <a:noFill/>
-          <a:ln/>
-        </p:spPr>
-        <p:txBody>
-          <a:bodyPr wrap="square" rtlCol="0" anchor="ctr"/>
-          <a:lstStyle/>
-          <a:p>
-            <a:pPr indent="0" marL="0">
-              <a:buNone/>
-            </a:pPr>
-            <a:r>
-              <a:rPr lang="en-US" sz="2100" b="1" dirty="0">
-                <a:solidFill>
-                  <a:srgbClr val="1A1A1A"/>
-                </a:solidFill>
-                <a:latin typeface="Cambria" pitchFamily="34" charset="0"/>
-                <a:ea typeface="Cambria" pitchFamily="34" charset="-122"/>
-                <a:cs typeface="Cambria" pitchFamily="34" charset="-120"/>
-              </a:rPr>
-              <a:t>Discussion</a:t>
-            </a:r>
-            <a:endParaRPr lang="en-US" sz="2100" dirty="0"/>
-          </a:p>
-        </p:txBody>
-      </p:sp>
-      <p:sp>
-        <p:nvSpPr>
-          <p:cNvPr id="15" name="Text 13"/>
-          <p:cNvSpPr/>
-          <p:nvPr/>
-        </p:nvSpPr>
-        <p:spPr>
-          <a:xfrm>
-            <a:off x="8778240" y="3977640"/>
-            <a:ext cx="2651760" cy="1371600"/>
-          </a:xfrm>
-          <a:prstGeom prst="rect">
-            <a:avLst/>
-          </a:prstGeom>
-          <a:noFill/>
-          <a:ln/>
-        </p:spPr>
-        <p:txBody>
-          <a:bodyPr wrap="square" rtlCol="0" anchor="t">
-            <a:spAutoFit/>
-          </a:bodyPr>
-          <a:lstStyle/>
-          <a:p>
-            <a:pPr indent="0" marL="0">
-              <a:lnSpc>
-                <a:spcPct val="115000"/>
-              </a:lnSpc>
-              <a:buNone/>
-            </a:pPr>
-            <a:r>
-              <a:rPr lang="en-US" sz="1500" dirty="0">
-                <a:solidFill>
-                  <a:srgbClr val="1A1A1A"/>
-                </a:solidFill>
-                <a:latin typeface="Calibri" pitchFamily="34" charset="0"/>
-                <a:ea typeface="Calibri" pitchFamily="34" charset="-122"/>
-                <a:cs typeface="Calibri" pitchFamily="34" charset="-120"/>
-              </a:rPr>
-              <a:t>Interrogate the study, debate it, or critique each other's work.</a:t>
-            </a:r>
-            <a:endParaRPr lang="en-US" sz="1500" dirty="0"/>
+              <a:t>Counted by brightness in the session; by defined color ranges after class.</a:t>
+            </a:r>
+            <a:endParaRPr lang="en-US" sz="1200" dirty="0"/>
           </a:p>
         </p:txBody>
       </p:sp>
@@ -5589,7 +5526,7 @@
         </p:nvSpPr>
         <p:spPr>
           <a:xfrm>
-            <a:off x="640080" y="640080"/>
+            <a:off x="640080" y="731520"/>
             <a:ext cx="10058400" cy="731520"/>
           </a:xfrm>
           <a:prstGeom prst="rect">
@@ -5614,7 +5551,7 @@
                 <a:ea typeface="Cambria" pitchFamily="34" charset="-122"/>
                 <a:cs typeface="Cambria" pitchFamily="34" charset="-120"/>
               </a:rPr>
-              <a:t>The session</a:t>
+              <a:t>Three modes today</a:t>
             </a:r>
             <a:endParaRPr lang="en-US" sz="3000" dirty="0"/>
           </a:p>
@@ -5622,36 +5559,14 @@
       </p:sp>
       <p:sp>
         <p:nvSpPr>
-          <p:cNvPr id="3" name="Shape 1"/>
-          <p:cNvSpPr/>
-          <p:nvPr/>
-        </p:nvSpPr>
-        <p:spPr>
-          <a:xfrm>
-            <a:off x="640080" y="1572768"/>
-            <a:ext cx="868680" cy="450342"/>
-          </a:xfrm>
-          <a:prstGeom prst="roundRect">
-            <a:avLst>
-              <a:gd name="adj" fmla="val 12183"/>
-            </a:avLst>
-          </a:prstGeom>
-          <a:solidFill>
-            <a:srgbClr val="7A3B2E"/>
-          </a:solidFill>
-          <a:ln/>
-        </p:spPr>
-      </p:sp>
-      <p:sp>
-        <p:nvSpPr>
-          <p:cNvPr id="4" name="Text 2"/>
-          <p:cNvSpPr/>
-          <p:nvPr/>
-        </p:nvSpPr>
-        <p:spPr>
-          <a:xfrm>
-            <a:off x="640080" y="1572768"/>
-            <a:ext cx="868680" cy="450342"/>
+          <p:cNvPr id="3" name="Text 1"/>
+          <p:cNvSpPr/>
+          <p:nvPr/>
+        </p:nvSpPr>
+        <p:spPr>
+          <a:xfrm>
+            <a:off x="640080" y="1417320"/>
+            <a:ext cx="10058400" cy="365760"/>
           </a:xfrm>
           <a:prstGeom prst="rect">
             <a:avLst/>
@@ -5663,52 +5578,136 @@
           <a:bodyPr wrap="square" rtlCol="0" anchor="ctr"/>
           <a:lstStyle/>
           <a:p>
-            <a:pPr algn="ctr" indent="0" marL="0">
-              <a:buNone/>
-            </a:pPr>
-            <a:r>
-              <a:rPr lang="en-US" sz="1100" b="1" dirty="0">
-                <a:solidFill>
-                  <a:srgbClr val="FFFFFF"/>
+            <a:pPr indent="0" marL="0">
+              <a:buNone/>
+            </a:pPr>
+            <a:r>
+              <a:rPr lang="en-US" sz="1400" i="1" dirty="0">
+                <a:solidFill>
+                  <a:srgbClr val="6B6B63"/>
                 </a:solidFill>
                 <a:latin typeface="Calibri" pitchFamily="34" charset="0"/>
                 <a:ea typeface="Calibri" pitchFamily="34" charset="-122"/>
                 <a:cs typeface="Calibri" pitchFamily="34" charset="-120"/>
               </a:rPr>
-              <a:t>0:00</a:t>
-            </a:r>
-            <a:endParaRPr lang="en-US" sz="1100" dirty="0"/>
-          </a:p>
-        </p:txBody>
-      </p:sp>
-      <p:sp>
-        <p:nvSpPr>
-          <p:cNvPr id="5" name="Text 3"/>
-          <p:cNvSpPr/>
-          <p:nvPr/>
-        </p:nvSpPr>
-        <p:spPr>
-          <a:xfrm>
-            <a:off x="1691640" y="1554480"/>
-            <a:ext cx="9646920" cy="560070"/>
-          </a:xfrm>
-          <a:prstGeom prst="rect">
-            <a:avLst/>
-          </a:prstGeom>
-          <a:noFill/>
-          <a:ln/>
-        </p:spPr>
-        <p:txBody>
-          <a:bodyPr wrap="square" rtlCol="0" anchor="ctr">
+              <a:t>about a third of the session each</a:t>
+            </a:r>
+            <a:endParaRPr lang="en-US" sz="1400" dirty="0"/>
+          </a:p>
+        </p:txBody>
+      </p:sp>
+      <p:sp>
+        <p:nvSpPr>
+          <p:cNvPr id="4" name="Shape 2"/>
+          <p:cNvSpPr/>
+          <p:nvPr/>
+        </p:nvSpPr>
+        <p:spPr>
+          <a:xfrm>
+            <a:off x="640080" y="2194560"/>
+            <a:ext cx="3383280" cy="3291840"/>
+          </a:xfrm>
+          <a:prstGeom prst="roundRect">
+            <a:avLst>
+              <a:gd name="adj" fmla="val 3333"/>
+            </a:avLst>
+          </a:prstGeom>
+          <a:solidFill>
+            <a:srgbClr val="F4EEE8"/>
+          </a:solidFill>
+          <a:ln/>
+        </p:spPr>
+      </p:sp>
+      <p:sp>
+        <p:nvSpPr>
+          <p:cNvPr id="5" name="Shape 3"/>
+          <p:cNvSpPr/>
+          <p:nvPr/>
+        </p:nvSpPr>
+        <p:spPr>
+          <a:xfrm>
+            <a:off x="1051560" y="2606040"/>
+            <a:ext cx="548640" cy="548640"/>
+          </a:xfrm>
+          <a:prstGeom prst="ellipse">
+            <a:avLst/>
+          </a:prstGeom>
+          <a:solidFill>
+            <a:srgbClr val="7A3B2E"/>
+          </a:solidFill>
+          <a:ln/>
+        </p:spPr>
+      </p:sp>
+      <p:sp>
+        <p:nvSpPr>
+          <p:cNvPr id="6" name="Text 4"/>
+          <p:cNvSpPr/>
+          <p:nvPr/>
+        </p:nvSpPr>
+        <p:spPr>
+          <a:xfrm>
+            <a:off x="1005840" y="3383280"/>
+            <a:ext cx="2651760" cy="548640"/>
+          </a:xfrm>
+          <a:prstGeom prst="rect">
+            <a:avLst/>
+          </a:prstGeom>
+          <a:noFill/>
+          <a:ln/>
+        </p:spPr>
+        <p:txBody>
+          <a:bodyPr wrap="square" rtlCol="0" anchor="ctr"/>
+          <a:lstStyle/>
+          <a:p>
+            <a:pPr indent="0" marL="0">
+              <a:buNone/>
+            </a:pPr>
+            <a:r>
+              <a:rPr lang="en-US" sz="2100" b="1" dirty="0">
+                <a:solidFill>
+                  <a:srgbClr val="1A1A1A"/>
+                </a:solidFill>
+                <a:latin typeface="Cambria" pitchFamily="34" charset="0"/>
+                <a:ea typeface="Cambria" pitchFamily="34" charset="-122"/>
+                <a:cs typeface="Cambria" pitchFamily="34" charset="-120"/>
+              </a:rPr>
+              <a:t>Lecture / demo</a:t>
+            </a:r>
+            <a:endParaRPr lang="en-US" sz="2100" dirty="0"/>
+          </a:p>
+        </p:txBody>
+      </p:sp>
+      <p:sp>
+        <p:nvSpPr>
+          <p:cNvPr id="7" name="Text 5"/>
+          <p:cNvSpPr/>
+          <p:nvPr/>
+        </p:nvSpPr>
+        <p:spPr>
+          <a:xfrm>
+            <a:off x="1005840" y="3977640"/>
+            <a:ext cx="2651760" cy="1371600"/>
+          </a:xfrm>
+          <a:prstGeom prst="rect">
+            <a:avLst/>
+          </a:prstGeom>
+          <a:noFill/>
+          <a:ln/>
+        </p:spPr>
+        <p:txBody>
+          <a:bodyPr wrap="square" rtlCol="0" anchor="t">
             <a:spAutoFit/>
           </a:bodyPr>
           <a:lstStyle/>
           <a:p>
             <a:pPr indent="0" marL="0">
-              <a:buNone/>
-            </a:pPr>
-            <a:r>
-              <a:rPr lang="en-US" sz="1100" dirty="0">
+              <a:lnSpc>
+                <a:spcPct val="115000"/>
+              </a:lnSpc>
+              <a:buNone/>
+            </a:pPr>
+            <a:r>
+              <a:rPr lang="en-US" sz="1500" dirty="0">
                 <a:solidFill>
                   <a:srgbClr val="1A1A1A"/>
                 </a:solidFill>
@@ -5716,44 +5715,64 @@
                 <a:ea typeface="Calibri" pitchFamily="34" charset="-122"/>
                 <a:cs typeface="Calibri" pitchFamily="34" charset="-120"/>
               </a:rPr>
-              <a:t>Logistics, working agreements, and a one-round icebreaker: your name, one piece of culture you kept returning to this year, and one number about it you wish you knew. Today's live coding deliberately includes real mistakes.</a:t>
-            </a:r>
-            <a:endParaRPr lang="en-US" sz="1100" dirty="0"/>
-          </a:p>
-        </p:txBody>
-      </p:sp>
-      <p:sp>
-        <p:nvSpPr>
-          <p:cNvPr id="6" name="Shape 4"/>
-          <p:cNvSpPr/>
-          <p:nvPr/>
-        </p:nvSpPr>
-        <p:spPr>
-          <a:xfrm>
-            <a:off x="640080" y="2132838"/>
-            <a:ext cx="868680" cy="450342"/>
+              <a:t>Counting: rows, words, pixels</a:t>
+            </a:r>
+            <a:endParaRPr lang="en-US" sz="1500" dirty="0"/>
+          </a:p>
+        </p:txBody>
+      </p:sp>
+      <p:sp>
+        <p:nvSpPr>
+          <p:cNvPr id="8" name="Shape 6"/>
+          <p:cNvSpPr/>
+          <p:nvPr/>
+        </p:nvSpPr>
+        <p:spPr>
+          <a:xfrm>
+            <a:off x="4526280" y="2194560"/>
+            <a:ext cx="3383280" cy="3291840"/>
           </a:xfrm>
           <a:prstGeom prst="roundRect">
             <a:avLst>
-              <a:gd name="adj" fmla="val 12183"/>
+              <a:gd name="adj" fmla="val 3333"/>
             </a:avLst>
           </a:prstGeom>
           <a:solidFill>
-            <a:srgbClr val="7A3B2E"/>
-          </a:solidFill>
-          <a:ln/>
-        </p:spPr>
-      </p:sp>
-      <p:sp>
-        <p:nvSpPr>
-          <p:cNvPr id="7" name="Text 5"/>
-          <p:cNvSpPr/>
-          <p:nvPr/>
-        </p:nvSpPr>
-        <p:spPr>
-          <a:xfrm>
-            <a:off x="640080" y="2132838"/>
-            <a:ext cx="868680" cy="450342"/>
+            <a:srgbClr val="F4EEE8"/>
+          </a:solidFill>
+          <a:ln/>
+        </p:spPr>
+      </p:sp>
+      <p:sp>
+        <p:nvSpPr>
+          <p:cNvPr id="9" name="Shape 7"/>
+          <p:cNvSpPr/>
+          <p:nvPr/>
+        </p:nvSpPr>
+        <p:spPr>
+          <a:xfrm>
+            <a:off x="4937760" y="2606040"/>
+            <a:ext cx="548640" cy="548640"/>
+          </a:xfrm>
+          <a:prstGeom prst="ellipse">
+            <a:avLst/>
+          </a:prstGeom>
+          <a:solidFill>
+            <a:srgbClr val="3F6F5F"/>
+          </a:solidFill>
+          <a:ln/>
+        </p:spPr>
+      </p:sp>
+      <p:sp>
+        <p:nvSpPr>
+          <p:cNvPr id="10" name="Text 8"/>
+          <p:cNvSpPr/>
+          <p:nvPr/>
+        </p:nvSpPr>
+        <p:spPr>
+          <a:xfrm>
+            <a:off x="4892040" y="3383280"/>
+            <a:ext cx="2651760" cy="548640"/>
           </a:xfrm>
           <a:prstGeom prst="rect">
             <a:avLst/>
@@ -5765,52 +5784,180 @@
           <a:bodyPr wrap="square" rtlCol="0" anchor="ctr"/>
           <a:lstStyle/>
           <a:p>
-            <a:pPr algn="ctr" indent="0" marL="0">
-              <a:buNone/>
-            </a:pPr>
-            <a:r>
-              <a:rPr lang="en-US" sz="1100" b="1" dirty="0">
-                <a:solidFill>
-                  <a:srgbClr val="FFFFFF"/>
+            <a:pPr indent="0" marL="0">
+              <a:buNone/>
+            </a:pPr>
+            <a:r>
+              <a:rPr lang="en-US" sz="2100" b="1" dirty="0">
+                <a:solidFill>
+                  <a:srgbClr val="1A1A1A"/>
+                </a:solidFill>
+                <a:latin typeface="Cambria" pitchFamily="34" charset="0"/>
+                <a:ea typeface="Cambria" pitchFamily="34" charset="-122"/>
+                <a:cs typeface="Cambria" pitchFamily="34" charset="-120"/>
+              </a:rPr>
+              <a:t>Workshop</a:t>
+            </a:r>
+            <a:endParaRPr lang="en-US" sz="2100" dirty="0"/>
+          </a:p>
+        </p:txBody>
+      </p:sp>
+      <p:sp>
+        <p:nvSpPr>
+          <p:cNvPr id="11" name="Text 9"/>
+          <p:cNvSpPr/>
+          <p:nvPr/>
+        </p:nvSpPr>
+        <p:spPr>
+          <a:xfrm>
+            <a:off x="4892040" y="3977640"/>
+            <a:ext cx="2651760" cy="1371600"/>
+          </a:xfrm>
+          <a:prstGeom prst="rect">
+            <a:avLst/>
+          </a:prstGeom>
+          <a:noFill/>
+          <a:ln/>
+        </p:spPr>
+        <p:txBody>
+          <a:bodyPr wrap="square" rtlCol="0" anchor="t">
+            <a:spAutoFit/>
+          </a:bodyPr>
+          <a:lstStyle/>
+          <a:p>
+            <a:pPr indent="0" marL="0">
+              <a:lnSpc>
+                <a:spcPct val="115000"/>
+              </a:lnSpc>
+              <a:buNone/>
+            </a:pPr>
+            <a:r>
+              <a:rPr lang="en-US" sz="1500" dirty="0">
+                <a:solidFill>
+                  <a:srgbClr val="1A1A1A"/>
                 </a:solidFill>
                 <a:latin typeface="Calibri" pitchFamily="34" charset="0"/>
                 <a:ea typeface="Calibri" pitchFamily="34" charset="-122"/>
                 <a:cs typeface="Calibri" pitchFamily="34" charset="-120"/>
               </a:rPr>
-              <a:t>0:10</a:t>
-            </a:r>
-            <a:endParaRPr lang="en-US" sz="1100" dirty="0"/>
-          </a:p>
-        </p:txBody>
-      </p:sp>
-      <p:sp>
-        <p:nvSpPr>
-          <p:cNvPr id="8" name="Text 6"/>
-          <p:cNvSpPr/>
-          <p:nvPr/>
-        </p:nvSpPr>
-        <p:spPr>
-          <a:xfrm>
-            <a:off x="1691640" y="2114550"/>
-            <a:ext cx="9646920" cy="560070"/>
-          </a:xfrm>
-          <a:prstGeom prst="rect">
-            <a:avLst/>
-          </a:prstGeom>
-          <a:noFill/>
-          <a:ln/>
-        </p:spPr>
-        <p:txBody>
-          <a:bodyPr wrap="square" rtlCol="0" anchor="ctr">
+              <a:t>Build hands-on on your own data.</a:t>
+            </a:r>
+            <a:endParaRPr lang="en-US" sz="1500" dirty="0"/>
+          </a:p>
+        </p:txBody>
+      </p:sp>
+      <p:sp>
+        <p:nvSpPr>
+          <p:cNvPr id="12" name="Shape 10"/>
+          <p:cNvSpPr/>
+          <p:nvPr/>
+        </p:nvSpPr>
+        <p:spPr>
+          <a:xfrm>
+            <a:off x="8412480" y="2194560"/>
+            <a:ext cx="3383280" cy="3291840"/>
+          </a:xfrm>
+          <a:prstGeom prst="roundRect">
+            <a:avLst>
+              <a:gd name="adj" fmla="val 3333"/>
+            </a:avLst>
+          </a:prstGeom>
+          <a:solidFill>
+            <a:srgbClr val="F4EEE8"/>
+          </a:solidFill>
+          <a:ln/>
+        </p:spPr>
+      </p:sp>
+      <p:sp>
+        <p:nvSpPr>
+          <p:cNvPr id="13" name="Shape 11"/>
+          <p:cNvSpPr/>
+          <p:nvPr/>
+        </p:nvSpPr>
+        <p:spPr>
+          <a:xfrm>
+            <a:off x="8823960" y="2606040"/>
+            <a:ext cx="548640" cy="548640"/>
+          </a:xfrm>
+          <a:prstGeom prst="ellipse">
+            <a:avLst/>
+          </a:prstGeom>
+          <a:solidFill>
+            <a:srgbClr val="B9852F"/>
+          </a:solidFill>
+          <a:ln/>
+        </p:spPr>
+      </p:sp>
+      <p:sp>
+        <p:nvSpPr>
+          <p:cNvPr id="14" name="Text 12"/>
+          <p:cNvSpPr/>
+          <p:nvPr/>
+        </p:nvSpPr>
+        <p:spPr>
+          <a:xfrm>
+            <a:off x="8778240" y="3383280"/>
+            <a:ext cx="2651760" cy="548640"/>
+          </a:xfrm>
+          <a:prstGeom prst="rect">
+            <a:avLst/>
+          </a:prstGeom>
+          <a:noFill/>
+          <a:ln/>
+        </p:spPr>
+        <p:txBody>
+          <a:bodyPr wrap="square" rtlCol="0" anchor="ctr"/>
+          <a:lstStyle/>
+          <a:p>
+            <a:pPr indent="0" marL="0">
+              <a:buNone/>
+            </a:pPr>
+            <a:r>
+              <a:rPr lang="en-US" sz="2100" b="1" dirty="0">
+                <a:solidFill>
+                  <a:srgbClr val="1A1A1A"/>
+                </a:solidFill>
+                <a:latin typeface="Cambria" pitchFamily="34" charset="0"/>
+                <a:ea typeface="Cambria" pitchFamily="34" charset="-122"/>
+                <a:cs typeface="Cambria" pitchFamily="34" charset="-120"/>
+              </a:rPr>
+              <a:t>Discussion</a:t>
+            </a:r>
+            <a:endParaRPr lang="en-US" sz="2100" dirty="0"/>
+          </a:p>
+        </p:txBody>
+      </p:sp>
+      <p:sp>
+        <p:nvSpPr>
+          <p:cNvPr id="15" name="Text 13"/>
+          <p:cNvSpPr/>
+          <p:nvPr/>
+        </p:nvSpPr>
+        <p:spPr>
+          <a:xfrm>
+            <a:off x="8778240" y="3977640"/>
+            <a:ext cx="2651760" cy="1371600"/>
+          </a:xfrm>
+          <a:prstGeom prst="rect">
+            <a:avLst/>
+          </a:prstGeom>
+          <a:noFill/>
+          <a:ln/>
+        </p:spPr>
+        <p:txBody>
+          <a:bodyPr wrap="square" rtlCol="0" anchor="t">
             <a:spAutoFit/>
           </a:bodyPr>
           <a:lstStyle/>
           <a:p>
             <a:pPr indent="0" marL="0">
-              <a:buNone/>
-            </a:pPr>
-            <a:r>
-              <a:rPr lang="en-US" sz="1100" dirty="0">
+              <a:lnSpc>
+                <a:spcPct val="115000"/>
+              </a:lnSpc>
+              <a:buNone/>
+            </a:pPr>
+            <a:r>
+              <a:rPr lang="en-US" sz="1500" dirty="0">
                 <a:solidFill>
                   <a:srgbClr val="1A1A1A"/>
                 </a:solidFill>
@@ -5818,621 +5965,9 @@
                 <a:ea typeface="Calibri" pitchFamily="34" charset="-122"/>
                 <a:cs typeface="Calibri" pitchFamily="34" charset="-120"/>
               </a:rPr>
-              <a:t>Lecture, the stakes: machines already read culture at scale, the feed ranking what you see, the moderation filter, the model trained on scraped art and prose, and that reading happens without you. Counting culture has produced real knowledge (the screenplay verb split, the Rowling unmasking, pop music's 1991 revolution) and real mistakes, and both look identical until someone checks. In ten weeks you do the reading yourself and publish something checkable.</a:t>
-            </a:r>
-            <a:endParaRPr lang="en-US" sz="1100" dirty="0"/>
-          </a:p>
-        </p:txBody>
-      </p:sp>
-      <p:sp>
-        <p:nvSpPr>
-          <p:cNvPr id="9" name="Shape 7"/>
-          <p:cNvSpPr/>
-          <p:nvPr/>
-        </p:nvSpPr>
-        <p:spPr>
-          <a:xfrm>
-            <a:off x="640080" y="2692908"/>
-            <a:ext cx="868680" cy="450342"/>
-          </a:xfrm>
-          <a:prstGeom prst="roundRect">
-            <a:avLst>
-              <a:gd name="adj" fmla="val 12183"/>
-            </a:avLst>
-          </a:prstGeom>
-          <a:solidFill>
-            <a:srgbClr val="7A3B2E"/>
-          </a:solidFill>
-          <a:ln/>
-        </p:spPr>
-      </p:sp>
-      <p:sp>
-        <p:nvSpPr>
-          <p:cNvPr id="10" name="Text 8"/>
-          <p:cNvSpPr/>
-          <p:nvPr/>
-        </p:nvSpPr>
-        <p:spPr>
-          <a:xfrm>
-            <a:off x="640080" y="2692908"/>
-            <a:ext cx="868680" cy="450342"/>
-          </a:xfrm>
-          <a:prstGeom prst="rect">
-            <a:avLst/>
-          </a:prstGeom>
-          <a:noFill/>
-          <a:ln/>
-        </p:spPr>
-        <p:txBody>
-          <a:bodyPr wrap="square" rtlCol="0" anchor="ctr"/>
-          <a:lstStyle/>
-          <a:p>
-            <a:pPr algn="ctr" indent="0" marL="0">
-              <a:buNone/>
-            </a:pPr>
-            <a:r>
-              <a:rPr lang="en-US" sz="1100" b="1" dirty="0">
-                <a:solidFill>
-                  <a:srgbClr val="FFFFFF"/>
-                </a:solidFill>
-                <a:latin typeface="Calibri" pitchFamily="34" charset="0"/>
-                <a:ea typeface="Calibri" pitchFamily="34" charset="-122"/>
-                <a:cs typeface="Calibri" pitchFamily="34" charset="-120"/>
-              </a:rPr>
-              <a:t>0:28</a:t>
-            </a:r>
-            <a:endParaRPr lang="en-US" sz="1100" dirty="0"/>
-          </a:p>
-        </p:txBody>
-      </p:sp>
-      <p:sp>
-        <p:nvSpPr>
-          <p:cNvPr id="11" name="Text 9"/>
-          <p:cNvSpPr/>
-          <p:nvPr/>
-        </p:nvSpPr>
-        <p:spPr>
-          <a:xfrm>
-            <a:off x="1691640" y="2674620"/>
-            <a:ext cx="9646920" cy="560070"/>
-          </a:xfrm>
-          <a:prstGeom prst="rect">
-            <a:avLst/>
-          </a:prstGeom>
-          <a:noFill/>
-          <a:ln/>
-        </p:spPr>
-        <p:txBody>
-          <a:bodyPr wrap="square" rtlCol="0" anchor="ctr">
-            <a:spAutoFit/>
-          </a:bodyPr>
-          <a:lstStyle/>
-          <a:p>
-            <a:pPr indent="0" marL="0">
-              <a:buNone/>
-            </a:pPr>
-            <a:r>
-              <a:rPr lang="en-US" sz="1100" dirty="0">
-                <a:solidFill>
-                  <a:srgbClr val="1A1A1A"/>
-                </a:solidFill>
-                <a:latin typeface="Calibri" pitchFamily="34" charset="0"/>
-                <a:ea typeface="Calibri" pitchFamily="34" charset="-122"/>
-                <a:cs typeface="Calibri" pitchFamily="34" charset="-120"/>
-              </a:rPr>
-              <a:t>Look at This, then Question It: She Giggles, He Gallops.</a:t>
-            </a:r>
-            <a:endParaRPr lang="en-US" sz="1100" dirty="0"/>
-          </a:p>
-        </p:txBody>
-      </p:sp>
-      <p:sp>
-        <p:nvSpPr>
-          <p:cNvPr id="12" name="Shape 10"/>
-          <p:cNvSpPr/>
-          <p:nvPr/>
-        </p:nvSpPr>
-        <p:spPr>
-          <a:xfrm>
-            <a:off x="640080" y="3252978"/>
-            <a:ext cx="868680" cy="450342"/>
-          </a:xfrm>
-          <a:prstGeom prst="roundRect">
-            <a:avLst>
-              <a:gd name="adj" fmla="val 12183"/>
-            </a:avLst>
-          </a:prstGeom>
-          <a:solidFill>
-            <a:srgbClr val="7A3B2E"/>
-          </a:solidFill>
-          <a:ln/>
-        </p:spPr>
-      </p:sp>
-      <p:sp>
-        <p:nvSpPr>
-          <p:cNvPr id="13" name="Text 11"/>
-          <p:cNvSpPr/>
-          <p:nvPr/>
-        </p:nvSpPr>
-        <p:spPr>
-          <a:xfrm>
-            <a:off x="640080" y="3252978"/>
-            <a:ext cx="868680" cy="450342"/>
-          </a:xfrm>
-          <a:prstGeom prst="rect">
-            <a:avLst/>
-          </a:prstGeom>
-          <a:noFill/>
-          <a:ln/>
-        </p:spPr>
-        <p:txBody>
-          <a:bodyPr wrap="square" rtlCol="0" anchor="ctr"/>
-          <a:lstStyle/>
-          <a:p>
-            <a:pPr algn="ctr" indent="0" marL="0">
-              <a:buNone/>
-            </a:pPr>
-            <a:r>
-              <a:rPr lang="en-US" sz="1100" b="1" dirty="0">
-                <a:solidFill>
-                  <a:srgbClr val="FFFFFF"/>
-                </a:solidFill>
-                <a:latin typeface="Calibri" pitchFamily="34" charset="0"/>
-                <a:ea typeface="Calibri" pitchFamily="34" charset="-122"/>
-                <a:cs typeface="Calibri" pitchFamily="34" charset="-120"/>
-              </a:rPr>
-              <a:t>0:35</a:t>
-            </a:r>
-            <a:endParaRPr lang="en-US" sz="1100" dirty="0"/>
-          </a:p>
-        </p:txBody>
-      </p:sp>
-      <p:sp>
-        <p:nvSpPr>
-          <p:cNvPr id="14" name="Text 12"/>
-          <p:cNvSpPr/>
-          <p:nvPr/>
-        </p:nvSpPr>
-        <p:spPr>
-          <a:xfrm>
-            <a:off x="1691640" y="3234690"/>
-            <a:ext cx="9646920" cy="560070"/>
-          </a:xfrm>
-          <a:prstGeom prst="rect">
-            <a:avLst/>
-          </a:prstGeom>
-          <a:noFill/>
-          <a:ln/>
-        </p:spPr>
-        <p:txBody>
-          <a:bodyPr wrap="square" rtlCol="0" anchor="ctr">
-            <a:spAutoFit/>
-          </a:bodyPr>
-          <a:lstStyle/>
-          <a:p>
-            <a:pPr indent="0" marL="0">
-              <a:buNone/>
-            </a:pPr>
-            <a:r>
-              <a:rPr lang="en-US" sz="1100" dirty="0">
-                <a:solidFill>
-                  <a:srgbClr val="1A1A1A"/>
-                </a:solidFill>
-                <a:latin typeface="Calibri" pitchFamily="34" charset="0"/>
-                <a:ea typeface="Calibri" pitchFamily="34" charset="-122"/>
-                <a:cs typeface="Calibri" pitchFamily="34" charset="-120"/>
-              </a:rPr>
-              <a:t>The vocabulary and the map (no code): corpus, method, model, embedding, plus what data itself is. A CSV, anatomized on screen (rows are observations, columns are recorded facts), and Drucker's correction: data is capta, taken not given. Two minutes in pairs: what did the makers of the wedding table take, and what did they leave out? The deliverable, shown: a web essay on a runnable notebook.</a:t>
-            </a:r>
-            <a:endParaRPr lang="en-US" sz="1100" dirty="0"/>
-          </a:p>
-        </p:txBody>
-      </p:sp>
-      <p:sp>
-        <p:nvSpPr>
-          <p:cNvPr id="15" name="Shape 13"/>
-          <p:cNvSpPr/>
-          <p:nvPr/>
-        </p:nvSpPr>
-        <p:spPr>
-          <a:xfrm>
-            <a:off x="640080" y="3813048"/>
-            <a:ext cx="868680" cy="450342"/>
-          </a:xfrm>
-          <a:prstGeom prst="roundRect">
-            <a:avLst>
-              <a:gd name="adj" fmla="val 12183"/>
-            </a:avLst>
-          </a:prstGeom>
-          <a:solidFill>
-            <a:srgbClr val="7A3B2E"/>
-          </a:solidFill>
-          <a:ln/>
-        </p:spPr>
-      </p:sp>
-      <p:sp>
-        <p:nvSpPr>
-          <p:cNvPr id="16" name="Text 14"/>
-          <p:cNvSpPr/>
-          <p:nvPr/>
-        </p:nvSpPr>
-        <p:spPr>
-          <a:xfrm>
-            <a:off x="640080" y="3813048"/>
-            <a:ext cx="868680" cy="450342"/>
-          </a:xfrm>
-          <a:prstGeom prst="rect">
-            <a:avLst/>
-          </a:prstGeom>
-          <a:noFill/>
-          <a:ln/>
-        </p:spPr>
-        <p:txBody>
-          <a:bodyPr wrap="square" rtlCol="0" anchor="ctr"/>
-          <a:lstStyle/>
-          <a:p>
-            <a:pPr algn="ctr" indent="0" marL="0">
-              <a:buNone/>
-            </a:pPr>
-            <a:r>
-              <a:rPr lang="en-US" sz="1100" b="1" dirty="0">
-                <a:solidFill>
-                  <a:srgbClr val="FFFFFF"/>
-                </a:solidFill>
-                <a:latin typeface="Calibri" pitchFamily="34" charset="0"/>
-                <a:ea typeface="Calibri" pitchFamily="34" charset="-122"/>
-                <a:cs typeface="Calibri" pitchFamily="34" charset="-120"/>
-              </a:rPr>
-              <a:t>0:47</a:t>
-            </a:r>
-            <a:endParaRPr lang="en-US" sz="1100" dirty="0"/>
-          </a:p>
-        </p:txBody>
-      </p:sp>
-      <p:sp>
-        <p:nvSpPr>
-          <p:cNvPr id="17" name="Text 15"/>
-          <p:cNvSpPr/>
-          <p:nvPr/>
-        </p:nvSpPr>
-        <p:spPr>
-          <a:xfrm>
-            <a:off x="1691640" y="3794760"/>
-            <a:ext cx="9646920" cy="560070"/>
-          </a:xfrm>
-          <a:prstGeom prst="rect">
-            <a:avLst/>
-          </a:prstGeom>
-          <a:noFill/>
-          <a:ln/>
-        </p:spPr>
-        <p:txBody>
-          <a:bodyPr wrap="square" rtlCol="0" anchor="ctr">
-            <a:spAutoFit/>
-          </a:bodyPr>
-          <a:lstStyle/>
-          <a:p>
-            <a:pPr indent="0" marL="0">
-              <a:buNone/>
-            </a:pPr>
-            <a:r>
-              <a:rPr lang="en-US" sz="1100" dirty="0">
-                <a:solidFill>
-                  <a:srgbClr val="1A1A1A"/>
-                </a:solidFill>
-                <a:latin typeface="Calibri" pitchFamily="34" charset="0"/>
-                <a:ea typeface="Calibri" pitchFamily="34" charset="-122"/>
-                <a:cs typeface="Calibri" pitchFamily="34" charset="-120"/>
-              </a:rPr>
-              <a:t>Lab 1 (worked, participatory): copy the notebook to Drive and mount Drive into the runtime (this is how your corpus and results survive Colab wiping the session, everything saving to one project folder), put a Gemini key in Colab Secrets, load NYT wedding data, make a first chart. Hand out the common-errors cheat sheet. Then solo with a partner: draft three questions, pick one, have the AI write the code, run it, chart it. Write one sentence predicting your cell before you run it.</a:t>
-            </a:r>
-            <a:endParaRPr lang="en-US" sz="1100" dirty="0"/>
-          </a:p>
-        </p:txBody>
-      </p:sp>
-      <p:sp>
-        <p:nvSpPr>
-          <p:cNvPr id="18" name="Shape 16"/>
-          <p:cNvSpPr/>
-          <p:nvPr/>
-        </p:nvSpPr>
-        <p:spPr>
-          <a:xfrm>
-            <a:off x="640080" y="4373118"/>
-            <a:ext cx="868680" cy="450342"/>
-          </a:xfrm>
-          <a:prstGeom prst="roundRect">
-            <a:avLst>
-              <a:gd name="adj" fmla="val 12183"/>
-            </a:avLst>
-          </a:prstGeom>
-          <a:solidFill>
-            <a:srgbClr val="7A3B2E"/>
-          </a:solidFill>
-          <a:ln/>
-        </p:spPr>
-      </p:sp>
-      <p:sp>
-        <p:nvSpPr>
-          <p:cNvPr id="19" name="Text 17"/>
-          <p:cNvSpPr/>
-          <p:nvPr/>
-        </p:nvSpPr>
-        <p:spPr>
-          <a:xfrm>
-            <a:off x="640080" y="4373118"/>
-            <a:ext cx="868680" cy="450342"/>
-          </a:xfrm>
-          <a:prstGeom prst="rect">
-            <a:avLst/>
-          </a:prstGeom>
-          <a:noFill/>
-          <a:ln/>
-        </p:spPr>
-        <p:txBody>
-          <a:bodyPr wrap="square" rtlCol="0" anchor="ctr"/>
-          <a:lstStyle/>
-          <a:p>
-            <a:pPr algn="ctr" indent="0" marL="0">
-              <a:buNone/>
-            </a:pPr>
-            <a:r>
-              <a:rPr lang="en-US" sz="1100" b="1" dirty="0">
-                <a:solidFill>
-                  <a:srgbClr val="FFFFFF"/>
-                </a:solidFill>
-                <a:latin typeface="Calibri" pitchFamily="34" charset="0"/>
-                <a:ea typeface="Calibri" pitchFamily="34" charset="-122"/>
-                <a:cs typeface="Calibri" pitchFamily="34" charset="-120"/>
-              </a:rPr>
-              <a:t>1:20</a:t>
-            </a:r>
-            <a:endParaRPr lang="en-US" sz="1100" dirty="0"/>
-          </a:p>
-        </p:txBody>
-      </p:sp>
-      <p:sp>
-        <p:nvSpPr>
-          <p:cNvPr id="20" name="Text 18"/>
-          <p:cNvSpPr/>
-          <p:nvPr/>
-        </p:nvSpPr>
-        <p:spPr>
-          <a:xfrm>
-            <a:off x="1691640" y="4354830"/>
-            <a:ext cx="9646920" cy="560070"/>
-          </a:xfrm>
-          <a:prstGeom prst="rect">
-            <a:avLst/>
-          </a:prstGeom>
-          <a:noFill/>
-          <a:ln/>
-        </p:spPr>
-        <p:txBody>
-          <a:bodyPr wrap="square" rtlCol="0" anchor="ctr">
-            <a:spAutoFit/>
-          </a:bodyPr>
-          <a:lstStyle/>
-          <a:p>
-            <a:pPr indent="0" marL="0">
-              <a:buNone/>
-            </a:pPr>
-            <a:r>
-              <a:rPr lang="en-US" sz="1100" dirty="0">
-                <a:solidFill>
-                  <a:srgbClr val="1A1A1A"/>
-                </a:solidFill>
-                <a:latin typeface="Calibri" pitchFamily="34" charset="0"/>
-                <a:ea typeface="Calibri" pitchFamily="34" charset="-122"/>
-                <a:cs typeface="Calibri" pitchFamily="34" charset="-120"/>
-              </a:rPr>
-              <a:t>Break</a:t>
-            </a:r>
-            <a:endParaRPr lang="en-US" sz="1100" dirty="0"/>
-          </a:p>
-        </p:txBody>
-      </p:sp>
-      <p:sp>
-        <p:nvSpPr>
-          <p:cNvPr id="21" name="Shape 19"/>
-          <p:cNvSpPr/>
-          <p:nvPr/>
-        </p:nvSpPr>
-        <p:spPr>
-          <a:xfrm>
-            <a:off x="640080" y="4933188"/>
-            <a:ext cx="868680" cy="450342"/>
-          </a:xfrm>
-          <a:prstGeom prst="roundRect">
-            <a:avLst>
-              <a:gd name="adj" fmla="val 12183"/>
-            </a:avLst>
-          </a:prstGeom>
-          <a:solidFill>
-            <a:srgbClr val="7A3B2E"/>
-          </a:solidFill>
-          <a:ln/>
-        </p:spPr>
-      </p:sp>
-      <p:sp>
-        <p:nvSpPr>
-          <p:cNvPr id="22" name="Text 20"/>
-          <p:cNvSpPr/>
-          <p:nvPr/>
-        </p:nvSpPr>
-        <p:spPr>
-          <a:xfrm>
-            <a:off x="640080" y="4933188"/>
-            <a:ext cx="868680" cy="450342"/>
-          </a:xfrm>
-          <a:prstGeom prst="rect">
-            <a:avLst/>
-          </a:prstGeom>
-          <a:noFill/>
-          <a:ln/>
-        </p:spPr>
-        <p:txBody>
-          <a:bodyPr wrap="square" rtlCol="0" anchor="ctr"/>
-          <a:lstStyle/>
-          <a:p>
-            <a:pPr algn="ctr" indent="0" marL="0">
-              <a:buNone/>
-            </a:pPr>
-            <a:r>
-              <a:rPr lang="en-US" sz="1100" b="1" dirty="0">
-                <a:solidFill>
-                  <a:srgbClr val="FFFFFF"/>
-                </a:solidFill>
-                <a:latin typeface="Calibri" pitchFamily="34" charset="0"/>
-                <a:ea typeface="Calibri" pitchFamily="34" charset="-122"/>
-                <a:cs typeface="Calibri" pitchFamily="34" charset="-120"/>
-              </a:rPr>
-              <a:t>1:30</a:t>
-            </a:r>
-            <a:endParaRPr lang="en-US" sz="1100" dirty="0"/>
-          </a:p>
-        </p:txBody>
-      </p:sp>
-      <p:sp>
-        <p:nvSpPr>
-          <p:cNvPr id="23" name="Text 21"/>
-          <p:cNvSpPr/>
-          <p:nvPr/>
-        </p:nvSpPr>
-        <p:spPr>
-          <a:xfrm>
-            <a:off x="1691640" y="4914900"/>
-            <a:ext cx="9646920" cy="560070"/>
-          </a:xfrm>
-          <a:prstGeom prst="rect">
-            <a:avLst/>
-          </a:prstGeom>
-          <a:noFill/>
-          <a:ln/>
-        </p:spPr>
-        <p:txBody>
-          <a:bodyPr wrap="square" rtlCol="0" anchor="ctr">
-            <a:spAutoFit/>
-          </a:bodyPr>
-          <a:lstStyle/>
-          <a:p>
-            <a:pPr indent="0" marL="0">
-              <a:buNone/>
-            </a:pPr>
-            <a:r>
-              <a:rPr lang="en-US" sz="1100" dirty="0">
-                <a:solidFill>
-                  <a:srgbClr val="1A1A1A"/>
-                </a:solidFill>
-                <a:latin typeface="Calibri" pitchFamily="34" charset="0"/>
-                <a:ea typeface="Calibri" pitchFamily="34" charset="-122"/>
-                <a:cs typeface="Calibri" pitchFamily="34" charset="-120"/>
-              </a:rPr>
-              <a:t>Lab 2 (worked): count words, then pixels. Shakespeare's 154 sonnets: thy and thou top the count until the stop list learns the corpus, then love, beauty, and time surface. Then the Met image corpus ranked darkest to brightest by average brightness. The notebook's after-class half, defined color ranges and Sonnet 130's bag against the poem itself, is this week's guided homework. Image projects begin here.</a:t>
-            </a:r>
-            <a:endParaRPr lang="en-US" sz="1100" dirty="0"/>
-          </a:p>
-        </p:txBody>
-      </p:sp>
-      <p:sp>
-        <p:nvSpPr>
-          <p:cNvPr id="24" name="Shape 22"/>
-          <p:cNvSpPr/>
-          <p:nvPr/>
-        </p:nvSpPr>
-        <p:spPr>
-          <a:xfrm>
-            <a:off x="640080" y="5493258"/>
-            <a:ext cx="868680" cy="450342"/>
-          </a:xfrm>
-          <a:prstGeom prst="roundRect">
-            <a:avLst>
-              <a:gd name="adj" fmla="val 12183"/>
-            </a:avLst>
-          </a:prstGeom>
-          <a:solidFill>
-            <a:srgbClr val="7A3B2E"/>
-          </a:solidFill>
-          <a:ln/>
-        </p:spPr>
-      </p:sp>
-      <p:sp>
-        <p:nvSpPr>
-          <p:cNvPr id="25" name="Text 23"/>
-          <p:cNvSpPr/>
-          <p:nvPr/>
-        </p:nvSpPr>
-        <p:spPr>
-          <a:xfrm>
-            <a:off x="640080" y="5493258"/>
-            <a:ext cx="868680" cy="450342"/>
-          </a:xfrm>
-          <a:prstGeom prst="rect">
-            <a:avLst/>
-          </a:prstGeom>
-          <a:noFill/>
-          <a:ln/>
-        </p:spPr>
-        <p:txBody>
-          <a:bodyPr wrap="square" rtlCol="0" anchor="ctr"/>
-          <a:lstStyle/>
-          <a:p>
-            <a:pPr algn="ctr" indent="0" marL="0">
-              <a:buNone/>
-            </a:pPr>
-            <a:r>
-              <a:rPr lang="en-US" sz="1100" b="1" dirty="0">
-                <a:solidFill>
-                  <a:srgbClr val="FFFFFF"/>
-                </a:solidFill>
-                <a:latin typeface="Calibri" pitchFamily="34" charset="0"/>
-                <a:ea typeface="Calibri" pitchFamily="34" charset="-122"/>
-                <a:cs typeface="Calibri" pitchFamily="34" charset="-120"/>
-              </a:rPr>
-              <a:t>1:52</a:t>
-            </a:r>
-            <a:endParaRPr lang="en-US" sz="1100" dirty="0"/>
-          </a:p>
-        </p:txBody>
-      </p:sp>
-      <p:sp>
-        <p:nvSpPr>
-          <p:cNvPr id="26" name="Text 24"/>
-          <p:cNvSpPr/>
-          <p:nvPr/>
-        </p:nvSpPr>
-        <p:spPr>
-          <a:xfrm>
-            <a:off x="1691640" y="5474970"/>
-            <a:ext cx="9646920" cy="560070"/>
-          </a:xfrm>
-          <a:prstGeom prst="rect">
-            <a:avLst/>
-          </a:prstGeom>
-          <a:noFill/>
-          <a:ln/>
-        </p:spPr>
-        <p:txBody>
-          <a:bodyPr wrap="square" rtlCol="0" anchor="ctr">
-            <a:spAutoFit/>
-          </a:bodyPr>
-          <a:lstStyle/>
-          <a:p>
-            <a:pPr indent="0" marL="0">
-              <a:buNone/>
-            </a:pPr>
-            <a:r>
-              <a:rPr lang="en-US" sz="1100" dirty="0">
-                <a:solidFill>
-                  <a:srgbClr val="1A1A1A"/>
-                </a:solidFill>
-                <a:latin typeface="Calibri" pitchFamily="34" charset="0"/>
-                <a:ea typeface="Calibri" pitchFamily="34" charset="-122"/>
-                <a:cs typeface="Calibri" pitchFamily="34" charset="-120"/>
-              </a:rPr>
-              <a:t>Preview of the methods ahead; the weekly routines introduced. First check-out.</a:t>
-            </a:r>
-            <a:endParaRPr lang="en-US" sz="1100" dirty="0"/>
+              <a:t>Interrogate the study, debate it, or critique each other's work.</a:t>
+            </a:r>
+            <a:endParaRPr lang="en-US" sz="1500" dirty="0"/>
           </a:p>
         </p:txBody>
       </p:sp>
@@ -6501,7 +6036,7 @@
                 <a:ea typeface="Cambria" pitchFamily="34" charset="-122"/>
                 <a:cs typeface="Cambria" pitchFamily="34" charset="-120"/>
               </a:rPr>
-              <a:t>Reading &amp; homework</a:t>
+              <a:t>The session</a:t>
             </a:r>
             <a:endParaRPr lang="en-US" sz="3000" dirty="0"/>
           </a:p>
@@ -6515,11 +6050,13 @@
         </p:nvSpPr>
         <p:spPr>
           <a:xfrm>
-            <a:off x="640080" y="1673352"/>
-            <a:ext cx="219456" cy="219456"/>
-          </a:xfrm>
-          <a:prstGeom prst="ellipse">
-            <a:avLst/>
+            <a:off x="640080" y="1572768"/>
+            <a:ext cx="868680" cy="450342"/>
+          </a:xfrm>
+          <a:prstGeom prst="roundRect">
+            <a:avLst>
+              <a:gd name="adj" fmla="val 12183"/>
+            </a:avLst>
           </a:prstGeom>
           <a:solidFill>
             <a:srgbClr val="7A3B2E"/>
@@ -6535,8 +6072,8 @@
         </p:nvSpPr>
         <p:spPr>
           <a:xfrm>
-            <a:off x="1051560" y="1600200"/>
-            <a:ext cx="10424160" cy="365760"/>
+            <a:off x="640080" y="1572768"/>
+            <a:ext cx="868680" cy="450342"/>
           </a:xfrm>
           <a:prstGeom prst="rect">
             <a:avLst/>
@@ -6548,21 +6085,21 @@
           <a:bodyPr wrap="square" rtlCol="0" anchor="ctr"/>
           <a:lstStyle/>
           <a:p>
-            <a:pPr indent="0" marL="0">
-              <a:buNone/>
-            </a:pPr>
-            <a:r>
-              <a:rPr lang="en-US" sz="1500" b="1" dirty="0">
-                <a:solidFill>
-                  <a:srgbClr val="7A3B2E"/>
+            <a:pPr algn="ctr" indent="0" marL="0">
+              <a:buNone/>
+            </a:pPr>
+            <a:r>
+              <a:rPr lang="en-US" sz="1100" b="1" dirty="0">
+                <a:solidFill>
+                  <a:srgbClr val="FFFFFF"/>
                 </a:solidFill>
                 <a:latin typeface="Calibri" pitchFamily="34" charset="0"/>
                 <a:ea typeface="Calibri" pitchFamily="34" charset="-122"/>
                 <a:cs typeface="Calibri" pitchFamily="34" charset="-120"/>
               </a:rPr>
-              <a:t>Reading</a:t>
-            </a:r>
-            <a:endParaRPr lang="en-US" sz="1500" dirty="0"/>
+              <a:t>0:00</a:t>
+            </a:r>
+            <a:endParaRPr lang="en-US" sz="1100" dirty="0"/>
           </a:p>
         </p:txBody>
       </p:sp>
@@ -6574,17 +6111,17 @@
         </p:nvSpPr>
         <p:spPr>
           <a:xfrm>
-            <a:off x="1051560" y="1984248"/>
-            <a:ext cx="10424160" cy="731520"/>
-          </a:xfrm>
-          <a:prstGeom prst="rect">
-            <a:avLst/>
-          </a:prstGeom>
-          <a:noFill/>
-          <a:ln/>
-        </p:spPr>
-        <p:txBody>
-          <a:bodyPr wrap="square" rtlCol="0" anchor="t">
+            <a:off x="1691640" y="1554480"/>
+            <a:ext cx="9646920" cy="560070"/>
+          </a:xfrm>
+          <a:prstGeom prst="rect">
+            <a:avLst/>
+          </a:prstGeom>
+          <a:noFill/>
+          <a:ln/>
+        </p:spPr>
+        <p:txBody>
+          <a:bodyPr wrap="square" rtlCol="0" anchor="ctr">
             <a:spAutoFit/>
           </a:bodyPr>
           <a:lstStyle/>
@@ -6593,7 +6130,7 @@
               <a:buNone/>
             </a:pPr>
             <a:r>
-              <a:rPr lang="en-US" sz="1400" dirty="0">
+              <a:rPr lang="en-US" sz="1100" dirty="0">
                 <a:solidFill>
                   <a:srgbClr val="1A1A1A"/>
                 </a:solidFill>
@@ -6601,9 +6138,9 @@
                 <a:ea typeface="Calibri" pitchFamily="34" charset="-122"/>
                 <a:cs typeface="Calibri" pitchFamily="34" charset="-120"/>
               </a:rPr>
-              <a:t>Bollen et al., the cognitive-distortions hockey stick (PNAS 2021), with the Schmidt et al. critique</a:t>
-            </a:r>
-            <a:endParaRPr lang="en-US" sz="1400" dirty="0"/>
+              <a:t>Logistics, working agreements, and a one-round icebreaker: your name, one piece of culture you kept returning to this year, and one number about it you wish you knew. Today's live coding deliberately includes real mistakes.</a:t>
+            </a:r>
+            <a:endParaRPr lang="en-US" sz="1100" dirty="0"/>
           </a:p>
         </p:txBody>
       </p:sp>
@@ -6615,14 +6152,16 @@
         </p:nvSpPr>
         <p:spPr>
           <a:xfrm>
-            <a:off x="640080" y="2633472"/>
-            <a:ext cx="219456" cy="219456"/>
-          </a:xfrm>
-          <a:prstGeom prst="ellipse">
-            <a:avLst/>
-          </a:prstGeom>
-          <a:solidFill>
-            <a:srgbClr val="3F6F5F"/>
+            <a:off x="640080" y="2132838"/>
+            <a:ext cx="868680" cy="450342"/>
+          </a:xfrm>
+          <a:prstGeom prst="roundRect">
+            <a:avLst>
+              <a:gd name="adj" fmla="val 12183"/>
+            </a:avLst>
+          </a:prstGeom>
+          <a:solidFill>
+            <a:srgbClr val="7A3B2E"/>
           </a:solidFill>
           <a:ln/>
         </p:spPr>
@@ -6635,8 +6174,8 @@
         </p:nvSpPr>
         <p:spPr>
           <a:xfrm>
-            <a:off x="1051560" y="2560320"/>
-            <a:ext cx="10424160" cy="365760"/>
+            <a:off x="640080" y="2132838"/>
+            <a:ext cx="868680" cy="450342"/>
           </a:xfrm>
           <a:prstGeom prst="rect">
             <a:avLst/>
@@ -6648,21 +6187,21 @@
           <a:bodyPr wrap="square" rtlCol="0" anchor="ctr"/>
           <a:lstStyle/>
           <a:p>
-            <a:pPr indent="0" marL="0">
-              <a:buNone/>
-            </a:pPr>
-            <a:r>
-              <a:rPr lang="en-US" sz="1500" b="1" dirty="0">
-                <a:solidFill>
-                  <a:srgbClr val="3F6F5F"/>
+            <a:pPr algn="ctr" indent="0" marL="0">
+              <a:buNone/>
+            </a:pPr>
+            <a:r>
+              <a:rPr lang="en-US" sz="1100" b="1" dirty="0">
+                <a:solidFill>
+                  <a:srgbClr val="FFFFFF"/>
                 </a:solidFill>
                 <a:latin typeface="Calibri" pitchFamily="34" charset="0"/>
                 <a:ea typeface="Calibri" pitchFamily="34" charset="-122"/>
                 <a:cs typeface="Calibri" pitchFamily="34" charset="-120"/>
               </a:rPr>
-              <a:t>Supplement</a:t>
-            </a:r>
-            <a:endParaRPr lang="en-US" sz="1500" dirty="0"/>
+              <a:t>0:10</a:t>
+            </a:r>
+            <a:endParaRPr lang="en-US" sz="1100" dirty="0"/>
           </a:p>
         </p:txBody>
       </p:sp>
@@ -6674,17 +6213,17 @@
         </p:nvSpPr>
         <p:spPr>
           <a:xfrm>
-            <a:off x="1051560" y="2944368"/>
-            <a:ext cx="10424160" cy="731520"/>
-          </a:xfrm>
-          <a:prstGeom prst="rect">
-            <a:avLst/>
-          </a:prstGeom>
-          <a:noFill/>
-          <a:ln/>
-        </p:spPr>
-        <p:txBody>
-          <a:bodyPr wrap="square" rtlCol="0" anchor="t">
+            <a:off x="1691640" y="2114550"/>
+            <a:ext cx="9646920" cy="560070"/>
+          </a:xfrm>
+          <a:prstGeom prst="rect">
+            <a:avLst/>
+          </a:prstGeom>
+          <a:noFill/>
+          <a:ln/>
+        </p:spPr>
+        <p:txBody>
+          <a:bodyPr wrap="square" rtlCol="0" anchor="ctr">
             <a:spAutoFit/>
           </a:bodyPr>
           <a:lstStyle/>
@@ -6693,7 +6232,7 @@
               <a:buNone/>
             </a:pPr>
             <a:r>
-              <a:rPr lang="en-US" sz="1400" dirty="0">
+              <a:rPr lang="en-US" sz="1100" dirty="0">
                 <a:solidFill>
                   <a:srgbClr val="1A1A1A"/>
                 </a:solidFill>
@@ -6701,9 +6240,9 @@
                 <a:ea typeface="Calibri" pitchFamily="34" charset="-122"/>
                 <a:cs typeface="Calibri" pitchFamily="34" charset="-120"/>
               </a:rPr>
-              <a:t>Robin Sloan, Writing with the machine; Drucker, Humanities Approaches to Graphical Display (DHQ 2011), the case that all data is capta</a:t>
-            </a:r>
-            <a:endParaRPr lang="en-US" sz="1400" dirty="0"/>
+              <a:t>Lecture, the stakes: machines already read culture at scale, the feed ranking what you see, the moderation filter, the model trained on scraped art and prose, and that reading happens without you. Counting culture has produced real knowledge (the screenplay verb split, the Rowling unmasking, pop music's 1991 revolution) and real mistakes, and both look identical until someone checks. In ten weeks you do the reading yourself and publish something checkable.</a:t>
+            </a:r>
+            <a:endParaRPr lang="en-US" sz="1100" dirty="0"/>
           </a:p>
         </p:txBody>
       </p:sp>
@@ -6715,14 +6254,16 @@
         </p:nvSpPr>
         <p:spPr>
           <a:xfrm>
-            <a:off x="640080" y="3593592"/>
-            <a:ext cx="219456" cy="219456"/>
-          </a:xfrm>
-          <a:prstGeom prst="ellipse">
-            <a:avLst/>
-          </a:prstGeom>
-          <a:solidFill>
-            <a:srgbClr val="B9852F"/>
+            <a:off x="640080" y="2692908"/>
+            <a:ext cx="868680" cy="450342"/>
+          </a:xfrm>
+          <a:prstGeom prst="roundRect">
+            <a:avLst>
+              <a:gd name="adj" fmla="val 12183"/>
+            </a:avLst>
+          </a:prstGeom>
+          <a:solidFill>
+            <a:srgbClr val="7A3B2E"/>
           </a:solidFill>
           <a:ln/>
         </p:spPr>
@@ -6735,8 +6276,8 @@
         </p:nvSpPr>
         <p:spPr>
           <a:xfrm>
-            <a:off x="1051560" y="3520440"/>
-            <a:ext cx="10424160" cy="365760"/>
+            <a:off x="640080" y="2692908"/>
+            <a:ext cx="868680" cy="450342"/>
           </a:xfrm>
           <a:prstGeom prst="rect">
             <a:avLst/>
@@ -6748,21 +6289,21 @@
           <a:bodyPr wrap="square" rtlCol="0" anchor="ctr"/>
           <a:lstStyle/>
           <a:p>
-            <a:pPr indent="0" marL="0">
-              <a:buNone/>
-            </a:pPr>
-            <a:r>
-              <a:rPr lang="en-US" sz="1500" b="1" dirty="0">
-                <a:solidFill>
-                  <a:srgbClr val="B9852F"/>
+            <a:pPr algn="ctr" indent="0" marL="0">
+              <a:buNone/>
+            </a:pPr>
+            <a:r>
+              <a:rPr lang="en-US" sz="1100" b="1" dirty="0">
+                <a:solidFill>
+                  <a:srgbClr val="FFFFFF"/>
                 </a:solidFill>
                 <a:latin typeface="Calibri" pitchFamily="34" charset="0"/>
                 <a:ea typeface="Calibri" pitchFamily="34" charset="-122"/>
                 <a:cs typeface="Calibri" pitchFamily="34" charset="-120"/>
               </a:rPr>
-              <a:t>Deeper (optional)</a:t>
-            </a:r>
-            <a:endParaRPr lang="en-US" sz="1500" dirty="0"/>
+              <a:t>0:28</a:t>
+            </a:r>
+            <a:endParaRPr lang="en-US" sz="1100" dirty="0"/>
           </a:p>
         </p:txBody>
       </p:sp>
@@ -6774,17 +6315,17 @@
         </p:nvSpPr>
         <p:spPr>
           <a:xfrm>
-            <a:off x="1051560" y="3904488"/>
-            <a:ext cx="10424160" cy="731520"/>
-          </a:xfrm>
-          <a:prstGeom prst="rect">
-            <a:avLst/>
-          </a:prstGeom>
-          <a:noFill/>
-          <a:ln/>
-        </p:spPr>
-        <p:txBody>
-          <a:bodyPr wrap="square" rtlCol="0" anchor="t">
+            <a:off x="1691640" y="2674620"/>
+            <a:ext cx="9646920" cy="560070"/>
+          </a:xfrm>
+          <a:prstGeom prst="rect">
+            <a:avLst/>
+          </a:prstGeom>
+          <a:noFill/>
+          <a:ln/>
+        </p:spPr>
+        <p:txBody>
+          <a:bodyPr wrap="square" rtlCol="0" anchor="ctr">
             <a:spAutoFit/>
           </a:bodyPr>
           <a:lstStyle/>
@@ -6793,7 +6334,7 @@
               <a:buNone/>
             </a:pPr>
             <a:r>
-              <a:rPr lang="en-US" sz="1400" dirty="0">
+              <a:rPr lang="en-US" sz="1100" dirty="0">
                 <a:solidFill>
                   <a:srgbClr val="1A1A1A"/>
                 </a:solidFill>
@@ -6801,9 +6342,9 @@
                 <a:ea typeface="Calibri" pitchFamily="34" charset="-122"/>
                 <a:cs typeface="Calibri" pitchFamily="34" charset="-120"/>
               </a:rPr>
-              <a:t>Moretti, Conjectures on World Literature (NLR 2000), the founding argument for reading culture at scale</a:t>
-            </a:r>
-            <a:endParaRPr lang="en-US" sz="1400" dirty="0"/>
+              <a:t>Look at This, then Question It: She Giggles, He Gallops.</a:t>
+            </a:r>
+            <a:endParaRPr lang="en-US" sz="1100" dirty="0"/>
           </a:p>
         </p:txBody>
       </p:sp>
@@ -6815,14 +6356,16 @@
         </p:nvSpPr>
         <p:spPr>
           <a:xfrm>
-            <a:off x="640080" y="4553712"/>
-            <a:ext cx="219456" cy="219456"/>
-          </a:xfrm>
-          <a:prstGeom prst="ellipse">
-            <a:avLst/>
-          </a:prstGeom>
-          <a:solidFill>
-            <a:srgbClr val="3F6F5F"/>
+            <a:off x="640080" y="3252978"/>
+            <a:ext cx="868680" cy="450342"/>
+          </a:xfrm>
+          <a:prstGeom prst="roundRect">
+            <a:avLst>
+              <a:gd name="adj" fmla="val 12183"/>
+            </a:avLst>
+          </a:prstGeom>
+          <a:solidFill>
+            <a:srgbClr val="7A3B2E"/>
           </a:solidFill>
           <a:ln/>
         </p:spPr>
@@ -6835,8 +6378,8 @@
         </p:nvSpPr>
         <p:spPr>
           <a:xfrm>
-            <a:off x="1051560" y="4480560"/>
-            <a:ext cx="10424160" cy="365760"/>
+            <a:off x="640080" y="3252978"/>
+            <a:ext cx="868680" cy="450342"/>
           </a:xfrm>
           <a:prstGeom prst="rect">
             <a:avLst/>
@@ -6848,21 +6391,21 @@
           <a:bodyPr wrap="square" rtlCol="0" anchor="ctr"/>
           <a:lstStyle/>
           <a:p>
-            <a:pPr indent="0" marL="0">
-              <a:buNone/>
-            </a:pPr>
-            <a:r>
-              <a:rPr lang="en-US" sz="1500" b="1" dirty="0">
-                <a:solidFill>
-                  <a:srgbClr val="3F6F5F"/>
+            <a:pPr algn="ctr" indent="0" marL="0">
+              <a:buNone/>
+            </a:pPr>
+            <a:r>
+              <a:rPr lang="en-US" sz="1100" b="1" dirty="0">
+                <a:solidFill>
+                  <a:srgbClr val="FFFFFF"/>
                 </a:solidFill>
                 <a:latin typeface="Calibri" pitchFamily="34" charset="0"/>
                 <a:ea typeface="Calibri" pitchFamily="34" charset="-122"/>
                 <a:cs typeface="Calibri" pitchFamily="34" charset="-120"/>
               </a:rPr>
-              <a:t>Sketch</a:t>
-            </a:r>
-            <a:endParaRPr lang="en-US" sz="1500" dirty="0"/>
+              <a:t>0:35</a:t>
+            </a:r>
+            <a:endParaRPr lang="en-US" sz="1100" dirty="0"/>
           </a:p>
         </p:txBody>
       </p:sp>
@@ -6874,17 +6417,17 @@
         </p:nvSpPr>
         <p:spPr>
           <a:xfrm>
-            <a:off x="1051560" y="4864608"/>
-            <a:ext cx="10424160" cy="731520"/>
-          </a:xfrm>
-          <a:prstGeom prst="rect">
-            <a:avLst/>
-          </a:prstGeom>
-          <a:noFill/>
-          <a:ln/>
-        </p:spPr>
-        <p:txBody>
-          <a:bodyPr wrap="square" rtlCol="0" anchor="t">
+            <a:off x="1691640" y="3234690"/>
+            <a:ext cx="9646920" cy="560070"/>
+          </a:xfrm>
+          <a:prstGeom prst="rect">
+            <a:avLst/>
+          </a:prstGeom>
+          <a:noFill/>
+          <a:ln/>
+        </p:spPr>
+        <p:txBody>
+          <a:bodyPr wrap="square" rtlCol="0" anchor="ctr">
             <a:spAutoFit/>
           </a:bodyPr>
           <a:lstStyle/>
@@ -6893,7 +6436,7 @@
               <a:buNone/>
             </a:pPr>
             <a:r>
-              <a:rPr lang="en-US" sz="1400" dirty="0">
+              <a:rPr lang="en-US" sz="1100" dirty="0">
                 <a:solidFill>
                   <a:srgbClr val="1A1A1A"/>
                 </a:solidFill>
@@ -6901,9 +6444,9 @@
                 <a:ea typeface="Calibri" pitchFamily="34" charset="-122"/>
                 <a:cs typeface="Calibri" pitchFamily="34" charset="-120"/>
               </a:rPr>
-              <a:t>A favorite Pudding piece and what it counted; the question from your life it inspires; the notebook's after-class half (~20 minutes).</a:t>
-            </a:r>
-            <a:endParaRPr lang="en-US" sz="1400" dirty="0"/>
+              <a:t>The vocabulary and the map (no code): corpus, method, model, embedding, plus what data itself is. A CSV, anatomized on screen using the painting manifest (rows are paintings, columns are what the Met chose to record), and Drucker's correction: data is capta, taken not given. Two minutes in pairs: what did the catalogers take, and what did they leave out? The deliverable, shown: a web essay on a runnable notebook.</a:t>
+            </a:r>
+            <a:endParaRPr lang="en-US" sz="1100" dirty="0"/>
           </a:p>
         </p:txBody>
       </p:sp>
@@ -6915,11 +6458,13 @@
         </p:nvSpPr>
         <p:spPr>
           <a:xfrm>
-            <a:off x="640080" y="5513832"/>
-            <a:ext cx="219456" cy="219456"/>
-          </a:xfrm>
-          <a:prstGeom prst="ellipse">
-            <a:avLst/>
+            <a:off x="640080" y="3813048"/>
+            <a:ext cx="868680" cy="450342"/>
+          </a:xfrm>
+          <a:prstGeom prst="roundRect">
+            <a:avLst>
+              <a:gd name="adj" fmla="val 12183"/>
+            </a:avLst>
           </a:prstGeom>
           <a:solidFill>
             <a:srgbClr val="7A3B2E"/>
@@ -6935,8 +6480,8 @@
         </p:nvSpPr>
         <p:spPr>
           <a:xfrm>
-            <a:off x="1051560" y="5440680"/>
-            <a:ext cx="10424160" cy="365760"/>
+            <a:off x="640080" y="3813048"/>
+            <a:ext cx="868680" cy="450342"/>
           </a:xfrm>
           <a:prstGeom prst="rect">
             <a:avLst/>
@@ -6948,21 +6493,21 @@
           <a:bodyPr wrap="square" rtlCol="0" anchor="ctr"/>
           <a:lstStyle/>
           <a:p>
-            <a:pPr indent="0" marL="0">
-              <a:buNone/>
-            </a:pPr>
-            <a:r>
-              <a:rPr lang="en-US" sz="1500" b="1" dirty="0">
-                <a:solidFill>
-                  <a:srgbClr val="7A3B2E"/>
+            <a:pPr algn="ctr" indent="0" marL="0">
+              <a:buNone/>
+            </a:pPr>
+            <a:r>
+              <a:rPr lang="en-US" sz="1100" b="1" dirty="0">
+                <a:solidFill>
+                  <a:srgbClr val="FFFFFF"/>
                 </a:solidFill>
                 <a:latin typeface="Calibri" pitchFamily="34" charset="0"/>
                 <a:ea typeface="Calibri" pitchFamily="34" charset="-122"/>
                 <a:cs typeface="Calibri" pitchFamily="34" charset="-120"/>
               </a:rPr>
-              <a:t>Check (AI closed)</a:t>
-            </a:r>
-            <a:endParaRPr lang="en-US" sz="1500" dirty="0"/>
+              <a:t>0:47</a:t>
+            </a:r>
+            <a:endParaRPr lang="en-US" sz="1100" dirty="0"/>
           </a:p>
         </p:txBody>
       </p:sp>
@@ -6974,17 +6519,17 @@
         </p:nvSpPr>
         <p:spPr>
           <a:xfrm>
-            <a:off x="1051560" y="5824728"/>
-            <a:ext cx="10424160" cy="731520"/>
-          </a:xfrm>
-          <a:prstGeom prst="rect">
-            <a:avLst/>
-          </a:prstGeom>
-          <a:noFill/>
-          <a:ln/>
-        </p:spPr>
-        <p:txBody>
-          <a:bodyPr wrap="square" rtlCol="0" anchor="t">
+            <a:off x="1691640" y="3794760"/>
+            <a:ext cx="9646920" cy="560070"/>
+          </a:xfrm>
+          <a:prstGeom prst="rect">
+            <a:avLst/>
+          </a:prstGeom>
+          <a:noFill/>
+          <a:ln/>
+        </p:spPr>
+        <p:txBody>
+          <a:bodyPr wrap="square" rtlCol="0" anchor="ctr">
             <a:spAutoFit/>
           </a:bodyPr>
           <a:lstStyle/>
@@ -6993,7 +6538,7 @@
               <a:buNone/>
             </a:pPr>
             <a:r>
-              <a:rPr lang="en-US" sz="1400" dirty="0">
+              <a:rPr lang="en-US" sz="1100" dirty="0">
                 <a:solidFill>
                   <a:srgbClr val="1A1A1A"/>
                 </a:solidFill>
@@ -7001,9 +6546,315 @@
                 <a:ea typeface="Calibri" pitchFamily="34" charset="-122"/>
                 <a:cs typeface="Calibri" pitchFamily="34" charset="-120"/>
               </a:rPr>
-              <a:t>Trace it: one written sentence predicting what your cell does before you run it. (Competency 1.)</a:t>
-            </a:r>
-            <a:endParaRPr lang="en-US" sz="1400" dirty="0"/>
+              <a:t>Lab 1 (worked, participatory): copy the notebook to Drive and mount Drive (this is how work survives Colab wiping the session), Gemini key into Colab Secrets, then load the 154 sonnets and make a first chart: love across the sequence. Count the whole corpus and watch the stop list matter. Then the AI loop, solo: ask, predict, run, interrogate. The error drill lands here, cheat sheet in hand.</a:t>
+            </a:r>
+            <a:endParaRPr lang="en-US" sz="1100" dirty="0"/>
+          </a:p>
+        </p:txBody>
+      </p:sp>
+      <p:sp>
+        <p:nvSpPr>
+          <p:cNvPr id="18" name="Shape 16"/>
+          <p:cNvSpPr/>
+          <p:nvPr/>
+        </p:nvSpPr>
+        <p:spPr>
+          <a:xfrm>
+            <a:off x="640080" y="4373118"/>
+            <a:ext cx="868680" cy="450342"/>
+          </a:xfrm>
+          <a:prstGeom prst="roundRect">
+            <a:avLst>
+              <a:gd name="adj" fmla="val 12183"/>
+            </a:avLst>
+          </a:prstGeom>
+          <a:solidFill>
+            <a:srgbClr val="7A3B2E"/>
+          </a:solidFill>
+          <a:ln/>
+        </p:spPr>
+      </p:sp>
+      <p:sp>
+        <p:nvSpPr>
+          <p:cNvPr id="19" name="Text 17"/>
+          <p:cNvSpPr/>
+          <p:nvPr/>
+        </p:nvSpPr>
+        <p:spPr>
+          <a:xfrm>
+            <a:off x="640080" y="4373118"/>
+            <a:ext cx="868680" cy="450342"/>
+          </a:xfrm>
+          <a:prstGeom prst="rect">
+            <a:avLst/>
+          </a:prstGeom>
+          <a:noFill/>
+          <a:ln/>
+        </p:spPr>
+        <p:txBody>
+          <a:bodyPr wrap="square" rtlCol="0" anchor="ctr"/>
+          <a:lstStyle/>
+          <a:p>
+            <a:pPr algn="ctr" indent="0" marL="0">
+              <a:buNone/>
+            </a:pPr>
+            <a:r>
+              <a:rPr lang="en-US" sz="1100" b="1" dirty="0">
+                <a:solidFill>
+                  <a:srgbClr val="FFFFFF"/>
+                </a:solidFill>
+                <a:latin typeface="Calibri" pitchFamily="34" charset="0"/>
+                <a:ea typeface="Calibri" pitchFamily="34" charset="-122"/>
+                <a:cs typeface="Calibri" pitchFamily="34" charset="-120"/>
+              </a:rPr>
+              <a:t>1:20</a:t>
+            </a:r>
+            <a:endParaRPr lang="en-US" sz="1100" dirty="0"/>
+          </a:p>
+        </p:txBody>
+      </p:sp>
+      <p:sp>
+        <p:nvSpPr>
+          <p:cNvPr id="20" name="Text 18"/>
+          <p:cNvSpPr/>
+          <p:nvPr/>
+        </p:nvSpPr>
+        <p:spPr>
+          <a:xfrm>
+            <a:off x="1691640" y="4354830"/>
+            <a:ext cx="9646920" cy="560070"/>
+          </a:xfrm>
+          <a:prstGeom prst="rect">
+            <a:avLst/>
+          </a:prstGeom>
+          <a:noFill/>
+          <a:ln/>
+        </p:spPr>
+        <p:txBody>
+          <a:bodyPr wrap="square" rtlCol="0" anchor="ctr">
+            <a:spAutoFit/>
+          </a:bodyPr>
+          <a:lstStyle/>
+          <a:p>
+            <a:pPr indent="0" marL="0">
+              <a:buNone/>
+            </a:pPr>
+            <a:r>
+              <a:rPr lang="en-US" sz="1100" dirty="0">
+                <a:solidFill>
+                  <a:srgbClr val="1A1A1A"/>
+                </a:solidFill>
+                <a:latin typeface="Calibri" pitchFamily="34" charset="0"/>
+                <a:ea typeface="Calibri" pitchFamily="34" charset="-122"/>
+                <a:cs typeface="Calibri" pitchFamily="34" charset="-120"/>
+              </a:rPr>
+              <a:t>Break</a:t>
+            </a:r>
+            <a:endParaRPr lang="en-US" sz="1100" dirty="0"/>
+          </a:p>
+        </p:txBody>
+      </p:sp>
+      <p:sp>
+        <p:nvSpPr>
+          <p:cNvPr id="21" name="Shape 19"/>
+          <p:cNvSpPr/>
+          <p:nvPr/>
+        </p:nvSpPr>
+        <p:spPr>
+          <a:xfrm>
+            <a:off x="640080" y="4933188"/>
+            <a:ext cx="868680" cy="450342"/>
+          </a:xfrm>
+          <a:prstGeom prst="roundRect">
+            <a:avLst>
+              <a:gd name="adj" fmla="val 12183"/>
+            </a:avLst>
+          </a:prstGeom>
+          <a:solidFill>
+            <a:srgbClr val="7A3B2E"/>
+          </a:solidFill>
+          <a:ln/>
+        </p:spPr>
+      </p:sp>
+      <p:sp>
+        <p:nvSpPr>
+          <p:cNvPr id="22" name="Text 20"/>
+          <p:cNvSpPr/>
+          <p:nvPr/>
+        </p:nvSpPr>
+        <p:spPr>
+          <a:xfrm>
+            <a:off x="640080" y="4933188"/>
+            <a:ext cx="868680" cy="450342"/>
+          </a:xfrm>
+          <a:prstGeom prst="rect">
+            <a:avLst/>
+          </a:prstGeom>
+          <a:noFill/>
+          <a:ln/>
+        </p:spPr>
+        <p:txBody>
+          <a:bodyPr wrap="square" rtlCol="0" anchor="ctr"/>
+          <a:lstStyle/>
+          <a:p>
+            <a:pPr algn="ctr" indent="0" marL="0">
+              <a:buNone/>
+            </a:pPr>
+            <a:r>
+              <a:rPr lang="en-US" sz="1100" b="1" dirty="0">
+                <a:solidFill>
+                  <a:srgbClr val="FFFFFF"/>
+                </a:solidFill>
+                <a:latin typeface="Calibri" pitchFamily="34" charset="0"/>
+                <a:ea typeface="Calibri" pitchFamily="34" charset="-122"/>
+                <a:cs typeface="Calibri" pitchFamily="34" charset="-120"/>
+              </a:rPr>
+              <a:t>1:30</a:t>
+            </a:r>
+            <a:endParaRPr lang="en-US" sz="1100" dirty="0"/>
+          </a:p>
+        </p:txBody>
+      </p:sp>
+      <p:sp>
+        <p:nvSpPr>
+          <p:cNvPr id="23" name="Text 21"/>
+          <p:cNvSpPr/>
+          <p:nvPr/>
+        </p:nvSpPr>
+        <p:spPr>
+          <a:xfrm>
+            <a:off x="1691640" y="4914900"/>
+            <a:ext cx="9646920" cy="560070"/>
+          </a:xfrm>
+          <a:prstGeom prst="rect">
+            <a:avLst/>
+          </a:prstGeom>
+          <a:noFill/>
+          <a:ln/>
+        </p:spPr>
+        <p:txBody>
+          <a:bodyPr wrap="square" rtlCol="0" anchor="ctr">
+            <a:spAutoFit/>
+          </a:bodyPr>
+          <a:lstStyle/>
+          <a:p>
+            <a:pPr indent="0" marL="0">
+              <a:buNone/>
+            </a:pPr>
+            <a:r>
+              <a:rPr lang="en-US" sz="1100" dirty="0">
+                <a:solidFill>
+                  <a:srgbClr val="1A1A1A"/>
+                </a:solidFill>
+                <a:latin typeface="Calibri" pitchFamily="34" charset="0"/>
+                <a:ea typeface="Calibri" pitchFamily="34" charset="-122"/>
+                <a:cs typeface="Calibri" pitchFamily="34" charset="-120"/>
+              </a:rPr>
+              <a:t>Lab 2 (worked): count pixels. The manifest is the first CSV (rows are paintings, columns are the Met's choices), and the 18 paintings rank darkest to brightest by average luminance. The notebook's after-class half, defined color ranges and Sonnet 130's bag against the poem itself, is this week's guided homework. Image projects begin here.</a:t>
+            </a:r>
+            <a:endParaRPr lang="en-US" sz="1100" dirty="0"/>
+          </a:p>
+        </p:txBody>
+      </p:sp>
+      <p:sp>
+        <p:nvSpPr>
+          <p:cNvPr id="24" name="Shape 22"/>
+          <p:cNvSpPr/>
+          <p:nvPr/>
+        </p:nvSpPr>
+        <p:spPr>
+          <a:xfrm>
+            <a:off x="640080" y="5493258"/>
+            <a:ext cx="868680" cy="450342"/>
+          </a:xfrm>
+          <a:prstGeom prst="roundRect">
+            <a:avLst>
+              <a:gd name="adj" fmla="val 12183"/>
+            </a:avLst>
+          </a:prstGeom>
+          <a:solidFill>
+            <a:srgbClr val="7A3B2E"/>
+          </a:solidFill>
+          <a:ln/>
+        </p:spPr>
+      </p:sp>
+      <p:sp>
+        <p:nvSpPr>
+          <p:cNvPr id="25" name="Text 23"/>
+          <p:cNvSpPr/>
+          <p:nvPr/>
+        </p:nvSpPr>
+        <p:spPr>
+          <a:xfrm>
+            <a:off x="640080" y="5493258"/>
+            <a:ext cx="868680" cy="450342"/>
+          </a:xfrm>
+          <a:prstGeom prst="rect">
+            <a:avLst/>
+          </a:prstGeom>
+          <a:noFill/>
+          <a:ln/>
+        </p:spPr>
+        <p:txBody>
+          <a:bodyPr wrap="square" rtlCol="0" anchor="ctr"/>
+          <a:lstStyle/>
+          <a:p>
+            <a:pPr algn="ctr" indent="0" marL="0">
+              <a:buNone/>
+            </a:pPr>
+            <a:r>
+              <a:rPr lang="en-US" sz="1100" b="1" dirty="0">
+                <a:solidFill>
+                  <a:srgbClr val="FFFFFF"/>
+                </a:solidFill>
+                <a:latin typeface="Calibri" pitchFamily="34" charset="0"/>
+                <a:ea typeface="Calibri" pitchFamily="34" charset="-122"/>
+                <a:cs typeface="Calibri" pitchFamily="34" charset="-120"/>
+              </a:rPr>
+              <a:t>1:52</a:t>
+            </a:r>
+            <a:endParaRPr lang="en-US" sz="1100" dirty="0"/>
+          </a:p>
+        </p:txBody>
+      </p:sp>
+      <p:sp>
+        <p:nvSpPr>
+          <p:cNvPr id="26" name="Text 24"/>
+          <p:cNvSpPr/>
+          <p:nvPr/>
+        </p:nvSpPr>
+        <p:spPr>
+          <a:xfrm>
+            <a:off x="1691640" y="5474970"/>
+            <a:ext cx="9646920" cy="560070"/>
+          </a:xfrm>
+          <a:prstGeom prst="rect">
+            <a:avLst/>
+          </a:prstGeom>
+          <a:noFill/>
+          <a:ln/>
+        </p:spPr>
+        <p:txBody>
+          <a:bodyPr wrap="square" rtlCol="0" anchor="ctr">
+            <a:spAutoFit/>
+          </a:bodyPr>
+          <a:lstStyle/>
+          <a:p>
+            <a:pPr indent="0" marL="0">
+              <a:buNone/>
+            </a:pPr>
+            <a:r>
+              <a:rPr lang="en-US" sz="1100" dirty="0">
+                <a:solidFill>
+                  <a:srgbClr val="1A1A1A"/>
+                </a:solidFill>
+                <a:latin typeface="Calibri" pitchFamily="34" charset="0"/>
+                <a:ea typeface="Calibri" pitchFamily="34" charset="-122"/>
+                <a:cs typeface="Calibri" pitchFamily="34" charset="-120"/>
+              </a:rPr>
+              <a:t>Preview of the methods ahead; the weekly routines introduced. First check-out.</a:t>
+            </a:r>
+            <a:endParaRPr lang="en-US" sz="1100" dirty="0"/>
           </a:p>
         </p:txBody>
       </p:sp>
@@ -7048,7 +6899,7 @@
         <p:spPr>
           <a:xfrm>
             <a:off x="640080" y="640080"/>
-            <a:ext cx="10058400" cy="320040"/>
+            <a:ext cx="10058400" cy="731520"/>
           </a:xfrm>
           <a:prstGeom prst="rect">
             <a:avLst/>
@@ -7064,7 +6915,66 @@
               <a:buNone/>
             </a:pPr>
             <a:r>
-              <a:rPr lang="en-US" sz="1300" b="1" spc="300" kern="0" dirty="0">
+              <a:rPr lang="en-US" sz="3000" b="1" dirty="0">
+                <a:solidFill>
+                  <a:srgbClr val="1A1A1A"/>
+                </a:solidFill>
+                <a:latin typeface="Cambria" pitchFamily="34" charset="0"/>
+                <a:ea typeface="Cambria" pitchFamily="34" charset="-122"/>
+                <a:cs typeface="Cambria" pitchFamily="34" charset="-120"/>
+              </a:rPr>
+              <a:t>Reading &amp; homework</a:t>
+            </a:r>
+            <a:endParaRPr lang="en-US" sz="3000" dirty="0"/>
+          </a:p>
+        </p:txBody>
+      </p:sp>
+      <p:sp>
+        <p:nvSpPr>
+          <p:cNvPr id="3" name="Shape 1"/>
+          <p:cNvSpPr/>
+          <p:nvPr/>
+        </p:nvSpPr>
+        <p:spPr>
+          <a:xfrm>
+            <a:off x="640080" y="1673352"/>
+            <a:ext cx="219456" cy="219456"/>
+          </a:xfrm>
+          <a:prstGeom prst="ellipse">
+            <a:avLst/>
+          </a:prstGeom>
+          <a:solidFill>
+            <a:srgbClr val="7A3B2E"/>
+          </a:solidFill>
+          <a:ln/>
+        </p:spPr>
+      </p:sp>
+      <p:sp>
+        <p:nvSpPr>
+          <p:cNvPr id="4" name="Text 2"/>
+          <p:cNvSpPr/>
+          <p:nvPr/>
+        </p:nvSpPr>
+        <p:spPr>
+          <a:xfrm>
+            <a:off x="1051560" y="1600200"/>
+            <a:ext cx="10424160" cy="365760"/>
+          </a:xfrm>
+          <a:prstGeom prst="rect">
+            <a:avLst/>
+          </a:prstGeom>
+          <a:noFill/>
+          <a:ln/>
+        </p:spPr>
+        <p:txBody>
+          <a:bodyPr wrap="square" rtlCol="0" anchor="ctr"/>
+          <a:lstStyle/>
+          <a:p>
+            <a:pPr indent="0" marL="0">
+              <a:buNone/>
+            </a:pPr>
+            <a:r>
+              <a:rPr lang="en-US" sz="1500" b="1" dirty="0">
                 <a:solidFill>
                   <a:srgbClr val="7A3B2E"/>
                 </a:solidFill>
@@ -7072,72 +6982,11 @@
                 <a:ea typeface="Calibri" pitchFamily="34" charset="-122"/>
                 <a:cs typeface="Calibri" pitchFamily="34" charset="-120"/>
               </a:rPr>
-              <a:t>HOW THIS WEEK CONNECTS</a:t>
-            </a:r>
-            <a:endParaRPr lang="en-US" sz="1300" dirty="0"/>
-          </a:p>
-        </p:txBody>
-      </p:sp>
-      <p:sp>
-        <p:nvSpPr>
-          <p:cNvPr id="3" name="Text 1"/>
-          <p:cNvSpPr/>
-          <p:nvPr/>
-        </p:nvSpPr>
-        <p:spPr>
-          <a:xfrm>
-            <a:off x="640080" y="987552"/>
-            <a:ext cx="10058400" cy="640080"/>
-          </a:xfrm>
-          <a:prstGeom prst="rect">
-            <a:avLst/>
-          </a:prstGeom>
-          <a:noFill/>
-          <a:ln/>
-        </p:spPr>
-        <p:txBody>
-          <a:bodyPr wrap="square" rtlCol="0" anchor="ctr"/>
-          <a:lstStyle/>
-          <a:p>
-            <a:pPr indent="0" marL="0">
-              <a:buNone/>
-            </a:pPr>
-            <a:r>
-              <a:rPr lang="en-US" sz="2800" b="1" dirty="0">
-                <a:solidFill>
-                  <a:srgbClr val="1A1A1A"/>
-                </a:solidFill>
-                <a:latin typeface="Cambria" pitchFamily="34" charset="0"/>
-                <a:ea typeface="Cambria" pitchFamily="34" charset="-122"/>
-                <a:cs typeface="Cambria" pitchFamily="34" charset="-120"/>
-              </a:rPr>
-              <a:t>The course's through-lines</a:t>
-            </a:r>
-            <a:endParaRPr lang="en-US" sz="2800" dirty="0"/>
-          </a:p>
-        </p:txBody>
-      </p:sp>
-      <p:sp>
-        <p:nvSpPr>
-          <p:cNvPr id="4" name="Shape 2"/>
-          <p:cNvSpPr/>
-          <p:nvPr/>
-        </p:nvSpPr>
-        <p:spPr>
-          <a:xfrm>
-            <a:off x="640080" y="2057400"/>
-            <a:ext cx="457200" cy="457200"/>
-          </a:xfrm>
-          <a:prstGeom prst="roundRect">
-            <a:avLst>
-              <a:gd name="adj" fmla="val 16000"/>
-            </a:avLst>
-          </a:prstGeom>
-          <a:solidFill>
-            <a:srgbClr val="7A3B2E"/>
-          </a:solidFill>
-          <a:ln/>
-        </p:spPr>
+              <a:t>Reading</a:t>
+            </a:r>
+            <a:endParaRPr lang="en-US" sz="1500" dirty="0"/>
+          </a:p>
+        </p:txBody>
       </p:sp>
       <p:sp>
         <p:nvSpPr>
@@ -7147,86 +6996,8 @@
         </p:nvSpPr>
         <p:spPr>
           <a:xfrm>
-            <a:off x="640080" y="2057400"/>
-            <a:ext cx="457200" cy="457200"/>
-          </a:xfrm>
-          <a:prstGeom prst="rect">
-            <a:avLst/>
-          </a:prstGeom>
-          <a:noFill/>
-          <a:ln/>
-        </p:spPr>
-        <p:txBody>
-          <a:bodyPr wrap="square" rtlCol="0" anchor="ctr"/>
-          <a:lstStyle/>
-          <a:p>
-            <a:pPr algn="ctr" indent="0" marL="0">
-              <a:buNone/>
-            </a:pPr>
-            <a:r>
-              <a:rPr lang="en-US" sz="2000" b="1" dirty="0">
-                <a:solidFill>
-                  <a:srgbClr val="FFFFFF"/>
-                </a:solidFill>
-                <a:latin typeface="Cambria" pitchFamily="34" charset="0"/>
-                <a:ea typeface="Cambria" pitchFamily="34" charset="-122"/>
-                <a:cs typeface="Cambria" pitchFamily="34" charset="-120"/>
-              </a:rPr>
-              <a:t>1</a:t>
-            </a:r>
-            <a:endParaRPr lang="en-US" sz="2000" dirty="0"/>
-          </a:p>
-        </p:txBody>
-      </p:sp>
-      <p:sp>
-        <p:nvSpPr>
-          <p:cNvPr id="6" name="Text 4"/>
-          <p:cNvSpPr/>
-          <p:nvPr/>
-        </p:nvSpPr>
-        <p:spPr>
-          <a:xfrm>
-            <a:off x="1371600" y="2020824"/>
-            <a:ext cx="10332720" cy="411480"/>
-          </a:xfrm>
-          <a:prstGeom prst="rect">
-            <a:avLst/>
-          </a:prstGeom>
-          <a:noFill/>
-          <a:ln/>
-        </p:spPr>
-        <p:txBody>
-          <a:bodyPr wrap="square" rtlCol="0" anchor="ctr"/>
-          <a:lstStyle/>
-          <a:p>
-            <a:pPr indent="0" marL="0">
-              <a:buNone/>
-            </a:pPr>
-            <a:r>
-              <a:rPr lang="en-US" sz="1900" b="1" dirty="0">
-                <a:solidFill>
-                  <a:srgbClr val="7A3B2E"/>
-                </a:solidFill>
-                <a:latin typeface="Cambria" pitchFamily="34" charset="0"/>
-                <a:ea typeface="Cambria" pitchFamily="34" charset="-122"/>
-                <a:cs typeface="Cambria" pitchFamily="34" charset="-120"/>
-              </a:rPr>
-              <a:t>Read work critically</a:t>
-            </a:r>
-            <a:endParaRPr lang="en-US" sz="1900" dirty="0"/>
-          </a:p>
-        </p:txBody>
-      </p:sp>
-      <p:sp>
-        <p:nvSpPr>
-          <p:cNvPr id="7" name="Text 5"/>
-          <p:cNvSpPr/>
-          <p:nvPr/>
-        </p:nvSpPr>
-        <p:spPr>
-          <a:xfrm>
-            <a:off x="1371600" y="2441448"/>
-            <a:ext cx="10332720" cy="914400"/>
+            <a:off x="1051560" y="1984248"/>
+            <a:ext cx="10424160" cy="731520"/>
           </a:xfrm>
           <a:prstGeom prst="rect">
             <a:avLst/>
@@ -7241,13 +7012,10 @@
           <a:lstStyle/>
           <a:p>
             <a:pPr indent="0" marL="0">
-              <a:lnSpc>
-                <a:spcPct val="112000"/>
-              </a:lnSpc>
-              <a:buNone/>
-            </a:pPr>
-            <a:r>
-              <a:rPr lang="en-US" sz="1450" dirty="0">
+              <a:buNone/>
+            </a:pPr>
+            <a:r>
+              <a:rPr lang="en-US" sz="1400" dirty="0">
                 <a:solidFill>
                   <a:srgbClr val="1A1A1A"/>
                 </a:solidFill>
@@ -7255,27 +7023,25 @@
                 <a:ea typeface="Calibri" pitchFamily="34" charset="-122"/>
                 <a:cs typeface="Calibri" pitchFamily="34" charset="-120"/>
               </a:rPr>
-              <a:t>She Giggles, He Gallops is excellent and its choices are debatable. Admiring and questioning at once is the habit the course is built on.</a:t>
-            </a:r>
-            <a:endParaRPr lang="en-US" sz="1450" dirty="0"/>
-          </a:p>
-        </p:txBody>
-      </p:sp>
-      <p:sp>
-        <p:nvSpPr>
-          <p:cNvPr id="8" name="Shape 6"/>
-          <p:cNvSpPr/>
-          <p:nvPr/>
-        </p:nvSpPr>
-        <p:spPr>
-          <a:xfrm>
-            <a:off x="640080" y="3520440"/>
-            <a:ext cx="457200" cy="457200"/>
-          </a:xfrm>
-          <a:prstGeom prst="roundRect">
-            <a:avLst>
-              <a:gd name="adj" fmla="val 16000"/>
-            </a:avLst>
+              <a:t>Bollen et al., the cognitive-distortions hockey stick (PNAS 2021), with the Schmidt et al. critique</a:t>
+            </a:r>
+            <a:endParaRPr lang="en-US" sz="1400" dirty="0"/>
+          </a:p>
+        </p:txBody>
+      </p:sp>
+      <p:sp>
+        <p:nvSpPr>
+          <p:cNvPr id="6" name="Shape 4"/>
+          <p:cNvSpPr/>
+          <p:nvPr/>
+        </p:nvSpPr>
+        <p:spPr>
+          <a:xfrm>
+            <a:off x="640080" y="2633472"/>
+            <a:ext cx="219456" cy="219456"/>
+          </a:xfrm>
+          <a:prstGeom prst="ellipse">
+            <a:avLst/>
           </a:prstGeom>
           <a:solidFill>
             <a:srgbClr val="3F6F5F"/>
@@ -7285,14 +7051,14 @@
       </p:sp>
       <p:sp>
         <p:nvSpPr>
-          <p:cNvPr id="9" name="Text 7"/>
-          <p:cNvSpPr/>
-          <p:nvPr/>
-        </p:nvSpPr>
-        <p:spPr>
-          <a:xfrm>
-            <a:off x="640080" y="3520440"/>
-            <a:ext cx="457200" cy="457200"/>
+          <p:cNvPr id="7" name="Text 5"/>
+          <p:cNvSpPr/>
+          <p:nvPr/>
+        </p:nvSpPr>
+        <p:spPr>
+          <a:xfrm>
+            <a:off x="1051560" y="2560320"/>
+            <a:ext cx="10424160" cy="365760"/>
           </a:xfrm>
           <a:prstGeom prst="rect">
             <a:avLst/>
@@ -7304,73 +7070,34 @@
           <a:bodyPr wrap="square" rtlCol="0" anchor="ctr"/>
           <a:lstStyle/>
           <a:p>
-            <a:pPr algn="ctr" indent="0" marL="0">
-              <a:buNone/>
-            </a:pPr>
-            <a:r>
-              <a:rPr lang="en-US" sz="2000" b="1" dirty="0">
-                <a:solidFill>
-                  <a:srgbClr val="FFFFFF"/>
-                </a:solidFill>
-                <a:latin typeface="Cambria" pitchFamily="34" charset="0"/>
-                <a:ea typeface="Cambria" pitchFamily="34" charset="-122"/>
-                <a:cs typeface="Cambria" pitchFamily="34" charset="-120"/>
-              </a:rPr>
-              <a:t>2</a:t>
-            </a:r>
-            <a:endParaRPr lang="en-US" sz="2000" dirty="0"/>
-          </a:p>
-        </p:txBody>
-      </p:sp>
-      <p:sp>
-        <p:nvSpPr>
-          <p:cNvPr id="10" name="Text 8"/>
-          <p:cNvSpPr/>
-          <p:nvPr/>
-        </p:nvSpPr>
-        <p:spPr>
-          <a:xfrm>
-            <a:off x="1371600" y="3483864"/>
-            <a:ext cx="10332720" cy="411480"/>
-          </a:xfrm>
-          <a:prstGeom prst="rect">
-            <a:avLst/>
-          </a:prstGeom>
-          <a:noFill/>
-          <a:ln/>
-        </p:spPr>
-        <p:txBody>
-          <a:bodyPr wrap="square" rtlCol="0" anchor="ctr"/>
-          <a:lstStyle/>
-          <a:p>
-            <a:pPr indent="0" marL="0">
-              <a:buNone/>
-            </a:pPr>
-            <a:r>
-              <a:rPr lang="en-US" sz="1900" b="1" dirty="0">
+            <a:pPr indent="0" marL="0">
+              <a:buNone/>
+            </a:pPr>
+            <a:r>
+              <a:rPr lang="en-US" sz="1500" b="1" dirty="0">
                 <a:solidFill>
                   <a:srgbClr val="3F6F5F"/>
                 </a:solidFill>
-                <a:latin typeface="Cambria" pitchFamily="34" charset="0"/>
-                <a:ea typeface="Cambria" pitchFamily="34" charset="-122"/>
-                <a:cs typeface="Cambria" pitchFamily="34" charset="-120"/>
-              </a:rPr>
-              <a:t>Make something real</a:t>
-            </a:r>
-            <a:endParaRPr lang="en-US" sz="1900" dirty="0"/>
-          </a:p>
-        </p:txBody>
-      </p:sp>
-      <p:sp>
-        <p:nvSpPr>
-          <p:cNvPr id="11" name="Text 9"/>
-          <p:cNvSpPr/>
-          <p:nvPr/>
-        </p:nvSpPr>
-        <p:spPr>
-          <a:xfrm>
-            <a:off x="1371600" y="3904488"/>
-            <a:ext cx="10332720" cy="914400"/>
+                <a:latin typeface="Calibri" pitchFamily="34" charset="0"/>
+                <a:ea typeface="Calibri" pitchFamily="34" charset="-122"/>
+                <a:cs typeface="Calibri" pitchFamily="34" charset="-120"/>
+              </a:rPr>
+              <a:t>Supplement</a:t>
+            </a:r>
+            <a:endParaRPr lang="en-US" sz="1500" dirty="0"/>
+          </a:p>
+        </p:txBody>
+      </p:sp>
+      <p:sp>
+        <p:nvSpPr>
+          <p:cNvPr id="8" name="Text 6"/>
+          <p:cNvSpPr/>
+          <p:nvPr/>
+        </p:nvSpPr>
+        <p:spPr>
+          <a:xfrm>
+            <a:off x="1051560" y="2944368"/>
+            <a:ext cx="10424160" cy="731520"/>
           </a:xfrm>
           <a:prstGeom prst="rect">
             <a:avLst/>
@@ -7385,13 +7112,10 @@
           <a:lstStyle/>
           <a:p>
             <a:pPr indent="0" marL="0">
-              <a:lnSpc>
-                <a:spcPct val="112000"/>
-              </a:lnSpc>
-              <a:buNone/>
-            </a:pPr>
-            <a:r>
-              <a:rPr lang="en-US" sz="1450" dirty="0">
+              <a:buNone/>
+            </a:pPr>
+            <a:r>
+              <a:rPr lang="en-US" sz="1400" dirty="0">
                 <a:solidFill>
                   <a:srgbClr val="1A1A1A"/>
                 </a:solidFill>
@@ -7399,27 +7123,25 @@
                 <a:ea typeface="Calibri" pitchFamily="34" charset="-122"/>
                 <a:cs typeface="Calibri" pitchFamily="34" charset="-120"/>
               </a:rPr>
-              <a:t>A complete investigation by the first break, before any theory.</a:t>
-            </a:r>
-            <a:endParaRPr lang="en-US" sz="1450" dirty="0"/>
-          </a:p>
-        </p:txBody>
-      </p:sp>
-      <p:sp>
-        <p:nvSpPr>
-          <p:cNvPr id="12" name="Shape 10"/>
-          <p:cNvSpPr/>
-          <p:nvPr/>
-        </p:nvSpPr>
-        <p:spPr>
-          <a:xfrm>
-            <a:off x="640080" y="4983480"/>
-            <a:ext cx="457200" cy="457200"/>
-          </a:xfrm>
-          <a:prstGeom prst="roundRect">
-            <a:avLst>
-              <a:gd name="adj" fmla="val 16000"/>
-            </a:avLst>
+              <a:t>Robin Sloan, Writing with the machine; Drucker, Humanities Approaches to Graphical Display (DHQ 2011), the case that all data is capta</a:t>
+            </a:r>
+            <a:endParaRPr lang="en-US" sz="1400" dirty="0"/>
+          </a:p>
+        </p:txBody>
+      </p:sp>
+      <p:sp>
+        <p:nvSpPr>
+          <p:cNvPr id="9" name="Shape 7"/>
+          <p:cNvSpPr/>
+          <p:nvPr/>
+        </p:nvSpPr>
+        <p:spPr>
+          <a:xfrm>
+            <a:off x="640080" y="3593592"/>
+            <a:ext cx="219456" cy="219456"/>
+          </a:xfrm>
+          <a:prstGeom prst="ellipse">
+            <a:avLst/>
           </a:prstGeom>
           <a:solidFill>
             <a:srgbClr val="B9852F"/>
@@ -7429,14 +7151,14 @@
       </p:sp>
       <p:sp>
         <p:nvSpPr>
-          <p:cNvPr id="13" name="Text 11"/>
-          <p:cNvSpPr/>
-          <p:nvPr/>
-        </p:nvSpPr>
-        <p:spPr>
-          <a:xfrm>
-            <a:off x="640080" y="4983480"/>
-            <a:ext cx="457200" cy="457200"/>
+          <p:cNvPr id="10" name="Text 8"/>
+          <p:cNvSpPr/>
+          <p:nvPr/>
+        </p:nvSpPr>
+        <p:spPr>
+          <a:xfrm>
+            <a:off x="1051560" y="3520440"/>
+            <a:ext cx="10424160" cy="365760"/>
           </a:xfrm>
           <a:prstGeom prst="rect">
             <a:avLst/>
@@ -7448,73 +7170,34 @@
           <a:bodyPr wrap="square" rtlCol="0" anchor="ctr"/>
           <a:lstStyle/>
           <a:p>
-            <a:pPr algn="ctr" indent="0" marL="0">
-              <a:buNone/>
-            </a:pPr>
-            <a:r>
-              <a:rPr lang="en-US" sz="2000" b="1" dirty="0">
-                <a:solidFill>
-                  <a:srgbClr val="FFFFFF"/>
-                </a:solidFill>
-                <a:latin typeface="Cambria" pitchFamily="34" charset="0"/>
-                <a:ea typeface="Cambria" pitchFamily="34" charset="-122"/>
-                <a:cs typeface="Cambria" pitchFamily="34" charset="-120"/>
-              </a:rPr>
-              <a:t>3</a:t>
-            </a:r>
-            <a:endParaRPr lang="en-US" sz="2000" dirty="0"/>
-          </a:p>
-        </p:txBody>
-      </p:sp>
-      <p:sp>
-        <p:nvSpPr>
-          <p:cNvPr id="14" name="Text 12"/>
-          <p:cNvSpPr/>
-          <p:nvPr/>
-        </p:nvSpPr>
-        <p:spPr>
-          <a:xfrm>
-            <a:off x="1371600" y="4946904"/>
-            <a:ext cx="10332720" cy="411480"/>
-          </a:xfrm>
-          <a:prstGeom prst="rect">
-            <a:avLst/>
-          </a:prstGeom>
-          <a:noFill/>
-          <a:ln/>
-        </p:spPr>
-        <p:txBody>
-          <a:bodyPr wrap="square" rtlCol="0" anchor="ctr"/>
-          <a:lstStyle/>
-          <a:p>
-            <a:pPr indent="0" marL="0">
-              <a:buNone/>
-            </a:pPr>
-            <a:r>
-              <a:rPr lang="en-US" sz="1900" b="1" dirty="0">
+            <a:pPr indent="0" marL="0">
+              <a:buNone/>
+            </a:pPr>
+            <a:r>
+              <a:rPr lang="en-US" sz="1500" b="1" dirty="0">
                 <a:solidFill>
                   <a:srgbClr val="B9852F"/>
                 </a:solidFill>
-                <a:latin typeface="Cambria" pitchFamily="34" charset="0"/>
-                <a:ea typeface="Cambria" pitchFamily="34" charset="-122"/>
-                <a:cs typeface="Cambria" pitchFamily="34" charset="-120"/>
-              </a:rPr>
-              <a:t>Images are culture too</a:t>
-            </a:r>
-            <a:endParaRPr lang="en-US" sz="1900" dirty="0"/>
-          </a:p>
-        </p:txBody>
-      </p:sp>
-      <p:sp>
-        <p:nvSpPr>
-          <p:cNvPr id="15" name="Text 13"/>
-          <p:cNvSpPr/>
-          <p:nvPr/>
-        </p:nvSpPr>
-        <p:spPr>
-          <a:xfrm>
-            <a:off x="1371600" y="5367528"/>
-            <a:ext cx="10332720" cy="914400"/>
+                <a:latin typeface="Calibri" pitchFamily="34" charset="0"/>
+                <a:ea typeface="Calibri" pitchFamily="34" charset="-122"/>
+                <a:cs typeface="Calibri" pitchFamily="34" charset="-120"/>
+              </a:rPr>
+              <a:t>Deeper (optional)</a:t>
+            </a:r>
+            <a:endParaRPr lang="en-US" sz="1500" dirty="0"/>
+          </a:p>
+        </p:txBody>
+      </p:sp>
+      <p:sp>
+        <p:nvSpPr>
+          <p:cNvPr id="11" name="Text 9"/>
+          <p:cNvSpPr/>
+          <p:nvPr/>
+        </p:nvSpPr>
+        <p:spPr>
+          <a:xfrm>
+            <a:off x="1051560" y="3904488"/>
+            <a:ext cx="10424160" cy="731520"/>
           </a:xfrm>
           <a:prstGeom prst="rect">
             <a:avLst/>
@@ -7529,13 +7212,10 @@
           <a:lstStyle/>
           <a:p>
             <a:pPr indent="0" marL="0">
-              <a:lnSpc>
-                <a:spcPct val="112000"/>
-              </a:lnSpc>
-              <a:buNone/>
-            </a:pPr>
-            <a:r>
-              <a:rPr lang="en-US" sz="1450" dirty="0">
+              <a:buNone/>
+            </a:pPr>
+            <a:r>
+              <a:rPr lang="en-US" sz="1400" dirty="0">
                 <a:solidFill>
                   <a:srgbClr val="1A1A1A"/>
                 </a:solidFill>
@@ -7543,9 +7223,209 @@
                 <a:ea typeface="Calibri" pitchFamily="34" charset="-122"/>
                 <a:cs typeface="Calibri" pitchFamily="34" charset="-120"/>
               </a:rPr>
-              <a:t>A picture is numbers: you counted pixels on day one, and images continue as a co-equal corpus through all ten weeks.</a:t>
-            </a:r>
-            <a:endParaRPr lang="en-US" sz="1450" dirty="0"/>
+              <a:t>Moretti, Conjectures on World Literature (NLR 2000), the founding argument for reading culture at scale</a:t>
+            </a:r>
+            <a:endParaRPr lang="en-US" sz="1400" dirty="0"/>
+          </a:p>
+        </p:txBody>
+      </p:sp>
+      <p:sp>
+        <p:nvSpPr>
+          <p:cNvPr id="12" name="Shape 10"/>
+          <p:cNvSpPr/>
+          <p:nvPr/>
+        </p:nvSpPr>
+        <p:spPr>
+          <a:xfrm>
+            <a:off x="640080" y="4553712"/>
+            <a:ext cx="219456" cy="219456"/>
+          </a:xfrm>
+          <a:prstGeom prst="ellipse">
+            <a:avLst/>
+          </a:prstGeom>
+          <a:solidFill>
+            <a:srgbClr val="3F6F5F"/>
+          </a:solidFill>
+          <a:ln/>
+        </p:spPr>
+      </p:sp>
+      <p:sp>
+        <p:nvSpPr>
+          <p:cNvPr id="13" name="Text 11"/>
+          <p:cNvSpPr/>
+          <p:nvPr/>
+        </p:nvSpPr>
+        <p:spPr>
+          <a:xfrm>
+            <a:off x="1051560" y="4480560"/>
+            <a:ext cx="10424160" cy="365760"/>
+          </a:xfrm>
+          <a:prstGeom prst="rect">
+            <a:avLst/>
+          </a:prstGeom>
+          <a:noFill/>
+          <a:ln/>
+        </p:spPr>
+        <p:txBody>
+          <a:bodyPr wrap="square" rtlCol="0" anchor="ctr"/>
+          <a:lstStyle/>
+          <a:p>
+            <a:pPr indent="0" marL="0">
+              <a:buNone/>
+            </a:pPr>
+            <a:r>
+              <a:rPr lang="en-US" sz="1500" b="1" dirty="0">
+                <a:solidFill>
+                  <a:srgbClr val="3F6F5F"/>
+                </a:solidFill>
+                <a:latin typeface="Calibri" pitchFamily="34" charset="0"/>
+                <a:ea typeface="Calibri" pitchFamily="34" charset="-122"/>
+                <a:cs typeface="Calibri" pitchFamily="34" charset="-120"/>
+              </a:rPr>
+              <a:t>Sketch</a:t>
+            </a:r>
+            <a:endParaRPr lang="en-US" sz="1500" dirty="0"/>
+          </a:p>
+        </p:txBody>
+      </p:sp>
+      <p:sp>
+        <p:nvSpPr>
+          <p:cNvPr id="14" name="Text 12"/>
+          <p:cNvSpPr/>
+          <p:nvPr/>
+        </p:nvSpPr>
+        <p:spPr>
+          <a:xfrm>
+            <a:off x="1051560" y="4864608"/>
+            <a:ext cx="10424160" cy="731520"/>
+          </a:xfrm>
+          <a:prstGeom prst="rect">
+            <a:avLst/>
+          </a:prstGeom>
+          <a:noFill/>
+          <a:ln/>
+        </p:spPr>
+        <p:txBody>
+          <a:bodyPr wrap="square" rtlCol="0" anchor="t">
+            <a:spAutoFit/>
+          </a:bodyPr>
+          <a:lstStyle/>
+          <a:p>
+            <a:pPr indent="0" marL="0">
+              <a:buNone/>
+            </a:pPr>
+            <a:r>
+              <a:rPr lang="en-US" sz="1400" dirty="0">
+                <a:solidFill>
+                  <a:srgbClr val="1A1A1A"/>
+                </a:solidFill>
+                <a:latin typeface="Calibri" pitchFamily="34" charset="0"/>
+                <a:ea typeface="Calibri" pitchFamily="34" charset="-122"/>
+                <a:cs typeface="Calibri" pitchFamily="34" charset="-120"/>
+              </a:rPr>
+              <a:t>A favorite Pudding piece and what it counted; the question from your life it inspires; the notebook's after-class half (~20 minutes).</a:t>
+            </a:r>
+            <a:endParaRPr lang="en-US" sz="1400" dirty="0"/>
+          </a:p>
+        </p:txBody>
+      </p:sp>
+      <p:sp>
+        <p:nvSpPr>
+          <p:cNvPr id="15" name="Shape 13"/>
+          <p:cNvSpPr/>
+          <p:nvPr/>
+        </p:nvSpPr>
+        <p:spPr>
+          <a:xfrm>
+            <a:off x="640080" y="5513832"/>
+            <a:ext cx="219456" cy="219456"/>
+          </a:xfrm>
+          <a:prstGeom prst="ellipse">
+            <a:avLst/>
+          </a:prstGeom>
+          <a:solidFill>
+            <a:srgbClr val="7A3B2E"/>
+          </a:solidFill>
+          <a:ln/>
+        </p:spPr>
+      </p:sp>
+      <p:sp>
+        <p:nvSpPr>
+          <p:cNvPr id="16" name="Text 14"/>
+          <p:cNvSpPr/>
+          <p:nvPr/>
+        </p:nvSpPr>
+        <p:spPr>
+          <a:xfrm>
+            <a:off x="1051560" y="5440680"/>
+            <a:ext cx="10424160" cy="365760"/>
+          </a:xfrm>
+          <a:prstGeom prst="rect">
+            <a:avLst/>
+          </a:prstGeom>
+          <a:noFill/>
+          <a:ln/>
+        </p:spPr>
+        <p:txBody>
+          <a:bodyPr wrap="square" rtlCol="0" anchor="ctr"/>
+          <a:lstStyle/>
+          <a:p>
+            <a:pPr indent="0" marL="0">
+              <a:buNone/>
+            </a:pPr>
+            <a:r>
+              <a:rPr lang="en-US" sz="1500" b="1" dirty="0">
+                <a:solidFill>
+                  <a:srgbClr val="7A3B2E"/>
+                </a:solidFill>
+                <a:latin typeface="Calibri" pitchFamily="34" charset="0"/>
+                <a:ea typeface="Calibri" pitchFamily="34" charset="-122"/>
+                <a:cs typeface="Calibri" pitchFamily="34" charset="-120"/>
+              </a:rPr>
+              <a:t>Check (AI closed)</a:t>
+            </a:r>
+            <a:endParaRPr lang="en-US" sz="1500" dirty="0"/>
+          </a:p>
+        </p:txBody>
+      </p:sp>
+      <p:sp>
+        <p:nvSpPr>
+          <p:cNvPr id="17" name="Text 15"/>
+          <p:cNvSpPr/>
+          <p:nvPr/>
+        </p:nvSpPr>
+        <p:spPr>
+          <a:xfrm>
+            <a:off x="1051560" y="5824728"/>
+            <a:ext cx="10424160" cy="731520"/>
+          </a:xfrm>
+          <a:prstGeom prst="rect">
+            <a:avLst/>
+          </a:prstGeom>
+          <a:noFill/>
+          <a:ln/>
+        </p:spPr>
+        <p:txBody>
+          <a:bodyPr wrap="square" rtlCol="0" anchor="t">
+            <a:spAutoFit/>
+          </a:bodyPr>
+          <a:lstStyle/>
+          <a:p>
+            <a:pPr indent="0" marL="0">
+              <a:buNone/>
+            </a:pPr>
+            <a:r>
+              <a:rPr lang="en-US" sz="1400" dirty="0">
+                <a:solidFill>
+                  <a:srgbClr val="1A1A1A"/>
+                </a:solidFill>
+                <a:latin typeface="Calibri" pitchFamily="34" charset="0"/>
+                <a:ea typeface="Calibri" pitchFamily="34" charset="-122"/>
+                <a:cs typeface="Calibri" pitchFamily="34" charset="-120"/>
+              </a:rPr>
+              <a:t>Trace it: one written sentence predicting what your cell does before you run it. (Competency 1.)</a:t>
+            </a:r>
+            <a:endParaRPr lang="en-US" sz="1400" dirty="0"/>
           </a:p>
         </p:txBody>
       </p:sp>
@@ -7563,7 +7443,7 @@
     <p:bg>
       <p:bgPr>
         <a:solidFill>
-          <a:srgbClr val="4E261D"/>
+          <a:srgbClr val="FFFFFF"/>
         </a:solidFill>
       </p:bgPr>
     </p:bg>
@@ -7589,8 +7469,8 @@
         </p:nvSpPr>
         <p:spPr>
           <a:xfrm>
-            <a:off x="640080" y="1005840"/>
-            <a:ext cx="8229600" cy="320040"/>
+            <a:off x="640080" y="640080"/>
+            <a:ext cx="10058400" cy="320040"/>
           </a:xfrm>
           <a:prstGeom prst="rect">
             <a:avLst/>
@@ -7608,13 +7488,13 @@
             <a:r>
               <a:rPr lang="en-US" sz="1300" b="1" spc="300" kern="0" dirty="0">
                 <a:solidFill>
-                  <a:srgbClr val="B9852F"/>
+                  <a:srgbClr val="7A3B2E"/>
                 </a:solidFill>
                 <a:latin typeface="Calibri" pitchFamily="34" charset="0"/>
                 <a:ea typeface="Calibri" pitchFamily="34" charset="-122"/>
                 <a:cs typeface="Calibri" pitchFamily="34" charset="-120"/>
               </a:rPr>
-              <a:t>THE CHECK, AI CLOSED</a:t>
+              <a:t>HOW THIS WEEK CONNECTS</a:t>
             </a:r>
             <a:endParaRPr lang="en-US" sz="1300" dirty="0"/>
           </a:p>
@@ -7628,8 +7508,147 @@
         </p:nvSpPr>
         <p:spPr>
           <a:xfrm>
-            <a:off x="640080" y="1645920"/>
-            <a:ext cx="8686800" cy="3108960"/>
+            <a:off x="640080" y="987552"/>
+            <a:ext cx="10058400" cy="640080"/>
+          </a:xfrm>
+          <a:prstGeom prst="rect">
+            <a:avLst/>
+          </a:prstGeom>
+          <a:noFill/>
+          <a:ln/>
+        </p:spPr>
+        <p:txBody>
+          <a:bodyPr wrap="square" rtlCol="0" anchor="ctr"/>
+          <a:lstStyle/>
+          <a:p>
+            <a:pPr indent="0" marL="0">
+              <a:buNone/>
+            </a:pPr>
+            <a:r>
+              <a:rPr lang="en-US" sz="2800" b="1" dirty="0">
+                <a:solidFill>
+                  <a:srgbClr val="1A1A1A"/>
+                </a:solidFill>
+                <a:latin typeface="Cambria" pitchFamily="34" charset="0"/>
+                <a:ea typeface="Cambria" pitchFamily="34" charset="-122"/>
+                <a:cs typeface="Cambria" pitchFamily="34" charset="-120"/>
+              </a:rPr>
+              <a:t>The course's through-lines</a:t>
+            </a:r>
+            <a:endParaRPr lang="en-US" sz="2800" dirty="0"/>
+          </a:p>
+        </p:txBody>
+      </p:sp>
+      <p:sp>
+        <p:nvSpPr>
+          <p:cNvPr id="4" name="Shape 2"/>
+          <p:cNvSpPr/>
+          <p:nvPr/>
+        </p:nvSpPr>
+        <p:spPr>
+          <a:xfrm>
+            <a:off x="640080" y="2057400"/>
+            <a:ext cx="457200" cy="457200"/>
+          </a:xfrm>
+          <a:prstGeom prst="roundRect">
+            <a:avLst>
+              <a:gd name="adj" fmla="val 16000"/>
+            </a:avLst>
+          </a:prstGeom>
+          <a:solidFill>
+            <a:srgbClr val="7A3B2E"/>
+          </a:solidFill>
+          <a:ln/>
+        </p:spPr>
+      </p:sp>
+      <p:sp>
+        <p:nvSpPr>
+          <p:cNvPr id="5" name="Text 3"/>
+          <p:cNvSpPr/>
+          <p:nvPr/>
+        </p:nvSpPr>
+        <p:spPr>
+          <a:xfrm>
+            <a:off x="640080" y="2057400"/>
+            <a:ext cx="457200" cy="457200"/>
+          </a:xfrm>
+          <a:prstGeom prst="rect">
+            <a:avLst/>
+          </a:prstGeom>
+          <a:noFill/>
+          <a:ln/>
+        </p:spPr>
+        <p:txBody>
+          <a:bodyPr wrap="square" rtlCol="0" anchor="ctr"/>
+          <a:lstStyle/>
+          <a:p>
+            <a:pPr algn="ctr" indent="0" marL="0">
+              <a:buNone/>
+            </a:pPr>
+            <a:r>
+              <a:rPr lang="en-US" sz="2000" b="1" dirty="0">
+                <a:solidFill>
+                  <a:srgbClr val="FFFFFF"/>
+                </a:solidFill>
+                <a:latin typeface="Cambria" pitchFamily="34" charset="0"/>
+                <a:ea typeface="Cambria" pitchFamily="34" charset="-122"/>
+                <a:cs typeface="Cambria" pitchFamily="34" charset="-120"/>
+              </a:rPr>
+              <a:t>1</a:t>
+            </a:r>
+            <a:endParaRPr lang="en-US" sz="2000" dirty="0"/>
+          </a:p>
+        </p:txBody>
+      </p:sp>
+      <p:sp>
+        <p:nvSpPr>
+          <p:cNvPr id="6" name="Text 4"/>
+          <p:cNvSpPr/>
+          <p:nvPr/>
+        </p:nvSpPr>
+        <p:spPr>
+          <a:xfrm>
+            <a:off x="1371600" y="2020824"/>
+            <a:ext cx="10332720" cy="411480"/>
+          </a:xfrm>
+          <a:prstGeom prst="rect">
+            <a:avLst/>
+          </a:prstGeom>
+          <a:noFill/>
+          <a:ln/>
+        </p:spPr>
+        <p:txBody>
+          <a:bodyPr wrap="square" rtlCol="0" anchor="ctr"/>
+          <a:lstStyle/>
+          <a:p>
+            <a:pPr indent="0" marL="0">
+              <a:buNone/>
+            </a:pPr>
+            <a:r>
+              <a:rPr lang="en-US" sz="1900" b="1" dirty="0">
+                <a:solidFill>
+                  <a:srgbClr val="7A3B2E"/>
+                </a:solidFill>
+                <a:latin typeface="Cambria" pitchFamily="34" charset="0"/>
+                <a:ea typeface="Cambria" pitchFamily="34" charset="-122"/>
+                <a:cs typeface="Cambria" pitchFamily="34" charset="-120"/>
+              </a:rPr>
+              <a:t>Read work critically</a:t>
+            </a:r>
+            <a:endParaRPr lang="en-US" sz="1900" dirty="0"/>
+          </a:p>
+        </p:txBody>
+      </p:sp>
+      <p:sp>
+        <p:nvSpPr>
+          <p:cNvPr id="7" name="Text 5"/>
+          <p:cNvSpPr/>
+          <p:nvPr/>
+        </p:nvSpPr>
+        <p:spPr>
+          <a:xfrm>
+            <a:off x="1371600" y="2441448"/>
+            <a:ext cx="10332720" cy="914400"/>
           </a:xfrm>
           <a:prstGeom prst="rect">
             <a:avLst/>
@@ -7645,12 +7664,73 @@
           <a:p>
             <a:pPr indent="0" marL="0">
               <a:lnSpc>
-                <a:spcPct val="115000"/>
+                <a:spcPct val="112000"/>
               </a:lnSpc>
               <a:buNone/>
             </a:pPr>
             <a:r>
-              <a:rPr lang="en-US" sz="2600" dirty="0">
+              <a:rPr lang="en-US" sz="1450" dirty="0">
+                <a:solidFill>
+                  <a:srgbClr val="1A1A1A"/>
+                </a:solidFill>
+                <a:latin typeface="Calibri" pitchFamily="34" charset="0"/>
+                <a:ea typeface="Calibri" pitchFamily="34" charset="-122"/>
+                <a:cs typeface="Calibri" pitchFamily="34" charset="-120"/>
+              </a:rPr>
+              <a:t>She Giggles, He Gallops is excellent and its choices are debatable. Admiring and questioning at once is the habit the course is built on.</a:t>
+            </a:r>
+            <a:endParaRPr lang="en-US" sz="1450" dirty="0"/>
+          </a:p>
+        </p:txBody>
+      </p:sp>
+      <p:sp>
+        <p:nvSpPr>
+          <p:cNvPr id="8" name="Shape 6"/>
+          <p:cNvSpPr/>
+          <p:nvPr/>
+        </p:nvSpPr>
+        <p:spPr>
+          <a:xfrm>
+            <a:off x="640080" y="3520440"/>
+            <a:ext cx="457200" cy="457200"/>
+          </a:xfrm>
+          <a:prstGeom prst="roundRect">
+            <a:avLst>
+              <a:gd name="adj" fmla="val 16000"/>
+            </a:avLst>
+          </a:prstGeom>
+          <a:solidFill>
+            <a:srgbClr val="3F6F5F"/>
+          </a:solidFill>
+          <a:ln/>
+        </p:spPr>
+      </p:sp>
+      <p:sp>
+        <p:nvSpPr>
+          <p:cNvPr id="9" name="Text 7"/>
+          <p:cNvSpPr/>
+          <p:nvPr/>
+        </p:nvSpPr>
+        <p:spPr>
+          <a:xfrm>
+            <a:off x="640080" y="3520440"/>
+            <a:ext cx="457200" cy="457200"/>
+          </a:xfrm>
+          <a:prstGeom prst="rect">
+            <a:avLst/>
+          </a:prstGeom>
+          <a:noFill/>
+          <a:ln/>
+        </p:spPr>
+        <p:txBody>
+          <a:bodyPr wrap="square" rtlCol="0" anchor="ctr"/>
+          <a:lstStyle/>
+          <a:p>
+            <a:pPr algn="ctr" indent="0" marL="0">
+              <a:buNone/>
+            </a:pPr>
+            <a:r>
+              <a:rPr lang="en-US" sz="2000" b="1" dirty="0">
                 <a:solidFill>
                   <a:srgbClr val="FFFFFF"/>
                 </a:solidFill>
@@ -7658,22 +7738,22 @@
                 <a:ea typeface="Cambria" pitchFamily="34" charset="-122"/>
                 <a:cs typeface="Cambria" pitchFamily="34" charset="-120"/>
               </a:rPr>
-              <a:t>Trace it: one written sentence predicting what your cell does before you run it. (Competency 1.)</a:t>
-            </a:r>
-            <a:endParaRPr lang="en-US" sz="2600" dirty="0"/>
-          </a:p>
-        </p:txBody>
-      </p:sp>
-      <p:sp>
-        <p:nvSpPr>
-          <p:cNvPr id="4" name="Text 2"/>
-          <p:cNvSpPr/>
-          <p:nvPr/>
-        </p:nvSpPr>
-        <p:spPr>
-          <a:xfrm>
-            <a:off x="640080" y="6126480"/>
-            <a:ext cx="7315200" cy="365760"/>
+              <a:t>2</a:t>
+            </a:r>
+            <a:endParaRPr lang="en-US" sz="2000" dirty="0"/>
+          </a:p>
+        </p:txBody>
+      </p:sp>
+      <p:sp>
+        <p:nvSpPr>
+          <p:cNvPr id="10" name="Text 8"/>
+          <p:cNvSpPr/>
+          <p:nvPr/>
+        </p:nvSpPr>
+        <p:spPr>
+          <a:xfrm>
+            <a:off x="1371600" y="3483864"/>
+            <a:ext cx="10332720" cy="411480"/>
           </a:xfrm>
           <a:prstGeom prst="rect">
             <a:avLst/>
@@ -7689,73 +7769,79 @@
               <a:buNone/>
             </a:pPr>
             <a:r>
-              <a:rPr lang="en-US" sz="1200" dirty="0">
-                <a:solidFill>
-                  <a:srgbClr val="E8DCD6"/>
+              <a:rPr lang="en-US" sz="1900" b="1" dirty="0">
+                <a:solidFill>
+                  <a:srgbClr val="3F6F5F"/>
+                </a:solidFill>
+                <a:latin typeface="Cambria" pitchFamily="34" charset="0"/>
+                <a:ea typeface="Cambria" pitchFamily="34" charset="-122"/>
+                <a:cs typeface="Cambria" pitchFamily="34" charset="-120"/>
+              </a:rPr>
+              <a:t>Make something real</a:t>
+            </a:r>
+            <a:endParaRPr lang="en-US" sz="1900" dirty="0"/>
+          </a:p>
+        </p:txBody>
+      </p:sp>
+      <p:sp>
+        <p:nvSpPr>
+          <p:cNvPr id="11" name="Text 9"/>
+          <p:cNvSpPr/>
+          <p:nvPr/>
+        </p:nvSpPr>
+        <p:spPr>
+          <a:xfrm>
+            <a:off x="1371600" y="3904488"/>
+            <a:ext cx="10332720" cy="914400"/>
+          </a:xfrm>
+          <a:prstGeom prst="rect">
+            <a:avLst/>
+          </a:prstGeom>
+          <a:noFill/>
+          <a:ln/>
+        </p:spPr>
+        <p:txBody>
+          <a:bodyPr wrap="square" rtlCol="0" anchor="t">
+            <a:spAutoFit/>
+          </a:bodyPr>
+          <a:lstStyle/>
+          <a:p>
+            <a:pPr indent="0" marL="0">
+              <a:lnSpc>
+                <a:spcPct val="112000"/>
+              </a:lnSpc>
+              <a:buNone/>
+            </a:pPr>
+            <a:r>
+              <a:rPr lang="en-US" sz="1450" dirty="0">
+                <a:solidFill>
+                  <a:srgbClr val="1A1A1A"/>
                 </a:solidFill>
                 <a:latin typeface="Calibri" pitchFamily="34" charset="0"/>
                 <a:ea typeface="Calibri" pitchFamily="34" charset="-122"/>
                 <a:cs typeface="Calibri" pitchFamily="34" charset="-120"/>
               </a:rPr>
-              <a:t>Culture as Data  ·  Week 1</a:t>
-            </a:r>
-            <a:endParaRPr lang="en-US" sz="1200" dirty="0"/>
-          </a:p>
-        </p:txBody>
-      </p:sp>
-      <p:sp>
-        <p:nvSpPr>
-          <p:cNvPr id="5" name="Shape 3"/>
-          <p:cNvSpPr/>
-          <p:nvPr/>
-        </p:nvSpPr>
-        <p:spPr>
-          <a:xfrm>
-            <a:off x="11006176" y="4841304"/>
-            <a:ext cx="70992" cy="70992"/>
-          </a:xfrm>
-          <a:prstGeom prst="ellipse">
-            <a:avLst/>
-          </a:prstGeom>
-          <a:solidFill>
-            <a:srgbClr val="7A3B2E"/>
-          </a:solidFill>
-          <a:ln/>
-        </p:spPr>
-      </p:sp>
-      <p:sp>
-        <p:nvSpPr>
-          <p:cNvPr id="6" name="Shape 4"/>
-          <p:cNvSpPr/>
-          <p:nvPr/>
-        </p:nvSpPr>
-        <p:spPr>
-          <a:xfrm>
-            <a:off x="10333730" y="5139734"/>
-            <a:ext cx="51926" cy="51926"/>
-          </a:xfrm>
-          <a:prstGeom prst="ellipse">
-            <a:avLst/>
-          </a:prstGeom>
-          <a:solidFill>
-            <a:srgbClr val="3F6F5F"/>
-          </a:solidFill>
-          <a:ln/>
-        </p:spPr>
-      </p:sp>
-      <p:sp>
-        <p:nvSpPr>
-          <p:cNvPr id="7" name="Shape 5"/>
-          <p:cNvSpPr/>
-          <p:nvPr/>
-        </p:nvSpPr>
-        <p:spPr>
-          <a:xfrm>
-            <a:off x="9655357" y="4517202"/>
-            <a:ext cx="66260" cy="66260"/>
-          </a:xfrm>
-          <a:prstGeom prst="ellipse">
-            <a:avLst/>
+              <a:t>A complete investigation by the first break, before any theory.</a:t>
+            </a:r>
+            <a:endParaRPr lang="en-US" sz="1450" dirty="0"/>
+          </a:p>
+        </p:txBody>
+      </p:sp>
+      <p:sp>
+        <p:nvSpPr>
+          <p:cNvPr id="12" name="Shape 10"/>
+          <p:cNvSpPr/>
+          <p:nvPr/>
+        </p:nvSpPr>
+        <p:spPr>
+          <a:xfrm>
+            <a:off x="640080" y="4983480"/>
+            <a:ext cx="457200" cy="457200"/>
+          </a:xfrm>
+          <a:prstGeom prst="roundRect">
+            <a:avLst>
+              <a:gd name="adj" fmla="val 16000"/>
+            </a:avLst>
           </a:prstGeom>
           <a:solidFill>
             <a:srgbClr val="B9852F"/>
@@ -7765,223 +7851,125 @@
       </p:sp>
       <p:sp>
         <p:nvSpPr>
-          <p:cNvPr id="8" name="Shape 6"/>
-          <p:cNvSpPr/>
-          <p:nvPr/>
-        </p:nvSpPr>
-        <p:spPr>
-          <a:xfrm>
-            <a:off x="10037857" y="5434969"/>
-            <a:ext cx="81992" cy="81992"/>
-          </a:xfrm>
-          <a:prstGeom prst="ellipse">
-            <a:avLst/>
-          </a:prstGeom>
-          <a:solidFill>
-            <a:srgbClr val="7A3B2E"/>
-          </a:solidFill>
-          <a:ln/>
-        </p:spPr>
-      </p:sp>
-      <p:sp>
-        <p:nvSpPr>
-          <p:cNvPr id="9" name="Shape 7"/>
-          <p:cNvSpPr/>
-          <p:nvPr/>
-        </p:nvSpPr>
-        <p:spPr>
-          <a:xfrm>
-            <a:off x="9987711" y="5142214"/>
-            <a:ext cx="67117" cy="67117"/>
-          </a:xfrm>
-          <a:prstGeom prst="ellipse">
-            <a:avLst/>
-          </a:prstGeom>
-          <a:solidFill>
-            <a:srgbClr val="3F6F5F"/>
-          </a:solidFill>
-          <a:ln/>
-        </p:spPr>
-      </p:sp>
-      <p:sp>
-        <p:nvSpPr>
-          <p:cNvPr id="10" name="Shape 8"/>
-          <p:cNvSpPr/>
-          <p:nvPr/>
-        </p:nvSpPr>
-        <p:spPr>
-          <a:xfrm>
-            <a:off x="10571718" y="6100197"/>
-            <a:ext cx="99359" cy="99359"/>
-          </a:xfrm>
-          <a:prstGeom prst="ellipse">
-            <a:avLst/>
-          </a:prstGeom>
-          <a:solidFill>
-            <a:srgbClr val="B9852F"/>
-          </a:solidFill>
-          <a:ln/>
-        </p:spPr>
-      </p:sp>
-      <p:sp>
-        <p:nvSpPr>
-          <p:cNvPr id="11" name="Shape 9"/>
-          <p:cNvSpPr/>
-          <p:nvPr/>
-        </p:nvSpPr>
-        <p:spPr>
-          <a:xfrm>
-            <a:off x="10296359" y="5558099"/>
-            <a:ext cx="91849" cy="91849"/>
-          </a:xfrm>
-          <a:prstGeom prst="ellipse">
-            <a:avLst/>
-          </a:prstGeom>
-          <a:solidFill>
-            <a:srgbClr val="7A3B2E"/>
-          </a:solidFill>
-          <a:ln/>
-        </p:spPr>
-      </p:sp>
-      <p:sp>
-        <p:nvSpPr>
-          <p:cNvPr id="12" name="Shape 10"/>
-          <p:cNvSpPr/>
-          <p:nvPr/>
-        </p:nvSpPr>
-        <p:spPr>
-          <a:xfrm>
-            <a:off x="10228433" y="5977179"/>
-            <a:ext cx="67449" cy="67449"/>
-          </a:xfrm>
-          <a:prstGeom prst="ellipse">
-            <a:avLst/>
-          </a:prstGeom>
-          <a:solidFill>
-            <a:srgbClr val="3F6F5F"/>
-          </a:solidFill>
-          <a:ln/>
-        </p:spPr>
-      </p:sp>
-      <p:sp>
-        <p:nvSpPr>
-          <p:cNvPr id="13" name="Shape 11"/>
-          <p:cNvSpPr/>
-          <p:nvPr/>
-        </p:nvSpPr>
-        <p:spPr>
-          <a:xfrm>
-            <a:off x="11434740" y="4606617"/>
-            <a:ext cx="49018" cy="49018"/>
-          </a:xfrm>
-          <a:prstGeom prst="ellipse">
-            <a:avLst/>
-          </a:prstGeom>
-          <a:solidFill>
-            <a:srgbClr val="B9852F"/>
-          </a:solidFill>
-          <a:ln/>
-        </p:spPr>
-      </p:sp>
-      <p:sp>
-        <p:nvSpPr>
-          <p:cNvPr id="14" name="Shape 12"/>
-          <p:cNvSpPr/>
-          <p:nvPr/>
-        </p:nvSpPr>
-        <p:spPr>
-          <a:xfrm>
-            <a:off x="9861440" y="5645034"/>
-            <a:ext cx="59416" cy="59416"/>
-          </a:xfrm>
-          <a:prstGeom prst="ellipse">
-            <a:avLst/>
-          </a:prstGeom>
-          <a:solidFill>
-            <a:srgbClr val="7A3B2E"/>
-          </a:solidFill>
-          <a:ln/>
-        </p:spPr>
-      </p:sp>
-      <p:sp>
-        <p:nvSpPr>
-          <p:cNvPr id="15" name="Shape 13"/>
-          <p:cNvSpPr/>
-          <p:nvPr/>
-        </p:nvSpPr>
-        <p:spPr>
-          <a:xfrm>
-            <a:off x="9135654" y="4604249"/>
-            <a:ext cx="66639" cy="66639"/>
-          </a:xfrm>
-          <a:prstGeom prst="ellipse">
-            <a:avLst/>
-          </a:prstGeom>
-          <a:solidFill>
-            <a:srgbClr val="3F6F5F"/>
-          </a:solidFill>
-          <a:ln/>
-        </p:spPr>
-      </p:sp>
-      <p:sp>
-        <p:nvSpPr>
-          <p:cNvPr id="16" name="Shape 14"/>
-          <p:cNvSpPr/>
-          <p:nvPr/>
-        </p:nvSpPr>
-        <p:spPr>
-          <a:xfrm>
-            <a:off x="10324181" y="5682882"/>
-            <a:ext cx="93546" cy="93546"/>
-          </a:xfrm>
-          <a:prstGeom prst="ellipse">
-            <a:avLst/>
-          </a:prstGeom>
-          <a:solidFill>
-            <a:srgbClr val="B9852F"/>
-          </a:solidFill>
-          <a:ln/>
-        </p:spPr>
-      </p:sp>
-      <p:sp>
-        <p:nvSpPr>
-          <p:cNvPr id="17" name="Shape 15"/>
-          <p:cNvSpPr/>
-          <p:nvPr/>
-        </p:nvSpPr>
-        <p:spPr>
-          <a:xfrm>
-            <a:off x="9373182" y="6130114"/>
-            <a:ext cx="53271" cy="53271"/>
-          </a:xfrm>
-          <a:prstGeom prst="ellipse">
-            <a:avLst/>
-          </a:prstGeom>
-          <a:solidFill>
-            <a:srgbClr val="7A3B2E"/>
-          </a:solidFill>
-          <a:ln/>
-        </p:spPr>
-      </p:sp>
-      <p:sp>
-        <p:nvSpPr>
-          <p:cNvPr id="18" name="Shape 16"/>
-          <p:cNvSpPr/>
-          <p:nvPr/>
-        </p:nvSpPr>
-        <p:spPr>
-          <a:xfrm>
-            <a:off x="9909776" y="4932484"/>
-            <a:ext cx="78401" cy="78401"/>
-          </a:xfrm>
-          <a:prstGeom prst="ellipse">
-            <a:avLst/>
-          </a:prstGeom>
-          <a:solidFill>
-            <a:srgbClr val="3F6F5F"/>
-          </a:solidFill>
-          <a:ln/>
-        </p:spPr>
+          <p:cNvPr id="13" name="Text 11"/>
+          <p:cNvSpPr/>
+          <p:nvPr/>
+        </p:nvSpPr>
+        <p:spPr>
+          <a:xfrm>
+            <a:off x="640080" y="4983480"/>
+            <a:ext cx="457200" cy="457200"/>
+          </a:xfrm>
+          <a:prstGeom prst="rect">
+            <a:avLst/>
+          </a:prstGeom>
+          <a:noFill/>
+          <a:ln/>
+        </p:spPr>
+        <p:txBody>
+          <a:bodyPr wrap="square" rtlCol="0" anchor="ctr"/>
+          <a:lstStyle/>
+          <a:p>
+            <a:pPr algn="ctr" indent="0" marL="0">
+              <a:buNone/>
+            </a:pPr>
+            <a:r>
+              <a:rPr lang="en-US" sz="2000" b="1" dirty="0">
+                <a:solidFill>
+                  <a:srgbClr val="FFFFFF"/>
+                </a:solidFill>
+                <a:latin typeface="Cambria" pitchFamily="34" charset="0"/>
+                <a:ea typeface="Cambria" pitchFamily="34" charset="-122"/>
+                <a:cs typeface="Cambria" pitchFamily="34" charset="-120"/>
+              </a:rPr>
+              <a:t>3</a:t>
+            </a:r>
+            <a:endParaRPr lang="en-US" sz="2000" dirty="0"/>
+          </a:p>
+        </p:txBody>
+      </p:sp>
+      <p:sp>
+        <p:nvSpPr>
+          <p:cNvPr id="14" name="Text 12"/>
+          <p:cNvSpPr/>
+          <p:nvPr/>
+        </p:nvSpPr>
+        <p:spPr>
+          <a:xfrm>
+            <a:off x="1371600" y="4946904"/>
+            <a:ext cx="10332720" cy="411480"/>
+          </a:xfrm>
+          <a:prstGeom prst="rect">
+            <a:avLst/>
+          </a:prstGeom>
+          <a:noFill/>
+          <a:ln/>
+        </p:spPr>
+        <p:txBody>
+          <a:bodyPr wrap="square" rtlCol="0" anchor="ctr"/>
+          <a:lstStyle/>
+          <a:p>
+            <a:pPr indent="0" marL="0">
+              <a:buNone/>
+            </a:pPr>
+            <a:r>
+              <a:rPr lang="en-US" sz="1900" b="1" dirty="0">
+                <a:solidFill>
+                  <a:srgbClr val="B9852F"/>
+                </a:solidFill>
+                <a:latin typeface="Cambria" pitchFamily="34" charset="0"/>
+                <a:ea typeface="Cambria" pitchFamily="34" charset="-122"/>
+                <a:cs typeface="Cambria" pitchFamily="34" charset="-120"/>
+              </a:rPr>
+              <a:t>Images are culture too</a:t>
+            </a:r>
+            <a:endParaRPr lang="en-US" sz="1900" dirty="0"/>
+          </a:p>
+        </p:txBody>
+      </p:sp>
+      <p:sp>
+        <p:nvSpPr>
+          <p:cNvPr id="15" name="Text 13"/>
+          <p:cNvSpPr/>
+          <p:nvPr/>
+        </p:nvSpPr>
+        <p:spPr>
+          <a:xfrm>
+            <a:off x="1371600" y="5367528"/>
+            <a:ext cx="10332720" cy="914400"/>
+          </a:xfrm>
+          <a:prstGeom prst="rect">
+            <a:avLst/>
+          </a:prstGeom>
+          <a:noFill/>
+          <a:ln/>
+        </p:spPr>
+        <p:txBody>
+          <a:bodyPr wrap="square" rtlCol="0" anchor="t">
+            <a:spAutoFit/>
+          </a:bodyPr>
+          <a:lstStyle/>
+          <a:p>
+            <a:pPr indent="0" marL="0">
+              <a:lnSpc>
+                <a:spcPct val="112000"/>
+              </a:lnSpc>
+              <a:buNone/>
+            </a:pPr>
+            <a:r>
+              <a:rPr lang="en-US" sz="1450" dirty="0">
+                <a:solidFill>
+                  <a:srgbClr val="1A1A1A"/>
+                </a:solidFill>
+                <a:latin typeface="Calibri" pitchFamily="34" charset="0"/>
+                <a:ea typeface="Calibri" pitchFamily="34" charset="-122"/>
+                <a:cs typeface="Calibri" pitchFamily="34" charset="-120"/>
+              </a:rPr>
+              <a:t>A picture is numbers: you counted pixels on day one, and images continue as a co-equal corpus through all ten weeks.</a:t>
+            </a:r>
+            <a:endParaRPr lang="en-US" sz="1450" dirty="0"/>
+          </a:p>
+        </p:txBody>
       </p:sp>
     </p:spTree>
   </p:cSld>
@@ -8225,6 +8213,440 @@
 </p:sld>
 </file>
 
+<file path=ppt/slides/slide20.xml><?xml version="1.0" encoding="utf-8"?>
+<p:sld xmlns:a="http://schemas.openxmlformats.org/drawingml/2006/main" xmlns:r="http://schemas.openxmlformats.org/officeDocument/2006/relationships" xmlns:p="http://schemas.openxmlformats.org/presentationml/2006/main">
+  <p:cSld name="Slide 20">
+    <p:bg>
+      <p:bgPr>
+        <a:solidFill>
+          <a:srgbClr val="4E261D"/>
+        </a:solidFill>
+      </p:bgPr>
+    </p:bg>
+    <p:spTree>
+      <p:nvGrpSpPr>
+        <p:cNvPr id="1" name=""/>
+        <p:cNvGrpSpPr/>
+        <p:nvPr/>
+      </p:nvGrpSpPr>
+      <p:grpSpPr>
+        <a:xfrm>
+          <a:off x="0" y="0"/>
+          <a:ext cx="0" cy="0"/>
+          <a:chOff x="0" y="0"/>
+          <a:chExt cx="0" cy="0"/>
+        </a:xfrm>
+      </p:grpSpPr>
+      <p:sp>
+        <p:nvSpPr>
+          <p:cNvPr id="2" name="Text 0"/>
+          <p:cNvSpPr/>
+          <p:nvPr/>
+        </p:nvSpPr>
+        <p:spPr>
+          <a:xfrm>
+            <a:off x="640080" y="1005840"/>
+            <a:ext cx="8229600" cy="320040"/>
+          </a:xfrm>
+          <a:prstGeom prst="rect">
+            <a:avLst/>
+          </a:prstGeom>
+          <a:noFill/>
+          <a:ln/>
+        </p:spPr>
+        <p:txBody>
+          <a:bodyPr wrap="square" rtlCol="0" anchor="ctr"/>
+          <a:lstStyle/>
+          <a:p>
+            <a:pPr indent="0" marL="0">
+              <a:buNone/>
+            </a:pPr>
+            <a:r>
+              <a:rPr lang="en-US" sz="1300" b="1" spc="300" kern="0" dirty="0">
+                <a:solidFill>
+                  <a:srgbClr val="B9852F"/>
+                </a:solidFill>
+                <a:latin typeface="Calibri" pitchFamily="34" charset="0"/>
+                <a:ea typeface="Calibri" pitchFamily="34" charset="-122"/>
+                <a:cs typeface="Calibri" pitchFamily="34" charset="-120"/>
+              </a:rPr>
+              <a:t>THE CHECK, AI CLOSED</a:t>
+            </a:r>
+            <a:endParaRPr lang="en-US" sz="1300" dirty="0"/>
+          </a:p>
+        </p:txBody>
+      </p:sp>
+      <p:sp>
+        <p:nvSpPr>
+          <p:cNvPr id="3" name="Text 1"/>
+          <p:cNvSpPr/>
+          <p:nvPr/>
+        </p:nvSpPr>
+        <p:spPr>
+          <a:xfrm>
+            <a:off x="640080" y="1645920"/>
+            <a:ext cx="8686800" cy="3108960"/>
+          </a:xfrm>
+          <a:prstGeom prst="rect">
+            <a:avLst/>
+          </a:prstGeom>
+          <a:noFill/>
+          <a:ln/>
+        </p:spPr>
+        <p:txBody>
+          <a:bodyPr wrap="square" rtlCol="0" anchor="t">
+            <a:spAutoFit/>
+          </a:bodyPr>
+          <a:lstStyle/>
+          <a:p>
+            <a:pPr indent="0" marL="0">
+              <a:lnSpc>
+                <a:spcPct val="115000"/>
+              </a:lnSpc>
+              <a:buNone/>
+            </a:pPr>
+            <a:r>
+              <a:rPr lang="en-US" sz="2600" dirty="0">
+                <a:solidFill>
+                  <a:srgbClr val="FFFFFF"/>
+                </a:solidFill>
+                <a:latin typeface="Cambria" pitchFamily="34" charset="0"/>
+                <a:ea typeface="Cambria" pitchFamily="34" charset="-122"/>
+                <a:cs typeface="Cambria" pitchFamily="34" charset="-120"/>
+              </a:rPr>
+              <a:t>Trace it: one written sentence predicting what your cell does before you run it. (Competency 1.)</a:t>
+            </a:r>
+            <a:endParaRPr lang="en-US" sz="2600" dirty="0"/>
+          </a:p>
+        </p:txBody>
+      </p:sp>
+      <p:sp>
+        <p:nvSpPr>
+          <p:cNvPr id="4" name="Text 2"/>
+          <p:cNvSpPr/>
+          <p:nvPr/>
+        </p:nvSpPr>
+        <p:spPr>
+          <a:xfrm>
+            <a:off x="640080" y="6126480"/>
+            <a:ext cx="7315200" cy="365760"/>
+          </a:xfrm>
+          <a:prstGeom prst="rect">
+            <a:avLst/>
+          </a:prstGeom>
+          <a:noFill/>
+          <a:ln/>
+        </p:spPr>
+        <p:txBody>
+          <a:bodyPr wrap="square" rtlCol="0" anchor="ctr"/>
+          <a:lstStyle/>
+          <a:p>
+            <a:pPr indent="0" marL="0">
+              <a:buNone/>
+            </a:pPr>
+            <a:r>
+              <a:rPr lang="en-US" sz="1200" dirty="0">
+                <a:solidFill>
+                  <a:srgbClr val="E8DCD6"/>
+                </a:solidFill>
+                <a:latin typeface="Calibri" pitchFamily="34" charset="0"/>
+                <a:ea typeface="Calibri" pitchFamily="34" charset="-122"/>
+                <a:cs typeface="Calibri" pitchFamily="34" charset="-120"/>
+              </a:rPr>
+              <a:t>Culture as Data  ·  Week 1</a:t>
+            </a:r>
+            <a:endParaRPr lang="en-US" sz="1200" dirty="0"/>
+          </a:p>
+        </p:txBody>
+      </p:sp>
+      <p:sp>
+        <p:nvSpPr>
+          <p:cNvPr id="5" name="Shape 3"/>
+          <p:cNvSpPr/>
+          <p:nvPr/>
+        </p:nvSpPr>
+        <p:spPr>
+          <a:xfrm>
+            <a:off x="11006176" y="4841304"/>
+            <a:ext cx="70992" cy="70992"/>
+          </a:xfrm>
+          <a:prstGeom prst="ellipse">
+            <a:avLst/>
+          </a:prstGeom>
+          <a:solidFill>
+            <a:srgbClr val="7A3B2E"/>
+          </a:solidFill>
+          <a:ln/>
+        </p:spPr>
+      </p:sp>
+      <p:sp>
+        <p:nvSpPr>
+          <p:cNvPr id="6" name="Shape 4"/>
+          <p:cNvSpPr/>
+          <p:nvPr/>
+        </p:nvSpPr>
+        <p:spPr>
+          <a:xfrm>
+            <a:off x="10333730" y="5139734"/>
+            <a:ext cx="51926" cy="51926"/>
+          </a:xfrm>
+          <a:prstGeom prst="ellipse">
+            <a:avLst/>
+          </a:prstGeom>
+          <a:solidFill>
+            <a:srgbClr val="3F6F5F"/>
+          </a:solidFill>
+          <a:ln/>
+        </p:spPr>
+      </p:sp>
+      <p:sp>
+        <p:nvSpPr>
+          <p:cNvPr id="7" name="Shape 5"/>
+          <p:cNvSpPr/>
+          <p:nvPr/>
+        </p:nvSpPr>
+        <p:spPr>
+          <a:xfrm>
+            <a:off x="9655357" y="4517202"/>
+            <a:ext cx="66260" cy="66260"/>
+          </a:xfrm>
+          <a:prstGeom prst="ellipse">
+            <a:avLst/>
+          </a:prstGeom>
+          <a:solidFill>
+            <a:srgbClr val="B9852F"/>
+          </a:solidFill>
+          <a:ln/>
+        </p:spPr>
+      </p:sp>
+      <p:sp>
+        <p:nvSpPr>
+          <p:cNvPr id="8" name="Shape 6"/>
+          <p:cNvSpPr/>
+          <p:nvPr/>
+        </p:nvSpPr>
+        <p:spPr>
+          <a:xfrm>
+            <a:off x="10037857" y="5434969"/>
+            <a:ext cx="81992" cy="81992"/>
+          </a:xfrm>
+          <a:prstGeom prst="ellipse">
+            <a:avLst/>
+          </a:prstGeom>
+          <a:solidFill>
+            <a:srgbClr val="7A3B2E"/>
+          </a:solidFill>
+          <a:ln/>
+        </p:spPr>
+      </p:sp>
+      <p:sp>
+        <p:nvSpPr>
+          <p:cNvPr id="9" name="Shape 7"/>
+          <p:cNvSpPr/>
+          <p:nvPr/>
+        </p:nvSpPr>
+        <p:spPr>
+          <a:xfrm>
+            <a:off x="9987711" y="5142214"/>
+            <a:ext cx="67117" cy="67117"/>
+          </a:xfrm>
+          <a:prstGeom prst="ellipse">
+            <a:avLst/>
+          </a:prstGeom>
+          <a:solidFill>
+            <a:srgbClr val="3F6F5F"/>
+          </a:solidFill>
+          <a:ln/>
+        </p:spPr>
+      </p:sp>
+      <p:sp>
+        <p:nvSpPr>
+          <p:cNvPr id="10" name="Shape 8"/>
+          <p:cNvSpPr/>
+          <p:nvPr/>
+        </p:nvSpPr>
+        <p:spPr>
+          <a:xfrm>
+            <a:off x="10571718" y="6100197"/>
+            <a:ext cx="99359" cy="99359"/>
+          </a:xfrm>
+          <a:prstGeom prst="ellipse">
+            <a:avLst/>
+          </a:prstGeom>
+          <a:solidFill>
+            <a:srgbClr val="B9852F"/>
+          </a:solidFill>
+          <a:ln/>
+        </p:spPr>
+      </p:sp>
+      <p:sp>
+        <p:nvSpPr>
+          <p:cNvPr id="11" name="Shape 9"/>
+          <p:cNvSpPr/>
+          <p:nvPr/>
+        </p:nvSpPr>
+        <p:spPr>
+          <a:xfrm>
+            <a:off x="10296359" y="5558099"/>
+            <a:ext cx="91849" cy="91849"/>
+          </a:xfrm>
+          <a:prstGeom prst="ellipse">
+            <a:avLst/>
+          </a:prstGeom>
+          <a:solidFill>
+            <a:srgbClr val="7A3B2E"/>
+          </a:solidFill>
+          <a:ln/>
+        </p:spPr>
+      </p:sp>
+      <p:sp>
+        <p:nvSpPr>
+          <p:cNvPr id="12" name="Shape 10"/>
+          <p:cNvSpPr/>
+          <p:nvPr/>
+        </p:nvSpPr>
+        <p:spPr>
+          <a:xfrm>
+            <a:off x="10228433" y="5977179"/>
+            <a:ext cx="67449" cy="67449"/>
+          </a:xfrm>
+          <a:prstGeom prst="ellipse">
+            <a:avLst/>
+          </a:prstGeom>
+          <a:solidFill>
+            <a:srgbClr val="3F6F5F"/>
+          </a:solidFill>
+          <a:ln/>
+        </p:spPr>
+      </p:sp>
+      <p:sp>
+        <p:nvSpPr>
+          <p:cNvPr id="13" name="Shape 11"/>
+          <p:cNvSpPr/>
+          <p:nvPr/>
+        </p:nvSpPr>
+        <p:spPr>
+          <a:xfrm>
+            <a:off x="11434740" y="4606617"/>
+            <a:ext cx="49018" cy="49018"/>
+          </a:xfrm>
+          <a:prstGeom prst="ellipse">
+            <a:avLst/>
+          </a:prstGeom>
+          <a:solidFill>
+            <a:srgbClr val="B9852F"/>
+          </a:solidFill>
+          <a:ln/>
+        </p:spPr>
+      </p:sp>
+      <p:sp>
+        <p:nvSpPr>
+          <p:cNvPr id="14" name="Shape 12"/>
+          <p:cNvSpPr/>
+          <p:nvPr/>
+        </p:nvSpPr>
+        <p:spPr>
+          <a:xfrm>
+            <a:off x="9861440" y="5645034"/>
+            <a:ext cx="59416" cy="59416"/>
+          </a:xfrm>
+          <a:prstGeom prst="ellipse">
+            <a:avLst/>
+          </a:prstGeom>
+          <a:solidFill>
+            <a:srgbClr val="7A3B2E"/>
+          </a:solidFill>
+          <a:ln/>
+        </p:spPr>
+      </p:sp>
+      <p:sp>
+        <p:nvSpPr>
+          <p:cNvPr id="15" name="Shape 13"/>
+          <p:cNvSpPr/>
+          <p:nvPr/>
+        </p:nvSpPr>
+        <p:spPr>
+          <a:xfrm>
+            <a:off x="9135654" y="4604249"/>
+            <a:ext cx="66639" cy="66639"/>
+          </a:xfrm>
+          <a:prstGeom prst="ellipse">
+            <a:avLst/>
+          </a:prstGeom>
+          <a:solidFill>
+            <a:srgbClr val="3F6F5F"/>
+          </a:solidFill>
+          <a:ln/>
+        </p:spPr>
+      </p:sp>
+      <p:sp>
+        <p:nvSpPr>
+          <p:cNvPr id="16" name="Shape 14"/>
+          <p:cNvSpPr/>
+          <p:nvPr/>
+        </p:nvSpPr>
+        <p:spPr>
+          <a:xfrm>
+            <a:off x="10324181" y="5682882"/>
+            <a:ext cx="93546" cy="93546"/>
+          </a:xfrm>
+          <a:prstGeom prst="ellipse">
+            <a:avLst/>
+          </a:prstGeom>
+          <a:solidFill>
+            <a:srgbClr val="B9852F"/>
+          </a:solidFill>
+          <a:ln/>
+        </p:spPr>
+      </p:sp>
+      <p:sp>
+        <p:nvSpPr>
+          <p:cNvPr id="17" name="Shape 15"/>
+          <p:cNvSpPr/>
+          <p:nvPr/>
+        </p:nvSpPr>
+        <p:spPr>
+          <a:xfrm>
+            <a:off x="9373182" y="6130114"/>
+            <a:ext cx="53271" cy="53271"/>
+          </a:xfrm>
+          <a:prstGeom prst="ellipse">
+            <a:avLst/>
+          </a:prstGeom>
+          <a:solidFill>
+            <a:srgbClr val="7A3B2E"/>
+          </a:solidFill>
+          <a:ln/>
+        </p:spPr>
+      </p:sp>
+      <p:sp>
+        <p:nvSpPr>
+          <p:cNvPr id="18" name="Shape 16"/>
+          <p:cNvSpPr/>
+          <p:nvPr/>
+        </p:nvSpPr>
+        <p:spPr>
+          <a:xfrm>
+            <a:off x="9909776" y="4932484"/>
+            <a:ext cx="78401" cy="78401"/>
+          </a:xfrm>
+          <a:prstGeom prst="ellipse">
+            <a:avLst/>
+          </a:prstGeom>
+          <a:solidFill>
+            <a:srgbClr val="3F6F5F"/>
+          </a:solidFill>
+          <a:ln/>
+        </p:spPr>
+      </p:sp>
+    </p:spTree>
+  </p:cSld>
+  <p:clrMapOvr>
+    <a:masterClrMapping/>
+  </p:clrMapOvr>
+</p:sld>
+</file>
+
 <file path=ppt/slides/slide3.xml><?xml version="1.0" encoding="utf-8"?>
 <p:sld xmlns:a="http://schemas.openxmlformats.org/drawingml/2006/main" xmlns:r="http://schemas.openxmlformats.org/officeDocument/2006/relationships" xmlns:p="http://schemas.openxmlformats.org/presentationml/2006/main">
   <p:cSld name="Slide 3">
@@ -10263,7 +10685,7 @@
                 <a:ea typeface="Calibri" pitchFamily="34" charset="-122"/>
                 <a:cs typeface="Calibri" pitchFamily="34" charset="-120"/>
               </a:rPr>
-              <a:t>Data is anything made countable: rows in a table, words in a headline, numbers in a pixel. The making is the part to watch.</a:t>
+              <a:t>Data is anything made countable. The making is the part to watch.</a:t>
             </a:r>
             <a:endParaRPr lang="en-US" sz="1500" dirty="0"/>
           </a:p>
@@ -10327,7 +10749,7 @@
                 <a:ea typeface="Calibri" pitchFamily="34" charset="-122"/>
                 <a:cs typeface="Calibri" pitchFamily="34" charset="-120"/>
               </a:rPr>
-              <a:t>A CSV is the plainest container: one row per observation, one column per recorded fact, a first line naming the columns. Ours has four columns and 7,835 rows, and opens in anything.</a:t>
+              <a:t>A CSV: one row per thing, one column per recorded fact. Ours: 18 paintings, seven columns.</a:t>
             </a:r>
             <a:endParaRPr lang="en-US" sz="1500" dirty="0"/>
           </a:p>
@@ -10391,7 +10813,7 @@
                 <a:ea typeface="Calibri" pitchFamily="34" charset="-122"/>
                 <a:cs typeface="Calibri" pitchFamily="34" charset="-120"/>
               </a:rPr>
-              <a:t>Johanna Drucker's correction: data ("the given") is the wrong word; capta ("the taken") is honest. Nothing is simply given - someone chose what to record.</a:t>
+              <a:t>Drucker: data ("the given") is the wrong word. Capta, "the taken," is honest.</a:t>
             </a:r>
             <a:endParaRPr lang="en-US" sz="1500" dirty="0"/>
           </a:p>
@@ -10455,7 +10877,7 @@
                 <a:ea typeface="Calibri" pitchFamily="34" charset="-122"/>
                 <a:cs typeface="Calibri" pitchFamily="34" charset="-120"/>
               </a:rPr>
-              <a:t>The four columns are those choices. There is a name status for the bride and none for the groom; ages but no occupations; no field a same-sex couple could use for most of the period.</a:t>
+              <a:t>The columns are choices: the artist's name but not the sitter's; a free-text date. Absence is a decision too.</a:t>
             </a:r>
             <a:endParaRPr lang="en-US" sz="1500" dirty="0"/>
           </a:p>
@@ -10519,7 +10941,7 @@
                 <a:ea typeface="Calibri" pitchFamily="34" charset="-122"/>
                 <a:cs typeface="Calibri" pitchFamily="34" charset="-120"/>
               </a:rPr>
-              <a:t>Discussion, in pairs: what did the makers of this table take, and what did they leave? That question is the course, asked of every corpus from now on - and it has a whole literature, on the next slide.</a:t>
+              <a:t>Pairs, two minutes: what did the catalogers take, and what did they leave?</a:t>
             </a:r>
             <a:endParaRPr lang="en-US" sz="1500" dirty="0"/>
           </a:p>
@@ -10779,7 +11201,7 @@
                 <a:ea typeface="Calibri" pitchFamily="34" charset="-122"/>
                 <a:cs typeface="Calibri" pitchFamily="34" charset="-120"/>
               </a:rPr>
-              <a:t>Bowker and Star, Sorting Things Out (1999): every classification makes some things visible and others invisible; categories have politics, including the four columns of a wedding table.</a:t>
+              <a:t>Bowker and Star, Sorting Things Out (1999): every classification makes some things visible and others invisible; categories have politics, including the columns of a museum catalog.</a:t>
             </a:r>
             <a:endParaRPr lang="en-US" sz="1500" dirty="0"/>
           </a:p>

--- a/slides/pptx/week-01.pptx
+++ b/slides/pptx/week-01.pptx
@@ -3987,7 +3987,7 @@
                 <a:ea typeface="Cambria" pitchFamily="34" charset="-122"/>
                 <a:cs typeface="Cambria" pitchFamily="34" charset="-120"/>
               </a:rPr>
-              <a:t>The after-class half: defining a color, and what every bag loses</a:t>
+              <a:t>Bags of words, bags of pixels, and what scrambling shows</a:t>
             </a:r>
             <a:endParaRPr lang="en-US" sz="3000" dirty="0"/>
           </a:p>
@@ -6750,7 +6750,7 @@
                 <a:ea typeface="Calibri" pitchFamily="34" charset="-122"/>
                 <a:cs typeface="Calibri" pitchFamily="34" charset="-120"/>
               </a:rPr>
-              <a:t>Lab 2 (worked): count pixels. The manifest is the first CSV (rows are paintings, columns are the Met's choices), and the 18 paintings rank darkest to brightest by average luminance. The notebook's after-class half, defined color ranges and Sonnet 130's bag against the poem itself, is this week's guided homework. Image projects begin here.</a:t>
+              <a:t>Lab 2 (worked): count pixels. The manifest is the first CSV (rows are paintings, columns are the Met's choices); the 18 paintings rank darkest to brightest in a grid, and the corpus palette is a bar chart of defined color ranges. A painting beside its scrambled pixels shows what the bag cannot hold. The after-class half, the boundary experiment and Sonnet 130's bag against the poem itself, is this week's guided homework. Image projects begin here.</a:t>
             </a:r>
             <a:endParaRPr lang="en-US" sz="1100" dirty="0"/>
           </a:p>

--- a/slides/pptx/week-01.pptx
+++ b/slides/pptx/week-01.pptx
@@ -3987,7 +3987,7 @@
                 <a:ea typeface="Cambria" pitchFamily="34" charset="-122"/>
                 <a:cs typeface="Cambria" pitchFamily="34" charset="-120"/>
               </a:rPr>
-              <a:t>Bags of words, bags of pixels, and what scrambling shows</a:t>
+              <a:t>Bags of words, bags of pixels, and what they miss</a:t>
             </a:r>
             <a:endParaRPr lang="en-US" sz="3000" dirty="0"/>
           </a:p>
@@ -4243,7 +4243,7 @@
                 <a:ea typeface="Calibri" pitchFamily="34" charset="-122"/>
                 <a:cs typeface="Calibri" pitchFamily="34" charset="-120"/>
               </a:rPr>
-              <a:t>A painting and its shuffled pixels share the brightness, the average color, and the palette. Composition is to images what order and negation are to sentences.</a:t>
+              <a:t>The manifest's date column reads "ca. 1520" and "1530s". Force it to numbers and pandas quietly turns those into NaN, and mean() skips NaN without telling you: the average drops half the paintings, the older half. Count your NaN before you average.</a:t>
             </a:r>
             <a:endParaRPr lang="en-US" sz="1500" dirty="0"/>
           </a:p>
@@ -6750,7 +6750,7 @@
                 <a:ea typeface="Calibri" pitchFamily="34" charset="-122"/>
                 <a:cs typeface="Calibri" pitchFamily="34" charset="-120"/>
               </a:rPr>
-              <a:t>Lab 2 (worked): count pixels. The manifest is the first CSV (rows are paintings, columns are the Met's choices); the 18 paintings rank darkest to brightest in a grid, and the corpus palette is a bar chart of defined color ranges. A painting beside its scrambled pixels shows what the bag cannot hold. The after-class half, the boundary experiment and Sonnet 130's bag against the poem itself, is this week's guided homework. Image projects begin here.</a:t>
+              <a:t>Lab 2 (worked): count pixels. The manifest is the first CSV (rows are paintings, columns are the Met's choices); the 18 paintings rank darkest to brightest in a grid, and the corpus palette is a bar chart of defined color ranges. The manifest's messy dates set the missing-data trap: forced to numbers, half become NaN, and the average quietly drops the older half of the corpus. The after-class half, the boundary experiment and Sonnet 130's bag against the poem itself, is this week's guided homework. Image projects begin here.</a:t>
             </a:r>
             <a:endParaRPr lang="en-US" sz="1100" dirty="0"/>
           </a:p>

--- a/slides/pptx/week-01.pptx
+++ b/slides/pptx/week-01.pptx
@@ -6240,7 +6240,7 @@
                 <a:ea typeface="Calibri" pitchFamily="34" charset="-122"/>
                 <a:cs typeface="Calibri" pitchFamily="34" charset="-120"/>
               </a:rPr>
-              <a:t>Lecture, the stakes: machines already read culture at scale, the feed ranking what you see, the moderation filter, the model trained on scraped art and prose, and that reading happens without you. Counting culture has produced real knowledge (the screenplay verb split, the Rowling unmasking, pop music's 1991 revolution) and real mistakes, and both look identical until someone checks. In ten weeks you do the reading yourself and publish something checkable.</a:t>
+              <a:t>Lecture, the stakes: machines already read culture at scale, the feed ranking what you see, the moderation filter, the model trained on scraped art and prose, and that reading happens without you. Counting culture has produced real knowledge (the screenplay verb split, the gendered language in 14 million teaching reviews, the Rowling unmasking, pop music's 1991 revolution) and real mistakes, and both look identical until someone checks. In ten weeks you do the reading yourself and publish something checkable.</a:t>
             </a:r>
             <a:endParaRPr lang="en-US" sz="1100" dirty="0"/>
           </a:p>

--- a/slides/pptx/week-01.pptx
+++ b/slides/pptx/week-01.pptx
@@ -6546,7 +6546,7 @@
                 <a:ea typeface="Calibri" pitchFamily="34" charset="-122"/>
                 <a:cs typeface="Calibri" pitchFamily="34" charset="-120"/>
               </a:rPr>
-              <a:t>Lab 1 (worked, participatory): copy the notebook to Drive and mount Drive (this is how work survives Colab wiping the session), Gemini key into Colab Secrets, then load the 154 sonnets and make a first chart: love across the sequence. Count the whole corpus and watch the stop list matter. Then the AI loop, solo: ask, predict, run, interrogate. The error drill lands here, cheat sheet in hand.</a:t>
+              <a:t>Lab 1 (worked, participatory): copy the notebook to Drive and mount Drive (this is how work survives Colab wiping the session), Gemini key into Colab Secrets, then load the 154 sonnets and make a first chart: love across the sequence. Count the whole corpus three ways, one bar chart per stop list, and watch the answer change; then count word pairs, the first n-grams (She Giggles is a bigram count). Then the AI loop, solo: ask, predict, run, interrogate. The error drill lands here, cheat sheet in hand.</a:t>
             </a:r>
             <a:endParaRPr lang="en-US" sz="1100" dirty="0"/>
           </a:p>

--- a/slides/pptx/week-01.pptx
+++ b/slides/pptx/week-01.pptx
@@ -4955,7 +4955,7 @@
                 <a:ea typeface="Calibri" pitchFamily="34" charset="-122"/>
                 <a:cs typeface="Calibri" pitchFamily="34" charset="-120"/>
               </a:rPr>
-              <a:t>Rows: a manifest of 18 paintings, counted and ranked in one pipeline.</a:t>
+              <a:t>Rows: a manifest of paintings, downloaded live and ranked in one pipeline.</a:t>
             </a:r>
             <a:endParaRPr lang="en-US" sz="1650" dirty="0"/>
           </a:p>
@@ -5257,7 +5257,7 @@
                 <a:ea typeface="Cambria" pitchFamily="34" charset="-122"/>
                 <a:cs typeface="Cambria" pitchFamily="34" charset="-120"/>
               </a:rPr>
-              <a:t>Eighteen real paintings, public domain, snapshotted in the repo</a:t>
+              <a:t>Real CC0 paintings from the Met's open-access collection, downloaded live in the notebook</a:t>
             </a:r>
             <a:endParaRPr lang="en-US" sz="2600" dirty="0"/>
           </a:p>
@@ -5480,7 +5480,7 @@
                 <a:ea typeface="Calibri" pitchFamily="34" charset="-122"/>
                 <a:cs typeface="Calibri" pitchFamily="34" charset="-120"/>
               </a:rPr>
-              <a:t>Counted by brightness in the session; by defined color ranges after class.</a:t>
+              <a:t>Counted by brightness in the session; by defined color ranges after class. The notebook downloads its own set live.</a:t>
             </a:r>
             <a:endParaRPr lang="en-US" sz="1200" dirty="0"/>
           </a:p>
@@ -6750,7 +6750,7 @@
                 <a:ea typeface="Calibri" pitchFamily="34" charset="-122"/>
                 <a:cs typeface="Calibri" pitchFamily="34" charset="-120"/>
               </a:rPr>
-              <a:t>Lab 2 (worked): count pixels. The manifest is the first CSV (rows are paintings, columns are the Met's choices); the 18 paintings rank darkest to brightest in a grid, and the corpus palette is a bar chart of defined color ranges. The manifest's messy dates set the missing-data trap: forced to numbers, half become NaN, and the average quietly drops the older half of the corpus. The after-class half, the boundary experiment and Sonnet 130's bag against the poem itself, is this week's guided homework. Image projects begin here.</a:t>
+              <a:t>Lab 2 (worked): count pixels. The manifest is the first CSV (rows are paintings, columns are the Met's choices); a dozen paintings download live from the Met API and rank darkest to brightest in a grid, and the corpus palette is a bar chart of defined color ranges. The manifest's messy dates set the missing-data trap: forced to numbers, half become NaN, and the average quietly drops the older half of the corpus. The after-class half, the boundary experiment and Sonnet 130's bag against the poem itself, is this week's guided homework. Image projects begin here.</a:t>
             </a:r>
             <a:endParaRPr lang="en-US" sz="1100" dirty="0"/>
           </a:p>
@@ -10749,7 +10749,7 @@
                 <a:ea typeface="Calibri" pitchFamily="34" charset="-122"/>
                 <a:cs typeface="Calibri" pitchFamily="34" charset="-120"/>
               </a:rPr>
-              <a:t>A CSV: one row per thing, one column per recorded fact. Ours: 18 paintings, seven columns.</a:t>
+              <a:t>A CSV: one row per thing, one column per recorded fact. Ours: one row per painting, one column per fact the Met records.</a:t>
             </a:r>
             <a:endParaRPr lang="en-US" sz="1500" dirty="0"/>
           </a:p>
